--- a/.preview/pptx-claro/deck.pptx
+++ b/.preview/pptx-claro/deck.pptx
@@ -2,27 +2,27 @@
 <file path=ppt/presentation.xml><?xml version="1.0" encoding="utf-8"?>
 <p:presentation xmlns:p="http://schemas.openxmlformats.org/presentationml/2006/main">
   <p:sldMasterIdLst>
-    <p:sldMasterId xmlns:r="http://schemas.openxmlformats.org/officeDocument/2006/relationships" id="2147483648" r:id="R4beb9629e46e47d5"/>
+    <p:sldMasterId xmlns:r="http://schemas.openxmlformats.org/officeDocument/2006/relationships" id="2147483648" r:id="R20c89ad038ef4ef3"/>
   </p:sldMasterIdLst>
   <p:notesMasterIdLst>
-    <p:notesMasterId xmlns:r="http://schemas.openxmlformats.org/officeDocument/2006/relationships" r:id="R2a9490b630d649db"/>
+    <p:notesMasterId xmlns:r="http://schemas.openxmlformats.org/officeDocument/2006/relationships" r:id="R64c8534e78604253"/>
   </p:notesMasterIdLst>
   <p:sldIdLst>
-    <p:sldId xmlns:r="http://schemas.openxmlformats.org/officeDocument/2006/relationships" id="256" r:id="R20d6f55b474a4614"/>
-    <p:sldId xmlns:r="http://schemas.openxmlformats.org/officeDocument/2006/relationships" id="257" r:id="R3c8da05270f64215"/>
-    <p:sldId xmlns:r="http://schemas.openxmlformats.org/officeDocument/2006/relationships" id="258" r:id="R973352ccb44842d4"/>
-    <p:sldId xmlns:r="http://schemas.openxmlformats.org/officeDocument/2006/relationships" id="259" r:id="R59eaf5c4168d4d18"/>
-    <p:sldId xmlns:r="http://schemas.openxmlformats.org/officeDocument/2006/relationships" id="260" r:id="R657bbfaa8c5f45d7"/>
-    <p:sldId xmlns:r="http://schemas.openxmlformats.org/officeDocument/2006/relationships" id="261" r:id="Rdab5ab6849ba4524"/>
-    <p:sldId xmlns:r="http://schemas.openxmlformats.org/officeDocument/2006/relationships" id="262" r:id="R08fd2226abf042a9"/>
-    <p:sldId xmlns:r="http://schemas.openxmlformats.org/officeDocument/2006/relationships" id="263" r:id="Rcfc088c3cd3c4201"/>
-    <p:sldId xmlns:r="http://schemas.openxmlformats.org/officeDocument/2006/relationships" id="264" r:id="R5f30374612024ca6"/>
-    <p:sldId xmlns:r="http://schemas.openxmlformats.org/officeDocument/2006/relationships" id="265" r:id="R06dde12659ef4b21"/>
-    <p:sldId xmlns:r="http://schemas.openxmlformats.org/officeDocument/2006/relationships" id="266" r:id="R50c9d89fbb5945da"/>
-    <p:sldId xmlns:r="http://schemas.openxmlformats.org/officeDocument/2006/relationships" id="267" r:id="R84c82f7e250042fd"/>
-    <p:sldId xmlns:r="http://schemas.openxmlformats.org/officeDocument/2006/relationships" id="268" r:id="Rdea07737f47344b7"/>
-    <p:sldId xmlns:r="http://schemas.openxmlformats.org/officeDocument/2006/relationships" id="269" r:id="R3a888f65145d4eeb"/>
-    <p:sldId xmlns:r="http://schemas.openxmlformats.org/officeDocument/2006/relationships" id="270" r:id="R9067f38e68794f7b"/>
+    <p:sldId xmlns:r="http://schemas.openxmlformats.org/officeDocument/2006/relationships" id="256" r:id="Rd4a1fc349ba14911"/>
+    <p:sldId xmlns:r="http://schemas.openxmlformats.org/officeDocument/2006/relationships" id="257" r:id="Rd08255bf5fb44c3d"/>
+    <p:sldId xmlns:r="http://schemas.openxmlformats.org/officeDocument/2006/relationships" id="258" r:id="R75ec7df2c8ca46be"/>
+    <p:sldId xmlns:r="http://schemas.openxmlformats.org/officeDocument/2006/relationships" id="259" r:id="R1b1348244d5f412b"/>
+    <p:sldId xmlns:r="http://schemas.openxmlformats.org/officeDocument/2006/relationships" id="260" r:id="R4643b3fc7ae24826"/>
+    <p:sldId xmlns:r="http://schemas.openxmlformats.org/officeDocument/2006/relationships" id="261" r:id="Rf1cb5fe135714d9d"/>
+    <p:sldId xmlns:r="http://schemas.openxmlformats.org/officeDocument/2006/relationships" id="262" r:id="Rb3bcd3e3547c4882"/>
+    <p:sldId xmlns:r="http://schemas.openxmlformats.org/officeDocument/2006/relationships" id="263" r:id="R7465d9ca4c3b4cdb"/>
+    <p:sldId xmlns:r="http://schemas.openxmlformats.org/officeDocument/2006/relationships" id="264" r:id="R589064f658754ac3"/>
+    <p:sldId xmlns:r="http://schemas.openxmlformats.org/officeDocument/2006/relationships" id="265" r:id="Rb35a7c91ffcb48cb"/>
+    <p:sldId xmlns:r="http://schemas.openxmlformats.org/officeDocument/2006/relationships" id="266" r:id="Rbe4443ec21944ec9"/>
+    <p:sldId xmlns:r="http://schemas.openxmlformats.org/officeDocument/2006/relationships" id="267" r:id="R94ec5803b0fc4734"/>
+    <p:sldId xmlns:r="http://schemas.openxmlformats.org/officeDocument/2006/relationships" id="268" r:id="R5e0ad9cab5c44181"/>
+    <p:sldId xmlns:r="http://schemas.openxmlformats.org/officeDocument/2006/relationships" id="269" r:id="R8bbe8110de6f454b"/>
+    <p:sldId xmlns:r="http://schemas.openxmlformats.org/officeDocument/2006/relationships" id="270" r:id="R956d7888e2d54d86"/>
   </p:sldIdLst>
   <p:sldSz cx="12192000" cy="6858000"/>
   <p:notesSz cx="6858000" cy="9144000"/>
@@ -1879,7 +1879,7 @@
   </p:cSld>
   <p:clrMap bg1="lt1" tx1="dk1" bg2="lt2" tx2="dk2" accent1="accent1" accent2="accent2" accent3="accent3" accent4="accent4" accent5="accent5" accent6="accent6" hlink="hlink" folHlink="folHlink"/>
   <p:sldLayoutIdLst>
-    <p:sldLayoutId xmlns:r="http://schemas.openxmlformats.org/officeDocument/2006/relationships" id="2147483649" r:id="Re94a1c784c2b423d"/>
+    <p:sldLayoutId xmlns:r="http://schemas.openxmlformats.org/officeDocument/2006/relationships" id="2147483649" r:id="R815a923de29e47cf"/>
   </p:sldLayoutIdLst>
   <p:txStyles>
     <p:titleStyle>
@@ -2430,7 +2430,7 @@
           <p:cNvPr id="17" name="">
             <a:extLst xmlns:a="http://schemas.openxmlformats.org/drawingml/2006/main">
               <a:ext uri="{FF2B5EF4-FFF2-40B4-BE49-F238E27FC236}">
-                <a16:creationId xmlns:a16="http://schemas.microsoft.com/office/drawing/2014/main" id="{1539078B-B045-494A-8443-5661CE5E8B76}"/>
+                <a16:creationId xmlns:a16="http://schemas.microsoft.com/office/drawing/2014/main" id="{DAD75175-6656-44D7-970B-5ECA550A0208}"/>
               </a:ext>
             </a:extLst>
           </p:cNvPr>
@@ -2463,7 +2463,7 @@
           <p:cNvPr id="2" name="">
             <a:extLst xmlns:a="http://schemas.openxmlformats.org/drawingml/2006/main">
               <a:ext uri="{FF2B5EF4-FFF2-40B4-BE49-F238E27FC236}">
-                <a16:creationId xmlns:a16="http://schemas.microsoft.com/office/drawing/2014/main" id="{60EA5FB4-A431-4EB6-AFB5-439C9893A292}"/>
+                <a16:creationId xmlns:a16="http://schemas.microsoft.com/office/drawing/2014/main" id="{687877DD-472D-4EDA-B125-FD510C465DAA}"/>
               </a:ext>
             </a:extLst>
           </p:cNvPr>
@@ -2494,7 +2494,7 @@
           <p:cNvPr id="3" name="">
             <a:extLst xmlns:a="http://schemas.openxmlformats.org/drawingml/2006/main">
               <a:ext uri="{FF2B5EF4-FFF2-40B4-BE49-F238E27FC236}">
-                <a16:creationId xmlns:a16="http://schemas.microsoft.com/office/drawing/2014/main" id="{E6F3343F-22AC-44D9-9F93-255F92A8D849}"/>
+                <a16:creationId xmlns:a16="http://schemas.microsoft.com/office/drawing/2014/main" id="{8D2099F7-C545-4A5A-88A5-56C373933206}"/>
               </a:ext>
             </a:extLst>
           </p:cNvPr>
@@ -2529,7 +2529,7 @@
           <p:nvPr/>
         </p:nvPicPr>
         <p:blipFill>
-          <a:blip xmlns:r="http://schemas.openxmlformats.org/officeDocument/2006/relationships" xmlns:a="http://schemas.openxmlformats.org/drawingml/2006/main" r:embed="R9a2f987b1638427a"/>
+          <a:blip xmlns:r="http://schemas.openxmlformats.org/officeDocument/2006/relationships" xmlns:a="http://schemas.openxmlformats.org/drawingml/2006/main" r:embed="R98d1d52d17214d6f"/>
           <a:stretch xmlns:a="http://schemas.openxmlformats.org/drawingml/2006/main"/>
         </p:blipFill>
         <p:spPr>
@@ -2547,7 +2547,7 @@
           <p:cNvPr id="5" name="">
             <a:extLst xmlns:a="http://schemas.openxmlformats.org/drawingml/2006/main">
               <a:ext uri="{FF2B5EF4-FFF2-40B4-BE49-F238E27FC236}">
-                <a16:creationId xmlns:a16="http://schemas.microsoft.com/office/drawing/2014/main" id="{9B0A33CB-938E-438E-A720-747024F0D633}"/>
+                <a16:creationId xmlns:a16="http://schemas.microsoft.com/office/drawing/2014/main" id="{8D124504-D694-4FB1-8B2B-EF70A853DB03}"/>
               </a:ext>
             </a:extLst>
           </p:cNvPr>
@@ -2599,7 +2599,7 @@
           <p:cNvPr id="6" name="">
             <a:extLst xmlns:a="http://schemas.openxmlformats.org/drawingml/2006/main">
               <a:ext uri="{FF2B5EF4-FFF2-40B4-BE49-F238E27FC236}">
-                <a16:creationId xmlns:a16="http://schemas.microsoft.com/office/drawing/2014/main" id="{A932D0CA-DE42-477A-8B97-BFEFFCF026CD}"/>
+                <a16:creationId xmlns:a16="http://schemas.microsoft.com/office/drawing/2014/main" id="{F8BD50A3-C8FC-4DA4-BF0D-5420C9F10FC3}"/>
               </a:ext>
             </a:extLst>
           </p:cNvPr>
@@ -2655,7 +2655,7 @@
           <p:nvPr/>
         </p:nvPicPr>
         <p:blipFill>
-          <a:blip xmlns:r="http://schemas.openxmlformats.org/officeDocument/2006/relationships" xmlns:a="http://schemas.openxmlformats.org/drawingml/2006/main" r:embed="R7262884e9b284768"/>
+          <a:blip xmlns:r="http://schemas.openxmlformats.org/officeDocument/2006/relationships" xmlns:a="http://schemas.openxmlformats.org/drawingml/2006/main" r:embed="R97f7f82770b34c48"/>
           <a:stretch xmlns:a="http://schemas.openxmlformats.org/drawingml/2006/main"/>
         </p:blipFill>
         <p:spPr>
@@ -2673,7 +2673,7 @@
           <p:cNvPr id="8" name="">
             <a:extLst xmlns:a="http://schemas.openxmlformats.org/drawingml/2006/main">
               <a:ext uri="{FF2B5EF4-FFF2-40B4-BE49-F238E27FC236}">
-                <a16:creationId xmlns:a16="http://schemas.microsoft.com/office/drawing/2014/main" id="{59853129-E456-48C7-AE4A-1E4F7D7607D0}"/>
+                <a16:creationId xmlns:a16="http://schemas.microsoft.com/office/drawing/2014/main" id="{5AF3E70F-B993-4372-AEFF-638A68CF1C84}"/>
               </a:ext>
             </a:extLst>
           </p:cNvPr>
@@ -2706,7 +2706,7 @@
           <p:cNvPr id="9" name="">
             <a:extLst xmlns:a="http://schemas.openxmlformats.org/drawingml/2006/main">
               <a:ext uri="{FF2B5EF4-FFF2-40B4-BE49-F238E27FC236}">
-                <a16:creationId xmlns:a16="http://schemas.microsoft.com/office/drawing/2014/main" id="{7E61187C-34B9-4A5B-9C6B-C522ED661E2C}"/>
+                <a16:creationId xmlns:a16="http://schemas.microsoft.com/office/drawing/2014/main" id="{911070E3-2326-4824-AA64-32E9B3DBFACF}"/>
               </a:ext>
             </a:extLst>
           </p:cNvPr>
@@ -2758,7 +2758,7 @@
           <p:cNvPr id="10" name="">
             <a:extLst xmlns:a="http://schemas.openxmlformats.org/drawingml/2006/main">
               <a:ext uri="{FF2B5EF4-FFF2-40B4-BE49-F238E27FC236}">
-                <a16:creationId xmlns:a16="http://schemas.microsoft.com/office/drawing/2014/main" id="{E18138C4-21E6-4FA0-9E92-08573305C203}"/>
+                <a16:creationId xmlns:a16="http://schemas.microsoft.com/office/drawing/2014/main" id="{71BC2C34-9A4A-4185-928D-1070B26352A4}"/>
               </a:ext>
             </a:extLst>
           </p:cNvPr>
@@ -2810,7 +2810,7 @@
           <p:cNvPr id="11" name="">
             <a:extLst xmlns:a="http://schemas.openxmlformats.org/drawingml/2006/main">
               <a:ext uri="{FF2B5EF4-FFF2-40B4-BE49-F238E27FC236}">
-                <a16:creationId xmlns:a16="http://schemas.microsoft.com/office/drawing/2014/main" id="{2DFB2826-9143-4D12-9D18-5AD924A5D2C1}"/>
+                <a16:creationId xmlns:a16="http://schemas.microsoft.com/office/drawing/2014/main" id="{49B4126A-FC5F-49AE-B4F1-8AE6753A4F24}"/>
               </a:ext>
             </a:extLst>
           </p:cNvPr>
@@ -2862,7 +2862,7 @@
           <p:cNvPr id="12" name="">
             <a:extLst xmlns:a="http://schemas.openxmlformats.org/drawingml/2006/main">
               <a:ext uri="{FF2B5EF4-FFF2-40B4-BE49-F238E27FC236}">
-                <a16:creationId xmlns:a16="http://schemas.microsoft.com/office/drawing/2014/main" id="{DA262919-2414-4AF4-9F3E-42817DF4D1B3}"/>
+                <a16:creationId xmlns:a16="http://schemas.microsoft.com/office/drawing/2014/main" id="{10706D51-9E74-4D39-94AB-C7F9383AB67D}"/>
               </a:ext>
             </a:extLst>
           </p:cNvPr>
@@ -2914,7 +2914,7 @@
           <p:cNvPr id="13" name="">
             <a:extLst xmlns:a="http://schemas.openxmlformats.org/drawingml/2006/main">
               <a:ext uri="{FF2B5EF4-FFF2-40B4-BE49-F238E27FC236}">
-                <a16:creationId xmlns:a16="http://schemas.microsoft.com/office/drawing/2014/main" id="{575A56A6-5365-4F05-A8DF-9812B0978609}"/>
+                <a16:creationId xmlns:a16="http://schemas.microsoft.com/office/drawing/2014/main" id="{AB99BD98-ADC1-4685-807C-3FF3199BFDE8}"/>
               </a:ext>
             </a:extLst>
           </p:cNvPr>
@@ -2966,7 +2966,7 @@
           <p:cNvPr id="14" name="">
             <a:extLst xmlns:a="http://schemas.openxmlformats.org/drawingml/2006/main">
               <a:ext uri="{FF2B5EF4-FFF2-40B4-BE49-F238E27FC236}">
-                <a16:creationId xmlns:a16="http://schemas.microsoft.com/office/drawing/2014/main" id="{8EADA2EA-E2DB-4ED0-B525-FC1000F0A406}"/>
+                <a16:creationId xmlns:a16="http://schemas.microsoft.com/office/drawing/2014/main" id="{7F6B93BF-B29D-4E79-B244-DA7ED758AA34}"/>
               </a:ext>
             </a:extLst>
           </p:cNvPr>
@@ -3018,7 +3018,7 @@
           <p:cNvPr id="15" name="">
             <a:extLst xmlns:a="http://schemas.openxmlformats.org/drawingml/2006/main">
               <a:ext uri="{FF2B5EF4-FFF2-40B4-BE49-F238E27FC236}">
-                <a16:creationId xmlns:a16="http://schemas.microsoft.com/office/drawing/2014/main" id="{41064D61-1A4C-40BD-B735-11F69CFC2F4B}"/>
+                <a16:creationId xmlns:a16="http://schemas.microsoft.com/office/drawing/2014/main" id="{F7E8FA07-2CE9-430F-9E89-2469F3DCC875}"/>
               </a:ext>
             </a:extLst>
           </p:cNvPr>
@@ -3070,7 +3070,7 @@
           <p:cNvPr id="16" name="">
             <a:extLst xmlns:a="http://schemas.openxmlformats.org/drawingml/2006/main">
               <a:ext uri="{FF2B5EF4-FFF2-40B4-BE49-F238E27FC236}">
-                <a16:creationId xmlns:a16="http://schemas.microsoft.com/office/drawing/2014/main" id="{F4A408E3-6F7B-4078-BD3A-8D71E014FA4F}"/>
+                <a16:creationId xmlns:a16="http://schemas.microsoft.com/office/drawing/2014/main" id="{17D16BB1-C212-4052-B456-597F9829643F}"/>
               </a:ext>
             </a:extLst>
           </p:cNvPr>
@@ -3120,7 +3120,7 @@
     </p:spTree>
     <p:extLst>
       <p:ext uri="{BB962C8B-B14F-4D97-AF65-F5344CB8AC3E}">
-        <p14:creationId xmlns:p14="http://schemas.microsoft.com/office/powerpoint/2010/main" val="1243378830"/>
+        <p14:creationId xmlns:p14="http://schemas.microsoft.com/office/powerpoint/2010/main" val="1095171102"/>
       </p:ext>
     </p:extLst>
   </p:cSld>
@@ -3151,7 +3151,7 @@
           <p:cNvPr id="103" name="">
             <a:extLst xmlns:a="http://schemas.openxmlformats.org/drawingml/2006/main">
               <a:ext uri="{FF2B5EF4-FFF2-40B4-BE49-F238E27FC236}">
-                <a16:creationId xmlns:a16="http://schemas.microsoft.com/office/drawing/2014/main" id="{33AE3ACD-D47E-4721-B55D-7D9004745642}"/>
+                <a16:creationId xmlns:a16="http://schemas.microsoft.com/office/drawing/2014/main" id="{492694AD-D50E-4F6F-B805-DEE50A714A63}"/>
               </a:ext>
             </a:extLst>
           </p:cNvPr>
@@ -3184,7 +3184,7 @@
           <p:cNvPr id="2" name="">
             <a:extLst xmlns:a="http://schemas.openxmlformats.org/drawingml/2006/main">
               <a:ext uri="{FF2B5EF4-FFF2-40B4-BE49-F238E27FC236}">
-                <a16:creationId xmlns:a16="http://schemas.microsoft.com/office/drawing/2014/main" id="{EABB921F-E7F4-433F-A68D-1C8C25DC9D47}"/>
+                <a16:creationId xmlns:a16="http://schemas.microsoft.com/office/drawing/2014/main" id="{FF44796D-32B4-401D-9E04-AB09F689CA7B}"/>
               </a:ext>
             </a:extLst>
           </p:cNvPr>
@@ -3215,7 +3215,7 @@
           <p:cNvPr id="3" name="">
             <a:extLst xmlns:a="http://schemas.openxmlformats.org/drawingml/2006/main">
               <a:ext uri="{FF2B5EF4-FFF2-40B4-BE49-F238E27FC236}">
-                <a16:creationId xmlns:a16="http://schemas.microsoft.com/office/drawing/2014/main" id="{15479F8D-3F09-4937-9C0F-EDEE4D6DAFBB}"/>
+                <a16:creationId xmlns:a16="http://schemas.microsoft.com/office/drawing/2014/main" id="{27C09A91-1206-436D-AEDB-D521A8960F0C}"/>
               </a:ext>
             </a:extLst>
           </p:cNvPr>
@@ -3267,7 +3267,7 @@
           <p:cNvPr id="4" name="">
             <a:extLst xmlns:a="http://schemas.openxmlformats.org/drawingml/2006/main">
               <a:ext uri="{FF2B5EF4-FFF2-40B4-BE49-F238E27FC236}">
-                <a16:creationId xmlns:a16="http://schemas.microsoft.com/office/drawing/2014/main" id="{7A8DDC83-EA55-4780-87F8-9B2B97C92BAA}"/>
+                <a16:creationId xmlns:a16="http://schemas.microsoft.com/office/drawing/2014/main" id="{B6478166-3665-4C5A-A151-940236260361}"/>
               </a:ext>
             </a:extLst>
           </p:cNvPr>
@@ -3319,7 +3319,7 @@
           <p:cNvPr id="5" name="">
             <a:extLst xmlns:a="http://schemas.openxmlformats.org/drawingml/2006/main">
               <a:ext uri="{FF2B5EF4-FFF2-40B4-BE49-F238E27FC236}">
-                <a16:creationId xmlns:a16="http://schemas.microsoft.com/office/drawing/2014/main" id="{9B70859E-2F49-4480-B9F3-7A1374373050}"/>
+                <a16:creationId xmlns:a16="http://schemas.microsoft.com/office/drawing/2014/main" id="{42E7BD9F-9FAD-4B2D-982A-B117B6318F9C}"/>
               </a:ext>
             </a:extLst>
           </p:cNvPr>
@@ -3354,7 +3354,7 @@
           <p:nvPr/>
         </p:nvPicPr>
         <p:blipFill>
-          <a:blip xmlns:r="http://schemas.openxmlformats.org/officeDocument/2006/relationships" xmlns:a="http://schemas.openxmlformats.org/drawingml/2006/main" r:embed="Ra838f771521c4df9"/>
+          <a:blip xmlns:r="http://schemas.openxmlformats.org/officeDocument/2006/relationships" xmlns:a="http://schemas.openxmlformats.org/drawingml/2006/main" r:embed="R80c0290f48e24111"/>
           <a:stretch xmlns:a="http://schemas.openxmlformats.org/drawingml/2006/main"/>
         </p:blipFill>
         <p:spPr>
@@ -3372,7 +3372,7 @@
           <p:cNvPr id="7" name="">
             <a:extLst xmlns:a="http://schemas.openxmlformats.org/drawingml/2006/main">
               <a:ext uri="{FF2B5EF4-FFF2-40B4-BE49-F238E27FC236}">
-                <a16:creationId xmlns:a16="http://schemas.microsoft.com/office/drawing/2014/main" id="{6AB6ADBE-1D6B-4D13-9795-CB6F50BBAC16}"/>
+                <a16:creationId xmlns:a16="http://schemas.microsoft.com/office/drawing/2014/main" id="{B2161154-AF5D-4951-BF80-45D4B5AB8148}"/>
               </a:ext>
             </a:extLst>
           </p:cNvPr>
@@ -3424,7 +3424,7 @@
           <p:cNvPr id="8" name="">
             <a:extLst xmlns:a="http://schemas.openxmlformats.org/drawingml/2006/main">
               <a:ext uri="{FF2B5EF4-FFF2-40B4-BE49-F238E27FC236}">
-                <a16:creationId xmlns:a16="http://schemas.microsoft.com/office/drawing/2014/main" id="{377B5C71-1757-4428-A97B-752680526F38}"/>
+                <a16:creationId xmlns:a16="http://schemas.microsoft.com/office/drawing/2014/main" id="{854137BF-36F8-4838-8C97-A5728CBFD5BC}"/>
               </a:ext>
             </a:extLst>
           </p:cNvPr>
@@ -3476,7 +3476,7 @@
           <p:cNvPr id="9" name="">
             <a:extLst xmlns:a="http://schemas.openxmlformats.org/drawingml/2006/main">
               <a:ext uri="{FF2B5EF4-FFF2-40B4-BE49-F238E27FC236}">
-                <a16:creationId xmlns:a16="http://schemas.microsoft.com/office/drawing/2014/main" id="{B46E753F-BD22-49EA-B5B3-ADF27037160B}"/>
+                <a16:creationId xmlns:a16="http://schemas.microsoft.com/office/drawing/2014/main" id="{56BEE69C-98A2-4DE9-989F-0EF208A36E32}"/>
               </a:ext>
             </a:extLst>
           </p:cNvPr>
@@ -3528,7 +3528,7 @@
           <p:cNvPr id="10" name="">
             <a:extLst xmlns:a="http://schemas.openxmlformats.org/drawingml/2006/main">
               <a:ext uri="{FF2B5EF4-FFF2-40B4-BE49-F238E27FC236}">
-                <a16:creationId xmlns:a16="http://schemas.microsoft.com/office/drawing/2014/main" id="{BEF3A92E-5EBE-4980-AA12-E2333919F458}"/>
+                <a16:creationId xmlns:a16="http://schemas.microsoft.com/office/drawing/2014/main" id="{86F5E241-0222-46CF-9F6C-3939FA5EE02C}"/>
               </a:ext>
             </a:extLst>
           </p:cNvPr>
@@ -3580,7 +3580,7 @@
           <p:cNvPr id="11" name="">
             <a:extLst xmlns:a="http://schemas.openxmlformats.org/drawingml/2006/main">
               <a:ext uri="{FF2B5EF4-FFF2-40B4-BE49-F238E27FC236}">
-                <a16:creationId xmlns:a16="http://schemas.microsoft.com/office/drawing/2014/main" id="{865DAC8E-87F0-4F0D-B520-488483C9EC90}"/>
+                <a16:creationId xmlns:a16="http://schemas.microsoft.com/office/drawing/2014/main" id="{7498762D-85CA-41D2-9F0E-BDB297AC1A72}"/>
               </a:ext>
             </a:extLst>
           </p:cNvPr>
@@ -3611,7 +3611,7 @@
           <p:cNvPr id="12" name="">
             <a:extLst xmlns:a="http://schemas.openxmlformats.org/drawingml/2006/main">
               <a:ext uri="{FF2B5EF4-FFF2-40B4-BE49-F238E27FC236}">
-                <a16:creationId xmlns:a16="http://schemas.microsoft.com/office/drawing/2014/main" id="{531D229D-8669-447B-AAC9-58765BE2627B}"/>
+                <a16:creationId xmlns:a16="http://schemas.microsoft.com/office/drawing/2014/main" id="{BDE9D2BD-407F-4419-BC1B-4FAE501BD3FC}"/>
               </a:ext>
             </a:extLst>
           </p:cNvPr>
@@ -3642,7 +3642,7 @@
           <p:cNvPr id="13" name="">
             <a:extLst xmlns:a="http://schemas.openxmlformats.org/drawingml/2006/main">
               <a:ext uri="{FF2B5EF4-FFF2-40B4-BE49-F238E27FC236}">
-                <a16:creationId xmlns:a16="http://schemas.microsoft.com/office/drawing/2014/main" id="{C2E12D53-2AEC-404A-A388-CED57FF736D2}"/>
+                <a16:creationId xmlns:a16="http://schemas.microsoft.com/office/drawing/2014/main" id="{3F585315-B426-4142-BF1F-EEDC7833924F}"/>
               </a:ext>
             </a:extLst>
           </p:cNvPr>
@@ -3694,7 +3694,7 @@
           <p:cNvPr id="14" name="">
             <a:extLst xmlns:a="http://schemas.openxmlformats.org/drawingml/2006/main">
               <a:ext uri="{FF2B5EF4-FFF2-40B4-BE49-F238E27FC236}">
-                <a16:creationId xmlns:a16="http://schemas.microsoft.com/office/drawing/2014/main" id="{9753AF09-DA0B-43A8-BB8B-963430C8A06B}"/>
+                <a16:creationId xmlns:a16="http://schemas.microsoft.com/office/drawing/2014/main" id="{420DA1F4-76F1-469D-8B1A-AE7028175233}"/>
               </a:ext>
             </a:extLst>
           </p:cNvPr>
@@ -3746,7 +3746,7 @@
           <p:cNvPr id="15" name="">
             <a:extLst xmlns:a="http://schemas.openxmlformats.org/drawingml/2006/main">
               <a:ext uri="{FF2B5EF4-FFF2-40B4-BE49-F238E27FC236}">
-                <a16:creationId xmlns:a16="http://schemas.microsoft.com/office/drawing/2014/main" id="{40E7124C-98C1-4EE3-A27F-325D0D2B42D5}"/>
+                <a16:creationId xmlns:a16="http://schemas.microsoft.com/office/drawing/2014/main" id="{0C7393B5-1E91-462B-B4FC-562B58A768CC}"/>
               </a:ext>
             </a:extLst>
           </p:cNvPr>
@@ -3798,7 +3798,7 @@
           <p:cNvPr id="16" name="">
             <a:extLst xmlns:a="http://schemas.openxmlformats.org/drawingml/2006/main">
               <a:ext uri="{FF2B5EF4-FFF2-40B4-BE49-F238E27FC236}">
-                <a16:creationId xmlns:a16="http://schemas.microsoft.com/office/drawing/2014/main" id="{2C359F48-E7C6-4B7A-934D-0AC7944AFE37}"/>
+                <a16:creationId xmlns:a16="http://schemas.microsoft.com/office/drawing/2014/main" id="{7F5EE7FE-58B6-4551-889D-E452998420CC}"/>
               </a:ext>
             </a:extLst>
           </p:cNvPr>
@@ -3850,7 +3850,7 @@
           <p:cNvPr id="17" name="">
             <a:extLst xmlns:a="http://schemas.openxmlformats.org/drawingml/2006/main">
               <a:ext uri="{FF2B5EF4-FFF2-40B4-BE49-F238E27FC236}">
-                <a16:creationId xmlns:a16="http://schemas.microsoft.com/office/drawing/2014/main" id="{AE8C8455-7BC6-4358-816F-8926931F8A21}"/>
+                <a16:creationId xmlns:a16="http://schemas.microsoft.com/office/drawing/2014/main" id="{3829BDA0-6622-45EE-8F3D-0BC4471FDA4A}"/>
               </a:ext>
             </a:extLst>
           </p:cNvPr>
@@ -3902,7 +3902,7 @@
           <p:cNvPr id="18" name="">
             <a:extLst xmlns:a="http://schemas.openxmlformats.org/drawingml/2006/main">
               <a:ext uri="{FF2B5EF4-FFF2-40B4-BE49-F238E27FC236}">
-                <a16:creationId xmlns:a16="http://schemas.microsoft.com/office/drawing/2014/main" id="{A154607C-F2D3-436D-B3D8-47EFE6C5293C}"/>
+                <a16:creationId xmlns:a16="http://schemas.microsoft.com/office/drawing/2014/main" id="{6A2D5359-BC65-4F57-86C2-954DD0E53C79}"/>
               </a:ext>
             </a:extLst>
           </p:cNvPr>
@@ -3933,7 +3933,7 @@
           <p:cNvPr id="19" name="">
             <a:extLst xmlns:a="http://schemas.openxmlformats.org/drawingml/2006/main">
               <a:ext uri="{FF2B5EF4-FFF2-40B4-BE49-F238E27FC236}">
-                <a16:creationId xmlns:a16="http://schemas.microsoft.com/office/drawing/2014/main" id="{491DAA63-EAF7-4CE0-979F-816760325B7A}"/>
+                <a16:creationId xmlns:a16="http://schemas.microsoft.com/office/drawing/2014/main" id="{565EF168-76B4-4501-BA2A-104D458A63AE}"/>
               </a:ext>
             </a:extLst>
           </p:cNvPr>
@@ -3964,7 +3964,7 @@
           <p:cNvPr id="20" name="">
             <a:extLst xmlns:a="http://schemas.openxmlformats.org/drawingml/2006/main">
               <a:ext uri="{FF2B5EF4-FFF2-40B4-BE49-F238E27FC236}">
-                <a16:creationId xmlns:a16="http://schemas.microsoft.com/office/drawing/2014/main" id="{F08128F7-3217-4DE7-AAA0-50CC79AD7A17}"/>
+                <a16:creationId xmlns:a16="http://schemas.microsoft.com/office/drawing/2014/main" id="{A77A3009-B904-4B68-A24E-3DF47C4D61F0}"/>
               </a:ext>
             </a:extLst>
           </p:cNvPr>
@@ -4016,7 +4016,7 @@
           <p:cNvPr id="21" name="">
             <a:extLst xmlns:a="http://schemas.openxmlformats.org/drawingml/2006/main">
               <a:ext uri="{FF2B5EF4-FFF2-40B4-BE49-F238E27FC236}">
-                <a16:creationId xmlns:a16="http://schemas.microsoft.com/office/drawing/2014/main" id="{02132D8E-5656-48C7-A201-BE034BA51862}"/>
+                <a16:creationId xmlns:a16="http://schemas.microsoft.com/office/drawing/2014/main" id="{E375BF59-6DBF-430A-A484-F795062DFB96}"/>
               </a:ext>
             </a:extLst>
           </p:cNvPr>
@@ -4068,7 +4068,7 @@
           <p:cNvPr id="22" name="">
             <a:extLst xmlns:a="http://schemas.openxmlformats.org/drawingml/2006/main">
               <a:ext uri="{FF2B5EF4-FFF2-40B4-BE49-F238E27FC236}">
-                <a16:creationId xmlns:a16="http://schemas.microsoft.com/office/drawing/2014/main" id="{F67FFCC0-A42A-4ADD-8CC5-AFE9D2143724}"/>
+                <a16:creationId xmlns:a16="http://schemas.microsoft.com/office/drawing/2014/main" id="{8485BBB4-3B03-4775-9B61-12A4F8C67CD7}"/>
               </a:ext>
             </a:extLst>
           </p:cNvPr>
@@ -4120,7 +4120,7 @@
           <p:cNvPr id="23" name="">
             <a:extLst xmlns:a="http://schemas.openxmlformats.org/drawingml/2006/main">
               <a:ext uri="{FF2B5EF4-FFF2-40B4-BE49-F238E27FC236}">
-                <a16:creationId xmlns:a16="http://schemas.microsoft.com/office/drawing/2014/main" id="{34108110-097A-4C41-9507-1504171B30E8}"/>
+                <a16:creationId xmlns:a16="http://schemas.microsoft.com/office/drawing/2014/main" id="{250914C9-E5D1-493C-BE2B-ED9EDA1AA965}"/>
               </a:ext>
             </a:extLst>
           </p:cNvPr>
@@ -4172,7 +4172,7 @@
           <p:cNvPr id="24" name="">
             <a:extLst xmlns:a="http://schemas.openxmlformats.org/drawingml/2006/main">
               <a:ext uri="{FF2B5EF4-FFF2-40B4-BE49-F238E27FC236}">
-                <a16:creationId xmlns:a16="http://schemas.microsoft.com/office/drawing/2014/main" id="{CBFCA9E7-6BE5-4F02-A92F-0A9A72BE917A}"/>
+                <a16:creationId xmlns:a16="http://schemas.microsoft.com/office/drawing/2014/main" id="{ED46EB66-50C9-499D-83ED-2AAF935CEC1C}"/>
               </a:ext>
             </a:extLst>
           </p:cNvPr>
@@ -4224,7 +4224,7 @@
           <p:cNvPr id="25" name="">
             <a:extLst xmlns:a="http://schemas.openxmlformats.org/drawingml/2006/main">
               <a:ext uri="{FF2B5EF4-FFF2-40B4-BE49-F238E27FC236}">
-                <a16:creationId xmlns:a16="http://schemas.microsoft.com/office/drawing/2014/main" id="{F2D40893-8308-497E-845E-1009728FDEE9}"/>
+                <a16:creationId xmlns:a16="http://schemas.microsoft.com/office/drawing/2014/main" id="{AAD626F9-2B9B-401F-AAE6-F98C7E198638}"/>
               </a:ext>
             </a:extLst>
           </p:cNvPr>
@@ -4255,7 +4255,7 @@
           <p:cNvPr id="26" name="">
             <a:extLst xmlns:a="http://schemas.openxmlformats.org/drawingml/2006/main">
               <a:ext uri="{FF2B5EF4-FFF2-40B4-BE49-F238E27FC236}">
-                <a16:creationId xmlns:a16="http://schemas.microsoft.com/office/drawing/2014/main" id="{F67B1DC5-2D69-4694-93A7-7FBB64B30F9E}"/>
+                <a16:creationId xmlns:a16="http://schemas.microsoft.com/office/drawing/2014/main" id="{10244BBE-E353-4795-8B09-0BE47DFCD23B}"/>
               </a:ext>
             </a:extLst>
           </p:cNvPr>
@@ -4307,7 +4307,7 @@
           <p:cNvPr id="27" name="">
             <a:extLst xmlns:a="http://schemas.openxmlformats.org/drawingml/2006/main">
               <a:ext uri="{FF2B5EF4-FFF2-40B4-BE49-F238E27FC236}">
-                <a16:creationId xmlns:a16="http://schemas.microsoft.com/office/drawing/2014/main" id="{6CF1DDAB-86B2-4609-A734-7DA2F0AE29AA}"/>
+                <a16:creationId xmlns:a16="http://schemas.microsoft.com/office/drawing/2014/main" id="{39448F6B-9511-4150-AB47-5AD11D9AEFC6}"/>
               </a:ext>
             </a:extLst>
           </p:cNvPr>
@@ -4359,7 +4359,7 @@
           <p:cNvPr id="28" name="">
             <a:extLst xmlns:a="http://schemas.openxmlformats.org/drawingml/2006/main">
               <a:ext uri="{FF2B5EF4-FFF2-40B4-BE49-F238E27FC236}">
-                <a16:creationId xmlns:a16="http://schemas.microsoft.com/office/drawing/2014/main" id="{A154D75D-DA29-48FA-8F87-37F4EC166C10}"/>
+                <a16:creationId xmlns:a16="http://schemas.microsoft.com/office/drawing/2014/main" id="{F3E75AD3-3D64-467C-9C53-31661D17DD5A}"/>
               </a:ext>
             </a:extLst>
           </p:cNvPr>
@@ -4411,7 +4411,7 @@
           <p:cNvPr id="29" name="">
             <a:extLst xmlns:a="http://schemas.openxmlformats.org/drawingml/2006/main">
               <a:ext uri="{FF2B5EF4-FFF2-40B4-BE49-F238E27FC236}">
-                <a16:creationId xmlns:a16="http://schemas.microsoft.com/office/drawing/2014/main" id="{FCA68112-033E-4204-A4D0-19A8E14738BA}"/>
+                <a16:creationId xmlns:a16="http://schemas.microsoft.com/office/drawing/2014/main" id="{4EFE13D4-57DA-408D-AB15-543C704FD36B}"/>
               </a:ext>
             </a:extLst>
           </p:cNvPr>
@@ -4463,7 +4463,7 @@
           <p:cNvPr id="30" name="">
             <a:extLst xmlns:a="http://schemas.openxmlformats.org/drawingml/2006/main">
               <a:ext uri="{FF2B5EF4-FFF2-40B4-BE49-F238E27FC236}">
-                <a16:creationId xmlns:a16="http://schemas.microsoft.com/office/drawing/2014/main" id="{4E245D97-155E-4468-9DE7-43643FD2C7F3}"/>
+                <a16:creationId xmlns:a16="http://schemas.microsoft.com/office/drawing/2014/main" id="{9CC37A05-ECB6-4AF1-96F3-35AC5D7BFDF5}"/>
               </a:ext>
             </a:extLst>
           </p:cNvPr>
@@ -4515,7 +4515,7 @@
           <p:cNvPr id="31" name="">
             <a:extLst xmlns:a="http://schemas.openxmlformats.org/drawingml/2006/main">
               <a:ext uri="{FF2B5EF4-FFF2-40B4-BE49-F238E27FC236}">
-                <a16:creationId xmlns:a16="http://schemas.microsoft.com/office/drawing/2014/main" id="{645F40A3-5F2E-4D64-8011-5A380412BA37}"/>
+                <a16:creationId xmlns:a16="http://schemas.microsoft.com/office/drawing/2014/main" id="{5992A9A4-8FE1-4F0C-A546-68EC17FC97B7}"/>
               </a:ext>
             </a:extLst>
           </p:cNvPr>
@@ -4546,7 +4546,7 @@
           <p:cNvPr id="32" name="">
             <a:extLst xmlns:a="http://schemas.openxmlformats.org/drawingml/2006/main">
               <a:ext uri="{FF2B5EF4-FFF2-40B4-BE49-F238E27FC236}">
-                <a16:creationId xmlns:a16="http://schemas.microsoft.com/office/drawing/2014/main" id="{80B89030-264D-45A4-B0E7-4D1794AD65EB}"/>
+                <a16:creationId xmlns:a16="http://schemas.microsoft.com/office/drawing/2014/main" id="{79263AA3-F95C-46A3-BD5A-9F9A4795AFDA}"/>
               </a:ext>
             </a:extLst>
           </p:cNvPr>
@@ -4577,7 +4577,7 @@
           <p:cNvPr id="33" name="">
             <a:extLst xmlns:a="http://schemas.openxmlformats.org/drawingml/2006/main">
               <a:ext uri="{FF2B5EF4-FFF2-40B4-BE49-F238E27FC236}">
-                <a16:creationId xmlns:a16="http://schemas.microsoft.com/office/drawing/2014/main" id="{FC6042B3-D632-4FB8-984F-3E1D56A782F4}"/>
+                <a16:creationId xmlns:a16="http://schemas.microsoft.com/office/drawing/2014/main" id="{BE98A2E3-C000-4D91-A99C-74CFC6931182}"/>
               </a:ext>
             </a:extLst>
           </p:cNvPr>
@@ -4629,7 +4629,7 @@
           <p:cNvPr id="34" name="">
             <a:extLst xmlns:a="http://schemas.openxmlformats.org/drawingml/2006/main">
               <a:ext uri="{FF2B5EF4-FFF2-40B4-BE49-F238E27FC236}">
-                <a16:creationId xmlns:a16="http://schemas.microsoft.com/office/drawing/2014/main" id="{D6850EEF-6F2B-45FB-B125-0C9C233E42E9}"/>
+                <a16:creationId xmlns:a16="http://schemas.microsoft.com/office/drawing/2014/main" id="{DFA1D346-8700-44B3-86E3-6DB359F58EC5}"/>
               </a:ext>
             </a:extLst>
           </p:cNvPr>
@@ -4681,7 +4681,7 @@
           <p:cNvPr id="35" name="">
             <a:extLst xmlns:a="http://schemas.openxmlformats.org/drawingml/2006/main">
               <a:ext uri="{FF2B5EF4-FFF2-40B4-BE49-F238E27FC236}">
-                <a16:creationId xmlns:a16="http://schemas.microsoft.com/office/drawing/2014/main" id="{F66B49EC-4F54-4BD1-BEA4-D86AE6048370}"/>
+                <a16:creationId xmlns:a16="http://schemas.microsoft.com/office/drawing/2014/main" id="{7D652B82-EAB3-44C2-83BF-DFC5C86BC89B}"/>
               </a:ext>
             </a:extLst>
           </p:cNvPr>
@@ -4733,7 +4733,7 @@
           <p:cNvPr id="36" name="">
             <a:extLst xmlns:a="http://schemas.openxmlformats.org/drawingml/2006/main">
               <a:ext uri="{FF2B5EF4-FFF2-40B4-BE49-F238E27FC236}">
-                <a16:creationId xmlns:a16="http://schemas.microsoft.com/office/drawing/2014/main" id="{CBF96E88-386D-408D-B4C9-523E42AD5154}"/>
+                <a16:creationId xmlns:a16="http://schemas.microsoft.com/office/drawing/2014/main" id="{6556890C-7136-481D-B1EE-B25E0F28523F}"/>
               </a:ext>
             </a:extLst>
           </p:cNvPr>
@@ -4785,7 +4785,7 @@
           <p:cNvPr id="37" name="">
             <a:extLst xmlns:a="http://schemas.openxmlformats.org/drawingml/2006/main">
               <a:ext uri="{FF2B5EF4-FFF2-40B4-BE49-F238E27FC236}">
-                <a16:creationId xmlns:a16="http://schemas.microsoft.com/office/drawing/2014/main" id="{EFABF1C8-30C3-422A-8864-42A6F0C22846}"/>
+                <a16:creationId xmlns:a16="http://schemas.microsoft.com/office/drawing/2014/main" id="{839617B7-9B56-4399-8AD2-321F93BB37E3}"/>
               </a:ext>
             </a:extLst>
           </p:cNvPr>
@@ -4837,7 +4837,7 @@
           <p:cNvPr id="38" name="">
             <a:extLst xmlns:a="http://schemas.openxmlformats.org/drawingml/2006/main">
               <a:ext uri="{FF2B5EF4-FFF2-40B4-BE49-F238E27FC236}">
-                <a16:creationId xmlns:a16="http://schemas.microsoft.com/office/drawing/2014/main" id="{8F86FA24-0CCA-43E5-A199-B54B7BBB5DEF}"/>
+                <a16:creationId xmlns:a16="http://schemas.microsoft.com/office/drawing/2014/main" id="{45E2B6D8-2E09-472A-9888-D00B6879DC4B}"/>
               </a:ext>
             </a:extLst>
           </p:cNvPr>
@@ -4868,7 +4868,7 @@
           <p:cNvPr id="39" name="">
             <a:extLst xmlns:a="http://schemas.openxmlformats.org/drawingml/2006/main">
               <a:ext uri="{FF2B5EF4-FFF2-40B4-BE49-F238E27FC236}">
-                <a16:creationId xmlns:a16="http://schemas.microsoft.com/office/drawing/2014/main" id="{A5DEB19E-0840-4799-848E-B66801628D2E}"/>
+                <a16:creationId xmlns:a16="http://schemas.microsoft.com/office/drawing/2014/main" id="{14810CCA-0C30-46F3-8946-35405E6877E7}"/>
               </a:ext>
             </a:extLst>
           </p:cNvPr>
@@ -4920,7 +4920,7 @@
           <p:cNvPr id="40" name="">
             <a:extLst xmlns:a="http://schemas.openxmlformats.org/drawingml/2006/main">
               <a:ext uri="{FF2B5EF4-FFF2-40B4-BE49-F238E27FC236}">
-                <a16:creationId xmlns:a16="http://schemas.microsoft.com/office/drawing/2014/main" id="{6B30F831-8782-4425-8CE9-36A191BC0267}"/>
+                <a16:creationId xmlns:a16="http://schemas.microsoft.com/office/drawing/2014/main" id="{68085ED9-8D09-436F-A515-2EC6A565387C}"/>
               </a:ext>
             </a:extLst>
           </p:cNvPr>
@@ -4972,7 +4972,7 @@
           <p:cNvPr id="41" name="">
             <a:extLst xmlns:a="http://schemas.openxmlformats.org/drawingml/2006/main">
               <a:ext uri="{FF2B5EF4-FFF2-40B4-BE49-F238E27FC236}">
-                <a16:creationId xmlns:a16="http://schemas.microsoft.com/office/drawing/2014/main" id="{F099373B-E2D2-4B02-ADF1-AF56E6DFDCAE}"/>
+                <a16:creationId xmlns:a16="http://schemas.microsoft.com/office/drawing/2014/main" id="{9E3FCEEE-F231-415D-8B1B-D56B02AEC7AA}"/>
               </a:ext>
             </a:extLst>
           </p:cNvPr>
@@ -5024,7 +5024,7 @@
           <p:cNvPr id="42" name="">
             <a:extLst xmlns:a="http://schemas.openxmlformats.org/drawingml/2006/main">
               <a:ext uri="{FF2B5EF4-FFF2-40B4-BE49-F238E27FC236}">
-                <a16:creationId xmlns:a16="http://schemas.microsoft.com/office/drawing/2014/main" id="{791E67BA-670A-45DC-BEEE-A46F51B320FC}"/>
+                <a16:creationId xmlns:a16="http://schemas.microsoft.com/office/drawing/2014/main" id="{BC9F1F07-579C-4D1F-8A5A-5C99C791541C}"/>
               </a:ext>
             </a:extLst>
           </p:cNvPr>
@@ -5076,7 +5076,7 @@
           <p:cNvPr id="43" name="">
             <a:extLst xmlns:a="http://schemas.openxmlformats.org/drawingml/2006/main">
               <a:ext uri="{FF2B5EF4-FFF2-40B4-BE49-F238E27FC236}">
-                <a16:creationId xmlns:a16="http://schemas.microsoft.com/office/drawing/2014/main" id="{76F90F60-AA40-4206-8FA1-D1B94A5005CD}"/>
+                <a16:creationId xmlns:a16="http://schemas.microsoft.com/office/drawing/2014/main" id="{93A8E603-213D-4407-AF63-ECB299D14D73}"/>
               </a:ext>
             </a:extLst>
           </p:cNvPr>
@@ -5128,7 +5128,7 @@
           <p:cNvPr id="44" name="">
             <a:extLst xmlns:a="http://schemas.openxmlformats.org/drawingml/2006/main">
               <a:ext uri="{FF2B5EF4-FFF2-40B4-BE49-F238E27FC236}">
-                <a16:creationId xmlns:a16="http://schemas.microsoft.com/office/drawing/2014/main" id="{71DCFF3C-ACD3-45DA-B636-97DB84C63959}"/>
+                <a16:creationId xmlns:a16="http://schemas.microsoft.com/office/drawing/2014/main" id="{59D5F5E5-1FC5-459E-B3FD-2658853335F4}"/>
               </a:ext>
             </a:extLst>
           </p:cNvPr>
@@ -5159,7 +5159,7 @@
           <p:cNvPr id="45" name="">
             <a:extLst xmlns:a="http://schemas.openxmlformats.org/drawingml/2006/main">
               <a:ext uri="{FF2B5EF4-FFF2-40B4-BE49-F238E27FC236}">
-                <a16:creationId xmlns:a16="http://schemas.microsoft.com/office/drawing/2014/main" id="{E3358069-D1D8-4BDD-936A-655BBCAAC71F}"/>
+                <a16:creationId xmlns:a16="http://schemas.microsoft.com/office/drawing/2014/main" id="{33FAB215-3758-4E3B-A0CB-68D288A37ABF}"/>
               </a:ext>
             </a:extLst>
           </p:cNvPr>
@@ -5190,7 +5190,7 @@
           <p:cNvPr id="46" name="">
             <a:extLst xmlns:a="http://schemas.openxmlformats.org/drawingml/2006/main">
               <a:ext uri="{FF2B5EF4-FFF2-40B4-BE49-F238E27FC236}">
-                <a16:creationId xmlns:a16="http://schemas.microsoft.com/office/drawing/2014/main" id="{0E1CDC2B-55C3-49D1-A15A-18F9C117CD65}"/>
+                <a16:creationId xmlns:a16="http://schemas.microsoft.com/office/drawing/2014/main" id="{686AC32B-759F-43B0-B9BB-D8EBF2057549}"/>
               </a:ext>
             </a:extLst>
           </p:cNvPr>
@@ -5242,7 +5242,7 @@
           <p:cNvPr id="47" name="">
             <a:extLst xmlns:a="http://schemas.openxmlformats.org/drawingml/2006/main">
               <a:ext uri="{FF2B5EF4-FFF2-40B4-BE49-F238E27FC236}">
-                <a16:creationId xmlns:a16="http://schemas.microsoft.com/office/drawing/2014/main" id="{15073993-73FA-45EC-8727-6513F80C60B0}"/>
+                <a16:creationId xmlns:a16="http://schemas.microsoft.com/office/drawing/2014/main" id="{550E10E6-BFD8-4727-AE32-E51AC7E9BA19}"/>
               </a:ext>
             </a:extLst>
           </p:cNvPr>
@@ -5294,7 +5294,7 @@
           <p:cNvPr id="48" name="">
             <a:extLst xmlns:a="http://schemas.openxmlformats.org/drawingml/2006/main">
               <a:ext uri="{FF2B5EF4-FFF2-40B4-BE49-F238E27FC236}">
-                <a16:creationId xmlns:a16="http://schemas.microsoft.com/office/drawing/2014/main" id="{F42320EE-8124-46BB-9BB3-80BB0F37E81D}"/>
+                <a16:creationId xmlns:a16="http://schemas.microsoft.com/office/drawing/2014/main" id="{3D9DB318-4FD3-4A30-8D3F-B363C7F25751}"/>
               </a:ext>
             </a:extLst>
           </p:cNvPr>
@@ -5346,7 +5346,7 @@
           <p:cNvPr id="49" name="">
             <a:extLst xmlns:a="http://schemas.openxmlformats.org/drawingml/2006/main">
               <a:ext uri="{FF2B5EF4-FFF2-40B4-BE49-F238E27FC236}">
-                <a16:creationId xmlns:a16="http://schemas.microsoft.com/office/drawing/2014/main" id="{FF62E45F-1CE4-48CD-829C-462389B82DB6}"/>
+                <a16:creationId xmlns:a16="http://schemas.microsoft.com/office/drawing/2014/main" id="{A650B8E2-3C45-453C-AAA4-6D87499641AB}"/>
               </a:ext>
             </a:extLst>
           </p:cNvPr>
@@ -5398,7 +5398,7 @@
           <p:cNvPr id="50" name="">
             <a:extLst xmlns:a="http://schemas.openxmlformats.org/drawingml/2006/main">
               <a:ext uri="{FF2B5EF4-FFF2-40B4-BE49-F238E27FC236}">
-                <a16:creationId xmlns:a16="http://schemas.microsoft.com/office/drawing/2014/main" id="{8CEC6123-273A-47B9-9B5B-2B9D6CC99190}"/>
+                <a16:creationId xmlns:a16="http://schemas.microsoft.com/office/drawing/2014/main" id="{06086218-CC06-465F-AFE6-4C242147072A}"/>
               </a:ext>
             </a:extLst>
           </p:cNvPr>
@@ -5450,7 +5450,7 @@
           <p:cNvPr id="51" name="">
             <a:extLst xmlns:a="http://schemas.openxmlformats.org/drawingml/2006/main">
               <a:ext uri="{FF2B5EF4-FFF2-40B4-BE49-F238E27FC236}">
-                <a16:creationId xmlns:a16="http://schemas.microsoft.com/office/drawing/2014/main" id="{7C87DB2A-46BC-4748-8598-1E10CC340AD1}"/>
+                <a16:creationId xmlns:a16="http://schemas.microsoft.com/office/drawing/2014/main" id="{DC424169-3645-4B01-9CC6-AEAACF75DFD0}"/>
               </a:ext>
             </a:extLst>
           </p:cNvPr>
@@ -5481,7 +5481,7 @@
           <p:cNvPr id="52" name="">
             <a:extLst xmlns:a="http://schemas.openxmlformats.org/drawingml/2006/main">
               <a:ext uri="{FF2B5EF4-FFF2-40B4-BE49-F238E27FC236}">
-                <a16:creationId xmlns:a16="http://schemas.microsoft.com/office/drawing/2014/main" id="{D178134F-C93A-4422-9E4B-9C60F45B5491}"/>
+                <a16:creationId xmlns:a16="http://schemas.microsoft.com/office/drawing/2014/main" id="{72710681-F211-4C26-B4D3-D1BAF3F84BBA}"/>
               </a:ext>
             </a:extLst>
           </p:cNvPr>
@@ -5533,7 +5533,7 @@
           <p:cNvPr id="53" name="">
             <a:extLst xmlns:a="http://schemas.openxmlformats.org/drawingml/2006/main">
               <a:ext uri="{FF2B5EF4-FFF2-40B4-BE49-F238E27FC236}">
-                <a16:creationId xmlns:a16="http://schemas.microsoft.com/office/drawing/2014/main" id="{960E875C-7D3B-4266-AF6D-4DFCE06DE324}"/>
+                <a16:creationId xmlns:a16="http://schemas.microsoft.com/office/drawing/2014/main" id="{92F81B61-0458-4617-A8FA-33F2A512DFCA}"/>
               </a:ext>
             </a:extLst>
           </p:cNvPr>
@@ -5585,7 +5585,7 @@
           <p:cNvPr id="54" name="">
             <a:extLst xmlns:a="http://schemas.openxmlformats.org/drawingml/2006/main">
               <a:ext uri="{FF2B5EF4-FFF2-40B4-BE49-F238E27FC236}">
-                <a16:creationId xmlns:a16="http://schemas.microsoft.com/office/drawing/2014/main" id="{FA782CA4-22EC-452F-A48E-C2B222D3C67B}"/>
+                <a16:creationId xmlns:a16="http://schemas.microsoft.com/office/drawing/2014/main" id="{1C4B7D1C-2FA9-452A-9489-C229C8D36288}"/>
               </a:ext>
             </a:extLst>
           </p:cNvPr>
@@ -5637,7 +5637,7 @@
           <p:cNvPr id="55" name="">
             <a:extLst xmlns:a="http://schemas.openxmlformats.org/drawingml/2006/main">
               <a:ext uri="{FF2B5EF4-FFF2-40B4-BE49-F238E27FC236}">
-                <a16:creationId xmlns:a16="http://schemas.microsoft.com/office/drawing/2014/main" id="{5C7F15AD-FD86-449D-AE5E-6FB5FB33E570}"/>
+                <a16:creationId xmlns:a16="http://schemas.microsoft.com/office/drawing/2014/main" id="{6B264295-5932-423B-AAEF-8F005AF665C8}"/>
               </a:ext>
             </a:extLst>
           </p:cNvPr>
@@ -5689,7 +5689,7 @@
           <p:cNvPr id="56" name="">
             <a:extLst xmlns:a="http://schemas.openxmlformats.org/drawingml/2006/main">
               <a:ext uri="{FF2B5EF4-FFF2-40B4-BE49-F238E27FC236}">
-                <a16:creationId xmlns:a16="http://schemas.microsoft.com/office/drawing/2014/main" id="{8AC7017D-2E74-45F2-B7D7-24640B7298D9}"/>
+                <a16:creationId xmlns:a16="http://schemas.microsoft.com/office/drawing/2014/main" id="{C9EAD169-7992-4011-A87F-136E35C1971F}"/>
               </a:ext>
             </a:extLst>
           </p:cNvPr>
@@ -5741,7 +5741,7 @@
           <p:cNvPr id="57" name="">
             <a:extLst xmlns:a="http://schemas.openxmlformats.org/drawingml/2006/main">
               <a:ext uri="{FF2B5EF4-FFF2-40B4-BE49-F238E27FC236}">
-                <a16:creationId xmlns:a16="http://schemas.microsoft.com/office/drawing/2014/main" id="{1CB5300E-90B4-4951-8256-E94F44A636F2}"/>
+                <a16:creationId xmlns:a16="http://schemas.microsoft.com/office/drawing/2014/main" id="{F72A4043-39EA-4EF5-BAF9-D3518C03929B}"/>
               </a:ext>
             </a:extLst>
           </p:cNvPr>
@@ -5772,7 +5772,7 @@
           <p:cNvPr id="58" name="">
             <a:extLst xmlns:a="http://schemas.openxmlformats.org/drawingml/2006/main">
               <a:ext uri="{FF2B5EF4-FFF2-40B4-BE49-F238E27FC236}">
-                <a16:creationId xmlns:a16="http://schemas.microsoft.com/office/drawing/2014/main" id="{63E400E4-134A-4044-BC31-E721AB397803}"/>
+                <a16:creationId xmlns:a16="http://schemas.microsoft.com/office/drawing/2014/main" id="{AC6AFCDE-FF17-4511-AF1E-847AC90D8452}"/>
               </a:ext>
             </a:extLst>
           </p:cNvPr>
@@ -5803,7 +5803,7 @@
           <p:cNvPr id="59" name="">
             <a:extLst xmlns:a="http://schemas.openxmlformats.org/drawingml/2006/main">
               <a:ext uri="{FF2B5EF4-FFF2-40B4-BE49-F238E27FC236}">
-                <a16:creationId xmlns:a16="http://schemas.microsoft.com/office/drawing/2014/main" id="{D7F1357B-195E-4B16-A09C-E598CAFBA2F4}"/>
+                <a16:creationId xmlns:a16="http://schemas.microsoft.com/office/drawing/2014/main" id="{74F6AD8F-5B02-47C5-A17A-9C305B76F141}"/>
               </a:ext>
             </a:extLst>
           </p:cNvPr>
@@ -5855,7 +5855,7 @@
           <p:cNvPr id="60" name="">
             <a:extLst xmlns:a="http://schemas.openxmlformats.org/drawingml/2006/main">
               <a:ext uri="{FF2B5EF4-FFF2-40B4-BE49-F238E27FC236}">
-                <a16:creationId xmlns:a16="http://schemas.microsoft.com/office/drawing/2014/main" id="{498428D2-AE81-4FEC-B637-BF4CCDECF3A9}"/>
+                <a16:creationId xmlns:a16="http://schemas.microsoft.com/office/drawing/2014/main" id="{85FDD881-089E-45DA-95CF-9D65710201F9}"/>
               </a:ext>
             </a:extLst>
           </p:cNvPr>
@@ -5907,7 +5907,7 @@
           <p:cNvPr id="61" name="">
             <a:extLst xmlns:a="http://schemas.openxmlformats.org/drawingml/2006/main">
               <a:ext uri="{FF2B5EF4-FFF2-40B4-BE49-F238E27FC236}">
-                <a16:creationId xmlns:a16="http://schemas.microsoft.com/office/drawing/2014/main" id="{AE05F098-66FA-41A7-BA46-F0D0419220CE}"/>
+                <a16:creationId xmlns:a16="http://schemas.microsoft.com/office/drawing/2014/main" id="{95BBE4A0-46A9-4969-A81B-4A5402F291E4}"/>
               </a:ext>
             </a:extLst>
           </p:cNvPr>
@@ -5959,7 +5959,7 @@
           <p:cNvPr id="62" name="">
             <a:extLst xmlns:a="http://schemas.openxmlformats.org/drawingml/2006/main">
               <a:ext uri="{FF2B5EF4-FFF2-40B4-BE49-F238E27FC236}">
-                <a16:creationId xmlns:a16="http://schemas.microsoft.com/office/drawing/2014/main" id="{75879E96-F03E-402F-95B8-81A4E59892C6}"/>
+                <a16:creationId xmlns:a16="http://schemas.microsoft.com/office/drawing/2014/main" id="{9BB4735B-5110-49BB-8C2F-8AEDD41E820E}"/>
               </a:ext>
             </a:extLst>
           </p:cNvPr>
@@ -6011,7 +6011,7 @@
           <p:cNvPr id="63" name="">
             <a:extLst xmlns:a="http://schemas.openxmlformats.org/drawingml/2006/main">
               <a:ext uri="{FF2B5EF4-FFF2-40B4-BE49-F238E27FC236}">
-                <a16:creationId xmlns:a16="http://schemas.microsoft.com/office/drawing/2014/main" id="{251B25FD-B347-41F2-8E94-1BBF67430F14}"/>
+                <a16:creationId xmlns:a16="http://schemas.microsoft.com/office/drawing/2014/main" id="{6927573E-4CA0-491C-9092-37EC54251F12}"/>
               </a:ext>
             </a:extLst>
           </p:cNvPr>
@@ -6063,7 +6063,7 @@
           <p:cNvPr id="64" name="">
             <a:extLst xmlns:a="http://schemas.openxmlformats.org/drawingml/2006/main">
               <a:ext uri="{FF2B5EF4-FFF2-40B4-BE49-F238E27FC236}">
-                <a16:creationId xmlns:a16="http://schemas.microsoft.com/office/drawing/2014/main" id="{68953993-2C99-435C-89D9-C96142EF5C54}"/>
+                <a16:creationId xmlns:a16="http://schemas.microsoft.com/office/drawing/2014/main" id="{57FDF6E1-989B-408E-AD57-84F7B1DEC67D}"/>
               </a:ext>
             </a:extLst>
           </p:cNvPr>
@@ -6094,7 +6094,7 @@
           <p:cNvPr id="65" name="">
             <a:extLst xmlns:a="http://schemas.openxmlformats.org/drawingml/2006/main">
               <a:ext uri="{FF2B5EF4-FFF2-40B4-BE49-F238E27FC236}">
-                <a16:creationId xmlns:a16="http://schemas.microsoft.com/office/drawing/2014/main" id="{16397A99-6CB2-4B03-A233-31DC81470D3F}"/>
+                <a16:creationId xmlns:a16="http://schemas.microsoft.com/office/drawing/2014/main" id="{CC7CF9D1-5AAF-438A-BAA8-335F78A1FAEA}"/>
               </a:ext>
             </a:extLst>
           </p:cNvPr>
@@ -6146,7 +6146,7 @@
           <p:cNvPr id="66" name="">
             <a:extLst xmlns:a="http://schemas.openxmlformats.org/drawingml/2006/main">
               <a:ext uri="{FF2B5EF4-FFF2-40B4-BE49-F238E27FC236}">
-                <a16:creationId xmlns:a16="http://schemas.microsoft.com/office/drawing/2014/main" id="{ED372BC9-0CCD-4071-9042-E17FA9220969}"/>
+                <a16:creationId xmlns:a16="http://schemas.microsoft.com/office/drawing/2014/main" id="{611BB6CA-CC56-49E6-AA7B-3D775358E71D}"/>
               </a:ext>
             </a:extLst>
           </p:cNvPr>
@@ -6198,7 +6198,7 @@
           <p:cNvPr id="67" name="">
             <a:extLst xmlns:a="http://schemas.openxmlformats.org/drawingml/2006/main">
               <a:ext uri="{FF2B5EF4-FFF2-40B4-BE49-F238E27FC236}">
-                <a16:creationId xmlns:a16="http://schemas.microsoft.com/office/drawing/2014/main" id="{53A5E424-5D51-440C-9934-4084122516FA}"/>
+                <a16:creationId xmlns:a16="http://schemas.microsoft.com/office/drawing/2014/main" id="{62AAE239-F116-443D-BDD9-D6F9721BE821}"/>
               </a:ext>
             </a:extLst>
           </p:cNvPr>
@@ -6250,7 +6250,7 @@
           <p:cNvPr id="68" name="">
             <a:extLst xmlns:a="http://schemas.openxmlformats.org/drawingml/2006/main">
               <a:ext uri="{FF2B5EF4-FFF2-40B4-BE49-F238E27FC236}">
-                <a16:creationId xmlns:a16="http://schemas.microsoft.com/office/drawing/2014/main" id="{760D4A72-6BD4-4492-9D63-54F6649C8461}"/>
+                <a16:creationId xmlns:a16="http://schemas.microsoft.com/office/drawing/2014/main" id="{3A065901-FBEA-481F-ADA3-2986EDBCC12B}"/>
               </a:ext>
             </a:extLst>
           </p:cNvPr>
@@ -6302,7 +6302,7 @@
           <p:cNvPr id="69" name="">
             <a:extLst xmlns:a="http://schemas.openxmlformats.org/drawingml/2006/main">
               <a:ext uri="{FF2B5EF4-FFF2-40B4-BE49-F238E27FC236}">
-                <a16:creationId xmlns:a16="http://schemas.microsoft.com/office/drawing/2014/main" id="{BC4CC899-FE21-4905-B150-0F7741F33B64}"/>
+                <a16:creationId xmlns:a16="http://schemas.microsoft.com/office/drawing/2014/main" id="{C2104916-B6CD-4A58-A4AC-7CA5F6765018}"/>
               </a:ext>
             </a:extLst>
           </p:cNvPr>
@@ -6354,7 +6354,7 @@
           <p:cNvPr id="70" name="">
             <a:extLst xmlns:a="http://schemas.openxmlformats.org/drawingml/2006/main">
               <a:ext uri="{FF2B5EF4-FFF2-40B4-BE49-F238E27FC236}">
-                <a16:creationId xmlns:a16="http://schemas.microsoft.com/office/drawing/2014/main" id="{4EA2DDEB-202D-4439-BA83-5CFA7CCACB2B}"/>
+                <a16:creationId xmlns:a16="http://schemas.microsoft.com/office/drawing/2014/main" id="{5596D2EE-61E4-4778-9293-6AED5597DB3E}"/>
               </a:ext>
             </a:extLst>
           </p:cNvPr>
@@ -6385,7 +6385,7 @@
           <p:cNvPr id="71" name="">
             <a:extLst xmlns:a="http://schemas.openxmlformats.org/drawingml/2006/main">
               <a:ext uri="{FF2B5EF4-FFF2-40B4-BE49-F238E27FC236}">
-                <a16:creationId xmlns:a16="http://schemas.microsoft.com/office/drawing/2014/main" id="{34CDBCF0-8EE3-4683-AFBE-9E66D9DAA657}"/>
+                <a16:creationId xmlns:a16="http://schemas.microsoft.com/office/drawing/2014/main" id="{B1101965-C79F-4CBF-8097-E77D4E502503}"/>
               </a:ext>
             </a:extLst>
           </p:cNvPr>
@@ -6416,7 +6416,7 @@
           <p:cNvPr id="72" name="">
             <a:extLst xmlns:a="http://schemas.openxmlformats.org/drawingml/2006/main">
               <a:ext uri="{FF2B5EF4-FFF2-40B4-BE49-F238E27FC236}">
-                <a16:creationId xmlns:a16="http://schemas.microsoft.com/office/drawing/2014/main" id="{7C38C90C-A673-487B-8CBE-A6E19EC8B05E}"/>
+                <a16:creationId xmlns:a16="http://schemas.microsoft.com/office/drawing/2014/main" id="{0B70063F-6E8C-4185-A877-2EF93C121372}"/>
               </a:ext>
             </a:extLst>
           </p:cNvPr>
@@ -6468,7 +6468,7 @@
           <p:cNvPr id="73" name="">
             <a:extLst xmlns:a="http://schemas.openxmlformats.org/drawingml/2006/main">
               <a:ext uri="{FF2B5EF4-FFF2-40B4-BE49-F238E27FC236}">
-                <a16:creationId xmlns:a16="http://schemas.microsoft.com/office/drawing/2014/main" id="{1D8E46DD-83DC-4919-B68F-5355E955EC98}"/>
+                <a16:creationId xmlns:a16="http://schemas.microsoft.com/office/drawing/2014/main" id="{0503F067-E22B-4AF4-A4BC-C763C3B96390}"/>
               </a:ext>
             </a:extLst>
           </p:cNvPr>
@@ -6520,7 +6520,7 @@
           <p:cNvPr id="74" name="">
             <a:extLst xmlns:a="http://schemas.openxmlformats.org/drawingml/2006/main">
               <a:ext uri="{FF2B5EF4-FFF2-40B4-BE49-F238E27FC236}">
-                <a16:creationId xmlns:a16="http://schemas.microsoft.com/office/drawing/2014/main" id="{EFF51869-32CA-477A-B0AC-8183AE3206D1}"/>
+                <a16:creationId xmlns:a16="http://schemas.microsoft.com/office/drawing/2014/main" id="{79DA28F8-8442-4926-A83C-6A4410DA4715}"/>
               </a:ext>
             </a:extLst>
           </p:cNvPr>
@@ -6572,7 +6572,7 @@
           <p:cNvPr id="75" name="">
             <a:extLst xmlns:a="http://schemas.openxmlformats.org/drawingml/2006/main">
               <a:ext uri="{FF2B5EF4-FFF2-40B4-BE49-F238E27FC236}">
-                <a16:creationId xmlns:a16="http://schemas.microsoft.com/office/drawing/2014/main" id="{5013D0F1-185E-405E-B9E9-57B3C13BC1C8}"/>
+                <a16:creationId xmlns:a16="http://schemas.microsoft.com/office/drawing/2014/main" id="{3585D742-26AA-4AB2-B6C2-C56F1B96EB92}"/>
               </a:ext>
             </a:extLst>
           </p:cNvPr>
@@ -6624,7 +6624,7 @@
           <p:cNvPr id="76" name="">
             <a:extLst xmlns:a="http://schemas.openxmlformats.org/drawingml/2006/main">
               <a:ext uri="{FF2B5EF4-FFF2-40B4-BE49-F238E27FC236}">
-                <a16:creationId xmlns:a16="http://schemas.microsoft.com/office/drawing/2014/main" id="{1BE10171-2F75-42EF-B599-DCC402383D71}"/>
+                <a16:creationId xmlns:a16="http://schemas.microsoft.com/office/drawing/2014/main" id="{5B725E8A-4B67-4B4D-A6F5-F22C1130E1E8}"/>
               </a:ext>
             </a:extLst>
           </p:cNvPr>
@@ -6676,7 +6676,7 @@
           <p:cNvPr id="77" name="">
             <a:extLst xmlns:a="http://schemas.openxmlformats.org/drawingml/2006/main">
               <a:ext uri="{FF2B5EF4-FFF2-40B4-BE49-F238E27FC236}">
-                <a16:creationId xmlns:a16="http://schemas.microsoft.com/office/drawing/2014/main" id="{3583B9A2-17F5-4944-911A-B5823C3A1713}"/>
+                <a16:creationId xmlns:a16="http://schemas.microsoft.com/office/drawing/2014/main" id="{59C7AB4C-2883-4206-950F-FAE76B3C17E1}"/>
               </a:ext>
             </a:extLst>
           </p:cNvPr>
@@ -6707,7 +6707,7 @@
           <p:cNvPr id="78" name="">
             <a:extLst xmlns:a="http://schemas.openxmlformats.org/drawingml/2006/main">
               <a:ext uri="{FF2B5EF4-FFF2-40B4-BE49-F238E27FC236}">
-                <a16:creationId xmlns:a16="http://schemas.microsoft.com/office/drawing/2014/main" id="{A104C0E6-D12B-4C93-AFE1-391F6D5D6426}"/>
+                <a16:creationId xmlns:a16="http://schemas.microsoft.com/office/drawing/2014/main" id="{F63C9BB5-CAC8-4DCF-B26A-1F61D02C572F}"/>
               </a:ext>
             </a:extLst>
           </p:cNvPr>
@@ -6759,7 +6759,7 @@
           <p:cNvPr id="79" name="">
             <a:extLst xmlns:a="http://schemas.openxmlformats.org/drawingml/2006/main">
               <a:ext uri="{FF2B5EF4-FFF2-40B4-BE49-F238E27FC236}">
-                <a16:creationId xmlns:a16="http://schemas.microsoft.com/office/drawing/2014/main" id="{5E36C48C-DCCB-4B73-958C-FBEB6F25AF3E}"/>
+                <a16:creationId xmlns:a16="http://schemas.microsoft.com/office/drawing/2014/main" id="{B860480B-CAB6-4AB3-8A62-5CDA017E487C}"/>
               </a:ext>
             </a:extLst>
           </p:cNvPr>
@@ -6811,7 +6811,7 @@
           <p:cNvPr id="80" name="">
             <a:extLst xmlns:a="http://schemas.openxmlformats.org/drawingml/2006/main">
               <a:ext uri="{FF2B5EF4-FFF2-40B4-BE49-F238E27FC236}">
-                <a16:creationId xmlns:a16="http://schemas.microsoft.com/office/drawing/2014/main" id="{A3ABF23D-F263-4445-B0C4-E50E8B4D9716}"/>
+                <a16:creationId xmlns:a16="http://schemas.microsoft.com/office/drawing/2014/main" id="{5FE99639-A33D-4413-8CC8-F8B1D4FEE854}"/>
               </a:ext>
             </a:extLst>
           </p:cNvPr>
@@ -6863,7 +6863,7 @@
           <p:cNvPr id="81" name="">
             <a:extLst xmlns:a="http://schemas.openxmlformats.org/drawingml/2006/main">
               <a:ext uri="{FF2B5EF4-FFF2-40B4-BE49-F238E27FC236}">
-                <a16:creationId xmlns:a16="http://schemas.microsoft.com/office/drawing/2014/main" id="{1B085A42-1ED2-45F4-9063-5566A0381DC8}"/>
+                <a16:creationId xmlns:a16="http://schemas.microsoft.com/office/drawing/2014/main" id="{7159DADF-1C23-4585-BAD5-41DB816F88AD}"/>
               </a:ext>
             </a:extLst>
           </p:cNvPr>
@@ -6915,7 +6915,7 @@
           <p:cNvPr id="82" name="">
             <a:extLst xmlns:a="http://schemas.openxmlformats.org/drawingml/2006/main">
               <a:ext uri="{FF2B5EF4-FFF2-40B4-BE49-F238E27FC236}">
-                <a16:creationId xmlns:a16="http://schemas.microsoft.com/office/drawing/2014/main" id="{F89C8B27-3DEE-44C8-A7DD-0FFB9D6D58BE}"/>
+                <a16:creationId xmlns:a16="http://schemas.microsoft.com/office/drawing/2014/main" id="{F5F3B5C0-E517-4350-BD1E-9F3ADD1A2290}"/>
               </a:ext>
             </a:extLst>
           </p:cNvPr>
@@ -6967,7 +6967,7 @@
           <p:cNvPr id="83" name="">
             <a:extLst xmlns:a="http://schemas.openxmlformats.org/drawingml/2006/main">
               <a:ext uri="{FF2B5EF4-FFF2-40B4-BE49-F238E27FC236}">
-                <a16:creationId xmlns:a16="http://schemas.microsoft.com/office/drawing/2014/main" id="{9235E1FD-6C0E-48FD-8CCB-386EFA7421D4}"/>
+                <a16:creationId xmlns:a16="http://schemas.microsoft.com/office/drawing/2014/main" id="{4BD3C0B3-B672-4BF1-A6C7-A58AC7292F92}"/>
               </a:ext>
             </a:extLst>
           </p:cNvPr>
@@ -6998,7 +6998,7 @@
           <p:cNvPr id="84" name="">
             <a:extLst xmlns:a="http://schemas.openxmlformats.org/drawingml/2006/main">
               <a:ext uri="{FF2B5EF4-FFF2-40B4-BE49-F238E27FC236}">
-                <a16:creationId xmlns:a16="http://schemas.microsoft.com/office/drawing/2014/main" id="{4FA4E3E9-C5E7-4E14-B150-98DAF0553346}"/>
+                <a16:creationId xmlns:a16="http://schemas.microsoft.com/office/drawing/2014/main" id="{227A5EBD-4999-4EE7-BCFF-BE83C0EBEDFA}"/>
               </a:ext>
             </a:extLst>
           </p:cNvPr>
@@ -7029,7 +7029,7 @@
           <p:cNvPr id="85" name="">
             <a:extLst xmlns:a="http://schemas.openxmlformats.org/drawingml/2006/main">
               <a:ext uri="{FF2B5EF4-FFF2-40B4-BE49-F238E27FC236}">
-                <a16:creationId xmlns:a16="http://schemas.microsoft.com/office/drawing/2014/main" id="{1D1A6CD9-7F6A-4934-865A-B061B992574C}"/>
+                <a16:creationId xmlns:a16="http://schemas.microsoft.com/office/drawing/2014/main" id="{B77D30F4-61FE-4302-8ED6-3DE1F37CE348}"/>
               </a:ext>
             </a:extLst>
           </p:cNvPr>
@@ -7081,7 +7081,7 @@
           <p:cNvPr id="86" name="">
             <a:extLst xmlns:a="http://schemas.openxmlformats.org/drawingml/2006/main">
               <a:ext uri="{FF2B5EF4-FFF2-40B4-BE49-F238E27FC236}">
-                <a16:creationId xmlns:a16="http://schemas.microsoft.com/office/drawing/2014/main" id="{F69A76DC-75B1-4496-BE49-F776BA2234D2}"/>
+                <a16:creationId xmlns:a16="http://schemas.microsoft.com/office/drawing/2014/main" id="{1B568FBA-C7D3-436D-82C0-B095BF03AC07}"/>
               </a:ext>
             </a:extLst>
           </p:cNvPr>
@@ -7133,7 +7133,7 @@
           <p:cNvPr id="87" name="">
             <a:extLst xmlns:a="http://schemas.openxmlformats.org/drawingml/2006/main">
               <a:ext uri="{FF2B5EF4-FFF2-40B4-BE49-F238E27FC236}">
-                <a16:creationId xmlns:a16="http://schemas.microsoft.com/office/drawing/2014/main" id="{C09F13D1-FF9D-464C-9FBF-BA9FE47EF9F8}"/>
+                <a16:creationId xmlns:a16="http://schemas.microsoft.com/office/drawing/2014/main" id="{5E357A19-D156-4DF4-BBC4-8BF70E0BE612}"/>
               </a:ext>
             </a:extLst>
           </p:cNvPr>
@@ -7185,7 +7185,7 @@
           <p:cNvPr id="88" name="">
             <a:extLst xmlns:a="http://schemas.openxmlformats.org/drawingml/2006/main">
               <a:ext uri="{FF2B5EF4-FFF2-40B4-BE49-F238E27FC236}">
-                <a16:creationId xmlns:a16="http://schemas.microsoft.com/office/drawing/2014/main" id="{00F4BBF8-AB24-44BD-B40B-A4851056F70A}"/>
+                <a16:creationId xmlns:a16="http://schemas.microsoft.com/office/drawing/2014/main" id="{1973C208-2F5A-446E-8FFF-D8D4C623802D}"/>
               </a:ext>
             </a:extLst>
           </p:cNvPr>
@@ -7237,7 +7237,7 @@
           <p:cNvPr id="89" name="">
             <a:extLst xmlns:a="http://schemas.openxmlformats.org/drawingml/2006/main">
               <a:ext uri="{FF2B5EF4-FFF2-40B4-BE49-F238E27FC236}">
-                <a16:creationId xmlns:a16="http://schemas.microsoft.com/office/drawing/2014/main" id="{FC99CA89-3A5B-4896-8878-3778623FD22E}"/>
+                <a16:creationId xmlns:a16="http://schemas.microsoft.com/office/drawing/2014/main" id="{2BD86354-6DA2-462B-AB82-71433305F897}"/>
               </a:ext>
             </a:extLst>
           </p:cNvPr>
@@ -7289,7 +7289,7 @@
           <p:cNvPr id="90" name="">
             <a:extLst xmlns:a="http://schemas.openxmlformats.org/drawingml/2006/main">
               <a:ext uri="{FF2B5EF4-FFF2-40B4-BE49-F238E27FC236}">
-                <a16:creationId xmlns:a16="http://schemas.microsoft.com/office/drawing/2014/main" id="{37F73690-10FF-4E75-AEDD-0D3576A9A83A}"/>
+                <a16:creationId xmlns:a16="http://schemas.microsoft.com/office/drawing/2014/main" id="{FB895515-F261-4FEF-9088-15D32326B60C}"/>
               </a:ext>
             </a:extLst>
           </p:cNvPr>
@@ -7320,7 +7320,7 @@
           <p:cNvPr id="91" name="">
             <a:extLst xmlns:a="http://schemas.openxmlformats.org/drawingml/2006/main">
               <a:ext uri="{FF2B5EF4-FFF2-40B4-BE49-F238E27FC236}">
-                <a16:creationId xmlns:a16="http://schemas.microsoft.com/office/drawing/2014/main" id="{5A579D4C-7CB0-4726-883F-3293199E6480}"/>
+                <a16:creationId xmlns:a16="http://schemas.microsoft.com/office/drawing/2014/main" id="{30259833-2DF3-4165-8FEF-DDD7044B40A0}"/>
               </a:ext>
             </a:extLst>
           </p:cNvPr>
@@ -7372,7 +7372,7 @@
           <p:cNvPr id="92" name="">
             <a:extLst xmlns:a="http://schemas.openxmlformats.org/drawingml/2006/main">
               <a:ext uri="{FF2B5EF4-FFF2-40B4-BE49-F238E27FC236}">
-                <a16:creationId xmlns:a16="http://schemas.microsoft.com/office/drawing/2014/main" id="{CA061B7F-2D3C-46D0-88FB-3955442D68B5}"/>
+                <a16:creationId xmlns:a16="http://schemas.microsoft.com/office/drawing/2014/main" id="{15868875-9535-4BFA-8914-094ACF86C253}"/>
               </a:ext>
             </a:extLst>
           </p:cNvPr>
@@ -7424,7 +7424,7 @@
           <p:cNvPr id="93" name="">
             <a:extLst xmlns:a="http://schemas.openxmlformats.org/drawingml/2006/main">
               <a:ext uri="{FF2B5EF4-FFF2-40B4-BE49-F238E27FC236}">
-                <a16:creationId xmlns:a16="http://schemas.microsoft.com/office/drawing/2014/main" id="{3CCFD035-AF06-4E33-A6ED-3CDB1BE5CAF8}"/>
+                <a16:creationId xmlns:a16="http://schemas.microsoft.com/office/drawing/2014/main" id="{EE33C217-26A5-4424-8030-A0BBDED3DBA0}"/>
               </a:ext>
             </a:extLst>
           </p:cNvPr>
@@ -7476,7 +7476,7 @@
           <p:cNvPr id="94" name="">
             <a:extLst xmlns:a="http://schemas.openxmlformats.org/drawingml/2006/main">
               <a:ext uri="{FF2B5EF4-FFF2-40B4-BE49-F238E27FC236}">
-                <a16:creationId xmlns:a16="http://schemas.microsoft.com/office/drawing/2014/main" id="{BB21096F-E9B4-436D-AEDD-3174C934C5B6}"/>
+                <a16:creationId xmlns:a16="http://schemas.microsoft.com/office/drawing/2014/main" id="{74A74A30-C5D7-41A5-B267-6FA87AE5665E}"/>
               </a:ext>
             </a:extLst>
           </p:cNvPr>
@@ -7528,7 +7528,7 @@
           <p:cNvPr id="95" name="">
             <a:extLst xmlns:a="http://schemas.openxmlformats.org/drawingml/2006/main">
               <a:ext uri="{FF2B5EF4-FFF2-40B4-BE49-F238E27FC236}">
-                <a16:creationId xmlns:a16="http://schemas.microsoft.com/office/drawing/2014/main" id="{407DA07D-5B7D-4269-9525-B1C15B8E5C0A}"/>
+                <a16:creationId xmlns:a16="http://schemas.microsoft.com/office/drawing/2014/main" id="{23FB47C5-A7CB-423D-8D9F-A53AB5496E8A}"/>
               </a:ext>
             </a:extLst>
           </p:cNvPr>
@@ -7580,7 +7580,7 @@
           <p:cNvPr id="96" name="">
             <a:extLst xmlns:a="http://schemas.openxmlformats.org/drawingml/2006/main">
               <a:ext uri="{FF2B5EF4-FFF2-40B4-BE49-F238E27FC236}">
-                <a16:creationId xmlns:a16="http://schemas.microsoft.com/office/drawing/2014/main" id="{18497556-1DA6-4FC8-837E-11CF024C5BD9}"/>
+                <a16:creationId xmlns:a16="http://schemas.microsoft.com/office/drawing/2014/main" id="{ED99944F-260C-41AE-8B20-1D66EE36146D}"/>
               </a:ext>
             </a:extLst>
           </p:cNvPr>
@@ -7611,7 +7611,7 @@
           <p:cNvPr id="97" name="">
             <a:extLst xmlns:a="http://schemas.openxmlformats.org/drawingml/2006/main">
               <a:ext uri="{FF2B5EF4-FFF2-40B4-BE49-F238E27FC236}">
-                <a16:creationId xmlns:a16="http://schemas.microsoft.com/office/drawing/2014/main" id="{B9ED7E74-9C9F-4469-97EA-C9B3541B5ADE}"/>
+                <a16:creationId xmlns:a16="http://schemas.microsoft.com/office/drawing/2014/main" id="{4DDD9D3B-B5CF-4CFC-8732-6ABF2C64BD65}"/>
               </a:ext>
             </a:extLst>
           </p:cNvPr>
@@ -7642,7 +7642,7 @@
           <p:cNvPr id="98" name="">
             <a:extLst xmlns:a="http://schemas.openxmlformats.org/drawingml/2006/main">
               <a:ext uri="{FF2B5EF4-FFF2-40B4-BE49-F238E27FC236}">
-                <a16:creationId xmlns:a16="http://schemas.microsoft.com/office/drawing/2014/main" id="{DFBE0E7C-14CC-4BFB-A813-C2AE85880664}"/>
+                <a16:creationId xmlns:a16="http://schemas.microsoft.com/office/drawing/2014/main" id="{1D0E0AE3-1119-4DB2-9EDA-38CF548CBC6D}"/>
               </a:ext>
             </a:extLst>
           </p:cNvPr>
@@ -7694,7 +7694,7 @@
           <p:cNvPr id="99" name="">
             <a:extLst xmlns:a="http://schemas.openxmlformats.org/drawingml/2006/main">
               <a:ext uri="{FF2B5EF4-FFF2-40B4-BE49-F238E27FC236}">
-                <a16:creationId xmlns:a16="http://schemas.microsoft.com/office/drawing/2014/main" id="{1190345F-CD3C-49DE-8630-DFB261770710}"/>
+                <a16:creationId xmlns:a16="http://schemas.microsoft.com/office/drawing/2014/main" id="{0B811E8E-6115-4DD3-91B1-8B21AB4453B3}"/>
               </a:ext>
             </a:extLst>
           </p:cNvPr>
@@ -7746,7 +7746,7 @@
           <p:cNvPr id="100" name="">
             <a:extLst xmlns:a="http://schemas.openxmlformats.org/drawingml/2006/main">
               <a:ext uri="{FF2B5EF4-FFF2-40B4-BE49-F238E27FC236}">
-                <a16:creationId xmlns:a16="http://schemas.microsoft.com/office/drawing/2014/main" id="{54359B5E-9ED4-42A7-A7E3-417C29989320}"/>
+                <a16:creationId xmlns:a16="http://schemas.microsoft.com/office/drawing/2014/main" id="{6AEDEBDD-15E1-4DB2-9521-167D52DDCC81}"/>
               </a:ext>
             </a:extLst>
           </p:cNvPr>
@@ -7798,7 +7798,7 @@
           <p:cNvPr id="101" name="">
             <a:extLst xmlns:a="http://schemas.openxmlformats.org/drawingml/2006/main">
               <a:ext uri="{FF2B5EF4-FFF2-40B4-BE49-F238E27FC236}">
-                <a16:creationId xmlns:a16="http://schemas.microsoft.com/office/drawing/2014/main" id="{047A6322-812E-4DA6-A522-902627B81622}"/>
+                <a16:creationId xmlns:a16="http://schemas.microsoft.com/office/drawing/2014/main" id="{1D3E2A1C-D4BD-4F3B-AA7E-20F9A52DB04D}"/>
               </a:ext>
             </a:extLst>
           </p:cNvPr>
@@ -7850,7 +7850,7 @@
           <p:cNvPr id="102" name="">
             <a:extLst xmlns:a="http://schemas.openxmlformats.org/drawingml/2006/main">
               <a:ext uri="{FF2B5EF4-FFF2-40B4-BE49-F238E27FC236}">
-                <a16:creationId xmlns:a16="http://schemas.microsoft.com/office/drawing/2014/main" id="{6EEF55CF-BA7C-4236-B805-85E4716E76AC}"/>
+                <a16:creationId xmlns:a16="http://schemas.microsoft.com/office/drawing/2014/main" id="{8A94C0B7-BB14-4D4E-A4C3-5D253D00BA48}"/>
               </a:ext>
             </a:extLst>
           </p:cNvPr>
@@ -7900,7 +7900,7 @@
     </p:spTree>
     <p:extLst>
       <p:ext uri="{BB962C8B-B14F-4D97-AF65-F5344CB8AC3E}">
-        <p14:creationId xmlns:p14="http://schemas.microsoft.com/office/powerpoint/2010/main" val="1749969448"/>
+        <p14:creationId xmlns:p14="http://schemas.microsoft.com/office/powerpoint/2010/main" val="647622317"/>
       </p:ext>
     </p:extLst>
   </p:cSld>
@@ -7931,7 +7931,7 @@
           <p:cNvPr id="98" name="">
             <a:extLst xmlns:a="http://schemas.openxmlformats.org/drawingml/2006/main">
               <a:ext uri="{FF2B5EF4-FFF2-40B4-BE49-F238E27FC236}">
-                <a16:creationId xmlns:a16="http://schemas.microsoft.com/office/drawing/2014/main" id="{66E3493B-031D-48EF-9656-29D7D6DCCD8E}"/>
+                <a16:creationId xmlns:a16="http://schemas.microsoft.com/office/drawing/2014/main" id="{5355BB50-3579-4172-81E0-FEAA1E7086A0}"/>
               </a:ext>
             </a:extLst>
           </p:cNvPr>
@@ -7964,7 +7964,7 @@
           <p:cNvPr id="2" name="">
             <a:extLst xmlns:a="http://schemas.openxmlformats.org/drawingml/2006/main">
               <a:ext uri="{FF2B5EF4-FFF2-40B4-BE49-F238E27FC236}">
-                <a16:creationId xmlns:a16="http://schemas.microsoft.com/office/drawing/2014/main" id="{F8C0F611-D631-45B4-93A9-5C6A5816986E}"/>
+                <a16:creationId xmlns:a16="http://schemas.microsoft.com/office/drawing/2014/main" id="{F88F28E3-D232-45A5-9E18-154C32E36129}"/>
               </a:ext>
             </a:extLst>
           </p:cNvPr>
@@ -7995,7 +7995,7 @@
           <p:cNvPr id="3" name="">
             <a:extLst xmlns:a="http://schemas.openxmlformats.org/drawingml/2006/main">
               <a:ext uri="{FF2B5EF4-FFF2-40B4-BE49-F238E27FC236}">
-                <a16:creationId xmlns:a16="http://schemas.microsoft.com/office/drawing/2014/main" id="{7AF13312-B3C9-4D25-A08C-E19240D1BF1D}"/>
+                <a16:creationId xmlns:a16="http://schemas.microsoft.com/office/drawing/2014/main" id="{FA15F7DB-990A-43AD-9DC3-30EC26570FE4}"/>
               </a:ext>
             </a:extLst>
           </p:cNvPr>
@@ -8047,7 +8047,7 @@
           <p:cNvPr id="4" name="">
             <a:extLst xmlns:a="http://schemas.openxmlformats.org/drawingml/2006/main">
               <a:ext uri="{FF2B5EF4-FFF2-40B4-BE49-F238E27FC236}">
-                <a16:creationId xmlns:a16="http://schemas.microsoft.com/office/drawing/2014/main" id="{770E7DB2-D168-4A2F-8551-19D4C8CEF4D2}"/>
+                <a16:creationId xmlns:a16="http://schemas.microsoft.com/office/drawing/2014/main" id="{9BF6C2CF-1F61-443A-ADC0-FF00B9088C32}"/>
               </a:ext>
             </a:extLst>
           </p:cNvPr>
@@ -8099,7 +8099,7 @@
           <p:cNvPr id="5" name="">
             <a:extLst xmlns:a="http://schemas.openxmlformats.org/drawingml/2006/main">
               <a:ext uri="{FF2B5EF4-FFF2-40B4-BE49-F238E27FC236}">
-                <a16:creationId xmlns:a16="http://schemas.microsoft.com/office/drawing/2014/main" id="{C997038F-0304-4E5A-9DAE-4D5046B2CC34}"/>
+                <a16:creationId xmlns:a16="http://schemas.microsoft.com/office/drawing/2014/main" id="{BA18DEA9-953A-41B5-980B-E05B53E05089}"/>
               </a:ext>
             </a:extLst>
           </p:cNvPr>
@@ -8134,7 +8134,7 @@
           <p:nvPr/>
         </p:nvPicPr>
         <p:blipFill>
-          <a:blip xmlns:r="http://schemas.openxmlformats.org/officeDocument/2006/relationships" xmlns:a="http://schemas.openxmlformats.org/drawingml/2006/main" r:embed="Rf7e25614e467455b"/>
+          <a:blip xmlns:r="http://schemas.openxmlformats.org/officeDocument/2006/relationships" xmlns:a="http://schemas.openxmlformats.org/drawingml/2006/main" r:embed="R6ec6119c3c4c4231"/>
           <a:stretch xmlns:a="http://schemas.openxmlformats.org/drawingml/2006/main"/>
         </p:blipFill>
         <p:spPr>
@@ -8152,7 +8152,7 @@
           <p:cNvPr id="7" name="">
             <a:extLst xmlns:a="http://schemas.openxmlformats.org/drawingml/2006/main">
               <a:ext uri="{FF2B5EF4-FFF2-40B4-BE49-F238E27FC236}">
-                <a16:creationId xmlns:a16="http://schemas.microsoft.com/office/drawing/2014/main" id="{EA64A6E7-9BF6-498E-818B-4BBD369A2049}"/>
+                <a16:creationId xmlns:a16="http://schemas.microsoft.com/office/drawing/2014/main" id="{01DB82AC-24E8-476B-813F-59D1E5CB47A3}"/>
               </a:ext>
             </a:extLst>
           </p:cNvPr>
@@ -8204,7 +8204,7 @@
           <p:cNvPr id="8" name="">
             <a:extLst xmlns:a="http://schemas.openxmlformats.org/drawingml/2006/main">
               <a:ext uri="{FF2B5EF4-FFF2-40B4-BE49-F238E27FC236}">
-                <a16:creationId xmlns:a16="http://schemas.microsoft.com/office/drawing/2014/main" id="{6E01867C-36AD-4958-BCB7-DA35501A0BA6}"/>
+                <a16:creationId xmlns:a16="http://schemas.microsoft.com/office/drawing/2014/main" id="{4767D66A-6153-4715-B947-15A8CAF4FFE6}"/>
               </a:ext>
             </a:extLst>
           </p:cNvPr>
@@ -8256,7 +8256,7 @@
           <p:cNvPr id="9" name="">
             <a:extLst xmlns:a="http://schemas.openxmlformats.org/drawingml/2006/main">
               <a:ext uri="{FF2B5EF4-FFF2-40B4-BE49-F238E27FC236}">
-                <a16:creationId xmlns:a16="http://schemas.microsoft.com/office/drawing/2014/main" id="{EA3804B4-A763-4FA8-9222-E3D884C3DA50}"/>
+                <a16:creationId xmlns:a16="http://schemas.microsoft.com/office/drawing/2014/main" id="{580A7213-2C7F-4F74-AAF4-B721D64D6D8F}"/>
               </a:ext>
             </a:extLst>
           </p:cNvPr>
@@ -8308,7 +8308,7 @@
           <p:cNvPr id="10" name="">
             <a:extLst xmlns:a="http://schemas.openxmlformats.org/drawingml/2006/main">
               <a:ext uri="{FF2B5EF4-FFF2-40B4-BE49-F238E27FC236}">
-                <a16:creationId xmlns:a16="http://schemas.microsoft.com/office/drawing/2014/main" id="{145304B8-2039-4B74-90CF-59ED0EDA6010}"/>
+                <a16:creationId xmlns:a16="http://schemas.microsoft.com/office/drawing/2014/main" id="{15581D01-797E-49C7-A102-03CCB6573471}"/>
               </a:ext>
             </a:extLst>
           </p:cNvPr>
@@ -8360,7 +8360,7 @@
           <p:cNvPr id="11" name="">
             <a:extLst xmlns:a="http://schemas.openxmlformats.org/drawingml/2006/main">
               <a:ext uri="{FF2B5EF4-FFF2-40B4-BE49-F238E27FC236}">
-                <a16:creationId xmlns:a16="http://schemas.microsoft.com/office/drawing/2014/main" id="{A94D144F-8D22-489B-BE9B-7DB1B8EC0CB2}"/>
+                <a16:creationId xmlns:a16="http://schemas.microsoft.com/office/drawing/2014/main" id="{12DDA1CE-1959-4AB7-9284-85B22CE50095}"/>
               </a:ext>
             </a:extLst>
           </p:cNvPr>
@@ -8391,7 +8391,7 @@
           <p:cNvPr id="12" name="">
             <a:extLst xmlns:a="http://schemas.openxmlformats.org/drawingml/2006/main">
               <a:ext uri="{FF2B5EF4-FFF2-40B4-BE49-F238E27FC236}">
-                <a16:creationId xmlns:a16="http://schemas.microsoft.com/office/drawing/2014/main" id="{C4169215-9EFE-440A-84A3-492255D9A891}"/>
+                <a16:creationId xmlns:a16="http://schemas.microsoft.com/office/drawing/2014/main" id="{09C3C2A4-D71A-4258-AEA9-312617775D16}"/>
               </a:ext>
             </a:extLst>
           </p:cNvPr>
@@ -8422,7 +8422,7 @@
           <p:cNvPr id="13" name="">
             <a:extLst xmlns:a="http://schemas.openxmlformats.org/drawingml/2006/main">
               <a:ext uri="{FF2B5EF4-FFF2-40B4-BE49-F238E27FC236}">
-                <a16:creationId xmlns:a16="http://schemas.microsoft.com/office/drawing/2014/main" id="{C3A3E083-76CC-4F1D-A6CB-4D8CDB79526A}"/>
+                <a16:creationId xmlns:a16="http://schemas.microsoft.com/office/drawing/2014/main" id="{E35460C3-8724-4541-90C2-EF3E069AC5A4}"/>
               </a:ext>
             </a:extLst>
           </p:cNvPr>
@@ -8474,7 +8474,7 @@
           <p:cNvPr id="14" name="">
             <a:extLst xmlns:a="http://schemas.openxmlformats.org/drawingml/2006/main">
               <a:ext uri="{FF2B5EF4-FFF2-40B4-BE49-F238E27FC236}">
-                <a16:creationId xmlns:a16="http://schemas.microsoft.com/office/drawing/2014/main" id="{EC11D246-9D1A-416F-817C-0DFB904B0A52}"/>
+                <a16:creationId xmlns:a16="http://schemas.microsoft.com/office/drawing/2014/main" id="{F8ED2597-DE87-44EE-BA81-858F77ECD32B}"/>
               </a:ext>
             </a:extLst>
           </p:cNvPr>
@@ -8526,7 +8526,7 @@
           <p:cNvPr id="15" name="">
             <a:extLst xmlns:a="http://schemas.openxmlformats.org/drawingml/2006/main">
               <a:ext uri="{FF2B5EF4-FFF2-40B4-BE49-F238E27FC236}">
-                <a16:creationId xmlns:a16="http://schemas.microsoft.com/office/drawing/2014/main" id="{F048EB0B-5B37-4D18-BD74-5902A9B0AA87}"/>
+                <a16:creationId xmlns:a16="http://schemas.microsoft.com/office/drawing/2014/main" id="{EC80D609-CF0D-42BA-8534-8671C10298E8}"/>
               </a:ext>
             </a:extLst>
           </p:cNvPr>
@@ -8578,7 +8578,7 @@
           <p:cNvPr id="16" name="">
             <a:extLst xmlns:a="http://schemas.openxmlformats.org/drawingml/2006/main">
               <a:ext uri="{FF2B5EF4-FFF2-40B4-BE49-F238E27FC236}">
-                <a16:creationId xmlns:a16="http://schemas.microsoft.com/office/drawing/2014/main" id="{CF4A0817-82CD-4862-893E-DEE68298159D}"/>
+                <a16:creationId xmlns:a16="http://schemas.microsoft.com/office/drawing/2014/main" id="{66FF82C0-1056-401A-8106-300C5E9B63B0}"/>
               </a:ext>
             </a:extLst>
           </p:cNvPr>
@@ -8630,7 +8630,7 @@
           <p:cNvPr id="17" name="">
             <a:extLst xmlns:a="http://schemas.openxmlformats.org/drawingml/2006/main">
               <a:ext uri="{FF2B5EF4-FFF2-40B4-BE49-F238E27FC236}">
-                <a16:creationId xmlns:a16="http://schemas.microsoft.com/office/drawing/2014/main" id="{C88BADDD-8BF7-44C8-9000-3C7172053E06}"/>
+                <a16:creationId xmlns:a16="http://schemas.microsoft.com/office/drawing/2014/main" id="{A49E62D2-E459-440C-9910-539101E37E13}"/>
               </a:ext>
             </a:extLst>
           </p:cNvPr>
@@ -8682,7 +8682,7 @@
           <p:cNvPr id="18" name="">
             <a:extLst xmlns:a="http://schemas.openxmlformats.org/drawingml/2006/main">
               <a:ext uri="{FF2B5EF4-FFF2-40B4-BE49-F238E27FC236}">
-                <a16:creationId xmlns:a16="http://schemas.microsoft.com/office/drawing/2014/main" id="{AF085430-C85C-41FD-9A82-7409B8409BE2}"/>
+                <a16:creationId xmlns:a16="http://schemas.microsoft.com/office/drawing/2014/main" id="{AC3F36FE-690B-46A4-B941-8B39204144AB}"/>
               </a:ext>
             </a:extLst>
           </p:cNvPr>
@@ -8713,7 +8713,7 @@
           <p:cNvPr id="19" name="">
             <a:extLst xmlns:a="http://schemas.openxmlformats.org/drawingml/2006/main">
               <a:ext uri="{FF2B5EF4-FFF2-40B4-BE49-F238E27FC236}">
-                <a16:creationId xmlns:a16="http://schemas.microsoft.com/office/drawing/2014/main" id="{56CC8060-AB19-4210-B236-8639987B043C}"/>
+                <a16:creationId xmlns:a16="http://schemas.microsoft.com/office/drawing/2014/main" id="{21FE3F51-AEBA-4B74-BFCA-CDE050EB1A13}"/>
               </a:ext>
             </a:extLst>
           </p:cNvPr>
@@ -8765,7 +8765,7 @@
           <p:cNvPr id="20" name="">
             <a:extLst xmlns:a="http://schemas.openxmlformats.org/drawingml/2006/main">
               <a:ext uri="{FF2B5EF4-FFF2-40B4-BE49-F238E27FC236}">
-                <a16:creationId xmlns:a16="http://schemas.microsoft.com/office/drawing/2014/main" id="{8FFEF668-A851-4620-BCDF-2A9B9D955D3B}"/>
+                <a16:creationId xmlns:a16="http://schemas.microsoft.com/office/drawing/2014/main" id="{7265F0C7-E325-425D-8C10-4BFEC5856883}"/>
               </a:ext>
             </a:extLst>
           </p:cNvPr>
@@ -8817,7 +8817,7 @@
           <p:cNvPr id="21" name="">
             <a:extLst xmlns:a="http://schemas.openxmlformats.org/drawingml/2006/main">
               <a:ext uri="{FF2B5EF4-FFF2-40B4-BE49-F238E27FC236}">
-                <a16:creationId xmlns:a16="http://schemas.microsoft.com/office/drawing/2014/main" id="{C2EEF746-6CA9-476C-A33B-A1A8410DAE55}"/>
+                <a16:creationId xmlns:a16="http://schemas.microsoft.com/office/drawing/2014/main" id="{4D1FE55D-E2A2-46B9-88FF-CC081B48BA79}"/>
               </a:ext>
             </a:extLst>
           </p:cNvPr>
@@ -8869,7 +8869,7 @@
           <p:cNvPr id="22" name="">
             <a:extLst xmlns:a="http://schemas.openxmlformats.org/drawingml/2006/main">
               <a:ext uri="{FF2B5EF4-FFF2-40B4-BE49-F238E27FC236}">
-                <a16:creationId xmlns:a16="http://schemas.microsoft.com/office/drawing/2014/main" id="{8F12569E-3A34-466A-8213-6156DD573FD7}"/>
+                <a16:creationId xmlns:a16="http://schemas.microsoft.com/office/drawing/2014/main" id="{C31527F6-0885-4F7E-A216-5D83558BDA82}"/>
               </a:ext>
             </a:extLst>
           </p:cNvPr>
@@ -8921,7 +8921,7 @@
           <p:cNvPr id="23" name="">
             <a:extLst xmlns:a="http://schemas.openxmlformats.org/drawingml/2006/main">
               <a:ext uri="{FF2B5EF4-FFF2-40B4-BE49-F238E27FC236}">
-                <a16:creationId xmlns:a16="http://schemas.microsoft.com/office/drawing/2014/main" id="{BDF7650C-B681-4063-A804-58BC7F429A5D}"/>
+                <a16:creationId xmlns:a16="http://schemas.microsoft.com/office/drawing/2014/main" id="{DDA3E536-E57F-4C64-9A8E-D79A940021C5}"/>
               </a:ext>
             </a:extLst>
           </p:cNvPr>
@@ -8973,7 +8973,7 @@
           <p:cNvPr id="24" name="">
             <a:extLst xmlns:a="http://schemas.openxmlformats.org/drawingml/2006/main">
               <a:ext uri="{FF2B5EF4-FFF2-40B4-BE49-F238E27FC236}">
-                <a16:creationId xmlns:a16="http://schemas.microsoft.com/office/drawing/2014/main" id="{A5561375-DCF7-437D-BF94-D13D43BA5CF0}"/>
+                <a16:creationId xmlns:a16="http://schemas.microsoft.com/office/drawing/2014/main" id="{70B20D6B-E133-4934-876A-9A0062A4BFE9}"/>
               </a:ext>
             </a:extLst>
           </p:cNvPr>
@@ -9004,7 +9004,7 @@
           <p:cNvPr id="25" name="">
             <a:extLst xmlns:a="http://schemas.openxmlformats.org/drawingml/2006/main">
               <a:ext uri="{FF2B5EF4-FFF2-40B4-BE49-F238E27FC236}">
-                <a16:creationId xmlns:a16="http://schemas.microsoft.com/office/drawing/2014/main" id="{51FE418D-677F-48F2-99D4-083FFEED950B}"/>
+                <a16:creationId xmlns:a16="http://schemas.microsoft.com/office/drawing/2014/main" id="{75D67870-3B0C-4D5E-94F3-EC0E5A3BE925}"/>
               </a:ext>
             </a:extLst>
           </p:cNvPr>
@@ -9035,7 +9035,7 @@
           <p:cNvPr id="26" name="">
             <a:extLst xmlns:a="http://schemas.openxmlformats.org/drawingml/2006/main">
               <a:ext uri="{FF2B5EF4-FFF2-40B4-BE49-F238E27FC236}">
-                <a16:creationId xmlns:a16="http://schemas.microsoft.com/office/drawing/2014/main" id="{FAFD1EF0-1552-4B4F-9581-C0B46C6038E0}"/>
+                <a16:creationId xmlns:a16="http://schemas.microsoft.com/office/drawing/2014/main" id="{DE35BFB1-E383-4397-B4DB-042C3A743B6F}"/>
               </a:ext>
             </a:extLst>
           </p:cNvPr>
@@ -9087,7 +9087,7 @@
           <p:cNvPr id="27" name="">
             <a:extLst xmlns:a="http://schemas.openxmlformats.org/drawingml/2006/main">
               <a:ext uri="{FF2B5EF4-FFF2-40B4-BE49-F238E27FC236}">
-                <a16:creationId xmlns:a16="http://schemas.microsoft.com/office/drawing/2014/main" id="{D1900733-38DC-4ACC-8AFC-96A52D1A2ADE}"/>
+                <a16:creationId xmlns:a16="http://schemas.microsoft.com/office/drawing/2014/main" id="{10E06FCF-5DFD-4108-877D-BA21BE28D8DB}"/>
               </a:ext>
             </a:extLst>
           </p:cNvPr>
@@ -9139,7 +9139,7 @@
           <p:cNvPr id="28" name="">
             <a:extLst xmlns:a="http://schemas.openxmlformats.org/drawingml/2006/main">
               <a:ext uri="{FF2B5EF4-FFF2-40B4-BE49-F238E27FC236}">
-                <a16:creationId xmlns:a16="http://schemas.microsoft.com/office/drawing/2014/main" id="{5B2683C9-F299-42E7-B554-07EC6E40835A}"/>
+                <a16:creationId xmlns:a16="http://schemas.microsoft.com/office/drawing/2014/main" id="{29F44240-2F7A-4FB8-B5BB-F4F74EAFE33C}"/>
               </a:ext>
             </a:extLst>
           </p:cNvPr>
@@ -9191,7 +9191,7 @@
           <p:cNvPr id="29" name="">
             <a:extLst xmlns:a="http://schemas.openxmlformats.org/drawingml/2006/main">
               <a:ext uri="{FF2B5EF4-FFF2-40B4-BE49-F238E27FC236}">
-                <a16:creationId xmlns:a16="http://schemas.microsoft.com/office/drawing/2014/main" id="{9F32AD3A-B66F-4E46-BF2A-70E6AB6F6E6F}"/>
+                <a16:creationId xmlns:a16="http://schemas.microsoft.com/office/drawing/2014/main" id="{D803B5AC-D9BC-43B0-9C0D-BFCF6C86B3DA}"/>
               </a:ext>
             </a:extLst>
           </p:cNvPr>
@@ -9243,7 +9243,7 @@
           <p:cNvPr id="30" name="">
             <a:extLst xmlns:a="http://schemas.openxmlformats.org/drawingml/2006/main">
               <a:ext uri="{FF2B5EF4-FFF2-40B4-BE49-F238E27FC236}">
-                <a16:creationId xmlns:a16="http://schemas.microsoft.com/office/drawing/2014/main" id="{FC68CA95-F381-4F69-83AC-B716DF064F39}"/>
+                <a16:creationId xmlns:a16="http://schemas.microsoft.com/office/drawing/2014/main" id="{09ABB3DD-E4E9-42A2-BAFA-F22954A56ECB}"/>
               </a:ext>
             </a:extLst>
           </p:cNvPr>
@@ -9295,7 +9295,7 @@
           <p:cNvPr id="31" name="">
             <a:extLst xmlns:a="http://schemas.openxmlformats.org/drawingml/2006/main">
               <a:ext uri="{FF2B5EF4-FFF2-40B4-BE49-F238E27FC236}">
-                <a16:creationId xmlns:a16="http://schemas.microsoft.com/office/drawing/2014/main" id="{1A17F245-E6FA-426F-807E-C214DA335E73}"/>
+                <a16:creationId xmlns:a16="http://schemas.microsoft.com/office/drawing/2014/main" id="{EEC4C76C-6819-4292-B21C-1C6722F522F2}"/>
               </a:ext>
             </a:extLst>
           </p:cNvPr>
@@ -9326,7 +9326,7 @@
           <p:cNvPr id="32" name="">
             <a:extLst xmlns:a="http://schemas.openxmlformats.org/drawingml/2006/main">
               <a:ext uri="{FF2B5EF4-FFF2-40B4-BE49-F238E27FC236}">
-                <a16:creationId xmlns:a16="http://schemas.microsoft.com/office/drawing/2014/main" id="{8FB7C4A0-B039-4090-8B67-4AAA222987C0}"/>
+                <a16:creationId xmlns:a16="http://schemas.microsoft.com/office/drawing/2014/main" id="{66D830DB-DE53-45EB-B431-35C7C7467822}"/>
               </a:ext>
             </a:extLst>
           </p:cNvPr>
@@ -9378,7 +9378,7 @@
           <p:cNvPr id="33" name="">
             <a:extLst xmlns:a="http://schemas.openxmlformats.org/drawingml/2006/main">
               <a:ext uri="{FF2B5EF4-FFF2-40B4-BE49-F238E27FC236}">
-                <a16:creationId xmlns:a16="http://schemas.microsoft.com/office/drawing/2014/main" id="{3FBBF4DF-7D16-4E1D-B6F9-F67EE5874C18}"/>
+                <a16:creationId xmlns:a16="http://schemas.microsoft.com/office/drawing/2014/main" id="{37B04D3D-8DEB-4038-91D2-D1663E1865ED}"/>
               </a:ext>
             </a:extLst>
           </p:cNvPr>
@@ -9430,7 +9430,7 @@
           <p:cNvPr id="34" name="">
             <a:extLst xmlns:a="http://schemas.openxmlformats.org/drawingml/2006/main">
               <a:ext uri="{FF2B5EF4-FFF2-40B4-BE49-F238E27FC236}">
-                <a16:creationId xmlns:a16="http://schemas.microsoft.com/office/drawing/2014/main" id="{D2AE1A02-AFB8-4132-88CB-84FC9F9F048F}"/>
+                <a16:creationId xmlns:a16="http://schemas.microsoft.com/office/drawing/2014/main" id="{420762F4-8F52-4745-9C51-1964DC8386AA}"/>
               </a:ext>
             </a:extLst>
           </p:cNvPr>
@@ -9482,7 +9482,7 @@
           <p:cNvPr id="35" name="">
             <a:extLst xmlns:a="http://schemas.openxmlformats.org/drawingml/2006/main">
               <a:ext uri="{FF2B5EF4-FFF2-40B4-BE49-F238E27FC236}">
-                <a16:creationId xmlns:a16="http://schemas.microsoft.com/office/drawing/2014/main" id="{204572CC-898E-4D38-A130-56A317816B75}"/>
+                <a16:creationId xmlns:a16="http://schemas.microsoft.com/office/drawing/2014/main" id="{75F73CE1-1152-41D6-A8A7-7B7DA3E0C169}"/>
               </a:ext>
             </a:extLst>
           </p:cNvPr>
@@ -9534,7 +9534,7 @@
           <p:cNvPr id="36" name="">
             <a:extLst xmlns:a="http://schemas.openxmlformats.org/drawingml/2006/main">
               <a:ext uri="{FF2B5EF4-FFF2-40B4-BE49-F238E27FC236}">
-                <a16:creationId xmlns:a16="http://schemas.microsoft.com/office/drawing/2014/main" id="{0421D59A-4BE5-43C5-9F8E-AAF73E17E66A}"/>
+                <a16:creationId xmlns:a16="http://schemas.microsoft.com/office/drawing/2014/main" id="{57D17B8F-6F03-47B5-8A44-9F95696372C6}"/>
               </a:ext>
             </a:extLst>
           </p:cNvPr>
@@ -9586,7 +9586,7 @@
           <p:cNvPr id="37" name="">
             <a:extLst xmlns:a="http://schemas.openxmlformats.org/drawingml/2006/main">
               <a:ext uri="{FF2B5EF4-FFF2-40B4-BE49-F238E27FC236}">
-                <a16:creationId xmlns:a16="http://schemas.microsoft.com/office/drawing/2014/main" id="{BCD2165C-8E64-4055-8260-71CC46AFFCEF}"/>
+                <a16:creationId xmlns:a16="http://schemas.microsoft.com/office/drawing/2014/main" id="{7788D074-DE6F-4B68-9D32-B177BC92DB9A}"/>
               </a:ext>
             </a:extLst>
           </p:cNvPr>
@@ -9617,7 +9617,7 @@
           <p:cNvPr id="38" name="">
             <a:extLst xmlns:a="http://schemas.openxmlformats.org/drawingml/2006/main">
               <a:ext uri="{FF2B5EF4-FFF2-40B4-BE49-F238E27FC236}">
-                <a16:creationId xmlns:a16="http://schemas.microsoft.com/office/drawing/2014/main" id="{2BD6327F-D171-4A73-928D-7243B52BA080}"/>
+                <a16:creationId xmlns:a16="http://schemas.microsoft.com/office/drawing/2014/main" id="{72DC3992-2DF8-409B-B506-C5E029B19E9C}"/>
               </a:ext>
             </a:extLst>
           </p:cNvPr>
@@ -9648,7 +9648,7 @@
           <p:cNvPr id="39" name="">
             <a:extLst xmlns:a="http://schemas.openxmlformats.org/drawingml/2006/main">
               <a:ext uri="{FF2B5EF4-FFF2-40B4-BE49-F238E27FC236}">
-                <a16:creationId xmlns:a16="http://schemas.microsoft.com/office/drawing/2014/main" id="{D890EE4D-728E-4665-ADA9-FFB8E4D41712}"/>
+                <a16:creationId xmlns:a16="http://schemas.microsoft.com/office/drawing/2014/main" id="{36A8E3A5-9822-47F9-BB56-46BB15730CBD}"/>
               </a:ext>
             </a:extLst>
           </p:cNvPr>
@@ -9700,7 +9700,7 @@
           <p:cNvPr id="40" name="">
             <a:extLst xmlns:a="http://schemas.openxmlformats.org/drawingml/2006/main">
               <a:ext uri="{FF2B5EF4-FFF2-40B4-BE49-F238E27FC236}">
-                <a16:creationId xmlns:a16="http://schemas.microsoft.com/office/drawing/2014/main" id="{90AA39C2-8137-4D3C-945B-8A39522BA97D}"/>
+                <a16:creationId xmlns:a16="http://schemas.microsoft.com/office/drawing/2014/main" id="{F87AE46E-31DF-4953-9895-381D8383EB4B}"/>
               </a:ext>
             </a:extLst>
           </p:cNvPr>
@@ -9752,7 +9752,7 @@
           <p:cNvPr id="41" name="">
             <a:extLst xmlns:a="http://schemas.openxmlformats.org/drawingml/2006/main">
               <a:ext uri="{FF2B5EF4-FFF2-40B4-BE49-F238E27FC236}">
-                <a16:creationId xmlns:a16="http://schemas.microsoft.com/office/drawing/2014/main" id="{BAD01121-F37E-4FB2-9102-BEF30D45D23A}"/>
+                <a16:creationId xmlns:a16="http://schemas.microsoft.com/office/drawing/2014/main" id="{C1D32438-AC18-4F53-A17A-B45F1D379A21}"/>
               </a:ext>
             </a:extLst>
           </p:cNvPr>
@@ -9804,7 +9804,7 @@
           <p:cNvPr id="42" name="">
             <a:extLst xmlns:a="http://schemas.openxmlformats.org/drawingml/2006/main">
               <a:ext uri="{FF2B5EF4-FFF2-40B4-BE49-F238E27FC236}">
-                <a16:creationId xmlns:a16="http://schemas.microsoft.com/office/drawing/2014/main" id="{D6885729-0747-405D-B7F5-1014FCD0B0EC}"/>
+                <a16:creationId xmlns:a16="http://schemas.microsoft.com/office/drawing/2014/main" id="{BB9B9C5A-E80A-46BF-88F7-D1D4831746D2}"/>
               </a:ext>
             </a:extLst>
           </p:cNvPr>
@@ -9856,7 +9856,7 @@
           <p:cNvPr id="43" name="">
             <a:extLst xmlns:a="http://schemas.openxmlformats.org/drawingml/2006/main">
               <a:ext uri="{FF2B5EF4-FFF2-40B4-BE49-F238E27FC236}">
-                <a16:creationId xmlns:a16="http://schemas.microsoft.com/office/drawing/2014/main" id="{D0776823-6D4A-4849-ACA7-CCB684BB3A16}"/>
+                <a16:creationId xmlns:a16="http://schemas.microsoft.com/office/drawing/2014/main" id="{4BBD9FE1-B549-4D81-86A5-468B1905BBC6}"/>
               </a:ext>
             </a:extLst>
           </p:cNvPr>
@@ -9908,7 +9908,7 @@
           <p:cNvPr id="44" name="">
             <a:extLst xmlns:a="http://schemas.openxmlformats.org/drawingml/2006/main">
               <a:ext uri="{FF2B5EF4-FFF2-40B4-BE49-F238E27FC236}">
-                <a16:creationId xmlns:a16="http://schemas.microsoft.com/office/drawing/2014/main" id="{584A5660-77A6-486F-AD94-D4AB492C1219}"/>
+                <a16:creationId xmlns:a16="http://schemas.microsoft.com/office/drawing/2014/main" id="{DF2ADAB6-C529-4E2B-B8C6-1C64F3AE9B25}"/>
               </a:ext>
             </a:extLst>
           </p:cNvPr>
@@ -9939,7 +9939,7 @@
           <p:cNvPr id="45" name="">
             <a:extLst xmlns:a="http://schemas.openxmlformats.org/drawingml/2006/main">
               <a:ext uri="{FF2B5EF4-FFF2-40B4-BE49-F238E27FC236}">
-                <a16:creationId xmlns:a16="http://schemas.microsoft.com/office/drawing/2014/main" id="{1B0ECD1E-B5F8-4B9B-81AB-A31EEBF6E65B}"/>
+                <a16:creationId xmlns:a16="http://schemas.microsoft.com/office/drawing/2014/main" id="{BBCFC1CE-CDF9-4D31-B880-EAABC06D7E35}"/>
               </a:ext>
             </a:extLst>
           </p:cNvPr>
@@ -9991,7 +9991,7 @@
           <p:cNvPr id="46" name="">
             <a:extLst xmlns:a="http://schemas.openxmlformats.org/drawingml/2006/main">
               <a:ext uri="{FF2B5EF4-FFF2-40B4-BE49-F238E27FC236}">
-                <a16:creationId xmlns:a16="http://schemas.microsoft.com/office/drawing/2014/main" id="{F174789D-5887-45EA-B1B5-4745B1729B88}"/>
+                <a16:creationId xmlns:a16="http://schemas.microsoft.com/office/drawing/2014/main" id="{74F7ADD3-3A20-4404-9139-2BB02EFCCF2F}"/>
               </a:ext>
             </a:extLst>
           </p:cNvPr>
@@ -10043,7 +10043,7 @@
           <p:cNvPr id="47" name="">
             <a:extLst xmlns:a="http://schemas.openxmlformats.org/drawingml/2006/main">
               <a:ext uri="{FF2B5EF4-FFF2-40B4-BE49-F238E27FC236}">
-                <a16:creationId xmlns:a16="http://schemas.microsoft.com/office/drawing/2014/main" id="{C189457C-3383-4FC4-88D1-3E3432DE3496}"/>
+                <a16:creationId xmlns:a16="http://schemas.microsoft.com/office/drawing/2014/main" id="{64B51DC1-00EC-4CD5-AB5F-0A80241E6B38}"/>
               </a:ext>
             </a:extLst>
           </p:cNvPr>
@@ -10095,7 +10095,7 @@
           <p:cNvPr id="48" name="">
             <a:extLst xmlns:a="http://schemas.openxmlformats.org/drawingml/2006/main">
               <a:ext uri="{FF2B5EF4-FFF2-40B4-BE49-F238E27FC236}">
-                <a16:creationId xmlns:a16="http://schemas.microsoft.com/office/drawing/2014/main" id="{8D51EC1B-E196-4ADB-B375-FD1340860984}"/>
+                <a16:creationId xmlns:a16="http://schemas.microsoft.com/office/drawing/2014/main" id="{A1DF2D82-3A45-4AE3-8340-4A165EDA3D76}"/>
               </a:ext>
             </a:extLst>
           </p:cNvPr>
@@ -10147,7 +10147,7 @@
           <p:cNvPr id="49" name="">
             <a:extLst xmlns:a="http://schemas.openxmlformats.org/drawingml/2006/main">
               <a:ext uri="{FF2B5EF4-FFF2-40B4-BE49-F238E27FC236}">
-                <a16:creationId xmlns:a16="http://schemas.microsoft.com/office/drawing/2014/main" id="{5FE4B493-802E-4D1E-B7E8-ED8AF6868379}"/>
+                <a16:creationId xmlns:a16="http://schemas.microsoft.com/office/drawing/2014/main" id="{7E8B9918-17FD-4663-AD2A-DA286B2A4660}"/>
               </a:ext>
             </a:extLst>
           </p:cNvPr>
@@ -10199,7 +10199,7 @@
           <p:cNvPr id="50" name="">
             <a:extLst xmlns:a="http://schemas.openxmlformats.org/drawingml/2006/main">
               <a:ext uri="{FF2B5EF4-FFF2-40B4-BE49-F238E27FC236}">
-                <a16:creationId xmlns:a16="http://schemas.microsoft.com/office/drawing/2014/main" id="{A5A91BC5-84D3-4408-9A6E-E6EFDED1765B}"/>
+                <a16:creationId xmlns:a16="http://schemas.microsoft.com/office/drawing/2014/main" id="{0F341CC4-EA1A-4637-85D8-74D5CCF429BE}"/>
               </a:ext>
             </a:extLst>
           </p:cNvPr>
@@ -10251,7 +10251,7 @@
           <p:cNvPr id="51" name="">
             <a:extLst xmlns:a="http://schemas.openxmlformats.org/drawingml/2006/main">
               <a:ext uri="{FF2B5EF4-FFF2-40B4-BE49-F238E27FC236}">
-                <a16:creationId xmlns:a16="http://schemas.microsoft.com/office/drawing/2014/main" id="{9AB78ED5-12A0-4821-B151-84C39E0A7D46}"/>
+                <a16:creationId xmlns:a16="http://schemas.microsoft.com/office/drawing/2014/main" id="{004735A8-9FB3-409B-B146-DE9B0E265555}"/>
               </a:ext>
             </a:extLst>
           </p:cNvPr>
@@ -10282,7 +10282,7 @@
           <p:cNvPr id="52" name="">
             <a:extLst xmlns:a="http://schemas.openxmlformats.org/drawingml/2006/main">
               <a:ext uri="{FF2B5EF4-FFF2-40B4-BE49-F238E27FC236}">
-                <a16:creationId xmlns:a16="http://schemas.microsoft.com/office/drawing/2014/main" id="{65754B98-66B8-4F9C-96DC-BDB31E3766BA}"/>
+                <a16:creationId xmlns:a16="http://schemas.microsoft.com/office/drawing/2014/main" id="{2D7292C7-0C21-42A9-A597-9D7BF82B4330}"/>
               </a:ext>
             </a:extLst>
           </p:cNvPr>
@@ -10313,7 +10313,7 @@
           <p:cNvPr id="53" name="">
             <a:extLst xmlns:a="http://schemas.openxmlformats.org/drawingml/2006/main">
               <a:ext uri="{FF2B5EF4-FFF2-40B4-BE49-F238E27FC236}">
-                <a16:creationId xmlns:a16="http://schemas.microsoft.com/office/drawing/2014/main" id="{70407F45-CCBD-42DF-92AA-C526AFE50FD0}"/>
+                <a16:creationId xmlns:a16="http://schemas.microsoft.com/office/drawing/2014/main" id="{2D205490-B9CC-4933-AC79-A9A524288FF4}"/>
               </a:ext>
             </a:extLst>
           </p:cNvPr>
@@ -10344,7 +10344,7 @@
           <p:cNvPr id="54" name="">
             <a:extLst xmlns:a="http://schemas.openxmlformats.org/drawingml/2006/main">
               <a:ext uri="{FF2B5EF4-FFF2-40B4-BE49-F238E27FC236}">
-                <a16:creationId xmlns:a16="http://schemas.microsoft.com/office/drawing/2014/main" id="{A9A74A18-0DA1-4F1F-AF0E-BA3C0499C936}"/>
+                <a16:creationId xmlns:a16="http://schemas.microsoft.com/office/drawing/2014/main" id="{94C0DE1F-4A3A-4A2E-A394-CAC4D840B315}"/>
               </a:ext>
             </a:extLst>
           </p:cNvPr>
@@ -10396,7 +10396,7 @@
           <p:cNvPr id="55" name="">
             <a:extLst xmlns:a="http://schemas.openxmlformats.org/drawingml/2006/main">
               <a:ext uri="{FF2B5EF4-FFF2-40B4-BE49-F238E27FC236}">
-                <a16:creationId xmlns:a16="http://schemas.microsoft.com/office/drawing/2014/main" id="{5DDD8DE9-4170-42E5-B684-ED5642D3F10B}"/>
+                <a16:creationId xmlns:a16="http://schemas.microsoft.com/office/drawing/2014/main" id="{169422B8-D1CF-4A82-9D13-91D15DD3D6CB}"/>
               </a:ext>
             </a:extLst>
           </p:cNvPr>
@@ -10448,7 +10448,7 @@
           <p:cNvPr id="56" name="">
             <a:extLst xmlns:a="http://schemas.openxmlformats.org/drawingml/2006/main">
               <a:ext uri="{FF2B5EF4-FFF2-40B4-BE49-F238E27FC236}">
-                <a16:creationId xmlns:a16="http://schemas.microsoft.com/office/drawing/2014/main" id="{AB339D22-C3AF-4DF6-8B36-A8CFA115E1D9}"/>
+                <a16:creationId xmlns:a16="http://schemas.microsoft.com/office/drawing/2014/main" id="{AA050366-0886-483C-A72A-CF3102C43108}"/>
               </a:ext>
             </a:extLst>
           </p:cNvPr>
@@ -10500,7 +10500,7 @@
           <p:cNvPr id="57" name="">
             <a:extLst xmlns:a="http://schemas.openxmlformats.org/drawingml/2006/main">
               <a:ext uri="{FF2B5EF4-FFF2-40B4-BE49-F238E27FC236}">
-                <a16:creationId xmlns:a16="http://schemas.microsoft.com/office/drawing/2014/main" id="{1CE82538-68FC-4F4F-8123-D245666CEAA0}"/>
+                <a16:creationId xmlns:a16="http://schemas.microsoft.com/office/drawing/2014/main" id="{A2D69893-6AEF-4C90-8E45-93F0BDBAE486}"/>
               </a:ext>
             </a:extLst>
           </p:cNvPr>
@@ -10552,7 +10552,7 @@
           <p:cNvPr id="58" name="">
             <a:extLst xmlns:a="http://schemas.openxmlformats.org/drawingml/2006/main">
               <a:ext uri="{FF2B5EF4-FFF2-40B4-BE49-F238E27FC236}">
-                <a16:creationId xmlns:a16="http://schemas.microsoft.com/office/drawing/2014/main" id="{B8FFFFE8-1F51-4771-B36E-39DFCAB23422}"/>
+                <a16:creationId xmlns:a16="http://schemas.microsoft.com/office/drawing/2014/main" id="{262A8E0F-2546-49A9-B451-41E069777648}"/>
               </a:ext>
             </a:extLst>
           </p:cNvPr>
@@ -10604,7 +10604,7 @@
           <p:cNvPr id="59" name="">
             <a:extLst xmlns:a="http://schemas.openxmlformats.org/drawingml/2006/main">
               <a:ext uri="{FF2B5EF4-FFF2-40B4-BE49-F238E27FC236}">
-                <a16:creationId xmlns:a16="http://schemas.microsoft.com/office/drawing/2014/main" id="{936EC2DA-8C50-44C2-B7E5-C8A6331CAB5B}"/>
+                <a16:creationId xmlns:a16="http://schemas.microsoft.com/office/drawing/2014/main" id="{22C24F03-C7CA-4C47-8D48-A64B304042DD}"/>
               </a:ext>
             </a:extLst>
           </p:cNvPr>
@@ -10635,7 +10635,7 @@
           <p:cNvPr id="60" name="">
             <a:extLst xmlns:a="http://schemas.openxmlformats.org/drawingml/2006/main">
               <a:ext uri="{FF2B5EF4-FFF2-40B4-BE49-F238E27FC236}">
-                <a16:creationId xmlns:a16="http://schemas.microsoft.com/office/drawing/2014/main" id="{BEB8D12B-2595-4BA9-9975-DCFA23719B41}"/>
+                <a16:creationId xmlns:a16="http://schemas.microsoft.com/office/drawing/2014/main" id="{1C7EE0B2-2647-4418-8098-1881437E7A07}"/>
               </a:ext>
             </a:extLst>
           </p:cNvPr>
@@ -10687,7 +10687,7 @@
           <p:cNvPr id="61" name="">
             <a:extLst xmlns:a="http://schemas.openxmlformats.org/drawingml/2006/main">
               <a:ext uri="{FF2B5EF4-FFF2-40B4-BE49-F238E27FC236}">
-                <a16:creationId xmlns:a16="http://schemas.microsoft.com/office/drawing/2014/main" id="{51A18595-6D17-4B0B-AD58-D72586CFAFCF}"/>
+                <a16:creationId xmlns:a16="http://schemas.microsoft.com/office/drawing/2014/main" id="{7CB086CD-6B2E-495C-AF73-03A5884BF8AB}"/>
               </a:ext>
             </a:extLst>
           </p:cNvPr>
@@ -10739,7 +10739,7 @@
           <p:cNvPr id="62" name="">
             <a:extLst xmlns:a="http://schemas.openxmlformats.org/drawingml/2006/main">
               <a:ext uri="{FF2B5EF4-FFF2-40B4-BE49-F238E27FC236}">
-                <a16:creationId xmlns:a16="http://schemas.microsoft.com/office/drawing/2014/main" id="{28531884-6517-46F4-81F1-E5B33FDACA2C}"/>
+                <a16:creationId xmlns:a16="http://schemas.microsoft.com/office/drawing/2014/main" id="{C0046AC2-486E-49A6-A6D0-2010A316F7F1}"/>
               </a:ext>
             </a:extLst>
           </p:cNvPr>
@@ -10791,7 +10791,7 @@
           <p:cNvPr id="63" name="">
             <a:extLst xmlns:a="http://schemas.openxmlformats.org/drawingml/2006/main">
               <a:ext uri="{FF2B5EF4-FFF2-40B4-BE49-F238E27FC236}">
-                <a16:creationId xmlns:a16="http://schemas.microsoft.com/office/drawing/2014/main" id="{7F0345CE-7CD9-4C67-91F5-283B9AFE46AE}"/>
+                <a16:creationId xmlns:a16="http://schemas.microsoft.com/office/drawing/2014/main" id="{4F545452-B0CD-4223-8C40-0EE41E2AA1D9}"/>
               </a:ext>
             </a:extLst>
           </p:cNvPr>
@@ -10843,7 +10843,7 @@
           <p:cNvPr id="64" name="">
             <a:extLst xmlns:a="http://schemas.openxmlformats.org/drawingml/2006/main">
               <a:ext uri="{FF2B5EF4-FFF2-40B4-BE49-F238E27FC236}">
-                <a16:creationId xmlns:a16="http://schemas.microsoft.com/office/drawing/2014/main" id="{8D89B64E-CC3B-4233-9E73-E8E3039FC0B9}"/>
+                <a16:creationId xmlns:a16="http://schemas.microsoft.com/office/drawing/2014/main" id="{652FC1FC-A7E7-4240-9FEA-DFC228F09C80}"/>
               </a:ext>
             </a:extLst>
           </p:cNvPr>
@@ -10895,7 +10895,7 @@
           <p:cNvPr id="65" name="">
             <a:extLst xmlns:a="http://schemas.openxmlformats.org/drawingml/2006/main">
               <a:ext uri="{FF2B5EF4-FFF2-40B4-BE49-F238E27FC236}">
-                <a16:creationId xmlns:a16="http://schemas.microsoft.com/office/drawing/2014/main" id="{E6DDF7F4-DEE6-4C2B-B15B-842C354B5C8F}"/>
+                <a16:creationId xmlns:a16="http://schemas.microsoft.com/office/drawing/2014/main" id="{970A1364-FD5E-477B-A6B1-251AED6C7D02}"/>
               </a:ext>
             </a:extLst>
           </p:cNvPr>
@@ -10926,7 +10926,7 @@
           <p:cNvPr id="66" name="">
             <a:extLst xmlns:a="http://schemas.openxmlformats.org/drawingml/2006/main">
               <a:ext uri="{FF2B5EF4-FFF2-40B4-BE49-F238E27FC236}">
-                <a16:creationId xmlns:a16="http://schemas.microsoft.com/office/drawing/2014/main" id="{F7123040-23BA-4457-A8BF-6A024BE20B75}"/>
+                <a16:creationId xmlns:a16="http://schemas.microsoft.com/office/drawing/2014/main" id="{C25D00D3-09C6-4274-AFFA-AD20D18B2628}"/>
               </a:ext>
             </a:extLst>
           </p:cNvPr>
@@ -10957,7 +10957,7 @@
           <p:cNvPr id="67" name="">
             <a:extLst xmlns:a="http://schemas.openxmlformats.org/drawingml/2006/main">
               <a:ext uri="{FF2B5EF4-FFF2-40B4-BE49-F238E27FC236}">
-                <a16:creationId xmlns:a16="http://schemas.microsoft.com/office/drawing/2014/main" id="{41A31983-2EC1-417E-9D90-156F2277A8DE}"/>
+                <a16:creationId xmlns:a16="http://schemas.microsoft.com/office/drawing/2014/main" id="{A5CC4912-07F8-46D4-BDD9-485A706E5515}"/>
               </a:ext>
             </a:extLst>
           </p:cNvPr>
@@ -11009,7 +11009,7 @@
           <p:cNvPr id="68" name="">
             <a:extLst xmlns:a="http://schemas.openxmlformats.org/drawingml/2006/main">
               <a:ext uri="{FF2B5EF4-FFF2-40B4-BE49-F238E27FC236}">
-                <a16:creationId xmlns:a16="http://schemas.microsoft.com/office/drawing/2014/main" id="{7B30A1B5-27D5-4EBF-BBA7-53FB7AF5A2FC}"/>
+                <a16:creationId xmlns:a16="http://schemas.microsoft.com/office/drawing/2014/main" id="{C5FBD311-26B6-4FC6-91E3-A4B3C2413CE9}"/>
               </a:ext>
             </a:extLst>
           </p:cNvPr>
@@ -11061,7 +11061,7 @@
           <p:cNvPr id="69" name="">
             <a:extLst xmlns:a="http://schemas.openxmlformats.org/drawingml/2006/main">
               <a:ext uri="{FF2B5EF4-FFF2-40B4-BE49-F238E27FC236}">
-                <a16:creationId xmlns:a16="http://schemas.microsoft.com/office/drawing/2014/main" id="{FB11CF23-81E6-4377-A08E-6888ABC44EF2}"/>
+                <a16:creationId xmlns:a16="http://schemas.microsoft.com/office/drawing/2014/main" id="{104639D9-0C54-4EB8-89B4-3CBF2338D899}"/>
               </a:ext>
             </a:extLst>
           </p:cNvPr>
@@ -11113,7 +11113,7 @@
           <p:cNvPr id="70" name="">
             <a:extLst xmlns:a="http://schemas.openxmlformats.org/drawingml/2006/main">
               <a:ext uri="{FF2B5EF4-FFF2-40B4-BE49-F238E27FC236}">
-                <a16:creationId xmlns:a16="http://schemas.microsoft.com/office/drawing/2014/main" id="{1E8B1AC3-524C-439C-80E1-35F7691E816C}"/>
+                <a16:creationId xmlns:a16="http://schemas.microsoft.com/office/drawing/2014/main" id="{290F9F35-21CE-4B81-B10A-00ADCFB61E85}"/>
               </a:ext>
             </a:extLst>
           </p:cNvPr>
@@ -11165,7 +11165,7 @@
           <p:cNvPr id="71" name="">
             <a:extLst xmlns:a="http://schemas.openxmlformats.org/drawingml/2006/main">
               <a:ext uri="{FF2B5EF4-FFF2-40B4-BE49-F238E27FC236}">
-                <a16:creationId xmlns:a16="http://schemas.microsoft.com/office/drawing/2014/main" id="{BB9F4369-14C9-4B28-A935-1329749AF58E}"/>
+                <a16:creationId xmlns:a16="http://schemas.microsoft.com/office/drawing/2014/main" id="{4079D853-E0B5-418E-93D6-D49AA56C6F2E}"/>
               </a:ext>
             </a:extLst>
           </p:cNvPr>
@@ -11217,7 +11217,7 @@
           <p:cNvPr id="72" name="">
             <a:extLst xmlns:a="http://schemas.openxmlformats.org/drawingml/2006/main">
               <a:ext uri="{FF2B5EF4-FFF2-40B4-BE49-F238E27FC236}">
-                <a16:creationId xmlns:a16="http://schemas.microsoft.com/office/drawing/2014/main" id="{CDA75D62-493C-49F1-B1C2-9A6DDD87AE4C}"/>
+                <a16:creationId xmlns:a16="http://schemas.microsoft.com/office/drawing/2014/main" id="{DD96480E-AA98-457A-ADF3-F6CD7879C67D}"/>
               </a:ext>
             </a:extLst>
           </p:cNvPr>
@@ -11248,7 +11248,7 @@
           <p:cNvPr id="73" name="">
             <a:extLst xmlns:a="http://schemas.openxmlformats.org/drawingml/2006/main">
               <a:ext uri="{FF2B5EF4-FFF2-40B4-BE49-F238E27FC236}">
-                <a16:creationId xmlns:a16="http://schemas.microsoft.com/office/drawing/2014/main" id="{C6B48889-5298-4CCA-BBE9-F78904FBA8A6}"/>
+                <a16:creationId xmlns:a16="http://schemas.microsoft.com/office/drawing/2014/main" id="{C2EDC73A-2650-4D04-800A-A8E9C45BD990}"/>
               </a:ext>
             </a:extLst>
           </p:cNvPr>
@@ -11300,7 +11300,7 @@
           <p:cNvPr id="74" name="">
             <a:extLst xmlns:a="http://schemas.openxmlformats.org/drawingml/2006/main">
               <a:ext uri="{FF2B5EF4-FFF2-40B4-BE49-F238E27FC236}">
-                <a16:creationId xmlns:a16="http://schemas.microsoft.com/office/drawing/2014/main" id="{B6ED37BB-4358-46E2-A050-9633DBBB272A}"/>
+                <a16:creationId xmlns:a16="http://schemas.microsoft.com/office/drawing/2014/main" id="{11B7F635-8E60-49D0-B4B3-1A6DA2ED93EC}"/>
               </a:ext>
             </a:extLst>
           </p:cNvPr>
@@ -11352,7 +11352,7 @@
           <p:cNvPr id="75" name="">
             <a:extLst xmlns:a="http://schemas.openxmlformats.org/drawingml/2006/main">
               <a:ext uri="{FF2B5EF4-FFF2-40B4-BE49-F238E27FC236}">
-                <a16:creationId xmlns:a16="http://schemas.microsoft.com/office/drawing/2014/main" id="{9E31E3FA-6E44-41D9-B732-792E79229AE6}"/>
+                <a16:creationId xmlns:a16="http://schemas.microsoft.com/office/drawing/2014/main" id="{A534BE0F-2444-4B47-BE8B-D643172FE865}"/>
               </a:ext>
             </a:extLst>
           </p:cNvPr>
@@ -11404,7 +11404,7 @@
           <p:cNvPr id="76" name="">
             <a:extLst xmlns:a="http://schemas.openxmlformats.org/drawingml/2006/main">
               <a:ext uri="{FF2B5EF4-FFF2-40B4-BE49-F238E27FC236}">
-                <a16:creationId xmlns:a16="http://schemas.microsoft.com/office/drawing/2014/main" id="{B57411DB-10AF-4EDD-99B0-1FEF3AA979D7}"/>
+                <a16:creationId xmlns:a16="http://schemas.microsoft.com/office/drawing/2014/main" id="{FCBA72CD-F36B-40CD-98A3-818C1D5D5EC2}"/>
               </a:ext>
             </a:extLst>
           </p:cNvPr>
@@ -11456,7 +11456,7 @@
           <p:cNvPr id="77" name="">
             <a:extLst xmlns:a="http://schemas.openxmlformats.org/drawingml/2006/main">
               <a:ext uri="{FF2B5EF4-FFF2-40B4-BE49-F238E27FC236}">
-                <a16:creationId xmlns:a16="http://schemas.microsoft.com/office/drawing/2014/main" id="{F4C27A1C-E931-4FC5-9B0C-14ED57AF5F8B}"/>
+                <a16:creationId xmlns:a16="http://schemas.microsoft.com/office/drawing/2014/main" id="{F9FA5D2A-4D3B-426C-A5D3-69DAB2641185}"/>
               </a:ext>
             </a:extLst>
           </p:cNvPr>
@@ -11508,7 +11508,7 @@
           <p:cNvPr id="78" name="">
             <a:extLst xmlns:a="http://schemas.openxmlformats.org/drawingml/2006/main">
               <a:ext uri="{FF2B5EF4-FFF2-40B4-BE49-F238E27FC236}">
-                <a16:creationId xmlns:a16="http://schemas.microsoft.com/office/drawing/2014/main" id="{130089BF-8343-4B8E-A988-02F5EED2DFC8}"/>
+                <a16:creationId xmlns:a16="http://schemas.microsoft.com/office/drawing/2014/main" id="{AAB5BEF7-4C4B-463C-A063-10898853959E}"/>
               </a:ext>
             </a:extLst>
           </p:cNvPr>
@@ -11539,7 +11539,7 @@
           <p:cNvPr id="79" name="">
             <a:extLst xmlns:a="http://schemas.openxmlformats.org/drawingml/2006/main">
               <a:ext uri="{FF2B5EF4-FFF2-40B4-BE49-F238E27FC236}">
-                <a16:creationId xmlns:a16="http://schemas.microsoft.com/office/drawing/2014/main" id="{3B652D57-EF01-43F2-B473-3E63718A813A}"/>
+                <a16:creationId xmlns:a16="http://schemas.microsoft.com/office/drawing/2014/main" id="{28E41E3B-ABAA-4332-A877-AF4054613075}"/>
               </a:ext>
             </a:extLst>
           </p:cNvPr>
@@ -11570,7 +11570,7 @@
           <p:cNvPr id="80" name="">
             <a:extLst xmlns:a="http://schemas.openxmlformats.org/drawingml/2006/main">
               <a:ext uri="{FF2B5EF4-FFF2-40B4-BE49-F238E27FC236}">
-                <a16:creationId xmlns:a16="http://schemas.microsoft.com/office/drawing/2014/main" id="{26651700-D62A-41E3-8334-C6A58CEA9F18}"/>
+                <a16:creationId xmlns:a16="http://schemas.microsoft.com/office/drawing/2014/main" id="{17C46FDD-2A1F-406C-9708-05C452FDCF77}"/>
               </a:ext>
             </a:extLst>
           </p:cNvPr>
@@ -11622,7 +11622,7 @@
           <p:cNvPr id="81" name="">
             <a:extLst xmlns:a="http://schemas.openxmlformats.org/drawingml/2006/main">
               <a:ext uri="{FF2B5EF4-FFF2-40B4-BE49-F238E27FC236}">
-                <a16:creationId xmlns:a16="http://schemas.microsoft.com/office/drawing/2014/main" id="{B479177B-D09F-480A-868C-9BB506530066}"/>
+                <a16:creationId xmlns:a16="http://schemas.microsoft.com/office/drawing/2014/main" id="{E94A6C23-79A5-41D6-B16E-219BDA676DBF}"/>
               </a:ext>
             </a:extLst>
           </p:cNvPr>
@@ -11674,7 +11674,7 @@
           <p:cNvPr id="82" name="">
             <a:extLst xmlns:a="http://schemas.openxmlformats.org/drawingml/2006/main">
               <a:ext uri="{FF2B5EF4-FFF2-40B4-BE49-F238E27FC236}">
-                <a16:creationId xmlns:a16="http://schemas.microsoft.com/office/drawing/2014/main" id="{46F8A372-7A22-462A-88F6-A9436E24F5A6}"/>
+                <a16:creationId xmlns:a16="http://schemas.microsoft.com/office/drawing/2014/main" id="{1BD71EE0-E076-41AF-8F94-E6C4312396E3}"/>
               </a:ext>
             </a:extLst>
           </p:cNvPr>
@@ -11726,7 +11726,7 @@
           <p:cNvPr id="83" name="">
             <a:extLst xmlns:a="http://schemas.openxmlformats.org/drawingml/2006/main">
               <a:ext uri="{FF2B5EF4-FFF2-40B4-BE49-F238E27FC236}">
-                <a16:creationId xmlns:a16="http://schemas.microsoft.com/office/drawing/2014/main" id="{232A9D54-EC71-4005-8EBF-3144238CE248}"/>
+                <a16:creationId xmlns:a16="http://schemas.microsoft.com/office/drawing/2014/main" id="{904152C5-EA8E-4B87-84C0-E99F35855784}"/>
               </a:ext>
             </a:extLst>
           </p:cNvPr>
@@ -11778,7 +11778,7 @@
           <p:cNvPr id="84" name="">
             <a:extLst xmlns:a="http://schemas.openxmlformats.org/drawingml/2006/main">
               <a:ext uri="{FF2B5EF4-FFF2-40B4-BE49-F238E27FC236}">
-                <a16:creationId xmlns:a16="http://schemas.microsoft.com/office/drawing/2014/main" id="{2362D1C6-F614-436D-851C-5F25FD3062B2}"/>
+                <a16:creationId xmlns:a16="http://schemas.microsoft.com/office/drawing/2014/main" id="{1B0CDF16-A031-4B46-8484-443783DEFA17}"/>
               </a:ext>
             </a:extLst>
           </p:cNvPr>
@@ -11830,7 +11830,7 @@
           <p:cNvPr id="85" name="">
             <a:extLst xmlns:a="http://schemas.openxmlformats.org/drawingml/2006/main">
               <a:ext uri="{FF2B5EF4-FFF2-40B4-BE49-F238E27FC236}">
-                <a16:creationId xmlns:a16="http://schemas.microsoft.com/office/drawing/2014/main" id="{A5DC6947-4AC6-43D9-868B-D6B7F00DDAE2}"/>
+                <a16:creationId xmlns:a16="http://schemas.microsoft.com/office/drawing/2014/main" id="{5A279A5B-EF4E-4B7A-A691-0F4DED2AA92B}"/>
               </a:ext>
             </a:extLst>
           </p:cNvPr>
@@ -11861,7 +11861,7 @@
           <p:cNvPr id="86" name="">
             <a:extLst xmlns:a="http://schemas.openxmlformats.org/drawingml/2006/main">
               <a:ext uri="{FF2B5EF4-FFF2-40B4-BE49-F238E27FC236}">
-                <a16:creationId xmlns:a16="http://schemas.microsoft.com/office/drawing/2014/main" id="{906C2202-3F73-4FEE-AF7F-F98C115C3E29}"/>
+                <a16:creationId xmlns:a16="http://schemas.microsoft.com/office/drawing/2014/main" id="{B2E68D9D-1BDE-4535-A3C7-4EB589431AEB}"/>
               </a:ext>
             </a:extLst>
           </p:cNvPr>
@@ -11913,7 +11913,7 @@
           <p:cNvPr id="87" name="">
             <a:extLst xmlns:a="http://schemas.openxmlformats.org/drawingml/2006/main">
               <a:ext uri="{FF2B5EF4-FFF2-40B4-BE49-F238E27FC236}">
-                <a16:creationId xmlns:a16="http://schemas.microsoft.com/office/drawing/2014/main" id="{48966883-B8ED-4F8C-BBFC-76E14AF37436}"/>
+                <a16:creationId xmlns:a16="http://schemas.microsoft.com/office/drawing/2014/main" id="{E5852666-61F4-4684-91D9-91F33990F089}"/>
               </a:ext>
             </a:extLst>
           </p:cNvPr>
@@ -11965,7 +11965,7 @@
           <p:cNvPr id="88" name="">
             <a:extLst xmlns:a="http://schemas.openxmlformats.org/drawingml/2006/main">
               <a:ext uri="{FF2B5EF4-FFF2-40B4-BE49-F238E27FC236}">
-                <a16:creationId xmlns:a16="http://schemas.microsoft.com/office/drawing/2014/main" id="{C506D7BE-5D90-41C2-9B0B-F895A4D1C30A}"/>
+                <a16:creationId xmlns:a16="http://schemas.microsoft.com/office/drawing/2014/main" id="{E5AF16CC-49EC-4612-A090-D86A02B15F3E}"/>
               </a:ext>
             </a:extLst>
           </p:cNvPr>
@@ -12017,7 +12017,7 @@
           <p:cNvPr id="89" name="">
             <a:extLst xmlns:a="http://schemas.openxmlformats.org/drawingml/2006/main">
               <a:ext uri="{FF2B5EF4-FFF2-40B4-BE49-F238E27FC236}">
-                <a16:creationId xmlns:a16="http://schemas.microsoft.com/office/drawing/2014/main" id="{890A17CC-5F91-4AAB-9636-E5D843D7CA7C}"/>
+                <a16:creationId xmlns:a16="http://schemas.microsoft.com/office/drawing/2014/main" id="{A33E201C-F0C5-40FC-9E8A-A1F224ADE7EE}"/>
               </a:ext>
             </a:extLst>
           </p:cNvPr>
@@ -12069,7 +12069,7 @@
           <p:cNvPr id="90" name="">
             <a:extLst xmlns:a="http://schemas.openxmlformats.org/drawingml/2006/main">
               <a:ext uri="{FF2B5EF4-FFF2-40B4-BE49-F238E27FC236}">
-                <a16:creationId xmlns:a16="http://schemas.microsoft.com/office/drawing/2014/main" id="{0A2F7A04-7FFC-4F61-89D8-721F2449C8C2}"/>
+                <a16:creationId xmlns:a16="http://schemas.microsoft.com/office/drawing/2014/main" id="{16774503-6F76-40A2-AA32-0162E539CBCB}"/>
               </a:ext>
             </a:extLst>
           </p:cNvPr>
@@ -12121,7 +12121,7 @@
           <p:cNvPr id="91" name="">
             <a:extLst xmlns:a="http://schemas.openxmlformats.org/drawingml/2006/main">
               <a:ext uri="{FF2B5EF4-FFF2-40B4-BE49-F238E27FC236}">
-                <a16:creationId xmlns:a16="http://schemas.microsoft.com/office/drawing/2014/main" id="{D96005B1-38CE-46FE-8639-33F4073A42A1}"/>
+                <a16:creationId xmlns:a16="http://schemas.microsoft.com/office/drawing/2014/main" id="{BB292B42-24A4-4445-A064-CF985848406A}"/>
               </a:ext>
             </a:extLst>
           </p:cNvPr>
@@ -12152,7 +12152,7 @@
           <p:cNvPr id="92" name="">
             <a:extLst xmlns:a="http://schemas.openxmlformats.org/drawingml/2006/main">
               <a:ext uri="{FF2B5EF4-FFF2-40B4-BE49-F238E27FC236}">
-                <a16:creationId xmlns:a16="http://schemas.microsoft.com/office/drawing/2014/main" id="{4FDE8750-D6D0-4748-8810-6802DB65287C}"/>
+                <a16:creationId xmlns:a16="http://schemas.microsoft.com/office/drawing/2014/main" id="{4AF6FC81-1173-4023-91C7-DCFCEC4E13B7}"/>
               </a:ext>
             </a:extLst>
           </p:cNvPr>
@@ -12183,7 +12183,7 @@
           <p:cNvPr id="93" name="">
             <a:extLst xmlns:a="http://schemas.openxmlformats.org/drawingml/2006/main">
               <a:ext uri="{FF2B5EF4-FFF2-40B4-BE49-F238E27FC236}">
-                <a16:creationId xmlns:a16="http://schemas.microsoft.com/office/drawing/2014/main" id="{B0BEC4EA-0C93-4354-8EA2-0BBBAD6F6EDD}"/>
+                <a16:creationId xmlns:a16="http://schemas.microsoft.com/office/drawing/2014/main" id="{627B3423-2960-4BFB-990D-0423F9BC6C04}"/>
               </a:ext>
             </a:extLst>
           </p:cNvPr>
@@ -12235,7 +12235,7 @@
           <p:cNvPr id="94" name="">
             <a:extLst xmlns:a="http://schemas.openxmlformats.org/drawingml/2006/main">
               <a:ext uri="{FF2B5EF4-FFF2-40B4-BE49-F238E27FC236}">
-                <a16:creationId xmlns:a16="http://schemas.microsoft.com/office/drawing/2014/main" id="{0E94C3A2-76BC-4618-8288-ACD5F1A0C1C4}"/>
+                <a16:creationId xmlns:a16="http://schemas.microsoft.com/office/drawing/2014/main" id="{32449BD5-1C94-4CAC-8F49-D6132E26F36D}"/>
               </a:ext>
             </a:extLst>
           </p:cNvPr>
@@ -12287,7 +12287,7 @@
           <p:cNvPr id="95" name="">
             <a:extLst xmlns:a="http://schemas.openxmlformats.org/drawingml/2006/main">
               <a:ext uri="{FF2B5EF4-FFF2-40B4-BE49-F238E27FC236}">
-                <a16:creationId xmlns:a16="http://schemas.microsoft.com/office/drawing/2014/main" id="{9877F2FA-78EE-4A65-A19A-C2E246CA5198}"/>
+                <a16:creationId xmlns:a16="http://schemas.microsoft.com/office/drawing/2014/main" id="{A51876D9-CA02-4510-A2ED-9598F3F5EE05}"/>
               </a:ext>
             </a:extLst>
           </p:cNvPr>
@@ -12339,7 +12339,7 @@
           <p:cNvPr id="96" name="">
             <a:extLst xmlns:a="http://schemas.openxmlformats.org/drawingml/2006/main">
               <a:ext uri="{FF2B5EF4-FFF2-40B4-BE49-F238E27FC236}">
-                <a16:creationId xmlns:a16="http://schemas.microsoft.com/office/drawing/2014/main" id="{6AF92D3D-8CB3-4DF7-80AA-F04280C79914}"/>
+                <a16:creationId xmlns:a16="http://schemas.microsoft.com/office/drawing/2014/main" id="{FDA5F23E-2569-49D0-AA6B-B2ACDEBB0E33}"/>
               </a:ext>
             </a:extLst>
           </p:cNvPr>
@@ -12391,7 +12391,7 @@
           <p:cNvPr id="97" name="">
             <a:extLst xmlns:a="http://schemas.openxmlformats.org/drawingml/2006/main">
               <a:ext uri="{FF2B5EF4-FFF2-40B4-BE49-F238E27FC236}">
-                <a16:creationId xmlns:a16="http://schemas.microsoft.com/office/drawing/2014/main" id="{714BB326-4D75-4315-976F-1648A8A69C35}"/>
+                <a16:creationId xmlns:a16="http://schemas.microsoft.com/office/drawing/2014/main" id="{D38F7DFB-4FB9-4B37-9E31-4BC438AA395B}"/>
               </a:ext>
             </a:extLst>
           </p:cNvPr>
@@ -12441,7 +12441,7 @@
     </p:spTree>
     <p:extLst>
       <p:ext uri="{BB962C8B-B14F-4D97-AF65-F5344CB8AC3E}">
-        <p14:creationId xmlns:p14="http://schemas.microsoft.com/office/powerpoint/2010/main" val="409731100"/>
+        <p14:creationId xmlns:p14="http://schemas.microsoft.com/office/powerpoint/2010/main" val="1450401394"/>
       </p:ext>
     </p:extLst>
   </p:cSld>
@@ -12472,7 +12472,7 @@
           <p:cNvPr id="102" name="">
             <a:extLst xmlns:a="http://schemas.openxmlformats.org/drawingml/2006/main">
               <a:ext uri="{FF2B5EF4-FFF2-40B4-BE49-F238E27FC236}">
-                <a16:creationId xmlns:a16="http://schemas.microsoft.com/office/drawing/2014/main" id="{DE802396-5DFF-4788-A298-4D3F1E364B7B}"/>
+                <a16:creationId xmlns:a16="http://schemas.microsoft.com/office/drawing/2014/main" id="{8B427516-D9F5-44A4-8243-05C73211FA01}"/>
               </a:ext>
             </a:extLst>
           </p:cNvPr>
@@ -12505,7 +12505,7 @@
           <p:cNvPr id="2" name="">
             <a:extLst xmlns:a="http://schemas.openxmlformats.org/drawingml/2006/main">
               <a:ext uri="{FF2B5EF4-FFF2-40B4-BE49-F238E27FC236}">
-                <a16:creationId xmlns:a16="http://schemas.microsoft.com/office/drawing/2014/main" id="{D45D0917-6A55-440B-AA94-A961B3E99EBA}"/>
+                <a16:creationId xmlns:a16="http://schemas.microsoft.com/office/drawing/2014/main" id="{6D2099F8-EFC7-4C8B-A480-DC5DB20F7FD7}"/>
               </a:ext>
             </a:extLst>
           </p:cNvPr>
@@ -12536,7 +12536,7 @@
           <p:cNvPr id="3" name="">
             <a:extLst xmlns:a="http://schemas.openxmlformats.org/drawingml/2006/main">
               <a:ext uri="{FF2B5EF4-FFF2-40B4-BE49-F238E27FC236}">
-                <a16:creationId xmlns:a16="http://schemas.microsoft.com/office/drawing/2014/main" id="{5BCA61D1-C7EC-42DB-A8FA-4557023369DE}"/>
+                <a16:creationId xmlns:a16="http://schemas.microsoft.com/office/drawing/2014/main" id="{E4198054-C52B-412A-9415-0A8EFA413C13}"/>
               </a:ext>
             </a:extLst>
           </p:cNvPr>
@@ -12588,7 +12588,7 @@
           <p:cNvPr id="4" name="">
             <a:extLst xmlns:a="http://schemas.openxmlformats.org/drawingml/2006/main">
               <a:ext uri="{FF2B5EF4-FFF2-40B4-BE49-F238E27FC236}">
-                <a16:creationId xmlns:a16="http://schemas.microsoft.com/office/drawing/2014/main" id="{24556EAC-743F-4FFB-BC5B-44222B824AC6}"/>
+                <a16:creationId xmlns:a16="http://schemas.microsoft.com/office/drawing/2014/main" id="{D9A2B82C-4531-49EB-B241-6C005DD34560}"/>
               </a:ext>
             </a:extLst>
           </p:cNvPr>
@@ -12640,7 +12640,7 @@
           <p:cNvPr id="5" name="">
             <a:extLst xmlns:a="http://schemas.openxmlformats.org/drawingml/2006/main">
               <a:ext uri="{FF2B5EF4-FFF2-40B4-BE49-F238E27FC236}">
-                <a16:creationId xmlns:a16="http://schemas.microsoft.com/office/drawing/2014/main" id="{789718C1-AFAB-43F8-BDC8-70853631E87D}"/>
+                <a16:creationId xmlns:a16="http://schemas.microsoft.com/office/drawing/2014/main" id="{A088FC64-4482-4596-83AA-F4F1AEF9DD85}"/>
               </a:ext>
             </a:extLst>
           </p:cNvPr>
@@ -12675,7 +12675,7 @@
           <p:nvPr/>
         </p:nvPicPr>
         <p:blipFill>
-          <a:blip xmlns:r="http://schemas.openxmlformats.org/officeDocument/2006/relationships" xmlns:a="http://schemas.openxmlformats.org/drawingml/2006/main" r:embed="Rdcdfaeb981b1423a"/>
+          <a:blip xmlns:r="http://schemas.openxmlformats.org/officeDocument/2006/relationships" xmlns:a="http://schemas.openxmlformats.org/drawingml/2006/main" r:embed="R1ede66f2eef74921"/>
           <a:stretch xmlns:a="http://schemas.openxmlformats.org/drawingml/2006/main"/>
         </p:blipFill>
         <p:spPr>
@@ -12693,7 +12693,7 @@
           <p:cNvPr id="7" name="">
             <a:extLst xmlns:a="http://schemas.openxmlformats.org/drawingml/2006/main">
               <a:ext uri="{FF2B5EF4-FFF2-40B4-BE49-F238E27FC236}">
-                <a16:creationId xmlns:a16="http://schemas.microsoft.com/office/drawing/2014/main" id="{2EB0062E-7FAE-43CC-A431-4281CE964E14}"/>
+                <a16:creationId xmlns:a16="http://schemas.microsoft.com/office/drawing/2014/main" id="{24A87D17-63E0-45BD-B663-B7605289698E}"/>
               </a:ext>
             </a:extLst>
           </p:cNvPr>
@@ -12745,7 +12745,7 @@
           <p:cNvPr id="8" name="">
             <a:extLst xmlns:a="http://schemas.openxmlformats.org/drawingml/2006/main">
               <a:ext uri="{FF2B5EF4-FFF2-40B4-BE49-F238E27FC236}">
-                <a16:creationId xmlns:a16="http://schemas.microsoft.com/office/drawing/2014/main" id="{FD185AA1-A2AF-49AF-9F6D-6B96B923A5B1}"/>
+                <a16:creationId xmlns:a16="http://schemas.microsoft.com/office/drawing/2014/main" id="{8F18EDEF-C9EC-45AD-9079-038982FE5FC7}"/>
               </a:ext>
             </a:extLst>
           </p:cNvPr>
@@ -12797,7 +12797,7 @@
           <p:cNvPr id="9" name="">
             <a:extLst xmlns:a="http://schemas.openxmlformats.org/drawingml/2006/main">
               <a:ext uri="{FF2B5EF4-FFF2-40B4-BE49-F238E27FC236}">
-                <a16:creationId xmlns:a16="http://schemas.microsoft.com/office/drawing/2014/main" id="{C7CCDF9B-E04B-4B92-B012-F4D588A393D7}"/>
+                <a16:creationId xmlns:a16="http://schemas.microsoft.com/office/drawing/2014/main" id="{1E4DFB85-B7CC-4DA8-867B-E3F5A70C1561}"/>
               </a:ext>
             </a:extLst>
           </p:cNvPr>
@@ -12849,7 +12849,7 @@
           <p:cNvPr id="10" name="">
             <a:extLst xmlns:a="http://schemas.openxmlformats.org/drawingml/2006/main">
               <a:ext uri="{FF2B5EF4-FFF2-40B4-BE49-F238E27FC236}">
-                <a16:creationId xmlns:a16="http://schemas.microsoft.com/office/drawing/2014/main" id="{34953239-96D3-48D3-A4C7-188213BA74C0}"/>
+                <a16:creationId xmlns:a16="http://schemas.microsoft.com/office/drawing/2014/main" id="{CD2551AB-5EE9-40A3-8F21-EC8DFE3C6E5A}"/>
               </a:ext>
             </a:extLst>
           </p:cNvPr>
@@ -12901,7 +12901,7 @@
           <p:cNvPr id="11" name="">
             <a:extLst xmlns:a="http://schemas.openxmlformats.org/drawingml/2006/main">
               <a:ext uri="{FF2B5EF4-FFF2-40B4-BE49-F238E27FC236}">
-                <a16:creationId xmlns:a16="http://schemas.microsoft.com/office/drawing/2014/main" id="{008AFF97-F88D-4FFB-B5B2-61F7367F6293}"/>
+                <a16:creationId xmlns:a16="http://schemas.microsoft.com/office/drawing/2014/main" id="{D75F7229-F40C-4A9C-8A96-011246AF160E}"/>
               </a:ext>
             </a:extLst>
           </p:cNvPr>
@@ -12932,7 +12932,7 @@
           <p:cNvPr id="12" name="">
             <a:extLst xmlns:a="http://schemas.openxmlformats.org/drawingml/2006/main">
               <a:ext uri="{FF2B5EF4-FFF2-40B4-BE49-F238E27FC236}">
-                <a16:creationId xmlns:a16="http://schemas.microsoft.com/office/drawing/2014/main" id="{A086BC43-5416-4C13-AF15-2F8878AA0F5C}"/>
+                <a16:creationId xmlns:a16="http://schemas.microsoft.com/office/drawing/2014/main" id="{BF1FA3B5-E66F-42DC-A85C-C5B828DF4761}"/>
               </a:ext>
             </a:extLst>
           </p:cNvPr>
@@ -12963,7 +12963,7 @@
           <p:cNvPr id="13" name="">
             <a:extLst xmlns:a="http://schemas.openxmlformats.org/drawingml/2006/main">
               <a:ext uri="{FF2B5EF4-FFF2-40B4-BE49-F238E27FC236}">
-                <a16:creationId xmlns:a16="http://schemas.microsoft.com/office/drawing/2014/main" id="{7F2C6B9C-6A7F-4340-A7A6-321998B95717}"/>
+                <a16:creationId xmlns:a16="http://schemas.microsoft.com/office/drawing/2014/main" id="{99F5A75A-8F2C-4211-AFA2-99EF56B7F445}"/>
               </a:ext>
             </a:extLst>
           </p:cNvPr>
@@ -13015,7 +13015,7 @@
           <p:cNvPr id="14" name="">
             <a:extLst xmlns:a="http://schemas.openxmlformats.org/drawingml/2006/main">
               <a:ext uri="{FF2B5EF4-FFF2-40B4-BE49-F238E27FC236}">
-                <a16:creationId xmlns:a16="http://schemas.microsoft.com/office/drawing/2014/main" id="{F33BBE7D-A215-420B-99BA-49BCB5741F80}"/>
+                <a16:creationId xmlns:a16="http://schemas.microsoft.com/office/drawing/2014/main" id="{FF9C80F1-2314-44E0-95CF-E432281A87F4}"/>
               </a:ext>
             </a:extLst>
           </p:cNvPr>
@@ -13067,7 +13067,7 @@
           <p:cNvPr id="15" name="">
             <a:extLst xmlns:a="http://schemas.openxmlformats.org/drawingml/2006/main">
               <a:ext uri="{FF2B5EF4-FFF2-40B4-BE49-F238E27FC236}">
-                <a16:creationId xmlns:a16="http://schemas.microsoft.com/office/drawing/2014/main" id="{F6675486-924A-439F-988C-0BDE36BCB725}"/>
+                <a16:creationId xmlns:a16="http://schemas.microsoft.com/office/drawing/2014/main" id="{4F60A148-619D-45C4-84AF-DE69642BAF12}"/>
               </a:ext>
             </a:extLst>
           </p:cNvPr>
@@ -13119,7 +13119,7 @@
           <p:cNvPr id="16" name="">
             <a:extLst xmlns:a="http://schemas.openxmlformats.org/drawingml/2006/main">
               <a:ext uri="{FF2B5EF4-FFF2-40B4-BE49-F238E27FC236}">
-                <a16:creationId xmlns:a16="http://schemas.microsoft.com/office/drawing/2014/main" id="{6D8F05C8-32FF-493F-96FD-96B6E0B43852}"/>
+                <a16:creationId xmlns:a16="http://schemas.microsoft.com/office/drawing/2014/main" id="{A2F06296-B648-4C3F-B64D-DB97A0699533}"/>
               </a:ext>
             </a:extLst>
           </p:cNvPr>
@@ -13171,7 +13171,7 @@
           <p:cNvPr id="17" name="">
             <a:extLst xmlns:a="http://schemas.openxmlformats.org/drawingml/2006/main">
               <a:ext uri="{FF2B5EF4-FFF2-40B4-BE49-F238E27FC236}">
-                <a16:creationId xmlns:a16="http://schemas.microsoft.com/office/drawing/2014/main" id="{B40E9428-700D-493B-AB0C-40B5108809D0}"/>
+                <a16:creationId xmlns:a16="http://schemas.microsoft.com/office/drawing/2014/main" id="{5936FCD7-9B9D-49EB-90A6-2CB81A2974A5}"/>
               </a:ext>
             </a:extLst>
           </p:cNvPr>
@@ -13223,7 +13223,7 @@
           <p:cNvPr id="18" name="">
             <a:extLst xmlns:a="http://schemas.openxmlformats.org/drawingml/2006/main">
               <a:ext uri="{FF2B5EF4-FFF2-40B4-BE49-F238E27FC236}">
-                <a16:creationId xmlns:a16="http://schemas.microsoft.com/office/drawing/2014/main" id="{BB36D896-CCB2-48E9-A6BA-6C8B41740A5A}"/>
+                <a16:creationId xmlns:a16="http://schemas.microsoft.com/office/drawing/2014/main" id="{A74AD1CA-E300-48D1-93EE-00448ADDD1F3}"/>
               </a:ext>
             </a:extLst>
           </p:cNvPr>
@@ -13254,7 +13254,7 @@
           <p:cNvPr id="19" name="">
             <a:extLst xmlns:a="http://schemas.openxmlformats.org/drawingml/2006/main">
               <a:ext uri="{FF2B5EF4-FFF2-40B4-BE49-F238E27FC236}">
-                <a16:creationId xmlns:a16="http://schemas.microsoft.com/office/drawing/2014/main" id="{F71BEB5C-C582-4712-8D3B-EF82CD1441C6}"/>
+                <a16:creationId xmlns:a16="http://schemas.microsoft.com/office/drawing/2014/main" id="{67EF8EFB-DB1B-415A-881E-EFC54226FE28}"/>
               </a:ext>
             </a:extLst>
           </p:cNvPr>
@@ -13306,7 +13306,7 @@
           <p:cNvPr id="20" name="">
             <a:extLst xmlns:a="http://schemas.openxmlformats.org/drawingml/2006/main">
               <a:ext uri="{FF2B5EF4-FFF2-40B4-BE49-F238E27FC236}">
-                <a16:creationId xmlns:a16="http://schemas.microsoft.com/office/drawing/2014/main" id="{FCBBB401-A2C5-440C-9087-FE0454F3F118}"/>
+                <a16:creationId xmlns:a16="http://schemas.microsoft.com/office/drawing/2014/main" id="{0A22739B-68D3-4D80-9485-64597C69A833}"/>
               </a:ext>
             </a:extLst>
           </p:cNvPr>
@@ -13358,7 +13358,7 @@
           <p:cNvPr id="21" name="">
             <a:extLst xmlns:a="http://schemas.openxmlformats.org/drawingml/2006/main">
               <a:ext uri="{FF2B5EF4-FFF2-40B4-BE49-F238E27FC236}">
-                <a16:creationId xmlns:a16="http://schemas.microsoft.com/office/drawing/2014/main" id="{37742AF7-D23F-48BC-A86B-A6D0E15D1E71}"/>
+                <a16:creationId xmlns:a16="http://schemas.microsoft.com/office/drawing/2014/main" id="{0078725D-329F-4040-8B51-E2D435C1FAED}"/>
               </a:ext>
             </a:extLst>
           </p:cNvPr>
@@ -13410,7 +13410,7 @@
           <p:cNvPr id="22" name="">
             <a:extLst xmlns:a="http://schemas.openxmlformats.org/drawingml/2006/main">
               <a:ext uri="{FF2B5EF4-FFF2-40B4-BE49-F238E27FC236}">
-                <a16:creationId xmlns:a16="http://schemas.microsoft.com/office/drawing/2014/main" id="{0C93AE2C-ABF8-4D7E-BE00-AE5C5DA22DB1}"/>
+                <a16:creationId xmlns:a16="http://schemas.microsoft.com/office/drawing/2014/main" id="{FDC542FA-CFC8-4E91-8A63-8867728673AD}"/>
               </a:ext>
             </a:extLst>
           </p:cNvPr>
@@ -13462,7 +13462,7 @@
           <p:cNvPr id="23" name="">
             <a:extLst xmlns:a="http://schemas.openxmlformats.org/drawingml/2006/main">
               <a:ext uri="{FF2B5EF4-FFF2-40B4-BE49-F238E27FC236}">
-                <a16:creationId xmlns:a16="http://schemas.microsoft.com/office/drawing/2014/main" id="{C55AD880-825E-420D-9C05-8FF035AF1521}"/>
+                <a16:creationId xmlns:a16="http://schemas.microsoft.com/office/drawing/2014/main" id="{B16FB499-7F85-44FB-9163-AEDC95E2D3C3}"/>
               </a:ext>
             </a:extLst>
           </p:cNvPr>
@@ -13514,7 +13514,7 @@
           <p:cNvPr id="24" name="">
             <a:extLst xmlns:a="http://schemas.openxmlformats.org/drawingml/2006/main">
               <a:ext uri="{FF2B5EF4-FFF2-40B4-BE49-F238E27FC236}">
-                <a16:creationId xmlns:a16="http://schemas.microsoft.com/office/drawing/2014/main" id="{3BF78CC2-10A6-4437-B827-9FBE610075A3}"/>
+                <a16:creationId xmlns:a16="http://schemas.microsoft.com/office/drawing/2014/main" id="{A060944F-0A8A-4E49-97FE-DB2588BE5805}"/>
               </a:ext>
             </a:extLst>
           </p:cNvPr>
@@ -13545,7 +13545,7 @@
           <p:cNvPr id="25" name="">
             <a:extLst xmlns:a="http://schemas.openxmlformats.org/drawingml/2006/main">
               <a:ext uri="{FF2B5EF4-FFF2-40B4-BE49-F238E27FC236}">
-                <a16:creationId xmlns:a16="http://schemas.microsoft.com/office/drawing/2014/main" id="{78D51AC5-891F-42AF-A6A2-E82E864E9F5E}"/>
+                <a16:creationId xmlns:a16="http://schemas.microsoft.com/office/drawing/2014/main" id="{63DD2044-7C8C-4A48-BE0A-5FAA019E1095}"/>
               </a:ext>
             </a:extLst>
           </p:cNvPr>
@@ -13576,7 +13576,7 @@
           <p:cNvPr id="26" name="">
             <a:extLst xmlns:a="http://schemas.openxmlformats.org/drawingml/2006/main">
               <a:ext uri="{FF2B5EF4-FFF2-40B4-BE49-F238E27FC236}">
-                <a16:creationId xmlns:a16="http://schemas.microsoft.com/office/drawing/2014/main" id="{416771B0-5F85-4258-81DD-4590D35D9343}"/>
+                <a16:creationId xmlns:a16="http://schemas.microsoft.com/office/drawing/2014/main" id="{3DBED77E-1E6E-414A-A2E9-B03718460659}"/>
               </a:ext>
             </a:extLst>
           </p:cNvPr>
@@ -13628,7 +13628,7 @@
           <p:cNvPr id="27" name="">
             <a:extLst xmlns:a="http://schemas.openxmlformats.org/drawingml/2006/main">
               <a:ext uri="{FF2B5EF4-FFF2-40B4-BE49-F238E27FC236}">
-                <a16:creationId xmlns:a16="http://schemas.microsoft.com/office/drawing/2014/main" id="{00FD2FA5-0011-47B8-B982-D95631F62BBE}"/>
+                <a16:creationId xmlns:a16="http://schemas.microsoft.com/office/drawing/2014/main" id="{933D9E14-7A4D-4C87-9887-0D586CF156F0}"/>
               </a:ext>
             </a:extLst>
           </p:cNvPr>
@@ -13680,7 +13680,7 @@
           <p:cNvPr id="28" name="">
             <a:extLst xmlns:a="http://schemas.openxmlformats.org/drawingml/2006/main">
               <a:ext uri="{FF2B5EF4-FFF2-40B4-BE49-F238E27FC236}">
-                <a16:creationId xmlns:a16="http://schemas.microsoft.com/office/drawing/2014/main" id="{E7CE4F6C-E75A-48DF-BD69-F7CA095AED3B}"/>
+                <a16:creationId xmlns:a16="http://schemas.microsoft.com/office/drawing/2014/main" id="{20D0A375-5815-4BD2-ACD5-EC89CC8B758C}"/>
               </a:ext>
             </a:extLst>
           </p:cNvPr>
@@ -13732,7 +13732,7 @@
           <p:cNvPr id="29" name="">
             <a:extLst xmlns:a="http://schemas.openxmlformats.org/drawingml/2006/main">
               <a:ext uri="{FF2B5EF4-FFF2-40B4-BE49-F238E27FC236}">
-                <a16:creationId xmlns:a16="http://schemas.microsoft.com/office/drawing/2014/main" id="{5B190C82-2B93-4427-903B-12613F884B5F}"/>
+                <a16:creationId xmlns:a16="http://schemas.microsoft.com/office/drawing/2014/main" id="{9E5228D3-08F5-4A00-9148-A1519827933A}"/>
               </a:ext>
             </a:extLst>
           </p:cNvPr>
@@ -13784,7 +13784,7 @@
           <p:cNvPr id="30" name="">
             <a:extLst xmlns:a="http://schemas.openxmlformats.org/drawingml/2006/main">
               <a:ext uri="{FF2B5EF4-FFF2-40B4-BE49-F238E27FC236}">
-                <a16:creationId xmlns:a16="http://schemas.microsoft.com/office/drawing/2014/main" id="{B4FB94F0-A026-491E-9D89-AA2BFC8D3A30}"/>
+                <a16:creationId xmlns:a16="http://schemas.microsoft.com/office/drawing/2014/main" id="{51A882AA-5E48-40EE-B7EE-21E99DDCC795}"/>
               </a:ext>
             </a:extLst>
           </p:cNvPr>
@@ -13836,7 +13836,7 @@
           <p:cNvPr id="31" name="">
             <a:extLst xmlns:a="http://schemas.openxmlformats.org/drawingml/2006/main">
               <a:ext uri="{FF2B5EF4-FFF2-40B4-BE49-F238E27FC236}">
-                <a16:creationId xmlns:a16="http://schemas.microsoft.com/office/drawing/2014/main" id="{9CFDE614-F95D-4268-87AB-E91A1D9006B0}"/>
+                <a16:creationId xmlns:a16="http://schemas.microsoft.com/office/drawing/2014/main" id="{1433CC86-D7EB-47E1-BE4D-429C86DF3808}"/>
               </a:ext>
             </a:extLst>
           </p:cNvPr>
@@ -13867,7 +13867,7 @@
           <p:cNvPr id="32" name="">
             <a:extLst xmlns:a="http://schemas.openxmlformats.org/drawingml/2006/main">
               <a:ext uri="{FF2B5EF4-FFF2-40B4-BE49-F238E27FC236}">
-                <a16:creationId xmlns:a16="http://schemas.microsoft.com/office/drawing/2014/main" id="{82D53881-4AEA-408D-87BD-A8C43565D45B}"/>
+                <a16:creationId xmlns:a16="http://schemas.microsoft.com/office/drawing/2014/main" id="{27000C48-095E-471A-9738-85EF97FCC159}"/>
               </a:ext>
             </a:extLst>
           </p:cNvPr>
@@ -13919,7 +13919,7 @@
           <p:cNvPr id="33" name="">
             <a:extLst xmlns:a="http://schemas.openxmlformats.org/drawingml/2006/main">
               <a:ext uri="{FF2B5EF4-FFF2-40B4-BE49-F238E27FC236}">
-                <a16:creationId xmlns:a16="http://schemas.microsoft.com/office/drawing/2014/main" id="{671FF41F-6ED1-4654-8EE5-CBBF44E080A6}"/>
+                <a16:creationId xmlns:a16="http://schemas.microsoft.com/office/drawing/2014/main" id="{E0DC008D-A3F9-4867-BF67-51334C725096}"/>
               </a:ext>
             </a:extLst>
           </p:cNvPr>
@@ -13971,7 +13971,7 @@
           <p:cNvPr id="34" name="">
             <a:extLst xmlns:a="http://schemas.openxmlformats.org/drawingml/2006/main">
               <a:ext uri="{FF2B5EF4-FFF2-40B4-BE49-F238E27FC236}">
-                <a16:creationId xmlns:a16="http://schemas.microsoft.com/office/drawing/2014/main" id="{B83FAA4F-01ED-4FEF-9BFD-0A559F978605}"/>
+                <a16:creationId xmlns:a16="http://schemas.microsoft.com/office/drawing/2014/main" id="{715FF1E1-A95C-4C68-AD78-B080F0E4E4C2}"/>
               </a:ext>
             </a:extLst>
           </p:cNvPr>
@@ -14023,7 +14023,7 @@
           <p:cNvPr id="35" name="">
             <a:extLst xmlns:a="http://schemas.openxmlformats.org/drawingml/2006/main">
               <a:ext uri="{FF2B5EF4-FFF2-40B4-BE49-F238E27FC236}">
-                <a16:creationId xmlns:a16="http://schemas.microsoft.com/office/drawing/2014/main" id="{4300F469-78F5-48F4-9027-8C03E8BB0187}"/>
+                <a16:creationId xmlns:a16="http://schemas.microsoft.com/office/drawing/2014/main" id="{9C9CD725-2268-4F61-ACED-77131681B068}"/>
               </a:ext>
             </a:extLst>
           </p:cNvPr>
@@ -14075,7 +14075,7 @@
           <p:cNvPr id="36" name="">
             <a:extLst xmlns:a="http://schemas.openxmlformats.org/drawingml/2006/main">
               <a:ext uri="{FF2B5EF4-FFF2-40B4-BE49-F238E27FC236}">
-                <a16:creationId xmlns:a16="http://schemas.microsoft.com/office/drawing/2014/main" id="{F1329D01-B1E4-42DF-9D5E-1621D539DD5D}"/>
+                <a16:creationId xmlns:a16="http://schemas.microsoft.com/office/drawing/2014/main" id="{095D015F-3D1C-47E2-B3A1-34B0425F06C8}"/>
               </a:ext>
             </a:extLst>
           </p:cNvPr>
@@ -14127,7 +14127,7 @@
           <p:cNvPr id="37" name="">
             <a:extLst xmlns:a="http://schemas.openxmlformats.org/drawingml/2006/main">
               <a:ext uri="{FF2B5EF4-FFF2-40B4-BE49-F238E27FC236}">
-                <a16:creationId xmlns:a16="http://schemas.microsoft.com/office/drawing/2014/main" id="{31092C44-28F9-463A-99A6-418AE98EF623}"/>
+                <a16:creationId xmlns:a16="http://schemas.microsoft.com/office/drawing/2014/main" id="{E6B54BB1-C15E-4080-8B5A-95D88BBD6F36}"/>
               </a:ext>
             </a:extLst>
           </p:cNvPr>
@@ -14158,7 +14158,7 @@
           <p:cNvPr id="38" name="">
             <a:extLst xmlns:a="http://schemas.openxmlformats.org/drawingml/2006/main">
               <a:ext uri="{FF2B5EF4-FFF2-40B4-BE49-F238E27FC236}">
-                <a16:creationId xmlns:a16="http://schemas.microsoft.com/office/drawing/2014/main" id="{52161F96-9010-4DC6-9FAA-863234CF439A}"/>
+                <a16:creationId xmlns:a16="http://schemas.microsoft.com/office/drawing/2014/main" id="{21D9F44D-FF82-49B2-BF5B-5BC630A06305}"/>
               </a:ext>
             </a:extLst>
           </p:cNvPr>
@@ -14189,7 +14189,7 @@
           <p:cNvPr id="39" name="">
             <a:extLst xmlns:a="http://schemas.openxmlformats.org/drawingml/2006/main">
               <a:ext uri="{FF2B5EF4-FFF2-40B4-BE49-F238E27FC236}">
-                <a16:creationId xmlns:a16="http://schemas.microsoft.com/office/drawing/2014/main" id="{8FC25896-22ED-4B54-AF06-1C8966936FA9}"/>
+                <a16:creationId xmlns:a16="http://schemas.microsoft.com/office/drawing/2014/main" id="{4B2026EB-7D87-4631-BEC0-D8A51658B87B}"/>
               </a:ext>
             </a:extLst>
           </p:cNvPr>
@@ -14241,7 +14241,7 @@
           <p:cNvPr id="40" name="">
             <a:extLst xmlns:a="http://schemas.openxmlformats.org/drawingml/2006/main">
               <a:ext uri="{FF2B5EF4-FFF2-40B4-BE49-F238E27FC236}">
-                <a16:creationId xmlns:a16="http://schemas.microsoft.com/office/drawing/2014/main" id="{9DDCEAEA-CD97-49EF-96DA-D61D9CE284AA}"/>
+                <a16:creationId xmlns:a16="http://schemas.microsoft.com/office/drawing/2014/main" id="{837115A0-4799-4963-AC4E-F738AEE60CF9}"/>
               </a:ext>
             </a:extLst>
           </p:cNvPr>
@@ -14293,7 +14293,7 @@
           <p:cNvPr id="41" name="">
             <a:extLst xmlns:a="http://schemas.openxmlformats.org/drawingml/2006/main">
               <a:ext uri="{FF2B5EF4-FFF2-40B4-BE49-F238E27FC236}">
-                <a16:creationId xmlns:a16="http://schemas.microsoft.com/office/drawing/2014/main" id="{4B16A867-EBF2-47C3-9D82-3426AA749203}"/>
+                <a16:creationId xmlns:a16="http://schemas.microsoft.com/office/drawing/2014/main" id="{0043333A-9A9C-4845-AF18-0F3ED65E546E}"/>
               </a:ext>
             </a:extLst>
           </p:cNvPr>
@@ -14345,7 +14345,7 @@
           <p:cNvPr id="42" name="">
             <a:extLst xmlns:a="http://schemas.openxmlformats.org/drawingml/2006/main">
               <a:ext uri="{FF2B5EF4-FFF2-40B4-BE49-F238E27FC236}">
-                <a16:creationId xmlns:a16="http://schemas.microsoft.com/office/drawing/2014/main" id="{8B9ADBBE-0F54-461B-8EBB-67F4FA6D42EE}"/>
+                <a16:creationId xmlns:a16="http://schemas.microsoft.com/office/drawing/2014/main" id="{D71B4C42-81E2-427D-BD9E-75637D638244}"/>
               </a:ext>
             </a:extLst>
           </p:cNvPr>
@@ -14397,7 +14397,7 @@
           <p:cNvPr id="43" name="">
             <a:extLst xmlns:a="http://schemas.openxmlformats.org/drawingml/2006/main">
               <a:ext uri="{FF2B5EF4-FFF2-40B4-BE49-F238E27FC236}">
-                <a16:creationId xmlns:a16="http://schemas.microsoft.com/office/drawing/2014/main" id="{B306D646-59ED-4B3A-A5D5-AE3E49F9A510}"/>
+                <a16:creationId xmlns:a16="http://schemas.microsoft.com/office/drawing/2014/main" id="{856A6544-8BA6-483D-9F32-20C024420769}"/>
               </a:ext>
             </a:extLst>
           </p:cNvPr>
@@ -14449,7 +14449,7 @@
           <p:cNvPr id="44" name="">
             <a:extLst xmlns:a="http://schemas.openxmlformats.org/drawingml/2006/main">
               <a:ext uri="{FF2B5EF4-FFF2-40B4-BE49-F238E27FC236}">
-                <a16:creationId xmlns:a16="http://schemas.microsoft.com/office/drawing/2014/main" id="{74039A8B-FDED-49C8-861C-9A209AACF468}"/>
+                <a16:creationId xmlns:a16="http://schemas.microsoft.com/office/drawing/2014/main" id="{9D5FD4AE-A4E3-424C-B49B-4306F6CCE236}"/>
               </a:ext>
             </a:extLst>
           </p:cNvPr>
@@ -14480,7 +14480,7 @@
           <p:cNvPr id="45" name="">
             <a:extLst xmlns:a="http://schemas.openxmlformats.org/drawingml/2006/main">
               <a:ext uri="{FF2B5EF4-FFF2-40B4-BE49-F238E27FC236}">
-                <a16:creationId xmlns:a16="http://schemas.microsoft.com/office/drawing/2014/main" id="{2E553721-1360-446E-8A2D-4E0BA1F70560}"/>
+                <a16:creationId xmlns:a16="http://schemas.microsoft.com/office/drawing/2014/main" id="{78A2CD31-A4EF-4557-BE31-657D34EFFCB2}"/>
               </a:ext>
             </a:extLst>
           </p:cNvPr>
@@ -14532,7 +14532,7 @@
           <p:cNvPr id="46" name="">
             <a:extLst xmlns:a="http://schemas.openxmlformats.org/drawingml/2006/main">
               <a:ext uri="{FF2B5EF4-FFF2-40B4-BE49-F238E27FC236}">
-                <a16:creationId xmlns:a16="http://schemas.microsoft.com/office/drawing/2014/main" id="{61262666-1E7E-4BF8-86B0-D4B510A09F4A}"/>
+                <a16:creationId xmlns:a16="http://schemas.microsoft.com/office/drawing/2014/main" id="{C6415141-8AED-409E-A7CA-AE8F240E615C}"/>
               </a:ext>
             </a:extLst>
           </p:cNvPr>
@@ -14584,7 +14584,7 @@
           <p:cNvPr id="47" name="">
             <a:extLst xmlns:a="http://schemas.openxmlformats.org/drawingml/2006/main">
               <a:ext uri="{FF2B5EF4-FFF2-40B4-BE49-F238E27FC236}">
-                <a16:creationId xmlns:a16="http://schemas.microsoft.com/office/drawing/2014/main" id="{22A983DD-508F-4664-A7B8-4513D415E117}"/>
+                <a16:creationId xmlns:a16="http://schemas.microsoft.com/office/drawing/2014/main" id="{2590506C-5A0F-456B-BF2F-CC84D7C4317F}"/>
               </a:ext>
             </a:extLst>
           </p:cNvPr>
@@ -14636,7 +14636,7 @@
           <p:cNvPr id="48" name="">
             <a:extLst xmlns:a="http://schemas.openxmlformats.org/drawingml/2006/main">
               <a:ext uri="{FF2B5EF4-FFF2-40B4-BE49-F238E27FC236}">
-                <a16:creationId xmlns:a16="http://schemas.microsoft.com/office/drawing/2014/main" id="{186E47C5-3E7F-4AA7-AB22-C87BBD6E703A}"/>
+                <a16:creationId xmlns:a16="http://schemas.microsoft.com/office/drawing/2014/main" id="{7DC8CAE1-2414-472B-84B3-B0186AF500A6}"/>
               </a:ext>
             </a:extLst>
           </p:cNvPr>
@@ -14688,7 +14688,7 @@
           <p:cNvPr id="49" name="">
             <a:extLst xmlns:a="http://schemas.openxmlformats.org/drawingml/2006/main">
               <a:ext uri="{FF2B5EF4-FFF2-40B4-BE49-F238E27FC236}">
-                <a16:creationId xmlns:a16="http://schemas.microsoft.com/office/drawing/2014/main" id="{B990B9D6-830F-4A36-841A-911E1EA78DAA}"/>
+                <a16:creationId xmlns:a16="http://schemas.microsoft.com/office/drawing/2014/main" id="{367DCEBB-47BE-4113-8F61-3B453958B25A}"/>
               </a:ext>
             </a:extLst>
           </p:cNvPr>
@@ -14740,7 +14740,7 @@
           <p:cNvPr id="50" name="">
             <a:extLst xmlns:a="http://schemas.openxmlformats.org/drawingml/2006/main">
               <a:ext uri="{FF2B5EF4-FFF2-40B4-BE49-F238E27FC236}">
-                <a16:creationId xmlns:a16="http://schemas.microsoft.com/office/drawing/2014/main" id="{E50CCE8B-05F8-4809-9DDF-4C98F92794A1}"/>
+                <a16:creationId xmlns:a16="http://schemas.microsoft.com/office/drawing/2014/main" id="{73E2EE78-D4E0-46C4-9585-B6C89E530A83}"/>
               </a:ext>
             </a:extLst>
           </p:cNvPr>
@@ -14771,7 +14771,7 @@
           <p:cNvPr id="51" name="">
             <a:extLst xmlns:a="http://schemas.openxmlformats.org/drawingml/2006/main">
               <a:ext uri="{FF2B5EF4-FFF2-40B4-BE49-F238E27FC236}">
-                <a16:creationId xmlns:a16="http://schemas.microsoft.com/office/drawing/2014/main" id="{B3211D3D-5243-489A-BBAA-28D0CA55105A}"/>
+                <a16:creationId xmlns:a16="http://schemas.microsoft.com/office/drawing/2014/main" id="{6432BC8E-891E-44B6-90BB-23EFB2704F32}"/>
               </a:ext>
             </a:extLst>
           </p:cNvPr>
@@ -14802,7 +14802,7 @@
           <p:cNvPr id="52" name="">
             <a:extLst xmlns:a="http://schemas.openxmlformats.org/drawingml/2006/main">
               <a:ext uri="{FF2B5EF4-FFF2-40B4-BE49-F238E27FC236}">
-                <a16:creationId xmlns:a16="http://schemas.microsoft.com/office/drawing/2014/main" id="{013D2816-3423-436D-8A0B-EE79371C83DC}"/>
+                <a16:creationId xmlns:a16="http://schemas.microsoft.com/office/drawing/2014/main" id="{83B91286-95D7-4920-8100-7E12E2572932}"/>
               </a:ext>
             </a:extLst>
           </p:cNvPr>
@@ -14854,7 +14854,7 @@
           <p:cNvPr id="53" name="">
             <a:extLst xmlns:a="http://schemas.openxmlformats.org/drawingml/2006/main">
               <a:ext uri="{FF2B5EF4-FFF2-40B4-BE49-F238E27FC236}">
-                <a16:creationId xmlns:a16="http://schemas.microsoft.com/office/drawing/2014/main" id="{AC1CC2CA-AC8E-4ECD-9B1C-AA2B29C4CFF2}"/>
+                <a16:creationId xmlns:a16="http://schemas.microsoft.com/office/drawing/2014/main" id="{65239F51-6EFE-4834-851D-27D0BF62C134}"/>
               </a:ext>
             </a:extLst>
           </p:cNvPr>
@@ -14906,7 +14906,7 @@
           <p:cNvPr id="54" name="">
             <a:extLst xmlns:a="http://schemas.openxmlformats.org/drawingml/2006/main">
               <a:ext uri="{FF2B5EF4-FFF2-40B4-BE49-F238E27FC236}">
-                <a16:creationId xmlns:a16="http://schemas.microsoft.com/office/drawing/2014/main" id="{5D5FDC1E-1090-4574-80BF-1D2EEDB000E7}"/>
+                <a16:creationId xmlns:a16="http://schemas.microsoft.com/office/drawing/2014/main" id="{F33CB8E6-D56F-40F2-84E6-9AF2F37C4F2E}"/>
               </a:ext>
             </a:extLst>
           </p:cNvPr>
@@ -14958,7 +14958,7 @@
           <p:cNvPr id="55" name="">
             <a:extLst xmlns:a="http://schemas.openxmlformats.org/drawingml/2006/main">
               <a:ext uri="{FF2B5EF4-FFF2-40B4-BE49-F238E27FC236}">
-                <a16:creationId xmlns:a16="http://schemas.microsoft.com/office/drawing/2014/main" id="{A8CBF7C3-DDD9-49DC-9A39-9CB0668099D9}"/>
+                <a16:creationId xmlns:a16="http://schemas.microsoft.com/office/drawing/2014/main" id="{BAAD2DAF-0400-489E-9E68-46476959C887}"/>
               </a:ext>
             </a:extLst>
           </p:cNvPr>
@@ -15010,7 +15010,7 @@
           <p:cNvPr id="56" name="">
             <a:extLst xmlns:a="http://schemas.openxmlformats.org/drawingml/2006/main">
               <a:ext uri="{FF2B5EF4-FFF2-40B4-BE49-F238E27FC236}">
-                <a16:creationId xmlns:a16="http://schemas.microsoft.com/office/drawing/2014/main" id="{E4BE9F9B-D9D9-4C10-98FC-445F002CB23A}"/>
+                <a16:creationId xmlns:a16="http://schemas.microsoft.com/office/drawing/2014/main" id="{42C7E824-3FDF-4EEC-B9E0-7A580B301187}"/>
               </a:ext>
             </a:extLst>
           </p:cNvPr>
@@ -15062,7 +15062,7 @@
           <p:cNvPr id="57" name="">
             <a:extLst xmlns:a="http://schemas.openxmlformats.org/drawingml/2006/main">
               <a:ext uri="{FF2B5EF4-FFF2-40B4-BE49-F238E27FC236}">
-                <a16:creationId xmlns:a16="http://schemas.microsoft.com/office/drawing/2014/main" id="{894CC68F-CE58-4720-9086-1E45722334B4}"/>
+                <a16:creationId xmlns:a16="http://schemas.microsoft.com/office/drawing/2014/main" id="{A8F0D494-47C2-4F8D-9664-184CEEBBACA3}"/>
               </a:ext>
             </a:extLst>
           </p:cNvPr>
@@ -15093,7 +15093,7 @@
           <p:cNvPr id="58" name="">
             <a:extLst xmlns:a="http://schemas.openxmlformats.org/drawingml/2006/main">
               <a:ext uri="{FF2B5EF4-FFF2-40B4-BE49-F238E27FC236}">
-                <a16:creationId xmlns:a16="http://schemas.microsoft.com/office/drawing/2014/main" id="{47A4D001-77BC-4787-B2A4-B2C6A245F03A}"/>
+                <a16:creationId xmlns:a16="http://schemas.microsoft.com/office/drawing/2014/main" id="{D07583E9-155F-4D58-9423-DDA014BF3D5A}"/>
               </a:ext>
             </a:extLst>
           </p:cNvPr>
@@ -15145,7 +15145,7 @@
           <p:cNvPr id="59" name="">
             <a:extLst xmlns:a="http://schemas.openxmlformats.org/drawingml/2006/main">
               <a:ext uri="{FF2B5EF4-FFF2-40B4-BE49-F238E27FC236}">
-                <a16:creationId xmlns:a16="http://schemas.microsoft.com/office/drawing/2014/main" id="{F9644894-E17F-4800-9A51-E09534C56C7E}"/>
+                <a16:creationId xmlns:a16="http://schemas.microsoft.com/office/drawing/2014/main" id="{ED54B9DB-2510-46D7-AE49-0EFF749BAAA3}"/>
               </a:ext>
             </a:extLst>
           </p:cNvPr>
@@ -15197,7 +15197,7 @@
           <p:cNvPr id="60" name="">
             <a:extLst xmlns:a="http://schemas.openxmlformats.org/drawingml/2006/main">
               <a:ext uri="{FF2B5EF4-FFF2-40B4-BE49-F238E27FC236}">
-                <a16:creationId xmlns:a16="http://schemas.microsoft.com/office/drawing/2014/main" id="{5F14EC5E-E8AC-45EA-AE7B-12527B9ED2F7}"/>
+                <a16:creationId xmlns:a16="http://schemas.microsoft.com/office/drawing/2014/main" id="{BADD4CB7-9EA9-4FA9-85B1-216A9670F128}"/>
               </a:ext>
             </a:extLst>
           </p:cNvPr>
@@ -15249,7 +15249,7 @@
           <p:cNvPr id="61" name="">
             <a:extLst xmlns:a="http://schemas.openxmlformats.org/drawingml/2006/main">
               <a:ext uri="{FF2B5EF4-FFF2-40B4-BE49-F238E27FC236}">
-                <a16:creationId xmlns:a16="http://schemas.microsoft.com/office/drawing/2014/main" id="{79E8EF72-F024-4681-ACCF-905744FA6491}"/>
+                <a16:creationId xmlns:a16="http://schemas.microsoft.com/office/drawing/2014/main" id="{2B2FDEC6-C34A-4AA0-82F2-74AF6EBA19F7}"/>
               </a:ext>
             </a:extLst>
           </p:cNvPr>
@@ -15301,7 +15301,7 @@
           <p:cNvPr id="62" name="">
             <a:extLst xmlns:a="http://schemas.openxmlformats.org/drawingml/2006/main">
               <a:ext uri="{FF2B5EF4-FFF2-40B4-BE49-F238E27FC236}">
-                <a16:creationId xmlns:a16="http://schemas.microsoft.com/office/drawing/2014/main" id="{6E5E381E-93E6-4CFB-B9BD-EBFA19E8A29B}"/>
+                <a16:creationId xmlns:a16="http://schemas.microsoft.com/office/drawing/2014/main" id="{3A5F48E1-946D-4A30-A7C0-4341E79C8FB5}"/>
               </a:ext>
             </a:extLst>
           </p:cNvPr>
@@ -15353,7 +15353,7 @@
           <p:cNvPr id="63" name="">
             <a:extLst xmlns:a="http://schemas.openxmlformats.org/drawingml/2006/main">
               <a:ext uri="{FF2B5EF4-FFF2-40B4-BE49-F238E27FC236}">
-                <a16:creationId xmlns:a16="http://schemas.microsoft.com/office/drawing/2014/main" id="{866DA986-D579-4ED0-BECB-F4F050493446}"/>
+                <a16:creationId xmlns:a16="http://schemas.microsoft.com/office/drawing/2014/main" id="{91407CDD-6C19-46F9-9664-64493BAAB026}"/>
               </a:ext>
             </a:extLst>
           </p:cNvPr>
@@ -15384,7 +15384,7 @@
           <p:cNvPr id="64" name="">
             <a:extLst xmlns:a="http://schemas.openxmlformats.org/drawingml/2006/main">
               <a:ext uri="{FF2B5EF4-FFF2-40B4-BE49-F238E27FC236}">
-                <a16:creationId xmlns:a16="http://schemas.microsoft.com/office/drawing/2014/main" id="{6142E512-E6B2-40CA-A45E-4A17BE3B3978}"/>
+                <a16:creationId xmlns:a16="http://schemas.microsoft.com/office/drawing/2014/main" id="{75AE301F-7C5F-4D4B-98A2-D1AABDF20317}"/>
               </a:ext>
             </a:extLst>
           </p:cNvPr>
@@ -15415,7 +15415,7 @@
           <p:cNvPr id="65" name="">
             <a:extLst xmlns:a="http://schemas.openxmlformats.org/drawingml/2006/main">
               <a:ext uri="{FF2B5EF4-FFF2-40B4-BE49-F238E27FC236}">
-                <a16:creationId xmlns:a16="http://schemas.microsoft.com/office/drawing/2014/main" id="{67089B11-4CE7-4F29-8625-A8B3893251E1}"/>
+                <a16:creationId xmlns:a16="http://schemas.microsoft.com/office/drawing/2014/main" id="{5AD805B7-BE77-4E4E-92F5-C51D911A5962}"/>
               </a:ext>
             </a:extLst>
           </p:cNvPr>
@@ -15467,7 +15467,7 @@
           <p:cNvPr id="66" name="">
             <a:extLst xmlns:a="http://schemas.openxmlformats.org/drawingml/2006/main">
               <a:ext uri="{FF2B5EF4-FFF2-40B4-BE49-F238E27FC236}">
-                <a16:creationId xmlns:a16="http://schemas.microsoft.com/office/drawing/2014/main" id="{284DF4CA-4420-4E3B-8025-30B947BA0BE1}"/>
+                <a16:creationId xmlns:a16="http://schemas.microsoft.com/office/drawing/2014/main" id="{F59BEA8A-07D0-4651-8DE6-382E1595AEC1}"/>
               </a:ext>
             </a:extLst>
           </p:cNvPr>
@@ -15519,7 +15519,7 @@
           <p:cNvPr id="67" name="">
             <a:extLst xmlns:a="http://schemas.openxmlformats.org/drawingml/2006/main">
               <a:ext uri="{FF2B5EF4-FFF2-40B4-BE49-F238E27FC236}">
-                <a16:creationId xmlns:a16="http://schemas.microsoft.com/office/drawing/2014/main" id="{AEE3921A-6C15-447C-98C8-11BC94F02C51}"/>
+                <a16:creationId xmlns:a16="http://schemas.microsoft.com/office/drawing/2014/main" id="{3177AE07-6A3B-461C-AF54-5E23C178D184}"/>
               </a:ext>
             </a:extLst>
           </p:cNvPr>
@@ -15571,7 +15571,7 @@
           <p:cNvPr id="68" name="">
             <a:extLst xmlns:a="http://schemas.openxmlformats.org/drawingml/2006/main">
               <a:ext uri="{FF2B5EF4-FFF2-40B4-BE49-F238E27FC236}">
-                <a16:creationId xmlns:a16="http://schemas.microsoft.com/office/drawing/2014/main" id="{0B84DBD8-6FBE-41EF-A627-0800A4A41D2B}"/>
+                <a16:creationId xmlns:a16="http://schemas.microsoft.com/office/drawing/2014/main" id="{C4EE2F09-A7F0-4CAA-A756-5B2359DD7D3E}"/>
               </a:ext>
             </a:extLst>
           </p:cNvPr>
@@ -15623,7 +15623,7 @@
           <p:cNvPr id="69" name="">
             <a:extLst xmlns:a="http://schemas.openxmlformats.org/drawingml/2006/main">
               <a:ext uri="{FF2B5EF4-FFF2-40B4-BE49-F238E27FC236}">
-                <a16:creationId xmlns:a16="http://schemas.microsoft.com/office/drawing/2014/main" id="{4DA478D2-FB81-4F92-9072-D55DF9DCA14F}"/>
+                <a16:creationId xmlns:a16="http://schemas.microsoft.com/office/drawing/2014/main" id="{DA000E0D-5B05-429E-AA99-7300EEDAADC5}"/>
               </a:ext>
             </a:extLst>
           </p:cNvPr>
@@ -15675,7 +15675,7 @@
           <p:cNvPr id="70" name="">
             <a:extLst xmlns:a="http://schemas.openxmlformats.org/drawingml/2006/main">
               <a:ext uri="{FF2B5EF4-FFF2-40B4-BE49-F238E27FC236}">
-                <a16:creationId xmlns:a16="http://schemas.microsoft.com/office/drawing/2014/main" id="{3173C277-E5D9-4EE0-AE82-BD429897B002}"/>
+                <a16:creationId xmlns:a16="http://schemas.microsoft.com/office/drawing/2014/main" id="{64DB9D9F-0A01-48F7-B811-9C87BAA7889D}"/>
               </a:ext>
             </a:extLst>
           </p:cNvPr>
@@ -15706,7 +15706,7 @@
           <p:cNvPr id="71" name="">
             <a:extLst xmlns:a="http://schemas.openxmlformats.org/drawingml/2006/main">
               <a:ext uri="{FF2B5EF4-FFF2-40B4-BE49-F238E27FC236}">
-                <a16:creationId xmlns:a16="http://schemas.microsoft.com/office/drawing/2014/main" id="{9322881D-7285-449C-B20B-50A3FDEE460B}"/>
+                <a16:creationId xmlns:a16="http://schemas.microsoft.com/office/drawing/2014/main" id="{ACF0F7A9-DD17-4835-9F41-BEC8A20D15CA}"/>
               </a:ext>
             </a:extLst>
           </p:cNvPr>
@@ -15758,7 +15758,7 @@
           <p:cNvPr id="72" name="">
             <a:extLst xmlns:a="http://schemas.openxmlformats.org/drawingml/2006/main">
               <a:ext uri="{FF2B5EF4-FFF2-40B4-BE49-F238E27FC236}">
-                <a16:creationId xmlns:a16="http://schemas.microsoft.com/office/drawing/2014/main" id="{20005518-BE91-4B55-853D-79419DCEA4CD}"/>
+                <a16:creationId xmlns:a16="http://schemas.microsoft.com/office/drawing/2014/main" id="{E37AF1E0-B3C3-4AE2-9351-DE30083A1334}"/>
               </a:ext>
             </a:extLst>
           </p:cNvPr>
@@ -15810,7 +15810,7 @@
           <p:cNvPr id="73" name="">
             <a:extLst xmlns:a="http://schemas.openxmlformats.org/drawingml/2006/main">
               <a:ext uri="{FF2B5EF4-FFF2-40B4-BE49-F238E27FC236}">
-                <a16:creationId xmlns:a16="http://schemas.microsoft.com/office/drawing/2014/main" id="{C0422EC6-BC01-4B9C-BD4D-1577F17211C5}"/>
+                <a16:creationId xmlns:a16="http://schemas.microsoft.com/office/drawing/2014/main" id="{B579DC06-61C5-4CDC-998D-2D068ECC05CA}"/>
               </a:ext>
             </a:extLst>
           </p:cNvPr>
@@ -15862,7 +15862,7 @@
           <p:cNvPr id="74" name="">
             <a:extLst xmlns:a="http://schemas.openxmlformats.org/drawingml/2006/main">
               <a:ext uri="{FF2B5EF4-FFF2-40B4-BE49-F238E27FC236}">
-                <a16:creationId xmlns:a16="http://schemas.microsoft.com/office/drawing/2014/main" id="{96030065-196E-4547-BA94-ADCDDB2DA09D}"/>
+                <a16:creationId xmlns:a16="http://schemas.microsoft.com/office/drawing/2014/main" id="{368F86BB-83AB-4263-85FB-BC05E07E2A3B}"/>
               </a:ext>
             </a:extLst>
           </p:cNvPr>
@@ -15914,7 +15914,7 @@
           <p:cNvPr id="75" name="">
             <a:extLst xmlns:a="http://schemas.openxmlformats.org/drawingml/2006/main">
               <a:ext uri="{FF2B5EF4-FFF2-40B4-BE49-F238E27FC236}">
-                <a16:creationId xmlns:a16="http://schemas.microsoft.com/office/drawing/2014/main" id="{08D966F7-F2FC-4B88-AC59-13C156D5E241}"/>
+                <a16:creationId xmlns:a16="http://schemas.microsoft.com/office/drawing/2014/main" id="{59CCA6FC-B47E-4A1C-8631-1C390AB7FCAC}"/>
               </a:ext>
             </a:extLst>
           </p:cNvPr>
@@ -15966,7 +15966,7 @@
           <p:cNvPr id="76" name="">
             <a:extLst xmlns:a="http://schemas.openxmlformats.org/drawingml/2006/main">
               <a:ext uri="{FF2B5EF4-FFF2-40B4-BE49-F238E27FC236}">
-                <a16:creationId xmlns:a16="http://schemas.microsoft.com/office/drawing/2014/main" id="{BA3DEB70-6AD6-41F9-A14C-5795CB6F2296}"/>
+                <a16:creationId xmlns:a16="http://schemas.microsoft.com/office/drawing/2014/main" id="{B20D4115-5462-44C0-9B86-4A111C7680DC}"/>
               </a:ext>
             </a:extLst>
           </p:cNvPr>
@@ -15997,7 +15997,7 @@
           <p:cNvPr id="77" name="">
             <a:extLst xmlns:a="http://schemas.openxmlformats.org/drawingml/2006/main">
               <a:ext uri="{FF2B5EF4-FFF2-40B4-BE49-F238E27FC236}">
-                <a16:creationId xmlns:a16="http://schemas.microsoft.com/office/drawing/2014/main" id="{9192B914-FC80-4D11-BEFB-A59B5E36E2AC}"/>
+                <a16:creationId xmlns:a16="http://schemas.microsoft.com/office/drawing/2014/main" id="{AE7D8B04-257A-4C74-A879-1F18546032B6}"/>
               </a:ext>
             </a:extLst>
           </p:cNvPr>
@@ -16028,7 +16028,7 @@
           <p:cNvPr id="78" name="">
             <a:extLst xmlns:a="http://schemas.openxmlformats.org/drawingml/2006/main">
               <a:ext uri="{FF2B5EF4-FFF2-40B4-BE49-F238E27FC236}">
-                <a16:creationId xmlns:a16="http://schemas.microsoft.com/office/drawing/2014/main" id="{D3FDEEBC-5362-4373-B99A-DD76809C431B}"/>
+                <a16:creationId xmlns:a16="http://schemas.microsoft.com/office/drawing/2014/main" id="{55CD46EC-A64F-4838-8989-2138C23350C0}"/>
               </a:ext>
             </a:extLst>
           </p:cNvPr>
@@ -16080,7 +16080,7 @@
           <p:cNvPr id="79" name="">
             <a:extLst xmlns:a="http://schemas.openxmlformats.org/drawingml/2006/main">
               <a:ext uri="{FF2B5EF4-FFF2-40B4-BE49-F238E27FC236}">
-                <a16:creationId xmlns:a16="http://schemas.microsoft.com/office/drawing/2014/main" id="{7E928EDA-AC3B-4AAB-9CC8-8A911BF0E776}"/>
+                <a16:creationId xmlns:a16="http://schemas.microsoft.com/office/drawing/2014/main" id="{5590FC5A-5F43-4153-911C-F644F57938A4}"/>
               </a:ext>
             </a:extLst>
           </p:cNvPr>
@@ -16132,7 +16132,7 @@
           <p:cNvPr id="80" name="">
             <a:extLst xmlns:a="http://schemas.openxmlformats.org/drawingml/2006/main">
               <a:ext uri="{FF2B5EF4-FFF2-40B4-BE49-F238E27FC236}">
-                <a16:creationId xmlns:a16="http://schemas.microsoft.com/office/drawing/2014/main" id="{98198705-FAFD-4278-90E8-9DB7E512CBF0}"/>
+                <a16:creationId xmlns:a16="http://schemas.microsoft.com/office/drawing/2014/main" id="{F3156B86-F8B7-417A-9A6B-5412BE61EECE}"/>
               </a:ext>
             </a:extLst>
           </p:cNvPr>
@@ -16184,7 +16184,7 @@
           <p:cNvPr id="81" name="">
             <a:extLst xmlns:a="http://schemas.openxmlformats.org/drawingml/2006/main">
               <a:ext uri="{FF2B5EF4-FFF2-40B4-BE49-F238E27FC236}">
-                <a16:creationId xmlns:a16="http://schemas.microsoft.com/office/drawing/2014/main" id="{3C9D27CC-0C7A-4978-8FC9-442E129CB7A2}"/>
+                <a16:creationId xmlns:a16="http://schemas.microsoft.com/office/drawing/2014/main" id="{2ED530E5-9AF6-4356-BC90-8274FC80F21F}"/>
               </a:ext>
             </a:extLst>
           </p:cNvPr>
@@ -16236,7 +16236,7 @@
           <p:cNvPr id="82" name="">
             <a:extLst xmlns:a="http://schemas.openxmlformats.org/drawingml/2006/main">
               <a:ext uri="{FF2B5EF4-FFF2-40B4-BE49-F238E27FC236}">
-                <a16:creationId xmlns:a16="http://schemas.microsoft.com/office/drawing/2014/main" id="{2A8FA4FC-9635-45C8-AED3-A925905908A4}"/>
+                <a16:creationId xmlns:a16="http://schemas.microsoft.com/office/drawing/2014/main" id="{25CC9572-E5AD-4572-915F-C0EF4F7330E8}"/>
               </a:ext>
             </a:extLst>
           </p:cNvPr>
@@ -16288,7 +16288,7 @@
           <p:cNvPr id="83" name="">
             <a:extLst xmlns:a="http://schemas.openxmlformats.org/drawingml/2006/main">
               <a:ext uri="{FF2B5EF4-FFF2-40B4-BE49-F238E27FC236}">
-                <a16:creationId xmlns:a16="http://schemas.microsoft.com/office/drawing/2014/main" id="{D0AA8ABA-93F4-4934-A147-30981F4DE319}"/>
+                <a16:creationId xmlns:a16="http://schemas.microsoft.com/office/drawing/2014/main" id="{6435F3B8-1ADC-4BA0-BB71-6343A20AD44F}"/>
               </a:ext>
             </a:extLst>
           </p:cNvPr>
@@ -16319,7 +16319,7 @@
           <p:cNvPr id="84" name="">
             <a:extLst xmlns:a="http://schemas.openxmlformats.org/drawingml/2006/main">
               <a:ext uri="{FF2B5EF4-FFF2-40B4-BE49-F238E27FC236}">
-                <a16:creationId xmlns:a16="http://schemas.microsoft.com/office/drawing/2014/main" id="{D2ABFD02-FC15-4739-9D1E-07A854893F2F}"/>
+                <a16:creationId xmlns:a16="http://schemas.microsoft.com/office/drawing/2014/main" id="{17562C0B-3A8D-48FF-A417-2DD81012143D}"/>
               </a:ext>
             </a:extLst>
           </p:cNvPr>
@@ -16371,7 +16371,7 @@
           <p:cNvPr id="85" name="">
             <a:extLst xmlns:a="http://schemas.openxmlformats.org/drawingml/2006/main">
               <a:ext uri="{FF2B5EF4-FFF2-40B4-BE49-F238E27FC236}">
-                <a16:creationId xmlns:a16="http://schemas.microsoft.com/office/drawing/2014/main" id="{61839FE2-46C0-48F1-B209-9A84867FBB45}"/>
+                <a16:creationId xmlns:a16="http://schemas.microsoft.com/office/drawing/2014/main" id="{BF954B32-AD0C-4A5D-A0EC-7751E1FE585E}"/>
               </a:ext>
             </a:extLst>
           </p:cNvPr>
@@ -16423,7 +16423,7 @@
           <p:cNvPr id="86" name="">
             <a:extLst xmlns:a="http://schemas.openxmlformats.org/drawingml/2006/main">
               <a:ext uri="{FF2B5EF4-FFF2-40B4-BE49-F238E27FC236}">
-                <a16:creationId xmlns:a16="http://schemas.microsoft.com/office/drawing/2014/main" id="{8DF5DE6D-5799-4EBC-B02C-51973FBFD5DF}"/>
+                <a16:creationId xmlns:a16="http://schemas.microsoft.com/office/drawing/2014/main" id="{D53D4661-B374-4BFD-A755-080D765799CF}"/>
               </a:ext>
             </a:extLst>
           </p:cNvPr>
@@ -16475,7 +16475,7 @@
           <p:cNvPr id="87" name="">
             <a:extLst xmlns:a="http://schemas.openxmlformats.org/drawingml/2006/main">
               <a:ext uri="{FF2B5EF4-FFF2-40B4-BE49-F238E27FC236}">
-                <a16:creationId xmlns:a16="http://schemas.microsoft.com/office/drawing/2014/main" id="{D3A2A743-8775-4BA3-AA8F-472FD4CC039D}"/>
+                <a16:creationId xmlns:a16="http://schemas.microsoft.com/office/drawing/2014/main" id="{AACEC2F6-BC4D-4C19-9408-5E691238223D}"/>
               </a:ext>
             </a:extLst>
           </p:cNvPr>
@@ -16527,7 +16527,7 @@
           <p:cNvPr id="88" name="">
             <a:extLst xmlns:a="http://schemas.openxmlformats.org/drawingml/2006/main">
               <a:ext uri="{FF2B5EF4-FFF2-40B4-BE49-F238E27FC236}">
-                <a16:creationId xmlns:a16="http://schemas.microsoft.com/office/drawing/2014/main" id="{C6835935-D7D3-41F3-9849-5A7770E713FA}"/>
+                <a16:creationId xmlns:a16="http://schemas.microsoft.com/office/drawing/2014/main" id="{2DD1A886-1749-488D-807D-7EAFB6967D23}"/>
               </a:ext>
             </a:extLst>
           </p:cNvPr>
@@ -16579,7 +16579,7 @@
           <p:cNvPr id="89" name="">
             <a:extLst xmlns:a="http://schemas.openxmlformats.org/drawingml/2006/main">
               <a:ext uri="{FF2B5EF4-FFF2-40B4-BE49-F238E27FC236}">
-                <a16:creationId xmlns:a16="http://schemas.microsoft.com/office/drawing/2014/main" id="{687C2E1C-BD9F-42CF-9CC3-1ADE9D8D39EA}"/>
+                <a16:creationId xmlns:a16="http://schemas.microsoft.com/office/drawing/2014/main" id="{90CCB176-8CE1-4A82-A995-B94A5B7BC1B9}"/>
               </a:ext>
             </a:extLst>
           </p:cNvPr>
@@ -16610,7 +16610,7 @@
           <p:cNvPr id="90" name="">
             <a:extLst xmlns:a="http://schemas.openxmlformats.org/drawingml/2006/main">
               <a:ext uri="{FF2B5EF4-FFF2-40B4-BE49-F238E27FC236}">
-                <a16:creationId xmlns:a16="http://schemas.microsoft.com/office/drawing/2014/main" id="{AABF9811-C90C-4DCA-9E1A-C46DB9E7EF6E}"/>
+                <a16:creationId xmlns:a16="http://schemas.microsoft.com/office/drawing/2014/main" id="{EF379DD1-FABE-497C-A03F-19AB6CC89C15}"/>
               </a:ext>
             </a:extLst>
           </p:cNvPr>
@@ -16641,7 +16641,7 @@
           <p:cNvPr id="91" name="">
             <a:extLst xmlns:a="http://schemas.openxmlformats.org/drawingml/2006/main">
               <a:ext uri="{FF2B5EF4-FFF2-40B4-BE49-F238E27FC236}">
-                <a16:creationId xmlns:a16="http://schemas.microsoft.com/office/drawing/2014/main" id="{5F51FAE8-DEDE-4A93-ADB3-6BC870FAFB3A}"/>
+                <a16:creationId xmlns:a16="http://schemas.microsoft.com/office/drawing/2014/main" id="{F3A8E897-4E90-4275-9212-2809CB3D2E7A}"/>
               </a:ext>
             </a:extLst>
           </p:cNvPr>
@@ -16693,7 +16693,7 @@
           <p:cNvPr id="92" name="">
             <a:extLst xmlns:a="http://schemas.openxmlformats.org/drawingml/2006/main">
               <a:ext uri="{FF2B5EF4-FFF2-40B4-BE49-F238E27FC236}">
-                <a16:creationId xmlns:a16="http://schemas.microsoft.com/office/drawing/2014/main" id="{5AF4B509-5AA7-41CD-A5E1-4B658E7CF2A9}"/>
+                <a16:creationId xmlns:a16="http://schemas.microsoft.com/office/drawing/2014/main" id="{2791FD81-33F0-40DE-BF36-0AC6C6714B91}"/>
               </a:ext>
             </a:extLst>
           </p:cNvPr>
@@ -16745,7 +16745,7 @@
           <p:cNvPr id="93" name="">
             <a:extLst xmlns:a="http://schemas.openxmlformats.org/drawingml/2006/main">
               <a:ext uri="{FF2B5EF4-FFF2-40B4-BE49-F238E27FC236}">
-                <a16:creationId xmlns:a16="http://schemas.microsoft.com/office/drawing/2014/main" id="{A55458D1-DCDA-4FBC-AC88-57D955DF989A}"/>
+                <a16:creationId xmlns:a16="http://schemas.microsoft.com/office/drawing/2014/main" id="{B31E6D44-3168-4C81-A47A-06E6F1DEB68E}"/>
               </a:ext>
             </a:extLst>
           </p:cNvPr>
@@ -16797,7 +16797,7 @@
           <p:cNvPr id="94" name="">
             <a:extLst xmlns:a="http://schemas.openxmlformats.org/drawingml/2006/main">
               <a:ext uri="{FF2B5EF4-FFF2-40B4-BE49-F238E27FC236}">
-                <a16:creationId xmlns:a16="http://schemas.microsoft.com/office/drawing/2014/main" id="{3AEBF1C1-4650-4073-93C2-411EF89B315E}"/>
+                <a16:creationId xmlns:a16="http://schemas.microsoft.com/office/drawing/2014/main" id="{95A03B94-DCA8-47F1-AFC7-4896FB11810B}"/>
               </a:ext>
             </a:extLst>
           </p:cNvPr>
@@ -16849,7 +16849,7 @@
           <p:cNvPr id="95" name="">
             <a:extLst xmlns:a="http://schemas.openxmlformats.org/drawingml/2006/main">
               <a:ext uri="{FF2B5EF4-FFF2-40B4-BE49-F238E27FC236}">
-                <a16:creationId xmlns:a16="http://schemas.microsoft.com/office/drawing/2014/main" id="{7019B4E5-33CF-4656-96AE-B94DED1AE46D}"/>
+                <a16:creationId xmlns:a16="http://schemas.microsoft.com/office/drawing/2014/main" id="{D414AE83-9F71-44A8-A5AB-24791910883C}"/>
               </a:ext>
             </a:extLst>
           </p:cNvPr>
@@ -16901,7 +16901,7 @@
           <p:cNvPr id="96" name="">
             <a:extLst xmlns:a="http://schemas.openxmlformats.org/drawingml/2006/main">
               <a:ext uri="{FF2B5EF4-FFF2-40B4-BE49-F238E27FC236}">
-                <a16:creationId xmlns:a16="http://schemas.microsoft.com/office/drawing/2014/main" id="{AE1BE671-324B-4E03-8A1D-AF8EE2CAD2DD}"/>
+                <a16:creationId xmlns:a16="http://schemas.microsoft.com/office/drawing/2014/main" id="{BC6C63AC-E776-4726-A3CC-0C2DBFB5977D}"/>
               </a:ext>
             </a:extLst>
           </p:cNvPr>
@@ -16932,7 +16932,7 @@
           <p:cNvPr id="97" name="">
             <a:extLst xmlns:a="http://schemas.openxmlformats.org/drawingml/2006/main">
               <a:ext uri="{FF2B5EF4-FFF2-40B4-BE49-F238E27FC236}">
-                <a16:creationId xmlns:a16="http://schemas.microsoft.com/office/drawing/2014/main" id="{23D4914D-AEE4-457C-BFA3-FC8F9BAE35B0}"/>
+                <a16:creationId xmlns:a16="http://schemas.microsoft.com/office/drawing/2014/main" id="{6333400A-F47B-4B3D-884B-15159F8FB5C1}"/>
               </a:ext>
             </a:extLst>
           </p:cNvPr>
@@ -16984,7 +16984,7 @@
           <p:cNvPr id="98" name="">
             <a:extLst xmlns:a="http://schemas.openxmlformats.org/drawingml/2006/main">
               <a:ext uri="{FF2B5EF4-FFF2-40B4-BE49-F238E27FC236}">
-                <a16:creationId xmlns:a16="http://schemas.microsoft.com/office/drawing/2014/main" id="{FBAD7EF0-FFF7-4663-A022-AD4D7309B86C}"/>
+                <a16:creationId xmlns:a16="http://schemas.microsoft.com/office/drawing/2014/main" id="{703779BF-6F6E-4A7E-86E5-DC76FB9571FC}"/>
               </a:ext>
             </a:extLst>
           </p:cNvPr>
@@ -17036,7 +17036,7 @@
           <p:cNvPr id="99" name="">
             <a:extLst xmlns:a="http://schemas.openxmlformats.org/drawingml/2006/main">
               <a:ext uri="{FF2B5EF4-FFF2-40B4-BE49-F238E27FC236}">
-                <a16:creationId xmlns:a16="http://schemas.microsoft.com/office/drawing/2014/main" id="{FB5D9673-33D1-4150-B4C2-3AC19EB64F9F}"/>
+                <a16:creationId xmlns:a16="http://schemas.microsoft.com/office/drawing/2014/main" id="{5332F94E-52A1-4D3E-A2BA-F010DA7F9EEF}"/>
               </a:ext>
             </a:extLst>
           </p:cNvPr>
@@ -17088,7 +17088,7 @@
           <p:cNvPr id="100" name="">
             <a:extLst xmlns:a="http://schemas.openxmlformats.org/drawingml/2006/main">
               <a:ext uri="{FF2B5EF4-FFF2-40B4-BE49-F238E27FC236}">
-                <a16:creationId xmlns:a16="http://schemas.microsoft.com/office/drawing/2014/main" id="{068E4061-3AC8-48B4-824D-132D0D73F9C3}"/>
+                <a16:creationId xmlns:a16="http://schemas.microsoft.com/office/drawing/2014/main" id="{00F5D9FE-BDAC-4062-B653-95344CE99C8C}"/>
               </a:ext>
             </a:extLst>
           </p:cNvPr>
@@ -17140,7 +17140,7 @@
           <p:cNvPr id="101" name="">
             <a:extLst xmlns:a="http://schemas.openxmlformats.org/drawingml/2006/main">
               <a:ext uri="{FF2B5EF4-FFF2-40B4-BE49-F238E27FC236}">
-                <a16:creationId xmlns:a16="http://schemas.microsoft.com/office/drawing/2014/main" id="{ACEE9227-1B84-4277-98A9-22ACFCF467C7}"/>
+                <a16:creationId xmlns:a16="http://schemas.microsoft.com/office/drawing/2014/main" id="{10A30BE8-13C2-4B24-B90B-43C38FC7D061}"/>
               </a:ext>
             </a:extLst>
           </p:cNvPr>
@@ -17190,7 +17190,7 @@
     </p:spTree>
     <p:extLst>
       <p:ext uri="{BB962C8B-B14F-4D97-AF65-F5344CB8AC3E}">
-        <p14:creationId xmlns:p14="http://schemas.microsoft.com/office/powerpoint/2010/main" val="2004083469"/>
+        <p14:creationId xmlns:p14="http://schemas.microsoft.com/office/powerpoint/2010/main" val="1203667310"/>
       </p:ext>
     </p:extLst>
   </p:cSld>
@@ -17221,7 +17221,7 @@
           <p:cNvPr id="96" name="">
             <a:extLst xmlns:a="http://schemas.openxmlformats.org/drawingml/2006/main">
               <a:ext uri="{FF2B5EF4-FFF2-40B4-BE49-F238E27FC236}">
-                <a16:creationId xmlns:a16="http://schemas.microsoft.com/office/drawing/2014/main" id="{43B6BFBC-9483-4FFD-9739-57FEBDACC5E7}"/>
+                <a16:creationId xmlns:a16="http://schemas.microsoft.com/office/drawing/2014/main" id="{376AB615-5256-41B4-A584-98EC21A93D00}"/>
               </a:ext>
             </a:extLst>
           </p:cNvPr>
@@ -17254,7 +17254,7 @@
           <p:cNvPr id="2" name="">
             <a:extLst xmlns:a="http://schemas.openxmlformats.org/drawingml/2006/main">
               <a:ext uri="{FF2B5EF4-FFF2-40B4-BE49-F238E27FC236}">
-                <a16:creationId xmlns:a16="http://schemas.microsoft.com/office/drawing/2014/main" id="{5CF83ACF-FE2D-48CC-90AF-1B113F180AC6}"/>
+                <a16:creationId xmlns:a16="http://schemas.microsoft.com/office/drawing/2014/main" id="{51B11008-20B9-4207-8B12-BE9BFE041CEB}"/>
               </a:ext>
             </a:extLst>
           </p:cNvPr>
@@ -17285,7 +17285,7 @@
           <p:cNvPr id="3" name="">
             <a:extLst xmlns:a="http://schemas.openxmlformats.org/drawingml/2006/main">
               <a:ext uri="{FF2B5EF4-FFF2-40B4-BE49-F238E27FC236}">
-                <a16:creationId xmlns:a16="http://schemas.microsoft.com/office/drawing/2014/main" id="{DB26206F-2E90-4A2E-8266-E2E37BE1B45B}"/>
+                <a16:creationId xmlns:a16="http://schemas.microsoft.com/office/drawing/2014/main" id="{A9F61B83-FA7A-4A4F-AF29-C886C8DF57A1}"/>
               </a:ext>
             </a:extLst>
           </p:cNvPr>
@@ -17337,7 +17337,7 @@
           <p:cNvPr id="4" name="">
             <a:extLst xmlns:a="http://schemas.openxmlformats.org/drawingml/2006/main">
               <a:ext uri="{FF2B5EF4-FFF2-40B4-BE49-F238E27FC236}">
-                <a16:creationId xmlns:a16="http://schemas.microsoft.com/office/drawing/2014/main" id="{9C92A682-CDBC-40F9-ACE3-CEDCC3E62CF3}"/>
+                <a16:creationId xmlns:a16="http://schemas.microsoft.com/office/drawing/2014/main" id="{79821A85-EEDF-4183-AC5A-8D1F65D88CB8}"/>
               </a:ext>
             </a:extLst>
           </p:cNvPr>
@@ -17389,7 +17389,7 @@
           <p:cNvPr id="5" name="">
             <a:extLst xmlns:a="http://schemas.openxmlformats.org/drawingml/2006/main">
               <a:ext uri="{FF2B5EF4-FFF2-40B4-BE49-F238E27FC236}">
-                <a16:creationId xmlns:a16="http://schemas.microsoft.com/office/drawing/2014/main" id="{CA0DBC90-AD56-41DB-8493-5DF9943FA5EB}"/>
+                <a16:creationId xmlns:a16="http://schemas.microsoft.com/office/drawing/2014/main" id="{B575EA44-E35B-48F2-B3C0-71EDDBCE0099}"/>
               </a:ext>
             </a:extLst>
           </p:cNvPr>
@@ -17424,7 +17424,7 @@
           <p:nvPr/>
         </p:nvPicPr>
         <p:blipFill>
-          <a:blip xmlns:r="http://schemas.openxmlformats.org/officeDocument/2006/relationships" xmlns:a="http://schemas.openxmlformats.org/drawingml/2006/main" r:embed="R4c0b11020e684bab"/>
+          <a:blip xmlns:r="http://schemas.openxmlformats.org/officeDocument/2006/relationships" xmlns:a="http://schemas.openxmlformats.org/drawingml/2006/main" r:embed="R40a202480a864e9e"/>
           <a:stretch xmlns:a="http://schemas.openxmlformats.org/drawingml/2006/main"/>
         </p:blipFill>
         <p:spPr>
@@ -17442,7 +17442,7 @@
           <p:cNvPr id="7" name="">
             <a:extLst xmlns:a="http://schemas.openxmlformats.org/drawingml/2006/main">
               <a:ext uri="{FF2B5EF4-FFF2-40B4-BE49-F238E27FC236}">
-                <a16:creationId xmlns:a16="http://schemas.microsoft.com/office/drawing/2014/main" id="{E8473F08-D5E2-4B7F-BD8B-4874EE46FEDD}"/>
+                <a16:creationId xmlns:a16="http://schemas.microsoft.com/office/drawing/2014/main" id="{80405D40-7241-4684-9FA6-6EDA2CDC5948}"/>
               </a:ext>
             </a:extLst>
           </p:cNvPr>
@@ -17494,7 +17494,7 @@
           <p:cNvPr id="8" name="">
             <a:extLst xmlns:a="http://schemas.openxmlformats.org/drawingml/2006/main">
               <a:ext uri="{FF2B5EF4-FFF2-40B4-BE49-F238E27FC236}">
-                <a16:creationId xmlns:a16="http://schemas.microsoft.com/office/drawing/2014/main" id="{6BF049C3-CF7C-4DC1-A88C-18663E6892D7}"/>
+                <a16:creationId xmlns:a16="http://schemas.microsoft.com/office/drawing/2014/main" id="{318ACDF3-B351-4C53-9C53-ACF9340BB77D}"/>
               </a:ext>
             </a:extLst>
           </p:cNvPr>
@@ -17546,7 +17546,7 @@
           <p:cNvPr id="9" name="">
             <a:extLst xmlns:a="http://schemas.openxmlformats.org/drawingml/2006/main">
               <a:ext uri="{FF2B5EF4-FFF2-40B4-BE49-F238E27FC236}">
-                <a16:creationId xmlns:a16="http://schemas.microsoft.com/office/drawing/2014/main" id="{83E02591-D66D-424E-97F9-1CE5448173B6}"/>
+                <a16:creationId xmlns:a16="http://schemas.microsoft.com/office/drawing/2014/main" id="{39757BBE-1300-4E33-B4F4-F5021B679F3B}"/>
               </a:ext>
             </a:extLst>
           </p:cNvPr>
@@ -17598,7 +17598,7 @@
           <p:cNvPr id="10" name="">
             <a:extLst xmlns:a="http://schemas.openxmlformats.org/drawingml/2006/main">
               <a:ext uri="{FF2B5EF4-FFF2-40B4-BE49-F238E27FC236}">
-                <a16:creationId xmlns:a16="http://schemas.microsoft.com/office/drawing/2014/main" id="{CAC94F0B-A4DE-4B8B-8CAB-5C85B7DF79BA}"/>
+                <a16:creationId xmlns:a16="http://schemas.microsoft.com/office/drawing/2014/main" id="{8E740A73-77AB-4B39-B6CE-9707BE03B0DB}"/>
               </a:ext>
             </a:extLst>
           </p:cNvPr>
@@ -17650,7 +17650,7 @@
           <p:cNvPr id="11" name="">
             <a:extLst xmlns:a="http://schemas.openxmlformats.org/drawingml/2006/main">
               <a:ext uri="{FF2B5EF4-FFF2-40B4-BE49-F238E27FC236}">
-                <a16:creationId xmlns:a16="http://schemas.microsoft.com/office/drawing/2014/main" id="{3ECD694C-6B44-44CC-B0CD-C5CEB728B560}"/>
+                <a16:creationId xmlns:a16="http://schemas.microsoft.com/office/drawing/2014/main" id="{9463F07B-D9FB-4270-8F63-BDCC1AF3897F}"/>
               </a:ext>
             </a:extLst>
           </p:cNvPr>
@@ -17681,7 +17681,7 @@
           <p:cNvPr id="12" name="">
             <a:extLst xmlns:a="http://schemas.openxmlformats.org/drawingml/2006/main">
               <a:ext uri="{FF2B5EF4-FFF2-40B4-BE49-F238E27FC236}">
-                <a16:creationId xmlns:a16="http://schemas.microsoft.com/office/drawing/2014/main" id="{1E208CB6-6555-4843-B1E1-4477D3BD1248}"/>
+                <a16:creationId xmlns:a16="http://schemas.microsoft.com/office/drawing/2014/main" id="{798D2EA1-C14E-4241-8780-6660BAAB0AC8}"/>
               </a:ext>
             </a:extLst>
           </p:cNvPr>
@@ -17712,7 +17712,7 @@
           <p:cNvPr id="13" name="">
             <a:extLst xmlns:a="http://schemas.openxmlformats.org/drawingml/2006/main">
               <a:ext uri="{FF2B5EF4-FFF2-40B4-BE49-F238E27FC236}">
-                <a16:creationId xmlns:a16="http://schemas.microsoft.com/office/drawing/2014/main" id="{AC65850F-1303-4263-BEF8-E71329A77B1A}"/>
+                <a16:creationId xmlns:a16="http://schemas.microsoft.com/office/drawing/2014/main" id="{A1B98946-9E35-41FE-8140-0EB033CBCC9C}"/>
               </a:ext>
             </a:extLst>
           </p:cNvPr>
@@ -17764,7 +17764,7 @@
           <p:cNvPr id="14" name="">
             <a:extLst xmlns:a="http://schemas.openxmlformats.org/drawingml/2006/main">
               <a:ext uri="{FF2B5EF4-FFF2-40B4-BE49-F238E27FC236}">
-                <a16:creationId xmlns:a16="http://schemas.microsoft.com/office/drawing/2014/main" id="{1879448D-0A94-4F3B-A872-6D50FE0B4B7B}"/>
+                <a16:creationId xmlns:a16="http://schemas.microsoft.com/office/drawing/2014/main" id="{F22BEE4D-4D20-48F2-9667-29F4152A80E5}"/>
               </a:ext>
             </a:extLst>
           </p:cNvPr>
@@ -17816,7 +17816,7 @@
           <p:cNvPr id="15" name="">
             <a:extLst xmlns:a="http://schemas.openxmlformats.org/drawingml/2006/main">
               <a:ext uri="{FF2B5EF4-FFF2-40B4-BE49-F238E27FC236}">
-                <a16:creationId xmlns:a16="http://schemas.microsoft.com/office/drawing/2014/main" id="{9A983083-E3D9-46D9-B6C9-1347BB87A2BF}"/>
+                <a16:creationId xmlns:a16="http://schemas.microsoft.com/office/drawing/2014/main" id="{DD24BB74-8B06-4124-BD9D-26113E075E82}"/>
               </a:ext>
             </a:extLst>
           </p:cNvPr>
@@ -17868,7 +17868,7 @@
           <p:cNvPr id="16" name="">
             <a:extLst xmlns:a="http://schemas.openxmlformats.org/drawingml/2006/main">
               <a:ext uri="{FF2B5EF4-FFF2-40B4-BE49-F238E27FC236}">
-                <a16:creationId xmlns:a16="http://schemas.microsoft.com/office/drawing/2014/main" id="{60CC4B4A-A7E5-4540-A859-453518F852A6}"/>
+                <a16:creationId xmlns:a16="http://schemas.microsoft.com/office/drawing/2014/main" id="{BC0CF01C-33F0-48B8-9147-47DE5D5AA39D}"/>
               </a:ext>
             </a:extLst>
           </p:cNvPr>
@@ -17920,7 +17920,7 @@
           <p:cNvPr id="17" name="">
             <a:extLst xmlns:a="http://schemas.openxmlformats.org/drawingml/2006/main">
               <a:ext uri="{FF2B5EF4-FFF2-40B4-BE49-F238E27FC236}">
-                <a16:creationId xmlns:a16="http://schemas.microsoft.com/office/drawing/2014/main" id="{36680920-9050-4B63-8D6F-3DCA79FADA4B}"/>
+                <a16:creationId xmlns:a16="http://schemas.microsoft.com/office/drawing/2014/main" id="{D5E48014-A5CA-44C2-B780-11D6992C268E}"/>
               </a:ext>
             </a:extLst>
           </p:cNvPr>
@@ -17972,7 +17972,7 @@
           <p:cNvPr id="18" name="">
             <a:extLst xmlns:a="http://schemas.openxmlformats.org/drawingml/2006/main">
               <a:ext uri="{FF2B5EF4-FFF2-40B4-BE49-F238E27FC236}">
-                <a16:creationId xmlns:a16="http://schemas.microsoft.com/office/drawing/2014/main" id="{10A44678-DB46-4323-8955-45371B5F5478}"/>
+                <a16:creationId xmlns:a16="http://schemas.microsoft.com/office/drawing/2014/main" id="{AFB51C69-96F6-4C76-8C17-4A05967739A8}"/>
               </a:ext>
             </a:extLst>
           </p:cNvPr>
@@ -18003,7 +18003,7 @@
           <p:cNvPr id="19" name="">
             <a:extLst xmlns:a="http://schemas.openxmlformats.org/drawingml/2006/main">
               <a:ext uri="{FF2B5EF4-FFF2-40B4-BE49-F238E27FC236}">
-                <a16:creationId xmlns:a16="http://schemas.microsoft.com/office/drawing/2014/main" id="{13F85981-E6EE-4179-B9C8-3536D39C9E29}"/>
+                <a16:creationId xmlns:a16="http://schemas.microsoft.com/office/drawing/2014/main" id="{64ED396A-3499-44F4-9EB7-62A080841B5D}"/>
               </a:ext>
             </a:extLst>
           </p:cNvPr>
@@ -18034,7 +18034,7 @@
           <p:cNvPr id="20" name="">
             <a:extLst xmlns:a="http://schemas.openxmlformats.org/drawingml/2006/main">
               <a:ext uri="{FF2B5EF4-FFF2-40B4-BE49-F238E27FC236}">
-                <a16:creationId xmlns:a16="http://schemas.microsoft.com/office/drawing/2014/main" id="{E9D1EABE-0AF5-4FD5-86C2-6E9861DD4713}"/>
+                <a16:creationId xmlns:a16="http://schemas.microsoft.com/office/drawing/2014/main" id="{E65F045C-4DA9-4EE6-9081-5A3FF195CE83}"/>
               </a:ext>
             </a:extLst>
           </p:cNvPr>
@@ -18086,7 +18086,7 @@
           <p:cNvPr id="21" name="">
             <a:extLst xmlns:a="http://schemas.openxmlformats.org/drawingml/2006/main">
               <a:ext uri="{FF2B5EF4-FFF2-40B4-BE49-F238E27FC236}">
-                <a16:creationId xmlns:a16="http://schemas.microsoft.com/office/drawing/2014/main" id="{D3F83FAF-698F-4913-8CD2-B0C6D6AED439}"/>
+                <a16:creationId xmlns:a16="http://schemas.microsoft.com/office/drawing/2014/main" id="{8CF3C82A-438A-4454-92A9-8F2A3E88CBC4}"/>
               </a:ext>
             </a:extLst>
           </p:cNvPr>
@@ -18138,7 +18138,7 @@
           <p:cNvPr id="22" name="">
             <a:extLst xmlns:a="http://schemas.openxmlformats.org/drawingml/2006/main">
               <a:ext uri="{FF2B5EF4-FFF2-40B4-BE49-F238E27FC236}">
-                <a16:creationId xmlns:a16="http://schemas.microsoft.com/office/drawing/2014/main" id="{C23DD35E-8E4D-45DA-BAD8-4F4499B853A1}"/>
+                <a16:creationId xmlns:a16="http://schemas.microsoft.com/office/drawing/2014/main" id="{CD496AF8-F1CB-403E-B81A-9331D09984C9}"/>
               </a:ext>
             </a:extLst>
           </p:cNvPr>
@@ -18190,7 +18190,7 @@
           <p:cNvPr id="23" name="">
             <a:extLst xmlns:a="http://schemas.openxmlformats.org/drawingml/2006/main">
               <a:ext uri="{FF2B5EF4-FFF2-40B4-BE49-F238E27FC236}">
-                <a16:creationId xmlns:a16="http://schemas.microsoft.com/office/drawing/2014/main" id="{25EBCBF7-468D-48C0-B65D-5A0FD5833FCA}"/>
+                <a16:creationId xmlns:a16="http://schemas.microsoft.com/office/drawing/2014/main" id="{BF52AF7A-1B99-45F0-8270-D130B6AFD50D}"/>
               </a:ext>
             </a:extLst>
           </p:cNvPr>
@@ -18242,7 +18242,7 @@
           <p:cNvPr id="24" name="">
             <a:extLst xmlns:a="http://schemas.openxmlformats.org/drawingml/2006/main">
               <a:ext uri="{FF2B5EF4-FFF2-40B4-BE49-F238E27FC236}">
-                <a16:creationId xmlns:a16="http://schemas.microsoft.com/office/drawing/2014/main" id="{FBABFE70-54A1-4BCF-8B85-4FA793C8E6A7}"/>
+                <a16:creationId xmlns:a16="http://schemas.microsoft.com/office/drawing/2014/main" id="{64FA74DE-BB98-4EA8-BD3B-2CEA6B31D936}"/>
               </a:ext>
             </a:extLst>
           </p:cNvPr>
@@ -18294,7 +18294,7 @@
           <p:cNvPr id="25" name="">
             <a:extLst xmlns:a="http://schemas.openxmlformats.org/drawingml/2006/main">
               <a:ext uri="{FF2B5EF4-FFF2-40B4-BE49-F238E27FC236}">
-                <a16:creationId xmlns:a16="http://schemas.microsoft.com/office/drawing/2014/main" id="{38957916-50E1-41C5-821A-17A030926C8D}"/>
+                <a16:creationId xmlns:a16="http://schemas.microsoft.com/office/drawing/2014/main" id="{B81C8296-E1B3-41EF-87AB-D1AF10A7142A}"/>
               </a:ext>
             </a:extLst>
           </p:cNvPr>
@@ -18325,7 +18325,7 @@
           <p:cNvPr id="26" name="">
             <a:extLst xmlns:a="http://schemas.openxmlformats.org/drawingml/2006/main">
               <a:ext uri="{FF2B5EF4-FFF2-40B4-BE49-F238E27FC236}">
-                <a16:creationId xmlns:a16="http://schemas.microsoft.com/office/drawing/2014/main" id="{0DF99CE3-1851-41AF-B9BE-AE5EF9257888}"/>
+                <a16:creationId xmlns:a16="http://schemas.microsoft.com/office/drawing/2014/main" id="{8907E754-D5B2-4E11-9236-EB24260FE3C6}"/>
               </a:ext>
             </a:extLst>
           </p:cNvPr>
@@ -18377,7 +18377,7 @@
           <p:cNvPr id="27" name="">
             <a:extLst xmlns:a="http://schemas.openxmlformats.org/drawingml/2006/main">
               <a:ext uri="{FF2B5EF4-FFF2-40B4-BE49-F238E27FC236}">
-                <a16:creationId xmlns:a16="http://schemas.microsoft.com/office/drawing/2014/main" id="{E6933EE2-D9AD-4B88-83AC-6982DDFB9923}"/>
+                <a16:creationId xmlns:a16="http://schemas.microsoft.com/office/drawing/2014/main" id="{277EFC60-42AC-4B13-95B3-52CD137FA6E9}"/>
               </a:ext>
             </a:extLst>
           </p:cNvPr>
@@ -18429,7 +18429,7 @@
           <p:cNvPr id="28" name="">
             <a:extLst xmlns:a="http://schemas.openxmlformats.org/drawingml/2006/main">
               <a:ext uri="{FF2B5EF4-FFF2-40B4-BE49-F238E27FC236}">
-                <a16:creationId xmlns:a16="http://schemas.microsoft.com/office/drawing/2014/main" id="{C2F8BA8A-1EE8-466F-89D2-A53AF48FADED}"/>
+                <a16:creationId xmlns:a16="http://schemas.microsoft.com/office/drawing/2014/main" id="{78F31907-9FAB-4D4A-9D34-B5DC465A3F68}"/>
               </a:ext>
             </a:extLst>
           </p:cNvPr>
@@ -18481,7 +18481,7 @@
           <p:cNvPr id="29" name="">
             <a:extLst xmlns:a="http://schemas.openxmlformats.org/drawingml/2006/main">
               <a:ext uri="{FF2B5EF4-FFF2-40B4-BE49-F238E27FC236}">
-                <a16:creationId xmlns:a16="http://schemas.microsoft.com/office/drawing/2014/main" id="{90D5A32D-029F-4645-8A8A-545BF307C39B}"/>
+                <a16:creationId xmlns:a16="http://schemas.microsoft.com/office/drawing/2014/main" id="{FF0FA05C-62F2-4EC0-837E-BDA8C943CFBC}"/>
               </a:ext>
             </a:extLst>
           </p:cNvPr>
@@ -18533,7 +18533,7 @@
           <p:cNvPr id="30" name="">
             <a:extLst xmlns:a="http://schemas.openxmlformats.org/drawingml/2006/main">
               <a:ext uri="{FF2B5EF4-FFF2-40B4-BE49-F238E27FC236}">
-                <a16:creationId xmlns:a16="http://schemas.microsoft.com/office/drawing/2014/main" id="{2F5DBF00-8B57-4109-BCD9-F9B9979B0B78}"/>
+                <a16:creationId xmlns:a16="http://schemas.microsoft.com/office/drawing/2014/main" id="{52A5F964-46C1-4190-85CE-296169F73EFD}"/>
               </a:ext>
             </a:extLst>
           </p:cNvPr>
@@ -18585,7 +18585,7 @@
           <p:cNvPr id="31" name="">
             <a:extLst xmlns:a="http://schemas.openxmlformats.org/drawingml/2006/main">
               <a:ext uri="{FF2B5EF4-FFF2-40B4-BE49-F238E27FC236}">
-                <a16:creationId xmlns:a16="http://schemas.microsoft.com/office/drawing/2014/main" id="{27FB8595-25F9-45BF-AF4D-A25AEF64E8B4}"/>
+                <a16:creationId xmlns:a16="http://schemas.microsoft.com/office/drawing/2014/main" id="{02965EAB-03E7-4F70-9C9D-27D68F940924}"/>
               </a:ext>
             </a:extLst>
           </p:cNvPr>
@@ -18616,7 +18616,7 @@
           <p:cNvPr id="32" name="">
             <a:extLst xmlns:a="http://schemas.openxmlformats.org/drawingml/2006/main">
               <a:ext uri="{FF2B5EF4-FFF2-40B4-BE49-F238E27FC236}">
-                <a16:creationId xmlns:a16="http://schemas.microsoft.com/office/drawing/2014/main" id="{D4119BBF-B713-4A74-8038-D55A9BEEC4A9}"/>
+                <a16:creationId xmlns:a16="http://schemas.microsoft.com/office/drawing/2014/main" id="{5348691C-1216-4AC0-A5D2-7B0F29C8C0D1}"/>
               </a:ext>
             </a:extLst>
           </p:cNvPr>
@@ -18647,7 +18647,7 @@
           <p:cNvPr id="33" name="">
             <a:extLst xmlns:a="http://schemas.openxmlformats.org/drawingml/2006/main">
               <a:ext uri="{FF2B5EF4-FFF2-40B4-BE49-F238E27FC236}">
-                <a16:creationId xmlns:a16="http://schemas.microsoft.com/office/drawing/2014/main" id="{AD3535D4-AD88-4AB0-A0C6-F8A54ABC562E}"/>
+                <a16:creationId xmlns:a16="http://schemas.microsoft.com/office/drawing/2014/main" id="{A25830C1-99EF-4216-A1E1-8329CE7002BA}"/>
               </a:ext>
             </a:extLst>
           </p:cNvPr>
@@ -18699,7 +18699,7 @@
           <p:cNvPr id="34" name="">
             <a:extLst xmlns:a="http://schemas.openxmlformats.org/drawingml/2006/main">
               <a:ext uri="{FF2B5EF4-FFF2-40B4-BE49-F238E27FC236}">
-                <a16:creationId xmlns:a16="http://schemas.microsoft.com/office/drawing/2014/main" id="{B1B8704C-9335-45B4-82D1-4E1AFFF5A988}"/>
+                <a16:creationId xmlns:a16="http://schemas.microsoft.com/office/drawing/2014/main" id="{E65C593E-AC98-458C-8CA8-02A3DC1C33B3}"/>
               </a:ext>
             </a:extLst>
           </p:cNvPr>
@@ -18751,7 +18751,7 @@
           <p:cNvPr id="35" name="">
             <a:extLst xmlns:a="http://schemas.openxmlformats.org/drawingml/2006/main">
               <a:ext uri="{FF2B5EF4-FFF2-40B4-BE49-F238E27FC236}">
-                <a16:creationId xmlns:a16="http://schemas.microsoft.com/office/drawing/2014/main" id="{55859348-D9FD-483B-8C00-32C7186F31B5}"/>
+                <a16:creationId xmlns:a16="http://schemas.microsoft.com/office/drawing/2014/main" id="{6046A445-1E80-4B16-AE86-FA4CDF1098C4}"/>
               </a:ext>
             </a:extLst>
           </p:cNvPr>
@@ -18803,7 +18803,7 @@
           <p:cNvPr id="36" name="">
             <a:extLst xmlns:a="http://schemas.openxmlformats.org/drawingml/2006/main">
               <a:ext uri="{FF2B5EF4-FFF2-40B4-BE49-F238E27FC236}">
-                <a16:creationId xmlns:a16="http://schemas.microsoft.com/office/drawing/2014/main" id="{AC64EDF7-6191-42D5-B545-CAE6478EC7AD}"/>
+                <a16:creationId xmlns:a16="http://schemas.microsoft.com/office/drawing/2014/main" id="{848972ED-B49A-42C8-BD41-D580FEEC99F5}"/>
               </a:ext>
             </a:extLst>
           </p:cNvPr>
@@ -18855,7 +18855,7 @@
           <p:cNvPr id="37" name="">
             <a:extLst xmlns:a="http://schemas.openxmlformats.org/drawingml/2006/main">
               <a:ext uri="{FF2B5EF4-FFF2-40B4-BE49-F238E27FC236}">
-                <a16:creationId xmlns:a16="http://schemas.microsoft.com/office/drawing/2014/main" id="{4B7F6638-EAEE-49A6-9BAE-2C3FA69F5036}"/>
+                <a16:creationId xmlns:a16="http://schemas.microsoft.com/office/drawing/2014/main" id="{F954C16E-7830-421C-8098-55B3C0C0C725}"/>
               </a:ext>
             </a:extLst>
           </p:cNvPr>
@@ -18907,7 +18907,7 @@
           <p:cNvPr id="38" name="">
             <a:extLst xmlns:a="http://schemas.openxmlformats.org/drawingml/2006/main">
               <a:ext uri="{FF2B5EF4-FFF2-40B4-BE49-F238E27FC236}">
-                <a16:creationId xmlns:a16="http://schemas.microsoft.com/office/drawing/2014/main" id="{CF9381B0-6299-4ADE-BA06-8EE01023D2AA}"/>
+                <a16:creationId xmlns:a16="http://schemas.microsoft.com/office/drawing/2014/main" id="{4267ACC3-7F4A-48D2-9F77-DAF3F028658C}"/>
               </a:ext>
             </a:extLst>
           </p:cNvPr>
@@ -18938,7 +18938,7 @@
           <p:cNvPr id="39" name="">
             <a:extLst xmlns:a="http://schemas.openxmlformats.org/drawingml/2006/main">
               <a:ext uri="{FF2B5EF4-FFF2-40B4-BE49-F238E27FC236}">
-                <a16:creationId xmlns:a16="http://schemas.microsoft.com/office/drawing/2014/main" id="{B127E277-62AB-4B8C-B57F-6B7EFA3B88ED}"/>
+                <a16:creationId xmlns:a16="http://schemas.microsoft.com/office/drawing/2014/main" id="{3B44D1BC-CAC6-4BEF-85B6-45DF70B78115}"/>
               </a:ext>
             </a:extLst>
           </p:cNvPr>
@@ -18990,7 +18990,7 @@
           <p:cNvPr id="40" name="">
             <a:extLst xmlns:a="http://schemas.openxmlformats.org/drawingml/2006/main">
               <a:ext uri="{FF2B5EF4-FFF2-40B4-BE49-F238E27FC236}">
-                <a16:creationId xmlns:a16="http://schemas.microsoft.com/office/drawing/2014/main" id="{9A149887-B21A-48C7-9C61-ADEA7DB88806}"/>
+                <a16:creationId xmlns:a16="http://schemas.microsoft.com/office/drawing/2014/main" id="{9B474E66-597B-4FCC-A023-586F343DD538}"/>
               </a:ext>
             </a:extLst>
           </p:cNvPr>
@@ -19042,7 +19042,7 @@
           <p:cNvPr id="41" name="">
             <a:extLst xmlns:a="http://schemas.openxmlformats.org/drawingml/2006/main">
               <a:ext uri="{FF2B5EF4-FFF2-40B4-BE49-F238E27FC236}">
-                <a16:creationId xmlns:a16="http://schemas.microsoft.com/office/drawing/2014/main" id="{9632F51C-8346-487D-AE8E-66474F90208F}"/>
+                <a16:creationId xmlns:a16="http://schemas.microsoft.com/office/drawing/2014/main" id="{5C81CDFC-8CC1-42E5-8C02-9B75D5233D2E}"/>
               </a:ext>
             </a:extLst>
           </p:cNvPr>
@@ -19094,7 +19094,7 @@
           <p:cNvPr id="42" name="">
             <a:extLst xmlns:a="http://schemas.openxmlformats.org/drawingml/2006/main">
               <a:ext uri="{FF2B5EF4-FFF2-40B4-BE49-F238E27FC236}">
-                <a16:creationId xmlns:a16="http://schemas.microsoft.com/office/drawing/2014/main" id="{A8EF94B4-2C46-49BB-9AC6-8C189EFCADCF}"/>
+                <a16:creationId xmlns:a16="http://schemas.microsoft.com/office/drawing/2014/main" id="{F87317E8-363C-46F8-957A-E8838CCBEE05}"/>
               </a:ext>
             </a:extLst>
           </p:cNvPr>
@@ -19146,7 +19146,7 @@
           <p:cNvPr id="43" name="">
             <a:extLst xmlns:a="http://schemas.openxmlformats.org/drawingml/2006/main">
               <a:ext uri="{FF2B5EF4-FFF2-40B4-BE49-F238E27FC236}">
-                <a16:creationId xmlns:a16="http://schemas.microsoft.com/office/drawing/2014/main" id="{FD3CFF7C-9595-4182-8CF5-C91A94C63C73}"/>
+                <a16:creationId xmlns:a16="http://schemas.microsoft.com/office/drawing/2014/main" id="{80CEC7E8-251E-40B9-B658-7C98FF904E0F}"/>
               </a:ext>
             </a:extLst>
           </p:cNvPr>
@@ -19198,7 +19198,7 @@
           <p:cNvPr id="44" name="">
             <a:extLst xmlns:a="http://schemas.openxmlformats.org/drawingml/2006/main">
               <a:ext uri="{FF2B5EF4-FFF2-40B4-BE49-F238E27FC236}">
-                <a16:creationId xmlns:a16="http://schemas.microsoft.com/office/drawing/2014/main" id="{78ABD92B-105D-4758-8FBD-B9FB48AB01A9}"/>
+                <a16:creationId xmlns:a16="http://schemas.microsoft.com/office/drawing/2014/main" id="{8046E477-778E-4F84-8D79-30796F5B7627}"/>
               </a:ext>
             </a:extLst>
           </p:cNvPr>
@@ -19229,7 +19229,7 @@
           <p:cNvPr id="45" name="">
             <a:extLst xmlns:a="http://schemas.openxmlformats.org/drawingml/2006/main">
               <a:ext uri="{FF2B5EF4-FFF2-40B4-BE49-F238E27FC236}">
-                <a16:creationId xmlns:a16="http://schemas.microsoft.com/office/drawing/2014/main" id="{7847CE9B-4105-4058-AF33-085D665A72A7}"/>
+                <a16:creationId xmlns:a16="http://schemas.microsoft.com/office/drawing/2014/main" id="{33C4EFDC-D5D2-4CE6-9EBE-17C867B72DF5}"/>
               </a:ext>
             </a:extLst>
           </p:cNvPr>
@@ -19260,7 +19260,7 @@
           <p:cNvPr id="46" name="">
             <a:extLst xmlns:a="http://schemas.openxmlformats.org/drawingml/2006/main">
               <a:ext uri="{FF2B5EF4-FFF2-40B4-BE49-F238E27FC236}">
-                <a16:creationId xmlns:a16="http://schemas.microsoft.com/office/drawing/2014/main" id="{4D98125C-231F-46FF-AB94-7A48F2CC7D78}"/>
+                <a16:creationId xmlns:a16="http://schemas.microsoft.com/office/drawing/2014/main" id="{42C2F862-6E97-435B-8140-87A47038F01B}"/>
               </a:ext>
             </a:extLst>
           </p:cNvPr>
@@ -19312,7 +19312,7 @@
           <p:cNvPr id="47" name="">
             <a:extLst xmlns:a="http://schemas.openxmlformats.org/drawingml/2006/main">
               <a:ext uri="{FF2B5EF4-FFF2-40B4-BE49-F238E27FC236}">
-                <a16:creationId xmlns:a16="http://schemas.microsoft.com/office/drawing/2014/main" id="{2E613F0D-AEAD-4F4A-BF49-BEE6B40C7F2F}"/>
+                <a16:creationId xmlns:a16="http://schemas.microsoft.com/office/drawing/2014/main" id="{279E7089-2A14-4575-A4C1-93DB879C7B8B}"/>
               </a:ext>
             </a:extLst>
           </p:cNvPr>
@@ -19364,7 +19364,7 @@
           <p:cNvPr id="48" name="">
             <a:extLst xmlns:a="http://schemas.openxmlformats.org/drawingml/2006/main">
               <a:ext uri="{FF2B5EF4-FFF2-40B4-BE49-F238E27FC236}">
-                <a16:creationId xmlns:a16="http://schemas.microsoft.com/office/drawing/2014/main" id="{D045B3B7-D543-47F4-8E62-C952C27CD11B}"/>
+                <a16:creationId xmlns:a16="http://schemas.microsoft.com/office/drawing/2014/main" id="{D3943F24-2681-40A8-940A-178F9F019675}"/>
               </a:ext>
             </a:extLst>
           </p:cNvPr>
@@ -19416,7 +19416,7 @@
           <p:cNvPr id="49" name="">
             <a:extLst xmlns:a="http://schemas.openxmlformats.org/drawingml/2006/main">
               <a:ext uri="{FF2B5EF4-FFF2-40B4-BE49-F238E27FC236}">
-                <a16:creationId xmlns:a16="http://schemas.microsoft.com/office/drawing/2014/main" id="{70D3904B-1F8B-4B61-8EBF-E7B2CEAF361C}"/>
+                <a16:creationId xmlns:a16="http://schemas.microsoft.com/office/drawing/2014/main" id="{06E04F45-52D1-45BB-B7BF-ECFBD4EF39F9}"/>
               </a:ext>
             </a:extLst>
           </p:cNvPr>
@@ -19468,7 +19468,7 @@
           <p:cNvPr id="50" name="">
             <a:extLst xmlns:a="http://schemas.openxmlformats.org/drawingml/2006/main">
               <a:ext uri="{FF2B5EF4-FFF2-40B4-BE49-F238E27FC236}">
-                <a16:creationId xmlns:a16="http://schemas.microsoft.com/office/drawing/2014/main" id="{B02FAFDE-0F65-4994-A69B-F0BF8DC713BE}"/>
+                <a16:creationId xmlns:a16="http://schemas.microsoft.com/office/drawing/2014/main" id="{03DF2A27-F723-421D-9AC5-0C0C87891F5D}"/>
               </a:ext>
             </a:extLst>
           </p:cNvPr>
@@ -19520,7 +19520,7 @@
           <p:cNvPr id="51" name="">
             <a:extLst xmlns:a="http://schemas.openxmlformats.org/drawingml/2006/main">
               <a:ext uri="{FF2B5EF4-FFF2-40B4-BE49-F238E27FC236}">
-                <a16:creationId xmlns:a16="http://schemas.microsoft.com/office/drawing/2014/main" id="{57546B5F-B098-4DB4-8CA8-5781E7C241D0}"/>
+                <a16:creationId xmlns:a16="http://schemas.microsoft.com/office/drawing/2014/main" id="{2918B6FD-37A9-4154-862A-B489D3CB44AE}"/>
               </a:ext>
             </a:extLst>
           </p:cNvPr>
@@ -19551,7 +19551,7 @@
           <p:cNvPr id="52" name="">
             <a:extLst xmlns:a="http://schemas.openxmlformats.org/drawingml/2006/main">
               <a:ext uri="{FF2B5EF4-FFF2-40B4-BE49-F238E27FC236}">
-                <a16:creationId xmlns:a16="http://schemas.microsoft.com/office/drawing/2014/main" id="{AFD4C83D-20C4-483A-9D7C-0E595103F400}"/>
+                <a16:creationId xmlns:a16="http://schemas.microsoft.com/office/drawing/2014/main" id="{08CBDEB7-A8F0-4C6A-9229-EBBD855BEA7A}"/>
               </a:ext>
             </a:extLst>
           </p:cNvPr>
@@ -19603,7 +19603,7 @@
           <p:cNvPr id="53" name="">
             <a:extLst xmlns:a="http://schemas.openxmlformats.org/drawingml/2006/main">
               <a:ext uri="{FF2B5EF4-FFF2-40B4-BE49-F238E27FC236}">
-                <a16:creationId xmlns:a16="http://schemas.microsoft.com/office/drawing/2014/main" id="{F808564D-976D-4903-B4E8-66FB208BF198}"/>
+                <a16:creationId xmlns:a16="http://schemas.microsoft.com/office/drawing/2014/main" id="{51EA8633-A0F4-4FAF-A597-F70B61EAA1FD}"/>
               </a:ext>
             </a:extLst>
           </p:cNvPr>
@@ -19655,7 +19655,7 @@
           <p:cNvPr id="54" name="">
             <a:extLst xmlns:a="http://schemas.openxmlformats.org/drawingml/2006/main">
               <a:ext uri="{FF2B5EF4-FFF2-40B4-BE49-F238E27FC236}">
-                <a16:creationId xmlns:a16="http://schemas.microsoft.com/office/drawing/2014/main" id="{2FC2EF09-0AB8-4795-A05B-11341190BE83}"/>
+                <a16:creationId xmlns:a16="http://schemas.microsoft.com/office/drawing/2014/main" id="{78CEFC4D-298F-4B62-8D8B-C0119C35191B}"/>
               </a:ext>
             </a:extLst>
           </p:cNvPr>
@@ -19707,7 +19707,7 @@
           <p:cNvPr id="55" name="">
             <a:extLst xmlns:a="http://schemas.openxmlformats.org/drawingml/2006/main">
               <a:ext uri="{FF2B5EF4-FFF2-40B4-BE49-F238E27FC236}">
-                <a16:creationId xmlns:a16="http://schemas.microsoft.com/office/drawing/2014/main" id="{7F2E017E-08F3-4440-B960-9B7F32085BE9}"/>
+                <a16:creationId xmlns:a16="http://schemas.microsoft.com/office/drawing/2014/main" id="{DFD7E976-9DD5-4D89-9A93-26AD9101CCC4}"/>
               </a:ext>
             </a:extLst>
           </p:cNvPr>
@@ -19759,7 +19759,7 @@
           <p:cNvPr id="56" name="">
             <a:extLst xmlns:a="http://schemas.openxmlformats.org/drawingml/2006/main">
               <a:ext uri="{FF2B5EF4-FFF2-40B4-BE49-F238E27FC236}">
-                <a16:creationId xmlns:a16="http://schemas.microsoft.com/office/drawing/2014/main" id="{415729E7-2DFC-426D-B63B-382544DDB73B}"/>
+                <a16:creationId xmlns:a16="http://schemas.microsoft.com/office/drawing/2014/main" id="{EE0D7E61-CFFF-4495-8D8A-913E7E0B1B11}"/>
               </a:ext>
             </a:extLst>
           </p:cNvPr>
@@ -19811,7 +19811,7 @@
           <p:cNvPr id="57" name="">
             <a:extLst xmlns:a="http://schemas.openxmlformats.org/drawingml/2006/main">
               <a:ext uri="{FF2B5EF4-FFF2-40B4-BE49-F238E27FC236}">
-                <a16:creationId xmlns:a16="http://schemas.microsoft.com/office/drawing/2014/main" id="{F9610898-B173-4C0A-A818-D629E7D88DEB}"/>
+                <a16:creationId xmlns:a16="http://schemas.microsoft.com/office/drawing/2014/main" id="{7BFE3A34-442F-42D9-B777-E28AC4BD8E77}"/>
               </a:ext>
             </a:extLst>
           </p:cNvPr>
@@ -19842,7 +19842,7 @@
           <p:cNvPr id="58" name="">
             <a:extLst xmlns:a="http://schemas.openxmlformats.org/drawingml/2006/main">
               <a:ext uri="{FF2B5EF4-FFF2-40B4-BE49-F238E27FC236}">
-                <a16:creationId xmlns:a16="http://schemas.microsoft.com/office/drawing/2014/main" id="{7F089258-E6FE-4765-9824-CDC575466CDB}"/>
+                <a16:creationId xmlns:a16="http://schemas.microsoft.com/office/drawing/2014/main" id="{88F7FC6C-50B6-4571-9F0D-03C65DEA9781}"/>
               </a:ext>
             </a:extLst>
           </p:cNvPr>
@@ -19873,7 +19873,7 @@
           <p:cNvPr id="59" name="">
             <a:extLst xmlns:a="http://schemas.openxmlformats.org/drawingml/2006/main">
               <a:ext uri="{FF2B5EF4-FFF2-40B4-BE49-F238E27FC236}">
-                <a16:creationId xmlns:a16="http://schemas.microsoft.com/office/drawing/2014/main" id="{2A12CE40-12DB-4E2C-AABE-BB5CDB1F6398}"/>
+                <a16:creationId xmlns:a16="http://schemas.microsoft.com/office/drawing/2014/main" id="{6DAE3556-00A2-47BC-B3ED-667818C59F7E}"/>
               </a:ext>
             </a:extLst>
           </p:cNvPr>
@@ -19925,7 +19925,7 @@
           <p:cNvPr id="60" name="">
             <a:extLst xmlns:a="http://schemas.openxmlformats.org/drawingml/2006/main">
               <a:ext uri="{FF2B5EF4-FFF2-40B4-BE49-F238E27FC236}">
-                <a16:creationId xmlns:a16="http://schemas.microsoft.com/office/drawing/2014/main" id="{518FD2C8-E963-4F31-90B3-A5B016415792}"/>
+                <a16:creationId xmlns:a16="http://schemas.microsoft.com/office/drawing/2014/main" id="{46DA062C-DB18-49D0-BAE4-19BE1165FCA5}"/>
               </a:ext>
             </a:extLst>
           </p:cNvPr>
@@ -19977,7 +19977,7 @@
           <p:cNvPr id="61" name="">
             <a:extLst xmlns:a="http://schemas.openxmlformats.org/drawingml/2006/main">
               <a:ext uri="{FF2B5EF4-FFF2-40B4-BE49-F238E27FC236}">
-                <a16:creationId xmlns:a16="http://schemas.microsoft.com/office/drawing/2014/main" id="{D900813A-6632-45F3-9BA7-BBD2A7127A21}"/>
+                <a16:creationId xmlns:a16="http://schemas.microsoft.com/office/drawing/2014/main" id="{FCF480A2-5CDE-4710-A0EF-BBCA85DD9491}"/>
               </a:ext>
             </a:extLst>
           </p:cNvPr>
@@ -20029,7 +20029,7 @@
           <p:cNvPr id="62" name="">
             <a:extLst xmlns:a="http://schemas.openxmlformats.org/drawingml/2006/main">
               <a:ext uri="{FF2B5EF4-FFF2-40B4-BE49-F238E27FC236}">
-                <a16:creationId xmlns:a16="http://schemas.microsoft.com/office/drawing/2014/main" id="{05F8B6FA-6984-4E31-98EA-8606EBAEDEBB}"/>
+                <a16:creationId xmlns:a16="http://schemas.microsoft.com/office/drawing/2014/main" id="{6AF4E99F-EFF6-4B9C-A7C1-ED1A03EE3CA9}"/>
               </a:ext>
             </a:extLst>
           </p:cNvPr>
@@ -20081,7 +20081,7 @@
           <p:cNvPr id="63" name="">
             <a:extLst xmlns:a="http://schemas.openxmlformats.org/drawingml/2006/main">
               <a:ext uri="{FF2B5EF4-FFF2-40B4-BE49-F238E27FC236}">
-                <a16:creationId xmlns:a16="http://schemas.microsoft.com/office/drawing/2014/main" id="{C65CA4B8-CB78-4DD7-8121-D9BE7B28F943}"/>
+                <a16:creationId xmlns:a16="http://schemas.microsoft.com/office/drawing/2014/main" id="{48EEDB53-2A35-4074-865D-ABB77C43208D}"/>
               </a:ext>
             </a:extLst>
           </p:cNvPr>
@@ -20133,7 +20133,7 @@
           <p:cNvPr id="64" name="">
             <a:extLst xmlns:a="http://schemas.openxmlformats.org/drawingml/2006/main">
               <a:ext uri="{FF2B5EF4-FFF2-40B4-BE49-F238E27FC236}">
-                <a16:creationId xmlns:a16="http://schemas.microsoft.com/office/drawing/2014/main" id="{4A473BDA-9560-4DE4-8BCE-CDC3C443FE8D}"/>
+                <a16:creationId xmlns:a16="http://schemas.microsoft.com/office/drawing/2014/main" id="{AF57B631-19F6-415F-8AD8-31E737DE68E7}"/>
               </a:ext>
             </a:extLst>
           </p:cNvPr>
@@ -20164,7 +20164,7 @@
           <p:cNvPr id="65" name="">
             <a:extLst xmlns:a="http://schemas.openxmlformats.org/drawingml/2006/main">
               <a:ext uri="{FF2B5EF4-FFF2-40B4-BE49-F238E27FC236}">
-                <a16:creationId xmlns:a16="http://schemas.microsoft.com/office/drawing/2014/main" id="{6F2B70B0-5758-4260-B0CB-8E707BC3D426}"/>
+                <a16:creationId xmlns:a16="http://schemas.microsoft.com/office/drawing/2014/main" id="{7BF77929-66F7-44E6-BA34-94D799CBAB29}"/>
               </a:ext>
             </a:extLst>
           </p:cNvPr>
@@ -20216,7 +20216,7 @@
           <p:cNvPr id="66" name="">
             <a:extLst xmlns:a="http://schemas.openxmlformats.org/drawingml/2006/main">
               <a:ext uri="{FF2B5EF4-FFF2-40B4-BE49-F238E27FC236}">
-                <a16:creationId xmlns:a16="http://schemas.microsoft.com/office/drawing/2014/main" id="{BFD37AF8-9F24-4825-81FB-204A48ED4B33}"/>
+                <a16:creationId xmlns:a16="http://schemas.microsoft.com/office/drawing/2014/main" id="{5DBEB1C0-958D-4E6D-B169-E9C6B03E9312}"/>
               </a:ext>
             </a:extLst>
           </p:cNvPr>
@@ -20268,7 +20268,7 @@
           <p:cNvPr id="67" name="">
             <a:extLst xmlns:a="http://schemas.openxmlformats.org/drawingml/2006/main">
               <a:ext uri="{FF2B5EF4-FFF2-40B4-BE49-F238E27FC236}">
-                <a16:creationId xmlns:a16="http://schemas.microsoft.com/office/drawing/2014/main" id="{4149592D-8976-437C-B76E-62A515B2D3EB}"/>
+                <a16:creationId xmlns:a16="http://schemas.microsoft.com/office/drawing/2014/main" id="{FB43E505-D9F5-414A-B6FA-7F859DB378B9}"/>
               </a:ext>
             </a:extLst>
           </p:cNvPr>
@@ -20320,7 +20320,7 @@
           <p:cNvPr id="68" name="">
             <a:extLst xmlns:a="http://schemas.openxmlformats.org/drawingml/2006/main">
               <a:ext uri="{FF2B5EF4-FFF2-40B4-BE49-F238E27FC236}">
-                <a16:creationId xmlns:a16="http://schemas.microsoft.com/office/drawing/2014/main" id="{18044B09-3EAF-4922-B3C5-B6AB456AD795}"/>
+                <a16:creationId xmlns:a16="http://schemas.microsoft.com/office/drawing/2014/main" id="{61EB6A5A-2A81-4689-B08A-170862E148EB}"/>
               </a:ext>
             </a:extLst>
           </p:cNvPr>
@@ -20372,7 +20372,7 @@
           <p:cNvPr id="69" name="">
             <a:extLst xmlns:a="http://schemas.openxmlformats.org/drawingml/2006/main">
               <a:ext uri="{FF2B5EF4-FFF2-40B4-BE49-F238E27FC236}">
-                <a16:creationId xmlns:a16="http://schemas.microsoft.com/office/drawing/2014/main" id="{A4685D54-049B-4433-ABC3-5FB235A8A230}"/>
+                <a16:creationId xmlns:a16="http://schemas.microsoft.com/office/drawing/2014/main" id="{5601A04F-7178-4F5E-9090-4B8A2E6458C7}"/>
               </a:ext>
             </a:extLst>
           </p:cNvPr>
@@ -20424,7 +20424,7 @@
           <p:cNvPr id="70" name="">
             <a:extLst xmlns:a="http://schemas.openxmlformats.org/drawingml/2006/main">
               <a:ext uri="{FF2B5EF4-FFF2-40B4-BE49-F238E27FC236}">
-                <a16:creationId xmlns:a16="http://schemas.microsoft.com/office/drawing/2014/main" id="{D25247F9-E3AC-4466-AAC5-B97FF40822FC}"/>
+                <a16:creationId xmlns:a16="http://schemas.microsoft.com/office/drawing/2014/main" id="{2867FEA9-08D0-4E1E-A969-770922F946EC}"/>
               </a:ext>
             </a:extLst>
           </p:cNvPr>
@@ -20455,7 +20455,7 @@
           <p:cNvPr id="71" name="">
             <a:extLst xmlns:a="http://schemas.openxmlformats.org/drawingml/2006/main">
               <a:ext uri="{FF2B5EF4-FFF2-40B4-BE49-F238E27FC236}">
-                <a16:creationId xmlns:a16="http://schemas.microsoft.com/office/drawing/2014/main" id="{B9449C90-05DB-4C52-90AC-4407701DCF10}"/>
+                <a16:creationId xmlns:a16="http://schemas.microsoft.com/office/drawing/2014/main" id="{1BCF99F9-0982-40C2-8EDC-D9F35982FEDE}"/>
               </a:ext>
             </a:extLst>
           </p:cNvPr>
@@ -20486,7 +20486,7 @@
           <p:cNvPr id="72" name="">
             <a:extLst xmlns:a="http://schemas.openxmlformats.org/drawingml/2006/main">
               <a:ext uri="{FF2B5EF4-FFF2-40B4-BE49-F238E27FC236}">
-                <a16:creationId xmlns:a16="http://schemas.microsoft.com/office/drawing/2014/main" id="{71119771-99DE-4E99-B88D-C90955206FEC}"/>
+                <a16:creationId xmlns:a16="http://schemas.microsoft.com/office/drawing/2014/main" id="{A73F38A3-02E4-469F-A719-E5C634E63D1B}"/>
               </a:ext>
             </a:extLst>
           </p:cNvPr>
@@ -20538,7 +20538,7 @@
           <p:cNvPr id="73" name="">
             <a:extLst xmlns:a="http://schemas.openxmlformats.org/drawingml/2006/main">
               <a:ext uri="{FF2B5EF4-FFF2-40B4-BE49-F238E27FC236}">
-                <a16:creationId xmlns:a16="http://schemas.microsoft.com/office/drawing/2014/main" id="{8AF56288-B27D-4AD5-AE94-65C4324338C4}"/>
+                <a16:creationId xmlns:a16="http://schemas.microsoft.com/office/drawing/2014/main" id="{D16797C9-29A0-478A-B6D7-D2D0775FFADB}"/>
               </a:ext>
             </a:extLst>
           </p:cNvPr>
@@ -20590,7 +20590,7 @@
           <p:cNvPr id="74" name="">
             <a:extLst xmlns:a="http://schemas.openxmlformats.org/drawingml/2006/main">
               <a:ext uri="{FF2B5EF4-FFF2-40B4-BE49-F238E27FC236}">
-                <a16:creationId xmlns:a16="http://schemas.microsoft.com/office/drawing/2014/main" id="{9967FABA-700E-4AF3-B94C-4461A9C5F7AD}"/>
+                <a16:creationId xmlns:a16="http://schemas.microsoft.com/office/drawing/2014/main" id="{A359C04D-43A7-40AE-A487-E9468C22E843}"/>
               </a:ext>
             </a:extLst>
           </p:cNvPr>
@@ -20642,7 +20642,7 @@
           <p:cNvPr id="75" name="">
             <a:extLst xmlns:a="http://schemas.openxmlformats.org/drawingml/2006/main">
               <a:ext uri="{FF2B5EF4-FFF2-40B4-BE49-F238E27FC236}">
-                <a16:creationId xmlns:a16="http://schemas.microsoft.com/office/drawing/2014/main" id="{54AA805E-19AC-429C-A2C4-1168A6D357DA}"/>
+                <a16:creationId xmlns:a16="http://schemas.microsoft.com/office/drawing/2014/main" id="{7DC84044-9BBC-4EC6-9128-EFDF0383AF72}"/>
               </a:ext>
             </a:extLst>
           </p:cNvPr>
@@ -20694,7 +20694,7 @@
           <p:cNvPr id="76" name="">
             <a:extLst xmlns:a="http://schemas.openxmlformats.org/drawingml/2006/main">
               <a:ext uri="{FF2B5EF4-FFF2-40B4-BE49-F238E27FC236}">
-                <a16:creationId xmlns:a16="http://schemas.microsoft.com/office/drawing/2014/main" id="{C25132C5-5A5D-4978-BB23-D76BBBEF4C47}"/>
+                <a16:creationId xmlns:a16="http://schemas.microsoft.com/office/drawing/2014/main" id="{6CF41313-ECFD-4C93-AE46-76ABB17E13CD}"/>
               </a:ext>
             </a:extLst>
           </p:cNvPr>
@@ -20746,7 +20746,7 @@
           <p:cNvPr id="77" name="">
             <a:extLst xmlns:a="http://schemas.openxmlformats.org/drawingml/2006/main">
               <a:ext uri="{FF2B5EF4-FFF2-40B4-BE49-F238E27FC236}">
-                <a16:creationId xmlns:a16="http://schemas.microsoft.com/office/drawing/2014/main" id="{D96E4F44-F91D-4DA3-B004-5B6A26B5A6A3}"/>
+                <a16:creationId xmlns:a16="http://schemas.microsoft.com/office/drawing/2014/main" id="{0EAF5385-9666-4E3B-8AAC-7D68FD2AB87F}"/>
               </a:ext>
             </a:extLst>
           </p:cNvPr>
@@ -20777,7 +20777,7 @@
           <p:cNvPr id="78" name="">
             <a:extLst xmlns:a="http://schemas.openxmlformats.org/drawingml/2006/main">
               <a:ext uri="{FF2B5EF4-FFF2-40B4-BE49-F238E27FC236}">
-                <a16:creationId xmlns:a16="http://schemas.microsoft.com/office/drawing/2014/main" id="{1C935469-7AA5-4F54-8AEE-40E02EA0A071}"/>
+                <a16:creationId xmlns:a16="http://schemas.microsoft.com/office/drawing/2014/main" id="{303F1245-A7BB-4F9C-A6D3-FFE637D2FD65}"/>
               </a:ext>
             </a:extLst>
           </p:cNvPr>
@@ -20829,7 +20829,7 @@
           <p:cNvPr id="79" name="">
             <a:extLst xmlns:a="http://schemas.openxmlformats.org/drawingml/2006/main">
               <a:ext uri="{FF2B5EF4-FFF2-40B4-BE49-F238E27FC236}">
-                <a16:creationId xmlns:a16="http://schemas.microsoft.com/office/drawing/2014/main" id="{5DC85F79-1FFF-4097-A5A2-AFC48A4FF5AC}"/>
+                <a16:creationId xmlns:a16="http://schemas.microsoft.com/office/drawing/2014/main" id="{C8F4A28B-D7A5-439C-871B-9165C0CBFF65}"/>
               </a:ext>
             </a:extLst>
           </p:cNvPr>
@@ -20881,7 +20881,7 @@
           <p:cNvPr id="80" name="">
             <a:extLst xmlns:a="http://schemas.openxmlformats.org/drawingml/2006/main">
               <a:ext uri="{FF2B5EF4-FFF2-40B4-BE49-F238E27FC236}">
-                <a16:creationId xmlns:a16="http://schemas.microsoft.com/office/drawing/2014/main" id="{62C02316-1BB4-44F7-AB63-974858DFB86E}"/>
+                <a16:creationId xmlns:a16="http://schemas.microsoft.com/office/drawing/2014/main" id="{6BDA02C6-9D01-43DE-BA58-8B9EC84BBE27}"/>
               </a:ext>
             </a:extLst>
           </p:cNvPr>
@@ -20933,7 +20933,7 @@
           <p:cNvPr id="81" name="">
             <a:extLst xmlns:a="http://schemas.openxmlformats.org/drawingml/2006/main">
               <a:ext uri="{FF2B5EF4-FFF2-40B4-BE49-F238E27FC236}">
-                <a16:creationId xmlns:a16="http://schemas.microsoft.com/office/drawing/2014/main" id="{B7E27E28-80D5-4DD0-A382-EFDE76924804}"/>
+                <a16:creationId xmlns:a16="http://schemas.microsoft.com/office/drawing/2014/main" id="{08193142-FDDA-412A-BB22-05425B03A944}"/>
               </a:ext>
             </a:extLst>
           </p:cNvPr>
@@ -20985,7 +20985,7 @@
           <p:cNvPr id="82" name="">
             <a:extLst xmlns:a="http://schemas.openxmlformats.org/drawingml/2006/main">
               <a:ext uri="{FF2B5EF4-FFF2-40B4-BE49-F238E27FC236}">
-                <a16:creationId xmlns:a16="http://schemas.microsoft.com/office/drawing/2014/main" id="{9D600C8C-7707-4698-A602-588B7051C42E}"/>
+                <a16:creationId xmlns:a16="http://schemas.microsoft.com/office/drawing/2014/main" id="{8E016E3A-1E80-48C5-98F7-42F8D6A217EC}"/>
               </a:ext>
             </a:extLst>
           </p:cNvPr>
@@ -21037,7 +21037,7 @@
           <p:cNvPr id="83" name="">
             <a:extLst xmlns:a="http://schemas.openxmlformats.org/drawingml/2006/main">
               <a:ext uri="{FF2B5EF4-FFF2-40B4-BE49-F238E27FC236}">
-                <a16:creationId xmlns:a16="http://schemas.microsoft.com/office/drawing/2014/main" id="{88A859F1-52EB-49B6-8180-50F339D5D42F}"/>
+                <a16:creationId xmlns:a16="http://schemas.microsoft.com/office/drawing/2014/main" id="{BF556055-6499-4FFD-99B7-F3DB09BB78DF}"/>
               </a:ext>
             </a:extLst>
           </p:cNvPr>
@@ -21068,7 +21068,7 @@
           <p:cNvPr id="84" name="">
             <a:extLst xmlns:a="http://schemas.openxmlformats.org/drawingml/2006/main">
               <a:ext uri="{FF2B5EF4-FFF2-40B4-BE49-F238E27FC236}">
-                <a16:creationId xmlns:a16="http://schemas.microsoft.com/office/drawing/2014/main" id="{7E963D5F-D928-4980-85D9-51B1D4B786F0}"/>
+                <a16:creationId xmlns:a16="http://schemas.microsoft.com/office/drawing/2014/main" id="{556EFB6B-8A24-44AB-987E-DE29DF64718F}"/>
               </a:ext>
             </a:extLst>
           </p:cNvPr>
@@ -21120,7 +21120,7 @@
           <p:cNvPr id="85" name="">
             <a:extLst xmlns:a="http://schemas.openxmlformats.org/drawingml/2006/main">
               <a:ext uri="{FF2B5EF4-FFF2-40B4-BE49-F238E27FC236}">
-                <a16:creationId xmlns:a16="http://schemas.microsoft.com/office/drawing/2014/main" id="{0859AC68-ABE5-46FC-96F1-9EC89BDF513F}"/>
+                <a16:creationId xmlns:a16="http://schemas.microsoft.com/office/drawing/2014/main" id="{95B8815A-4432-40C6-8FC9-BEFAFE9ED8D4}"/>
               </a:ext>
             </a:extLst>
           </p:cNvPr>
@@ -21172,7 +21172,7 @@
           <p:cNvPr id="86" name="">
             <a:extLst xmlns:a="http://schemas.openxmlformats.org/drawingml/2006/main">
               <a:ext uri="{FF2B5EF4-FFF2-40B4-BE49-F238E27FC236}">
-                <a16:creationId xmlns:a16="http://schemas.microsoft.com/office/drawing/2014/main" id="{0AE2F7C6-78D5-495D-AF03-3930068D74EA}"/>
+                <a16:creationId xmlns:a16="http://schemas.microsoft.com/office/drawing/2014/main" id="{596C41C9-6668-4E7F-B35F-9453C8A4C66B}"/>
               </a:ext>
             </a:extLst>
           </p:cNvPr>
@@ -21224,7 +21224,7 @@
           <p:cNvPr id="87" name="">
             <a:extLst xmlns:a="http://schemas.openxmlformats.org/drawingml/2006/main">
               <a:ext uri="{FF2B5EF4-FFF2-40B4-BE49-F238E27FC236}">
-                <a16:creationId xmlns:a16="http://schemas.microsoft.com/office/drawing/2014/main" id="{88C5CA37-7BDC-4875-ACAA-90CE8DAE01A7}"/>
+                <a16:creationId xmlns:a16="http://schemas.microsoft.com/office/drawing/2014/main" id="{2306BB2A-7C53-4A74-B36A-57CADB4C0DD0}"/>
               </a:ext>
             </a:extLst>
           </p:cNvPr>
@@ -21276,7 +21276,7 @@
           <p:cNvPr id="88" name="">
             <a:extLst xmlns:a="http://schemas.openxmlformats.org/drawingml/2006/main">
               <a:ext uri="{FF2B5EF4-FFF2-40B4-BE49-F238E27FC236}">
-                <a16:creationId xmlns:a16="http://schemas.microsoft.com/office/drawing/2014/main" id="{1FCC4B52-0EF9-4A33-A6F9-B0A1C8694FDC}"/>
+                <a16:creationId xmlns:a16="http://schemas.microsoft.com/office/drawing/2014/main" id="{230EA3E7-F7CC-41BF-8883-A05640590E0D}"/>
               </a:ext>
             </a:extLst>
           </p:cNvPr>
@@ -21328,7 +21328,7 @@
           <p:cNvPr id="89" name="">
             <a:extLst xmlns:a="http://schemas.openxmlformats.org/drawingml/2006/main">
               <a:ext uri="{FF2B5EF4-FFF2-40B4-BE49-F238E27FC236}">
-                <a16:creationId xmlns:a16="http://schemas.microsoft.com/office/drawing/2014/main" id="{DED82CBA-0358-4821-BB74-DA680355BBF9}"/>
+                <a16:creationId xmlns:a16="http://schemas.microsoft.com/office/drawing/2014/main" id="{FE6C38AF-07ED-467F-9179-8222098FDCDC}"/>
               </a:ext>
             </a:extLst>
           </p:cNvPr>
@@ -21359,7 +21359,7 @@
           <p:cNvPr id="90" name="">
             <a:extLst xmlns:a="http://schemas.openxmlformats.org/drawingml/2006/main">
               <a:ext uri="{FF2B5EF4-FFF2-40B4-BE49-F238E27FC236}">
-                <a16:creationId xmlns:a16="http://schemas.microsoft.com/office/drawing/2014/main" id="{E1786FD4-9FA7-4EA0-96FC-7CB863521833}"/>
+                <a16:creationId xmlns:a16="http://schemas.microsoft.com/office/drawing/2014/main" id="{2B4E7155-82ED-42A8-9181-14482E768724}"/>
               </a:ext>
             </a:extLst>
           </p:cNvPr>
@@ -21390,7 +21390,7 @@
           <p:cNvPr id="91" name="">
             <a:extLst xmlns:a="http://schemas.openxmlformats.org/drawingml/2006/main">
               <a:ext uri="{FF2B5EF4-FFF2-40B4-BE49-F238E27FC236}">
-                <a16:creationId xmlns:a16="http://schemas.microsoft.com/office/drawing/2014/main" id="{88FBDCAF-BBD3-4A94-BFA8-F8BF7FE114E1}"/>
+                <a16:creationId xmlns:a16="http://schemas.microsoft.com/office/drawing/2014/main" id="{25A2C4F5-4E76-4618-BCC3-6892182EBC77}"/>
               </a:ext>
             </a:extLst>
           </p:cNvPr>
@@ -21442,7 +21442,7 @@
           <p:cNvPr id="92" name="">
             <a:extLst xmlns:a="http://schemas.openxmlformats.org/drawingml/2006/main">
               <a:ext uri="{FF2B5EF4-FFF2-40B4-BE49-F238E27FC236}">
-                <a16:creationId xmlns:a16="http://schemas.microsoft.com/office/drawing/2014/main" id="{D9B8C611-93BD-4F00-8C95-0D045EDE5708}"/>
+                <a16:creationId xmlns:a16="http://schemas.microsoft.com/office/drawing/2014/main" id="{93AD4941-9DE4-4492-83B2-D1A4B2123FE9}"/>
               </a:ext>
             </a:extLst>
           </p:cNvPr>
@@ -21494,7 +21494,7 @@
           <p:cNvPr id="93" name="">
             <a:extLst xmlns:a="http://schemas.openxmlformats.org/drawingml/2006/main">
               <a:ext uri="{FF2B5EF4-FFF2-40B4-BE49-F238E27FC236}">
-                <a16:creationId xmlns:a16="http://schemas.microsoft.com/office/drawing/2014/main" id="{03D9EFE0-726A-4165-8F54-56CAEFEA4310}"/>
+                <a16:creationId xmlns:a16="http://schemas.microsoft.com/office/drawing/2014/main" id="{F278A3AB-4D15-489B-9C8E-E90EF9183865}"/>
               </a:ext>
             </a:extLst>
           </p:cNvPr>
@@ -21546,7 +21546,7 @@
           <p:cNvPr id="94" name="">
             <a:extLst xmlns:a="http://schemas.openxmlformats.org/drawingml/2006/main">
               <a:ext uri="{FF2B5EF4-FFF2-40B4-BE49-F238E27FC236}">
-                <a16:creationId xmlns:a16="http://schemas.microsoft.com/office/drawing/2014/main" id="{A8F0000A-1691-4D7B-ADB3-330C45482BA8}"/>
+                <a16:creationId xmlns:a16="http://schemas.microsoft.com/office/drawing/2014/main" id="{9DBA4995-736E-42C4-A783-AD6F2A5DA239}"/>
               </a:ext>
             </a:extLst>
           </p:cNvPr>
@@ -21598,7 +21598,7 @@
           <p:cNvPr id="95" name="">
             <a:extLst xmlns:a="http://schemas.openxmlformats.org/drawingml/2006/main">
               <a:ext uri="{FF2B5EF4-FFF2-40B4-BE49-F238E27FC236}">
-                <a16:creationId xmlns:a16="http://schemas.microsoft.com/office/drawing/2014/main" id="{6F8CAAFB-544C-4EDA-BBFE-0BEDD1615942}"/>
+                <a16:creationId xmlns:a16="http://schemas.microsoft.com/office/drawing/2014/main" id="{C4AA606D-FB34-4C1D-B8B2-67DD612143BC}"/>
               </a:ext>
             </a:extLst>
           </p:cNvPr>
@@ -21648,7 +21648,7 @@
     </p:spTree>
     <p:extLst>
       <p:ext uri="{BB962C8B-B14F-4D97-AF65-F5344CB8AC3E}">
-        <p14:creationId xmlns:p14="http://schemas.microsoft.com/office/powerpoint/2010/main" val="1214876494"/>
+        <p14:creationId xmlns:p14="http://schemas.microsoft.com/office/powerpoint/2010/main" val="507300383"/>
       </p:ext>
     </p:extLst>
   </p:cSld>
@@ -21679,7 +21679,7 @@
           <p:cNvPr id="135" name="">
             <a:extLst xmlns:a="http://schemas.openxmlformats.org/drawingml/2006/main">
               <a:ext uri="{FF2B5EF4-FFF2-40B4-BE49-F238E27FC236}">
-                <a16:creationId xmlns:a16="http://schemas.microsoft.com/office/drawing/2014/main" id="{DCAB3CB5-2F27-4FBD-A3FB-9980FB324B2D}"/>
+                <a16:creationId xmlns:a16="http://schemas.microsoft.com/office/drawing/2014/main" id="{2B54BECD-EC82-478B-877E-8FB7039BFBC4}"/>
               </a:ext>
             </a:extLst>
           </p:cNvPr>
@@ -21712,7 +21712,7 @@
           <p:cNvPr id="2" name="">
             <a:extLst xmlns:a="http://schemas.openxmlformats.org/drawingml/2006/main">
               <a:ext uri="{FF2B5EF4-FFF2-40B4-BE49-F238E27FC236}">
-                <a16:creationId xmlns:a16="http://schemas.microsoft.com/office/drawing/2014/main" id="{BA58A421-26C0-4E66-8943-55999D70B613}"/>
+                <a16:creationId xmlns:a16="http://schemas.microsoft.com/office/drawing/2014/main" id="{F189D721-AD92-40E3-B233-BA123D0C1964}"/>
               </a:ext>
             </a:extLst>
           </p:cNvPr>
@@ -21743,7 +21743,7 @@
           <p:cNvPr id="3" name="">
             <a:extLst xmlns:a="http://schemas.openxmlformats.org/drawingml/2006/main">
               <a:ext uri="{FF2B5EF4-FFF2-40B4-BE49-F238E27FC236}">
-                <a16:creationId xmlns:a16="http://schemas.microsoft.com/office/drawing/2014/main" id="{C6659683-EBC7-4766-91E2-58FFE2FEAADF}"/>
+                <a16:creationId xmlns:a16="http://schemas.microsoft.com/office/drawing/2014/main" id="{74201896-D65C-4B06-8300-FAB092D3407E}"/>
               </a:ext>
             </a:extLst>
           </p:cNvPr>
@@ -21795,7 +21795,7 @@
           <p:cNvPr id="4" name="">
             <a:extLst xmlns:a="http://schemas.openxmlformats.org/drawingml/2006/main">
               <a:ext uri="{FF2B5EF4-FFF2-40B4-BE49-F238E27FC236}">
-                <a16:creationId xmlns:a16="http://schemas.microsoft.com/office/drawing/2014/main" id="{B568FB45-703E-4139-873C-8B23A4C794BB}"/>
+                <a16:creationId xmlns:a16="http://schemas.microsoft.com/office/drawing/2014/main" id="{B4E090E3-27B6-46E4-A583-FA0ECDF51D6D}"/>
               </a:ext>
             </a:extLst>
           </p:cNvPr>
@@ -21847,7 +21847,7 @@
           <p:cNvPr id="5" name="">
             <a:extLst xmlns:a="http://schemas.openxmlformats.org/drawingml/2006/main">
               <a:ext uri="{FF2B5EF4-FFF2-40B4-BE49-F238E27FC236}">
-                <a16:creationId xmlns:a16="http://schemas.microsoft.com/office/drawing/2014/main" id="{6C178AAD-DC8D-43E2-B165-1D1DAB585711}"/>
+                <a16:creationId xmlns:a16="http://schemas.microsoft.com/office/drawing/2014/main" id="{045C666E-A4FF-4158-A6C0-701E005D9DA9}"/>
               </a:ext>
             </a:extLst>
           </p:cNvPr>
@@ -21882,7 +21882,7 @@
           <p:nvPr/>
         </p:nvPicPr>
         <p:blipFill>
-          <a:blip xmlns:r="http://schemas.openxmlformats.org/officeDocument/2006/relationships" xmlns:a="http://schemas.openxmlformats.org/drawingml/2006/main" r:embed="R6b31a04d4a23489a"/>
+          <a:blip xmlns:r="http://schemas.openxmlformats.org/officeDocument/2006/relationships" xmlns:a="http://schemas.openxmlformats.org/drawingml/2006/main" r:embed="R39531d74790843d9"/>
           <a:stretch xmlns:a="http://schemas.openxmlformats.org/drawingml/2006/main"/>
         </p:blipFill>
         <p:spPr>
@@ -21900,7 +21900,7 @@
           <p:cNvPr id="7" name="">
             <a:extLst xmlns:a="http://schemas.openxmlformats.org/drawingml/2006/main">
               <a:ext uri="{FF2B5EF4-FFF2-40B4-BE49-F238E27FC236}">
-                <a16:creationId xmlns:a16="http://schemas.microsoft.com/office/drawing/2014/main" id="{1C3EC2F6-71BD-4918-B348-A56C55023E1A}"/>
+                <a16:creationId xmlns:a16="http://schemas.microsoft.com/office/drawing/2014/main" id="{98EEA95E-5FB5-4027-A4B4-F40D9BE01494}"/>
               </a:ext>
             </a:extLst>
           </p:cNvPr>
@@ -21952,7 +21952,7 @@
           <p:cNvPr id="8" name="">
             <a:extLst xmlns:a="http://schemas.openxmlformats.org/drawingml/2006/main">
               <a:ext uri="{FF2B5EF4-FFF2-40B4-BE49-F238E27FC236}">
-                <a16:creationId xmlns:a16="http://schemas.microsoft.com/office/drawing/2014/main" id="{FE8B0085-935F-4D85-91E3-FE3EE1BAB36A}"/>
+                <a16:creationId xmlns:a16="http://schemas.microsoft.com/office/drawing/2014/main" id="{F612820C-4E58-4E35-A41C-394925A65636}"/>
               </a:ext>
             </a:extLst>
           </p:cNvPr>
@@ -22004,7 +22004,7 @@
           <p:cNvPr id="9" name="">
             <a:extLst xmlns:a="http://schemas.openxmlformats.org/drawingml/2006/main">
               <a:ext uri="{FF2B5EF4-FFF2-40B4-BE49-F238E27FC236}">
-                <a16:creationId xmlns:a16="http://schemas.microsoft.com/office/drawing/2014/main" id="{E16BFFBA-9698-4725-858C-43AAEAFAF5EA}"/>
+                <a16:creationId xmlns:a16="http://schemas.microsoft.com/office/drawing/2014/main" id="{2892906B-875D-4E74-90F8-8C70A410EFEF}"/>
               </a:ext>
             </a:extLst>
           </p:cNvPr>
@@ -22056,7 +22056,7 @@
           <p:cNvPr id="10" name="">
             <a:extLst xmlns:a="http://schemas.openxmlformats.org/drawingml/2006/main">
               <a:ext uri="{FF2B5EF4-FFF2-40B4-BE49-F238E27FC236}">
-                <a16:creationId xmlns:a16="http://schemas.microsoft.com/office/drawing/2014/main" id="{F7D2CE98-400E-4000-A351-C975D8EA9923}"/>
+                <a16:creationId xmlns:a16="http://schemas.microsoft.com/office/drawing/2014/main" id="{B119C85F-0DA3-4AEA-94AD-D1CADC301F96}"/>
               </a:ext>
             </a:extLst>
           </p:cNvPr>
@@ -22108,7 +22108,7 @@
           <p:cNvPr id="11" name="">
             <a:extLst xmlns:a="http://schemas.openxmlformats.org/drawingml/2006/main">
               <a:ext uri="{FF2B5EF4-FFF2-40B4-BE49-F238E27FC236}">
-                <a16:creationId xmlns:a16="http://schemas.microsoft.com/office/drawing/2014/main" id="{EF93AF02-E2A0-4A5D-B603-788631034191}"/>
+                <a16:creationId xmlns:a16="http://schemas.microsoft.com/office/drawing/2014/main" id="{605BBFC5-7511-436E-BCB0-FA749F612686}"/>
               </a:ext>
             </a:extLst>
           </p:cNvPr>
@@ -22139,7 +22139,7 @@
           <p:cNvPr id="12" name="">
             <a:extLst xmlns:a="http://schemas.openxmlformats.org/drawingml/2006/main">
               <a:ext uri="{FF2B5EF4-FFF2-40B4-BE49-F238E27FC236}">
-                <a16:creationId xmlns:a16="http://schemas.microsoft.com/office/drawing/2014/main" id="{E46B3A7C-8B17-48CE-BE07-44364279834A}"/>
+                <a16:creationId xmlns:a16="http://schemas.microsoft.com/office/drawing/2014/main" id="{76A6D82B-7E13-42AD-8A5A-03611850BF4C}"/>
               </a:ext>
             </a:extLst>
           </p:cNvPr>
@@ -22170,7 +22170,7 @@
           <p:cNvPr id="13" name="">
             <a:extLst xmlns:a="http://schemas.openxmlformats.org/drawingml/2006/main">
               <a:ext uri="{FF2B5EF4-FFF2-40B4-BE49-F238E27FC236}">
-                <a16:creationId xmlns:a16="http://schemas.microsoft.com/office/drawing/2014/main" id="{65A435D6-CEA5-4CF6-9ED7-63A18481D2C7}"/>
+                <a16:creationId xmlns:a16="http://schemas.microsoft.com/office/drawing/2014/main" id="{76EEB2BB-B850-4B7C-9DF6-B434E15EEEA2}"/>
               </a:ext>
             </a:extLst>
           </p:cNvPr>
@@ -22222,7 +22222,7 @@
           <p:cNvPr id="14" name="">
             <a:extLst xmlns:a="http://schemas.openxmlformats.org/drawingml/2006/main">
               <a:ext uri="{FF2B5EF4-FFF2-40B4-BE49-F238E27FC236}">
-                <a16:creationId xmlns:a16="http://schemas.microsoft.com/office/drawing/2014/main" id="{526B8585-BDA3-4A64-B080-6667DD716406}"/>
+                <a16:creationId xmlns:a16="http://schemas.microsoft.com/office/drawing/2014/main" id="{AFCFB7A2-79DE-4717-A571-E16780F53155}"/>
               </a:ext>
             </a:extLst>
           </p:cNvPr>
@@ -22274,7 +22274,7 @@
           <p:cNvPr id="15" name="">
             <a:extLst xmlns:a="http://schemas.openxmlformats.org/drawingml/2006/main">
               <a:ext uri="{FF2B5EF4-FFF2-40B4-BE49-F238E27FC236}">
-                <a16:creationId xmlns:a16="http://schemas.microsoft.com/office/drawing/2014/main" id="{BE28196D-99C8-4282-9079-715E9BAC747A}"/>
+                <a16:creationId xmlns:a16="http://schemas.microsoft.com/office/drawing/2014/main" id="{DB74C96D-D476-4FE7-8F7D-3AD8CCD46F58}"/>
               </a:ext>
             </a:extLst>
           </p:cNvPr>
@@ -22326,7 +22326,7 @@
           <p:cNvPr id="16" name="">
             <a:extLst xmlns:a="http://schemas.openxmlformats.org/drawingml/2006/main">
               <a:ext uri="{FF2B5EF4-FFF2-40B4-BE49-F238E27FC236}">
-                <a16:creationId xmlns:a16="http://schemas.microsoft.com/office/drawing/2014/main" id="{54B94C26-EAE0-4631-9781-4DB72836A317}"/>
+                <a16:creationId xmlns:a16="http://schemas.microsoft.com/office/drawing/2014/main" id="{798C6AC2-6373-4D48-AFE5-5C6184616A28}"/>
               </a:ext>
             </a:extLst>
           </p:cNvPr>
@@ -22378,7 +22378,7 @@
           <p:cNvPr id="17" name="">
             <a:extLst xmlns:a="http://schemas.openxmlformats.org/drawingml/2006/main">
               <a:ext uri="{FF2B5EF4-FFF2-40B4-BE49-F238E27FC236}">
-                <a16:creationId xmlns:a16="http://schemas.microsoft.com/office/drawing/2014/main" id="{0A38A778-D390-4502-826B-0491E7D35390}"/>
+                <a16:creationId xmlns:a16="http://schemas.microsoft.com/office/drawing/2014/main" id="{D9113A10-7D64-414B-A4CC-7C09FB041C5C}"/>
               </a:ext>
             </a:extLst>
           </p:cNvPr>
@@ -22430,7 +22430,7 @@
           <p:cNvPr id="18" name="">
             <a:extLst xmlns:a="http://schemas.openxmlformats.org/drawingml/2006/main">
               <a:ext uri="{FF2B5EF4-FFF2-40B4-BE49-F238E27FC236}">
-                <a16:creationId xmlns:a16="http://schemas.microsoft.com/office/drawing/2014/main" id="{606196DD-53B2-4ED4-88B0-63A1FC4EA512}"/>
+                <a16:creationId xmlns:a16="http://schemas.microsoft.com/office/drawing/2014/main" id="{D670E0C7-FCBD-4BC6-8923-078C7BCBBF7F}"/>
               </a:ext>
             </a:extLst>
           </p:cNvPr>
@@ -22482,7 +22482,7 @@
           <p:cNvPr id="19" name="">
             <a:extLst xmlns:a="http://schemas.openxmlformats.org/drawingml/2006/main">
               <a:ext uri="{FF2B5EF4-FFF2-40B4-BE49-F238E27FC236}">
-                <a16:creationId xmlns:a16="http://schemas.microsoft.com/office/drawing/2014/main" id="{2C9D25B7-B0D9-4563-B299-833FBF0EA52C}"/>
+                <a16:creationId xmlns:a16="http://schemas.microsoft.com/office/drawing/2014/main" id="{41E19085-DB81-433F-9D64-7FCECED99B52}"/>
               </a:ext>
             </a:extLst>
           </p:cNvPr>
@@ -22534,7 +22534,7 @@
           <p:cNvPr id="20" name="">
             <a:extLst xmlns:a="http://schemas.openxmlformats.org/drawingml/2006/main">
               <a:ext uri="{FF2B5EF4-FFF2-40B4-BE49-F238E27FC236}">
-                <a16:creationId xmlns:a16="http://schemas.microsoft.com/office/drawing/2014/main" id="{A77F182B-C11A-4195-880E-BE738E646B37}"/>
+                <a16:creationId xmlns:a16="http://schemas.microsoft.com/office/drawing/2014/main" id="{BEFC5AB9-2B43-459F-9C2F-749621DE7D26}"/>
               </a:ext>
             </a:extLst>
           </p:cNvPr>
@@ -22586,7 +22586,7 @@
           <p:cNvPr id="21" name="">
             <a:extLst xmlns:a="http://schemas.openxmlformats.org/drawingml/2006/main">
               <a:ext uri="{FF2B5EF4-FFF2-40B4-BE49-F238E27FC236}">
-                <a16:creationId xmlns:a16="http://schemas.microsoft.com/office/drawing/2014/main" id="{FC015CB0-A60B-45E1-AE33-82B76615A3AB}"/>
+                <a16:creationId xmlns:a16="http://schemas.microsoft.com/office/drawing/2014/main" id="{A2B97518-2177-4C0E-90B9-E4EAB047C3D3}"/>
               </a:ext>
             </a:extLst>
           </p:cNvPr>
@@ -22617,7 +22617,7 @@
           <p:cNvPr id="22" name="">
             <a:extLst xmlns:a="http://schemas.openxmlformats.org/drawingml/2006/main">
               <a:ext uri="{FF2B5EF4-FFF2-40B4-BE49-F238E27FC236}">
-                <a16:creationId xmlns:a16="http://schemas.microsoft.com/office/drawing/2014/main" id="{51915F61-BAA2-4363-A1FE-F77050B655E3}"/>
+                <a16:creationId xmlns:a16="http://schemas.microsoft.com/office/drawing/2014/main" id="{0C593C6E-5653-4202-AF21-425CED6578D9}"/>
               </a:ext>
             </a:extLst>
           </p:cNvPr>
@@ -22669,7 +22669,7 @@
           <p:cNvPr id="23" name="">
             <a:extLst xmlns:a="http://schemas.openxmlformats.org/drawingml/2006/main">
               <a:ext uri="{FF2B5EF4-FFF2-40B4-BE49-F238E27FC236}">
-                <a16:creationId xmlns:a16="http://schemas.microsoft.com/office/drawing/2014/main" id="{0B5FBD9B-F1F1-4553-A8A5-5618AAE91AD2}"/>
+                <a16:creationId xmlns:a16="http://schemas.microsoft.com/office/drawing/2014/main" id="{D2A305A5-5749-403D-96F2-47D4D21992A6}"/>
               </a:ext>
             </a:extLst>
           </p:cNvPr>
@@ -22721,7 +22721,7 @@
           <p:cNvPr id="24" name="">
             <a:extLst xmlns:a="http://schemas.openxmlformats.org/drawingml/2006/main">
               <a:ext uri="{FF2B5EF4-FFF2-40B4-BE49-F238E27FC236}">
-                <a16:creationId xmlns:a16="http://schemas.microsoft.com/office/drawing/2014/main" id="{B2F7EF41-E29B-4F9F-8AC1-A650C2AAA7C2}"/>
+                <a16:creationId xmlns:a16="http://schemas.microsoft.com/office/drawing/2014/main" id="{4EDA5E51-60BD-4AC6-9460-E88C36FFB754}"/>
               </a:ext>
             </a:extLst>
           </p:cNvPr>
@@ -22773,7 +22773,7 @@
           <p:cNvPr id="25" name="">
             <a:extLst xmlns:a="http://schemas.openxmlformats.org/drawingml/2006/main">
               <a:ext uri="{FF2B5EF4-FFF2-40B4-BE49-F238E27FC236}">
-                <a16:creationId xmlns:a16="http://schemas.microsoft.com/office/drawing/2014/main" id="{5E177538-316B-4D1D-8F54-07BE23122795}"/>
+                <a16:creationId xmlns:a16="http://schemas.microsoft.com/office/drawing/2014/main" id="{0D40CBE2-A9E6-498D-87AF-FCB3466799C5}"/>
               </a:ext>
             </a:extLst>
           </p:cNvPr>
@@ -22825,7 +22825,7 @@
           <p:cNvPr id="26" name="">
             <a:extLst xmlns:a="http://schemas.openxmlformats.org/drawingml/2006/main">
               <a:ext uri="{FF2B5EF4-FFF2-40B4-BE49-F238E27FC236}">
-                <a16:creationId xmlns:a16="http://schemas.microsoft.com/office/drawing/2014/main" id="{1CB9575C-DE8C-45CB-946B-5DE75C45EF0A}"/>
+                <a16:creationId xmlns:a16="http://schemas.microsoft.com/office/drawing/2014/main" id="{96DDAB51-24D3-4184-A381-7E9442C7A25E}"/>
               </a:ext>
             </a:extLst>
           </p:cNvPr>
@@ -22877,7 +22877,7 @@
           <p:cNvPr id="27" name="">
             <a:extLst xmlns:a="http://schemas.openxmlformats.org/drawingml/2006/main">
               <a:ext uri="{FF2B5EF4-FFF2-40B4-BE49-F238E27FC236}">
-                <a16:creationId xmlns:a16="http://schemas.microsoft.com/office/drawing/2014/main" id="{670363E3-DC00-4D61-B755-9A41A3B9676D}"/>
+                <a16:creationId xmlns:a16="http://schemas.microsoft.com/office/drawing/2014/main" id="{53F56B59-29E5-4FAB-87F6-D5871B31CACA}"/>
               </a:ext>
             </a:extLst>
           </p:cNvPr>
@@ -22929,7 +22929,7 @@
           <p:cNvPr id="28" name="">
             <a:extLst xmlns:a="http://schemas.openxmlformats.org/drawingml/2006/main">
               <a:ext uri="{FF2B5EF4-FFF2-40B4-BE49-F238E27FC236}">
-                <a16:creationId xmlns:a16="http://schemas.microsoft.com/office/drawing/2014/main" id="{5E9ADF2D-6B79-4A46-A6E7-29D25E471BB6}"/>
+                <a16:creationId xmlns:a16="http://schemas.microsoft.com/office/drawing/2014/main" id="{11AB0B2C-5953-4365-84E7-3FB6465F249F}"/>
               </a:ext>
             </a:extLst>
           </p:cNvPr>
@@ -22981,7 +22981,7 @@
           <p:cNvPr id="29" name="">
             <a:extLst xmlns:a="http://schemas.openxmlformats.org/drawingml/2006/main">
               <a:ext uri="{FF2B5EF4-FFF2-40B4-BE49-F238E27FC236}">
-                <a16:creationId xmlns:a16="http://schemas.microsoft.com/office/drawing/2014/main" id="{CB54D367-96AB-41E9-B828-F6E6F55A4F6F}"/>
+                <a16:creationId xmlns:a16="http://schemas.microsoft.com/office/drawing/2014/main" id="{30B81C2B-574D-462B-AE12-AD1AD4EA2D7D}"/>
               </a:ext>
             </a:extLst>
           </p:cNvPr>
@@ -23033,7 +23033,7 @@
           <p:cNvPr id="30" name="">
             <a:extLst xmlns:a="http://schemas.openxmlformats.org/drawingml/2006/main">
               <a:ext uri="{FF2B5EF4-FFF2-40B4-BE49-F238E27FC236}">
-                <a16:creationId xmlns:a16="http://schemas.microsoft.com/office/drawing/2014/main" id="{373F63D7-A5F7-46DE-B0BA-2367A54D3933}"/>
+                <a16:creationId xmlns:a16="http://schemas.microsoft.com/office/drawing/2014/main" id="{AAFE43A8-70F4-4C4A-8C3E-763898C99A0A}"/>
               </a:ext>
             </a:extLst>
           </p:cNvPr>
@@ -23064,7 +23064,7 @@
           <p:cNvPr id="31" name="">
             <a:extLst xmlns:a="http://schemas.openxmlformats.org/drawingml/2006/main">
               <a:ext uri="{FF2B5EF4-FFF2-40B4-BE49-F238E27FC236}">
-                <a16:creationId xmlns:a16="http://schemas.microsoft.com/office/drawing/2014/main" id="{9205BEC9-9481-4C91-9A20-9EF2E056FEB7}"/>
+                <a16:creationId xmlns:a16="http://schemas.microsoft.com/office/drawing/2014/main" id="{36D67DB4-E0EB-4277-8001-D5E8BFA63294}"/>
               </a:ext>
             </a:extLst>
           </p:cNvPr>
@@ -23095,7 +23095,7 @@
           <p:cNvPr id="32" name="">
             <a:extLst xmlns:a="http://schemas.openxmlformats.org/drawingml/2006/main">
               <a:ext uri="{FF2B5EF4-FFF2-40B4-BE49-F238E27FC236}">
-                <a16:creationId xmlns:a16="http://schemas.microsoft.com/office/drawing/2014/main" id="{DD502269-6AC8-4532-8082-6F4716917FAC}"/>
+                <a16:creationId xmlns:a16="http://schemas.microsoft.com/office/drawing/2014/main" id="{001FDD61-BBB0-4FE3-B3B0-50D3630BD591}"/>
               </a:ext>
             </a:extLst>
           </p:cNvPr>
@@ -23147,7 +23147,7 @@
           <p:cNvPr id="33" name="">
             <a:extLst xmlns:a="http://schemas.openxmlformats.org/drawingml/2006/main">
               <a:ext uri="{FF2B5EF4-FFF2-40B4-BE49-F238E27FC236}">
-                <a16:creationId xmlns:a16="http://schemas.microsoft.com/office/drawing/2014/main" id="{653F0CE3-2A92-4BCC-9C49-30ACEDFB2F36}"/>
+                <a16:creationId xmlns:a16="http://schemas.microsoft.com/office/drawing/2014/main" id="{C357CA67-A221-45A1-A508-F64F71E8CCAA}"/>
               </a:ext>
             </a:extLst>
           </p:cNvPr>
@@ -23199,7 +23199,7 @@
           <p:cNvPr id="34" name="">
             <a:extLst xmlns:a="http://schemas.openxmlformats.org/drawingml/2006/main">
               <a:ext uri="{FF2B5EF4-FFF2-40B4-BE49-F238E27FC236}">
-                <a16:creationId xmlns:a16="http://schemas.microsoft.com/office/drawing/2014/main" id="{F834B13C-08D0-4722-9A1D-8163E84BEB76}"/>
+                <a16:creationId xmlns:a16="http://schemas.microsoft.com/office/drawing/2014/main" id="{79131837-34F2-4D2A-99FF-B76F60C95CAF}"/>
               </a:ext>
             </a:extLst>
           </p:cNvPr>
@@ -23251,7 +23251,7 @@
           <p:cNvPr id="35" name="">
             <a:extLst xmlns:a="http://schemas.openxmlformats.org/drawingml/2006/main">
               <a:ext uri="{FF2B5EF4-FFF2-40B4-BE49-F238E27FC236}">
-                <a16:creationId xmlns:a16="http://schemas.microsoft.com/office/drawing/2014/main" id="{BCB50E28-7B49-41A6-A385-68D2376EC503}"/>
+                <a16:creationId xmlns:a16="http://schemas.microsoft.com/office/drawing/2014/main" id="{27B33A1E-A62D-4571-AC93-A5816118354F}"/>
               </a:ext>
             </a:extLst>
           </p:cNvPr>
@@ -23303,7 +23303,7 @@
           <p:cNvPr id="36" name="">
             <a:extLst xmlns:a="http://schemas.openxmlformats.org/drawingml/2006/main">
               <a:ext uri="{FF2B5EF4-FFF2-40B4-BE49-F238E27FC236}">
-                <a16:creationId xmlns:a16="http://schemas.microsoft.com/office/drawing/2014/main" id="{37045BF5-E038-42B1-BAAE-AC0F4C2290D3}"/>
+                <a16:creationId xmlns:a16="http://schemas.microsoft.com/office/drawing/2014/main" id="{4D4E6E40-FEE2-4AB7-82E9-A7B7E09118B0}"/>
               </a:ext>
             </a:extLst>
           </p:cNvPr>
@@ -23355,7 +23355,7 @@
           <p:cNvPr id="37" name="">
             <a:extLst xmlns:a="http://schemas.openxmlformats.org/drawingml/2006/main">
               <a:ext uri="{FF2B5EF4-FFF2-40B4-BE49-F238E27FC236}">
-                <a16:creationId xmlns:a16="http://schemas.microsoft.com/office/drawing/2014/main" id="{E012CCEA-FFF4-45AC-9531-2AE401777FB3}"/>
+                <a16:creationId xmlns:a16="http://schemas.microsoft.com/office/drawing/2014/main" id="{DCD3194B-D6C6-48BE-A069-78A2899FCA5F}"/>
               </a:ext>
             </a:extLst>
           </p:cNvPr>
@@ -23407,7 +23407,7 @@
           <p:cNvPr id="38" name="">
             <a:extLst xmlns:a="http://schemas.openxmlformats.org/drawingml/2006/main">
               <a:ext uri="{FF2B5EF4-FFF2-40B4-BE49-F238E27FC236}">
-                <a16:creationId xmlns:a16="http://schemas.microsoft.com/office/drawing/2014/main" id="{DD5952A8-DF1F-46CA-A392-241FE303ED57}"/>
+                <a16:creationId xmlns:a16="http://schemas.microsoft.com/office/drawing/2014/main" id="{2E65C261-1B3A-48B4-8ABA-AFF72811EF15}"/>
               </a:ext>
             </a:extLst>
           </p:cNvPr>
@@ -23459,7 +23459,7 @@
           <p:cNvPr id="39" name="">
             <a:extLst xmlns:a="http://schemas.openxmlformats.org/drawingml/2006/main">
               <a:ext uri="{FF2B5EF4-FFF2-40B4-BE49-F238E27FC236}">
-                <a16:creationId xmlns:a16="http://schemas.microsoft.com/office/drawing/2014/main" id="{DD4DC0E0-18CC-456F-906D-65A0971EFE49}"/>
+                <a16:creationId xmlns:a16="http://schemas.microsoft.com/office/drawing/2014/main" id="{10BC3E9A-F4A9-4800-AB64-65E7DE803290}"/>
               </a:ext>
             </a:extLst>
           </p:cNvPr>
@@ -23511,7 +23511,7 @@
           <p:cNvPr id="40" name="">
             <a:extLst xmlns:a="http://schemas.openxmlformats.org/drawingml/2006/main">
               <a:ext uri="{FF2B5EF4-FFF2-40B4-BE49-F238E27FC236}">
-                <a16:creationId xmlns:a16="http://schemas.microsoft.com/office/drawing/2014/main" id="{3C7EE619-2ED0-460A-BC48-7F417295E415}"/>
+                <a16:creationId xmlns:a16="http://schemas.microsoft.com/office/drawing/2014/main" id="{B1558B30-7D16-452A-9A04-5FF32DE0896A}"/>
               </a:ext>
             </a:extLst>
           </p:cNvPr>
@@ -23542,7 +23542,7 @@
           <p:cNvPr id="41" name="">
             <a:extLst xmlns:a="http://schemas.openxmlformats.org/drawingml/2006/main">
               <a:ext uri="{FF2B5EF4-FFF2-40B4-BE49-F238E27FC236}">
-                <a16:creationId xmlns:a16="http://schemas.microsoft.com/office/drawing/2014/main" id="{8BE3268B-665F-4FD2-9D93-938D2DDC31D3}"/>
+                <a16:creationId xmlns:a16="http://schemas.microsoft.com/office/drawing/2014/main" id="{587D83F3-E1AB-4D8D-B110-080CD4618B78}"/>
               </a:ext>
             </a:extLst>
           </p:cNvPr>
@@ -23594,7 +23594,7 @@
           <p:cNvPr id="42" name="">
             <a:extLst xmlns:a="http://schemas.openxmlformats.org/drawingml/2006/main">
               <a:ext uri="{FF2B5EF4-FFF2-40B4-BE49-F238E27FC236}">
-                <a16:creationId xmlns:a16="http://schemas.microsoft.com/office/drawing/2014/main" id="{D0B1CE7C-3BC1-4B34-8E64-988FBB988E30}"/>
+                <a16:creationId xmlns:a16="http://schemas.microsoft.com/office/drawing/2014/main" id="{1B6652A9-C9FA-4EED-A176-808F57C07CE7}"/>
               </a:ext>
             </a:extLst>
           </p:cNvPr>
@@ -23646,7 +23646,7 @@
           <p:cNvPr id="43" name="">
             <a:extLst xmlns:a="http://schemas.openxmlformats.org/drawingml/2006/main">
               <a:ext uri="{FF2B5EF4-FFF2-40B4-BE49-F238E27FC236}">
-                <a16:creationId xmlns:a16="http://schemas.microsoft.com/office/drawing/2014/main" id="{B9687CB1-7A2A-46CC-9264-5C6026DBCB48}"/>
+                <a16:creationId xmlns:a16="http://schemas.microsoft.com/office/drawing/2014/main" id="{3AE9C96A-396B-4EE6-A23D-8C3AE19F1183}"/>
               </a:ext>
             </a:extLst>
           </p:cNvPr>
@@ -23698,7 +23698,7 @@
           <p:cNvPr id="44" name="">
             <a:extLst xmlns:a="http://schemas.openxmlformats.org/drawingml/2006/main">
               <a:ext uri="{FF2B5EF4-FFF2-40B4-BE49-F238E27FC236}">
-                <a16:creationId xmlns:a16="http://schemas.microsoft.com/office/drawing/2014/main" id="{629848B4-3771-4887-8872-CC00A9417C39}"/>
+                <a16:creationId xmlns:a16="http://schemas.microsoft.com/office/drawing/2014/main" id="{7D5AA048-1424-4734-8C6B-FB05D8E677F1}"/>
               </a:ext>
             </a:extLst>
           </p:cNvPr>
@@ -23750,7 +23750,7 @@
           <p:cNvPr id="45" name="">
             <a:extLst xmlns:a="http://schemas.openxmlformats.org/drawingml/2006/main">
               <a:ext uri="{FF2B5EF4-FFF2-40B4-BE49-F238E27FC236}">
-                <a16:creationId xmlns:a16="http://schemas.microsoft.com/office/drawing/2014/main" id="{E6F22995-8FF4-47F4-BD28-381E5F96EC0C}"/>
+                <a16:creationId xmlns:a16="http://schemas.microsoft.com/office/drawing/2014/main" id="{EA17B614-F417-4323-89DD-C532163B10D7}"/>
               </a:ext>
             </a:extLst>
           </p:cNvPr>
@@ -23802,7 +23802,7 @@
           <p:cNvPr id="46" name="">
             <a:extLst xmlns:a="http://schemas.openxmlformats.org/drawingml/2006/main">
               <a:ext uri="{FF2B5EF4-FFF2-40B4-BE49-F238E27FC236}">
-                <a16:creationId xmlns:a16="http://schemas.microsoft.com/office/drawing/2014/main" id="{3B968FBF-A000-4586-996F-BD7756CB9FC4}"/>
+                <a16:creationId xmlns:a16="http://schemas.microsoft.com/office/drawing/2014/main" id="{D14A2B29-DC41-4F8B-83C6-2DE54B9571BE}"/>
               </a:ext>
             </a:extLst>
           </p:cNvPr>
@@ -23854,7 +23854,7 @@
           <p:cNvPr id="47" name="">
             <a:extLst xmlns:a="http://schemas.openxmlformats.org/drawingml/2006/main">
               <a:ext uri="{FF2B5EF4-FFF2-40B4-BE49-F238E27FC236}">
-                <a16:creationId xmlns:a16="http://schemas.microsoft.com/office/drawing/2014/main" id="{5FF78FBA-D478-4E9A-BCB4-8F1EC2B264F4}"/>
+                <a16:creationId xmlns:a16="http://schemas.microsoft.com/office/drawing/2014/main" id="{BAA67D75-744B-440A-95FC-BBA9E2D2C60F}"/>
               </a:ext>
             </a:extLst>
           </p:cNvPr>
@@ -23906,7 +23906,7 @@
           <p:cNvPr id="48" name="">
             <a:extLst xmlns:a="http://schemas.openxmlformats.org/drawingml/2006/main">
               <a:ext uri="{FF2B5EF4-FFF2-40B4-BE49-F238E27FC236}">
-                <a16:creationId xmlns:a16="http://schemas.microsoft.com/office/drawing/2014/main" id="{FF2D134F-AFE2-4538-97C1-AAB753A46094}"/>
+                <a16:creationId xmlns:a16="http://schemas.microsoft.com/office/drawing/2014/main" id="{8C8CE6AB-950F-413F-92F0-641B64BAD7EF}"/>
               </a:ext>
             </a:extLst>
           </p:cNvPr>
@@ -23958,7 +23958,7 @@
           <p:cNvPr id="49" name="">
             <a:extLst xmlns:a="http://schemas.openxmlformats.org/drawingml/2006/main">
               <a:ext uri="{FF2B5EF4-FFF2-40B4-BE49-F238E27FC236}">
-                <a16:creationId xmlns:a16="http://schemas.microsoft.com/office/drawing/2014/main" id="{5D62B98F-29D0-4A53-A100-5692419DB238}"/>
+                <a16:creationId xmlns:a16="http://schemas.microsoft.com/office/drawing/2014/main" id="{DFEF1117-59C0-442E-A98F-83AB35C79793}"/>
               </a:ext>
             </a:extLst>
           </p:cNvPr>
@@ -23989,7 +23989,7 @@
           <p:cNvPr id="50" name="">
             <a:extLst xmlns:a="http://schemas.openxmlformats.org/drawingml/2006/main">
               <a:ext uri="{FF2B5EF4-FFF2-40B4-BE49-F238E27FC236}">
-                <a16:creationId xmlns:a16="http://schemas.microsoft.com/office/drawing/2014/main" id="{F696B641-227B-45FA-9E27-DE5773A8F802}"/>
+                <a16:creationId xmlns:a16="http://schemas.microsoft.com/office/drawing/2014/main" id="{DA3EB40A-C89A-499C-91C5-41A96D032EA7}"/>
               </a:ext>
             </a:extLst>
           </p:cNvPr>
@@ -24020,7 +24020,7 @@
           <p:cNvPr id="51" name="">
             <a:extLst xmlns:a="http://schemas.openxmlformats.org/drawingml/2006/main">
               <a:ext uri="{FF2B5EF4-FFF2-40B4-BE49-F238E27FC236}">
-                <a16:creationId xmlns:a16="http://schemas.microsoft.com/office/drawing/2014/main" id="{3ED4585F-218C-430C-A1C2-351B973F473E}"/>
+                <a16:creationId xmlns:a16="http://schemas.microsoft.com/office/drawing/2014/main" id="{B9AA70AB-4017-4EE0-AA65-F35377BDC6BC}"/>
               </a:ext>
             </a:extLst>
           </p:cNvPr>
@@ -24072,7 +24072,7 @@
           <p:cNvPr id="52" name="">
             <a:extLst xmlns:a="http://schemas.openxmlformats.org/drawingml/2006/main">
               <a:ext uri="{FF2B5EF4-FFF2-40B4-BE49-F238E27FC236}">
-                <a16:creationId xmlns:a16="http://schemas.microsoft.com/office/drawing/2014/main" id="{3B344632-0C05-429C-8C20-1FE2B9FA50BB}"/>
+                <a16:creationId xmlns:a16="http://schemas.microsoft.com/office/drawing/2014/main" id="{ECE91B98-8436-4BB3-A27C-86F8CCCA539C}"/>
               </a:ext>
             </a:extLst>
           </p:cNvPr>
@@ -24124,7 +24124,7 @@
           <p:cNvPr id="53" name="">
             <a:extLst xmlns:a="http://schemas.openxmlformats.org/drawingml/2006/main">
               <a:ext uri="{FF2B5EF4-FFF2-40B4-BE49-F238E27FC236}">
-                <a16:creationId xmlns:a16="http://schemas.microsoft.com/office/drawing/2014/main" id="{2B84EC4F-00BD-40E2-B16C-F2F3460C86B0}"/>
+                <a16:creationId xmlns:a16="http://schemas.microsoft.com/office/drawing/2014/main" id="{F5B3D7BC-9CE5-44CF-B402-2665FA4925D7}"/>
               </a:ext>
             </a:extLst>
           </p:cNvPr>
@@ -24176,7 +24176,7 @@
           <p:cNvPr id="54" name="">
             <a:extLst xmlns:a="http://schemas.openxmlformats.org/drawingml/2006/main">
               <a:ext uri="{FF2B5EF4-FFF2-40B4-BE49-F238E27FC236}">
-                <a16:creationId xmlns:a16="http://schemas.microsoft.com/office/drawing/2014/main" id="{2839779C-E88D-4D55-A438-2C856BAE7CE5}"/>
+                <a16:creationId xmlns:a16="http://schemas.microsoft.com/office/drawing/2014/main" id="{592F09F3-8E4D-433F-94DA-AAA12739F213}"/>
               </a:ext>
             </a:extLst>
           </p:cNvPr>
@@ -24228,7 +24228,7 @@
           <p:cNvPr id="55" name="">
             <a:extLst xmlns:a="http://schemas.openxmlformats.org/drawingml/2006/main">
               <a:ext uri="{FF2B5EF4-FFF2-40B4-BE49-F238E27FC236}">
-                <a16:creationId xmlns:a16="http://schemas.microsoft.com/office/drawing/2014/main" id="{36CBBCFA-B2AA-4423-8826-AE15C9EB5C75}"/>
+                <a16:creationId xmlns:a16="http://schemas.microsoft.com/office/drawing/2014/main" id="{719EA057-6BA7-4B15-8DF6-ECC6815B07D8}"/>
               </a:ext>
             </a:extLst>
           </p:cNvPr>
@@ -24280,7 +24280,7 @@
           <p:cNvPr id="56" name="">
             <a:extLst xmlns:a="http://schemas.openxmlformats.org/drawingml/2006/main">
               <a:ext uri="{FF2B5EF4-FFF2-40B4-BE49-F238E27FC236}">
-                <a16:creationId xmlns:a16="http://schemas.microsoft.com/office/drawing/2014/main" id="{048911E5-3BBE-47B5-B39A-2D2A73E653C5}"/>
+                <a16:creationId xmlns:a16="http://schemas.microsoft.com/office/drawing/2014/main" id="{E6925B59-2B84-4614-BC13-A468AF4532E0}"/>
               </a:ext>
             </a:extLst>
           </p:cNvPr>
@@ -24332,7 +24332,7 @@
           <p:cNvPr id="57" name="">
             <a:extLst xmlns:a="http://schemas.openxmlformats.org/drawingml/2006/main">
               <a:ext uri="{FF2B5EF4-FFF2-40B4-BE49-F238E27FC236}">
-                <a16:creationId xmlns:a16="http://schemas.microsoft.com/office/drawing/2014/main" id="{BB26BB10-0C3D-4906-8C43-FE38DC616C45}"/>
+                <a16:creationId xmlns:a16="http://schemas.microsoft.com/office/drawing/2014/main" id="{01003017-7EEA-45C4-93E0-3C1EA1F256FA}"/>
               </a:ext>
             </a:extLst>
           </p:cNvPr>
@@ -24384,7 +24384,7 @@
           <p:cNvPr id="58" name="">
             <a:extLst xmlns:a="http://schemas.openxmlformats.org/drawingml/2006/main">
               <a:ext uri="{FF2B5EF4-FFF2-40B4-BE49-F238E27FC236}">
-                <a16:creationId xmlns:a16="http://schemas.microsoft.com/office/drawing/2014/main" id="{07E07084-363C-4604-967F-5A725B3792C4}"/>
+                <a16:creationId xmlns:a16="http://schemas.microsoft.com/office/drawing/2014/main" id="{8D31C940-3AF0-4E75-A87F-66F61A6DE2B6}"/>
               </a:ext>
             </a:extLst>
           </p:cNvPr>
@@ -24436,7 +24436,7 @@
           <p:cNvPr id="59" name="">
             <a:extLst xmlns:a="http://schemas.openxmlformats.org/drawingml/2006/main">
               <a:ext uri="{FF2B5EF4-FFF2-40B4-BE49-F238E27FC236}">
-                <a16:creationId xmlns:a16="http://schemas.microsoft.com/office/drawing/2014/main" id="{040D670B-0CDB-4AA2-BD57-787D76078ECE}"/>
+                <a16:creationId xmlns:a16="http://schemas.microsoft.com/office/drawing/2014/main" id="{17BE7710-4993-417B-B0B3-C324F005C53B}"/>
               </a:ext>
             </a:extLst>
           </p:cNvPr>
@@ -24467,7 +24467,7 @@
           <p:cNvPr id="60" name="">
             <a:extLst xmlns:a="http://schemas.openxmlformats.org/drawingml/2006/main">
               <a:ext uri="{FF2B5EF4-FFF2-40B4-BE49-F238E27FC236}">
-                <a16:creationId xmlns:a16="http://schemas.microsoft.com/office/drawing/2014/main" id="{02B5D9DC-2347-409F-8C78-202C180D2297}"/>
+                <a16:creationId xmlns:a16="http://schemas.microsoft.com/office/drawing/2014/main" id="{B20570DE-EBAE-4F6E-9205-614F6512E484}"/>
               </a:ext>
             </a:extLst>
           </p:cNvPr>
@@ -24519,7 +24519,7 @@
           <p:cNvPr id="61" name="">
             <a:extLst xmlns:a="http://schemas.openxmlformats.org/drawingml/2006/main">
               <a:ext uri="{FF2B5EF4-FFF2-40B4-BE49-F238E27FC236}">
-                <a16:creationId xmlns:a16="http://schemas.microsoft.com/office/drawing/2014/main" id="{1EB0C2B2-31F6-4930-BBAD-4731D9EEC9F0}"/>
+                <a16:creationId xmlns:a16="http://schemas.microsoft.com/office/drawing/2014/main" id="{6FAE098D-2C94-4BA5-9DF2-8821A70B449C}"/>
               </a:ext>
             </a:extLst>
           </p:cNvPr>
@@ -24571,7 +24571,7 @@
           <p:cNvPr id="62" name="">
             <a:extLst xmlns:a="http://schemas.openxmlformats.org/drawingml/2006/main">
               <a:ext uri="{FF2B5EF4-FFF2-40B4-BE49-F238E27FC236}">
-                <a16:creationId xmlns:a16="http://schemas.microsoft.com/office/drawing/2014/main" id="{8D888256-5A9A-44B8-8217-678307A24CD6}"/>
+                <a16:creationId xmlns:a16="http://schemas.microsoft.com/office/drawing/2014/main" id="{463FE9AF-4F8B-4F09-A721-6B41F61B9B95}"/>
               </a:ext>
             </a:extLst>
           </p:cNvPr>
@@ -24623,7 +24623,7 @@
           <p:cNvPr id="63" name="">
             <a:extLst xmlns:a="http://schemas.openxmlformats.org/drawingml/2006/main">
               <a:ext uri="{FF2B5EF4-FFF2-40B4-BE49-F238E27FC236}">
-                <a16:creationId xmlns:a16="http://schemas.microsoft.com/office/drawing/2014/main" id="{767866FE-B2FE-49B0-B275-363BA8639236}"/>
+                <a16:creationId xmlns:a16="http://schemas.microsoft.com/office/drawing/2014/main" id="{BFF3C751-6119-4626-B49C-FC2767D1B5BF}"/>
               </a:ext>
             </a:extLst>
           </p:cNvPr>
@@ -24675,7 +24675,7 @@
           <p:cNvPr id="64" name="">
             <a:extLst xmlns:a="http://schemas.openxmlformats.org/drawingml/2006/main">
               <a:ext uri="{FF2B5EF4-FFF2-40B4-BE49-F238E27FC236}">
-                <a16:creationId xmlns:a16="http://schemas.microsoft.com/office/drawing/2014/main" id="{EE75F778-7AEA-4169-86A6-01B453A389E2}"/>
+                <a16:creationId xmlns:a16="http://schemas.microsoft.com/office/drawing/2014/main" id="{3DEA8E03-4AC8-46D7-9138-C4C85C4F205B}"/>
               </a:ext>
             </a:extLst>
           </p:cNvPr>
@@ -24727,7 +24727,7 @@
           <p:cNvPr id="65" name="">
             <a:extLst xmlns:a="http://schemas.openxmlformats.org/drawingml/2006/main">
               <a:ext uri="{FF2B5EF4-FFF2-40B4-BE49-F238E27FC236}">
-                <a16:creationId xmlns:a16="http://schemas.microsoft.com/office/drawing/2014/main" id="{81EA57B2-53DC-428F-B197-E35DA81A58B3}"/>
+                <a16:creationId xmlns:a16="http://schemas.microsoft.com/office/drawing/2014/main" id="{84C6A4D7-3DCD-4C21-9542-AF1303414448}"/>
               </a:ext>
             </a:extLst>
           </p:cNvPr>
@@ -24779,7 +24779,7 @@
           <p:cNvPr id="66" name="">
             <a:extLst xmlns:a="http://schemas.openxmlformats.org/drawingml/2006/main">
               <a:ext uri="{FF2B5EF4-FFF2-40B4-BE49-F238E27FC236}">
-                <a16:creationId xmlns:a16="http://schemas.microsoft.com/office/drawing/2014/main" id="{48D96B3E-48B3-4C77-838F-EB6C0D583F72}"/>
+                <a16:creationId xmlns:a16="http://schemas.microsoft.com/office/drawing/2014/main" id="{41112FC6-4F95-4FDD-941F-1780A2269D25}"/>
               </a:ext>
             </a:extLst>
           </p:cNvPr>
@@ -24831,7 +24831,7 @@
           <p:cNvPr id="67" name="">
             <a:extLst xmlns:a="http://schemas.openxmlformats.org/drawingml/2006/main">
               <a:ext uri="{FF2B5EF4-FFF2-40B4-BE49-F238E27FC236}">
-                <a16:creationId xmlns:a16="http://schemas.microsoft.com/office/drawing/2014/main" id="{BA90398D-700C-4A24-A4C3-050F2EDCD0EE}"/>
+                <a16:creationId xmlns:a16="http://schemas.microsoft.com/office/drawing/2014/main" id="{C9C68114-CDEC-4783-9148-AAD146B1EAB9}"/>
               </a:ext>
             </a:extLst>
           </p:cNvPr>
@@ -24883,7 +24883,7 @@
           <p:cNvPr id="68" name="">
             <a:extLst xmlns:a="http://schemas.openxmlformats.org/drawingml/2006/main">
               <a:ext uri="{FF2B5EF4-FFF2-40B4-BE49-F238E27FC236}">
-                <a16:creationId xmlns:a16="http://schemas.microsoft.com/office/drawing/2014/main" id="{7A7FCAF0-FD69-426B-8B1A-5A6D8C657FC9}"/>
+                <a16:creationId xmlns:a16="http://schemas.microsoft.com/office/drawing/2014/main" id="{9E2BD3D1-38BD-42A4-9D5B-B19E7A4834E7}"/>
               </a:ext>
             </a:extLst>
           </p:cNvPr>
@@ -24914,7 +24914,7 @@
           <p:cNvPr id="69" name="">
             <a:extLst xmlns:a="http://schemas.openxmlformats.org/drawingml/2006/main">
               <a:ext uri="{FF2B5EF4-FFF2-40B4-BE49-F238E27FC236}">
-                <a16:creationId xmlns:a16="http://schemas.microsoft.com/office/drawing/2014/main" id="{95BDFB87-27BF-4E52-96AE-8DC661EF486C}"/>
+                <a16:creationId xmlns:a16="http://schemas.microsoft.com/office/drawing/2014/main" id="{9037378A-08A3-4F89-9F6C-031278942539}"/>
               </a:ext>
             </a:extLst>
           </p:cNvPr>
@@ -24945,7 +24945,7 @@
           <p:cNvPr id="70" name="">
             <a:extLst xmlns:a="http://schemas.openxmlformats.org/drawingml/2006/main">
               <a:ext uri="{FF2B5EF4-FFF2-40B4-BE49-F238E27FC236}">
-                <a16:creationId xmlns:a16="http://schemas.microsoft.com/office/drawing/2014/main" id="{6ED728B2-1250-40F8-A2D7-F933E8D93573}"/>
+                <a16:creationId xmlns:a16="http://schemas.microsoft.com/office/drawing/2014/main" id="{93F16E36-77A2-4F78-B439-EB638B3EC8D0}"/>
               </a:ext>
             </a:extLst>
           </p:cNvPr>
@@ -24997,7 +24997,7 @@
           <p:cNvPr id="71" name="">
             <a:extLst xmlns:a="http://schemas.openxmlformats.org/drawingml/2006/main">
               <a:ext uri="{FF2B5EF4-FFF2-40B4-BE49-F238E27FC236}">
-                <a16:creationId xmlns:a16="http://schemas.microsoft.com/office/drawing/2014/main" id="{1FE83235-DC68-49A9-8603-746479812737}"/>
+                <a16:creationId xmlns:a16="http://schemas.microsoft.com/office/drawing/2014/main" id="{05DE09F5-0597-4CED-AD20-77FF31FD3934}"/>
               </a:ext>
             </a:extLst>
           </p:cNvPr>
@@ -25049,7 +25049,7 @@
           <p:cNvPr id="72" name="">
             <a:extLst xmlns:a="http://schemas.openxmlformats.org/drawingml/2006/main">
               <a:ext uri="{FF2B5EF4-FFF2-40B4-BE49-F238E27FC236}">
-                <a16:creationId xmlns:a16="http://schemas.microsoft.com/office/drawing/2014/main" id="{DF6271BD-36AA-4454-8034-6E7937949322}"/>
+                <a16:creationId xmlns:a16="http://schemas.microsoft.com/office/drawing/2014/main" id="{9315F57B-FBB2-470B-A74C-36F60362CED2}"/>
               </a:ext>
             </a:extLst>
           </p:cNvPr>
@@ -25101,7 +25101,7 @@
           <p:cNvPr id="73" name="">
             <a:extLst xmlns:a="http://schemas.openxmlformats.org/drawingml/2006/main">
               <a:ext uri="{FF2B5EF4-FFF2-40B4-BE49-F238E27FC236}">
-                <a16:creationId xmlns:a16="http://schemas.microsoft.com/office/drawing/2014/main" id="{89D96C1D-84B2-428F-8EF4-988430D94C38}"/>
+                <a16:creationId xmlns:a16="http://schemas.microsoft.com/office/drawing/2014/main" id="{D836EF7D-B46C-4933-913C-1BAE98DC54DB}"/>
               </a:ext>
             </a:extLst>
           </p:cNvPr>
@@ -25153,7 +25153,7 @@
           <p:cNvPr id="74" name="">
             <a:extLst xmlns:a="http://schemas.openxmlformats.org/drawingml/2006/main">
               <a:ext uri="{FF2B5EF4-FFF2-40B4-BE49-F238E27FC236}">
-                <a16:creationId xmlns:a16="http://schemas.microsoft.com/office/drawing/2014/main" id="{3BE29BC6-08EB-47AC-9220-CFD487BF3707}"/>
+                <a16:creationId xmlns:a16="http://schemas.microsoft.com/office/drawing/2014/main" id="{BC3A0B12-10EE-43A3-811B-2CE1EFA08995}"/>
               </a:ext>
             </a:extLst>
           </p:cNvPr>
@@ -25205,7 +25205,7 @@
           <p:cNvPr id="75" name="">
             <a:extLst xmlns:a="http://schemas.openxmlformats.org/drawingml/2006/main">
               <a:ext uri="{FF2B5EF4-FFF2-40B4-BE49-F238E27FC236}">
-                <a16:creationId xmlns:a16="http://schemas.microsoft.com/office/drawing/2014/main" id="{4CBD33FB-0E1C-4DEF-B712-F7C92CC77070}"/>
+                <a16:creationId xmlns:a16="http://schemas.microsoft.com/office/drawing/2014/main" id="{166E9127-FED0-49BA-946C-52158B6663BB}"/>
               </a:ext>
             </a:extLst>
           </p:cNvPr>
@@ -25257,7 +25257,7 @@
           <p:cNvPr id="76" name="">
             <a:extLst xmlns:a="http://schemas.openxmlformats.org/drawingml/2006/main">
               <a:ext uri="{FF2B5EF4-FFF2-40B4-BE49-F238E27FC236}">
-                <a16:creationId xmlns:a16="http://schemas.microsoft.com/office/drawing/2014/main" id="{550BE5AC-88A3-4BE2-A1F5-1EBE9016B06C}"/>
+                <a16:creationId xmlns:a16="http://schemas.microsoft.com/office/drawing/2014/main" id="{02307CFF-2374-4A45-8174-83D55B92CE26}"/>
               </a:ext>
             </a:extLst>
           </p:cNvPr>
@@ -25309,7 +25309,7 @@
           <p:cNvPr id="77" name="">
             <a:extLst xmlns:a="http://schemas.openxmlformats.org/drawingml/2006/main">
               <a:ext uri="{FF2B5EF4-FFF2-40B4-BE49-F238E27FC236}">
-                <a16:creationId xmlns:a16="http://schemas.microsoft.com/office/drawing/2014/main" id="{AA06D25A-99EB-4679-B2E1-4D6C4A212BE7}"/>
+                <a16:creationId xmlns:a16="http://schemas.microsoft.com/office/drawing/2014/main" id="{961B3EAB-44AD-4016-A374-5178378E8CE6}"/>
               </a:ext>
             </a:extLst>
           </p:cNvPr>
@@ -25361,7 +25361,7 @@
           <p:cNvPr id="78" name="">
             <a:extLst xmlns:a="http://schemas.openxmlformats.org/drawingml/2006/main">
               <a:ext uri="{FF2B5EF4-FFF2-40B4-BE49-F238E27FC236}">
-                <a16:creationId xmlns:a16="http://schemas.microsoft.com/office/drawing/2014/main" id="{AAE0063E-CBC7-4EE5-89EA-627C2EDEBDA4}"/>
+                <a16:creationId xmlns:a16="http://schemas.microsoft.com/office/drawing/2014/main" id="{9FB7B089-D4AE-45FB-8DC0-F84813FE3EEC}"/>
               </a:ext>
             </a:extLst>
           </p:cNvPr>
@@ -25392,7 +25392,7 @@
           <p:cNvPr id="79" name="">
             <a:extLst xmlns:a="http://schemas.openxmlformats.org/drawingml/2006/main">
               <a:ext uri="{FF2B5EF4-FFF2-40B4-BE49-F238E27FC236}">
-                <a16:creationId xmlns:a16="http://schemas.microsoft.com/office/drawing/2014/main" id="{D03ED246-A6F3-4331-AEEC-494D8075249F}"/>
+                <a16:creationId xmlns:a16="http://schemas.microsoft.com/office/drawing/2014/main" id="{B28D356F-85F3-4307-AAD1-62E6DA81824F}"/>
               </a:ext>
             </a:extLst>
           </p:cNvPr>
@@ -25444,7 +25444,7 @@
           <p:cNvPr id="80" name="">
             <a:extLst xmlns:a="http://schemas.openxmlformats.org/drawingml/2006/main">
               <a:ext uri="{FF2B5EF4-FFF2-40B4-BE49-F238E27FC236}">
-                <a16:creationId xmlns:a16="http://schemas.microsoft.com/office/drawing/2014/main" id="{7428EBEA-DFFA-4EDA-8492-A8EA916AA622}"/>
+                <a16:creationId xmlns:a16="http://schemas.microsoft.com/office/drawing/2014/main" id="{96F4F933-96D5-4302-B4AE-959686A78ECE}"/>
               </a:ext>
             </a:extLst>
           </p:cNvPr>
@@ -25496,7 +25496,7 @@
           <p:cNvPr id="81" name="">
             <a:extLst xmlns:a="http://schemas.openxmlformats.org/drawingml/2006/main">
               <a:ext uri="{FF2B5EF4-FFF2-40B4-BE49-F238E27FC236}">
-                <a16:creationId xmlns:a16="http://schemas.microsoft.com/office/drawing/2014/main" id="{AA70CC35-B816-4F34-B585-DFCEF2B5027A}"/>
+                <a16:creationId xmlns:a16="http://schemas.microsoft.com/office/drawing/2014/main" id="{36EB9DBA-5213-42CB-927F-E3A84DCE30E6}"/>
               </a:ext>
             </a:extLst>
           </p:cNvPr>
@@ -25548,7 +25548,7 @@
           <p:cNvPr id="82" name="">
             <a:extLst xmlns:a="http://schemas.openxmlformats.org/drawingml/2006/main">
               <a:ext uri="{FF2B5EF4-FFF2-40B4-BE49-F238E27FC236}">
-                <a16:creationId xmlns:a16="http://schemas.microsoft.com/office/drawing/2014/main" id="{8D1A230F-03C4-48C7-A348-CE1FF7B1ED01}"/>
+                <a16:creationId xmlns:a16="http://schemas.microsoft.com/office/drawing/2014/main" id="{00EFF3D2-AF77-4AB3-ACA0-98C8A628FAFC}"/>
               </a:ext>
             </a:extLst>
           </p:cNvPr>
@@ -25600,7 +25600,7 @@
           <p:cNvPr id="83" name="">
             <a:extLst xmlns:a="http://schemas.openxmlformats.org/drawingml/2006/main">
               <a:ext uri="{FF2B5EF4-FFF2-40B4-BE49-F238E27FC236}">
-                <a16:creationId xmlns:a16="http://schemas.microsoft.com/office/drawing/2014/main" id="{302DF213-62A1-41CA-8768-7F95851C1A2F}"/>
+                <a16:creationId xmlns:a16="http://schemas.microsoft.com/office/drawing/2014/main" id="{BAF811A4-6B1B-4657-B635-68DCE92441B8}"/>
               </a:ext>
             </a:extLst>
           </p:cNvPr>
@@ -25652,7 +25652,7 @@
           <p:cNvPr id="84" name="">
             <a:extLst xmlns:a="http://schemas.openxmlformats.org/drawingml/2006/main">
               <a:ext uri="{FF2B5EF4-FFF2-40B4-BE49-F238E27FC236}">
-                <a16:creationId xmlns:a16="http://schemas.microsoft.com/office/drawing/2014/main" id="{8B69EC13-04C8-449D-8586-D9A2A9A6DF2B}"/>
+                <a16:creationId xmlns:a16="http://schemas.microsoft.com/office/drawing/2014/main" id="{F455A035-21E2-4B97-85BB-2E32BC6CC455}"/>
               </a:ext>
             </a:extLst>
           </p:cNvPr>
@@ -25704,7 +25704,7 @@
           <p:cNvPr id="85" name="">
             <a:extLst xmlns:a="http://schemas.openxmlformats.org/drawingml/2006/main">
               <a:ext uri="{FF2B5EF4-FFF2-40B4-BE49-F238E27FC236}">
-                <a16:creationId xmlns:a16="http://schemas.microsoft.com/office/drawing/2014/main" id="{8D96DC70-899B-4411-A8F6-35A665B09589}"/>
+                <a16:creationId xmlns:a16="http://schemas.microsoft.com/office/drawing/2014/main" id="{9E82178E-FD80-488B-8EC4-0E785B51AD40}"/>
               </a:ext>
             </a:extLst>
           </p:cNvPr>
@@ -25756,7 +25756,7 @@
           <p:cNvPr id="86" name="">
             <a:extLst xmlns:a="http://schemas.openxmlformats.org/drawingml/2006/main">
               <a:ext uri="{FF2B5EF4-FFF2-40B4-BE49-F238E27FC236}">
-                <a16:creationId xmlns:a16="http://schemas.microsoft.com/office/drawing/2014/main" id="{D4F10E74-6487-4A18-AB82-F3A76F30AF40}"/>
+                <a16:creationId xmlns:a16="http://schemas.microsoft.com/office/drawing/2014/main" id="{5CE004F6-03A7-4B55-9D1A-61D9EE01B02E}"/>
               </a:ext>
             </a:extLst>
           </p:cNvPr>
@@ -25808,7 +25808,7 @@
           <p:cNvPr id="87" name="">
             <a:extLst xmlns:a="http://schemas.openxmlformats.org/drawingml/2006/main">
               <a:ext uri="{FF2B5EF4-FFF2-40B4-BE49-F238E27FC236}">
-                <a16:creationId xmlns:a16="http://schemas.microsoft.com/office/drawing/2014/main" id="{456B3787-7F96-49D6-B5CD-C99C3717B94E}"/>
+                <a16:creationId xmlns:a16="http://schemas.microsoft.com/office/drawing/2014/main" id="{7CFA441A-1477-4424-BF0D-BF41CCCDAB15}"/>
               </a:ext>
             </a:extLst>
           </p:cNvPr>
@@ -25839,7 +25839,7 @@
           <p:cNvPr id="88" name="">
             <a:extLst xmlns:a="http://schemas.openxmlformats.org/drawingml/2006/main">
               <a:ext uri="{FF2B5EF4-FFF2-40B4-BE49-F238E27FC236}">
-                <a16:creationId xmlns:a16="http://schemas.microsoft.com/office/drawing/2014/main" id="{F39531D1-DCCF-4538-8679-DF5201228007}"/>
+                <a16:creationId xmlns:a16="http://schemas.microsoft.com/office/drawing/2014/main" id="{EF4A4BBC-38BE-4EE7-A89A-51FD8C76C3C5}"/>
               </a:ext>
             </a:extLst>
           </p:cNvPr>
@@ -25870,7 +25870,7 @@
           <p:cNvPr id="89" name="">
             <a:extLst xmlns:a="http://schemas.openxmlformats.org/drawingml/2006/main">
               <a:ext uri="{FF2B5EF4-FFF2-40B4-BE49-F238E27FC236}">
-                <a16:creationId xmlns:a16="http://schemas.microsoft.com/office/drawing/2014/main" id="{0DF97F6C-7F4C-40A3-AAAB-90228B9289FF}"/>
+                <a16:creationId xmlns:a16="http://schemas.microsoft.com/office/drawing/2014/main" id="{17A4A927-4CEA-4574-B312-9891B8D4EF46}"/>
               </a:ext>
             </a:extLst>
           </p:cNvPr>
@@ -25922,7 +25922,7 @@
           <p:cNvPr id="90" name="">
             <a:extLst xmlns:a="http://schemas.openxmlformats.org/drawingml/2006/main">
               <a:ext uri="{FF2B5EF4-FFF2-40B4-BE49-F238E27FC236}">
-                <a16:creationId xmlns:a16="http://schemas.microsoft.com/office/drawing/2014/main" id="{C60927AE-26C2-4969-A5EA-9B29DAFC8C7D}"/>
+                <a16:creationId xmlns:a16="http://schemas.microsoft.com/office/drawing/2014/main" id="{7F8EE922-3B04-44C9-9C9B-AA0B5FD2FEB2}"/>
               </a:ext>
             </a:extLst>
           </p:cNvPr>
@@ -25974,7 +25974,7 @@
           <p:cNvPr id="91" name="">
             <a:extLst xmlns:a="http://schemas.openxmlformats.org/drawingml/2006/main">
               <a:ext uri="{FF2B5EF4-FFF2-40B4-BE49-F238E27FC236}">
-                <a16:creationId xmlns:a16="http://schemas.microsoft.com/office/drawing/2014/main" id="{E8D8CF38-91B9-410E-93D5-06EE703D127C}"/>
+                <a16:creationId xmlns:a16="http://schemas.microsoft.com/office/drawing/2014/main" id="{7A7BE0DB-AC20-4A9D-9D67-A8F06F4C9107}"/>
               </a:ext>
             </a:extLst>
           </p:cNvPr>
@@ -26026,7 +26026,7 @@
           <p:cNvPr id="92" name="">
             <a:extLst xmlns:a="http://schemas.openxmlformats.org/drawingml/2006/main">
               <a:ext uri="{FF2B5EF4-FFF2-40B4-BE49-F238E27FC236}">
-                <a16:creationId xmlns:a16="http://schemas.microsoft.com/office/drawing/2014/main" id="{72528237-B7AD-489C-8DE8-99E9D8A4EDF6}"/>
+                <a16:creationId xmlns:a16="http://schemas.microsoft.com/office/drawing/2014/main" id="{52428292-5581-4C7A-804C-A9EA329046DB}"/>
               </a:ext>
             </a:extLst>
           </p:cNvPr>
@@ -26078,7 +26078,7 @@
           <p:cNvPr id="93" name="">
             <a:extLst xmlns:a="http://schemas.openxmlformats.org/drawingml/2006/main">
               <a:ext uri="{FF2B5EF4-FFF2-40B4-BE49-F238E27FC236}">
-                <a16:creationId xmlns:a16="http://schemas.microsoft.com/office/drawing/2014/main" id="{A0C7E71A-05E2-4734-9D6F-107D21E5E928}"/>
+                <a16:creationId xmlns:a16="http://schemas.microsoft.com/office/drawing/2014/main" id="{85666A1B-29C4-4AB3-9D61-C92180A4AB62}"/>
               </a:ext>
             </a:extLst>
           </p:cNvPr>
@@ -26130,7 +26130,7 @@
           <p:cNvPr id="94" name="">
             <a:extLst xmlns:a="http://schemas.openxmlformats.org/drawingml/2006/main">
               <a:ext uri="{FF2B5EF4-FFF2-40B4-BE49-F238E27FC236}">
-                <a16:creationId xmlns:a16="http://schemas.microsoft.com/office/drawing/2014/main" id="{B65FF67F-4B1C-4781-9CD7-45B9442245F4}"/>
+                <a16:creationId xmlns:a16="http://schemas.microsoft.com/office/drawing/2014/main" id="{ADB6C2C8-40D0-46A0-9544-C310BD34734A}"/>
               </a:ext>
             </a:extLst>
           </p:cNvPr>
@@ -26182,7 +26182,7 @@
           <p:cNvPr id="95" name="">
             <a:extLst xmlns:a="http://schemas.openxmlformats.org/drawingml/2006/main">
               <a:ext uri="{FF2B5EF4-FFF2-40B4-BE49-F238E27FC236}">
-                <a16:creationId xmlns:a16="http://schemas.microsoft.com/office/drawing/2014/main" id="{D120E44F-CA95-4FD3-A44A-D9D53898B9FA}"/>
+                <a16:creationId xmlns:a16="http://schemas.microsoft.com/office/drawing/2014/main" id="{93310E1F-B00E-4A0F-9276-3BCFF57C6933}"/>
               </a:ext>
             </a:extLst>
           </p:cNvPr>
@@ -26234,7 +26234,7 @@
           <p:cNvPr id="96" name="">
             <a:extLst xmlns:a="http://schemas.openxmlformats.org/drawingml/2006/main">
               <a:ext uri="{FF2B5EF4-FFF2-40B4-BE49-F238E27FC236}">
-                <a16:creationId xmlns:a16="http://schemas.microsoft.com/office/drawing/2014/main" id="{E34F8AA0-62A0-46B6-8AF3-104D5CCD1603}"/>
+                <a16:creationId xmlns:a16="http://schemas.microsoft.com/office/drawing/2014/main" id="{0E4D9D98-2B20-4F37-94A0-83F51E4827E2}"/>
               </a:ext>
             </a:extLst>
           </p:cNvPr>
@@ -26286,7 +26286,7 @@
           <p:cNvPr id="97" name="">
             <a:extLst xmlns:a="http://schemas.openxmlformats.org/drawingml/2006/main">
               <a:ext uri="{FF2B5EF4-FFF2-40B4-BE49-F238E27FC236}">
-                <a16:creationId xmlns:a16="http://schemas.microsoft.com/office/drawing/2014/main" id="{703A7BA1-77AA-4D1C-AA4E-A6DA4B74CC59}"/>
+                <a16:creationId xmlns:a16="http://schemas.microsoft.com/office/drawing/2014/main" id="{898D0AAF-0A06-44D1-8B3E-8912CAEA1C75}"/>
               </a:ext>
             </a:extLst>
           </p:cNvPr>
@@ -26317,7 +26317,7 @@
           <p:cNvPr id="98" name="">
             <a:extLst xmlns:a="http://schemas.openxmlformats.org/drawingml/2006/main">
               <a:ext uri="{FF2B5EF4-FFF2-40B4-BE49-F238E27FC236}">
-                <a16:creationId xmlns:a16="http://schemas.microsoft.com/office/drawing/2014/main" id="{775DBD3D-D691-4F1E-BFAA-C4286B7F3C0E}"/>
+                <a16:creationId xmlns:a16="http://schemas.microsoft.com/office/drawing/2014/main" id="{14CD0432-A7E1-413C-9B70-8DF5AF0FD9D8}"/>
               </a:ext>
             </a:extLst>
           </p:cNvPr>
@@ -26369,7 +26369,7 @@
           <p:cNvPr id="99" name="">
             <a:extLst xmlns:a="http://schemas.openxmlformats.org/drawingml/2006/main">
               <a:ext uri="{FF2B5EF4-FFF2-40B4-BE49-F238E27FC236}">
-                <a16:creationId xmlns:a16="http://schemas.microsoft.com/office/drawing/2014/main" id="{0BB43F0A-D2B1-4047-BE30-3BE7370EB63B}"/>
+                <a16:creationId xmlns:a16="http://schemas.microsoft.com/office/drawing/2014/main" id="{793C1CD9-AC7E-45F7-83CF-96ECBA7C7835}"/>
               </a:ext>
             </a:extLst>
           </p:cNvPr>
@@ -26421,7 +26421,7 @@
           <p:cNvPr id="100" name="">
             <a:extLst xmlns:a="http://schemas.openxmlformats.org/drawingml/2006/main">
               <a:ext uri="{FF2B5EF4-FFF2-40B4-BE49-F238E27FC236}">
-                <a16:creationId xmlns:a16="http://schemas.microsoft.com/office/drawing/2014/main" id="{5CE86CD3-9FBC-4C8F-9429-E6531F33E916}"/>
+                <a16:creationId xmlns:a16="http://schemas.microsoft.com/office/drawing/2014/main" id="{32399F7F-56CA-448E-A176-5830AF0D182F}"/>
               </a:ext>
             </a:extLst>
           </p:cNvPr>
@@ -26473,7 +26473,7 @@
           <p:cNvPr id="101" name="">
             <a:extLst xmlns:a="http://schemas.openxmlformats.org/drawingml/2006/main">
               <a:ext uri="{FF2B5EF4-FFF2-40B4-BE49-F238E27FC236}">
-                <a16:creationId xmlns:a16="http://schemas.microsoft.com/office/drawing/2014/main" id="{1EF34585-26E8-4C24-A01C-0480D04024C2}"/>
+                <a16:creationId xmlns:a16="http://schemas.microsoft.com/office/drawing/2014/main" id="{9D9D1E3B-5D70-4C0F-BC4B-93CA86B6F818}"/>
               </a:ext>
             </a:extLst>
           </p:cNvPr>
@@ -26525,7 +26525,7 @@
           <p:cNvPr id="102" name="">
             <a:extLst xmlns:a="http://schemas.openxmlformats.org/drawingml/2006/main">
               <a:ext uri="{FF2B5EF4-FFF2-40B4-BE49-F238E27FC236}">
-                <a16:creationId xmlns:a16="http://schemas.microsoft.com/office/drawing/2014/main" id="{9FACB0C1-D41B-4E89-9BC4-B740F10768DC}"/>
+                <a16:creationId xmlns:a16="http://schemas.microsoft.com/office/drawing/2014/main" id="{6C617912-09C5-4E63-ACBD-EA726AB2AC41}"/>
               </a:ext>
             </a:extLst>
           </p:cNvPr>
@@ -26577,7 +26577,7 @@
           <p:cNvPr id="103" name="">
             <a:extLst xmlns:a="http://schemas.openxmlformats.org/drawingml/2006/main">
               <a:ext uri="{FF2B5EF4-FFF2-40B4-BE49-F238E27FC236}">
-                <a16:creationId xmlns:a16="http://schemas.microsoft.com/office/drawing/2014/main" id="{445E0494-E68D-4494-8A23-DE7D71D2C9F1}"/>
+                <a16:creationId xmlns:a16="http://schemas.microsoft.com/office/drawing/2014/main" id="{2193ABEB-38AF-4912-8FBF-A7D0AB02D52E}"/>
               </a:ext>
             </a:extLst>
           </p:cNvPr>
@@ -26629,7 +26629,7 @@
           <p:cNvPr id="104" name="">
             <a:extLst xmlns:a="http://schemas.openxmlformats.org/drawingml/2006/main">
               <a:ext uri="{FF2B5EF4-FFF2-40B4-BE49-F238E27FC236}">
-                <a16:creationId xmlns:a16="http://schemas.microsoft.com/office/drawing/2014/main" id="{BC73D638-0BA7-4B75-B816-D90D88EEFC7E}"/>
+                <a16:creationId xmlns:a16="http://schemas.microsoft.com/office/drawing/2014/main" id="{3E18D962-5AB1-47D2-A4EA-1E61DC641697}"/>
               </a:ext>
             </a:extLst>
           </p:cNvPr>
@@ -26681,7 +26681,7 @@
           <p:cNvPr id="105" name="">
             <a:extLst xmlns:a="http://schemas.openxmlformats.org/drawingml/2006/main">
               <a:ext uri="{FF2B5EF4-FFF2-40B4-BE49-F238E27FC236}">
-                <a16:creationId xmlns:a16="http://schemas.microsoft.com/office/drawing/2014/main" id="{97A10058-EC41-48A2-A311-2C9144A9B176}"/>
+                <a16:creationId xmlns:a16="http://schemas.microsoft.com/office/drawing/2014/main" id="{FF282563-6D54-445E-A51F-05F71EC6E2D7}"/>
               </a:ext>
             </a:extLst>
           </p:cNvPr>
@@ -26733,7 +26733,7 @@
           <p:cNvPr id="106" name="">
             <a:extLst xmlns:a="http://schemas.openxmlformats.org/drawingml/2006/main">
               <a:ext uri="{FF2B5EF4-FFF2-40B4-BE49-F238E27FC236}">
-                <a16:creationId xmlns:a16="http://schemas.microsoft.com/office/drawing/2014/main" id="{71546D5C-C6FC-4CF8-8D3F-1A842225FD32}"/>
+                <a16:creationId xmlns:a16="http://schemas.microsoft.com/office/drawing/2014/main" id="{61D0CC7F-BA81-4720-A85E-2C27BB6A4F1A}"/>
               </a:ext>
             </a:extLst>
           </p:cNvPr>
@@ -26764,7 +26764,7 @@
           <p:cNvPr id="107" name="">
             <a:extLst xmlns:a="http://schemas.openxmlformats.org/drawingml/2006/main">
               <a:ext uri="{FF2B5EF4-FFF2-40B4-BE49-F238E27FC236}">
-                <a16:creationId xmlns:a16="http://schemas.microsoft.com/office/drawing/2014/main" id="{4833D813-FEB5-4F5C-996F-1AEFB116E767}"/>
+                <a16:creationId xmlns:a16="http://schemas.microsoft.com/office/drawing/2014/main" id="{9EE760BB-B2D3-4822-9D02-EECAEC29A51E}"/>
               </a:ext>
             </a:extLst>
           </p:cNvPr>
@@ -26795,7 +26795,7 @@
           <p:cNvPr id="108" name="">
             <a:extLst xmlns:a="http://schemas.openxmlformats.org/drawingml/2006/main">
               <a:ext uri="{FF2B5EF4-FFF2-40B4-BE49-F238E27FC236}">
-                <a16:creationId xmlns:a16="http://schemas.microsoft.com/office/drawing/2014/main" id="{7A06D108-0747-42D1-B962-9A0B85804A09}"/>
+                <a16:creationId xmlns:a16="http://schemas.microsoft.com/office/drawing/2014/main" id="{4AC8AF0D-BD34-4456-BDA2-7E97CF9FF696}"/>
               </a:ext>
             </a:extLst>
           </p:cNvPr>
@@ -26847,7 +26847,7 @@
           <p:cNvPr id="109" name="">
             <a:extLst xmlns:a="http://schemas.openxmlformats.org/drawingml/2006/main">
               <a:ext uri="{FF2B5EF4-FFF2-40B4-BE49-F238E27FC236}">
-                <a16:creationId xmlns:a16="http://schemas.microsoft.com/office/drawing/2014/main" id="{C3C022A2-89E1-4255-B158-94A98F3519A4}"/>
+                <a16:creationId xmlns:a16="http://schemas.microsoft.com/office/drawing/2014/main" id="{CCB09235-FE93-4AA4-8BF0-ED386ACABE63}"/>
               </a:ext>
             </a:extLst>
           </p:cNvPr>
@@ -26899,7 +26899,7 @@
           <p:cNvPr id="110" name="">
             <a:extLst xmlns:a="http://schemas.openxmlformats.org/drawingml/2006/main">
               <a:ext uri="{FF2B5EF4-FFF2-40B4-BE49-F238E27FC236}">
-                <a16:creationId xmlns:a16="http://schemas.microsoft.com/office/drawing/2014/main" id="{A621C381-575D-4434-A5FC-ED8934FCAFC0}"/>
+                <a16:creationId xmlns:a16="http://schemas.microsoft.com/office/drawing/2014/main" id="{773B8785-4475-4D51-BBBF-C02481F67684}"/>
               </a:ext>
             </a:extLst>
           </p:cNvPr>
@@ -26951,7 +26951,7 @@
           <p:cNvPr id="111" name="">
             <a:extLst xmlns:a="http://schemas.openxmlformats.org/drawingml/2006/main">
               <a:ext uri="{FF2B5EF4-FFF2-40B4-BE49-F238E27FC236}">
-                <a16:creationId xmlns:a16="http://schemas.microsoft.com/office/drawing/2014/main" id="{DBA8D0C7-06FB-49F5-8B6D-B02F35911B84}"/>
+                <a16:creationId xmlns:a16="http://schemas.microsoft.com/office/drawing/2014/main" id="{2AE6F140-312B-4BDC-BFEF-DEC6F028E5C3}"/>
               </a:ext>
             </a:extLst>
           </p:cNvPr>
@@ -27003,7 +27003,7 @@
           <p:cNvPr id="112" name="">
             <a:extLst xmlns:a="http://schemas.openxmlformats.org/drawingml/2006/main">
               <a:ext uri="{FF2B5EF4-FFF2-40B4-BE49-F238E27FC236}">
-                <a16:creationId xmlns:a16="http://schemas.microsoft.com/office/drawing/2014/main" id="{90C87EA0-B287-4D51-901A-00710C28144F}"/>
+                <a16:creationId xmlns:a16="http://schemas.microsoft.com/office/drawing/2014/main" id="{0FD521CF-BB1C-473D-A68F-23B4CE4343A9}"/>
               </a:ext>
             </a:extLst>
           </p:cNvPr>
@@ -27055,7 +27055,7 @@
           <p:cNvPr id="113" name="">
             <a:extLst xmlns:a="http://schemas.openxmlformats.org/drawingml/2006/main">
               <a:ext uri="{FF2B5EF4-FFF2-40B4-BE49-F238E27FC236}">
-                <a16:creationId xmlns:a16="http://schemas.microsoft.com/office/drawing/2014/main" id="{80317659-0B0B-4D04-A26D-97DB4A3F88E1}"/>
+                <a16:creationId xmlns:a16="http://schemas.microsoft.com/office/drawing/2014/main" id="{E9F0C12C-6333-49E4-A63C-1D1B200EBBD2}"/>
               </a:ext>
             </a:extLst>
           </p:cNvPr>
@@ -27107,7 +27107,7 @@
           <p:cNvPr id="114" name="">
             <a:extLst xmlns:a="http://schemas.openxmlformats.org/drawingml/2006/main">
               <a:ext uri="{FF2B5EF4-FFF2-40B4-BE49-F238E27FC236}">
-                <a16:creationId xmlns:a16="http://schemas.microsoft.com/office/drawing/2014/main" id="{9FA8A268-8810-4400-AEB8-ED848D51B654}"/>
+                <a16:creationId xmlns:a16="http://schemas.microsoft.com/office/drawing/2014/main" id="{B45E968B-8A77-4923-AC38-63F63D763CBF}"/>
               </a:ext>
             </a:extLst>
           </p:cNvPr>
@@ -27159,7 +27159,7 @@
           <p:cNvPr id="115" name="">
             <a:extLst xmlns:a="http://schemas.openxmlformats.org/drawingml/2006/main">
               <a:ext uri="{FF2B5EF4-FFF2-40B4-BE49-F238E27FC236}">
-                <a16:creationId xmlns:a16="http://schemas.microsoft.com/office/drawing/2014/main" id="{79840C55-0EF7-433F-B09B-8F700C7D4FED}"/>
+                <a16:creationId xmlns:a16="http://schemas.microsoft.com/office/drawing/2014/main" id="{FA3DBB73-9639-49F3-A8B3-E07E0E34B9FE}"/>
               </a:ext>
             </a:extLst>
           </p:cNvPr>
@@ -27211,7 +27211,7 @@
           <p:cNvPr id="116" name="">
             <a:extLst xmlns:a="http://schemas.openxmlformats.org/drawingml/2006/main">
               <a:ext uri="{FF2B5EF4-FFF2-40B4-BE49-F238E27FC236}">
-                <a16:creationId xmlns:a16="http://schemas.microsoft.com/office/drawing/2014/main" id="{7F119AEA-7778-4A6B-9D22-81643926B5BA}"/>
+                <a16:creationId xmlns:a16="http://schemas.microsoft.com/office/drawing/2014/main" id="{286C639F-20D7-4149-92B0-ABCC713A64C2}"/>
               </a:ext>
             </a:extLst>
           </p:cNvPr>
@@ -27242,7 +27242,7 @@
           <p:cNvPr id="117" name="">
             <a:extLst xmlns:a="http://schemas.openxmlformats.org/drawingml/2006/main">
               <a:ext uri="{FF2B5EF4-FFF2-40B4-BE49-F238E27FC236}">
-                <a16:creationId xmlns:a16="http://schemas.microsoft.com/office/drawing/2014/main" id="{9AF8ABB3-D5C4-42ED-AB94-E08C5D4CF83B}"/>
+                <a16:creationId xmlns:a16="http://schemas.microsoft.com/office/drawing/2014/main" id="{5AB16061-7336-4DB5-844D-9125153FBC13}"/>
               </a:ext>
             </a:extLst>
           </p:cNvPr>
@@ -27294,7 +27294,7 @@
           <p:cNvPr id="118" name="">
             <a:extLst xmlns:a="http://schemas.openxmlformats.org/drawingml/2006/main">
               <a:ext uri="{FF2B5EF4-FFF2-40B4-BE49-F238E27FC236}">
-                <a16:creationId xmlns:a16="http://schemas.microsoft.com/office/drawing/2014/main" id="{9FF8B71C-570D-4EA3-BD25-B467940CD457}"/>
+                <a16:creationId xmlns:a16="http://schemas.microsoft.com/office/drawing/2014/main" id="{638C1241-36DD-484E-810C-CD0CDC7FD6B4}"/>
               </a:ext>
             </a:extLst>
           </p:cNvPr>
@@ -27346,7 +27346,7 @@
           <p:cNvPr id="119" name="">
             <a:extLst xmlns:a="http://schemas.openxmlformats.org/drawingml/2006/main">
               <a:ext uri="{FF2B5EF4-FFF2-40B4-BE49-F238E27FC236}">
-                <a16:creationId xmlns:a16="http://schemas.microsoft.com/office/drawing/2014/main" id="{A1C3D7EC-9185-45CF-930C-3FE0BAA9A78A}"/>
+                <a16:creationId xmlns:a16="http://schemas.microsoft.com/office/drawing/2014/main" id="{B8C74C2B-AD17-46BB-91CB-1221320F0781}"/>
               </a:ext>
             </a:extLst>
           </p:cNvPr>
@@ -27398,7 +27398,7 @@
           <p:cNvPr id="120" name="">
             <a:extLst xmlns:a="http://schemas.openxmlformats.org/drawingml/2006/main">
               <a:ext uri="{FF2B5EF4-FFF2-40B4-BE49-F238E27FC236}">
-                <a16:creationId xmlns:a16="http://schemas.microsoft.com/office/drawing/2014/main" id="{A8358FF3-A946-4D3A-993E-DC9341B49CDB}"/>
+                <a16:creationId xmlns:a16="http://schemas.microsoft.com/office/drawing/2014/main" id="{A202323F-27B2-4684-BFC6-FC503EF6934C}"/>
               </a:ext>
             </a:extLst>
           </p:cNvPr>
@@ -27450,7 +27450,7 @@
           <p:cNvPr id="121" name="">
             <a:extLst xmlns:a="http://schemas.openxmlformats.org/drawingml/2006/main">
               <a:ext uri="{FF2B5EF4-FFF2-40B4-BE49-F238E27FC236}">
-                <a16:creationId xmlns:a16="http://schemas.microsoft.com/office/drawing/2014/main" id="{C081C19D-6E82-48A4-BC36-D17DC531BC80}"/>
+                <a16:creationId xmlns:a16="http://schemas.microsoft.com/office/drawing/2014/main" id="{9CA82A61-46A0-43DA-8EBC-6A1E95354A54}"/>
               </a:ext>
             </a:extLst>
           </p:cNvPr>
@@ -27502,7 +27502,7 @@
           <p:cNvPr id="122" name="">
             <a:extLst xmlns:a="http://schemas.openxmlformats.org/drawingml/2006/main">
               <a:ext uri="{FF2B5EF4-FFF2-40B4-BE49-F238E27FC236}">
-                <a16:creationId xmlns:a16="http://schemas.microsoft.com/office/drawing/2014/main" id="{23FBF8DD-28E6-4F94-8E4F-CBA4AEBFA2AB}"/>
+                <a16:creationId xmlns:a16="http://schemas.microsoft.com/office/drawing/2014/main" id="{E1214585-710E-461F-8987-30731F95CCCF}"/>
               </a:ext>
             </a:extLst>
           </p:cNvPr>
@@ -27554,7 +27554,7 @@
           <p:cNvPr id="123" name="">
             <a:extLst xmlns:a="http://schemas.openxmlformats.org/drawingml/2006/main">
               <a:ext uri="{FF2B5EF4-FFF2-40B4-BE49-F238E27FC236}">
-                <a16:creationId xmlns:a16="http://schemas.microsoft.com/office/drawing/2014/main" id="{8530D19A-EF84-4BDF-A9BE-8CA7C491A841}"/>
+                <a16:creationId xmlns:a16="http://schemas.microsoft.com/office/drawing/2014/main" id="{7F003879-8091-490C-B4EC-AD83A38C87F5}"/>
               </a:ext>
             </a:extLst>
           </p:cNvPr>
@@ -27606,7 +27606,7 @@
           <p:cNvPr id="124" name="">
             <a:extLst xmlns:a="http://schemas.openxmlformats.org/drawingml/2006/main">
               <a:ext uri="{FF2B5EF4-FFF2-40B4-BE49-F238E27FC236}">
-                <a16:creationId xmlns:a16="http://schemas.microsoft.com/office/drawing/2014/main" id="{34275D3D-1282-409E-8DC5-ACA6B601C55E}"/>
+                <a16:creationId xmlns:a16="http://schemas.microsoft.com/office/drawing/2014/main" id="{E0E705B3-C423-4743-894A-0B3DD058D386}"/>
               </a:ext>
             </a:extLst>
           </p:cNvPr>
@@ -27658,7 +27658,7 @@
           <p:cNvPr id="125" name="">
             <a:extLst xmlns:a="http://schemas.openxmlformats.org/drawingml/2006/main">
               <a:ext uri="{FF2B5EF4-FFF2-40B4-BE49-F238E27FC236}">
-                <a16:creationId xmlns:a16="http://schemas.microsoft.com/office/drawing/2014/main" id="{FD2DCBC0-AF53-41F4-BE03-82DB0F97E879}"/>
+                <a16:creationId xmlns:a16="http://schemas.microsoft.com/office/drawing/2014/main" id="{9F82D366-26C4-4498-9FA1-0D1C3AD0FFD8}"/>
               </a:ext>
             </a:extLst>
           </p:cNvPr>
@@ -27689,7 +27689,7 @@
           <p:cNvPr id="126" name="">
             <a:extLst xmlns:a="http://schemas.openxmlformats.org/drawingml/2006/main">
               <a:ext uri="{FF2B5EF4-FFF2-40B4-BE49-F238E27FC236}">
-                <a16:creationId xmlns:a16="http://schemas.microsoft.com/office/drawing/2014/main" id="{33E56275-C9C6-4824-A3CD-4C810F08AE33}"/>
+                <a16:creationId xmlns:a16="http://schemas.microsoft.com/office/drawing/2014/main" id="{C92B03C5-6284-4549-AD28-2A144E74D4EC}"/>
               </a:ext>
             </a:extLst>
           </p:cNvPr>
@@ -27720,7 +27720,7 @@
           <p:cNvPr id="127" name="">
             <a:extLst xmlns:a="http://schemas.openxmlformats.org/drawingml/2006/main">
               <a:ext uri="{FF2B5EF4-FFF2-40B4-BE49-F238E27FC236}">
-                <a16:creationId xmlns:a16="http://schemas.microsoft.com/office/drawing/2014/main" id="{71195CE1-0999-4E49-AFAD-A991CA1A611B}"/>
+                <a16:creationId xmlns:a16="http://schemas.microsoft.com/office/drawing/2014/main" id="{1090A9C2-AD4C-4546-B725-73BDDEFC94BE}"/>
               </a:ext>
             </a:extLst>
           </p:cNvPr>
@@ -27772,7 +27772,7 @@
           <p:cNvPr id="128" name="">
             <a:extLst xmlns:a="http://schemas.openxmlformats.org/drawingml/2006/main">
               <a:ext uri="{FF2B5EF4-FFF2-40B4-BE49-F238E27FC236}">
-                <a16:creationId xmlns:a16="http://schemas.microsoft.com/office/drawing/2014/main" id="{632E16C3-4A3C-4F14-A242-9D940B181AD9}"/>
+                <a16:creationId xmlns:a16="http://schemas.microsoft.com/office/drawing/2014/main" id="{6F00CD0C-599E-4FF4-86F9-70A45FBB4E12}"/>
               </a:ext>
             </a:extLst>
           </p:cNvPr>
@@ -27824,7 +27824,7 @@
           <p:cNvPr id="129" name="">
             <a:extLst xmlns:a="http://schemas.openxmlformats.org/drawingml/2006/main">
               <a:ext uri="{FF2B5EF4-FFF2-40B4-BE49-F238E27FC236}">
-                <a16:creationId xmlns:a16="http://schemas.microsoft.com/office/drawing/2014/main" id="{B52BB157-D2C1-4015-98AB-9E35AAE2501F}"/>
+                <a16:creationId xmlns:a16="http://schemas.microsoft.com/office/drawing/2014/main" id="{745D9FC0-6BB5-48A8-8596-33636BC2936D}"/>
               </a:ext>
             </a:extLst>
           </p:cNvPr>
@@ -27876,7 +27876,7 @@
           <p:cNvPr id="130" name="">
             <a:extLst xmlns:a="http://schemas.openxmlformats.org/drawingml/2006/main">
               <a:ext uri="{FF2B5EF4-FFF2-40B4-BE49-F238E27FC236}">
-                <a16:creationId xmlns:a16="http://schemas.microsoft.com/office/drawing/2014/main" id="{7E85B14C-0942-4A28-9096-87F9A00821E9}"/>
+                <a16:creationId xmlns:a16="http://schemas.microsoft.com/office/drawing/2014/main" id="{9F5B6CCB-34DE-48F7-8D92-7A4877B0A2A2}"/>
               </a:ext>
             </a:extLst>
           </p:cNvPr>
@@ -27928,7 +27928,7 @@
           <p:cNvPr id="131" name="">
             <a:extLst xmlns:a="http://schemas.openxmlformats.org/drawingml/2006/main">
               <a:ext uri="{FF2B5EF4-FFF2-40B4-BE49-F238E27FC236}">
-                <a16:creationId xmlns:a16="http://schemas.microsoft.com/office/drawing/2014/main" id="{B69BE2CD-1699-46C3-B2B0-BC26F3BBFBF7}"/>
+                <a16:creationId xmlns:a16="http://schemas.microsoft.com/office/drawing/2014/main" id="{1B697317-626E-41FD-A7AF-B95E2F0FCB37}"/>
               </a:ext>
             </a:extLst>
           </p:cNvPr>
@@ -27980,7 +27980,7 @@
           <p:cNvPr id="132" name="">
             <a:extLst xmlns:a="http://schemas.openxmlformats.org/drawingml/2006/main">
               <a:ext uri="{FF2B5EF4-FFF2-40B4-BE49-F238E27FC236}">
-                <a16:creationId xmlns:a16="http://schemas.microsoft.com/office/drawing/2014/main" id="{029A094D-1075-471A-B140-B38346CBEF3B}"/>
+                <a16:creationId xmlns:a16="http://schemas.microsoft.com/office/drawing/2014/main" id="{24CB684D-93F0-4295-B54B-D2D7B5FFE658}"/>
               </a:ext>
             </a:extLst>
           </p:cNvPr>
@@ -28032,7 +28032,7 @@
           <p:cNvPr id="133" name="">
             <a:extLst xmlns:a="http://schemas.openxmlformats.org/drawingml/2006/main">
               <a:ext uri="{FF2B5EF4-FFF2-40B4-BE49-F238E27FC236}">
-                <a16:creationId xmlns:a16="http://schemas.microsoft.com/office/drawing/2014/main" id="{20896AB8-2072-487C-BDF6-8A77F229265F}"/>
+                <a16:creationId xmlns:a16="http://schemas.microsoft.com/office/drawing/2014/main" id="{A8C0E9C0-770A-493C-9ADC-141385C953BC}"/>
               </a:ext>
             </a:extLst>
           </p:cNvPr>
@@ -28084,7 +28084,7 @@
           <p:cNvPr id="134" name="">
             <a:extLst xmlns:a="http://schemas.openxmlformats.org/drawingml/2006/main">
               <a:ext uri="{FF2B5EF4-FFF2-40B4-BE49-F238E27FC236}">
-                <a16:creationId xmlns:a16="http://schemas.microsoft.com/office/drawing/2014/main" id="{1E495F43-328F-4A5D-9F54-2276B6674275}"/>
+                <a16:creationId xmlns:a16="http://schemas.microsoft.com/office/drawing/2014/main" id="{B2360C1E-5A31-4378-9C49-6CE0053544C1}"/>
               </a:ext>
             </a:extLst>
           </p:cNvPr>
@@ -28134,7 +28134,7 @@
     </p:spTree>
     <p:extLst>
       <p:ext uri="{BB962C8B-B14F-4D97-AF65-F5344CB8AC3E}">
-        <p14:creationId xmlns:p14="http://schemas.microsoft.com/office/powerpoint/2010/main" val="2028715918"/>
+        <p14:creationId xmlns:p14="http://schemas.microsoft.com/office/powerpoint/2010/main" val="1336919851"/>
       </p:ext>
     </p:extLst>
   </p:cSld>
@@ -28165,7 +28165,7 @@
           <p:cNvPr id="9" name="">
             <a:extLst xmlns:a="http://schemas.openxmlformats.org/drawingml/2006/main">
               <a:ext uri="{FF2B5EF4-FFF2-40B4-BE49-F238E27FC236}">
-                <a16:creationId xmlns:a16="http://schemas.microsoft.com/office/drawing/2014/main" id="{2D29FADD-4E93-45BA-9C91-51DBA938B134}"/>
+                <a16:creationId xmlns:a16="http://schemas.microsoft.com/office/drawing/2014/main" id="{29A7A888-D18C-401D-9B53-ED7738D2822E}"/>
               </a:ext>
             </a:extLst>
           </p:cNvPr>
@@ -28198,7 +28198,7 @@
           <p:cNvPr id="2" name="">
             <a:extLst xmlns:a="http://schemas.openxmlformats.org/drawingml/2006/main">
               <a:ext uri="{FF2B5EF4-FFF2-40B4-BE49-F238E27FC236}">
-                <a16:creationId xmlns:a16="http://schemas.microsoft.com/office/drawing/2014/main" id="{2FC4E51B-5ED9-4B9A-9EC5-C2257344A77A}"/>
+                <a16:creationId xmlns:a16="http://schemas.microsoft.com/office/drawing/2014/main" id="{B2585E8B-44F8-44C2-9D97-367881D286F0}"/>
               </a:ext>
             </a:extLst>
           </p:cNvPr>
@@ -28229,7 +28229,7 @@
           <p:cNvPr id="3" name="">
             <a:extLst xmlns:a="http://schemas.openxmlformats.org/drawingml/2006/main">
               <a:ext uri="{FF2B5EF4-FFF2-40B4-BE49-F238E27FC236}">
-                <a16:creationId xmlns:a16="http://schemas.microsoft.com/office/drawing/2014/main" id="{95EE1DAE-A8F5-48F5-938D-79E3A76CCB5C}"/>
+                <a16:creationId xmlns:a16="http://schemas.microsoft.com/office/drawing/2014/main" id="{1105D387-86A6-4B0C-86FE-494DA87786A6}"/>
               </a:ext>
             </a:extLst>
           </p:cNvPr>
@@ -28281,7 +28281,7 @@
           <p:cNvPr id="4" name="">
             <a:extLst xmlns:a="http://schemas.openxmlformats.org/drawingml/2006/main">
               <a:ext uri="{FF2B5EF4-FFF2-40B4-BE49-F238E27FC236}">
-                <a16:creationId xmlns:a16="http://schemas.microsoft.com/office/drawing/2014/main" id="{ECCA6862-289D-42A6-BA2A-1FD9FE526C3C}"/>
+                <a16:creationId xmlns:a16="http://schemas.microsoft.com/office/drawing/2014/main" id="{E51DF82C-E2D5-4637-80D4-8F25496412CD}"/>
               </a:ext>
             </a:extLst>
           </p:cNvPr>
@@ -28316,7 +28316,7 @@
           <p:nvPr/>
         </p:nvPicPr>
         <p:blipFill>
-          <a:blip xmlns:r="http://schemas.openxmlformats.org/officeDocument/2006/relationships" xmlns:a="http://schemas.openxmlformats.org/drawingml/2006/main" r:embed="Reb5a8a7dad9e4e81"/>
+          <a:blip xmlns:r="http://schemas.openxmlformats.org/officeDocument/2006/relationships" xmlns:a="http://schemas.openxmlformats.org/drawingml/2006/main" r:embed="Rc0c6da3105e54b9b"/>
           <a:stretch xmlns:a="http://schemas.openxmlformats.org/drawingml/2006/main"/>
         </p:blipFill>
         <p:spPr>
@@ -28334,7 +28334,7 @@
           <p:cNvPr id="6" name="">
             <a:extLst xmlns:a="http://schemas.openxmlformats.org/drawingml/2006/main">
               <a:ext uri="{FF2B5EF4-FFF2-40B4-BE49-F238E27FC236}">
-                <a16:creationId xmlns:a16="http://schemas.microsoft.com/office/drawing/2014/main" id="{52D68F8E-FAB5-4A74-AAB6-629EA262FDA0}"/>
+                <a16:creationId xmlns:a16="http://schemas.microsoft.com/office/drawing/2014/main" id="{C2E20EED-B80A-4887-93FC-5AB2FC2DF3E8}"/>
               </a:ext>
             </a:extLst>
           </p:cNvPr>
@@ -28386,7 +28386,7 @@
           <p:cNvPr id="7" name="">
             <a:extLst xmlns:a="http://schemas.openxmlformats.org/drawingml/2006/main">
               <a:ext uri="{FF2B5EF4-FFF2-40B4-BE49-F238E27FC236}">
-                <a16:creationId xmlns:a16="http://schemas.microsoft.com/office/drawing/2014/main" id="{35660476-5B88-47D2-8735-4119198D41A5}"/>
+                <a16:creationId xmlns:a16="http://schemas.microsoft.com/office/drawing/2014/main" id="{FBBCD236-DF99-44D6-ABCE-A3644216959D}"/>
               </a:ext>
             </a:extLst>
           </p:cNvPr>
@@ -28442,7 +28442,7 @@
           <p:nvPr/>
         </p:nvPicPr>
         <p:blipFill>
-          <a:blip xmlns:r="http://schemas.openxmlformats.org/officeDocument/2006/relationships" xmlns:a="http://schemas.openxmlformats.org/drawingml/2006/main" r:embed="R5270ca56eec342c1"/>
+          <a:blip xmlns:r="http://schemas.openxmlformats.org/officeDocument/2006/relationships" xmlns:a="http://schemas.openxmlformats.org/drawingml/2006/main" r:embed="R3a48cd5b11a54e4f"/>
           <a:stretch xmlns:a="http://schemas.openxmlformats.org/drawingml/2006/main"/>
         </p:blipFill>
         <p:spPr>
@@ -28458,7 +28458,7 @@
     </p:spTree>
     <p:extLst>
       <p:ext uri="{BB962C8B-B14F-4D97-AF65-F5344CB8AC3E}">
-        <p14:creationId xmlns:p14="http://schemas.microsoft.com/office/powerpoint/2010/main" val="203123577"/>
+        <p14:creationId xmlns:p14="http://schemas.microsoft.com/office/powerpoint/2010/main" val="1490786833"/>
       </p:ext>
     </p:extLst>
   </p:cSld>
@@ -28489,7 +28489,7 @@
           <p:cNvPr id="42" name="">
             <a:extLst xmlns:a="http://schemas.openxmlformats.org/drawingml/2006/main">
               <a:ext uri="{FF2B5EF4-FFF2-40B4-BE49-F238E27FC236}">
-                <a16:creationId xmlns:a16="http://schemas.microsoft.com/office/drawing/2014/main" id="{C3DE9954-CCE1-41BD-ADF5-F4755FEE2FCC}"/>
+                <a16:creationId xmlns:a16="http://schemas.microsoft.com/office/drawing/2014/main" id="{086A919A-6E3B-4201-BCB0-51B0FD02D612}"/>
               </a:ext>
             </a:extLst>
           </p:cNvPr>
@@ -28522,7 +28522,7 @@
           <p:cNvPr id="2" name="">
             <a:extLst xmlns:a="http://schemas.openxmlformats.org/drawingml/2006/main">
               <a:ext uri="{FF2B5EF4-FFF2-40B4-BE49-F238E27FC236}">
-                <a16:creationId xmlns:a16="http://schemas.microsoft.com/office/drawing/2014/main" id="{47BAAC42-EC67-409E-A603-067C5F20CA6A}"/>
+                <a16:creationId xmlns:a16="http://schemas.microsoft.com/office/drawing/2014/main" id="{84A75114-38DF-4D5A-8991-BA6900674BEE}"/>
               </a:ext>
             </a:extLst>
           </p:cNvPr>
@@ -28553,7 +28553,7 @@
           <p:cNvPr id="3" name="">
             <a:extLst xmlns:a="http://schemas.openxmlformats.org/drawingml/2006/main">
               <a:ext uri="{FF2B5EF4-FFF2-40B4-BE49-F238E27FC236}">
-                <a16:creationId xmlns:a16="http://schemas.microsoft.com/office/drawing/2014/main" id="{A8B57DC1-8D8C-4E5B-BA87-D7AB4C876624}"/>
+                <a16:creationId xmlns:a16="http://schemas.microsoft.com/office/drawing/2014/main" id="{83139EB0-EBF7-4E54-BE88-D36ABB2CDB34}"/>
               </a:ext>
             </a:extLst>
           </p:cNvPr>
@@ -28605,7 +28605,7 @@
           <p:cNvPr id="4" name="">
             <a:extLst xmlns:a="http://schemas.openxmlformats.org/drawingml/2006/main">
               <a:ext uri="{FF2B5EF4-FFF2-40B4-BE49-F238E27FC236}">
-                <a16:creationId xmlns:a16="http://schemas.microsoft.com/office/drawing/2014/main" id="{719D2000-8DB3-4B44-A542-CE8169BCEA60}"/>
+                <a16:creationId xmlns:a16="http://schemas.microsoft.com/office/drawing/2014/main" id="{59509E70-C16E-4694-BB44-228BBEAC5734}"/>
               </a:ext>
             </a:extLst>
           </p:cNvPr>
@@ -28657,7 +28657,7 @@
           <p:cNvPr id="5" name="">
             <a:extLst xmlns:a="http://schemas.openxmlformats.org/drawingml/2006/main">
               <a:ext uri="{FF2B5EF4-FFF2-40B4-BE49-F238E27FC236}">
-                <a16:creationId xmlns:a16="http://schemas.microsoft.com/office/drawing/2014/main" id="{0687162D-191E-48DA-9FF4-2725B8507F7F}"/>
+                <a16:creationId xmlns:a16="http://schemas.microsoft.com/office/drawing/2014/main" id="{0EB58821-527D-4F4F-BA42-C22202BDDB03}"/>
               </a:ext>
             </a:extLst>
           </p:cNvPr>
@@ -28692,7 +28692,7 @@
           <p:nvPr/>
         </p:nvPicPr>
         <p:blipFill>
-          <a:blip xmlns:r="http://schemas.openxmlformats.org/officeDocument/2006/relationships" xmlns:a="http://schemas.openxmlformats.org/drawingml/2006/main" r:embed="R2a661a2e38c44105"/>
+          <a:blip xmlns:r="http://schemas.openxmlformats.org/officeDocument/2006/relationships" xmlns:a="http://schemas.openxmlformats.org/drawingml/2006/main" r:embed="Rcbe94ec8ad4a4a93"/>
           <a:stretch xmlns:a="http://schemas.openxmlformats.org/drawingml/2006/main"/>
         </p:blipFill>
         <p:spPr>
@@ -28710,7 +28710,7 @@
           <p:cNvPr id="7" name="">
             <a:extLst xmlns:a="http://schemas.openxmlformats.org/drawingml/2006/main">
               <a:ext uri="{FF2B5EF4-FFF2-40B4-BE49-F238E27FC236}">
-                <a16:creationId xmlns:a16="http://schemas.microsoft.com/office/drawing/2014/main" id="{8B9DF1D8-53E3-475A-BDF1-CAB0364EE0B5}"/>
+                <a16:creationId xmlns:a16="http://schemas.microsoft.com/office/drawing/2014/main" id="{CF6A0615-49F5-40E7-8CCE-570F948E441B}"/>
               </a:ext>
             </a:extLst>
           </p:cNvPr>
@@ -28762,7 +28762,7 @@
           <p:cNvPr id="8" name="">
             <a:extLst xmlns:a="http://schemas.openxmlformats.org/drawingml/2006/main">
               <a:ext uri="{FF2B5EF4-FFF2-40B4-BE49-F238E27FC236}">
-                <a16:creationId xmlns:a16="http://schemas.microsoft.com/office/drawing/2014/main" id="{0234A365-67D5-461E-9018-46D604CCD6A8}"/>
+                <a16:creationId xmlns:a16="http://schemas.microsoft.com/office/drawing/2014/main" id="{900CF641-EBF0-4B18-8CF0-5DBE13491076}"/>
               </a:ext>
             </a:extLst>
           </p:cNvPr>
@@ -28814,7 +28814,7 @@
           <p:cNvPr id="9" name="">
             <a:extLst xmlns:a="http://schemas.openxmlformats.org/drawingml/2006/main">
               <a:ext uri="{FF2B5EF4-FFF2-40B4-BE49-F238E27FC236}">
-                <a16:creationId xmlns:a16="http://schemas.microsoft.com/office/drawing/2014/main" id="{4029A711-61E1-4143-B324-5A149B5EFD25}"/>
+                <a16:creationId xmlns:a16="http://schemas.microsoft.com/office/drawing/2014/main" id="{1A5D2594-4DEB-40D5-98E3-DA032D054495}"/>
               </a:ext>
             </a:extLst>
           </p:cNvPr>
@@ -28866,7 +28866,7 @@
           <p:cNvPr id="10" name="">
             <a:extLst xmlns:a="http://schemas.openxmlformats.org/drawingml/2006/main">
               <a:ext uri="{FF2B5EF4-FFF2-40B4-BE49-F238E27FC236}">
-                <a16:creationId xmlns:a16="http://schemas.microsoft.com/office/drawing/2014/main" id="{35185BF1-379A-48F2-B314-13225996BF25}"/>
+                <a16:creationId xmlns:a16="http://schemas.microsoft.com/office/drawing/2014/main" id="{E0519D08-D5FF-4DE3-BE18-7101AB5AF901}"/>
               </a:ext>
             </a:extLst>
           </p:cNvPr>
@@ -28897,7 +28897,7 @@
           <p:cNvPr id="11" name="">
             <a:extLst xmlns:a="http://schemas.openxmlformats.org/drawingml/2006/main">
               <a:ext uri="{FF2B5EF4-FFF2-40B4-BE49-F238E27FC236}">
-                <a16:creationId xmlns:a16="http://schemas.microsoft.com/office/drawing/2014/main" id="{B9818E64-439B-40C6-9DCE-8980FEF3823B}"/>
+                <a16:creationId xmlns:a16="http://schemas.microsoft.com/office/drawing/2014/main" id="{E732AEEA-573D-44AC-9C3A-B6A3F6228195}"/>
               </a:ext>
             </a:extLst>
           </p:cNvPr>
@@ -28949,7 +28949,7 @@
           <p:cNvPr id="12" name="">
             <a:extLst xmlns:a="http://schemas.openxmlformats.org/drawingml/2006/main">
               <a:ext uri="{FF2B5EF4-FFF2-40B4-BE49-F238E27FC236}">
-                <a16:creationId xmlns:a16="http://schemas.microsoft.com/office/drawing/2014/main" id="{2E496864-0707-4213-93E8-2D948F264503}"/>
+                <a16:creationId xmlns:a16="http://schemas.microsoft.com/office/drawing/2014/main" id="{4DD2C135-F6EF-47B9-8F59-132A98236A58}"/>
               </a:ext>
             </a:extLst>
           </p:cNvPr>
@@ -29001,7 +29001,7 @@
           <p:cNvPr id="13" name="">
             <a:extLst xmlns:a="http://schemas.openxmlformats.org/drawingml/2006/main">
               <a:ext uri="{FF2B5EF4-FFF2-40B4-BE49-F238E27FC236}">
-                <a16:creationId xmlns:a16="http://schemas.microsoft.com/office/drawing/2014/main" id="{E0F1B0C0-56D1-4B44-B0AC-19E6FFD9F68D}"/>
+                <a16:creationId xmlns:a16="http://schemas.microsoft.com/office/drawing/2014/main" id="{937151BE-9146-4517-A1EA-E45892196D92}"/>
               </a:ext>
             </a:extLst>
           </p:cNvPr>
@@ -29053,7 +29053,7 @@
           <p:cNvPr id="14" name="">
             <a:extLst xmlns:a="http://schemas.openxmlformats.org/drawingml/2006/main">
               <a:ext uri="{FF2B5EF4-FFF2-40B4-BE49-F238E27FC236}">
-                <a16:creationId xmlns:a16="http://schemas.microsoft.com/office/drawing/2014/main" id="{8EAC5EF8-DBF9-4AE2-9E76-C58DB978F319}"/>
+                <a16:creationId xmlns:a16="http://schemas.microsoft.com/office/drawing/2014/main" id="{A835BEDC-BF8F-4DFE-A9CC-7918B928582B}"/>
               </a:ext>
             </a:extLst>
           </p:cNvPr>
@@ -29084,7 +29084,7 @@
           <p:cNvPr id="15" name="">
             <a:extLst xmlns:a="http://schemas.openxmlformats.org/drawingml/2006/main">
               <a:ext uri="{FF2B5EF4-FFF2-40B4-BE49-F238E27FC236}">
-                <a16:creationId xmlns:a16="http://schemas.microsoft.com/office/drawing/2014/main" id="{06F388A0-4071-43EB-850F-90833E14222B}"/>
+                <a16:creationId xmlns:a16="http://schemas.microsoft.com/office/drawing/2014/main" id="{A0863E87-BA94-4418-BACC-C4F740AB9216}"/>
               </a:ext>
             </a:extLst>
           </p:cNvPr>
@@ -29136,7 +29136,7 @@
           <p:cNvPr id="16" name="">
             <a:extLst xmlns:a="http://schemas.openxmlformats.org/drawingml/2006/main">
               <a:ext uri="{FF2B5EF4-FFF2-40B4-BE49-F238E27FC236}">
-                <a16:creationId xmlns:a16="http://schemas.microsoft.com/office/drawing/2014/main" id="{1F145706-B997-436A-8F7B-25978514CBD6}"/>
+                <a16:creationId xmlns:a16="http://schemas.microsoft.com/office/drawing/2014/main" id="{311F322C-7C46-4D9B-AF0A-7B0864D8D024}"/>
               </a:ext>
             </a:extLst>
           </p:cNvPr>
@@ -29188,7 +29188,7 @@
           <p:cNvPr id="17" name="">
             <a:extLst xmlns:a="http://schemas.openxmlformats.org/drawingml/2006/main">
               <a:ext uri="{FF2B5EF4-FFF2-40B4-BE49-F238E27FC236}">
-                <a16:creationId xmlns:a16="http://schemas.microsoft.com/office/drawing/2014/main" id="{2098B334-45BE-4A52-BDA1-12033BEC72B2}"/>
+                <a16:creationId xmlns:a16="http://schemas.microsoft.com/office/drawing/2014/main" id="{819F3A0F-62AA-464E-9F35-E6AD36A71253}"/>
               </a:ext>
             </a:extLst>
           </p:cNvPr>
@@ -29240,7 +29240,7 @@
           <p:cNvPr id="18" name="">
             <a:extLst xmlns:a="http://schemas.openxmlformats.org/drawingml/2006/main">
               <a:ext uri="{FF2B5EF4-FFF2-40B4-BE49-F238E27FC236}">
-                <a16:creationId xmlns:a16="http://schemas.microsoft.com/office/drawing/2014/main" id="{C1CFDCA3-6724-40CE-9FC1-E78906E15872}"/>
+                <a16:creationId xmlns:a16="http://schemas.microsoft.com/office/drawing/2014/main" id="{0F3EB91E-82DC-4945-9CCC-D6C828856CE8}"/>
               </a:ext>
             </a:extLst>
           </p:cNvPr>
@@ -29271,7 +29271,7 @@
           <p:cNvPr id="19" name="">
             <a:extLst xmlns:a="http://schemas.openxmlformats.org/drawingml/2006/main">
               <a:ext uri="{FF2B5EF4-FFF2-40B4-BE49-F238E27FC236}">
-                <a16:creationId xmlns:a16="http://schemas.microsoft.com/office/drawing/2014/main" id="{4FB0F9AF-1D21-4DB5-AD95-D82388D01622}"/>
+                <a16:creationId xmlns:a16="http://schemas.microsoft.com/office/drawing/2014/main" id="{EEC8B68C-DC55-4381-B661-21D6B29C8D61}"/>
               </a:ext>
             </a:extLst>
           </p:cNvPr>
@@ -29323,7 +29323,7 @@
           <p:cNvPr id="20" name="">
             <a:extLst xmlns:a="http://schemas.openxmlformats.org/drawingml/2006/main">
               <a:ext uri="{FF2B5EF4-FFF2-40B4-BE49-F238E27FC236}">
-                <a16:creationId xmlns:a16="http://schemas.microsoft.com/office/drawing/2014/main" id="{EFDBB5C4-C36F-4858-98A6-FA195F1C6A81}"/>
+                <a16:creationId xmlns:a16="http://schemas.microsoft.com/office/drawing/2014/main" id="{43BD230E-1764-4321-B51F-E8C152B83B26}"/>
               </a:ext>
             </a:extLst>
           </p:cNvPr>
@@ -29375,7 +29375,7 @@
           <p:cNvPr id="21" name="">
             <a:extLst xmlns:a="http://schemas.openxmlformats.org/drawingml/2006/main">
               <a:ext uri="{FF2B5EF4-FFF2-40B4-BE49-F238E27FC236}">
-                <a16:creationId xmlns:a16="http://schemas.microsoft.com/office/drawing/2014/main" id="{59951B23-C1FF-466E-BA4C-E62933B0E288}"/>
+                <a16:creationId xmlns:a16="http://schemas.microsoft.com/office/drawing/2014/main" id="{699967A6-3AA2-418A-A5D0-3A45ECA293F9}"/>
               </a:ext>
             </a:extLst>
           </p:cNvPr>
@@ -29427,7 +29427,7 @@
           <p:cNvPr id="22" name="">
             <a:extLst xmlns:a="http://schemas.openxmlformats.org/drawingml/2006/main">
               <a:ext uri="{FF2B5EF4-FFF2-40B4-BE49-F238E27FC236}">
-                <a16:creationId xmlns:a16="http://schemas.microsoft.com/office/drawing/2014/main" id="{6A9E090D-BFB5-4B7B-8ECA-15706CFFCB2A}"/>
+                <a16:creationId xmlns:a16="http://schemas.microsoft.com/office/drawing/2014/main" id="{EEB3C883-5A1D-4B63-8EA4-6217B71C5317}"/>
               </a:ext>
             </a:extLst>
           </p:cNvPr>
@@ -29458,7 +29458,7 @@
           <p:cNvPr id="23" name="">
             <a:extLst xmlns:a="http://schemas.openxmlformats.org/drawingml/2006/main">
               <a:ext uri="{FF2B5EF4-FFF2-40B4-BE49-F238E27FC236}">
-                <a16:creationId xmlns:a16="http://schemas.microsoft.com/office/drawing/2014/main" id="{0522CDDB-EFFB-4661-A49C-BC0888C5642D}"/>
+                <a16:creationId xmlns:a16="http://schemas.microsoft.com/office/drawing/2014/main" id="{A54AFF3D-1A14-4752-9099-455BDE258DF9}"/>
               </a:ext>
             </a:extLst>
           </p:cNvPr>
@@ -29510,7 +29510,7 @@
           <p:cNvPr id="24" name="">
             <a:extLst xmlns:a="http://schemas.openxmlformats.org/drawingml/2006/main">
               <a:ext uri="{FF2B5EF4-FFF2-40B4-BE49-F238E27FC236}">
-                <a16:creationId xmlns:a16="http://schemas.microsoft.com/office/drawing/2014/main" id="{5BF071B5-9587-4BE2-86B3-9A1D8CE313A7}"/>
+                <a16:creationId xmlns:a16="http://schemas.microsoft.com/office/drawing/2014/main" id="{6319D27D-DB6E-46BD-B998-765EFFB731A4}"/>
               </a:ext>
             </a:extLst>
           </p:cNvPr>
@@ -29562,7 +29562,7 @@
           <p:cNvPr id="25" name="">
             <a:extLst xmlns:a="http://schemas.openxmlformats.org/drawingml/2006/main">
               <a:ext uri="{FF2B5EF4-FFF2-40B4-BE49-F238E27FC236}">
-                <a16:creationId xmlns:a16="http://schemas.microsoft.com/office/drawing/2014/main" id="{9FC36FEF-7782-4867-AFB0-82C23CE3D99E}"/>
+                <a16:creationId xmlns:a16="http://schemas.microsoft.com/office/drawing/2014/main" id="{4CBA0A13-547E-4540-A247-22E2F92E720E}"/>
               </a:ext>
             </a:extLst>
           </p:cNvPr>
@@ -29614,7 +29614,7 @@
           <p:cNvPr id="26" name="">
             <a:extLst xmlns:a="http://schemas.openxmlformats.org/drawingml/2006/main">
               <a:ext uri="{FF2B5EF4-FFF2-40B4-BE49-F238E27FC236}">
-                <a16:creationId xmlns:a16="http://schemas.microsoft.com/office/drawing/2014/main" id="{F6D65D8B-64DE-4DA5-868C-904ACF90DA31}"/>
+                <a16:creationId xmlns:a16="http://schemas.microsoft.com/office/drawing/2014/main" id="{460674B6-2E0F-430C-90A4-A1FB5F4D400D}"/>
               </a:ext>
             </a:extLst>
           </p:cNvPr>
@@ -29645,7 +29645,7 @@
           <p:cNvPr id="27" name="">
             <a:extLst xmlns:a="http://schemas.openxmlformats.org/drawingml/2006/main">
               <a:ext uri="{FF2B5EF4-FFF2-40B4-BE49-F238E27FC236}">
-                <a16:creationId xmlns:a16="http://schemas.microsoft.com/office/drawing/2014/main" id="{40111C7F-B460-4D4A-8E78-BDE8F22644D7}"/>
+                <a16:creationId xmlns:a16="http://schemas.microsoft.com/office/drawing/2014/main" id="{1EEDDFF0-235E-424F-B387-772A9AB7EFC6}"/>
               </a:ext>
             </a:extLst>
           </p:cNvPr>
@@ -29697,7 +29697,7 @@
           <p:cNvPr id="28" name="">
             <a:extLst xmlns:a="http://schemas.openxmlformats.org/drawingml/2006/main">
               <a:ext uri="{FF2B5EF4-FFF2-40B4-BE49-F238E27FC236}">
-                <a16:creationId xmlns:a16="http://schemas.microsoft.com/office/drawing/2014/main" id="{D651FD7C-3C57-44F2-891F-F6FAE0420200}"/>
+                <a16:creationId xmlns:a16="http://schemas.microsoft.com/office/drawing/2014/main" id="{DC3CF4FE-E10E-42C1-8E47-410A47BF3DD7}"/>
               </a:ext>
             </a:extLst>
           </p:cNvPr>
@@ -29749,7 +29749,7 @@
           <p:cNvPr id="29" name="">
             <a:extLst xmlns:a="http://schemas.openxmlformats.org/drawingml/2006/main">
               <a:ext uri="{FF2B5EF4-FFF2-40B4-BE49-F238E27FC236}">
-                <a16:creationId xmlns:a16="http://schemas.microsoft.com/office/drawing/2014/main" id="{1810A875-0F49-496C-8EF8-0CAB576D57BC}"/>
+                <a16:creationId xmlns:a16="http://schemas.microsoft.com/office/drawing/2014/main" id="{C32656D3-F8DA-43E6-B9D6-FA66BC033A92}"/>
               </a:ext>
             </a:extLst>
           </p:cNvPr>
@@ -29801,7 +29801,7 @@
           <p:cNvPr id="30" name="">
             <a:extLst xmlns:a="http://schemas.openxmlformats.org/drawingml/2006/main">
               <a:ext uri="{FF2B5EF4-FFF2-40B4-BE49-F238E27FC236}">
-                <a16:creationId xmlns:a16="http://schemas.microsoft.com/office/drawing/2014/main" id="{DC51D15D-8B23-44EE-BDD8-900E01E5241E}"/>
+                <a16:creationId xmlns:a16="http://schemas.microsoft.com/office/drawing/2014/main" id="{84372DC5-6C1C-437E-93A3-8BC07AC89F7E}"/>
               </a:ext>
             </a:extLst>
           </p:cNvPr>
@@ -29832,7 +29832,7 @@
           <p:cNvPr id="31" name="">
             <a:extLst xmlns:a="http://schemas.openxmlformats.org/drawingml/2006/main">
               <a:ext uri="{FF2B5EF4-FFF2-40B4-BE49-F238E27FC236}">
-                <a16:creationId xmlns:a16="http://schemas.microsoft.com/office/drawing/2014/main" id="{E241AC72-9C14-4C9A-B434-1BFFD77C62A1}"/>
+                <a16:creationId xmlns:a16="http://schemas.microsoft.com/office/drawing/2014/main" id="{C720C789-1E8F-44D7-8198-9BD4245642AC}"/>
               </a:ext>
             </a:extLst>
           </p:cNvPr>
@@ -29884,7 +29884,7 @@
           <p:cNvPr id="32" name="">
             <a:extLst xmlns:a="http://schemas.openxmlformats.org/drawingml/2006/main">
               <a:ext uri="{FF2B5EF4-FFF2-40B4-BE49-F238E27FC236}">
-                <a16:creationId xmlns:a16="http://schemas.microsoft.com/office/drawing/2014/main" id="{5BCB7F27-E2D7-4BF4-AD1A-953239258E47}"/>
+                <a16:creationId xmlns:a16="http://schemas.microsoft.com/office/drawing/2014/main" id="{6C5C11F3-F9F0-44F5-BE9B-0657CB9F45B7}"/>
               </a:ext>
             </a:extLst>
           </p:cNvPr>
@@ -29936,7 +29936,7 @@
           <p:cNvPr id="33" name="">
             <a:extLst xmlns:a="http://schemas.openxmlformats.org/drawingml/2006/main">
               <a:ext uri="{FF2B5EF4-FFF2-40B4-BE49-F238E27FC236}">
-                <a16:creationId xmlns:a16="http://schemas.microsoft.com/office/drawing/2014/main" id="{1AD3D0C3-EC68-4B87-ABF9-7BB6AEDEC0E7}"/>
+                <a16:creationId xmlns:a16="http://schemas.microsoft.com/office/drawing/2014/main" id="{EF18135A-A504-49BD-8E81-4C517A9E1206}"/>
               </a:ext>
             </a:extLst>
           </p:cNvPr>
@@ -29988,7 +29988,7 @@
           <p:cNvPr id="34" name="">
             <a:extLst xmlns:a="http://schemas.openxmlformats.org/drawingml/2006/main">
               <a:ext uri="{FF2B5EF4-FFF2-40B4-BE49-F238E27FC236}">
-                <a16:creationId xmlns:a16="http://schemas.microsoft.com/office/drawing/2014/main" id="{3AC589A7-8F65-4C64-914F-A1B91D805818}"/>
+                <a16:creationId xmlns:a16="http://schemas.microsoft.com/office/drawing/2014/main" id="{59CE3FC2-963B-479E-883A-9D6FC255E3FC}"/>
               </a:ext>
             </a:extLst>
           </p:cNvPr>
@@ -30019,7 +30019,7 @@
           <p:cNvPr id="35" name="">
             <a:extLst xmlns:a="http://schemas.openxmlformats.org/drawingml/2006/main">
               <a:ext uri="{FF2B5EF4-FFF2-40B4-BE49-F238E27FC236}">
-                <a16:creationId xmlns:a16="http://schemas.microsoft.com/office/drawing/2014/main" id="{CFAEC490-09DC-47F1-9B42-4041DDC6D5E7}"/>
+                <a16:creationId xmlns:a16="http://schemas.microsoft.com/office/drawing/2014/main" id="{BC3FB6D5-D7F3-4469-8830-4EF10698E108}"/>
               </a:ext>
             </a:extLst>
           </p:cNvPr>
@@ -30071,7 +30071,7 @@
           <p:cNvPr id="36" name="">
             <a:extLst xmlns:a="http://schemas.openxmlformats.org/drawingml/2006/main">
               <a:ext uri="{FF2B5EF4-FFF2-40B4-BE49-F238E27FC236}">
-                <a16:creationId xmlns:a16="http://schemas.microsoft.com/office/drawing/2014/main" id="{ACA786D9-B288-4FDF-BE10-D8A06FF3E064}"/>
+                <a16:creationId xmlns:a16="http://schemas.microsoft.com/office/drawing/2014/main" id="{69A60F44-A029-442D-B286-8EF4CF8CCAC9}"/>
               </a:ext>
             </a:extLst>
           </p:cNvPr>
@@ -30123,7 +30123,7 @@
           <p:cNvPr id="37" name="">
             <a:extLst xmlns:a="http://schemas.openxmlformats.org/drawingml/2006/main">
               <a:ext uri="{FF2B5EF4-FFF2-40B4-BE49-F238E27FC236}">
-                <a16:creationId xmlns:a16="http://schemas.microsoft.com/office/drawing/2014/main" id="{8D99A7DC-F3A6-4B3C-AEED-C33066A87A9A}"/>
+                <a16:creationId xmlns:a16="http://schemas.microsoft.com/office/drawing/2014/main" id="{E003F6E6-25A2-4CF1-B3C6-103E705984F2}"/>
               </a:ext>
             </a:extLst>
           </p:cNvPr>
@@ -30175,7 +30175,7 @@
           <p:cNvPr id="38" name="">
             <a:extLst xmlns:a="http://schemas.openxmlformats.org/drawingml/2006/main">
               <a:ext uri="{FF2B5EF4-FFF2-40B4-BE49-F238E27FC236}">
-                <a16:creationId xmlns:a16="http://schemas.microsoft.com/office/drawing/2014/main" id="{5B70607E-5463-4632-9B7C-9619ADF85296}"/>
+                <a16:creationId xmlns:a16="http://schemas.microsoft.com/office/drawing/2014/main" id="{0BA675C8-D248-4A01-9BED-9D5CCBE659F8}"/>
               </a:ext>
             </a:extLst>
           </p:cNvPr>
@@ -30206,7 +30206,7 @@
           <p:cNvPr id="39" name="">
             <a:extLst xmlns:a="http://schemas.openxmlformats.org/drawingml/2006/main">
               <a:ext uri="{FF2B5EF4-FFF2-40B4-BE49-F238E27FC236}">
-                <a16:creationId xmlns:a16="http://schemas.microsoft.com/office/drawing/2014/main" id="{1250C249-7792-4DC5-A806-533EFD99D2E3}"/>
+                <a16:creationId xmlns:a16="http://schemas.microsoft.com/office/drawing/2014/main" id="{CA2BA82A-F968-449C-8A67-9C5D9225E080}"/>
               </a:ext>
             </a:extLst>
           </p:cNvPr>
@@ -30258,7 +30258,7 @@
           <p:cNvPr id="40" name="">
             <a:extLst xmlns:a="http://schemas.openxmlformats.org/drawingml/2006/main">
               <a:ext uri="{FF2B5EF4-FFF2-40B4-BE49-F238E27FC236}">
-                <a16:creationId xmlns:a16="http://schemas.microsoft.com/office/drawing/2014/main" id="{3EAAC5A5-A322-446F-99B2-67DF9D3D2A2E}"/>
+                <a16:creationId xmlns:a16="http://schemas.microsoft.com/office/drawing/2014/main" id="{041593E1-F82E-4529-BEDB-358DD5C55C1B}"/>
               </a:ext>
             </a:extLst>
           </p:cNvPr>
@@ -30310,7 +30310,7 @@
           <p:cNvPr id="41" name="">
             <a:extLst xmlns:a="http://schemas.openxmlformats.org/drawingml/2006/main">
               <a:ext uri="{FF2B5EF4-FFF2-40B4-BE49-F238E27FC236}">
-                <a16:creationId xmlns:a16="http://schemas.microsoft.com/office/drawing/2014/main" id="{5BC4CBD3-540F-4C8A-ABB1-4B72E09B9EBC}"/>
+                <a16:creationId xmlns:a16="http://schemas.microsoft.com/office/drawing/2014/main" id="{C00BAD2D-6FAB-407B-AF3B-BFA919B63598}"/>
               </a:ext>
             </a:extLst>
           </p:cNvPr>
@@ -30360,7 +30360,7 @@
     </p:spTree>
     <p:extLst>
       <p:ext uri="{BB962C8B-B14F-4D97-AF65-F5344CB8AC3E}">
-        <p14:creationId xmlns:p14="http://schemas.microsoft.com/office/powerpoint/2010/main" val="837800358"/>
+        <p14:creationId xmlns:p14="http://schemas.microsoft.com/office/powerpoint/2010/main" val="2004156540"/>
       </p:ext>
     </p:extLst>
   </p:cSld>
@@ -30391,7 +30391,7 @@
           <p:cNvPr id="76" name="">
             <a:extLst xmlns:a="http://schemas.openxmlformats.org/drawingml/2006/main">
               <a:ext uri="{FF2B5EF4-FFF2-40B4-BE49-F238E27FC236}">
-                <a16:creationId xmlns:a16="http://schemas.microsoft.com/office/drawing/2014/main" id="{13D438CF-9679-45E1-8115-1583B3F3C8FC}"/>
+                <a16:creationId xmlns:a16="http://schemas.microsoft.com/office/drawing/2014/main" id="{8DD10510-19E3-452D-A5E1-B3EC3760B98B}"/>
               </a:ext>
             </a:extLst>
           </p:cNvPr>
@@ -30424,7 +30424,7 @@
           <p:cNvPr id="2" name="">
             <a:extLst xmlns:a="http://schemas.openxmlformats.org/drawingml/2006/main">
               <a:ext uri="{FF2B5EF4-FFF2-40B4-BE49-F238E27FC236}">
-                <a16:creationId xmlns:a16="http://schemas.microsoft.com/office/drawing/2014/main" id="{FE7E080C-2ABF-49DF-BEBE-1BE64DC7B5FD}"/>
+                <a16:creationId xmlns:a16="http://schemas.microsoft.com/office/drawing/2014/main" id="{FDB6E800-048D-43E5-9EDA-374A77097C17}"/>
               </a:ext>
             </a:extLst>
           </p:cNvPr>
@@ -30455,7 +30455,7 @@
           <p:cNvPr id="3" name="">
             <a:extLst xmlns:a="http://schemas.openxmlformats.org/drawingml/2006/main">
               <a:ext uri="{FF2B5EF4-FFF2-40B4-BE49-F238E27FC236}">
-                <a16:creationId xmlns:a16="http://schemas.microsoft.com/office/drawing/2014/main" id="{FCA7D3B0-CE5B-4295-A59B-4B83413D6271}"/>
+                <a16:creationId xmlns:a16="http://schemas.microsoft.com/office/drawing/2014/main" id="{872550E4-4513-49FC-B6D1-C3793D2E48C7}"/>
               </a:ext>
             </a:extLst>
           </p:cNvPr>
@@ -30507,7 +30507,7 @@
           <p:cNvPr id="4" name="">
             <a:extLst xmlns:a="http://schemas.openxmlformats.org/drawingml/2006/main">
               <a:ext uri="{FF2B5EF4-FFF2-40B4-BE49-F238E27FC236}">
-                <a16:creationId xmlns:a16="http://schemas.microsoft.com/office/drawing/2014/main" id="{98FD4FFD-C4A7-4AF6-AAC2-EC8E7BB9F5F2}"/>
+                <a16:creationId xmlns:a16="http://schemas.microsoft.com/office/drawing/2014/main" id="{E3BD99D9-D631-46D9-9701-C32EE4D28A6E}"/>
               </a:ext>
             </a:extLst>
           </p:cNvPr>
@@ -30559,7 +30559,7 @@
           <p:cNvPr id="5" name="">
             <a:extLst xmlns:a="http://schemas.openxmlformats.org/drawingml/2006/main">
               <a:ext uri="{FF2B5EF4-FFF2-40B4-BE49-F238E27FC236}">
-                <a16:creationId xmlns:a16="http://schemas.microsoft.com/office/drawing/2014/main" id="{4119864A-40E3-4457-93E4-0AFC608EF535}"/>
+                <a16:creationId xmlns:a16="http://schemas.microsoft.com/office/drawing/2014/main" id="{FC9C086C-6261-4EF1-912E-F6C1EC79BEC7}"/>
               </a:ext>
             </a:extLst>
           </p:cNvPr>
@@ -30594,7 +30594,7 @@
           <p:nvPr/>
         </p:nvPicPr>
         <p:blipFill>
-          <a:blip xmlns:r="http://schemas.openxmlformats.org/officeDocument/2006/relationships" xmlns:a="http://schemas.openxmlformats.org/drawingml/2006/main" r:embed="R740216b5c5b04def"/>
+          <a:blip xmlns:r="http://schemas.openxmlformats.org/officeDocument/2006/relationships" xmlns:a="http://schemas.openxmlformats.org/drawingml/2006/main" r:embed="Rcdf06876419b4d22"/>
           <a:stretch xmlns:a="http://schemas.openxmlformats.org/drawingml/2006/main"/>
         </p:blipFill>
         <p:spPr>
@@ -30612,7 +30612,7 @@
           <p:cNvPr id="7" name="">
             <a:extLst xmlns:a="http://schemas.openxmlformats.org/drawingml/2006/main">
               <a:ext uri="{FF2B5EF4-FFF2-40B4-BE49-F238E27FC236}">
-                <a16:creationId xmlns:a16="http://schemas.microsoft.com/office/drawing/2014/main" id="{8B502B1E-4D1A-47C1-97D9-ADB20D75E23D}"/>
+                <a16:creationId xmlns:a16="http://schemas.microsoft.com/office/drawing/2014/main" id="{BE89FC19-21D0-45F6-96F0-FD05636E2C30}"/>
               </a:ext>
             </a:extLst>
           </p:cNvPr>
@@ -30664,7 +30664,7 @@
           <p:cNvPr id="8" name="">
             <a:extLst xmlns:a="http://schemas.openxmlformats.org/drawingml/2006/main">
               <a:ext uri="{FF2B5EF4-FFF2-40B4-BE49-F238E27FC236}">
-                <a16:creationId xmlns:a16="http://schemas.microsoft.com/office/drawing/2014/main" id="{C67A5E84-4387-4058-BAB1-8433893526C5}"/>
+                <a16:creationId xmlns:a16="http://schemas.microsoft.com/office/drawing/2014/main" id="{6014F40E-C698-49C4-9C78-2CC30F602616}"/>
               </a:ext>
             </a:extLst>
           </p:cNvPr>
@@ -30716,7 +30716,7 @@
           <p:cNvPr id="9" name="">
             <a:extLst xmlns:a="http://schemas.openxmlformats.org/drawingml/2006/main">
               <a:ext uri="{FF2B5EF4-FFF2-40B4-BE49-F238E27FC236}">
-                <a16:creationId xmlns:a16="http://schemas.microsoft.com/office/drawing/2014/main" id="{1A715B93-9027-455D-9796-934A11E4044C}"/>
+                <a16:creationId xmlns:a16="http://schemas.microsoft.com/office/drawing/2014/main" id="{D3AD802B-7487-4AE9-AB10-3673EBA99ED8}"/>
               </a:ext>
             </a:extLst>
           </p:cNvPr>
@@ -30768,7 +30768,7 @@
           <p:cNvPr id="10" name="">
             <a:extLst xmlns:a="http://schemas.openxmlformats.org/drawingml/2006/main">
               <a:ext uri="{FF2B5EF4-FFF2-40B4-BE49-F238E27FC236}">
-                <a16:creationId xmlns:a16="http://schemas.microsoft.com/office/drawing/2014/main" id="{B46BFC5D-FD7B-4EBB-868B-E39935E188FA}"/>
+                <a16:creationId xmlns:a16="http://schemas.microsoft.com/office/drawing/2014/main" id="{D5346194-F40D-4531-A05A-1E5D05598C98}"/>
               </a:ext>
             </a:extLst>
           </p:cNvPr>
@@ -30820,7 +30820,7 @@
           <p:cNvPr id="11" name="">
             <a:extLst xmlns:a="http://schemas.openxmlformats.org/drawingml/2006/main">
               <a:ext uri="{FF2B5EF4-FFF2-40B4-BE49-F238E27FC236}">
-                <a16:creationId xmlns:a16="http://schemas.microsoft.com/office/drawing/2014/main" id="{033B3235-2108-4117-92E8-9F7861C31A76}"/>
+                <a16:creationId xmlns:a16="http://schemas.microsoft.com/office/drawing/2014/main" id="{0F399529-887D-4D2F-A77A-AB8C6F190EF1}"/>
               </a:ext>
             </a:extLst>
           </p:cNvPr>
@@ -30863,7 +30863,7 @@
           <p:cNvPr id="12" name="">
             <a:extLst xmlns:a="http://schemas.openxmlformats.org/drawingml/2006/main">
               <a:ext uri="{FF2B5EF4-FFF2-40B4-BE49-F238E27FC236}">
-                <a16:creationId xmlns:a16="http://schemas.microsoft.com/office/drawing/2014/main" id="{C4696454-E9AE-44C7-91A4-2C722B77A9DE}"/>
+                <a16:creationId xmlns:a16="http://schemas.microsoft.com/office/drawing/2014/main" id="{43B7E345-E97E-4025-9A7A-8B6DC8B3127B}"/>
               </a:ext>
             </a:extLst>
           </p:cNvPr>
@@ -30894,7 +30894,7 @@
           <p:cNvPr id="13" name="">
             <a:extLst xmlns:a="http://schemas.openxmlformats.org/drawingml/2006/main">
               <a:ext uri="{FF2B5EF4-FFF2-40B4-BE49-F238E27FC236}">
-                <a16:creationId xmlns:a16="http://schemas.microsoft.com/office/drawing/2014/main" id="{25942DF2-9D4B-4947-B457-9473E28B582E}"/>
+                <a16:creationId xmlns:a16="http://schemas.microsoft.com/office/drawing/2014/main" id="{B679CBBE-9207-460A-A162-9C8B2D0BAEF3}"/>
               </a:ext>
             </a:extLst>
           </p:cNvPr>
@@ -30925,7 +30925,7 @@
           <p:cNvPr id="14" name="">
             <a:extLst xmlns:a="http://schemas.openxmlformats.org/drawingml/2006/main">
               <a:ext uri="{FF2B5EF4-FFF2-40B4-BE49-F238E27FC236}">
-                <a16:creationId xmlns:a16="http://schemas.microsoft.com/office/drawing/2014/main" id="{CDFB0267-9A77-425B-979B-99959A070420}"/>
+                <a16:creationId xmlns:a16="http://schemas.microsoft.com/office/drawing/2014/main" id="{EBB1C7DF-5D59-4CF3-B052-4625D6A69BB0}"/>
               </a:ext>
             </a:extLst>
           </p:cNvPr>
@@ -30968,7 +30968,7 @@
           <p:cNvPr id="15" name="">
             <a:extLst xmlns:a="http://schemas.openxmlformats.org/drawingml/2006/main">
               <a:ext uri="{FF2B5EF4-FFF2-40B4-BE49-F238E27FC236}">
-                <a16:creationId xmlns:a16="http://schemas.microsoft.com/office/drawing/2014/main" id="{EF6A51FC-40E3-40D0-A22E-5D50440FF1FB}"/>
+                <a16:creationId xmlns:a16="http://schemas.microsoft.com/office/drawing/2014/main" id="{0F079440-225A-4019-9EB2-A034B9C468B4}"/>
               </a:ext>
             </a:extLst>
           </p:cNvPr>
@@ -30999,7 +30999,7 @@
           <p:cNvPr id="16" name="">
             <a:extLst xmlns:a="http://schemas.openxmlformats.org/drawingml/2006/main">
               <a:ext uri="{FF2B5EF4-FFF2-40B4-BE49-F238E27FC236}">
-                <a16:creationId xmlns:a16="http://schemas.microsoft.com/office/drawing/2014/main" id="{35FCC3F6-6F29-4334-AB85-8906BD833456}"/>
+                <a16:creationId xmlns:a16="http://schemas.microsoft.com/office/drawing/2014/main" id="{7B268E67-3896-4DA1-A790-946E1C58D3C4}"/>
               </a:ext>
             </a:extLst>
           </p:cNvPr>
@@ -31030,7 +31030,7 @@
           <p:cNvPr id="17" name="">
             <a:extLst xmlns:a="http://schemas.openxmlformats.org/drawingml/2006/main">
               <a:ext uri="{FF2B5EF4-FFF2-40B4-BE49-F238E27FC236}">
-                <a16:creationId xmlns:a16="http://schemas.microsoft.com/office/drawing/2014/main" id="{1A04516A-E5C4-4732-A6AB-C0C7E18EC7C7}"/>
+                <a16:creationId xmlns:a16="http://schemas.microsoft.com/office/drawing/2014/main" id="{5B58A8AE-E344-484D-AB3E-221F02780B08}"/>
               </a:ext>
             </a:extLst>
           </p:cNvPr>
@@ -31082,7 +31082,7 @@
           <p:cNvPr id="18" name="">
             <a:extLst xmlns:a="http://schemas.openxmlformats.org/drawingml/2006/main">
               <a:ext uri="{FF2B5EF4-FFF2-40B4-BE49-F238E27FC236}">
-                <a16:creationId xmlns:a16="http://schemas.microsoft.com/office/drawing/2014/main" id="{1E544DCF-B3F8-4E8C-BE39-6DA52D0313EC}"/>
+                <a16:creationId xmlns:a16="http://schemas.microsoft.com/office/drawing/2014/main" id="{001BBCF5-CB00-4259-B2B7-3F76F55AC470}"/>
               </a:ext>
             </a:extLst>
           </p:cNvPr>
@@ -31134,7 +31134,7 @@
           <p:cNvPr id="19" name="">
             <a:extLst xmlns:a="http://schemas.openxmlformats.org/drawingml/2006/main">
               <a:ext uri="{FF2B5EF4-FFF2-40B4-BE49-F238E27FC236}">
-                <a16:creationId xmlns:a16="http://schemas.microsoft.com/office/drawing/2014/main" id="{E0E6CAFA-C13E-4A42-BDE2-D6857B714250}"/>
+                <a16:creationId xmlns:a16="http://schemas.microsoft.com/office/drawing/2014/main" id="{4BEE961A-50A5-45ED-A63A-D6854EB57423}"/>
               </a:ext>
             </a:extLst>
           </p:cNvPr>
@@ -31186,7 +31186,7 @@
           <p:cNvPr id="20" name="">
             <a:extLst xmlns:a="http://schemas.openxmlformats.org/drawingml/2006/main">
               <a:ext uri="{FF2B5EF4-FFF2-40B4-BE49-F238E27FC236}">
-                <a16:creationId xmlns:a16="http://schemas.microsoft.com/office/drawing/2014/main" id="{FF4DCBC8-CD82-4993-9742-5804FF3EC585}"/>
+                <a16:creationId xmlns:a16="http://schemas.microsoft.com/office/drawing/2014/main" id="{CAFF606D-FA38-4810-A7A8-DCA9B19DA404}"/>
               </a:ext>
             </a:extLst>
           </p:cNvPr>
@@ -31229,7 +31229,7 @@
           <p:cNvPr id="21" name="">
             <a:extLst xmlns:a="http://schemas.openxmlformats.org/drawingml/2006/main">
               <a:ext uri="{FF2B5EF4-FFF2-40B4-BE49-F238E27FC236}">
-                <a16:creationId xmlns:a16="http://schemas.microsoft.com/office/drawing/2014/main" id="{D44D0148-31E7-4208-9B0E-195B8EC3C438}"/>
+                <a16:creationId xmlns:a16="http://schemas.microsoft.com/office/drawing/2014/main" id="{152BEC88-BC17-4F61-9A6E-E5D5D79A08F3}"/>
               </a:ext>
             </a:extLst>
           </p:cNvPr>
@@ -31260,7 +31260,7 @@
           <p:cNvPr id="22" name="">
             <a:extLst xmlns:a="http://schemas.openxmlformats.org/drawingml/2006/main">
               <a:ext uri="{FF2B5EF4-FFF2-40B4-BE49-F238E27FC236}">
-                <a16:creationId xmlns:a16="http://schemas.microsoft.com/office/drawing/2014/main" id="{210ECE85-B115-4418-9F3B-2D06C241D5CA}"/>
+                <a16:creationId xmlns:a16="http://schemas.microsoft.com/office/drawing/2014/main" id="{3A8DA5C9-79D4-4488-92AB-8790FED2C4F8}"/>
               </a:ext>
             </a:extLst>
           </p:cNvPr>
@@ -31291,7 +31291,7 @@
           <p:cNvPr id="23" name="">
             <a:extLst xmlns:a="http://schemas.openxmlformats.org/drawingml/2006/main">
               <a:ext uri="{FF2B5EF4-FFF2-40B4-BE49-F238E27FC236}">
-                <a16:creationId xmlns:a16="http://schemas.microsoft.com/office/drawing/2014/main" id="{FE77716C-7E21-4AA7-AAEA-DAC49625BDC7}"/>
+                <a16:creationId xmlns:a16="http://schemas.microsoft.com/office/drawing/2014/main" id="{83975A48-B506-42D1-9C81-B64CB6CDB491}"/>
               </a:ext>
             </a:extLst>
           </p:cNvPr>
@@ -31343,7 +31343,7 @@
           <p:cNvPr id="24" name="">
             <a:extLst xmlns:a="http://schemas.openxmlformats.org/drawingml/2006/main">
               <a:ext uri="{FF2B5EF4-FFF2-40B4-BE49-F238E27FC236}">
-                <a16:creationId xmlns:a16="http://schemas.microsoft.com/office/drawing/2014/main" id="{6A3EA2A2-FEF0-4C3B-9D36-5266A5CB10E9}"/>
+                <a16:creationId xmlns:a16="http://schemas.microsoft.com/office/drawing/2014/main" id="{DFF10539-1B20-40D0-96DC-8F8309241A8F}"/>
               </a:ext>
             </a:extLst>
           </p:cNvPr>
@@ -31395,7 +31395,7 @@
           <p:cNvPr id="25" name="">
             <a:extLst xmlns:a="http://schemas.openxmlformats.org/drawingml/2006/main">
               <a:ext uri="{FF2B5EF4-FFF2-40B4-BE49-F238E27FC236}">
-                <a16:creationId xmlns:a16="http://schemas.microsoft.com/office/drawing/2014/main" id="{8363B946-3B50-4242-B05B-3E0F2B12FE03}"/>
+                <a16:creationId xmlns:a16="http://schemas.microsoft.com/office/drawing/2014/main" id="{07153375-C959-4CB1-BCBF-249F389BF1BA}"/>
               </a:ext>
             </a:extLst>
           </p:cNvPr>
@@ -31447,7 +31447,7 @@
           <p:cNvPr id="26" name="">
             <a:extLst xmlns:a="http://schemas.openxmlformats.org/drawingml/2006/main">
               <a:ext uri="{FF2B5EF4-FFF2-40B4-BE49-F238E27FC236}">
-                <a16:creationId xmlns:a16="http://schemas.microsoft.com/office/drawing/2014/main" id="{76C831C2-7C27-4BBD-B34F-3AB4BEB42BDD}"/>
+                <a16:creationId xmlns:a16="http://schemas.microsoft.com/office/drawing/2014/main" id="{DFED509F-747B-4A81-9415-86990A3D55E5}"/>
               </a:ext>
             </a:extLst>
           </p:cNvPr>
@@ -31490,7 +31490,7 @@
           <p:cNvPr id="27" name="">
             <a:extLst xmlns:a="http://schemas.openxmlformats.org/drawingml/2006/main">
               <a:ext uri="{FF2B5EF4-FFF2-40B4-BE49-F238E27FC236}">
-                <a16:creationId xmlns:a16="http://schemas.microsoft.com/office/drawing/2014/main" id="{FF4D61EC-B165-4137-A1B0-7EA90B5DEB5F}"/>
+                <a16:creationId xmlns:a16="http://schemas.microsoft.com/office/drawing/2014/main" id="{C215F1B2-0CB5-4766-B4AF-4C6478E8CDB8}"/>
               </a:ext>
             </a:extLst>
           </p:cNvPr>
@@ -31521,7 +31521,7 @@
           <p:cNvPr id="28" name="">
             <a:extLst xmlns:a="http://schemas.openxmlformats.org/drawingml/2006/main">
               <a:ext uri="{FF2B5EF4-FFF2-40B4-BE49-F238E27FC236}">
-                <a16:creationId xmlns:a16="http://schemas.microsoft.com/office/drawing/2014/main" id="{0C5FF307-FA6C-486B-891E-76CD91098420}"/>
+                <a16:creationId xmlns:a16="http://schemas.microsoft.com/office/drawing/2014/main" id="{4B426BFA-C7F2-4DAC-B597-54809C4F6EC3}"/>
               </a:ext>
             </a:extLst>
           </p:cNvPr>
@@ -31552,7 +31552,7 @@
           <p:cNvPr id="29" name="">
             <a:extLst xmlns:a="http://schemas.openxmlformats.org/drawingml/2006/main">
               <a:ext uri="{FF2B5EF4-FFF2-40B4-BE49-F238E27FC236}">
-                <a16:creationId xmlns:a16="http://schemas.microsoft.com/office/drawing/2014/main" id="{0D3CA3D8-1E5A-4550-81D5-55375650141A}"/>
+                <a16:creationId xmlns:a16="http://schemas.microsoft.com/office/drawing/2014/main" id="{23729EA8-29AF-4FC1-8D6C-8E366F82F930}"/>
               </a:ext>
             </a:extLst>
           </p:cNvPr>
@@ -31604,7 +31604,7 @@
           <p:cNvPr id="30" name="">
             <a:extLst xmlns:a="http://schemas.openxmlformats.org/drawingml/2006/main">
               <a:ext uri="{FF2B5EF4-FFF2-40B4-BE49-F238E27FC236}">
-                <a16:creationId xmlns:a16="http://schemas.microsoft.com/office/drawing/2014/main" id="{09D4DF7B-7CB4-4978-B828-89D7A503BD41}"/>
+                <a16:creationId xmlns:a16="http://schemas.microsoft.com/office/drawing/2014/main" id="{90A5C9ED-F947-4A14-8FD6-DA51C4FB8964}"/>
               </a:ext>
             </a:extLst>
           </p:cNvPr>
@@ -31656,7 +31656,7 @@
           <p:cNvPr id="31" name="">
             <a:extLst xmlns:a="http://schemas.openxmlformats.org/drawingml/2006/main">
               <a:ext uri="{FF2B5EF4-FFF2-40B4-BE49-F238E27FC236}">
-                <a16:creationId xmlns:a16="http://schemas.microsoft.com/office/drawing/2014/main" id="{64F4D0AC-F6C3-4DB7-9E42-34E2C15961C1}"/>
+                <a16:creationId xmlns:a16="http://schemas.microsoft.com/office/drawing/2014/main" id="{FC5F1E6F-F67C-4E91-9B7B-5246D73EBED5}"/>
               </a:ext>
             </a:extLst>
           </p:cNvPr>
@@ -31708,7 +31708,7 @@
           <p:cNvPr id="32" name="">
             <a:extLst xmlns:a="http://schemas.openxmlformats.org/drawingml/2006/main">
               <a:ext uri="{FF2B5EF4-FFF2-40B4-BE49-F238E27FC236}">
-                <a16:creationId xmlns:a16="http://schemas.microsoft.com/office/drawing/2014/main" id="{17ED7BC6-0E87-4EF1-B234-41528A437734}"/>
+                <a16:creationId xmlns:a16="http://schemas.microsoft.com/office/drawing/2014/main" id="{BE5583FB-4FF3-43D0-8BE3-DE5D2F611BED}"/>
               </a:ext>
             </a:extLst>
           </p:cNvPr>
@@ -31751,7 +31751,7 @@
           <p:cNvPr id="33" name="">
             <a:extLst xmlns:a="http://schemas.openxmlformats.org/drawingml/2006/main">
               <a:ext uri="{FF2B5EF4-FFF2-40B4-BE49-F238E27FC236}">
-                <a16:creationId xmlns:a16="http://schemas.microsoft.com/office/drawing/2014/main" id="{C4942CAD-A608-4A20-8439-C915AF990C28}"/>
+                <a16:creationId xmlns:a16="http://schemas.microsoft.com/office/drawing/2014/main" id="{E4484E63-DF9B-40E3-81C3-24FF3B600C10}"/>
               </a:ext>
             </a:extLst>
           </p:cNvPr>
@@ -31782,7 +31782,7 @@
           <p:cNvPr id="34" name="">
             <a:extLst xmlns:a="http://schemas.openxmlformats.org/drawingml/2006/main">
               <a:ext uri="{FF2B5EF4-FFF2-40B4-BE49-F238E27FC236}">
-                <a16:creationId xmlns:a16="http://schemas.microsoft.com/office/drawing/2014/main" id="{2D6B8C86-F240-4D0A-B2FA-87B5EB36807D}"/>
+                <a16:creationId xmlns:a16="http://schemas.microsoft.com/office/drawing/2014/main" id="{DEA400EC-DFBE-479B-A5B4-608AEC12160A}"/>
               </a:ext>
             </a:extLst>
           </p:cNvPr>
@@ -31813,7 +31813,7 @@
           <p:cNvPr id="35" name="">
             <a:extLst xmlns:a="http://schemas.openxmlformats.org/drawingml/2006/main">
               <a:ext uri="{FF2B5EF4-FFF2-40B4-BE49-F238E27FC236}">
-                <a16:creationId xmlns:a16="http://schemas.microsoft.com/office/drawing/2014/main" id="{CA2B275B-AC4B-42A7-8420-FC4A41B1EA02}"/>
+                <a16:creationId xmlns:a16="http://schemas.microsoft.com/office/drawing/2014/main" id="{4B1528BA-8D92-4F49-ADBA-CAF8AC5B2CC6}"/>
               </a:ext>
             </a:extLst>
           </p:cNvPr>
@@ -31865,7 +31865,7 @@
           <p:cNvPr id="36" name="">
             <a:extLst xmlns:a="http://schemas.openxmlformats.org/drawingml/2006/main">
               <a:ext uri="{FF2B5EF4-FFF2-40B4-BE49-F238E27FC236}">
-                <a16:creationId xmlns:a16="http://schemas.microsoft.com/office/drawing/2014/main" id="{265FC147-CF6A-4C69-9A22-BAE355D7EE6A}"/>
+                <a16:creationId xmlns:a16="http://schemas.microsoft.com/office/drawing/2014/main" id="{6099DBF7-715B-4BC6-A7CF-9C9D66696313}"/>
               </a:ext>
             </a:extLst>
           </p:cNvPr>
@@ -31917,7 +31917,7 @@
           <p:cNvPr id="37" name="">
             <a:extLst xmlns:a="http://schemas.openxmlformats.org/drawingml/2006/main">
               <a:ext uri="{FF2B5EF4-FFF2-40B4-BE49-F238E27FC236}">
-                <a16:creationId xmlns:a16="http://schemas.microsoft.com/office/drawing/2014/main" id="{F669FF35-FFE8-4BD1-B959-75495916C55B}"/>
+                <a16:creationId xmlns:a16="http://schemas.microsoft.com/office/drawing/2014/main" id="{B9ACE185-F562-40B3-B42E-E7F5812AF6D0}"/>
               </a:ext>
             </a:extLst>
           </p:cNvPr>
@@ -31973,10 +31973,10 @@
           <p:nvPr/>
         </p:nvPicPr>
         <p:blipFill>
-          <a:blip xmlns:r="http://schemas.openxmlformats.org/officeDocument/2006/relationships" xmlns:a="http://schemas.openxmlformats.org/drawingml/2006/main" r:embed="R7363afd216294076">
+          <a:blip xmlns:r="http://schemas.openxmlformats.org/officeDocument/2006/relationships" xmlns:a="http://schemas.openxmlformats.org/drawingml/2006/main" r:embed="R8f2d3a9cde4646a5">
             <a:extLst>
               <a:ext uri="{96DAC541-7B7A-43D3-8B79-37D633B846F1}">
-                <asvg:svgBlip xmlns:asvg="http://schemas.microsoft.com/office/drawing/2016/SVG/main" r:embed="R54fc1a56cc794f79"/>
+                <asvg:svgBlip xmlns:asvg="http://schemas.microsoft.com/office/drawing/2016/SVG/main" r:embed="R1a8c9e462a874cb9"/>
               </a:ext>
             </a:extLst>
           </a:blip>
@@ -31997,7 +31997,7 @@
           <p:cNvPr id="39" name="">
             <a:extLst xmlns:a="http://schemas.openxmlformats.org/drawingml/2006/main">
               <a:ext uri="{FF2B5EF4-FFF2-40B4-BE49-F238E27FC236}">
-                <a16:creationId xmlns:a16="http://schemas.microsoft.com/office/drawing/2014/main" id="{C3B5D8B3-D3AC-44A6-889B-A20B4C203719}"/>
+                <a16:creationId xmlns:a16="http://schemas.microsoft.com/office/drawing/2014/main" id="{508387EF-7837-4665-94B1-0150E3A35800}"/>
               </a:ext>
             </a:extLst>
           </p:cNvPr>
@@ -32049,7 +32049,7 @@
           <p:cNvPr id="40" name="">
             <a:extLst xmlns:a="http://schemas.openxmlformats.org/drawingml/2006/main">
               <a:ext uri="{FF2B5EF4-FFF2-40B4-BE49-F238E27FC236}">
-                <a16:creationId xmlns:a16="http://schemas.microsoft.com/office/drawing/2014/main" id="{7ABC2229-53B9-4F2E-9734-EA99D6E15C82}"/>
+                <a16:creationId xmlns:a16="http://schemas.microsoft.com/office/drawing/2014/main" id="{042C2093-64CB-44F6-9C8E-CC328EBDA8FC}"/>
               </a:ext>
             </a:extLst>
           </p:cNvPr>
@@ -32101,7 +32101,7 @@
           <p:cNvPr id="41" name="">
             <a:extLst xmlns:a="http://schemas.openxmlformats.org/drawingml/2006/main">
               <a:ext uri="{FF2B5EF4-FFF2-40B4-BE49-F238E27FC236}">
-                <a16:creationId xmlns:a16="http://schemas.microsoft.com/office/drawing/2014/main" id="{B7EEDA12-CB15-40DF-ADCE-0C15658D9C76}"/>
+                <a16:creationId xmlns:a16="http://schemas.microsoft.com/office/drawing/2014/main" id="{263A6798-38BF-432F-B397-0BD071FA5172}"/>
               </a:ext>
             </a:extLst>
           </p:cNvPr>
@@ -32144,7 +32144,7 @@
           <p:cNvPr id="42" name="">
             <a:extLst xmlns:a="http://schemas.openxmlformats.org/drawingml/2006/main">
               <a:ext uri="{FF2B5EF4-FFF2-40B4-BE49-F238E27FC236}">
-                <a16:creationId xmlns:a16="http://schemas.microsoft.com/office/drawing/2014/main" id="{5FCF01EF-E761-4B08-B2DE-3DB88004B38F}"/>
+                <a16:creationId xmlns:a16="http://schemas.microsoft.com/office/drawing/2014/main" id="{A75217B1-0AC4-473D-A1F3-23192AAA4A4B}"/>
               </a:ext>
             </a:extLst>
           </p:cNvPr>
@@ -32175,7 +32175,7 @@
           <p:cNvPr id="43" name="">
             <a:extLst xmlns:a="http://schemas.openxmlformats.org/drawingml/2006/main">
               <a:ext uri="{FF2B5EF4-FFF2-40B4-BE49-F238E27FC236}">
-                <a16:creationId xmlns:a16="http://schemas.microsoft.com/office/drawing/2014/main" id="{2E550735-A6D7-40C7-9B98-ED7FCB0CE54F}"/>
+                <a16:creationId xmlns:a16="http://schemas.microsoft.com/office/drawing/2014/main" id="{F5170E05-AE87-4B16-A0F6-75CEB9B51E96}"/>
               </a:ext>
             </a:extLst>
           </p:cNvPr>
@@ -32206,7 +32206,7 @@
           <p:cNvPr id="44" name="">
             <a:extLst xmlns:a="http://schemas.openxmlformats.org/drawingml/2006/main">
               <a:ext uri="{FF2B5EF4-FFF2-40B4-BE49-F238E27FC236}">
-                <a16:creationId xmlns:a16="http://schemas.microsoft.com/office/drawing/2014/main" id="{35DDB619-AF40-4E2D-9B86-23431A3FD2A2}"/>
+                <a16:creationId xmlns:a16="http://schemas.microsoft.com/office/drawing/2014/main" id="{B3DA4856-8797-417C-9A67-234F2C4BC4FF}"/>
               </a:ext>
             </a:extLst>
           </p:cNvPr>
@@ -32249,7 +32249,7 @@
           <p:cNvPr id="45" name="">
             <a:extLst xmlns:a="http://schemas.openxmlformats.org/drawingml/2006/main">
               <a:ext uri="{FF2B5EF4-FFF2-40B4-BE49-F238E27FC236}">
-                <a16:creationId xmlns:a16="http://schemas.microsoft.com/office/drawing/2014/main" id="{E0735996-B466-4C2B-B6D9-37344823575C}"/>
+                <a16:creationId xmlns:a16="http://schemas.microsoft.com/office/drawing/2014/main" id="{8EDD2105-A157-4DCE-BFED-C3FEE4CFCC35}"/>
               </a:ext>
             </a:extLst>
           </p:cNvPr>
@@ -32280,7 +32280,7 @@
           <p:cNvPr id="46" name="">
             <a:extLst xmlns:a="http://schemas.openxmlformats.org/drawingml/2006/main">
               <a:ext uri="{FF2B5EF4-FFF2-40B4-BE49-F238E27FC236}">
-                <a16:creationId xmlns:a16="http://schemas.microsoft.com/office/drawing/2014/main" id="{8B209E8F-8707-479E-900B-060AAA37640D}"/>
+                <a16:creationId xmlns:a16="http://schemas.microsoft.com/office/drawing/2014/main" id="{AC8F2846-3940-41A0-B599-452F23CF6042}"/>
               </a:ext>
             </a:extLst>
           </p:cNvPr>
@@ -32311,7 +32311,7 @@
           <p:cNvPr id="47" name="">
             <a:extLst xmlns:a="http://schemas.openxmlformats.org/drawingml/2006/main">
               <a:ext uri="{FF2B5EF4-FFF2-40B4-BE49-F238E27FC236}">
-                <a16:creationId xmlns:a16="http://schemas.microsoft.com/office/drawing/2014/main" id="{6241841E-71E7-4E16-B2E4-486FB1D69608}"/>
+                <a16:creationId xmlns:a16="http://schemas.microsoft.com/office/drawing/2014/main" id="{3D369673-8E19-4647-BF76-51386E3FAE1A}"/>
               </a:ext>
             </a:extLst>
           </p:cNvPr>
@@ -32363,7 +32363,7 @@
           <p:cNvPr id="48" name="">
             <a:extLst xmlns:a="http://schemas.openxmlformats.org/drawingml/2006/main">
               <a:ext uri="{FF2B5EF4-FFF2-40B4-BE49-F238E27FC236}">
-                <a16:creationId xmlns:a16="http://schemas.microsoft.com/office/drawing/2014/main" id="{D1F066CF-C2D9-40FE-BB0A-62934BF5F93F}"/>
+                <a16:creationId xmlns:a16="http://schemas.microsoft.com/office/drawing/2014/main" id="{425B2044-787F-492F-B838-C8D5BCB8F196}"/>
               </a:ext>
             </a:extLst>
           </p:cNvPr>
@@ -32396,7 +32396,7 @@
           <p:cNvPr id="49" name="">
             <a:extLst xmlns:a="http://schemas.openxmlformats.org/drawingml/2006/main">
               <a:ext uri="{FF2B5EF4-FFF2-40B4-BE49-F238E27FC236}">
-                <a16:creationId xmlns:a16="http://schemas.microsoft.com/office/drawing/2014/main" id="{D251816D-DAD9-47CD-A4F7-6D34741C1397}"/>
+                <a16:creationId xmlns:a16="http://schemas.microsoft.com/office/drawing/2014/main" id="{18C77B72-8B67-4935-B2D3-7BDC79744E7F}"/>
               </a:ext>
             </a:extLst>
           </p:cNvPr>
@@ -32448,7 +32448,7 @@
           <p:cNvPr id="50" name="">
             <a:extLst xmlns:a="http://schemas.openxmlformats.org/drawingml/2006/main">
               <a:ext uri="{FF2B5EF4-FFF2-40B4-BE49-F238E27FC236}">
-                <a16:creationId xmlns:a16="http://schemas.microsoft.com/office/drawing/2014/main" id="{AD313987-8C0B-4D6B-A1A0-7E95E4237A85}"/>
+                <a16:creationId xmlns:a16="http://schemas.microsoft.com/office/drawing/2014/main" id="{9DAF549A-C876-4A48-8FFC-3D7A57705723}"/>
               </a:ext>
             </a:extLst>
           </p:cNvPr>
@@ -32500,7 +32500,7 @@
           <p:cNvPr id="51" name="">
             <a:extLst xmlns:a="http://schemas.openxmlformats.org/drawingml/2006/main">
               <a:ext uri="{FF2B5EF4-FFF2-40B4-BE49-F238E27FC236}">
-                <a16:creationId xmlns:a16="http://schemas.microsoft.com/office/drawing/2014/main" id="{9300C34D-A882-4261-A3AC-22BBBCA136E5}"/>
+                <a16:creationId xmlns:a16="http://schemas.microsoft.com/office/drawing/2014/main" id="{35F01154-8E62-405F-AB95-FEF811344BB9}"/>
               </a:ext>
             </a:extLst>
           </p:cNvPr>
@@ -32552,7 +32552,7 @@
           <p:cNvPr id="52" name="">
             <a:extLst xmlns:a="http://schemas.openxmlformats.org/drawingml/2006/main">
               <a:ext uri="{FF2B5EF4-FFF2-40B4-BE49-F238E27FC236}">
-                <a16:creationId xmlns:a16="http://schemas.microsoft.com/office/drawing/2014/main" id="{5657AAC2-D93E-4A33-8415-B6615EEA69D8}"/>
+                <a16:creationId xmlns:a16="http://schemas.microsoft.com/office/drawing/2014/main" id="{18C59278-5BFB-4A1D-90E6-3B0A15090333}"/>
               </a:ext>
             </a:extLst>
           </p:cNvPr>
@@ -32595,7 +32595,7 @@
           <p:cNvPr id="53" name="">
             <a:extLst xmlns:a="http://schemas.openxmlformats.org/drawingml/2006/main">
               <a:ext uri="{FF2B5EF4-FFF2-40B4-BE49-F238E27FC236}">
-                <a16:creationId xmlns:a16="http://schemas.microsoft.com/office/drawing/2014/main" id="{33BCD0F0-F461-4E6A-A8A1-926553DBD6E5}"/>
+                <a16:creationId xmlns:a16="http://schemas.microsoft.com/office/drawing/2014/main" id="{64F2AB84-E2FB-4D33-9F69-60AB4F11B9AB}"/>
               </a:ext>
             </a:extLst>
           </p:cNvPr>
@@ -32626,7 +32626,7 @@
           <p:cNvPr id="54" name="">
             <a:extLst xmlns:a="http://schemas.openxmlformats.org/drawingml/2006/main">
               <a:ext uri="{FF2B5EF4-FFF2-40B4-BE49-F238E27FC236}">
-                <a16:creationId xmlns:a16="http://schemas.microsoft.com/office/drawing/2014/main" id="{641F97F8-A560-4285-ABF5-A938913F501D}"/>
+                <a16:creationId xmlns:a16="http://schemas.microsoft.com/office/drawing/2014/main" id="{31C92AA3-F116-4923-8760-B8F517A67BC3}"/>
               </a:ext>
             </a:extLst>
           </p:cNvPr>
@@ -32657,7 +32657,7 @@
           <p:cNvPr id="55" name="">
             <a:extLst xmlns:a="http://schemas.openxmlformats.org/drawingml/2006/main">
               <a:ext uri="{FF2B5EF4-FFF2-40B4-BE49-F238E27FC236}">
-                <a16:creationId xmlns:a16="http://schemas.microsoft.com/office/drawing/2014/main" id="{1552FA29-6B20-4A77-A698-F173347C91A9}"/>
+                <a16:creationId xmlns:a16="http://schemas.microsoft.com/office/drawing/2014/main" id="{FF42BA63-D215-42CF-A8D7-D7E56C311152}"/>
               </a:ext>
             </a:extLst>
           </p:cNvPr>
@@ -32709,7 +32709,7 @@
           <p:cNvPr id="56" name="">
             <a:extLst xmlns:a="http://schemas.openxmlformats.org/drawingml/2006/main">
               <a:ext uri="{FF2B5EF4-FFF2-40B4-BE49-F238E27FC236}">
-                <a16:creationId xmlns:a16="http://schemas.microsoft.com/office/drawing/2014/main" id="{530828E3-F3EB-4BDB-B75E-C6050543BC42}"/>
+                <a16:creationId xmlns:a16="http://schemas.microsoft.com/office/drawing/2014/main" id="{FB2A92FE-4592-48EE-BFE2-BEA18EA5CD94}"/>
               </a:ext>
             </a:extLst>
           </p:cNvPr>
@@ -32742,7 +32742,7 @@
           <p:cNvPr id="57" name="">
             <a:extLst xmlns:a="http://schemas.openxmlformats.org/drawingml/2006/main">
               <a:ext uri="{FF2B5EF4-FFF2-40B4-BE49-F238E27FC236}">
-                <a16:creationId xmlns:a16="http://schemas.microsoft.com/office/drawing/2014/main" id="{7FBAF0D6-2E89-47A4-AA21-2C90CD9514CA}"/>
+                <a16:creationId xmlns:a16="http://schemas.microsoft.com/office/drawing/2014/main" id="{CF8BD3B2-DE43-4E63-B986-8A3F7D750C07}"/>
               </a:ext>
             </a:extLst>
           </p:cNvPr>
@@ -32794,7 +32794,7 @@
           <p:cNvPr id="58" name="">
             <a:extLst xmlns:a="http://schemas.openxmlformats.org/drawingml/2006/main">
               <a:ext uri="{FF2B5EF4-FFF2-40B4-BE49-F238E27FC236}">
-                <a16:creationId xmlns:a16="http://schemas.microsoft.com/office/drawing/2014/main" id="{2A02C05A-DE70-4257-AC66-F3514389D8BF}"/>
+                <a16:creationId xmlns:a16="http://schemas.microsoft.com/office/drawing/2014/main" id="{7DEB438A-E4F6-4496-8190-82F0253FD2F2}"/>
               </a:ext>
             </a:extLst>
           </p:cNvPr>
@@ -32846,7 +32846,7 @@
           <p:cNvPr id="59" name="">
             <a:extLst xmlns:a="http://schemas.openxmlformats.org/drawingml/2006/main">
               <a:ext uri="{FF2B5EF4-FFF2-40B4-BE49-F238E27FC236}">
-                <a16:creationId xmlns:a16="http://schemas.microsoft.com/office/drawing/2014/main" id="{90481DFB-8E18-48CF-905E-478C7ACE0031}"/>
+                <a16:creationId xmlns:a16="http://schemas.microsoft.com/office/drawing/2014/main" id="{24161331-AD1D-49D9-AADE-54104B83D3A5}"/>
               </a:ext>
             </a:extLst>
           </p:cNvPr>
@@ -32898,7 +32898,7 @@
           <p:cNvPr id="60" name="">
             <a:extLst xmlns:a="http://schemas.openxmlformats.org/drawingml/2006/main">
               <a:ext uri="{FF2B5EF4-FFF2-40B4-BE49-F238E27FC236}">
-                <a16:creationId xmlns:a16="http://schemas.microsoft.com/office/drawing/2014/main" id="{3B78CB4D-2A9F-4CB2-B8C6-6447A3373924}"/>
+                <a16:creationId xmlns:a16="http://schemas.microsoft.com/office/drawing/2014/main" id="{4D74183A-3DDC-4278-9BCC-A15EF0A13088}"/>
               </a:ext>
             </a:extLst>
           </p:cNvPr>
@@ -32941,7 +32941,7 @@
           <p:cNvPr id="61" name="">
             <a:extLst xmlns:a="http://schemas.openxmlformats.org/drawingml/2006/main">
               <a:ext uri="{FF2B5EF4-FFF2-40B4-BE49-F238E27FC236}">
-                <a16:creationId xmlns:a16="http://schemas.microsoft.com/office/drawing/2014/main" id="{039F8EA9-2C19-46FE-8DE4-37BD55BC01CE}"/>
+                <a16:creationId xmlns:a16="http://schemas.microsoft.com/office/drawing/2014/main" id="{9365BEC4-71B8-434C-8407-ECBD7F46A8EB}"/>
               </a:ext>
             </a:extLst>
           </p:cNvPr>
@@ -32972,7 +32972,7 @@
           <p:cNvPr id="62" name="">
             <a:extLst xmlns:a="http://schemas.openxmlformats.org/drawingml/2006/main">
               <a:ext uri="{FF2B5EF4-FFF2-40B4-BE49-F238E27FC236}">
-                <a16:creationId xmlns:a16="http://schemas.microsoft.com/office/drawing/2014/main" id="{6D14C365-08F1-4342-8632-9E5BD4D8FED2}"/>
+                <a16:creationId xmlns:a16="http://schemas.microsoft.com/office/drawing/2014/main" id="{B4D1264C-DB0E-4C60-B86A-8B97FA0E5DFD}"/>
               </a:ext>
             </a:extLst>
           </p:cNvPr>
@@ -33003,7 +33003,7 @@
           <p:cNvPr id="63" name="">
             <a:extLst xmlns:a="http://schemas.openxmlformats.org/drawingml/2006/main">
               <a:ext uri="{FF2B5EF4-FFF2-40B4-BE49-F238E27FC236}">
-                <a16:creationId xmlns:a16="http://schemas.microsoft.com/office/drawing/2014/main" id="{BACC982A-78AC-4F65-A4E9-BB2C32AB89D4}"/>
+                <a16:creationId xmlns:a16="http://schemas.microsoft.com/office/drawing/2014/main" id="{E90BE93F-A9B5-423E-B2E6-C3CE5B58DCC4}"/>
               </a:ext>
             </a:extLst>
           </p:cNvPr>
@@ -33055,7 +33055,7 @@
           <p:cNvPr id="64" name="">
             <a:extLst xmlns:a="http://schemas.openxmlformats.org/drawingml/2006/main">
               <a:ext uri="{FF2B5EF4-FFF2-40B4-BE49-F238E27FC236}">
-                <a16:creationId xmlns:a16="http://schemas.microsoft.com/office/drawing/2014/main" id="{9677B82B-8959-4B39-8E2E-3058C6572B98}"/>
+                <a16:creationId xmlns:a16="http://schemas.microsoft.com/office/drawing/2014/main" id="{164651F5-8ACD-4B20-BBB7-211E76679BAB}"/>
               </a:ext>
             </a:extLst>
           </p:cNvPr>
@@ -33088,7 +33088,7 @@
           <p:cNvPr id="65" name="">
             <a:extLst xmlns:a="http://schemas.openxmlformats.org/drawingml/2006/main">
               <a:ext uri="{FF2B5EF4-FFF2-40B4-BE49-F238E27FC236}">
-                <a16:creationId xmlns:a16="http://schemas.microsoft.com/office/drawing/2014/main" id="{55707E28-C8E4-4898-AFA8-365F2B2B78F6}"/>
+                <a16:creationId xmlns:a16="http://schemas.microsoft.com/office/drawing/2014/main" id="{26EC7FDA-72B0-45CF-9F23-F77BADEFF8DC}"/>
               </a:ext>
             </a:extLst>
           </p:cNvPr>
@@ -33140,7 +33140,7 @@
           <p:cNvPr id="66" name="">
             <a:extLst xmlns:a="http://schemas.openxmlformats.org/drawingml/2006/main">
               <a:ext uri="{FF2B5EF4-FFF2-40B4-BE49-F238E27FC236}">
-                <a16:creationId xmlns:a16="http://schemas.microsoft.com/office/drawing/2014/main" id="{ACE04BE4-6262-4B02-A9C6-93FCFA451E61}"/>
+                <a16:creationId xmlns:a16="http://schemas.microsoft.com/office/drawing/2014/main" id="{6670D1C7-680E-4BF7-9819-298B1C36F1CA}"/>
               </a:ext>
             </a:extLst>
           </p:cNvPr>
@@ -33192,7 +33192,7 @@
           <p:cNvPr id="67" name="">
             <a:extLst xmlns:a="http://schemas.openxmlformats.org/drawingml/2006/main">
               <a:ext uri="{FF2B5EF4-FFF2-40B4-BE49-F238E27FC236}">
-                <a16:creationId xmlns:a16="http://schemas.microsoft.com/office/drawing/2014/main" id="{5A3642B8-C7C8-4963-B2D3-B0789631C7F0}"/>
+                <a16:creationId xmlns:a16="http://schemas.microsoft.com/office/drawing/2014/main" id="{D36D333E-52A7-433D-AC2C-F0B3139E4985}"/>
               </a:ext>
             </a:extLst>
           </p:cNvPr>
@@ -33244,7 +33244,7 @@
           <p:cNvPr id="68" name="">
             <a:extLst xmlns:a="http://schemas.openxmlformats.org/drawingml/2006/main">
               <a:ext uri="{FF2B5EF4-FFF2-40B4-BE49-F238E27FC236}">
-                <a16:creationId xmlns:a16="http://schemas.microsoft.com/office/drawing/2014/main" id="{847D1577-A8CF-43D4-8633-BCE0037A37E1}"/>
+                <a16:creationId xmlns:a16="http://schemas.microsoft.com/office/drawing/2014/main" id="{56074EE1-1C0B-434E-B6F2-9206C3C481E8}"/>
               </a:ext>
             </a:extLst>
           </p:cNvPr>
@@ -33287,7 +33287,7 @@
           <p:cNvPr id="69" name="">
             <a:extLst xmlns:a="http://schemas.openxmlformats.org/drawingml/2006/main">
               <a:ext uri="{FF2B5EF4-FFF2-40B4-BE49-F238E27FC236}">
-                <a16:creationId xmlns:a16="http://schemas.microsoft.com/office/drawing/2014/main" id="{83FD4E3B-7BB5-4610-BC62-CAB3952FB72D}"/>
+                <a16:creationId xmlns:a16="http://schemas.microsoft.com/office/drawing/2014/main" id="{0B261721-A38F-40A9-87DD-79D826ECC221}"/>
               </a:ext>
             </a:extLst>
           </p:cNvPr>
@@ -33318,7 +33318,7 @@
           <p:cNvPr id="70" name="">
             <a:extLst xmlns:a="http://schemas.openxmlformats.org/drawingml/2006/main">
               <a:ext uri="{FF2B5EF4-FFF2-40B4-BE49-F238E27FC236}">
-                <a16:creationId xmlns:a16="http://schemas.microsoft.com/office/drawing/2014/main" id="{00AD95CF-B620-4CDD-9C59-9F40C47E2571}"/>
+                <a16:creationId xmlns:a16="http://schemas.microsoft.com/office/drawing/2014/main" id="{1D328F8C-B588-4AC5-9366-5FCCF7DB0EE8}"/>
               </a:ext>
             </a:extLst>
           </p:cNvPr>
@@ -33349,7 +33349,7 @@
           <p:cNvPr id="71" name="">
             <a:extLst xmlns:a="http://schemas.openxmlformats.org/drawingml/2006/main">
               <a:ext uri="{FF2B5EF4-FFF2-40B4-BE49-F238E27FC236}">
-                <a16:creationId xmlns:a16="http://schemas.microsoft.com/office/drawing/2014/main" id="{4E3BC721-740F-49EA-B0DC-2B1F170F3AA2}"/>
+                <a16:creationId xmlns:a16="http://schemas.microsoft.com/office/drawing/2014/main" id="{40C0143C-54D7-48AF-A192-8C6AD856EFE8}"/>
               </a:ext>
             </a:extLst>
           </p:cNvPr>
@@ -33401,7 +33401,7 @@
           <p:cNvPr id="72" name="">
             <a:extLst xmlns:a="http://schemas.openxmlformats.org/drawingml/2006/main">
               <a:ext uri="{FF2B5EF4-FFF2-40B4-BE49-F238E27FC236}">
-                <a16:creationId xmlns:a16="http://schemas.microsoft.com/office/drawing/2014/main" id="{1466C9D2-55B2-453A-A11B-96130474BDC8}"/>
+                <a16:creationId xmlns:a16="http://schemas.microsoft.com/office/drawing/2014/main" id="{42641681-9A78-4324-AC42-8CD0EB20CD95}"/>
               </a:ext>
             </a:extLst>
           </p:cNvPr>
@@ -33434,7 +33434,7 @@
           <p:cNvPr id="73" name="">
             <a:extLst xmlns:a="http://schemas.openxmlformats.org/drawingml/2006/main">
               <a:ext uri="{FF2B5EF4-FFF2-40B4-BE49-F238E27FC236}">
-                <a16:creationId xmlns:a16="http://schemas.microsoft.com/office/drawing/2014/main" id="{A0CA8341-3123-4F8E-A3C7-AE97124E5EAB}"/>
+                <a16:creationId xmlns:a16="http://schemas.microsoft.com/office/drawing/2014/main" id="{BBD36D85-D1B4-445F-ABF0-44355A123B00}"/>
               </a:ext>
             </a:extLst>
           </p:cNvPr>
@@ -33486,7 +33486,7 @@
           <p:cNvPr id="74" name="">
             <a:extLst xmlns:a="http://schemas.openxmlformats.org/drawingml/2006/main">
               <a:ext uri="{FF2B5EF4-FFF2-40B4-BE49-F238E27FC236}">
-                <a16:creationId xmlns:a16="http://schemas.microsoft.com/office/drawing/2014/main" id="{04E87DE1-52D3-434F-B373-50BC88C9933B}"/>
+                <a16:creationId xmlns:a16="http://schemas.microsoft.com/office/drawing/2014/main" id="{E42FEDD3-4404-4A39-83B6-85A9FC3AF48C}"/>
               </a:ext>
             </a:extLst>
           </p:cNvPr>
@@ -33538,7 +33538,7 @@
           <p:cNvPr id="75" name="">
             <a:extLst xmlns:a="http://schemas.openxmlformats.org/drawingml/2006/main">
               <a:ext uri="{FF2B5EF4-FFF2-40B4-BE49-F238E27FC236}">
-                <a16:creationId xmlns:a16="http://schemas.microsoft.com/office/drawing/2014/main" id="{9D3F26EB-5C24-4A67-8A77-088A2F4F7632}"/>
+                <a16:creationId xmlns:a16="http://schemas.microsoft.com/office/drawing/2014/main" id="{183C8D45-D665-49AF-BC2B-9F368079CA29}"/>
               </a:ext>
             </a:extLst>
           </p:cNvPr>
@@ -33588,7 +33588,7 @@
     </p:spTree>
     <p:extLst>
       <p:ext uri="{BB962C8B-B14F-4D97-AF65-F5344CB8AC3E}">
-        <p14:creationId xmlns:p14="http://schemas.microsoft.com/office/powerpoint/2010/main" val="914396058"/>
+        <p14:creationId xmlns:p14="http://schemas.microsoft.com/office/powerpoint/2010/main" val="901759494"/>
       </p:ext>
     </p:extLst>
   </p:cSld>
@@ -33619,7 +33619,7 @@
           <p:cNvPr id="30" name="">
             <a:extLst xmlns:a="http://schemas.openxmlformats.org/drawingml/2006/main">
               <a:ext uri="{FF2B5EF4-FFF2-40B4-BE49-F238E27FC236}">
-                <a16:creationId xmlns:a16="http://schemas.microsoft.com/office/drawing/2014/main" id="{12E2238D-4BE7-48FE-890D-8DA3839CC7CA}"/>
+                <a16:creationId xmlns:a16="http://schemas.microsoft.com/office/drawing/2014/main" id="{898DAD6A-40E3-4B1F-ACCD-7F84E40AC51C}"/>
               </a:ext>
             </a:extLst>
           </p:cNvPr>
@@ -33652,7 +33652,7 @@
           <p:cNvPr id="2" name="">
             <a:extLst xmlns:a="http://schemas.openxmlformats.org/drawingml/2006/main">
               <a:ext uri="{FF2B5EF4-FFF2-40B4-BE49-F238E27FC236}">
-                <a16:creationId xmlns:a16="http://schemas.microsoft.com/office/drawing/2014/main" id="{AECBEC80-ACCE-41CD-AD09-908C204DA7F5}"/>
+                <a16:creationId xmlns:a16="http://schemas.microsoft.com/office/drawing/2014/main" id="{191C41CC-CFBD-4949-AF97-03407830C4FA}"/>
               </a:ext>
             </a:extLst>
           </p:cNvPr>
@@ -33683,7 +33683,7 @@
           <p:cNvPr id="3" name="">
             <a:extLst xmlns:a="http://schemas.openxmlformats.org/drawingml/2006/main">
               <a:ext uri="{FF2B5EF4-FFF2-40B4-BE49-F238E27FC236}">
-                <a16:creationId xmlns:a16="http://schemas.microsoft.com/office/drawing/2014/main" id="{2C1F8F28-07FD-4980-B1AF-4DDCEE2E2771}"/>
+                <a16:creationId xmlns:a16="http://schemas.microsoft.com/office/drawing/2014/main" id="{08AAFA1D-3B04-4994-9B11-98FA59A12959}"/>
               </a:ext>
             </a:extLst>
           </p:cNvPr>
@@ -33735,7 +33735,7 @@
           <p:cNvPr id="4" name="">
             <a:extLst xmlns:a="http://schemas.openxmlformats.org/drawingml/2006/main">
               <a:ext uri="{FF2B5EF4-FFF2-40B4-BE49-F238E27FC236}">
-                <a16:creationId xmlns:a16="http://schemas.microsoft.com/office/drawing/2014/main" id="{D107FF81-570A-4495-A905-9E1DD246335B}"/>
+                <a16:creationId xmlns:a16="http://schemas.microsoft.com/office/drawing/2014/main" id="{16A98C53-DE11-46A4-945E-C111832BAC59}"/>
               </a:ext>
             </a:extLst>
           </p:cNvPr>
@@ -33787,7 +33787,7 @@
           <p:cNvPr id="5" name="">
             <a:extLst xmlns:a="http://schemas.openxmlformats.org/drawingml/2006/main">
               <a:ext uri="{FF2B5EF4-FFF2-40B4-BE49-F238E27FC236}">
-                <a16:creationId xmlns:a16="http://schemas.microsoft.com/office/drawing/2014/main" id="{472619D0-0447-4856-A0CE-8DAEF1DD5BB9}"/>
+                <a16:creationId xmlns:a16="http://schemas.microsoft.com/office/drawing/2014/main" id="{293D2E57-C147-405E-B81A-90848BD7BB39}"/>
               </a:ext>
             </a:extLst>
           </p:cNvPr>
@@ -33822,7 +33822,7 @@
           <p:nvPr/>
         </p:nvPicPr>
         <p:blipFill>
-          <a:blip xmlns:r="http://schemas.openxmlformats.org/officeDocument/2006/relationships" xmlns:a="http://schemas.openxmlformats.org/drawingml/2006/main" r:embed="R042e59625f4c4c14"/>
+          <a:blip xmlns:r="http://schemas.openxmlformats.org/officeDocument/2006/relationships" xmlns:a="http://schemas.openxmlformats.org/drawingml/2006/main" r:embed="R3d69f3ffe51d4691"/>
           <a:stretch xmlns:a="http://schemas.openxmlformats.org/drawingml/2006/main"/>
         </p:blipFill>
         <p:spPr>
@@ -33840,7 +33840,7 @@
           <p:cNvPr id="7" name="">
             <a:extLst xmlns:a="http://schemas.openxmlformats.org/drawingml/2006/main">
               <a:ext uri="{FF2B5EF4-FFF2-40B4-BE49-F238E27FC236}">
-                <a16:creationId xmlns:a16="http://schemas.microsoft.com/office/drawing/2014/main" id="{7801DC80-47D9-402D-8C49-6BA42BB09BC1}"/>
+                <a16:creationId xmlns:a16="http://schemas.microsoft.com/office/drawing/2014/main" id="{EEE5A45B-E17E-4D2A-B543-3678A70C6583}"/>
               </a:ext>
             </a:extLst>
           </p:cNvPr>
@@ -33892,7 +33892,7 @@
           <p:cNvPr id="8" name="">
             <a:extLst xmlns:a="http://schemas.openxmlformats.org/drawingml/2006/main">
               <a:ext uri="{FF2B5EF4-FFF2-40B4-BE49-F238E27FC236}">
-                <a16:creationId xmlns:a16="http://schemas.microsoft.com/office/drawing/2014/main" id="{B42EDF5D-0CAC-40C7-B29B-0F64A5A9A132}"/>
+                <a16:creationId xmlns:a16="http://schemas.microsoft.com/office/drawing/2014/main" id="{E9551A6B-58F0-41C7-93D0-5C9D29D64DB4}"/>
               </a:ext>
             </a:extLst>
           </p:cNvPr>
@@ -33944,7 +33944,7 @@
           <p:cNvPr id="9" name="">
             <a:extLst xmlns:a="http://schemas.openxmlformats.org/drawingml/2006/main">
               <a:ext uri="{FF2B5EF4-FFF2-40B4-BE49-F238E27FC236}">
-                <a16:creationId xmlns:a16="http://schemas.microsoft.com/office/drawing/2014/main" id="{5E8C7E2F-035A-4624-ABE3-EF0C90588ACF}"/>
+                <a16:creationId xmlns:a16="http://schemas.microsoft.com/office/drawing/2014/main" id="{8BDF2B89-6142-4D73-9FC2-B024DC02CE41}"/>
               </a:ext>
             </a:extLst>
           </p:cNvPr>
@@ -33996,7 +33996,7 @@
           <p:cNvPr id="10" name="">
             <a:extLst xmlns:a="http://schemas.openxmlformats.org/drawingml/2006/main">
               <a:ext uri="{FF2B5EF4-FFF2-40B4-BE49-F238E27FC236}">
-                <a16:creationId xmlns:a16="http://schemas.microsoft.com/office/drawing/2014/main" id="{16FC5FF3-4618-4BB0-8FAC-C0D10CF2804D}"/>
+                <a16:creationId xmlns:a16="http://schemas.microsoft.com/office/drawing/2014/main" id="{FC8D6B67-329F-4C23-8ABA-0D8189B5A8D0}"/>
               </a:ext>
             </a:extLst>
           </p:cNvPr>
@@ -34048,7 +34048,7 @@
           <p:cNvPr id="11" name="">
             <a:extLst xmlns:a="http://schemas.openxmlformats.org/drawingml/2006/main">
               <a:ext uri="{FF2B5EF4-FFF2-40B4-BE49-F238E27FC236}">
-                <a16:creationId xmlns:a16="http://schemas.microsoft.com/office/drawing/2014/main" id="{3B845F8C-F6BE-4058-AF3E-B228F6E520E8}"/>
+                <a16:creationId xmlns:a16="http://schemas.microsoft.com/office/drawing/2014/main" id="{EA41876F-3E9D-4B12-BECE-073555B5143F}"/>
               </a:ext>
             </a:extLst>
           </p:cNvPr>
@@ -34095,10 +34095,10 @@
           <p:nvPr/>
         </p:nvPicPr>
         <p:blipFill>
-          <a:blip xmlns:r="http://schemas.openxmlformats.org/officeDocument/2006/relationships" xmlns:a="http://schemas.openxmlformats.org/drawingml/2006/main" r:embed="R73e8f931bbb549c3">
+          <a:blip xmlns:r="http://schemas.openxmlformats.org/officeDocument/2006/relationships" xmlns:a="http://schemas.openxmlformats.org/drawingml/2006/main" r:embed="R2fb0550d9ff44aca">
             <a:extLst>
               <a:ext uri="{96DAC541-7B7A-43D3-8B79-37D633B846F1}">
-                <asvg:svgBlip xmlns:asvg="http://schemas.microsoft.com/office/drawing/2016/SVG/main" r:embed="Rd51a1001772549af"/>
+                <asvg:svgBlip xmlns:asvg="http://schemas.microsoft.com/office/drawing/2016/SVG/main" r:embed="R1b6ec2f00f824dd3"/>
               </a:ext>
             </a:extLst>
           </a:blip>
@@ -34119,7 +34119,7 @@
           <p:cNvPr id="13" name="">
             <a:extLst xmlns:a="http://schemas.openxmlformats.org/drawingml/2006/main">
               <a:ext uri="{FF2B5EF4-FFF2-40B4-BE49-F238E27FC236}">
-                <a16:creationId xmlns:a16="http://schemas.microsoft.com/office/drawing/2014/main" id="{ADBD4F02-8441-4CEA-8F77-56B67845EBC7}"/>
+                <a16:creationId xmlns:a16="http://schemas.microsoft.com/office/drawing/2014/main" id="{6F1D94CC-4BAC-4632-ADE6-7E7F8DF55267}"/>
               </a:ext>
             </a:extLst>
           </p:cNvPr>
@@ -34152,7 +34152,7 @@
           <p:cNvPr id="14" name="">
             <a:extLst xmlns:a="http://schemas.openxmlformats.org/drawingml/2006/main">
               <a:ext uri="{FF2B5EF4-FFF2-40B4-BE49-F238E27FC236}">
-                <a16:creationId xmlns:a16="http://schemas.microsoft.com/office/drawing/2014/main" id="{27D1D16A-AE57-48E7-B39D-5EEA8BD33F03}"/>
+                <a16:creationId xmlns:a16="http://schemas.microsoft.com/office/drawing/2014/main" id="{134E4FB2-33CF-44D2-A8D6-DDBB75239DCF}"/>
               </a:ext>
             </a:extLst>
           </p:cNvPr>
@@ -34204,7 +34204,7 @@
           <p:cNvPr id="15" name="">
             <a:extLst xmlns:a="http://schemas.openxmlformats.org/drawingml/2006/main">
               <a:ext uri="{FF2B5EF4-FFF2-40B4-BE49-F238E27FC236}">
-                <a16:creationId xmlns:a16="http://schemas.microsoft.com/office/drawing/2014/main" id="{76DE1E0D-A639-4910-AC87-67D9998FA371}"/>
+                <a16:creationId xmlns:a16="http://schemas.microsoft.com/office/drawing/2014/main" id="{D3E3DA38-23AE-47D7-89F3-F63B8E414ED2}"/>
               </a:ext>
             </a:extLst>
           </p:cNvPr>
@@ -34237,7 +34237,7 @@
           <p:cNvPr id="16" name="">
             <a:extLst xmlns:a="http://schemas.openxmlformats.org/drawingml/2006/main">
               <a:ext uri="{FF2B5EF4-FFF2-40B4-BE49-F238E27FC236}">
-                <a16:creationId xmlns:a16="http://schemas.microsoft.com/office/drawing/2014/main" id="{C4890656-98EE-4A21-8F33-0E616FF73409}"/>
+                <a16:creationId xmlns:a16="http://schemas.microsoft.com/office/drawing/2014/main" id="{83F5FDA8-3D6C-431D-9DD9-1BDB0C791917}"/>
               </a:ext>
             </a:extLst>
           </p:cNvPr>
@@ -34289,7 +34289,7 @@
           <p:cNvPr id="17" name="">
             <a:extLst xmlns:a="http://schemas.openxmlformats.org/drawingml/2006/main">
               <a:ext uri="{FF2B5EF4-FFF2-40B4-BE49-F238E27FC236}">
-                <a16:creationId xmlns:a16="http://schemas.microsoft.com/office/drawing/2014/main" id="{BFACE856-AB1D-4447-BA7A-5944BC9EAC20}"/>
+                <a16:creationId xmlns:a16="http://schemas.microsoft.com/office/drawing/2014/main" id="{5118CFD9-B84E-428B-AE8F-4316572DA2B7}"/>
               </a:ext>
             </a:extLst>
           </p:cNvPr>
@@ -34322,7 +34322,7 @@
           <p:cNvPr id="18" name="">
             <a:extLst xmlns:a="http://schemas.openxmlformats.org/drawingml/2006/main">
               <a:ext uri="{FF2B5EF4-FFF2-40B4-BE49-F238E27FC236}">
-                <a16:creationId xmlns:a16="http://schemas.microsoft.com/office/drawing/2014/main" id="{CD35A2C7-BBF3-4BB8-9549-0C6930F198FF}"/>
+                <a16:creationId xmlns:a16="http://schemas.microsoft.com/office/drawing/2014/main" id="{BE1A97E5-73BB-4936-8025-F6BE789DE693}"/>
               </a:ext>
             </a:extLst>
           </p:cNvPr>
@@ -34374,7 +34374,7 @@
           <p:cNvPr id="19" name="">
             <a:extLst xmlns:a="http://schemas.openxmlformats.org/drawingml/2006/main">
               <a:ext uri="{FF2B5EF4-FFF2-40B4-BE49-F238E27FC236}">
-                <a16:creationId xmlns:a16="http://schemas.microsoft.com/office/drawing/2014/main" id="{67071D43-0614-49A6-966B-58E7EF6EF650}"/>
+                <a16:creationId xmlns:a16="http://schemas.microsoft.com/office/drawing/2014/main" id="{3A92C16D-6E2A-48C8-88F2-39B76F28A7D1}"/>
               </a:ext>
             </a:extLst>
           </p:cNvPr>
@@ -34407,7 +34407,7 @@
           <p:cNvPr id="20" name="">
             <a:extLst xmlns:a="http://schemas.openxmlformats.org/drawingml/2006/main">
               <a:ext uri="{FF2B5EF4-FFF2-40B4-BE49-F238E27FC236}">
-                <a16:creationId xmlns:a16="http://schemas.microsoft.com/office/drawing/2014/main" id="{AC0BA6BB-8753-45C4-938C-92A4A863EBA3}"/>
+                <a16:creationId xmlns:a16="http://schemas.microsoft.com/office/drawing/2014/main" id="{0433444F-2302-41EA-ACBA-621B166E3B5C}"/>
               </a:ext>
             </a:extLst>
           </p:cNvPr>
@@ -34459,7 +34459,7 @@
           <p:cNvPr id="21" name="">
             <a:extLst xmlns:a="http://schemas.openxmlformats.org/drawingml/2006/main">
               <a:ext uri="{FF2B5EF4-FFF2-40B4-BE49-F238E27FC236}">
-                <a16:creationId xmlns:a16="http://schemas.microsoft.com/office/drawing/2014/main" id="{8EF2DB51-2895-4E19-A80C-748DAFBF57D0}"/>
+                <a16:creationId xmlns:a16="http://schemas.microsoft.com/office/drawing/2014/main" id="{E447C2DF-15F5-4A0A-B741-CD864D054B81}"/>
               </a:ext>
             </a:extLst>
           </p:cNvPr>
@@ -34490,7 +34490,7 @@
           <p:cNvPr id="22" name="">
             <a:extLst xmlns:a="http://schemas.openxmlformats.org/drawingml/2006/main">
               <a:ext uri="{FF2B5EF4-FFF2-40B4-BE49-F238E27FC236}">
-                <a16:creationId xmlns:a16="http://schemas.microsoft.com/office/drawing/2014/main" id="{A81E31FD-FA5F-433D-8200-593CF0326330}"/>
+                <a16:creationId xmlns:a16="http://schemas.microsoft.com/office/drawing/2014/main" id="{47CA6AB1-4025-42EE-A293-EA9DFAA445BE}"/>
               </a:ext>
             </a:extLst>
           </p:cNvPr>
@@ -34542,7 +34542,7 @@
           <p:cNvPr id="23" name="">
             <a:extLst xmlns:a="http://schemas.openxmlformats.org/drawingml/2006/main">
               <a:ext uri="{FF2B5EF4-FFF2-40B4-BE49-F238E27FC236}">
-                <a16:creationId xmlns:a16="http://schemas.microsoft.com/office/drawing/2014/main" id="{1837F10C-0B1D-4B32-AC47-D93F71A61636}"/>
+                <a16:creationId xmlns:a16="http://schemas.microsoft.com/office/drawing/2014/main" id="{A923CDCC-6652-4C6D-BD7A-B28E4A6C5D43}"/>
               </a:ext>
             </a:extLst>
           </p:cNvPr>
@@ -34594,7 +34594,7 @@
           <p:cNvPr id="24" name="">
             <a:extLst xmlns:a="http://schemas.openxmlformats.org/drawingml/2006/main">
               <a:ext uri="{FF2B5EF4-FFF2-40B4-BE49-F238E27FC236}">
-                <a16:creationId xmlns:a16="http://schemas.microsoft.com/office/drawing/2014/main" id="{67C9FECC-2AA0-44F0-844D-EF53C627C9BC}"/>
+                <a16:creationId xmlns:a16="http://schemas.microsoft.com/office/drawing/2014/main" id="{475C94E5-48A3-49F4-B21F-0F60664AC53B}"/>
               </a:ext>
             </a:extLst>
           </p:cNvPr>
@@ -34646,7 +34646,7 @@
           <p:cNvPr id="25" name="">
             <a:extLst xmlns:a="http://schemas.openxmlformats.org/drawingml/2006/main">
               <a:ext uri="{FF2B5EF4-FFF2-40B4-BE49-F238E27FC236}">
-                <a16:creationId xmlns:a16="http://schemas.microsoft.com/office/drawing/2014/main" id="{9D4A2F02-31FA-416F-B70D-E8C48F037D4C}"/>
+                <a16:creationId xmlns:a16="http://schemas.microsoft.com/office/drawing/2014/main" id="{4AB384C9-39D0-4749-911B-EFAE1B9719C3}"/>
               </a:ext>
             </a:extLst>
           </p:cNvPr>
@@ -34698,7 +34698,7 @@
           <p:cNvPr id="26" name="">
             <a:extLst xmlns:a="http://schemas.openxmlformats.org/drawingml/2006/main">
               <a:ext uri="{FF2B5EF4-FFF2-40B4-BE49-F238E27FC236}">
-                <a16:creationId xmlns:a16="http://schemas.microsoft.com/office/drawing/2014/main" id="{8B28CDA4-3473-415A-B8C9-0ED50D75D5ED}"/>
+                <a16:creationId xmlns:a16="http://schemas.microsoft.com/office/drawing/2014/main" id="{943EC16D-CD6A-45E8-8681-5CCAE542DA89}"/>
               </a:ext>
             </a:extLst>
           </p:cNvPr>
@@ -34750,7 +34750,7 @@
           <p:cNvPr id="27" name="">
             <a:extLst xmlns:a="http://schemas.openxmlformats.org/drawingml/2006/main">
               <a:ext uri="{FF2B5EF4-FFF2-40B4-BE49-F238E27FC236}">
-                <a16:creationId xmlns:a16="http://schemas.microsoft.com/office/drawing/2014/main" id="{3AC88F1C-E66C-4A02-9581-471F75D7B729}"/>
+                <a16:creationId xmlns:a16="http://schemas.microsoft.com/office/drawing/2014/main" id="{FDF7F5DC-5902-4FFD-88D2-0C68A3D31208}"/>
               </a:ext>
             </a:extLst>
           </p:cNvPr>
@@ -34802,7 +34802,7 @@
           <p:cNvPr id="28" name="">
             <a:extLst xmlns:a="http://schemas.openxmlformats.org/drawingml/2006/main">
               <a:ext uri="{FF2B5EF4-FFF2-40B4-BE49-F238E27FC236}">
-                <a16:creationId xmlns:a16="http://schemas.microsoft.com/office/drawing/2014/main" id="{F0001AE0-763A-4A23-99A4-9722CF4C658C}"/>
+                <a16:creationId xmlns:a16="http://schemas.microsoft.com/office/drawing/2014/main" id="{E7DCE85E-4DE7-45CD-9DD9-A907E16AD45F}"/>
               </a:ext>
             </a:extLst>
           </p:cNvPr>
@@ -34854,7 +34854,7 @@
           <p:cNvPr id="29" name="">
             <a:extLst xmlns:a="http://schemas.openxmlformats.org/drawingml/2006/main">
               <a:ext uri="{FF2B5EF4-FFF2-40B4-BE49-F238E27FC236}">
-                <a16:creationId xmlns:a16="http://schemas.microsoft.com/office/drawing/2014/main" id="{3C4A5978-AADC-4784-874F-35B42D1A0591}"/>
+                <a16:creationId xmlns:a16="http://schemas.microsoft.com/office/drawing/2014/main" id="{D990685B-6726-453C-8228-A4CC22BB13D4}"/>
               </a:ext>
             </a:extLst>
           </p:cNvPr>
@@ -34904,7 +34904,7 @@
     </p:spTree>
     <p:extLst>
       <p:ext uri="{BB962C8B-B14F-4D97-AF65-F5344CB8AC3E}">
-        <p14:creationId xmlns:p14="http://schemas.microsoft.com/office/powerpoint/2010/main" val="638017602"/>
+        <p14:creationId xmlns:p14="http://schemas.microsoft.com/office/powerpoint/2010/main" val="1769717078"/>
       </p:ext>
     </p:extLst>
   </p:cSld>
@@ -34935,7 +34935,7 @@
           <p:cNvPr id="33" name="">
             <a:extLst xmlns:a="http://schemas.openxmlformats.org/drawingml/2006/main">
               <a:ext uri="{FF2B5EF4-FFF2-40B4-BE49-F238E27FC236}">
-                <a16:creationId xmlns:a16="http://schemas.microsoft.com/office/drawing/2014/main" id="{318F089D-BDE5-492B-A9B4-AFB0C5F10634}"/>
+                <a16:creationId xmlns:a16="http://schemas.microsoft.com/office/drawing/2014/main" id="{DFB90EB0-D6B9-41B2-AA1A-DFAD9C1C6F27}"/>
               </a:ext>
             </a:extLst>
           </p:cNvPr>
@@ -34968,7 +34968,7 @@
           <p:cNvPr id="2" name="">
             <a:extLst xmlns:a="http://schemas.openxmlformats.org/drawingml/2006/main">
               <a:ext uri="{FF2B5EF4-FFF2-40B4-BE49-F238E27FC236}">
-                <a16:creationId xmlns:a16="http://schemas.microsoft.com/office/drawing/2014/main" id="{8FCA5C48-9B48-4591-ADC6-B625CF07A184}"/>
+                <a16:creationId xmlns:a16="http://schemas.microsoft.com/office/drawing/2014/main" id="{C9E3DC04-AAE8-48F2-B5C4-25B027DDA663}"/>
               </a:ext>
             </a:extLst>
           </p:cNvPr>
@@ -34999,7 +34999,7 @@
           <p:cNvPr id="3" name="">
             <a:extLst xmlns:a="http://schemas.openxmlformats.org/drawingml/2006/main">
               <a:ext uri="{FF2B5EF4-FFF2-40B4-BE49-F238E27FC236}">
-                <a16:creationId xmlns:a16="http://schemas.microsoft.com/office/drawing/2014/main" id="{511FE8FD-5C11-4F5E-A1DE-BEBA1F0DA46D}"/>
+                <a16:creationId xmlns:a16="http://schemas.microsoft.com/office/drawing/2014/main" id="{ADCC62E3-55E9-4C1A-B5A0-7E80F7607F03}"/>
               </a:ext>
             </a:extLst>
           </p:cNvPr>
@@ -35051,7 +35051,7 @@
           <p:cNvPr id="4" name="">
             <a:extLst xmlns:a="http://schemas.openxmlformats.org/drawingml/2006/main">
               <a:ext uri="{FF2B5EF4-FFF2-40B4-BE49-F238E27FC236}">
-                <a16:creationId xmlns:a16="http://schemas.microsoft.com/office/drawing/2014/main" id="{E9348787-40F0-489F-9196-B1C306A47299}"/>
+                <a16:creationId xmlns:a16="http://schemas.microsoft.com/office/drawing/2014/main" id="{5827D466-F4A8-4066-B436-1E65500737DE}"/>
               </a:ext>
             </a:extLst>
           </p:cNvPr>
@@ -35103,7 +35103,7 @@
           <p:cNvPr id="5" name="">
             <a:extLst xmlns:a="http://schemas.openxmlformats.org/drawingml/2006/main">
               <a:ext uri="{FF2B5EF4-FFF2-40B4-BE49-F238E27FC236}">
-                <a16:creationId xmlns:a16="http://schemas.microsoft.com/office/drawing/2014/main" id="{79037AA4-1E52-4E15-ABCA-C7EF068D0B96}"/>
+                <a16:creationId xmlns:a16="http://schemas.microsoft.com/office/drawing/2014/main" id="{D1076466-1A7C-467C-986D-9B243E1FB101}"/>
               </a:ext>
             </a:extLst>
           </p:cNvPr>
@@ -35138,7 +35138,7 @@
           <p:nvPr/>
         </p:nvPicPr>
         <p:blipFill>
-          <a:blip xmlns:r="http://schemas.openxmlformats.org/officeDocument/2006/relationships" xmlns:a="http://schemas.openxmlformats.org/drawingml/2006/main" r:embed="R5908e7b81cd34eb6"/>
+          <a:blip xmlns:r="http://schemas.openxmlformats.org/officeDocument/2006/relationships" xmlns:a="http://schemas.openxmlformats.org/drawingml/2006/main" r:embed="R8def504c446f4f83"/>
           <a:stretch xmlns:a="http://schemas.openxmlformats.org/drawingml/2006/main"/>
         </p:blipFill>
         <p:spPr>
@@ -35156,7 +35156,7 @@
           <p:cNvPr id="7" name="">
             <a:extLst xmlns:a="http://schemas.openxmlformats.org/drawingml/2006/main">
               <a:ext uri="{FF2B5EF4-FFF2-40B4-BE49-F238E27FC236}">
-                <a16:creationId xmlns:a16="http://schemas.microsoft.com/office/drawing/2014/main" id="{76B561A4-3A34-4C54-A086-C6F0E18B2999}"/>
+                <a16:creationId xmlns:a16="http://schemas.microsoft.com/office/drawing/2014/main" id="{E30F078E-3B17-497C-87B2-8534EEA6E1BE}"/>
               </a:ext>
             </a:extLst>
           </p:cNvPr>
@@ -35208,7 +35208,7 @@
           <p:cNvPr id="8" name="">
             <a:extLst xmlns:a="http://schemas.openxmlformats.org/drawingml/2006/main">
               <a:ext uri="{FF2B5EF4-FFF2-40B4-BE49-F238E27FC236}">
-                <a16:creationId xmlns:a16="http://schemas.microsoft.com/office/drawing/2014/main" id="{ACD35224-2335-4554-8489-146656C49CDA}"/>
+                <a16:creationId xmlns:a16="http://schemas.microsoft.com/office/drawing/2014/main" id="{6389793A-33E2-46AF-8B6A-D012A290A36C}"/>
               </a:ext>
             </a:extLst>
           </p:cNvPr>
@@ -35260,7 +35260,7 @@
           <p:cNvPr id="9" name="">
             <a:extLst xmlns:a="http://schemas.openxmlformats.org/drawingml/2006/main">
               <a:ext uri="{FF2B5EF4-FFF2-40B4-BE49-F238E27FC236}">
-                <a16:creationId xmlns:a16="http://schemas.microsoft.com/office/drawing/2014/main" id="{259703BE-9AA4-4FCA-AC13-1D16288B9EA5}"/>
+                <a16:creationId xmlns:a16="http://schemas.microsoft.com/office/drawing/2014/main" id="{D41FE35A-4D0F-4F26-902C-DAD21BC8F092}"/>
               </a:ext>
             </a:extLst>
           </p:cNvPr>
@@ -35312,7 +35312,7 @@
           <p:cNvPr id="10" name="">
             <a:extLst xmlns:a="http://schemas.openxmlformats.org/drawingml/2006/main">
               <a:ext uri="{FF2B5EF4-FFF2-40B4-BE49-F238E27FC236}">
-                <a16:creationId xmlns:a16="http://schemas.microsoft.com/office/drawing/2014/main" id="{F6964915-C2EC-446A-8FC9-2897F0BCABF5}"/>
+                <a16:creationId xmlns:a16="http://schemas.microsoft.com/office/drawing/2014/main" id="{94B0AC94-0A38-4652-AC3B-A408E60B1528}"/>
               </a:ext>
             </a:extLst>
           </p:cNvPr>
@@ -35364,7 +35364,7 @@
           <p:cNvPr id="11" name="">
             <a:extLst xmlns:a="http://schemas.openxmlformats.org/drawingml/2006/main">
               <a:ext uri="{FF2B5EF4-FFF2-40B4-BE49-F238E27FC236}">
-                <a16:creationId xmlns:a16="http://schemas.microsoft.com/office/drawing/2014/main" id="{D60DDA2F-636C-45A8-82B8-F6B0EB5D08E0}"/>
+                <a16:creationId xmlns:a16="http://schemas.microsoft.com/office/drawing/2014/main" id="{D7858381-6BC1-40BF-A257-40EE2904ECA0}"/>
               </a:ext>
             </a:extLst>
           </p:cNvPr>
@@ -35411,10 +35411,10 @@
           <p:nvPr/>
         </p:nvPicPr>
         <p:blipFill>
-          <a:blip xmlns:r="http://schemas.openxmlformats.org/officeDocument/2006/relationships" xmlns:a="http://schemas.openxmlformats.org/drawingml/2006/main" r:embed="R0011026fe2134a40">
+          <a:blip xmlns:r="http://schemas.openxmlformats.org/officeDocument/2006/relationships" xmlns:a="http://schemas.openxmlformats.org/drawingml/2006/main" r:embed="Rf4d63d56644a4fad">
             <a:extLst>
               <a:ext uri="{96DAC541-7B7A-43D3-8B79-37D633B846F1}">
-                <asvg:svgBlip xmlns:asvg="http://schemas.microsoft.com/office/drawing/2016/SVG/main" r:embed="Rce680ec2a1bd490b"/>
+                <asvg:svgBlip xmlns:asvg="http://schemas.microsoft.com/office/drawing/2016/SVG/main" r:embed="Rbf8a3c0de911418b"/>
               </a:ext>
             </a:extLst>
           </a:blip>
@@ -35435,7 +35435,7 @@
           <p:cNvPr id="13" name="">
             <a:extLst xmlns:a="http://schemas.openxmlformats.org/drawingml/2006/main">
               <a:ext uri="{FF2B5EF4-FFF2-40B4-BE49-F238E27FC236}">
-                <a16:creationId xmlns:a16="http://schemas.microsoft.com/office/drawing/2014/main" id="{723B8A81-DA8C-4CBE-A43F-87B382364BE5}"/>
+                <a16:creationId xmlns:a16="http://schemas.microsoft.com/office/drawing/2014/main" id="{99955EDF-1891-4C44-A828-0EFD7D63DBB1}"/>
               </a:ext>
             </a:extLst>
           </p:cNvPr>
@@ -35468,7 +35468,7 @@
           <p:cNvPr id="14" name="">
             <a:extLst xmlns:a="http://schemas.openxmlformats.org/drawingml/2006/main">
               <a:ext uri="{FF2B5EF4-FFF2-40B4-BE49-F238E27FC236}">
-                <a16:creationId xmlns:a16="http://schemas.microsoft.com/office/drawing/2014/main" id="{E7F0AD4F-26BD-4B83-B750-B47C88AA9489}"/>
+                <a16:creationId xmlns:a16="http://schemas.microsoft.com/office/drawing/2014/main" id="{E0167B74-36CD-44D0-8741-1B5CE8C55227}"/>
               </a:ext>
             </a:extLst>
           </p:cNvPr>
@@ -35520,7 +35520,7 @@
           <p:cNvPr id="15" name="">
             <a:extLst xmlns:a="http://schemas.openxmlformats.org/drawingml/2006/main">
               <a:ext uri="{FF2B5EF4-FFF2-40B4-BE49-F238E27FC236}">
-                <a16:creationId xmlns:a16="http://schemas.microsoft.com/office/drawing/2014/main" id="{71A7E90F-91A3-4036-BA39-0C68B73ED4D0}"/>
+                <a16:creationId xmlns:a16="http://schemas.microsoft.com/office/drawing/2014/main" id="{E10FBD76-8A6B-4D0D-B7E8-1007C5BF3EF6}"/>
               </a:ext>
             </a:extLst>
           </p:cNvPr>
@@ -35551,7 +35551,7 @@
           <p:cNvPr id="16" name="">
             <a:extLst xmlns:a="http://schemas.openxmlformats.org/drawingml/2006/main">
               <a:ext uri="{FF2B5EF4-FFF2-40B4-BE49-F238E27FC236}">
-                <a16:creationId xmlns:a16="http://schemas.microsoft.com/office/drawing/2014/main" id="{644C429E-6B37-4F06-A7B4-D0CF864A94E3}"/>
+                <a16:creationId xmlns:a16="http://schemas.microsoft.com/office/drawing/2014/main" id="{B11B7F2A-C8A1-4F7D-A4BE-D7477D135094}"/>
               </a:ext>
             </a:extLst>
           </p:cNvPr>
@@ -35582,7 +35582,7 @@
           <p:cNvPr id="17" name="">
             <a:extLst xmlns:a="http://schemas.openxmlformats.org/drawingml/2006/main">
               <a:ext uri="{FF2B5EF4-FFF2-40B4-BE49-F238E27FC236}">
-                <a16:creationId xmlns:a16="http://schemas.microsoft.com/office/drawing/2014/main" id="{BB0ECA2E-C4EE-4453-912C-5CF41045581C}"/>
+                <a16:creationId xmlns:a16="http://schemas.microsoft.com/office/drawing/2014/main" id="{715D1B9C-AE11-4631-933E-0555B5F40DFD}"/>
               </a:ext>
             </a:extLst>
           </p:cNvPr>
@@ -35634,7 +35634,7 @@
           <p:cNvPr id="18" name="">
             <a:extLst xmlns:a="http://schemas.openxmlformats.org/drawingml/2006/main">
               <a:ext uri="{FF2B5EF4-FFF2-40B4-BE49-F238E27FC236}">
-                <a16:creationId xmlns:a16="http://schemas.microsoft.com/office/drawing/2014/main" id="{42C03F66-5AB3-4C3D-B85E-2F9ED041DB8A}"/>
+                <a16:creationId xmlns:a16="http://schemas.microsoft.com/office/drawing/2014/main" id="{83C70238-2160-4AFC-B6AD-839273669E2F}"/>
               </a:ext>
             </a:extLst>
           </p:cNvPr>
@@ -35667,7 +35667,7 @@
           <p:cNvPr id="19" name="">
             <a:extLst xmlns:a="http://schemas.openxmlformats.org/drawingml/2006/main">
               <a:ext uri="{FF2B5EF4-FFF2-40B4-BE49-F238E27FC236}">
-                <a16:creationId xmlns:a16="http://schemas.microsoft.com/office/drawing/2014/main" id="{B9DF17E2-C705-4A9C-9A10-2492252BB526}"/>
+                <a16:creationId xmlns:a16="http://schemas.microsoft.com/office/drawing/2014/main" id="{257C72C0-B2D2-4EA1-A79F-A740E9493C8E}"/>
               </a:ext>
             </a:extLst>
           </p:cNvPr>
@@ -35719,7 +35719,7 @@
           <p:cNvPr id="20" name="">
             <a:extLst xmlns:a="http://schemas.openxmlformats.org/drawingml/2006/main">
               <a:ext uri="{FF2B5EF4-FFF2-40B4-BE49-F238E27FC236}">
-                <a16:creationId xmlns:a16="http://schemas.microsoft.com/office/drawing/2014/main" id="{0C1913AD-DB92-4038-8C21-14421E739712}"/>
+                <a16:creationId xmlns:a16="http://schemas.microsoft.com/office/drawing/2014/main" id="{DCDEFCA4-D969-46F0-9B8C-76FDC6BDE1F4}"/>
               </a:ext>
             </a:extLst>
           </p:cNvPr>
@@ -35750,7 +35750,7 @@
           <p:cNvPr id="21" name="">
             <a:extLst xmlns:a="http://schemas.openxmlformats.org/drawingml/2006/main">
               <a:ext uri="{FF2B5EF4-FFF2-40B4-BE49-F238E27FC236}">
-                <a16:creationId xmlns:a16="http://schemas.microsoft.com/office/drawing/2014/main" id="{8A0FF3BE-03C8-4351-8474-8C7B60BCD08E}"/>
+                <a16:creationId xmlns:a16="http://schemas.microsoft.com/office/drawing/2014/main" id="{C86C66B9-D98C-41AE-84BC-BE184E96A514}"/>
               </a:ext>
             </a:extLst>
           </p:cNvPr>
@@ -35781,7 +35781,7 @@
           <p:cNvPr id="22" name="">
             <a:extLst xmlns:a="http://schemas.openxmlformats.org/drawingml/2006/main">
               <a:ext uri="{FF2B5EF4-FFF2-40B4-BE49-F238E27FC236}">
-                <a16:creationId xmlns:a16="http://schemas.microsoft.com/office/drawing/2014/main" id="{03C28F41-E875-43B8-ACC8-F0F9F61011FF}"/>
+                <a16:creationId xmlns:a16="http://schemas.microsoft.com/office/drawing/2014/main" id="{B81DA0D3-BADE-4F0E-8D5A-5B3443090EDB}"/>
               </a:ext>
             </a:extLst>
           </p:cNvPr>
@@ -35833,7 +35833,7 @@
           <p:cNvPr id="23" name="">
             <a:extLst xmlns:a="http://schemas.openxmlformats.org/drawingml/2006/main">
               <a:ext uri="{FF2B5EF4-FFF2-40B4-BE49-F238E27FC236}">
-                <a16:creationId xmlns:a16="http://schemas.microsoft.com/office/drawing/2014/main" id="{6736C66A-728E-47EB-AB7D-3B95F1036473}"/>
+                <a16:creationId xmlns:a16="http://schemas.microsoft.com/office/drawing/2014/main" id="{411BC914-51C8-4461-9A92-BEA6FADE5AFB}"/>
               </a:ext>
             </a:extLst>
           </p:cNvPr>
@@ -35885,7 +35885,7 @@
           <p:cNvPr id="24" name="">
             <a:extLst xmlns:a="http://schemas.openxmlformats.org/drawingml/2006/main">
               <a:ext uri="{FF2B5EF4-FFF2-40B4-BE49-F238E27FC236}">
-                <a16:creationId xmlns:a16="http://schemas.microsoft.com/office/drawing/2014/main" id="{4F7A8133-BAFF-4E10-9475-0992BF2FC4E4}"/>
+                <a16:creationId xmlns:a16="http://schemas.microsoft.com/office/drawing/2014/main" id="{F414DAC1-DFA8-480C-B26B-48C67A62C729}"/>
               </a:ext>
             </a:extLst>
           </p:cNvPr>
@@ -35916,7 +35916,7 @@
           <p:cNvPr id="25" name="">
             <a:extLst xmlns:a="http://schemas.openxmlformats.org/drawingml/2006/main">
               <a:ext uri="{FF2B5EF4-FFF2-40B4-BE49-F238E27FC236}">
-                <a16:creationId xmlns:a16="http://schemas.microsoft.com/office/drawing/2014/main" id="{76106083-BB00-4E53-8ECB-03FFB0AB97A5}"/>
+                <a16:creationId xmlns:a16="http://schemas.microsoft.com/office/drawing/2014/main" id="{ACDF5F49-3496-473E-ADE0-A397E5FF00C0}"/>
               </a:ext>
             </a:extLst>
           </p:cNvPr>
@@ -35968,7 +35968,7 @@
           <p:cNvPr id="26" name="">
             <a:extLst xmlns:a="http://schemas.openxmlformats.org/drawingml/2006/main">
               <a:ext uri="{FF2B5EF4-FFF2-40B4-BE49-F238E27FC236}">
-                <a16:creationId xmlns:a16="http://schemas.microsoft.com/office/drawing/2014/main" id="{90BC931A-04BF-4D56-8463-F341E66F1B83}"/>
+                <a16:creationId xmlns:a16="http://schemas.microsoft.com/office/drawing/2014/main" id="{7E33FAAD-7192-40E5-A41F-D5FDBEFC6291}"/>
               </a:ext>
             </a:extLst>
           </p:cNvPr>
@@ -36020,7 +36020,7 @@
           <p:cNvPr id="27" name="">
             <a:extLst xmlns:a="http://schemas.openxmlformats.org/drawingml/2006/main">
               <a:ext uri="{FF2B5EF4-FFF2-40B4-BE49-F238E27FC236}">
-                <a16:creationId xmlns:a16="http://schemas.microsoft.com/office/drawing/2014/main" id="{FDF1CF70-0411-425C-93F1-BDB4A488B4D3}"/>
+                <a16:creationId xmlns:a16="http://schemas.microsoft.com/office/drawing/2014/main" id="{04A456FC-F173-45A8-A677-D5EDAD6000D3}"/>
               </a:ext>
             </a:extLst>
           </p:cNvPr>
@@ -36072,7 +36072,7 @@
           <p:cNvPr id="28" name="">
             <a:extLst xmlns:a="http://schemas.openxmlformats.org/drawingml/2006/main">
               <a:ext uri="{FF2B5EF4-FFF2-40B4-BE49-F238E27FC236}">
-                <a16:creationId xmlns:a16="http://schemas.microsoft.com/office/drawing/2014/main" id="{4C27388D-553F-44E4-A9A1-9D09876A7DA8}"/>
+                <a16:creationId xmlns:a16="http://schemas.microsoft.com/office/drawing/2014/main" id="{ACAF40A6-1084-4E5F-90D9-ECDDA197FD79}"/>
               </a:ext>
             </a:extLst>
           </p:cNvPr>
@@ -36124,7 +36124,7 @@
           <p:cNvPr id="29" name="">
             <a:extLst xmlns:a="http://schemas.openxmlformats.org/drawingml/2006/main">
               <a:ext uri="{FF2B5EF4-FFF2-40B4-BE49-F238E27FC236}">
-                <a16:creationId xmlns:a16="http://schemas.microsoft.com/office/drawing/2014/main" id="{2F955861-AD02-4D8F-8D1B-A8D48627F597}"/>
+                <a16:creationId xmlns:a16="http://schemas.microsoft.com/office/drawing/2014/main" id="{9EC7DAE2-EB64-4DF0-BBA9-AE049908DBC7}"/>
               </a:ext>
             </a:extLst>
           </p:cNvPr>
@@ -36176,7 +36176,7 @@
           <p:cNvPr id="30" name="">
             <a:extLst xmlns:a="http://schemas.openxmlformats.org/drawingml/2006/main">
               <a:ext uri="{FF2B5EF4-FFF2-40B4-BE49-F238E27FC236}">
-                <a16:creationId xmlns:a16="http://schemas.microsoft.com/office/drawing/2014/main" id="{D00A2F25-B650-42D6-88DC-827C01FE17CE}"/>
+                <a16:creationId xmlns:a16="http://schemas.microsoft.com/office/drawing/2014/main" id="{A6E1D802-A600-44CB-B97F-F7965C229DBE}"/>
               </a:ext>
             </a:extLst>
           </p:cNvPr>
@@ -36228,7 +36228,7 @@
           <p:cNvPr id="31" name="">
             <a:extLst xmlns:a="http://schemas.openxmlformats.org/drawingml/2006/main">
               <a:ext uri="{FF2B5EF4-FFF2-40B4-BE49-F238E27FC236}">
-                <a16:creationId xmlns:a16="http://schemas.microsoft.com/office/drawing/2014/main" id="{2D8070D4-E9D3-4D1D-91E6-B4F737295A37}"/>
+                <a16:creationId xmlns:a16="http://schemas.microsoft.com/office/drawing/2014/main" id="{F26C8B12-2253-4375-BDA3-60210306ACE2}"/>
               </a:ext>
             </a:extLst>
           </p:cNvPr>
@@ -36280,7 +36280,7 @@
           <p:cNvPr id="32" name="">
             <a:extLst xmlns:a="http://schemas.openxmlformats.org/drawingml/2006/main">
               <a:ext uri="{FF2B5EF4-FFF2-40B4-BE49-F238E27FC236}">
-                <a16:creationId xmlns:a16="http://schemas.microsoft.com/office/drawing/2014/main" id="{84BE879C-9362-4248-B6E9-F685948312D7}"/>
+                <a16:creationId xmlns:a16="http://schemas.microsoft.com/office/drawing/2014/main" id="{6FE4CFB4-A129-49F1-885B-CEC818C07F9B}"/>
               </a:ext>
             </a:extLst>
           </p:cNvPr>
@@ -36330,7 +36330,7 @@
     </p:spTree>
     <p:extLst>
       <p:ext uri="{BB962C8B-B14F-4D97-AF65-F5344CB8AC3E}">
-        <p14:creationId xmlns:p14="http://schemas.microsoft.com/office/powerpoint/2010/main" val="1442445706"/>
+        <p14:creationId xmlns:p14="http://schemas.microsoft.com/office/powerpoint/2010/main" val="236844965"/>
       </p:ext>
     </p:extLst>
   </p:cSld>
@@ -36361,7 +36361,7 @@
           <p:cNvPr id="27" name="">
             <a:extLst xmlns:a="http://schemas.openxmlformats.org/drawingml/2006/main">
               <a:ext uri="{FF2B5EF4-FFF2-40B4-BE49-F238E27FC236}">
-                <a16:creationId xmlns:a16="http://schemas.microsoft.com/office/drawing/2014/main" id="{1A6F7F86-4F80-4631-A058-A412E64BDE42}"/>
+                <a16:creationId xmlns:a16="http://schemas.microsoft.com/office/drawing/2014/main" id="{26D693AA-8A58-4B1E-9F99-0D59EC3B00A0}"/>
               </a:ext>
             </a:extLst>
           </p:cNvPr>
@@ -36394,7 +36394,7 @@
           <p:cNvPr id="2" name="">
             <a:extLst xmlns:a="http://schemas.openxmlformats.org/drawingml/2006/main">
               <a:ext uri="{FF2B5EF4-FFF2-40B4-BE49-F238E27FC236}">
-                <a16:creationId xmlns:a16="http://schemas.microsoft.com/office/drawing/2014/main" id="{574FD269-3C7B-4B74-AD59-B95DA79A665E}"/>
+                <a16:creationId xmlns:a16="http://schemas.microsoft.com/office/drawing/2014/main" id="{51C4A039-BB7A-4099-9F54-DA35A8720303}"/>
               </a:ext>
             </a:extLst>
           </p:cNvPr>
@@ -36425,7 +36425,7 @@
           <p:cNvPr id="3" name="">
             <a:extLst xmlns:a="http://schemas.openxmlformats.org/drawingml/2006/main">
               <a:ext uri="{FF2B5EF4-FFF2-40B4-BE49-F238E27FC236}">
-                <a16:creationId xmlns:a16="http://schemas.microsoft.com/office/drawing/2014/main" id="{165AB1E8-4C58-4AEE-97F0-2EB4D714AB76}"/>
+                <a16:creationId xmlns:a16="http://schemas.microsoft.com/office/drawing/2014/main" id="{AC84C740-FB87-4BCF-B617-6714B9A1A4DF}"/>
               </a:ext>
             </a:extLst>
           </p:cNvPr>
@@ -36477,7 +36477,7 @@
           <p:cNvPr id="4" name="">
             <a:extLst xmlns:a="http://schemas.openxmlformats.org/drawingml/2006/main">
               <a:ext uri="{FF2B5EF4-FFF2-40B4-BE49-F238E27FC236}">
-                <a16:creationId xmlns:a16="http://schemas.microsoft.com/office/drawing/2014/main" id="{00BCD504-219E-41F8-8D87-C2A2D9D96013}"/>
+                <a16:creationId xmlns:a16="http://schemas.microsoft.com/office/drawing/2014/main" id="{515D56CF-445C-4A8F-A63C-120F6544CA63}"/>
               </a:ext>
             </a:extLst>
           </p:cNvPr>
@@ -36529,7 +36529,7 @@
           <p:cNvPr id="5" name="">
             <a:extLst xmlns:a="http://schemas.openxmlformats.org/drawingml/2006/main">
               <a:ext uri="{FF2B5EF4-FFF2-40B4-BE49-F238E27FC236}">
-                <a16:creationId xmlns:a16="http://schemas.microsoft.com/office/drawing/2014/main" id="{BC752C36-8BFC-435B-B031-8C0646D6EB26}"/>
+                <a16:creationId xmlns:a16="http://schemas.microsoft.com/office/drawing/2014/main" id="{61C1A0A1-83E9-47DF-9E1F-5B89DDDA8719}"/>
               </a:ext>
             </a:extLst>
           </p:cNvPr>
@@ -36564,7 +36564,7 @@
           <p:nvPr/>
         </p:nvPicPr>
         <p:blipFill>
-          <a:blip xmlns:r="http://schemas.openxmlformats.org/officeDocument/2006/relationships" xmlns:a="http://schemas.openxmlformats.org/drawingml/2006/main" r:embed="R1ed67c5c561e474d"/>
+          <a:blip xmlns:r="http://schemas.openxmlformats.org/officeDocument/2006/relationships" xmlns:a="http://schemas.openxmlformats.org/drawingml/2006/main" r:embed="R316bd5506e584ce9"/>
           <a:stretch xmlns:a="http://schemas.openxmlformats.org/drawingml/2006/main"/>
         </p:blipFill>
         <p:spPr>
@@ -36582,7 +36582,7 @@
           <p:cNvPr id="7" name="">
             <a:extLst xmlns:a="http://schemas.openxmlformats.org/drawingml/2006/main">
               <a:ext uri="{FF2B5EF4-FFF2-40B4-BE49-F238E27FC236}">
-                <a16:creationId xmlns:a16="http://schemas.microsoft.com/office/drawing/2014/main" id="{655F2052-FD19-41F0-8BDE-D3E94D899ECD}"/>
+                <a16:creationId xmlns:a16="http://schemas.microsoft.com/office/drawing/2014/main" id="{0456A6CB-3D66-4463-AE31-4DE98CC15D2C}"/>
               </a:ext>
             </a:extLst>
           </p:cNvPr>
@@ -36634,7 +36634,7 @@
           <p:cNvPr id="8" name="">
             <a:extLst xmlns:a="http://schemas.openxmlformats.org/drawingml/2006/main">
               <a:ext uri="{FF2B5EF4-FFF2-40B4-BE49-F238E27FC236}">
-                <a16:creationId xmlns:a16="http://schemas.microsoft.com/office/drawing/2014/main" id="{8D65082D-ACE3-4643-9030-C303CC4D02F2}"/>
+                <a16:creationId xmlns:a16="http://schemas.microsoft.com/office/drawing/2014/main" id="{1144661C-0125-47E1-9501-F40C3B0CB59C}"/>
               </a:ext>
             </a:extLst>
           </p:cNvPr>
@@ -36686,7 +36686,7 @@
           <p:cNvPr id="9" name="">
             <a:extLst xmlns:a="http://schemas.openxmlformats.org/drawingml/2006/main">
               <a:ext uri="{FF2B5EF4-FFF2-40B4-BE49-F238E27FC236}">
-                <a16:creationId xmlns:a16="http://schemas.microsoft.com/office/drawing/2014/main" id="{27CAA790-4363-40CD-8779-DFD27585AB21}"/>
+                <a16:creationId xmlns:a16="http://schemas.microsoft.com/office/drawing/2014/main" id="{45BFBCB8-1A36-476F-B240-88EB80205BAF}"/>
               </a:ext>
             </a:extLst>
           </p:cNvPr>
@@ -36738,7 +36738,7 @@
           <p:cNvPr id="10" name="">
             <a:extLst xmlns:a="http://schemas.openxmlformats.org/drawingml/2006/main">
               <a:ext uri="{FF2B5EF4-FFF2-40B4-BE49-F238E27FC236}">
-                <a16:creationId xmlns:a16="http://schemas.microsoft.com/office/drawing/2014/main" id="{BEFF4594-A7FC-4864-A905-73DE49CDCA29}"/>
+                <a16:creationId xmlns:a16="http://schemas.microsoft.com/office/drawing/2014/main" id="{7184F5EA-195E-4D7F-9A79-30A448401906}"/>
               </a:ext>
             </a:extLst>
           </p:cNvPr>
@@ -36790,7 +36790,7 @@
           <p:cNvPr id="11" name="">
             <a:extLst xmlns:a="http://schemas.openxmlformats.org/drawingml/2006/main">
               <a:ext uri="{FF2B5EF4-FFF2-40B4-BE49-F238E27FC236}">
-                <a16:creationId xmlns:a16="http://schemas.microsoft.com/office/drawing/2014/main" id="{455EFFFF-EFE9-40F2-837B-560EE5870D70}"/>
+                <a16:creationId xmlns:a16="http://schemas.microsoft.com/office/drawing/2014/main" id="{EABBF753-1F97-4849-9215-9C35CE14191B}"/>
               </a:ext>
             </a:extLst>
           </p:cNvPr>
@@ -36837,10 +36837,10 @@
           <p:nvPr/>
         </p:nvPicPr>
         <p:blipFill>
-          <a:blip xmlns:r="http://schemas.openxmlformats.org/officeDocument/2006/relationships" xmlns:a="http://schemas.openxmlformats.org/drawingml/2006/main" r:embed="R623e0085bda84ee1">
+          <a:blip xmlns:r="http://schemas.openxmlformats.org/officeDocument/2006/relationships" xmlns:a="http://schemas.openxmlformats.org/drawingml/2006/main" r:embed="Rdf0d331474654295">
             <a:extLst>
               <a:ext uri="{96DAC541-7B7A-43D3-8B79-37D633B846F1}">
-                <asvg:svgBlip xmlns:asvg="http://schemas.microsoft.com/office/drawing/2016/SVG/main" r:embed="R678b6cfc785d4081"/>
+                <asvg:svgBlip xmlns:asvg="http://schemas.microsoft.com/office/drawing/2016/SVG/main" r:embed="Rf9dd5219e7104665"/>
               </a:ext>
             </a:extLst>
           </a:blip>
@@ -36861,7 +36861,7 @@
           <p:cNvPr id="13" name="">
             <a:extLst xmlns:a="http://schemas.openxmlformats.org/drawingml/2006/main">
               <a:ext uri="{FF2B5EF4-FFF2-40B4-BE49-F238E27FC236}">
-                <a16:creationId xmlns:a16="http://schemas.microsoft.com/office/drawing/2014/main" id="{66EB9077-5337-46B6-A79A-BBC7FE30A0C7}"/>
+                <a16:creationId xmlns:a16="http://schemas.microsoft.com/office/drawing/2014/main" id="{2690433E-A295-4ADF-A62B-247EE1644D33}"/>
               </a:ext>
             </a:extLst>
           </p:cNvPr>
@@ -36894,7 +36894,7 @@
           <p:cNvPr id="14" name="">
             <a:extLst xmlns:a="http://schemas.openxmlformats.org/drawingml/2006/main">
               <a:ext uri="{FF2B5EF4-FFF2-40B4-BE49-F238E27FC236}">
-                <a16:creationId xmlns:a16="http://schemas.microsoft.com/office/drawing/2014/main" id="{301F3F92-84A9-4C64-A3D5-C5CF7DD80DCF}"/>
+                <a16:creationId xmlns:a16="http://schemas.microsoft.com/office/drawing/2014/main" id="{720822DA-7C91-47D3-B535-6294079C81AC}"/>
               </a:ext>
             </a:extLst>
           </p:cNvPr>
@@ -36946,7 +36946,7 @@
           <p:cNvPr id="15" name="">
             <a:extLst xmlns:a="http://schemas.openxmlformats.org/drawingml/2006/main">
               <a:ext uri="{FF2B5EF4-FFF2-40B4-BE49-F238E27FC236}">
-                <a16:creationId xmlns:a16="http://schemas.microsoft.com/office/drawing/2014/main" id="{B3917435-F32F-4155-B1DE-9CA41AFEF001}"/>
+                <a16:creationId xmlns:a16="http://schemas.microsoft.com/office/drawing/2014/main" id="{26E17263-3969-499A-8D3D-C886192B2A8B}"/>
               </a:ext>
             </a:extLst>
           </p:cNvPr>
@@ -36979,7 +36979,7 @@
           <p:cNvPr id="16" name="">
             <a:extLst xmlns:a="http://schemas.openxmlformats.org/drawingml/2006/main">
               <a:ext uri="{FF2B5EF4-FFF2-40B4-BE49-F238E27FC236}">
-                <a16:creationId xmlns:a16="http://schemas.microsoft.com/office/drawing/2014/main" id="{4586FF89-F5B4-4B36-8BD5-CBB598CDDACB}"/>
+                <a16:creationId xmlns:a16="http://schemas.microsoft.com/office/drawing/2014/main" id="{988333DB-A702-4515-8578-569A94486DD9}"/>
               </a:ext>
             </a:extLst>
           </p:cNvPr>
@@ -37031,7 +37031,7 @@
           <p:cNvPr id="17" name="">
             <a:extLst xmlns:a="http://schemas.openxmlformats.org/drawingml/2006/main">
               <a:ext uri="{FF2B5EF4-FFF2-40B4-BE49-F238E27FC236}">
-                <a16:creationId xmlns:a16="http://schemas.microsoft.com/office/drawing/2014/main" id="{D4439367-63AC-4ABB-B2FA-5D81D990F1FC}"/>
+                <a16:creationId xmlns:a16="http://schemas.microsoft.com/office/drawing/2014/main" id="{7DD6FD89-7DF7-453B-ADA7-C76588A61D6C}"/>
               </a:ext>
             </a:extLst>
           </p:cNvPr>
@@ -37062,7 +37062,7 @@
           <p:cNvPr id="18" name="">
             <a:extLst xmlns:a="http://schemas.openxmlformats.org/drawingml/2006/main">
               <a:ext uri="{FF2B5EF4-FFF2-40B4-BE49-F238E27FC236}">
-                <a16:creationId xmlns:a16="http://schemas.microsoft.com/office/drawing/2014/main" id="{4D253E00-4D1E-46A7-B294-B35878BD9D0C}"/>
+                <a16:creationId xmlns:a16="http://schemas.microsoft.com/office/drawing/2014/main" id="{58368341-7F8D-420A-B258-C7BAE4068046}"/>
               </a:ext>
             </a:extLst>
           </p:cNvPr>
@@ -37093,7 +37093,7 @@
           <p:cNvPr id="19" name="">
             <a:extLst xmlns:a="http://schemas.openxmlformats.org/drawingml/2006/main">
               <a:ext uri="{FF2B5EF4-FFF2-40B4-BE49-F238E27FC236}">
-                <a16:creationId xmlns:a16="http://schemas.microsoft.com/office/drawing/2014/main" id="{B7F4114B-9599-4BB4-AD22-D979472890E2}"/>
+                <a16:creationId xmlns:a16="http://schemas.microsoft.com/office/drawing/2014/main" id="{DF1C31F0-FA77-4929-B205-B80B2D3A0090}"/>
               </a:ext>
             </a:extLst>
           </p:cNvPr>
@@ -37145,7 +37145,7 @@
           <p:cNvPr id="20" name="">
             <a:extLst xmlns:a="http://schemas.openxmlformats.org/drawingml/2006/main">
               <a:ext uri="{FF2B5EF4-FFF2-40B4-BE49-F238E27FC236}">
-                <a16:creationId xmlns:a16="http://schemas.microsoft.com/office/drawing/2014/main" id="{C60E470B-FA14-46E7-B04D-1C9099471074}"/>
+                <a16:creationId xmlns:a16="http://schemas.microsoft.com/office/drawing/2014/main" id="{9A3E3337-BE7E-4CCC-B050-97519869275A}"/>
               </a:ext>
             </a:extLst>
           </p:cNvPr>
@@ -37176,7 +37176,7 @@
           <p:cNvPr id="21" name="">
             <a:extLst xmlns:a="http://schemas.openxmlformats.org/drawingml/2006/main">
               <a:ext uri="{FF2B5EF4-FFF2-40B4-BE49-F238E27FC236}">
-                <a16:creationId xmlns:a16="http://schemas.microsoft.com/office/drawing/2014/main" id="{704AC922-6304-4058-9215-4BECAF1EEBEE}"/>
+                <a16:creationId xmlns:a16="http://schemas.microsoft.com/office/drawing/2014/main" id="{3F94F91D-72AF-4A5E-BD11-293D4FE3427F}"/>
               </a:ext>
             </a:extLst>
           </p:cNvPr>
@@ -37228,7 +37228,7 @@
           <p:cNvPr id="22" name="">
             <a:extLst xmlns:a="http://schemas.openxmlformats.org/drawingml/2006/main">
               <a:ext uri="{FF2B5EF4-FFF2-40B4-BE49-F238E27FC236}">
-                <a16:creationId xmlns:a16="http://schemas.microsoft.com/office/drawing/2014/main" id="{3F632AB8-ABFB-4A22-8F1A-815D899C92B1}"/>
+                <a16:creationId xmlns:a16="http://schemas.microsoft.com/office/drawing/2014/main" id="{7474A01B-3B81-4F2F-AD40-F3582F297F55}"/>
               </a:ext>
             </a:extLst>
           </p:cNvPr>
@@ -37280,7 +37280,7 @@
           <p:cNvPr id="23" name="">
             <a:extLst xmlns:a="http://schemas.openxmlformats.org/drawingml/2006/main">
               <a:ext uri="{FF2B5EF4-FFF2-40B4-BE49-F238E27FC236}">
-                <a16:creationId xmlns:a16="http://schemas.microsoft.com/office/drawing/2014/main" id="{A22A3CC3-BC31-4277-A2BF-9D9794DC7272}"/>
+                <a16:creationId xmlns:a16="http://schemas.microsoft.com/office/drawing/2014/main" id="{B5AEEE84-25E5-4E60-8193-8614DFF82C1F}"/>
               </a:ext>
             </a:extLst>
           </p:cNvPr>
@@ -37332,7 +37332,7 @@
           <p:cNvPr id="24" name="">
             <a:extLst xmlns:a="http://schemas.openxmlformats.org/drawingml/2006/main">
               <a:ext uri="{FF2B5EF4-FFF2-40B4-BE49-F238E27FC236}">
-                <a16:creationId xmlns:a16="http://schemas.microsoft.com/office/drawing/2014/main" id="{3ACAAD24-2126-40D2-B9B1-954EA4559535}"/>
+                <a16:creationId xmlns:a16="http://schemas.microsoft.com/office/drawing/2014/main" id="{8DE3C246-D370-4161-AF0A-86BAEF4915C3}"/>
               </a:ext>
             </a:extLst>
           </p:cNvPr>
@@ -37384,7 +37384,7 @@
           <p:cNvPr id="25" name="">
             <a:extLst xmlns:a="http://schemas.openxmlformats.org/drawingml/2006/main">
               <a:ext uri="{FF2B5EF4-FFF2-40B4-BE49-F238E27FC236}">
-                <a16:creationId xmlns:a16="http://schemas.microsoft.com/office/drawing/2014/main" id="{421F9902-7794-404A-A26D-5710C9C4902D}"/>
+                <a16:creationId xmlns:a16="http://schemas.microsoft.com/office/drawing/2014/main" id="{C91FEDC2-D3FC-4D8E-B5BD-4DE57D18C28B}"/>
               </a:ext>
             </a:extLst>
           </p:cNvPr>
@@ -37436,7 +37436,7 @@
           <p:cNvPr id="26" name="">
             <a:extLst xmlns:a="http://schemas.openxmlformats.org/drawingml/2006/main">
               <a:ext uri="{FF2B5EF4-FFF2-40B4-BE49-F238E27FC236}">
-                <a16:creationId xmlns:a16="http://schemas.microsoft.com/office/drawing/2014/main" id="{4A3F16D4-B37D-4E19-BD62-A6539C1E3527}"/>
+                <a16:creationId xmlns:a16="http://schemas.microsoft.com/office/drawing/2014/main" id="{2CDE6CFE-6CEF-4EBC-B1A8-4B45F4B3F491}"/>
               </a:ext>
             </a:extLst>
           </p:cNvPr>
@@ -37486,7 +37486,7 @@
     </p:spTree>
     <p:extLst>
       <p:ext uri="{BB962C8B-B14F-4D97-AF65-F5344CB8AC3E}">
-        <p14:creationId xmlns:p14="http://schemas.microsoft.com/office/powerpoint/2010/main" val="1409635407"/>
+        <p14:creationId xmlns:p14="http://schemas.microsoft.com/office/powerpoint/2010/main" val="355971044"/>
       </p:ext>
     </p:extLst>
   </p:cSld>
@@ -37517,7 +37517,7 @@
           <p:cNvPr id="27" name="">
             <a:extLst xmlns:a="http://schemas.openxmlformats.org/drawingml/2006/main">
               <a:ext uri="{FF2B5EF4-FFF2-40B4-BE49-F238E27FC236}">
-                <a16:creationId xmlns:a16="http://schemas.microsoft.com/office/drawing/2014/main" id="{EB1C13A8-03D9-4CDC-9230-9A263103AE79}"/>
+                <a16:creationId xmlns:a16="http://schemas.microsoft.com/office/drawing/2014/main" id="{FFE10685-5449-432D-B515-6ABCE823EACE}"/>
               </a:ext>
             </a:extLst>
           </p:cNvPr>
@@ -37550,7 +37550,7 @@
           <p:cNvPr id="2" name="">
             <a:extLst xmlns:a="http://schemas.openxmlformats.org/drawingml/2006/main">
               <a:ext uri="{FF2B5EF4-FFF2-40B4-BE49-F238E27FC236}">
-                <a16:creationId xmlns:a16="http://schemas.microsoft.com/office/drawing/2014/main" id="{ECC43A10-DAF2-48AE-994F-98DA08C9CD82}"/>
+                <a16:creationId xmlns:a16="http://schemas.microsoft.com/office/drawing/2014/main" id="{8FE880A1-99E0-4E1B-9298-7420FA7FCA22}"/>
               </a:ext>
             </a:extLst>
           </p:cNvPr>
@@ -37581,7 +37581,7 @@
           <p:cNvPr id="3" name="">
             <a:extLst xmlns:a="http://schemas.openxmlformats.org/drawingml/2006/main">
               <a:ext uri="{FF2B5EF4-FFF2-40B4-BE49-F238E27FC236}">
-                <a16:creationId xmlns:a16="http://schemas.microsoft.com/office/drawing/2014/main" id="{84C1B7A1-8305-4E9A-96DA-2C46959A67B3}"/>
+                <a16:creationId xmlns:a16="http://schemas.microsoft.com/office/drawing/2014/main" id="{32907597-73A3-4372-B351-4CD0F7396B1D}"/>
               </a:ext>
             </a:extLst>
           </p:cNvPr>
@@ -37633,7 +37633,7 @@
           <p:cNvPr id="4" name="">
             <a:extLst xmlns:a="http://schemas.openxmlformats.org/drawingml/2006/main">
               <a:ext uri="{FF2B5EF4-FFF2-40B4-BE49-F238E27FC236}">
-                <a16:creationId xmlns:a16="http://schemas.microsoft.com/office/drawing/2014/main" id="{C7DC3AF6-CB82-46CA-AC9B-092A6F27FAEB}"/>
+                <a16:creationId xmlns:a16="http://schemas.microsoft.com/office/drawing/2014/main" id="{F9AB9D01-AFAB-4577-9885-625101961BB6}"/>
               </a:ext>
             </a:extLst>
           </p:cNvPr>
@@ -37685,7 +37685,7 @@
           <p:cNvPr id="5" name="">
             <a:extLst xmlns:a="http://schemas.openxmlformats.org/drawingml/2006/main">
               <a:ext uri="{FF2B5EF4-FFF2-40B4-BE49-F238E27FC236}">
-                <a16:creationId xmlns:a16="http://schemas.microsoft.com/office/drawing/2014/main" id="{E005ED4D-73AC-43CA-957D-CCCC305570B7}"/>
+                <a16:creationId xmlns:a16="http://schemas.microsoft.com/office/drawing/2014/main" id="{73555855-C438-41F0-B4BF-8DE129F1C9BA}"/>
               </a:ext>
             </a:extLst>
           </p:cNvPr>
@@ -37720,7 +37720,7 @@
           <p:nvPr/>
         </p:nvPicPr>
         <p:blipFill>
-          <a:blip xmlns:r="http://schemas.openxmlformats.org/officeDocument/2006/relationships" xmlns:a="http://schemas.openxmlformats.org/drawingml/2006/main" r:embed="R137d03b65d4e4856"/>
+          <a:blip xmlns:r="http://schemas.openxmlformats.org/officeDocument/2006/relationships" xmlns:a="http://schemas.openxmlformats.org/drawingml/2006/main" r:embed="R539596aa08354962"/>
           <a:stretch xmlns:a="http://schemas.openxmlformats.org/drawingml/2006/main"/>
         </p:blipFill>
         <p:spPr>
@@ -37738,7 +37738,7 @@
           <p:cNvPr id="7" name="">
             <a:extLst xmlns:a="http://schemas.openxmlformats.org/drawingml/2006/main">
               <a:ext uri="{FF2B5EF4-FFF2-40B4-BE49-F238E27FC236}">
-                <a16:creationId xmlns:a16="http://schemas.microsoft.com/office/drawing/2014/main" id="{E53D2063-121B-4552-9208-4FAB07AFCDEB}"/>
+                <a16:creationId xmlns:a16="http://schemas.microsoft.com/office/drawing/2014/main" id="{2E2DB58F-FC1F-424B-BCB2-04915C97847F}"/>
               </a:ext>
             </a:extLst>
           </p:cNvPr>
@@ -37790,7 +37790,7 @@
           <p:cNvPr id="8" name="">
             <a:extLst xmlns:a="http://schemas.openxmlformats.org/drawingml/2006/main">
               <a:ext uri="{FF2B5EF4-FFF2-40B4-BE49-F238E27FC236}">
-                <a16:creationId xmlns:a16="http://schemas.microsoft.com/office/drawing/2014/main" id="{B0BC27AF-8F63-4D0A-82AB-C1FACE5EF202}"/>
+                <a16:creationId xmlns:a16="http://schemas.microsoft.com/office/drawing/2014/main" id="{D861EEE6-9E1F-4875-9009-33118AA57683}"/>
               </a:ext>
             </a:extLst>
           </p:cNvPr>
@@ -37842,7 +37842,7 @@
           <p:cNvPr id="9" name="">
             <a:extLst xmlns:a="http://schemas.openxmlformats.org/drawingml/2006/main">
               <a:ext uri="{FF2B5EF4-FFF2-40B4-BE49-F238E27FC236}">
-                <a16:creationId xmlns:a16="http://schemas.microsoft.com/office/drawing/2014/main" id="{18C005CD-A69B-45D2-B1B7-8DAEBA7B3348}"/>
+                <a16:creationId xmlns:a16="http://schemas.microsoft.com/office/drawing/2014/main" id="{DCABAAAC-EC65-452F-A68A-CE38F485DE8C}"/>
               </a:ext>
             </a:extLst>
           </p:cNvPr>
@@ -37894,7 +37894,7 @@
           <p:cNvPr id="10" name="">
             <a:extLst xmlns:a="http://schemas.openxmlformats.org/drawingml/2006/main">
               <a:ext uri="{FF2B5EF4-FFF2-40B4-BE49-F238E27FC236}">
-                <a16:creationId xmlns:a16="http://schemas.microsoft.com/office/drawing/2014/main" id="{3A326339-D8A2-4F9A-9DDC-79A1EB2DCD7A}"/>
+                <a16:creationId xmlns:a16="http://schemas.microsoft.com/office/drawing/2014/main" id="{365608C5-5403-4D03-80DD-5719BF0E1B78}"/>
               </a:ext>
             </a:extLst>
           </p:cNvPr>
@@ -37946,7 +37946,7 @@
           <p:cNvPr id="11" name="">
             <a:extLst xmlns:a="http://schemas.openxmlformats.org/drawingml/2006/main">
               <a:ext uri="{FF2B5EF4-FFF2-40B4-BE49-F238E27FC236}">
-                <a16:creationId xmlns:a16="http://schemas.microsoft.com/office/drawing/2014/main" id="{81D81BA1-9AE9-4354-84E6-66BFF2EC3D8E}"/>
+                <a16:creationId xmlns:a16="http://schemas.microsoft.com/office/drawing/2014/main" id="{D8FF2D8A-22EB-41A9-8F5C-330C1F0233D3}"/>
               </a:ext>
             </a:extLst>
           </p:cNvPr>
@@ -37993,10 +37993,10 @@
           <p:nvPr/>
         </p:nvPicPr>
         <p:blipFill>
-          <a:blip xmlns:r="http://schemas.openxmlformats.org/officeDocument/2006/relationships" xmlns:a="http://schemas.openxmlformats.org/drawingml/2006/main" r:embed="Rf998c0f11b0a4f21">
+          <a:blip xmlns:r="http://schemas.openxmlformats.org/officeDocument/2006/relationships" xmlns:a="http://schemas.openxmlformats.org/drawingml/2006/main" r:embed="Rbc7abdfab3ee4043">
             <a:extLst>
               <a:ext uri="{96DAC541-7B7A-43D3-8B79-37D633B846F1}">
-                <asvg:svgBlip xmlns:asvg="http://schemas.microsoft.com/office/drawing/2016/SVG/main" r:embed="R417db0fad3884349"/>
+                <asvg:svgBlip xmlns:asvg="http://schemas.microsoft.com/office/drawing/2016/SVG/main" r:embed="Re752ba42b7c24f2f"/>
               </a:ext>
             </a:extLst>
           </a:blip>
@@ -38017,7 +38017,7 @@
           <p:cNvPr id="13" name="">
             <a:extLst xmlns:a="http://schemas.openxmlformats.org/drawingml/2006/main">
               <a:ext uri="{FF2B5EF4-FFF2-40B4-BE49-F238E27FC236}">
-                <a16:creationId xmlns:a16="http://schemas.microsoft.com/office/drawing/2014/main" id="{2DF56934-AE12-499E-B3D2-BCDE54D1CCE7}"/>
+                <a16:creationId xmlns:a16="http://schemas.microsoft.com/office/drawing/2014/main" id="{3F8FC8D7-A04B-4403-ADD5-11C3C161619F}"/>
               </a:ext>
             </a:extLst>
           </p:cNvPr>
@@ -38050,7 +38050,7 @@
           <p:cNvPr id="14" name="">
             <a:extLst xmlns:a="http://schemas.openxmlformats.org/drawingml/2006/main">
               <a:ext uri="{FF2B5EF4-FFF2-40B4-BE49-F238E27FC236}">
-                <a16:creationId xmlns:a16="http://schemas.microsoft.com/office/drawing/2014/main" id="{57BA9143-F978-4657-A031-7A40B0CACA47}"/>
+                <a16:creationId xmlns:a16="http://schemas.microsoft.com/office/drawing/2014/main" id="{28DC638B-956D-46BB-AD2F-57D76DBB8B86}"/>
               </a:ext>
             </a:extLst>
           </p:cNvPr>
@@ -38102,7 +38102,7 @@
           <p:cNvPr id="15" name="">
             <a:extLst xmlns:a="http://schemas.openxmlformats.org/drawingml/2006/main">
               <a:ext uri="{FF2B5EF4-FFF2-40B4-BE49-F238E27FC236}">
-                <a16:creationId xmlns:a16="http://schemas.microsoft.com/office/drawing/2014/main" id="{D05E06A0-90EF-4500-A60E-E642D7E1B443}"/>
+                <a16:creationId xmlns:a16="http://schemas.microsoft.com/office/drawing/2014/main" id="{D78B6F1D-A71E-42F1-BEF4-511647BEBBEA}"/>
               </a:ext>
             </a:extLst>
           </p:cNvPr>
@@ -38135,7 +38135,7 @@
           <p:cNvPr id="16" name="">
             <a:extLst xmlns:a="http://schemas.openxmlformats.org/drawingml/2006/main">
               <a:ext uri="{FF2B5EF4-FFF2-40B4-BE49-F238E27FC236}">
-                <a16:creationId xmlns:a16="http://schemas.microsoft.com/office/drawing/2014/main" id="{54C73108-85C0-42F2-BF8C-98DBB4B12298}"/>
+                <a16:creationId xmlns:a16="http://schemas.microsoft.com/office/drawing/2014/main" id="{00B8E99F-F3A7-42C6-966F-83965D8D16A7}"/>
               </a:ext>
             </a:extLst>
           </p:cNvPr>
@@ -38187,7 +38187,7 @@
           <p:cNvPr id="17" name="">
             <a:extLst xmlns:a="http://schemas.openxmlformats.org/drawingml/2006/main">
               <a:ext uri="{FF2B5EF4-FFF2-40B4-BE49-F238E27FC236}">
-                <a16:creationId xmlns:a16="http://schemas.microsoft.com/office/drawing/2014/main" id="{4DE0CD5B-C24E-43D6-936A-D965F66EFA8A}"/>
+                <a16:creationId xmlns:a16="http://schemas.microsoft.com/office/drawing/2014/main" id="{3EB1ADCD-B23C-4568-8868-FDE8FFF03CD2}"/>
               </a:ext>
             </a:extLst>
           </p:cNvPr>
@@ -38220,7 +38220,7 @@
           <p:cNvPr id="18" name="">
             <a:extLst xmlns:a="http://schemas.openxmlformats.org/drawingml/2006/main">
               <a:ext uri="{FF2B5EF4-FFF2-40B4-BE49-F238E27FC236}">
-                <a16:creationId xmlns:a16="http://schemas.microsoft.com/office/drawing/2014/main" id="{218C98D6-9A97-4A28-8BCD-7DD30C1DB7E7}"/>
+                <a16:creationId xmlns:a16="http://schemas.microsoft.com/office/drawing/2014/main" id="{93B9A73E-E216-416E-BC9B-FCB70522E013}"/>
               </a:ext>
             </a:extLst>
           </p:cNvPr>
@@ -38272,7 +38272,7 @@
           <p:cNvPr id="19" name="">
             <a:extLst xmlns:a="http://schemas.openxmlformats.org/drawingml/2006/main">
               <a:ext uri="{FF2B5EF4-FFF2-40B4-BE49-F238E27FC236}">
-                <a16:creationId xmlns:a16="http://schemas.microsoft.com/office/drawing/2014/main" id="{D7BB33E4-DFCA-4D31-9C54-3DEF052C77C4}"/>
+                <a16:creationId xmlns:a16="http://schemas.microsoft.com/office/drawing/2014/main" id="{90EF0670-E8C1-4E01-B511-8F0545347171}"/>
               </a:ext>
             </a:extLst>
           </p:cNvPr>
@@ -38324,7 +38324,7 @@
           <p:cNvPr id="20" name="">
             <a:extLst xmlns:a="http://schemas.openxmlformats.org/drawingml/2006/main">
               <a:ext uri="{FF2B5EF4-FFF2-40B4-BE49-F238E27FC236}">
-                <a16:creationId xmlns:a16="http://schemas.microsoft.com/office/drawing/2014/main" id="{E203AFAE-4C20-4050-B098-369CDD976800}"/>
+                <a16:creationId xmlns:a16="http://schemas.microsoft.com/office/drawing/2014/main" id="{0E892873-ADC2-40D5-B039-81B7E19A02E0}"/>
               </a:ext>
             </a:extLst>
           </p:cNvPr>
@@ -38355,7 +38355,7 @@
           <p:cNvPr id="21" name="">
             <a:extLst xmlns:a="http://schemas.openxmlformats.org/drawingml/2006/main">
               <a:ext uri="{FF2B5EF4-FFF2-40B4-BE49-F238E27FC236}">
-                <a16:creationId xmlns:a16="http://schemas.microsoft.com/office/drawing/2014/main" id="{B266FFCD-EA50-495F-B5E8-8634D910C5BF}"/>
+                <a16:creationId xmlns:a16="http://schemas.microsoft.com/office/drawing/2014/main" id="{C6053EFA-4282-4FAF-B6F0-CC0428538818}"/>
               </a:ext>
             </a:extLst>
           </p:cNvPr>
@@ -38407,7 +38407,7 @@
           <p:cNvPr id="22" name="">
             <a:extLst xmlns:a="http://schemas.openxmlformats.org/drawingml/2006/main">
               <a:ext uri="{FF2B5EF4-FFF2-40B4-BE49-F238E27FC236}">
-                <a16:creationId xmlns:a16="http://schemas.microsoft.com/office/drawing/2014/main" id="{6FEE98CD-37F6-40E1-A856-CCCAACD52FEC}"/>
+                <a16:creationId xmlns:a16="http://schemas.microsoft.com/office/drawing/2014/main" id="{2DB74438-A807-4177-91DF-A413BF3BAF01}"/>
               </a:ext>
             </a:extLst>
           </p:cNvPr>
@@ -38459,7 +38459,7 @@
           <p:cNvPr id="23" name="">
             <a:extLst xmlns:a="http://schemas.openxmlformats.org/drawingml/2006/main">
               <a:ext uri="{FF2B5EF4-FFF2-40B4-BE49-F238E27FC236}">
-                <a16:creationId xmlns:a16="http://schemas.microsoft.com/office/drawing/2014/main" id="{FFAD80F0-6902-4EE4-A466-5CC70A8556BD}"/>
+                <a16:creationId xmlns:a16="http://schemas.microsoft.com/office/drawing/2014/main" id="{6982A22C-D6C8-4339-8B30-DCC6D6C88C49}"/>
               </a:ext>
             </a:extLst>
           </p:cNvPr>
@@ -38511,7 +38511,7 @@
           <p:cNvPr id="24" name="">
             <a:extLst xmlns:a="http://schemas.openxmlformats.org/drawingml/2006/main">
               <a:ext uri="{FF2B5EF4-FFF2-40B4-BE49-F238E27FC236}">
-                <a16:creationId xmlns:a16="http://schemas.microsoft.com/office/drawing/2014/main" id="{2EB23FDB-6A33-435F-B346-9EB9569025B5}"/>
+                <a16:creationId xmlns:a16="http://schemas.microsoft.com/office/drawing/2014/main" id="{BF412882-0D0F-4BE6-B497-B447B49D5228}"/>
               </a:ext>
             </a:extLst>
           </p:cNvPr>
@@ -38563,7 +38563,7 @@
           <p:cNvPr id="25" name="">
             <a:extLst xmlns:a="http://schemas.openxmlformats.org/drawingml/2006/main">
               <a:ext uri="{FF2B5EF4-FFF2-40B4-BE49-F238E27FC236}">
-                <a16:creationId xmlns:a16="http://schemas.microsoft.com/office/drawing/2014/main" id="{A12BD6C5-BE25-44D5-8B14-4B64388453A3}"/>
+                <a16:creationId xmlns:a16="http://schemas.microsoft.com/office/drawing/2014/main" id="{30AD6925-3DEC-4AA4-812E-0B0241439D72}"/>
               </a:ext>
             </a:extLst>
           </p:cNvPr>
@@ -38615,7 +38615,7 @@
           <p:cNvPr id="26" name="">
             <a:extLst xmlns:a="http://schemas.openxmlformats.org/drawingml/2006/main">
               <a:ext uri="{FF2B5EF4-FFF2-40B4-BE49-F238E27FC236}">
-                <a16:creationId xmlns:a16="http://schemas.microsoft.com/office/drawing/2014/main" id="{F825CF2C-D080-4710-9347-D0673C5407E4}"/>
+                <a16:creationId xmlns:a16="http://schemas.microsoft.com/office/drawing/2014/main" id="{83AA91B3-F09D-4A06-894D-9309F9F44872}"/>
               </a:ext>
             </a:extLst>
           </p:cNvPr>
@@ -38665,7 +38665,7 @@
     </p:spTree>
     <p:extLst>
       <p:ext uri="{BB962C8B-B14F-4D97-AF65-F5344CB8AC3E}">
-        <p14:creationId xmlns:p14="http://schemas.microsoft.com/office/powerpoint/2010/main" val="587848261"/>
+        <p14:creationId xmlns:p14="http://schemas.microsoft.com/office/powerpoint/2010/main" val="916243546"/>
       </p:ext>
     </p:extLst>
   </p:cSld>
@@ -38696,7 +38696,7 @@
           <p:cNvPr id="35" name="">
             <a:extLst xmlns:a="http://schemas.openxmlformats.org/drawingml/2006/main">
               <a:ext uri="{FF2B5EF4-FFF2-40B4-BE49-F238E27FC236}">
-                <a16:creationId xmlns:a16="http://schemas.microsoft.com/office/drawing/2014/main" id="{AFF6B5AB-D3BD-48A4-9B3F-717281ADE5CB}"/>
+                <a16:creationId xmlns:a16="http://schemas.microsoft.com/office/drawing/2014/main" id="{A5A61129-A0C1-4B35-992A-F9A478901433}"/>
               </a:ext>
             </a:extLst>
           </p:cNvPr>
@@ -38729,7 +38729,7 @@
           <p:cNvPr id="2" name="">
             <a:extLst xmlns:a="http://schemas.openxmlformats.org/drawingml/2006/main">
               <a:ext uri="{FF2B5EF4-FFF2-40B4-BE49-F238E27FC236}">
-                <a16:creationId xmlns:a16="http://schemas.microsoft.com/office/drawing/2014/main" id="{EA8B42F8-4024-4875-8C32-D610DC8B9C7B}"/>
+                <a16:creationId xmlns:a16="http://schemas.microsoft.com/office/drawing/2014/main" id="{2B32845E-8BC1-48CA-A033-6EAEE86C6797}"/>
               </a:ext>
             </a:extLst>
           </p:cNvPr>
@@ -38760,7 +38760,7 @@
           <p:cNvPr id="3" name="">
             <a:extLst xmlns:a="http://schemas.openxmlformats.org/drawingml/2006/main">
               <a:ext uri="{FF2B5EF4-FFF2-40B4-BE49-F238E27FC236}">
-                <a16:creationId xmlns:a16="http://schemas.microsoft.com/office/drawing/2014/main" id="{BA26D4E1-9377-4E11-B8A6-DC5DD1EC6EF3}"/>
+                <a16:creationId xmlns:a16="http://schemas.microsoft.com/office/drawing/2014/main" id="{60D1602B-FE76-4945-8ABD-FA400AC559B9}"/>
               </a:ext>
             </a:extLst>
           </p:cNvPr>
@@ -38812,7 +38812,7 @@
           <p:cNvPr id="4" name="">
             <a:extLst xmlns:a="http://schemas.openxmlformats.org/drawingml/2006/main">
               <a:ext uri="{FF2B5EF4-FFF2-40B4-BE49-F238E27FC236}">
-                <a16:creationId xmlns:a16="http://schemas.microsoft.com/office/drawing/2014/main" id="{619D826E-6A53-4E2C-9A2B-CA19C8E0A5E5}"/>
+                <a16:creationId xmlns:a16="http://schemas.microsoft.com/office/drawing/2014/main" id="{FEA574C6-0EC9-4542-8635-B5CEAED66D3D}"/>
               </a:ext>
             </a:extLst>
           </p:cNvPr>
@@ -38864,7 +38864,7 @@
           <p:cNvPr id="5" name="">
             <a:extLst xmlns:a="http://schemas.openxmlformats.org/drawingml/2006/main">
               <a:ext uri="{FF2B5EF4-FFF2-40B4-BE49-F238E27FC236}">
-                <a16:creationId xmlns:a16="http://schemas.microsoft.com/office/drawing/2014/main" id="{A1B5FF9D-566C-4AF8-9872-856C7215A170}"/>
+                <a16:creationId xmlns:a16="http://schemas.microsoft.com/office/drawing/2014/main" id="{EF9C67D7-9688-4041-A8A8-F81DB107B8AC}"/>
               </a:ext>
             </a:extLst>
           </p:cNvPr>
@@ -38899,7 +38899,7 @@
           <p:nvPr/>
         </p:nvPicPr>
         <p:blipFill>
-          <a:blip xmlns:r="http://schemas.openxmlformats.org/officeDocument/2006/relationships" xmlns:a="http://schemas.openxmlformats.org/drawingml/2006/main" r:embed="R75f3f63bd86f4d9c"/>
+          <a:blip xmlns:r="http://schemas.openxmlformats.org/officeDocument/2006/relationships" xmlns:a="http://schemas.openxmlformats.org/drawingml/2006/main" r:embed="R8378e2aa10354bf2"/>
           <a:stretch xmlns:a="http://schemas.openxmlformats.org/drawingml/2006/main"/>
         </p:blipFill>
         <p:spPr>
@@ -38917,7 +38917,7 @@
           <p:cNvPr id="7" name="">
             <a:extLst xmlns:a="http://schemas.openxmlformats.org/drawingml/2006/main">
               <a:ext uri="{FF2B5EF4-FFF2-40B4-BE49-F238E27FC236}">
-                <a16:creationId xmlns:a16="http://schemas.microsoft.com/office/drawing/2014/main" id="{41A6127A-50A0-4886-A9DB-ADC0229BC6D1}"/>
+                <a16:creationId xmlns:a16="http://schemas.microsoft.com/office/drawing/2014/main" id="{18699A62-940A-4B57-8E1B-9ED1739A70DE}"/>
               </a:ext>
             </a:extLst>
           </p:cNvPr>
@@ -38969,7 +38969,7 @@
           <p:cNvPr id="8" name="">
             <a:extLst xmlns:a="http://schemas.openxmlformats.org/drawingml/2006/main">
               <a:ext uri="{FF2B5EF4-FFF2-40B4-BE49-F238E27FC236}">
-                <a16:creationId xmlns:a16="http://schemas.microsoft.com/office/drawing/2014/main" id="{3D2C2F72-9A95-435B-9EA2-CBE25E3A753B}"/>
+                <a16:creationId xmlns:a16="http://schemas.microsoft.com/office/drawing/2014/main" id="{57E6E997-BA10-4750-A4A8-49C68E8333BD}"/>
               </a:ext>
             </a:extLst>
           </p:cNvPr>
@@ -39021,7 +39021,7 @@
           <p:cNvPr id="9" name="">
             <a:extLst xmlns:a="http://schemas.openxmlformats.org/drawingml/2006/main">
               <a:ext uri="{FF2B5EF4-FFF2-40B4-BE49-F238E27FC236}">
-                <a16:creationId xmlns:a16="http://schemas.microsoft.com/office/drawing/2014/main" id="{3638DA1F-3D0A-4A91-81BC-0FD6B9BBEF95}"/>
+                <a16:creationId xmlns:a16="http://schemas.microsoft.com/office/drawing/2014/main" id="{BE6C74B6-A6D3-4E61-B45D-3C9BA1E715B0}"/>
               </a:ext>
             </a:extLst>
           </p:cNvPr>
@@ -39073,7 +39073,7 @@
           <p:cNvPr id="10" name="">
             <a:extLst xmlns:a="http://schemas.openxmlformats.org/drawingml/2006/main">
               <a:ext uri="{FF2B5EF4-FFF2-40B4-BE49-F238E27FC236}">
-                <a16:creationId xmlns:a16="http://schemas.microsoft.com/office/drawing/2014/main" id="{B6FF9BF3-34B4-4A2B-943A-F266101A5252}"/>
+                <a16:creationId xmlns:a16="http://schemas.microsoft.com/office/drawing/2014/main" id="{CB8FE0DE-9463-48AA-B3C9-9E056E6C52C0}"/>
               </a:ext>
             </a:extLst>
           </p:cNvPr>
@@ -39125,7 +39125,7 @@
           <p:cNvPr id="11" name="">
             <a:extLst xmlns:a="http://schemas.openxmlformats.org/drawingml/2006/main">
               <a:ext uri="{FF2B5EF4-FFF2-40B4-BE49-F238E27FC236}">
-                <a16:creationId xmlns:a16="http://schemas.microsoft.com/office/drawing/2014/main" id="{B7D420D7-B221-439E-A6B8-57CBEC906621}"/>
+                <a16:creationId xmlns:a16="http://schemas.microsoft.com/office/drawing/2014/main" id="{28255707-0116-4356-A947-229EB83DA378}"/>
               </a:ext>
             </a:extLst>
           </p:cNvPr>
@@ -39172,10 +39172,10 @@
           <p:nvPr/>
         </p:nvPicPr>
         <p:blipFill>
-          <a:blip xmlns:r="http://schemas.openxmlformats.org/officeDocument/2006/relationships" xmlns:a="http://schemas.openxmlformats.org/drawingml/2006/main" r:embed="Rfb264f9b946348dc">
+          <a:blip xmlns:r="http://schemas.openxmlformats.org/officeDocument/2006/relationships" xmlns:a="http://schemas.openxmlformats.org/drawingml/2006/main" r:embed="Re400767b809c4962">
             <a:extLst>
               <a:ext uri="{96DAC541-7B7A-43D3-8B79-37D633B846F1}">
-                <asvg:svgBlip xmlns:asvg="http://schemas.microsoft.com/office/drawing/2016/SVG/main" r:embed="R4f1ec85f8a8a4273"/>
+                <asvg:svgBlip xmlns:asvg="http://schemas.microsoft.com/office/drawing/2016/SVG/main" r:embed="Ra2fffd0be02e42cc"/>
               </a:ext>
             </a:extLst>
           </a:blip>
@@ -39196,7 +39196,7 @@
           <p:cNvPr id="13" name="">
             <a:extLst xmlns:a="http://schemas.openxmlformats.org/drawingml/2006/main">
               <a:ext uri="{FF2B5EF4-FFF2-40B4-BE49-F238E27FC236}">
-                <a16:creationId xmlns:a16="http://schemas.microsoft.com/office/drawing/2014/main" id="{147DA83F-2F1D-42BB-9A92-558B29FAF163}"/>
+                <a16:creationId xmlns:a16="http://schemas.microsoft.com/office/drawing/2014/main" id="{7F5675AF-163A-46E2-8351-85E48C818267}"/>
               </a:ext>
             </a:extLst>
           </p:cNvPr>
@@ -39229,7 +39229,7 @@
           <p:cNvPr id="14" name="">
             <a:extLst xmlns:a="http://schemas.openxmlformats.org/drawingml/2006/main">
               <a:ext uri="{FF2B5EF4-FFF2-40B4-BE49-F238E27FC236}">
-                <a16:creationId xmlns:a16="http://schemas.microsoft.com/office/drawing/2014/main" id="{21CF38F2-CF24-453E-A1FD-61874FD8BC5B}"/>
+                <a16:creationId xmlns:a16="http://schemas.microsoft.com/office/drawing/2014/main" id="{F30140C0-F3C6-43F1-89AD-01DAE9375004}"/>
               </a:ext>
             </a:extLst>
           </p:cNvPr>
@@ -39281,7 +39281,7 @@
           <p:cNvPr id="15" name="">
             <a:extLst xmlns:a="http://schemas.openxmlformats.org/drawingml/2006/main">
               <a:ext uri="{FF2B5EF4-FFF2-40B4-BE49-F238E27FC236}">
-                <a16:creationId xmlns:a16="http://schemas.microsoft.com/office/drawing/2014/main" id="{338783D8-4142-4711-BBA4-CFC29A56DE5F}"/>
+                <a16:creationId xmlns:a16="http://schemas.microsoft.com/office/drawing/2014/main" id="{8200E75E-88CF-41C9-94AE-D3954879D717}"/>
               </a:ext>
             </a:extLst>
           </p:cNvPr>
@@ -39314,7 +39314,7 @@
           <p:cNvPr id="16" name="">
             <a:extLst xmlns:a="http://schemas.openxmlformats.org/drawingml/2006/main">
               <a:ext uri="{FF2B5EF4-FFF2-40B4-BE49-F238E27FC236}">
-                <a16:creationId xmlns:a16="http://schemas.microsoft.com/office/drawing/2014/main" id="{00F33531-9F9F-474E-B5A5-1677A2ACD26F}"/>
+                <a16:creationId xmlns:a16="http://schemas.microsoft.com/office/drawing/2014/main" id="{7FE57933-FDF6-470E-949D-55314A1362BA}"/>
               </a:ext>
             </a:extLst>
           </p:cNvPr>
@@ -39366,7 +39366,7 @@
           <p:cNvPr id="17" name="">
             <a:extLst xmlns:a="http://schemas.openxmlformats.org/drawingml/2006/main">
               <a:ext uri="{FF2B5EF4-FFF2-40B4-BE49-F238E27FC236}">
-                <a16:creationId xmlns:a16="http://schemas.microsoft.com/office/drawing/2014/main" id="{7D477E6F-DEAF-482F-86A2-85B2A7CEEE30}"/>
+                <a16:creationId xmlns:a16="http://schemas.microsoft.com/office/drawing/2014/main" id="{C44F32ED-BD57-4901-B5E9-B2239BEF37E6}"/>
               </a:ext>
             </a:extLst>
           </p:cNvPr>
@@ -39399,7 +39399,7 @@
           <p:cNvPr id="18" name="">
             <a:extLst xmlns:a="http://schemas.openxmlformats.org/drawingml/2006/main">
               <a:ext uri="{FF2B5EF4-FFF2-40B4-BE49-F238E27FC236}">
-                <a16:creationId xmlns:a16="http://schemas.microsoft.com/office/drawing/2014/main" id="{9A5314F7-6C3F-4E84-83AA-610067992D32}"/>
+                <a16:creationId xmlns:a16="http://schemas.microsoft.com/office/drawing/2014/main" id="{79D2D692-09E5-46B8-A23C-8A17B3EDD50B}"/>
               </a:ext>
             </a:extLst>
           </p:cNvPr>
@@ -39451,7 +39451,7 @@
           <p:cNvPr id="19" name="">
             <a:extLst xmlns:a="http://schemas.openxmlformats.org/drawingml/2006/main">
               <a:ext uri="{FF2B5EF4-FFF2-40B4-BE49-F238E27FC236}">
-                <a16:creationId xmlns:a16="http://schemas.microsoft.com/office/drawing/2014/main" id="{23D1965E-6CF9-40C3-B1BE-695AF5ED9ABA}"/>
+                <a16:creationId xmlns:a16="http://schemas.microsoft.com/office/drawing/2014/main" id="{8665D904-F3DE-431D-93F1-6587E12495B9}"/>
               </a:ext>
             </a:extLst>
           </p:cNvPr>
@@ -39484,7 +39484,7 @@
           <p:cNvPr id="20" name="">
             <a:extLst xmlns:a="http://schemas.openxmlformats.org/drawingml/2006/main">
               <a:ext uri="{FF2B5EF4-FFF2-40B4-BE49-F238E27FC236}">
-                <a16:creationId xmlns:a16="http://schemas.microsoft.com/office/drawing/2014/main" id="{E63FAC0A-2A38-4036-8251-B29F1A249301}"/>
+                <a16:creationId xmlns:a16="http://schemas.microsoft.com/office/drawing/2014/main" id="{6B58F260-BC21-4C82-9B2E-610A0A7300FA}"/>
               </a:ext>
             </a:extLst>
           </p:cNvPr>
@@ -39536,7 +39536,7 @@
           <p:cNvPr id="21" name="">
             <a:extLst xmlns:a="http://schemas.openxmlformats.org/drawingml/2006/main">
               <a:ext uri="{FF2B5EF4-FFF2-40B4-BE49-F238E27FC236}">
-                <a16:creationId xmlns:a16="http://schemas.microsoft.com/office/drawing/2014/main" id="{B8808095-3D2E-4035-A796-E90063B22B52}"/>
+                <a16:creationId xmlns:a16="http://schemas.microsoft.com/office/drawing/2014/main" id="{D32E68FC-8029-4CAE-B327-0E6F56B02383}"/>
               </a:ext>
             </a:extLst>
           </p:cNvPr>
@@ -39569,7 +39569,7 @@
           <p:cNvPr id="22" name="">
             <a:extLst xmlns:a="http://schemas.openxmlformats.org/drawingml/2006/main">
               <a:ext uri="{FF2B5EF4-FFF2-40B4-BE49-F238E27FC236}">
-                <a16:creationId xmlns:a16="http://schemas.microsoft.com/office/drawing/2014/main" id="{6DDC2784-33A8-4624-820A-6CB2B30C4F15}"/>
+                <a16:creationId xmlns:a16="http://schemas.microsoft.com/office/drawing/2014/main" id="{54BE1577-4A31-43E6-BCCD-1126A1EE2836}"/>
               </a:ext>
             </a:extLst>
           </p:cNvPr>
@@ -39621,7 +39621,7 @@
           <p:cNvPr id="23" name="">
             <a:extLst xmlns:a="http://schemas.openxmlformats.org/drawingml/2006/main">
               <a:ext uri="{FF2B5EF4-FFF2-40B4-BE49-F238E27FC236}">
-                <a16:creationId xmlns:a16="http://schemas.microsoft.com/office/drawing/2014/main" id="{D6E43086-72C0-4F27-B106-B569D6F39003}"/>
+                <a16:creationId xmlns:a16="http://schemas.microsoft.com/office/drawing/2014/main" id="{9CB99770-9696-4F3A-92C0-F7BBB0C1E2F4}"/>
               </a:ext>
             </a:extLst>
           </p:cNvPr>
@@ -39654,7 +39654,7 @@
           <p:cNvPr id="24" name="">
             <a:extLst xmlns:a="http://schemas.openxmlformats.org/drawingml/2006/main">
               <a:ext uri="{FF2B5EF4-FFF2-40B4-BE49-F238E27FC236}">
-                <a16:creationId xmlns:a16="http://schemas.microsoft.com/office/drawing/2014/main" id="{DF4182D0-C764-40F5-86FE-16322863FBAA}"/>
+                <a16:creationId xmlns:a16="http://schemas.microsoft.com/office/drawing/2014/main" id="{1972661A-183B-40C6-89D9-31CEBD22CB1E}"/>
               </a:ext>
             </a:extLst>
           </p:cNvPr>
@@ -39706,7 +39706,7 @@
           <p:cNvPr id="25" name="">
             <a:extLst xmlns:a="http://schemas.openxmlformats.org/drawingml/2006/main">
               <a:ext uri="{FF2B5EF4-FFF2-40B4-BE49-F238E27FC236}">
-                <a16:creationId xmlns:a16="http://schemas.microsoft.com/office/drawing/2014/main" id="{06A284B8-ECF3-450E-9F1A-99A79EF8790A}"/>
+                <a16:creationId xmlns:a16="http://schemas.microsoft.com/office/drawing/2014/main" id="{DE8AB7F4-C1A8-42E7-8C20-3F9A7B8E8B30}"/>
               </a:ext>
             </a:extLst>
           </p:cNvPr>
@@ -39739,7 +39739,7 @@
           <p:cNvPr id="26" name="">
             <a:extLst xmlns:a="http://schemas.openxmlformats.org/drawingml/2006/main">
               <a:ext uri="{FF2B5EF4-FFF2-40B4-BE49-F238E27FC236}">
-                <a16:creationId xmlns:a16="http://schemas.microsoft.com/office/drawing/2014/main" id="{61F73863-253B-41F2-9A99-147B2401270B}"/>
+                <a16:creationId xmlns:a16="http://schemas.microsoft.com/office/drawing/2014/main" id="{CFB9869C-E7D9-44A0-8D6D-5ED6AEA3EAB3}"/>
               </a:ext>
             </a:extLst>
           </p:cNvPr>
@@ -39791,7 +39791,7 @@
           <p:cNvPr id="27" name="">
             <a:extLst xmlns:a="http://schemas.openxmlformats.org/drawingml/2006/main">
               <a:ext uri="{FF2B5EF4-FFF2-40B4-BE49-F238E27FC236}">
-                <a16:creationId xmlns:a16="http://schemas.microsoft.com/office/drawing/2014/main" id="{93BE70BC-6F40-403E-B084-74DF3B43E9F1}"/>
+                <a16:creationId xmlns:a16="http://schemas.microsoft.com/office/drawing/2014/main" id="{51D63221-D7A4-4045-AA4D-3E8707298A02}"/>
               </a:ext>
             </a:extLst>
           </p:cNvPr>
@@ -39824,7 +39824,7 @@
           <p:cNvPr id="28" name="">
             <a:extLst xmlns:a="http://schemas.openxmlformats.org/drawingml/2006/main">
               <a:ext uri="{FF2B5EF4-FFF2-40B4-BE49-F238E27FC236}">
-                <a16:creationId xmlns:a16="http://schemas.microsoft.com/office/drawing/2014/main" id="{A62F9500-6F71-4EFC-B2FF-04EF632D05D1}"/>
+                <a16:creationId xmlns:a16="http://schemas.microsoft.com/office/drawing/2014/main" id="{C73BC36A-A6E8-4592-8AFE-79275C939834}"/>
               </a:ext>
             </a:extLst>
           </p:cNvPr>
@@ -39876,7 +39876,7 @@
           <p:cNvPr id="29" name="">
             <a:extLst xmlns:a="http://schemas.openxmlformats.org/drawingml/2006/main">
               <a:ext uri="{FF2B5EF4-FFF2-40B4-BE49-F238E27FC236}">
-                <a16:creationId xmlns:a16="http://schemas.microsoft.com/office/drawing/2014/main" id="{AB630F41-073D-484E-9AA2-3A15F9FA88D1}"/>
+                <a16:creationId xmlns:a16="http://schemas.microsoft.com/office/drawing/2014/main" id="{AA338292-C073-4C9D-B7B3-9B79467AD5A2}"/>
               </a:ext>
             </a:extLst>
           </p:cNvPr>
@@ -39909,7 +39909,7 @@
           <p:cNvPr id="30" name="">
             <a:extLst xmlns:a="http://schemas.openxmlformats.org/drawingml/2006/main">
               <a:ext uri="{FF2B5EF4-FFF2-40B4-BE49-F238E27FC236}">
-                <a16:creationId xmlns:a16="http://schemas.microsoft.com/office/drawing/2014/main" id="{29761F04-DE78-4C82-B2B8-70710DECFB94}"/>
+                <a16:creationId xmlns:a16="http://schemas.microsoft.com/office/drawing/2014/main" id="{1F08C3A0-F24F-4055-BCC2-647B2F020A15}"/>
               </a:ext>
             </a:extLst>
           </p:cNvPr>
@@ -39961,7 +39961,7 @@
           <p:cNvPr id="31" name="">
             <a:extLst xmlns:a="http://schemas.openxmlformats.org/drawingml/2006/main">
               <a:ext uri="{FF2B5EF4-FFF2-40B4-BE49-F238E27FC236}">
-                <a16:creationId xmlns:a16="http://schemas.microsoft.com/office/drawing/2014/main" id="{45CF25BC-D437-4B3B-8AC3-5942696E0630}"/>
+                <a16:creationId xmlns:a16="http://schemas.microsoft.com/office/drawing/2014/main" id="{0867AE96-2A72-4C26-959E-927B492CC14B}"/>
               </a:ext>
             </a:extLst>
           </p:cNvPr>
@@ -39994,7 +39994,7 @@
           <p:cNvPr id="32" name="">
             <a:extLst xmlns:a="http://schemas.openxmlformats.org/drawingml/2006/main">
               <a:ext uri="{FF2B5EF4-FFF2-40B4-BE49-F238E27FC236}">
-                <a16:creationId xmlns:a16="http://schemas.microsoft.com/office/drawing/2014/main" id="{266DA4D8-975C-47E1-ACB5-16F830DA3979}"/>
+                <a16:creationId xmlns:a16="http://schemas.microsoft.com/office/drawing/2014/main" id="{5F1008AE-E04C-4422-B360-1F1AFF53CA5D}"/>
               </a:ext>
             </a:extLst>
           </p:cNvPr>
@@ -40046,7 +40046,7 @@
           <p:cNvPr id="33" name="">
             <a:extLst xmlns:a="http://schemas.openxmlformats.org/drawingml/2006/main">
               <a:ext uri="{FF2B5EF4-FFF2-40B4-BE49-F238E27FC236}">
-                <a16:creationId xmlns:a16="http://schemas.microsoft.com/office/drawing/2014/main" id="{03EECE7E-F52A-4DB2-8450-76D907C243D4}"/>
+                <a16:creationId xmlns:a16="http://schemas.microsoft.com/office/drawing/2014/main" id="{595A9EB8-7BC0-4EC3-B7BF-03FEE31894DD}"/>
               </a:ext>
             </a:extLst>
           </p:cNvPr>
@@ -40079,7 +40079,7 @@
           <p:cNvPr id="34" name="">
             <a:extLst xmlns:a="http://schemas.openxmlformats.org/drawingml/2006/main">
               <a:ext uri="{FF2B5EF4-FFF2-40B4-BE49-F238E27FC236}">
-                <a16:creationId xmlns:a16="http://schemas.microsoft.com/office/drawing/2014/main" id="{417B876E-9C80-4603-9FC0-C614C0244002}"/>
+                <a16:creationId xmlns:a16="http://schemas.microsoft.com/office/drawing/2014/main" id="{93B368DB-C5EE-4343-88E4-D7180986B603}"/>
               </a:ext>
             </a:extLst>
           </p:cNvPr>
@@ -40129,7 +40129,7 @@
     </p:spTree>
     <p:extLst>
       <p:ext uri="{BB962C8B-B14F-4D97-AF65-F5344CB8AC3E}">
-        <p14:creationId xmlns:p14="http://schemas.microsoft.com/office/powerpoint/2010/main" val="42405099"/>
+        <p14:creationId xmlns:p14="http://schemas.microsoft.com/office/powerpoint/2010/main" val="957340724"/>
       </p:ext>
     </p:extLst>
   </p:cSld>
@@ -40160,7 +40160,7 @@
           <p:cNvPr id="102" name="">
             <a:extLst xmlns:a="http://schemas.openxmlformats.org/drawingml/2006/main">
               <a:ext uri="{FF2B5EF4-FFF2-40B4-BE49-F238E27FC236}">
-                <a16:creationId xmlns:a16="http://schemas.microsoft.com/office/drawing/2014/main" id="{70E96AAB-81AC-4F9F-849B-58BC11D7E028}"/>
+                <a16:creationId xmlns:a16="http://schemas.microsoft.com/office/drawing/2014/main" id="{AA96B7CD-B2F3-4BDE-8DE1-D0240A8CB241}"/>
               </a:ext>
             </a:extLst>
           </p:cNvPr>
@@ -40193,7 +40193,7 @@
           <p:cNvPr id="2" name="">
             <a:extLst xmlns:a="http://schemas.openxmlformats.org/drawingml/2006/main">
               <a:ext uri="{FF2B5EF4-FFF2-40B4-BE49-F238E27FC236}">
-                <a16:creationId xmlns:a16="http://schemas.microsoft.com/office/drawing/2014/main" id="{477D5952-4ED7-4D21-8F28-84D251B31429}"/>
+                <a16:creationId xmlns:a16="http://schemas.microsoft.com/office/drawing/2014/main" id="{8689B259-2B8D-4293-95D0-11C14FA4DF41}"/>
               </a:ext>
             </a:extLst>
           </p:cNvPr>
@@ -40224,7 +40224,7 @@
           <p:cNvPr id="3" name="">
             <a:extLst xmlns:a="http://schemas.openxmlformats.org/drawingml/2006/main">
               <a:ext uri="{FF2B5EF4-FFF2-40B4-BE49-F238E27FC236}">
-                <a16:creationId xmlns:a16="http://schemas.microsoft.com/office/drawing/2014/main" id="{C2D1EA97-A900-49B7-B587-D440AC2075D5}"/>
+                <a16:creationId xmlns:a16="http://schemas.microsoft.com/office/drawing/2014/main" id="{639B4410-B01D-456C-86F9-4AF6742C75EA}"/>
               </a:ext>
             </a:extLst>
           </p:cNvPr>
@@ -40276,7 +40276,7 @@
           <p:cNvPr id="4" name="">
             <a:extLst xmlns:a="http://schemas.openxmlformats.org/drawingml/2006/main">
               <a:ext uri="{FF2B5EF4-FFF2-40B4-BE49-F238E27FC236}">
-                <a16:creationId xmlns:a16="http://schemas.microsoft.com/office/drawing/2014/main" id="{E976500D-62BC-41D4-95CE-92FD35CF86B3}"/>
+                <a16:creationId xmlns:a16="http://schemas.microsoft.com/office/drawing/2014/main" id="{605FFA69-BAA6-4A35-83CF-922C5766DA1E}"/>
               </a:ext>
             </a:extLst>
           </p:cNvPr>
@@ -40328,7 +40328,7 @@
           <p:cNvPr id="5" name="">
             <a:extLst xmlns:a="http://schemas.openxmlformats.org/drawingml/2006/main">
               <a:ext uri="{FF2B5EF4-FFF2-40B4-BE49-F238E27FC236}">
-                <a16:creationId xmlns:a16="http://schemas.microsoft.com/office/drawing/2014/main" id="{FA586E03-694C-4AAE-A933-81613B4D2A4C}"/>
+                <a16:creationId xmlns:a16="http://schemas.microsoft.com/office/drawing/2014/main" id="{ACFA9C31-F445-4315-A4A6-DF3508F01501}"/>
               </a:ext>
             </a:extLst>
           </p:cNvPr>
@@ -40363,7 +40363,7 @@
           <p:nvPr/>
         </p:nvPicPr>
         <p:blipFill>
-          <a:blip xmlns:r="http://schemas.openxmlformats.org/officeDocument/2006/relationships" xmlns:a="http://schemas.openxmlformats.org/drawingml/2006/main" r:embed="R06b64c3e11dd4a85"/>
+          <a:blip xmlns:r="http://schemas.openxmlformats.org/officeDocument/2006/relationships" xmlns:a="http://schemas.openxmlformats.org/drawingml/2006/main" r:embed="Rf0604ba4b5fa45da"/>
           <a:stretch xmlns:a="http://schemas.openxmlformats.org/drawingml/2006/main"/>
         </p:blipFill>
         <p:spPr>
@@ -40381,7 +40381,7 @@
           <p:cNvPr id="7" name="">
             <a:extLst xmlns:a="http://schemas.openxmlformats.org/drawingml/2006/main">
               <a:ext uri="{FF2B5EF4-FFF2-40B4-BE49-F238E27FC236}">
-                <a16:creationId xmlns:a16="http://schemas.microsoft.com/office/drawing/2014/main" id="{1FE7469E-60EA-43B8-A874-397A8BDB3FBA}"/>
+                <a16:creationId xmlns:a16="http://schemas.microsoft.com/office/drawing/2014/main" id="{51DACE01-201B-4664-B956-B9A47D9A39A6}"/>
               </a:ext>
             </a:extLst>
           </p:cNvPr>
@@ -40433,7 +40433,7 @@
           <p:cNvPr id="8" name="">
             <a:extLst xmlns:a="http://schemas.openxmlformats.org/drawingml/2006/main">
               <a:ext uri="{FF2B5EF4-FFF2-40B4-BE49-F238E27FC236}">
-                <a16:creationId xmlns:a16="http://schemas.microsoft.com/office/drawing/2014/main" id="{CEFD4797-64C3-487A-8559-702110468F15}"/>
+                <a16:creationId xmlns:a16="http://schemas.microsoft.com/office/drawing/2014/main" id="{02100ACB-5FD9-4CAD-829E-F50F28084A6C}"/>
               </a:ext>
             </a:extLst>
           </p:cNvPr>
@@ -40485,7 +40485,7 @@
           <p:cNvPr id="9" name="">
             <a:extLst xmlns:a="http://schemas.openxmlformats.org/drawingml/2006/main">
               <a:ext uri="{FF2B5EF4-FFF2-40B4-BE49-F238E27FC236}">
-                <a16:creationId xmlns:a16="http://schemas.microsoft.com/office/drawing/2014/main" id="{DCA4412F-F2FE-4E25-99BE-3DD5ED3F94BF}"/>
+                <a16:creationId xmlns:a16="http://schemas.microsoft.com/office/drawing/2014/main" id="{EDDAE6A6-8BD1-41D0-AFFA-957623153135}"/>
               </a:ext>
             </a:extLst>
           </p:cNvPr>
@@ -40537,7 +40537,7 @@
           <p:cNvPr id="10" name="">
             <a:extLst xmlns:a="http://schemas.openxmlformats.org/drawingml/2006/main">
               <a:ext uri="{FF2B5EF4-FFF2-40B4-BE49-F238E27FC236}">
-                <a16:creationId xmlns:a16="http://schemas.microsoft.com/office/drawing/2014/main" id="{F64D0A48-0C39-4CF5-A297-9098B4358096}"/>
+                <a16:creationId xmlns:a16="http://schemas.microsoft.com/office/drawing/2014/main" id="{9730CAEE-EFF5-4D24-8528-919AD7D6D0EB}"/>
               </a:ext>
             </a:extLst>
           </p:cNvPr>
@@ -40589,7 +40589,7 @@
           <p:cNvPr id="11" name="">
             <a:extLst xmlns:a="http://schemas.openxmlformats.org/drawingml/2006/main">
               <a:ext uri="{FF2B5EF4-FFF2-40B4-BE49-F238E27FC236}">
-                <a16:creationId xmlns:a16="http://schemas.microsoft.com/office/drawing/2014/main" id="{D7AA236C-680E-4E06-8C82-E63DBC8AF48F}"/>
+                <a16:creationId xmlns:a16="http://schemas.microsoft.com/office/drawing/2014/main" id="{294C186A-ED6E-4AAA-96D6-D82DDC2C2272}"/>
               </a:ext>
             </a:extLst>
           </p:cNvPr>
@@ -40620,7 +40620,7 @@
           <p:cNvPr id="12" name="">
             <a:extLst xmlns:a="http://schemas.openxmlformats.org/drawingml/2006/main">
               <a:ext uri="{FF2B5EF4-FFF2-40B4-BE49-F238E27FC236}">
-                <a16:creationId xmlns:a16="http://schemas.microsoft.com/office/drawing/2014/main" id="{9789B8E8-C2F5-4805-8BAF-A33EDB0A5E80}"/>
+                <a16:creationId xmlns:a16="http://schemas.microsoft.com/office/drawing/2014/main" id="{A4A88F44-BF5A-4CF7-A09F-5EE9D2F9E077}"/>
               </a:ext>
             </a:extLst>
           </p:cNvPr>
@@ -40651,7 +40651,7 @@
           <p:cNvPr id="13" name="">
             <a:extLst xmlns:a="http://schemas.openxmlformats.org/drawingml/2006/main">
               <a:ext uri="{FF2B5EF4-FFF2-40B4-BE49-F238E27FC236}">
-                <a16:creationId xmlns:a16="http://schemas.microsoft.com/office/drawing/2014/main" id="{F1C5ABCC-116E-4800-B9F7-40E5D06ECFB2}"/>
+                <a16:creationId xmlns:a16="http://schemas.microsoft.com/office/drawing/2014/main" id="{4A162197-816E-4D96-99F2-4CC9C6BF6D2E}"/>
               </a:ext>
             </a:extLst>
           </p:cNvPr>
@@ -40703,7 +40703,7 @@
           <p:cNvPr id="14" name="">
             <a:extLst xmlns:a="http://schemas.openxmlformats.org/drawingml/2006/main">
               <a:ext uri="{FF2B5EF4-FFF2-40B4-BE49-F238E27FC236}">
-                <a16:creationId xmlns:a16="http://schemas.microsoft.com/office/drawing/2014/main" id="{4F465E90-8072-4723-87E6-A595326FF7B1}"/>
+                <a16:creationId xmlns:a16="http://schemas.microsoft.com/office/drawing/2014/main" id="{9A169DFA-75E3-4B7F-801E-BC4B5CD559B8}"/>
               </a:ext>
             </a:extLst>
           </p:cNvPr>
@@ -40755,7 +40755,7 @@
           <p:cNvPr id="15" name="">
             <a:extLst xmlns:a="http://schemas.openxmlformats.org/drawingml/2006/main">
               <a:ext uri="{FF2B5EF4-FFF2-40B4-BE49-F238E27FC236}">
-                <a16:creationId xmlns:a16="http://schemas.microsoft.com/office/drawing/2014/main" id="{39DC8821-B87B-4E5D-A47B-9D3EEE4592A3}"/>
+                <a16:creationId xmlns:a16="http://schemas.microsoft.com/office/drawing/2014/main" id="{4938BDCD-3AB8-4A1F-864D-ECD39FDE8A8B}"/>
               </a:ext>
             </a:extLst>
           </p:cNvPr>
@@ -40807,7 +40807,7 @@
           <p:cNvPr id="16" name="">
             <a:extLst xmlns:a="http://schemas.openxmlformats.org/drawingml/2006/main">
               <a:ext uri="{FF2B5EF4-FFF2-40B4-BE49-F238E27FC236}">
-                <a16:creationId xmlns:a16="http://schemas.microsoft.com/office/drawing/2014/main" id="{C3485205-DF58-44AD-A963-9B7F26765D3E}"/>
+                <a16:creationId xmlns:a16="http://schemas.microsoft.com/office/drawing/2014/main" id="{A9214EF5-59FE-4CD8-B2B4-E357F22E74C8}"/>
               </a:ext>
             </a:extLst>
           </p:cNvPr>
@@ -40859,7 +40859,7 @@
           <p:cNvPr id="17" name="">
             <a:extLst xmlns:a="http://schemas.openxmlformats.org/drawingml/2006/main">
               <a:ext uri="{FF2B5EF4-FFF2-40B4-BE49-F238E27FC236}">
-                <a16:creationId xmlns:a16="http://schemas.microsoft.com/office/drawing/2014/main" id="{65389D01-6FF5-43F2-9F09-29ACE0203F17}"/>
+                <a16:creationId xmlns:a16="http://schemas.microsoft.com/office/drawing/2014/main" id="{13591F76-553C-456A-A984-931DEAD84E61}"/>
               </a:ext>
             </a:extLst>
           </p:cNvPr>
@@ -40911,7 +40911,7 @@
           <p:cNvPr id="18" name="">
             <a:extLst xmlns:a="http://schemas.openxmlformats.org/drawingml/2006/main">
               <a:ext uri="{FF2B5EF4-FFF2-40B4-BE49-F238E27FC236}">
-                <a16:creationId xmlns:a16="http://schemas.microsoft.com/office/drawing/2014/main" id="{D335CEAB-B021-47DE-BE9F-C48FEA64E9EC}"/>
+                <a16:creationId xmlns:a16="http://schemas.microsoft.com/office/drawing/2014/main" id="{DC4FF43A-565B-4227-B643-3C9FF525002E}"/>
               </a:ext>
             </a:extLst>
           </p:cNvPr>
@@ -40942,7 +40942,7 @@
           <p:cNvPr id="19" name="">
             <a:extLst xmlns:a="http://schemas.openxmlformats.org/drawingml/2006/main">
               <a:ext uri="{FF2B5EF4-FFF2-40B4-BE49-F238E27FC236}">
-                <a16:creationId xmlns:a16="http://schemas.microsoft.com/office/drawing/2014/main" id="{7B827907-A3AD-40CD-ADD9-C9F987752818}"/>
+                <a16:creationId xmlns:a16="http://schemas.microsoft.com/office/drawing/2014/main" id="{C4DD1CC6-7FDC-4D41-BD39-96F0AA884DC0}"/>
               </a:ext>
             </a:extLst>
           </p:cNvPr>
@@ -40994,7 +40994,7 @@
           <p:cNvPr id="20" name="">
             <a:extLst xmlns:a="http://schemas.openxmlformats.org/drawingml/2006/main">
               <a:ext uri="{FF2B5EF4-FFF2-40B4-BE49-F238E27FC236}">
-                <a16:creationId xmlns:a16="http://schemas.microsoft.com/office/drawing/2014/main" id="{B4BB3200-4C80-4836-AC98-908412B200D6}"/>
+                <a16:creationId xmlns:a16="http://schemas.microsoft.com/office/drawing/2014/main" id="{14A7826F-9757-4665-9755-B6E6618E3B4A}"/>
               </a:ext>
             </a:extLst>
           </p:cNvPr>
@@ -41046,7 +41046,7 @@
           <p:cNvPr id="21" name="">
             <a:extLst xmlns:a="http://schemas.openxmlformats.org/drawingml/2006/main">
               <a:ext uri="{FF2B5EF4-FFF2-40B4-BE49-F238E27FC236}">
-                <a16:creationId xmlns:a16="http://schemas.microsoft.com/office/drawing/2014/main" id="{79303277-0FE1-432A-8964-D3B98A34EE5A}"/>
+                <a16:creationId xmlns:a16="http://schemas.microsoft.com/office/drawing/2014/main" id="{02013C25-1EE0-43E2-9FDC-74BC03D82620}"/>
               </a:ext>
             </a:extLst>
           </p:cNvPr>
@@ -41098,7 +41098,7 @@
           <p:cNvPr id="22" name="">
             <a:extLst xmlns:a="http://schemas.openxmlformats.org/drawingml/2006/main">
               <a:ext uri="{FF2B5EF4-FFF2-40B4-BE49-F238E27FC236}">
-                <a16:creationId xmlns:a16="http://schemas.microsoft.com/office/drawing/2014/main" id="{A2BD9685-F295-484B-93A8-7194DEA77EE5}"/>
+                <a16:creationId xmlns:a16="http://schemas.microsoft.com/office/drawing/2014/main" id="{B057E0DB-DA5B-4752-A9FF-CBF906C5F562}"/>
               </a:ext>
             </a:extLst>
           </p:cNvPr>
@@ -41150,7 +41150,7 @@
           <p:cNvPr id="23" name="">
             <a:extLst xmlns:a="http://schemas.openxmlformats.org/drawingml/2006/main">
               <a:ext uri="{FF2B5EF4-FFF2-40B4-BE49-F238E27FC236}">
-                <a16:creationId xmlns:a16="http://schemas.microsoft.com/office/drawing/2014/main" id="{7925B31D-94F4-409A-8EF9-BCFEF73A679D}"/>
+                <a16:creationId xmlns:a16="http://schemas.microsoft.com/office/drawing/2014/main" id="{2040E180-CC96-471F-9AD9-03AA166F1309}"/>
               </a:ext>
             </a:extLst>
           </p:cNvPr>
@@ -41202,7 +41202,7 @@
           <p:cNvPr id="24" name="">
             <a:extLst xmlns:a="http://schemas.openxmlformats.org/drawingml/2006/main">
               <a:ext uri="{FF2B5EF4-FFF2-40B4-BE49-F238E27FC236}">
-                <a16:creationId xmlns:a16="http://schemas.microsoft.com/office/drawing/2014/main" id="{B9A3FFBD-F4E4-456B-8F4B-9CE39684A639}"/>
+                <a16:creationId xmlns:a16="http://schemas.microsoft.com/office/drawing/2014/main" id="{61520358-49D9-4D59-A790-BD51971CEC6E}"/>
               </a:ext>
             </a:extLst>
           </p:cNvPr>
@@ -41233,7 +41233,7 @@
           <p:cNvPr id="25" name="">
             <a:extLst xmlns:a="http://schemas.openxmlformats.org/drawingml/2006/main">
               <a:ext uri="{FF2B5EF4-FFF2-40B4-BE49-F238E27FC236}">
-                <a16:creationId xmlns:a16="http://schemas.microsoft.com/office/drawing/2014/main" id="{AAC3B74E-2AED-42F6-A190-C1AC41CD417C}"/>
+                <a16:creationId xmlns:a16="http://schemas.microsoft.com/office/drawing/2014/main" id="{E4FF487F-CE91-4321-9B1F-878224827859}"/>
               </a:ext>
             </a:extLst>
           </p:cNvPr>
@@ -41264,7 +41264,7 @@
           <p:cNvPr id="26" name="">
             <a:extLst xmlns:a="http://schemas.openxmlformats.org/drawingml/2006/main">
               <a:ext uri="{FF2B5EF4-FFF2-40B4-BE49-F238E27FC236}">
-                <a16:creationId xmlns:a16="http://schemas.microsoft.com/office/drawing/2014/main" id="{0C576BBC-EBE8-4B61-AF88-B5D4816B55ED}"/>
+                <a16:creationId xmlns:a16="http://schemas.microsoft.com/office/drawing/2014/main" id="{D5062A7E-BCAB-4C82-A188-A59F14C80473}"/>
               </a:ext>
             </a:extLst>
           </p:cNvPr>
@@ -41316,7 +41316,7 @@
           <p:cNvPr id="27" name="">
             <a:extLst xmlns:a="http://schemas.openxmlformats.org/drawingml/2006/main">
               <a:ext uri="{FF2B5EF4-FFF2-40B4-BE49-F238E27FC236}">
-                <a16:creationId xmlns:a16="http://schemas.microsoft.com/office/drawing/2014/main" id="{ECC43E21-ED31-4C3E-8F71-7EF837C17D5D}"/>
+                <a16:creationId xmlns:a16="http://schemas.microsoft.com/office/drawing/2014/main" id="{3FF83167-3198-4982-8653-37026CA61DC6}"/>
               </a:ext>
             </a:extLst>
           </p:cNvPr>
@@ -41368,7 +41368,7 @@
           <p:cNvPr id="28" name="">
             <a:extLst xmlns:a="http://schemas.openxmlformats.org/drawingml/2006/main">
               <a:ext uri="{FF2B5EF4-FFF2-40B4-BE49-F238E27FC236}">
-                <a16:creationId xmlns:a16="http://schemas.microsoft.com/office/drawing/2014/main" id="{3282FD00-BB15-42C1-A90C-849D8877AC54}"/>
+                <a16:creationId xmlns:a16="http://schemas.microsoft.com/office/drawing/2014/main" id="{D1ADEB6B-E243-4D27-BBFF-3B6469514293}"/>
               </a:ext>
             </a:extLst>
           </p:cNvPr>
@@ -41420,7 +41420,7 @@
           <p:cNvPr id="29" name="">
             <a:extLst xmlns:a="http://schemas.openxmlformats.org/drawingml/2006/main">
               <a:ext uri="{FF2B5EF4-FFF2-40B4-BE49-F238E27FC236}">
-                <a16:creationId xmlns:a16="http://schemas.microsoft.com/office/drawing/2014/main" id="{7A23ABE4-AD6B-405A-94A9-DAE2C450995D}"/>
+                <a16:creationId xmlns:a16="http://schemas.microsoft.com/office/drawing/2014/main" id="{76E3F8B3-9DCE-4814-A910-646190C8DB47}"/>
               </a:ext>
             </a:extLst>
           </p:cNvPr>
@@ -41472,7 +41472,7 @@
           <p:cNvPr id="30" name="">
             <a:extLst xmlns:a="http://schemas.openxmlformats.org/drawingml/2006/main">
               <a:ext uri="{FF2B5EF4-FFF2-40B4-BE49-F238E27FC236}">
-                <a16:creationId xmlns:a16="http://schemas.microsoft.com/office/drawing/2014/main" id="{0B594707-7B6E-470C-BA80-578A8A1859E9}"/>
+                <a16:creationId xmlns:a16="http://schemas.microsoft.com/office/drawing/2014/main" id="{03F62698-4B1A-417F-AC83-C1E85A0A9218}"/>
               </a:ext>
             </a:extLst>
           </p:cNvPr>
@@ -41524,7 +41524,7 @@
           <p:cNvPr id="31" name="">
             <a:extLst xmlns:a="http://schemas.openxmlformats.org/drawingml/2006/main">
               <a:ext uri="{FF2B5EF4-FFF2-40B4-BE49-F238E27FC236}">
-                <a16:creationId xmlns:a16="http://schemas.microsoft.com/office/drawing/2014/main" id="{5AA78253-720C-4AB7-A599-7309B17BAA2A}"/>
+                <a16:creationId xmlns:a16="http://schemas.microsoft.com/office/drawing/2014/main" id="{A347C34F-76EB-4B0C-BED1-0FA851891293}"/>
               </a:ext>
             </a:extLst>
           </p:cNvPr>
@@ -41555,7 +41555,7 @@
           <p:cNvPr id="32" name="">
             <a:extLst xmlns:a="http://schemas.openxmlformats.org/drawingml/2006/main">
               <a:ext uri="{FF2B5EF4-FFF2-40B4-BE49-F238E27FC236}">
-                <a16:creationId xmlns:a16="http://schemas.microsoft.com/office/drawing/2014/main" id="{CB6CE2E8-E019-4105-89F2-6D27966FF866}"/>
+                <a16:creationId xmlns:a16="http://schemas.microsoft.com/office/drawing/2014/main" id="{F4DCBEC0-D902-4E75-80AB-5AAADDDC2F9D}"/>
               </a:ext>
             </a:extLst>
           </p:cNvPr>
@@ -41607,7 +41607,7 @@
           <p:cNvPr id="33" name="">
             <a:extLst xmlns:a="http://schemas.openxmlformats.org/drawingml/2006/main">
               <a:ext uri="{FF2B5EF4-FFF2-40B4-BE49-F238E27FC236}">
-                <a16:creationId xmlns:a16="http://schemas.microsoft.com/office/drawing/2014/main" id="{52244677-692F-4E4E-8119-C19BB5E172F2}"/>
+                <a16:creationId xmlns:a16="http://schemas.microsoft.com/office/drawing/2014/main" id="{8C56D1E8-AF6E-49E4-8B83-CDAE8E1C3EDD}"/>
               </a:ext>
             </a:extLst>
           </p:cNvPr>
@@ -41659,7 +41659,7 @@
           <p:cNvPr id="34" name="">
             <a:extLst xmlns:a="http://schemas.openxmlformats.org/drawingml/2006/main">
               <a:ext uri="{FF2B5EF4-FFF2-40B4-BE49-F238E27FC236}">
-                <a16:creationId xmlns:a16="http://schemas.microsoft.com/office/drawing/2014/main" id="{0CD142FB-A513-4093-A05A-C4022B229BEE}"/>
+                <a16:creationId xmlns:a16="http://schemas.microsoft.com/office/drawing/2014/main" id="{2437A120-F7AE-4F31-9E9A-E2861E386C1E}"/>
               </a:ext>
             </a:extLst>
           </p:cNvPr>
@@ -41711,7 +41711,7 @@
           <p:cNvPr id="35" name="">
             <a:extLst xmlns:a="http://schemas.openxmlformats.org/drawingml/2006/main">
               <a:ext uri="{FF2B5EF4-FFF2-40B4-BE49-F238E27FC236}">
-                <a16:creationId xmlns:a16="http://schemas.microsoft.com/office/drawing/2014/main" id="{B31512CE-0FB3-4A74-AB67-2DB556B4A7A4}"/>
+                <a16:creationId xmlns:a16="http://schemas.microsoft.com/office/drawing/2014/main" id="{E3F179AB-0E95-48A6-A348-23954856FFD1}"/>
               </a:ext>
             </a:extLst>
           </p:cNvPr>
@@ -41763,7 +41763,7 @@
           <p:cNvPr id="36" name="">
             <a:extLst xmlns:a="http://schemas.openxmlformats.org/drawingml/2006/main">
               <a:ext uri="{FF2B5EF4-FFF2-40B4-BE49-F238E27FC236}">
-                <a16:creationId xmlns:a16="http://schemas.microsoft.com/office/drawing/2014/main" id="{A9F4D7B3-294F-4535-8B7C-10C8AAB51CDD}"/>
+                <a16:creationId xmlns:a16="http://schemas.microsoft.com/office/drawing/2014/main" id="{5B53E081-F56E-4789-91FA-6AEEC1451624}"/>
               </a:ext>
             </a:extLst>
           </p:cNvPr>
@@ -41815,7 +41815,7 @@
           <p:cNvPr id="37" name="">
             <a:extLst xmlns:a="http://schemas.openxmlformats.org/drawingml/2006/main">
               <a:ext uri="{FF2B5EF4-FFF2-40B4-BE49-F238E27FC236}">
-                <a16:creationId xmlns:a16="http://schemas.microsoft.com/office/drawing/2014/main" id="{6714285C-79EA-4A86-A082-A0DD63861499}"/>
+                <a16:creationId xmlns:a16="http://schemas.microsoft.com/office/drawing/2014/main" id="{3863F312-8B87-45FF-9DBC-6DA8A98763D1}"/>
               </a:ext>
             </a:extLst>
           </p:cNvPr>
@@ -41846,7 +41846,7 @@
           <p:cNvPr id="38" name="">
             <a:extLst xmlns:a="http://schemas.openxmlformats.org/drawingml/2006/main">
               <a:ext uri="{FF2B5EF4-FFF2-40B4-BE49-F238E27FC236}">
-                <a16:creationId xmlns:a16="http://schemas.microsoft.com/office/drawing/2014/main" id="{72A0FA20-60A0-491F-9513-51067288106D}"/>
+                <a16:creationId xmlns:a16="http://schemas.microsoft.com/office/drawing/2014/main" id="{DC48A667-2B81-48E3-8159-66E762B1E569}"/>
               </a:ext>
             </a:extLst>
           </p:cNvPr>
@@ -41877,7 +41877,7 @@
           <p:cNvPr id="39" name="">
             <a:extLst xmlns:a="http://schemas.openxmlformats.org/drawingml/2006/main">
               <a:ext uri="{FF2B5EF4-FFF2-40B4-BE49-F238E27FC236}">
-                <a16:creationId xmlns:a16="http://schemas.microsoft.com/office/drawing/2014/main" id="{8A9D6E79-8AEA-463B-9BCA-76FA07B585E3}"/>
+                <a16:creationId xmlns:a16="http://schemas.microsoft.com/office/drawing/2014/main" id="{460B018B-2D04-4E31-BB3D-AA9C13C52BAC}"/>
               </a:ext>
             </a:extLst>
           </p:cNvPr>
@@ -41929,7 +41929,7 @@
           <p:cNvPr id="40" name="">
             <a:extLst xmlns:a="http://schemas.openxmlformats.org/drawingml/2006/main">
               <a:ext uri="{FF2B5EF4-FFF2-40B4-BE49-F238E27FC236}">
-                <a16:creationId xmlns:a16="http://schemas.microsoft.com/office/drawing/2014/main" id="{43723CE4-5D5F-46AD-8D87-44A0448B2AAB}"/>
+                <a16:creationId xmlns:a16="http://schemas.microsoft.com/office/drawing/2014/main" id="{5EA80133-CC8C-463A-8D37-E5BEE5B5F40B}"/>
               </a:ext>
             </a:extLst>
           </p:cNvPr>
@@ -41981,7 +41981,7 @@
           <p:cNvPr id="41" name="">
             <a:extLst xmlns:a="http://schemas.openxmlformats.org/drawingml/2006/main">
               <a:ext uri="{FF2B5EF4-FFF2-40B4-BE49-F238E27FC236}">
-                <a16:creationId xmlns:a16="http://schemas.microsoft.com/office/drawing/2014/main" id="{9FEB0160-DF3A-4559-9073-922F97AF13C1}"/>
+                <a16:creationId xmlns:a16="http://schemas.microsoft.com/office/drawing/2014/main" id="{73BA3BEF-277B-4F28-8D7E-0570CA98E82B}"/>
               </a:ext>
             </a:extLst>
           </p:cNvPr>
@@ -42033,7 +42033,7 @@
           <p:cNvPr id="42" name="">
             <a:extLst xmlns:a="http://schemas.openxmlformats.org/drawingml/2006/main">
               <a:ext uri="{FF2B5EF4-FFF2-40B4-BE49-F238E27FC236}">
-                <a16:creationId xmlns:a16="http://schemas.microsoft.com/office/drawing/2014/main" id="{63BBDFEE-26E3-4C7E-94E6-C827BE65C3AC}"/>
+                <a16:creationId xmlns:a16="http://schemas.microsoft.com/office/drawing/2014/main" id="{8C92507E-2AB9-4291-A184-CD694BF0A8E5}"/>
               </a:ext>
             </a:extLst>
           </p:cNvPr>
@@ -42085,7 +42085,7 @@
           <p:cNvPr id="43" name="">
             <a:extLst xmlns:a="http://schemas.openxmlformats.org/drawingml/2006/main">
               <a:ext uri="{FF2B5EF4-FFF2-40B4-BE49-F238E27FC236}">
-                <a16:creationId xmlns:a16="http://schemas.microsoft.com/office/drawing/2014/main" id="{593BF2E8-0D43-4ABE-8608-83975EE1C545}"/>
+                <a16:creationId xmlns:a16="http://schemas.microsoft.com/office/drawing/2014/main" id="{AFFD2011-767D-44D2-B57F-D0DF637154EE}"/>
               </a:ext>
             </a:extLst>
           </p:cNvPr>
@@ -42137,7 +42137,7 @@
           <p:cNvPr id="44" name="">
             <a:extLst xmlns:a="http://schemas.openxmlformats.org/drawingml/2006/main">
               <a:ext uri="{FF2B5EF4-FFF2-40B4-BE49-F238E27FC236}">
-                <a16:creationId xmlns:a16="http://schemas.microsoft.com/office/drawing/2014/main" id="{DC14C3A5-D3D4-4B27-B387-304C8112C060}"/>
+                <a16:creationId xmlns:a16="http://schemas.microsoft.com/office/drawing/2014/main" id="{2B97E2E4-EF2C-40FE-A95D-CAAE7F1968E2}"/>
               </a:ext>
             </a:extLst>
           </p:cNvPr>
@@ -42168,7 +42168,7 @@
           <p:cNvPr id="45" name="">
             <a:extLst xmlns:a="http://schemas.openxmlformats.org/drawingml/2006/main">
               <a:ext uri="{FF2B5EF4-FFF2-40B4-BE49-F238E27FC236}">
-                <a16:creationId xmlns:a16="http://schemas.microsoft.com/office/drawing/2014/main" id="{25C344B1-DAE4-4FC6-8F80-2A774076204E}"/>
+                <a16:creationId xmlns:a16="http://schemas.microsoft.com/office/drawing/2014/main" id="{0D3CF9DC-D04F-4D53-83BB-B47801E75A17}"/>
               </a:ext>
             </a:extLst>
           </p:cNvPr>
@@ -42220,7 +42220,7 @@
           <p:cNvPr id="46" name="">
             <a:extLst xmlns:a="http://schemas.openxmlformats.org/drawingml/2006/main">
               <a:ext uri="{FF2B5EF4-FFF2-40B4-BE49-F238E27FC236}">
-                <a16:creationId xmlns:a16="http://schemas.microsoft.com/office/drawing/2014/main" id="{8654D1B7-6482-497E-AD6B-9FDC4FFEA4DD}"/>
+                <a16:creationId xmlns:a16="http://schemas.microsoft.com/office/drawing/2014/main" id="{CD4A0B06-E07A-488B-93E8-74D996C9D198}"/>
               </a:ext>
             </a:extLst>
           </p:cNvPr>
@@ -42272,7 +42272,7 @@
           <p:cNvPr id="47" name="">
             <a:extLst xmlns:a="http://schemas.openxmlformats.org/drawingml/2006/main">
               <a:ext uri="{FF2B5EF4-FFF2-40B4-BE49-F238E27FC236}">
-                <a16:creationId xmlns:a16="http://schemas.microsoft.com/office/drawing/2014/main" id="{48D34A7F-8C48-4394-900E-2065377B88A1}"/>
+                <a16:creationId xmlns:a16="http://schemas.microsoft.com/office/drawing/2014/main" id="{4B5BF1E1-3187-4120-93EB-5BE93AE52F46}"/>
               </a:ext>
             </a:extLst>
           </p:cNvPr>
@@ -42324,7 +42324,7 @@
           <p:cNvPr id="48" name="">
             <a:extLst xmlns:a="http://schemas.openxmlformats.org/drawingml/2006/main">
               <a:ext uri="{FF2B5EF4-FFF2-40B4-BE49-F238E27FC236}">
-                <a16:creationId xmlns:a16="http://schemas.microsoft.com/office/drawing/2014/main" id="{09EFD8EB-A787-4BED-A434-4A217D9F6D7F}"/>
+                <a16:creationId xmlns:a16="http://schemas.microsoft.com/office/drawing/2014/main" id="{55E0A832-9DC8-427E-81F9-B822B36B3A8D}"/>
               </a:ext>
             </a:extLst>
           </p:cNvPr>
@@ -42376,7 +42376,7 @@
           <p:cNvPr id="49" name="">
             <a:extLst xmlns:a="http://schemas.openxmlformats.org/drawingml/2006/main">
               <a:ext uri="{FF2B5EF4-FFF2-40B4-BE49-F238E27FC236}">
-                <a16:creationId xmlns:a16="http://schemas.microsoft.com/office/drawing/2014/main" id="{A208885B-0B13-4C68-A176-36585C0804E2}"/>
+                <a16:creationId xmlns:a16="http://schemas.microsoft.com/office/drawing/2014/main" id="{5E5A2310-EA98-4FB2-A95B-8A0626946A4B}"/>
               </a:ext>
             </a:extLst>
           </p:cNvPr>
@@ -42428,7 +42428,7 @@
           <p:cNvPr id="50" name="">
             <a:extLst xmlns:a="http://schemas.openxmlformats.org/drawingml/2006/main">
               <a:ext uri="{FF2B5EF4-FFF2-40B4-BE49-F238E27FC236}">
-                <a16:creationId xmlns:a16="http://schemas.microsoft.com/office/drawing/2014/main" id="{806FF738-8636-4D05-A465-66356FB2C8FE}"/>
+                <a16:creationId xmlns:a16="http://schemas.microsoft.com/office/drawing/2014/main" id="{9B3C3041-BE0E-4ED4-B6BB-22570A010F51}"/>
               </a:ext>
             </a:extLst>
           </p:cNvPr>
@@ -42459,7 +42459,7 @@
           <p:cNvPr id="51" name="">
             <a:extLst xmlns:a="http://schemas.openxmlformats.org/drawingml/2006/main">
               <a:ext uri="{FF2B5EF4-FFF2-40B4-BE49-F238E27FC236}">
-                <a16:creationId xmlns:a16="http://schemas.microsoft.com/office/drawing/2014/main" id="{50DC0CD3-833E-4A9B-8451-33B44B2EAF27}"/>
+                <a16:creationId xmlns:a16="http://schemas.microsoft.com/office/drawing/2014/main" id="{29229FFE-9BE2-4370-820A-2BAF97421BDD}"/>
               </a:ext>
             </a:extLst>
           </p:cNvPr>
@@ -42490,7 +42490,7 @@
           <p:cNvPr id="52" name="">
             <a:extLst xmlns:a="http://schemas.openxmlformats.org/drawingml/2006/main">
               <a:ext uri="{FF2B5EF4-FFF2-40B4-BE49-F238E27FC236}">
-                <a16:creationId xmlns:a16="http://schemas.microsoft.com/office/drawing/2014/main" id="{5B71957F-2EA4-4803-8598-FCCC62313C05}"/>
+                <a16:creationId xmlns:a16="http://schemas.microsoft.com/office/drawing/2014/main" id="{BAEA07FF-8DA7-41AA-A846-B92BCC9934E0}"/>
               </a:ext>
             </a:extLst>
           </p:cNvPr>
@@ -42542,7 +42542,7 @@
           <p:cNvPr id="53" name="">
             <a:extLst xmlns:a="http://schemas.openxmlformats.org/drawingml/2006/main">
               <a:ext uri="{FF2B5EF4-FFF2-40B4-BE49-F238E27FC236}">
-                <a16:creationId xmlns:a16="http://schemas.microsoft.com/office/drawing/2014/main" id="{6FA4CEF0-0C11-4B13-A643-A283A9A5E3F9}"/>
+                <a16:creationId xmlns:a16="http://schemas.microsoft.com/office/drawing/2014/main" id="{6919AE7F-EFBC-4F07-94BA-D2E4F2E91B2C}"/>
               </a:ext>
             </a:extLst>
           </p:cNvPr>
@@ -42594,7 +42594,7 @@
           <p:cNvPr id="54" name="">
             <a:extLst xmlns:a="http://schemas.openxmlformats.org/drawingml/2006/main">
               <a:ext uri="{FF2B5EF4-FFF2-40B4-BE49-F238E27FC236}">
-                <a16:creationId xmlns:a16="http://schemas.microsoft.com/office/drawing/2014/main" id="{38BE4BF9-F93E-43BA-B9AF-ABA25294093A}"/>
+                <a16:creationId xmlns:a16="http://schemas.microsoft.com/office/drawing/2014/main" id="{5DD6CFFB-FC6B-4F66-B7BD-08D8A9172FCF}"/>
               </a:ext>
             </a:extLst>
           </p:cNvPr>
@@ -42646,7 +42646,7 @@
           <p:cNvPr id="55" name="">
             <a:extLst xmlns:a="http://schemas.openxmlformats.org/drawingml/2006/main">
               <a:ext uri="{FF2B5EF4-FFF2-40B4-BE49-F238E27FC236}">
-                <a16:creationId xmlns:a16="http://schemas.microsoft.com/office/drawing/2014/main" id="{23A52F41-ED48-4DE1-ADAE-CB9E2ACD4E86}"/>
+                <a16:creationId xmlns:a16="http://schemas.microsoft.com/office/drawing/2014/main" id="{2840E975-726B-4A5F-8A73-3094BF3FEBDE}"/>
               </a:ext>
             </a:extLst>
           </p:cNvPr>
@@ -42698,7 +42698,7 @@
           <p:cNvPr id="56" name="">
             <a:extLst xmlns:a="http://schemas.openxmlformats.org/drawingml/2006/main">
               <a:ext uri="{FF2B5EF4-FFF2-40B4-BE49-F238E27FC236}">
-                <a16:creationId xmlns:a16="http://schemas.microsoft.com/office/drawing/2014/main" id="{09B65465-F6C1-421A-9C74-A1935532152E}"/>
+                <a16:creationId xmlns:a16="http://schemas.microsoft.com/office/drawing/2014/main" id="{6866B95C-BE9A-427F-9418-F25D39FFA937}"/>
               </a:ext>
             </a:extLst>
           </p:cNvPr>
@@ -42750,7 +42750,7 @@
           <p:cNvPr id="57" name="">
             <a:extLst xmlns:a="http://schemas.openxmlformats.org/drawingml/2006/main">
               <a:ext uri="{FF2B5EF4-FFF2-40B4-BE49-F238E27FC236}">
-                <a16:creationId xmlns:a16="http://schemas.microsoft.com/office/drawing/2014/main" id="{09837FFF-F6B0-4A4F-A9D1-D45EDF2162C9}"/>
+                <a16:creationId xmlns:a16="http://schemas.microsoft.com/office/drawing/2014/main" id="{1FF1D2D7-38E9-4D14-AA4A-907C3866BE13}"/>
               </a:ext>
             </a:extLst>
           </p:cNvPr>
@@ -42781,7 +42781,7 @@
           <p:cNvPr id="58" name="">
             <a:extLst xmlns:a="http://schemas.openxmlformats.org/drawingml/2006/main">
               <a:ext uri="{FF2B5EF4-FFF2-40B4-BE49-F238E27FC236}">
-                <a16:creationId xmlns:a16="http://schemas.microsoft.com/office/drawing/2014/main" id="{6DD20488-DDB3-4F21-9FC7-B1578008E463}"/>
+                <a16:creationId xmlns:a16="http://schemas.microsoft.com/office/drawing/2014/main" id="{DD83C57D-FAE6-4C4E-9093-57489E88593A}"/>
               </a:ext>
             </a:extLst>
           </p:cNvPr>
@@ -42833,7 +42833,7 @@
           <p:cNvPr id="59" name="">
             <a:extLst xmlns:a="http://schemas.openxmlformats.org/drawingml/2006/main">
               <a:ext uri="{FF2B5EF4-FFF2-40B4-BE49-F238E27FC236}">
-                <a16:creationId xmlns:a16="http://schemas.microsoft.com/office/drawing/2014/main" id="{F77E8B87-BA3B-4C41-9C56-38D39623FB03}"/>
+                <a16:creationId xmlns:a16="http://schemas.microsoft.com/office/drawing/2014/main" id="{6E0A4477-08BC-4FC8-8F89-087608B5CD53}"/>
               </a:ext>
             </a:extLst>
           </p:cNvPr>
@@ -42885,7 +42885,7 @@
           <p:cNvPr id="60" name="">
             <a:extLst xmlns:a="http://schemas.openxmlformats.org/drawingml/2006/main">
               <a:ext uri="{FF2B5EF4-FFF2-40B4-BE49-F238E27FC236}">
-                <a16:creationId xmlns:a16="http://schemas.microsoft.com/office/drawing/2014/main" id="{40FE644D-EEB5-4627-BDA0-654BAC08D916}"/>
+                <a16:creationId xmlns:a16="http://schemas.microsoft.com/office/drawing/2014/main" id="{1177AB64-57C4-40F7-852A-4AB44B88C30C}"/>
               </a:ext>
             </a:extLst>
           </p:cNvPr>
@@ -42937,7 +42937,7 @@
           <p:cNvPr id="61" name="">
             <a:extLst xmlns:a="http://schemas.openxmlformats.org/drawingml/2006/main">
               <a:ext uri="{FF2B5EF4-FFF2-40B4-BE49-F238E27FC236}">
-                <a16:creationId xmlns:a16="http://schemas.microsoft.com/office/drawing/2014/main" id="{BCE9C6CE-370B-4C92-AA27-56200B5C2C1C}"/>
+                <a16:creationId xmlns:a16="http://schemas.microsoft.com/office/drawing/2014/main" id="{54762C16-4F55-4671-B6B3-E97C2454BBAC}"/>
               </a:ext>
             </a:extLst>
           </p:cNvPr>
@@ -42989,7 +42989,7 @@
           <p:cNvPr id="62" name="">
             <a:extLst xmlns:a="http://schemas.openxmlformats.org/drawingml/2006/main">
               <a:ext uri="{FF2B5EF4-FFF2-40B4-BE49-F238E27FC236}">
-                <a16:creationId xmlns:a16="http://schemas.microsoft.com/office/drawing/2014/main" id="{6D5678B9-438B-46E5-9EFB-B66AFC148359}"/>
+                <a16:creationId xmlns:a16="http://schemas.microsoft.com/office/drawing/2014/main" id="{8A727BBA-DB4B-4604-BC98-B355B2328E7E}"/>
               </a:ext>
             </a:extLst>
           </p:cNvPr>
@@ -43041,7 +43041,7 @@
           <p:cNvPr id="63" name="">
             <a:extLst xmlns:a="http://schemas.openxmlformats.org/drawingml/2006/main">
               <a:ext uri="{FF2B5EF4-FFF2-40B4-BE49-F238E27FC236}">
-                <a16:creationId xmlns:a16="http://schemas.microsoft.com/office/drawing/2014/main" id="{B136E169-BAD7-4DD1-AD4A-4A35D1DDBADE}"/>
+                <a16:creationId xmlns:a16="http://schemas.microsoft.com/office/drawing/2014/main" id="{75E49A0B-5029-4FC8-A834-DEF7988311E3}"/>
               </a:ext>
             </a:extLst>
           </p:cNvPr>
@@ -43072,7 +43072,7 @@
           <p:cNvPr id="64" name="">
             <a:extLst xmlns:a="http://schemas.openxmlformats.org/drawingml/2006/main">
               <a:ext uri="{FF2B5EF4-FFF2-40B4-BE49-F238E27FC236}">
-                <a16:creationId xmlns:a16="http://schemas.microsoft.com/office/drawing/2014/main" id="{0361354B-6746-45B5-8C54-2AC2A6BDA977}"/>
+                <a16:creationId xmlns:a16="http://schemas.microsoft.com/office/drawing/2014/main" id="{EDE8C619-4883-49E5-9F97-2CC72F3141FE}"/>
               </a:ext>
             </a:extLst>
           </p:cNvPr>
@@ -43103,7 +43103,7 @@
           <p:cNvPr id="65" name="">
             <a:extLst xmlns:a="http://schemas.openxmlformats.org/drawingml/2006/main">
               <a:ext uri="{FF2B5EF4-FFF2-40B4-BE49-F238E27FC236}">
-                <a16:creationId xmlns:a16="http://schemas.microsoft.com/office/drawing/2014/main" id="{78725179-9B89-4F8D-BB7C-03236E342067}"/>
+                <a16:creationId xmlns:a16="http://schemas.microsoft.com/office/drawing/2014/main" id="{0118B3F2-821F-4E26-A099-58BFC34393C2}"/>
               </a:ext>
             </a:extLst>
           </p:cNvPr>
@@ -43155,7 +43155,7 @@
           <p:cNvPr id="66" name="">
             <a:extLst xmlns:a="http://schemas.openxmlformats.org/drawingml/2006/main">
               <a:ext uri="{FF2B5EF4-FFF2-40B4-BE49-F238E27FC236}">
-                <a16:creationId xmlns:a16="http://schemas.microsoft.com/office/drawing/2014/main" id="{BB1A5DD5-BDD3-44E2-A630-73A40B6103CA}"/>
+                <a16:creationId xmlns:a16="http://schemas.microsoft.com/office/drawing/2014/main" id="{DB787E4B-842D-4E06-AC35-24A0E595A46A}"/>
               </a:ext>
             </a:extLst>
           </p:cNvPr>
@@ -43207,7 +43207,7 @@
           <p:cNvPr id="67" name="">
             <a:extLst xmlns:a="http://schemas.openxmlformats.org/drawingml/2006/main">
               <a:ext uri="{FF2B5EF4-FFF2-40B4-BE49-F238E27FC236}">
-                <a16:creationId xmlns:a16="http://schemas.microsoft.com/office/drawing/2014/main" id="{631BFD8C-EAF7-4025-B1D9-A851D76C43C4}"/>
+                <a16:creationId xmlns:a16="http://schemas.microsoft.com/office/drawing/2014/main" id="{4A670ED1-A2E2-4453-8271-EBFDC595FF68}"/>
               </a:ext>
             </a:extLst>
           </p:cNvPr>
@@ -43259,7 +43259,7 @@
           <p:cNvPr id="68" name="">
             <a:extLst xmlns:a="http://schemas.openxmlformats.org/drawingml/2006/main">
               <a:ext uri="{FF2B5EF4-FFF2-40B4-BE49-F238E27FC236}">
-                <a16:creationId xmlns:a16="http://schemas.microsoft.com/office/drawing/2014/main" id="{F93AFA4A-63A0-4DD5-A578-1DA72CAB024B}"/>
+                <a16:creationId xmlns:a16="http://schemas.microsoft.com/office/drawing/2014/main" id="{445F4668-A5F8-40C1-9FA2-08406154A623}"/>
               </a:ext>
             </a:extLst>
           </p:cNvPr>
@@ -43311,7 +43311,7 @@
           <p:cNvPr id="69" name="">
             <a:extLst xmlns:a="http://schemas.openxmlformats.org/drawingml/2006/main">
               <a:ext uri="{FF2B5EF4-FFF2-40B4-BE49-F238E27FC236}">
-                <a16:creationId xmlns:a16="http://schemas.microsoft.com/office/drawing/2014/main" id="{4DD481A5-8E34-4BD7-85F5-5429F9EFEC1E}"/>
+                <a16:creationId xmlns:a16="http://schemas.microsoft.com/office/drawing/2014/main" id="{51E290BE-DF5A-45D5-82D9-2B3365E69878}"/>
               </a:ext>
             </a:extLst>
           </p:cNvPr>
@@ -43363,7 +43363,7 @@
           <p:cNvPr id="70" name="">
             <a:extLst xmlns:a="http://schemas.openxmlformats.org/drawingml/2006/main">
               <a:ext uri="{FF2B5EF4-FFF2-40B4-BE49-F238E27FC236}">
-                <a16:creationId xmlns:a16="http://schemas.microsoft.com/office/drawing/2014/main" id="{81DDD136-2636-4422-A60A-D06F4C52E7FA}"/>
+                <a16:creationId xmlns:a16="http://schemas.microsoft.com/office/drawing/2014/main" id="{7375860C-87D0-40C9-B847-9B84506C1BCA}"/>
               </a:ext>
             </a:extLst>
           </p:cNvPr>
@@ -43394,7 +43394,7 @@
           <p:cNvPr id="71" name="">
             <a:extLst xmlns:a="http://schemas.openxmlformats.org/drawingml/2006/main">
               <a:ext uri="{FF2B5EF4-FFF2-40B4-BE49-F238E27FC236}">
-                <a16:creationId xmlns:a16="http://schemas.microsoft.com/office/drawing/2014/main" id="{E3C7530F-BA32-488F-8E03-858BB4D161CC}"/>
+                <a16:creationId xmlns:a16="http://schemas.microsoft.com/office/drawing/2014/main" id="{E544EFC4-F6D8-4A14-8040-35B74A3D445E}"/>
               </a:ext>
             </a:extLst>
           </p:cNvPr>
@@ -43446,7 +43446,7 @@
           <p:cNvPr id="72" name="">
             <a:extLst xmlns:a="http://schemas.openxmlformats.org/drawingml/2006/main">
               <a:ext uri="{FF2B5EF4-FFF2-40B4-BE49-F238E27FC236}">
-                <a16:creationId xmlns:a16="http://schemas.microsoft.com/office/drawing/2014/main" id="{D8A51F0D-688D-4F41-82FB-39B340E910F7}"/>
+                <a16:creationId xmlns:a16="http://schemas.microsoft.com/office/drawing/2014/main" id="{93AC94E8-28A3-445F-A4A1-B81DF1BF1616}"/>
               </a:ext>
             </a:extLst>
           </p:cNvPr>
@@ -43498,7 +43498,7 @@
           <p:cNvPr id="73" name="">
             <a:extLst xmlns:a="http://schemas.openxmlformats.org/drawingml/2006/main">
               <a:ext uri="{FF2B5EF4-FFF2-40B4-BE49-F238E27FC236}">
-                <a16:creationId xmlns:a16="http://schemas.microsoft.com/office/drawing/2014/main" id="{C314DD4D-9853-4130-8CAC-FCCCF01EB96F}"/>
+                <a16:creationId xmlns:a16="http://schemas.microsoft.com/office/drawing/2014/main" id="{537A6C8F-6C9C-4159-B8BF-D5ADD866D0BC}"/>
               </a:ext>
             </a:extLst>
           </p:cNvPr>
@@ -43550,7 +43550,7 @@
           <p:cNvPr id="74" name="">
             <a:extLst xmlns:a="http://schemas.openxmlformats.org/drawingml/2006/main">
               <a:ext uri="{FF2B5EF4-FFF2-40B4-BE49-F238E27FC236}">
-                <a16:creationId xmlns:a16="http://schemas.microsoft.com/office/drawing/2014/main" id="{F23E1D83-9A5C-4BCC-9698-2AE9DAB0F469}"/>
+                <a16:creationId xmlns:a16="http://schemas.microsoft.com/office/drawing/2014/main" id="{FA291EF2-4570-4477-BAEC-54CB6ADE2185}"/>
               </a:ext>
             </a:extLst>
           </p:cNvPr>
@@ -43602,7 +43602,7 @@
           <p:cNvPr id="75" name="">
             <a:extLst xmlns:a="http://schemas.openxmlformats.org/drawingml/2006/main">
               <a:ext uri="{FF2B5EF4-FFF2-40B4-BE49-F238E27FC236}">
-                <a16:creationId xmlns:a16="http://schemas.microsoft.com/office/drawing/2014/main" id="{0C87AFC0-6824-480E-BF2F-00D3B30365D9}"/>
+                <a16:creationId xmlns:a16="http://schemas.microsoft.com/office/drawing/2014/main" id="{F2A0220F-F374-4F2D-A5CE-BE6BDBC4C39E}"/>
               </a:ext>
             </a:extLst>
           </p:cNvPr>
@@ -43654,7 +43654,7 @@
           <p:cNvPr id="76" name="">
             <a:extLst xmlns:a="http://schemas.openxmlformats.org/drawingml/2006/main">
               <a:ext uri="{FF2B5EF4-FFF2-40B4-BE49-F238E27FC236}">
-                <a16:creationId xmlns:a16="http://schemas.microsoft.com/office/drawing/2014/main" id="{6E062729-1E4E-4197-9D75-0FFE4609339E}"/>
+                <a16:creationId xmlns:a16="http://schemas.microsoft.com/office/drawing/2014/main" id="{215A0D50-473E-44EF-BA85-41E536D51063}"/>
               </a:ext>
             </a:extLst>
           </p:cNvPr>
@@ -43685,7 +43685,7 @@
           <p:cNvPr id="77" name="">
             <a:extLst xmlns:a="http://schemas.openxmlformats.org/drawingml/2006/main">
               <a:ext uri="{FF2B5EF4-FFF2-40B4-BE49-F238E27FC236}">
-                <a16:creationId xmlns:a16="http://schemas.microsoft.com/office/drawing/2014/main" id="{FAF0B477-BBBC-4070-A4F3-1D10FFD4B022}"/>
+                <a16:creationId xmlns:a16="http://schemas.microsoft.com/office/drawing/2014/main" id="{8E68CCE1-D1D3-411C-80DD-33DAFD3FE411}"/>
               </a:ext>
             </a:extLst>
           </p:cNvPr>
@@ -43716,7 +43716,7 @@
           <p:cNvPr id="78" name="">
             <a:extLst xmlns:a="http://schemas.openxmlformats.org/drawingml/2006/main">
               <a:ext uri="{FF2B5EF4-FFF2-40B4-BE49-F238E27FC236}">
-                <a16:creationId xmlns:a16="http://schemas.microsoft.com/office/drawing/2014/main" id="{9166D1A2-DDFF-4105-BDA7-ECE045CA6DFC}"/>
+                <a16:creationId xmlns:a16="http://schemas.microsoft.com/office/drawing/2014/main" id="{79B3D82A-8DB4-4E87-9FE3-CD41B05B2F63}"/>
               </a:ext>
             </a:extLst>
           </p:cNvPr>
@@ -43768,7 +43768,7 @@
           <p:cNvPr id="79" name="">
             <a:extLst xmlns:a="http://schemas.openxmlformats.org/drawingml/2006/main">
               <a:ext uri="{FF2B5EF4-FFF2-40B4-BE49-F238E27FC236}">
-                <a16:creationId xmlns:a16="http://schemas.microsoft.com/office/drawing/2014/main" id="{FB242D70-542A-4705-9953-B56FA4BC1EC9}"/>
+                <a16:creationId xmlns:a16="http://schemas.microsoft.com/office/drawing/2014/main" id="{5501C6A4-883F-457C-B42E-69D736B6C5F3}"/>
               </a:ext>
             </a:extLst>
           </p:cNvPr>
@@ -43820,7 +43820,7 @@
           <p:cNvPr id="80" name="">
             <a:extLst xmlns:a="http://schemas.openxmlformats.org/drawingml/2006/main">
               <a:ext uri="{FF2B5EF4-FFF2-40B4-BE49-F238E27FC236}">
-                <a16:creationId xmlns:a16="http://schemas.microsoft.com/office/drawing/2014/main" id="{9DF7937D-E2B9-4459-9BA2-E98F344894C7}"/>
+                <a16:creationId xmlns:a16="http://schemas.microsoft.com/office/drawing/2014/main" id="{7759D8A9-5485-426D-B6E8-6AE695CF759F}"/>
               </a:ext>
             </a:extLst>
           </p:cNvPr>
@@ -43872,7 +43872,7 @@
           <p:cNvPr id="81" name="">
             <a:extLst xmlns:a="http://schemas.openxmlformats.org/drawingml/2006/main">
               <a:ext uri="{FF2B5EF4-FFF2-40B4-BE49-F238E27FC236}">
-                <a16:creationId xmlns:a16="http://schemas.microsoft.com/office/drawing/2014/main" id="{E53AEA1D-0A01-45F3-8FB4-069A6C6096FC}"/>
+                <a16:creationId xmlns:a16="http://schemas.microsoft.com/office/drawing/2014/main" id="{B5D0DF12-AC32-4A52-AC6F-2E2A60868855}"/>
               </a:ext>
             </a:extLst>
           </p:cNvPr>
@@ -43924,7 +43924,7 @@
           <p:cNvPr id="82" name="">
             <a:extLst xmlns:a="http://schemas.openxmlformats.org/drawingml/2006/main">
               <a:ext uri="{FF2B5EF4-FFF2-40B4-BE49-F238E27FC236}">
-                <a16:creationId xmlns:a16="http://schemas.microsoft.com/office/drawing/2014/main" id="{2139BF2C-5004-47D7-AB72-4A03F1027B6B}"/>
+                <a16:creationId xmlns:a16="http://schemas.microsoft.com/office/drawing/2014/main" id="{2F1510D9-AD8F-402E-8C49-887F4C1EE9E1}"/>
               </a:ext>
             </a:extLst>
           </p:cNvPr>
@@ -43976,7 +43976,7 @@
           <p:cNvPr id="83" name="">
             <a:extLst xmlns:a="http://schemas.openxmlformats.org/drawingml/2006/main">
               <a:ext uri="{FF2B5EF4-FFF2-40B4-BE49-F238E27FC236}">
-                <a16:creationId xmlns:a16="http://schemas.microsoft.com/office/drawing/2014/main" id="{DA281DCE-0449-45D9-A856-BB4AA48C8BF1}"/>
+                <a16:creationId xmlns:a16="http://schemas.microsoft.com/office/drawing/2014/main" id="{9FA36CF0-38C6-48E1-AFF8-146861DAE023}"/>
               </a:ext>
             </a:extLst>
           </p:cNvPr>
@@ -44007,7 +44007,7 @@
           <p:cNvPr id="84" name="">
             <a:extLst xmlns:a="http://schemas.openxmlformats.org/drawingml/2006/main">
               <a:ext uri="{FF2B5EF4-FFF2-40B4-BE49-F238E27FC236}">
-                <a16:creationId xmlns:a16="http://schemas.microsoft.com/office/drawing/2014/main" id="{A0256477-A843-44BA-8DDF-B69486FCEE43}"/>
+                <a16:creationId xmlns:a16="http://schemas.microsoft.com/office/drawing/2014/main" id="{D849AF5A-5EF3-468D-9DA7-F20E2F65A1E6}"/>
               </a:ext>
             </a:extLst>
           </p:cNvPr>
@@ -44059,7 +44059,7 @@
           <p:cNvPr id="85" name="">
             <a:extLst xmlns:a="http://schemas.openxmlformats.org/drawingml/2006/main">
               <a:ext uri="{FF2B5EF4-FFF2-40B4-BE49-F238E27FC236}">
-                <a16:creationId xmlns:a16="http://schemas.microsoft.com/office/drawing/2014/main" id="{0ED7916E-69AA-4E17-A7C6-AE2F8CBC6879}"/>
+                <a16:creationId xmlns:a16="http://schemas.microsoft.com/office/drawing/2014/main" id="{A217635D-5A84-4363-82BE-7147454FF7E0}"/>
               </a:ext>
             </a:extLst>
           </p:cNvPr>
@@ -44111,7 +44111,7 @@
           <p:cNvPr id="86" name="">
             <a:extLst xmlns:a="http://schemas.openxmlformats.org/drawingml/2006/main">
               <a:ext uri="{FF2B5EF4-FFF2-40B4-BE49-F238E27FC236}">
-                <a16:creationId xmlns:a16="http://schemas.microsoft.com/office/drawing/2014/main" id="{49E56DA5-E9A2-4DC3-96EC-62446DCBFC53}"/>
+                <a16:creationId xmlns:a16="http://schemas.microsoft.com/office/drawing/2014/main" id="{313DE263-A14A-4157-88EA-DC786EFDE819}"/>
               </a:ext>
             </a:extLst>
           </p:cNvPr>
@@ -44163,7 +44163,7 @@
           <p:cNvPr id="87" name="">
             <a:extLst xmlns:a="http://schemas.openxmlformats.org/drawingml/2006/main">
               <a:ext uri="{FF2B5EF4-FFF2-40B4-BE49-F238E27FC236}">
-                <a16:creationId xmlns:a16="http://schemas.microsoft.com/office/drawing/2014/main" id="{A90BD9EE-4378-4220-8132-13B801BCDF3A}"/>
+                <a16:creationId xmlns:a16="http://schemas.microsoft.com/office/drawing/2014/main" id="{C5EE7D0B-A991-476D-920D-B4DD2D967A66}"/>
               </a:ext>
             </a:extLst>
           </p:cNvPr>
@@ -44215,7 +44215,7 @@
           <p:cNvPr id="88" name="">
             <a:extLst xmlns:a="http://schemas.openxmlformats.org/drawingml/2006/main">
               <a:ext uri="{FF2B5EF4-FFF2-40B4-BE49-F238E27FC236}">
-                <a16:creationId xmlns:a16="http://schemas.microsoft.com/office/drawing/2014/main" id="{E0CE82CA-62CF-4627-ACDA-2C1ED5A2AC95}"/>
+                <a16:creationId xmlns:a16="http://schemas.microsoft.com/office/drawing/2014/main" id="{16608ADB-7415-4FD6-89C3-47ADBCC7091B}"/>
               </a:ext>
             </a:extLst>
           </p:cNvPr>
@@ -44267,7 +44267,7 @@
           <p:cNvPr id="89" name="">
             <a:extLst xmlns:a="http://schemas.openxmlformats.org/drawingml/2006/main">
               <a:ext uri="{FF2B5EF4-FFF2-40B4-BE49-F238E27FC236}">
-                <a16:creationId xmlns:a16="http://schemas.microsoft.com/office/drawing/2014/main" id="{84CF7BA4-B7FF-4BA2-880C-B0A4D881BA98}"/>
+                <a16:creationId xmlns:a16="http://schemas.microsoft.com/office/drawing/2014/main" id="{43437938-1B71-4EA2-B6DA-C77831FDEC6D}"/>
               </a:ext>
             </a:extLst>
           </p:cNvPr>
@@ -44298,7 +44298,7 @@
           <p:cNvPr id="90" name="">
             <a:extLst xmlns:a="http://schemas.openxmlformats.org/drawingml/2006/main">
               <a:ext uri="{FF2B5EF4-FFF2-40B4-BE49-F238E27FC236}">
-                <a16:creationId xmlns:a16="http://schemas.microsoft.com/office/drawing/2014/main" id="{4BED508F-A0EF-4C9E-84AA-9C43534EDB5B}"/>
+                <a16:creationId xmlns:a16="http://schemas.microsoft.com/office/drawing/2014/main" id="{47D26889-9B6B-4FE6-8DB0-69B9E6445CD9}"/>
               </a:ext>
             </a:extLst>
           </p:cNvPr>
@@ -44329,7 +44329,7 @@
           <p:cNvPr id="91" name="">
             <a:extLst xmlns:a="http://schemas.openxmlformats.org/drawingml/2006/main">
               <a:ext uri="{FF2B5EF4-FFF2-40B4-BE49-F238E27FC236}">
-                <a16:creationId xmlns:a16="http://schemas.microsoft.com/office/drawing/2014/main" id="{24ABC81C-225A-4B08-8E95-3E7960B7A671}"/>
+                <a16:creationId xmlns:a16="http://schemas.microsoft.com/office/drawing/2014/main" id="{3E7C7672-07E9-4AFE-AAFD-39255F698080}"/>
               </a:ext>
             </a:extLst>
           </p:cNvPr>
@@ -44381,7 +44381,7 @@
           <p:cNvPr id="92" name="">
             <a:extLst xmlns:a="http://schemas.openxmlformats.org/drawingml/2006/main">
               <a:ext uri="{FF2B5EF4-FFF2-40B4-BE49-F238E27FC236}">
-                <a16:creationId xmlns:a16="http://schemas.microsoft.com/office/drawing/2014/main" id="{69829F4D-B4A5-4532-9572-FE7701866055}"/>
+                <a16:creationId xmlns:a16="http://schemas.microsoft.com/office/drawing/2014/main" id="{60C4C16C-488E-41BE-821A-B200A2D9A57B}"/>
               </a:ext>
             </a:extLst>
           </p:cNvPr>
@@ -44433,7 +44433,7 @@
           <p:cNvPr id="93" name="">
             <a:extLst xmlns:a="http://schemas.openxmlformats.org/drawingml/2006/main">
               <a:ext uri="{FF2B5EF4-FFF2-40B4-BE49-F238E27FC236}">
-                <a16:creationId xmlns:a16="http://schemas.microsoft.com/office/drawing/2014/main" id="{CFA84EE7-B9DB-4611-9C09-1A4F13DDE963}"/>
+                <a16:creationId xmlns:a16="http://schemas.microsoft.com/office/drawing/2014/main" id="{2B495A26-06BB-4916-886A-DB14DEA08F07}"/>
               </a:ext>
             </a:extLst>
           </p:cNvPr>
@@ -44485,7 +44485,7 @@
           <p:cNvPr id="94" name="">
             <a:extLst xmlns:a="http://schemas.openxmlformats.org/drawingml/2006/main">
               <a:ext uri="{FF2B5EF4-FFF2-40B4-BE49-F238E27FC236}">
-                <a16:creationId xmlns:a16="http://schemas.microsoft.com/office/drawing/2014/main" id="{1FD37960-365E-4431-9FBC-301AAE25BB63}"/>
+                <a16:creationId xmlns:a16="http://schemas.microsoft.com/office/drawing/2014/main" id="{FA7A261B-23A7-47F8-A8C4-12A5BCF4FBB6}"/>
               </a:ext>
             </a:extLst>
           </p:cNvPr>
@@ -44537,7 +44537,7 @@
           <p:cNvPr id="95" name="">
             <a:extLst xmlns:a="http://schemas.openxmlformats.org/drawingml/2006/main">
               <a:ext uri="{FF2B5EF4-FFF2-40B4-BE49-F238E27FC236}">
-                <a16:creationId xmlns:a16="http://schemas.microsoft.com/office/drawing/2014/main" id="{112318E7-CC86-4EF7-90E6-FD99E22AC5B8}"/>
+                <a16:creationId xmlns:a16="http://schemas.microsoft.com/office/drawing/2014/main" id="{49C9A84C-9173-4D15-946B-8094D331F58C}"/>
               </a:ext>
             </a:extLst>
           </p:cNvPr>
@@ -44589,7 +44589,7 @@
           <p:cNvPr id="96" name="">
             <a:extLst xmlns:a="http://schemas.openxmlformats.org/drawingml/2006/main">
               <a:ext uri="{FF2B5EF4-FFF2-40B4-BE49-F238E27FC236}">
-                <a16:creationId xmlns:a16="http://schemas.microsoft.com/office/drawing/2014/main" id="{365B7B59-45A6-4FEF-B1BE-F597FBD1458D}"/>
+                <a16:creationId xmlns:a16="http://schemas.microsoft.com/office/drawing/2014/main" id="{5F003431-D780-48AD-86A2-A030A5DDA93E}"/>
               </a:ext>
             </a:extLst>
           </p:cNvPr>
@@ -44620,7 +44620,7 @@
           <p:cNvPr id="97" name="">
             <a:extLst xmlns:a="http://schemas.openxmlformats.org/drawingml/2006/main">
               <a:ext uri="{FF2B5EF4-FFF2-40B4-BE49-F238E27FC236}">
-                <a16:creationId xmlns:a16="http://schemas.microsoft.com/office/drawing/2014/main" id="{C9A3316A-4761-4C0C-8358-657AE58BB2AC}"/>
+                <a16:creationId xmlns:a16="http://schemas.microsoft.com/office/drawing/2014/main" id="{ADD8A474-E72F-47EF-B487-91221CC62698}"/>
               </a:ext>
             </a:extLst>
           </p:cNvPr>
@@ -44672,7 +44672,7 @@
           <p:cNvPr id="98" name="">
             <a:extLst xmlns:a="http://schemas.openxmlformats.org/drawingml/2006/main">
               <a:ext uri="{FF2B5EF4-FFF2-40B4-BE49-F238E27FC236}">
-                <a16:creationId xmlns:a16="http://schemas.microsoft.com/office/drawing/2014/main" id="{326AAE07-AB58-4CF5-B2BC-103F02A76A74}"/>
+                <a16:creationId xmlns:a16="http://schemas.microsoft.com/office/drawing/2014/main" id="{99478F8E-4575-4A03-837F-098AFF227313}"/>
               </a:ext>
             </a:extLst>
           </p:cNvPr>
@@ -44724,7 +44724,7 @@
           <p:cNvPr id="99" name="">
             <a:extLst xmlns:a="http://schemas.openxmlformats.org/drawingml/2006/main">
               <a:ext uri="{FF2B5EF4-FFF2-40B4-BE49-F238E27FC236}">
-                <a16:creationId xmlns:a16="http://schemas.microsoft.com/office/drawing/2014/main" id="{9006D8B5-D3D1-4807-BD09-333017A0AA8F}"/>
+                <a16:creationId xmlns:a16="http://schemas.microsoft.com/office/drawing/2014/main" id="{51F8A56C-6563-4EFD-B79A-78BA24E12FD4}"/>
               </a:ext>
             </a:extLst>
           </p:cNvPr>
@@ -44776,7 +44776,7 @@
           <p:cNvPr id="100" name="">
             <a:extLst xmlns:a="http://schemas.openxmlformats.org/drawingml/2006/main">
               <a:ext uri="{FF2B5EF4-FFF2-40B4-BE49-F238E27FC236}">
-                <a16:creationId xmlns:a16="http://schemas.microsoft.com/office/drawing/2014/main" id="{8C21F368-4289-4547-B874-35D8A40D885B}"/>
+                <a16:creationId xmlns:a16="http://schemas.microsoft.com/office/drawing/2014/main" id="{4C50493A-3E9F-4F1A-A9C8-1C5C8BF59C67}"/>
               </a:ext>
             </a:extLst>
           </p:cNvPr>
@@ -44828,7 +44828,7 @@
           <p:cNvPr id="101" name="">
             <a:extLst xmlns:a="http://schemas.openxmlformats.org/drawingml/2006/main">
               <a:ext uri="{FF2B5EF4-FFF2-40B4-BE49-F238E27FC236}">
-                <a16:creationId xmlns:a16="http://schemas.microsoft.com/office/drawing/2014/main" id="{C2499574-C676-4DBE-AAAB-24B9597D5898}"/>
+                <a16:creationId xmlns:a16="http://schemas.microsoft.com/office/drawing/2014/main" id="{5D40C861-CABC-4005-93AF-C63CEDB51E29}"/>
               </a:ext>
             </a:extLst>
           </p:cNvPr>
@@ -44878,7 +44878,7 @@
     </p:spTree>
     <p:extLst>
       <p:ext uri="{BB962C8B-B14F-4D97-AF65-F5344CB8AC3E}">
-        <p14:creationId xmlns:p14="http://schemas.microsoft.com/office/powerpoint/2010/main" val="2120184766"/>
+        <p14:creationId xmlns:p14="http://schemas.microsoft.com/office/powerpoint/2010/main" val="1232714125"/>
       </p:ext>
     </p:extLst>
   </p:cSld>

--- a/.preview/pptx-claro/deck.pptx
+++ b/.preview/pptx-claro/deck.pptx
@@ -2,27 +2,27 @@
 <file path=ppt/presentation.xml><?xml version="1.0" encoding="utf-8"?>
 <p:presentation xmlns:p="http://schemas.openxmlformats.org/presentationml/2006/main">
   <p:sldMasterIdLst>
-    <p:sldMasterId xmlns:r="http://schemas.openxmlformats.org/officeDocument/2006/relationships" id="2147483648" r:id="Redda1cf2389647f2"/>
+    <p:sldMasterId xmlns:r="http://schemas.openxmlformats.org/officeDocument/2006/relationships" id="2147483648" r:id="R8be4fbcc6e3f4520"/>
   </p:sldMasterIdLst>
   <p:notesMasterIdLst>
-    <p:notesMasterId xmlns:r="http://schemas.openxmlformats.org/officeDocument/2006/relationships" r:id="R8d08af68cf6945f4"/>
+    <p:notesMasterId xmlns:r="http://schemas.openxmlformats.org/officeDocument/2006/relationships" r:id="Rac3605fb06c3448e"/>
   </p:notesMasterIdLst>
   <p:sldIdLst>
-    <p:sldId xmlns:r="http://schemas.openxmlformats.org/officeDocument/2006/relationships" id="256" r:id="R21bdb13d51084611"/>
-    <p:sldId xmlns:r="http://schemas.openxmlformats.org/officeDocument/2006/relationships" id="257" r:id="R312c63fd47854592"/>
-    <p:sldId xmlns:r="http://schemas.openxmlformats.org/officeDocument/2006/relationships" id="258" r:id="R2e01fe456d6740dd"/>
-    <p:sldId xmlns:r="http://schemas.openxmlformats.org/officeDocument/2006/relationships" id="259" r:id="Re424adcbfd3e4106"/>
-    <p:sldId xmlns:r="http://schemas.openxmlformats.org/officeDocument/2006/relationships" id="260" r:id="R2e3ac73b7c214df1"/>
-    <p:sldId xmlns:r="http://schemas.openxmlformats.org/officeDocument/2006/relationships" id="261" r:id="Rbb41ecfe11684aff"/>
-    <p:sldId xmlns:r="http://schemas.openxmlformats.org/officeDocument/2006/relationships" id="262" r:id="Red3b8d7540f8484f"/>
-    <p:sldId xmlns:r="http://schemas.openxmlformats.org/officeDocument/2006/relationships" id="263" r:id="R2eb6cc7266ed4e49"/>
-    <p:sldId xmlns:r="http://schemas.openxmlformats.org/officeDocument/2006/relationships" id="264" r:id="R4211b176a0744a8c"/>
-    <p:sldId xmlns:r="http://schemas.openxmlformats.org/officeDocument/2006/relationships" id="265" r:id="R81a9e47456f34a02"/>
-    <p:sldId xmlns:r="http://schemas.openxmlformats.org/officeDocument/2006/relationships" id="266" r:id="R33c624479bb94fdd"/>
-    <p:sldId xmlns:r="http://schemas.openxmlformats.org/officeDocument/2006/relationships" id="267" r:id="R999f7d6b89924e44"/>
-    <p:sldId xmlns:r="http://schemas.openxmlformats.org/officeDocument/2006/relationships" id="268" r:id="R1857a9241a644fae"/>
-    <p:sldId xmlns:r="http://schemas.openxmlformats.org/officeDocument/2006/relationships" id="269" r:id="Ra9cf6394e3744c3a"/>
-    <p:sldId xmlns:r="http://schemas.openxmlformats.org/officeDocument/2006/relationships" id="270" r:id="Rf0abe68ae5ed4974"/>
+    <p:sldId xmlns:r="http://schemas.openxmlformats.org/officeDocument/2006/relationships" id="256" r:id="Rad162787f2854eaa"/>
+    <p:sldId xmlns:r="http://schemas.openxmlformats.org/officeDocument/2006/relationships" id="257" r:id="R7b2cd728da7646ad"/>
+    <p:sldId xmlns:r="http://schemas.openxmlformats.org/officeDocument/2006/relationships" id="258" r:id="Ra5127260120f4c21"/>
+    <p:sldId xmlns:r="http://schemas.openxmlformats.org/officeDocument/2006/relationships" id="259" r:id="Rfd0b3c5dd6bc480f"/>
+    <p:sldId xmlns:r="http://schemas.openxmlformats.org/officeDocument/2006/relationships" id="260" r:id="R9b806fa1a28e48ad"/>
+    <p:sldId xmlns:r="http://schemas.openxmlformats.org/officeDocument/2006/relationships" id="261" r:id="Rc5d5cb9103594ae8"/>
+    <p:sldId xmlns:r="http://schemas.openxmlformats.org/officeDocument/2006/relationships" id="262" r:id="R83cf517e9be54023"/>
+    <p:sldId xmlns:r="http://schemas.openxmlformats.org/officeDocument/2006/relationships" id="263" r:id="R8fa3d878a1ac4c81"/>
+    <p:sldId xmlns:r="http://schemas.openxmlformats.org/officeDocument/2006/relationships" id="264" r:id="R3b5ec1dc7d6242e2"/>
+    <p:sldId xmlns:r="http://schemas.openxmlformats.org/officeDocument/2006/relationships" id="265" r:id="R272111ec9821431b"/>
+    <p:sldId xmlns:r="http://schemas.openxmlformats.org/officeDocument/2006/relationships" id="266" r:id="Rc7841c8dc1f648ef"/>
+    <p:sldId xmlns:r="http://schemas.openxmlformats.org/officeDocument/2006/relationships" id="267" r:id="R0d7d4a6a7f4e4f8b"/>
+    <p:sldId xmlns:r="http://schemas.openxmlformats.org/officeDocument/2006/relationships" id="268" r:id="R7b09981cf1904eb0"/>
+    <p:sldId xmlns:r="http://schemas.openxmlformats.org/officeDocument/2006/relationships" id="269" r:id="R610ce29488d64650"/>
+    <p:sldId xmlns:r="http://schemas.openxmlformats.org/officeDocument/2006/relationships" id="270" r:id="R52492277fdef4365"/>
   </p:sldIdLst>
   <p:sldSz cx="12192000" cy="6858000"/>
   <p:notesSz cx="6858000" cy="9144000"/>
@@ -1879,7 +1879,7 @@
   </p:cSld>
   <p:clrMap bg1="lt1" tx1="dk1" bg2="lt2" tx2="dk2" accent1="accent1" accent2="accent2" accent3="accent3" accent4="accent4" accent5="accent5" accent6="accent6" hlink="hlink" folHlink="folHlink"/>
   <p:sldLayoutIdLst>
-    <p:sldLayoutId xmlns:r="http://schemas.openxmlformats.org/officeDocument/2006/relationships" id="2147483649" r:id="Rf7d5d78edd1a400f"/>
+    <p:sldLayoutId xmlns:r="http://schemas.openxmlformats.org/officeDocument/2006/relationships" id="2147483649" r:id="R62596e22a5b142c5"/>
   </p:sldLayoutIdLst>
   <p:txStyles>
     <p:titleStyle>
@@ -2430,7 +2430,7 @@
           <p:cNvPr id="17" name="">
             <a:extLst xmlns:a="http://schemas.openxmlformats.org/drawingml/2006/main">
               <a:ext uri="{FF2B5EF4-FFF2-40B4-BE49-F238E27FC236}">
-                <a16:creationId xmlns:a16="http://schemas.microsoft.com/office/drawing/2014/main" id="{373DCC46-64D8-4E8D-9176-48DD0EAA302F}"/>
+                <a16:creationId xmlns:a16="http://schemas.microsoft.com/office/drawing/2014/main" id="{6F04357B-C924-4FCD-BF66-380350E90527}"/>
               </a:ext>
             </a:extLst>
           </p:cNvPr>
@@ -2463,7 +2463,7 @@
           <p:cNvPr id="2" name="">
             <a:extLst xmlns:a="http://schemas.openxmlformats.org/drawingml/2006/main">
               <a:ext uri="{FF2B5EF4-FFF2-40B4-BE49-F238E27FC236}">
-                <a16:creationId xmlns:a16="http://schemas.microsoft.com/office/drawing/2014/main" id="{31434594-7760-40ED-B0B0-A704011477E5}"/>
+                <a16:creationId xmlns:a16="http://schemas.microsoft.com/office/drawing/2014/main" id="{4ABF7FFD-C61D-4CD4-B453-0D46FE7D7461}"/>
               </a:ext>
             </a:extLst>
           </p:cNvPr>
@@ -2494,7 +2494,7 @@
           <p:cNvPr id="3" name="">
             <a:extLst xmlns:a="http://schemas.openxmlformats.org/drawingml/2006/main">
               <a:ext uri="{FF2B5EF4-FFF2-40B4-BE49-F238E27FC236}">
-                <a16:creationId xmlns:a16="http://schemas.microsoft.com/office/drawing/2014/main" id="{D8F26378-3ED8-446C-98FC-38D513539517}"/>
+                <a16:creationId xmlns:a16="http://schemas.microsoft.com/office/drawing/2014/main" id="{30EDB489-194F-40C1-8FCE-1B2022674BBB}"/>
               </a:ext>
             </a:extLst>
           </p:cNvPr>
@@ -2529,7 +2529,7 @@
           <p:nvPr/>
         </p:nvPicPr>
         <p:blipFill>
-          <a:blip xmlns:r="http://schemas.openxmlformats.org/officeDocument/2006/relationships" xmlns:a="http://schemas.openxmlformats.org/drawingml/2006/main" r:embed="Rd6401be849ff41bf"/>
+          <a:blip xmlns:r="http://schemas.openxmlformats.org/officeDocument/2006/relationships" xmlns:a="http://schemas.openxmlformats.org/drawingml/2006/main" r:embed="R407d29352f3f4545"/>
           <a:stretch xmlns:a="http://schemas.openxmlformats.org/drawingml/2006/main"/>
         </p:blipFill>
         <p:spPr>
@@ -2547,7 +2547,7 @@
           <p:cNvPr id="5" name="">
             <a:extLst xmlns:a="http://schemas.openxmlformats.org/drawingml/2006/main">
               <a:ext uri="{FF2B5EF4-FFF2-40B4-BE49-F238E27FC236}">
-                <a16:creationId xmlns:a16="http://schemas.microsoft.com/office/drawing/2014/main" id="{2262285A-7727-4EAA-9F46-2833D0862FB3}"/>
+                <a16:creationId xmlns:a16="http://schemas.microsoft.com/office/drawing/2014/main" id="{5F1CCC55-0E09-4DFF-930A-6C95E5D2FE38}"/>
               </a:ext>
             </a:extLst>
           </p:cNvPr>
@@ -2599,7 +2599,7 @@
           <p:cNvPr id="6" name="">
             <a:extLst xmlns:a="http://schemas.openxmlformats.org/drawingml/2006/main">
               <a:ext uri="{FF2B5EF4-FFF2-40B4-BE49-F238E27FC236}">
-                <a16:creationId xmlns:a16="http://schemas.microsoft.com/office/drawing/2014/main" id="{AE0E7A84-5F3C-4E4E-831E-09F726A9946D}"/>
+                <a16:creationId xmlns:a16="http://schemas.microsoft.com/office/drawing/2014/main" id="{25552AF8-C584-4022-B82A-5F839394008F}"/>
               </a:ext>
             </a:extLst>
           </p:cNvPr>
@@ -2655,7 +2655,7 @@
           <p:nvPr/>
         </p:nvPicPr>
         <p:blipFill>
-          <a:blip xmlns:r="http://schemas.openxmlformats.org/officeDocument/2006/relationships" xmlns:a="http://schemas.openxmlformats.org/drawingml/2006/main" r:embed="Rd890457448034b30"/>
+          <a:blip xmlns:r="http://schemas.openxmlformats.org/officeDocument/2006/relationships" xmlns:a="http://schemas.openxmlformats.org/drawingml/2006/main" r:embed="Rc2a36c0ef9064e81"/>
           <a:stretch xmlns:a="http://schemas.openxmlformats.org/drawingml/2006/main"/>
         </p:blipFill>
         <p:spPr>
@@ -2673,7 +2673,7 @@
           <p:cNvPr id="8" name="">
             <a:extLst xmlns:a="http://schemas.openxmlformats.org/drawingml/2006/main">
               <a:ext uri="{FF2B5EF4-FFF2-40B4-BE49-F238E27FC236}">
-                <a16:creationId xmlns:a16="http://schemas.microsoft.com/office/drawing/2014/main" id="{CDBFD303-C836-4145-8FA0-A442E7E5B7BB}"/>
+                <a16:creationId xmlns:a16="http://schemas.microsoft.com/office/drawing/2014/main" id="{A704604D-1F9B-485D-8534-8245C28DD5AA}"/>
               </a:ext>
             </a:extLst>
           </p:cNvPr>
@@ -2706,7 +2706,7 @@
           <p:cNvPr id="9" name="">
             <a:extLst xmlns:a="http://schemas.openxmlformats.org/drawingml/2006/main">
               <a:ext uri="{FF2B5EF4-FFF2-40B4-BE49-F238E27FC236}">
-                <a16:creationId xmlns:a16="http://schemas.microsoft.com/office/drawing/2014/main" id="{8040966C-6E6F-428E-BD6E-AC1A35734F49}"/>
+                <a16:creationId xmlns:a16="http://schemas.microsoft.com/office/drawing/2014/main" id="{28217AF1-F08F-44F7-85FF-AFB0A87CB3A5}"/>
               </a:ext>
             </a:extLst>
           </p:cNvPr>
@@ -2758,7 +2758,7 @@
           <p:cNvPr id="10" name="">
             <a:extLst xmlns:a="http://schemas.openxmlformats.org/drawingml/2006/main">
               <a:ext uri="{FF2B5EF4-FFF2-40B4-BE49-F238E27FC236}">
-                <a16:creationId xmlns:a16="http://schemas.microsoft.com/office/drawing/2014/main" id="{C239A7F8-31E3-4529-9593-FE7CB866CE9A}"/>
+                <a16:creationId xmlns:a16="http://schemas.microsoft.com/office/drawing/2014/main" id="{CC18D608-2EDA-4DAC-BC6A-911F37C23AF0}"/>
               </a:ext>
             </a:extLst>
           </p:cNvPr>
@@ -2810,7 +2810,7 @@
           <p:cNvPr id="11" name="">
             <a:extLst xmlns:a="http://schemas.openxmlformats.org/drawingml/2006/main">
               <a:ext uri="{FF2B5EF4-FFF2-40B4-BE49-F238E27FC236}">
-                <a16:creationId xmlns:a16="http://schemas.microsoft.com/office/drawing/2014/main" id="{6FB80C5B-07B1-457F-9B7D-0D6F6CABA1D0}"/>
+                <a16:creationId xmlns:a16="http://schemas.microsoft.com/office/drawing/2014/main" id="{5520739D-23F7-4D6D-B3EA-22585415FCF4}"/>
               </a:ext>
             </a:extLst>
           </p:cNvPr>
@@ -2862,7 +2862,7 @@
           <p:cNvPr id="12" name="">
             <a:extLst xmlns:a="http://schemas.openxmlformats.org/drawingml/2006/main">
               <a:ext uri="{FF2B5EF4-FFF2-40B4-BE49-F238E27FC236}">
-                <a16:creationId xmlns:a16="http://schemas.microsoft.com/office/drawing/2014/main" id="{66BE5414-2A07-4053-9032-B8B5DF69002A}"/>
+                <a16:creationId xmlns:a16="http://schemas.microsoft.com/office/drawing/2014/main" id="{D7E1AC54-2DF5-4926-9FA5-A83B57C04085}"/>
               </a:ext>
             </a:extLst>
           </p:cNvPr>
@@ -2914,7 +2914,7 @@
           <p:cNvPr id="13" name="">
             <a:extLst xmlns:a="http://schemas.openxmlformats.org/drawingml/2006/main">
               <a:ext uri="{FF2B5EF4-FFF2-40B4-BE49-F238E27FC236}">
-                <a16:creationId xmlns:a16="http://schemas.microsoft.com/office/drawing/2014/main" id="{9C62B725-D6BC-44F7-9BE1-CB85DBF0C791}"/>
+                <a16:creationId xmlns:a16="http://schemas.microsoft.com/office/drawing/2014/main" id="{1DFBECBF-2E09-43CB-B95E-7E65330013BC}"/>
               </a:ext>
             </a:extLst>
           </p:cNvPr>
@@ -2966,7 +2966,7 @@
           <p:cNvPr id="14" name="">
             <a:extLst xmlns:a="http://schemas.openxmlformats.org/drawingml/2006/main">
               <a:ext uri="{FF2B5EF4-FFF2-40B4-BE49-F238E27FC236}">
-                <a16:creationId xmlns:a16="http://schemas.microsoft.com/office/drawing/2014/main" id="{5F856C88-0443-4D4F-8721-21862C52CD8A}"/>
+                <a16:creationId xmlns:a16="http://schemas.microsoft.com/office/drawing/2014/main" id="{DF4CC1A9-7363-44A7-9872-665C1C9CE5D1}"/>
               </a:ext>
             </a:extLst>
           </p:cNvPr>
@@ -3018,7 +3018,7 @@
           <p:cNvPr id="15" name="">
             <a:extLst xmlns:a="http://schemas.openxmlformats.org/drawingml/2006/main">
               <a:ext uri="{FF2B5EF4-FFF2-40B4-BE49-F238E27FC236}">
-                <a16:creationId xmlns:a16="http://schemas.microsoft.com/office/drawing/2014/main" id="{3BBDB1A5-DD49-46F1-B0A6-F8302B773225}"/>
+                <a16:creationId xmlns:a16="http://schemas.microsoft.com/office/drawing/2014/main" id="{EEBF39D9-8D4B-4407-B4A2-78DF9FE3ED72}"/>
               </a:ext>
             </a:extLst>
           </p:cNvPr>
@@ -3070,7 +3070,7 @@
           <p:cNvPr id="16" name="">
             <a:extLst xmlns:a="http://schemas.openxmlformats.org/drawingml/2006/main">
               <a:ext uri="{FF2B5EF4-FFF2-40B4-BE49-F238E27FC236}">
-                <a16:creationId xmlns:a16="http://schemas.microsoft.com/office/drawing/2014/main" id="{66A5BA09-6B6B-42A1-A26A-838DB8B49E2C}"/>
+                <a16:creationId xmlns:a16="http://schemas.microsoft.com/office/drawing/2014/main" id="{A30EA6CD-2645-46B0-B6C4-B133A08F8042}"/>
               </a:ext>
             </a:extLst>
           </p:cNvPr>
@@ -3120,7 +3120,7 @@
     </p:spTree>
     <p:extLst>
       <p:ext uri="{BB962C8B-B14F-4D97-AF65-F5344CB8AC3E}">
-        <p14:creationId xmlns:p14="http://schemas.microsoft.com/office/powerpoint/2010/main" val="5057671"/>
+        <p14:creationId xmlns:p14="http://schemas.microsoft.com/office/powerpoint/2010/main" val="295514081"/>
       </p:ext>
     </p:extLst>
   </p:cSld>
@@ -3151,7 +3151,7 @@
           <p:cNvPr id="103" name="">
             <a:extLst xmlns:a="http://schemas.openxmlformats.org/drawingml/2006/main">
               <a:ext uri="{FF2B5EF4-FFF2-40B4-BE49-F238E27FC236}">
-                <a16:creationId xmlns:a16="http://schemas.microsoft.com/office/drawing/2014/main" id="{F81C2F6A-4575-4ACA-BC8C-038ACCF95B1A}"/>
+                <a16:creationId xmlns:a16="http://schemas.microsoft.com/office/drawing/2014/main" id="{77CEE376-0CB8-465C-88EB-E2912318C62D}"/>
               </a:ext>
             </a:extLst>
           </p:cNvPr>
@@ -3184,7 +3184,7 @@
           <p:cNvPr id="2" name="">
             <a:extLst xmlns:a="http://schemas.openxmlformats.org/drawingml/2006/main">
               <a:ext uri="{FF2B5EF4-FFF2-40B4-BE49-F238E27FC236}">
-                <a16:creationId xmlns:a16="http://schemas.microsoft.com/office/drawing/2014/main" id="{3C3094F1-210A-4225-87ED-210B1CC52ED6}"/>
+                <a16:creationId xmlns:a16="http://schemas.microsoft.com/office/drawing/2014/main" id="{DCBED293-2D6A-401A-976C-B310C0A6B52F}"/>
               </a:ext>
             </a:extLst>
           </p:cNvPr>
@@ -3215,7 +3215,7 @@
           <p:cNvPr id="3" name="">
             <a:extLst xmlns:a="http://schemas.openxmlformats.org/drawingml/2006/main">
               <a:ext uri="{FF2B5EF4-FFF2-40B4-BE49-F238E27FC236}">
-                <a16:creationId xmlns:a16="http://schemas.microsoft.com/office/drawing/2014/main" id="{FBCBF1FD-8862-453B-8B7E-A7907EACC4A3}"/>
+                <a16:creationId xmlns:a16="http://schemas.microsoft.com/office/drawing/2014/main" id="{FB3C40EE-6CCC-4749-9ABE-1824C894D988}"/>
               </a:ext>
             </a:extLst>
           </p:cNvPr>
@@ -3267,7 +3267,7 @@
           <p:cNvPr id="4" name="">
             <a:extLst xmlns:a="http://schemas.openxmlformats.org/drawingml/2006/main">
               <a:ext uri="{FF2B5EF4-FFF2-40B4-BE49-F238E27FC236}">
-                <a16:creationId xmlns:a16="http://schemas.microsoft.com/office/drawing/2014/main" id="{65A243E7-53FA-46F7-9521-E84760C2D601}"/>
+                <a16:creationId xmlns:a16="http://schemas.microsoft.com/office/drawing/2014/main" id="{91040483-8DDA-419F-BCE9-C4DADDF7AF6A}"/>
               </a:ext>
             </a:extLst>
           </p:cNvPr>
@@ -3319,7 +3319,7 @@
           <p:cNvPr id="5" name="">
             <a:extLst xmlns:a="http://schemas.openxmlformats.org/drawingml/2006/main">
               <a:ext uri="{FF2B5EF4-FFF2-40B4-BE49-F238E27FC236}">
-                <a16:creationId xmlns:a16="http://schemas.microsoft.com/office/drawing/2014/main" id="{2A5CEBBF-BED0-44E3-876A-466746F99BE1}"/>
+                <a16:creationId xmlns:a16="http://schemas.microsoft.com/office/drawing/2014/main" id="{87A2CD75-ECEF-4089-87ED-F72B255A3A67}"/>
               </a:ext>
             </a:extLst>
           </p:cNvPr>
@@ -3354,7 +3354,7 @@
           <p:nvPr/>
         </p:nvPicPr>
         <p:blipFill>
-          <a:blip xmlns:r="http://schemas.openxmlformats.org/officeDocument/2006/relationships" xmlns:a="http://schemas.openxmlformats.org/drawingml/2006/main" r:embed="R624abace47924878"/>
+          <a:blip xmlns:r="http://schemas.openxmlformats.org/officeDocument/2006/relationships" xmlns:a="http://schemas.openxmlformats.org/drawingml/2006/main" r:embed="R5e98aaf0881447a7"/>
           <a:stretch xmlns:a="http://schemas.openxmlformats.org/drawingml/2006/main"/>
         </p:blipFill>
         <p:spPr>
@@ -3372,7 +3372,7 @@
           <p:cNvPr id="7" name="">
             <a:extLst xmlns:a="http://schemas.openxmlformats.org/drawingml/2006/main">
               <a:ext uri="{FF2B5EF4-FFF2-40B4-BE49-F238E27FC236}">
-                <a16:creationId xmlns:a16="http://schemas.microsoft.com/office/drawing/2014/main" id="{61DB9AF0-88F8-4AE1-A152-1E91FC481E70}"/>
+                <a16:creationId xmlns:a16="http://schemas.microsoft.com/office/drawing/2014/main" id="{52BFABAF-E2CD-4B0C-98EE-DA40AB5C67B4}"/>
               </a:ext>
             </a:extLst>
           </p:cNvPr>
@@ -3424,7 +3424,7 @@
           <p:cNvPr id="8" name="">
             <a:extLst xmlns:a="http://schemas.openxmlformats.org/drawingml/2006/main">
               <a:ext uri="{FF2B5EF4-FFF2-40B4-BE49-F238E27FC236}">
-                <a16:creationId xmlns:a16="http://schemas.microsoft.com/office/drawing/2014/main" id="{15FF4DB7-E90F-451A-BD59-92F5C383BD78}"/>
+                <a16:creationId xmlns:a16="http://schemas.microsoft.com/office/drawing/2014/main" id="{EEB2AF3C-4C94-438B-8FE7-6E896073BB8D}"/>
               </a:ext>
             </a:extLst>
           </p:cNvPr>
@@ -3476,7 +3476,7 @@
           <p:cNvPr id="9" name="">
             <a:extLst xmlns:a="http://schemas.openxmlformats.org/drawingml/2006/main">
               <a:ext uri="{FF2B5EF4-FFF2-40B4-BE49-F238E27FC236}">
-                <a16:creationId xmlns:a16="http://schemas.microsoft.com/office/drawing/2014/main" id="{7CC80B11-ED4F-4DE7-A537-F491638E8A8F}"/>
+                <a16:creationId xmlns:a16="http://schemas.microsoft.com/office/drawing/2014/main" id="{6F1D3E8B-3279-441F-A05F-FA97A3C77B39}"/>
               </a:ext>
             </a:extLst>
           </p:cNvPr>
@@ -3528,7 +3528,7 @@
           <p:cNvPr id="10" name="">
             <a:extLst xmlns:a="http://schemas.openxmlformats.org/drawingml/2006/main">
               <a:ext uri="{FF2B5EF4-FFF2-40B4-BE49-F238E27FC236}">
-                <a16:creationId xmlns:a16="http://schemas.microsoft.com/office/drawing/2014/main" id="{0ECF30BC-E301-405E-BE13-23F80025180E}"/>
+                <a16:creationId xmlns:a16="http://schemas.microsoft.com/office/drawing/2014/main" id="{ECFB7717-35AF-497F-BFB8-5E260814514B}"/>
               </a:ext>
             </a:extLst>
           </p:cNvPr>
@@ -3580,7 +3580,7 @@
           <p:cNvPr id="11" name="">
             <a:extLst xmlns:a="http://schemas.openxmlformats.org/drawingml/2006/main">
               <a:ext uri="{FF2B5EF4-FFF2-40B4-BE49-F238E27FC236}">
-                <a16:creationId xmlns:a16="http://schemas.microsoft.com/office/drawing/2014/main" id="{23921C50-D566-4D42-8CC9-750DD4AD793A}"/>
+                <a16:creationId xmlns:a16="http://schemas.microsoft.com/office/drawing/2014/main" id="{D635673B-D857-4D84-8B30-27B29736A14C}"/>
               </a:ext>
             </a:extLst>
           </p:cNvPr>
@@ -3611,7 +3611,7 @@
           <p:cNvPr id="12" name="">
             <a:extLst xmlns:a="http://schemas.openxmlformats.org/drawingml/2006/main">
               <a:ext uri="{FF2B5EF4-FFF2-40B4-BE49-F238E27FC236}">
-                <a16:creationId xmlns:a16="http://schemas.microsoft.com/office/drawing/2014/main" id="{E99822A9-5361-4DF6-A518-99193C03EF2D}"/>
+                <a16:creationId xmlns:a16="http://schemas.microsoft.com/office/drawing/2014/main" id="{D34354D3-3FC7-4A35-98F9-164D36DA4523}"/>
               </a:ext>
             </a:extLst>
           </p:cNvPr>
@@ -3642,7 +3642,7 @@
           <p:cNvPr id="13" name="">
             <a:extLst xmlns:a="http://schemas.openxmlformats.org/drawingml/2006/main">
               <a:ext uri="{FF2B5EF4-FFF2-40B4-BE49-F238E27FC236}">
-                <a16:creationId xmlns:a16="http://schemas.microsoft.com/office/drawing/2014/main" id="{40E92FA6-867F-403D-BA51-CC690B36A9C0}"/>
+                <a16:creationId xmlns:a16="http://schemas.microsoft.com/office/drawing/2014/main" id="{660EF4CC-2C37-49AE-BEE3-27CD45CE2A94}"/>
               </a:ext>
             </a:extLst>
           </p:cNvPr>
@@ -3694,7 +3694,7 @@
           <p:cNvPr id="14" name="">
             <a:extLst xmlns:a="http://schemas.openxmlformats.org/drawingml/2006/main">
               <a:ext uri="{FF2B5EF4-FFF2-40B4-BE49-F238E27FC236}">
-                <a16:creationId xmlns:a16="http://schemas.microsoft.com/office/drawing/2014/main" id="{BE8F04AD-CFC1-4728-8413-7D4D00815625}"/>
+                <a16:creationId xmlns:a16="http://schemas.microsoft.com/office/drawing/2014/main" id="{D94C6C33-D01B-487E-AFA5-1690999B77A7}"/>
               </a:ext>
             </a:extLst>
           </p:cNvPr>
@@ -3746,7 +3746,7 @@
           <p:cNvPr id="15" name="">
             <a:extLst xmlns:a="http://schemas.openxmlformats.org/drawingml/2006/main">
               <a:ext uri="{FF2B5EF4-FFF2-40B4-BE49-F238E27FC236}">
-                <a16:creationId xmlns:a16="http://schemas.microsoft.com/office/drawing/2014/main" id="{06383412-65A4-4014-B11E-2631828F6862}"/>
+                <a16:creationId xmlns:a16="http://schemas.microsoft.com/office/drawing/2014/main" id="{80A0B1E1-CAC4-4668-82EE-CA887B71623E}"/>
               </a:ext>
             </a:extLst>
           </p:cNvPr>
@@ -3798,7 +3798,7 @@
           <p:cNvPr id="16" name="">
             <a:extLst xmlns:a="http://schemas.openxmlformats.org/drawingml/2006/main">
               <a:ext uri="{FF2B5EF4-FFF2-40B4-BE49-F238E27FC236}">
-                <a16:creationId xmlns:a16="http://schemas.microsoft.com/office/drawing/2014/main" id="{69393CBF-99D9-4F2B-BD22-D7A9CBF74E12}"/>
+                <a16:creationId xmlns:a16="http://schemas.microsoft.com/office/drawing/2014/main" id="{69853DA7-BC2C-4B46-B377-E1B8FBEAFC66}"/>
               </a:ext>
             </a:extLst>
           </p:cNvPr>
@@ -3850,7 +3850,7 @@
           <p:cNvPr id="17" name="">
             <a:extLst xmlns:a="http://schemas.openxmlformats.org/drawingml/2006/main">
               <a:ext uri="{FF2B5EF4-FFF2-40B4-BE49-F238E27FC236}">
-                <a16:creationId xmlns:a16="http://schemas.microsoft.com/office/drawing/2014/main" id="{3ECD10B0-5F57-4D19-8325-61C170A53669}"/>
+                <a16:creationId xmlns:a16="http://schemas.microsoft.com/office/drawing/2014/main" id="{0D337E8E-AA10-4D09-AD2B-4C6693213983}"/>
               </a:ext>
             </a:extLst>
           </p:cNvPr>
@@ -3902,7 +3902,7 @@
           <p:cNvPr id="18" name="">
             <a:extLst xmlns:a="http://schemas.openxmlformats.org/drawingml/2006/main">
               <a:ext uri="{FF2B5EF4-FFF2-40B4-BE49-F238E27FC236}">
-                <a16:creationId xmlns:a16="http://schemas.microsoft.com/office/drawing/2014/main" id="{47C608BD-5EBA-4BC3-AB2B-2F9B2BE7BAF3}"/>
+                <a16:creationId xmlns:a16="http://schemas.microsoft.com/office/drawing/2014/main" id="{0FAB02E6-CB6B-4968-A110-818B835C5233}"/>
               </a:ext>
             </a:extLst>
           </p:cNvPr>
@@ -3933,7 +3933,7 @@
           <p:cNvPr id="19" name="">
             <a:extLst xmlns:a="http://schemas.openxmlformats.org/drawingml/2006/main">
               <a:ext uri="{FF2B5EF4-FFF2-40B4-BE49-F238E27FC236}">
-                <a16:creationId xmlns:a16="http://schemas.microsoft.com/office/drawing/2014/main" id="{21BBCDEE-0898-4144-92A0-D0F9D40DA5E9}"/>
+                <a16:creationId xmlns:a16="http://schemas.microsoft.com/office/drawing/2014/main" id="{AC27A9CB-D261-4A60-82D0-9813083D3004}"/>
               </a:ext>
             </a:extLst>
           </p:cNvPr>
@@ -3964,7 +3964,7 @@
           <p:cNvPr id="20" name="">
             <a:extLst xmlns:a="http://schemas.openxmlformats.org/drawingml/2006/main">
               <a:ext uri="{FF2B5EF4-FFF2-40B4-BE49-F238E27FC236}">
-                <a16:creationId xmlns:a16="http://schemas.microsoft.com/office/drawing/2014/main" id="{91D38DBC-8132-4BF5-96D5-569B46A736AF}"/>
+                <a16:creationId xmlns:a16="http://schemas.microsoft.com/office/drawing/2014/main" id="{7C093751-801A-482D-9613-341395B22602}"/>
               </a:ext>
             </a:extLst>
           </p:cNvPr>
@@ -4016,7 +4016,7 @@
           <p:cNvPr id="21" name="">
             <a:extLst xmlns:a="http://schemas.openxmlformats.org/drawingml/2006/main">
               <a:ext uri="{FF2B5EF4-FFF2-40B4-BE49-F238E27FC236}">
-                <a16:creationId xmlns:a16="http://schemas.microsoft.com/office/drawing/2014/main" id="{F935F230-630E-47E1-A4E2-41115307C7A2}"/>
+                <a16:creationId xmlns:a16="http://schemas.microsoft.com/office/drawing/2014/main" id="{41262952-F2D2-4558-B8D3-A6B3F520732F}"/>
               </a:ext>
             </a:extLst>
           </p:cNvPr>
@@ -4068,7 +4068,7 @@
           <p:cNvPr id="22" name="">
             <a:extLst xmlns:a="http://schemas.openxmlformats.org/drawingml/2006/main">
               <a:ext uri="{FF2B5EF4-FFF2-40B4-BE49-F238E27FC236}">
-                <a16:creationId xmlns:a16="http://schemas.microsoft.com/office/drawing/2014/main" id="{2DEC2A7D-D9B3-4A78-9E10-3AFEA4B47D4D}"/>
+                <a16:creationId xmlns:a16="http://schemas.microsoft.com/office/drawing/2014/main" id="{F9343216-90AE-45D1-B13B-6C7D67B0A7BD}"/>
               </a:ext>
             </a:extLst>
           </p:cNvPr>
@@ -4120,7 +4120,7 @@
           <p:cNvPr id="23" name="">
             <a:extLst xmlns:a="http://schemas.openxmlformats.org/drawingml/2006/main">
               <a:ext uri="{FF2B5EF4-FFF2-40B4-BE49-F238E27FC236}">
-                <a16:creationId xmlns:a16="http://schemas.microsoft.com/office/drawing/2014/main" id="{6D0184AB-45BA-4BC1-967E-BBBE2350FC27}"/>
+                <a16:creationId xmlns:a16="http://schemas.microsoft.com/office/drawing/2014/main" id="{1E8D4651-9346-4CC8-A230-C262065F7A03}"/>
               </a:ext>
             </a:extLst>
           </p:cNvPr>
@@ -4172,7 +4172,7 @@
           <p:cNvPr id="24" name="">
             <a:extLst xmlns:a="http://schemas.openxmlformats.org/drawingml/2006/main">
               <a:ext uri="{FF2B5EF4-FFF2-40B4-BE49-F238E27FC236}">
-                <a16:creationId xmlns:a16="http://schemas.microsoft.com/office/drawing/2014/main" id="{4B4CA0E4-0714-4A45-B4A0-6EC12A1E748A}"/>
+                <a16:creationId xmlns:a16="http://schemas.microsoft.com/office/drawing/2014/main" id="{804A09F8-09C7-4681-8AE3-0C27BA49B7FC}"/>
               </a:ext>
             </a:extLst>
           </p:cNvPr>
@@ -4224,7 +4224,7 @@
           <p:cNvPr id="25" name="">
             <a:extLst xmlns:a="http://schemas.openxmlformats.org/drawingml/2006/main">
               <a:ext uri="{FF2B5EF4-FFF2-40B4-BE49-F238E27FC236}">
-                <a16:creationId xmlns:a16="http://schemas.microsoft.com/office/drawing/2014/main" id="{5E91775C-E4E2-45F3-A3D6-A47837330437}"/>
+                <a16:creationId xmlns:a16="http://schemas.microsoft.com/office/drawing/2014/main" id="{712E0E20-42DC-413E-AF1B-67295B6E9CC5}"/>
               </a:ext>
             </a:extLst>
           </p:cNvPr>
@@ -4255,7 +4255,7 @@
           <p:cNvPr id="26" name="">
             <a:extLst xmlns:a="http://schemas.openxmlformats.org/drawingml/2006/main">
               <a:ext uri="{FF2B5EF4-FFF2-40B4-BE49-F238E27FC236}">
-                <a16:creationId xmlns:a16="http://schemas.microsoft.com/office/drawing/2014/main" id="{FB7B0393-3EE2-4B56-B235-3D818C5D458D}"/>
+                <a16:creationId xmlns:a16="http://schemas.microsoft.com/office/drawing/2014/main" id="{0CB6B297-7FA2-4364-A93C-F19ADE1C1EE3}"/>
               </a:ext>
             </a:extLst>
           </p:cNvPr>
@@ -4307,7 +4307,7 @@
           <p:cNvPr id="27" name="">
             <a:extLst xmlns:a="http://schemas.openxmlformats.org/drawingml/2006/main">
               <a:ext uri="{FF2B5EF4-FFF2-40B4-BE49-F238E27FC236}">
-                <a16:creationId xmlns:a16="http://schemas.microsoft.com/office/drawing/2014/main" id="{15C6A127-0788-4C68-9DB5-AA77CC02AA4C}"/>
+                <a16:creationId xmlns:a16="http://schemas.microsoft.com/office/drawing/2014/main" id="{BD7BA7FB-4D13-4A8F-A030-049FCC4815D1}"/>
               </a:ext>
             </a:extLst>
           </p:cNvPr>
@@ -4359,7 +4359,7 @@
           <p:cNvPr id="28" name="">
             <a:extLst xmlns:a="http://schemas.openxmlformats.org/drawingml/2006/main">
               <a:ext uri="{FF2B5EF4-FFF2-40B4-BE49-F238E27FC236}">
-                <a16:creationId xmlns:a16="http://schemas.microsoft.com/office/drawing/2014/main" id="{6D1A2FCA-4E28-49B4-A37F-7BFBBC7056B2}"/>
+                <a16:creationId xmlns:a16="http://schemas.microsoft.com/office/drawing/2014/main" id="{3665F66E-EA62-4EE7-82BE-4E831A4E15A6}"/>
               </a:ext>
             </a:extLst>
           </p:cNvPr>
@@ -4411,7 +4411,7 @@
           <p:cNvPr id="29" name="">
             <a:extLst xmlns:a="http://schemas.openxmlformats.org/drawingml/2006/main">
               <a:ext uri="{FF2B5EF4-FFF2-40B4-BE49-F238E27FC236}">
-                <a16:creationId xmlns:a16="http://schemas.microsoft.com/office/drawing/2014/main" id="{18576444-BFF7-40F1-AC5B-93F162A63846}"/>
+                <a16:creationId xmlns:a16="http://schemas.microsoft.com/office/drawing/2014/main" id="{E27A1EF1-655F-45E9-8AF4-196A1B081A5C}"/>
               </a:ext>
             </a:extLst>
           </p:cNvPr>
@@ -4463,7 +4463,7 @@
           <p:cNvPr id="30" name="">
             <a:extLst xmlns:a="http://schemas.openxmlformats.org/drawingml/2006/main">
               <a:ext uri="{FF2B5EF4-FFF2-40B4-BE49-F238E27FC236}">
-                <a16:creationId xmlns:a16="http://schemas.microsoft.com/office/drawing/2014/main" id="{A07F599B-EE3B-4287-BA1F-711801F8A68F}"/>
+                <a16:creationId xmlns:a16="http://schemas.microsoft.com/office/drawing/2014/main" id="{04514E59-F313-4DA6-84A9-E2B8B92C0FBE}"/>
               </a:ext>
             </a:extLst>
           </p:cNvPr>
@@ -4515,7 +4515,7 @@
           <p:cNvPr id="31" name="">
             <a:extLst xmlns:a="http://schemas.openxmlformats.org/drawingml/2006/main">
               <a:ext uri="{FF2B5EF4-FFF2-40B4-BE49-F238E27FC236}">
-                <a16:creationId xmlns:a16="http://schemas.microsoft.com/office/drawing/2014/main" id="{04E09508-F8DD-422B-BE86-0D923B0ED626}"/>
+                <a16:creationId xmlns:a16="http://schemas.microsoft.com/office/drawing/2014/main" id="{28B3469F-636D-44FB-A136-3609FE0DE62E}"/>
               </a:ext>
             </a:extLst>
           </p:cNvPr>
@@ -4546,7 +4546,7 @@
           <p:cNvPr id="32" name="">
             <a:extLst xmlns:a="http://schemas.openxmlformats.org/drawingml/2006/main">
               <a:ext uri="{FF2B5EF4-FFF2-40B4-BE49-F238E27FC236}">
-                <a16:creationId xmlns:a16="http://schemas.microsoft.com/office/drawing/2014/main" id="{9338893D-2962-4306-95C7-E98FD18C2C50}"/>
+                <a16:creationId xmlns:a16="http://schemas.microsoft.com/office/drawing/2014/main" id="{604FE857-B4BF-431B-87F9-DD5025D69E71}"/>
               </a:ext>
             </a:extLst>
           </p:cNvPr>
@@ -4577,7 +4577,7 @@
           <p:cNvPr id="33" name="">
             <a:extLst xmlns:a="http://schemas.openxmlformats.org/drawingml/2006/main">
               <a:ext uri="{FF2B5EF4-FFF2-40B4-BE49-F238E27FC236}">
-                <a16:creationId xmlns:a16="http://schemas.microsoft.com/office/drawing/2014/main" id="{989F87F1-2393-42ED-80D7-AC09AA6EB0B7}"/>
+                <a16:creationId xmlns:a16="http://schemas.microsoft.com/office/drawing/2014/main" id="{3E2E2A67-E0FF-4F19-AF98-4B007C0ECF36}"/>
               </a:ext>
             </a:extLst>
           </p:cNvPr>
@@ -4629,7 +4629,7 @@
           <p:cNvPr id="34" name="">
             <a:extLst xmlns:a="http://schemas.openxmlformats.org/drawingml/2006/main">
               <a:ext uri="{FF2B5EF4-FFF2-40B4-BE49-F238E27FC236}">
-                <a16:creationId xmlns:a16="http://schemas.microsoft.com/office/drawing/2014/main" id="{91BC056E-429A-4101-8427-DF86AEB33A2A}"/>
+                <a16:creationId xmlns:a16="http://schemas.microsoft.com/office/drawing/2014/main" id="{31B168DC-4D98-43D7-B480-35603F7F2A6D}"/>
               </a:ext>
             </a:extLst>
           </p:cNvPr>
@@ -4681,7 +4681,7 @@
           <p:cNvPr id="35" name="">
             <a:extLst xmlns:a="http://schemas.openxmlformats.org/drawingml/2006/main">
               <a:ext uri="{FF2B5EF4-FFF2-40B4-BE49-F238E27FC236}">
-                <a16:creationId xmlns:a16="http://schemas.microsoft.com/office/drawing/2014/main" id="{24D97EB0-9D1E-4556-9C86-5C90793E9610}"/>
+                <a16:creationId xmlns:a16="http://schemas.microsoft.com/office/drawing/2014/main" id="{A77471F6-D305-4E6D-BCA9-12F6361E1884}"/>
               </a:ext>
             </a:extLst>
           </p:cNvPr>
@@ -4733,7 +4733,7 @@
           <p:cNvPr id="36" name="">
             <a:extLst xmlns:a="http://schemas.openxmlformats.org/drawingml/2006/main">
               <a:ext uri="{FF2B5EF4-FFF2-40B4-BE49-F238E27FC236}">
-                <a16:creationId xmlns:a16="http://schemas.microsoft.com/office/drawing/2014/main" id="{610BA106-8C31-4EFF-A9B5-EE5AA1579F3F}"/>
+                <a16:creationId xmlns:a16="http://schemas.microsoft.com/office/drawing/2014/main" id="{70F7E884-F24C-4879-99DC-E37D0433DDFC}"/>
               </a:ext>
             </a:extLst>
           </p:cNvPr>
@@ -4785,7 +4785,7 @@
           <p:cNvPr id="37" name="">
             <a:extLst xmlns:a="http://schemas.openxmlformats.org/drawingml/2006/main">
               <a:ext uri="{FF2B5EF4-FFF2-40B4-BE49-F238E27FC236}">
-                <a16:creationId xmlns:a16="http://schemas.microsoft.com/office/drawing/2014/main" id="{3BB2B7C6-6367-41AD-8F75-6A9E9C229D3A}"/>
+                <a16:creationId xmlns:a16="http://schemas.microsoft.com/office/drawing/2014/main" id="{11F40AE7-9AA7-4D0D-8F87-E2998DD1352F}"/>
               </a:ext>
             </a:extLst>
           </p:cNvPr>
@@ -4837,7 +4837,7 @@
           <p:cNvPr id="38" name="">
             <a:extLst xmlns:a="http://schemas.openxmlformats.org/drawingml/2006/main">
               <a:ext uri="{FF2B5EF4-FFF2-40B4-BE49-F238E27FC236}">
-                <a16:creationId xmlns:a16="http://schemas.microsoft.com/office/drawing/2014/main" id="{98807137-9CED-4E51-9E68-17FFFB23937F}"/>
+                <a16:creationId xmlns:a16="http://schemas.microsoft.com/office/drawing/2014/main" id="{1F85B26D-AB7A-4B6C-B890-5D200ED6D6B1}"/>
               </a:ext>
             </a:extLst>
           </p:cNvPr>
@@ -4868,7 +4868,7 @@
           <p:cNvPr id="39" name="">
             <a:extLst xmlns:a="http://schemas.openxmlformats.org/drawingml/2006/main">
               <a:ext uri="{FF2B5EF4-FFF2-40B4-BE49-F238E27FC236}">
-                <a16:creationId xmlns:a16="http://schemas.microsoft.com/office/drawing/2014/main" id="{75E6D3A7-E486-4969-AE36-3D1276BD63E1}"/>
+                <a16:creationId xmlns:a16="http://schemas.microsoft.com/office/drawing/2014/main" id="{71C058DE-7119-4E37-90CE-171C30C662DB}"/>
               </a:ext>
             </a:extLst>
           </p:cNvPr>
@@ -4920,7 +4920,7 @@
           <p:cNvPr id="40" name="">
             <a:extLst xmlns:a="http://schemas.openxmlformats.org/drawingml/2006/main">
               <a:ext uri="{FF2B5EF4-FFF2-40B4-BE49-F238E27FC236}">
-                <a16:creationId xmlns:a16="http://schemas.microsoft.com/office/drawing/2014/main" id="{D8D3C4CD-3EB1-40AD-B44B-EAEAFECDCEA5}"/>
+                <a16:creationId xmlns:a16="http://schemas.microsoft.com/office/drawing/2014/main" id="{F6980A2E-066C-4144-8562-B6C28D6D4592}"/>
               </a:ext>
             </a:extLst>
           </p:cNvPr>
@@ -4972,7 +4972,7 @@
           <p:cNvPr id="41" name="">
             <a:extLst xmlns:a="http://schemas.openxmlformats.org/drawingml/2006/main">
               <a:ext uri="{FF2B5EF4-FFF2-40B4-BE49-F238E27FC236}">
-                <a16:creationId xmlns:a16="http://schemas.microsoft.com/office/drawing/2014/main" id="{854A27BC-27C0-40EA-9764-CE0E17672396}"/>
+                <a16:creationId xmlns:a16="http://schemas.microsoft.com/office/drawing/2014/main" id="{191022CB-E57B-470C-975B-E7DADA66D903}"/>
               </a:ext>
             </a:extLst>
           </p:cNvPr>
@@ -5024,7 +5024,7 @@
           <p:cNvPr id="42" name="">
             <a:extLst xmlns:a="http://schemas.openxmlformats.org/drawingml/2006/main">
               <a:ext uri="{FF2B5EF4-FFF2-40B4-BE49-F238E27FC236}">
-                <a16:creationId xmlns:a16="http://schemas.microsoft.com/office/drawing/2014/main" id="{0E276679-B6A6-49D7-9E06-33E519D6BC32}"/>
+                <a16:creationId xmlns:a16="http://schemas.microsoft.com/office/drawing/2014/main" id="{4FC2ADCD-CC31-41CB-B13A-E9F27B4C1D17}"/>
               </a:ext>
             </a:extLst>
           </p:cNvPr>
@@ -5076,7 +5076,7 @@
           <p:cNvPr id="43" name="">
             <a:extLst xmlns:a="http://schemas.openxmlformats.org/drawingml/2006/main">
               <a:ext uri="{FF2B5EF4-FFF2-40B4-BE49-F238E27FC236}">
-                <a16:creationId xmlns:a16="http://schemas.microsoft.com/office/drawing/2014/main" id="{A5E9AD13-9DBF-42BE-9FB8-683DCCD215CF}"/>
+                <a16:creationId xmlns:a16="http://schemas.microsoft.com/office/drawing/2014/main" id="{3843200C-2127-4462-B3A2-EC4D7A0D3F8F}"/>
               </a:ext>
             </a:extLst>
           </p:cNvPr>
@@ -5128,7 +5128,7 @@
           <p:cNvPr id="44" name="">
             <a:extLst xmlns:a="http://schemas.openxmlformats.org/drawingml/2006/main">
               <a:ext uri="{FF2B5EF4-FFF2-40B4-BE49-F238E27FC236}">
-                <a16:creationId xmlns:a16="http://schemas.microsoft.com/office/drawing/2014/main" id="{333FAE3D-70CF-4483-B9D0-CB7A73CE85E8}"/>
+                <a16:creationId xmlns:a16="http://schemas.microsoft.com/office/drawing/2014/main" id="{4A158147-6741-4ADD-831A-720ACACC5AA3}"/>
               </a:ext>
             </a:extLst>
           </p:cNvPr>
@@ -5159,7 +5159,7 @@
           <p:cNvPr id="45" name="">
             <a:extLst xmlns:a="http://schemas.openxmlformats.org/drawingml/2006/main">
               <a:ext uri="{FF2B5EF4-FFF2-40B4-BE49-F238E27FC236}">
-                <a16:creationId xmlns:a16="http://schemas.microsoft.com/office/drawing/2014/main" id="{1F357323-6F83-4E3D-92BC-38AF4D5E7401}"/>
+                <a16:creationId xmlns:a16="http://schemas.microsoft.com/office/drawing/2014/main" id="{B0435995-5D64-431F-982B-2B42AE55DE69}"/>
               </a:ext>
             </a:extLst>
           </p:cNvPr>
@@ -5190,7 +5190,7 @@
           <p:cNvPr id="46" name="">
             <a:extLst xmlns:a="http://schemas.openxmlformats.org/drawingml/2006/main">
               <a:ext uri="{FF2B5EF4-FFF2-40B4-BE49-F238E27FC236}">
-                <a16:creationId xmlns:a16="http://schemas.microsoft.com/office/drawing/2014/main" id="{1E136199-3235-4E39-AA55-5684E8BD82F9}"/>
+                <a16:creationId xmlns:a16="http://schemas.microsoft.com/office/drawing/2014/main" id="{ADAC833A-5A58-436A-BA54-B537E7C522E6}"/>
               </a:ext>
             </a:extLst>
           </p:cNvPr>
@@ -5242,7 +5242,7 @@
           <p:cNvPr id="47" name="">
             <a:extLst xmlns:a="http://schemas.openxmlformats.org/drawingml/2006/main">
               <a:ext uri="{FF2B5EF4-FFF2-40B4-BE49-F238E27FC236}">
-                <a16:creationId xmlns:a16="http://schemas.microsoft.com/office/drawing/2014/main" id="{C3D29A50-8C27-45D1-94AC-D410AAE4E967}"/>
+                <a16:creationId xmlns:a16="http://schemas.microsoft.com/office/drawing/2014/main" id="{A07FB6B9-90C8-4337-8CD9-938D26FA9456}"/>
               </a:ext>
             </a:extLst>
           </p:cNvPr>
@@ -5294,7 +5294,7 @@
           <p:cNvPr id="48" name="">
             <a:extLst xmlns:a="http://schemas.openxmlformats.org/drawingml/2006/main">
               <a:ext uri="{FF2B5EF4-FFF2-40B4-BE49-F238E27FC236}">
-                <a16:creationId xmlns:a16="http://schemas.microsoft.com/office/drawing/2014/main" id="{4D8FD781-3938-469C-8E7F-74BAB274FCC0}"/>
+                <a16:creationId xmlns:a16="http://schemas.microsoft.com/office/drawing/2014/main" id="{B800BBC1-5A3B-4E92-AE20-772F8ABBC8D6}"/>
               </a:ext>
             </a:extLst>
           </p:cNvPr>
@@ -5346,7 +5346,7 @@
           <p:cNvPr id="49" name="">
             <a:extLst xmlns:a="http://schemas.openxmlformats.org/drawingml/2006/main">
               <a:ext uri="{FF2B5EF4-FFF2-40B4-BE49-F238E27FC236}">
-                <a16:creationId xmlns:a16="http://schemas.microsoft.com/office/drawing/2014/main" id="{385303E0-A74A-4FD8-9300-46F9BD1A1E77}"/>
+                <a16:creationId xmlns:a16="http://schemas.microsoft.com/office/drawing/2014/main" id="{BBB879AE-7625-48B3-9BE7-D0DD040E599B}"/>
               </a:ext>
             </a:extLst>
           </p:cNvPr>
@@ -5398,7 +5398,7 @@
           <p:cNvPr id="50" name="">
             <a:extLst xmlns:a="http://schemas.openxmlformats.org/drawingml/2006/main">
               <a:ext uri="{FF2B5EF4-FFF2-40B4-BE49-F238E27FC236}">
-                <a16:creationId xmlns:a16="http://schemas.microsoft.com/office/drawing/2014/main" id="{E6396E41-3F0B-4CB3-B891-48D96E776F45}"/>
+                <a16:creationId xmlns:a16="http://schemas.microsoft.com/office/drawing/2014/main" id="{37211C58-F676-4C30-9A57-34C6E760BE13}"/>
               </a:ext>
             </a:extLst>
           </p:cNvPr>
@@ -5450,7 +5450,7 @@
           <p:cNvPr id="51" name="">
             <a:extLst xmlns:a="http://schemas.openxmlformats.org/drawingml/2006/main">
               <a:ext uri="{FF2B5EF4-FFF2-40B4-BE49-F238E27FC236}">
-                <a16:creationId xmlns:a16="http://schemas.microsoft.com/office/drawing/2014/main" id="{EC6AC26A-4400-4B0D-9FC6-678092BA35E4}"/>
+                <a16:creationId xmlns:a16="http://schemas.microsoft.com/office/drawing/2014/main" id="{33F27D7B-1A08-453D-A5B9-77B49737D58C}"/>
               </a:ext>
             </a:extLst>
           </p:cNvPr>
@@ -5481,7 +5481,7 @@
           <p:cNvPr id="52" name="">
             <a:extLst xmlns:a="http://schemas.openxmlformats.org/drawingml/2006/main">
               <a:ext uri="{FF2B5EF4-FFF2-40B4-BE49-F238E27FC236}">
-                <a16:creationId xmlns:a16="http://schemas.microsoft.com/office/drawing/2014/main" id="{FF4A7FA6-154F-4738-B74B-56D1FD4D4250}"/>
+                <a16:creationId xmlns:a16="http://schemas.microsoft.com/office/drawing/2014/main" id="{FEDB65CE-1F1B-4D61-B194-5409CEAF8755}"/>
               </a:ext>
             </a:extLst>
           </p:cNvPr>
@@ -5533,7 +5533,7 @@
           <p:cNvPr id="53" name="">
             <a:extLst xmlns:a="http://schemas.openxmlformats.org/drawingml/2006/main">
               <a:ext uri="{FF2B5EF4-FFF2-40B4-BE49-F238E27FC236}">
-                <a16:creationId xmlns:a16="http://schemas.microsoft.com/office/drawing/2014/main" id="{F1B2909F-F5E8-436D-8C01-D447F2A01173}"/>
+                <a16:creationId xmlns:a16="http://schemas.microsoft.com/office/drawing/2014/main" id="{214DBF54-31EC-4AE2-9BBD-8667A7C057A7}"/>
               </a:ext>
             </a:extLst>
           </p:cNvPr>
@@ -5585,7 +5585,7 @@
           <p:cNvPr id="54" name="">
             <a:extLst xmlns:a="http://schemas.openxmlformats.org/drawingml/2006/main">
               <a:ext uri="{FF2B5EF4-FFF2-40B4-BE49-F238E27FC236}">
-                <a16:creationId xmlns:a16="http://schemas.microsoft.com/office/drawing/2014/main" id="{5A3B498C-4291-4D79-9234-E7B6B24C1640}"/>
+                <a16:creationId xmlns:a16="http://schemas.microsoft.com/office/drawing/2014/main" id="{2205C5F2-0EFC-4118-A86E-4495105FCFA5}"/>
               </a:ext>
             </a:extLst>
           </p:cNvPr>
@@ -5637,7 +5637,7 @@
           <p:cNvPr id="55" name="">
             <a:extLst xmlns:a="http://schemas.openxmlformats.org/drawingml/2006/main">
               <a:ext uri="{FF2B5EF4-FFF2-40B4-BE49-F238E27FC236}">
-                <a16:creationId xmlns:a16="http://schemas.microsoft.com/office/drawing/2014/main" id="{61C27FB3-1F3C-4BD6-820B-439D2B059813}"/>
+                <a16:creationId xmlns:a16="http://schemas.microsoft.com/office/drawing/2014/main" id="{2BD6C40A-DBB1-400B-BD35-516BEFEA88F6}"/>
               </a:ext>
             </a:extLst>
           </p:cNvPr>
@@ -5689,7 +5689,7 @@
           <p:cNvPr id="56" name="">
             <a:extLst xmlns:a="http://schemas.openxmlformats.org/drawingml/2006/main">
               <a:ext uri="{FF2B5EF4-FFF2-40B4-BE49-F238E27FC236}">
-                <a16:creationId xmlns:a16="http://schemas.microsoft.com/office/drawing/2014/main" id="{251268E2-A99B-4386-AA4E-2326C1681EFA}"/>
+                <a16:creationId xmlns:a16="http://schemas.microsoft.com/office/drawing/2014/main" id="{67A3EFC9-11DB-4BBB-8B34-72D12F94DE07}"/>
               </a:ext>
             </a:extLst>
           </p:cNvPr>
@@ -5741,7 +5741,7 @@
           <p:cNvPr id="57" name="">
             <a:extLst xmlns:a="http://schemas.openxmlformats.org/drawingml/2006/main">
               <a:ext uri="{FF2B5EF4-FFF2-40B4-BE49-F238E27FC236}">
-                <a16:creationId xmlns:a16="http://schemas.microsoft.com/office/drawing/2014/main" id="{A32CB479-7FF4-4AAD-BCBF-949D7B55D709}"/>
+                <a16:creationId xmlns:a16="http://schemas.microsoft.com/office/drawing/2014/main" id="{5ADE85EE-595D-418A-A995-C61A106B1F3B}"/>
               </a:ext>
             </a:extLst>
           </p:cNvPr>
@@ -5772,7 +5772,7 @@
           <p:cNvPr id="58" name="">
             <a:extLst xmlns:a="http://schemas.openxmlformats.org/drawingml/2006/main">
               <a:ext uri="{FF2B5EF4-FFF2-40B4-BE49-F238E27FC236}">
-                <a16:creationId xmlns:a16="http://schemas.microsoft.com/office/drawing/2014/main" id="{4C15518D-9696-4662-B973-34EB0D3565EF}"/>
+                <a16:creationId xmlns:a16="http://schemas.microsoft.com/office/drawing/2014/main" id="{D739D0E6-52DB-4F39-A92C-3DED73A74979}"/>
               </a:ext>
             </a:extLst>
           </p:cNvPr>
@@ -5803,7 +5803,7 @@
           <p:cNvPr id="59" name="">
             <a:extLst xmlns:a="http://schemas.openxmlformats.org/drawingml/2006/main">
               <a:ext uri="{FF2B5EF4-FFF2-40B4-BE49-F238E27FC236}">
-                <a16:creationId xmlns:a16="http://schemas.microsoft.com/office/drawing/2014/main" id="{85DA7484-4150-4D04-A0CE-6E946595A20B}"/>
+                <a16:creationId xmlns:a16="http://schemas.microsoft.com/office/drawing/2014/main" id="{2EA2C44D-9E69-4005-98D0-5EC47F0E5470}"/>
               </a:ext>
             </a:extLst>
           </p:cNvPr>
@@ -5855,7 +5855,7 @@
           <p:cNvPr id="60" name="">
             <a:extLst xmlns:a="http://schemas.openxmlformats.org/drawingml/2006/main">
               <a:ext uri="{FF2B5EF4-FFF2-40B4-BE49-F238E27FC236}">
-                <a16:creationId xmlns:a16="http://schemas.microsoft.com/office/drawing/2014/main" id="{951A8C2D-02CD-478C-B438-9101C167324B}"/>
+                <a16:creationId xmlns:a16="http://schemas.microsoft.com/office/drawing/2014/main" id="{4D8131FA-1FBB-435A-92A7-02D86A995129}"/>
               </a:ext>
             </a:extLst>
           </p:cNvPr>
@@ -5907,7 +5907,7 @@
           <p:cNvPr id="61" name="">
             <a:extLst xmlns:a="http://schemas.openxmlformats.org/drawingml/2006/main">
               <a:ext uri="{FF2B5EF4-FFF2-40B4-BE49-F238E27FC236}">
-                <a16:creationId xmlns:a16="http://schemas.microsoft.com/office/drawing/2014/main" id="{6AF3A50B-53CC-48F5-B6D8-6A2CD6759B58}"/>
+                <a16:creationId xmlns:a16="http://schemas.microsoft.com/office/drawing/2014/main" id="{216EB8C4-4DCD-4DE3-811E-C36356B7AC9F}"/>
               </a:ext>
             </a:extLst>
           </p:cNvPr>
@@ -5959,7 +5959,7 @@
           <p:cNvPr id="62" name="">
             <a:extLst xmlns:a="http://schemas.openxmlformats.org/drawingml/2006/main">
               <a:ext uri="{FF2B5EF4-FFF2-40B4-BE49-F238E27FC236}">
-                <a16:creationId xmlns:a16="http://schemas.microsoft.com/office/drawing/2014/main" id="{8CE96572-9F3E-4C83-AD36-19093459B9AF}"/>
+                <a16:creationId xmlns:a16="http://schemas.microsoft.com/office/drawing/2014/main" id="{C408D4C5-58C2-4608-B738-2B68C8A71981}"/>
               </a:ext>
             </a:extLst>
           </p:cNvPr>
@@ -6011,7 +6011,7 @@
           <p:cNvPr id="63" name="">
             <a:extLst xmlns:a="http://schemas.openxmlformats.org/drawingml/2006/main">
               <a:ext uri="{FF2B5EF4-FFF2-40B4-BE49-F238E27FC236}">
-                <a16:creationId xmlns:a16="http://schemas.microsoft.com/office/drawing/2014/main" id="{A33DF414-C6F6-45C3-9B40-C381952FCB33}"/>
+                <a16:creationId xmlns:a16="http://schemas.microsoft.com/office/drawing/2014/main" id="{CBEBDE78-DD3F-4DC0-A944-8FFCB05C88FD}"/>
               </a:ext>
             </a:extLst>
           </p:cNvPr>
@@ -6063,7 +6063,7 @@
           <p:cNvPr id="64" name="">
             <a:extLst xmlns:a="http://schemas.openxmlformats.org/drawingml/2006/main">
               <a:ext uri="{FF2B5EF4-FFF2-40B4-BE49-F238E27FC236}">
-                <a16:creationId xmlns:a16="http://schemas.microsoft.com/office/drawing/2014/main" id="{C39A3B04-D3C9-422D-B2EB-91964A39145D}"/>
+                <a16:creationId xmlns:a16="http://schemas.microsoft.com/office/drawing/2014/main" id="{D874C212-5FBB-4446-814C-580EAE4810CA}"/>
               </a:ext>
             </a:extLst>
           </p:cNvPr>
@@ -6094,7 +6094,7 @@
           <p:cNvPr id="65" name="">
             <a:extLst xmlns:a="http://schemas.openxmlformats.org/drawingml/2006/main">
               <a:ext uri="{FF2B5EF4-FFF2-40B4-BE49-F238E27FC236}">
-                <a16:creationId xmlns:a16="http://schemas.microsoft.com/office/drawing/2014/main" id="{60BBDCA1-70B9-4BA9-B7BD-BE63EA85F4D6}"/>
+                <a16:creationId xmlns:a16="http://schemas.microsoft.com/office/drawing/2014/main" id="{021B35EA-9F30-4147-A60A-4943F439CA1F}"/>
               </a:ext>
             </a:extLst>
           </p:cNvPr>
@@ -6146,7 +6146,7 @@
           <p:cNvPr id="66" name="">
             <a:extLst xmlns:a="http://schemas.openxmlformats.org/drawingml/2006/main">
               <a:ext uri="{FF2B5EF4-FFF2-40B4-BE49-F238E27FC236}">
-                <a16:creationId xmlns:a16="http://schemas.microsoft.com/office/drawing/2014/main" id="{1248CBE5-5518-4499-953D-B18312C94F74}"/>
+                <a16:creationId xmlns:a16="http://schemas.microsoft.com/office/drawing/2014/main" id="{4C23F58B-83A4-46BF-BF42-CD205FEFACC8}"/>
               </a:ext>
             </a:extLst>
           </p:cNvPr>
@@ -6198,7 +6198,7 @@
           <p:cNvPr id="67" name="">
             <a:extLst xmlns:a="http://schemas.openxmlformats.org/drawingml/2006/main">
               <a:ext uri="{FF2B5EF4-FFF2-40B4-BE49-F238E27FC236}">
-                <a16:creationId xmlns:a16="http://schemas.microsoft.com/office/drawing/2014/main" id="{2CED6A71-9DEC-4759-8E30-183D0D064C42}"/>
+                <a16:creationId xmlns:a16="http://schemas.microsoft.com/office/drawing/2014/main" id="{F85751AF-A6FD-491E-8C60-9583EBAD77F2}"/>
               </a:ext>
             </a:extLst>
           </p:cNvPr>
@@ -6250,7 +6250,7 @@
           <p:cNvPr id="68" name="">
             <a:extLst xmlns:a="http://schemas.openxmlformats.org/drawingml/2006/main">
               <a:ext uri="{FF2B5EF4-FFF2-40B4-BE49-F238E27FC236}">
-                <a16:creationId xmlns:a16="http://schemas.microsoft.com/office/drawing/2014/main" id="{7B54040B-9BD9-43E0-961F-5079E6740183}"/>
+                <a16:creationId xmlns:a16="http://schemas.microsoft.com/office/drawing/2014/main" id="{E4AEC9C4-7610-4D4F-9E64-6CA923D6262D}"/>
               </a:ext>
             </a:extLst>
           </p:cNvPr>
@@ -6302,7 +6302,7 @@
           <p:cNvPr id="69" name="">
             <a:extLst xmlns:a="http://schemas.openxmlformats.org/drawingml/2006/main">
               <a:ext uri="{FF2B5EF4-FFF2-40B4-BE49-F238E27FC236}">
-                <a16:creationId xmlns:a16="http://schemas.microsoft.com/office/drawing/2014/main" id="{7AEFF6D6-BE45-469B-A745-BB9F4C1AD34F}"/>
+                <a16:creationId xmlns:a16="http://schemas.microsoft.com/office/drawing/2014/main" id="{B3B8C2C6-0C73-4F0C-B2AB-153564EAB40B}"/>
               </a:ext>
             </a:extLst>
           </p:cNvPr>
@@ -6354,7 +6354,7 @@
           <p:cNvPr id="70" name="">
             <a:extLst xmlns:a="http://schemas.openxmlformats.org/drawingml/2006/main">
               <a:ext uri="{FF2B5EF4-FFF2-40B4-BE49-F238E27FC236}">
-                <a16:creationId xmlns:a16="http://schemas.microsoft.com/office/drawing/2014/main" id="{B81A77B3-1FB3-4E2C-AB14-FA99D02516DA}"/>
+                <a16:creationId xmlns:a16="http://schemas.microsoft.com/office/drawing/2014/main" id="{90ECEBA9-8638-4E20-AF95-06946FDDE26B}"/>
               </a:ext>
             </a:extLst>
           </p:cNvPr>
@@ -6385,7 +6385,7 @@
           <p:cNvPr id="71" name="">
             <a:extLst xmlns:a="http://schemas.openxmlformats.org/drawingml/2006/main">
               <a:ext uri="{FF2B5EF4-FFF2-40B4-BE49-F238E27FC236}">
-                <a16:creationId xmlns:a16="http://schemas.microsoft.com/office/drawing/2014/main" id="{853110C8-C8CB-49E0-BB01-C2EDDCEB53C7}"/>
+                <a16:creationId xmlns:a16="http://schemas.microsoft.com/office/drawing/2014/main" id="{8C7860F9-B13D-471B-8B36-B2860FB51A28}"/>
               </a:ext>
             </a:extLst>
           </p:cNvPr>
@@ -6416,7 +6416,7 @@
           <p:cNvPr id="72" name="">
             <a:extLst xmlns:a="http://schemas.openxmlformats.org/drawingml/2006/main">
               <a:ext uri="{FF2B5EF4-FFF2-40B4-BE49-F238E27FC236}">
-                <a16:creationId xmlns:a16="http://schemas.microsoft.com/office/drawing/2014/main" id="{CD88E854-02E3-49F5-A940-2353169B8982}"/>
+                <a16:creationId xmlns:a16="http://schemas.microsoft.com/office/drawing/2014/main" id="{D9655930-E862-4D13-9FE0-AE940D35BF32}"/>
               </a:ext>
             </a:extLst>
           </p:cNvPr>
@@ -6468,7 +6468,7 @@
           <p:cNvPr id="73" name="">
             <a:extLst xmlns:a="http://schemas.openxmlformats.org/drawingml/2006/main">
               <a:ext uri="{FF2B5EF4-FFF2-40B4-BE49-F238E27FC236}">
-                <a16:creationId xmlns:a16="http://schemas.microsoft.com/office/drawing/2014/main" id="{29EF4D73-3153-400C-8C22-A2B04BA85EBC}"/>
+                <a16:creationId xmlns:a16="http://schemas.microsoft.com/office/drawing/2014/main" id="{316F8DEB-F860-4172-BB1A-938C3A8B9CC4}"/>
               </a:ext>
             </a:extLst>
           </p:cNvPr>
@@ -6520,7 +6520,7 @@
           <p:cNvPr id="74" name="">
             <a:extLst xmlns:a="http://schemas.openxmlformats.org/drawingml/2006/main">
               <a:ext uri="{FF2B5EF4-FFF2-40B4-BE49-F238E27FC236}">
-                <a16:creationId xmlns:a16="http://schemas.microsoft.com/office/drawing/2014/main" id="{91CF2A08-3FE1-4E82-9BCD-5D8B7ABCD919}"/>
+                <a16:creationId xmlns:a16="http://schemas.microsoft.com/office/drawing/2014/main" id="{A1F690CA-F9BB-4875-9D0F-9412011029D1}"/>
               </a:ext>
             </a:extLst>
           </p:cNvPr>
@@ -6572,7 +6572,7 @@
           <p:cNvPr id="75" name="">
             <a:extLst xmlns:a="http://schemas.openxmlformats.org/drawingml/2006/main">
               <a:ext uri="{FF2B5EF4-FFF2-40B4-BE49-F238E27FC236}">
-                <a16:creationId xmlns:a16="http://schemas.microsoft.com/office/drawing/2014/main" id="{8A1C9CCD-C70A-45B1-9315-0F1A89D90AED}"/>
+                <a16:creationId xmlns:a16="http://schemas.microsoft.com/office/drawing/2014/main" id="{40BD4C29-6D6A-440B-8D39-4AAAF2D22267}"/>
               </a:ext>
             </a:extLst>
           </p:cNvPr>
@@ -6624,7 +6624,7 @@
           <p:cNvPr id="76" name="">
             <a:extLst xmlns:a="http://schemas.openxmlformats.org/drawingml/2006/main">
               <a:ext uri="{FF2B5EF4-FFF2-40B4-BE49-F238E27FC236}">
-                <a16:creationId xmlns:a16="http://schemas.microsoft.com/office/drawing/2014/main" id="{E8BEEEB4-B677-4B34-9393-DA3B5DF5DEA3}"/>
+                <a16:creationId xmlns:a16="http://schemas.microsoft.com/office/drawing/2014/main" id="{57E92D34-2DDC-45AD-A1F1-992046C7D0CF}"/>
               </a:ext>
             </a:extLst>
           </p:cNvPr>
@@ -6676,7 +6676,7 @@
           <p:cNvPr id="77" name="">
             <a:extLst xmlns:a="http://schemas.openxmlformats.org/drawingml/2006/main">
               <a:ext uri="{FF2B5EF4-FFF2-40B4-BE49-F238E27FC236}">
-                <a16:creationId xmlns:a16="http://schemas.microsoft.com/office/drawing/2014/main" id="{5E00BCD2-6FD8-4A33-A349-C03801290574}"/>
+                <a16:creationId xmlns:a16="http://schemas.microsoft.com/office/drawing/2014/main" id="{5024DEED-5492-4A69-8E8B-573168B5037D}"/>
               </a:ext>
             </a:extLst>
           </p:cNvPr>
@@ -6707,7 +6707,7 @@
           <p:cNvPr id="78" name="">
             <a:extLst xmlns:a="http://schemas.openxmlformats.org/drawingml/2006/main">
               <a:ext uri="{FF2B5EF4-FFF2-40B4-BE49-F238E27FC236}">
-                <a16:creationId xmlns:a16="http://schemas.microsoft.com/office/drawing/2014/main" id="{B9DC38D8-6F31-47A1-91BF-84E762FD96BA}"/>
+                <a16:creationId xmlns:a16="http://schemas.microsoft.com/office/drawing/2014/main" id="{58CEF48C-BDF5-4590-AA28-E3BE5C9D7C1C}"/>
               </a:ext>
             </a:extLst>
           </p:cNvPr>
@@ -6759,7 +6759,7 @@
           <p:cNvPr id="79" name="">
             <a:extLst xmlns:a="http://schemas.openxmlformats.org/drawingml/2006/main">
               <a:ext uri="{FF2B5EF4-FFF2-40B4-BE49-F238E27FC236}">
-                <a16:creationId xmlns:a16="http://schemas.microsoft.com/office/drawing/2014/main" id="{E6EA3A89-8D56-4651-95E4-E0BE9BACF827}"/>
+                <a16:creationId xmlns:a16="http://schemas.microsoft.com/office/drawing/2014/main" id="{A2BB4C82-683D-42A6-959F-476686530EE8}"/>
               </a:ext>
             </a:extLst>
           </p:cNvPr>
@@ -6811,7 +6811,7 @@
           <p:cNvPr id="80" name="">
             <a:extLst xmlns:a="http://schemas.openxmlformats.org/drawingml/2006/main">
               <a:ext uri="{FF2B5EF4-FFF2-40B4-BE49-F238E27FC236}">
-                <a16:creationId xmlns:a16="http://schemas.microsoft.com/office/drawing/2014/main" id="{EF9674F8-0AB5-40A4-9FB1-1A6C90198B2D}"/>
+                <a16:creationId xmlns:a16="http://schemas.microsoft.com/office/drawing/2014/main" id="{5B9D815E-2DD7-4698-8DAC-F317A2DF3140}"/>
               </a:ext>
             </a:extLst>
           </p:cNvPr>
@@ -6863,7 +6863,7 @@
           <p:cNvPr id="81" name="">
             <a:extLst xmlns:a="http://schemas.openxmlformats.org/drawingml/2006/main">
               <a:ext uri="{FF2B5EF4-FFF2-40B4-BE49-F238E27FC236}">
-                <a16:creationId xmlns:a16="http://schemas.microsoft.com/office/drawing/2014/main" id="{11036454-C827-42D6-9A24-58BA817A9EE8}"/>
+                <a16:creationId xmlns:a16="http://schemas.microsoft.com/office/drawing/2014/main" id="{7ECA958B-11CF-4DB3-90A5-FB1B0466B626}"/>
               </a:ext>
             </a:extLst>
           </p:cNvPr>
@@ -6915,7 +6915,7 @@
           <p:cNvPr id="82" name="">
             <a:extLst xmlns:a="http://schemas.openxmlformats.org/drawingml/2006/main">
               <a:ext uri="{FF2B5EF4-FFF2-40B4-BE49-F238E27FC236}">
-                <a16:creationId xmlns:a16="http://schemas.microsoft.com/office/drawing/2014/main" id="{1B57E883-D6E7-4775-A023-1066FBD81FF8}"/>
+                <a16:creationId xmlns:a16="http://schemas.microsoft.com/office/drawing/2014/main" id="{72D3DBC3-45F8-4947-B143-E9C7C095AE45}"/>
               </a:ext>
             </a:extLst>
           </p:cNvPr>
@@ -6967,7 +6967,7 @@
           <p:cNvPr id="83" name="">
             <a:extLst xmlns:a="http://schemas.openxmlformats.org/drawingml/2006/main">
               <a:ext uri="{FF2B5EF4-FFF2-40B4-BE49-F238E27FC236}">
-                <a16:creationId xmlns:a16="http://schemas.microsoft.com/office/drawing/2014/main" id="{F28FAD23-5B27-46B3-AE58-23676D138488}"/>
+                <a16:creationId xmlns:a16="http://schemas.microsoft.com/office/drawing/2014/main" id="{589A71CC-77D4-4CAB-B0DB-FB0257700B69}"/>
               </a:ext>
             </a:extLst>
           </p:cNvPr>
@@ -6998,7 +6998,7 @@
           <p:cNvPr id="84" name="">
             <a:extLst xmlns:a="http://schemas.openxmlformats.org/drawingml/2006/main">
               <a:ext uri="{FF2B5EF4-FFF2-40B4-BE49-F238E27FC236}">
-                <a16:creationId xmlns:a16="http://schemas.microsoft.com/office/drawing/2014/main" id="{F2F3D416-0DF6-4B46-BAF6-52E883608458}"/>
+                <a16:creationId xmlns:a16="http://schemas.microsoft.com/office/drawing/2014/main" id="{5F9F5A65-70C6-4457-B207-15CEB2FC0B60}"/>
               </a:ext>
             </a:extLst>
           </p:cNvPr>
@@ -7029,7 +7029,7 @@
           <p:cNvPr id="85" name="">
             <a:extLst xmlns:a="http://schemas.openxmlformats.org/drawingml/2006/main">
               <a:ext uri="{FF2B5EF4-FFF2-40B4-BE49-F238E27FC236}">
-                <a16:creationId xmlns:a16="http://schemas.microsoft.com/office/drawing/2014/main" id="{7B5B1DDB-29D9-48EE-AE07-490B24765F72}"/>
+                <a16:creationId xmlns:a16="http://schemas.microsoft.com/office/drawing/2014/main" id="{BCC58F19-E603-4B14-99FF-D8662D834489}"/>
               </a:ext>
             </a:extLst>
           </p:cNvPr>
@@ -7081,7 +7081,7 @@
           <p:cNvPr id="86" name="">
             <a:extLst xmlns:a="http://schemas.openxmlformats.org/drawingml/2006/main">
               <a:ext uri="{FF2B5EF4-FFF2-40B4-BE49-F238E27FC236}">
-                <a16:creationId xmlns:a16="http://schemas.microsoft.com/office/drawing/2014/main" id="{6A649B7F-D609-45D4-8444-B6736849CD35}"/>
+                <a16:creationId xmlns:a16="http://schemas.microsoft.com/office/drawing/2014/main" id="{18A00448-525D-403E-94F3-EC638B83312C}"/>
               </a:ext>
             </a:extLst>
           </p:cNvPr>
@@ -7133,7 +7133,7 @@
           <p:cNvPr id="87" name="">
             <a:extLst xmlns:a="http://schemas.openxmlformats.org/drawingml/2006/main">
               <a:ext uri="{FF2B5EF4-FFF2-40B4-BE49-F238E27FC236}">
-                <a16:creationId xmlns:a16="http://schemas.microsoft.com/office/drawing/2014/main" id="{8318426D-5838-42E4-9EC7-5A05125D7FFD}"/>
+                <a16:creationId xmlns:a16="http://schemas.microsoft.com/office/drawing/2014/main" id="{688ABFEC-B8D7-4CFD-AA9C-902CA0905DF6}"/>
               </a:ext>
             </a:extLst>
           </p:cNvPr>
@@ -7185,7 +7185,7 @@
           <p:cNvPr id="88" name="">
             <a:extLst xmlns:a="http://schemas.openxmlformats.org/drawingml/2006/main">
               <a:ext uri="{FF2B5EF4-FFF2-40B4-BE49-F238E27FC236}">
-                <a16:creationId xmlns:a16="http://schemas.microsoft.com/office/drawing/2014/main" id="{4CD1B277-4DE6-4975-8C35-6772F152BB52}"/>
+                <a16:creationId xmlns:a16="http://schemas.microsoft.com/office/drawing/2014/main" id="{7B67F1CA-1A91-4414-85B0-F102003B0D5A}"/>
               </a:ext>
             </a:extLst>
           </p:cNvPr>
@@ -7237,7 +7237,7 @@
           <p:cNvPr id="89" name="">
             <a:extLst xmlns:a="http://schemas.openxmlformats.org/drawingml/2006/main">
               <a:ext uri="{FF2B5EF4-FFF2-40B4-BE49-F238E27FC236}">
-                <a16:creationId xmlns:a16="http://schemas.microsoft.com/office/drawing/2014/main" id="{2B43DA9F-9833-43CB-9F4F-9F9B18DD242F}"/>
+                <a16:creationId xmlns:a16="http://schemas.microsoft.com/office/drawing/2014/main" id="{4A38381C-CCCC-4A84-B802-47422F918D7C}"/>
               </a:ext>
             </a:extLst>
           </p:cNvPr>
@@ -7289,7 +7289,7 @@
           <p:cNvPr id="90" name="">
             <a:extLst xmlns:a="http://schemas.openxmlformats.org/drawingml/2006/main">
               <a:ext uri="{FF2B5EF4-FFF2-40B4-BE49-F238E27FC236}">
-                <a16:creationId xmlns:a16="http://schemas.microsoft.com/office/drawing/2014/main" id="{8437D68B-D791-4503-9E1D-BCBB64CA3046}"/>
+                <a16:creationId xmlns:a16="http://schemas.microsoft.com/office/drawing/2014/main" id="{C6E2FCCF-039F-42BD-A67C-4EDF44AFC6B2}"/>
               </a:ext>
             </a:extLst>
           </p:cNvPr>
@@ -7320,7 +7320,7 @@
           <p:cNvPr id="91" name="">
             <a:extLst xmlns:a="http://schemas.openxmlformats.org/drawingml/2006/main">
               <a:ext uri="{FF2B5EF4-FFF2-40B4-BE49-F238E27FC236}">
-                <a16:creationId xmlns:a16="http://schemas.microsoft.com/office/drawing/2014/main" id="{911C70BB-FA98-4C89-8051-3A7CC779258A}"/>
+                <a16:creationId xmlns:a16="http://schemas.microsoft.com/office/drawing/2014/main" id="{BBCA2189-3CFD-4C3F-8EEA-168326ED59F8}"/>
               </a:ext>
             </a:extLst>
           </p:cNvPr>
@@ -7372,7 +7372,7 @@
           <p:cNvPr id="92" name="">
             <a:extLst xmlns:a="http://schemas.openxmlformats.org/drawingml/2006/main">
               <a:ext uri="{FF2B5EF4-FFF2-40B4-BE49-F238E27FC236}">
-                <a16:creationId xmlns:a16="http://schemas.microsoft.com/office/drawing/2014/main" id="{25BB827D-95B1-4E52-B51E-693F42ABD930}"/>
+                <a16:creationId xmlns:a16="http://schemas.microsoft.com/office/drawing/2014/main" id="{3319F513-0BF0-4459-9D92-7C72D6B2E2F7}"/>
               </a:ext>
             </a:extLst>
           </p:cNvPr>
@@ -7424,7 +7424,7 @@
           <p:cNvPr id="93" name="">
             <a:extLst xmlns:a="http://schemas.openxmlformats.org/drawingml/2006/main">
               <a:ext uri="{FF2B5EF4-FFF2-40B4-BE49-F238E27FC236}">
-                <a16:creationId xmlns:a16="http://schemas.microsoft.com/office/drawing/2014/main" id="{97EF6281-6A5D-4F13-A708-9C9FFD76D46C}"/>
+                <a16:creationId xmlns:a16="http://schemas.microsoft.com/office/drawing/2014/main" id="{B932F922-58C8-4C29-B487-64B83930C622}"/>
               </a:ext>
             </a:extLst>
           </p:cNvPr>
@@ -7476,7 +7476,7 @@
           <p:cNvPr id="94" name="">
             <a:extLst xmlns:a="http://schemas.openxmlformats.org/drawingml/2006/main">
               <a:ext uri="{FF2B5EF4-FFF2-40B4-BE49-F238E27FC236}">
-                <a16:creationId xmlns:a16="http://schemas.microsoft.com/office/drawing/2014/main" id="{EABFCA21-9404-43E6-BC7A-4E45C0A9857B}"/>
+                <a16:creationId xmlns:a16="http://schemas.microsoft.com/office/drawing/2014/main" id="{36B4D9CB-2216-4B1E-86B8-FF488622E5B4}"/>
               </a:ext>
             </a:extLst>
           </p:cNvPr>
@@ -7528,7 +7528,7 @@
           <p:cNvPr id="95" name="">
             <a:extLst xmlns:a="http://schemas.openxmlformats.org/drawingml/2006/main">
               <a:ext uri="{FF2B5EF4-FFF2-40B4-BE49-F238E27FC236}">
-                <a16:creationId xmlns:a16="http://schemas.microsoft.com/office/drawing/2014/main" id="{74F570AA-62D8-48FD-95C6-382B443A7A0F}"/>
+                <a16:creationId xmlns:a16="http://schemas.microsoft.com/office/drawing/2014/main" id="{FAE4258D-3430-4F95-8A8A-6FFBF5D55B97}"/>
               </a:ext>
             </a:extLst>
           </p:cNvPr>
@@ -7580,7 +7580,7 @@
           <p:cNvPr id="96" name="">
             <a:extLst xmlns:a="http://schemas.openxmlformats.org/drawingml/2006/main">
               <a:ext uri="{FF2B5EF4-FFF2-40B4-BE49-F238E27FC236}">
-                <a16:creationId xmlns:a16="http://schemas.microsoft.com/office/drawing/2014/main" id="{F34C44A7-A1F5-442F-8C91-DBDC4DB51CDE}"/>
+                <a16:creationId xmlns:a16="http://schemas.microsoft.com/office/drawing/2014/main" id="{630E47E7-859B-4425-9357-1C16D14FF0AE}"/>
               </a:ext>
             </a:extLst>
           </p:cNvPr>
@@ -7611,7 +7611,7 @@
           <p:cNvPr id="97" name="">
             <a:extLst xmlns:a="http://schemas.openxmlformats.org/drawingml/2006/main">
               <a:ext uri="{FF2B5EF4-FFF2-40B4-BE49-F238E27FC236}">
-                <a16:creationId xmlns:a16="http://schemas.microsoft.com/office/drawing/2014/main" id="{6A31F9C7-1F36-4BDF-B93B-F1C7C67B9A44}"/>
+                <a16:creationId xmlns:a16="http://schemas.microsoft.com/office/drawing/2014/main" id="{DD1341E0-355E-4801-8EA2-3002E180E163}"/>
               </a:ext>
             </a:extLst>
           </p:cNvPr>
@@ -7642,7 +7642,7 @@
           <p:cNvPr id="98" name="">
             <a:extLst xmlns:a="http://schemas.openxmlformats.org/drawingml/2006/main">
               <a:ext uri="{FF2B5EF4-FFF2-40B4-BE49-F238E27FC236}">
-                <a16:creationId xmlns:a16="http://schemas.microsoft.com/office/drawing/2014/main" id="{AE8BF288-00B6-47E2-9C59-0552F45B2534}"/>
+                <a16:creationId xmlns:a16="http://schemas.microsoft.com/office/drawing/2014/main" id="{FAF76E21-EDCC-43CD-BF01-BFD04BEE39A7}"/>
               </a:ext>
             </a:extLst>
           </p:cNvPr>
@@ -7694,7 +7694,7 @@
           <p:cNvPr id="99" name="">
             <a:extLst xmlns:a="http://schemas.openxmlformats.org/drawingml/2006/main">
               <a:ext uri="{FF2B5EF4-FFF2-40B4-BE49-F238E27FC236}">
-                <a16:creationId xmlns:a16="http://schemas.microsoft.com/office/drawing/2014/main" id="{02C864D9-399A-4268-869A-C3B9615A1ABB}"/>
+                <a16:creationId xmlns:a16="http://schemas.microsoft.com/office/drawing/2014/main" id="{18994981-68F2-44DE-8CAA-53B8B9A6AD6F}"/>
               </a:ext>
             </a:extLst>
           </p:cNvPr>
@@ -7746,7 +7746,7 @@
           <p:cNvPr id="100" name="">
             <a:extLst xmlns:a="http://schemas.openxmlformats.org/drawingml/2006/main">
               <a:ext uri="{FF2B5EF4-FFF2-40B4-BE49-F238E27FC236}">
-                <a16:creationId xmlns:a16="http://schemas.microsoft.com/office/drawing/2014/main" id="{5A9B618A-402A-47E6-9C40-AD50CF01C927}"/>
+                <a16:creationId xmlns:a16="http://schemas.microsoft.com/office/drawing/2014/main" id="{110DAA25-1F0B-4BC6-89B6-2A75D3204A2B}"/>
               </a:ext>
             </a:extLst>
           </p:cNvPr>
@@ -7798,7 +7798,7 @@
           <p:cNvPr id="101" name="">
             <a:extLst xmlns:a="http://schemas.openxmlformats.org/drawingml/2006/main">
               <a:ext uri="{FF2B5EF4-FFF2-40B4-BE49-F238E27FC236}">
-                <a16:creationId xmlns:a16="http://schemas.microsoft.com/office/drawing/2014/main" id="{E90C7646-F539-48F2-8847-FDFE41AC6B38}"/>
+                <a16:creationId xmlns:a16="http://schemas.microsoft.com/office/drawing/2014/main" id="{F63EB30A-EC3E-4493-A1A5-9BF9F59D2A7B}"/>
               </a:ext>
             </a:extLst>
           </p:cNvPr>
@@ -7850,7 +7850,7 @@
           <p:cNvPr id="102" name="">
             <a:extLst xmlns:a="http://schemas.openxmlformats.org/drawingml/2006/main">
               <a:ext uri="{FF2B5EF4-FFF2-40B4-BE49-F238E27FC236}">
-                <a16:creationId xmlns:a16="http://schemas.microsoft.com/office/drawing/2014/main" id="{F360367C-2FA3-441F-92A1-194ACE9EC751}"/>
+                <a16:creationId xmlns:a16="http://schemas.microsoft.com/office/drawing/2014/main" id="{79027F70-68CA-4F18-A301-C1AB26B2C33D}"/>
               </a:ext>
             </a:extLst>
           </p:cNvPr>
@@ -7900,7 +7900,7 @@
     </p:spTree>
     <p:extLst>
       <p:ext uri="{BB962C8B-B14F-4D97-AF65-F5344CB8AC3E}">
-        <p14:creationId xmlns:p14="http://schemas.microsoft.com/office/powerpoint/2010/main" val="2081492673"/>
+        <p14:creationId xmlns:p14="http://schemas.microsoft.com/office/powerpoint/2010/main" val="330623249"/>
       </p:ext>
     </p:extLst>
   </p:cSld>
@@ -7931,7 +7931,7 @@
           <p:cNvPr id="98" name="">
             <a:extLst xmlns:a="http://schemas.openxmlformats.org/drawingml/2006/main">
               <a:ext uri="{FF2B5EF4-FFF2-40B4-BE49-F238E27FC236}">
-                <a16:creationId xmlns:a16="http://schemas.microsoft.com/office/drawing/2014/main" id="{9628419B-5B80-44B8-A402-00A7683D9E9C}"/>
+                <a16:creationId xmlns:a16="http://schemas.microsoft.com/office/drawing/2014/main" id="{F4503986-14CB-4B68-8DB9-3D0E9A0FE09D}"/>
               </a:ext>
             </a:extLst>
           </p:cNvPr>
@@ -7964,7 +7964,7 @@
           <p:cNvPr id="2" name="">
             <a:extLst xmlns:a="http://schemas.openxmlformats.org/drawingml/2006/main">
               <a:ext uri="{FF2B5EF4-FFF2-40B4-BE49-F238E27FC236}">
-                <a16:creationId xmlns:a16="http://schemas.microsoft.com/office/drawing/2014/main" id="{A3D54CE2-EF97-4A0F-9065-F8A4CE09145C}"/>
+                <a16:creationId xmlns:a16="http://schemas.microsoft.com/office/drawing/2014/main" id="{CB4B4425-205C-46F2-AE5F-EDEC4C7ECA48}"/>
               </a:ext>
             </a:extLst>
           </p:cNvPr>
@@ -7995,7 +7995,7 @@
           <p:cNvPr id="3" name="">
             <a:extLst xmlns:a="http://schemas.openxmlformats.org/drawingml/2006/main">
               <a:ext uri="{FF2B5EF4-FFF2-40B4-BE49-F238E27FC236}">
-                <a16:creationId xmlns:a16="http://schemas.microsoft.com/office/drawing/2014/main" id="{85A9C088-0191-49C8-A443-58FC0DE8F48C}"/>
+                <a16:creationId xmlns:a16="http://schemas.microsoft.com/office/drawing/2014/main" id="{56037206-9C63-4A3C-B033-91DD58B20960}"/>
               </a:ext>
             </a:extLst>
           </p:cNvPr>
@@ -8047,7 +8047,7 @@
           <p:cNvPr id="4" name="">
             <a:extLst xmlns:a="http://schemas.openxmlformats.org/drawingml/2006/main">
               <a:ext uri="{FF2B5EF4-FFF2-40B4-BE49-F238E27FC236}">
-                <a16:creationId xmlns:a16="http://schemas.microsoft.com/office/drawing/2014/main" id="{478F6F08-2C40-4EC4-9552-27710E77DB80}"/>
+                <a16:creationId xmlns:a16="http://schemas.microsoft.com/office/drawing/2014/main" id="{AE9DF301-C68A-4252-925E-50A9FC9D67E1}"/>
               </a:ext>
             </a:extLst>
           </p:cNvPr>
@@ -8099,7 +8099,7 @@
           <p:cNvPr id="5" name="">
             <a:extLst xmlns:a="http://schemas.openxmlformats.org/drawingml/2006/main">
               <a:ext uri="{FF2B5EF4-FFF2-40B4-BE49-F238E27FC236}">
-                <a16:creationId xmlns:a16="http://schemas.microsoft.com/office/drawing/2014/main" id="{4CD0B254-067B-4557-821C-886C85ADAC97}"/>
+                <a16:creationId xmlns:a16="http://schemas.microsoft.com/office/drawing/2014/main" id="{1FD2C718-31C7-47B3-95B8-0A895D29E4CD}"/>
               </a:ext>
             </a:extLst>
           </p:cNvPr>
@@ -8134,7 +8134,7 @@
           <p:nvPr/>
         </p:nvPicPr>
         <p:blipFill>
-          <a:blip xmlns:r="http://schemas.openxmlformats.org/officeDocument/2006/relationships" xmlns:a="http://schemas.openxmlformats.org/drawingml/2006/main" r:embed="Rdff8584c25c744d2"/>
+          <a:blip xmlns:r="http://schemas.openxmlformats.org/officeDocument/2006/relationships" xmlns:a="http://schemas.openxmlformats.org/drawingml/2006/main" r:embed="Ra9569e1c7acf4a40"/>
           <a:stretch xmlns:a="http://schemas.openxmlformats.org/drawingml/2006/main"/>
         </p:blipFill>
         <p:spPr>
@@ -8152,7 +8152,7 @@
           <p:cNvPr id="7" name="">
             <a:extLst xmlns:a="http://schemas.openxmlformats.org/drawingml/2006/main">
               <a:ext uri="{FF2B5EF4-FFF2-40B4-BE49-F238E27FC236}">
-                <a16:creationId xmlns:a16="http://schemas.microsoft.com/office/drawing/2014/main" id="{5A60D31B-A24F-4EF6-A893-582C2FA1239A}"/>
+                <a16:creationId xmlns:a16="http://schemas.microsoft.com/office/drawing/2014/main" id="{8FBE7E86-91CF-4A9F-BEC1-0F9CA0A45733}"/>
               </a:ext>
             </a:extLst>
           </p:cNvPr>
@@ -8204,7 +8204,7 @@
           <p:cNvPr id="8" name="">
             <a:extLst xmlns:a="http://schemas.openxmlformats.org/drawingml/2006/main">
               <a:ext uri="{FF2B5EF4-FFF2-40B4-BE49-F238E27FC236}">
-                <a16:creationId xmlns:a16="http://schemas.microsoft.com/office/drawing/2014/main" id="{96BA8346-FFAF-4554-A4AA-60895A0E9ED7}"/>
+                <a16:creationId xmlns:a16="http://schemas.microsoft.com/office/drawing/2014/main" id="{4C3601F0-48DE-4CAC-906F-7D80111CB597}"/>
               </a:ext>
             </a:extLst>
           </p:cNvPr>
@@ -8256,7 +8256,7 @@
           <p:cNvPr id="9" name="">
             <a:extLst xmlns:a="http://schemas.openxmlformats.org/drawingml/2006/main">
               <a:ext uri="{FF2B5EF4-FFF2-40B4-BE49-F238E27FC236}">
-                <a16:creationId xmlns:a16="http://schemas.microsoft.com/office/drawing/2014/main" id="{9E6C7ED0-6381-4DB8-9E40-8BBB67BD6CFA}"/>
+                <a16:creationId xmlns:a16="http://schemas.microsoft.com/office/drawing/2014/main" id="{08324BC2-58D9-432E-A403-0F4A4ACF31B8}"/>
               </a:ext>
             </a:extLst>
           </p:cNvPr>
@@ -8308,7 +8308,7 @@
           <p:cNvPr id="10" name="">
             <a:extLst xmlns:a="http://schemas.openxmlformats.org/drawingml/2006/main">
               <a:ext uri="{FF2B5EF4-FFF2-40B4-BE49-F238E27FC236}">
-                <a16:creationId xmlns:a16="http://schemas.microsoft.com/office/drawing/2014/main" id="{422C9D56-E8F9-439A-A44F-7CE3A2656C4C}"/>
+                <a16:creationId xmlns:a16="http://schemas.microsoft.com/office/drawing/2014/main" id="{D43D2FF5-2378-4A50-B04B-CA13B422D363}"/>
               </a:ext>
             </a:extLst>
           </p:cNvPr>
@@ -8360,7 +8360,7 @@
           <p:cNvPr id="11" name="">
             <a:extLst xmlns:a="http://schemas.openxmlformats.org/drawingml/2006/main">
               <a:ext uri="{FF2B5EF4-FFF2-40B4-BE49-F238E27FC236}">
-                <a16:creationId xmlns:a16="http://schemas.microsoft.com/office/drawing/2014/main" id="{F5BCE623-01CC-497F-B99C-F6C78CDFEB8A}"/>
+                <a16:creationId xmlns:a16="http://schemas.microsoft.com/office/drawing/2014/main" id="{16E37A14-DA05-42A4-A5A5-E5C1CDB700E1}"/>
               </a:ext>
             </a:extLst>
           </p:cNvPr>
@@ -8391,7 +8391,7 @@
           <p:cNvPr id="12" name="">
             <a:extLst xmlns:a="http://schemas.openxmlformats.org/drawingml/2006/main">
               <a:ext uri="{FF2B5EF4-FFF2-40B4-BE49-F238E27FC236}">
-                <a16:creationId xmlns:a16="http://schemas.microsoft.com/office/drawing/2014/main" id="{65DC6F44-37BB-4748-9F52-AFE140D32FDB}"/>
+                <a16:creationId xmlns:a16="http://schemas.microsoft.com/office/drawing/2014/main" id="{69C4E1BC-9976-4054-B41A-E2BFE073A1EA}"/>
               </a:ext>
             </a:extLst>
           </p:cNvPr>
@@ -8422,7 +8422,7 @@
           <p:cNvPr id="13" name="">
             <a:extLst xmlns:a="http://schemas.openxmlformats.org/drawingml/2006/main">
               <a:ext uri="{FF2B5EF4-FFF2-40B4-BE49-F238E27FC236}">
-                <a16:creationId xmlns:a16="http://schemas.microsoft.com/office/drawing/2014/main" id="{1FBD73FF-E658-47BF-97E2-6BF7F772A6A0}"/>
+                <a16:creationId xmlns:a16="http://schemas.microsoft.com/office/drawing/2014/main" id="{406F1FF0-19A8-4457-9017-E5352FAAEBA9}"/>
               </a:ext>
             </a:extLst>
           </p:cNvPr>
@@ -8474,7 +8474,7 @@
           <p:cNvPr id="14" name="">
             <a:extLst xmlns:a="http://schemas.openxmlformats.org/drawingml/2006/main">
               <a:ext uri="{FF2B5EF4-FFF2-40B4-BE49-F238E27FC236}">
-                <a16:creationId xmlns:a16="http://schemas.microsoft.com/office/drawing/2014/main" id="{B9B2A6E1-8086-461A-9E33-332C6E23EC05}"/>
+                <a16:creationId xmlns:a16="http://schemas.microsoft.com/office/drawing/2014/main" id="{277E3BE4-6D83-4702-A6EE-4037FC2DE0CB}"/>
               </a:ext>
             </a:extLst>
           </p:cNvPr>
@@ -8526,7 +8526,7 @@
           <p:cNvPr id="15" name="">
             <a:extLst xmlns:a="http://schemas.openxmlformats.org/drawingml/2006/main">
               <a:ext uri="{FF2B5EF4-FFF2-40B4-BE49-F238E27FC236}">
-                <a16:creationId xmlns:a16="http://schemas.microsoft.com/office/drawing/2014/main" id="{F36DB78E-39FB-4D7C-9A5B-522A3B57FE69}"/>
+                <a16:creationId xmlns:a16="http://schemas.microsoft.com/office/drawing/2014/main" id="{F03F740D-86E8-43E8-B30E-0FFA46BA1BAF}"/>
               </a:ext>
             </a:extLst>
           </p:cNvPr>
@@ -8578,7 +8578,7 @@
           <p:cNvPr id="16" name="">
             <a:extLst xmlns:a="http://schemas.openxmlformats.org/drawingml/2006/main">
               <a:ext uri="{FF2B5EF4-FFF2-40B4-BE49-F238E27FC236}">
-                <a16:creationId xmlns:a16="http://schemas.microsoft.com/office/drawing/2014/main" id="{30F22C6F-7DFD-43B4-961D-B9B3A3B70D8E}"/>
+                <a16:creationId xmlns:a16="http://schemas.microsoft.com/office/drawing/2014/main" id="{0B909D05-B96D-42ED-9C36-A8B188150327}"/>
               </a:ext>
             </a:extLst>
           </p:cNvPr>
@@ -8630,7 +8630,7 @@
           <p:cNvPr id="17" name="">
             <a:extLst xmlns:a="http://schemas.openxmlformats.org/drawingml/2006/main">
               <a:ext uri="{FF2B5EF4-FFF2-40B4-BE49-F238E27FC236}">
-                <a16:creationId xmlns:a16="http://schemas.microsoft.com/office/drawing/2014/main" id="{53B21273-68C4-42DA-9F02-3C88F08D4146}"/>
+                <a16:creationId xmlns:a16="http://schemas.microsoft.com/office/drawing/2014/main" id="{43B96CE8-9F82-406C-9DAD-6703DE91DA76}"/>
               </a:ext>
             </a:extLst>
           </p:cNvPr>
@@ -8682,7 +8682,7 @@
           <p:cNvPr id="18" name="">
             <a:extLst xmlns:a="http://schemas.openxmlformats.org/drawingml/2006/main">
               <a:ext uri="{FF2B5EF4-FFF2-40B4-BE49-F238E27FC236}">
-                <a16:creationId xmlns:a16="http://schemas.microsoft.com/office/drawing/2014/main" id="{DBC44EBE-1298-4DEC-B9A9-B632E0EBDD82}"/>
+                <a16:creationId xmlns:a16="http://schemas.microsoft.com/office/drawing/2014/main" id="{41B79055-E421-41A0-B205-BFFB4294FE73}"/>
               </a:ext>
             </a:extLst>
           </p:cNvPr>
@@ -8713,7 +8713,7 @@
           <p:cNvPr id="19" name="">
             <a:extLst xmlns:a="http://schemas.openxmlformats.org/drawingml/2006/main">
               <a:ext uri="{FF2B5EF4-FFF2-40B4-BE49-F238E27FC236}">
-                <a16:creationId xmlns:a16="http://schemas.microsoft.com/office/drawing/2014/main" id="{2BC3385D-D352-41BB-8AC9-A8ACB5418210}"/>
+                <a16:creationId xmlns:a16="http://schemas.microsoft.com/office/drawing/2014/main" id="{32DC1811-95B4-4BA5-A9E2-2006C092DDD4}"/>
               </a:ext>
             </a:extLst>
           </p:cNvPr>
@@ -8765,7 +8765,7 @@
           <p:cNvPr id="20" name="">
             <a:extLst xmlns:a="http://schemas.openxmlformats.org/drawingml/2006/main">
               <a:ext uri="{FF2B5EF4-FFF2-40B4-BE49-F238E27FC236}">
-                <a16:creationId xmlns:a16="http://schemas.microsoft.com/office/drawing/2014/main" id="{0C001787-6564-43D8-8C18-BBBA08E67B0C}"/>
+                <a16:creationId xmlns:a16="http://schemas.microsoft.com/office/drawing/2014/main" id="{FC74721E-DEF7-4165-8EC0-5D2D82284556}"/>
               </a:ext>
             </a:extLst>
           </p:cNvPr>
@@ -8817,7 +8817,7 @@
           <p:cNvPr id="21" name="">
             <a:extLst xmlns:a="http://schemas.openxmlformats.org/drawingml/2006/main">
               <a:ext uri="{FF2B5EF4-FFF2-40B4-BE49-F238E27FC236}">
-                <a16:creationId xmlns:a16="http://schemas.microsoft.com/office/drawing/2014/main" id="{99FB6B66-508D-4A93-A64C-8C35D7307CE1}"/>
+                <a16:creationId xmlns:a16="http://schemas.microsoft.com/office/drawing/2014/main" id="{E181A103-202E-4661-BC20-3BBAB097F0F0}"/>
               </a:ext>
             </a:extLst>
           </p:cNvPr>
@@ -8869,7 +8869,7 @@
           <p:cNvPr id="22" name="">
             <a:extLst xmlns:a="http://schemas.openxmlformats.org/drawingml/2006/main">
               <a:ext uri="{FF2B5EF4-FFF2-40B4-BE49-F238E27FC236}">
-                <a16:creationId xmlns:a16="http://schemas.microsoft.com/office/drawing/2014/main" id="{C1CBDCAA-8AE6-4E28-AA63-EE1C52E9EE54}"/>
+                <a16:creationId xmlns:a16="http://schemas.microsoft.com/office/drawing/2014/main" id="{0666BABB-4395-4504-8ACC-B15C1872869B}"/>
               </a:ext>
             </a:extLst>
           </p:cNvPr>
@@ -8921,7 +8921,7 @@
           <p:cNvPr id="23" name="">
             <a:extLst xmlns:a="http://schemas.openxmlformats.org/drawingml/2006/main">
               <a:ext uri="{FF2B5EF4-FFF2-40B4-BE49-F238E27FC236}">
-                <a16:creationId xmlns:a16="http://schemas.microsoft.com/office/drawing/2014/main" id="{F71250A1-B907-4421-BFBA-EDDB1E877F7A}"/>
+                <a16:creationId xmlns:a16="http://schemas.microsoft.com/office/drawing/2014/main" id="{8705B770-BA18-41B5-A2C4-613E9A9BDAF5}"/>
               </a:ext>
             </a:extLst>
           </p:cNvPr>
@@ -8973,7 +8973,7 @@
           <p:cNvPr id="24" name="">
             <a:extLst xmlns:a="http://schemas.openxmlformats.org/drawingml/2006/main">
               <a:ext uri="{FF2B5EF4-FFF2-40B4-BE49-F238E27FC236}">
-                <a16:creationId xmlns:a16="http://schemas.microsoft.com/office/drawing/2014/main" id="{EA9A6C4C-E444-4C64-ACA1-6F53D3075BEB}"/>
+                <a16:creationId xmlns:a16="http://schemas.microsoft.com/office/drawing/2014/main" id="{E2CAEA61-4CA4-43B7-8CC4-2F61DF0A3002}"/>
               </a:ext>
             </a:extLst>
           </p:cNvPr>
@@ -9004,7 +9004,7 @@
           <p:cNvPr id="25" name="">
             <a:extLst xmlns:a="http://schemas.openxmlformats.org/drawingml/2006/main">
               <a:ext uri="{FF2B5EF4-FFF2-40B4-BE49-F238E27FC236}">
-                <a16:creationId xmlns:a16="http://schemas.microsoft.com/office/drawing/2014/main" id="{F7AC8D05-7F10-42FA-9494-F2884C016FD5}"/>
+                <a16:creationId xmlns:a16="http://schemas.microsoft.com/office/drawing/2014/main" id="{006ACF93-FDE1-45F2-9976-1FF2734E3FA6}"/>
               </a:ext>
             </a:extLst>
           </p:cNvPr>
@@ -9035,7 +9035,7 @@
           <p:cNvPr id="26" name="">
             <a:extLst xmlns:a="http://schemas.openxmlformats.org/drawingml/2006/main">
               <a:ext uri="{FF2B5EF4-FFF2-40B4-BE49-F238E27FC236}">
-                <a16:creationId xmlns:a16="http://schemas.microsoft.com/office/drawing/2014/main" id="{42276616-A85A-4601-8EFA-163396B5CF12}"/>
+                <a16:creationId xmlns:a16="http://schemas.microsoft.com/office/drawing/2014/main" id="{C3896079-A6E7-4E76-B446-1B59B0CCD11F}"/>
               </a:ext>
             </a:extLst>
           </p:cNvPr>
@@ -9087,7 +9087,7 @@
           <p:cNvPr id="27" name="">
             <a:extLst xmlns:a="http://schemas.openxmlformats.org/drawingml/2006/main">
               <a:ext uri="{FF2B5EF4-FFF2-40B4-BE49-F238E27FC236}">
-                <a16:creationId xmlns:a16="http://schemas.microsoft.com/office/drawing/2014/main" id="{9C652E3A-6E24-4B7F-999B-C14E4B057F26}"/>
+                <a16:creationId xmlns:a16="http://schemas.microsoft.com/office/drawing/2014/main" id="{32ECAE88-B9E8-40FE-8E68-A1FAB40EFF0F}"/>
               </a:ext>
             </a:extLst>
           </p:cNvPr>
@@ -9139,7 +9139,7 @@
           <p:cNvPr id="28" name="">
             <a:extLst xmlns:a="http://schemas.openxmlformats.org/drawingml/2006/main">
               <a:ext uri="{FF2B5EF4-FFF2-40B4-BE49-F238E27FC236}">
-                <a16:creationId xmlns:a16="http://schemas.microsoft.com/office/drawing/2014/main" id="{01780DF0-6AF7-46F1-BAA0-9F44930CB985}"/>
+                <a16:creationId xmlns:a16="http://schemas.microsoft.com/office/drawing/2014/main" id="{24D5A6D5-9F3D-415E-9D6D-E75347825F51}"/>
               </a:ext>
             </a:extLst>
           </p:cNvPr>
@@ -9191,7 +9191,7 @@
           <p:cNvPr id="29" name="">
             <a:extLst xmlns:a="http://schemas.openxmlformats.org/drawingml/2006/main">
               <a:ext uri="{FF2B5EF4-FFF2-40B4-BE49-F238E27FC236}">
-                <a16:creationId xmlns:a16="http://schemas.microsoft.com/office/drawing/2014/main" id="{9617E379-217C-43A9-8F91-BF4615CF4412}"/>
+                <a16:creationId xmlns:a16="http://schemas.microsoft.com/office/drawing/2014/main" id="{42FC7C7E-3A82-476F-A035-D26EF0D9C72D}"/>
               </a:ext>
             </a:extLst>
           </p:cNvPr>
@@ -9243,7 +9243,7 @@
           <p:cNvPr id="30" name="">
             <a:extLst xmlns:a="http://schemas.openxmlformats.org/drawingml/2006/main">
               <a:ext uri="{FF2B5EF4-FFF2-40B4-BE49-F238E27FC236}">
-                <a16:creationId xmlns:a16="http://schemas.microsoft.com/office/drawing/2014/main" id="{F94D6AE8-35BC-4826-9BC1-AEBDEC2CD4D1}"/>
+                <a16:creationId xmlns:a16="http://schemas.microsoft.com/office/drawing/2014/main" id="{4C7DB8BC-29CF-4C91-973A-D5F292932871}"/>
               </a:ext>
             </a:extLst>
           </p:cNvPr>
@@ -9295,7 +9295,7 @@
           <p:cNvPr id="31" name="">
             <a:extLst xmlns:a="http://schemas.openxmlformats.org/drawingml/2006/main">
               <a:ext uri="{FF2B5EF4-FFF2-40B4-BE49-F238E27FC236}">
-                <a16:creationId xmlns:a16="http://schemas.microsoft.com/office/drawing/2014/main" id="{F2D2BA03-98FA-43C2-93DF-DFB99D123CC6}"/>
+                <a16:creationId xmlns:a16="http://schemas.microsoft.com/office/drawing/2014/main" id="{198F950F-2EBF-45C1-A77F-B96477251F4F}"/>
               </a:ext>
             </a:extLst>
           </p:cNvPr>
@@ -9326,7 +9326,7 @@
           <p:cNvPr id="32" name="">
             <a:extLst xmlns:a="http://schemas.openxmlformats.org/drawingml/2006/main">
               <a:ext uri="{FF2B5EF4-FFF2-40B4-BE49-F238E27FC236}">
-                <a16:creationId xmlns:a16="http://schemas.microsoft.com/office/drawing/2014/main" id="{2A446601-D223-4D87-AA07-8820C22D64F7}"/>
+                <a16:creationId xmlns:a16="http://schemas.microsoft.com/office/drawing/2014/main" id="{23615892-8574-4DB1-AC10-09AD00FD0BC0}"/>
               </a:ext>
             </a:extLst>
           </p:cNvPr>
@@ -9378,7 +9378,7 @@
           <p:cNvPr id="33" name="">
             <a:extLst xmlns:a="http://schemas.openxmlformats.org/drawingml/2006/main">
               <a:ext uri="{FF2B5EF4-FFF2-40B4-BE49-F238E27FC236}">
-                <a16:creationId xmlns:a16="http://schemas.microsoft.com/office/drawing/2014/main" id="{2E0A449F-1325-4D33-B399-C0F754D88A33}"/>
+                <a16:creationId xmlns:a16="http://schemas.microsoft.com/office/drawing/2014/main" id="{A81967B0-83EF-4106-B72E-C099A7B96BF5}"/>
               </a:ext>
             </a:extLst>
           </p:cNvPr>
@@ -9430,7 +9430,7 @@
           <p:cNvPr id="34" name="">
             <a:extLst xmlns:a="http://schemas.openxmlformats.org/drawingml/2006/main">
               <a:ext uri="{FF2B5EF4-FFF2-40B4-BE49-F238E27FC236}">
-                <a16:creationId xmlns:a16="http://schemas.microsoft.com/office/drawing/2014/main" id="{723D6037-78F1-4B7A-AE20-9841F24DF92B}"/>
+                <a16:creationId xmlns:a16="http://schemas.microsoft.com/office/drawing/2014/main" id="{2039F7D2-3020-4FA7-B864-EEBE208B4E71}"/>
               </a:ext>
             </a:extLst>
           </p:cNvPr>
@@ -9482,7 +9482,7 @@
           <p:cNvPr id="35" name="">
             <a:extLst xmlns:a="http://schemas.openxmlformats.org/drawingml/2006/main">
               <a:ext uri="{FF2B5EF4-FFF2-40B4-BE49-F238E27FC236}">
-                <a16:creationId xmlns:a16="http://schemas.microsoft.com/office/drawing/2014/main" id="{AB616A79-DC15-4F78-B642-F79CE91B955D}"/>
+                <a16:creationId xmlns:a16="http://schemas.microsoft.com/office/drawing/2014/main" id="{47B18148-B46A-402E-BA77-6BD898379C28}"/>
               </a:ext>
             </a:extLst>
           </p:cNvPr>
@@ -9534,7 +9534,7 @@
           <p:cNvPr id="36" name="">
             <a:extLst xmlns:a="http://schemas.openxmlformats.org/drawingml/2006/main">
               <a:ext uri="{FF2B5EF4-FFF2-40B4-BE49-F238E27FC236}">
-                <a16:creationId xmlns:a16="http://schemas.microsoft.com/office/drawing/2014/main" id="{31033407-2979-4BD1-9022-67EC6320945D}"/>
+                <a16:creationId xmlns:a16="http://schemas.microsoft.com/office/drawing/2014/main" id="{F643CE2A-6168-4CB6-AD1F-E61F6259FFCD}"/>
               </a:ext>
             </a:extLst>
           </p:cNvPr>
@@ -9586,7 +9586,7 @@
           <p:cNvPr id="37" name="">
             <a:extLst xmlns:a="http://schemas.openxmlformats.org/drawingml/2006/main">
               <a:ext uri="{FF2B5EF4-FFF2-40B4-BE49-F238E27FC236}">
-                <a16:creationId xmlns:a16="http://schemas.microsoft.com/office/drawing/2014/main" id="{47EE1D26-DD37-43DA-BB21-4BEC75FE5F95}"/>
+                <a16:creationId xmlns:a16="http://schemas.microsoft.com/office/drawing/2014/main" id="{85E4A9C8-6928-41F0-AE73-6F3F91193F8C}"/>
               </a:ext>
             </a:extLst>
           </p:cNvPr>
@@ -9617,7 +9617,7 @@
           <p:cNvPr id="38" name="">
             <a:extLst xmlns:a="http://schemas.openxmlformats.org/drawingml/2006/main">
               <a:ext uri="{FF2B5EF4-FFF2-40B4-BE49-F238E27FC236}">
-                <a16:creationId xmlns:a16="http://schemas.microsoft.com/office/drawing/2014/main" id="{C022B738-40AF-417B-9F51-8A2F3BAD4BDD}"/>
+                <a16:creationId xmlns:a16="http://schemas.microsoft.com/office/drawing/2014/main" id="{7CE4E682-0B50-4A19-9DD3-54C0309AC60F}"/>
               </a:ext>
             </a:extLst>
           </p:cNvPr>
@@ -9648,7 +9648,7 @@
           <p:cNvPr id="39" name="">
             <a:extLst xmlns:a="http://schemas.openxmlformats.org/drawingml/2006/main">
               <a:ext uri="{FF2B5EF4-FFF2-40B4-BE49-F238E27FC236}">
-                <a16:creationId xmlns:a16="http://schemas.microsoft.com/office/drawing/2014/main" id="{1840CE68-105D-446A-BD35-D8A3CB67D1A7}"/>
+                <a16:creationId xmlns:a16="http://schemas.microsoft.com/office/drawing/2014/main" id="{0A5FBC93-2EBC-43BA-8D21-B44C1545B571}"/>
               </a:ext>
             </a:extLst>
           </p:cNvPr>
@@ -9700,7 +9700,7 @@
           <p:cNvPr id="40" name="">
             <a:extLst xmlns:a="http://schemas.openxmlformats.org/drawingml/2006/main">
               <a:ext uri="{FF2B5EF4-FFF2-40B4-BE49-F238E27FC236}">
-                <a16:creationId xmlns:a16="http://schemas.microsoft.com/office/drawing/2014/main" id="{1A60E0C7-C717-4801-82F8-618686A5D78F}"/>
+                <a16:creationId xmlns:a16="http://schemas.microsoft.com/office/drawing/2014/main" id="{1A87EE66-95DA-4245-90F6-C9E3B3E1B1B9}"/>
               </a:ext>
             </a:extLst>
           </p:cNvPr>
@@ -9752,7 +9752,7 @@
           <p:cNvPr id="41" name="">
             <a:extLst xmlns:a="http://schemas.openxmlformats.org/drawingml/2006/main">
               <a:ext uri="{FF2B5EF4-FFF2-40B4-BE49-F238E27FC236}">
-                <a16:creationId xmlns:a16="http://schemas.microsoft.com/office/drawing/2014/main" id="{231113B5-DCCD-412F-A0F1-65C318014698}"/>
+                <a16:creationId xmlns:a16="http://schemas.microsoft.com/office/drawing/2014/main" id="{EC856D44-2170-47FA-BEF8-D1A28EE35420}"/>
               </a:ext>
             </a:extLst>
           </p:cNvPr>
@@ -9804,7 +9804,7 @@
           <p:cNvPr id="42" name="">
             <a:extLst xmlns:a="http://schemas.openxmlformats.org/drawingml/2006/main">
               <a:ext uri="{FF2B5EF4-FFF2-40B4-BE49-F238E27FC236}">
-                <a16:creationId xmlns:a16="http://schemas.microsoft.com/office/drawing/2014/main" id="{9B643294-25F6-49F5-8381-1ABC2B07F1EC}"/>
+                <a16:creationId xmlns:a16="http://schemas.microsoft.com/office/drawing/2014/main" id="{9C98D240-D1B9-4ED3-86AE-3F2D2C532607}"/>
               </a:ext>
             </a:extLst>
           </p:cNvPr>
@@ -9856,7 +9856,7 @@
           <p:cNvPr id="43" name="">
             <a:extLst xmlns:a="http://schemas.openxmlformats.org/drawingml/2006/main">
               <a:ext uri="{FF2B5EF4-FFF2-40B4-BE49-F238E27FC236}">
-                <a16:creationId xmlns:a16="http://schemas.microsoft.com/office/drawing/2014/main" id="{9391167D-820B-458F-B645-9AFD428C5A98}"/>
+                <a16:creationId xmlns:a16="http://schemas.microsoft.com/office/drawing/2014/main" id="{9A4F7B3E-C076-4A5B-A634-6A8A9D0F0025}"/>
               </a:ext>
             </a:extLst>
           </p:cNvPr>
@@ -9908,7 +9908,7 @@
           <p:cNvPr id="44" name="">
             <a:extLst xmlns:a="http://schemas.openxmlformats.org/drawingml/2006/main">
               <a:ext uri="{FF2B5EF4-FFF2-40B4-BE49-F238E27FC236}">
-                <a16:creationId xmlns:a16="http://schemas.microsoft.com/office/drawing/2014/main" id="{9FD45A3A-8437-466B-A70B-5FBC32BBA813}"/>
+                <a16:creationId xmlns:a16="http://schemas.microsoft.com/office/drawing/2014/main" id="{0F014617-5D53-4483-884A-9580340F7ECC}"/>
               </a:ext>
             </a:extLst>
           </p:cNvPr>
@@ -9939,7 +9939,7 @@
           <p:cNvPr id="45" name="">
             <a:extLst xmlns:a="http://schemas.openxmlformats.org/drawingml/2006/main">
               <a:ext uri="{FF2B5EF4-FFF2-40B4-BE49-F238E27FC236}">
-                <a16:creationId xmlns:a16="http://schemas.microsoft.com/office/drawing/2014/main" id="{ACFC5EC6-E816-4A13-A926-5555775A711E}"/>
+                <a16:creationId xmlns:a16="http://schemas.microsoft.com/office/drawing/2014/main" id="{6820C067-70C6-4A65-810C-F3C00790DE44}"/>
               </a:ext>
             </a:extLst>
           </p:cNvPr>
@@ -9991,7 +9991,7 @@
           <p:cNvPr id="46" name="">
             <a:extLst xmlns:a="http://schemas.openxmlformats.org/drawingml/2006/main">
               <a:ext uri="{FF2B5EF4-FFF2-40B4-BE49-F238E27FC236}">
-                <a16:creationId xmlns:a16="http://schemas.microsoft.com/office/drawing/2014/main" id="{9C604366-E83C-491F-943C-B3803199240E}"/>
+                <a16:creationId xmlns:a16="http://schemas.microsoft.com/office/drawing/2014/main" id="{A8459023-B54A-4BCD-B7E1-AA5E2048737D}"/>
               </a:ext>
             </a:extLst>
           </p:cNvPr>
@@ -10043,7 +10043,7 @@
           <p:cNvPr id="47" name="">
             <a:extLst xmlns:a="http://schemas.openxmlformats.org/drawingml/2006/main">
               <a:ext uri="{FF2B5EF4-FFF2-40B4-BE49-F238E27FC236}">
-                <a16:creationId xmlns:a16="http://schemas.microsoft.com/office/drawing/2014/main" id="{40E86A23-DD61-4524-828E-DF2540FE8BB0}"/>
+                <a16:creationId xmlns:a16="http://schemas.microsoft.com/office/drawing/2014/main" id="{312EA0AC-7ADC-45B6-A3B1-08695FC56A69}"/>
               </a:ext>
             </a:extLst>
           </p:cNvPr>
@@ -10095,7 +10095,7 @@
           <p:cNvPr id="48" name="">
             <a:extLst xmlns:a="http://schemas.openxmlformats.org/drawingml/2006/main">
               <a:ext uri="{FF2B5EF4-FFF2-40B4-BE49-F238E27FC236}">
-                <a16:creationId xmlns:a16="http://schemas.microsoft.com/office/drawing/2014/main" id="{40BE2264-8B37-470E-A3A8-F71939B08C65}"/>
+                <a16:creationId xmlns:a16="http://schemas.microsoft.com/office/drawing/2014/main" id="{C2B01BD3-BC3C-42DA-8C2F-A4ED5FA59A37}"/>
               </a:ext>
             </a:extLst>
           </p:cNvPr>
@@ -10147,7 +10147,7 @@
           <p:cNvPr id="49" name="">
             <a:extLst xmlns:a="http://schemas.openxmlformats.org/drawingml/2006/main">
               <a:ext uri="{FF2B5EF4-FFF2-40B4-BE49-F238E27FC236}">
-                <a16:creationId xmlns:a16="http://schemas.microsoft.com/office/drawing/2014/main" id="{983A2929-AE14-4736-8567-92A4AFA12F9D}"/>
+                <a16:creationId xmlns:a16="http://schemas.microsoft.com/office/drawing/2014/main" id="{72A932A1-654D-4AB5-97EE-6C6BC6E7BD7F}"/>
               </a:ext>
             </a:extLst>
           </p:cNvPr>
@@ -10199,7 +10199,7 @@
           <p:cNvPr id="50" name="">
             <a:extLst xmlns:a="http://schemas.openxmlformats.org/drawingml/2006/main">
               <a:ext uri="{FF2B5EF4-FFF2-40B4-BE49-F238E27FC236}">
-                <a16:creationId xmlns:a16="http://schemas.microsoft.com/office/drawing/2014/main" id="{92234256-E77E-4E5D-B2F0-9E9C98D45626}"/>
+                <a16:creationId xmlns:a16="http://schemas.microsoft.com/office/drawing/2014/main" id="{44CC161B-037E-4347-AD70-68A59642B935}"/>
               </a:ext>
             </a:extLst>
           </p:cNvPr>
@@ -10251,7 +10251,7 @@
           <p:cNvPr id="51" name="">
             <a:extLst xmlns:a="http://schemas.openxmlformats.org/drawingml/2006/main">
               <a:ext uri="{FF2B5EF4-FFF2-40B4-BE49-F238E27FC236}">
-                <a16:creationId xmlns:a16="http://schemas.microsoft.com/office/drawing/2014/main" id="{0244C9F8-3D10-4275-9185-4A89A453A374}"/>
+                <a16:creationId xmlns:a16="http://schemas.microsoft.com/office/drawing/2014/main" id="{B17F080D-6DE4-47C9-9BC8-C81758169301}"/>
               </a:ext>
             </a:extLst>
           </p:cNvPr>
@@ -10282,7 +10282,7 @@
           <p:cNvPr id="52" name="">
             <a:extLst xmlns:a="http://schemas.openxmlformats.org/drawingml/2006/main">
               <a:ext uri="{FF2B5EF4-FFF2-40B4-BE49-F238E27FC236}">
-                <a16:creationId xmlns:a16="http://schemas.microsoft.com/office/drawing/2014/main" id="{4326B1A4-0BC6-4349-91F4-A3C34DDE6F9C}"/>
+                <a16:creationId xmlns:a16="http://schemas.microsoft.com/office/drawing/2014/main" id="{8C904B60-E384-45F2-95CC-E0C497E81BDF}"/>
               </a:ext>
             </a:extLst>
           </p:cNvPr>
@@ -10313,7 +10313,7 @@
           <p:cNvPr id="53" name="">
             <a:extLst xmlns:a="http://schemas.openxmlformats.org/drawingml/2006/main">
               <a:ext uri="{FF2B5EF4-FFF2-40B4-BE49-F238E27FC236}">
-                <a16:creationId xmlns:a16="http://schemas.microsoft.com/office/drawing/2014/main" id="{4142ED87-03E1-4B0B-A4D3-F733BE00FB7B}"/>
+                <a16:creationId xmlns:a16="http://schemas.microsoft.com/office/drawing/2014/main" id="{F7791CFB-7723-4CAC-AFFF-4F4EBB3382BB}"/>
               </a:ext>
             </a:extLst>
           </p:cNvPr>
@@ -10344,7 +10344,7 @@
           <p:cNvPr id="54" name="">
             <a:extLst xmlns:a="http://schemas.openxmlformats.org/drawingml/2006/main">
               <a:ext uri="{FF2B5EF4-FFF2-40B4-BE49-F238E27FC236}">
-                <a16:creationId xmlns:a16="http://schemas.microsoft.com/office/drawing/2014/main" id="{1502C946-896A-4FE6-936B-473B5B6AA13A}"/>
+                <a16:creationId xmlns:a16="http://schemas.microsoft.com/office/drawing/2014/main" id="{2C25CA6C-EBEB-4BEC-80AF-72179C6633B0}"/>
               </a:ext>
             </a:extLst>
           </p:cNvPr>
@@ -10396,7 +10396,7 @@
           <p:cNvPr id="55" name="">
             <a:extLst xmlns:a="http://schemas.openxmlformats.org/drawingml/2006/main">
               <a:ext uri="{FF2B5EF4-FFF2-40B4-BE49-F238E27FC236}">
-                <a16:creationId xmlns:a16="http://schemas.microsoft.com/office/drawing/2014/main" id="{FFE5D3C6-E15D-470A-AA1F-7120BBD47356}"/>
+                <a16:creationId xmlns:a16="http://schemas.microsoft.com/office/drawing/2014/main" id="{A2BAF77B-485B-45D8-818D-116AF77BB29A}"/>
               </a:ext>
             </a:extLst>
           </p:cNvPr>
@@ -10448,7 +10448,7 @@
           <p:cNvPr id="56" name="">
             <a:extLst xmlns:a="http://schemas.openxmlformats.org/drawingml/2006/main">
               <a:ext uri="{FF2B5EF4-FFF2-40B4-BE49-F238E27FC236}">
-                <a16:creationId xmlns:a16="http://schemas.microsoft.com/office/drawing/2014/main" id="{524B3352-7480-46A9-BD18-D0DBF2568EFC}"/>
+                <a16:creationId xmlns:a16="http://schemas.microsoft.com/office/drawing/2014/main" id="{DE690C34-5714-4C4C-8BCD-BCB9BE6A5418}"/>
               </a:ext>
             </a:extLst>
           </p:cNvPr>
@@ -10500,7 +10500,7 @@
           <p:cNvPr id="57" name="">
             <a:extLst xmlns:a="http://schemas.openxmlformats.org/drawingml/2006/main">
               <a:ext uri="{FF2B5EF4-FFF2-40B4-BE49-F238E27FC236}">
-                <a16:creationId xmlns:a16="http://schemas.microsoft.com/office/drawing/2014/main" id="{6749D2FB-97E6-48D2-9067-E25990853261}"/>
+                <a16:creationId xmlns:a16="http://schemas.microsoft.com/office/drawing/2014/main" id="{3EC9A0DD-2C02-405A-A0FE-01C1F92EF685}"/>
               </a:ext>
             </a:extLst>
           </p:cNvPr>
@@ -10552,7 +10552,7 @@
           <p:cNvPr id="58" name="">
             <a:extLst xmlns:a="http://schemas.openxmlformats.org/drawingml/2006/main">
               <a:ext uri="{FF2B5EF4-FFF2-40B4-BE49-F238E27FC236}">
-                <a16:creationId xmlns:a16="http://schemas.microsoft.com/office/drawing/2014/main" id="{E75D7FC9-27A5-4619-A05F-275E03913C53}"/>
+                <a16:creationId xmlns:a16="http://schemas.microsoft.com/office/drawing/2014/main" id="{3F56D864-9DAB-4454-9E29-3B6BF9C90433}"/>
               </a:ext>
             </a:extLst>
           </p:cNvPr>
@@ -10604,7 +10604,7 @@
           <p:cNvPr id="59" name="">
             <a:extLst xmlns:a="http://schemas.openxmlformats.org/drawingml/2006/main">
               <a:ext uri="{FF2B5EF4-FFF2-40B4-BE49-F238E27FC236}">
-                <a16:creationId xmlns:a16="http://schemas.microsoft.com/office/drawing/2014/main" id="{D3AD5F2C-5346-4BBB-9A54-FC60D0252F80}"/>
+                <a16:creationId xmlns:a16="http://schemas.microsoft.com/office/drawing/2014/main" id="{2E71B29A-C767-44D3-ACC1-8005A1A957DE}"/>
               </a:ext>
             </a:extLst>
           </p:cNvPr>
@@ -10635,7 +10635,7 @@
           <p:cNvPr id="60" name="">
             <a:extLst xmlns:a="http://schemas.openxmlformats.org/drawingml/2006/main">
               <a:ext uri="{FF2B5EF4-FFF2-40B4-BE49-F238E27FC236}">
-                <a16:creationId xmlns:a16="http://schemas.microsoft.com/office/drawing/2014/main" id="{5ADEFF89-CEB4-40D4-81A6-C5AC0EE513AD}"/>
+                <a16:creationId xmlns:a16="http://schemas.microsoft.com/office/drawing/2014/main" id="{C8645535-D370-42C3-AA1E-D1C97A65FCFA}"/>
               </a:ext>
             </a:extLst>
           </p:cNvPr>
@@ -10687,7 +10687,7 @@
           <p:cNvPr id="61" name="">
             <a:extLst xmlns:a="http://schemas.openxmlformats.org/drawingml/2006/main">
               <a:ext uri="{FF2B5EF4-FFF2-40B4-BE49-F238E27FC236}">
-                <a16:creationId xmlns:a16="http://schemas.microsoft.com/office/drawing/2014/main" id="{18956F16-24EE-4735-A1F0-6F9C85248476}"/>
+                <a16:creationId xmlns:a16="http://schemas.microsoft.com/office/drawing/2014/main" id="{EEA93E6E-8EEC-4FFB-B701-675CD7BBD74F}"/>
               </a:ext>
             </a:extLst>
           </p:cNvPr>
@@ -10739,7 +10739,7 @@
           <p:cNvPr id="62" name="">
             <a:extLst xmlns:a="http://schemas.openxmlformats.org/drawingml/2006/main">
               <a:ext uri="{FF2B5EF4-FFF2-40B4-BE49-F238E27FC236}">
-                <a16:creationId xmlns:a16="http://schemas.microsoft.com/office/drawing/2014/main" id="{11F29D8D-5033-4E5D-AA31-50BB155A2886}"/>
+                <a16:creationId xmlns:a16="http://schemas.microsoft.com/office/drawing/2014/main" id="{05A1F132-39A8-4A18-B915-982E4066A4CA}"/>
               </a:ext>
             </a:extLst>
           </p:cNvPr>
@@ -10791,7 +10791,7 @@
           <p:cNvPr id="63" name="">
             <a:extLst xmlns:a="http://schemas.openxmlformats.org/drawingml/2006/main">
               <a:ext uri="{FF2B5EF4-FFF2-40B4-BE49-F238E27FC236}">
-                <a16:creationId xmlns:a16="http://schemas.microsoft.com/office/drawing/2014/main" id="{24E6FBBD-D6CB-4F70-B8EE-1166BDB7B9DC}"/>
+                <a16:creationId xmlns:a16="http://schemas.microsoft.com/office/drawing/2014/main" id="{94638A5C-E859-4850-AD32-6B710A2AFDF8}"/>
               </a:ext>
             </a:extLst>
           </p:cNvPr>
@@ -10843,7 +10843,7 @@
           <p:cNvPr id="64" name="">
             <a:extLst xmlns:a="http://schemas.openxmlformats.org/drawingml/2006/main">
               <a:ext uri="{FF2B5EF4-FFF2-40B4-BE49-F238E27FC236}">
-                <a16:creationId xmlns:a16="http://schemas.microsoft.com/office/drawing/2014/main" id="{38041E55-ADDD-4416-98DA-3BDE3064E775}"/>
+                <a16:creationId xmlns:a16="http://schemas.microsoft.com/office/drawing/2014/main" id="{213FEC61-A470-4291-94DA-886E5425761D}"/>
               </a:ext>
             </a:extLst>
           </p:cNvPr>
@@ -10895,7 +10895,7 @@
           <p:cNvPr id="65" name="">
             <a:extLst xmlns:a="http://schemas.openxmlformats.org/drawingml/2006/main">
               <a:ext uri="{FF2B5EF4-FFF2-40B4-BE49-F238E27FC236}">
-                <a16:creationId xmlns:a16="http://schemas.microsoft.com/office/drawing/2014/main" id="{7B4ADBC6-C550-492E-A4FB-51BC9F32833A}"/>
+                <a16:creationId xmlns:a16="http://schemas.microsoft.com/office/drawing/2014/main" id="{8284FF04-0BA9-4126-A439-A750874A4619}"/>
               </a:ext>
             </a:extLst>
           </p:cNvPr>
@@ -10926,7 +10926,7 @@
           <p:cNvPr id="66" name="">
             <a:extLst xmlns:a="http://schemas.openxmlformats.org/drawingml/2006/main">
               <a:ext uri="{FF2B5EF4-FFF2-40B4-BE49-F238E27FC236}">
-                <a16:creationId xmlns:a16="http://schemas.microsoft.com/office/drawing/2014/main" id="{C76E5625-FB96-4CEA-80E9-CCCC9AC99C16}"/>
+                <a16:creationId xmlns:a16="http://schemas.microsoft.com/office/drawing/2014/main" id="{C594EEB9-475A-4367-A349-5C998F50EEEE}"/>
               </a:ext>
             </a:extLst>
           </p:cNvPr>
@@ -10957,7 +10957,7 @@
           <p:cNvPr id="67" name="">
             <a:extLst xmlns:a="http://schemas.openxmlformats.org/drawingml/2006/main">
               <a:ext uri="{FF2B5EF4-FFF2-40B4-BE49-F238E27FC236}">
-                <a16:creationId xmlns:a16="http://schemas.microsoft.com/office/drawing/2014/main" id="{14A238D8-DBE6-4C59-BBE5-75F6C6821E28}"/>
+                <a16:creationId xmlns:a16="http://schemas.microsoft.com/office/drawing/2014/main" id="{50F76231-9873-479E-ADF8-1416827DBE4E}"/>
               </a:ext>
             </a:extLst>
           </p:cNvPr>
@@ -11009,7 +11009,7 @@
           <p:cNvPr id="68" name="">
             <a:extLst xmlns:a="http://schemas.openxmlformats.org/drawingml/2006/main">
               <a:ext uri="{FF2B5EF4-FFF2-40B4-BE49-F238E27FC236}">
-                <a16:creationId xmlns:a16="http://schemas.microsoft.com/office/drawing/2014/main" id="{9B302F01-0A0A-4B2F-B671-7D39FBE26679}"/>
+                <a16:creationId xmlns:a16="http://schemas.microsoft.com/office/drawing/2014/main" id="{C5D21F91-2B0B-4B77-B3BE-DE4713D45BDE}"/>
               </a:ext>
             </a:extLst>
           </p:cNvPr>
@@ -11061,7 +11061,7 @@
           <p:cNvPr id="69" name="">
             <a:extLst xmlns:a="http://schemas.openxmlformats.org/drawingml/2006/main">
               <a:ext uri="{FF2B5EF4-FFF2-40B4-BE49-F238E27FC236}">
-                <a16:creationId xmlns:a16="http://schemas.microsoft.com/office/drawing/2014/main" id="{8B251CEC-77CA-4D4C-ADE0-54E627E03F4C}"/>
+                <a16:creationId xmlns:a16="http://schemas.microsoft.com/office/drawing/2014/main" id="{4396367A-475B-4B72-A7E0-2DCEFFDF8477}"/>
               </a:ext>
             </a:extLst>
           </p:cNvPr>
@@ -11113,7 +11113,7 @@
           <p:cNvPr id="70" name="">
             <a:extLst xmlns:a="http://schemas.openxmlformats.org/drawingml/2006/main">
               <a:ext uri="{FF2B5EF4-FFF2-40B4-BE49-F238E27FC236}">
-                <a16:creationId xmlns:a16="http://schemas.microsoft.com/office/drawing/2014/main" id="{5DABCD97-FBF3-4CD4-802F-27196AB5771C}"/>
+                <a16:creationId xmlns:a16="http://schemas.microsoft.com/office/drawing/2014/main" id="{321F3CDF-6817-49EB-A71D-DE81C72838C3}"/>
               </a:ext>
             </a:extLst>
           </p:cNvPr>
@@ -11165,7 +11165,7 @@
           <p:cNvPr id="71" name="">
             <a:extLst xmlns:a="http://schemas.openxmlformats.org/drawingml/2006/main">
               <a:ext uri="{FF2B5EF4-FFF2-40B4-BE49-F238E27FC236}">
-                <a16:creationId xmlns:a16="http://schemas.microsoft.com/office/drawing/2014/main" id="{F02D7A39-F248-420E-92BB-698681481549}"/>
+                <a16:creationId xmlns:a16="http://schemas.microsoft.com/office/drawing/2014/main" id="{F5850F3F-108A-4182-ACD8-3BB9BBA65BB9}"/>
               </a:ext>
             </a:extLst>
           </p:cNvPr>
@@ -11217,7 +11217,7 @@
           <p:cNvPr id="72" name="">
             <a:extLst xmlns:a="http://schemas.openxmlformats.org/drawingml/2006/main">
               <a:ext uri="{FF2B5EF4-FFF2-40B4-BE49-F238E27FC236}">
-                <a16:creationId xmlns:a16="http://schemas.microsoft.com/office/drawing/2014/main" id="{48D57464-3E39-42D8-AE49-B5DACBC39116}"/>
+                <a16:creationId xmlns:a16="http://schemas.microsoft.com/office/drawing/2014/main" id="{0368B3A5-FC33-4772-B529-D0E0A7422322}"/>
               </a:ext>
             </a:extLst>
           </p:cNvPr>
@@ -11248,7 +11248,7 @@
           <p:cNvPr id="73" name="">
             <a:extLst xmlns:a="http://schemas.openxmlformats.org/drawingml/2006/main">
               <a:ext uri="{FF2B5EF4-FFF2-40B4-BE49-F238E27FC236}">
-                <a16:creationId xmlns:a16="http://schemas.microsoft.com/office/drawing/2014/main" id="{F52D96C5-7FDE-469F-8E0A-A0E3AE252C2C}"/>
+                <a16:creationId xmlns:a16="http://schemas.microsoft.com/office/drawing/2014/main" id="{39EACE9C-2FC4-4253-938E-407982C742E2}"/>
               </a:ext>
             </a:extLst>
           </p:cNvPr>
@@ -11300,7 +11300,7 @@
           <p:cNvPr id="74" name="">
             <a:extLst xmlns:a="http://schemas.openxmlformats.org/drawingml/2006/main">
               <a:ext uri="{FF2B5EF4-FFF2-40B4-BE49-F238E27FC236}">
-                <a16:creationId xmlns:a16="http://schemas.microsoft.com/office/drawing/2014/main" id="{7C0431B4-D8DC-4F65-ACCA-F8F7F448012D}"/>
+                <a16:creationId xmlns:a16="http://schemas.microsoft.com/office/drawing/2014/main" id="{B6B71742-9866-4A21-8DD8-F28EBBB66CAB}"/>
               </a:ext>
             </a:extLst>
           </p:cNvPr>
@@ -11352,7 +11352,7 @@
           <p:cNvPr id="75" name="">
             <a:extLst xmlns:a="http://schemas.openxmlformats.org/drawingml/2006/main">
               <a:ext uri="{FF2B5EF4-FFF2-40B4-BE49-F238E27FC236}">
-                <a16:creationId xmlns:a16="http://schemas.microsoft.com/office/drawing/2014/main" id="{FD736791-532E-42AA-A8B6-36983A53F900}"/>
+                <a16:creationId xmlns:a16="http://schemas.microsoft.com/office/drawing/2014/main" id="{E26398AE-334F-4189-967C-DE6C3EDA4399}"/>
               </a:ext>
             </a:extLst>
           </p:cNvPr>
@@ -11404,7 +11404,7 @@
           <p:cNvPr id="76" name="">
             <a:extLst xmlns:a="http://schemas.openxmlformats.org/drawingml/2006/main">
               <a:ext uri="{FF2B5EF4-FFF2-40B4-BE49-F238E27FC236}">
-                <a16:creationId xmlns:a16="http://schemas.microsoft.com/office/drawing/2014/main" id="{840CF534-550B-4109-8FEE-8728FF31C2F2}"/>
+                <a16:creationId xmlns:a16="http://schemas.microsoft.com/office/drawing/2014/main" id="{40095BAD-0381-4B06-9592-C4F794D73451}"/>
               </a:ext>
             </a:extLst>
           </p:cNvPr>
@@ -11456,7 +11456,7 @@
           <p:cNvPr id="77" name="">
             <a:extLst xmlns:a="http://schemas.openxmlformats.org/drawingml/2006/main">
               <a:ext uri="{FF2B5EF4-FFF2-40B4-BE49-F238E27FC236}">
-                <a16:creationId xmlns:a16="http://schemas.microsoft.com/office/drawing/2014/main" id="{17793393-540B-469D-98EB-B68074BD54B3}"/>
+                <a16:creationId xmlns:a16="http://schemas.microsoft.com/office/drawing/2014/main" id="{071CF5D7-15C9-4972-9B33-2BD86241C99E}"/>
               </a:ext>
             </a:extLst>
           </p:cNvPr>
@@ -11508,7 +11508,7 @@
           <p:cNvPr id="78" name="">
             <a:extLst xmlns:a="http://schemas.openxmlformats.org/drawingml/2006/main">
               <a:ext uri="{FF2B5EF4-FFF2-40B4-BE49-F238E27FC236}">
-                <a16:creationId xmlns:a16="http://schemas.microsoft.com/office/drawing/2014/main" id="{4445C104-F1D0-4FD1-BFD1-2B746A2BA7DA}"/>
+                <a16:creationId xmlns:a16="http://schemas.microsoft.com/office/drawing/2014/main" id="{59C10909-F5E2-4166-9471-8F0EFC970F23}"/>
               </a:ext>
             </a:extLst>
           </p:cNvPr>
@@ -11539,7 +11539,7 @@
           <p:cNvPr id="79" name="">
             <a:extLst xmlns:a="http://schemas.openxmlformats.org/drawingml/2006/main">
               <a:ext uri="{FF2B5EF4-FFF2-40B4-BE49-F238E27FC236}">
-                <a16:creationId xmlns:a16="http://schemas.microsoft.com/office/drawing/2014/main" id="{7AD15161-569E-4D07-9DDD-DC65AFFF223B}"/>
+                <a16:creationId xmlns:a16="http://schemas.microsoft.com/office/drawing/2014/main" id="{200D92B6-43AE-41E2-AAA1-3B5548BA485C}"/>
               </a:ext>
             </a:extLst>
           </p:cNvPr>
@@ -11570,7 +11570,7 @@
           <p:cNvPr id="80" name="">
             <a:extLst xmlns:a="http://schemas.openxmlformats.org/drawingml/2006/main">
               <a:ext uri="{FF2B5EF4-FFF2-40B4-BE49-F238E27FC236}">
-                <a16:creationId xmlns:a16="http://schemas.microsoft.com/office/drawing/2014/main" id="{B748B911-8E67-4EE6-B831-3DEAB66D3EF1}"/>
+                <a16:creationId xmlns:a16="http://schemas.microsoft.com/office/drawing/2014/main" id="{0DB921EE-04A8-45D5-A050-F4B642ABAE25}"/>
               </a:ext>
             </a:extLst>
           </p:cNvPr>
@@ -11622,7 +11622,7 @@
           <p:cNvPr id="81" name="">
             <a:extLst xmlns:a="http://schemas.openxmlformats.org/drawingml/2006/main">
               <a:ext uri="{FF2B5EF4-FFF2-40B4-BE49-F238E27FC236}">
-                <a16:creationId xmlns:a16="http://schemas.microsoft.com/office/drawing/2014/main" id="{FD9B1171-5BB0-4A51-8058-1CBA40FC789C}"/>
+                <a16:creationId xmlns:a16="http://schemas.microsoft.com/office/drawing/2014/main" id="{D215825D-DF70-486E-9861-87BBD2CDE97A}"/>
               </a:ext>
             </a:extLst>
           </p:cNvPr>
@@ -11674,7 +11674,7 @@
           <p:cNvPr id="82" name="">
             <a:extLst xmlns:a="http://schemas.openxmlformats.org/drawingml/2006/main">
               <a:ext uri="{FF2B5EF4-FFF2-40B4-BE49-F238E27FC236}">
-                <a16:creationId xmlns:a16="http://schemas.microsoft.com/office/drawing/2014/main" id="{75286965-E4B0-486E-A3E9-0DAA32F9C4DF}"/>
+                <a16:creationId xmlns:a16="http://schemas.microsoft.com/office/drawing/2014/main" id="{CE74D3AB-8E21-47FE-84A2-573E5BBC3266}"/>
               </a:ext>
             </a:extLst>
           </p:cNvPr>
@@ -11726,7 +11726,7 @@
           <p:cNvPr id="83" name="">
             <a:extLst xmlns:a="http://schemas.openxmlformats.org/drawingml/2006/main">
               <a:ext uri="{FF2B5EF4-FFF2-40B4-BE49-F238E27FC236}">
-                <a16:creationId xmlns:a16="http://schemas.microsoft.com/office/drawing/2014/main" id="{A8023057-C03F-4B8C-A11D-CF4CCE86552E}"/>
+                <a16:creationId xmlns:a16="http://schemas.microsoft.com/office/drawing/2014/main" id="{94A294D2-7CCE-412E-89F5-61652D17167E}"/>
               </a:ext>
             </a:extLst>
           </p:cNvPr>
@@ -11778,7 +11778,7 @@
           <p:cNvPr id="84" name="">
             <a:extLst xmlns:a="http://schemas.openxmlformats.org/drawingml/2006/main">
               <a:ext uri="{FF2B5EF4-FFF2-40B4-BE49-F238E27FC236}">
-                <a16:creationId xmlns:a16="http://schemas.microsoft.com/office/drawing/2014/main" id="{B8CE0ACD-81F2-4494-9002-77B575C4C70C}"/>
+                <a16:creationId xmlns:a16="http://schemas.microsoft.com/office/drawing/2014/main" id="{63F47A34-A545-4C23-9640-876F3E08D572}"/>
               </a:ext>
             </a:extLst>
           </p:cNvPr>
@@ -11830,7 +11830,7 @@
           <p:cNvPr id="85" name="">
             <a:extLst xmlns:a="http://schemas.openxmlformats.org/drawingml/2006/main">
               <a:ext uri="{FF2B5EF4-FFF2-40B4-BE49-F238E27FC236}">
-                <a16:creationId xmlns:a16="http://schemas.microsoft.com/office/drawing/2014/main" id="{2D54B0CF-26D5-4696-ACA9-5B06ABB8632B}"/>
+                <a16:creationId xmlns:a16="http://schemas.microsoft.com/office/drawing/2014/main" id="{288326BB-96BF-4459-83D3-747AA8F67B58}"/>
               </a:ext>
             </a:extLst>
           </p:cNvPr>
@@ -11861,7 +11861,7 @@
           <p:cNvPr id="86" name="">
             <a:extLst xmlns:a="http://schemas.openxmlformats.org/drawingml/2006/main">
               <a:ext uri="{FF2B5EF4-FFF2-40B4-BE49-F238E27FC236}">
-                <a16:creationId xmlns:a16="http://schemas.microsoft.com/office/drawing/2014/main" id="{C791A09B-EE02-4AC4-84DA-FF59B40B45B3}"/>
+                <a16:creationId xmlns:a16="http://schemas.microsoft.com/office/drawing/2014/main" id="{4374A3E0-61A0-4CC7-95F9-B92005AE6E74}"/>
               </a:ext>
             </a:extLst>
           </p:cNvPr>
@@ -11913,7 +11913,7 @@
           <p:cNvPr id="87" name="">
             <a:extLst xmlns:a="http://schemas.openxmlformats.org/drawingml/2006/main">
               <a:ext uri="{FF2B5EF4-FFF2-40B4-BE49-F238E27FC236}">
-                <a16:creationId xmlns:a16="http://schemas.microsoft.com/office/drawing/2014/main" id="{263496E7-3BA7-44D4-A1BD-3175F57EB012}"/>
+                <a16:creationId xmlns:a16="http://schemas.microsoft.com/office/drawing/2014/main" id="{82615C63-5E67-4E62-8F9E-C5DEE86B96F1}"/>
               </a:ext>
             </a:extLst>
           </p:cNvPr>
@@ -11965,7 +11965,7 @@
           <p:cNvPr id="88" name="">
             <a:extLst xmlns:a="http://schemas.openxmlformats.org/drawingml/2006/main">
               <a:ext uri="{FF2B5EF4-FFF2-40B4-BE49-F238E27FC236}">
-                <a16:creationId xmlns:a16="http://schemas.microsoft.com/office/drawing/2014/main" id="{363F512F-222C-43FF-A364-46998F8B1C5E}"/>
+                <a16:creationId xmlns:a16="http://schemas.microsoft.com/office/drawing/2014/main" id="{72068F13-F79D-4789-8488-B9F09A024917}"/>
               </a:ext>
             </a:extLst>
           </p:cNvPr>
@@ -12017,7 +12017,7 @@
           <p:cNvPr id="89" name="">
             <a:extLst xmlns:a="http://schemas.openxmlformats.org/drawingml/2006/main">
               <a:ext uri="{FF2B5EF4-FFF2-40B4-BE49-F238E27FC236}">
-                <a16:creationId xmlns:a16="http://schemas.microsoft.com/office/drawing/2014/main" id="{21B5B85C-37C9-4408-932F-8143E7EE6DE7}"/>
+                <a16:creationId xmlns:a16="http://schemas.microsoft.com/office/drawing/2014/main" id="{E4AE8A53-BDB3-4335-8ED3-7367EF626F67}"/>
               </a:ext>
             </a:extLst>
           </p:cNvPr>
@@ -12069,7 +12069,7 @@
           <p:cNvPr id="90" name="">
             <a:extLst xmlns:a="http://schemas.openxmlformats.org/drawingml/2006/main">
               <a:ext uri="{FF2B5EF4-FFF2-40B4-BE49-F238E27FC236}">
-                <a16:creationId xmlns:a16="http://schemas.microsoft.com/office/drawing/2014/main" id="{6D04D864-30E4-44C5-B5A4-CB1FC08B33B8}"/>
+                <a16:creationId xmlns:a16="http://schemas.microsoft.com/office/drawing/2014/main" id="{C761F060-BAB6-44E2-82A1-5B64F4B72592}"/>
               </a:ext>
             </a:extLst>
           </p:cNvPr>
@@ -12121,7 +12121,7 @@
           <p:cNvPr id="91" name="">
             <a:extLst xmlns:a="http://schemas.openxmlformats.org/drawingml/2006/main">
               <a:ext uri="{FF2B5EF4-FFF2-40B4-BE49-F238E27FC236}">
-                <a16:creationId xmlns:a16="http://schemas.microsoft.com/office/drawing/2014/main" id="{DAC743F6-4D8C-4E8C-BCAC-BB977BA59772}"/>
+                <a16:creationId xmlns:a16="http://schemas.microsoft.com/office/drawing/2014/main" id="{505C3E9E-2EED-4758-A872-7163FBEF4A73}"/>
               </a:ext>
             </a:extLst>
           </p:cNvPr>
@@ -12152,7 +12152,7 @@
           <p:cNvPr id="92" name="">
             <a:extLst xmlns:a="http://schemas.openxmlformats.org/drawingml/2006/main">
               <a:ext uri="{FF2B5EF4-FFF2-40B4-BE49-F238E27FC236}">
-                <a16:creationId xmlns:a16="http://schemas.microsoft.com/office/drawing/2014/main" id="{FACBE9EC-BFD0-4E94-B4DB-878D8FC9B9F7}"/>
+                <a16:creationId xmlns:a16="http://schemas.microsoft.com/office/drawing/2014/main" id="{F21E70B1-DEF5-4E7A-8B3E-8017B86EB089}"/>
               </a:ext>
             </a:extLst>
           </p:cNvPr>
@@ -12183,7 +12183,7 @@
           <p:cNvPr id="93" name="">
             <a:extLst xmlns:a="http://schemas.openxmlformats.org/drawingml/2006/main">
               <a:ext uri="{FF2B5EF4-FFF2-40B4-BE49-F238E27FC236}">
-                <a16:creationId xmlns:a16="http://schemas.microsoft.com/office/drawing/2014/main" id="{F25B6CA8-5EE7-45B1-9CD8-00E6650D8210}"/>
+                <a16:creationId xmlns:a16="http://schemas.microsoft.com/office/drawing/2014/main" id="{1029EA12-935E-42B6-88D8-36EB947E6C50}"/>
               </a:ext>
             </a:extLst>
           </p:cNvPr>
@@ -12235,7 +12235,7 @@
           <p:cNvPr id="94" name="">
             <a:extLst xmlns:a="http://schemas.openxmlformats.org/drawingml/2006/main">
               <a:ext uri="{FF2B5EF4-FFF2-40B4-BE49-F238E27FC236}">
-                <a16:creationId xmlns:a16="http://schemas.microsoft.com/office/drawing/2014/main" id="{9C807242-9AAB-4A29-A9CF-8A1EAFE15259}"/>
+                <a16:creationId xmlns:a16="http://schemas.microsoft.com/office/drawing/2014/main" id="{446D7553-D9F6-4B3F-A376-04727F96EC18}"/>
               </a:ext>
             </a:extLst>
           </p:cNvPr>
@@ -12287,7 +12287,7 @@
           <p:cNvPr id="95" name="">
             <a:extLst xmlns:a="http://schemas.openxmlformats.org/drawingml/2006/main">
               <a:ext uri="{FF2B5EF4-FFF2-40B4-BE49-F238E27FC236}">
-                <a16:creationId xmlns:a16="http://schemas.microsoft.com/office/drawing/2014/main" id="{397851E5-9F81-4CCF-874C-E22920D8CEB6}"/>
+                <a16:creationId xmlns:a16="http://schemas.microsoft.com/office/drawing/2014/main" id="{784A8831-48BE-4C9F-96F8-2E9931A155D3}"/>
               </a:ext>
             </a:extLst>
           </p:cNvPr>
@@ -12339,7 +12339,7 @@
           <p:cNvPr id="96" name="">
             <a:extLst xmlns:a="http://schemas.openxmlformats.org/drawingml/2006/main">
               <a:ext uri="{FF2B5EF4-FFF2-40B4-BE49-F238E27FC236}">
-                <a16:creationId xmlns:a16="http://schemas.microsoft.com/office/drawing/2014/main" id="{8A240195-B56B-4FBF-B318-26DD78041901}"/>
+                <a16:creationId xmlns:a16="http://schemas.microsoft.com/office/drawing/2014/main" id="{976B4411-6749-4E43-BB37-989D6486DE05}"/>
               </a:ext>
             </a:extLst>
           </p:cNvPr>
@@ -12391,7 +12391,7 @@
           <p:cNvPr id="97" name="">
             <a:extLst xmlns:a="http://schemas.openxmlformats.org/drawingml/2006/main">
               <a:ext uri="{FF2B5EF4-FFF2-40B4-BE49-F238E27FC236}">
-                <a16:creationId xmlns:a16="http://schemas.microsoft.com/office/drawing/2014/main" id="{6CA5A0B6-7797-4CC1-8C42-27A42D7BF8E5}"/>
+                <a16:creationId xmlns:a16="http://schemas.microsoft.com/office/drawing/2014/main" id="{66C6D13E-18D1-45C0-9425-E9379D1CC115}"/>
               </a:ext>
             </a:extLst>
           </p:cNvPr>
@@ -12441,7 +12441,7 @@
     </p:spTree>
     <p:extLst>
       <p:ext uri="{BB962C8B-B14F-4D97-AF65-F5344CB8AC3E}">
-        <p14:creationId xmlns:p14="http://schemas.microsoft.com/office/powerpoint/2010/main" val="1098318529"/>
+        <p14:creationId xmlns:p14="http://schemas.microsoft.com/office/powerpoint/2010/main" val="1287608515"/>
       </p:ext>
     </p:extLst>
   </p:cSld>
@@ -12472,7 +12472,7 @@
           <p:cNvPr id="102" name="">
             <a:extLst xmlns:a="http://schemas.openxmlformats.org/drawingml/2006/main">
               <a:ext uri="{FF2B5EF4-FFF2-40B4-BE49-F238E27FC236}">
-                <a16:creationId xmlns:a16="http://schemas.microsoft.com/office/drawing/2014/main" id="{47A631DC-B460-4B57-AF50-DAE979469F32}"/>
+                <a16:creationId xmlns:a16="http://schemas.microsoft.com/office/drawing/2014/main" id="{A59FE9E3-3B46-459F-8AC3-3C9698CBC022}"/>
               </a:ext>
             </a:extLst>
           </p:cNvPr>
@@ -12505,7 +12505,7 @@
           <p:cNvPr id="2" name="">
             <a:extLst xmlns:a="http://schemas.openxmlformats.org/drawingml/2006/main">
               <a:ext uri="{FF2B5EF4-FFF2-40B4-BE49-F238E27FC236}">
-                <a16:creationId xmlns:a16="http://schemas.microsoft.com/office/drawing/2014/main" id="{D6BA86EE-03A7-499D-B0E3-FAE96702D403}"/>
+                <a16:creationId xmlns:a16="http://schemas.microsoft.com/office/drawing/2014/main" id="{2642C0B2-79C2-45C1-AA53-3EE6C54339D9}"/>
               </a:ext>
             </a:extLst>
           </p:cNvPr>
@@ -12536,7 +12536,7 @@
           <p:cNvPr id="3" name="">
             <a:extLst xmlns:a="http://schemas.openxmlformats.org/drawingml/2006/main">
               <a:ext uri="{FF2B5EF4-FFF2-40B4-BE49-F238E27FC236}">
-                <a16:creationId xmlns:a16="http://schemas.microsoft.com/office/drawing/2014/main" id="{0E45DF9D-B87E-4E50-A747-7BDBF900B1ED}"/>
+                <a16:creationId xmlns:a16="http://schemas.microsoft.com/office/drawing/2014/main" id="{E7B2508C-B4EA-4DB8-808D-AB0657D201DB}"/>
               </a:ext>
             </a:extLst>
           </p:cNvPr>
@@ -12588,7 +12588,7 @@
           <p:cNvPr id="4" name="">
             <a:extLst xmlns:a="http://schemas.openxmlformats.org/drawingml/2006/main">
               <a:ext uri="{FF2B5EF4-FFF2-40B4-BE49-F238E27FC236}">
-                <a16:creationId xmlns:a16="http://schemas.microsoft.com/office/drawing/2014/main" id="{135B0B28-4D22-426F-982F-352426DEC35F}"/>
+                <a16:creationId xmlns:a16="http://schemas.microsoft.com/office/drawing/2014/main" id="{BB2B701D-B9F7-41C4-869E-3F9252D16888}"/>
               </a:ext>
             </a:extLst>
           </p:cNvPr>
@@ -12640,7 +12640,7 @@
           <p:cNvPr id="5" name="">
             <a:extLst xmlns:a="http://schemas.openxmlformats.org/drawingml/2006/main">
               <a:ext uri="{FF2B5EF4-FFF2-40B4-BE49-F238E27FC236}">
-                <a16:creationId xmlns:a16="http://schemas.microsoft.com/office/drawing/2014/main" id="{0D808D17-B525-45ED-BD86-1B91913CEE98}"/>
+                <a16:creationId xmlns:a16="http://schemas.microsoft.com/office/drawing/2014/main" id="{3434F4E9-6F08-4109-B2B6-64708B13B5D3}"/>
               </a:ext>
             </a:extLst>
           </p:cNvPr>
@@ -12675,7 +12675,7 @@
           <p:nvPr/>
         </p:nvPicPr>
         <p:blipFill>
-          <a:blip xmlns:r="http://schemas.openxmlformats.org/officeDocument/2006/relationships" xmlns:a="http://schemas.openxmlformats.org/drawingml/2006/main" r:embed="R358fa47495334af5"/>
+          <a:blip xmlns:r="http://schemas.openxmlformats.org/officeDocument/2006/relationships" xmlns:a="http://schemas.openxmlformats.org/drawingml/2006/main" r:embed="R112c1cd87639472e"/>
           <a:stretch xmlns:a="http://schemas.openxmlformats.org/drawingml/2006/main"/>
         </p:blipFill>
         <p:spPr>
@@ -12693,7 +12693,7 @@
           <p:cNvPr id="7" name="">
             <a:extLst xmlns:a="http://schemas.openxmlformats.org/drawingml/2006/main">
               <a:ext uri="{FF2B5EF4-FFF2-40B4-BE49-F238E27FC236}">
-                <a16:creationId xmlns:a16="http://schemas.microsoft.com/office/drawing/2014/main" id="{814FF01E-01D1-4DDF-9C72-19FF86E76BD1}"/>
+                <a16:creationId xmlns:a16="http://schemas.microsoft.com/office/drawing/2014/main" id="{08744B8B-CCD8-40B0-AECC-BD69F4A1A437}"/>
               </a:ext>
             </a:extLst>
           </p:cNvPr>
@@ -12745,7 +12745,7 @@
           <p:cNvPr id="8" name="">
             <a:extLst xmlns:a="http://schemas.openxmlformats.org/drawingml/2006/main">
               <a:ext uri="{FF2B5EF4-FFF2-40B4-BE49-F238E27FC236}">
-                <a16:creationId xmlns:a16="http://schemas.microsoft.com/office/drawing/2014/main" id="{38B3CBCD-D915-47CB-AB15-87D843AA07AC}"/>
+                <a16:creationId xmlns:a16="http://schemas.microsoft.com/office/drawing/2014/main" id="{236E98F0-3529-4400-A2C0-D20348594AE5}"/>
               </a:ext>
             </a:extLst>
           </p:cNvPr>
@@ -12797,7 +12797,7 @@
           <p:cNvPr id="9" name="">
             <a:extLst xmlns:a="http://schemas.openxmlformats.org/drawingml/2006/main">
               <a:ext uri="{FF2B5EF4-FFF2-40B4-BE49-F238E27FC236}">
-                <a16:creationId xmlns:a16="http://schemas.microsoft.com/office/drawing/2014/main" id="{5925453A-7D75-4C87-8C13-A628BF561A4E}"/>
+                <a16:creationId xmlns:a16="http://schemas.microsoft.com/office/drawing/2014/main" id="{FC8C520D-7124-464D-A7E7-407E00989FD1}"/>
               </a:ext>
             </a:extLst>
           </p:cNvPr>
@@ -12849,7 +12849,7 @@
           <p:cNvPr id="10" name="">
             <a:extLst xmlns:a="http://schemas.openxmlformats.org/drawingml/2006/main">
               <a:ext uri="{FF2B5EF4-FFF2-40B4-BE49-F238E27FC236}">
-                <a16:creationId xmlns:a16="http://schemas.microsoft.com/office/drawing/2014/main" id="{9394DAF3-AAA8-4DD3-A0B3-6CFA0E8086E8}"/>
+                <a16:creationId xmlns:a16="http://schemas.microsoft.com/office/drawing/2014/main" id="{0150E5BB-E189-4EF4-9D28-EDFEED573D47}"/>
               </a:ext>
             </a:extLst>
           </p:cNvPr>
@@ -12901,7 +12901,7 @@
           <p:cNvPr id="11" name="">
             <a:extLst xmlns:a="http://schemas.openxmlformats.org/drawingml/2006/main">
               <a:ext uri="{FF2B5EF4-FFF2-40B4-BE49-F238E27FC236}">
-                <a16:creationId xmlns:a16="http://schemas.microsoft.com/office/drawing/2014/main" id="{8D7306D8-F681-48BC-9C9E-1F5A1CEDA295}"/>
+                <a16:creationId xmlns:a16="http://schemas.microsoft.com/office/drawing/2014/main" id="{804B294F-2CA9-4CFF-8A0E-803CDD03D2C5}"/>
               </a:ext>
             </a:extLst>
           </p:cNvPr>
@@ -12932,7 +12932,7 @@
           <p:cNvPr id="12" name="">
             <a:extLst xmlns:a="http://schemas.openxmlformats.org/drawingml/2006/main">
               <a:ext uri="{FF2B5EF4-FFF2-40B4-BE49-F238E27FC236}">
-                <a16:creationId xmlns:a16="http://schemas.microsoft.com/office/drawing/2014/main" id="{0AA50216-6B4B-4B10-8A11-D8C56DB1F88A}"/>
+                <a16:creationId xmlns:a16="http://schemas.microsoft.com/office/drawing/2014/main" id="{99ED2795-370E-443D-8843-420B049673D5}"/>
               </a:ext>
             </a:extLst>
           </p:cNvPr>
@@ -12963,7 +12963,7 @@
           <p:cNvPr id="13" name="">
             <a:extLst xmlns:a="http://schemas.openxmlformats.org/drawingml/2006/main">
               <a:ext uri="{FF2B5EF4-FFF2-40B4-BE49-F238E27FC236}">
-                <a16:creationId xmlns:a16="http://schemas.microsoft.com/office/drawing/2014/main" id="{091A3B0B-91CA-4ED1-8614-413852301294}"/>
+                <a16:creationId xmlns:a16="http://schemas.microsoft.com/office/drawing/2014/main" id="{9C021960-AD41-4A91-82E6-D5432E4D558D}"/>
               </a:ext>
             </a:extLst>
           </p:cNvPr>
@@ -13015,7 +13015,7 @@
           <p:cNvPr id="14" name="">
             <a:extLst xmlns:a="http://schemas.openxmlformats.org/drawingml/2006/main">
               <a:ext uri="{FF2B5EF4-FFF2-40B4-BE49-F238E27FC236}">
-                <a16:creationId xmlns:a16="http://schemas.microsoft.com/office/drawing/2014/main" id="{17098FE5-4CE2-4458-BFC4-C5C2186F565E}"/>
+                <a16:creationId xmlns:a16="http://schemas.microsoft.com/office/drawing/2014/main" id="{45DD69BB-23B0-4DAC-8E4D-A82B4EE48D12}"/>
               </a:ext>
             </a:extLst>
           </p:cNvPr>
@@ -13067,7 +13067,7 @@
           <p:cNvPr id="15" name="">
             <a:extLst xmlns:a="http://schemas.openxmlformats.org/drawingml/2006/main">
               <a:ext uri="{FF2B5EF4-FFF2-40B4-BE49-F238E27FC236}">
-                <a16:creationId xmlns:a16="http://schemas.microsoft.com/office/drawing/2014/main" id="{69451562-3BAC-4B50-9C74-D48262549BDA}"/>
+                <a16:creationId xmlns:a16="http://schemas.microsoft.com/office/drawing/2014/main" id="{A10A2DDC-7B9A-40AE-B4CA-7D505E30D54D}"/>
               </a:ext>
             </a:extLst>
           </p:cNvPr>
@@ -13119,7 +13119,7 @@
           <p:cNvPr id="16" name="">
             <a:extLst xmlns:a="http://schemas.openxmlformats.org/drawingml/2006/main">
               <a:ext uri="{FF2B5EF4-FFF2-40B4-BE49-F238E27FC236}">
-                <a16:creationId xmlns:a16="http://schemas.microsoft.com/office/drawing/2014/main" id="{598187A4-30AF-4CD3-8AA3-E8495BD3D4C1}"/>
+                <a16:creationId xmlns:a16="http://schemas.microsoft.com/office/drawing/2014/main" id="{58C4E946-DC1B-4E5A-A64A-6130D164631D}"/>
               </a:ext>
             </a:extLst>
           </p:cNvPr>
@@ -13171,7 +13171,7 @@
           <p:cNvPr id="17" name="">
             <a:extLst xmlns:a="http://schemas.openxmlformats.org/drawingml/2006/main">
               <a:ext uri="{FF2B5EF4-FFF2-40B4-BE49-F238E27FC236}">
-                <a16:creationId xmlns:a16="http://schemas.microsoft.com/office/drawing/2014/main" id="{EDB3F196-F152-4A81-B8D8-4D399F80AF30}"/>
+                <a16:creationId xmlns:a16="http://schemas.microsoft.com/office/drawing/2014/main" id="{0F2D64F4-B538-4C78-935B-869863D29FF4}"/>
               </a:ext>
             </a:extLst>
           </p:cNvPr>
@@ -13223,7 +13223,7 @@
           <p:cNvPr id="18" name="">
             <a:extLst xmlns:a="http://schemas.openxmlformats.org/drawingml/2006/main">
               <a:ext uri="{FF2B5EF4-FFF2-40B4-BE49-F238E27FC236}">
-                <a16:creationId xmlns:a16="http://schemas.microsoft.com/office/drawing/2014/main" id="{C7EDE386-AF9E-4C3B-ABBC-8F70EA10D524}"/>
+                <a16:creationId xmlns:a16="http://schemas.microsoft.com/office/drawing/2014/main" id="{D6DC4DF8-008B-4353-A56A-D344751BA571}"/>
               </a:ext>
             </a:extLst>
           </p:cNvPr>
@@ -13254,7 +13254,7 @@
           <p:cNvPr id="19" name="">
             <a:extLst xmlns:a="http://schemas.openxmlformats.org/drawingml/2006/main">
               <a:ext uri="{FF2B5EF4-FFF2-40B4-BE49-F238E27FC236}">
-                <a16:creationId xmlns:a16="http://schemas.microsoft.com/office/drawing/2014/main" id="{BD917713-2BF1-430B-8DED-BF324EA45AAB}"/>
+                <a16:creationId xmlns:a16="http://schemas.microsoft.com/office/drawing/2014/main" id="{1B1D851A-6A93-487D-9C83-2AC494696DE7}"/>
               </a:ext>
             </a:extLst>
           </p:cNvPr>
@@ -13306,7 +13306,7 @@
           <p:cNvPr id="20" name="">
             <a:extLst xmlns:a="http://schemas.openxmlformats.org/drawingml/2006/main">
               <a:ext uri="{FF2B5EF4-FFF2-40B4-BE49-F238E27FC236}">
-                <a16:creationId xmlns:a16="http://schemas.microsoft.com/office/drawing/2014/main" id="{87FCFABB-D055-4AF4-BA91-5C20A3D93DAF}"/>
+                <a16:creationId xmlns:a16="http://schemas.microsoft.com/office/drawing/2014/main" id="{44C58FDA-99E4-4CC7-A5A9-78E41DAE2873}"/>
               </a:ext>
             </a:extLst>
           </p:cNvPr>
@@ -13358,7 +13358,7 @@
           <p:cNvPr id="21" name="">
             <a:extLst xmlns:a="http://schemas.openxmlformats.org/drawingml/2006/main">
               <a:ext uri="{FF2B5EF4-FFF2-40B4-BE49-F238E27FC236}">
-                <a16:creationId xmlns:a16="http://schemas.microsoft.com/office/drawing/2014/main" id="{E7B892C3-E0D3-4C4C-86AF-577C83DEE0F5}"/>
+                <a16:creationId xmlns:a16="http://schemas.microsoft.com/office/drawing/2014/main" id="{90B36F2C-2725-4F96-BA84-6DB9978D9DBC}"/>
               </a:ext>
             </a:extLst>
           </p:cNvPr>
@@ -13410,7 +13410,7 @@
           <p:cNvPr id="22" name="">
             <a:extLst xmlns:a="http://schemas.openxmlformats.org/drawingml/2006/main">
               <a:ext uri="{FF2B5EF4-FFF2-40B4-BE49-F238E27FC236}">
-                <a16:creationId xmlns:a16="http://schemas.microsoft.com/office/drawing/2014/main" id="{12593744-6509-44D2-8F66-C6DFAA8FF49E}"/>
+                <a16:creationId xmlns:a16="http://schemas.microsoft.com/office/drawing/2014/main" id="{0C867811-95A9-4B5D-A0B1-26351D70F382}"/>
               </a:ext>
             </a:extLst>
           </p:cNvPr>
@@ -13462,7 +13462,7 @@
           <p:cNvPr id="23" name="">
             <a:extLst xmlns:a="http://schemas.openxmlformats.org/drawingml/2006/main">
               <a:ext uri="{FF2B5EF4-FFF2-40B4-BE49-F238E27FC236}">
-                <a16:creationId xmlns:a16="http://schemas.microsoft.com/office/drawing/2014/main" id="{7E1CBE6A-61BF-45C7-A72F-3182F4CFC06F}"/>
+                <a16:creationId xmlns:a16="http://schemas.microsoft.com/office/drawing/2014/main" id="{C6BDD339-DF8D-4618-AD06-0182B79264C6}"/>
               </a:ext>
             </a:extLst>
           </p:cNvPr>
@@ -13514,7 +13514,7 @@
           <p:cNvPr id="24" name="">
             <a:extLst xmlns:a="http://schemas.openxmlformats.org/drawingml/2006/main">
               <a:ext uri="{FF2B5EF4-FFF2-40B4-BE49-F238E27FC236}">
-                <a16:creationId xmlns:a16="http://schemas.microsoft.com/office/drawing/2014/main" id="{8148596B-8C56-46DA-B144-242C5BAF3B37}"/>
+                <a16:creationId xmlns:a16="http://schemas.microsoft.com/office/drawing/2014/main" id="{74917113-75D2-48BD-A030-0EBB35E92A7A}"/>
               </a:ext>
             </a:extLst>
           </p:cNvPr>
@@ -13545,7 +13545,7 @@
           <p:cNvPr id="25" name="">
             <a:extLst xmlns:a="http://schemas.openxmlformats.org/drawingml/2006/main">
               <a:ext uri="{FF2B5EF4-FFF2-40B4-BE49-F238E27FC236}">
-                <a16:creationId xmlns:a16="http://schemas.microsoft.com/office/drawing/2014/main" id="{7D03BC3F-A690-47EC-ACFF-064C1F9D006E}"/>
+                <a16:creationId xmlns:a16="http://schemas.microsoft.com/office/drawing/2014/main" id="{B601FD15-8879-4BBA-9643-34F227F58B37}"/>
               </a:ext>
             </a:extLst>
           </p:cNvPr>
@@ -13576,7 +13576,7 @@
           <p:cNvPr id="26" name="">
             <a:extLst xmlns:a="http://schemas.openxmlformats.org/drawingml/2006/main">
               <a:ext uri="{FF2B5EF4-FFF2-40B4-BE49-F238E27FC236}">
-                <a16:creationId xmlns:a16="http://schemas.microsoft.com/office/drawing/2014/main" id="{B34A6C4D-87E0-4A96-81FE-AA668B385E28}"/>
+                <a16:creationId xmlns:a16="http://schemas.microsoft.com/office/drawing/2014/main" id="{7FE8EE23-304A-48D7-BB84-ABA3448CCFA2}"/>
               </a:ext>
             </a:extLst>
           </p:cNvPr>
@@ -13628,7 +13628,7 @@
           <p:cNvPr id="27" name="">
             <a:extLst xmlns:a="http://schemas.openxmlformats.org/drawingml/2006/main">
               <a:ext uri="{FF2B5EF4-FFF2-40B4-BE49-F238E27FC236}">
-                <a16:creationId xmlns:a16="http://schemas.microsoft.com/office/drawing/2014/main" id="{2E2BB044-D986-4A75-BE05-27528410AE71}"/>
+                <a16:creationId xmlns:a16="http://schemas.microsoft.com/office/drawing/2014/main" id="{5B13C07F-C1BD-425F-8FE0-4651189DE896}"/>
               </a:ext>
             </a:extLst>
           </p:cNvPr>
@@ -13680,7 +13680,7 @@
           <p:cNvPr id="28" name="">
             <a:extLst xmlns:a="http://schemas.openxmlformats.org/drawingml/2006/main">
               <a:ext uri="{FF2B5EF4-FFF2-40B4-BE49-F238E27FC236}">
-                <a16:creationId xmlns:a16="http://schemas.microsoft.com/office/drawing/2014/main" id="{E5D71267-4CAC-4060-BEB6-52EB563CC691}"/>
+                <a16:creationId xmlns:a16="http://schemas.microsoft.com/office/drawing/2014/main" id="{30CD4C88-7921-4372-BAD0-A6C4FE2E647D}"/>
               </a:ext>
             </a:extLst>
           </p:cNvPr>
@@ -13732,7 +13732,7 @@
           <p:cNvPr id="29" name="">
             <a:extLst xmlns:a="http://schemas.openxmlformats.org/drawingml/2006/main">
               <a:ext uri="{FF2B5EF4-FFF2-40B4-BE49-F238E27FC236}">
-                <a16:creationId xmlns:a16="http://schemas.microsoft.com/office/drawing/2014/main" id="{4BBC3FBF-64EC-4896-86B0-30FDC41D458F}"/>
+                <a16:creationId xmlns:a16="http://schemas.microsoft.com/office/drawing/2014/main" id="{8C736BE5-BFD3-4AC2-A1F3-A8BD1F431CB0}"/>
               </a:ext>
             </a:extLst>
           </p:cNvPr>
@@ -13784,7 +13784,7 @@
           <p:cNvPr id="30" name="">
             <a:extLst xmlns:a="http://schemas.openxmlformats.org/drawingml/2006/main">
               <a:ext uri="{FF2B5EF4-FFF2-40B4-BE49-F238E27FC236}">
-                <a16:creationId xmlns:a16="http://schemas.microsoft.com/office/drawing/2014/main" id="{CAC99D0B-13A7-436A-A7BF-D773E818EBD7}"/>
+                <a16:creationId xmlns:a16="http://schemas.microsoft.com/office/drawing/2014/main" id="{1490EE70-62AD-499F-A96D-BA9F3867B240}"/>
               </a:ext>
             </a:extLst>
           </p:cNvPr>
@@ -13836,7 +13836,7 @@
           <p:cNvPr id="31" name="">
             <a:extLst xmlns:a="http://schemas.openxmlformats.org/drawingml/2006/main">
               <a:ext uri="{FF2B5EF4-FFF2-40B4-BE49-F238E27FC236}">
-                <a16:creationId xmlns:a16="http://schemas.microsoft.com/office/drawing/2014/main" id="{6B500C9D-7929-4D83-863B-BA476CEA0DE3}"/>
+                <a16:creationId xmlns:a16="http://schemas.microsoft.com/office/drawing/2014/main" id="{39549514-4590-4208-91C9-6E0185AEDF83}"/>
               </a:ext>
             </a:extLst>
           </p:cNvPr>
@@ -13867,7 +13867,7 @@
           <p:cNvPr id="32" name="">
             <a:extLst xmlns:a="http://schemas.openxmlformats.org/drawingml/2006/main">
               <a:ext uri="{FF2B5EF4-FFF2-40B4-BE49-F238E27FC236}">
-                <a16:creationId xmlns:a16="http://schemas.microsoft.com/office/drawing/2014/main" id="{9EE983A5-9A9F-4156-8F7E-06423DD3019B}"/>
+                <a16:creationId xmlns:a16="http://schemas.microsoft.com/office/drawing/2014/main" id="{05EB08F0-BB10-43DE-880D-82C8CB747CDA}"/>
               </a:ext>
             </a:extLst>
           </p:cNvPr>
@@ -13919,7 +13919,7 @@
           <p:cNvPr id="33" name="">
             <a:extLst xmlns:a="http://schemas.openxmlformats.org/drawingml/2006/main">
               <a:ext uri="{FF2B5EF4-FFF2-40B4-BE49-F238E27FC236}">
-                <a16:creationId xmlns:a16="http://schemas.microsoft.com/office/drawing/2014/main" id="{0379FBB6-8114-4437-8AC7-14938A630B41}"/>
+                <a16:creationId xmlns:a16="http://schemas.microsoft.com/office/drawing/2014/main" id="{6BC9BB3B-704A-41DB-AE01-C8CF246C2C0F}"/>
               </a:ext>
             </a:extLst>
           </p:cNvPr>
@@ -13971,7 +13971,7 @@
           <p:cNvPr id="34" name="">
             <a:extLst xmlns:a="http://schemas.openxmlformats.org/drawingml/2006/main">
               <a:ext uri="{FF2B5EF4-FFF2-40B4-BE49-F238E27FC236}">
-                <a16:creationId xmlns:a16="http://schemas.microsoft.com/office/drawing/2014/main" id="{9018FB89-F1D4-4EE6-AAA5-28298D8DB87B}"/>
+                <a16:creationId xmlns:a16="http://schemas.microsoft.com/office/drawing/2014/main" id="{ECCC415F-C13E-4613-85A6-08F4C511FFF4}"/>
               </a:ext>
             </a:extLst>
           </p:cNvPr>
@@ -14023,7 +14023,7 @@
           <p:cNvPr id="35" name="">
             <a:extLst xmlns:a="http://schemas.openxmlformats.org/drawingml/2006/main">
               <a:ext uri="{FF2B5EF4-FFF2-40B4-BE49-F238E27FC236}">
-                <a16:creationId xmlns:a16="http://schemas.microsoft.com/office/drawing/2014/main" id="{4D1D46C6-7A8C-4B94-B890-F91724EEB000}"/>
+                <a16:creationId xmlns:a16="http://schemas.microsoft.com/office/drawing/2014/main" id="{0391090B-27B9-4B96-8508-0D3AC57ACBF3}"/>
               </a:ext>
             </a:extLst>
           </p:cNvPr>
@@ -14075,7 +14075,7 @@
           <p:cNvPr id="36" name="">
             <a:extLst xmlns:a="http://schemas.openxmlformats.org/drawingml/2006/main">
               <a:ext uri="{FF2B5EF4-FFF2-40B4-BE49-F238E27FC236}">
-                <a16:creationId xmlns:a16="http://schemas.microsoft.com/office/drawing/2014/main" id="{A6FDA7FF-819F-4B7A-B374-29935DDC9828}"/>
+                <a16:creationId xmlns:a16="http://schemas.microsoft.com/office/drawing/2014/main" id="{D637515A-131D-47C7-AF09-C5085DE0B16D}"/>
               </a:ext>
             </a:extLst>
           </p:cNvPr>
@@ -14127,7 +14127,7 @@
           <p:cNvPr id="37" name="">
             <a:extLst xmlns:a="http://schemas.openxmlformats.org/drawingml/2006/main">
               <a:ext uri="{FF2B5EF4-FFF2-40B4-BE49-F238E27FC236}">
-                <a16:creationId xmlns:a16="http://schemas.microsoft.com/office/drawing/2014/main" id="{0F939486-93A1-4DD8-AEA0-6CE2B82C065B}"/>
+                <a16:creationId xmlns:a16="http://schemas.microsoft.com/office/drawing/2014/main" id="{F393484C-8B23-4B4E-A5C8-1DADFE8DE1F9}"/>
               </a:ext>
             </a:extLst>
           </p:cNvPr>
@@ -14158,7 +14158,7 @@
           <p:cNvPr id="38" name="">
             <a:extLst xmlns:a="http://schemas.openxmlformats.org/drawingml/2006/main">
               <a:ext uri="{FF2B5EF4-FFF2-40B4-BE49-F238E27FC236}">
-                <a16:creationId xmlns:a16="http://schemas.microsoft.com/office/drawing/2014/main" id="{EAE47E87-54E8-41C3-B22C-060BD7F5E985}"/>
+                <a16:creationId xmlns:a16="http://schemas.microsoft.com/office/drawing/2014/main" id="{4D2C5D50-FC25-492D-8B8D-B09EB8CFFCD0}"/>
               </a:ext>
             </a:extLst>
           </p:cNvPr>
@@ -14189,7 +14189,7 @@
           <p:cNvPr id="39" name="">
             <a:extLst xmlns:a="http://schemas.openxmlformats.org/drawingml/2006/main">
               <a:ext uri="{FF2B5EF4-FFF2-40B4-BE49-F238E27FC236}">
-                <a16:creationId xmlns:a16="http://schemas.microsoft.com/office/drawing/2014/main" id="{884F8313-B1B6-489C-9CE4-0F5304572A75}"/>
+                <a16:creationId xmlns:a16="http://schemas.microsoft.com/office/drawing/2014/main" id="{B4BB686B-B291-4EF7-A3D2-A131438D88BA}"/>
               </a:ext>
             </a:extLst>
           </p:cNvPr>
@@ -14241,7 +14241,7 @@
           <p:cNvPr id="40" name="">
             <a:extLst xmlns:a="http://schemas.openxmlformats.org/drawingml/2006/main">
               <a:ext uri="{FF2B5EF4-FFF2-40B4-BE49-F238E27FC236}">
-                <a16:creationId xmlns:a16="http://schemas.microsoft.com/office/drawing/2014/main" id="{C1ED2F58-ABB5-4995-906C-606E10B7D0A4}"/>
+                <a16:creationId xmlns:a16="http://schemas.microsoft.com/office/drawing/2014/main" id="{07666E29-A1B6-46E1-B317-1A14A632B3BC}"/>
               </a:ext>
             </a:extLst>
           </p:cNvPr>
@@ -14293,7 +14293,7 @@
           <p:cNvPr id="41" name="">
             <a:extLst xmlns:a="http://schemas.openxmlformats.org/drawingml/2006/main">
               <a:ext uri="{FF2B5EF4-FFF2-40B4-BE49-F238E27FC236}">
-                <a16:creationId xmlns:a16="http://schemas.microsoft.com/office/drawing/2014/main" id="{EFF0842B-4B50-41C2-9011-B6D3585CBF87}"/>
+                <a16:creationId xmlns:a16="http://schemas.microsoft.com/office/drawing/2014/main" id="{AB0F36C5-5E71-4180-9767-2065516AEB54}"/>
               </a:ext>
             </a:extLst>
           </p:cNvPr>
@@ -14345,7 +14345,7 @@
           <p:cNvPr id="42" name="">
             <a:extLst xmlns:a="http://schemas.openxmlformats.org/drawingml/2006/main">
               <a:ext uri="{FF2B5EF4-FFF2-40B4-BE49-F238E27FC236}">
-                <a16:creationId xmlns:a16="http://schemas.microsoft.com/office/drawing/2014/main" id="{B436CC81-1F27-4D6C-B51A-82D1E8CFA0B8}"/>
+                <a16:creationId xmlns:a16="http://schemas.microsoft.com/office/drawing/2014/main" id="{86C2AE3B-6009-4FF1-BFB8-901000E0430D}"/>
               </a:ext>
             </a:extLst>
           </p:cNvPr>
@@ -14397,7 +14397,7 @@
           <p:cNvPr id="43" name="">
             <a:extLst xmlns:a="http://schemas.openxmlformats.org/drawingml/2006/main">
               <a:ext uri="{FF2B5EF4-FFF2-40B4-BE49-F238E27FC236}">
-                <a16:creationId xmlns:a16="http://schemas.microsoft.com/office/drawing/2014/main" id="{16A90704-94E1-4556-B2F4-DB8B0B624769}"/>
+                <a16:creationId xmlns:a16="http://schemas.microsoft.com/office/drawing/2014/main" id="{FFAAAF57-531B-43DD-A612-9BC8B7FC386F}"/>
               </a:ext>
             </a:extLst>
           </p:cNvPr>
@@ -14449,7 +14449,7 @@
           <p:cNvPr id="44" name="">
             <a:extLst xmlns:a="http://schemas.openxmlformats.org/drawingml/2006/main">
               <a:ext uri="{FF2B5EF4-FFF2-40B4-BE49-F238E27FC236}">
-                <a16:creationId xmlns:a16="http://schemas.microsoft.com/office/drawing/2014/main" id="{4C7B14B3-9C9A-4A61-A6D0-D65401E5E6AC}"/>
+                <a16:creationId xmlns:a16="http://schemas.microsoft.com/office/drawing/2014/main" id="{C47BB52E-6F04-4467-A6D7-D3E7136C654E}"/>
               </a:ext>
             </a:extLst>
           </p:cNvPr>
@@ -14480,7 +14480,7 @@
           <p:cNvPr id="45" name="">
             <a:extLst xmlns:a="http://schemas.openxmlformats.org/drawingml/2006/main">
               <a:ext uri="{FF2B5EF4-FFF2-40B4-BE49-F238E27FC236}">
-                <a16:creationId xmlns:a16="http://schemas.microsoft.com/office/drawing/2014/main" id="{7E354930-0BD2-4B40-A601-936510FBDCE7}"/>
+                <a16:creationId xmlns:a16="http://schemas.microsoft.com/office/drawing/2014/main" id="{82F068E4-68B1-45E7-A7DF-902847CE1127}"/>
               </a:ext>
             </a:extLst>
           </p:cNvPr>
@@ -14532,7 +14532,7 @@
           <p:cNvPr id="46" name="">
             <a:extLst xmlns:a="http://schemas.openxmlformats.org/drawingml/2006/main">
               <a:ext uri="{FF2B5EF4-FFF2-40B4-BE49-F238E27FC236}">
-                <a16:creationId xmlns:a16="http://schemas.microsoft.com/office/drawing/2014/main" id="{5AD177E2-1FB1-47BC-96D5-59F9AD21A46B}"/>
+                <a16:creationId xmlns:a16="http://schemas.microsoft.com/office/drawing/2014/main" id="{B75647F8-547D-468D-8B93-4F509F24FAF6}"/>
               </a:ext>
             </a:extLst>
           </p:cNvPr>
@@ -14584,7 +14584,7 @@
           <p:cNvPr id="47" name="">
             <a:extLst xmlns:a="http://schemas.openxmlformats.org/drawingml/2006/main">
               <a:ext uri="{FF2B5EF4-FFF2-40B4-BE49-F238E27FC236}">
-                <a16:creationId xmlns:a16="http://schemas.microsoft.com/office/drawing/2014/main" id="{C20C1F98-5C79-4660-9E72-7582B7055263}"/>
+                <a16:creationId xmlns:a16="http://schemas.microsoft.com/office/drawing/2014/main" id="{5371A630-8C99-4218-A5AB-E4299083384F}"/>
               </a:ext>
             </a:extLst>
           </p:cNvPr>
@@ -14636,7 +14636,7 @@
           <p:cNvPr id="48" name="">
             <a:extLst xmlns:a="http://schemas.openxmlformats.org/drawingml/2006/main">
               <a:ext uri="{FF2B5EF4-FFF2-40B4-BE49-F238E27FC236}">
-                <a16:creationId xmlns:a16="http://schemas.microsoft.com/office/drawing/2014/main" id="{33E238B8-3C75-446D-BA82-AE5EC928EC64}"/>
+                <a16:creationId xmlns:a16="http://schemas.microsoft.com/office/drawing/2014/main" id="{AA920066-43FB-4575-95FF-33D4FF68E313}"/>
               </a:ext>
             </a:extLst>
           </p:cNvPr>
@@ -14688,7 +14688,7 @@
           <p:cNvPr id="49" name="">
             <a:extLst xmlns:a="http://schemas.openxmlformats.org/drawingml/2006/main">
               <a:ext uri="{FF2B5EF4-FFF2-40B4-BE49-F238E27FC236}">
-                <a16:creationId xmlns:a16="http://schemas.microsoft.com/office/drawing/2014/main" id="{047673E7-86D4-4C85-AB02-23C757B09A83}"/>
+                <a16:creationId xmlns:a16="http://schemas.microsoft.com/office/drawing/2014/main" id="{A0078621-861E-402B-8CB0-E21458DB8A21}"/>
               </a:ext>
             </a:extLst>
           </p:cNvPr>
@@ -14740,7 +14740,7 @@
           <p:cNvPr id="50" name="">
             <a:extLst xmlns:a="http://schemas.openxmlformats.org/drawingml/2006/main">
               <a:ext uri="{FF2B5EF4-FFF2-40B4-BE49-F238E27FC236}">
-                <a16:creationId xmlns:a16="http://schemas.microsoft.com/office/drawing/2014/main" id="{D5AAE8B5-69C9-48F2-A4DD-DBE817E12B02}"/>
+                <a16:creationId xmlns:a16="http://schemas.microsoft.com/office/drawing/2014/main" id="{A4EABB28-416A-4EE4-9051-EE854E4E8772}"/>
               </a:ext>
             </a:extLst>
           </p:cNvPr>
@@ -14771,7 +14771,7 @@
           <p:cNvPr id="51" name="">
             <a:extLst xmlns:a="http://schemas.openxmlformats.org/drawingml/2006/main">
               <a:ext uri="{FF2B5EF4-FFF2-40B4-BE49-F238E27FC236}">
-                <a16:creationId xmlns:a16="http://schemas.microsoft.com/office/drawing/2014/main" id="{AB8EA8AC-C25A-4D37-A7BB-0ECC54D127E1}"/>
+                <a16:creationId xmlns:a16="http://schemas.microsoft.com/office/drawing/2014/main" id="{D50D4B23-BDB1-4E28-9E90-F46914E67FF7}"/>
               </a:ext>
             </a:extLst>
           </p:cNvPr>
@@ -14802,7 +14802,7 @@
           <p:cNvPr id="52" name="">
             <a:extLst xmlns:a="http://schemas.openxmlformats.org/drawingml/2006/main">
               <a:ext uri="{FF2B5EF4-FFF2-40B4-BE49-F238E27FC236}">
-                <a16:creationId xmlns:a16="http://schemas.microsoft.com/office/drawing/2014/main" id="{8372FC52-CD58-4F33-94B4-D4E550A71F97}"/>
+                <a16:creationId xmlns:a16="http://schemas.microsoft.com/office/drawing/2014/main" id="{BEBD2D0F-23A6-42F1-ACBF-E17780FF71AC}"/>
               </a:ext>
             </a:extLst>
           </p:cNvPr>
@@ -14854,7 +14854,7 @@
           <p:cNvPr id="53" name="">
             <a:extLst xmlns:a="http://schemas.openxmlformats.org/drawingml/2006/main">
               <a:ext uri="{FF2B5EF4-FFF2-40B4-BE49-F238E27FC236}">
-                <a16:creationId xmlns:a16="http://schemas.microsoft.com/office/drawing/2014/main" id="{61AE0C7D-850F-4B6E-8DE2-32431F57D7CA}"/>
+                <a16:creationId xmlns:a16="http://schemas.microsoft.com/office/drawing/2014/main" id="{941CA376-A0E0-40B6-910D-DF8846441462}"/>
               </a:ext>
             </a:extLst>
           </p:cNvPr>
@@ -14906,7 +14906,7 @@
           <p:cNvPr id="54" name="">
             <a:extLst xmlns:a="http://schemas.openxmlformats.org/drawingml/2006/main">
               <a:ext uri="{FF2B5EF4-FFF2-40B4-BE49-F238E27FC236}">
-                <a16:creationId xmlns:a16="http://schemas.microsoft.com/office/drawing/2014/main" id="{734AE6AB-B408-461D-A465-B3284F260B94}"/>
+                <a16:creationId xmlns:a16="http://schemas.microsoft.com/office/drawing/2014/main" id="{8CA8AA30-795E-4D46-95A8-A1DE0D67FA44}"/>
               </a:ext>
             </a:extLst>
           </p:cNvPr>
@@ -14958,7 +14958,7 @@
           <p:cNvPr id="55" name="">
             <a:extLst xmlns:a="http://schemas.openxmlformats.org/drawingml/2006/main">
               <a:ext uri="{FF2B5EF4-FFF2-40B4-BE49-F238E27FC236}">
-                <a16:creationId xmlns:a16="http://schemas.microsoft.com/office/drawing/2014/main" id="{2ABB6E82-0D37-4CF2-BE94-DA5215911C96}"/>
+                <a16:creationId xmlns:a16="http://schemas.microsoft.com/office/drawing/2014/main" id="{ACC969B2-A74B-47DF-A105-2204CC89520D}"/>
               </a:ext>
             </a:extLst>
           </p:cNvPr>
@@ -15010,7 +15010,7 @@
           <p:cNvPr id="56" name="">
             <a:extLst xmlns:a="http://schemas.openxmlformats.org/drawingml/2006/main">
               <a:ext uri="{FF2B5EF4-FFF2-40B4-BE49-F238E27FC236}">
-                <a16:creationId xmlns:a16="http://schemas.microsoft.com/office/drawing/2014/main" id="{DF858E5A-2DD4-4801-B772-31576166BCC6}"/>
+                <a16:creationId xmlns:a16="http://schemas.microsoft.com/office/drawing/2014/main" id="{CEB8DE6D-6543-42A6-836A-18A31FD4006A}"/>
               </a:ext>
             </a:extLst>
           </p:cNvPr>
@@ -15062,7 +15062,7 @@
           <p:cNvPr id="57" name="">
             <a:extLst xmlns:a="http://schemas.openxmlformats.org/drawingml/2006/main">
               <a:ext uri="{FF2B5EF4-FFF2-40B4-BE49-F238E27FC236}">
-                <a16:creationId xmlns:a16="http://schemas.microsoft.com/office/drawing/2014/main" id="{3302DE11-672A-4F5A-B9D1-8312887AA4BB}"/>
+                <a16:creationId xmlns:a16="http://schemas.microsoft.com/office/drawing/2014/main" id="{A910FC74-D7FB-4774-975C-917BD82EC6D7}"/>
               </a:ext>
             </a:extLst>
           </p:cNvPr>
@@ -15093,7 +15093,7 @@
           <p:cNvPr id="58" name="">
             <a:extLst xmlns:a="http://schemas.openxmlformats.org/drawingml/2006/main">
               <a:ext uri="{FF2B5EF4-FFF2-40B4-BE49-F238E27FC236}">
-                <a16:creationId xmlns:a16="http://schemas.microsoft.com/office/drawing/2014/main" id="{D62A00B7-A733-48F5-A19C-37F7E88DB1E8}"/>
+                <a16:creationId xmlns:a16="http://schemas.microsoft.com/office/drawing/2014/main" id="{BF8C0924-2E5C-46D3-8A19-35E57E28A8C0}"/>
               </a:ext>
             </a:extLst>
           </p:cNvPr>
@@ -15145,7 +15145,7 @@
           <p:cNvPr id="59" name="">
             <a:extLst xmlns:a="http://schemas.openxmlformats.org/drawingml/2006/main">
               <a:ext uri="{FF2B5EF4-FFF2-40B4-BE49-F238E27FC236}">
-                <a16:creationId xmlns:a16="http://schemas.microsoft.com/office/drawing/2014/main" id="{B8E6D331-FC18-4CCD-B412-0245D3154871}"/>
+                <a16:creationId xmlns:a16="http://schemas.microsoft.com/office/drawing/2014/main" id="{543C0147-A610-4CF6-BD88-4FBDE7F35D9E}"/>
               </a:ext>
             </a:extLst>
           </p:cNvPr>
@@ -15197,7 +15197,7 @@
           <p:cNvPr id="60" name="">
             <a:extLst xmlns:a="http://schemas.openxmlformats.org/drawingml/2006/main">
               <a:ext uri="{FF2B5EF4-FFF2-40B4-BE49-F238E27FC236}">
-                <a16:creationId xmlns:a16="http://schemas.microsoft.com/office/drawing/2014/main" id="{BC9415A3-4520-407A-B39E-A0D7C424184D}"/>
+                <a16:creationId xmlns:a16="http://schemas.microsoft.com/office/drawing/2014/main" id="{D0703437-49F3-4F4C-8D85-94167E9A4ADA}"/>
               </a:ext>
             </a:extLst>
           </p:cNvPr>
@@ -15249,7 +15249,7 @@
           <p:cNvPr id="61" name="">
             <a:extLst xmlns:a="http://schemas.openxmlformats.org/drawingml/2006/main">
               <a:ext uri="{FF2B5EF4-FFF2-40B4-BE49-F238E27FC236}">
-                <a16:creationId xmlns:a16="http://schemas.microsoft.com/office/drawing/2014/main" id="{D49653B4-210A-4C6C-8CAA-4F1A83AD211C}"/>
+                <a16:creationId xmlns:a16="http://schemas.microsoft.com/office/drawing/2014/main" id="{8445A495-D406-4D09-B0C5-4DE15758866C}"/>
               </a:ext>
             </a:extLst>
           </p:cNvPr>
@@ -15301,7 +15301,7 @@
           <p:cNvPr id="62" name="">
             <a:extLst xmlns:a="http://schemas.openxmlformats.org/drawingml/2006/main">
               <a:ext uri="{FF2B5EF4-FFF2-40B4-BE49-F238E27FC236}">
-                <a16:creationId xmlns:a16="http://schemas.microsoft.com/office/drawing/2014/main" id="{D7F9865E-D495-4650-A84B-F12E11224E6D}"/>
+                <a16:creationId xmlns:a16="http://schemas.microsoft.com/office/drawing/2014/main" id="{6841C9E1-A0D9-4C3F-ADB6-C98E9D780181}"/>
               </a:ext>
             </a:extLst>
           </p:cNvPr>
@@ -15353,7 +15353,7 @@
           <p:cNvPr id="63" name="">
             <a:extLst xmlns:a="http://schemas.openxmlformats.org/drawingml/2006/main">
               <a:ext uri="{FF2B5EF4-FFF2-40B4-BE49-F238E27FC236}">
-                <a16:creationId xmlns:a16="http://schemas.microsoft.com/office/drawing/2014/main" id="{67908A56-35E2-4177-B22A-3513D81820F1}"/>
+                <a16:creationId xmlns:a16="http://schemas.microsoft.com/office/drawing/2014/main" id="{ACF49C41-BC93-4E3A-9B18-67B942E7C7FA}"/>
               </a:ext>
             </a:extLst>
           </p:cNvPr>
@@ -15384,7 +15384,7 @@
           <p:cNvPr id="64" name="">
             <a:extLst xmlns:a="http://schemas.openxmlformats.org/drawingml/2006/main">
               <a:ext uri="{FF2B5EF4-FFF2-40B4-BE49-F238E27FC236}">
-                <a16:creationId xmlns:a16="http://schemas.microsoft.com/office/drawing/2014/main" id="{53852944-8D6A-46DC-825A-CEFA32180401}"/>
+                <a16:creationId xmlns:a16="http://schemas.microsoft.com/office/drawing/2014/main" id="{4CC23A3C-1BC6-41D8-B8A5-4DE9516EE391}"/>
               </a:ext>
             </a:extLst>
           </p:cNvPr>
@@ -15415,7 +15415,7 @@
           <p:cNvPr id="65" name="">
             <a:extLst xmlns:a="http://schemas.openxmlformats.org/drawingml/2006/main">
               <a:ext uri="{FF2B5EF4-FFF2-40B4-BE49-F238E27FC236}">
-                <a16:creationId xmlns:a16="http://schemas.microsoft.com/office/drawing/2014/main" id="{C302673B-99C3-4FB4-A60A-D821AFFF9261}"/>
+                <a16:creationId xmlns:a16="http://schemas.microsoft.com/office/drawing/2014/main" id="{1FE21321-DFD0-49C5-AA90-4E3846AAF531}"/>
               </a:ext>
             </a:extLst>
           </p:cNvPr>
@@ -15467,7 +15467,7 @@
           <p:cNvPr id="66" name="">
             <a:extLst xmlns:a="http://schemas.openxmlformats.org/drawingml/2006/main">
               <a:ext uri="{FF2B5EF4-FFF2-40B4-BE49-F238E27FC236}">
-                <a16:creationId xmlns:a16="http://schemas.microsoft.com/office/drawing/2014/main" id="{DBF80F60-89CB-4FA3-A4FF-694DFF8141E7}"/>
+                <a16:creationId xmlns:a16="http://schemas.microsoft.com/office/drawing/2014/main" id="{6D3D0122-CAB8-434C-B8C4-B546B51D5C87}"/>
               </a:ext>
             </a:extLst>
           </p:cNvPr>
@@ -15519,7 +15519,7 @@
           <p:cNvPr id="67" name="">
             <a:extLst xmlns:a="http://schemas.openxmlformats.org/drawingml/2006/main">
               <a:ext uri="{FF2B5EF4-FFF2-40B4-BE49-F238E27FC236}">
-                <a16:creationId xmlns:a16="http://schemas.microsoft.com/office/drawing/2014/main" id="{E1E59391-0CD1-4DF5-885E-9C237624013C}"/>
+                <a16:creationId xmlns:a16="http://schemas.microsoft.com/office/drawing/2014/main" id="{CA783A2D-2BD4-4D43-971B-8BC19DE55F08}"/>
               </a:ext>
             </a:extLst>
           </p:cNvPr>
@@ -15571,7 +15571,7 @@
           <p:cNvPr id="68" name="">
             <a:extLst xmlns:a="http://schemas.openxmlformats.org/drawingml/2006/main">
               <a:ext uri="{FF2B5EF4-FFF2-40B4-BE49-F238E27FC236}">
-                <a16:creationId xmlns:a16="http://schemas.microsoft.com/office/drawing/2014/main" id="{50EB7C49-F31C-4082-B5D9-DDBF0F54AC54}"/>
+                <a16:creationId xmlns:a16="http://schemas.microsoft.com/office/drawing/2014/main" id="{5CBDECA6-110A-467A-8D23-AB7F5AC7D4CA}"/>
               </a:ext>
             </a:extLst>
           </p:cNvPr>
@@ -15623,7 +15623,7 @@
           <p:cNvPr id="69" name="">
             <a:extLst xmlns:a="http://schemas.openxmlformats.org/drawingml/2006/main">
               <a:ext uri="{FF2B5EF4-FFF2-40B4-BE49-F238E27FC236}">
-                <a16:creationId xmlns:a16="http://schemas.microsoft.com/office/drawing/2014/main" id="{EE2E6652-46BB-4ACE-B461-7BE54FAF6C7B}"/>
+                <a16:creationId xmlns:a16="http://schemas.microsoft.com/office/drawing/2014/main" id="{F5A4381D-5CE9-4496-8889-CA185572306F}"/>
               </a:ext>
             </a:extLst>
           </p:cNvPr>
@@ -15675,7 +15675,7 @@
           <p:cNvPr id="70" name="">
             <a:extLst xmlns:a="http://schemas.openxmlformats.org/drawingml/2006/main">
               <a:ext uri="{FF2B5EF4-FFF2-40B4-BE49-F238E27FC236}">
-                <a16:creationId xmlns:a16="http://schemas.microsoft.com/office/drawing/2014/main" id="{020A59DA-E31C-4831-8036-D978EE87A1FB}"/>
+                <a16:creationId xmlns:a16="http://schemas.microsoft.com/office/drawing/2014/main" id="{DFBE1C9D-F40D-424B-B5CA-A6DE4EC0122B}"/>
               </a:ext>
             </a:extLst>
           </p:cNvPr>
@@ -15706,7 +15706,7 @@
           <p:cNvPr id="71" name="">
             <a:extLst xmlns:a="http://schemas.openxmlformats.org/drawingml/2006/main">
               <a:ext uri="{FF2B5EF4-FFF2-40B4-BE49-F238E27FC236}">
-                <a16:creationId xmlns:a16="http://schemas.microsoft.com/office/drawing/2014/main" id="{FF635A89-5D0F-48EE-B3D8-2490E593D92B}"/>
+                <a16:creationId xmlns:a16="http://schemas.microsoft.com/office/drawing/2014/main" id="{5703AF4A-9ED9-41AC-A5DC-4C9B80C01DBB}"/>
               </a:ext>
             </a:extLst>
           </p:cNvPr>
@@ -15758,7 +15758,7 @@
           <p:cNvPr id="72" name="">
             <a:extLst xmlns:a="http://schemas.openxmlformats.org/drawingml/2006/main">
               <a:ext uri="{FF2B5EF4-FFF2-40B4-BE49-F238E27FC236}">
-                <a16:creationId xmlns:a16="http://schemas.microsoft.com/office/drawing/2014/main" id="{8895CE60-CC48-4C29-9392-544169F17949}"/>
+                <a16:creationId xmlns:a16="http://schemas.microsoft.com/office/drawing/2014/main" id="{D462C0A0-0A49-4C82-B041-6FE156F96AEE}"/>
               </a:ext>
             </a:extLst>
           </p:cNvPr>
@@ -15810,7 +15810,7 @@
           <p:cNvPr id="73" name="">
             <a:extLst xmlns:a="http://schemas.openxmlformats.org/drawingml/2006/main">
               <a:ext uri="{FF2B5EF4-FFF2-40B4-BE49-F238E27FC236}">
-                <a16:creationId xmlns:a16="http://schemas.microsoft.com/office/drawing/2014/main" id="{19A47F98-8724-4D53-A2BA-95B0EAFFABC7}"/>
+                <a16:creationId xmlns:a16="http://schemas.microsoft.com/office/drawing/2014/main" id="{146E3D3F-3B6C-4B7E-BAB9-FDCBD094C883}"/>
               </a:ext>
             </a:extLst>
           </p:cNvPr>
@@ -15862,7 +15862,7 @@
           <p:cNvPr id="74" name="">
             <a:extLst xmlns:a="http://schemas.openxmlformats.org/drawingml/2006/main">
               <a:ext uri="{FF2B5EF4-FFF2-40B4-BE49-F238E27FC236}">
-                <a16:creationId xmlns:a16="http://schemas.microsoft.com/office/drawing/2014/main" id="{0F8669BE-8E62-4852-A13C-E7A7C6B8E2E5}"/>
+                <a16:creationId xmlns:a16="http://schemas.microsoft.com/office/drawing/2014/main" id="{E5AA1815-1CB0-4731-AD29-E50D128A6530}"/>
               </a:ext>
             </a:extLst>
           </p:cNvPr>
@@ -15914,7 +15914,7 @@
           <p:cNvPr id="75" name="">
             <a:extLst xmlns:a="http://schemas.openxmlformats.org/drawingml/2006/main">
               <a:ext uri="{FF2B5EF4-FFF2-40B4-BE49-F238E27FC236}">
-                <a16:creationId xmlns:a16="http://schemas.microsoft.com/office/drawing/2014/main" id="{36F12CB7-7301-4B5E-8792-B9B1AC30A552}"/>
+                <a16:creationId xmlns:a16="http://schemas.microsoft.com/office/drawing/2014/main" id="{358EA962-F3A8-4BEE-8E55-DFCAB8938956}"/>
               </a:ext>
             </a:extLst>
           </p:cNvPr>
@@ -15966,7 +15966,7 @@
           <p:cNvPr id="76" name="">
             <a:extLst xmlns:a="http://schemas.openxmlformats.org/drawingml/2006/main">
               <a:ext uri="{FF2B5EF4-FFF2-40B4-BE49-F238E27FC236}">
-                <a16:creationId xmlns:a16="http://schemas.microsoft.com/office/drawing/2014/main" id="{5911F3AB-34F0-4F63-BA3E-2B7AAE7144B6}"/>
+                <a16:creationId xmlns:a16="http://schemas.microsoft.com/office/drawing/2014/main" id="{B71D6C3F-9E6F-4357-B99F-82E0892D82BC}"/>
               </a:ext>
             </a:extLst>
           </p:cNvPr>
@@ -15997,7 +15997,7 @@
           <p:cNvPr id="77" name="">
             <a:extLst xmlns:a="http://schemas.openxmlformats.org/drawingml/2006/main">
               <a:ext uri="{FF2B5EF4-FFF2-40B4-BE49-F238E27FC236}">
-                <a16:creationId xmlns:a16="http://schemas.microsoft.com/office/drawing/2014/main" id="{E351F9C9-6574-4C45-A55D-3362A814FF0F}"/>
+                <a16:creationId xmlns:a16="http://schemas.microsoft.com/office/drawing/2014/main" id="{6A2FD534-FEFA-4072-B0E5-CCE0547D68DB}"/>
               </a:ext>
             </a:extLst>
           </p:cNvPr>
@@ -16028,7 +16028,7 @@
           <p:cNvPr id="78" name="">
             <a:extLst xmlns:a="http://schemas.openxmlformats.org/drawingml/2006/main">
               <a:ext uri="{FF2B5EF4-FFF2-40B4-BE49-F238E27FC236}">
-                <a16:creationId xmlns:a16="http://schemas.microsoft.com/office/drawing/2014/main" id="{1770881D-A1C3-467C-86D0-75B2AE9D81A2}"/>
+                <a16:creationId xmlns:a16="http://schemas.microsoft.com/office/drawing/2014/main" id="{A49FDF98-1352-41DF-9498-F48A57126E6F}"/>
               </a:ext>
             </a:extLst>
           </p:cNvPr>
@@ -16080,7 +16080,7 @@
           <p:cNvPr id="79" name="">
             <a:extLst xmlns:a="http://schemas.openxmlformats.org/drawingml/2006/main">
               <a:ext uri="{FF2B5EF4-FFF2-40B4-BE49-F238E27FC236}">
-                <a16:creationId xmlns:a16="http://schemas.microsoft.com/office/drawing/2014/main" id="{F3ED419E-6FE3-4345-96FB-9554D415C5A2}"/>
+                <a16:creationId xmlns:a16="http://schemas.microsoft.com/office/drawing/2014/main" id="{08A316DD-A7FF-4DC1-B1E9-C2113FE4431E}"/>
               </a:ext>
             </a:extLst>
           </p:cNvPr>
@@ -16132,7 +16132,7 @@
           <p:cNvPr id="80" name="">
             <a:extLst xmlns:a="http://schemas.openxmlformats.org/drawingml/2006/main">
               <a:ext uri="{FF2B5EF4-FFF2-40B4-BE49-F238E27FC236}">
-                <a16:creationId xmlns:a16="http://schemas.microsoft.com/office/drawing/2014/main" id="{ED92AEDA-BF11-4CDD-8218-885F28CD2661}"/>
+                <a16:creationId xmlns:a16="http://schemas.microsoft.com/office/drawing/2014/main" id="{3D03FCCC-868B-4597-9B8F-8742A8F70661}"/>
               </a:ext>
             </a:extLst>
           </p:cNvPr>
@@ -16184,7 +16184,7 @@
           <p:cNvPr id="81" name="">
             <a:extLst xmlns:a="http://schemas.openxmlformats.org/drawingml/2006/main">
               <a:ext uri="{FF2B5EF4-FFF2-40B4-BE49-F238E27FC236}">
-                <a16:creationId xmlns:a16="http://schemas.microsoft.com/office/drawing/2014/main" id="{BE8F31BD-0B4B-4B96-A04B-4BC5E0F3484F}"/>
+                <a16:creationId xmlns:a16="http://schemas.microsoft.com/office/drawing/2014/main" id="{F4D9FC1E-738F-4D3C-9F2A-FB5D33506D83}"/>
               </a:ext>
             </a:extLst>
           </p:cNvPr>
@@ -16236,7 +16236,7 @@
           <p:cNvPr id="82" name="">
             <a:extLst xmlns:a="http://schemas.openxmlformats.org/drawingml/2006/main">
               <a:ext uri="{FF2B5EF4-FFF2-40B4-BE49-F238E27FC236}">
-                <a16:creationId xmlns:a16="http://schemas.microsoft.com/office/drawing/2014/main" id="{63DAF966-D016-4C89-889D-1F7048E94214}"/>
+                <a16:creationId xmlns:a16="http://schemas.microsoft.com/office/drawing/2014/main" id="{9A6CF797-AAB7-423B-84DE-A7045035C8C1}"/>
               </a:ext>
             </a:extLst>
           </p:cNvPr>
@@ -16288,7 +16288,7 @@
           <p:cNvPr id="83" name="">
             <a:extLst xmlns:a="http://schemas.openxmlformats.org/drawingml/2006/main">
               <a:ext uri="{FF2B5EF4-FFF2-40B4-BE49-F238E27FC236}">
-                <a16:creationId xmlns:a16="http://schemas.microsoft.com/office/drawing/2014/main" id="{7506DC8C-1A4D-436E-B9EE-640D4A1F92A6}"/>
+                <a16:creationId xmlns:a16="http://schemas.microsoft.com/office/drawing/2014/main" id="{B33D8784-49FF-43F1-8424-F82E8DDE1553}"/>
               </a:ext>
             </a:extLst>
           </p:cNvPr>
@@ -16319,7 +16319,7 @@
           <p:cNvPr id="84" name="">
             <a:extLst xmlns:a="http://schemas.openxmlformats.org/drawingml/2006/main">
               <a:ext uri="{FF2B5EF4-FFF2-40B4-BE49-F238E27FC236}">
-                <a16:creationId xmlns:a16="http://schemas.microsoft.com/office/drawing/2014/main" id="{992BE503-2D80-4A31-A16C-705F96910A27}"/>
+                <a16:creationId xmlns:a16="http://schemas.microsoft.com/office/drawing/2014/main" id="{687F47A2-E0A5-451D-954F-C1808E4E3D5A}"/>
               </a:ext>
             </a:extLst>
           </p:cNvPr>
@@ -16371,7 +16371,7 @@
           <p:cNvPr id="85" name="">
             <a:extLst xmlns:a="http://schemas.openxmlformats.org/drawingml/2006/main">
               <a:ext uri="{FF2B5EF4-FFF2-40B4-BE49-F238E27FC236}">
-                <a16:creationId xmlns:a16="http://schemas.microsoft.com/office/drawing/2014/main" id="{1DFF8053-0497-4094-BA58-2D6BAA2DF342}"/>
+                <a16:creationId xmlns:a16="http://schemas.microsoft.com/office/drawing/2014/main" id="{2776E407-FD72-43BC-AB53-EA9DBF92A81D}"/>
               </a:ext>
             </a:extLst>
           </p:cNvPr>
@@ -16423,7 +16423,7 @@
           <p:cNvPr id="86" name="">
             <a:extLst xmlns:a="http://schemas.openxmlformats.org/drawingml/2006/main">
               <a:ext uri="{FF2B5EF4-FFF2-40B4-BE49-F238E27FC236}">
-                <a16:creationId xmlns:a16="http://schemas.microsoft.com/office/drawing/2014/main" id="{56F1259E-2445-4140-B88A-B9C7AD2613A2}"/>
+                <a16:creationId xmlns:a16="http://schemas.microsoft.com/office/drawing/2014/main" id="{5F1DD72C-9D61-4E09-93FC-0E48079F4F38}"/>
               </a:ext>
             </a:extLst>
           </p:cNvPr>
@@ -16475,7 +16475,7 @@
           <p:cNvPr id="87" name="">
             <a:extLst xmlns:a="http://schemas.openxmlformats.org/drawingml/2006/main">
               <a:ext uri="{FF2B5EF4-FFF2-40B4-BE49-F238E27FC236}">
-                <a16:creationId xmlns:a16="http://schemas.microsoft.com/office/drawing/2014/main" id="{E9925D2D-DEAD-4EAE-895F-845FE4B926FD}"/>
+                <a16:creationId xmlns:a16="http://schemas.microsoft.com/office/drawing/2014/main" id="{81270204-B155-4844-80D9-A78A70550668}"/>
               </a:ext>
             </a:extLst>
           </p:cNvPr>
@@ -16527,7 +16527,7 @@
           <p:cNvPr id="88" name="">
             <a:extLst xmlns:a="http://schemas.openxmlformats.org/drawingml/2006/main">
               <a:ext uri="{FF2B5EF4-FFF2-40B4-BE49-F238E27FC236}">
-                <a16:creationId xmlns:a16="http://schemas.microsoft.com/office/drawing/2014/main" id="{D724D2DA-F35E-4EB0-8CB7-A6408334987C}"/>
+                <a16:creationId xmlns:a16="http://schemas.microsoft.com/office/drawing/2014/main" id="{24AF9A71-1037-4B2E-8CF6-B9C778671250}"/>
               </a:ext>
             </a:extLst>
           </p:cNvPr>
@@ -16579,7 +16579,7 @@
           <p:cNvPr id="89" name="">
             <a:extLst xmlns:a="http://schemas.openxmlformats.org/drawingml/2006/main">
               <a:ext uri="{FF2B5EF4-FFF2-40B4-BE49-F238E27FC236}">
-                <a16:creationId xmlns:a16="http://schemas.microsoft.com/office/drawing/2014/main" id="{12BE1B46-9A26-4B8D-B876-80B70A2BE1A0}"/>
+                <a16:creationId xmlns:a16="http://schemas.microsoft.com/office/drawing/2014/main" id="{2E0A8006-4AAC-4A90-9869-98E6F8CD0E28}"/>
               </a:ext>
             </a:extLst>
           </p:cNvPr>
@@ -16610,7 +16610,7 @@
           <p:cNvPr id="90" name="">
             <a:extLst xmlns:a="http://schemas.openxmlformats.org/drawingml/2006/main">
               <a:ext uri="{FF2B5EF4-FFF2-40B4-BE49-F238E27FC236}">
-                <a16:creationId xmlns:a16="http://schemas.microsoft.com/office/drawing/2014/main" id="{0EC12886-6FF1-4DA7-8E00-202E57F6A810}"/>
+                <a16:creationId xmlns:a16="http://schemas.microsoft.com/office/drawing/2014/main" id="{15C45B3A-F3BF-40FB-B7D0-C78AB32C5773}"/>
               </a:ext>
             </a:extLst>
           </p:cNvPr>
@@ -16641,7 +16641,7 @@
           <p:cNvPr id="91" name="">
             <a:extLst xmlns:a="http://schemas.openxmlformats.org/drawingml/2006/main">
               <a:ext uri="{FF2B5EF4-FFF2-40B4-BE49-F238E27FC236}">
-                <a16:creationId xmlns:a16="http://schemas.microsoft.com/office/drawing/2014/main" id="{01B18DB2-3F76-4DE7-A474-AD987FE061E2}"/>
+                <a16:creationId xmlns:a16="http://schemas.microsoft.com/office/drawing/2014/main" id="{9A3746A4-F8D9-44EA-A455-FFFBBBA20E1E}"/>
               </a:ext>
             </a:extLst>
           </p:cNvPr>
@@ -16693,7 +16693,7 @@
           <p:cNvPr id="92" name="">
             <a:extLst xmlns:a="http://schemas.openxmlformats.org/drawingml/2006/main">
               <a:ext uri="{FF2B5EF4-FFF2-40B4-BE49-F238E27FC236}">
-                <a16:creationId xmlns:a16="http://schemas.microsoft.com/office/drawing/2014/main" id="{EE176992-1E6F-4579-BA4D-100E5BB80399}"/>
+                <a16:creationId xmlns:a16="http://schemas.microsoft.com/office/drawing/2014/main" id="{E39D31C3-7169-4A4A-8DFD-8898EBAD0A65}"/>
               </a:ext>
             </a:extLst>
           </p:cNvPr>
@@ -16745,7 +16745,7 @@
           <p:cNvPr id="93" name="">
             <a:extLst xmlns:a="http://schemas.openxmlformats.org/drawingml/2006/main">
               <a:ext uri="{FF2B5EF4-FFF2-40B4-BE49-F238E27FC236}">
-                <a16:creationId xmlns:a16="http://schemas.microsoft.com/office/drawing/2014/main" id="{54F19EBC-BE28-4587-AD8C-A846CFFD979E}"/>
+                <a16:creationId xmlns:a16="http://schemas.microsoft.com/office/drawing/2014/main" id="{E152F4C9-12EC-4A73-A763-E5CACF7197AE}"/>
               </a:ext>
             </a:extLst>
           </p:cNvPr>
@@ -16797,7 +16797,7 @@
           <p:cNvPr id="94" name="">
             <a:extLst xmlns:a="http://schemas.openxmlformats.org/drawingml/2006/main">
               <a:ext uri="{FF2B5EF4-FFF2-40B4-BE49-F238E27FC236}">
-                <a16:creationId xmlns:a16="http://schemas.microsoft.com/office/drawing/2014/main" id="{DF0B35C5-1D7F-4CF8-AFB5-495446F65C36}"/>
+                <a16:creationId xmlns:a16="http://schemas.microsoft.com/office/drawing/2014/main" id="{752C4274-2A7B-47FF-9C42-7F4478BCEBE9}"/>
               </a:ext>
             </a:extLst>
           </p:cNvPr>
@@ -16849,7 +16849,7 @@
           <p:cNvPr id="95" name="">
             <a:extLst xmlns:a="http://schemas.openxmlformats.org/drawingml/2006/main">
               <a:ext uri="{FF2B5EF4-FFF2-40B4-BE49-F238E27FC236}">
-                <a16:creationId xmlns:a16="http://schemas.microsoft.com/office/drawing/2014/main" id="{07B58C79-C96C-4F1C-8385-E61D3935FC1A}"/>
+                <a16:creationId xmlns:a16="http://schemas.microsoft.com/office/drawing/2014/main" id="{2CA28DF8-8D37-4701-AE38-F80B998B7701}"/>
               </a:ext>
             </a:extLst>
           </p:cNvPr>
@@ -16901,7 +16901,7 @@
           <p:cNvPr id="96" name="">
             <a:extLst xmlns:a="http://schemas.openxmlformats.org/drawingml/2006/main">
               <a:ext uri="{FF2B5EF4-FFF2-40B4-BE49-F238E27FC236}">
-                <a16:creationId xmlns:a16="http://schemas.microsoft.com/office/drawing/2014/main" id="{827C5ADB-CF43-4B6B-B998-F7130C840634}"/>
+                <a16:creationId xmlns:a16="http://schemas.microsoft.com/office/drawing/2014/main" id="{C57BDB7C-8728-4186-9CCC-EE8F8FD9A33E}"/>
               </a:ext>
             </a:extLst>
           </p:cNvPr>
@@ -16932,7 +16932,7 @@
           <p:cNvPr id="97" name="">
             <a:extLst xmlns:a="http://schemas.openxmlformats.org/drawingml/2006/main">
               <a:ext uri="{FF2B5EF4-FFF2-40B4-BE49-F238E27FC236}">
-                <a16:creationId xmlns:a16="http://schemas.microsoft.com/office/drawing/2014/main" id="{CB52F414-DCC3-476C-AE0E-D49DD665B7D1}"/>
+                <a16:creationId xmlns:a16="http://schemas.microsoft.com/office/drawing/2014/main" id="{2027B4FA-98F4-4498-A647-02498BCCA060}"/>
               </a:ext>
             </a:extLst>
           </p:cNvPr>
@@ -16984,7 +16984,7 @@
           <p:cNvPr id="98" name="">
             <a:extLst xmlns:a="http://schemas.openxmlformats.org/drawingml/2006/main">
               <a:ext uri="{FF2B5EF4-FFF2-40B4-BE49-F238E27FC236}">
-                <a16:creationId xmlns:a16="http://schemas.microsoft.com/office/drawing/2014/main" id="{BCBFD0AE-D7D6-4C33-99F0-CF8C61F03EB1}"/>
+                <a16:creationId xmlns:a16="http://schemas.microsoft.com/office/drawing/2014/main" id="{BAB2F27B-B6A1-422B-A8E1-F64E6376ACB3}"/>
               </a:ext>
             </a:extLst>
           </p:cNvPr>
@@ -17036,7 +17036,7 @@
           <p:cNvPr id="99" name="">
             <a:extLst xmlns:a="http://schemas.openxmlformats.org/drawingml/2006/main">
               <a:ext uri="{FF2B5EF4-FFF2-40B4-BE49-F238E27FC236}">
-                <a16:creationId xmlns:a16="http://schemas.microsoft.com/office/drawing/2014/main" id="{CB2157B4-4E02-4A69-A31D-368112CC6986}"/>
+                <a16:creationId xmlns:a16="http://schemas.microsoft.com/office/drawing/2014/main" id="{B692151C-B534-4A2A-B15E-D649E94B2636}"/>
               </a:ext>
             </a:extLst>
           </p:cNvPr>
@@ -17088,7 +17088,7 @@
           <p:cNvPr id="100" name="">
             <a:extLst xmlns:a="http://schemas.openxmlformats.org/drawingml/2006/main">
               <a:ext uri="{FF2B5EF4-FFF2-40B4-BE49-F238E27FC236}">
-                <a16:creationId xmlns:a16="http://schemas.microsoft.com/office/drawing/2014/main" id="{29031ABF-B2EB-46DD-A04E-55C9302B5F6E}"/>
+                <a16:creationId xmlns:a16="http://schemas.microsoft.com/office/drawing/2014/main" id="{77E87AA2-1BBF-4B06-A8F8-CE0937EE60AA}"/>
               </a:ext>
             </a:extLst>
           </p:cNvPr>
@@ -17140,7 +17140,7 @@
           <p:cNvPr id="101" name="">
             <a:extLst xmlns:a="http://schemas.openxmlformats.org/drawingml/2006/main">
               <a:ext uri="{FF2B5EF4-FFF2-40B4-BE49-F238E27FC236}">
-                <a16:creationId xmlns:a16="http://schemas.microsoft.com/office/drawing/2014/main" id="{778E5938-456A-4100-B94C-54E80999C2A7}"/>
+                <a16:creationId xmlns:a16="http://schemas.microsoft.com/office/drawing/2014/main" id="{3F2CDEB3-65C0-4447-A89F-250B13449CA6}"/>
               </a:ext>
             </a:extLst>
           </p:cNvPr>
@@ -17190,7 +17190,7 @@
     </p:spTree>
     <p:extLst>
       <p:ext uri="{BB962C8B-B14F-4D97-AF65-F5344CB8AC3E}">
-        <p14:creationId xmlns:p14="http://schemas.microsoft.com/office/powerpoint/2010/main" val="634795313"/>
+        <p14:creationId xmlns:p14="http://schemas.microsoft.com/office/powerpoint/2010/main" val="2104594755"/>
       </p:ext>
     </p:extLst>
   </p:cSld>
@@ -17221,7 +17221,7 @@
           <p:cNvPr id="96" name="">
             <a:extLst xmlns:a="http://schemas.openxmlformats.org/drawingml/2006/main">
               <a:ext uri="{FF2B5EF4-FFF2-40B4-BE49-F238E27FC236}">
-                <a16:creationId xmlns:a16="http://schemas.microsoft.com/office/drawing/2014/main" id="{843206E6-38F2-4FE2-ADB6-29EFF667DA00}"/>
+                <a16:creationId xmlns:a16="http://schemas.microsoft.com/office/drawing/2014/main" id="{8EA1A113-971E-4B02-A055-3BD0E5A963C2}"/>
               </a:ext>
             </a:extLst>
           </p:cNvPr>
@@ -17254,7 +17254,7 @@
           <p:cNvPr id="2" name="">
             <a:extLst xmlns:a="http://schemas.openxmlformats.org/drawingml/2006/main">
               <a:ext uri="{FF2B5EF4-FFF2-40B4-BE49-F238E27FC236}">
-                <a16:creationId xmlns:a16="http://schemas.microsoft.com/office/drawing/2014/main" id="{332D372E-F63C-4609-92B8-8AC4FB2DAEF2}"/>
+                <a16:creationId xmlns:a16="http://schemas.microsoft.com/office/drawing/2014/main" id="{8859D14F-8023-4518-9B92-14B5A5DAE104}"/>
               </a:ext>
             </a:extLst>
           </p:cNvPr>
@@ -17285,7 +17285,7 @@
           <p:cNvPr id="3" name="">
             <a:extLst xmlns:a="http://schemas.openxmlformats.org/drawingml/2006/main">
               <a:ext uri="{FF2B5EF4-FFF2-40B4-BE49-F238E27FC236}">
-                <a16:creationId xmlns:a16="http://schemas.microsoft.com/office/drawing/2014/main" id="{9E2083C8-86C6-4EEC-BCE9-0C01ADB47AF7}"/>
+                <a16:creationId xmlns:a16="http://schemas.microsoft.com/office/drawing/2014/main" id="{02A18145-101C-495D-844B-781C8E5B56F1}"/>
               </a:ext>
             </a:extLst>
           </p:cNvPr>
@@ -17337,7 +17337,7 @@
           <p:cNvPr id="4" name="">
             <a:extLst xmlns:a="http://schemas.openxmlformats.org/drawingml/2006/main">
               <a:ext uri="{FF2B5EF4-FFF2-40B4-BE49-F238E27FC236}">
-                <a16:creationId xmlns:a16="http://schemas.microsoft.com/office/drawing/2014/main" id="{3A1E1B93-5CB4-4AA5-B08F-63BBDDB7A5DB}"/>
+                <a16:creationId xmlns:a16="http://schemas.microsoft.com/office/drawing/2014/main" id="{B7C7E48E-C504-46D4-9071-B7BD568A8137}"/>
               </a:ext>
             </a:extLst>
           </p:cNvPr>
@@ -17389,7 +17389,7 @@
           <p:cNvPr id="5" name="">
             <a:extLst xmlns:a="http://schemas.openxmlformats.org/drawingml/2006/main">
               <a:ext uri="{FF2B5EF4-FFF2-40B4-BE49-F238E27FC236}">
-                <a16:creationId xmlns:a16="http://schemas.microsoft.com/office/drawing/2014/main" id="{29F14E19-1BF7-4E1C-B454-5151B2998BB8}"/>
+                <a16:creationId xmlns:a16="http://schemas.microsoft.com/office/drawing/2014/main" id="{464D27A1-E93C-44D6-AA80-C52E65A6ED10}"/>
               </a:ext>
             </a:extLst>
           </p:cNvPr>
@@ -17424,7 +17424,7 @@
           <p:nvPr/>
         </p:nvPicPr>
         <p:blipFill>
-          <a:blip xmlns:r="http://schemas.openxmlformats.org/officeDocument/2006/relationships" xmlns:a="http://schemas.openxmlformats.org/drawingml/2006/main" r:embed="Rd66591bae16b4f6a"/>
+          <a:blip xmlns:r="http://schemas.openxmlformats.org/officeDocument/2006/relationships" xmlns:a="http://schemas.openxmlformats.org/drawingml/2006/main" r:embed="R08e7d07f745841df"/>
           <a:stretch xmlns:a="http://schemas.openxmlformats.org/drawingml/2006/main"/>
         </p:blipFill>
         <p:spPr>
@@ -17442,7 +17442,7 @@
           <p:cNvPr id="7" name="">
             <a:extLst xmlns:a="http://schemas.openxmlformats.org/drawingml/2006/main">
               <a:ext uri="{FF2B5EF4-FFF2-40B4-BE49-F238E27FC236}">
-                <a16:creationId xmlns:a16="http://schemas.microsoft.com/office/drawing/2014/main" id="{2D3FAE1D-E53E-4974-8E08-FEBEB46BB531}"/>
+                <a16:creationId xmlns:a16="http://schemas.microsoft.com/office/drawing/2014/main" id="{1C0482B5-707D-41FC-8D86-592CD0390441}"/>
               </a:ext>
             </a:extLst>
           </p:cNvPr>
@@ -17494,7 +17494,7 @@
           <p:cNvPr id="8" name="">
             <a:extLst xmlns:a="http://schemas.openxmlformats.org/drawingml/2006/main">
               <a:ext uri="{FF2B5EF4-FFF2-40B4-BE49-F238E27FC236}">
-                <a16:creationId xmlns:a16="http://schemas.microsoft.com/office/drawing/2014/main" id="{A4A17E91-2144-4611-BA2C-EC3DE97CC0E3}"/>
+                <a16:creationId xmlns:a16="http://schemas.microsoft.com/office/drawing/2014/main" id="{8C9B9B7E-90F5-402F-8EAB-342AF55FB64C}"/>
               </a:ext>
             </a:extLst>
           </p:cNvPr>
@@ -17546,7 +17546,7 @@
           <p:cNvPr id="9" name="">
             <a:extLst xmlns:a="http://schemas.openxmlformats.org/drawingml/2006/main">
               <a:ext uri="{FF2B5EF4-FFF2-40B4-BE49-F238E27FC236}">
-                <a16:creationId xmlns:a16="http://schemas.microsoft.com/office/drawing/2014/main" id="{916C988D-1E8A-4A01-8C9E-12FBC3B33164}"/>
+                <a16:creationId xmlns:a16="http://schemas.microsoft.com/office/drawing/2014/main" id="{64EB7B29-6B3A-4E35-A662-15656A2A83EB}"/>
               </a:ext>
             </a:extLst>
           </p:cNvPr>
@@ -17598,7 +17598,7 @@
           <p:cNvPr id="10" name="">
             <a:extLst xmlns:a="http://schemas.openxmlformats.org/drawingml/2006/main">
               <a:ext uri="{FF2B5EF4-FFF2-40B4-BE49-F238E27FC236}">
-                <a16:creationId xmlns:a16="http://schemas.microsoft.com/office/drawing/2014/main" id="{A6DB1558-9EEB-46A7-98C6-7C18EF64DAB5}"/>
+                <a16:creationId xmlns:a16="http://schemas.microsoft.com/office/drawing/2014/main" id="{42F5A5D0-DB29-4031-A1B7-57A22141E19D}"/>
               </a:ext>
             </a:extLst>
           </p:cNvPr>
@@ -17650,7 +17650,7 @@
           <p:cNvPr id="11" name="">
             <a:extLst xmlns:a="http://schemas.openxmlformats.org/drawingml/2006/main">
               <a:ext uri="{FF2B5EF4-FFF2-40B4-BE49-F238E27FC236}">
-                <a16:creationId xmlns:a16="http://schemas.microsoft.com/office/drawing/2014/main" id="{9B324A13-AB1C-4704-9949-D55A6D0830C3}"/>
+                <a16:creationId xmlns:a16="http://schemas.microsoft.com/office/drawing/2014/main" id="{17CD0D26-FF19-4C27-AD16-E75D0728B7BE}"/>
               </a:ext>
             </a:extLst>
           </p:cNvPr>
@@ -17681,7 +17681,7 @@
           <p:cNvPr id="12" name="">
             <a:extLst xmlns:a="http://schemas.openxmlformats.org/drawingml/2006/main">
               <a:ext uri="{FF2B5EF4-FFF2-40B4-BE49-F238E27FC236}">
-                <a16:creationId xmlns:a16="http://schemas.microsoft.com/office/drawing/2014/main" id="{3F69C4FA-75A9-4B94-B720-117EF1144640}"/>
+                <a16:creationId xmlns:a16="http://schemas.microsoft.com/office/drawing/2014/main" id="{DD3A536B-67C1-4910-B892-E8DA284453BA}"/>
               </a:ext>
             </a:extLst>
           </p:cNvPr>
@@ -17712,7 +17712,7 @@
           <p:cNvPr id="13" name="">
             <a:extLst xmlns:a="http://schemas.openxmlformats.org/drawingml/2006/main">
               <a:ext uri="{FF2B5EF4-FFF2-40B4-BE49-F238E27FC236}">
-                <a16:creationId xmlns:a16="http://schemas.microsoft.com/office/drawing/2014/main" id="{29B0A1CB-03E1-4915-B558-D6C364F29C17}"/>
+                <a16:creationId xmlns:a16="http://schemas.microsoft.com/office/drawing/2014/main" id="{EC4D6DF0-71CE-4365-82EE-EEF7DB77E358}"/>
               </a:ext>
             </a:extLst>
           </p:cNvPr>
@@ -17764,7 +17764,7 @@
           <p:cNvPr id="14" name="">
             <a:extLst xmlns:a="http://schemas.openxmlformats.org/drawingml/2006/main">
               <a:ext uri="{FF2B5EF4-FFF2-40B4-BE49-F238E27FC236}">
-                <a16:creationId xmlns:a16="http://schemas.microsoft.com/office/drawing/2014/main" id="{1F0E37F0-9D22-4DB6-ABF6-462CA6E13518}"/>
+                <a16:creationId xmlns:a16="http://schemas.microsoft.com/office/drawing/2014/main" id="{5A09D46F-4851-4A6F-B7D4-4CE6D24C0E0C}"/>
               </a:ext>
             </a:extLst>
           </p:cNvPr>
@@ -17816,7 +17816,7 @@
           <p:cNvPr id="15" name="">
             <a:extLst xmlns:a="http://schemas.openxmlformats.org/drawingml/2006/main">
               <a:ext uri="{FF2B5EF4-FFF2-40B4-BE49-F238E27FC236}">
-                <a16:creationId xmlns:a16="http://schemas.microsoft.com/office/drawing/2014/main" id="{3C7316AF-138D-4E3F-A42F-11F7CC6C4AAE}"/>
+                <a16:creationId xmlns:a16="http://schemas.microsoft.com/office/drawing/2014/main" id="{0025EF51-E8EF-4BB5-9B8E-8243AD221E08}"/>
               </a:ext>
             </a:extLst>
           </p:cNvPr>
@@ -17868,7 +17868,7 @@
           <p:cNvPr id="16" name="">
             <a:extLst xmlns:a="http://schemas.openxmlformats.org/drawingml/2006/main">
               <a:ext uri="{FF2B5EF4-FFF2-40B4-BE49-F238E27FC236}">
-                <a16:creationId xmlns:a16="http://schemas.microsoft.com/office/drawing/2014/main" id="{AB7B16D2-04A6-4629-93E7-B1CE31E01E01}"/>
+                <a16:creationId xmlns:a16="http://schemas.microsoft.com/office/drawing/2014/main" id="{71E40D3C-0F66-4618-B64A-DA6505215B7D}"/>
               </a:ext>
             </a:extLst>
           </p:cNvPr>
@@ -17920,7 +17920,7 @@
           <p:cNvPr id="17" name="">
             <a:extLst xmlns:a="http://schemas.openxmlformats.org/drawingml/2006/main">
               <a:ext uri="{FF2B5EF4-FFF2-40B4-BE49-F238E27FC236}">
-                <a16:creationId xmlns:a16="http://schemas.microsoft.com/office/drawing/2014/main" id="{C61A2198-EF60-4D9E-AA4C-B47F699E3376}"/>
+                <a16:creationId xmlns:a16="http://schemas.microsoft.com/office/drawing/2014/main" id="{EA0CEF3C-B735-43EC-93E1-3EFBF3F85FE6}"/>
               </a:ext>
             </a:extLst>
           </p:cNvPr>
@@ -17972,7 +17972,7 @@
           <p:cNvPr id="18" name="">
             <a:extLst xmlns:a="http://schemas.openxmlformats.org/drawingml/2006/main">
               <a:ext uri="{FF2B5EF4-FFF2-40B4-BE49-F238E27FC236}">
-                <a16:creationId xmlns:a16="http://schemas.microsoft.com/office/drawing/2014/main" id="{77024A8D-BF51-4B46-97DC-9FF58F10EEB6}"/>
+                <a16:creationId xmlns:a16="http://schemas.microsoft.com/office/drawing/2014/main" id="{E80F3024-EE15-4713-BEAE-BF0B2E63058D}"/>
               </a:ext>
             </a:extLst>
           </p:cNvPr>
@@ -18003,7 +18003,7 @@
           <p:cNvPr id="19" name="">
             <a:extLst xmlns:a="http://schemas.openxmlformats.org/drawingml/2006/main">
               <a:ext uri="{FF2B5EF4-FFF2-40B4-BE49-F238E27FC236}">
-                <a16:creationId xmlns:a16="http://schemas.microsoft.com/office/drawing/2014/main" id="{BC25E097-7B31-45D4-91CF-5A7D1EC3486F}"/>
+                <a16:creationId xmlns:a16="http://schemas.microsoft.com/office/drawing/2014/main" id="{419F630B-EF00-4F24-AC80-D5BE379FD447}"/>
               </a:ext>
             </a:extLst>
           </p:cNvPr>
@@ -18034,7 +18034,7 @@
           <p:cNvPr id="20" name="">
             <a:extLst xmlns:a="http://schemas.openxmlformats.org/drawingml/2006/main">
               <a:ext uri="{FF2B5EF4-FFF2-40B4-BE49-F238E27FC236}">
-                <a16:creationId xmlns:a16="http://schemas.microsoft.com/office/drawing/2014/main" id="{233A9F35-5EF3-4F16-A89F-FEA4A3801EB2}"/>
+                <a16:creationId xmlns:a16="http://schemas.microsoft.com/office/drawing/2014/main" id="{1769B513-6375-4F6F-885B-8826BAA99DA6}"/>
               </a:ext>
             </a:extLst>
           </p:cNvPr>
@@ -18086,7 +18086,7 @@
           <p:cNvPr id="21" name="">
             <a:extLst xmlns:a="http://schemas.openxmlformats.org/drawingml/2006/main">
               <a:ext uri="{FF2B5EF4-FFF2-40B4-BE49-F238E27FC236}">
-                <a16:creationId xmlns:a16="http://schemas.microsoft.com/office/drawing/2014/main" id="{685F8720-EF02-44DC-A32A-9D0CDAA4F1AF}"/>
+                <a16:creationId xmlns:a16="http://schemas.microsoft.com/office/drawing/2014/main" id="{203369D9-F45A-4567-9CB9-9F6F9BD1DC70}"/>
               </a:ext>
             </a:extLst>
           </p:cNvPr>
@@ -18138,7 +18138,7 @@
           <p:cNvPr id="22" name="">
             <a:extLst xmlns:a="http://schemas.openxmlformats.org/drawingml/2006/main">
               <a:ext uri="{FF2B5EF4-FFF2-40B4-BE49-F238E27FC236}">
-                <a16:creationId xmlns:a16="http://schemas.microsoft.com/office/drawing/2014/main" id="{231FC1B5-E514-4292-B80B-AD17755B6674}"/>
+                <a16:creationId xmlns:a16="http://schemas.microsoft.com/office/drawing/2014/main" id="{0EE76FAE-5B9D-40A2-969B-B033D7ED6892}"/>
               </a:ext>
             </a:extLst>
           </p:cNvPr>
@@ -18190,7 +18190,7 @@
           <p:cNvPr id="23" name="">
             <a:extLst xmlns:a="http://schemas.openxmlformats.org/drawingml/2006/main">
               <a:ext uri="{FF2B5EF4-FFF2-40B4-BE49-F238E27FC236}">
-                <a16:creationId xmlns:a16="http://schemas.microsoft.com/office/drawing/2014/main" id="{41287C08-3988-4989-9CF8-E9DAE826DE56}"/>
+                <a16:creationId xmlns:a16="http://schemas.microsoft.com/office/drawing/2014/main" id="{C52CCA0C-E230-458A-B5A8-06C50EEFD229}"/>
               </a:ext>
             </a:extLst>
           </p:cNvPr>
@@ -18242,7 +18242,7 @@
           <p:cNvPr id="24" name="">
             <a:extLst xmlns:a="http://schemas.openxmlformats.org/drawingml/2006/main">
               <a:ext uri="{FF2B5EF4-FFF2-40B4-BE49-F238E27FC236}">
-                <a16:creationId xmlns:a16="http://schemas.microsoft.com/office/drawing/2014/main" id="{0856A8E6-E509-41FD-9F92-05E8ED82AB6E}"/>
+                <a16:creationId xmlns:a16="http://schemas.microsoft.com/office/drawing/2014/main" id="{B699F6BD-29D5-4C07-AA4A-8EFFCECEB997}"/>
               </a:ext>
             </a:extLst>
           </p:cNvPr>
@@ -18294,7 +18294,7 @@
           <p:cNvPr id="25" name="">
             <a:extLst xmlns:a="http://schemas.openxmlformats.org/drawingml/2006/main">
               <a:ext uri="{FF2B5EF4-FFF2-40B4-BE49-F238E27FC236}">
-                <a16:creationId xmlns:a16="http://schemas.microsoft.com/office/drawing/2014/main" id="{BCB09521-2FE3-4CC9-AB0E-046CB3015984}"/>
+                <a16:creationId xmlns:a16="http://schemas.microsoft.com/office/drawing/2014/main" id="{FA9BF8C3-B2E3-427F-82A2-11B48B992E40}"/>
               </a:ext>
             </a:extLst>
           </p:cNvPr>
@@ -18325,7 +18325,7 @@
           <p:cNvPr id="26" name="">
             <a:extLst xmlns:a="http://schemas.openxmlformats.org/drawingml/2006/main">
               <a:ext uri="{FF2B5EF4-FFF2-40B4-BE49-F238E27FC236}">
-                <a16:creationId xmlns:a16="http://schemas.microsoft.com/office/drawing/2014/main" id="{66A95E2D-7194-4A88-9D2F-C0CC343F82FE}"/>
+                <a16:creationId xmlns:a16="http://schemas.microsoft.com/office/drawing/2014/main" id="{DA46E2CD-D6CE-4C64-BA58-935AD169DD0D}"/>
               </a:ext>
             </a:extLst>
           </p:cNvPr>
@@ -18377,7 +18377,7 @@
           <p:cNvPr id="27" name="">
             <a:extLst xmlns:a="http://schemas.openxmlformats.org/drawingml/2006/main">
               <a:ext uri="{FF2B5EF4-FFF2-40B4-BE49-F238E27FC236}">
-                <a16:creationId xmlns:a16="http://schemas.microsoft.com/office/drawing/2014/main" id="{9ECC13CE-ACD3-4E93-AA6A-256366F65D41}"/>
+                <a16:creationId xmlns:a16="http://schemas.microsoft.com/office/drawing/2014/main" id="{016D1452-1212-4705-B6E4-6C0DEFF62BA5}"/>
               </a:ext>
             </a:extLst>
           </p:cNvPr>
@@ -18429,7 +18429,7 @@
           <p:cNvPr id="28" name="">
             <a:extLst xmlns:a="http://schemas.openxmlformats.org/drawingml/2006/main">
               <a:ext uri="{FF2B5EF4-FFF2-40B4-BE49-F238E27FC236}">
-                <a16:creationId xmlns:a16="http://schemas.microsoft.com/office/drawing/2014/main" id="{0DD9D662-9CD6-46EB-AC1A-2F93D559575A}"/>
+                <a16:creationId xmlns:a16="http://schemas.microsoft.com/office/drawing/2014/main" id="{886B27EF-72D6-44D7-AC00-5B4319A309BE}"/>
               </a:ext>
             </a:extLst>
           </p:cNvPr>
@@ -18481,7 +18481,7 @@
           <p:cNvPr id="29" name="">
             <a:extLst xmlns:a="http://schemas.openxmlformats.org/drawingml/2006/main">
               <a:ext uri="{FF2B5EF4-FFF2-40B4-BE49-F238E27FC236}">
-                <a16:creationId xmlns:a16="http://schemas.microsoft.com/office/drawing/2014/main" id="{F5EDA923-9391-4361-93D2-2B87B0C332EE}"/>
+                <a16:creationId xmlns:a16="http://schemas.microsoft.com/office/drawing/2014/main" id="{644C6B97-8338-415F-BA38-B7347555B4F0}"/>
               </a:ext>
             </a:extLst>
           </p:cNvPr>
@@ -18533,7 +18533,7 @@
           <p:cNvPr id="30" name="">
             <a:extLst xmlns:a="http://schemas.openxmlformats.org/drawingml/2006/main">
               <a:ext uri="{FF2B5EF4-FFF2-40B4-BE49-F238E27FC236}">
-                <a16:creationId xmlns:a16="http://schemas.microsoft.com/office/drawing/2014/main" id="{9C4DDEF5-A9D0-4D41-ACFE-7FE2192B5EC6}"/>
+                <a16:creationId xmlns:a16="http://schemas.microsoft.com/office/drawing/2014/main" id="{684523B7-D86C-4B0B-830E-B03E96D8D772}"/>
               </a:ext>
             </a:extLst>
           </p:cNvPr>
@@ -18585,7 +18585,7 @@
           <p:cNvPr id="31" name="">
             <a:extLst xmlns:a="http://schemas.openxmlformats.org/drawingml/2006/main">
               <a:ext uri="{FF2B5EF4-FFF2-40B4-BE49-F238E27FC236}">
-                <a16:creationId xmlns:a16="http://schemas.microsoft.com/office/drawing/2014/main" id="{04907160-3DC8-47EF-BA3C-4C2535910980}"/>
+                <a16:creationId xmlns:a16="http://schemas.microsoft.com/office/drawing/2014/main" id="{1DDCD2DD-2694-4579-8A19-2ECCEE4B621C}"/>
               </a:ext>
             </a:extLst>
           </p:cNvPr>
@@ -18616,7 +18616,7 @@
           <p:cNvPr id="32" name="">
             <a:extLst xmlns:a="http://schemas.openxmlformats.org/drawingml/2006/main">
               <a:ext uri="{FF2B5EF4-FFF2-40B4-BE49-F238E27FC236}">
-                <a16:creationId xmlns:a16="http://schemas.microsoft.com/office/drawing/2014/main" id="{F9855057-6A26-4340-818C-DB0FACFFBB44}"/>
+                <a16:creationId xmlns:a16="http://schemas.microsoft.com/office/drawing/2014/main" id="{47A7DADC-FE2E-418A-B7C5-43577EAA4AFD}"/>
               </a:ext>
             </a:extLst>
           </p:cNvPr>
@@ -18647,7 +18647,7 @@
           <p:cNvPr id="33" name="">
             <a:extLst xmlns:a="http://schemas.openxmlformats.org/drawingml/2006/main">
               <a:ext uri="{FF2B5EF4-FFF2-40B4-BE49-F238E27FC236}">
-                <a16:creationId xmlns:a16="http://schemas.microsoft.com/office/drawing/2014/main" id="{AE1329D4-E62C-440D-BFBA-985266C75EAD}"/>
+                <a16:creationId xmlns:a16="http://schemas.microsoft.com/office/drawing/2014/main" id="{D5A7A405-DD7E-4B82-8477-B8FCE9BA67B6}"/>
               </a:ext>
             </a:extLst>
           </p:cNvPr>
@@ -18699,7 +18699,7 @@
           <p:cNvPr id="34" name="">
             <a:extLst xmlns:a="http://schemas.openxmlformats.org/drawingml/2006/main">
               <a:ext uri="{FF2B5EF4-FFF2-40B4-BE49-F238E27FC236}">
-                <a16:creationId xmlns:a16="http://schemas.microsoft.com/office/drawing/2014/main" id="{D66CF49E-FD10-4EB2-8758-4F2864C066BE}"/>
+                <a16:creationId xmlns:a16="http://schemas.microsoft.com/office/drawing/2014/main" id="{33F064AD-2F58-49AF-B314-3DC8249D6491}"/>
               </a:ext>
             </a:extLst>
           </p:cNvPr>
@@ -18751,7 +18751,7 @@
           <p:cNvPr id="35" name="">
             <a:extLst xmlns:a="http://schemas.openxmlformats.org/drawingml/2006/main">
               <a:ext uri="{FF2B5EF4-FFF2-40B4-BE49-F238E27FC236}">
-                <a16:creationId xmlns:a16="http://schemas.microsoft.com/office/drawing/2014/main" id="{591D71C5-B447-4F97-9508-6CF8BD525CA4}"/>
+                <a16:creationId xmlns:a16="http://schemas.microsoft.com/office/drawing/2014/main" id="{DB412685-781B-4C68-ACE4-81F257D08F3B}"/>
               </a:ext>
             </a:extLst>
           </p:cNvPr>
@@ -18803,7 +18803,7 @@
           <p:cNvPr id="36" name="">
             <a:extLst xmlns:a="http://schemas.openxmlformats.org/drawingml/2006/main">
               <a:ext uri="{FF2B5EF4-FFF2-40B4-BE49-F238E27FC236}">
-                <a16:creationId xmlns:a16="http://schemas.microsoft.com/office/drawing/2014/main" id="{E24EBED1-838C-4384-B87F-C47925216F19}"/>
+                <a16:creationId xmlns:a16="http://schemas.microsoft.com/office/drawing/2014/main" id="{8A01D203-E749-4A54-B56D-B73D2C610B32}"/>
               </a:ext>
             </a:extLst>
           </p:cNvPr>
@@ -18855,7 +18855,7 @@
           <p:cNvPr id="37" name="">
             <a:extLst xmlns:a="http://schemas.openxmlformats.org/drawingml/2006/main">
               <a:ext uri="{FF2B5EF4-FFF2-40B4-BE49-F238E27FC236}">
-                <a16:creationId xmlns:a16="http://schemas.microsoft.com/office/drawing/2014/main" id="{5A0DF3C5-A981-4ECF-8E92-5F8566723E2C}"/>
+                <a16:creationId xmlns:a16="http://schemas.microsoft.com/office/drawing/2014/main" id="{AD3B1149-3727-4D59-B4E9-077DC7160FF4}"/>
               </a:ext>
             </a:extLst>
           </p:cNvPr>
@@ -18907,7 +18907,7 @@
           <p:cNvPr id="38" name="">
             <a:extLst xmlns:a="http://schemas.openxmlformats.org/drawingml/2006/main">
               <a:ext uri="{FF2B5EF4-FFF2-40B4-BE49-F238E27FC236}">
-                <a16:creationId xmlns:a16="http://schemas.microsoft.com/office/drawing/2014/main" id="{562D3A0D-270B-48A6-BCC8-6A8B2AAA798A}"/>
+                <a16:creationId xmlns:a16="http://schemas.microsoft.com/office/drawing/2014/main" id="{FBFEF11B-D96D-4DE4-8A94-06999896249B}"/>
               </a:ext>
             </a:extLst>
           </p:cNvPr>
@@ -18938,7 +18938,7 @@
           <p:cNvPr id="39" name="">
             <a:extLst xmlns:a="http://schemas.openxmlformats.org/drawingml/2006/main">
               <a:ext uri="{FF2B5EF4-FFF2-40B4-BE49-F238E27FC236}">
-                <a16:creationId xmlns:a16="http://schemas.microsoft.com/office/drawing/2014/main" id="{3B59D507-4B27-4174-8E88-1651255FD588}"/>
+                <a16:creationId xmlns:a16="http://schemas.microsoft.com/office/drawing/2014/main" id="{1481340F-63E3-44DA-8E23-C0FE37508FC7}"/>
               </a:ext>
             </a:extLst>
           </p:cNvPr>
@@ -18990,7 +18990,7 @@
           <p:cNvPr id="40" name="">
             <a:extLst xmlns:a="http://schemas.openxmlformats.org/drawingml/2006/main">
               <a:ext uri="{FF2B5EF4-FFF2-40B4-BE49-F238E27FC236}">
-                <a16:creationId xmlns:a16="http://schemas.microsoft.com/office/drawing/2014/main" id="{31C3A869-A711-452C-BEDB-A593123CABDF}"/>
+                <a16:creationId xmlns:a16="http://schemas.microsoft.com/office/drawing/2014/main" id="{8311DA3E-16C2-4597-AB23-A758F2D0022F}"/>
               </a:ext>
             </a:extLst>
           </p:cNvPr>
@@ -19042,7 +19042,7 @@
           <p:cNvPr id="41" name="">
             <a:extLst xmlns:a="http://schemas.openxmlformats.org/drawingml/2006/main">
               <a:ext uri="{FF2B5EF4-FFF2-40B4-BE49-F238E27FC236}">
-                <a16:creationId xmlns:a16="http://schemas.microsoft.com/office/drawing/2014/main" id="{478BEAA3-5DEB-49E4-BB65-45D6C1A3BC4E}"/>
+                <a16:creationId xmlns:a16="http://schemas.microsoft.com/office/drawing/2014/main" id="{6ACC67DD-0259-43AD-B3EE-4013DF70DF3E}"/>
               </a:ext>
             </a:extLst>
           </p:cNvPr>
@@ -19094,7 +19094,7 @@
           <p:cNvPr id="42" name="">
             <a:extLst xmlns:a="http://schemas.openxmlformats.org/drawingml/2006/main">
               <a:ext uri="{FF2B5EF4-FFF2-40B4-BE49-F238E27FC236}">
-                <a16:creationId xmlns:a16="http://schemas.microsoft.com/office/drawing/2014/main" id="{C2534AE3-1C26-4816-87B6-7A52A06019DD}"/>
+                <a16:creationId xmlns:a16="http://schemas.microsoft.com/office/drawing/2014/main" id="{B939E10A-8D1F-4F9A-9C71-2CE30C13BD50}"/>
               </a:ext>
             </a:extLst>
           </p:cNvPr>
@@ -19146,7 +19146,7 @@
           <p:cNvPr id="43" name="">
             <a:extLst xmlns:a="http://schemas.openxmlformats.org/drawingml/2006/main">
               <a:ext uri="{FF2B5EF4-FFF2-40B4-BE49-F238E27FC236}">
-                <a16:creationId xmlns:a16="http://schemas.microsoft.com/office/drawing/2014/main" id="{F8A1E7CC-48EC-449A-B75E-F83BB8383D18}"/>
+                <a16:creationId xmlns:a16="http://schemas.microsoft.com/office/drawing/2014/main" id="{7A9EFC7F-79F6-48A0-BE84-B651224E12B3}"/>
               </a:ext>
             </a:extLst>
           </p:cNvPr>
@@ -19198,7 +19198,7 @@
           <p:cNvPr id="44" name="">
             <a:extLst xmlns:a="http://schemas.openxmlformats.org/drawingml/2006/main">
               <a:ext uri="{FF2B5EF4-FFF2-40B4-BE49-F238E27FC236}">
-                <a16:creationId xmlns:a16="http://schemas.microsoft.com/office/drawing/2014/main" id="{28DB9B76-F746-4472-B9C0-485D9EF4300E}"/>
+                <a16:creationId xmlns:a16="http://schemas.microsoft.com/office/drawing/2014/main" id="{29BCC117-7C7D-4DD5-A58E-E95FA369D67F}"/>
               </a:ext>
             </a:extLst>
           </p:cNvPr>
@@ -19229,7 +19229,7 @@
           <p:cNvPr id="45" name="">
             <a:extLst xmlns:a="http://schemas.openxmlformats.org/drawingml/2006/main">
               <a:ext uri="{FF2B5EF4-FFF2-40B4-BE49-F238E27FC236}">
-                <a16:creationId xmlns:a16="http://schemas.microsoft.com/office/drawing/2014/main" id="{ED62F202-F495-4145-967C-8F416194C37C}"/>
+                <a16:creationId xmlns:a16="http://schemas.microsoft.com/office/drawing/2014/main" id="{8E61D459-4097-41EA-81C5-050C5EDAE195}"/>
               </a:ext>
             </a:extLst>
           </p:cNvPr>
@@ -19260,7 +19260,7 @@
           <p:cNvPr id="46" name="">
             <a:extLst xmlns:a="http://schemas.openxmlformats.org/drawingml/2006/main">
               <a:ext uri="{FF2B5EF4-FFF2-40B4-BE49-F238E27FC236}">
-                <a16:creationId xmlns:a16="http://schemas.microsoft.com/office/drawing/2014/main" id="{E3621019-2CC7-4029-AE4E-6BD97A57723D}"/>
+                <a16:creationId xmlns:a16="http://schemas.microsoft.com/office/drawing/2014/main" id="{51C396DD-B7A9-4008-B979-9CBF04EFC2CE}"/>
               </a:ext>
             </a:extLst>
           </p:cNvPr>
@@ -19312,7 +19312,7 @@
           <p:cNvPr id="47" name="">
             <a:extLst xmlns:a="http://schemas.openxmlformats.org/drawingml/2006/main">
               <a:ext uri="{FF2B5EF4-FFF2-40B4-BE49-F238E27FC236}">
-                <a16:creationId xmlns:a16="http://schemas.microsoft.com/office/drawing/2014/main" id="{E7E5D203-F6F2-434C-9043-7A4DBAB4D8A9}"/>
+                <a16:creationId xmlns:a16="http://schemas.microsoft.com/office/drawing/2014/main" id="{61658B90-AA15-4620-902D-4AC5AE2C187B}"/>
               </a:ext>
             </a:extLst>
           </p:cNvPr>
@@ -19364,7 +19364,7 @@
           <p:cNvPr id="48" name="">
             <a:extLst xmlns:a="http://schemas.openxmlformats.org/drawingml/2006/main">
               <a:ext uri="{FF2B5EF4-FFF2-40B4-BE49-F238E27FC236}">
-                <a16:creationId xmlns:a16="http://schemas.microsoft.com/office/drawing/2014/main" id="{DBF1C508-D078-4779-BAF4-134E32CFBA88}"/>
+                <a16:creationId xmlns:a16="http://schemas.microsoft.com/office/drawing/2014/main" id="{D0AB7D9C-25E2-4875-84D5-F324DFB71D95}"/>
               </a:ext>
             </a:extLst>
           </p:cNvPr>
@@ -19416,7 +19416,7 @@
           <p:cNvPr id="49" name="">
             <a:extLst xmlns:a="http://schemas.openxmlformats.org/drawingml/2006/main">
               <a:ext uri="{FF2B5EF4-FFF2-40B4-BE49-F238E27FC236}">
-                <a16:creationId xmlns:a16="http://schemas.microsoft.com/office/drawing/2014/main" id="{EC0439AE-C2CA-4BEA-9D69-C76C843D835A}"/>
+                <a16:creationId xmlns:a16="http://schemas.microsoft.com/office/drawing/2014/main" id="{CC93AA11-9C85-4D3C-85E8-A91BCDEC0F95}"/>
               </a:ext>
             </a:extLst>
           </p:cNvPr>
@@ -19468,7 +19468,7 @@
           <p:cNvPr id="50" name="">
             <a:extLst xmlns:a="http://schemas.openxmlformats.org/drawingml/2006/main">
               <a:ext uri="{FF2B5EF4-FFF2-40B4-BE49-F238E27FC236}">
-                <a16:creationId xmlns:a16="http://schemas.microsoft.com/office/drawing/2014/main" id="{723AC868-B2F2-4FF6-A9B3-5B17CF2A838C}"/>
+                <a16:creationId xmlns:a16="http://schemas.microsoft.com/office/drawing/2014/main" id="{821A2C2F-A8BF-4A64-90CF-5484796AC7F6}"/>
               </a:ext>
             </a:extLst>
           </p:cNvPr>
@@ -19520,7 +19520,7 @@
           <p:cNvPr id="51" name="">
             <a:extLst xmlns:a="http://schemas.openxmlformats.org/drawingml/2006/main">
               <a:ext uri="{FF2B5EF4-FFF2-40B4-BE49-F238E27FC236}">
-                <a16:creationId xmlns:a16="http://schemas.microsoft.com/office/drawing/2014/main" id="{AF2420AB-2DEC-4DE7-BAA6-1FB826362DFC}"/>
+                <a16:creationId xmlns:a16="http://schemas.microsoft.com/office/drawing/2014/main" id="{5D468D0C-E17B-4C29-8F67-A23D343BE25E}"/>
               </a:ext>
             </a:extLst>
           </p:cNvPr>
@@ -19551,7 +19551,7 @@
           <p:cNvPr id="52" name="">
             <a:extLst xmlns:a="http://schemas.openxmlformats.org/drawingml/2006/main">
               <a:ext uri="{FF2B5EF4-FFF2-40B4-BE49-F238E27FC236}">
-                <a16:creationId xmlns:a16="http://schemas.microsoft.com/office/drawing/2014/main" id="{A6B7380B-5975-4EA3-AC67-8553A5955A62}"/>
+                <a16:creationId xmlns:a16="http://schemas.microsoft.com/office/drawing/2014/main" id="{D809FCBB-6E76-46B2-896C-527AC370B589}"/>
               </a:ext>
             </a:extLst>
           </p:cNvPr>
@@ -19603,7 +19603,7 @@
           <p:cNvPr id="53" name="">
             <a:extLst xmlns:a="http://schemas.openxmlformats.org/drawingml/2006/main">
               <a:ext uri="{FF2B5EF4-FFF2-40B4-BE49-F238E27FC236}">
-                <a16:creationId xmlns:a16="http://schemas.microsoft.com/office/drawing/2014/main" id="{F51D87B5-61C8-4DFC-8266-0D08586460B4}"/>
+                <a16:creationId xmlns:a16="http://schemas.microsoft.com/office/drawing/2014/main" id="{0C4EA40B-4F13-4BCB-9127-CBE46FFB6994}"/>
               </a:ext>
             </a:extLst>
           </p:cNvPr>
@@ -19655,7 +19655,7 @@
           <p:cNvPr id="54" name="">
             <a:extLst xmlns:a="http://schemas.openxmlformats.org/drawingml/2006/main">
               <a:ext uri="{FF2B5EF4-FFF2-40B4-BE49-F238E27FC236}">
-                <a16:creationId xmlns:a16="http://schemas.microsoft.com/office/drawing/2014/main" id="{483ADDC2-1BA9-43C0-BA66-6A6985198516}"/>
+                <a16:creationId xmlns:a16="http://schemas.microsoft.com/office/drawing/2014/main" id="{35AA4671-9FCB-401A-8D5B-78DC950360BA}"/>
               </a:ext>
             </a:extLst>
           </p:cNvPr>
@@ -19707,7 +19707,7 @@
           <p:cNvPr id="55" name="">
             <a:extLst xmlns:a="http://schemas.openxmlformats.org/drawingml/2006/main">
               <a:ext uri="{FF2B5EF4-FFF2-40B4-BE49-F238E27FC236}">
-                <a16:creationId xmlns:a16="http://schemas.microsoft.com/office/drawing/2014/main" id="{03E566BF-0B1C-4182-80BF-7C37BFEF64AC}"/>
+                <a16:creationId xmlns:a16="http://schemas.microsoft.com/office/drawing/2014/main" id="{EB09C0B5-652D-48A2-B10D-7B4754C8A0E0}"/>
               </a:ext>
             </a:extLst>
           </p:cNvPr>
@@ -19759,7 +19759,7 @@
           <p:cNvPr id="56" name="">
             <a:extLst xmlns:a="http://schemas.openxmlformats.org/drawingml/2006/main">
               <a:ext uri="{FF2B5EF4-FFF2-40B4-BE49-F238E27FC236}">
-                <a16:creationId xmlns:a16="http://schemas.microsoft.com/office/drawing/2014/main" id="{ECF93AD5-2FD2-4B55-8783-C79EB9FBE1F5}"/>
+                <a16:creationId xmlns:a16="http://schemas.microsoft.com/office/drawing/2014/main" id="{7713BC8F-DEE9-45B3-B486-6178D2B7007C}"/>
               </a:ext>
             </a:extLst>
           </p:cNvPr>
@@ -19811,7 +19811,7 @@
           <p:cNvPr id="57" name="">
             <a:extLst xmlns:a="http://schemas.openxmlformats.org/drawingml/2006/main">
               <a:ext uri="{FF2B5EF4-FFF2-40B4-BE49-F238E27FC236}">
-                <a16:creationId xmlns:a16="http://schemas.microsoft.com/office/drawing/2014/main" id="{93C94FAB-ADB8-468C-B0F5-D011E962AE5C}"/>
+                <a16:creationId xmlns:a16="http://schemas.microsoft.com/office/drawing/2014/main" id="{AAD1E446-0B5C-4F86-AC61-4227BC2D95EF}"/>
               </a:ext>
             </a:extLst>
           </p:cNvPr>
@@ -19842,7 +19842,7 @@
           <p:cNvPr id="58" name="">
             <a:extLst xmlns:a="http://schemas.openxmlformats.org/drawingml/2006/main">
               <a:ext uri="{FF2B5EF4-FFF2-40B4-BE49-F238E27FC236}">
-                <a16:creationId xmlns:a16="http://schemas.microsoft.com/office/drawing/2014/main" id="{FF901F26-3FDF-4093-894F-4D1A4554609E}"/>
+                <a16:creationId xmlns:a16="http://schemas.microsoft.com/office/drawing/2014/main" id="{032A07D6-0118-43F0-910A-09CA0F2DFEE9}"/>
               </a:ext>
             </a:extLst>
           </p:cNvPr>
@@ -19873,7 +19873,7 @@
           <p:cNvPr id="59" name="">
             <a:extLst xmlns:a="http://schemas.openxmlformats.org/drawingml/2006/main">
               <a:ext uri="{FF2B5EF4-FFF2-40B4-BE49-F238E27FC236}">
-                <a16:creationId xmlns:a16="http://schemas.microsoft.com/office/drawing/2014/main" id="{80A2559D-AD88-40A7-BE65-DF5DD5333CBC}"/>
+                <a16:creationId xmlns:a16="http://schemas.microsoft.com/office/drawing/2014/main" id="{68197BB4-A72B-4315-B467-FCDC0204004E}"/>
               </a:ext>
             </a:extLst>
           </p:cNvPr>
@@ -19925,7 +19925,7 @@
           <p:cNvPr id="60" name="">
             <a:extLst xmlns:a="http://schemas.openxmlformats.org/drawingml/2006/main">
               <a:ext uri="{FF2B5EF4-FFF2-40B4-BE49-F238E27FC236}">
-                <a16:creationId xmlns:a16="http://schemas.microsoft.com/office/drawing/2014/main" id="{B0B599EF-9A3C-4F7F-9918-3993D336819A}"/>
+                <a16:creationId xmlns:a16="http://schemas.microsoft.com/office/drawing/2014/main" id="{FEDF10E6-5D3B-475D-83E6-A7BAF8DF1E7F}"/>
               </a:ext>
             </a:extLst>
           </p:cNvPr>
@@ -19977,7 +19977,7 @@
           <p:cNvPr id="61" name="">
             <a:extLst xmlns:a="http://schemas.openxmlformats.org/drawingml/2006/main">
               <a:ext uri="{FF2B5EF4-FFF2-40B4-BE49-F238E27FC236}">
-                <a16:creationId xmlns:a16="http://schemas.microsoft.com/office/drawing/2014/main" id="{D2772D81-CC7B-4355-B963-D1A3B017FD30}"/>
+                <a16:creationId xmlns:a16="http://schemas.microsoft.com/office/drawing/2014/main" id="{8FB1A2A2-9568-4146-A4CC-45EFF22472E1}"/>
               </a:ext>
             </a:extLst>
           </p:cNvPr>
@@ -20029,7 +20029,7 @@
           <p:cNvPr id="62" name="">
             <a:extLst xmlns:a="http://schemas.openxmlformats.org/drawingml/2006/main">
               <a:ext uri="{FF2B5EF4-FFF2-40B4-BE49-F238E27FC236}">
-                <a16:creationId xmlns:a16="http://schemas.microsoft.com/office/drawing/2014/main" id="{6A3BD98B-614C-4D26-ADB7-EBF3FE4C9E0F}"/>
+                <a16:creationId xmlns:a16="http://schemas.microsoft.com/office/drawing/2014/main" id="{1C1924BE-B3FB-42B0-874D-D31C8C17A8A3}"/>
               </a:ext>
             </a:extLst>
           </p:cNvPr>
@@ -20081,7 +20081,7 @@
           <p:cNvPr id="63" name="">
             <a:extLst xmlns:a="http://schemas.openxmlformats.org/drawingml/2006/main">
               <a:ext uri="{FF2B5EF4-FFF2-40B4-BE49-F238E27FC236}">
-                <a16:creationId xmlns:a16="http://schemas.microsoft.com/office/drawing/2014/main" id="{E607294A-38A5-4F3F-B8E5-CCFD0F6755D2}"/>
+                <a16:creationId xmlns:a16="http://schemas.microsoft.com/office/drawing/2014/main" id="{73DEBD6C-C1DE-47DB-951F-0284D0E1EB9E}"/>
               </a:ext>
             </a:extLst>
           </p:cNvPr>
@@ -20133,7 +20133,7 @@
           <p:cNvPr id="64" name="">
             <a:extLst xmlns:a="http://schemas.openxmlformats.org/drawingml/2006/main">
               <a:ext uri="{FF2B5EF4-FFF2-40B4-BE49-F238E27FC236}">
-                <a16:creationId xmlns:a16="http://schemas.microsoft.com/office/drawing/2014/main" id="{555F98FA-5E12-42A3-A3D7-EDD2D3232373}"/>
+                <a16:creationId xmlns:a16="http://schemas.microsoft.com/office/drawing/2014/main" id="{8C037695-AF42-4A0E-AF78-5340CF4CB5C2}"/>
               </a:ext>
             </a:extLst>
           </p:cNvPr>
@@ -20164,7 +20164,7 @@
           <p:cNvPr id="65" name="">
             <a:extLst xmlns:a="http://schemas.openxmlformats.org/drawingml/2006/main">
               <a:ext uri="{FF2B5EF4-FFF2-40B4-BE49-F238E27FC236}">
-                <a16:creationId xmlns:a16="http://schemas.microsoft.com/office/drawing/2014/main" id="{53310DE4-6E33-48FB-961A-2A9EED03CEF3}"/>
+                <a16:creationId xmlns:a16="http://schemas.microsoft.com/office/drawing/2014/main" id="{A67EF838-EA91-45D0-A307-0C83D62C023D}"/>
               </a:ext>
             </a:extLst>
           </p:cNvPr>
@@ -20216,7 +20216,7 @@
           <p:cNvPr id="66" name="">
             <a:extLst xmlns:a="http://schemas.openxmlformats.org/drawingml/2006/main">
               <a:ext uri="{FF2B5EF4-FFF2-40B4-BE49-F238E27FC236}">
-                <a16:creationId xmlns:a16="http://schemas.microsoft.com/office/drawing/2014/main" id="{00F5FE11-B37D-430A-985C-F650F15D49D2}"/>
+                <a16:creationId xmlns:a16="http://schemas.microsoft.com/office/drawing/2014/main" id="{B9BFF29A-70A7-407C-9223-C28ADF4205AB}"/>
               </a:ext>
             </a:extLst>
           </p:cNvPr>
@@ -20268,7 +20268,7 @@
           <p:cNvPr id="67" name="">
             <a:extLst xmlns:a="http://schemas.openxmlformats.org/drawingml/2006/main">
               <a:ext uri="{FF2B5EF4-FFF2-40B4-BE49-F238E27FC236}">
-                <a16:creationId xmlns:a16="http://schemas.microsoft.com/office/drawing/2014/main" id="{85D3F7FA-99FB-424A-B6F7-00331BFDAA4C}"/>
+                <a16:creationId xmlns:a16="http://schemas.microsoft.com/office/drawing/2014/main" id="{8329C0A9-3F05-4437-A7C8-4C28CB3F3F48}"/>
               </a:ext>
             </a:extLst>
           </p:cNvPr>
@@ -20320,7 +20320,7 @@
           <p:cNvPr id="68" name="">
             <a:extLst xmlns:a="http://schemas.openxmlformats.org/drawingml/2006/main">
               <a:ext uri="{FF2B5EF4-FFF2-40B4-BE49-F238E27FC236}">
-                <a16:creationId xmlns:a16="http://schemas.microsoft.com/office/drawing/2014/main" id="{CB12F18F-DBE5-4D9F-B0B9-9AC1DA32D6BB}"/>
+                <a16:creationId xmlns:a16="http://schemas.microsoft.com/office/drawing/2014/main" id="{38E045CF-040F-4480-985E-315AF3ECDE62}"/>
               </a:ext>
             </a:extLst>
           </p:cNvPr>
@@ -20372,7 +20372,7 @@
           <p:cNvPr id="69" name="">
             <a:extLst xmlns:a="http://schemas.openxmlformats.org/drawingml/2006/main">
               <a:ext uri="{FF2B5EF4-FFF2-40B4-BE49-F238E27FC236}">
-                <a16:creationId xmlns:a16="http://schemas.microsoft.com/office/drawing/2014/main" id="{D33B11F3-65AC-4811-A250-C28D6722E292}"/>
+                <a16:creationId xmlns:a16="http://schemas.microsoft.com/office/drawing/2014/main" id="{1CCD0C79-B69E-476B-A7CE-64D493452F50}"/>
               </a:ext>
             </a:extLst>
           </p:cNvPr>
@@ -20424,7 +20424,7 @@
           <p:cNvPr id="70" name="">
             <a:extLst xmlns:a="http://schemas.openxmlformats.org/drawingml/2006/main">
               <a:ext uri="{FF2B5EF4-FFF2-40B4-BE49-F238E27FC236}">
-                <a16:creationId xmlns:a16="http://schemas.microsoft.com/office/drawing/2014/main" id="{73216E58-4B39-4707-A628-DBFD7038614F}"/>
+                <a16:creationId xmlns:a16="http://schemas.microsoft.com/office/drawing/2014/main" id="{26536CF3-F47F-4757-B243-FBE22D11C321}"/>
               </a:ext>
             </a:extLst>
           </p:cNvPr>
@@ -20455,7 +20455,7 @@
           <p:cNvPr id="71" name="">
             <a:extLst xmlns:a="http://schemas.openxmlformats.org/drawingml/2006/main">
               <a:ext uri="{FF2B5EF4-FFF2-40B4-BE49-F238E27FC236}">
-                <a16:creationId xmlns:a16="http://schemas.microsoft.com/office/drawing/2014/main" id="{DA314023-94BB-42ED-8305-01708A7FC57E}"/>
+                <a16:creationId xmlns:a16="http://schemas.microsoft.com/office/drawing/2014/main" id="{97CF08F5-97E4-4FB9-A128-E02DE66F14D4}"/>
               </a:ext>
             </a:extLst>
           </p:cNvPr>
@@ -20486,7 +20486,7 @@
           <p:cNvPr id="72" name="">
             <a:extLst xmlns:a="http://schemas.openxmlformats.org/drawingml/2006/main">
               <a:ext uri="{FF2B5EF4-FFF2-40B4-BE49-F238E27FC236}">
-                <a16:creationId xmlns:a16="http://schemas.microsoft.com/office/drawing/2014/main" id="{7E4D4C13-FAF6-4CB9-A409-D9D547858335}"/>
+                <a16:creationId xmlns:a16="http://schemas.microsoft.com/office/drawing/2014/main" id="{443AF44D-7054-4873-A354-735DD0D7CC10}"/>
               </a:ext>
             </a:extLst>
           </p:cNvPr>
@@ -20538,7 +20538,7 @@
           <p:cNvPr id="73" name="">
             <a:extLst xmlns:a="http://schemas.openxmlformats.org/drawingml/2006/main">
               <a:ext uri="{FF2B5EF4-FFF2-40B4-BE49-F238E27FC236}">
-                <a16:creationId xmlns:a16="http://schemas.microsoft.com/office/drawing/2014/main" id="{CAF9C1C8-2DD3-4DC8-B3F8-302ADBF761A9}"/>
+                <a16:creationId xmlns:a16="http://schemas.microsoft.com/office/drawing/2014/main" id="{47707AAE-2490-4A68-95B5-FDA58835E167}"/>
               </a:ext>
             </a:extLst>
           </p:cNvPr>
@@ -20590,7 +20590,7 @@
           <p:cNvPr id="74" name="">
             <a:extLst xmlns:a="http://schemas.openxmlformats.org/drawingml/2006/main">
               <a:ext uri="{FF2B5EF4-FFF2-40B4-BE49-F238E27FC236}">
-                <a16:creationId xmlns:a16="http://schemas.microsoft.com/office/drawing/2014/main" id="{6C7F5F81-DFED-4D58-BB0E-88F35CA9D456}"/>
+                <a16:creationId xmlns:a16="http://schemas.microsoft.com/office/drawing/2014/main" id="{8F708F94-3515-437A-9A78-FBBDE7E66E9B}"/>
               </a:ext>
             </a:extLst>
           </p:cNvPr>
@@ -20642,7 +20642,7 @@
           <p:cNvPr id="75" name="">
             <a:extLst xmlns:a="http://schemas.openxmlformats.org/drawingml/2006/main">
               <a:ext uri="{FF2B5EF4-FFF2-40B4-BE49-F238E27FC236}">
-                <a16:creationId xmlns:a16="http://schemas.microsoft.com/office/drawing/2014/main" id="{9FAA5D13-BFBE-4CC4-AEEF-BC3627AF534E}"/>
+                <a16:creationId xmlns:a16="http://schemas.microsoft.com/office/drawing/2014/main" id="{279B264E-6A5E-4FDF-AFD6-235C590E2617}"/>
               </a:ext>
             </a:extLst>
           </p:cNvPr>
@@ -20694,7 +20694,7 @@
           <p:cNvPr id="76" name="">
             <a:extLst xmlns:a="http://schemas.openxmlformats.org/drawingml/2006/main">
               <a:ext uri="{FF2B5EF4-FFF2-40B4-BE49-F238E27FC236}">
-                <a16:creationId xmlns:a16="http://schemas.microsoft.com/office/drawing/2014/main" id="{327F7EDC-E356-4EC3-86D1-94F0D728659C}"/>
+                <a16:creationId xmlns:a16="http://schemas.microsoft.com/office/drawing/2014/main" id="{D8A79F64-1FFC-44B7-AE62-B8425149DA6C}"/>
               </a:ext>
             </a:extLst>
           </p:cNvPr>
@@ -20746,7 +20746,7 @@
           <p:cNvPr id="77" name="">
             <a:extLst xmlns:a="http://schemas.openxmlformats.org/drawingml/2006/main">
               <a:ext uri="{FF2B5EF4-FFF2-40B4-BE49-F238E27FC236}">
-                <a16:creationId xmlns:a16="http://schemas.microsoft.com/office/drawing/2014/main" id="{2B4CF35A-BA7B-4932-9C1A-C04728223FE8}"/>
+                <a16:creationId xmlns:a16="http://schemas.microsoft.com/office/drawing/2014/main" id="{4DDC84F3-8821-442C-AC0A-0FFF393864D7}"/>
               </a:ext>
             </a:extLst>
           </p:cNvPr>
@@ -20777,7 +20777,7 @@
           <p:cNvPr id="78" name="">
             <a:extLst xmlns:a="http://schemas.openxmlformats.org/drawingml/2006/main">
               <a:ext uri="{FF2B5EF4-FFF2-40B4-BE49-F238E27FC236}">
-                <a16:creationId xmlns:a16="http://schemas.microsoft.com/office/drawing/2014/main" id="{AAE96F92-FC04-4FEB-A882-A2DE05304926}"/>
+                <a16:creationId xmlns:a16="http://schemas.microsoft.com/office/drawing/2014/main" id="{A7449A6B-4994-4DA2-979B-385C4E8B5706}"/>
               </a:ext>
             </a:extLst>
           </p:cNvPr>
@@ -20829,7 +20829,7 @@
           <p:cNvPr id="79" name="">
             <a:extLst xmlns:a="http://schemas.openxmlformats.org/drawingml/2006/main">
               <a:ext uri="{FF2B5EF4-FFF2-40B4-BE49-F238E27FC236}">
-                <a16:creationId xmlns:a16="http://schemas.microsoft.com/office/drawing/2014/main" id="{BFE44A17-8506-4EAF-9F3C-A8BF44D8DB7E}"/>
+                <a16:creationId xmlns:a16="http://schemas.microsoft.com/office/drawing/2014/main" id="{DA27C1DF-BD3A-449D-B42F-9C121B30A20B}"/>
               </a:ext>
             </a:extLst>
           </p:cNvPr>
@@ -20881,7 +20881,7 @@
           <p:cNvPr id="80" name="">
             <a:extLst xmlns:a="http://schemas.openxmlformats.org/drawingml/2006/main">
               <a:ext uri="{FF2B5EF4-FFF2-40B4-BE49-F238E27FC236}">
-                <a16:creationId xmlns:a16="http://schemas.microsoft.com/office/drawing/2014/main" id="{383425AF-C3E5-4EA2-9AE7-84BE1261C15A}"/>
+                <a16:creationId xmlns:a16="http://schemas.microsoft.com/office/drawing/2014/main" id="{A900DF79-8AFF-4D16-AACB-BFB49D4D13BD}"/>
               </a:ext>
             </a:extLst>
           </p:cNvPr>
@@ -20933,7 +20933,7 @@
           <p:cNvPr id="81" name="">
             <a:extLst xmlns:a="http://schemas.openxmlformats.org/drawingml/2006/main">
               <a:ext uri="{FF2B5EF4-FFF2-40B4-BE49-F238E27FC236}">
-                <a16:creationId xmlns:a16="http://schemas.microsoft.com/office/drawing/2014/main" id="{E33C8B18-18CD-4A6F-B9A7-78817573C3A1}"/>
+                <a16:creationId xmlns:a16="http://schemas.microsoft.com/office/drawing/2014/main" id="{ACE9CAA0-D6A7-4035-B1C5-57BCA78A6418}"/>
               </a:ext>
             </a:extLst>
           </p:cNvPr>
@@ -20985,7 +20985,7 @@
           <p:cNvPr id="82" name="">
             <a:extLst xmlns:a="http://schemas.openxmlformats.org/drawingml/2006/main">
               <a:ext uri="{FF2B5EF4-FFF2-40B4-BE49-F238E27FC236}">
-                <a16:creationId xmlns:a16="http://schemas.microsoft.com/office/drawing/2014/main" id="{72184C06-B990-417A-B14D-39423E40A832}"/>
+                <a16:creationId xmlns:a16="http://schemas.microsoft.com/office/drawing/2014/main" id="{34F424A3-FAE3-4008-9374-13889C230FFB}"/>
               </a:ext>
             </a:extLst>
           </p:cNvPr>
@@ -21037,7 +21037,7 @@
           <p:cNvPr id="83" name="">
             <a:extLst xmlns:a="http://schemas.openxmlformats.org/drawingml/2006/main">
               <a:ext uri="{FF2B5EF4-FFF2-40B4-BE49-F238E27FC236}">
-                <a16:creationId xmlns:a16="http://schemas.microsoft.com/office/drawing/2014/main" id="{EB91A138-DBCD-496E-AD74-26C788E1EB17}"/>
+                <a16:creationId xmlns:a16="http://schemas.microsoft.com/office/drawing/2014/main" id="{4D482B9F-A7D4-4507-9B38-927913FD95DB}"/>
               </a:ext>
             </a:extLst>
           </p:cNvPr>
@@ -21068,7 +21068,7 @@
           <p:cNvPr id="84" name="">
             <a:extLst xmlns:a="http://schemas.openxmlformats.org/drawingml/2006/main">
               <a:ext uri="{FF2B5EF4-FFF2-40B4-BE49-F238E27FC236}">
-                <a16:creationId xmlns:a16="http://schemas.microsoft.com/office/drawing/2014/main" id="{ABD7F78E-9E3E-4E9C-8304-FF8C8BA803A0}"/>
+                <a16:creationId xmlns:a16="http://schemas.microsoft.com/office/drawing/2014/main" id="{87992A32-760B-4EFD-B5E9-5ACEB73947FA}"/>
               </a:ext>
             </a:extLst>
           </p:cNvPr>
@@ -21120,7 +21120,7 @@
           <p:cNvPr id="85" name="">
             <a:extLst xmlns:a="http://schemas.openxmlformats.org/drawingml/2006/main">
               <a:ext uri="{FF2B5EF4-FFF2-40B4-BE49-F238E27FC236}">
-                <a16:creationId xmlns:a16="http://schemas.microsoft.com/office/drawing/2014/main" id="{E30EBCA8-CA22-4B49-BB3B-68DB461AB057}"/>
+                <a16:creationId xmlns:a16="http://schemas.microsoft.com/office/drawing/2014/main" id="{AD7CADB0-BDAB-433E-8436-9F19B836C4BB}"/>
               </a:ext>
             </a:extLst>
           </p:cNvPr>
@@ -21172,7 +21172,7 @@
           <p:cNvPr id="86" name="">
             <a:extLst xmlns:a="http://schemas.openxmlformats.org/drawingml/2006/main">
               <a:ext uri="{FF2B5EF4-FFF2-40B4-BE49-F238E27FC236}">
-                <a16:creationId xmlns:a16="http://schemas.microsoft.com/office/drawing/2014/main" id="{0984CFCE-9244-4329-B8FC-BA188E46B8D4}"/>
+                <a16:creationId xmlns:a16="http://schemas.microsoft.com/office/drawing/2014/main" id="{2EE74568-5717-4083-8280-19F204DC4968}"/>
               </a:ext>
             </a:extLst>
           </p:cNvPr>
@@ -21224,7 +21224,7 @@
           <p:cNvPr id="87" name="">
             <a:extLst xmlns:a="http://schemas.openxmlformats.org/drawingml/2006/main">
               <a:ext uri="{FF2B5EF4-FFF2-40B4-BE49-F238E27FC236}">
-                <a16:creationId xmlns:a16="http://schemas.microsoft.com/office/drawing/2014/main" id="{8A062AE0-731B-4B50-946D-A4B42A1DDF2D}"/>
+                <a16:creationId xmlns:a16="http://schemas.microsoft.com/office/drawing/2014/main" id="{7B419410-8A2C-4256-8DAC-42DB393F44E2}"/>
               </a:ext>
             </a:extLst>
           </p:cNvPr>
@@ -21276,7 +21276,7 @@
           <p:cNvPr id="88" name="">
             <a:extLst xmlns:a="http://schemas.openxmlformats.org/drawingml/2006/main">
               <a:ext uri="{FF2B5EF4-FFF2-40B4-BE49-F238E27FC236}">
-                <a16:creationId xmlns:a16="http://schemas.microsoft.com/office/drawing/2014/main" id="{9C44AF7F-019E-4E80-BDEE-8BFFA1D35349}"/>
+                <a16:creationId xmlns:a16="http://schemas.microsoft.com/office/drawing/2014/main" id="{73569FD0-0EDF-4596-B7C8-85FFD44FCE8A}"/>
               </a:ext>
             </a:extLst>
           </p:cNvPr>
@@ -21328,7 +21328,7 @@
           <p:cNvPr id="89" name="">
             <a:extLst xmlns:a="http://schemas.openxmlformats.org/drawingml/2006/main">
               <a:ext uri="{FF2B5EF4-FFF2-40B4-BE49-F238E27FC236}">
-                <a16:creationId xmlns:a16="http://schemas.microsoft.com/office/drawing/2014/main" id="{42E23B85-06FB-443A-94BE-96E83154AF4F}"/>
+                <a16:creationId xmlns:a16="http://schemas.microsoft.com/office/drawing/2014/main" id="{E156C21F-0E37-4134-BED7-9AC40C89051F}"/>
               </a:ext>
             </a:extLst>
           </p:cNvPr>
@@ -21359,7 +21359,7 @@
           <p:cNvPr id="90" name="">
             <a:extLst xmlns:a="http://schemas.openxmlformats.org/drawingml/2006/main">
               <a:ext uri="{FF2B5EF4-FFF2-40B4-BE49-F238E27FC236}">
-                <a16:creationId xmlns:a16="http://schemas.microsoft.com/office/drawing/2014/main" id="{6BD7C2DC-E5F7-446B-B293-4D1AC043B0EF}"/>
+                <a16:creationId xmlns:a16="http://schemas.microsoft.com/office/drawing/2014/main" id="{17C4FFD0-09B7-4D9C-921E-595C6E297A6B}"/>
               </a:ext>
             </a:extLst>
           </p:cNvPr>
@@ -21390,7 +21390,7 @@
           <p:cNvPr id="91" name="">
             <a:extLst xmlns:a="http://schemas.openxmlformats.org/drawingml/2006/main">
               <a:ext uri="{FF2B5EF4-FFF2-40B4-BE49-F238E27FC236}">
-                <a16:creationId xmlns:a16="http://schemas.microsoft.com/office/drawing/2014/main" id="{71A6B066-C2BE-4C83-BE4A-376370ABE11E}"/>
+                <a16:creationId xmlns:a16="http://schemas.microsoft.com/office/drawing/2014/main" id="{FFC07A22-9CE5-4FCE-B23B-B63A78066625}"/>
               </a:ext>
             </a:extLst>
           </p:cNvPr>
@@ -21442,7 +21442,7 @@
           <p:cNvPr id="92" name="">
             <a:extLst xmlns:a="http://schemas.openxmlformats.org/drawingml/2006/main">
               <a:ext uri="{FF2B5EF4-FFF2-40B4-BE49-F238E27FC236}">
-                <a16:creationId xmlns:a16="http://schemas.microsoft.com/office/drawing/2014/main" id="{4CD08056-5A6D-432C-AD65-021CAF1172B6}"/>
+                <a16:creationId xmlns:a16="http://schemas.microsoft.com/office/drawing/2014/main" id="{48608D09-1A9F-4C3B-B2A3-6C3D0105FE4F}"/>
               </a:ext>
             </a:extLst>
           </p:cNvPr>
@@ -21494,7 +21494,7 @@
           <p:cNvPr id="93" name="">
             <a:extLst xmlns:a="http://schemas.openxmlformats.org/drawingml/2006/main">
               <a:ext uri="{FF2B5EF4-FFF2-40B4-BE49-F238E27FC236}">
-                <a16:creationId xmlns:a16="http://schemas.microsoft.com/office/drawing/2014/main" id="{442181FC-925B-47A1-AD44-883DD62082CB}"/>
+                <a16:creationId xmlns:a16="http://schemas.microsoft.com/office/drawing/2014/main" id="{85C094D9-1F99-4F69-BCCC-D5F6644CCD0B}"/>
               </a:ext>
             </a:extLst>
           </p:cNvPr>
@@ -21546,7 +21546,7 @@
           <p:cNvPr id="94" name="">
             <a:extLst xmlns:a="http://schemas.openxmlformats.org/drawingml/2006/main">
               <a:ext uri="{FF2B5EF4-FFF2-40B4-BE49-F238E27FC236}">
-                <a16:creationId xmlns:a16="http://schemas.microsoft.com/office/drawing/2014/main" id="{BF458C14-41D8-46FB-B07F-413C49E4BD5B}"/>
+                <a16:creationId xmlns:a16="http://schemas.microsoft.com/office/drawing/2014/main" id="{37A5BD50-3980-4FD3-9633-72086E4570FE}"/>
               </a:ext>
             </a:extLst>
           </p:cNvPr>
@@ -21598,7 +21598,7 @@
           <p:cNvPr id="95" name="">
             <a:extLst xmlns:a="http://schemas.openxmlformats.org/drawingml/2006/main">
               <a:ext uri="{FF2B5EF4-FFF2-40B4-BE49-F238E27FC236}">
-                <a16:creationId xmlns:a16="http://schemas.microsoft.com/office/drawing/2014/main" id="{AF5FFBB7-A23F-4C16-B49E-1FF068948725}"/>
+                <a16:creationId xmlns:a16="http://schemas.microsoft.com/office/drawing/2014/main" id="{ACAF3A10-1B48-4829-A9B6-AC6D56DB5C5B}"/>
               </a:ext>
             </a:extLst>
           </p:cNvPr>
@@ -21648,7 +21648,7 @@
     </p:spTree>
     <p:extLst>
       <p:ext uri="{BB962C8B-B14F-4D97-AF65-F5344CB8AC3E}">
-        <p14:creationId xmlns:p14="http://schemas.microsoft.com/office/powerpoint/2010/main" val="1386602347"/>
+        <p14:creationId xmlns:p14="http://schemas.microsoft.com/office/powerpoint/2010/main" val="636750888"/>
       </p:ext>
     </p:extLst>
   </p:cSld>
@@ -21679,7 +21679,7 @@
           <p:cNvPr id="122" name="">
             <a:extLst xmlns:a="http://schemas.openxmlformats.org/drawingml/2006/main">
               <a:ext uri="{FF2B5EF4-FFF2-40B4-BE49-F238E27FC236}">
-                <a16:creationId xmlns:a16="http://schemas.microsoft.com/office/drawing/2014/main" id="{972BD5C4-82E4-40BD-80CC-1B90715C8B95}"/>
+                <a16:creationId xmlns:a16="http://schemas.microsoft.com/office/drawing/2014/main" id="{2B063F8E-0914-4E74-8CBF-E2C0D908A247}"/>
               </a:ext>
             </a:extLst>
           </p:cNvPr>
@@ -21712,7 +21712,7 @@
           <p:cNvPr id="2" name="">
             <a:extLst xmlns:a="http://schemas.openxmlformats.org/drawingml/2006/main">
               <a:ext uri="{FF2B5EF4-FFF2-40B4-BE49-F238E27FC236}">
-                <a16:creationId xmlns:a16="http://schemas.microsoft.com/office/drawing/2014/main" id="{22B3042B-CB4F-4B9B-B8FB-5C0256B52AC7}"/>
+                <a16:creationId xmlns:a16="http://schemas.microsoft.com/office/drawing/2014/main" id="{F5D06C45-70D1-460F-9637-62D18905EEF1}"/>
               </a:ext>
             </a:extLst>
           </p:cNvPr>
@@ -21743,7 +21743,7 @@
           <p:cNvPr id="3" name="">
             <a:extLst xmlns:a="http://schemas.openxmlformats.org/drawingml/2006/main">
               <a:ext uri="{FF2B5EF4-FFF2-40B4-BE49-F238E27FC236}">
-                <a16:creationId xmlns:a16="http://schemas.microsoft.com/office/drawing/2014/main" id="{456436F5-C0E5-4701-8141-94DCD9F7DF22}"/>
+                <a16:creationId xmlns:a16="http://schemas.microsoft.com/office/drawing/2014/main" id="{1A4D33E6-2541-4BB4-96D2-EC5F8953E46E}"/>
               </a:ext>
             </a:extLst>
           </p:cNvPr>
@@ -21795,7 +21795,7 @@
           <p:cNvPr id="4" name="">
             <a:extLst xmlns:a="http://schemas.openxmlformats.org/drawingml/2006/main">
               <a:ext uri="{FF2B5EF4-FFF2-40B4-BE49-F238E27FC236}">
-                <a16:creationId xmlns:a16="http://schemas.microsoft.com/office/drawing/2014/main" id="{8B12670E-466E-4A81-8F95-A654E8A1E63F}"/>
+                <a16:creationId xmlns:a16="http://schemas.microsoft.com/office/drawing/2014/main" id="{23B6FA38-BF9E-4DF4-A968-84B962C6DF09}"/>
               </a:ext>
             </a:extLst>
           </p:cNvPr>
@@ -21847,7 +21847,7 @@
           <p:cNvPr id="5" name="">
             <a:extLst xmlns:a="http://schemas.openxmlformats.org/drawingml/2006/main">
               <a:ext uri="{FF2B5EF4-FFF2-40B4-BE49-F238E27FC236}">
-                <a16:creationId xmlns:a16="http://schemas.microsoft.com/office/drawing/2014/main" id="{9E4674A5-1832-4C94-BAAE-2E4D5DD71BB0}"/>
+                <a16:creationId xmlns:a16="http://schemas.microsoft.com/office/drawing/2014/main" id="{97FC6421-5089-422B-BC75-1CC773038348}"/>
               </a:ext>
             </a:extLst>
           </p:cNvPr>
@@ -21882,7 +21882,7 @@
           <p:nvPr/>
         </p:nvPicPr>
         <p:blipFill>
-          <a:blip xmlns:r="http://schemas.openxmlformats.org/officeDocument/2006/relationships" xmlns:a="http://schemas.openxmlformats.org/drawingml/2006/main" r:embed="R1d19af43e2be4e68"/>
+          <a:blip xmlns:r="http://schemas.openxmlformats.org/officeDocument/2006/relationships" xmlns:a="http://schemas.openxmlformats.org/drawingml/2006/main" r:embed="Rf7f99e7c77bf48e5"/>
           <a:stretch xmlns:a="http://schemas.openxmlformats.org/drawingml/2006/main"/>
         </p:blipFill>
         <p:spPr>
@@ -21900,7 +21900,7 @@
           <p:cNvPr id="7" name="">
             <a:extLst xmlns:a="http://schemas.openxmlformats.org/drawingml/2006/main">
               <a:ext uri="{FF2B5EF4-FFF2-40B4-BE49-F238E27FC236}">
-                <a16:creationId xmlns:a16="http://schemas.microsoft.com/office/drawing/2014/main" id="{9C4A77AA-B372-4D27-A2F5-B236168B4501}"/>
+                <a16:creationId xmlns:a16="http://schemas.microsoft.com/office/drawing/2014/main" id="{F6FE6D0B-E3D2-406A-9833-8BC85B182C3C}"/>
               </a:ext>
             </a:extLst>
           </p:cNvPr>
@@ -21952,7 +21952,7 @@
           <p:cNvPr id="8" name="">
             <a:extLst xmlns:a="http://schemas.openxmlformats.org/drawingml/2006/main">
               <a:ext uri="{FF2B5EF4-FFF2-40B4-BE49-F238E27FC236}">
-                <a16:creationId xmlns:a16="http://schemas.microsoft.com/office/drawing/2014/main" id="{387B7EEC-8275-43B5-A8AA-117A55A6D1AF}"/>
+                <a16:creationId xmlns:a16="http://schemas.microsoft.com/office/drawing/2014/main" id="{257FE475-A28C-4BE4-AE9E-C254A82C759B}"/>
               </a:ext>
             </a:extLst>
           </p:cNvPr>
@@ -22004,7 +22004,7 @@
           <p:cNvPr id="9" name="">
             <a:extLst xmlns:a="http://schemas.openxmlformats.org/drawingml/2006/main">
               <a:ext uri="{FF2B5EF4-FFF2-40B4-BE49-F238E27FC236}">
-                <a16:creationId xmlns:a16="http://schemas.microsoft.com/office/drawing/2014/main" id="{6A22F671-00CD-482D-8A9B-91B20A8E39F2}"/>
+                <a16:creationId xmlns:a16="http://schemas.microsoft.com/office/drawing/2014/main" id="{E60D047B-3667-4E81-8DDB-59E05ECE487D}"/>
               </a:ext>
             </a:extLst>
           </p:cNvPr>
@@ -22056,7 +22056,7 @@
           <p:cNvPr id="10" name="">
             <a:extLst xmlns:a="http://schemas.openxmlformats.org/drawingml/2006/main">
               <a:ext uri="{FF2B5EF4-FFF2-40B4-BE49-F238E27FC236}">
-                <a16:creationId xmlns:a16="http://schemas.microsoft.com/office/drawing/2014/main" id="{E7BE3F4C-37A5-48F6-97AA-79430032E09B}"/>
+                <a16:creationId xmlns:a16="http://schemas.microsoft.com/office/drawing/2014/main" id="{68A39688-8C8F-4E01-A5F9-9B9ECDE74CF6}"/>
               </a:ext>
             </a:extLst>
           </p:cNvPr>
@@ -22108,7 +22108,7 @@
           <p:cNvPr id="11" name="">
             <a:extLst xmlns:a="http://schemas.openxmlformats.org/drawingml/2006/main">
               <a:ext uri="{FF2B5EF4-FFF2-40B4-BE49-F238E27FC236}">
-                <a16:creationId xmlns:a16="http://schemas.microsoft.com/office/drawing/2014/main" id="{D6A72C56-52D6-47FA-89CD-7064FF904430}"/>
+                <a16:creationId xmlns:a16="http://schemas.microsoft.com/office/drawing/2014/main" id="{9E318370-45D0-434F-A268-AC0DD5B566CF}"/>
               </a:ext>
             </a:extLst>
           </p:cNvPr>
@@ -22139,7 +22139,7 @@
           <p:cNvPr id="12" name="">
             <a:extLst xmlns:a="http://schemas.openxmlformats.org/drawingml/2006/main">
               <a:ext uri="{FF2B5EF4-FFF2-40B4-BE49-F238E27FC236}">
-                <a16:creationId xmlns:a16="http://schemas.microsoft.com/office/drawing/2014/main" id="{117BE3C8-281B-4A58-9283-12D7CC4961CF}"/>
+                <a16:creationId xmlns:a16="http://schemas.microsoft.com/office/drawing/2014/main" id="{30B0141E-9710-4ED6-9EDF-8EE4FCF8A686}"/>
               </a:ext>
             </a:extLst>
           </p:cNvPr>
@@ -22170,7 +22170,7 @@
           <p:cNvPr id="13" name="">
             <a:extLst xmlns:a="http://schemas.openxmlformats.org/drawingml/2006/main">
               <a:ext uri="{FF2B5EF4-FFF2-40B4-BE49-F238E27FC236}">
-                <a16:creationId xmlns:a16="http://schemas.microsoft.com/office/drawing/2014/main" id="{36D106C8-5A33-4149-914D-21779EE53097}"/>
+                <a16:creationId xmlns:a16="http://schemas.microsoft.com/office/drawing/2014/main" id="{29FA0B92-78A6-4FFD-8279-73BB5693F778}"/>
               </a:ext>
             </a:extLst>
           </p:cNvPr>
@@ -22222,7 +22222,7 @@
           <p:cNvPr id="14" name="">
             <a:extLst xmlns:a="http://schemas.openxmlformats.org/drawingml/2006/main">
               <a:ext uri="{FF2B5EF4-FFF2-40B4-BE49-F238E27FC236}">
-                <a16:creationId xmlns:a16="http://schemas.microsoft.com/office/drawing/2014/main" id="{9C8F4C2C-1818-42D5-9430-4E7FE4BC34A1}"/>
+                <a16:creationId xmlns:a16="http://schemas.microsoft.com/office/drawing/2014/main" id="{00528E46-3F1A-4B35-875C-A778F1B2909E}"/>
               </a:ext>
             </a:extLst>
           </p:cNvPr>
@@ -22274,7 +22274,7 @@
           <p:cNvPr id="15" name="">
             <a:extLst xmlns:a="http://schemas.openxmlformats.org/drawingml/2006/main">
               <a:ext uri="{FF2B5EF4-FFF2-40B4-BE49-F238E27FC236}">
-                <a16:creationId xmlns:a16="http://schemas.microsoft.com/office/drawing/2014/main" id="{DA3978F9-0C0B-4106-A2DA-245E446FCCD5}"/>
+                <a16:creationId xmlns:a16="http://schemas.microsoft.com/office/drawing/2014/main" id="{0A8D5E9A-4009-4383-AA5E-3F037DCCA66D}"/>
               </a:ext>
             </a:extLst>
           </p:cNvPr>
@@ -22326,7 +22326,7 @@
           <p:cNvPr id="16" name="">
             <a:extLst xmlns:a="http://schemas.openxmlformats.org/drawingml/2006/main">
               <a:ext uri="{FF2B5EF4-FFF2-40B4-BE49-F238E27FC236}">
-                <a16:creationId xmlns:a16="http://schemas.microsoft.com/office/drawing/2014/main" id="{2851EDD2-C04F-460D-A9B0-76FC01D6AD5D}"/>
+                <a16:creationId xmlns:a16="http://schemas.microsoft.com/office/drawing/2014/main" id="{0B383B1C-3E4E-4BCE-93E1-000A666D485A}"/>
               </a:ext>
             </a:extLst>
           </p:cNvPr>
@@ -22378,7 +22378,7 @@
           <p:cNvPr id="17" name="">
             <a:extLst xmlns:a="http://schemas.openxmlformats.org/drawingml/2006/main">
               <a:ext uri="{FF2B5EF4-FFF2-40B4-BE49-F238E27FC236}">
-                <a16:creationId xmlns:a16="http://schemas.microsoft.com/office/drawing/2014/main" id="{053C8DA9-3709-47F1-B716-64286F32F6E6}"/>
+                <a16:creationId xmlns:a16="http://schemas.microsoft.com/office/drawing/2014/main" id="{03445DCE-7C10-4F28-BAE0-BE5F682998AE}"/>
               </a:ext>
             </a:extLst>
           </p:cNvPr>
@@ -22430,7 +22430,7 @@
           <p:cNvPr id="18" name="">
             <a:extLst xmlns:a="http://schemas.openxmlformats.org/drawingml/2006/main">
               <a:ext uri="{FF2B5EF4-FFF2-40B4-BE49-F238E27FC236}">
-                <a16:creationId xmlns:a16="http://schemas.microsoft.com/office/drawing/2014/main" id="{3FC5A112-4E21-4C6D-9137-3415FA587A4A}"/>
+                <a16:creationId xmlns:a16="http://schemas.microsoft.com/office/drawing/2014/main" id="{0A878A64-111A-4D33-9CE5-3B9782883E6C}"/>
               </a:ext>
             </a:extLst>
           </p:cNvPr>
@@ -22482,7 +22482,7 @@
           <p:cNvPr id="19" name="">
             <a:extLst xmlns:a="http://schemas.openxmlformats.org/drawingml/2006/main">
               <a:ext uri="{FF2B5EF4-FFF2-40B4-BE49-F238E27FC236}">
-                <a16:creationId xmlns:a16="http://schemas.microsoft.com/office/drawing/2014/main" id="{1CBE34CE-DB4B-4649-B16A-58D82A6B93C3}"/>
+                <a16:creationId xmlns:a16="http://schemas.microsoft.com/office/drawing/2014/main" id="{83AF6217-2A51-4FCB-90EB-3ADAC9356459}"/>
               </a:ext>
             </a:extLst>
           </p:cNvPr>
@@ -22534,7 +22534,7 @@
           <p:cNvPr id="20" name="">
             <a:extLst xmlns:a="http://schemas.openxmlformats.org/drawingml/2006/main">
               <a:ext uri="{FF2B5EF4-FFF2-40B4-BE49-F238E27FC236}">
-                <a16:creationId xmlns:a16="http://schemas.microsoft.com/office/drawing/2014/main" id="{3C19FD0E-748A-4F00-B8DA-D1A378761787}"/>
+                <a16:creationId xmlns:a16="http://schemas.microsoft.com/office/drawing/2014/main" id="{822A1D17-69F3-4DE7-961F-BA14376B72FA}"/>
               </a:ext>
             </a:extLst>
           </p:cNvPr>
@@ -22565,7 +22565,7 @@
           <p:cNvPr id="21" name="">
             <a:extLst xmlns:a="http://schemas.openxmlformats.org/drawingml/2006/main">
               <a:ext uri="{FF2B5EF4-FFF2-40B4-BE49-F238E27FC236}">
-                <a16:creationId xmlns:a16="http://schemas.microsoft.com/office/drawing/2014/main" id="{AE40A641-3845-4DB4-9E9E-F9087084D367}"/>
+                <a16:creationId xmlns:a16="http://schemas.microsoft.com/office/drawing/2014/main" id="{08764FBD-7437-4057-89FE-2E2597BDBD5E}"/>
               </a:ext>
             </a:extLst>
           </p:cNvPr>
@@ -22617,7 +22617,7 @@
           <p:cNvPr id="22" name="">
             <a:extLst xmlns:a="http://schemas.openxmlformats.org/drawingml/2006/main">
               <a:ext uri="{FF2B5EF4-FFF2-40B4-BE49-F238E27FC236}">
-                <a16:creationId xmlns:a16="http://schemas.microsoft.com/office/drawing/2014/main" id="{7D65A4F0-20E1-4BE9-B406-A47EF2E2AA8E}"/>
+                <a16:creationId xmlns:a16="http://schemas.microsoft.com/office/drawing/2014/main" id="{4CDA67BC-3F4B-4AF3-B212-2C341A71E80C}"/>
               </a:ext>
             </a:extLst>
           </p:cNvPr>
@@ -22669,7 +22669,7 @@
           <p:cNvPr id="23" name="">
             <a:extLst xmlns:a="http://schemas.openxmlformats.org/drawingml/2006/main">
               <a:ext uri="{FF2B5EF4-FFF2-40B4-BE49-F238E27FC236}">
-                <a16:creationId xmlns:a16="http://schemas.microsoft.com/office/drawing/2014/main" id="{3FF74166-CE70-420A-9C1B-BE29F8B851CF}"/>
+                <a16:creationId xmlns:a16="http://schemas.microsoft.com/office/drawing/2014/main" id="{C0B195BA-BFF2-4AA7-B11E-054AD2116014}"/>
               </a:ext>
             </a:extLst>
           </p:cNvPr>
@@ -22721,7 +22721,7 @@
           <p:cNvPr id="24" name="">
             <a:extLst xmlns:a="http://schemas.openxmlformats.org/drawingml/2006/main">
               <a:ext uri="{FF2B5EF4-FFF2-40B4-BE49-F238E27FC236}">
-                <a16:creationId xmlns:a16="http://schemas.microsoft.com/office/drawing/2014/main" id="{49F99BA6-6619-454B-A2C5-907CCCE684F2}"/>
+                <a16:creationId xmlns:a16="http://schemas.microsoft.com/office/drawing/2014/main" id="{2C044A97-F440-44D2-AC01-DF95C225B920}"/>
               </a:ext>
             </a:extLst>
           </p:cNvPr>
@@ -22773,7 +22773,7 @@
           <p:cNvPr id="25" name="">
             <a:extLst xmlns:a="http://schemas.openxmlformats.org/drawingml/2006/main">
               <a:ext uri="{FF2B5EF4-FFF2-40B4-BE49-F238E27FC236}">
-                <a16:creationId xmlns:a16="http://schemas.microsoft.com/office/drawing/2014/main" id="{4751CF08-CD90-4EC5-871C-6F19D753474A}"/>
+                <a16:creationId xmlns:a16="http://schemas.microsoft.com/office/drawing/2014/main" id="{A19603EB-8848-4C76-B689-2C364FB45B44}"/>
               </a:ext>
             </a:extLst>
           </p:cNvPr>
@@ -22825,7 +22825,7 @@
           <p:cNvPr id="26" name="">
             <a:extLst xmlns:a="http://schemas.openxmlformats.org/drawingml/2006/main">
               <a:ext uri="{FF2B5EF4-FFF2-40B4-BE49-F238E27FC236}">
-                <a16:creationId xmlns:a16="http://schemas.microsoft.com/office/drawing/2014/main" id="{1C222A14-B86B-4C23-8B0E-ABF662446D8E}"/>
+                <a16:creationId xmlns:a16="http://schemas.microsoft.com/office/drawing/2014/main" id="{8C6B4C5A-2C52-441E-B7E0-048CE192D18A}"/>
               </a:ext>
             </a:extLst>
           </p:cNvPr>
@@ -22877,7 +22877,7 @@
           <p:cNvPr id="27" name="">
             <a:extLst xmlns:a="http://schemas.openxmlformats.org/drawingml/2006/main">
               <a:ext uri="{FF2B5EF4-FFF2-40B4-BE49-F238E27FC236}">
-                <a16:creationId xmlns:a16="http://schemas.microsoft.com/office/drawing/2014/main" id="{3F7487F0-8F51-414F-8EFF-4341F3ADDD5D}"/>
+                <a16:creationId xmlns:a16="http://schemas.microsoft.com/office/drawing/2014/main" id="{C8A83B8B-ED47-46DB-9AEF-D1F5D5B3FDF2}"/>
               </a:ext>
             </a:extLst>
           </p:cNvPr>
@@ -22929,7 +22929,7 @@
           <p:cNvPr id="28" name="">
             <a:extLst xmlns:a="http://schemas.openxmlformats.org/drawingml/2006/main">
               <a:ext uri="{FF2B5EF4-FFF2-40B4-BE49-F238E27FC236}">
-                <a16:creationId xmlns:a16="http://schemas.microsoft.com/office/drawing/2014/main" id="{EC90B5B8-B746-4712-BC2F-9F3533C63444}"/>
+                <a16:creationId xmlns:a16="http://schemas.microsoft.com/office/drawing/2014/main" id="{8868AC22-4900-46F7-B14E-B22CEDF0941D}"/>
               </a:ext>
             </a:extLst>
           </p:cNvPr>
@@ -22960,7 +22960,7 @@
           <p:cNvPr id="29" name="">
             <a:extLst xmlns:a="http://schemas.openxmlformats.org/drawingml/2006/main">
               <a:ext uri="{FF2B5EF4-FFF2-40B4-BE49-F238E27FC236}">
-                <a16:creationId xmlns:a16="http://schemas.microsoft.com/office/drawing/2014/main" id="{0EBAB387-F7EB-4563-A7FC-F04D083C0B0D}"/>
+                <a16:creationId xmlns:a16="http://schemas.microsoft.com/office/drawing/2014/main" id="{79E20391-2E62-4D4A-AA41-91F2B9D3CDE8}"/>
               </a:ext>
             </a:extLst>
           </p:cNvPr>
@@ -22991,7 +22991,7 @@
           <p:cNvPr id="30" name="">
             <a:extLst xmlns:a="http://schemas.openxmlformats.org/drawingml/2006/main">
               <a:ext uri="{FF2B5EF4-FFF2-40B4-BE49-F238E27FC236}">
-                <a16:creationId xmlns:a16="http://schemas.microsoft.com/office/drawing/2014/main" id="{698E60AE-948C-4B82-B2EA-565363D1A34B}"/>
+                <a16:creationId xmlns:a16="http://schemas.microsoft.com/office/drawing/2014/main" id="{070C8051-6D4A-40A6-80B8-ED29B9CBD95F}"/>
               </a:ext>
             </a:extLst>
           </p:cNvPr>
@@ -23043,7 +23043,7 @@
           <p:cNvPr id="31" name="">
             <a:extLst xmlns:a="http://schemas.openxmlformats.org/drawingml/2006/main">
               <a:ext uri="{FF2B5EF4-FFF2-40B4-BE49-F238E27FC236}">
-                <a16:creationId xmlns:a16="http://schemas.microsoft.com/office/drawing/2014/main" id="{D6F5CC2D-80D2-4EC2-B079-78C50EC1AF4C}"/>
+                <a16:creationId xmlns:a16="http://schemas.microsoft.com/office/drawing/2014/main" id="{5B705A00-ED4A-40EB-8F4B-864B923A1ED8}"/>
               </a:ext>
             </a:extLst>
           </p:cNvPr>
@@ -23095,7 +23095,7 @@
           <p:cNvPr id="32" name="">
             <a:extLst xmlns:a="http://schemas.openxmlformats.org/drawingml/2006/main">
               <a:ext uri="{FF2B5EF4-FFF2-40B4-BE49-F238E27FC236}">
-                <a16:creationId xmlns:a16="http://schemas.microsoft.com/office/drawing/2014/main" id="{1FC055D0-BA5B-4861-9DF3-6BE2C617C9B1}"/>
+                <a16:creationId xmlns:a16="http://schemas.microsoft.com/office/drawing/2014/main" id="{104BE72F-FC54-4D0D-834A-D3B5D1AF348A}"/>
               </a:ext>
             </a:extLst>
           </p:cNvPr>
@@ -23147,7 +23147,7 @@
           <p:cNvPr id="33" name="">
             <a:extLst xmlns:a="http://schemas.openxmlformats.org/drawingml/2006/main">
               <a:ext uri="{FF2B5EF4-FFF2-40B4-BE49-F238E27FC236}">
-                <a16:creationId xmlns:a16="http://schemas.microsoft.com/office/drawing/2014/main" id="{05CCBD6B-53B1-4C96-A39A-AE8DA70E416A}"/>
+                <a16:creationId xmlns:a16="http://schemas.microsoft.com/office/drawing/2014/main" id="{86A8E39A-2C0F-49C9-897C-E848778529EC}"/>
               </a:ext>
             </a:extLst>
           </p:cNvPr>
@@ -23199,7 +23199,7 @@
           <p:cNvPr id="34" name="">
             <a:extLst xmlns:a="http://schemas.openxmlformats.org/drawingml/2006/main">
               <a:ext uri="{FF2B5EF4-FFF2-40B4-BE49-F238E27FC236}">
-                <a16:creationId xmlns:a16="http://schemas.microsoft.com/office/drawing/2014/main" id="{64C91D91-DE4D-4812-BADD-A5663FF78345}"/>
+                <a16:creationId xmlns:a16="http://schemas.microsoft.com/office/drawing/2014/main" id="{0A222A2E-D3C0-43E5-BAC7-D081373A69B3}"/>
               </a:ext>
             </a:extLst>
           </p:cNvPr>
@@ -23251,7 +23251,7 @@
           <p:cNvPr id="35" name="">
             <a:extLst xmlns:a="http://schemas.openxmlformats.org/drawingml/2006/main">
               <a:ext uri="{FF2B5EF4-FFF2-40B4-BE49-F238E27FC236}">
-                <a16:creationId xmlns:a16="http://schemas.microsoft.com/office/drawing/2014/main" id="{08A8D80F-E6CC-4244-8505-E47B47D7859F}"/>
+                <a16:creationId xmlns:a16="http://schemas.microsoft.com/office/drawing/2014/main" id="{FBF45AF6-0099-494C-B711-9A9169BCA023}"/>
               </a:ext>
             </a:extLst>
           </p:cNvPr>
@@ -23303,7 +23303,7 @@
           <p:cNvPr id="36" name="">
             <a:extLst xmlns:a="http://schemas.openxmlformats.org/drawingml/2006/main">
               <a:ext uri="{FF2B5EF4-FFF2-40B4-BE49-F238E27FC236}">
-                <a16:creationId xmlns:a16="http://schemas.microsoft.com/office/drawing/2014/main" id="{F3C56CFE-8A3A-4F48-BDE2-F2177E6297A0}"/>
+                <a16:creationId xmlns:a16="http://schemas.microsoft.com/office/drawing/2014/main" id="{B520B3E2-A78E-4E6A-A227-D52AB4E14E43}"/>
               </a:ext>
             </a:extLst>
           </p:cNvPr>
@@ -23355,7 +23355,7 @@
           <p:cNvPr id="37" name="">
             <a:extLst xmlns:a="http://schemas.openxmlformats.org/drawingml/2006/main">
               <a:ext uri="{FF2B5EF4-FFF2-40B4-BE49-F238E27FC236}">
-                <a16:creationId xmlns:a16="http://schemas.microsoft.com/office/drawing/2014/main" id="{664F18C2-A9C1-4EB0-A6F0-53B4C92D1F3B}"/>
+                <a16:creationId xmlns:a16="http://schemas.microsoft.com/office/drawing/2014/main" id="{24BDDA8C-A883-4CCF-A9A2-9720F178B59B}"/>
               </a:ext>
             </a:extLst>
           </p:cNvPr>
@@ -23386,7 +23386,7 @@
           <p:cNvPr id="38" name="">
             <a:extLst xmlns:a="http://schemas.openxmlformats.org/drawingml/2006/main">
               <a:ext uri="{FF2B5EF4-FFF2-40B4-BE49-F238E27FC236}">
-                <a16:creationId xmlns:a16="http://schemas.microsoft.com/office/drawing/2014/main" id="{699E7B2F-D8AE-4001-B3F8-0DB155993031}"/>
+                <a16:creationId xmlns:a16="http://schemas.microsoft.com/office/drawing/2014/main" id="{9C484871-5042-4167-AD4A-EE09F9DB122C}"/>
               </a:ext>
             </a:extLst>
           </p:cNvPr>
@@ -23438,7 +23438,7 @@
           <p:cNvPr id="39" name="">
             <a:extLst xmlns:a="http://schemas.openxmlformats.org/drawingml/2006/main">
               <a:ext uri="{FF2B5EF4-FFF2-40B4-BE49-F238E27FC236}">
-                <a16:creationId xmlns:a16="http://schemas.microsoft.com/office/drawing/2014/main" id="{F22F869D-9491-472E-B48A-73F723639E90}"/>
+                <a16:creationId xmlns:a16="http://schemas.microsoft.com/office/drawing/2014/main" id="{5A29E984-EEDA-47A6-ACF9-E98C9D0DFE7A}"/>
               </a:ext>
             </a:extLst>
           </p:cNvPr>
@@ -23490,7 +23490,7 @@
           <p:cNvPr id="40" name="">
             <a:extLst xmlns:a="http://schemas.openxmlformats.org/drawingml/2006/main">
               <a:ext uri="{FF2B5EF4-FFF2-40B4-BE49-F238E27FC236}">
-                <a16:creationId xmlns:a16="http://schemas.microsoft.com/office/drawing/2014/main" id="{7460FEF9-6DDD-432A-B18D-03EE52CFC7A6}"/>
+                <a16:creationId xmlns:a16="http://schemas.microsoft.com/office/drawing/2014/main" id="{7314489A-1BC8-408C-8202-D83670C5DF64}"/>
               </a:ext>
             </a:extLst>
           </p:cNvPr>
@@ -23542,7 +23542,7 @@
           <p:cNvPr id="41" name="">
             <a:extLst xmlns:a="http://schemas.openxmlformats.org/drawingml/2006/main">
               <a:ext uri="{FF2B5EF4-FFF2-40B4-BE49-F238E27FC236}">
-                <a16:creationId xmlns:a16="http://schemas.microsoft.com/office/drawing/2014/main" id="{4A5E30A1-C27E-4D1A-AE4A-F9BF62DB25CB}"/>
+                <a16:creationId xmlns:a16="http://schemas.microsoft.com/office/drawing/2014/main" id="{A9555F1D-85FD-430B-8240-8672B91F0483}"/>
               </a:ext>
             </a:extLst>
           </p:cNvPr>
@@ -23594,7 +23594,7 @@
           <p:cNvPr id="42" name="">
             <a:extLst xmlns:a="http://schemas.openxmlformats.org/drawingml/2006/main">
               <a:ext uri="{FF2B5EF4-FFF2-40B4-BE49-F238E27FC236}">
-                <a16:creationId xmlns:a16="http://schemas.microsoft.com/office/drawing/2014/main" id="{700001F8-9012-4D28-A2CA-A7162310B9AC}"/>
+                <a16:creationId xmlns:a16="http://schemas.microsoft.com/office/drawing/2014/main" id="{F23724B3-C42B-4CC5-87F1-6AAE43DD5257}"/>
               </a:ext>
             </a:extLst>
           </p:cNvPr>
@@ -23646,7 +23646,7 @@
           <p:cNvPr id="43" name="">
             <a:extLst xmlns:a="http://schemas.openxmlformats.org/drawingml/2006/main">
               <a:ext uri="{FF2B5EF4-FFF2-40B4-BE49-F238E27FC236}">
-                <a16:creationId xmlns:a16="http://schemas.microsoft.com/office/drawing/2014/main" id="{B96D479D-4B32-4486-9087-EC8DF4E88ABD}"/>
+                <a16:creationId xmlns:a16="http://schemas.microsoft.com/office/drawing/2014/main" id="{95E72471-ADBA-4F00-A29A-657319098693}"/>
               </a:ext>
             </a:extLst>
           </p:cNvPr>
@@ -23698,7 +23698,7 @@
           <p:cNvPr id="44" name="">
             <a:extLst xmlns:a="http://schemas.openxmlformats.org/drawingml/2006/main">
               <a:ext uri="{FF2B5EF4-FFF2-40B4-BE49-F238E27FC236}">
-                <a16:creationId xmlns:a16="http://schemas.microsoft.com/office/drawing/2014/main" id="{48B7FBD9-FFE9-491E-86E0-7B052E06E8D8}"/>
+                <a16:creationId xmlns:a16="http://schemas.microsoft.com/office/drawing/2014/main" id="{B9EB73B7-B7D0-462F-867E-E6FEB98530B4}"/>
               </a:ext>
             </a:extLst>
           </p:cNvPr>
@@ -23750,7 +23750,7 @@
           <p:cNvPr id="45" name="">
             <a:extLst xmlns:a="http://schemas.openxmlformats.org/drawingml/2006/main">
               <a:ext uri="{FF2B5EF4-FFF2-40B4-BE49-F238E27FC236}">
-                <a16:creationId xmlns:a16="http://schemas.microsoft.com/office/drawing/2014/main" id="{623C3B75-0C8D-4C90-950C-5B4ACE5F9AFB}"/>
+                <a16:creationId xmlns:a16="http://schemas.microsoft.com/office/drawing/2014/main" id="{CDC327B7-DBAD-4C77-AC1C-C4928330C3CD}"/>
               </a:ext>
             </a:extLst>
           </p:cNvPr>
@@ -23781,7 +23781,7 @@
           <p:cNvPr id="46" name="">
             <a:extLst xmlns:a="http://schemas.openxmlformats.org/drawingml/2006/main">
               <a:ext uri="{FF2B5EF4-FFF2-40B4-BE49-F238E27FC236}">
-                <a16:creationId xmlns:a16="http://schemas.microsoft.com/office/drawing/2014/main" id="{E2CAE031-99CE-4C28-B769-E76F87292538}"/>
+                <a16:creationId xmlns:a16="http://schemas.microsoft.com/office/drawing/2014/main" id="{78CE97A2-DB6B-4DD5-AF9D-55B47DD1479D}"/>
               </a:ext>
             </a:extLst>
           </p:cNvPr>
@@ -23812,7 +23812,7 @@
           <p:cNvPr id="47" name="">
             <a:extLst xmlns:a="http://schemas.openxmlformats.org/drawingml/2006/main">
               <a:ext uri="{FF2B5EF4-FFF2-40B4-BE49-F238E27FC236}">
-                <a16:creationId xmlns:a16="http://schemas.microsoft.com/office/drawing/2014/main" id="{04555C18-25E7-480B-BEC9-8EEEF1E90803}"/>
+                <a16:creationId xmlns:a16="http://schemas.microsoft.com/office/drawing/2014/main" id="{74FFFD47-E53B-460B-860E-1AAE77589EE5}"/>
               </a:ext>
             </a:extLst>
           </p:cNvPr>
@@ -23864,7 +23864,7 @@
           <p:cNvPr id="48" name="">
             <a:extLst xmlns:a="http://schemas.openxmlformats.org/drawingml/2006/main">
               <a:ext uri="{FF2B5EF4-FFF2-40B4-BE49-F238E27FC236}">
-                <a16:creationId xmlns:a16="http://schemas.microsoft.com/office/drawing/2014/main" id="{98FCDD4B-79D3-46E5-AF46-083CE1E4C807}"/>
+                <a16:creationId xmlns:a16="http://schemas.microsoft.com/office/drawing/2014/main" id="{C419183F-B799-4A06-BF9F-DDF70744F0FD}"/>
               </a:ext>
             </a:extLst>
           </p:cNvPr>
@@ -23916,7 +23916,7 @@
           <p:cNvPr id="49" name="">
             <a:extLst xmlns:a="http://schemas.openxmlformats.org/drawingml/2006/main">
               <a:ext uri="{FF2B5EF4-FFF2-40B4-BE49-F238E27FC236}">
-                <a16:creationId xmlns:a16="http://schemas.microsoft.com/office/drawing/2014/main" id="{A29EAB4E-C01B-435D-91F5-F8ECC8267092}"/>
+                <a16:creationId xmlns:a16="http://schemas.microsoft.com/office/drawing/2014/main" id="{46DCF69C-4314-4C35-80D7-44CDE7237632}"/>
               </a:ext>
             </a:extLst>
           </p:cNvPr>
@@ -23968,7 +23968,7 @@
           <p:cNvPr id="50" name="">
             <a:extLst xmlns:a="http://schemas.openxmlformats.org/drawingml/2006/main">
               <a:ext uri="{FF2B5EF4-FFF2-40B4-BE49-F238E27FC236}">
-                <a16:creationId xmlns:a16="http://schemas.microsoft.com/office/drawing/2014/main" id="{15CF3CAD-6EDC-46B0-AA1C-C236D42E0AE3}"/>
+                <a16:creationId xmlns:a16="http://schemas.microsoft.com/office/drawing/2014/main" id="{90F49C82-20B6-40E9-9251-D467FE6055AD}"/>
               </a:ext>
             </a:extLst>
           </p:cNvPr>
@@ -24020,7 +24020,7 @@
           <p:cNvPr id="51" name="">
             <a:extLst xmlns:a="http://schemas.openxmlformats.org/drawingml/2006/main">
               <a:ext uri="{FF2B5EF4-FFF2-40B4-BE49-F238E27FC236}">
-                <a16:creationId xmlns:a16="http://schemas.microsoft.com/office/drawing/2014/main" id="{E8A1A442-6DDB-41FA-A6C2-F5939935C811}"/>
+                <a16:creationId xmlns:a16="http://schemas.microsoft.com/office/drawing/2014/main" id="{4EFC4390-2E0F-41C2-8632-B1C89407C2A1}"/>
               </a:ext>
             </a:extLst>
           </p:cNvPr>
@@ -24072,7 +24072,7 @@
           <p:cNvPr id="52" name="">
             <a:extLst xmlns:a="http://schemas.openxmlformats.org/drawingml/2006/main">
               <a:ext uri="{FF2B5EF4-FFF2-40B4-BE49-F238E27FC236}">
-                <a16:creationId xmlns:a16="http://schemas.microsoft.com/office/drawing/2014/main" id="{CE5608BC-B39E-41A4-A451-4312C4367F3C}"/>
+                <a16:creationId xmlns:a16="http://schemas.microsoft.com/office/drawing/2014/main" id="{06359722-8CDE-4D81-8335-A5FAF524BAB1}"/>
               </a:ext>
             </a:extLst>
           </p:cNvPr>
@@ -24124,7 +24124,7 @@
           <p:cNvPr id="53" name="">
             <a:extLst xmlns:a="http://schemas.openxmlformats.org/drawingml/2006/main">
               <a:ext uri="{FF2B5EF4-FFF2-40B4-BE49-F238E27FC236}">
-                <a16:creationId xmlns:a16="http://schemas.microsoft.com/office/drawing/2014/main" id="{F4D0A1E7-612F-472A-A086-99D86A9D3C7D}"/>
+                <a16:creationId xmlns:a16="http://schemas.microsoft.com/office/drawing/2014/main" id="{FE3E79EC-898C-4DB2-BFA7-4FB681D9191C}"/>
               </a:ext>
             </a:extLst>
           </p:cNvPr>
@@ -24176,7 +24176,7 @@
           <p:cNvPr id="54" name="">
             <a:extLst xmlns:a="http://schemas.openxmlformats.org/drawingml/2006/main">
               <a:ext uri="{FF2B5EF4-FFF2-40B4-BE49-F238E27FC236}">
-                <a16:creationId xmlns:a16="http://schemas.microsoft.com/office/drawing/2014/main" id="{C9B7BF23-3E81-4BA4-B2E2-D1BEBCF810CC}"/>
+                <a16:creationId xmlns:a16="http://schemas.microsoft.com/office/drawing/2014/main" id="{85D9358A-7979-430E-A967-02176B7008A1}"/>
               </a:ext>
             </a:extLst>
           </p:cNvPr>
@@ -24207,7 +24207,7 @@
           <p:cNvPr id="55" name="">
             <a:extLst xmlns:a="http://schemas.openxmlformats.org/drawingml/2006/main">
               <a:ext uri="{FF2B5EF4-FFF2-40B4-BE49-F238E27FC236}">
-                <a16:creationId xmlns:a16="http://schemas.microsoft.com/office/drawing/2014/main" id="{7A1A0EDA-71FA-44B7-BA21-9027B5A5A785}"/>
+                <a16:creationId xmlns:a16="http://schemas.microsoft.com/office/drawing/2014/main" id="{42D5FBBB-3704-4A48-A400-F3DBD343F6F0}"/>
               </a:ext>
             </a:extLst>
           </p:cNvPr>
@@ -24259,7 +24259,7 @@
           <p:cNvPr id="56" name="">
             <a:extLst xmlns:a="http://schemas.openxmlformats.org/drawingml/2006/main">
               <a:ext uri="{FF2B5EF4-FFF2-40B4-BE49-F238E27FC236}">
-                <a16:creationId xmlns:a16="http://schemas.microsoft.com/office/drawing/2014/main" id="{D6E1A1BB-81D4-42FB-877C-A2CBDCBFE2AE}"/>
+                <a16:creationId xmlns:a16="http://schemas.microsoft.com/office/drawing/2014/main" id="{1E8F92BD-EFA8-44A8-99C4-49FB7F942E81}"/>
               </a:ext>
             </a:extLst>
           </p:cNvPr>
@@ -24311,7 +24311,7 @@
           <p:cNvPr id="57" name="">
             <a:extLst xmlns:a="http://schemas.openxmlformats.org/drawingml/2006/main">
               <a:ext uri="{FF2B5EF4-FFF2-40B4-BE49-F238E27FC236}">
-                <a16:creationId xmlns:a16="http://schemas.microsoft.com/office/drawing/2014/main" id="{C067B8EC-4268-4EAB-AFFE-5767D9EEA1C5}"/>
+                <a16:creationId xmlns:a16="http://schemas.microsoft.com/office/drawing/2014/main" id="{9F4E760F-2B00-4333-8517-93FB74BDEBA3}"/>
               </a:ext>
             </a:extLst>
           </p:cNvPr>
@@ -24363,7 +24363,7 @@
           <p:cNvPr id="58" name="">
             <a:extLst xmlns:a="http://schemas.openxmlformats.org/drawingml/2006/main">
               <a:ext uri="{FF2B5EF4-FFF2-40B4-BE49-F238E27FC236}">
-                <a16:creationId xmlns:a16="http://schemas.microsoft.com/office/drawing/2014/main" id="{DC662571-A6F3-437D-B8DC-B283599F32CE}"/>
+                <a16:creationId xmlns:a16="http://schemas.microsoft.com/office/drawing/2014/main" id="{B7B661B2-B6B6-4ACC-A22C-79F2D2FBF106}"/>
               </a:ext>
             </a:extLst>
           </p:cNvPr>
@@ -24415,7 +24415,7 @@
           <p:cNvPr id="59" name="">
             <a:extLst xmlns:a="http://schemas.openxmlformats.org/drawingml/2006/main">
               <a:ext uri="{FF2B5EF4-FFF2-40B4-BE49-F238E27FC236}">
-                <a16:creationId xmlns:a16="http://schemas.microsoft.com/office/drawing/2014/main" id="{00CA19B2-786E-4201-91D5-489B69A1882C}"/>
+                <a16:creationId xmlns:a16="http://schemas.microsoft.com/office/drawing/2014/main" id="{C575655E-B5DF-4ACD-9826-E8AA9F3AAF94}"/>
               </a:ext>
             </a:extLst>
           </p:cNvPr>
@@ -24467,7 +24467,7 @@
           <p:cNvPr id="60" name="">
             <a:extLst xmlns:a="http://schemas.openxmlformats.org/drawingml/2006/main">
               <a:ext uri="{FF2B5EF4-FFF2-40B4-BE49-F238E27FC236}">
-                <a16:creationId xmlns:a16="http://schemas.microsoft.com/office/drawing/2014/main" id="{3C977A3B-B97F-4EB7-916D-F4636E6DA21F}"/>
+                <a16:creationId xmlns:a16="http://schemas.microsoft.com/office/drawing/2014/main" id="{316463ED-6543-47FA-8DBF-717731426891}"/>
               </a:ext>
             </a:extLst>
           </p:cNvPr>
@@ -24519,7 +24519,7 @@
           <p:cNvPr id="61" name="">
             <a:extLst xmlns:a="http://schemas.openxmlformats.org/drawingml/2006/main">
               <a:ext uri="{FF2B5EF4-FFF2-40B4-BE49-F238E27FC236}">
-                <a16:creationId xmlns:a16="http://schemas.microsoft.com/office/drawing/2014/main" id="{942A1073-AE28-4079-8C33-7E48CA51FA8A}"/>
+                <a16:creationId xmlns:a16="http://schemas.microsoft.com/office/drawing/2014/main" id="{66AF1C09-6FF0-48BD-8C44-9BBA402BB91B}"/>
               </a:ext>
             </a:extLst>
           </p:cNvPr>
@@ -24571,7 +24571,7 @@
           <p:cNvPr id="62" name="">
             <a:extLst xmlns:a="http://schemas.openxmlformats.org/drawingml/2006/main">
               <a:ext uri="{FF2B5EF4-FFF2-40B4-BE49-F238E27FC236}">
-                <a16:creationId xmlns:a16="http://schemas.microsoft.com/office/drawing/2014/main" id="{16001F6E-E5BE-4BDB-A02A-173AA237C035}"/>
+                <a16:creationId xmlns:a16="http://schemas.microsoft.com/office/drawing/2014/main" id="{7D22EC7F-EC1F-4143-8536-E26DD217480E}"/>
               </a:ext>
             </a:extLst>
           </p:cNvPr>
@@ -24602,7 +24602,7 @@
           <p:cNvPr id="63" name="">
             <a:extLst xmlns:a="http://schemas.openxmlformats.org/drawingml/2006/main">
               <a:ext uri="{FF2B5EF4-FFF2-40B4-BE49-F238E27FC236}">
-                <a16:creationId xmlns:a16="http://schemas.microsoft.com/office/drawing/2014/main" id="{61B7FB80-B842-47C7-ADE1-D80672D79AB7}"/>
+                <a16:creationId xmlns:a16="http://schemas.microsoft.com/office/drawing/2014/main" id="{A723B9C2-5191-4F04-96C7-9B844AED2495}"/>
               </a:ext>
             </a:extLst>
           </p:cNvPr>
@@ -24633,7 +24633,7 @@
           <p:cNvPr id="64" name="">
             <a:extLst xmlns:a="http://schemas.openxmlformats.org/drawingml/2006/main">
               <a:ext uri="{FF2B5EF4-FFF2-40B4-BE49-F238E27FC236}">
-                <a16:creationId xmlns:a16="http://schemas.microsoft.com/office/drawing/2014/main" id="{33C0D57B-CCF9-493E-A7D3-EE9BD2CC3728}"/>
+                <a16:creationId xmlns:a16="http://schemas.microsoft.com/office/drawing/2014/main" id="{8841D616-B047-4B21-AE8E-7888613563F9}"/>
               </a:ext>
             </a:extLst>
           </p:cNvPr>
@@ -24685,7 +24685,7 @@
           <p:cNvPr id="65" name="">
             <a:extLst xmlns:a="http://schemas.openxmlformats.org/drawingml/2006/main">
               <a:ext uri="{FF2B5EF4-FFF2-40B4-BE49-F238E27FC236}">
-                <a16:creationId xmlns:a16="http://schemas.microsoft.com/office/drawing/2014/main" id="{084E770B-89D8-4383-925E-8837DC0B5B3B}"/>
+                <a16:creationId xmlns:a16="http://schemas.microsoft.com/office/drawing/2014/main" id="{14E046B0-48F4-4065-89CE-BB0E0F854FC4}"/>
               </a:ext>
             </a:extLst>
           </p:cNvPr>
@@ -24737,7 +24737,7 @@
           <p:cNvPr id="66" name="">
             <a:extLst xmlns:a="http://schemas.openxmlformats.org/drawingml/2006/main">
               <a:ext uri="{FF2B5EF4-FFF2-40B4-BE49-F238E27FC236}">
-                <a16:creationId xmlns:a16="http://schemas.microsoft.com/office/drawing/2014/main" id="{8EE4E87C-7395-45B8-B590-48EF3BB43B78}"/>
+                <a16:creationId xmlns:a16="http://schemas.microsoft.com/office/drawing/2014/main" id="{25AC875C-E333-4393-B02E-60F4544DC0C0}"/>
               </a:ext>
             </a:extLst>
           </p:cNvPr>
@@ -24789,7 +24789,7 @@
           <p:cNvPr id="67" name="">
             <a:extLst xmlns:a="http://schemas.openxmlformats.org/drawingml/2006/main">
               <a:ext uri="{FF2B5EF4-FFF2-40B4-BE49-F238E27FC236}">
-                <a16:creationId xmlns:a16="http://schemas.microsoft.com/office/drawing/2014/main" id="{49A426C4-8D5D-4511-8D1B-636515BCEEDE}"/>
+                <a16:creationId xmlns:a16="http://schemas.microsoft.com/office/drawing/2014/main" id="{8E4E4809-9AAE-4F02-9993-E3EB5A2AE7F3}"/>
               </a:ext>
             </a:extLst>
           </p:cNvPr>
@@ -24841,7 +24841,7 @@
           <p:cNvPr id="68" name="">
             <a:extLst xmlns:a="http://schemas.openxmlformats.org/drawingml/2006/main">
               <a:ext uri="{FF2B5EF4-FFF2-40B4-BE49-F238E27FC236}">
-                <a16:creationId xmlns:a16="http://schemas.microsoft.com/office/drawing/2014/main" id="{CB157817-9BE8-4CDB-958E-5EED8BDFF63C}"/>
+                <a16:creationId xmlns:a16="http://schemas.microsoft.com/office/drawing/2014/main" id="{442F9531-1623-4F43-8C23-3AF0346A410D}"/>
               </a:ext>
             </a:extLst>
           </p:cNvPr>
@@ -24893,7 +24893,7 @@
           <p:cNvPr id="69" name="">
             <a:extLst xmlns:a="http://schemas.openxmlformats.org/drawingml/2006/main">
               <a:ext uri="{FF2B5EF4-FFF2-40B4-BE49-F238E27FC236}">
-                <a16:creationId xmlns:a16="http://schemas.microsoft.com/office/drawing/2014/main" id="{D62F9C83-9FBC-4CF6-9C7E-FA4AF9603F67}"/>
+                <a16:creationId xmlns:a16="http://schemas.microsoft.com/office/drawing/2014/main" id="{249CF7EE-9216-45AB-ACD1-7474BC94964B}"/>
               </a:ext>
             </a:extLst>
           </p:cNvPr>
@@ -24945,7 +24945,7 @@
           <p:cNvPr id="70" name="">
             <a:extLst xmlns:a="http://schemas.openxmlformats.org/drawingml/2006/main">
               <a:ext uri="{FF2B5EF4-FFF2-40B4-BE49-F238E27FC236}">
-                <a16:creationId xmlns:a16="http://schemas.microsoft.com/office/drawing/2014/main" id="{C0276A48-A146-4483-BE14-362296B14952}"/>
+                <a16:creationId xmlns:a16="http://schemas.microsoft.com/office/drawing/2014/main" id="{028C8581-2D64-4D7D-8F06-ED7730299DD4}"/>
               </a:ext>
             </a:extLst>
           </p:cNvPr>
@@ -24997,7 +24997,7 @@
           <p:cNvPr id="71" name="">
             <a:extLst xmlns:a="http://schemas.openxmlformats.org/drawingml/2006/main">
               <a:ext uri="{FF2B5EF4-FFF2-40B4-BE49-F238E27FC236}">
-                <a16:creationId xmlns:a16="http://schemas.microsoft.com/office/drawing/2014/main" id="{AF424A55-41B7-4EA3-8635-8E47251F3991}"/>
+                <a16:creationId xmlns:a16="http://schemas.microsoft.com/office/drawing/2014/main" id="{EE8CE196-C7B5-41CE-850F-65C3A95967ED}"/>
               </a:ext>
             </a:extLst>
           </p:cNvPr>
@@ -25028,7 +25028,7 @@
           <p:cNvPr id="72" name="">
             <a:extLst xmlns:a="http://schemas.openxmlformats.org/drawingml/2006/main">
               <a:ext uri="{FF2B5EF4-FFF2-40B4-BE49-F238E27FC236}">
-                <a16:creationId xmlns:a16="http://schemas.microsoft.com/office/drawing/2014/main" id="{648A1416-B844-4073-810B-6E09D01C3BC7}"/>
+                <a16:creationId xmlns:a16="http://schemas.microsoft.com/office/drawing/2014/main" id="{21E420F7-19E7-47F0-9C64-0D66BDBAFD2B}"/>
               </a:ext>
             </a:extLst>
           </p:cNvPr>
@@ -25080,7 +25080,7 @@
           <p:cNvPr id="73" name="">
             <a:extLst xmlns:a="http://schemas.openxmlformats.org/drawingml/2006/main">
               <a:ext uri="{FF2B5EF4-FFF2-40B4-BE49-F238E27FC236}">
-                <a16:creationId xmlns:a16="http://schemas.microsoft.com/office/drawing/2014/main" id="{D0A6610C-C3B3-4FFB-B84C-AB2A8CBCB802}"/>
+                <a16:creationId xmlns:a16="http://schemas.microsoft.com/office/drawing/2014/main" id="{39CAD1BF-A707-4A92-A41C-B06DD0508FA9}"/>
               </a:ext>
             </a:extLst>
           </p:cNvPr>
@@ -25132,7 +25132,7 @@
           <p:cNvPr id="74" name="">
             <a:extLst xmlns:a="http://schemas.openxmlformats.org/drawingml/2006/main">
               <a:ext uri="{FF2B5EF4-FFF2-40B4-BE49-F238E27FC236}">
-                <a16:creationId xmlns:a16="http://schemas.microsoft.com/office/drawing/2014/main" id="{B8289030-BBF7-4741-981A-89E9EBE83B49}"/>
+                <a16:creationId xmlns:a16="http://schemas.microsoft.com/office/drawing/2014/main" id="{DB541383-85E1-41D0-A3B6-4D9ECB376B24}"/>
               </a:ext>
             </a:extLst>
           </p:cNvPr>
@@ -25184,7 +25184,7 @@
           <p:cNvPr id="75" name="">
             <a:extLst xmlns:a="http://schemas.openxmlformats.org/drawingml/2006/main">
               <a:ext uri="{FF2B5EF4-FFF2-40B4-BE49-F238E27FC236}">
-                <a16:creationId xmlns:a16="http://schemas.microsoft.com/office/drawing/2014/main" id="{9F04B56B-E461-4A8A-BB1F-A03400079AF7}"/>
+                <a16:creationId xmlns:a16="http://schemas.microsoft.com/office/drawing/2014/main" id="{21597937-762F-4425-8ADF-EA06B3C22C16}"/>
               </a:ext>
             </a:extLst>
           </p:cNvPr>
@@ -25236,7 +25236,7 @@
           <p:cNvPr id="76" name="">
             <a:extLst xmlns:a="http://schemas.openxmlformats.org/drawingml/2006/main">
               <a:ext uri="{FF2B5EF4-FFF2-40B4-BE49-F238E27FC236}">
-                <a16:creationId xmlns:a16="http://schemas.microsoft.com/office/drawing/2014/main" id="{919D6EF7-C65E-4CA7-A098-D3AABEC31BD9}"/>
+                <a16:creationId xmlns:a16="http://schemas.microsoft.com/office/drawing/2014/main" id="{95236AD4-5F89-440D-85C8-83FAE2224229}"/>
               </a:ext>
             </a:extLst>
           </p:cNvPr>
@@ -25288,7 +25288,7 @@
           <p:cNvPr id="77" name="">
             <a:extLst xmlns:a="http://schemas.openxmlformats.org/drawingml/2006/main">
               <a:ext uri="{FF2B5EF4-FFF2-40B4-BE49-F238E27FC236}">
-                <a16:creationId xmlns:a16="http://schemas.microsoft.com/office/drawing/2014/main" id="{8E3116AE-40D5-4C96-A23B-3330A69EC322}"/>
+                <a16:creationId xmlns:a16="http://schemas.microsoft.com/office/drawing/2014/main" id="{2B9F44D1-322D-4996-BAC1-5E4F665B53BA}"/>
               </a:ext>
             </a:extLst>
           </p:cNvPr>
@@ -25340,7 +25340,7 @@
           <p:cNvPr id="78" name="">
             <a:extLst xmlns:a="http://schemas.openxmlformats.org/drawingml/2006/main">
               <a:ext uri="{FF2B5EF4-FFF2-40B4-BE49-F238E27FC236}">
-                <a16:creationId xmlns:a16="http://schemas.microsoft.com/office/drawing/2014/main" id="{386FCB66-5F14-40DF-B64A-9F31AEBBF5DE}"/>
+                <a16:creationId xmlns:a16="http://schemas.microsoft.com/office/drawing/2014/main" id="{681EE1A5-2DCE-4724-888D-8B145A03FAD9}"/>
               </a:ext>
             </a:extLst>
           </p:cNvPr>
@@ -25392,7 +25392,7 @@
           <p:cNvPr id="79" name="">
             <a:extLst xmlns:a="http://schemas.openxmlformats.org/drawingml/2006/main">
               <a:ext uri="{FF2B5EF4-FFF2-40B4-BE49-F238E27FC236}">
-                <a16:creationId xmlns:a16="http://schemas.microsoft.com/office/drawing/2014/main" id="{EC5EAC30-4580-47A5-8103-2FD3259D58D5}"/>
+                <a16:creationId xmlns:a16="http://schemas.microsoft.com/office/drawing/2014/main" id="{8F0EB74D-DBFD-49CB-93EB-2CB1C3E279C1}"/>
               </a:ext>
             </a:extLst>
           </p:cNvPr>
@@ -25423,7 +25423,7 @@
           <p:cNvPr id="80" name="">
             <a:extLst xmlns:a="http://schemas.openxmlformats.org/drawingml/2006/main">
               <a:ext uri="{FF2B5EF4-FFF2-40B4-BE49-F238E27FC236}">
-                <a16:creationId xmlns:a16="http://schemas.microsoft.com/office/drawing/2014/main" id="{C1D3A6DE-A32C-4080-BC90-BF6B0A0BE946}"/>
+                <a16:creationId xmlns:a16="http://schemas.microsoft.com/office/drawing/2014/main" id="{8D22EE4A-31E4-4FEA-84E6-D34FC0DE6DB9}"/>
               </a:ext>
             </a:extLst>
           </p:cNvPr>
@@ -25454,7 +25454,7 @@
           <p:cNvPr id="81" name="">
             <a:extLst xmlns:a="http://schemas.openxmlformats.org/drawingml/2006/main">
               <a:ext uri="{FF2B5EF4-FFF2-40B4-BE49-F238E27FC236}">
-                <a16:creationId xmlns:a16="http://schemas.microsoft.com/office/drawing/2014/main" id="{67D4DDF0-C6C1-4CB3-83A1-E90480CF0DA1}"/>
+                <a16:creationId xmlns:a16="http://schemas.microsoft.com/office/drawing/2014/main" id="{2A5BD854-E2C3-4790-92A9-32B9A9BD0DB8}"/>
               </a:ext>
             </a:extLst>
           </p:cNvPr>
@@ -25506,7 +25506,7 @@
           <p:cNvPr id="82" name="">
             <a:extLst xmlns:a="http://schemas.openxmlformats.org/drawingml/2006/main">
               <a:ext uri="{FF2B5EF4-FFF2-40B4-BE49-F238E27FC236}">
-                <a16:creationId xmlns:a16="http://schemas.microsoft.com/office/drawing/2014/main" id="{4E2597E6-5568-4EBA-B418-B1B261E514D1}"/>
+                <a16:creationId xmlns:a16="http://schemas.microsoft.com/office/drawing/2014/main" id="{639227BE-0110-4681-9A39-A2108DD5ADC5}"/>
               </a:ext>
             </a:extLst>
           </p:cNvPr>
@@ -25558,7 +25558,7 @@
           <p:cNvPr id="83" name="">
             <a:extLst xmlns:a="http://schemas.openxmlformats.org/drawingml/2006/main">
               <a:ext uri="{FF2B5EF4-FFF2-40B4-BE49-F238E27FC236}">
-                <a16:creationId xmlns:a16="http://schemas.microsoft.com/office/drawing/2014/main" id="{F17C8CCB-7A43-40B8-ABB0-D5E8D48AD0AE}"/>
+                <a16:creationId xmlns:a16="http://schemas.microsoft.com/office/drawing/2014/main" id="{C0AD5F9E-23EE-4AAB-9FD8-F909C29EA68D}"/>
               </a:ext>
             </a:extLst>
           </p:cNvPr>
@@ -25610,7 +25610,7 @@
           <p:cNvPr id="84" name="">
             <a:extLst xmlns:a="http://schemas.openxmlformats.org/drawingml/2006/main">
               <a:ext uri="{FF2B5EF4-FFF2-40B4-BE49-F238E27FC236}">
-                <a16:creationId xmlns:a16="http://schemas.microsoft.com/office/drawing/2014/main" id="{DD125F94-19BE-4F88-BE20-E87F79460B61}"/>
+                <a16:creationId xmlns:a16="http://schemas.microsoft.com/office/drawing/2014/main" id="{F7534329-9329-49A6-ACB4-3A7A65296D94}"/>
               </a:ext>
             </a:extLst>
           </p:cNvPr>
@@ -25662,7 +25662,7 @@
           <p:cNvPr id="85" name="">
             <a:extLst xmlns:a="http://schemas.openxmlformats.org/drawingml/2006/main">
               <a:ext uri="{FF2B5EF4-FFF2-40B4-BE49-F238E27FC236}">
-                <a16:creationId xmlns:a16="http://schemas.microsoft.com/office/drawing/2014/main" id="{A3806F4C-30C2-4832-AC19-7B235C0CD7E7}"/>
+                <a16:creationId xmlns:a16="http://schemas.microsoft.com/office/drawing/2014/main" id="{3C200D8C-0F13-4878-8672-D82A504E5DA1}"/>
               </a:ext>
             </a:extLst>
           </p:cNvPr>
@@ -25714,7 +25714,7 @@
           <p:cNvPr id="86" name="">
             <a:extLst xmlns:a="http://schemas.openxmlformats.org/drawingml/2006/main">
               <a:ext uri="{FF2B5EF4-FFF2-40B4-BE49-F238E27FC236}">
-                <a16:creationId xmlns:a16="http://schemas.microsoft.com/office/drawing/2014/main" id="{EE8C51F9-F65D-4598-9102-71A7BA875877}"/>
+                <a16:creationId xmlns:a16="http://schemas.microsoft.com/office/drawing/2014/main" id="{9CE9AE12-7C6A-452B-9121-CD2B5F9450D2}"/>
               </a:ext>
             </a:extLst>
           </p:cNvPr>
@@ -25766,7 +25766,7 @@
           <p:cNvPr id="87" name="">
             <a:extLst xmlns:a="http://schemas.openxmlformats.org/drawingml/2006/main">
               <a:ext uri="{FF2B5EF4-FFF2-40B4-BE49-F238E27FC236}">
-                <a16:creationId xmlns:a16="http://schemas.microsoft.com/office/drawing/2014/main" id="{7D094299-BE69-47A5-8EA1-A0CD8E15ECCF}"/>
+                <a16:creationId xmlns:a16="http://schemas.microsoft.com/office/drawing/2014/main" id="{FFA50902-E990-4F65-8D1F-23DD5BDE6FB6}"/>
               </a:ext>
             </a:extLst>
           </p:cNvPr>
@@ -25818,7 +25818,7 @@
           <p:cNvPr id="88" name="">
             <a:extLst xmlns:a="http://schemas.openxmlformats.org/drawingml/2006/main">
               <a:ext uri="{FF2B5EF4-FFF2-40B4-BE49-F238E27FC236}">
-                <a16:creationId xmlns:a16="http://schemas.microsoft.com/office/drawing/2014/main" id="{A40745C1-E494-4FFF-B8C9-861B0CB41BF6}"/>
+                <a16:creationId xmlns:a16="http://schemas.microsoft.com/office/drawing/2014/main" id="{CDA411EA-81CF-4438-85C3-460CF529775F}"/>
               </a:ext>
             </a:extLst>
           </p:cNvPr>
@@ -25849,7 +25849,7 @@
           <p:cNvPr id="89" name="">
             <a:extLst xmlns:a="http://schemas.openxmlformats.org/drawingml/2006/main">
               <a:ext uri="{FF2B5EF4-FFF2-40B4-BE49-F238E27FC236}">
-                <a16:creationId xmlns:a16="http://schemas.microsoft.com/office/drawing/2014/main" id="{EA717C89-D43F-434E-AA8B-C678A1E1E839}"/>
+                <a16:creationId xmlns:a16="http://schemas.microsoft.com/office/drawing/2014/main" id="{BB3E6A22-996D-40E8-A074-43A8AD8D38FF}"/>
               </a:ext>
             </a:extLst>
           </p:cNvPr>
@@ -25901,7 +25901,7 @@
           <p:cNvPr id="90" name="">
             <a:extLst xmlns:a="http://schemas.openxmlformats.org/drawingml/2006/main">
               <a:ext uri="{FF2B5EF4-FFF2-40B4-BE49-F238E27FC236}">
-                <a16:creationId xmlns:a16="http://schemas.microsoft.com/office/drawing/2014/main" id="{2C73FB12-04EF-4482-9067-6CF7614894AA}"/>
+                <a16:creationId xmlns:a16="http://schemas.microsoft.com/office/drawing/2014/main" id="{39ED99D7-ED74-49E8-BE1B-EFDDE5601D57}"/>
               </a:ext>
             </a:extLst>
           </p:cNvPr>
@@ -25953,7 +25953,7 @@
           <p:cNvPr id="91" name="">
             <a:extLst xmlns:a="http://schemas.openxmlformats.org/drawingml/2006/main">
               <a:ext uri="{FF2B5EF4-FFF2-40B4-BE49-F238E27FC236}">
-                <a16:creationId xmlns:a16="http://schemas.microsoft.com/office/drawing/2014/main" id="{DFD23941-E132-4C3D-AA88-24DA32EE2876}"/>
+                <a16:creationId xmlns:a16="http://schemas.microsoft.com/office/drawing/2014/main" id="{821BCCB3-6746-4ACC-9E90-2F9A68C1BCE1}"/>
               </a:ext>
             </a:extLst>
           </p:cNvPr>
@@ -26005,7 +26005,7 @@
           <p:cNvPr id="92" name="">
             <a:extLst xmlns:a="http://schemas.openxmlformats.org/drawingml/2006/main">
               <a:ext uri="{FF2B5EF4-FFF2-40B4-BE49-F238E27FC236}">
-                <a16:creationId xmlns:a16="http://schemas.microsoft.com/office/drawing/2014/main" id="{914F502F-A700-4EA6-8800-1093C62972C6}"/>
+                <a16:creationId xmlns:a16="http://schemas.microsoft.com/office/drawing/2014/main" id="{EA060ED1-602F-4108-A744-75CC5EF38D44}"/>
               </a:ext>
             </a:extLst>
           </p:cNvPr>
@@ -26057,7 +26057,7 @@
           <p:cNvPr id="93" name="">
             <a:extLst xmlns:a="http://schemas.openxmlformats.org/drawingml/2006/main">
               <a:ext uri="{FF2B5EF4-FFF2-40B4-BE49-F238E27FC236}">
-                <a16:creationId xmlns:a16="http://schemas.microsoft.com/office/drawing/2014/main" id="{0EF6E06A-8862-4579-8CEA-B129C8EB4183}"/>
+                <a16:creationId xmlns:a16="http://schemas.microsoft.com/office/drawing/2014/main" id="{9169073E-EA9E-4A4F-9D0C-8CC34E137765}"/>
               </a:ext>
             </a:extLst>
           </p:cNvPr>
@@ -26109,7 +26109,7 @@
           <p:cNvPr id="94" name="">
             <a:extLst xmlns:a="http://schemas.openxmlformats.org/drawingml/2006/main">
               <a:ext uri="{FF2B5EF4-FFF2-40B4-BE49-F238E27FC236}">
-                <a16:creationId xmlns:a16="http://schemas.microsoft.com/office/drawing/2014/main" id="{053CEF2B-74CA-4FFF-B466-609656543250}"/>
+                <a16:creationId xmlns:a16="http://schemas.microsoft.com/office/drawing/2014/main" id="{4E44B610-2FC4-4314-BFF0-85DCBD4F58AB}"/>
               </a:ext>
             </a:extLst>
           </p:cNvPr>
@@ -26161,7 +26161,7 @@
           <p:cNvPr id="95" name="">
             <a:extLst xmlns:a="http://schemas.openxmlformats.org/drawingml/2006/main">
               <a:ext uri="{FF2B5EF4-FFF2-40B4-BE49-F238E27FC236}">
-                <a16:creationId xmlns:a16="http://schemas.microsoft.com/office/drawing/2014/main" id="{16F0A857-43B3-4A72-9E45-3E2E2C8C98A7}"/>
+                <a16:creationId xmlns:a16="http://schemas.microsoft.com/office/drawing/2014/main" id="{63742D4A-6D6B-48CB-B25C-E459AB0B4C68}"/>
               </a:ext>
             </a:extLst>
           </p:cNvPr>
@@ -26213,7 +26213,7 @@
           <p:cNvPr id="96" name="">
             <a:extLst xmlns:a="http://schemas.openxmlformats.org/drawingml/2006/main">
               <a:ext uri="{FF2B5EF4-FFF2-40B4-BE49-F238E27FC236}">
-                <a16:creationId xmlns:a16="http://schemas.microsoft.com/office/drawing/2014/main" id="{02BFC8AF-2255-45FE-9346-AA85B243AEC2}"/>
+                <a16:creationId xmlns:a16="http://schemas.microsoft.com/office/drawing/2014/main" id="{05EF63B0-05F2-49B7-BF55-2591D306E71E}"/>
               </a:ext>
             </a:extLst>
           </p:cNvPr>
@@ -26244,7 +26244,7 @@
           <p:cNvPr id="97" name="">
             <a:extLst xmlns:a="http://schemas.openxmlformats.org/drawingml/2006/main">
               <a:ext uri="{FF2B5EF4-FFF2-40B4-BE49-F238E27FC236}">
-                <a16:creationId xmlns:a16="http://schemas.microsoft.com/office/drawing/2014/main" id="{482DFB83-1488-4B91-8E5E-9BE9E7C2B97C}"/>
+                <a16:creationId xmlns:a16="http://schemas.microsoft.com/office/drawing/2014/main" id="{DE1B5271-AAB7-4AA5-800E-F671876530ED}"/>
               </a:ext>
             </a:extLst>
           </p:cNvPr>
@@ -26275,7 +26275,7 @@
           <p:cNvPr id="98" name="">
             <a:extLst xmlns:a="http://schemas.openxmlformats.org/drawingml/2006/main">
               <a:ext uri="{FF2B5EF4-FFF2-40B4-BE49-F238E27FC236}">
-                <a16:creationId xmlns:a16="http://schemas.microsoft.com/office/drawing/2014/main" id="{4D0A6071-6A7F-4745-A657-604A959AEAB0}"/>
+                <a16:creationId xmlns:a16="http://schemas.microsoft.com/office/drawing/2014/main" id="{3A03227F-E13F-466E-A3F2-B68F12040DEA}"/>
               </a:ext>
             </a:extLst>
           </p:cNvPr>
@@ -26327,7 +26327,7 @@
           <p:cNvPr id="99" name="">
             <a:extLst xmlns:a="http://schemas.openxmlformats.org/drawingml/2006/main">
               <a:ext uri="{FF2B5EF4-FFF2-40B4-BE49-F238E27FC236}">
-                <a16:creationId xmlns:a16="http://schemas.microsoft.com/office/drawing/2014/main" id="{9DF31B4E-A415-4667-B444-94AAA0C446E4}"/>
+                <a16:creationId xmlns:a16="http://schemas.microsoft.com/office/drawing/2014/main" id="{1E773FEE-3BF1-43F5-829D-73B57F7E39A6}"/>
               </a:ext>
             </a:extLst>
           </p:cNvPr>
@@ -26379,7 +26379,7 @@
           <p:cNvPr id="100" name="">
             <a:extLst xmlns:a="http://schemas.openxmlformats.org/drawingml/2006/main">
               <a:ext uri="{FF2B5EF4-FFF2-40B4-BE49-F238E27FC236}">
-                <a16:creationId xmlns:a16="http://schemas.microsoft.com/office/drawing/2014/main" id="{12EA2F1E-8640-46F7-828C-BD5596417CDE}"/>
+                <a16:creationId xmlns:a16="http://schemas.microsoft.com/office/drawing/2014/main" id="{7054150B-C1D4-4D2C-8B15-A88125B9328C}"/>
               </a:ext>
             </a:extLst>
           </p:cNvPr>
@@ -26431,7 +26431,7 @@
           <p:cNvPr id="101" name="">
             <a:extLst xmlns:a="http://schemas.openxmlformats.org/drawingml/2006/main">
               <a:ext uri="{FF2B5EF4-FFF2-40B4-BE49-F238E27FC236}">
-                <a16:creationId xmlns:a16="http://schemas.microsoft.com/office/drawing/2014/main" id="{033D5BBE-BA51-4373-9F1B-8C16DB50AF54}"/>
+                <a16:creationId xmlns:a16="http://schemas.microsoft.com/office/drawing/2014/main" id="{9E1377D9-FDE0-4BE0-B64A-C1FF4AB42653}"/>
               </a:ext>
             </a:extLst>
           </p:cNvPr>
@@ -26483,7 +26483,7 @@
           <p:cNvPr id="102" name="">
             <a:extLst xmlns:a="http://schemas.openxmlformats.org/drawingml/2006/main">
               <a:ext uri="{FF2B5EF4-FFF2-40B4-BE49-F238E27FC236}">
-                <a16:creationId xmlns:a16="http://schemas.microsoft.com/office/drawing/2014/main" id="{D3590421-4F1F-4D90-8E9D-743D5B175D10}"/>
+                <a16:creationId xmlns:a16="http://schemas.microsoft.com/office/drawing/2014/main" id="{67846F32-D988-4263-B205-17021B34F35E}"/>
               </a:ext>
             </a:extLst>
           </p:cNvPr>
@@ -26535,7 +26535,7 @@
           <p:cNvPr id="103" name="">
             <a:extLst xmlns:a="http://schemas.openxmlformats.org/drawingml/2006/main">
               <a:ext uri="{FF2B5EF4-FFF2-40B4-BE49-F238E27FC236}">
-                <a16:creationId xmlns:a16="http://schemas.microsoft.com/office/drawing/2014/main" id="{351404A2-45BB-4B60-BE98-B830B996A32C}"/>
+                <a16:creationId xmlns:a16="http://schemas.microsoft.com/office/drawing/2014/main" id="{CEC3E4C0-29D6-4237-9D72-06BE709621E2}"/>
               </a:ext>
             </a:extLst>
           </p:cNvPr>
@@ -26587,7 +26587,7 @@
           <p:cNvPr id="104" name="">
             <a:extLst xmlns:a="http://schemas.openxmlformats.org/drawingml/2006/main">
               <a:ext uri="{FF2B5EF4-FFF2-40B4-BE49-F238E27FC236}">
-                <a16:creationId xmlns:a16="http://schemas.microsoft.com/office/drawing/2014/main" id="{4DEDBB77-CF7C-4B7D-B715-3DF5EA5C1D9B}"/>
+                <a16:creationId xmlns:a16="http://schemas.microsoft.com/office/drawing/2014/main" id="{3B340820-751D-4D8F-B9DF-C8399C629404}"/>
               </a:ext>
             </a:extLst>
           </p:cNvPr>
@@ -26639,7 +26639,7 @@
           <p:cNvPr id="105" name="">
             <a:extLst xmlns:a="http://schemas.openxmlformats.org/drawingml/2006/main">
               <a:ext uri="{FF2B5EF4-FFF2-40B4-BE49-F238E27FC236}">
-                <a16:creationId xmlns:a16="http://schemas.microsoft.com/office/drawing/2014/main" id="{A7672773-76D0-45CA-BEDA-0BB2F422F297}"/>
+                <a16:creationId xmlns:a16="http://schemas.microsoft.com/office/drawing/2014/main" id="{9EC3373C-B6A7-4F75-B6DC-1B0A8C3FAA33}"/>
               </a:ext>
             </a:extLst>
           </p:cNvPr>
@@ -26670,7 +26670,7 @@
           <p:cNvPr id="106" name="">
             <a:extLst xmlns:a="http://schemas.openxmlformats.org/drawingml/2006/main">
               <a:ext uri="{FF2B5EF4-FFF2-40B4-BE49-F238E27FC236}">
-                <a16:creationId xmlns:a16="http://schemas.microsoft.com/office/drawing/2014/main" id="{22434DB4-468E-44EB-877C-4750CE9247D7}"/>
+                <a16:creationId xmlns:a16="http://schemas.microsoft.com/office/drawing/2014/main" id="{57FAE21B-7080-4E88-9289-7833C337C854}"/>
               </a:ext>
             </a:extLst>
           </p:cNvPr>
@@ -26722,7 +26722,7 @@
           <p:cNvPr id="107" name="">
             <a:extLst xmlns:a="http://schemas.openxmlformats.org/drawingml/2006/main">
               <a:ext uri="{FF2B5EF4-FFF2-40B4-BE49-F238E27FC236}">
-                <a16:creationId xmlns:a16="http://schemas.microsoft.com/office/drawing/2014/main" id="{E486271C-8558-4B25-A9B1-472CB2124110}"/>
+                <a16:creationId xmlns:a16="http://schemas.microsoft.com/office/drawing/2014/main" id="{D077D480-D43A-4E36-84ED-9BB6B975A4AB}"/>
               </a:ext>
             </a:extLst>
           </p:cNvPr>
@@ -26774,7 +26774,7 @@
           <p:cNvPr id="108" name="">
             <a:extLst xmlns:a="http://schemas.openxmlformats.org/drawingml/2006/main">
               <a:ext uri="{FF2B5EF4-FFF2-40B4-BE49-F238E27FC236}">
-                <a16:creationId xmlns:a16="http://schemas.microsoft.com/office/drawing/2014/main" id="{09CA54EA-0BF9-4EE1-B8E8-A6B0E8164C46}"/>
+                <a16:creationId xmlns:a16="http://schemas.microsoft.com/office/drawing/2014/main" id="{CC29DD52-D1C7-4342-A344-F0253F0A3BDF}"/>
               </a:ext>
             </a:extLst>
           </p:cNvPr>
@@ -26826,7 +26826,7 @@
           <p:cNvPr id="109" name="">
             <a:extLst xmlns:a="http://schemas.openxmlformats.org/drawingml/2006/main">
               <a:ext uri="{FF2B5EF4-FFF2-40B4-BE49-F238E27FC236}">
-                <a16:creationId xmlns:a16="http://schemas.microsoft.com/office/drawing/2014/main" id="{4F021719-4217-4C67-A1B0-3159352C3CEE}"/>
+                <a16:creationId xmlns:a16="http://schemas.microsoft.com/office/drawing/2014/main" id="{47430FE2-4DDA-4F56-93C5-2D26E682D300}"/>
               </a:ext>
             </a:extLst>
           </p:cNvPr>
@@ -26878,7 +26878,7 @@
           <p:cNvPr id="110" name="">
             <a:extLst xmlns:a="http://schemas.openxmlformats.org/drawingml/2006/main">
               <a:ext uri="{FF2B5EF4-FFF2-40B4-BE49-F238E27FC236}">
-                <a16:creationId xmlns:a16="http://schemas.microsoft.com/office/drawing/2014/main" id="{5C820C0A-CFA1-4D95-8004-C6493FDA46B6}"/>
+                <a16:creationId xmlns:a16="http://schemas.microsoft.com/office/drawing/2014/main" id="{C39A8352-012F-4F52-A07E-22FA147AF4C9}"/>
               </a:ext>
             </a:extLst>
           </p:cNvPr>
@@ -26930,7 +26930,7 @@
           <p:cNvPr id="111" name="">
             <a:extLst xmlns:a="http://schemas.openxmlformats.org/drawingml/2006/main">
               <a:ext uri="{FF2B5EF4-FFF2-40B4-BE49-F238E27FC236}">
-                <a16:creationId xmlns:a16="http://schemas.microsoft.com/office/drawing/2014/main" id="{5C2A74D7-1CAE-4B5D-BE72-E9D0361466E6}"/>
+                <a16:creationId xmlns:a16="http://schemas.microsoft.com/office/drawing/2014/main" id="{85D47812-039E-467D-997C-97E3A8D68674}"/>
               </a:ext>
             </a:extLst>
           </p:cNvPr>
@@ -26982,7 +26982,7 @@
           <p:cNvPr id="112" name="">
             <a:extLst xmlns:a="http://schemas.openxmlformats.org/drawingml/2006/main">
               <a:ext uri="{FF2B5EF4-FFF2-40B4-BE49-F238E27FC236}">
-                <a16:creationId xmlns:a16="http://schemas.microsoft.com/office/drawing/2014/main" id="{7AC92ADD-AF47-40D8-BF0F-0EFE850BB0ED}"/>
+                <a16:creationId xmlns:a16="http://schemas.microsoft.com/office/drawing/2014/main" id="{BC590889-3965-43BC-AEC1-E98D4E258B0C}"/>
               </a:ext>
             </a:extLst>
           </p:cNvPr>
@@ -27034,7 +27034,7 @@
           <p:cNvPr id="113" name="">
             <a:extLst xmlns:a="http://schemas.openxmlformats.org/drawingml/2006/main">
               <a:ext uri="{FF2B5EF4-FFF2-40B4-BE49-F238E27FC236}">
-                <a16:creationId xmlns:a16="http://schemas.microsoft.com/office/drawing/2014/main" id="{7751C266-51A8-4B7D-A372-DC6D3AA2D174}"/>
+                <a16:creationId xmlns:a16="http://schemas.microsoft.com/office/drawing/2014/main" id="{3AEBB0CE-875F-4000-ABB9-F67388598559}"/>
               </a:ext>
             </a:extLst>
           </p:cNvPr>
@@ -27065,7 +27065,7 @@
           <p:cNvPr id="114" name="">
             <a:extLst xmlns:a="http://schemas.openxmlformats.org/drawingml/2006/main">
               <a:ext uri="{FF2B5EF4-FFF2-40B4-BE49-F238E27FC236}">
-                <a16:creationId xmlns:a16="http://schemas.microsoft.com/office/drawing/2014/main" id="{B806718B-1FE1-4C37-9D49-678F3C3FE57E}"/>
+                <a16:creationId xmlns:a16="http://schemas.microsoft.com/office/drawing/2014/main" id="{D4D5359F-5EB3-4654-B7EC-2CA0C5E00626}"/>
               </a:ext>
             </a:extLst>
           </p:cNvPr>
@@ -27096,7 +27096,7 @@
           <p:cNvPr id="115" name="">
             <a:extLst xmlns:a="http://schemas.openxmlformats.org/drawingml/2006/main">
               <a:ext uri="{FF2B5EF4-FFF2-40B4-BE49-F238E27FC236}">
-                <a16:creationId xmlns:a16="http://schemas.microsoft.com/office/drawing/2014/main" id="{8E502018-C324-4E3B-9077-1DF64FB25D3F}"/>
+                <a16:creationId xmlns:a16="http://schemas.microsoft.com/office/drawing/2014/main" id="{ABB3F4BA-DE56-4D38-A82C-23733531E39C}"/>
               </a:ext>
             </a:extLst>
           </p:cNvPr>
@@ -27148,7 +27148,7 @@
           <p:cNvPr id="116" name="">
             <a:extLst xmlns:a="http://schemas.openxmlformats.org/drawingml/2006/main">
               <a:ext uri="{FF2B5EF4-FFF2-40B4-BE49-F238E27FC236}">
-                <a16:creationId xmlns:a16="http://schemas.microsoft.com/office/drawing/2014/main" id="{86679D74-E124-4C4D-9F37-C415E0C421A0}"/>
+                <a16:creationId xmlns:a16="http://schemas.microsoft.com/office/drawing/2014/main" id="{05387A0C-37B4-4423-AB6E-7AC559A8C1AF}"/>
               </a:ext>
             </a:extLst>
           </p:cNvPr>
@@ -27200,7 +27200,7 @@
           <p:cNvPr id="117" name="">
             <a:extLst xmlns:a="http://schemas.openxmlformats.org/drawingml/2006/main">
               <a:ext uri="{FF2B5EF4-FFF2-40B4-BE49-F238E27FC236}">
-                <a16:creationId xmlns:a16="http://schemas.microsoft.com/office/drawing/2014/main" id="{707E9444-3FBC-41F2-AC0D-B700B072860C}"/>
+                <a16:creationId xmlns:a16="http://schemas.microsoft.com/office/drawing/2014/main" id="{416C1655-714E-4C78-BE55-8D483F0FE688}"/>
               </a:ext>
             </a:extLst>
           </p:cNvPr>
@@ -27252,7 +27252,7 @@
           <p:cNvPr id="118" name="">
             <a:extLst xmlns:a="http://schemas.openxmlformats.org/drawingml/2006/main">
               <a:ext uri="{FF2B5EF4-FFF2-40B4-BE49-F238E27FC236}">
-                <a16:creationId xmlns:a16="http://schemas.microsoft.com/office/drawing/2014/main" id="{16ECE593-836C-48EB-8D3B-BCCD740795D6}"/>
+                <a16:creationId xmlns:a16="http://schemas.microsoft.com/office/drawing/2014/main" id="{8FEEF5D7-1D89-46C7-8862-19D8F7A2C410}"/>
               </a:ext>
             </a:extLst>
           </p:cNvPr>
@@ -27304,7 +27304,7 @@
           <p:cNvPr id="119" name="">
             <a:extLst xmlns:a="http://schemas.openxmlformats.org/drawingml/2006/main">
               <a:ext uri="{FF2B5EF4-FFF2-40B4-BE49-F238E27FC236}">
-                <a16:creationId xmlns:a16="http://schemas.microsoft.com/office/drawing/2014/main" id="{E77261F2-751D-4206-BD37-FEABAADC7EEF}"/>
+                <a16:creationId xmlns:a16="http://schemas.microsoft.com/office/drawing/2014/main" id="{8330A0C5-E0BB-4322-842D-042441D4B043}"/>
               </a:ext>
             </a:extLst>
           </p:cNvPr>
@@ -27356,7 +27356,7 @@
           <p:cNvPr id="120" name="">
             <a:extLst xmlns:a="http://schemas.openxmlformats.org/drawingml/2006/main">
               <a:ext uri="{FF2B5EF4-FFF2-40B4-BE49-F238E27FC236}">
-                <a16:creationId xmlns:a16="http://schemas.microsoft.com/office/drawing/2014/main" id="{A2A1408C-37F1-480E-935E-AE964D068651}"/>
+                <a16:creationId xmlns:a16="http://schemas.microsoft.com/office/drawing/2014/main" id="{E0D68D01-1310-4626-811B-AF9934547D6D}"/>
               </a:ext>
             </a:extLst>
           </p:cNvPr>
@@ -27408,7 +27408,7 @@
           <p:cNvPr id="121" name="">
             <a:extLst xmlns:a="http://schemas.openxmlformats.org/drawingml/2006/main">
               <a:ext uri="{FF2B5EF4-FFF2-40B4-BE49-F238E27FC236}">
-                <a16:creationId xmlns:a16="http://schemas.microsoft.com/office/drawing/2014/main" id="{D7F62AA2-627F-4F69-90A4-AF497A8F12CC}"/>
+                <a16:creationId xmlns:a16="http://schemas.microsoft.com/office/drawing/2014/main" id="{526CBB19-0EB6-45FE-AA82-5AB74F12D909}"/>
               </a:ext>
             </a:extLst>
           </p:cNvPr>
@@ -27458,7 +27458,7 @@
     </p:spTree>
     <p:extLst>
       <p:ext uri="{BB962C8B-B14F-4D97-AF65-F5344CB8AC3E}">
-        <p14:creationId xmlns:p14="http://schemas.microsoft.com/office/powerpoint/2010/main" val="1458670402"/>
+        <p14:creationId xmlns:p14="http://schemas.microsoft.com/office/powerpoint/2010/main" val="1185475387"/>
       </p:ext>
     </p:extLst>
   </p:cSld>
@@ -27489,7 +27489,7 @@
           <p:cNvPr id="9" name="">
             <a:extLst xmlns:a="http://schemas.openxmlformats.org/drawingml/2006/main">
               <a:ext uri="{FF2B5EF4-FFF2-40B4-BE49-F238E27FC236}">
-                <a16:creationId xmlns:a16="http://schemas.microsoft.com/office/drawing/2014/main" id="{247F1201-595B-4837-8DA6-38C26180EDEC}"/>
+                <a16:creationId xmlns:a16="http://schemas.microsoft.com/office/drawing/2014/main" id="{193D4B5D-C9D1-4487-9842-688793408CC4}"/>
               </a:ext>
             </a:extLst>
           </p:cNvPr>
@@ -27522,7 +27522,7 @@
           <p:cNvPr id="2" name="">
             <a:extLst xmlns:a="http://schemas.openxmlformats.org/drawingml/2006/main">
               <a:ext uri="{FF2B5EF4-FFF2-40B4-BE49-F238E27FC236}">
-                <a16:creationId xmlns:a16="http://schemas.microsoft.com/office/drawing/2014/main" id="{775480F1-7F05-4D02-A807-1A5315389CB1}"/>
+                <a16:creationId xmlns:a16="http://schemas.microsoft.com/office/drawing/2014/main" id="{DDBB1645-F4C0-4E5A-9446-DD01457B8BFF}"/>
               </a:ext>
             </a:extLst>
           </p:cNvPr>
@@ -27553,7 +27553,7 @@
           <p:cNvPr id="3" name="">
             <a:extLst xmlns:a="http://schemas.openxmlformats.org/drawingml/2006/main">
               <a:ext uri="{FF2B5EF4-FFF2-40B4-BE49-F238E27FC236}">
-                <a16:creationId xmlns:a16="http://schemas.microsoft.com/office/drawing/2014/main" id="{AF52035F-7045-4A74-BFCF-B32BF4F5756C}"/>
+                <a16:creationId xmlns:a16="http://schemas.microsoft.com/office/drawing/2014/main" id="{38BF0894-BAC2-48B4-99E2-BAE7F67CF470}"/>
               </a:ext>
             </a:extLst>
           </p:cNvPr>
@@ -27605,7 +27605,7 @@
           <p:cNvPr id="4" name="">
             <a:extLst xmlns:a="http://schemas.openxmlformats.org/drawingml/2006/main">
               <a:ext uri="{FF2B5EF4-FFF2-40B4-BE49-F238E27FC236}">
-                <a16:creationId xmlns:a16="http://schemas.microsoft.com/office/drawing/2014/main" id="{D4604D03-D234-4B64-A492-B4A2A82A9DB4}"/>
+                <a16:creationId xmlns:a16="http://schemas.microsoft.com/office/drawing/2014/main" id="{F4EE008F-6A54-454E-A164-08925A4B84E2}"/>
               </a:ext>
             </a:extLst>
           </p:cNvPr>
@@ -27640,7 +27640,7 @@
           <p:nvPr/>
         </p:nvPicPr>
         <p:blipFill>
-          <a:blip xmlns:r="http://schemas.openxmlformats.org/officeDocument/2006/relationships" xmlns:a="http://schemas.openxmlformats.org/drawingml/2006/main" r:embed="R8ee3386ba7994d09"/>
+          <a:blip xmlns:r="http://schemas.openxmlformats.org/officeDocument/2006/relationships" xmlns:a="http://schemas.openxmlformats.org/drawingml/2006/main" r:embed="R95ab8028fd484868"/>
           <a:stretch xmlns:a="http://schemas.openxmlformats.org/drawingml/2006/main"/>
         </p:blipFill>
         <p:spPr>
@@ -27658,7 +27658,7 @@
           <p:cNvPr id="6" name="">
             <a:extLst xmlns:a="http://schemas.openxmlformats.org/drawingml/2006/main">
               <a:ext uri="{FF2B5EF4-FFF2-40B4-BE49-F238E27FC236}">
-                <a16:creationId xmlns:a16="http://schemas.microsoft.com/office/drawing/2014/main" id="{CBDE03CF-D11F-48C8-9573-A1470813BEB1}"/>
+                <a16:creationId xmlns:a16="http://schemas.microsoft.com/office/drawing/2014/main" id="{FA498571-DE58-4ED8-95C2-CC4671491C8F}"/>
               </a:ext>
             </a:extLst>
           </p:cNvPr>
@@ -27710,7 +27710,7 @@
           <p:cNvPr id="7" name="">
             <a:extLst xmlns:a="http://schemas.openxmlformats.org/drawingml/2006/main">
               <a:ext uri="{FF2B5EF4-FFF2-40B4-BE49-F238E27FC236}">
-                <a16:creationId xmlns:a16="http://schemas.microsoft.com/office/drawing/2014/main" id="{D3C338F6-6EB5-4403-8F7B-C41DDE664005}"/>
+                <a16:creationId xmlns:a16="http://schemas.microsoft.com/office/drawing/2014/main" id="{FC48C2EA-9741-455B-BCC0-DB8F6F82E3C7}"/>
               </a:ext>
             </a:extLst>
           </p:cNvPr>
@@ -27766,7 +27766,7 @@
           <p:nvPr/>
         </p:nvPicPr>
         <p:blipFill>
-          <a:blip xmlns:r="http://schemas.openxmlformats.org/officeDocument/2006/relationships" xmlns:a="http://schemas.openxmlformats.org/drawingml/2006/main" r:embed="R0088772f853f4553"/>
+          <a:blip xmlns:r="http://schemas.openxmlformats.org/officeDocument/2006/relationships" xmlns:a="http://schemas.openxmlformats.org/drawingml/2006/main" r:embed="R32f504a9cee14784"/>
           <a:stretch xmlns:a="http://schemas.openxmlformats.org/drawingml/2006/main"/>
         </p:blipFill>
         <p:spPr>
@@ -27782,7 +27782,7 @@
     </p:spTree>
     <p:extLst>
       <p:ext uri="{BB962C8B-B14F-4D97-AF65-F5344CB8AC3E}">
-        <p14:creationId xmlns:p14="http://schemas.microsoft.com/office/powerpoint/2010/main" val="294355755"/>
+        <p14:creationId xmlns:p14="http://schemas.microsoft.com/office/powerpoint/2010/main" val="1564804731"/>
       </p:ext>
     </p:extLst>
   </p:cSld>
@@ -27813,7 +27813,7 @@
           <p:cNvPr id="42" name="">
             <a:extLst xmlns:a="http://schemas.openxmlformats.org/drawingml/2006/main">
               <a:ext uri="{FF2B5EF4-FFF2-40B4-BE49-F238E27FC236}">
-                <a16:creationId xmlns:a16="http://schemas.microsoft.com/office/drawing/2014/main" id="{926DC063-8D64-49B5-9223-E2D3349B7725}"/>
+                <a16:creationId xmlns:a16="http://schemas.microsoft.com/office/drawing/2014/main" id="{3AA95D6C-D2EE-4168-948E-DE10A0B8C04A}"/>
               </a:ext>
             </a:extLst>
           </p:cNvPr>
@@ -27846,7 +27846,7 @@
           <p:cNvPr id="2" name="">
             <a:extLst xmlns:a="http://schemas.openxmlformats.org/drawingml/2006/main">
               <a:ext uri="{FF2B5EF4-FFF2-40B4-BE49-F238E27FC236}">
-                <a16:creationId xmlns:a16="http://schemas.microsoft.com/office/drawing/2014/main" id="{EC9D8CDE-FA59-4340-B6C5-E413B1EB21A4}"/>
+                <a16:creationId xmlns:a16="http://schemas.microsoft.com/office/drawing/2014/main" id="{A72F40D5-5579-474E-B0A1-3621059BDC73}"/>
               </a:ext>
             </a:extLst>
           </p:cNvPr>
@@ -27877,7 +27877,7 @@
           <p:cNvPr id="3" name="">
             <a:extLst xmlns:a="http://schemas.openxmlformats.org/drawingml/2006/main">
               <a:ext uri="{FF2B5EF4-FFF2-40B4-BE49-F238E27FC236}">
-                <a16:creationId xmlns:a16="http://schemas.microsoft.com/office/drawing/2014/main" id="{5B10BF3B-AD0D-41D9-BC9B-474A567C3E16}"/>
+                <a16:creationId xmlns:a16="http://schemas.microsoft.com/office/drawing/2014/main" id="{508E3797-1575-4470-8452-B995E0F1DC43}"/>
               </a:ext>
             </a:extLst>
           </p:cNvPr>
@@ -27929,7 +27929,7 @@
           <p:cNvPr id="4" name="">
             <a:extLst xmlns:a="http://schemas.openxmlformats.org/drawingml/2006/main">
               <a:ext uri="{FF2B5EF4-FFF2-40B4-BE49-F238E27FC236}">
-                <a16:creationId xmlns:a16="http://schemas.microsoft.com/office/drawing/2014/main" id="{35BEE534-BF66-4ADE-88E6-5A45B9725FD2}"/>
+                <a16:creationId xmlns:a16="http://schemas.microsoft.com/office/drawing/2014/main" id="{01196BE0-5BA7-4955-A7D9-A839610E51EB}"/>
               </a:ext>
             </a:extLst>
           </p:cNvPr>
@@ -27981,7 +27981,7 @@
           <p:cNvPr id="5" name="">
             <a:extLst xmlns:a="http://schemas.openxmlformats.org/drawingml/2006/main">
               <a:ext uri="{FF2B5EF4-FFF2-40B4-BE49-F238E27FC236}">
-                <a16:creationId xmlns:a16="http://schemas.microsoft.com/office/drawing/2014/main" id="{87F32885-DB2D-4D6F-A426-70D402BBEED9}"/>
+                <a16:creationId xmlns:a16="http://schemas.microsoft.com/office/drawing/2014/main" id="{0C918960-4295-491C-8467-E4BCEA403335}"/>
               </a:ext>
             </a:extLst>
           </p:cNvPr>
@@ -28016,7 +28016,7 @@
           <p:nvPr/>
         </p:nvPicPr>
         <p:blipFill>
-          <a:blip xmlns:r="http://schemas.openxmlformats.org/officeDocument/2006/relationships" xmlns:a="http://schemas.openxmlformats.org/drawingml/2006/main" r:embed="Rf21ea15da3b34fd4"/>
+          <a:blip xmlns:r="http://schemas.openxmlformats.org/officeDocument/2006/relationships" xmlns:a="http://schemas.openxmlformats.org/drawingml/2006/main" r:embed="Rc75678afd4824e4a"/>
           <a:stretch xmlns:a="http://schemas.openxmlformats.org/drawingml/2006/main"/>
         </p:blipFill>
         <p:spPr>
@@ -28034,7 +28034,7 @@
           <p:cNvPr id="7" name="">
             <a:extLst xmlns:a="http://schemas.openxmlformats.org/drawingml/2006/main">
               <a:ext uri="{FF2B5EF4-FFF2-40B4-BE49-F238E27FC236}">
-                <a16:creationId xmlns:a16="http://schemas.microsoft.com/office/drawing/2014/main" id="{898F1D31-CC7E-45EF-8B7E-FF84765E811F}"/>
+                <a16:creationId xmlns:a16="http://schemas.microsoft.com/office/drawing/2014/main" id="{46200CC3-9A94-4CB9-9940-79725DA1E63A}"/>
               </a:ext>
             </a:extLst>
           </p:cNvPr>
@@ -28086,7 +28086,7 @@
           <p:cNvPr id="8" name="">
             <a:extLst xmlns:a="http://schemas.openxmlformats.org/drawingml/2006/main">
               <a:ext uri="{FF2B5EF4-FFF2-40B4-BE49-F238E27FC236}">
-                <a16:creationId xmlns:a16="http://schemas.microsoft.com/office/drawing/2014/main" id="{C6E85721-1796-411E-A389-1AFC01EBC696}"/>
+                <a16:creationId xmlns:a16="http://schemas.microsoft.com/office/drawing/2014/main" id="{CE661503-664D-4BE1-B69D-292DC8253E75}"/>
               </a:ext>
             </a:extLst>
           </p:cNvPr>
@@ -28138,7 +28138,7 @@
           <p:cNvPr id="9" name="">
             <a:extLst xmlns:a="http://schemas.openxmlformats.org/drawingml/2006/main">
               <a:ext uri="{FF2B5EF4-FFF2-40B4-BE49-F238E27FC236}">
-                <a16:creationId xmlns:a16="http://schemas.microsoft.com/office/drawing/2014/main" id="{00E231B9-35C4-4A63-BCA4-640244C8A856}"/>
+                <a16:creationId xmlns:a16="http://schemas.microsoft.com/office/drawing/2014/main" id="{265EBC4C-A0C0-47A4-BF76-6EFADF2C5144}"/>
               </a:ext>
             </a:extLst>
           </p:cNvPr>
@@ -28190,7 +28190,7 @@
           <p:cNvPr id="10" name="">
             <a:extLst xmlns:a="http://schemas.openxmlformats.org/drawingml/2006/main">
               <a:ext uri="{FF2B5EF4-FFF2-40B4-BE49-F238E27FC236}">
-                <a16:creationId xmlns:a16="http://schemas.microsoft.com/office/drawing/2014/main" id="{A794BFEB-C73D-4849-AC9D-DB45BD3CDF71}"/>
+                <a16:creationId xmlns:a16="http://schemas.microsoft.com/office/drawing/2014/main" id="{D263A027-E84B-4688-A133-9D78A09E0885}"/>
               </a:ext>
             </a:extLst>
           </p:cNvPr>
@@ -28221,7 +28221,7 @@
           <p:cNvPr id="11" name="">
             <a:extLst xmlns:a="http://schemas.openxmlformats.org/drawingml/2006/main">
               <a:ext uri="{FF2B5EF4-FFF2-40B4-BE49-F238E27FC236}">
-                <a16:creationId xmlns:a16="http://schemas.microsoft.com/office/drawing/2014/main" id="{AF2DC0DC-906F-489D-A750-86EF2F5FB9EB}"/>
+                <a16:creationId xmlns:a16="http://schemas.microsoft.com/office/drawing/2014/main" id="{5EE5B5AF-1EA8-4880-859B-4AF0815C4863}"/>
               </a:ext>
             </a:extLst>
           </p:cNvPr>
@@ -28273,7 +28273,7 @@
           <p:cNvPr id="12" name="">
             <a:extLst xmlns:a="http://schemas.openxmlformats.org/drawingml/2006/main">
               <a:ext uri="{FF2B5EF4-FFF2-40B4-BE49-F238E27FC236}">
-                <a16:creationId xmlns:a16="http://schemas.microsoft.com/office/drawing/2014/main" id="{2FD5B9D7-68B4-471C-AC63-17F1EE2A9809}"/>
+                <a16:creationId xmlns:a16="http://schemas.microsoft.com/office/drawing/2014/main" id="{9B98198A-B951-46C1-91D8-9D121A46BF03}"/>
               </a:ext>
             </a:extLst>
           </p:cNvPr>
@@ -28325,7 +28325,7 @@
           <p:cNvPr id="13" name="">
             <a:extLst xmlns:a="http://schemas.openxmlformats.org/drawingml/2006/main">
               <a:ext uri="{FF2B5EF4-FFF2-40B4-BE49-F238E27FC236}">
-                <a16:creationId xmlns:a16="http://schemas.microsoft.com/office/drawing/2014/main" id="{42BCB5BD-B904-405A-8723-3FF1518020D1}"/>
+                <a16:creationId xmlns:a16="http://schemas.microsoft.com/office/drawing/2014/main" id="{432981C8-5B1C-42EF-9AFE-8C55F93E13C0}"/>
               </a:ext>
             </a:extLst>
           </p:cNvPr>
@@ -28377,7 +28377,7 @@
           <p:cNvPr id="14" name="">
             <a:extLst xmlns:a="http://schemas.openxmlformats.org/drawingml/2006/main">
               <a:ext uri="{FF2B5EF4-FFF2-40B4-BE49-F238E27FC236}">
-                <a16:creationId xmlns:a16="http://schemas.microsoft.com/office/drawing/2014/main" id="{68FBFF19-DBCC-4416-AD2D-10CFAFDFB310}"/>
+                <a16:creationId xmlns:a16="http://schemas.microsoft.com/office/drawing/2014/main" id="{E94507A6-8A6E-4CF2-AD51-726309449951}"/>
               </a:ext>
             </a:extLst>
           </p:cNvPr>
@@ -28408,7 +28408,7 @@
           <p:cNvPr id="15" name="">
             <a:extLst xmlns:a="http://schemas.openxmlformats.org/drawingml/2006/main">
               <a:ext uri="{FF2B5EF4-FFF2-40B4-BE49-F238E27FC236}">
-                <a16:creationId xmlns:a16="http://schemas.microsoft.com/office/drawing/2014/main" id="{18F8D7BE-43A0-4C47-93B7-4284B4CD27E0}"/>
+                <a16:creationId xmlns:a16="http://schemas.microsoft.com/office/drawing/2014/main" id="{2BF3044F-E9CE-4449-8A8F-2B977937B033}"/>
               </a:ext>
             </a:extLst>
           </p:cNvPr>
@@ -28460,7 +28460,7 @@
           <p:cNvPr id="16" name="">
             <a:extLst xmlns:a="http://schemas.openxmlformats.org/drawingml/2006/main">
               <a:ext uri="{FF2B5EF4-FFF2-40B4-BE49-F238E27FC236}">
-                <a16:creationId xmlns:a16="http://schemas.microsoft.com/office/drawing/2014/main" id="{9D386129-B4FF-44AD-B083-68437D91DC8A}"/>
+                <a16:creationId xmlns:a16="http://schemas.microsoft.com/office/drawing/2014/main" id="{502706FB-FC62-43A6-8BAB-7BB172DCAABD}"/>
               </a:ext>
             </a:extLst>
           </p:cNvPr>
@@ -28512,7 +28512,7 @@
           <p:cNvPr id="17" name="">
             <a:extLst xmlns:a="http://schemas.openxmlformats.org/drawingml/2006/main">
               <a:ext uri="{FF2B5EF4-FFF2-40B4-BE49-F238E27FC236}">
-                <a16:creationId xmlns:a16="http://schemas.microsoft.com/office/drawing/2014/main" id="{F44FAE3D-C0B3-4C73-A6E2-5666A8CB4342}"/>
+                <a16:creationId xmlns:a16="http://schemas.microsoft.com/office/drawing/2014/main" id="{388D8B32-C1FA-4AFB-BF63-606639CB88D8}"/>
               </a:ext>
             </a:extLst>
           </p:cNvPr>
@@ -28564,7 +28564,7 @@
           <p:cNvPr id="18" name="">
             <a:extLst xmlns:a="http://schemas.openxmlformats.org/drawingml/2006/main">
               <a:ext uri="{FF2B5EF4-FFF2-40B4-BE49-F238E27FC236}">
-                <a16:creationId xmlns:a16="http://schemas.microsoft.com/office/drawing/2014/main" id="{C24C6004-0D61-49B5-B22D-CBEC28767275}"/>
+                <a16:creationId xmlns:a16="http://schemas.microsoft.com/office/drawing/2014/main" id="{CC3D8306-49D8-4F39-8CDF-0FCD1327DC5A}"/>
               </a:ext>
             </a:extLst>
           </p:cNvPr>
@@ -28595,7 +28595,7 @@
           <p:cNvPr id="19" name="">
             <a:extLst xmlns:a="http://schemas.openxmlformats.org/drawingml/2006/main">
               <a:ext uri="{FF2B5EF4-FFF2-40B4-BE49-F238E27FC236}">
-                <a16:creationId xmlns:a16="http://schemas.microsoft.com/office/drawing/2014/main" id="{2444EBE2-BC18-4413-9C8B-EBA5DAD74D40}"/>
+                <a16:creationId xmlns:a16="http://schemas.microsoft.com/office/drawing/2014/main" id="{E79DE5E3-7A33-440C-93DE-95EC7D5A758E}"/>
               </a:ext>
             </a:extLst>
           </p:cNvPr>
@@ -28647,7 +28647,7 @@
           <p:cNvPr id="20" name="">
             <a:extLst xmlns:a="http://schemas.openxmlformats.org/drawingml/2006/main">
               <a:ext uri="{FF2B5EF4-FFF2-40B4-BE49-F238E27FC236}">
-                <a16:creationId xmlns:a16="http://schemas.microsoft.com/office/drawing/2014/main" id="{D1A97E66-6F04-43C2-BE4C-27B8FC6F0A62}"/>
+                <a16:creationId xmlns:a16="http://schemas.microsoft.com/office/drawing/2014/main" id="{61DB372C-B874-4E8B-B68A-342702C9A3B8}"/>
               </a:ext>
             </a:extLst>
           </p:cNvPr>
@@ -28699,7 +28699,7 @@
           <p:cNvPr id="21" name="">
             <a:extLst xmlns:a="http://schemas.openxmlformats.org/drawingml/2006/main">
               <a:ext uri="{FF2B5EF4-FFF2-40B4-BE49-F238E27FC236}">
-                <a16:creationId xmlns:a16="http://schemas.microsoft.com/office/drawing/2014/main" id="{4F28746D-1274-4837-B321-53225640CEB3}"/>
+                <a16:creationId xmlns:a16="http://schemas.microsoft.com/office/drawing/2014/main" id="{8552FB2B-E421-44B4-B02F-D527FD870E3B}"/>
               </a:ext>
             </a:extLst>
           </p:cNvPr>
@@ -28751,7 +28751,7 @@
           <p:cNvPr id="22" name="">
             <a:extLst xmlns:a="http://schemas.openxmlformats.org/drawingml/2006/main">
               <a:ext uri="{FF2B5EF4-FFF2-40B4-BE49-F238E27FC236}">
-                <a16:creationId xmlns:a16="http://schemas.microsoft.com/office/drawing/2014/main" id="{ABA786E7-3C01-44C6-A319-12DE8CF671F6}"/>
+                <a16:creationId xmlns:a16="http://schemas.microsoft.com/office/drawing/2014/main" id="{BE47DFEE-FFBF-4C49-B44D-FF033C7FD4BA}"/>
               </a:ext>
             </a:extLst>
           </p:cNvPr>
@@ -28782,7 +28782,7 @@
           <p:cNvPr id="23" name="">
             <a:extLst xmlns:a="http://schemas.openxmlformats.org/drawingml/2006/main">
               <a:ext uri="{FF2B5EF4-FFF2-40B4-BE49-F238E27FC236}">
-                <a16:creationId xmlns:a16="http://schemas.microsoft.com/office/drawing/2014/main" id="{5850DFEF-3C8D-457A-8434-6F27868F24A9}"/>
+                <a16:creationId xmlns:a16="http://schemas.microsoft.com/office/drawing/2014/main" id="{579E659E-2EE8-447A-9138-F0F916D248BE}"/>
               </a:ext>
             </a:extLst>
           </p:cNvPr>
@@ -28834,7 +28834,7 @@
           <p:cNvPr id="24" name="">
             <a:extLst xmlns:a="http://schemas.openxmlformats.org/drawingml/2006/main">
               <a:ext uri="{FF2B5EF4-FFF2-40B4-BE49-F238E27FC236}">
-                <a16:creationId xmlns:a16="http://schemas.microsoft.com/office/drawing/2014/main" id="{F47AB1C4-4ADC-4AED-9FB9-03083A9CDEC4}"/>
+                <a16:creationId xmlns:a16="http://schemas.microsoft.com/office/drawing/2014/main" id="{0D682F23-36B6-430C-B600-9561EB4DDF17}"/>
               </a:ext>
             </a:extLst>
           </p:cNvPr>
@@ -28886,7 +28886,7 @@
           <p:cNvPr id="25" name="">
             <a:extLst xmlns:a="http://schemas.openxmlformats.org/drawingml/2006/main">
               <a:ext uri="{FF2B5EF4-FFF2-40B4-BE49-F238E27FC236}">
-                <a16:creationId xmlns:a16="http://schemas.microsoft.com/office/drawing/2014/main" id="{0C69A628-31D8-4D4B-98F0-438C9F108A5A}"/>
+                <a16:creationId xmlns:a16="http://schemas.microsoft.com/office/drawing/2014/main" id="{C2D08BDD-A505-4460-92F1-4ECDCBD57A5B}"/>
               </a:ext>
             </a:extLst>
           </p:cNvPr>
@@ -28938,7 +28938,7 @@
           <p:cNvPr id="26" name="">
             <a:extLst xmlns:a="http://schemas.openxmlformats.org/drawingml/2006/main">
               <a:ext uri="{FF2B5EF4-FFF2-40B4-BE49-F238E27FC236}">
-                <a16:creationId xmlns:a16="http://schemas.microsoft.com/office/drawing/2014/main" id="{E3C5C564-AB7C-4788-B139-931324CB143D}"/>
+                <a16:creationId xmlns:a16="http://schemas.microsoft.com/office/drawing/2014/main" id="{7433DC82-6A95-4FD4-9BB7-9C9864A4FE01}"/>
               </a:ext>
             </a:extLst>
           </p:cNvPr>
@@ -28969,7 +28969,7 @@
           <p:cNvPr id="27" name="">
             <a:extLst xmlns:a="http://schemas.openxmlformats.org/drawingml/2006/main">
               <a:ext uri="{FF2B5EF4-FFF2-40B4-BE49-F238E27FC236}">
-                <a16:creationId xmlns:a16="http://schemas.microsoft.com/office/drawing/2014/main" id="{728DF877-1E5F-430B-ABD7-27AB6A34DD97}"/>
+                <a16:creationId xmlns:a16="http://schemas.microsoft.com/office/drawing/2014/main" id="{695B3D7C-BC28-49E3-921E-B2B532A1F013}"/>
               </a:ext>
             </a:extLst>
           </p:cNvPr>
@@ -29021,7 +29021,7 @@
           <p:cNvPr id="28" name="">
             <a:extLst xmlns:a="http://schemas.openxmlformats.org/drawingml/2006/main">
               <a:ext uri="{FF2B5EF4-FFF2-40B4-BE49-F238E27FC236}">
-                <a16:creationId xmlns:a16="http://schemas.microsoft.com/office/drawing/2014/main" id="{9262331F-DC0F-4999-A602-669BA6492B7A}"/>
+                <a16:creationId xmlns:a16="http://schemas.microsoft.com/office/drawing/2014/main" id="{4CF0EF60-D389-4EF8-A26A-1674A1AECA40}"/>
               </a:ext>
             </a:extLst>
           </p:cNvPr>
@@ -29073,7 +29073,7 @@
           <p:cNvPr id="29" name="">
             <a:extLst xmlns:a="http://schemas.openxmlformats.org/drawingml/2006/main">
               <a:ext uri="{FF2B5EF4-FFF2-40B4-BE49-F238E27FC236}">
-                <a16:creationId xmlns:a16="http://schemas.microsoft.com/office/drawing/2014/main" id="{06C50EE7-B9EE-4AC6-93E3-D1C9AC10312E}"/>
+                <a16:creationId xmlns:a16="http://schemas.microsoft.com/office/drawing/2014/main" id="{12FB2185-0485-4B8B-89BB-362F24721C05}"/>
               </a:ext>
             </a:extLst>
           </p:cNvPr>
@@ -29125,7 +29125,7 @@
           <p:cNvPr id="30" name="">
             <a:extLst xmlns:a="http://schemas.openxmlformats.org/drawingml/2006/main">
               <a:ext uri="{FF2B5EF4-FFF2-40B4-BE49-F238E27FC236}">
-                <a16:creationId xmlns:a16="http://schemas.microsoft.com/office/drawing/2014/main" id="{71134C15-4B60-4FAA-99ED-B35781A35348}"/>
+                <a16:creationId xmlns:a16="http://schemas.microsoft.com/office/drawing/2014/main" id="{32401BC3-C279-4D93-9780-EEDB20025563}"/>
               </a:ext>
             </a:extLst>
           </p:cNvPr>
@@ -29156,7 +29156,7 @@
           <p:cNvPr id="31" name="">
             <a:extLst xmlns:a="http://schemas.openxmlformats.org/drawingml/2006/main">
               <a:ext uri="{FF2B5EF4-FFF2-40B4-BE49-F238E27FC236}">
-                <a16:creationId xmlns:a16="http://schemas.microsoft.com/office/drawing/2014/main" id="{D0C29C80-C9A0-4A04-B608-38CFB9B77192}"/>
+                <a16:creationId xmlns:a16="http://schemas.microsoft.com/office/drawing/2014/main" id="{EB6C0117-C6D9-4AC6-A4F4-2C879AB094C2}"/>
               </a:ext>
             </a:extLst>
           </p:cNvPr>
@@ -29208,7 +29208,7 @@
           <p:cNvPr id="32" name="">
             <a:extLst xmlns:a="http://schemas.openxmlformats.org/drawingml/2006/main">
               <a:ext uri="{FF2B5EF4-FFF2-40B4-BE49-F238E27FC236}">
-                <a16:creationId xmlns:a16="http://schemas.microsoft.com/office/drawing/2014/main" id="{F24815D4-5AE0-4216-847E-F4F547B45DE1}"/>
+                <a16:creationId xmlns:a16="http://schemas.microsoft.com/office/drawing/2014/main" id="{B07E8199-2EB9-4C85-9FA1-6C92C254ED84}"/>
               </a:ext>
             </a:extLst>
           </p:cNvPr>
@@ -29260,7 +29260,7 @@
           <p:cNvPr id="33" name="">
             <a:extLst xmlns:a="http://schemas.openxmlformats.org/drawingml/2006/main">
               <a:ext uri="{FF2B5EF4-FFF2-40B4-BE49-F238E27FC236}">
-                <a16:creationId xmlns:a16="http://schemas.microsoft.com/office/drawing/2014/main" id="{9FA78042-0D37-4C96-857A-7A75DC902557}"/>
+                <a16:creationId xmlns:a16="http://schemas.microsoft.com/office/drawing/2014/main" id="{B0C1B263-128C-4CC2-AFCC-0F1BB5D11795}"/>
               </a:ext>
             </a:extLst>
           </p:cNvPr>
@@ -29312,7 +29312,7 @@
           <p:cNvPr id="34" name="">
             <a:extLst xmlns:a="http://schemas.openxmlformats.org/drawingml/2006/main">
               <a:ext uri="{FF2B5EF4-FFF2-40B4-BE49-F238E27FC236}">
-                <a16:creationId xmlns:a16="http://schemas.microsoft.com/office/drawing/2014/main" id="{DBCDE74C-DA1A-4DDC-A7D4-F16851E183F1}"/>
+                <a16:creationId xmlns:a16="http://schemas.microsoft.com/office/drawing/2014/main" id="{DEDA3687-0EEE-43D6-BE92-C7EBC6C0E279}"/>
               </a:ext>
             </a:extLst>
           </p:cNvPr>
@@ -29343,7 +29343,7 @@
           <p:cNvPr id="35" name="">
             <a:extLst xmlns:a="http://schemas.openxmlformats.org/drawingml/2006/main">
               <a:ext uri="{FF2B5EF4-FFF2-40B4-BE49-F238E27FC236}">
-                <a16:creationId xmlns:a16="http://schemas.microsoft.com/office/drawing/2014/main" id="{61675D15-34F8-4EC2-8214-7138F7CCF75A}"/>
+                <a16:creationId xmlns:a16="http://schemas.microsoft.com/office/drawing/2014/main" id="{3A3CF4CB-28E9-4F81-8BCF-CD46CC929E60}"/>
               </a:ext>
             </a:extLst>
           </p:cNvPr>
@@ -29395,7 +29395,7 @@
           <p:cNvPr id="36" name="">
             <a:extLst xmlns:a="http://schemas.openxmlformats.org/drawingml/2006/main">
               <a:ext uri="{FF2B5EF4-FFF2-40B4-BE49-F238E27FC236}">
-                <a16:creationId xmlns:a16="http://schemas.microsoft.com/office/drawing/2014/main" id="{2A3CEAB7-8A45-4AD1-B9B3-D291FAE443C0}"/>
+                <a16:creationId xmlns:a16="http://schemas.microsoft.com/office/drawing/2014/main" id="{33870727-A85B-44B1-AA13-B83A86FA3C7B}"/>
               </a:ext>
             </a:extLst>
           </p:cNvPr>
@@ -29447,7 +29447,7 @@
           <p:cNvPr id="37" name="">
             <a:extLst xmlns:a="http://schemas.openxmlformats.org/drawingml/2006/main">
               <a:ext uri="{FF2B5EF4-FFF2-40B4-BE49-F238E27FC236}">
-                <a16:creationId xmlns:a16="http://schemas.microsoft.com/office/drawing/2014/main" id="{74565F50-23B0-42B4-B5DF-C718B5EDEFFF}"/>
+                <a16:creationId xmlns:a16="http://schemas.microsoft.com/office/drawing/2014/main" id="{1C20096E-D79C-4A52-B436-96F8B184E950}"/>
               </a:ext>
             </a:extLst>
           </p:cNvPr>
@@ -29499,7 +29499,7 @@
           <p:cNvPr id="38" name="">
             <a:extLst xmlns:a="http://schemas.openxmlformats.org/drawingml/2006/main">
               <a:ext uri="{FF2B5EF4-FFF2-40B4-BE49-F238E27FC236}">
-                <a16:creationId xmlns:a16="http://schemas.microsoft.com/office/drawing/2014/main" id="{E8D4B163-F915-4026-BFFC-DD947E42091B}"/>
+                <a16:creationId xmlns:a16="http://schemas.microsoft.com/office/drawing/2014/main" id="{6A52D85B-1A68-4D04-BC9F-D39A4139BE84}"/>
               </a:ext>
             </a:extLst>
           </p:cNvPr>
@@ -29530,7 +29530,7 @@
           <p:cNvPr id="39" name="">
             <a:extLst xmlns:a="http://schemas.openxmlformats.org/drawingml/2006/main">
               <a:ext uri="{FF2B5EF4-FFF2-40B4-BE49-F238E27FC236}">
-                <a16:creationId xmlns:a16="http://schemas.microsoft.com/office/drawing/2014/main" id="{0C7B511F-3E59-4F2A-BA6B-53C97EDCFF90}"/>
+                <a16:creationId xmlns:a16="http://schemas.microsoft.com/office/drawing/2014/main" id="{45D2039F-0E9C-4FDD-9E9D-9D91DA4A9243}"/>
               </a:ext>
             </a:extLst>
           </p:cNvPr>
@@ -29582,7 +29582,7 @@
           <p:cNvPr id="40" name="">
             <a:extLst xmlns:a="http://schemas.openxmlformats.org/drawingml/2006/main">
               <a:ext uri="{FF2B5EF4-FFF2-40B4-BE49-F238E27FC236}">
-                <a16:creationId xmlns:a16="http://schemas.microsoft.com/office/drawing/2014/main" id="{04F30378-9502-4F59-9A71-ED82A0FDC923}"/>
+                <a16:creationId xmlns:a16="http://schemas.microsoft.com/office/drawing/2014/main" id="{2A167551-FD61-4E36-9BB5-986F1AE89FE1}"/>
               </a:ext>
             </a:extLst>
           </p:cNvPr>
@@ -29634,7 +29634,7 @@
           <p:cNvPr id="41" name="">
             <a:extLst xmlns:a="http://schemas.openxmlformats.org/drawingml/2006/main">
               <a:ext uri="{FF2B5EF4-FFF2-40B4-BE49-F238E27FC236}">
-                <a16:creationId xmlns:a16="http://schemas.microsoft.com/office/drawing/2014/main" id="{3A15C342-3A37-4AEB-9DB5-1F63133B75AA}"/>
+                <a16:creationId xmlns:a16="http://schemas.microsoft.com/office/drawing/2014/main" id="{6A99B158-46B7-4DF2-AD43-0849890FA68B}"/>
               </a:ext>
             </a:extLst>
           </p:cNvPr>
@@ -29684,7 +29684,7 @@
     </p:spTree>
     <p:extLst>
       <p:ext uri="{BB962C8B-B14F-4D97-AF65-F5344CB8AC3E}">
-        <p14:creationId xmlns:p14="http://schemas.microsoft.com/office/powerpoint/2010/main" val="1085600656"/>
+        <p14:creationId xmlns:p14="http://schemas.microsoft.com/office/powerpoint/2010/main" val="797578903"/>
       </p:ext>
     </p:extLst>
   </p:cSld>
@@ -29715,7 +29715,7 @@
           <p:cNvPr id="76" name="">
             <a:extLst xmlns:a="http://schemas.openxmlformats.org/drawingml/2006/main">
               <a:ext uri="{FF2B5EF4-FFF2-40B4-BE49-F238E27FC236}">
-                <a16:creationId xmlns:a16="http://schemas.microsoft.com/office/drawing/2014/main" id="{42E7C1C6-6270-461C-A643-EC854F71618C}"/>
+                <a16:creationId xmlns:a16="http://schemas.microsoft.com/office/drawing/2014/main" id="{534F220F-1EEA-471C-BAB6-AD13BEAD6CD6}"/>
               </a:ext>
             </a:extLst>
           </p:cNvPr>
@@ -29748,7 +29748,7 @@
           <p:cNvPr id="2" name="">
             <a:extLst xmlns:a="http://schemas.openxmlformats.org/drawingml/2006/main">
               <a:ext uri="{FF2B5EF4-FFF2-40B4-BE49-F238E27FC236}">
-                <a16:creationId xmlns:a16="http://schemas.microsoft.com/office/drawing/2014/main" id="{2898930C-3B04-4BF1-A5A7-1CAAA9EAEA1C}"/>
+                <a16:creationId xmlns:a16="http://schemas.microsoft.com/office/drawing/2014/main" id="{58F6FBF9-CFD0-4B66-AA4A-8E9FEFF0203B}"/>
               </a:ext>
             </a:extLst>
           </p:cNvPr>
@@ -29779,7 +29779,7 @@
           <p:cNvPr id="3" name="">
             <a:extLst xmlns:a="http://schemas.openxmlformats.org/drawingml/2006/main">
               <a:ext uri="{FF2B5EF4-FFF2-40B4-BE49-F238E27FC236}">
-                <a16:creationId xmlns:a16="http://schemas.microsoft.com/office/drawing/2014/main" id="{D6C0B343-FE76-4652-BF54-95829DCBB5B4}"/>
+                <a16:creationId xmlns:a16="http://schemas.microsoft.com/office/drawing/2014/main" id="{FE16F2FB-71DA-4289-B071-F54AFF6D06F8}"/>
               </a:ext>
             </a:extLst>
           </p:cNvPr>
@@ -29831,7 +29831,7 @@
           <p:cNvPr id="4" name="">
             <a:extLst xmlns:a="http://schemas.openxmlformats.org/drawingml/2006/main">
               <a:ext uri="{FF2B5EF4-FFF2-40B4-BE49-F238E27FC236}">
-                <a16:creationId xmlns:a16="http://schemas.microsoft.com/office/drawing/2014/main" id="{D631FE18-1F24-4663-8AB3-43D4E4A050DA}"/>
+                <a16:creationId xmlns:a16="http://schemas.microsoft.com/office/drawing/2014/main" id="{DC67F8B7-7E6B-421D-9F3B-2F59B2E456B9}"/>
               </a:ext>
             </a:extLst>
           </p:cNvPr>
@@ -29883,7 +29883,7 @@
           <p:cNvPr id="5" name="">
             <a:extLst xmlns:a="http://schemas.openxmlformats.org/drawingml/2006/main">
               <a:ext uri="{FF2B5EF4-FFF2-40B4-BE49-F238E27FC236}">
-                <a16:creationId xmlns:a16="http://schemas.microsoft.com/office/drawing/2014/main" id="{6208A5BC-7BA5-4D82-8355-C49275C2135F}"/>
+                <a16:creationId xmlns:a16="http://schemas.microsoft.com/office/drawing/2014/main" id="{96BF18CD-5CF0-47CB-A219-145993949A1A}"/>
               </a:ext>
             </a:extLst>
           </p:cNvPr>
@@ -29918,7 +29918,7 @@
           <p:nvPr/>
         </p:nvPicPr>
         <p:blipFill>
-          <a:blip xmlns:r="http://schemas.openxmlformats.org/officeDocument/2006/relationships" xmlns:a="http://schemas.openxmlformats.org/drawingml/2006/main" r:embed="R6203edbc7844485a"/>
+          <a:blip xmlns:r="http://schemas.openxmlformats.org/officeDocument/2006/relationships" xmlns:a="http://schemas.openxmlformats.org/drawingml/2006/main" r:embed="R1676e32402254640"/>
           <a:stretch xmlns:a="http://schemas.openxmlformats.org/drawingml/2006/main"/>
         </p:blipFill>
         <p:spPr>
@@ -29936,7 +29936,7 @@
           <p:cNvPr id="7" name="">
             <a:extLst xmlns:a="http://schemas.openxmlformats.org/drawingml/2006/main">
               <a:ext uri="{FF2B5EF4-FFF2-40B4-BE49-F238E27FC236}">
-                <a16:creationId xmlns:a16="http://schemas.microsoft.com/office/drawing/2014/main" id="{2A63EEC7-AD7D-4D57-B71E-46EB594C6D43}"/>
+                <a16:creationId xmlns:a16="http://schemas.microsoft.com/office/drawing/2014/main" id="{077C2A7A-7B42-4435-A47E-5CC8EAB9C77C}"/>
               </a:ext>
             </a:extLst>
           </p:cNvPr>
@@ -29988,7 +29988,7 @@
           <p:cNvPr id="8" name="">
             <a:extLst xmlns:a="http://schemas.openxmlformats.org/drawingml/2006/main">
               <a:ext uri="{FF2B5EF4-FFF2-40B4-BE49-F238E27FC236}">
-                <a16:creationId xmlns:a16="http://schemas.microsoft.com/office/drawing/2014/main" id="{A955E9AD-8101-47D1-BDE2-4E8C4234D402}"/>
+                <a16:creationId xmlns:a16="http://schemas.microsoft.com/office/drawing/2014/main" id="{61EBCACA-82CC-4068-A1C7-3CF98228283C}"/>
               </a:ext>
             </a:extLst>
           </p:cNvPr>
@@ -30040,7 +30040,7 @@
           <p:cNvPr id="9" name="">
             <a:extLst xmlns:a="http://schemas.openxmlformats.org/drawingml/2006/main">
               <a:ext uri="{FF2B5EF4-FFF2-40B4-BE49-F238E27FC236}">
-                <a16:creationId xmlns:a16="http://schemas.microsoft.com/office/drawing/2014/main" id="{FEB2E18A-365B-4C99-9A57-6BEF4AC49AD8}"/>
+                <a16:creationId xmlns:a16="http://schemas.microsoft.com/office/drawing/2014/main" id="{1A7057CC-CF8F-48BF-BEC7-9515034FFE67}"/>
               </a:ext>
             </a:extLst>
           </p:cNvPr>
@@ -30092,7 +30092,7 @@
           <p:cNvPr id="10" name="">
             <a:extLst xmlns:a="http://schemas.openxmlformats.org/drawingml/2006/main">
               <a:ext uri="{FF2B5EF4-FFF2-40B4-BE49-F238E27FC236}">
-                <a16:creationId xmlns:a16="http://schemas.microsoft.com/office/drawing/2014/main" id="{C4EEE9A2-1310-4CBD-863D-F6BAF31CD54D}"/>
+                <a16:creationId xmlns:a16="http://schemas.microsoft.com/office/drawing/2014/main" id="{29A158BD-49D0-4076-97BB-C3FA4758FDCD}"/>
               </a:ext>
             </a:extLst>
           </p:cNvPr>
@@ -30144,7 +30144,7 @@
           <p:cNvPr id="11" name="">
             <a:extLst xmlns:a="http://schemas.openxmlformats.org/drawingml/2006/main">
               <a:ext uri="{FF2B5EF4-FFF2-40B4-BE49-F238E27FC236}">
-                <a16:creationId xmlns:a16="http://schemas.microsoft.com/office/drawing/2014/main" id="{B612DDF7-0252-442B-B4FB-6226994648A6}"/>
+                <a16:creationId xmlns:a16="http://schemas.microsoft.com/office/drawing/2014/main" id="{ECA99A2C-C0BC-4707-A411-06AFB0AC2C01}"/>
               </a:ext>
             </a:extLst>
           </p:cNvPr>
@@ -30187,7 +30187,7 @@
           <p:cNvPr id="12" name="">
             <a:extLst xmlns:a="http://schemas.openxmlformats.org/drawingml/2006/main">
               <a:ext uri="{FF2B5EF4-FFF2-40B4-BE49-F238E27FC236}">
-                <a16:creationId xmlns:a16="http://schemas.microsoft.com/office/drawing/2014/main" id="{B177548F-F456-4ECA-A4F8-E62583C6F313}"/>
+                <a16:creationId xmlns:a16="http://schemas.microsoft.com/office/drawing/2014/main" id="{9FCBE329-197E-4C20-81C7-5E44BE44FB40}"/>
               </a:ext>
             </a:extLst>
           </p:cNvPr>
@@ -30218,7 +30218,7 @@
           <p:cNvPr id="13" name="">
             <a:extLst xmlns:a="http://schemas.openxmlformats.org/drawingml/2006/main">
               <a:ext uri="{FF2B5EF4-FFF2-40B4-BE49-F238E27FC236}">
-                <a16:creationId xmlns:a16="http://schemas.microsoft.com/office/drawing/2014/main" id="{19B6CD93-C5BD-4603-A52E-07670AE4874D}"/>
+                <a16:creationId xmlns:a16="http://schemas.microsoft.com/office/drawing/2014/main" id="{8A3B84A5-4B13-4F6A-8D10-D8CFFF737235}"/>
               </a:ext>
             </a:extLst>
           </p:cNvPr>
@@ -30249,7 +30249,7 @@
           <p:cNvPr id="14" name="">
             <a:extLst xmlns:a="http://schemas.openxmlformats.org/drawingml/2006/main">
               <a:ext uri="{FF2B5EF4-FFF2-40B4-BE49-F238E27FC236}">
-                <a16:creationId xmlns:a16="http://schemas.microsoft.com/office/drawing/2014/main" id="{3E617B33-A8DE-490C-87ED-88827BCFB31D}"/>
+                <a16:creationId xmlns:a16="http://schemas.microsoft.com/office/drawing/2014/main" id="{9480E6FB-BB30-42A6-A3FD-9C14FD1E645A}"/>
               </a:ext>
             </a:extLst>
           </p:cNvPr>
@@ -30292,7 +30292,7 @@
           <p:cNvPr id="15" name="">
             <a:extLst xmlns:a="http://schemas.openxmlformats.org/drawingml/2006/main">
               <a:ext uri="{FF2B5EF4-FFF2-40B4-BE49-F238E27FC236}">
-                <a16:creationId xmlns:a16="http://schemas.microsoft.com/office/drawing/2014/main" id="{7FE716C9-EDDD-4027-A0FF-464C31CA33D6}"/>
+                <a16:creationId xmlns:a16="http://schemas.microsoft.com/office/drawing/2014/main" id="{81A3D514-6B27-4B30-8A26-BE7A1A39A020}"/>
               </a:ext>
             </a:extLst>
           </p:cNvPr>
@@ -30323,7 +30323,7 @@
           <p:cNvPr id="16" name="">
             <a:extLst xmlns:a="http://schemas.openxmlformats.org/drawingml/2006/main">
               <a:ext uri="{FF2B5EF4-FFF2-40B4-BE49-F238E27FC236}">
-                <a16:creationId xmlns:a16="http://schemas.microsoft.com/office/drawing/2014/main" id="{438D9EAA-2B82-42D3-AE0C-3EF792798C46}"/>
+                <a16:creationId xmlns:a16="http://schemas.microsoft.com/office/drawing/2014/main" id="{BDF8CD0A-290E-4A3A-AA13-C2EF4AB6CB77}"/>
               </a:ext>
             </a:extLst>
           </p:cNvPr>
@@ -30354,7 +30354,7 @@
           <p:cNvPr id="17" name="">
             <a:extLst xmlns:a="http://schemas.openxmlformats.org/drawingml/2006/main">
               <a:ext uri="{FF2B5EF4-FFF2-40B4-BE49-F238E27FC236}">
-                <a16:creationId xmlns:a16="http://schemas.microsoft.com/office/drawing/2014/main" id="{5F414F4E-C1DA-4ECE-8171-83F2D2A7A8F4}"/>
+                <a16:creationId xmlns:a16="http://schemas.microsoft.com/office/drawing/2014/main" id="{9E6A584E-45F0-4524-938F-075C3D24980D}"/>
               </a:ext>
             </a:extLst>
           </p:cNvPr>
@@ -30406,7 +30406,7 @@
           <p:cNvPr id="18" name="">
             <a:extLst xmlns:a="http://schemas.openxmlformats.org/drawingml/2006/main">
               <a:ext uri="{FF2B5EF4-FFF2-40B4-BE49-F238E27FC236}">
-                <a16:creationId xmlns:a16="http://schemas.microsoft.com/office/drawing/2014/main" id="{D609EDF4-46FF-421B-AB1A-49A9BC24F802}"/>
+                <a16:creationId xmlns:a16="http://schemas.microsoft.com/office/drawing/2014/main" id="{DFDF62E5-8B8B-4D83-981E-3F5C0A9E97D6}"/>
               </a:ext>
             </a:extLst>
           </p:cNvPr>
@@ -30458,7 +30458,7 @@
           <p:cNvPr id="19" name="">
             <a:extLst xmlns:a="http://schemas.openxmlformats.org/drawingml/2006/main">
               <a:ext uri="{FF2B5EF4-FFF2-40B4-BE49-F238E27FC236}">
-                <a16:creationId xmlns:a16="http://schemas.microsoft.com/office/drawing/2014/main" id="{F089A293-1E8C-4796-B5DA-B33A42B54446}"/>
+                <a16:creationId xmlns:a16="http://schemas.microsoft.com/office/drawing/2014/main" id="{06599AD2-4698-42F6-86D1-FA9E94241EFE}"/>
               </a:ext>
             </a:extLst>
           </p:cNvPr>
@@ -30510,7 +30510,7 @@
           <p:cNvPr id="20" name="">
             <a:extLst xmlns:a="http://schemas.openxmlformats.org/drawingml/2006/main">
               <a:ext uri="{FF2B5EF4-FFF2-40B4-BE49-F238E27FC236}">
-                <a16:creationId xmlns:a16="http://schemas.microsoft.com/office/drawing/2014/main" id="{19EBE519-E090-43A7-A223-BB220C50094F}"/>
+                <a16:creationId xmlns:a16="http://schemas.microsoft.com/office/drawing/2014/main" id="{93EE1944-63FD-44C8-8D9A-B6589CC089DC}"/>
               </a:ext>
             </a:extLst>
           </p:cNvPr>
@@ -30553,7 +30553,7 @@
           <p:cNvPr id="21" name="">
             <a:extLst xmlns:a="http://schemas.openxmlformats.org/drawingml/2006/main">
               <a:ext uri="{FF2B5EF4-FFF2-40B4-BE49-F238E27FC236}">
-                <a16:creationId xmlns:a16="http://schemas.microsoft.com/office/drawing/2014/main" id="{AE53586A-35A5-4EBA-8CB3-2922B171AB29}"/>
+                <a16:creationId xmlns:a16="http://schemas.microsoft.com/office/drawing/2014/main" id="{B04C9BB6-6076-477C-A8E0-E2032A616DB3}"/>
               </a:ext>
             </a:extLst>
           </p:cNvPr>
@@ -30584,7 +30584,7 @@
           <p:cNvPr id="22" name="">
             <a:extLst xmlns:a="http://schemas.openxmlformats.org/drawingml/2006/main">
               <a:ext uri="{FF2B5EF4-FFF2-40B4-BE49-F238E27FC236}">
-                <a16:creationId xmlns:a16="http://schemas.microsoft.com/office/drawing/2014/main" id="{AFCE0187-E6E5-458D-B7D1-5BED9209E8A2}"/>
+                <a16:creationId xmlns:a16="http://schemas.microsoft.com/office/drawing/2014/main" id="{7C167144-1B3A-4A08-8CA3-71CB344457E5}"/>
               </a:ext>
             </a:extLst>
           </p:cNvPr>
@@ -30615,7 +30615,7 @@
           <p:cNvPr id="23" name="">
             <a:extLst xmlns:a="http://schemas.openxmlformats.org/drawingml/2006/main">
               <a:ext uri="{FF2B5EF4-FFF2-40B4-BE49-F238E27FC236}">
-                <a16:creationId xmlns:a16="http://schemas.microsoft.com/office/drawing/2014/main" id="{EBC306EB-DDC0-4EF7-BBFB-5B603502C8B0}"/>
+                <a16:creationId xmlns:a16="http://schemas.microsoft.com/office/drawing/2014/main" id="{033921ED-5B83-49F6-A53F-38EF18FABC4B}"/>
               </a:ext>
             </a:extLst>
           </p:cNvPr>
@@ -30667,7 +30667,7 @@
           <p:cNvPr id="24" name="">
             <a:extLst xmlns:a="http://schemas.openxmlformats.org/drawingml/2006/main">
               <a:ext uri="{FF2B5EF4-FFF2-40B4-BE49-F238E27FC236}">
-                <a16:creationId xmlns:a16="http://schemas.microsoft.com/office/drawing/2014/main" id="{4C253635-F0C2-43C5-89F9-4D36BECFC4B0}"/>
+                <a16:creationId xmlns:a16="http://schemas.microsoft.com/office/drawing/2014/main" id="{C1E5BF0E-9EDC-4503-BD9A-555255A9ACB1}"/>
               </a:ext>
             </a:extLst>
           </p:cNvPr>
@@ -30719,7 +30719,7 @@
           <p:cNvPr id="25" name="">
             <a:extLst xmlns:a="http://schemas.openxmlformats.org/drawingml/2006/main">
               <a:ext uri="{FF2B5EF4-FFF2-40B4-BE49-F238E27FC236}">
-                <a16:creationId xmlns:a16="http://schemas.microsoft.com/office/drawing/2014/main" id="{C4187676-D7C6-496E-9BD1-D2C78598AFB5}"/>
+                <a16:creationId xmlns:a16="http://schemas.microsoft.com/office/drawing/2014/main" id="{70E076D9-EC32-466D-A1C2-70497B0FBDF0}"/>
               </a:ext>
             </a:extLst>
           </p:cNvPr>
@@ -30771,7 +30771,7 @@
           <p:cNvPr id="26" name="">
             <a:extLst xmlns:a="http://schemas.openxmlformats.org/drawingml/2006/main">
               <a:ext uri="{FF2B5EF4-FFF2-40B4-BE49-F238E27FC236}">
-                <a16:creationId xmlns:a16="http://schemas.microsoft.com/office/drawing/2014/main" id="{FC04A3C9-4292-4B07-8F49-C7494AF7BC36}"/>
+                <a16:creationId xmlns:a16="http://schemas.microsoft.com/office/drawing/2014/main" id="{FB11D7AD-E3C9-4D3D-AA37-5441E834C5FC}"/>
               </a:ext>
             </a:extLst>
           </p:cNvPr>
@@ -30814,7 +30814,7 @@
           <p:cNvPr id="27" name="">
             <a:extLst xmlns:a="http://schemas.openxmlformats.org/drawingml/2006/main">
               <a:ext uri="{FF2B5EF4-FFF2-40B4-BE49-F238E27FC236}">
-                <a16:creationId xmlns:a16="http://schemas.microsoft.com/office/drawing/2014/main" id="{CC69E116-A178-426B-A382-889D60B59D09}"/>
+                <a16:creationId xmlns:a16="http://schemas.microsoft.com/office/drawing/2014/main" id="{0E129B28-6628-4A2F-80EC-FA7951FAC5C7}"/>
               </a:ext>
             </a:extLst>
           </p:cNvPr>
@@ -30845,7 +30845,7 @@
           <p:cNvPr id="28" name="">
             <a:extLst xmlns:a="http://schemas.openxmlformats.org/drawingml/2006/main">
               <a:ext uri="{FF2B5EF4-FFF2-40B4-BE49-F238E27FC236}">
-                <a16:creationId xmlns:a16="http://schemas.microsoft.com/office/drawing/2014/main" id="{4B8B1A9A-C200-4D34-AF12-DA4CFC271311}"/>
+                <a16:creationId xmlns:a16="http://schemas.microsoft.com/office/drawing/2014/main" id="{916D75B5-4970-4A22-A950-EA591BB2F6B1}"/>
               </a:ext>
             </a:extLst>
           </p:cNvPr>
@@ -30876,7 +30876,7 @@
           <p:cNvPr id="29" name="">
             <a:extLst xmlns:a="http://schemas.openxmlformats.org/drawingml/2006/main">
               <a:ext uri="{FF2B5EF4-FFF2-40B4-BE49-F238E27FC236}">
-                <a16:creationId xmlns:a16="http://schemas.microsoft.com/office/drawing/2014/main" id="{B8386017-95FF-409E-BF47-FA14414BD58B}"/>
+                <a16:creationId xmlns:a16="http://schemas.microsoft.com/office/drawing/2014/main" id="{4DD509AA-18B6-4941-A0F8-CFB47CE441E5}"/>
               </a:ext>
             </a:extLst>
           </p:cNvPr>
@@ -30928,7 +30928,7 @@
           <p:cNvPr id="30" name="">
             <a:extLst xmlns:a="http://schemas.openxmlformats.org/drawingml/2006/main">
               <a:ext uri="{FF2B5EF4-FFF2-40B4-BE49-F238E27FC236}">
-                <a16:creationId xmlns:a16="http://schemas.microsoft.com/office/drawing/2014/main" id="{52629144-BEBB-49F4-839D-0746897279A6}"/>
+                <a16:creationId xmlns:a16="http://schemas.microsoft.com/office/drawing/2014/main" id="{AFD0AD8D-3398-47CD-9B3B-1A82ABAE9406}"/>
               </a:ext>
             </a:extLst>
           </p:cNvPr>
@@ -30980,7 +30980,7 @@
           <p:cNvPr id="31" name="">
             <a:extLst xmlns:a="http://schemas.openxmlformats.org/drawingml/2006/main">
               <a:ext uri="{FF2B5EF4-FFF2-40B4-BE49-F238E27FC236}">
-                <a16:creationId xmlns:a16="http://schemas.microsoft.com/office/drawing/2014/main" id="{FB57BD40-7195-41D0-9F4A-6FF391722494}"/>
+                <a16:creationId xmlns:a16="http://schemas.microsoft.com/office/drawing/2014/main" id="{03EE93B6-A698-4C25-B4D5-FB07B311892C}"/>
               </a:ext>
             </a:extLst>
           </p:cNvPr>
@@ -31032,7 +31032,7 @@
           <p:cNvPr id="32" name="">
             <a:extLst xmlns:a="http://schemas.openxmlformats.org/drawingml/2006/main">
               <a:ext uri="{FF2B5EF4-FFF2-40B4-BE49-F238E27FC236}">
-                <a16:creationId xmlns:a16="http://schemas.microsoft.com/office/drawing/2014/main" id="{F65E60AD-9CE2-426E-8387-F1E7F7FD9DBC}"/>
+                <a16:creationId xmlns:a16="http://schemas.microsoft.com/office/drawing/2014/main" id="{116D54EE-22AA-4C8F-BDF6-D7FA27AAFEA9}"/>
               </a:ext>
             </a:extLst>
           </p:cNvPr>
@@ -31075,7 +31075,7 @@
           <p:cNvPr id="33" name="">
             <a:extLst xmlns:a="http://schemas.openxmlformats.org/drawingml/2006/main">
               <a:ext uri="{FF2B5EF4-FFF2-40B4-BE49-F238E27FC236}">
-                <a16:creationId xmlns:a16="http://schemas.microsoft.com/office/drawing/2014/main" id="{357D0493-D39F-470B-84D9-720CE90CCEA3}"/>
+                <a16:creationId xmlns:a16="http://schemas.microsoft.com/office/drawing/2014/main" id="{DC654EA6-68CC-4A27-8992-9E499440AAAD}"/>
               </a:ext>
             </a:extLst>
           </p:cNvPr>
@@ -31106,7 +31106,7 @@
           <p:cNvPr id="34" name="">
             <a:extLst xmlns:a="http://schemas.openxmlformats.org/drawingml/2006/main">
               <a:ext uri="{FF2B5EF4-FFF2-40B4-BE49-F238E27FC236}">
-                <a16:creationId xmlns:a16="http://schemas.microsoft.com/office/drawing/2014/main" id="{A7589D42-BF10-444C-99FC-0E975286496A}"/>
+                <a16:creationId xmlns:a16="http://schemas.microsoft.com/office/drawing/2014/main" id="{B8453445-053E-4211-9C40-A4985FB9D07B}"/>
               </a:ext>
             </a:extLst>
           </p:cNvPr>
@@ -31137,7 +31137,7 @@
           <p:cNvPr id="35" name="">
             <a:extLst xmlns:a="http://schemas.openxmlformats.org/drawingml/2006/main">
               <a:ext uri="{FF2B5EF4-FFF2-40B4-BE49-F238E27FC236}">
-                <a16:creationId xmlns:a16="http://schemas.microsoft.com/office/drawing/2014/main" id="{FCEDD976-8FFD-4A4E-8E1E-273283A9C98F}"/>
+                <a16:creationId xmlns:a16="http://schemas.microsoft.com/office/drawing/2014/main" id="{650E843E-0C0D-4528-A59F-44A1B4A0B3D8}"/>
               </a:ext>
             </a:extLst>
           </p:cNvPr>
@@ -31189,7 +31189,7 @@
           <p:cNvPr id="36" name="">
             <a:extLst xmlns:a="http://schemas.openxmlformats.org/drawingml/2006/main">
               <a:ext uri="{FF2B5EF4-FFF2-40B4-BE49-F238E27FC236}">
-                <a16:creationId xmlns:a16="http://schemas.microsoft.com/office/drawing/2014/main" id="{7BB3D197-1EF4-4771-9EBC-6878202BE1FA}"/>
+                <a16:creationId xmlns:a16="http://schemas.microsoft.com/office/drawing/2014/main" id="{718D988D-82A6-4148-B4DE-E45FFECB726B}"/>
               </a:ext>
             </a:extLst>
           </p:cNvPr>
@@ -31241,7 +31241,7 @@
           <p:cNvPr id="37" name="">
             <a:extLst xmlns:a="http://schemas.openxmlformats.org/drawingml/2006/main">
               <a:ext uri="{FF2B5EF4-FFF2-40B4-BE49-F238E27FC236}">
-                <a16:creationId xmlns:a16="http://schemas.microsoft.com/office/drawing/2014/main" id="{539D1937-3BB0-4DCC-8D50-EB28DF43C5DE}"/>
+                <a16:creationId xmlns:a16="http://schemas.microsoft.com/office/drawing/2014/main" id="{836C4532-657B-4E42-9DCB-7E0A927FCA10}"/>
               </a:ext>
             </a:extLst>
           </p:cNvPr>
@@ -31297,10 +31297,10 @@
           <p:nvPr/>
         </p:nvPicPr>
         <p:blipFill>
-          <a:blip xmlns:r="http://schemas.openxmlformats.org/officeDocument/2006/relationships" xmlns:a="http://schemas.openxmlformats.org/drawingml/2006/main" r:embed="R5058548a62094a21">
+          <a:blip xmlns:r="http://schemas.openxmlformats.org/officeDocument/2006/relationships" xmlns:a="http://schemas.openxmlformats.org/drawingml/2006/main" r:embed="R78e47176bb44422b">
             <a:extLst>
               <a:ext uri="{96DAC541-7B7A-43D3-8B79-37D633B846F1}">
-                <asvg:svgBlip xmlns:asvg="http://schemas.microsoft.com/office/drawing/2016/SVG/main" r:embed="R007a3eb685dc4079"/>
+                <asvg:svgBlip xmlns:asvg="http://schemas.microsoft.com/office/drawing/2016/SVG/main" r:embed="R12227a075c6641df"/>
               </a:ext>
             </a:extLst>
           </a:blip>
@@ -31321,7 +31321,7 @@
           <p:cNvPr id="39" name="">
             <a:extLst xmlns:a="http://schemas.openxmlformats.org/drawingml/2006/main">
               <a:ext uri="{FF2B5EF4-FFF2-40B4-BE49-F238E27FC236}">
-                <a16:creationId xmlns:a16="http://schemas.microsoft.com/office/drawing/2014/main" id="{7A1D240D-C6E3-40F3-B1C4-945CA87D91B8}"/>
+                <a16:creationId xmlns:a16="http://schemas.microsoft.com/office/drawing/2014/main" id="{3EC1D7B6-BFEF-4E8E-B812-1EC3F603D7A7}"/>
               </a:ext>
             </a:extLst>
           </p:cNvPr>
@@ -31373,7 +31373,7 @@
           <p:cNvPr id="40" name="">
             <a:extLst xmlns:a="http://schemas.openxmlformats.org/drawingml/2006/main">
               <a:ext uri="{FF2B5EF4-FFF2-40B4-BE49-F238E27FC236}">
-                <a16:creationId xmlns:a16="http://schemas.microsoft.com/office/drawing/2014/main" id="{37F63400-8AC0-4E16-904C-DB822B1D871E}"/>
+                <a16:creationId xmlns:a16="http://schemas.microsoft.com/office/drawing/2014/main" id="{C6284858-E2C8-4011-8DF4-570D64B4F619}"/>
               </a:ext>
             </a:extLst>
           </p:cNvPr>
@@ -31425,7 +31425,7 @@
           <p:cNvPr id="41" name="">
             <a:extLst xmlns:a="http://schemas.openxmlformats.org/drawingml/2006/main">
               <a:ext uri="{FF2B5EF4-FFF2-40B4-BE49-F238E27FC236}">
-                <a16:creationId xmlns:a16="http://schemas.microsoft.com/office/drawing/2014/main" id="{225651A9-D30D-4354-BF1D-EDDBC0296393}"/>
+                <a16:creationId xmlns:a16="http://schemas.microsoft.com/office/drawing/2014/main" id="{87D55942-C88D-4777-B07C-63FFF056C087}"/>
               </a:ext>
             </a:extLst>
           </p:cNvPr>
@@ -31468,7 +31468,7 @@
           <p:cNvPr id="42" name="">
             <a:extLst xmlns:a="http://schemas.openxmlformats.org/drawingml/2006/main">
               <a:ext uri="{FF2B5EF4-FFF2-40B4-BE49-F238E27FC236}">
-                <a16:creationId xmlns:a16="http://schemas.microsoft.com/office/drawing/2014/main" id="{26229066-60F7-45C3-8A2C-23C1AFBCC04C}"/>
+                <a16:creationId xmlns:a16="http://schemas.microsoft.com/office/drawing/2014/main" id="{4FC804EA-3E30-4680-9545-8323170C8E64}"/>
               </a:ext>
             </a:extLst>
           </p:cNvPr>
@@ -31499,7 +31499,7 @@
           <p:cNvPr id="43" name="">
             <a:extLst xmlns:a="http://schemas.openxmlformats.org/drawingml/2006/main">
               <a:ext uri="{FF2B5EF4-FFF2-40B4-BE49-F238E27FC236}">
-                <a16:creationId xmlns:a16="http://schemas.microsoft.com/office/drawing/2014/main" id="{47377EE0-D3F0-4FAB-B9D0-3E5045F71E82}"/>
+                <a16:creationId xmlns:a16="http://schemas.microsoft.com/office/drawing/2014/main" id="{27537BDE-D759-4482-A19A-A41C88D166A1}"/>
               </a:ext>
             </a:extLst>
           </p:cNvPr>
@@ -31530,7 +31530,7 @@
           <p:cNvPr id="44" name="">
             <a:extLst xmlns:a="http://schemas.openxmlformats.org/drawingml/2006/main">
               <a:ext uri="{FF2B5EF4-FFF2-40B4-BE49-F238E27FC236}">
-                <a16:creationId xmlns:a16="http://schemas.microsoft.com/office/drawing/2014/main" id="{1742939E-6E26-4EB9-AD98-A3368219BDB3}"/>
+                <a16:creationId xmlns:a16="http://schemas.microsoft.com/office/drawing/2014/main" id="{08B3080B-E8D9-47F0-AE27-1D1168330E4F}"/>
               </a:ext>
             </a:extLst>
           </p:cNvPr>
@@ -31573,7 +31573,7 @@
           <p:cNvPr id="45" name="">
             <a:extLst xmlns:a="http://schemas.openxmlformats.org/drawingml/2006/main">
               <a:ext uri="{FF2B5EF4-FFF2-40B4-BE49-F238E27FC236}">
-                <a16:creationId xmlns:a16="http://schemas.microsoft.com/office/drawing/2014/main" id="{922A3C94-53C4-4FD0-90DB-62961B270DF4}"/>
+                <a16:creationId xmlns:a16="http://schemas.microsoft.com/office/drawing/2014/main" id="{56DF48E9-6D55-4527-8152-1E41BB7EB7A0}"/>
               </a:ext>
             </a:extLst>
           </p:cNvPr>
@@ -31604,7 +31604,7 @@
           <p:cNvPr id="46" name="">
             <a:extLst xmlns:a="http://schemas.openxmlformats.org/drawingml/2006/main">
               <a:ext uri="{FF2B5EF4-FFF2-40B4-BE49-F238E27FC236}">
-                <a16:creationId xmlns:a16="http://schemas.microsoft.com/office/drawing/2014/main" id="{D42ABA7C-5C25-49DC-A4ED-07AD5CFD63B2}"/>
+                <a16:creationId xmlns:a16="http://schemas.microsoft.com/office/drawing/2014/main" id="{218E9D75-D63C-4185-BD12-6FB25BFAFDC5}"/>
               </a:ext>
             </a:extLst>
           </p:cNvPr>
@@ -31635,7 +31635,7 @@
           <p:cNvPr id="47" name="">
             <a:extLst xmlns:a="http://schemas.openxmlformats.org/drawingml/2006/main">
               <a:ext uri="{FF2B5EF4-FFF2-40B4-BE49-F238E27FC236}">
-                <a16:creationId xmlns:a16="http://schemas.microsoft.com/office/drawing/2014/main" id="{D435552D-136C-4454-A612-DDF45633F215}"/>
+                <a16:creationId xmlns:a16="http://schemas.microsoft.com/office/drawing/2014/main" id="{1FC301D2-4773-4F76-AE8B-6EC725807546}"/>
               </a:ext>
             </a:extLst>
           </p:cNvPr>
@@ -31687,7 +31687,7 @@
           <p:cNvPr id="48" name="">
             <a:extLst xmlns:a="http://schemas.openxmlformats.org/drawingml/2006/main">
               <a:ext uri="{FF2B5EF4-FFF2-40B4-BE49-F238E27FC236}">
-                <a16:creationId xmlns:a16="http://schemas.microsoft.com/office/drawing/2014/main" id="{165BF4BC-A0AA-467B-9F81-3742C3FE4510}"/>
+                <a16:creationId xmlns:a16="http://schemas.microsoft.com/office/drawing/2014/main" id="{30FCF2A0-5BFF-4BCF-98F4-CCB5D65C1CFA}"/>
               </a:ext>
             </a:extLst>
           </p:cNvPr>
@@ -31720,7 +31720,7 @@
           <p:cNvPr id="49" name="">
             <a:extLst xmlns:a="http://schemas.openxmlformats.org/drawingml/2006/main">
               <a:ext uri="{FF2B5EF4-FFF2-40B4-BE49-F238E27FC236}">
-                <a16:creationId xmlns:a16="http://schemas.microsoft.com/office/drawing/2014/main" id="{5ECF8658-72BD-41E2-BC34-34824172BF92}"/>
+                <a16:creationId xmlns:a16="http://schemas.microsoft.com/office/drawing/2014/main" id="{23A7B8ED-BD31-4AA9-9734-B96FB7773BF9}"/>
               </a:ext>
             </a:extLst>
           </p:cNvPr>
@@ -31772,7 +31772,7 @@
           <p:cNvPr id="50" name="">
             <a:extLst xmlns:a="http://schemas.openxmlformats.org/drawingml/2006/main">
               <a:ext uri="{FF2B5EF4-FFF2-40B4-BE49-F238E27FC236}">
-                <a16:creationId xmlns:a16="http://schemas.microsoft.com/office/drawing/2014/main" id="{DCF50E33-2149-49D0-9E9A-51D532CE3D47}"/>
+                <a16:creationId xmlns:a16="http://schemas.microsoft.com/office/drawing/2014/main" id="{80170F7F-AB5F-475C-96E2-860DE9E9F81D}"/>
               </a:ext>
             </a:extLst>
           </p:cNvPr>
@@ -31824,7 +31824,7 @@
           <p:cNvPr id="51" name="">
             <a:extLst xmlns:a="http://schemas.openxmlformats.org/drawingml/2006/main">
               <a:ext uri="{FF2B5EF4-FFF2-40B4-BE49-F238E27FC236}">
-                <a16:creationId xmlns:a16="http://schemas.microsoft.com/office/drawing/2014/main" id="{8A762639-3E37-4D81-B00A-1F322388CF70}"/>
+                <a16:creationId xmlns:a16="http://schemas.microsoft.com/office/drawing/2014/main" id="{DFC41B13-B63A-4D50-8A2C-7D0C45021720}"/>
               </a:ext>
             </a:extLst>
           </p:cNvPr>
@@ -31876,7 +31876,7 @@
           <p:cNvPr id="52" name="">
             <a:extLst xmlns:a="http://schemas.openxmlformats.org/drawingml/2006/main">
               <a:ext uri="{FF2B5EF4-FFF2-40B4-BE49-F238E27FC236}">
-                <a16:creationId xmlns:a16="http://schemas.microsoft.com/office/drawing/2014/main" id="{D23724C4-6453-4707-89A4-0A8E6879ABB4}"/>
+                <a16:creationId xmlns:a16="http://schemas.microsoft.com/office/drawing/2014/main" id="{53FC8F5E-8521-466C-B0B7-A2B2A80E16C5}"/>
               </a:ext>
             </a:extLst>
           </p:cNvPr>
@@ -31919,7 +31919,7 @@
           <p:cNvPr id="53" name="">
             <a:extLst xmlns:a="http://schemas.openxmlformats.org/drawingml/2006/main">
               <a:ext uri="{FF2B5EF4-FFF2-40B4-BE49-F238E27FC236}">
-                <a16:creationId xmlns:a16="http://schemas.microsoft.com/office/drawing/2014/main" id="{C5367C7F-B667-49B5-91EC-D231525A1D87}"/>
+                <a16:creationId xmlns:a16="http://schemas.microsoft.com/office/drawing/2014/main" id="{47F0EEFE-6439-45C9-A212-672AB1894AF1}"/>
               </a:ext>
             </a:extLst>
           </p:cNvPr>
@@ -31950,7 +31950,7 @@
           <p:cNvPr id="54" name="">
             <a:extLst xmlns:a="http://schemas.openxmlformats.org/drawingml/2006/main">
               <a:ext uri="{FF2B5EF4-FFF2-40B4-BE49-F238E27FC236}">
-                <a16:creationId xmlns:a16="http://schemas.microsoft.com/office/drawing/2014/main" id="{EC98D27A-6952-4B6B-A91D-67BC8CF6F7FD}"/>
+                <a16:creationId xmlns:a16="http://schemas.microsoft.com/office/drawing/2014/main" id="{ADD31308-61FA-4CF5-873C-678D3C36AF8B}"/>
               </a:ext>
             </a:extLst>
           </p:cNvPr>
@@ -31981,7 +31981,7 @@
           <p:cNvPr id="55" name="">
             <a:extLst xmlns:a="http://schemas.openxmlformats.org/drawingml/2006/main">
               <a:ext uri="{FF2B5EF4-FFF2-40B4-BE49-F238E27FC236}">
-                <a16:creationId xmlns:a16="http://schemas.microsoft.com/office/drawing/2014/main" id="{A4A94EA0-78E3-4481-BBAE-826BF352F597}"/>
+                <a16:creationId xmlns:a16="http://schemas.microsoft.com/office/drawing/2014/main" id="{95F04371-5EC9-42FC-AAD4-3B45A6234849}"/>
               </a:ext>
             </a:extLst>
           </p:cNvPr>
@@ -32033,7 +32033,7 @@
           <p:cNvPr id="56" name="">
             <a:extLst xmlns:a="http://schemas.openxmlformats.org/drawingml/2006/main">
               <a:ext uri="{FF2B5EF4-FFF2-40B4-BE49-F238E27FC236}">
-                <a16:creationId xmlns:a16="http://schemas.microsoft.com/office/drawing/2014/main" id="{06DEB182-0605-4930-A3BE-8A84EB19DB00}"/>
+                <a16:creationId xmlns:a16="http://schemas.microsoft.com/office/drawing/2014/main" id="{83D90A77-EFD7-4DFE-A286-67E747472C40}"/>
               </a:ext>
             </a:extLst>
           </p:cNvPr>
@@ -32066,7 +32066,7 @@
           <p:cNvPr id="57" name="">
             <a:extLst xmlns:a="http://schemas.openxmlformats.org/drawingml/2006/main">
               <a:ext uri="{FF2B5EF4-FFF2-40B4-BE49-F238E27FC236}">
-                <a16:creationId xmlns:a16="http://schemas.microsoft.com/office/drawing/2014/main" id="{76758F44-FBF8-4335-B74E-8650900FEE7E}"/>
+                <a16:creationId xmlns:a16="http://schemas.microsoft.com/office/drawing/2014/main" id="{9D98C203-C9EF-4393-8F9E-EE28FA84CC9E}"/>
               </a:ext>
             </a:extLst>
           </p:cNvPr>
@@ -32118,7 +32118,7 @@
           <p:cNvPr id="58" name="">
             <a:extLst xmlns:a="http://schemas.openxmlformats.org/drawingml/2006/main">
               <a:ext uri="{FF2B5EF4-FFF2-40B4-BE49-F238E27FC236}">
-                <a16:creationId xmlns:a16="http://schemas.microsoft.com/office/drawing/2014/main" id="{0905AF88-9BF2-491B-B8A0-21828E72EA1E}"/>
+                <a16:creationId xmlns:a16="http://schemas.microsoft.com/office/drawing/2014/main" id="{BE6B337D-A00B-459C-808D-054C6C02345F}"/>
               </a:ext>
             </a:extLst>
           </p:cNvPr>
@@ -32170,7 +32170,7 @@
           <p:cNvPr id="59" name="">
             <a:extLst xmlns:a="http://schemas.openxmlformats.org/drawingml/2006/main">
               <a:ext uri="{FF2B5EF4-FFF2-40B4-BE49-F238E27FC236}">
-                <a16:creationId xmlns:a16="http://schemas.microsoft.com/office/drawing/2014/main" id="{F6D588A1-9E83-4519-958C-FF64117AB612}"/>
+                <a16:creationId xmlns:a16="http://schemas.microsoft.com/office/drawing/2014/main" id="{F7CEDFC2-4B8C-445F-9E2A-F186DBFBC851}"/>
               </a:ext>
             </a:extLst>
           </p:cNvPr>
@@ -32222,7 +32222,7 @@
           <p:cNvPr id="60" name="">
             <a:extLst xmlns:a="http://schemas.openxmlformats.org/drawingml/2006/main">
               <a:ext uri="{FF2B5EF4-FFF2-40B4-BE49-F238E27FC236}">
-                <a16:creationId xmlns:a16="http://schemas.microsoft.com/office/drawing/2014/main" id="{4CC5F786-4AB3-4DBA-9CF9-D1297F828DED}"/>
+                <a16:creationId xmlns:a16="http://schemas.microsoft.com/office/drawing/2014/main" id="{777BADD8-AE7A-4CF1-B209-B688F86A006B}"/>
               </a:ext>
             </a:extLst>
           </p:cNvPr>
@@ -32265,7 +32265,7 @@
           <p:cNvPr id="61" name="">
             <a:extLst xmlns:a="http://schemas.openxmlformats.org/drawingml/2006/main">
               <a:ext uri="{FF2B5EF4-FFF2-40B4-BE49-F238E27FC236}">
-                <a16:creationId xmlns:a16="http://schemas.microsoft.com/office/drawing/2014/main" id="{F4317F2F-B944-4E44-A944-037919CD773D}"/>
+                <a16:creationId xmlns:a16="http://schemas.microsoft.com/office/drawing/2014/main" id="{E643C19A-D534-4387-B144-059454CB9477}"/>
               </a:ext>
             </a:extLst>
           </p:cNvPr>
@@ -32296,7 +32296,7 @@
           <p:cNvPr id="62" name="">
             <a:extLst xmlns:a="http://schemas.openxmlformats.org/drawingml/2006/main">
               <a:ext uri="{FF2B5EF4-FFF2-40B4-BE49-F238E27FC236}">
-                <a16:creationId xmlns:a16="http://schemas.microsoft.com/office/drawing/2014/main" id="{7934406D-AB8B-4ED3-81F1-A29EFD311DDB}"/>
+                <a16:creationId xmlns:a16="http://schemas.microsoft.com/office/drawing/2014/main" id="{13FD36E0-8B1B-45F4-B43C-05BC3D91012F}"/>
               </a:ext>
             </a:extLst>
           </p:cNvPr>
@@ -32327,7 +32327,7 @@
           <p:cNvPr id="63" name="">
             <a:extLst xmlns:a="http://schemas.openxmlformats.org/drawingml/2006/main">
               <a:ext uri="{FF2B5EF4-FFF2-40B4-BE49-F238E27FC236}">
-                <a16:creationId xmlns:a16="http://schemas.microsoft.com/office/drawing/2014/main" id="{C36AD070-DF31-4307-9F3B-0D9D03A0D8E1}"/>
+                <a16:creationId xmlns:a16="http://schemas.microsoft.com/office/drawing/2014/main" id="{825482C9-0510-460E-BC4A-7C1405E43BBD}"/>
               </a:ext>
             </a:extLst>
           </p:cNvPr>
@@ -32379,7 +32379,7 @@
           <p:cNvPr id="64" name="">
             <a:extLst xmlns:a="http://schemas.openxmlformats.org/drawingml/2006/main">
               <a:ext uri="{FF2B5EF4-FFF2-40B4-BE49-F238E27FC236}">
-                <a16:creationId xmlns:a16="http://schemas.microsoft.com/office/drawing/2014/main" id="{EB714689-A341-46E7-AA24-789791CE2C74}"/>
+                <a16:creationId xmlns:a16="http://schemas.microsoft.com/office/drawing/2014/main" id="{8E99CB99-746A-44C1-B069-B0FC3C0714E2}"/>
               </a:ext>
             </a:extLst>
           </p:cNvPr>
@@ -32412,7 +32412,7 @@
           <p:cNvPr id="65" name="">
             <a:extLst xmlns:a="http://schemas.openxmlformats.org/drawingml/2006/main">
               <a:ext uri="{FF2B5EF4-FFF2-40B4-BE49-F238E27FC236}">
-                <a16:creationId xmlns:a16="http://schemas.microsoft.com/office/drawing/2014/main" id="{6EB31105-045D-4418-881E-9194C606DF74}"/>
+                <a16:creationId xmlns:a16="http://schemas.microsoft.com/office/drawing/2014/main" id="{5A1FBC50-5CD4-4071-A790-2550613BB0C8}"/>
               </a:ext>
             </a:extLst>
           </p:cNvPr>
@@ -32464,7 +32464,7 @@
           <p:cNvPr id="66" name="">
             <a:extLst xmlns:a="http://schemas.openxmlformats.org/drawingml/2006/main">
               <a:ext uri="{FF2B5EF4-FFF2-40B4-BE49-F238E27FC236}">
-                <a16:creationId xmlns:a16="http://schemas.microsoft.com/office/drawing/2014/main" id="{54CE77A2-D81C-4B4E-B5E3-C4DCB21C349A}"/>
+                <a16:creationId xmlns:a16="http://schemas.microsoft.com/office/drawing/2014/main" id="{4E3B859F-3A9B-4BBA-AA11-FC79C8F246E2}"/>
               </a:ext>
             </a:extLst>
           </p:cNvPr>
@@ -32516,7 +32516,7 @@
           <p:cNvPr id="67" name="">
             <a:extLst xmlns:a="http://schemas.openxmlformats.org/drawingml/2006/main">
               <a:ext uri="{FF2B5EF4-FFF2-40B4-BE49-F238E27FC236}">
-                <a16:creationId xmlns:a16="http://schemas.microsoft.com/office/drawing/2014/main" id="{99D2F0E5-8C61-4888-85B9-A4CE4445B442}"/>
+                <a16:creationId xmlns:a16="http://schemas.microsoft.com/office/drawing/2014/main" id="{8DF6C1B2-F280-493B-A0B1-4B638BDFB751}"/>
               </a:ext>
             </a:extLst>
           </p:cNvPr>
@@ -32568,7 +32568,7 @@
           <p:cNvPr id="68" name="">
             <a:extLst xmlns:a="http://schemas.openxmlformats.org/drawingml/2006/main">
               <a:ext uri="{FF2B5EF4-FFF2-40B4-BE49-F238E27FC236}">
-                <a16:creationId xmlns:a16="http://schemas.microsoft.com/office/drawing/2014/main" id="{A1B764FE-DAC3-49DE-B2B0-1EE0F9FCC80E}"/>
+                <a16:creationId xmlns:a16="http://schemas.microsoft.com/office/drawing/2014/main" id="{14C6E23F-A1F9-4A22-834A-CF82AAB4C149}"/>
               </a:ext>
             </a:extLst>
           </p:cNvPr>
@@ -32611,7 +32611,7 @@
           <p:cNvPr id="69" name="">
             <a:extLst xmlns:a="http://schemas.openxmlformats.org/drawingml/2006/main">
               <a:ext uri="{FF2B5EF4-FFF2-40B4-BE49-F238E27FC236}">
-                <a16:creationId xmlns:a16="http://schemas.microsoft.com/office/drawing/2014/main" id="{6CC38AD4-4A19-4AC4-87D8-718C48E1CA76}"/>
+                <a16:creationId xmlns:a16="http://schemas.microsoft.com/office/drawing/2014/main" id="{C5732ABD-DAF9-45BD-B4DB-D262D79DC3CD}"/>
               </a:ext>
             </a:extLst>
           </p:cNvPr>
@@ -32642,7 +32642,7 @@
           <p:cNvPr id="70" name="">
             <a:extLst xmlns:a="http://schemas.openxmlformats.org/drawingml/2006/main">
               <a:ext uri="{FF2B5EF4-FFF2-40B4-BE49-F238E27FC236}">
-                <a16:creationId xmlns:a16="http://schemas.microsoft.com/office/drawing/2014/main" id="{6685A76A-C2DD-4CA7-BB34-CAD4A69F6E6E}"/>
+                <a16:creationId xmlns:a16="http://schemas.microsoft.com/office/drawing/2014/main" id="{7CB7D207-9939-4BEC-9CE4-D4D004BC7D1C}"/>
               </a:ext>
             </a:extLst>
           </p:cNvPr>
@@ -32673,7 +32673,7 @@
           <p:cNvPr id="71" name="">
             <a:extLst xmlns:a="http://schemas.openxmlformats.org/drawingml/2006/main">
               <a:ext uri="{FF2B5EF4-FFF2-40B4-BE49-F238E27FC236}">
-                <a16:creationId xmlns:a16="http://schemas.microsoft.com/office/drawing/2014/main" id="{FBC7B076-E8B9-4C89-AC26-BC8A05606EBF}"/>
+                <a16:creationId xmlns:a16="http://schemas.microsoft.com/office/drawing/2014/main" id="{401CE761-47DC-4A20-A99C-4429BD9B487A}"/>
               </a:ext>
             </a:extLst>
           </p:cNvPr>
@@ -32725,7 +32725,7 @@
           <p:cNvPr id="72" name="">
             <a:extLst xmlns:a="http://schemas.openxmlformats.org/drawingml/2006/main">
               <a:ext uri="{FF2B5EF4-FFF2-40B4-BE49-F238E27FC236}">
-                <a16:creationId xmlns:a16="http://schemas.microsoft.com/office/drawing/2014/main" id="{05132BCA-6A04-43FD-BD53-C29EABED6343}"/>
+                <a16:creationId xmlns:a16="http://schemas.microsoft.com/office/drawing/2014/main" id="{19FA5F00-67DC-4437-AC71-96AD313142E9}"/>
               </a:ext>
             </a:extLst>
           </p:cNvPr>
@@ -32758,7 +32758,7 @@
           <p:cNvPr id="73" name="">
             <a:extLst xmlns:a="http://schemas.openxmlformats.org/drawingml/2006/main">
               <a:ext uri="{FF2B5EF4-FFF2-40B4-BE49-F238E27FC236}">
-                <a16:creationId xmlns:a16="http://schemas.microsoft.com/office/drawing/2014/main" id="{61CFEBC4-7B91-4784-A882-244B2A17484B}"/>
+                <a16:creationId xmlns:a16="http://schemas.microsoft.com/office/drawing/2014/main" id="{9CDBBCFF-CDA7-4FFA-8574-7D78760A9CDC}"/>
               </a:ext>
             </a:extLst>
           </p:cNvPr>
@@ -32810,7 +32810,7 @@
           <p:cNvPr id="74" name="">
             <a:extLst xmlns:a="http://schemas.openxmlformats.org/drawingml/2006/main">
               <a:ext uri="{FF2B5EF4-FFF2-40B4-BE49-F238E27FC236}">
-                <a16:creationId xmlns:a16="http://schemas.microsoft.com/office/drawing/2014/main" id="{B9452388-0D2F-4013-8B43-2E56B7758C0F}"/>
+                <a16:creationId xmlns:a16="http://schemas.microsoft.com/office/drawing/2014/main" id="{F08C1169-5CC9-4662-B7EF-A1C1810F6320}"/>
               </a:ext>
             </a:extLst>
           </p:cNvPr>
@@ -32862,7 +32862,7 @@
           <p:cNvPr id="75" name="">
             <a:extLst xmlns:a="http://schemas.openxmlformats.org/drawingml/2006/main">
               <a:ext uri="{FF2B5EF4-FFF2-40B4-BE49-F238E27FC236}">
-                <a16:creationId xmlns:a16="http://schemas.microsoft.com/office/drawing/2014/main" id="{6857E418-BA6C-4EA3-95BE-4B440F723530}"/>
+                <a16:creationId xmlns:a16="http://schemas.microsoft.com/office/drawing/2014/main" id="{08A2A79D-C2A2-4221-8DDB-A8DF13EC77E2}"/>
               </a:ext>
             </a:extLst>
           </p:cNvPr>
@@ -32912,7 +32912,7 @@
     </p:spTree>
     <p:extLst>
       <p:ext uri="{BB962C8B-B14F-4D97-AF65-F5344CB8AC3E}">
-        <p14:creationId xmlns:p14="http://schemas.microsoft.com/office/powerpoint/2010/main" val="1676511557"/>
+        <p14:creationId xmlns:p14="http://schemas.microsoft.com/office/powerpoint/2010/main" val="861318938"/>
       </p:ext>
     </p:extLst>
   </p:cSld>
@@ -32943,7 +32943,7 @@
           <p:cNvPr id="30" name="">
             <a:extLst xmlns:a="http://schemas.openxmlformats.org/drawingml/2006/main">
               <a:ext uri="{FF2B5EF4-FFF2-40B4-BE49-F238E27FC236}">
-                <a16:creationId xmlns:a16="http://schemas.microsoft.com/office/drawing/2014/main" id="{B60E4CF9-4A9F-4EE7-8879-32DBE46DC686}"/>
+                <a16:creationId xmlns:a16="http://schemas.microsoft.com/office/drawing/2014/main" id="{DCF25C65-850B-4703-BE8F-FEAD54E483B7}"/>
               </a:ext>
             </a:extLst>
           </p:cNvPr>
@@ -32976,7 +32976,7 @@
           <p:cNvPr id="2" name="">
             <a:extLst xmlns:a="http://schemas.openxmlformats.org/drawingml/2006/main">
               <a:ext uri="{FF2B5EF4-FFF2-40B4-BE49-F238E27FC236}">
-                <a16:creationId xmlns:a16="http://schemas.microsoft.com/office/drawing/2014/main" id="{C01FE50C-4B41-49D8-B352-B1552918E635}"/>
+                <a16:creationId xmlns:a16="http://schemas.microsoft.com/office/drawing/2014/main" id="{86A6766D-0AC0-4B33-A2E7-83D966A4F473}"/>
               </a:ext>
             </a:extLst>
           </p:cNvPr>
@@ -33007,7 +33007,7 @@
           <p:cNvPr id="3" name="">
             <a:extLst xmlns:a="http://schemas.openxmlformats.org/drawingml/2006/main">
               <a:ext uri="{FF2B5EF4-FFF2-40B4-BE49-F238E27FC236}">
-                <a16:creationId xmlns:a16="http://schemas.microsoft.com/office/drawing/2014/main" id="{B56C1027-0919-4745-99C7-01D6701DE6E8}"/>
+                <a16:creationId xmlns:a16="http://schemas.microsoft.com/office/drawing/2014/main" id="{D0FC95A3-4F84-4D4C-A4A8-2F5CB9E99A16}"/>
               </a:ext>
             </a:extLst>
           </p:cNvPr>
@@ -33059,7 +33059,7 @@
           <p:cNvPr id="4" name="">
             <a:extLst xmlns:a="http://schemas.openxmlformats.org/drawingml/2006/main">
               <a:ext uri="{FF2B5EF4-FFF2-40B4-BE49-F238E27FC236}">
-                <a16:creationId xmlns:a16="http://schemas.microsoft.com/office/drawing/2014/main" id="{7E543087-EA00-4E6A-8AA9-2F1A8C8711C0}"/>
+                <a16:creationId xmlns:a16="http://schemas.microsoft.com/office/drawing/2014/main" id="{C8402D5A-19C5-4D88-A0CA-36EFD6A2A2A2}"/>
               </a:ext>
             </a:extLst>
           </p:cNvPr>
@@ -33111,7 +33111,7 @@
           <p:cNvPr id="5" name="">
             <a:extLst xmlns:a="http://schemas.openxmlformats.org/drawingml/2006/main">
               <a:ext uri="{FF2B5EF4-FFF2-40B4-BE49-F238E27FC236}">
-                <a16:creationId xmlns:a16="http://schemas.microsoft.com/office/drawing/2014/main" id="{CDBD99D7-30C4-4ADA-8092-F4119BE74F40}"/>
+                <a16:creationId xmlns:a16="http://schemas.microsoft.com/office/drawing/2014/main" id="{9BD295E4-9B06-4B3F-BECE-8A4A0DCAE17B}"/>
               </a:ext>
             </a:extLst>
           </p:cNvPr>
@@ -33146,7 +33146,7 @@
           <p:nvPr/>
         </p:nvPicPr>
         <p:blipFill>
-          <a:blip xmlns:r="http://schemas.openxmlformats.org/officeDocument/2006/relationships" xmlns:a="http://schemas.openxmlformats.org/drawingml/2006/main" r:embed="R002e425a725e42bc"/>
+          <a:blip xmlns:r="http://schemas.openxmlformats.org/officeDocument/2006/relationships" xmlns:a="http://schemas.openxmlformats.org/drawingml/2006/main" r:embed="Refe368c43a48456e"/>
           <a:stretch xmlns:a="http://schemas.openxmlformats.org/drawingml/2006/main"/>
         </p:blipFill>
         <p:spPr>
@@ -33164,7 +33164,7 @@
           <p:cNvPr id="7" name="">
             <a:extLst xmlns:a="http://schemas.openxmlformats.org/drawingml/2006/main">
               <a:ext uri="{FF2B5EF4-FFF2-40B4-BE49-F238E27FC236}">
-                <a16:creationId xmlns:a16="http://schemas.microsoft.com/office/drawing/2014/main" id="{113C6496-7760-4586-9533-7B6277C2348F}"/>
+                <a16:creationId xmlns:a16="http://schemas.microsoft.com/office/drawing/2014/main" id="{754027AB-39A7-4929-ADDD-1B9CD24D10E2}"/>
               </a:ext>
             </a:extLst>
           </p:cNvPr>
@@ -33216,7 +33216,7 @@
           <p:cNvPr id="8" name="">
             <a:extLst xmlns:a="http://schemas.openxmlformats.org/drawingml/2006/main">
               <a:ext uri="{FF2B5EF4-FFF2-40B4-BE49-F238E27FC236}">
-                <a16:creationId xmlns:a16="http://schemas.microsoft.com/office/drawing/2014/main" id="{67AE3ADD-A9E2-4214-B3CA-EA34634D2AEB}"/>
+                <a16:creationId xmlns:a16="http://schemas.microsoft.com/office/drawing/2014/main" id="{03A6F063-FC3C-4BF0-8208-3908AED39803}"/>
               </a:ext>
             </a:extLst>
           </p:cNvPr>
@@ -33268,7 +33268,7 @@
           <p:cNvPr id="9" name="">
             <a:extLst xmlns:a="http://schemas.openxmlformats.org/drawingml/2006/main">
               <a:ext uri="{FF2B5EF4-FFF2-40B4-BE49-F238E27FC236}">
-                <a16:creationId xmlns:a16="http://schemas.microsoft.com/office/drawing/2014/main" id="{FAB362CE-39B8-49AD-9826-249221EE7509}"/>
+                <a16:creationId xmlns:a16="http://schemas.microsoft.com/office/drawing/2014/main" id="{BD4DA6B5-71D2-40CE-BE75-EF611C5BDE5F}"/>
               </a:ext>
             </a:extLst>
           </p:cNvPr>
@@ -33320,7 +33320,7 @@
           <p:cNvPr id="10" name="">
             <a:extLst xmlns:a="http://schemas.openxmlformats.org/drawingml/2006/main">
               <a:ext uri="{FF2B5EF4-FFF2-40B4-BE49-F238E27FC236}">
-                <a16:creationId xmlns:a16="http://schemas.microsoft.com/office/drawing/2014/main" id="{D2123CD1-386C-469A-B59D-B1AC8FE1C331}"/>
+                <a16:creationId xmlns:a16="http://schemas.microsoft.com/office/drawing/2014/main" id="{BD105998-E799-4ECC-B690-F9817DD582D3}"/>
               </a:ext>
             </a:extLst>
           </p:cNvPr>
@@ -33372,7 +33372,7 @@
           <p:cNvPr id="11" name="">
             <a:extLst xmlns:a="http://schemas.openxmlformats.org/drawingml/2006/main">
               <a:ext uri="{FF2B5EF4-FFF2-40B4-BE49-F238E27FC236}">
-                <a16:creationId xmlns:a16="http://schemas.microsoft.com/office/drawing/2014/main" id="{ECEF1738-C9C5-42C6-8DFC-C8B001FC0DF1}"/>
+                <a16:creationId xmlns:a16="http://schemas.microsoft.com/office/drawing/2014/main" id="{D220D852-9C5E-410A-892A-386565F2C35F}"/>
               </a:ext>
             </a:extLst>
           </p:cNvPr>
@@ -33419,10 +33419,10 @@
           <p:nvPr/>
         </p:nvPicPr>
         <p:blipFill>
-          <a:blip xmlns:r="http://schemas.openxmlformats.org/officeDocument/2006/relationships" xmlns:a="http://schemas.openxmlformats.org/drawingml/2006/main" r:embed="Re06e84ef25054f0b">
+          <a:blip xmlns:r="http://schemas.openxmlformats.org/officeDocument/2006/relationships" xmlns:a="http://schemas.openxmlformats.org/drawingml/2006/main" r:embed="Rad0915b0d0ac4e34">
             <a:extLst>
               <a:ext uri="{96DAC541-7B7A-43D3-8B79-37D633B846F1}">
-                <asvg:svgBlip xmlns:asvg="http://schemas.microsoft.com/office/drawing/2016/SVG/main" r:embed="R17ff7d8b27934a77"/>
+                <asvg:svgBlip xmlns:asvg="http://schemas.microsoft.com/office/drawing/2016/SVG/main" r:embed="R76c9a67a770747ec"/>
               </a:ext>
             </a:extLst>
           </a:blip>
@@ -33443,7 +33443,7 @@
           <p:cNvPr id="13" name="">
             <a:extLst xmlns:a="http://schemas.openxmlformats.org/drawingml/2006/main">
               <a:ext uri="{FF2B5EF4-FFF2-40B4-BE49-F238E27FC236}">
-                <a16:creationId xmlns:a16="http://schemas.microsoft.com/office/drawing/2014/main" id="{8A77CCE4-C93D-497E-91F8-48D2AF2C2B92}"/>
+                <a16:creationId xmlns:a16="http://schemas.microsoft.com/office/drawing/2014/main" id="{07D3D823-DFBB-4675-AD94-663772665A13}"/>
               </a:ext>
             </a:extLst>
           </p:cNvPr>
@@ -33476,7 +33476,7 @@
           <p:cNvPr id="14" name="">
             <a:extLst xmlns:a="http://schemas.openxmlformats.org/drawingml/2006/main">
               <a:ext uri="{FF2B5EF4-FFF2-40B4-BE49-F238E27FC236}">
-                <a16:creationId xmlns:a16="http://schemas.microsoft.com/office/drawing/2014/main" id="{A1DBC418-FCF0-4E9B-85D7-D6E730BD4932}"/>
+                <a16:creationId xmlns:a16="http://schemas.microsoft.com/office/drawing/2014/main" id="{68F63042-0384-4682-80C8-BF723CD3EB2D}"/>
               </a:ext>
             </a:extLst>
           </p:cNvPr>
@@ -33528,7 +33528,7 @@
           <p:cNvPr id="15" name="">
             <a:extLst xmlns:a="http://schemas.openxmlformats.org/drawingml/2006/main">
               <a:ext uri="{FF2B5EF4-FFF2-40B4-BE49-F238E27FC236}">
-                <a16:creationId xmlns:a16="http://schemas.microsoft.com/office/drawing/2014/main" id="{2124100E-74D6-41BB-BAE4-D01FB7130536}"/>
+                <a16:creationId xmlns:a16="http://schemas.microsoft.com/office/drawing/2014/main" id="{86C0BA86-B5AF-4225-979D-FB1D7BCB3F45}"/>
               </a:ext>
             </a:extLst>
           </p:cNvPr>
@@ -33561,7 +33561,7 @@
           <p:cNvPr id="16" name="">
             <a:extLst xmlns:a="http://schemas.openxmlformats.org/drawingml/2006/main">
               <a:ext uri="{FF2B5EF4-FFF2-40B4-BE49-F238E27FC236}">
-                <a16:creationId xmlns:a16="http://schemas.microsoft.com/office/drawing/2014/main" id="{40B2BB12-C555-4A99-98D1-62AC6D2DF672}"/>
+                <a16:creationId xmlns:a16="http://schemas.microsoft.com/office/drawing/2014/main" id="{8ECB2C11-8061-4E02-A9EF-2996592F4EC1}"/>
               </a:ext>
             </a:extLst>
           </p:cNvPr>
@@ -33613,7 +33613,7 @@
           <p:cNvPr id="17" name="">
             <a:extLst xmlns:a="http://schemas.openxmlformats.org/drawingml/2006/main">
               <a:ext uri="{FF2B5EF4-FFF2-40B4-BE49-F238E27FC236}">
-                <a16:creationId xmlns:a16="http://schemas.microsoft.com/office/drawing/2014/main" id="{A6904268-1BB3-4763-AC75-DFF2FB563EC1}"/>
+                <a16:creationId xmlns:a16="http://schemas.microsoft.com/office/drawing/2014/main" id="{F250FAB6-D685-445D-B33E-6940F9A2FED6}"/>
               </a:ext>
             </a:extLst>
           </p:cNvPr>
@@ -33646,7 +33646,7 @@
           <p:cNvPr id="18" name="">
             <a:extLst xmlns:a="http://schemas.openxmlformats.org/drawingml/2006/main">
               <a:ext uri="{FF2B5EF4-FFF2-40B4-BE49-F238E27FC236}">
-                <a16:creationId xmlns:a16="http://schemas.microsoft.com/office/drawing/2014/main" id="{E68DBFFB-C231-44FB-A1D7-53D65014CA2C}"/>
+                <a16:creationId xmlns:a16="http://schemas.microsoft.com/office/drawing/2014/main" id="{0309591C-11A1-4ADB-AEAB-5F9D597A37A3}"/>
               </a:ext>
             </a:extLst>
           </p:cNvPr>
@@ -33698,7 +33698,7 @@
           <p:cNvPr id="19" name="">
             <a:extLst xmlns:a="http://schemas.openxmlformats.org/drawingml/2006/main">
               <a:ext uri="{FF2B5EF4-FFF2-40B4-BE49-F238E27FC236}">
-                <a16:creationId xmlns:a16="http://schemas.microsoft.com/office/drawing/2014/main" id="{A564C1B2-B320-4791-81A9-88BEB4C65892}"/>
+                <a16:creationId xmlns:a16="http://schemas.microsoft.com/office/drawing/2014/main" id="{EFCD99FC-1209-497E-A330-9656806D0AE4}"/>
               </a:ext>
             </a:extLst>
           </p:cNvPr>
@@ -33731,7 +33731,7 @@
           <p:cNvPr id="20" name="">
             <a:extLst xmlns:a="http://schemas.openxmlformats.org/drawingml/2006/main">
               <a:ext uri="{FF2B5EF4-FFF2-40B4-BE49-F238E27FC236}">
-                <a16:creationId xmlns:a16="http://schemas.microsoft.com/office/drawing/2014/main" id="{D1ACCF49-60DE-4F52-865C-2E7FC95C5C5E}"/>
+                <a16:creationId xmlns:a16="http://schemas.microsoft.com/office/drawing/2014/main" id="{8F8891C0-B761-46C2-AD77-5D6B276EA3DC}"/>
               </a:ext>
             </a:extLst>
           </p:cNvPr>
@@ -33783,7 +33783,7 @@
           <p:cNvPr id="21" name="">
             <a:extLst xmlns:a="http://schemas.openxmlformats.org/drawingml/2006/main">
               <a:ext uri="{FF2B5EF4-FFF2-40B4-BE49-F238E27FC236}">
-                <a16:creationId xmlns:a16="http://schemas.microsoft.com/office/drawing/2014/main" id="{1EEE6544-9F2B-4630-8E91-D53AA5992377}"/>
+                <a16:creationId xmlns:a16="http://schemas.microsoft.com/office/drawing/2014/main" id="{F26E2BDF-DD6C-4607-BFD6-288DB0E85BB8}"/>
               </a:ext>
             </a:extLst>
           </p:cNvPr>
@@ -33814,7 +33814,7 @@
           <p:cNvPr id="22" name="">
             <a:extLst xmlns:a="http://schemas.openxmlformats.org/drawingml/2006/main">
               <a:ext uri="{FF2B5EF4-FFF2-40B4-BE49-F238E27FC236}">
-                <a16:creationId xmlns:a16="http://schemas.microsoft.com/office/drawing/2014/main" id="{26D7C1D2-F81D-449E-BB7E-F2D836ADB32A}"/>
+                <a16:creationId xmlns:a16="http://schemas.microsoft.com/office/drawing/2014/main" id="{DEE9C699-C864-4A5C-AD3E-E4685925F8D8}"/>
               </a:ext>
             </a:extLst>
           </p:cNvPr>
@@ -33866,7 +33866,7 @@
           <p:cNvPr id="23" name="">
             <a:extLst xmlns:a="http://schemas.openxmlformats.org/drawingml/2006/main">
               <a:ext uri="{FF2B5EF4-FFF2-40B4-BE49-F238E27FC236}">
-                <a16:creationId xmlns:a16="http://schemas.microsoft.com/office/drawing/2014/main" id="{5E765770-E44B-4BD3-8543-0483DFE09598}"/>
+                <a16:creationId xmlns:a16="http://schemas.microsoft.com/office/drawing/2014/main" id="{2F29D234-5300-4B03-878F-CE16CC913FA1}"/>
               </a:ext>
             </a:extLst>
           </p:cNvPr>
@@ -33918,7 +33918,7 @@
           <p:cNvPr id="24" name="">
             <a:extLst xmlns:a="http://schemas.openxmlformats.org/drawingml/2006/main">
               <a:ext uri="{FF2B5EF4-FFF2-40B4-BE49-F238E27FC236}">
-                <a16:creationId xmlns:a16="http://schemas.microsoft.com/office/drawing/2014/main" id="{6FFD64D2-6248-41E1-8477-B0934A05382D}"/>
+                <a16:creationId xmlns:a16="http://schemas.microsoft.com/office/drawing/2014/main" id="{1B451845-922F-4126-82D6-96AD94CD60D2}"/>
               </a:ext>
             </a:extLst>
           </p:cNvPr>
@@ -33970,7 +33970,7 @@
           <p:cNvPr id="25" name="">
             <a:extLst xmlns:a="http://schemas.openxmlformats.org/drawingml/2006/main">
               <a:ext uri="{FF2B5EF4-FFF2-40B4-BE49-F238E27FC236}">
-                <a16:creationId xmlns:a16="http://schemas.microsoft.com/office/drawing/2014/main" id="{2893EBD8-68A2-4147-8802-56DFEF37EE60}"/>
+                <a16:creationId xmlns:a16="http://schemas.microsoft.com/office/drawing/2014/main" id="{95DCDB1C-49BB-4583-92CF-7B2DD8481D7E}"/>
               </a:ext>
             </a:extLst>
           </p:cNvPr>
@@ -34022,7 +34022,7 @@
           <p:cNvPr id="26" name="">
             <a:extLst xmlns:a="http://schemas.openxmlformats.org/drawingml/2006/main">
               <a:ext uri="{FF2B5EF4-FFF2-40B4-BE49-F238E27FC236}">
-                <a16:creationId xmlns:a16="http://schemas.microsoft.com/office/drawing/2014/main" id="{19ABDBD3-7894-4C72-9D0B-A71DCBDCE498}"/>
+                <a16:creationId xmlns:a16="http://schemas.microsoft.com/office/drawing/2014/main" id="{DE67A53F-18F9-40BF-A743-9E339245BFC7}"/>
               </a:ext>
             </a:extLst>
           </p:cNvPr>
@@ -34074,7 +34074,7 @@
           <p:cNvPr id="27" name="">
             <a:extLst xmlns:a="http://schemas.openxmlformats.org/drawingml/2006/main">
               <a:ext uri="{FF2B5EF4-FFF2-40B4-BE49-F238E27FC236}">
-                <a16:creationId xmlns:a16="http://schemas.microsoft.com/office/drawing/2014/main" id="{8FE07624-57C2-4922-8D60-67AFF595D1CA}"/>
+                <a16:creationId xmlns:a16="http://schemas.microsoft.com/office/drawing/2014/main" id="{923D9486-1D90-47F9-877B-071DF1EF3FA9}"/>
               </a:ext>
             </a:extLst>
           </p:cNvPr>
@@ -34126,7 +34126,7 @@
           <p:cNvPr id="28" name="">
             <a:extLst xmlns:a="http://schemas.openxmlformats.org/drawingml/2006/main">
               <a:ext uri="{FF2B5EF4-FFF2-40B4-BE49-F238E27FC236}">
-                <a16:creationId xmlns:a16="http://schemas.microsoft.com/office/drawing/2014/main" id="{5DB5EF7D-C835-4810-88F8-5BDFABE48BFB}"/>
+                <a16:creationId xmlns:a16="http://schemas.microsoft.com/office/drawing/2014/main" id="{9DBCE666-A343-47A8-BE0F-6A013091180E}"/>
               </a:ext>
             </a:extLst>
           </p:cNvPr>
@@ -34178,7 +34178,7 @@
           <p:cNvPr id="29" name="">
             <a:extLst xmlns:a="http://schemas.openxmlformats.org/drawingml/2006/main">
               <a:ext uri="{FF2B5EF4-FFF2-40B4-BE49-F238E27FC236}">
-                <a16:creationId xmlns:a16="http://schemas.microsoft.com/office/drawing/2014/main" id="{F7912B48-0314-47A6-8138-A8DF00FA6DF2}"/>
+                <a16:creationId xmlns:a16="http://schemas.microsoft.com/office/drawing/2014/main" id="{79078FB3-9338-46BC-8980-967C369018F7}"/>
               </a:ext>
             </a:extLst>
           </p:cNvPr>
@@ -34228,7 +34228,7 @@
     </p:spTree>
     <p:extLst>
       <p:ext uri="{BB962C8B-B14F-4D97-AF65-F5344CB8AC3E}">
-        <p14:creationId xmlns:p14="http://schemas.microsoft.com/office/powerpoint/2010/main" val="1177987018"/>
+        <p14:creationId xmlns:p14="http://schemas.microsoft.com/office/powerpoint/2010/main" val="344942096"/>
       </p:ext>
     </p:extLst>
   </p:cSld>
@@ -34259,7 +34259,7 @@
           <p:cNvPr id="33" name="">
             <a:extLst xmlns:a="http://schemas.openxmlformats.org/drawingml/2006/main">
               <a:ext uri="{FF2B5EF4-FFF2-40B4-BE49-F238E27FC236}">
-                <a16:creationId xmlns:a16="http://schemas.microsoft.com/office/drawing/2014/main" id="{7BE281AA-0D2C-43EC-934B-F74372E59721}"/>
+                <a16:creationId xmlns:a16="http://schemas.microsoft.com/office/drawing/2014/main" id="{A9DA4C17-3782-49F6-8060-4B07C654F8E9}"/>
               </a:ext>
             </a:extLst>
           </p:cNvPr>
@@ -34292,7 +34292,7 @@
           <p:cNvPr id="2" name="">
             <a:extLst xmlns:a="http://schemas.openxmlformats.org/drawingml/2006/main">
               <a:ext uri="{FF2B5EF4-FFF2-40B4-BE49-F238E27FC236}">
-                <a16:creationId xmlns:a16="http://schemas.microsoft.com/office/drawing/2014/main" id="{312FFAE1-D272-4D98-B77D-C5B02FC1B3C8}"/>
+                <a16:creationId xmlns:a16="http://schemas.microsoft.com/office/drawing/2014/main" id="{79FB5EAB-C2F1-42F5-814D-E3E57D8778FC}"/>
               </a:ext>
             </a:extLst>
           </p:cNvPr>
@@ -34323,7 +34323,7 @@
           <p:cNvPr id="3" name="">
             <a:extLst xmlns:a="http://schemas.openxmlformats.org/drawingml/2006/main">
               <a:ext uri="{FF2B5EF4-FFF2-40B4-BE49-F238E27FC236}">
-                <a16:creationId xmlns:a16="http://schemas.microsoft.com/office/drawing/2014/main" id="{857F4870-05FE-496F-87AC-EBF4482F6103}"/>
+                <a16:creationId xmlns:a16="http://schemas.microsoft.com/office/drawing/2014/main" id="{FF649985-42EC-4C94-A5B9-26769FE5DB24}"/>
               </a:ext>
             </a:extLst>
           </p:cNvPr>
@@ -34375,7 +34375,7 @@
           <p:cNvPr id="4" name="">
             <a:extLst xmlns:a="http://schemas.openxmlformats.org/drawingml/2006/main">
               <a:ext uri="{FF2B5EF4-FFF2-40B4-BE49-F238E27FC236}">
-                <a16:creationId xmlns:a16="http://schemas.microsoft.com/office/drawing/2014/main" id="{AD8B3BDF-EFC3-4926-887F-F9F3A5424BD3}"/>
+                <a16:creationId xmlns:a16="http://schemas.microsoft.com/office/drawing/2014/main" id="{180E319F-66F3-475F-884C-A0147971F0D4}"/>
               </a:ext>
             </a:extLst>
           </p:cNvPr>
@@ -34427,7 +34427,7 @@
           <p:cNvPr id="5" name="">
             <a:extLst xmlns:a="http://schemas.openxmlformats.org/drawingml/2006/main">
               <a:ext uri="{FF2B5EF4-FFF2-40B4-BE49-F238E27FC236}">
-                <a16:creationId xmlns:a16="http://schemas.microsoft.com/office/drawing/2014/main" id="{BC77CFC3-5CFA-44C7-AFFF-4CEB5F78E9B5}"/>
+                <a16:creationId xmlns:a16="http://schemas.microsoft.com/office/drawing/2014/main" id="{F9E4C558-759C-4A6F-A2FD-DCEC800E4C4A}"/>
               </a:ext>
             </a:extLst>
           </p:cNvPr>
@@ -34462,7 +34462,7 @@
           <p:nvPr/>
         </p:nvPicPr>
         <p:blipFill>
-          <a:blip xmlns:r="http://schemas.openxmlformats.org/officeDocument/2006/relationships" xmlns:a="http://schemas.openxmlformats.org/drawingml/2006/main" r:embed="R8537b7aaf5914dc2"/>
+          <a:blip xmlns:r="http://schemas.openxmlformats.org/officeDocument/2006/relationships" xmlns:a="http://schemas.openxmlformats.org/drawingml/2006/main" r:embed="Ra3b76f2d84304286"/>
           <a:stretch xmlns:a="http://schemas.openxmlformats.org/drawingml/2006/main"/>
         </p:blipFill>
         <p:spPr>
@@ -34480,7 +34480,7 @@
           <p:cNvPr id="7" name="">
             <a:extLst xmlns:a="http://schemas.openxmlformats.org/drawingml/2006/main">
               <a:ext uri="{FF2B5EF4-FFF2-40B4-BE49-F238E27FC236}">
-                <a16:creationId xmlns:a16="http://schemas.microsoft.com/office/drawing/2014/main" id="{D1515AE2-E4B5-440F-B50D-5EA7475FAA45}"/>
+                <a16:creationId xmlns:a16="http://schemas.microsoft.com/office/drawing/2014/main" id="{ED590937-9623-40B0-AE35-E33A99DB7C7F}"/>
               </a:ext>
             </a:extLst>
           </p:cNvPr>
@@ -34532,7 +34532,7 @@
           <p:cNvPr id="8" name="">
             <a:extLst xmlns:a="http://schemas.openxmlformats.org/drawingml/2006/main">
               <a:ext uri="{FF2B5EF4-FFF2-40B4-BE49-F238E27FC236}">
-                <a16:creationId xmlns:a16="http://schemas.microsoft.com/office/drawing/2014/main" id="{B627340A-19B8-4F48-92EE-5CC456B9DA2C}"/>
+                <a16:creationId xmlns:a16="http://schemas.microsoft.com/office/drawing/2014/main" id="{814EB8B8-6614-436C-B6CC-C849B3059E9D}"/>
               </a:ext>
             </a:extLst>
           </p:cNvPr>
@@ -34584,7 +34584,7 @@
           <p:cNvPr id="9" name="">
             <a:extLst xmlns:a="http://schemas.openxmlformats.org/drawingml/2006/main">
               <a:ext uri="{FF2B5EF4-FFF2-40B4-BE49-F238E27FC236}">
-                <a16:creationId xmlns:a16="http://schemas.microsoft.com/office/drawing/2014/main" id="{A2DC9309-4D7E-40C0-B13A-CFCBD44323B2}"/>
+                <a16:creationId xmlns:a16="http://schemas.microsoft.com/office/drawing/2014/main" id="{5E560B66-7DA6-4FF3-9AD0-E89B9EEB039B}"/>
               </a:ext>
             </a:extLst>
           </p:cNvPr>
@@ -34636,7 +34636,7 @@
           <p:cNvPr id="10" name="">
             <a:extLst xmlns:a="http://schemas.openxmlformats.org/drawingml/2006/main">
               <a:ext uri="{FF2B5EF4-FFF2-40B4-BE49-F238E27FC236}">
-                <a16:creationId xmlns:a16="http://schemas.microsoft.com/office/drawing/2014/main" id="{0745E0C7-FB78-42EB-8502-270E13ABD6FD}"/>
+                <a16:creationId xmlns:a16="http://schemas.microsoft.com/office/drawing/2014/main" id="{55EF3624-5665-4CF1-BFA9-73D3304F73A4}"/>
               </a:ext>
             </a:extLst>
           </p:cNvPr>
@@ -34688,7 +34688,7 @@
           <p:cNvPr id="11" name="">
             <a:extLst xmlns:a="http://schemas.openxmlformats.org/drawingml/2006/main">
               <a:ext uri="{FF2B5EF4-FFF2-40B4-BE49-F238E27FC236}">
-                <a16:creationId xmlns:a16="http://schemas.microsoft.com/office/drawing/2014/main" id="{CBF5388B-DA49-49FD-ADEE-2EEBD099FC83}"/>
+                <a16:creationId xmlns:a16="http://schemas.microsoft.com/office/drawing/2014/main" id="{63A887C4-F14D-4ACB-BDAC-3EC34CC21D73}"/>
               </a:ext>
             </a:extLst>
           </p:cNvPr>
@@ -34735,10 +34735,10 @@
           <p:nvPr/>
         </p:nvPicPr>
         <p:blipFill>
-          <a:blip xmlns:r="http://schemas.openxmlformats.org/officeDocument/2006/relationships" xmlns:a="http://schemas.openxmlformats.org/drawingml/2006/main" r:embed="R422509a2f4da4e1a">
+          <a:blip xmlns:r="http://schemas.openxmlformats.org/officeDocument/2006/relationships" xmlns:a="http://schemas.openxmlformats.org/drawingml/2006/main" r:embed="R92374d02f1e44351">
             <a:extLst>
               <a:ext uri="{96DAC541-7B7A-43D3-8B79-37D633B846F1}">
-                <asvg:svgBlip xmlns:asvg="http://schemas.microsoft.com/office/drawing/2016/SVG/main" r:embed="R06c80f4e61d8442a"/>
+                <asvg:svgBlip xmlns:asvg="http://schemas.microsoft.com/office/drawing/2016/SVG/main" r:embed="R3b13652f50b34607"/>
               </a:ext>
             </a:extLst>
           </a:blip>
@@ -34759,7 +34759,7 @@
           <p:cNvPr id="13" name="">
             <a:extLst xmlns:a="http://schemas.openxmlformats.org/drawingml/2006/main">
               <a:ext uri="{FF2B5EF4-FFF2-40B4-BE49-F238E27FC236}">
-                <a16:creationId xmlns:a16="http://schemas.microsoft.com/office/drawing/2014/main" id="{CC23154B-BE8D-402A-81DF-A0D09926F290}"/>
+                <a16:creationId xmlns:a16="http://schemas.microsoft.com/office/drawing/2014/main" id="{8B787BCE-5351-4AE3-B5B4-76C288219DD8}"/>
               </a:ext>
             </a:extLst>
           </p:cNvPr>
@@ -34792,7 +34792,7 @@
           <p:cNvPr id="14" name="">
             <a:extLst xmlns:a="http://schemas.openxmlformats.org/drawingml/2006/main">
               <a:ext uri="{FF2B5EF4-FFF2-40B4-BE49-F238E27FC236}">
-                <a16:creationId xmlns:a16="http://schemas.microsoft.com/office/drawing/2014/main" id="{EEFE9D1E-4AFB-45BC-8C56-AEFE11811447}"/>
+                <a16:creationId xmlns:a16="http://schemas.microsoft.com/office/drawing/2014/main" id="{05D84932-FB4C-4FE6-84D1-E5A7F805D0D2}"/>
               </a:ext>
             </a:extLst>
           </p:cNvPr>
@@ -34844,7 +34844,7 @@
           <p:cNvPr id="15" name="">
             <a:extLst xmlns:a="http://schemas.openxmlformats.org/drawingml/2006/main">
               <a:ext uri="{FF2B5EF4-FFF2-40B4-BE49-F238E27FC236}">
-                <a16:creationId xmlns:a16="http://schemas.microsoft.com/office/drawing/2014/main" id="{D0857ABA-079D-405B-9D63-BB9007FF6775}"/>
+                <a16:creationId xmlns:a16="http://schemas.microsoft.com/office/drawing/2014/main" id="{653B4A8F-89FC-46AF-8CAA-0021DACDE8AD}"/>
               </a:ext>
             </a:extLst>
           </p:cNvPr>
@@ -34875,7 +34875,7 @@
           <p:cNvPr id="16" name="">
             <a:extLst xmlns:a="http://schemas.openxmlformats.org/drawingml/2006/main">
               <a:ext uri="{FF2B5EF4-FFF2-40B4-BE49-F238E27FC236}">
-                <a16:creationId xmlns:a16="http://schemas.microsoft.com/office/drawing/2014/main" id="{B12EBE9E-50F9-44EC-A4A0-293B2F6094FF}"/>
+                <a16:creationId xmlns:a16="http://schemas.microsoft.com/office/drawing/2014/main" id="{B483697C-7F6B-4E39-95FE-29DF0611D1A9}"/>
               </a:ext>
             </a:extLst>
           </p:cNvPr>
@@ -34906,7 +34906,7 @@
           <p:cNvPr id="17" name="">
             <a:extLst xmlns:a="http://schemas.openxmlformats.org/drawingml/2006/main">
               <a:ext uri="{FF2B5EF4-FFF2-40B4-BE49-F238E27FC236}">
-                <a16:creationId xmlns:a16="http://schemas.microsoft.com/office/drawing/2014/main" id="{35FAF21A-779B-42DC-9AE5-44C2E91289ED}"/>
+                <a16:creationId xmlns:a16="http://schemas.microsoft.com/office/drawing/2014/main" id="{FF60CD81-41F6-43D4-9CF6-792BE0E8D24A}"/>
               </a:ext>
             </a:extLst>
           </p:cNvPr>
@@ -34958,7 +34958,7 @@
           <p:cNvPr id="18" name="">
             <a:extLst xmlns:a="http://schemas.openxmlformats.org/drawingml/2006/main">
               <a:ext uri="{FF2B5EF4-FFF2-40B4-BE49-F238E27FC236}">
-                <a16:creationId xmlns:a16="http://schemas.microsoft.com/office/drawing/2014/main" id="{24DAE621-E0D4-419F-8226-9D7D8D3890DC}"/>
+                <a16:creationId xmlns:a16="http://schemas.microsoft.com/office/drawing/2014/main" id="{7BBB64A4-77D1-4CB2-9D0E-5D8BA8FA0B17}"/>
               </a:ext>
             </a:extLst>
           </p:cNvPr>
@@ -34991,7 +34991,7 @@
           <p:cNvPr id="19" name="">
             <a:extLst xmlns:a="http://schemas.openxmlformats.org/drawingml/2006/main">
               <a:ext uri="{FF2B5EF4-FFF2-40B4-BE49-F238E27FC236}">
-                <a16:creationId xmlns:a16="http://schemas.microsoft.com/office/drawing/2014/main" id="{FD87B480-9F8F-4BF0-82EB-9DE4808883E4}"/>
+                <a16:creationId xmlns:a16="http://schemas.microsoft.com/office/drawing/2014/main" id="{AF41E9D0-1187-4529-B3C2-532FEBB1BD0D}"/>
               </a:ext>
             </a:extLst>
           </p:cNvPr>
@@ -35043,7 +35043,7 @@
           <p:cNvPr id="20" name="">
             <a:extLst xmlns:a="http://schemas.openxmlformats.org/drawingml/2006/main">
               <a:ext uri="{FF2B5EF4-FFF2-40B4-BE49-F238E27FC236}">
-                <a16:creationId xmlns:a16="http://schemas.microsoft.com/office/drawing/2014/main" id="{ED0BFFEF-D6A4-4C9A-B22C-304BAAC1C1CD}"/>
+                <a16:creationId xmlns:a16="http://schemas.microsoft.com/office/drawing/2014/main" id="{E59DE7D8-2275-4D73-B452-A1214D097ECD}"/>
               </a:ext>
             </a:extLst>
           </p:cNvPr>
@@ -35074,7 +35074,7 @@
           <p:cNvPr id="21" name="">
             <a:extLst xmlns:a="http://schemas.openxmlformats.org/drawingml/2006/main">
               <a:ext uri="{FF2B5EF4-FFF2-40B4-BE49-F238E27FC236}">
-                <a16:creationId xmlns:a16="http://schemas.microsoft.com/office/drawing/2014/main" id="{20A3D323-107E-4BB8-9A02-1978B73C78FF}"/>
+                <a16:creationId xmlns:a16="http://schemas.microsoft.com/office/drawing/2014/main" id="{35579CF3-4EBF-477B-B840-CFB5056D0F09}"/>
               </a:ext>
             </a:extLst>
           </p:cNvPr>
@@ -35105,7 +35105,7 @@
           <p:cNvPr id="22" name="">
             <a:extLst xmlns:a="http://schemas.openxmlformats.org/drawingml/2006/main">
               <a:ext uri="{FF2B5EF4-FFF2-40B4-BE49-F238E27FC236}">
-                <a16:creationId xmlns:a16="http://schemas.microsoft.com/office/drawing/2014/main" id="{583F5CC8-9440-4AD7-AECA-B17D9ED6D309}"/>
+                <a16:creationId xmlns:a16="http://schemas.microsoft.com/office/drawing/2014/main" id="{ABC33EB2-AD88-4FCC-8E08-326CEAFA8FFA}"/>
               </a:ext>
             </a:extLst>
           </p:cNvPr>
@@ -35157,7 +35157,7 @@
           <p:cNvPr id="23" name="">
             <a:extLst xmlns:a="http://schemas.openxmlformats.org/drawingml/2006/main">
               <a:ext uri="{FF2B5EF4-FFF2-40B4-BE49-F238E27FC236}">
-                <a16:creationId xmlns:a16="http://schemas.microsoft.com/office/drawing/2014/main" id="{3E6CB3A0-AF85-46D3-BBFD-FBB3A3966016}"/>
+                <a16:creationId xmlns:a16="http://schemas.microsoft.com/office/drawing/2014/main" id="{5551E249-59CD-4B75-A8A0-6D914BA50D04}"/>
               </a:ext>
             </a:extLst>
           </p:cNvPr>
@@ -35209,7 +35209,7 @@
           <p:cNvPr id="24" name="">
             <a:extLst xmlns:a="http://schemas.openxmlformats.org/drawingml/2006/main">
               <a:ext uri="{FF2B5EF4-FFF2-40B4-BE49-F238E27FC236}">
-                <a16:creationId xmlns:a16="http://schemas.microsoft.com/office/drawing/2014/main" id="{1126CC58-37BF-4801-9614-6705787F5C6D}"/>
+                <a16:creationId xmlns:a16="http://schemas.microsoft.com/office/drawing/2014/main" id="{E9ABE8A3-F460-45C2-B212-B8FBDCE704F0}"/>
               </a:ext>
             </a:extLst>
           </p:cNvPr>
@@ -35240,7 +35240,7 @@
           <p:cNvPr id="25" name="">
             <a:extLst xmlns:a="http://schemas.openxmlformats.org/drawingml/2006/main">
               <a:ext uri="{FF2B5EF4-FFF2-40B4-BE49-F238E27FC236}">
-                <a16:creationId xmlns:a16="http://schemas.microsoft.com/office/drawing/2014/main" id="{308E805A-F5BA-4CCF-9A79-EEAFBF050BE9}"/>
+                <a16:creationId xmlns:a16="http://schemas.microsoft.com/office/drawing/2014/main" id="{8B00C65D-E772-4B5D-8B58-0E9674E1A6DF}"/>
               </a:ext>
             </a:extLst>
           </p:cNvPr>
@@ -35292,7 +35292,7 @@
           <p:cNvPr id="26" name="">
             <a:extLst xmlns:a="http://schemas.openxmlformats.org/drawingml/2006/main">
               <a:ext uri="{FF2B5EF4-FFF2-40B4-BE49-F238E27FC236}">
-                <a16:creationId xmlns:a16="http://schemas.microsoft.com/office/drawing/2014/main" id="{E8854D56-F4C3-4C9E-808B-16A745247DA5}"/>
+                <a16:creationId xmlns:a16="http://schemas.microsoft.com/office/drawing/2014/main" id="{F7321EC9-30F7-4A37-A64A-53169813FBFE}"/>
               </a:ext>
             </a:extLst>
           </p:cNvPr>
@@ -35344,7 +35344,7 @@
           <p:cNvPr id="27" name="">
             <a:extLst xmlns:a="http://schemas.openxmlformats.org/drawingml/2006/main">
               <a:ext uri="{FF2B5EF4-FFF2-40B4-BE49-F238E27FC236}">
-                <a16:creationId xmlns:a16="http://schemas.microsoft.com/office/drawing/2014/main" id="{F0BC6575-16B5-41FD-84A0-5A4F9277B8C7}"/>
+                <a16:creationId xmlns:a16="http://schemas.microsoft.com/office/drawing/2014/main" id="{745CBE78-BAE6-48C1-89FC-2205CBC50CE6}"/>
               </a:ext>
             </a:extLst>
           </p:cNvPr>
@@ -35396,7 +35396,7 @@
           <p:cNvPr id="28" name="">
             <a:extLst xmlns:a="http://schemas.openxmlformats.org/drawingml/2006/main">
               <a:ext uri="{FF2B5EF4-FFF2-40B4-BE49-F238E27FC236}">
-                <a16:creationId xmlns:a16="http://schemas.microsoft.com/office/drawing/2014/main" id="{05A6FB25-693F-4C89-82DE-EBF72480C097}"/>
+                <a16:creationId xmlns:a16="http://schemas.microsoft.com/office/drawing/2014/main" id="{BEBFF2B3-75E0-4A87-AE38-5EFA0F302250}"/>
               </a:ext>
             </a:extLst>
           </p:cNvPr>
@@ -35448,7 +35448,7 @@
           <p:cNvPr id="29" name="">
             <a:extLst xmlns:a="http://schemas.openxmlformats.org/drawingml/2006/main">
               <a:ext uri="{FF2B5EF4-FFF2-40B4-BE49-F238E27FC236}">
-                <a16:creationId xmlns:a16="http://schemas.microsoft.com/office/drawing/2014/main" id="{EB639307-18E6-4E3E-B607-3E2B2B79DD30}"/>
+                <a16:creationId xmlns:a16="http://schemas.microsoft.com/office/drawing/2014/main" id="{7D57A4B8-9586-4B43-9A39-3F3FC157CF6C}"/>
               </a:ext>
             </a:extLst>
           </p:cNvPr>
@@ -35500,7 +35500,7 @@
           <p:cNvPr id="30" name="">
             <a:extLst xmlns:a="http://schemas.openxmlformats.org/drawingml/2006/main">
               <a:ext uri="{FF2B5EF4-FFF2-40B4-BE49-F238E27FC236}">
-                <a16:creationId xmlns:a16="http://schemas.microsoft.com/office/drawing/2014/main" id="{DCEDE08C-85FF-4756-87FB-88E53775360F}"/>
+                <a16:creationId xmlns:a16="http://schemas.microsoft.com/office/drawing/2014/main" id="{148EF693-ECF5-4525-800C-7A70B6BCFB5D}"/>
               </a:ext>
             </a:extLst>
           </p:cNvPr>
@@ -35552,7 +35552,7 @@
           <p:cNvPr id="31" name="">
             <a:extLst xmlns:a="http://schemas.openxmlformats.org/drawingml/2006/main">
               <a:ext uri="{FF2B5EF4-FFF2-40B4-BE49-F238E27FC236}">
-                <a16:creationId xmlns:a16="http://schemas.microsoft.com/office/drawing/2014/main" id="{8D9952F7-1170-475C-B8E3-F1BA6250980C}"/>
+                <a16:creationId xmlns:a16="http://schemas.microsoft.com/office/drawing/2014/main" id="{BAE33056-6DC9-495E-A119-19D5E5AA40AE}"/>
               </a:ext>
             </a:extLst>
           </p:cNvPr>
@@ -35604,7 +35604,7 @@
           <p:cNvPr id="32" name="">
             <a:extLst xmlns:a="http://schemas.openxmlformats.org/drawingml/2006/main">
               <a:ext uri="{FF2B5EF4-FFF2-40B4-BE49-F238E27FC236}">
-                <a16:creationId xmlns:a16="http://schemas.microsoft.com/office/drawing/2014/main" id="{D7DE4BE7-A1DB-4B77-B9C5-E4DD54FDA3F4}"/>
+                <a16:creationId xmlns:a16="http://schemas.microsoft.com/office/drawing/2014/main" id="{7253BA24-14A5-4A86-B77A-4E5D00A7CBF1}"/>
               </a:ext>
             </a:extLst>
           </p:cNvPr>
@@ -35654,7 +35654,7 @@
     </p:spTree>
     <p:extLst>
       <p:ext uri="{BB962C8B-B14F-4D97-AF65-F5344CB8AC3E}">
-        <p14:creationId xmlns:p14="http://schemas.microsoft.com/office/powerpoint/2010/main" val="926133797"/>
+        <p14:creationId xmlns:p14="http://schemas.microsoft.com/office/powerpoint/2010/main" val="62862920"/>
       </p:ext>
     </p:extLst>
   </p:cSld>
@@ -35685,7 +35685,7 @@
           <p:cNvPr id="27" name="">
             <a:extLst xmlns:a="http://schemas.openxmlformats.org/drawingml/2006/main">
               <a:ext uri="{FF2B5EF4-FFF2-40B4-BE49-F238E27FC236}">
-                <a16:creationId xmlns:a16="http://schemas.microsoft.com/office/drawing/2014/main" id="{AE0B0CB1-E716-46D2-8193-BB622DDECDEF}"/>
+                <a16:creationId xmlns:a16="http://schemas.microsoft.com/office/drawing/2014/main" id="{FBA19638-EBC7-4BE2-B934-EA8C64E4D046}"/>
               </a:ext>
             </a:extLst>
           </p:cNvPr>
@@ -35718,7 +35718,7 @@
           <p:cNvPr id="2" name="">
             <a:extLst xmlns:a="http://schemas.openxmlformats.org/drawingml/2006/main">
               <a:ext uri="{FF2B5EF4-FFF2-40B4-BE49-F238E27FC236}">
-                <a16:creationId xmlns:a16="http://schemas.microsoft.com/office/drawing/2014/main" id="{FF218501-5CCF-47E5-9473-9EBCC8953E31}"/>
+                <a16:creationId xmlns:a16="http://schemas.microsoft.com/office/drawing/2014/main" id="{3145595A-AA65-46DB-B8A8-BAEDC0074A97}"/>
               </a:ext>
             </a:extLst>
           </p:cNvPr>
@@ -35749,7 +35749,7 @@
           <p:cNvPr id="3" name="">
             <a:extLst xmlns:a="http://schemas.openxmlformats.org/drawingml/2006/main">
               <a:ext uri="{FF2B5EF4-FFF2-40B4-BE49-F238E27FC236}">
-                <a16:creationId xmlns:a16="http://schemas.microsoft.com/office/drawing/2014/main" id="{F2411C07-0284-4314-9DF5-3685D8709623}"/>
+                <a16:creationId xmlns:a16="http://schemas.microsoft.com/office/drawing/2014/main" id="{84B2963C-F882-47E6-908F-F917CE61CADC}"/>
               </a:ext>
             </a:extLst>
           </p:cNvPr>
@@ -35801,7 +35801,7 @@
           <p:cNvPr id="4" name="">
             <a:extLst xmlns:a="http://schemas.openxmlformats.org/drawingml/2006/main">
               <a:ext uri="{FF2B5EF4-FFF2-40B4-BE49-F238E27FC236}">
-                <a16:creationId xmlns:a16="http://schemas.microsoft.com/office/drawing/2014/main" id="{D04D2D21-0005-44AB-A9D4-B720326E6FA1}"/>
+                <a16:creationId xmlns:a16="http://schemas.microsoft.com/office/drawing/2014/main" id="{723ADDBE-0571-427A-AA1C-A4BE2C5E8AEB}"/>
               </a:ext>
             </a:extLst>
           </p:cNvPr>
@@ -35853,7 +35853,7 @@
           <p:cNvPr id="5" name="">
             <a:extLst xmlns:a="http://schemas.openxmlformats.org/drawingml/2006/main">
               <a:ext uri="{FF2B5EF4-FFF2-40B4-BE49-F238E27FC236}">
-                <a16:creationId xmlns:a16="http://schemas.microsoft.com/office/drawing/2014/main" id="{D8E33D4C-A21C-4C3A-B073-1971E985797D}"/>
+                <a16:creationId xmlns:a16="http://schemas.microsoft.com/office/drawing/2014/main" id="{4BF620A7-D701-4DED-98BD-CDDFF1C0DE36}"/>
               </a:ext>
             </a:extLst>
           </p:cNvPr>
@@ -35888,7 +35888,7 @@
           <p:nvPr/>
         </p:nvPicPr>
         <p:blipFill>
-          <a:blip xmlns:r="http://schemas.openxmlformats.org/officeDocument/2006/relationships" xmlns:a="http://schemas.openxmlformats.org/drawingml/2006/main" r:embed="R832b59373f384edd"/>
+          <a:blip xmlns:r="http://schemas.openxmlformats.org/officeDocument/2006/relationships" xmlns:a="http://schemas.openxmlformats.org/drawingml/2006/main" r:embed="R92e513a84ac34ea1"/>
           <a:stretch xmlns:a="http://schemas.openxmlformats.org/drawingml/2006/main"/>
         </p:blipFill>
         <p:spPr>
@@ -35906,7 +35906,7 @@
           <p:cNvPr id="7" name="">
             <a:extLst xmlns:a="http://schemas.openxmlformats.org/drawingml/2006/main">
               <a:ext uri="{FF2B5EF4-FFF2-40B4-BE49-F238E27FC236}">
-                <a16:creationId xmlns:a16="http://schemas.microsoft.com/office/drawing/2014/main" id="{9D6878C8-7A54-4B43-9AE8-8AD3F80EA39C}"/>
+                <a16:creationId xmlns:a16="http://schemas.microsoft.com/office/drawing/2014/main" id="{BA6002FA-1795-4081-B88C-C9E774357844}"/>
               </a:ext>
             </a:extLst>
           </p:cNvPr>
@@ -35958,7 +35958,7 @@
           <p:cNvPr id="8" name="">
             <a:extLst xmlns:a="http://schemas.openxmlformats.org/drawingml/2006/main">
               <a:ext uri="{FF2B5EF4-FFF2-40B4-BE49-F238E27FC236}">
-                <a16:creationId xmlns:a16="http://schemas.microsoft.com/office/drawing/2014/main" id="{26A48C60-DB49-495F-B013-F700CC53EB5E}"/>
+                <a16:creationId xmlns:a16="http://schemas.microsoft.com/office/drawing/2014/main" id="{D9F58EB7-6482-47BF-81C9-9102CC19C326}"/>
               </a:ext>
             </a:extLst>
           </p:cNvPr>
@@ -36010,7 +36010,7 @@
           <p:cNvPr id="9" name="">
             <a:extLst xmlns:a="http://schemas.openxmlformats.org/drawingml/2006/main">
               <a:ext uri="{FF2B5EF4-FFF2-40B4-BE49-F238E27FC236}">
-                <a16:creationId xmlns:a16="http://schemas.microsoft.com/office/drawing/2014/main" id="{38F28AEC-2932-40AA-A987-8BD4FE5D6731}"/>
+                <a16:creationId xmlns:a16="http://schemas.microsoft.com/office/drawing/2014/main" id="{042AF77B-DEB1-47A4-B265-8880B7E7BA73}"/>
               </a:ext>
             </a:extLst>
           </p:cNvPr>
@@ -36062,7 +36062,7 @@
           <p:cNvPr id="10" name="">
             <a:extLst xmlns:a="http://schemas.openxmlformats.org/drawingml/2006/main">
               <a:ext uri="{FF2B5EF4-FFF2-40B4-BE49-F238E27FC236}">
-                <a16:creationId xmlns:a16="http://schemas.microsoft.com/office/drawing/2014/main" id="{84B51A57-603E-49B3-8C88-778DCCBA1B72}"/>
+                <a16:creationId xmlns:a16="http://schemas.microsoft.com/office/drawing/2014/main" id="{940E0C7E-0B32-4193-8A2B-241E2780BB50}"/>
               </a:ext>
             </a:extLst>
           </p:cNvPr>
@@ -36114,7 +36114,7 @@
           <p:cNvPr id="11" name="">
             <a:extLst xmlns:a="http://schemas.openxmlformats.org/drawingml/2006/main">
               <a:ext uri="{FF2B5EF4-FFF2-40B4-BE49-F238E27FC236}">
-                <a16:creationId xmlns:a16="http://schemas.microsoft.com/office/drawing/2014/main" id="{AFFB2657-545F-4772-B43B-7F57F122A995}"/>
+                <a16:creationId xmlns:a16="http://schemas.microsoft.com/office/drawing/2014/main" id="{D457409B-D146-4FE8-975C-4A81C10A2E61}"/>
               </a:ext>
             </a:extLst>
           </p:cNvPr>
@@ -36161,10 +36161,10 @@
           <p:nvPr/>
         </p:nvPicPr>
         <p:blipFill>
-          <a:blip xmlns:r="http://schemas.openxmlformats.org/officeDocument/2006/relationships" xmlns:a="http://schemas.openxmlformats.org/drawingml/2006/main" r:embed="R528419ca23904504">
+          <a:blip xmlns:r="http://schemas.openxmlformats.org/officeDocument/2006/relationships" xmlns:a="http://schemas.openxmlformats.org/drawingml/2006/main" r:embed="R0a95a66c4ee54d45">
             <a:extLst>
               <a:ext uri="{96DAC541-7B7A-43D3-8B79-37D633B846F1}">
-                <asvg:svgBlip xmlns:asvg="http://schemas.microsoft.com/office/drawing/2016/SVG/main" r:embed="R9b2a6bb8043c4475"/>
+                <asvg:svgBlip xmlns:asvg="http://schemas.microsoft.com/office/drawing/2016/SVG/main" r:embed="R8555b201611d45fc"/>
               </a:ext>
             </a:extLst>
           </a:blip>
@@ -36185,7 +36185,7 @@
           <p:cNvPr id="13" name="">
             <a:extLst xmlns:a="http://schemas.openxmlformats.org/drawingml/2006/main">
               <a:ext uri="{FF2B5EF4-FFF2-40B4-BE49-F238E27FC236}">
-                <a16:creationId xmlns:a16="http://schemas.microsoft.com/office/drawing/2014/main" id="{FD1A2507-1DF4-4756-8792-AADFE40ED2ED}"/>
+                <a16:creationId xmlns:a16="http://schemas.microsoft.com/office/drawing/2014/main" id="{F25FC46F-39D7-463F-87FC-3D9944251253}"/>
               </a:ext>
             </a:extLst>
           </p:cNvPr>
@@ -36218,7 +36218,7 @@
           <p:cNvPr id="14" name="">
             <a:extLst xmlns:a="http://schemas.openxmlformats.org/drawingml/2006/main">
               <a:ext uri="{FF2B5EF4-FFF2-40B4-BE49-F238E27FC236}">
-                <a16:creationId xmlns:a16="http://schemas.microsoft.com/office/drawing/2014/main" id="{1729ABED-6211-45EB-8871-854AD905F48C}"/>
+                <a16:creationId xmlns:a16="http://schemas.microsoft.com/office/drawing/2014/main" id="{631364F6-5B71-44BA-8B73-61DB6E0E06ED}"/>
               </a:ext>
             </a:extLst>
           </p:cNvPr>
@@ -36270,7 +36270,7 @@
           <p:cNvPr id="15" name="">
             <a:extLst xmlns:a="http://schemas.openxmlformats.org/drawingml/2006/main">
               <a:ext uri="{FF2B5EF4-FFF2-40B4-BE49-F238E27FC236}">
-                <a16:creationId xmlns:a16="http://schemas.microsoft.com/office/drawing/2014/main" id="{5D34B6C4-3A02-4F85-8BD2-B42BE1D6C070}"/>
+                <a16:creationId xmlns:a16="http://schemas.microsoft.com/office/drawing/2014/main" id="{2887FC73-AD45-4CCD-8F87-B4D3E121AFC7}"/>
               </a:ext>
             </a:extLst>
           </p:cNvPr>
@@ -36303,7 +36303,7 @@
           <p:cNvPr id="16" name="">
             <a:extLst xmlns:a="http://schemas.openxmlformats.org/drawingml/2006/main">
               <a:ext uri="{FF2B5EF4-FFF2-40B4-BE49-F238E27FC236}">
-                <a16:creationId xmlns:a16="http://schemas.microsoft.com/office/drawing/2014/main" id="{DDE8CD36-6564-4577-A213-467FA8C553A0}"/>
+                <a16:creationId xmlns:a16="http://schemas.microsoft.com/office/drawing/2014/main" id="{6ED31D8C-C0B3-4832-AF71-6FC708E060CD}"/>
               </a:ext>
             </a:extLst>
           </p:cNvPr>
@@ -36355,7 +36355,7 @@
           <p:cNvPr id="17" name="">
             <a:extLst xmlns:a="http://schemas.openxmlformats.org/drawingml/2006/main">
               <a:ext uri="{FF2B5EF4-FFF2-40B4-BE49-F238E27FC236}">
-                <a16:creationId xmlns:a16="http://schemas.microsoft.com/office/drawing/2014/main" id="{4CAFDAFF-975A-4D6F-8C7C-23AD53F9E0FA}"/>
+                <a16:creationId xmlns:a16="http://schemas.microsoft.com/office/drawing/2014/main" id="{0DB7F97C-0053-4E64-94FF-6E0F1DAE3FA8}"/>
               </a:ext>
             </a:extLst>
           </p:cNvPr>
@@ -36386,7 +36386,7 @@
           <p:cNvPr id="18" name="">
             <a:extLst xmlns:a="http://schemas.openxmlformats.org/drawingml/2006/main">
               <a:ext uri="{FF2B5EF4-FFF2-40B4-BE49-F238E27FC236}">
-                <a16:creationId xmlns:a16="http://schemas.microsoft.com/office/drawing/2014/main" id="{8F88EF90-BA0F-4642-AE3B-C7EEE28A4BB6}"/>
+                <a16:creationId xmlns:a16="http://schemas.microsoft.com/office/drawing/2014/main" id="{EFB26BD1-2409-46A7-937E-9B628865A4DF}"/>
               </a:ext>
             </a:extLst>
           </p:cNvPr>
@@ -36417,7 +36417,7 @@
           <p:cNvPr id="19" name="">
             <a:extLst xmlns:a="http://schemas.openxmlformats.org/drawingml/2006/main">
               <a:ext uri="{FF2B5EF4-FFF2-40B4-BE49-F238E27FC236}">
-                <a16:creationId xmlns:a16="http://schemas.microsoft.com/office/drawing/2014/main" id="{3C6B9964-736F-4888-955A-4C8F9B3F108B}"/>
+                <a16:creationId xmlns:a16="http://schemas.microsoft.com/office/drawing/2014/main" id="{638EC4A2-86E0-449F-A76A-8A3BFABC38CF}"/>
               </a:ext>
             </a:extLst>
           </p:cNvPr>
@@ -36469,7 +36469,7 @@
           <p:cNvPr id="20" name="">
             <a:extLst xmlns:a="http://schemas.openxmlformats.org/drawingml/2006/main">
               <a:ext uri="{FF2B5EF4-FFF2-40B4-BE49-F238E27FC236}">
-                <a16:creationId xmlns:a16="http://schemas.microsoft.com/office/drawing/2014/main" id="{3EA7F10A-E375-4E59-A5C4-34F63C388DD0}"/>
+                <a16:creationId xmlns:a16="http://schemas.microsoft.com/office/drawing/2014/main" id="{9C7BC5A5-EB14-451C-B6D2-562E74A04870}"/>
               </a:ext>
             </a:extLst>
           </p:cNvPr>
@@ -36500,7 +36500,7 @@
           <p:cNvPr id="21" name="">
             <a:extLst xmlns:a="http://schemas.openxmlformats.org/drawingml/2006/main">
               <a:ext uri="{FF2B5EF4-FFF2-40B4-BE49-F238E27FC236}">
-                <a16:creationId xmlns:a16="http://schemas.microsoft.com/office/drawing/2014/main" id="{4ADE642D-A84F-4C66-9732-32185F435FDB}"/>
+                <a16:creationId xmlns:a16="http://schemas.microsoft.com/office/drawing/2014/main" id="{B2F3A39B-21EB-4C06-A1A1-410241953AAE}"/>
               </a:ext>
             </a:extLst>
           </p:cNvPr>
@@ -36552,7 +36552,7 @@
           <p:cNvPr id="22" name="">
             <a:extLst xmlns:a="http://schemas.openxmlformats.org/drawingml/2006/main">
               <a:ext uri="{FF2B5EF4-FFF2-40B4-BE49-F238E27FC236}">
-                <a16:creationId xmlns:a16="http://schemas.microsoft.com/office/drawing/2014/main" id="{20DD1D07-B286-4816-AE36-9376465A5564}"/>
+                <a16:creationId xmlns:a16="http://schemas.microsoft.com/office/drawing/2014/main" id="{8FCADB7D-DE95-4547-BDCB-C75894FB349E}"/>
               </a:ext>
             </a:extLst>
           </p:cNvPr>
@@ -36604,7 +36604,7 @@
           <p:cNvPr id="23" name="">
             <a:extLst xmlns:a="http://schemas.openxmlformats.org/drawingml/2006/main">
               <a:ext uri="{FF2B5EF4-FFF2-40B4-BE49-F238E27FC236}">
-                <a16:creationId xmlns:a16="http://schemas.microsoft.com/office/drawing/2014/main" id="{855B9D12-B0B2-4416-AAAD-615C6A27A2D4}"/>
+                <a16:creationId xmlns:a16="http://schemas.microsoft.com/office/drawing/2014/main" id="{70C9D0E3-F65C-4A6C-B1DC-77BB25919D7E}"/>
               </a:ext>
             </a:extLst>
           </p:cNvPr>
@@ -36656,7 +36656,7 @@
           <p:cNvPr id="24" name="">
             <a:extLst xmlns:a="http://schemas.openxmlformats.org/drawingml/2006/main">
               <a:ext uri="{FF2B5EF4-FFF2-40B4-BE49-F238E27FC236}">
-                <a16:creationId xmlns:a16="http://schemas.microsoft.com/office/drawing/2014/main" id="{BE29EC9D-A54B-445D-A215-F46777AC9E7E}"/>
+                <a16:creationId xmlns:a16="http://schemas.microsoft.com/office/drawing/2014/main" id="{2501144F-750B-41BF-85AB-C64B136F0395}"/>
               </a:ext>
             </a:extLst>
           </p:cNvPr>
@@ -36708,7 +36708,7 @@
           <p:cNvPr id="25" name="">
             <a:extLst xmlns:a="http://schemas.openxmlformats.org/drawingml/2006/main">
               <a:ext uri="{FF2B5EF4-FFF2-40B4-BE49-F238E27FC236}">
-                <a16:creationId xmlns:a16="http://schemas.microsoft.com/office/drawing/2014/main" id="{B8BB0832-ACF8-422F-936D-398CDF4176CD}"/>
+                <a16:creationId xmlns:a16="http://schemas.microsoft.com/office/drawing/2014/main" id="{CA289F46-BBA1-4FB9-90E9-FD8000CA6FCF}"/>
               </a:ext>
             </a:extLst>
           </p:cNvPr>
@@ -36760,7 +36760,7 @@
           <p:cNvPr id="26" name="">
             <a:extLst xmlns:a="http://schemas.openxmlformats.org/drawingml/2006/main">
               <a:ext uri="{FF2B5EF4-FFF2-40B4-BE49-F238E27FC236}">
-                <a16:creationId xmlns:a16="http://schemas.microsoft.com/office/drawing/2014/main" id="{C5FE317A-4FA8-499D-B25B-0F994841435F}"/>
+                <a16:creationId xmlns:a16="http://schemas.microsoft.com/office/drawing/2014/main" id="{408C91A6-1028-48E2-910C-27002F802A1C}"/>
               </a:ext>
             </a:extLst>
           </p:cNvPr>
@@ -36810,7 +36810,7 @@
     </p:spTree>
     <p:extLst>
       <p:ext uri="{BB962C8B-B14F-4D97-AF65-F5344CB8AC3E}">
-        <p14:creationId xmlns:p14="http://schemas.microsoft.com/office/powerpoint/2010/main" val="1454211662"/>
+        <p14:creationId xmlns:p14="http://schemas.microsoft.com/office/powerpoint/2010/main" val="724373623"/>
       </p:ext>
     </p:extLst>
   </p:cSld>
@@ -36841,7 +36841,7 @@
           <p:cNvPr id="27" name="">
             <a:extLst xmlns:a="http://schemas.openxmlformats.org/drawingml/2006/main">
               <a:ext uri="{FF2B5EF4-FFF2-40B4-BE49-F238E27FC236}">
-                <a16:creationId xmlns:a16="http://schemas.microsoft.com/office/drawing/2014/main" id="{D96FB2B1-8E13-49C3-BA7F-66BD40669289}"/>
+                <a16:creationId xmlns:a16="http://schemas.microsoft.com/office/drawing/2014/main" id="{BBCD2584-DD29-4993-9AA0-5AFFCA8D7649}"/>
               </a:ext>
             </a:extLst>
           </p:cNvPr>
@@ -36874,7 +36874,7 @@
           <p:cNvPr id="2" name="">
             <a:extLst xmlns:a="http://schemas.openxmlformats.org/drawingml/2006/main">
               <a:ext uri="{FF2B5EF4-FFF2-40B4-BE49-F238E27FC236}">
-                <a16:creationId xmlns:a16="http://schemas.microsoft.com/office/drawing/2014/main" id="{677D1FD9-7FB9-4542-9A99-AAB5CE3971FD}"/>
+                <a16:creationId xmlns:a16="http://schemas.microsoft.com/office/drawing/2014/main" id="{9FE7D550-748C-4444-AF12-B8090114F826}"/>
               </a:ext>
             </a:extLst>
           </p:cNvPr>
@@ -36905,7 +36905,7 @@
           <p:cNvPr id="3" name="">
             <a:extLst xmlns:a="http://schemas.openxmlformats.org/drawingml/2006/main">
               <a:ext uri="{FF2B5EF4-FFF2-40B4-BE49-F238E27FC236}">
-                <a16:creationId xmlns:a16="http://schemas.microsoft.com/office/drawing/2014/main" id="{FCA2061F-5238-4348-8658-7397B6B0196D}"/>
+                <a16:creationId xmlns:a16="http://schemas.microsoft.com/office/drawing/2014/main" id="{8DF74A93-22B1-4B59-AFD7-FBA4339069AF}"/>
               </a:ext>
             </a:extLst>
           </p:cNvPr>
@@ -36957,7 +36957,7 @@
           <p:cNvPr id="4" name="">
             <a:extLst xmlns:a="http://schemas.openxmlformats.org/drawingml/2006/main">
               <a:ext uri="{FF2B5EF4-FFF2-40B4-BE49-F238E27FC236}">
-                <a16:creationId xmlns:a16="http://schemas.microsoft.com/office/drawing/2014/main" id="{C760C6CF-DBD8-4964-B3D9-D6FD0AD56B56}"/>
+                <a16:creationId xmlns:a16="http://schemas.microsoft.com/office/drawing/2014/main" id="{2D974AC6-7F16-499E-86D5-3C8A33C14F64}"/>
               </a:ext>
             </a:extLst>
           </p:cNvPr>
@@ -37009,7 +37009,7 @@
           <p:cNvPr id="5" name="">
             <a:extLst xmlns:a="http://schemas.openxmlformats.org/drawingml/2006/main">
               <a:ext uri="{FF2B5EF4-FFF2-40B4-BE49-F238E27FC236}">
-                <a16:creationId xmlns:a16="http://schemas.microsoft.com/office/drawing/2014/main" id="{25283491-4E27-4A90-A822-4753B01B1324}"/>
+                <a16:creationId xmlns:a16="http://schemas.microsoft.com/office/drawing/2014/main" id="{85158E30-4268-4D76-9BA4-96B78D763A04}"/>
               </a:ext>
             </a:extLst>
           </p:cNvPr>
@@ -37044,7 +37044,7 @@
           <p:nvPr/>
         </p:nvPicPr>
         <p:blipFill>
-          <a:blip xmlns:r="http://schemas.openxmlformats.org/officeDocument/2006/relationships" xmlns:a="http://schemas.openxmlformats.org/drawingml/2006/main" r:embed="Rd6d96d2e1a224314"/>
+          <a:blip xmlns:r="http://schemas.openxmlformats.org/officeDocument/2006/relationships" xmlns:a="http://schemas.openxmlformats.org/drawingml/2006/main" r:embed="Rda677bd8fe5d49db"/>
           <a:stretch xmlns:a="http://schemas.openxmlformats.org/drawingml/2006/main"/>
         </p:blipFill>
         <p:spPr>
@@ -37062,7 +37062,7 @@
           <p:cNvPr id="7" name="">
             <a:extLst xmlns:a="http://schemas.openxmlformats.org/drawingml/2006/main">
               <a:ext uri="{FF2B5EF4-FFF2-40B4-BE49-F238E27FC236}">
-                <a16:creationId xmlns:a16="http://schemas.microsoft.com/office/drawing/2014/main" id="{4C33DD87-7576-47C3-9A04-8E2B4C6390B4}"/>
+                <a16:creationId xmlns:a16="http://schemas.microsoft.com/office/drawing/2014/main" id="{445A338B-FE6E-4FFC-A083-7FE1C9DEC92A}"/>
               </a:ext>
             </a:extLst>
           </p:cNvPr>
@@ -37114,7 +37114,7 @@
           <p:cNvPr id="8" name="">
             <a:extLst xmlns:a="http://schemas.openxmlformats.org/drawingml/2006/main">
               <a:ext uri="{FF2B5EF4-FFF2-40B4-BE49-F238E27FC236}">
-                <a16:creationId xmlns:a16="http://schemas.microsoft.com/office/drawing/2014/main" id="{1BC82C53-6AC0-464A-9CBE-1F129E0B22FF}"/>
+                <a16:creationId xmlns:a16="http://schemas.microsoft.com/office/drawing/2014/main" id="{B804D8B7-BD22-4AB8-B06B-8A2CC7C9DCAC}"/>
               </a:ext>
             </a:extLst>
           </p:cNvPr>
@@ -37166,7 +37166,7 @@
           <p:cNvPr id="9" name="">
             <a:extLst xmlns:a="http://schemas.openxmlformats.org/drawingml/2006/main">
               <a:ext uri="{FF2B5EF4-FFF2-40B4-BE49-F238E27FC236}">
-                <a16:creationId xmlns:a16="http://schemas.microsoft.com/office/drawing/2014/main" id="{6097EF51-216C-44C1-91CD-1DBABBE1F34E}"/>
+                <a16:creationId xmlns:a16="http://schemas.microsoft.com/office/drawing/2014/main" id="{ADB789F0-375A-4A09-AEF7-C1C1D1FE416C}"/>
               </a:ext>
             </a:extLst>
           </p:cNvPr>
@@ -37218,7 +37218,7 @@
           <p:cNvPr id="10" name="">
             <a:extLst xmlns:a="http://schemas.openxmlformats.org/drawingml/2006/main">
               <a:ext uri="{FF2B5EF4-FFF2-40B4-BE49-F238E27FC236}">
-                <a16:creationId xmlns:a16="http://schemas.microsoft.com/office/drawing/2014/main" id="{FEFBF4E6-84F3-49CA-9D7B-441F98033AC6}"/>
+                <a16:creationId xmlns:a16="http://schemas.microsoft.com/office/drawing/2014/main" id="{F036E63A-3240-4189-82CB-6A14B8388330}"/>
               </a:ext>
             </a:extLst>
           </p:cNvPr>
@@ -37270,7 +37270,7 @@
           <p:cNvPr id="11" name="">
             <a:extLst xmlns:a="http://schemas.openxmlformats.org/drawingml/2006/main">
               <a:ext uri="{FF2B5EF4-FFF2-40B4-BE49-F238E27FC236}">
-                <a16:creationId xmlns:a16="http://schemas.microsoft.com/office/drawing/2014/main" id="{F018D8C8-D220-4691-9667-C54E3DD10DFF}"/>
+                <a16:creationId xmlns:a16="http://schemas.microsoft.com/office/drawing/2014/main" id="{255CA2CD-1C1D-4E29-99C2-DA9F528B69CD}"/>
               </a:ext>
             </a:extLst>
           </p:cNvPr>
@@ -37317,10 +37317,10 @@
           <p:nvPr/>
         </p:nvPicPr>
         <p:blipFill>
-          <a:blip xmlns:r="http://schemas.openxmlformats.org/officeDocument/2006/relationships" xmlns:a="http://schemas.openxmlformats.org/drawingml/2006/main" r:embed="R7e3afcca1f6a4596">
+          <a:blip xmlns:r="http://schemas.openxmlformats.org/officeDocument/2006/relationships" xmlns:a="http://schemas.openxmlformats.org/drawingml/2006/main" r:embed="R2d1d6eb3effc4943">
             <a:extLst>
               <a:ext uri="{96DAC541-7B7A-43D3-8B79-37D633B846F1}">
-                <asvg:svgBlip xmlns:asvg="http://schemas.microsoft.com/office/drawing/2016/SVG/main" r:embed="Rf3f3d71a8e264098"/>
+                <asvg:svgBlip xmlns:asvg="http://schemas.microsoft.com/office/drawing/2016/SVG/main" r:embed="R69eb353e8a344a8a"/>
               </a:ext>
             </a:extLst>
           </a:blip>
@@ -37341,7 +37341,7 @@
           <p:cNvPr id="13" name="">
             <a:extLst xmlns:a="http://schemas.openxmlformats.org/drawingml/2006/main">
               <a:ext uri="{FF2B5EF4-FFF2-40B4-BE49-F238E27FC236}">
-                <a16:creationId xmlns:a16="http://schemas.microsoft.com/office/drawing/2014/main" id="{AB95F1D3-CE89-461C-875C-59AEC5C71AFB}"/>
+                <a16:creationId xmlns:a16="http://schemas.microsoft.com/office/drawing/2014/main" id="{77A7C722-828D-4FF5-9564-21D1C2AFFA95}"/>
               </a:ext>
             </a:extLst>
           </p:cNvPr>
@@ -37374,7 +37374,7 @@
           <p:cNvPr id="14" name="">
             <a:extLst xmlns:a="http://schemas.openxmlformats.org/drawingml/2006/main">
               <a:ext uri="{FF2B5EF4-FFF2-40B4-BE49-F238E27FC236}">
-                <a16:creationId xmlns:a16="http://schemas.microsoft.com/office/drawing/2014/main" id="{D5666A95-0B31-483D-9D39-A630BDA6D673}"/>
+                <a16:creationId xmlns:a16="http://schemas.microsoft.com/office/drawing/2014/main" id="{1FC27747-BA9F-4EFC-96D6-3393AFC03559}"/>
               </a:ext>
             </a:extLst>
           </p:cNvPr>
@@ -37426,7 +37426,7 @@
           <p:cNvPr id="15" name="">
             <a:extLst xmlns:a="http://schemas.openxmlformats.org/drawingml/2006/main">
               <a:ext uri="{FF2B5EF4-FFF2-40B4-BE49-F238E27FC236}">
-                <a16:creationId xmlns:a16="http://schemas.microsoft.com/office/drawing/2014/main" id="{D0499961-C1A3-43B4-838B-B89DB5D6922B}"/>
+                <a16:creationId xmlns:a16="http://schemas.microsoft.com/office/drawing/2014/main" id="{FF7D664E-32CB-4D6C-AD9D-6EE404EB229E}"/>
               </a:ext>
             </a:extLst>
           </p:cNvPr>
@@ -37459,7 +37459,7 @@
           <p:cNvPr id="16" name="">
             <a:extLst xmlns:a="http://schemas.openxmlformats.org/drawingml/2006/main">
               <a:ext uri="{FF2B5EF4-FFF2-40B4-BE49-F238E27FC236}">
-                <a16:creationId xmlns:a16="http://schemas.microsoft.com/office/drawing/2014/main" id="{631A9708-8107-420B-852B-EC4D56910630}"/>
+                <a16:creationId xmlns:a16="http://schemas.microsoft.com/office/drawing/2014/main" id="{3B7B7828-31DF-49ED-8698-B66C6CC1E5E1}"/>
               </a:ext>
             </a:extLst>
           </p:cNvPr>
@@ -37511,7 +37511,7 @@
           <p:cNvPr id="17" name="">
             <a:extLst xmlns:a="http://schemas.openxmlformats.org/drawingml/2006/main">
               <a:ext uri="{FF2B5EF4-FFF2-40B4-BE49-F238E27FC236}">
-                <a16:creationId xmlns:a16="http://schemas.microsoft.com/office/drawing/2014/main" id="{EE2147E0-371C-4445-9776-046807C7F606}"/>
+                <a16:creationId xmlns:a16="http://schemas.microsoft.com/office/drawing/2014/main" id="{17205AF3-8BFB-4CDB-B62E-733520DB1E67}"/>
               </a:ext>
             </a:extLst>
           </p:cNvPr>
@@ -37544,7 +37544,7 @@
           <p:cNvPr id="18" name="">
             <a:extLst xmlns:a="http://schemas.openxmlformats.org/drawingml/2006/main">
               <a:ext uri="{FF2B5EF4-FFF2-40B4-BE49-F238E27FC236}">
-                <a16:creationId xmlns:a16="http://schemas.microsoft.com/office/drawing/2014/main" id="{B7560710-3AB5-42E5-B374-43FEA93B2BB5}"/>
+                <a16:creationId xmlns:a16="http://schemas.microsoft.com/office/drawing/2014/main" id="{EAB8FE0B-07F9-4E37-BCA6-01D4AA00F803}"/>
               </a:ext>
             </a:extLst>
           </p:cNvPr>
@@ -37596,7 +37596,7 @@
           <p:cNvPr id="19" name="">
             <a:extLst xmlns:a="http://schemas.openxmlformats.org/drawingml/2006/main">
               <a:ext uri="{FF2B5EF4-FFF2-40B4-BE49-F238E27FC236}">
-                <a16:creationId xmlns:a16="http://schemas.microsoft.com/office/drawing/2014/main" id="{BCA179C7-7C8B-4892-83BB-F39A0A8B9E84}"/>
+                <a16:creationId xmlns:a16="http://schemas.microsoft.com/office/drawing/2014/main" id="{ACD91093-829C-4977-8640-80489AC2A14C}"/>
               </a:ext>
             </a:extLst>
           </p:cNvPr>
@@ -37648,7 +37648,7 @@
           <p:cNvPr id="20" name="">
             <a:extLst xmlns:a="http://schemas.openxmlformats.org/drawingml/2006/main">
               <a:ext uri="{FF2B5EF4-FFF2-40B4-BE49-F238E27FC236}">
-                <a16:creationId xmlns:a16="http://schemas.microsoft.com/office/drawing/2014/main" id="{7D96CD1D-A220-4D54-8E43-A44107F9D622}"/>
+                <a16:creationId xmlns:a16="http://schemas.microsoft.com/office/drawing/2014/main" id="{A97EDA55-1259-41BC-9716-3F1A99078A64}"/>
               </a:ext>
             </a:extLst>
           </p:cNvPr>
@@ -37679,7 +37679,7 @@
           <p:cNvPr id="21" name="">
             <a:extLst xmlns:a="http://schemas.openxmlformats.org/drawingml/2006/main">
               <a:ext uri="{FF2B5EF4-FFF2-40B4-BE49-F238E27FC236}">
-                <a16:creationId xmlns:a16="http://schemas.microsoft.com/office/drawing/2014/main" id="{851BDA23-91F1-438C-BA4F-04633A69C87E}"/>
+                <a16:creationId xmlns:a16="http://schemas.microsoft.com/office/drawing/2014/main" id="{A348ABCE-4139-4924-A52E-091063601300}"/>
               </a:ext>
             </a:extLst>
           </p:cNvPr>
@@ -37731,7 +37731,7 @@
           <p:cNvPr id="22" name="">
             <a:extLst xmlns:a="http://schemas.openxmlformats.org/drawingml/2006/main">
               <a:ext uri="{FF2B5EF4-FFF2-40B4-BE49-F238E27FC236}">
-                <a16:creationId xmlns:a16="http://schemas.microsoft.com/office/drawing/2014/main" id="{42DE5076-72A8-46A6-9152-258EC2512549}"/>
+                <a16:creationId xmlns:a16="http://schemas.microsoft.com/office/drawing/2014/main" id="{230E4105-2BCA-45F6-ACF8-58B84514C048}"/>
               </a:ext>
             </a:extLst>
           </p:cNvPr>
@@ -37783,7 +37783,7 @@
           <p:cNvPr id="23" name="">
             <a:extLst xmlns:a="http://schemas.openxmlformats.org/drawingml/2006/main">
               <a:ext uri="{FF2B5EF4-FFF2-40B4-BE49-F238E27FC236}">
-                <a16:creationId xmlns:a16="http://schemas.microsoft.com/office/drawing/2014/main" id="{0A6627E0-E663-4F34-B3DD-35D2135D924E}"/>
+                <a16:creationId xmlns:a16="http://schemas.microsoft.com/office/drawing/2014/main" id="{D405FAE1-67A1-4EF2-9A5A-9A96B4A23D21}"/>
               </a:ext>
             </a:extLst>
           </p:cNvPr>
@@ -37835,7 +37835,7 @@
           <p:cNvPr id="24" name="">
             <a:extLst xmlns:a="http://schemas.openxmlformats.org/drawingml/2006/main">
               <a:ext uri="{FF2B5EF4-FFF2-40B4-BE49-F238E27FC236}">
-                <a16:creationId xmlns:a16="http://schemas.microsoft.com/office/drawing/2014/main" id="{CF9D8291-6E8A-4EF4-8112-85085F7BD480}"/>
+                <a16:creationId xmlns:a16="http://schemas.microsoft.com/office/drawing/2014/main" id="{757670FA-0E77-4306-BD3A-25FE98E2EEDF}"/>
               </a:ext>
             </a:extLst>
           </p:cNvPr>
@@ -37887,7 +37887,7 @@
           <p:cNvPr id="25" name="">
             <a:extLst xmlns:a="http://schemas.openxmlformats.org/drawingml/2006/main">
               <a:ext uri="{FF2B5EF4-FFF2-40B4-BE49-F238E27FC236}">
-                <a16:creationId xmlns:a16="http://schemas.microsoft.com/office/drawing/2014/main" id="{8E1887A5-993D-4125-91C5-18540A5FF3B9}"/>
+                <a16:creationId xmlns:a16="http://schemas.microsoft.com/office/drawing/2014/main" id="{0CB4D01A-5895-4833-AA21-9AB26950588C}"/>
               </a:ext>
             </a:extLst>
           </p:cNvPr>
@@ -37939,7 +37939,7 @@
           <p:cNvPr id="26" name="">
             <a:extLst xmlns:a="http://schemas.openxmlformats.org/drawingml/2006/main">
               <a:ext uri="{FF2B5EF4-FFF2-40B4-BE49-F238E27FC236}">
-                <a16:creationId xmlns:a16="http://schemas.microsoft.com/office/drawing/2014/main" id="{0F4DFF7D-1818-48F0-B98E-0F3842B3AD4E}"/>
+                <a16:creationId xmlns:a16="http://schemas.microsoft.com/office/drawing/2014/main" id="{E21EFEA0-7816-402A-BB0E-865C49941602}"/>
               </a:ext>
             </a:extLst>
           </p:cNvPr>
@@ -37989,7 +37989,7 @@
     </p:spTree>
     <p:extLst>
       <p:ext uri="{BB962C8B-B14F-4D97-AF65-F5344CB8AC3E}">
-        <p14:creationId xmlns:p14="http://schemas.microsoft.com/office/powerpoint/2010/main" val="617202058"/>
+        <p14:creationId xmlns:p14="http://schemas.microsoft.com/office/powerpoint/2010/main" val="2080369573"/>
       </p:ext>
     </p:extLst>
   </p:cSld>
@@ -38020,7 +38020,7 @@
           <p:cNvPr id="35" name="">
             <a:extLst xmlns:a="http://schemas.openxmlformats.org/drawingml/2006/main">
               <a:ext uri="{FF2B5EF4-FFF2-40B4-BE49-F238E27FC236}">
-                <a16:creationId xmlns:a16="http://schemas.microsoft.com/office/drawing/2014/main" id="{F3F6AF1D-E213-4387-A77B-89C2FC8BFCFC}"/>
+                <a16:creationId xmlns:a16="http://schemas.microsoft.com/office/drawing/2014/main" id="{2E292ACC-AE2E-48BF-85CF-7ED3CBE85631}"/>
               </a:ext>
             </a:extLst>
           </p:cNvPr>
@@ -38053,7 +38053,7 @@
           <p:cNvPr id="2" name="">
             <a:extLst xmlns:a="http://schemas.openxmlformats.org/drawingml/2006/main">
               <a:ext uri="{FF2B5EF4-FFF2-40B4-BE49-F238E27FC236}">
-                <a16:creationId xmlns:a16="http://schemas.microsoft.com/office/drawing/2014/main" id="{CDFDB9C4-03CD-428A-A883-1E43AE4390DF}"/>
+                <a16:creationId xmlns:a16="http://schemas.microsoft.com/office/drawing/2014/main" id="{9EA93074-1023-4706-BAF1-106A1E57C901}"/>
               </a:ext>
             </a:extLst>
           </p:cNvPr>
@@ -38084,7 +38084,7 @@
           <p:cNvPr id="3" name="">
             <a:extLst xmlns:a="http://schemas.openxmlformats.org/drawingml/2006/main">
               <a:ext uri="{FF2B5EF4-FFF2-40B4-BE49-F238E27FC236}">
-                <a16:creationId xmlns:a16="http://schemas.microsoft.com/office/drawing/2014/main" id="{6C3042AB-6FE5-4B64-9B4A-79931F547DFF}"/>
+                <a16:creationId xmlns:a16="http://schemas.microsoft.com/office/drawing/2014/main" id="{92705BA2-F3CB-4087-92B6-5ACFE29BC8ED}"/>
               </a:ext>
             </a:extLst>
           </p:cNvPr>
@@ -38136,7 +38136,7 @@
           <p:cNvPr id="4" name="">
             <a:extLst xmlns:a="http://schemas.openxmlformats.org/drawingml/2006/main">
               <a:ext uri="{FF2B5EF4-FFF2-40B4-BE49-F238E27FC236}">
-                <a16:creationId xmlns:a16="http://schemas.microsoft.com/office/drawing/2014/main" id="{226EAAE3-C4A1-4357-8A67-9900D91D342E}"/>
+                <a16:creationId xmlns:a16="http://schemas.microsoft.com/office/drawing/2014/main" id="{262A5319-7B03-4C16-800D-44203001F86A}"/>
               </a:ext>
             </a:extLst>
           </p:cNvPr>
@@ -38188,7 +38188,7 @@
           <p:cNvPr id="5" name="">
             <a:extLst xmlns:a="http://schemas.openxmlformats.org/drawingml/2006/main">
               <a:ext uri="{FF2B5EF4-FFF2-40B4-BE49-F238E27FC236}">
-                <a16:creationId xmlns:a16="http://schemas.microsoft.com/office/drawing/2014/main" id="{CC405D36-032D-4B84-8C92-83165BAFF6C4}"/>
+                <a16:creationId xmlns:a16="http://schemas.microsoft.com/office/drawing/2014/main" id="{F838FC2F-426B-4013-850A-E63DCD834F32}"/>
               </a:ext>
             </a:extLst>
           </p:cNvPr>
@@ -38223,7 +38223,7 @@
           <p:nvPr/>
         </p:nvPicPr>
         <p:blipFill>
-          <a:blip xmlns:r="http://schemas.openxmlformats.org/officeDocument/2006/relationships" xmlns:a="http://schemas.openxmlformats.org/drawingml/2006/main" r:embed="R2f3e9df9ef6d4cbc"/>
+          <a:blip xmlns:r="http://schemas.openxmlformats.org/officeDocument/2006/relationships" xmlns:a="http://schemas.openxmlformats.org/drawingml/2006/main" r:embed="R73983da916604a7e"/>
           <a:stretch xmlns:a="http://schemas.openxmlformats.org/drawingml/2006/main"/>
         </p:blipFill>
         <p:spPr>
@@ -38241,7 +38241,7 @@
           <p:cNvPr id="7" name="">
             <a:extLst xmlns:a="http://schemas.openxmlformats.org/drawingml/2006/main">
               <a:ext uri="{FF2B5EF4-FFF2-40B4-BE49-F238E27FC236}">
-                <a16:creationId xmlns:a16="http://schemas.microsoft.com/office/drawing/2014/main" id="{763BCEDA-52FC-4586-8946-46002DAE1A7C}"/>
+                <a16:creationId xmlns:a16="http://schemas.microsoft.com/office/drawing/2014/main" id="{7ADCE55C-A767-4A01-887F-A83FB396A569}"/>
               </a:ext>
             </a:extLst>
           </p:cNvPr>
@@ -38293,7 +38293,7 @@
           <p:cNvPr id="8" name="">
             <a:extLst xmlns:a="http://schemas.openxmlformats.org/drawingml/2006/main">
               <a:ext uri="{FF2B5EF4-FFF2-40B4-BE49-F238E27FC236}">
-                <a16:creationId xmlns:a16="http://schemas.microsoft.com/office/drawing/2014/main" id="{62087DEC-B1CF-4AAE-9CCE-D4541DDE68D7}"/>
+                <a16:creationId xmlns:a16="http://schemas.microsoft.com/office/drawing/2014/main" id="{E00AACC3-78AF-43E7-848B-49178BAA9CE5}"/>
               </a:ext>
             </a:extLst>
           </p:cNvPr>
@@ -38345,7 +38345,7 @@
           <p:cNvPr id="9" name="">
             <a:extLst xmlns:a="http://schemas.openxmlformats.org/drawingml/2006/main">
               <a:ext uri="{FF2B5EF4-FFF2-40B4-BE49-F238E27FC236}">
-                <a16:creationId xmlns:a16="http://schemas.microsoft.com/office/drawing/2014/main" id="{1A8D4986-D0D9-4B14-A628-42AAC219D237}"/>
+                <a16:creationId xmlns:a16="http://schemas.microsoft.com/office/drawing/2014/main" id="{4AB7E80F-7F5B-4C05-83ED-54ADDF1849EB}"/>
               </a:ext>
             </a:extLst>
           </p:cNvPr>
@@ -38397,7 +38397,7 @@
           <p:cNvPr id="10" name="">
             <a:extLst xmlns:a="http://schemas.openxmlformats.org/drawingml/2006/main">
               <a:ext uri="{FF2B5EF4-FFF2-40B4-BE49-F238E27FC236}">
-                <a16:creationId xmlns:a16="http://schemas.microsoft.com/office/drawing/2014/main" id="{C88302FD-713E-495F-94AA-ED60FFBCF420}"/>
+                <a16:creationId xmlns:a16="http://schemas.microsoft.com/office/drawing/2014/main" id="{0069E83E-E789-4489-84D8-A4F5CFD694B0}"/>
               </a:ext>
             </a:extLst>
           </p:cNvPr>
@@ -38449,7 +38449,7 @@
           <p:cNvPr id="11" name="">
             <a:extLst xmlns:a="http://schemas.openxmlformats.org/drawingml/2006/main">
               <a:ext uri="{FF2B5EF4-FFF2-40B4-BE49-F238E27FC236}">
-                <a16:creationId xmlns:a16="http://schemas.microsoft.com/office/drawing/2014/main" id="{D301AB8D-9209-4E15-9620-556B1EE7FC63}"/>
+                <a16:creationId xmlns:a16="http://schemas.microsoft.com/office/drawing/2014/main" id="{AA07473B-67BE-4F8F-BCE5-4999E39D7EF8}"/>
               </a:ext>
             </a:extLst>
           </p:cNvPr>
@@ -38496,10 +38496,10 @@
           <p:nvPr/>
         </p:nvPicPr>
         <p:blipFill>
-          <a:blip xmlns:r="http://schemas.openxmlformats.org/officeDocument/2006/relationships" xmlns:a="http://schemas.openxmlformats.org/drawingml/2006/main" r:embed="R893b4aa3485c49db">
+          <a:blip xmlns:r="http://schemas.openxmlformats.org/officeDocument/2006/relationships" xmlns:a="http://schemas.openxmlformats.org/drawingml/2006/main" r:embed="R3eb7a7e0bf5b43a2">
             <a:extLst>
               <a:ext uri="{96DAC541-7B7A-43D3-8B79-37D633B846F1}">
-                <asvg:svgBlip xmlns:asvg="http://schemas.microsoft.com/office/drawing/2016/SVG/main" r:embed="R6c2288ab775d46bb"/>
+                <asvg:svgBlip xmlns:asvg="http://schemas.microsoft.com/office/drawing/2016/SVG/main" r:embed="R103985b19fe64f5f"/>
               </a:ext>
             </a:extLst>
           </a:blip>
@@ -38520,7 +38520,7 @@
           <p:cNvPr id="13" name="">
             <a:extLst xmlns:a="http://schemas.openxmlformats.org/drawingml/2006/main">
               <a:ext uri="{FF2B5EF4-FFF2-40B4-BE49-F238E27FC236}">
-                <a16:creationId xmlns:a16="http://schemas.microsoft.com/office/drawing/2014/main" id="{CEC23EDA-A968-4006-9E9B-AAC60A8DDE7A}"/>
+                <a16:creationId xmlns:a16="http://schemas.microsoft.com/office/drawing/2014/main" id="{A27EA4D5-DA11-4EBF-BA38-55388AE1C11A}"/>
               </a:ext>
             </a:extLst>
           </p:cNvPr>
@@ -38553,7 +38553,7 @@
           <p:cNvPr id="14" name="">
             <a:extLst xmlns:a="http://schemas.openxmlformats.org/drawingml/2006/main">
               <a:ext uri="{FF2B5EF4-FFF2-40B4-BE49-F238E27FC236}">
-                <a16:creationId xmlns:a16="http://schemas.microsoft.com/office/drawing/2014/main" id="{BBCC64D2-A2FD-4A89-A7C4-500DDFA9EDC3}"/>
+                <a16:creationId xmlns:a16="http://schemas.microsoft.com/office/drawing/2014/main" id="{22FD5E1E-6396-485E-B8D5-8480E883E619}"/>
               </a:ext>
             </a:extLst>
           </p:cNvPr>
@@ -38605,7 +38605,7 @@
           <p:cNvPr id="15" name="">
             <a:extLst xmlns:a="http://schemas.openxmlformats.org/drawingml/2006/main">
               <a:ext uri="{FF2B5EF4-FFF2-40B4-BE49-F238E27FC236}">
-                <a16:creationId xmlns:a16="http://schemas.microsoft.com/office/drawing/2014/main" id="{9F204506-C29D-48E7-98A5-89293ED12096}"/>
+                <a16:creationId xmlns:a16="http://schemas.microsoft.com/office/drawing/2014/main" id="{C6CC4C59-0384-428F-B07E-136F764F9E95}"/>
               </a:ext>
             </a:extLst>
           </p:cNvPr>
@@ -38638,7 +38638,7 @@
           <p:cNvPr id="16" name="">
             <a:extLst xmlns:a="http://schemas.openxmlformats.org/drawingml/2006/main">
               <a:ext uri="{FF2B5EF4-FFF2-40B4-BE49-F238E27FC236}">
-                <a16:creationId xmlns:a16="http://schemas.microsoft.com/office/drawing/2014/main" id="{44FDEA9F-BA85-45E2-A1FC-C4DCF3CB3DB8}"/>
+                <a16:creationId xmlns:a16="http://schemas.microsoft.com/office/drawing/2014/main" id="{1C688A7C-DB8D-41FB-8200-3B088BE3DA20}"/>
               </a:ext>
             </a:extLst>
           </p:cNvPr>
@@ -38690,7 +38690,7 @@
           <p:cNvPr id="17" name="">
             <a:extLst xmlns:a="http://schemas.openxmlformats.org/drawingml/2006/main">
               <a:ext uri="{FF2B5EF4-FFF2-40B4-BE49-F238E27FC236}">
-                <a16:creationId xmlns:a16="http://schemas.microsoft.com/office/drawing/2014/main" id="{479E1119-3CE8-4144-AFD9-854F9E5E4D72}"/>
+                <a16:creationId xmlns:a16="http://schemas.microsoft.com/office/drawing/2014/main" id="{BCE76FD6-38D8-4030-A1CA-A61B8336D651}"/>
               </a:ext>
             </a:extLst>
           </p:cNvPr>
@@ -38723,7 +38723,7 @@
           <p:cNvPr id="18" name="">
             <a:extLst xmlns:a="http://schemas.openxmlformats.org/drawingml/2006/main">
               <a:ext uri="{FF2B5EF4-FFF2-40B4-BE49-F238E27FC236}">
-                <a16:creationId xmlns:a16="http://schemas.microsoft.com/office/drawing/2014/main" id="{5DE1DF08-4C06-435F-9FE7-3DF043A7B080}"/>
+                <a16:creationId xmlns:a16="http://schemas.microsoft.com/office/drawing/2014/main" id="{DD8971BF-3867-4D67-ABBE-9E6827EBD45F}"/>
               </a:ext>
             </a:extLst>
           </p:cNvPr>
@@ -38775,7 +38775,7 @@
           <p:cNvPr id="19" name="">
             <a:extLst xmlns:a="http://schemas.openxmlformats.org/drawingml/2006/main">
               <a:ext uri="{FF2B5EF4-FFF2-40B4-BE49-F238E27FC236}">
-                <a16:creationId xmlns:a16="http://schemas.microsoft.com/office/drawing/2014/main" id="{23E9E433-81A0-431A-AF0D-7D1AAEE2DBF4}"/>
+                <a16:creationId xmlns:a16="http://schemas.microsoft.com/office/drawing/2014/main" id="{8606EA67-9E53-4D1E-8CBF-05417A5549D5}"/>
               </a:ext>
             </a:extLst>
           </p:cNvPr>
@@ -38808,7 +38808,7 @@
           <p:cNvPr id="20" name="">
             <a:extLst xmlns:a="http://schemas.openxmlformats.org/drawingml/2006/main">
               <a:ext uri="{FF2B5EF4-FFF2-40B4-BE49-F238E27FC236}">
-                <a16:creationId xmlns:a16="http://schemas.microsoft.com/office/drawing/2014/main" id="{0AAC347B-4751-43F6-A9BB-4A9B46D39347}"/>
+                <a16:creationId xmlns:a16="http://schemas.microsoft.com/office/drawing/2014/main" id="{0A5B060B-79D7-413C-878F-C52F0947830E}"/>
               </a:ext>
             </a:extLst>
           </p:cNvPr>
@@ -38860,7 +38860,7 @@
           <p:cNvPr id="21" name="">
             <a:extLst xmlns:a="http://schemas.openxmlformats.org/drawingml/2006/main">
               <a:ext uri="{FF2B5EF4-FFF2-40B4-BE49-F238E27FC236}">
-                <a16:creationId xmlns:a16="http://schemas.microsoft.com/office/drawing/2014/main" id="{20C0A6F6-F94E-4947-9B69-F1606724BFEA}"/>
+                <a16:creationId xmlns:a16="http://schemas.microsoft.com/office/drawing/2014/main" id="{E699BADE-6E2D-47AB-8501-FB42D0C5209C}"/>
               </a:ext>
             </a:extLst>
           </p:cNvPr>
@@ -38893,7 +38893,7 @@
           <p:cNvPr id="22" name="">
             <a:extLst xmlns:a="http://schemas.openxmlformats.org/drawingml/2006/main">
               <a:ext uri="{FF2B5EF4-FFF2-40B4-BE49-F238E27FC236}">
-                <a16:creationId xmlns:a16="http://schemas.microsoft.com/office/drawing/2014/main" id="{5087E096-0568-4497-AFC2-ABE8834B9A06}"/>
+                <a16:creationId xmlns:a16="http://schemas.microsoft.com/office/drawing/2014/main" id="{F276D870-6ECB-4170-8C69-4B659E9EC17D}"/>
               </a:ext>
             </a:extLst>
           </p:cNvPr>
@@ -38945,7 +38945,7 @@
           <p:cNvPr id="23" name="">
             <a:extLst xmlns:a="http://schemas.openxmlformats.org/drawingml/2006/main">
               <a:ext uri="{FF2B5EF4-FFF2-40B4-BE49-F238E27FC236}">
-                <a16:creationId xmlns:a16="http://schemas.microsoft.com/office/drawing/2014/main" id="{6255E6BB-768D-478D-B689-648ED104B811}"/>
+                <a16:creationId xmlns:a16="http://schemas.microsoft.com/office/drawing/2014/main" id="{6BD78645-3C83-446C-9777-350A15BFD185}"/>
               </a:ext>
             </a:extLst>
           </p:cNvPr>
@@ -38978,7 +38978,7 @@
           <p:cNvPr id="24" name="">
             <a:extLst xmlns:a="http://schemas.openxmlformats.org/drawingml/2006/main">
               <a:ext uri="{FF2B5EF4-FFF2-40B4-BE49-F238E27FC236}">
-                <a16:creationId xmlns:a16="http://schemas.microsoft.com/office/drawing/2014/main" id="{46319BE6-70AF-4E37-AF33-E9CAD8A2A276}"/>
+                <a16:creationId xmlns:a16="http://schemas.microsoft.com/office/drawing/2014/main" id="{B36DA1CA-124D-4CA4-9D6D-344B1BBF1E87}"/>
               </a:ext>
             </a:extLst>
           </p:cNvPr>
@@ -39030,7 +39030,7 @@
           <p:cNvPr id="25" name="">
             <a:extLst xmlns:a="http://schemas.openxmlformats.org/drawingml/2006/main">
               <a:ext uri="{FF2B5EF4-FFF2-40B4-BE49-F238E27FC236}">
-                <a16:creationId xmlns:a16="http://schemas.microsoft.com/office/drawing/2014/main" id="{989AC7A0-3AD6-4C12-9739-2F6FED04B3F3}"/>
+                <a16:creationId xmlns:a16="http://schemas.microsoft.com/office/drawing/2014/main" id="{EBF99E2C-FE2A-42AF-95E9-438123129759}"/>
               </a:ext>
             </a:extLst>
           </p:cNvPr>
@@ -39063,7 +39063,7 @@
           <p:cNvPr id="26" name="">
             <a:extLst xmlns:a="http://schemas.openxmlformats.org/drawingml/2006/main">
               <a:ext uri="{FF2B5EF4-FFF2-40B4-BE49-F238E27FC236}">
-                <a16:creationId xmlns:a16="http://schemas.microsoft.com/office/drawing/2014/main" id="{3BDFB64E-1A42-4A8A-95EC-6A78FEB1F702}"/>
+                <a16:creationId xmlns:a16="http://schemas.microsoft.com/office/drawing/2014/main" id="{C740A7C0-755A-4CAC-BD75-ECCC0C279434}"/>
               </a:ext>
             </a:extLst>
           </p:cNvPr>
@@ -39115,7 +39115,7 @@
           <p:cNvPr id="27" name="">
             <a:extLst xmlns:a="http://schemas.openxmlformats.org/drawingml/2006/main">
               <a:ext uri="{FF2B5EF4-FFF2-40B4-BE49-F238E27FC236}">
-                <a16:creationId xmlns:a16="http://schemas.microsoft.com/office/drawing/2014/main" id="{CFF84ECF-8E85-43EE-BC46-C6E928BC8D70}"/>
+                <a16:creationId xmlns:a16="http://schemas.microsoft.com/office/drawing/2014/main" id="{C5A94301-DFAD-44A8-9CB9-9CA311C5CC08}"/>
               </a:ext>
             </a:extLst>
           </p:cNvPr>
@@ -39148,7 +39148,7 @@
           <p:cNvPr id="28" name="">
             <a:extLst xmlns:a="http://schemas.openxmlformats.org/drawingml/2006/main">
               <a:ext uri="{FF2B5EF4-FFF2-40B4-BE49-F238E27FC236}">
-                <a16:creationId xmlns:a16="http://schemas.microsoft.com/office/drawing/2014/main" id="{85B86244-81AA-40FC-A2F8-0144D27D7DB8}"/>
+                <a16:creationId xmlns:a16="http://schemas.microsoft.com/office/drawing/2014/main" id="{0B46A24B-9E62-48FF-93EE-85CE8D767C7F}"/>
               </a:ext>
             </a:extLst>
           </p:cNvPr>
@@ -39200,7 +39200,7 @@
           <p:cNvPr id="29" name="">
             <a:extLst xmlns:a="http://schemas.openxmlformats.org/drawingml/2006/main">
               <a:ext uri="{FF2B5EF4-FFF2-40B4-BE49-F238E27FC236}">
-                <a16:creationId xmlns:a16="http://schemas.microsoft.com/office/drawing/2014/main" id="{17AA4F22-7D76-4DE4-8160-326768CD7D43}"/>
+                <a16:creationId xmlns:a16="http://schemas.microsoft.com/office/drawing/2014/main" id="{C72D891F-80E2-44B7-80AC-195DF30DA05E}"/>
               </a:ext>
             </a:extLst>
           </p:cNvPr>
@@ -39233,7 +39233,7 @@
           <p:cNvPr id="30" name="">
             <a:extLst xmlns:a="http://schemas.openxmlformats.org/drawingml/2006/main">
               <a:ext uri="{FF2B5EF4-FFF2-40B4-BE49-F238E27FC236}">
-                <a16:creationId xmlns:a16="http://schemas.microsoft.com/office/drawing/2014/main" id="{668EBBAC-0810-4569-89E8-697BA87DB6F9}"/>
+                <a16:creationId xmlns:a16="http://schemas.microsoft.com/office/drawing/2014/main" id="{6D2BA494-3195-43AA-8BA8-65E0B5ECFC61}"/>
               </a:ext>
             </a:extLst>
           </p:cNvPr>
@@ -39285,7 +39285,7 @@
           <p:cNvPr id="31" name="">
             <a:extLst xmlns:a="http://schemas.openxmlformats.org/drawingml/2006/main">
               <a:ext uri="{FF2B5EF4-FFF2-40B4-BE49-F238E27FC236}">
-                <a16:creationId xmlns:a16="http://schemas.microsoft.com/office/drawing/2014/main" id="{6D0E7BDB-577B-4E19-B907-61AF380884CE}"/>
+                <a16:creationId xmlns:a16="http://schemas.microsoft.com/office/drawing/2014/main" id="{2809BBD5-8CAF-4107-9F47-18B1A0693405}"/>
               </a:ext>
             </a:extLst>
           </p:cNvPr>
@@ -39318,7 +39318,7 @@
           <p:cNvPr id="32" name="">
             <a:extLst xmlns:a="http://schemas.openxmlformats.org/drawingml/2006/main">
               <a:ext uri="{FF2B5EF4-FFF2-40B4-BE49-F238E27FC236}">
-                <a16:creationId xmlns:a16="http://schemas.microsoft.com/office/drawing/2014/main" id="{439D89E9-9654-4A0A-A017-D78485A849D1}"/>
+                <a16:creationId xmlns:a16="http://schemas.microsoft.com/office/drawing/2014/main" id="{2079245F-7618-4ABC-887C-DCB15F218BA9}"/>
               </a:ext>
             </a:extLst>
           </p:cNvPr>
@@ -39370,7 +39370,7 @@
           <p:cNvPr id="33" name="">
             <a:extLst xmlns:a="http://schemas.openxmlformats.org/drawingml/2006/main">
               <a:ext uri="{FF2B5EF4-FFF2-40B4-BE49-F238E27FC236}">
-                <a16:creationId xmlns:a16="http://schemas.microsoft.com/office/drawing/2014/main" id="{8DA2363A-AEB8-40A3-BD59-A2175EE4272C}"/>
+                <a16:creationId xmlns:a16="http://schemas.microsoft.com/office/drawing/2014/main" id="{481EDD14-4395-4699-A5DB-113562B9B39A}"/>
               </a:ext>
             </a:extLst>
           </p:cNvPr>
@@ -39403,7 +39403,7 @@
           <p:cNvPr id="34" name="">
             <a:extLst xmlns:a="http://schemas.openxmlformats.org/drawingml/2006/main">
               <a:ext uri="{FF2B5EF4-FFF2-40B4-BE49-F238E27FC236}">
-                <a16:creationId xmlns:a16="http://schemas.microsoft.com/office/drawing/2014/main" id="{E2F4CF53-F9D9-4379-AF7C-FB542EB10F1C}"/>
+                <a16:creationId xmlns:a16="http://schemas.microsoft.com/office/drawing/2014/main" id="{AEDBCBD4-E62F-4990-B70E-813552DC8A04}"/>
               </a:ext>
             </a:extLst>
           </p:cNvPr>
@@ -39453,7 +39453,7 @@
     </p:spTree>
     <p:extLst>
       <p:ext uri="{BB962C8B-B14F-4D97-AF65-F5344CB8AC3E}">
-        <p14:creationId xmlns:p14="http://schemas.microsoft.com/office/powerpoint/2010/main" val="1095545701"/>
+        <p14:creationId xmlns:p14="http://schemas.microsoft.com/office/powerpoint/2010/main" val="643012332"/>
       </p:ext>
     </p:extLst>
   </p:cSld>
@@ -39484,7 +39484,7 @@
           <p:cNvPr id="102" name="">
             <a:extLst xmlns:a="http://schemas.openxmlformats.org/drawingml/2006/main">
               <a:ext uri="{FF2B5EF4-FFF2-40B4-BE49-F238E27FC236}">
-                <a16:creationId xmlns:a16="http://schemas.microsoft.com/office/drawing/2014/main" id="{F08F6D7C-9026-4AD3-AA98-4184E4692641}"/>
+                <a16:creationId xmlns:a16="http://schemas.microsoft.com/office/drawing/2014/main" id="{0DB5295E-1186-483A-A9B1-9B41C89CA0CB}"/>
               </a:ext>
             </a:extLst>
           </p:cNvPr>
@@ -39517,7 +39517,7 @@
           <p:cNvPr id="2" name="">
             <a:extLst xmlns:a="http://schemas.openxmlformats.org/drawingml/2006/main">
               <a:ext uri="{FF2B5EF4-FFF2-40B4-BE49-F238E27FC236}">
-                <a16:creationId xmlns:a16="http://schemas.microsoft.com/office/drawing/2014/main" id="{57DF159E-F26B-4AE8-93B9-C73EAF62448D}"/>
+                <a16:creationId xmlns:a16="http://schemas.microsoft.com/office/drawing/2014/main" id="{00942C2C-B5FA-4CB2-85DF-4C19BA665993}"/>
               </a:ext>
             </a:extLst>
           </p:cNvPr>
@@ -39548,7 +39548,7 @@
           <p:cNvPr id="3" name="">
             <a:extLst xmlns:a="http://schemas.openxmlformats.org/drawingml/2006/main">
               <a:ext uri="{FF2B5EF4-FFF2-40B4-BE49-F238E27FC236}">
-                <a16:creationId xmlns:a16="http://schemas.microsoft.com/office/drawing/2014/main" id="{89FB1B6B-DD50-40AA-A542-C07678A1C2C2}"/>
+                <a16:creationId xmlns:a16="http://schemas.microsoft.com/office/drawing/2014/main" id="{60BDE270-267B-499D-A72F-1EDCC2E0A891}"/>
               </a:ext>
             </a:extLst>
           </p:cNvPr>
@@ -39600,7 +39600,7 @@
           <p:cNvPr id="4" name="">
             <a:extLst xmlns:a="http://schemas.openxmlformats.org/drawingml/2006/main">
               <a:ext uri="{FF2B5EF4-FFF2-40B4-BE49-F238E27FC236}">
-                <a16:creationId xmlns:a16="http://schemas.microsoft.com/office/drawing/2014/main" id="{BD8A575A-2A8C-4518-BF5F-78D466ECEC31}"/>
+                <a16:creationId xmlns:a16="http://schemas.microsoft.com/office/drawing/2014/main" id="{353C8573-08FC-4D1F-9ABC-0BBB33749CFD}"/>
               </a:ext>
             </a:extLst>
           </p:cNvPr>
@@ -39652,7 +39652,7 @@
           <p:cNvPr id="5" name="">
             <a:extLst xmlns:a="http://schemas.openxmlformats.org/drawingml/2006/main">
               <a:ext uri="{FF2B5EF4-FFF2-40B4-BE49-F238E27FC236}">
-                <a16:creationId xmlns:a16="http://schemas.microsoft.com/office/drawing/2014/main" id="{CB4E2CE1-3962-4D99-A28B-7E62ECCBF76D}"/>
+                <a16:creationId xmlns:a16="http://schemas.microsoft.com/office/drawing/2014/main" id="{0335E5A0-7D41-4B25-92C9-D8FCD8AFBEA8}"/>
               </a:ext>
             </a:extLst>
           </p:cNvPr>
@@ -39687,7 +39687,7 @@
           <p:nvPr/>
         </p:nvPicPr>
         <p:blipFill>
-          <a:blip xmlns:r="http://schemas.openxmlformats.org/officeDocument/2006/relationships" xmlns:a="http://schemas.openxmlformats.org/drawingml/2006/main" r:embed="R8058ea929fa54d65"/>
+          <a:blip xmlns:r="http://schemas.openxmlformats.org/officeDocument/2006/relationships" xmlns:a="http://schemas.openxmlformats.org/drawingml/2006/main" r:embed="R36a5d2da2de043bb"/>
           <a:stretch xmlns:a="http://schemas.openxmlformats.org/drawingml/2006/main"/>
         </p:blipFill>
         <p:spPr>
@@ -39705,7 +39705,7 @@
           <p:cNvPr id="7" name="">
             <a:extLst xmlns:a="http://schemas.openxmlformats.org/drawingml/2006/main">
               <a:ext uri="{FF2B5EF4-FFF2-40B4-BE49-F238E27FC236}">
-                <a16:creationId xmlns:a16="http://schemas.microsoft.com/office/drawing/2014/main" id="{BB3B160A-DAAB-4650-9B63-8FE1BDA51836}"/>
+                <a16:creationId xmlns:a16="http://schemas.microsoft.com/office/drawing/2014/main" id="{AEFDB3A0-D1A5-4147-8575-75180269A517}"/>
               </a:ext>
             </a:extLst>
           </p:cNvPr>
@@ -39757,7 +39757,7 @@
           <p:cNvPr id="8" name="">
             <a:extLst xmlns:a="http://schemas.openxmlformats.org/drawingml/2006/main">
               <a:ext uri="{FF2B5EF4-FFF2-40B4-BE49-F238E27FC236}">
-                <a16:creationId xmlns:a16="http://schemas.microsoft.com/office/drawing/2014/main" id="{FF0B610B-AEB9-4DDD-AADD-210E85F63143}"/>
+                <a16:creationId xmlns:a16="http://schemas.microsoft.com/office/drawing/2014/main" id="{03D85291-938A-435F-814B-FF0FA75FC42A}"/>
               </a:ext>
             </a:extLst>
           </p:cNvPr>
@@ -39809,7 +39809,7 @@
           <p:cNvPr id="9" name="">
             <a:extLst xmlns:a="http://schemas.openxmlformats.org/drawingml/2006/main">
               <a:ext uri="{FF2B5EF4-FFF2-40B4-BE49-F238E27FC236}">
-                <a16:creationId xmlns:a16="http://schemas.microsoft.com/office/drawing/2014/main" id="{05F108BB-2424-42DB-9837-362B4BBC62D9}"/>
+                <a16:creationId xmlns:a16="http://schemas.microsoft.com/office/drawing/2014/main" id="{A41D03ED-BF6A-446B-ABD4-E150F7A015F8}"/>
               </a:ext>
             </a:extLst>
           </p:cNvPr>
@@ -39861,7 +39861,7 @@
           <p:cNvPr id="10" name="">
             <a:extLst xmlns:a="http://schemas.openxmlformats.org/drawingml/2006/main">
               <a:ext uri="{FF2B5EF4-FFF2-40B4-BE49-F238E27FC236}">
-                <a16:creationId xmlns:a16="http://schemas.microsoft.com/office/drawing/2014/main" id="{A3EA18C4-492A-4D2A-AC9F-9F49EB5F1987}"/>
+                <a16:creationId xmlns:a16="http://schemas.microsoft.com/office/drawing/2014/main" id="{9C258D9F-08F2-478C-BC79-E826E98DA468}"/>
               </a:ext>
             </a:extLst>
           </p:cNvPr>
@@ -39913,7 +39913,7 @@
           <p:cNvPr id="11" name="">
             <a:extLst xmlns:a="http://schemas.openxmlformats.org/drawingml/2006/main">
               <a:ext uri="{FF2B5EF4-FFF2-40B4-BE49-F238E27FC236}">
-                <a16:creationId xmlns:a16="http://schemas.microsoft.com/office/drawing/2014/main" id="{55661EEA-89D9-4AD8-8784-579A482F6BE3}"/>
+                <a16:creationId xmlns:a16="http://schemas.microsoft.com/office/drawing/2014/main" id="{847B9DC7-846F-4227-87E1-9EC322CAF9B2}"/>
               </a:ext>
             </a:extLst>
           </p:cNvPr>
@@ -39944,7 +39944,7 @@
           <p:cNvPr id="12" name="">
             <a:extLst xmlns:a="http://schemas.openxmlformats.org/drawingml/2006/main">
               <a:ext uri="{FF2B5EF4-FFF2-40B4-BE49-F238E27FC236}">
-                <a16:creationId xmlns:a16="http://schemas.microsoft.com/office/drawing/2014/main" id="{0697A43A-B2F0-434A-942B-6901FF2A7D7F}"/>
+                <a16:creationId xmlns:a16="http://schemas.microsoft.com/office/drawing/2014/main" id="{998030AC-C45E-4DD8-B642-F7F1902364B3}"/>
               </a:ext>
             </a:extLst>
           </p:cNvPr>
@@ -39975,7 +39975,7 @@
           <p:cNvPr id="13" name="">
             <a:extLst xmlns:a="http://schemas.openxmlformats.org/drawingml/2006/main">
               <a:ext uri="{FF2B5EF4-FFF2-40B4-BE49-F238E27FC236}">
-                <a16:creationId xmlns:a16="http://schemas.microsoft.com/office/drawing/2014/main" id="{D072E2AD-515E-4ECF-8540-3385BE574348}"/>
+                <a16:creationId xmlns:a16="http://schemas.microsoft.com/office/drawing/2014/main" id="{0C896123-046C-4CEC-A550-3E4F7B1D0B04}"/>
               </a:ext>
             </a:extLst>
           </p:cNvPr>
@@ -40027,7 +40027,7 @@
           <p:cNvPr id="14" name="">
             <a:extLst xmlns:a="http://schemas.openxmlformats.org/drawingml/2006/main">
               <a:ext uri="{FF2B5EF4-FFF2-40B4-BE49-F238E27FC236}">
-                <a16:creationId xmlns:a16="http://schemas.microsoft.com/office/drawing/2014/main" id="{A50CF8F6-AC1C-4785-9771-6723056F063C}"/>
+                <a16:creationId xmlns:a16="http://schemas.microsoft.com/office/drawing/2014/main" id="{37097B24-8F5F-4F41-A36B-8902ADA813CC}"/>
               </a:ext>
             </a:extLst>
           </p:cNvPr>
@@ -40079,7 +40079,7 @@
           <p:cNvPr id="15" name="">
             <a:extLst xmlns:a="http://schemas.openxmlformats.org/drawingml/2006/main">
               <a:ext uri="{FF2B5EF4-FFF2-40B4-BE49-F238E27FC236}">
-                <a16:creationId xmlns:a16="http://schemas.microsoft.com/office/drawing/2014/main" id="{8775E4A0-D1EE-4703-B8A8-D45EAA562FFB}"/>
+                <a16:creationId xmlns:a16="http://schemas.microsoft.com/office/drawing/2014/main" id="{4D1E5209-C85E-405A-9157-911C75AE7BB8}"/>
               </a:ext>
             </a:extLst>
           </p:cNvPr>
@@ -40131,7 +40131,7 @@
           <p:cNvPr id="16" name="">
             <a:extLst xmlns:a="http://schemas.openxmlformats.org/drawingml/2006/main">
               <a:ext uri="{FF2B5EF4-FFF2-40B4-BE49-F238E27FC236}">
-                <a16:creationId xmlns:a16="http://schemas.microsoft.com/office/drawing/2014/main" id="{FD075932-BBF1-4450-BCD1-6D74E6651639}"/>
+                <a16:creationId xmlns:a16="http://schemas.microsoft.com/office/drawing/2014/main" id="{2E790B5D-55B6-47A1-B143-3C2ADC4BD2A5}"/>
               </a:ext>
             </a:extLst>
           </p:cNvPr>
@@ -40183,7 +40183,7 @@
           <p:cNvPr id="17" name="">
             <a:extLst xmlns:a="http://schemas.openxmlformats.org/drawingml/2006/main">
               <a:ext uri="{FF2B5EF4-FFF2-40B4-BE49-F238E27FC236}">
-                <a16:creationId xmlns:a16="http://schemas.microsoft.com/office/drawing/2014/main" id="{E01EC289-BA23-44B7-84F8-4C6D12394CC4}"/>
+                <a16:creationId xmlns:a16="http://schemas.microsoft.com/office/drawing/2014/main" id="{1E212483-C3C7-4638-8E59-D640F3511230}"/>
               </a:ext>
             </a:extLst>
           </p:cNvPr>
@@ -40235,7 +40235,7 @@
           <p:cNvPr id="18" name="">
             <a:extLst xmlns:a="http://schemas.openxmlformats.org/drawingml/2006/main">
               <a:ext uri="{FF2B5EF4-FFF2-40B4-BE49-F238E27FC236}">
-                <a16:creationId xmlns:a16="http://schemas.microsoft.com/office/drawing/2014/main" id="{3ABE73A8-FA8E-483C-A5B6-66836035A77E}"/>
+                <a16:creationId xmlns:a16="http://schemas.microsoft.com/office/drawing/2014/main" id="{B30BA70B-11FC-49F6-AB12-E693AB898138}"/>
               </a:ext>
             </a:extLst>
           </p:cNvPr>
@@ -40266,7 +40266,7 @@
           <p:cNvPr id="19" name="">
             <a:extLst xmlns:a="http://schemas.openxmlformats.org/drawingml/2006/main">
               <a:ext uri="{FF2B5EF4-FFF2-40B4-BE49-F238E27FC236}">
-                <a16:creationId xmlns:a16="http://schemas.microsoft.com/office/drawing/2014/main" id="{174ABB4C-C4D4-42CD-9F27-EAE983D7E8D6}"/>
+                <a16:creationId xmlns:a16="http://schemas.microsoft.com/office/drawing/2014/main" id="{C2E5E0AD-ED5E-42A2-941E-FCC83810BD0D}"/>
               </a:ext>
             </a:extLst>
           </p:cNvPr>
@@ -40318,7 +40318,7 @@
           <p:cNvPr id="20" name="">
             <a:extLst xmlns:a="http://schemas.openxmlformats.org/drawingml/2006/main">
               <a:ext uri="{FF2B5EF4-FFF2-40B4-BE49-F238E27FC236}">
-                <a16:creationId xmlns:a16="http://schemas.microsoft.com/office/drawing/2014/main" id="{923C8B8D-84A3-4FE2-A4D6-96EB3225682B}"/>
+                <a16:creationId xmlns:a16="http://schemas.microsoft.com/office/drawing/2014/main" id="{2D98C540-7539-4D89-B878-6C4EB915E566}"/>
               </a:ext>
             </a:extLst>
           </p:cNvPr>
@@ -40370,7 +40370,7 @@
           <p:cNvPr id="21" name="">
             <a:extLst xmlns:a="http://schemas.openxmlformats.org/drawingml/2006/main">
               <a:ext uri="{FF2B5EF4-FFF2-40B4-BE49-F238E27FC236}">
-                <a16:creationId xmlns:a16="http://schemas.microsoft.com/office/drawing/2014/main" id="{E5F2EE13-D0D7-49EF-8B7A-5C016456911F}"/>
+                <a16:creationId xmlns:a16="http://schemas.microsoft.com/office/drawing/2014/main" id="{2D9214FB-3733-4A7C-B700-6DED854F6DF2}"/>
               </a:ext>
             </a:extLst>
           </p:cNvPr>
@@ -40422,7 +40422,7 @@
           <p:cNvPr id="22" name="">
             <a:extLst xmlns:a="http://schemas.openxmlformats.org/drawingml/2006/main">
               <a:ext uri="{FF2B5EF4-FFF2-40B4-BE49-F238E27FC236}">
-                <a16:creationId xmlns:a16="http://schemas.microsoft.com/office/drawing/2014/main" id="{8772B461-4EEA-4A22-825B-8FAFF4513B38}"/>
+                <a16:creationId xmlns:a16="http://schemas.microsoft.com/office/drawing/2014/main" id="{62973F82-22DD-469A-9346-E0754458F12F}"/>
               </a:ext>
             </a:extLst>
           </p:cNvPr>
@@ -40474,7 +40474,7 @@
           <p:cNvPr id="23" name="">
             <a:extLst xmlns:a="http://schemas.openxmlformats.org/drawingml/2006/main">
               <a:ext uri="{FF2B5EF4-FFF2-40B4-BE49-F238E27FC236}">
-                <a16:creationId xmlns:a16="http://schemas.microsoft.com/office/drawing/2014/main" id="{E0363F17-EAD2-4965-BB89-500550F0585D}"/>
+                <a16:creationId xmlns:a16="http://schemas.microsoft.com/office/drawing/2014/main" id="{AFE57977-6C0A-422D-BCE3-9792ACF47B77}"/>
               </a:ext>
             </a:extLst>
           </p:cNvPr>
@@ -40526,7 +40526,7 @@
           <p:cNvPr id="24" name="">
             <a:extLst xmlns:a="http://schemas.openxmlformats.org/drawingml/2006/main">
               <a:ext uri="{FF2B5EF4-FFF2-40B4-BE49-F238E27FC236}">
-                <a16:creationId xmlns:a16="http://schemas.microsoft.com/office/drawing/2014/main" id="{05475F90-AFC6-4907-BC43-E3EF8B2F95D3}"/>
+                <a16:creationId xmlns:a16="http://schemas.microsoft.com/office/drawing/2014/main" id="{01F64419-D298-4A25-97CB-21ADC2A522A2}"/>
               </a:ext>
             </a:extLst>
           </p:cNvPr>
@@ -40557,7 +40557,7 @@
           <p:cNvPr id="25" name="">
             <a:extLst xmlns:a="http://schemas.openxmlformats.org/drawingml/2006/main">
               <a:ext uri="{FF2B5EF4-FFF2-40B4-BE49-F238E27FC236}">
-                <a16:creationId xmlns:a16="http://schemas.microsoft.com/office/drawing/2014/main" id="{987C668F-50B0-40F0-BCBD-8D6166B7CA86}"/>
+                <a16:creationId xmlns:a16="http://schemas.microsoft.com/office/drawing/2014/main" id="{985115A5-9CEE-4CC8-8D4C-EBC01C62EC1B}"/>
               </a:ext>
             </a:extLst>
           </p:cNvPr>
@@ -40588,7 +40588,7 @@
           <p:cNvPr id="26" name="">
             <a:extLst xmlns:a="http://schemas.openxmlformats.org/drawingml/2006/main">
               <a:ext uri="{FF2B5EF4-FFF2-40B4-BE49-F238E27FC236}">
-                <a16:creationId xmlns:a16="http://schemas.microsoft.com/office/drawing/2014/main" id="{7B51F465-CF3F-430C-81D3-28175E540EE8}"/>
+                <a16:creationId xmlns:a16="http://schemas.microsoft.com/office/drawing/2014/main" id="{FD6B4858-DA11-42A2-AB15-8BEFCD17C2FC}"/>
               </a:ext>
             </a:extLst>
           </p:cNvPr>
@@ -40640,7 +40640,7 @@
           <p:cNvPr id="27" name="">
             <a:extLst xmlns:a="http://schemas.openxmlformats.org/drawingml/2006/main">
               <a:ext uri="{FF2B5EF4-FFF2-40B4-BE49-F238E27FC236}">
-                <a16:creationId xmlns:a16="http://schemas.microsoft.com/office/drawing/2014/main" id="{517F5F52-1F09-40E4-88BD-09320387AB88}"/>
+                <a16:creationId xmlns:a16="http://schemas.microsoft.com/office/drawing/2014/main" id="{5F530E05-DA51-4DF3-97CC-A3CD4FC9834B}"/>
               </a:ext>
             </a:extLst>
           </p:cNvPr>
@@ -40692,7 +40692,7 @@
           <p:cNvPr id="28" name="">
             <a:extLst xmlns:a="http://schemas.openxmlformats.org/drawingml/2006/main">
               <a:ext uri="{FF2B5EF4-FFF2-40B4-BE49-F238E27FC236}">
-                <a16:creationId xmlns:a16="http://schemas.microsoft.com/office/drawing/2014/main" id="{168819F7-C819-4454-A6FD-9847DB5DFCD9}"/>
+                <a16:creationId xmlns:a16="http://schemas.microsoft.com/office/drawing/2014/main" id="{7EFA01D3-AA33-4C16-86A1-2AEEB8A84B6A}"/>
               </a:ext>
             </a:extLst>
           </p:cNvPr>
@@ -40744,7 +40744,7 @@
           <p:cNvPr id="29" name="">
             <a:extLst xmlns:a="http://schemas.openxmlformats.org/drawingml/2006/main">
               <a:ext uri="{FF2B5EF4-FFF2-40B4-BE49-F238E27FC236}">
-                <a16:creationId xmlns:a16="http://schemas.microsoft.com/office/drawing/2014/main" id="{EC3863AC-A698-4677-ACFB-F0C0914877FB}"/>
+                <a16:creationId xmlns:a16="http://schemas.microsoft.com/office/drawing/2014/main" id="{F99379B7-DC20-4EED-9ADA-ADD19FE11D3B}"/>
               </a:ext>
             </a:extLst>
           </p:cNvPr>
@@ -40796,7 +40796,7 @@
           <p:cNvPr id="30" name="">
             <a:extLst xmlns:a="http://schemas.openxmlformats.org/drawingml/2006/main">
               <a:ext uri="{FF2B5EF4-FFF2-40B4-BE49-F238E27FC236}">
-                <a16:creationId xmlns:a16="http://schemas.microsoft.com/office/drawing/2014/main" id="{61BE0262-C877-4230-9CA4-3D47BBF3012E}"/>
+                <a16:creationId xmlns:a16="http://schemas.microsoft.com/office/drawing/2014/main" id="{FCFD479C-5816-4834-998F-E4A9ECBCCD8E}"/>
               </a:ext>
             </a:extLst>
           </p:cNvPr>
@@ -40848,7 +40848,7 @@
           <p:cNvPr id="31" name="">
             <a:extLst xmlns:a="http://schemas.openxmlformats.org/drawingml/2006/main">
               <a:ext uri="{FF2B5EF4-FFF2-40B4-BE49-F238E27FC236}">
-                <a16:creationId xmlns:a16="http://schemas.microsoft.com/office/drawing/2014/main" id="{2E2E793B-6F47-4D1A-9B28-DFE8011B99C2}"/>
+                <a16:creationId xmlns:a16="http://schemas.microsoft.com/office/drawing/2014/main" id="{C7AED589-6FFF-40EC-A3DB-67578D4306F9}"/>
               </a:ext>
             </a:extLst>
           </p:cNvPr>
@@ -40879,7 +40879,7 @@
           <p:cNvPr id="32" name="">
             <a:extLst xmlns:a="http://schemas.openxmlformats.org/drawingml/2006/main">
               <a:ext uri="{FF2B5EF4-FFF2-40B4-BE49-F238E27FC236}">
-                <a16:creationId xmlns:a16="http://schemas.microsoft.com/office/drawing/2014/main" id="{10A1CD9E-BC63-49A8-8A31-C6EA5984233C}"/>
+                <a16:creationId xmlns:a16="http://schemas.microsoft.com/office/drawing/2014/main" id="{27E83F04-96FF-4111-852E-F8982920011A}"/>
               </a:ext>
             </a:extLst>
           </p:cNvPr>
@@ -40931,7 +40931,7 @@
           <p:cNvPr id="33" name="">
             <a:extLst xmlns:a="http://schemas.openxmlformats.org/drawingml/2006/main">
               <a:ext uri="{FF2B5EF4-FFF2-40B4-BE49-F238E27FC236}">
-                <a16:creationId xmlns:a16="http://schemas.microsoft.com/office/drawing/2014/main" id="{615ADB9A-AF02-4A70-A6B0-71AD4DC70A35}"/>
+                <a16:creationId xmlns:a16="http://schemas.microsoft.com/office/drawing/2014/main" id="{8C3F6407-AEA3-444B-818E-4AED8AA6F039}"/>
               </a:ext>
             </a:extLst>
           </p:cNvPr>
@@ -40983,7 +40983,7 @@
           <p:cNvPr id="34" name="">
             <a:extLst xmlns:a="http://schemas.openxmlformats.org/drawingml/2006/main">
               <a:ext uri="{FF2B5EF4-FFF2-40B4-BE49-F238E27FC236}">
-                <a16:creationId xmlns:a16="http://schemas.microsoft.com/office/drawing/2014/main" id="{E65DE0D4-498E-4BCB-ADAB-DA139B001AFD}"/>
+                <a16:creationId xmlns:a16="http://schemas.microsoft.com/office/drawing/2014/main" id="{CE6A1129-87CA-4A23-B7DA-A5851112B7A9}"/>
               </a:ext>
             </a:extLst>
           </p:cNvPr>
@@ -41035,7 +41035,7 @@
           <p:cNvPr id="35" name="">
             <a:extLst xmlns:a="http://schemas.openxmlformats.org/drawingml/2006/main">
               <a:ext uri="{FF2B5EF4-FFF2-40B4-BE49-F238E27FC236}">
-                <a16:creationId xmlns:a16="http://schemas.microsoft.com/office/drawing/2014/main" id="{58645A5C-72A9-4423-8D13-99C1BE825419}"/>
+                <a16:creationId xmlns:a16="http://schemas.microsoft.com/office/drawing/2014/main" id="{EBFFF142-A94F-47F8-80A3-6E37BC5DF9AF}"/>
               </a:ext>
             </a:extLst>
           </p:cNvPr>
@@ -41087,7 +41087,7 @@
           <p:cNvPr id="36" name="">
             <a:extLst xmlns:a="http://schemas.openxmlformats.org/drawingml/2006/main">
               <a:ext uri="{FF2B5EF4-FFF2-40B4-BE49-F238E27FC236}">
-                <a16:creationId xmlns:a16="http://schemas.microsoft.com/office/drawing/2014/main" id="{41413EB3-1704-4C9F-84B0-0AFC63A88E63}"/>
+                <a16:creationId xmlns:a16="http://schemas.microsoft.com/office/drawing/2014/main" id="{202AAC9B-C3A9-44F8-BD71-7ED3F3C79244}"/>
               </a:ext>
             </a:extLst>
           </p:cNvPr>
@@ -41139,7 +41139,7 @@
           <p:cNvPr id="37" name="">
             <a:extLst xmlns:a="http://schemas.openxmlformats.org/drawingml/2006/main">
               <a:ext uri="{FF2B5EF4-FFF2-40B4-BE49-F238E27FC236}">
-                <a16:creationId xmlns:a16="http://schemas.microsoft.com/office/drawing/2014/main" id="{86152C55-9E9C-4B69-9775-F633B0AE97AF}"/>
+                <a16:creationId xmlns:a16="http://schemas.microsoft.com/office/drawing/2014/main" id="{3E8C8E14-DD30-4D51-B76B-51DAAA62D0A6}"/>
               </a:ext>
             </a:extLst>
           </p:cNvPr>
@@ -41170,7 +41170,7 @@
           <p:cNvPr id="38" name="">
             <a:extLst xmlns:a="http://schemas.openxmlformats.org/drawingml/2006/main">
               <a:ext uri="{FF2B5EF4-FFF2-40B4-BE49-F238E27FC236}">
-                <a16:creationId xmlns:a16="http://schemas.microsoft.com/office/drawing/2014/main" id="{B36AC748-2DB3-4AF2-9CB3-10634A416D74}"/>
+                <a16:creationId xmlns:a16="http://schemas.microsoft.com/office/drawing/2014/main" id="{5B442943-AA68-4494-8C36-43BFB5B9C872}"/>
               </a:ext>
             </a:extLst>
           </p:cNvPr>
@@ -41201,7 +41201,7 @@
           <p:cNvPr id="39" name="">
             <a:extLst xmlns:a="http://schemas.openxmlformats.org/drawingml/2006/main">
               <a:ext uri="{FF2B5EF4-FFF2-40B4-BE49-F238E27FC236}">
-                <a16:creationId xmlns:a16="http://schemas.microsoft.com/office/drawing/2014/main" id="{C2057AFD-7F33-480B-BC2A-3F99EE4D4127}"/>
+                <a16:creationId xmlns:a16="http://schemas.microsoft.com/office/drawing/2014/main" id="{E40E8DA9-EAC2-4C95-BD40-07F64C7BC35F}"/>
               </a:ext>
             </a:extLst>
           </p:cNvPr>
@@ -41253,7 +41253,7 @@
           <p:cNvPr id="40" name="">
             <a:extLst xmlns:a="http://schemas.openxmlformats.org/drawingml/2006/main">
               <a:ext uri="{FF2B5EF4-FFF2-40B4-BE49-F238E27FC236}">
-                <a16:creationId xmlns:a16="http://schemas.microsoft.com/office/drawing/2014/main" id="{FBC6770F-9FE0-4D47-B48A-B11B2AEF92D9}"/>
+                <a16:creationId xmlns:a16="http://schemas.microsoft.com/office/drawing/2014/main" id="{BA6073C4-FA95-49B4-94A8-C702EB7FFD0E}"/>
               </a:ext>
             </a:extLst>
           </p:cNvPr>
@@ -41305,7 +41305,7 @@
           <p:cNvPr id="41" name="">
             <a:extLst xmlns:a="http://schemas.openxmlformats.org/drawingml/2006/main">
               <a:ext uri="{FF2B5EF4-FFF2-40B4-BE49-F238E27FC236}">
-                <a16:creationId xmlns:a16="http://schemas.microsoft.com/office/drawing/2014/main" id="{79C6029D-8A0F-4683-9D42-BF7B2D9E06F4}"/>
+                <a16:creationId xmlns:a16="http://schemas.microsoft.com/office/drawing/2014/main" id="{FCA9029E-9A97-4643-868A-19751BF4440A}"/>
               </a:ext>
             </a:extLst>
           </p:cNvPr>
@@ -41357,7 +41357,7 @@
           <p:cNvPr id="42" name="">
             <a:extLst xmlns:a="http://schemas.openxmlformats.org/drawingml/2006/main">
               <a:ext uri="{FF2B5EF4-FFF2-40B4-BE49-F238E27FC236}">
-                <a16:creationId xmlns:a16="http://schemas.microsoft.com/office/drawing/2014/main" id="{CB878092-FE7E-4F79-91C6-0059662FC5DF}"/>
+                <a16:creationId xmlns:a16="http://schemas.microsoft.com/office/drawing/2014/main" id="{E0147AC4-B352-4C23-85C0-2E516243E9CA}"/>
               </a:ext>
             </a:extLst>
           </p:cNvPr>
@@ -41409,7 +41409,7 @@
           <p:cNvPr id="43" name="">
             <a:extLst xmlns:a="http://schemas.openxmlformats.org/drawingml/2006/main">
               <a:ext uri="{FF2B5EF4-FFF2-40B4-BE49-F238E27FC236}">
-                <a16:creationId xmlns:a16="http://schemas.microsoft.com/office/drawing/2014/main" id="{DDB69996-FD53-44E7-BCB0-4CF724D1261E}"/>
+                <a16:creationId xmlns:a16="http://schemas.microsoft.com/office/drawing/2014/main" id="{308C011C-CC56-4863-A56C-7AF4AF9568FD}"/>
               </a:ext>
             </a:extLst>
           </p:cNvPr>
@@ -41461,7 +41461,7 @@
           <p:cNvPr id="44" name="">
             <a:extLst xmlns:a="http://schemas.openxmlformats.org/drawingml/2006/main">
               <a:ext uri="{FF2B5EF4-FFF2-40B4-BE49-F238E27FC236}">
-                <a16:creationId xmlns:a16="http://schemas.microsoft.com/office/drawing/2014/main" id="{6C4FBF7B-F783-4D2C-B8A7-03A0851FA5AF}"/>
+                <a16:creationId xmlns:a16="http://schemas.microsoft.com/office/drawing/2014/main" id="{9B7689A4-B590-40E4-976B-40966DD5453B}"/>
               </a:ext>
             </a:extLst>
           </p:cNvPr>
@@ -41492,7 +41492,7 @@
           <p:cNvPr id="45" name="">
             <a:extLst xmlns:a="http://schemas.openxmlformats.org/drawingml/2006/main">
               <a:ext uri="{FF2B5EF4-FFF2-40B4-BE49-F238E27FC236}">
-                <a16:creationId xmlns:a16="http://schemas.microsoft.com/office/drawing/2014/main" id="{97717E91-E366-4877-8C6D-9CA3906D4EB1}"/>
+                <a16:creationId xmlns:a16="http://schemas.microsoft.com/office/drawing/2014/main" id="{27E1E569-3F7F-439C-B5E1-9D286E28B514}"/>
               </a:ext>
             </a:extLst>
           </p:cNvPr>
@@ -41544,7 +41544,7 @@
           <p:cNvPr id="46" name="">
             <a:extLst xmlns:a="http://schemas.openxmlformats.org/drawingml/2006/main">
               <a:ext uri="{FF2B5EF4-FFF2-40B4-BE49-F238E27FC236}">
-                <a16:creationId xmlns:a16="http://schemas.microsoft.com/office/drawing/2014/main" id="{C8E72950-8BC8-4047-B249-E9F9A7C338C7}"/>
+                <a16:creationId xmlns:a16="http://schemas.microsoft.com/office/drawing/2014/main" id="{D9EEEE8F-4065-4860-8CB4-5C8E2D28C291}"/>
               </a:ext>
             </a:extLst>
           </p:cNvPr>
@@ -41596,7 +41596,7 @@
           <p:cNvPr id="47" name="">
             <a:extLst xmlns:a="http://schemas.openxmlformats.org/drawingml/2006/main">
               <a:ext uri="{FF2B5EF4-FFF2-40B4-BE49-F238E27FC236}">
-                <a16:creationId xmlns:a16="http://schemas.microsoft.com/office/drawing/2014/main" id="{B9A123E6-3D50-4006-BD7B-27B0A4D4A614}"/>
+                <a16:creationId xmlns:a16="http://schemas.microsoft.com/office/drawing/2014/main" id="{C47427FA-D4CF-45C6-A3ED-88883C08AFBC}"/>
               </a:ext>
             </a:extLst>
           </p:cNvPr>
@@ -41648,7 +41648,7 @@
           <p:cNvPr id="48" name="">
             <a:extLst xmlns:a="http://schemas.openxmlformats.org/drawingml/2006/main">
               <a:ext uri="{FF2B5EF4-FFF2-40B4-BE49-F238E27FC236}">
-                <a16:creationId xmlns:a16="http://schemas.microsoft.com/office/drawing/2014/main" id="{12CBD3BF-519C-4DCE-8991-05F9422774A8}"/>
+                <a16:creationId xmlns:a16="http://schemas.microsoft.com/office/drawing/2014/main" id="{EB0B8D85-91D1-4B9C-92E3-0667178CE4D0}"/>
               </a:ext>
             </a:extLst>
           </p:cNvPr>
@@ -41700,7 +41700,7 @@
           <p:cNvPr id="49" name="">
             <a:extLst xmlns:a="http://schemas.openxmlformats.org/drawingml/2006/main">
               <a:ext uri="{FF2B5EF4-FFF2-40B4-BE49-F238E27FC236}">
-                <a16:creationId xmlns:a16="http://schemas.microsoft.com/office/drawing/2014/main" id="{8F996851-6788-4019-8D96-D7FBF55E1F34}"/>
+                <a16:creationId xmlns:a16="http://schemas.microsoft.com/office/drawing/2014/main" id="{2D6834B2-1E95-4A73-A63A-B532BD92D812}"/>
               </a:ext>
             </a:extLst>
           </p:cNvPr>
@@ -41752,7 +41752,7 @@
           <p:cNvPr id="50" name="">
             <a:extLst xmlns:a="http://schemas.openxmlformats.org/drawingml/2006/main">
               <a:ext uri="{FF2B5EF4-FFF2-40B4-BE49-F238E27FC236}">
-                <a16:creationId xmlns:a16="http://schemas.microsoft.com/office/drawing/2014/main" id="{66F26160-804A-4EEF-8A41-A4A4588D7AD4}"/>
+                <a16:creationId xmlns:a16="http://schemas.microsoft.com/office/drawing/2014/main" id="{D9152811-2242-4476-B870-A8F7854715E2}"/>
               </a:ext>
             </a:extLst>
           </p:cNvPr>
@@ -41783,7 +41783,7 @@
           <p:cNvPr id="51" name="">
             <a:extLst xmlns:a="http://schemas.openxmlformats.org/drawingml/2006/main">
               <a:ext uri="{FF2B5EF4-FFF2-40B4-BE49-F238E27FC236}">
-                <a16:creationId xmlns:a16="http://schemas.microsoft.com/office/drawing/2014/main" id="{1324E928-A625-4239-97A2-C123D66F0ECC}"/>
+                <a16:creationId xmlns:a16="http://schemas.microsoft.com/office/drawing/2014/main" id="{B2012260-7D4B-4C3E-BCE4-913EE0A92F1B}"/>
               </a:ext>
             </a:extLst>
           </p:cNvPr>
@@ -41814,7 +41814,7 @@
           <p:cNvPr id="52" name="">
             <a:extLst xmlns:a="http://schemas.openxmlformats.org/drawingml/2006/main">
               <a:ext uri="{FF2B5EF4-FFF2-40B4-BE49-F238E27FC236}">
-                <a16:creationId xmlns:a16="http://schemas.microsoft.com/office/drawing/2014/main" id="{4CEC4A9F-DA90-4F04-A133-E5DE2DC9C50B}"/>
+                <a16:creationId xmlns:a16="http://schemas.microsoft.com/office/drawing/2014/main" id="{66C57987-9D3E-40BA-8BDB-CD74E1B23C84}"/>
               </a:ext>
             </a:extLst>
           </p:cNvPr>
@@ -41866,7 +41866,7 @@
           <p:cNvPr id="53" name="">
             <a:extLst xmlns:a="http://schemas.openxmlformats.org/drawingml/2006/main">
               <a:ext uri="{FF2B5EF4-FFF2-40B4-BE49-F238E27FC236}">
-                <a16:creationId xmlns:a16="http://schemas.microsoft.com/office/drawing/2014/main" id="{3240B90D-596F-49FE-AFCB-87CA03256588}"/>
+                <a16:creationId xmlns:a16="http://schemas.microsoft.com/office/drawing/2014/main" id="{DCFA927C-20FC-4214-B5CA-3CAB8131FDA4}"/>
               </a:ext>
             </a:extLst>
           </p:cNvPr>
@@ -41918,7 +41918,7 @@
           <p:cNvPr id="54" name="">
             <a:extLst xmlns:a="http://schemas.openxmlformats.org/drawingml/2006/main">
               <a:ext uri="{FF2B5EF4-FFF2-40B4-BE49-F238E27FC236}">
-                <a16:creationId xmlns:a16="http://schemas.microsoft.com/office/drawing/2014/main" id="{069AE6BC-8AED-4737-A7BD-DDAC0C97D7E0}"/>
+                <a16:creationId xmlns:a16="http://schemas.microsoft.com/office/drawing/2014/main" id="{12D09A15-BD10-41F3-B411-0C0B3F6BA5B9}"/>
               </a:ext>
             </a:extLst>
           </p:cNvPr>
@@ -41970,7 +41970,7 @@
           <p:cNvPr id="55" name="">
             <a:extLst xmlns:a="http://schemas.openxmlformats.org/drawingml/2006/main">
               <a:ext uri="{FF2B5EF4-FFF2-40B4-BE49-F238E27FC236}">
-                <a16:creationId xmlns:a16="http://schemas.microsoft.com/office/drawing/2014/main" id="{168D1F1E-A4F4-4B09-B725-CE1612679F66}"/>
+                <a16:creationId xmlns:a16="http://schemas.microsoft.com/office/drawing/2014/main" id="{8793B85D-7569-485A-9664-B89C5EB2C96A}"/>
               </a:ext>
             </a:extLst>
           </p:cNvPr>
@@ -42022,7 +42022,7 @@
           <p:cNvPr id="56" name="">
             <a:extLst xmlns:a="http://schemas.openxmlformats.org/drawingml/2006/main">
               <a:ext uri="{FF2B5EF4-FFF2-40B4-BE49-F238E27FC236}">
-                <a16:creationId xmlns:a16="http://schemas.microsoft.com/office/drawing/2014/main" id="{814B5ADB-5709-4108-A7CB-3253791EFC6D}"/>
+                <a16:creationId xmlns:a16="http://schemas.microsoft.com/office/drawing/2014/main" id="{F53B78D9-C1D7-43A6-9CBE-39CE54606391}"/>
               </a:ext>
             </a:extLst>
           </p:cNvPr>
@@ -42074,7 +42074,7 @@
           <p:cNvPr id="57" name="">
             <a:extLst xmlns:a="http://schemas.openxmlformats.org/drawingml/2006/main">
               <a:ext uri="{FF2B5EF4-FFF2-40B4-BE49-F238E27FC236}">
-                <a16:creationId xmlns:a16="http://schemas.microsoft.com/office/drawing/2014/main" id="{6E9CA75A-0196-4A7E-94E3-19EEB0A5ACD9}"/>
+                <a16:creationId xmlns:a16="http://schemas.microsoft.com/office/drawing/2014/main" id="{03409E0B-40BF-4C54-A9EC-3096D948CE10}"/>
               </a:ext>
             </a:extLst>
           </p:cNvPr>
@@ -42105,7 +42105,7 @@
           <p:cNvPr id="58" name="">
             <a:extLst xmlns:a="http://schemas.openxmlformats.org/drawingml/2006/main">
               <a:ext uri="{FF2B5EF4-FFF2-40B4-BE49-F238E27FC236}">
-                <a16:creationId xmlns:a16="http://schemas.microsoft.com/office/drawing/2014/main" id="{C991684A-3045-473E-9EFF-F7FAE923AF2F}"/>
+                <a16:creationId xmlns:a16="http://schemas.microsoft.com/office/drawing/2014/main" id="{94EDC121-48DB-4405-9A5C-96D36EE4096E}"/>
               </a:ext>
             </a:extLst>
           </p:cNvPr>
@@ -42157,7 +42157,7 @@
           <p:cNvPr id="59" name="">
             <a:extLst xmlns:a="http://schemas.openxmlformats.org/drawingml/2006/main">
               <a:ext uri="{FF2B5EF4-FFF2-40B4-BE49-F238E27FC236}">
-                <a16:creationId xmlns:a16="http://schemas.microsoft.com/office/drawing/2014/main" id="{19FE9041-6D59-413C-A646-B75869DD80DB}"/>
+                <a16:creationId xmlns:a16="http://schemas.microsoft.com/office/drawing/2014/main" id="{1B8F9452-7DA2-4E04-9D0D-3E9921A8B03D}"/>
               </a:ext>
             </a:extLst>
           </p:cNvPr>
@@ -42209,7 +42209,7 @@
           <p:cNvPr id="60" name="">
             <a:extLst xmlns:a="http://schemas.openxmlformats.org/drawingml/2006/main">
               <a:ext uri="{FF2B5EF4-FFF2-40B4-BE49-F238E27FC236}">
-                <a16:creationId xmlns:a16="http://schemas.microsoft.com/office/drawing/2014/main" id="{CF10B6FE-8BCE-47B9-8DED-A29992760B61}"/>
+                <a16:creationId xmlns:a16="http://schemas.microsoft.com/office/drawing/2014/main" id="{402B8519-C1BA-4A8F-BD32-628F4B11E7A0}"/>
               </a:ext>
             </a:extLst>
           </p:cNvPr>
@@ -42261,7 +42261,7 @@
           <p:cNvPr id="61" name="">
             <a:extLst xmlns:a="http://schemas.openxmlformats.org/drawingml/2006/main">
               <a:ext uri="{FF2B5EF4-FFF2-40B4-BE49-F238E27FC236}">
-                <a16:creationId xmlns:a16="http://schemas.microsoft.com/office/drawing/2014/main" id="{57893DAC-6E30-4D0A-B1DB-6133C28A25D4}"/>
+                <a16:creationId xmlns:a16="http://schemas.microsoft.com/office/drawing/2014/main" id="{F0130508-D38D-4E50-928C-AA9125CED0E8}"/>
               </a:ext>
             </a:extLst>
           </p:cNvPr>
@@ -42313,7 +42313,7 @@
           <p:cNvPr id="62" name="">
             <a:extLst xmlns:a="http://schemas.openxmlformats.org/drawingml/2006/main">
               <a:ext uri="{FF2B5EF4-FFF2-40B4-BE49-F238E27FC236}">
-                <a16:creationId xmlns:a16="http://schemas.microsoft.com/office/drawing/2014/main" id="{52E0FE01-4898-4726-8E71-9C15245C6335}"/>
+                <a16:creationId xmlns:a16="http://schemas.microsoft.com/office/drawing/2014/main" id="{3B53D747-EB27-46A7-8E9A-74EF4A619B92}"/>
               </a:ext>
             </a:extLst>
           </p:cNvPr>
@@ -42365,7 +42365,7 @@
           <p:cNvPr id="63" name="">
             <a:extLst xmlns:a="http://schemas.openxmlformats.org/drawingml/2006/main">
               <a:ext uri="{FF2B5EF4-FFF2-40B4-BE49-F238E27FC236}">
-                <a16:creationId xmlns:a16="http://schemas.microsoft.com/office/drawing/2014/main" id="{6D28820D-8E8B-4081-BDEF-98CA9D2678C4}"/>
+                <a16:creationId xmlns:a16="http://schemas.microsoft.com/office/drawing/2014/main" id="{8B9AA140-272E-49E3-B748-20B60A37BF70}"/>
               </a:ext>
             </a:extLst>
           </p:cNvPr>
@@ -42396,7 +42396,7 @@
           <p:cNvPr id="64" name="">
             <a:extLst xmlns:a="http://schemas.openxmlformats.org/drawingml/2006/main">
               <a:ext uri="{FF2B5EF4-FFF2-40B4-BE49-F238E27FC236}">
-                <a16:creationId xmlns:a16="http://schemas.microsoft.com/office/drawing/2014/main" id="{D6686A60-1447-44E4-BDBD-9083C23C132A}"/>
+                <a16:creationId xmlns:a16="http://schemas.microsoft.com/office/drawing/2014/main" id="{4A244690-5740-4442-894F-F427CFC2224B}"/>
               </a:ext>
             </a:extLst>
           </p:cNvPr>
@@ -42427,7 +42427,7 @@
           <p:cNvPr id="65" name="">
             <a:extLst xmlns:a="http://schemas.openxmlformats.org/drawingml/2006/main">
               <a:ext uri="{FF2B5EF4-FFF2-40B4-BE49-F238E27FC236}">
-                <a16:creationId xmlns:a16="http://schemas.microsoft.com/office/drawing/2014/main" id="{9146694F-D039-405E-9B9A-31EA99135505}"/>
+                <a16:creationId xmlns:a16="http://schemas.microsoft.com/office/drawing/2014/main" id="{DE8B5533-ADA4-4699-8A40-7C6B98C7DC9C}"/>
               </a:ext>
             </a:extLst>
           </p:cNvPr>
@@ -42479,7 +42479,7 @@
           <p:cNvPr id="66" name="">
             <a:extLst xmlns:a="http://schemas.openxmlformats.org/drawingml/2006/main">
               <a:ext uri="{FF2B5EF4-FFF2-40B4-BE49-F238E27FC236}">
-                <a16:creationId xmlns:a16="http://schemas.microsoft.com/office/drawing/2014/main" id="{D0365DF2-F672-412B-A851-3186D4ECCECB}"/>
+                <a16:creationId xmlns:a16="http://schemas.microsoft.com/office/drawing/2014/main" id="{BE4C4DAF-B9A2-44BB-904F-CB65F92246AE}"/>
               </a:ext>
             </a:extLst>
           </p:cNvPr>
@@ -42531,7 +42531,7 @@
           <p:cNvPr id="67" name="">
             <a:extLst xmlns:a="http://schemas.openxmlformats.org/drawingml/2006/main">
               <a:ext uri="{FF2B5EF4-FFF2-40B4-BE49-F238E27FC236}">
-                <a16:creationId xmlns:a16="http://schemas.microsoft.com/office/drawing/2014/main" id="{9367F782-EB9D-4EFA-8F5A-9D1E9E0A2F8E}"/>
+                <a16:creationId xmlns:a16="http://schemas.microsoft.com/office/drawing/2014/main" id="{64E6E2A2-5D46-42E3-BA27-E98FCFB05463}"/>
               </a:ext>
             </a:extLst>
           </p:cNvPr>
@@ -42583,7 +42583,7 @@
           <p:cNvPr id="68" name="">
             <a:extLst xmlns:a="http://schemas.openxmlformats.org/drawingml/2006/main">
               <a:ext uri="{FF2B5EF4-FFF2-40B4-BE49-F238E27FC236}">
-                <a16:creationId xmlns:a16="http://schemas.microsoft.com/office/drawing/2014/main" id="{1C3D4E73-DE08-4165-A26C-5CF30F27F311}"/>
+                <a16:creationId xmlns:a16="http://schemas.microsoft.com/office/drawing/2014/main" id="{4C03E7CF-D3F2-400A-A400-7D3DDAF9A54D}"/>
               </a:ext>
             </a:extLst>
           </p:cNvPr>
@@ -42635,7 +42635,7 @@
           <p:cNvPr id="69" name="">
             <a:extLst xmlns:a="http://schemas.openxmlformats.org/drawingml/2006/main">
               <a:ext uri="{FF2B5EF4-FFF2-40B4-BE49-F238E27FC236}">
-                <a16:creationId xmlns:a16="http://schemas.microsoft.com/office/drawing/2014/main" id="{24EE112C-1869-405E-B237-C5CE39B6F2F5}"/>
+                <a16:creationId xmlns:a16="http://schemas.microsoft.com/office/drawing/2014/main" id="{C3CE5175-C869-4BBC-9420-5E3FF05371BE}"/>
               </a:ext>
             </a:extLst>
           </p:cNvPr>
@@ -42687,7 +42687,7 @@
           <p:cNvPr id="70" name="">
             <a:extLst xmlns:a="http://schemas.openxmlformats.org/drawingml/2006/main">
               <a:ext uri="{FF2B5EF4-FFF2-40B4-BE49-F238E27FC236}">
-                <a16:creationId xmlns:a16="http://schemas.microsoft.com/office/drawing/2014/main" id="{E91ACBAF-66C1-4CC0-B318-5CFA15A88EF9}"/>
+                <a16:creationId xmlns:a16="http://schemas.microsoft.com/office/drawing/2014/main" id="{7E5D7A39-057E-446D-8C16-6F22EB1C9CB2}"/>
               </a:ext>
             </a:extLst>
           </p:cNvPr>
@@ -42718,7 +42718,7 @@
           <p:cNvPr id="71" name="">
             <a:extLst xmlns:a="http://schemas.openxmlformats.org/drawingml/2006/main">
               <a:ext uri="{FF2B5EF4-FFF2-40B4-BE49-F238E27FC236}">
-                <a16:creationId xmlns:a16="http://schemas.microsoft.com/office/drawing/2014/main" id="{C6C63C2C-DDF6-4355-91FA-BEDF0F7DA922}"/>
+                <a16:creationId xmlns:a16="http://schemas.microsoft.com/office/drawing/2014/main" id="{17DFAD87-2909-4BF5-934B-2DA8AEC824F3}"/>
               </a:ext>
             </a:extLst>
           </p:cNvPr>
@@ -42770,7 +42770,7 @@
           <p:cNvPr id="72" name="">
             <a:extLst xmlns:a="http://schemas.openxmlformats.org/drawingml/2006/main">
               <a:ext uri="{FF2B5EF4-FFF2-40B4-BE49-F238E27FC236}">
-                <a16:creationId xmlns:a16="http://schemas.microsoft.com/office/drawing/2014/main" id="{6A33C99C-EF3B-4FE3-BFC4-AF013E82EF56}"/>
+                <a16:creationId xmlns:a16="http://schemas.microsoft.com/office/drawing/2014/main" id="{8DAE3CBE-22F8-4B13-878D-1001A78C1C55}"/>
               </a:ext>
             </a:extLst>
           </p:cNvPr>
@@ -42822,7 +42822,7 @@
           <p:cNvPr id="73" name="">
             <a:extLst xmlns:a="http://schemas.openxmlformats.org/drawingml/2006/main">
               <a:ext uri="{FF2B5EF4-FFF2-40B4-BE49-F238E27FC236}">
-                <a16:creationId xmlns:a16="http://schemas.microsoft.com/office/drawing/2014/main" id="{B4156437-6B9B-43DE-B6E1-58761B7CF5AB}"/>
+                <a16:creationId xmlns:a16="http://schemas.microsoft.com/office/drawing/2014/main" id="{B1A25FF8-3AAA-4B53-8544-B858632F5AA8}"/>
               </a:ext>
             </a:extLst>
           </p:cNvPr>
@@ -42874,7 +42874,7 @@
           <p:cNvPr id="74" name="">
             <a:extLst xmlns:a="http://schemas.openxmlformats.org/drawingml/2006/main">
               <a:ext uri="{FF2B5EF4-FFF2-40B4-BE49-F238E27FC236}">
-                <a16:creationId xmlns:a16="http://schemas.microsoft.com/office/drawing/2014/main" id="{CA29B72E-5F51-40D5-91AF-5997901ED645}"/>
+                <a16:creationId xmlns:a16="http://schemas.microsoft.com/office/drawing/2014/main" id="{1527068E-7A79-4093-B449-275AF3E8813C}"/>
               </a:ext>
             </a:extLst>
           </p:cNvPr>
@@ -42926,7 +42926,7 @@
           <p:cNvPr id="75" name="">
             <a:extLst xmlns:a="http://schemas.openxmlformats.org/drawingml/2006/main">
               <a:ext uri="{FF2B5EF4-FFF2-40B4-BE49-F238E27FC236}">
-                <a16:creationId xmlns:a16="http://schemas.microsoft.com/office/drawing/2014/main" id="{DED332B4-2DCA-4451-8858-F1570602B133}"/>
+                <a16:creationId xmlns:a16="http://schemas.microsoft.com/office/drawing/2014/main" id="{893A19A4-5CA9-4F32-8A07-C5DEC63F029D}"/>
               </a:ext>
             </a:extLst>
           </p:cNvPr>
@@ -42978,7 +42978,7 @@
           <p:cNvPr id="76" name="">
             <a:extLst xmlns:a="http://schemas.openxmlformats.org/drawingml/2006/main">
               <a:ext uri="{FF2B5EF4-FFF2-40B4-BE49-F238E27FC236}">
-                <a16:creationId xmlns:a16="http://schemas.microsoft.com/office/drawing/2014/main" id="{C9790EDE-9572-4A60-9390-AB2CD44FD4ED}"/>
+                <a16:creationId xmlns:a16="http://schemas.microsoft.com/office/drawing/2014/main" id="{D1036751-9017-4486-9CF6-260403323A70}"/>
               </a:ext>
             </a:extLst>
           </p:cNvPr>
@@ -43009,7 +43009,7 @@
           <p:cNvPr id="77" name="">
             <a:extLst xmlns:a="http://schemas.openxmlformats.org/drawingml/2006/main">
               <a:ext uri="{FF2B5EF4-FFF2-40B4-BE49-F238E27FC236}">
-                <a16:creationId xmlns:a16="http://schemas.microsoft.com/office/drawing/2014/main" id="{AB657A49-3649-4E16-960E-5EAC2A49A9F5}"/>
+                <a16:creationId xmlns:a16="http://schemas.microsoft.com/office/drawing/2014/main" id="{D4C6A8F8-A0F4-4B08-8EDA-A58869718B85}"/>
               </a:ext>
             </a:extLst>
           </p:cNvPr>
@@ -43040,7 +43040,7 @@
           <p:cNvPr id="78" name="">
             <a:extLst xmlns:a="http://schemas.openxmlformats.org/drawingml/2006/main">
               <a:ext uri="{FF2B5EF4-FFF2-40B4-BE49-F238E27FC236}">
-                <a16:creationId xmlns:a16="http://schemas.microsoft.com/office/drawing/2014/main" id="{A2B88FDE-833E-4E52-98BB-0ACA27054AEF}"/>
+                <a16:creationId xmlns:a16="http://schemas.microsoft.com/office/drawing/2014/main" id="{B221C623-98B4-4C4D-8552-F7247F6BA90C}"/>
               </a:ext>
             </a:extLst>
           </p:cNvPr>
@@ -43092,7 +43092,7 @@
           <p:cNvPr id="79" name="">
             <a:extLst xmlns:a="http://schemas.openxmlformats.org/drawingml/2006/main">
               <a:ext uri="{FF2B5EF4-FFF2-40B4-BE49-F238E27FC236}">
-                <a16:creationId xmlns:a16="http://schemas.microsoft.com/office/drawing/2014/main" id="{C99CCC30-F3EF-4A5D-9753-18D4BE9EAB28}"/>
+                <a16:creationId xmlns:a16="http://schemas.microsoft.com/office/drawing/2014/main" id="{4ADFD7C4-7A55-4889-84AE-48AA9A329DC2}"/>
               </a:ext>
             </a:extLst>
           </p:cNvPr>
@@ -43144,7 +43144,7 @@
           <p:cNvPr id="80" name="">
             <a:extLst xmlns:a="http://schemas.openxmlformats.org/drawingml/2006/main">
               <a:ext uri="{FF2B5EF4-FFF2-40B4-BE49-F238E27FC236}">
-                <a16:creationId xmlns:a16="http://schemas.microsoft.com/office/drawing/2014/main" id="{EB6F75BB-1D4B-4894-AAEB-4CC7FEF60FE4}"/>
+                <a16:creationId xmlns:a16="http://schemas.microsoft.com/office/drawing/2014/main" id="{83BA07AA-8243-4851-B843-AB028D929EB3}"/>
               </a:ext>
             </a:extLst>
           </p:cNvPr>
@@ -43196,7 +43196,7 @@
           <p:cNvPr id="81" name="">
             <a:extLst xmlns:a="http://schemas.openxmlformats.org/drawingml/2006/main">
               <a:ext uri="{FF2B5EF4-FFF2-40B4-BE49-F238E27FC236}">
-                <a16:creationId xmlns:a16="http://schemas.microsoft.com/office/drawing/2014/main" id="{0ED2E36A-DA85-4689-ACDA-94580370FB96}"/>
+                <a16:creationId xmlns:a16="http://schemas.microsoft.com/office/drawing/2014/main" id="{6220DBAC-DF33-4957-9179-99EFEF7FC26B}"/>
               </a:ext>
             </a:extLst>
           </p:cNvPr>
@@ -43248,7 +43248,7 @@
           <p:cNvPr id="82" name="">
             <a:extLst xmlns:a="http://schemas.openxmlformats.org/drawingml/2006/main">
               <a:ext uri="{FF2B5EF4-FFF2-40B4-BE49-F238E27FC236}">
-                <a16:creationId xmlns:a16="http://schemas.microsoft.com/office/drawing/2014/main" id="{D1C5594F-410A-48C7-88A9-98953D44D718}"/>
+                <a16:creationId xmlns:a16="http://schemas.microsoft.com/office/drawing/2014/main" id="{1BAAA7D4-CAD4-4270-B3F0-980EDA4CDEB9}"/>
               </a:ext>
             </a:extLst>
           </p:cNvPr>
@@ -43300,7 +43300,7 @@
           <p:cNvPr id="83" name="">
             <a:extLst xmlns:a="http://schemas.openxmlformats.org/drawingml/2006/main">
               <a:ext uri="{FF2B5EF4-FFF2-40B4-BE49-F238E27FC236}">
-                <a16:creationId xmlns:a16="http://schemas.microsoft.com/office/drawing/2014/main" id="{4B0A11F6-6112-4B9A-8227-2F9E9700543D}"/>
+                <a16:creationId xmlns:a16="http://schemas.microsoft.com/office/drawing/2014/main" id="{382C4644-E8A2-4A7E-8E59-DEE1E95FE3D3}"/>
               </a:ext>
             </a:extLst>
           </p:cNvPr>
@@ -43331,7 +43331,7 @@
           <p:cNvPr id="84" name="">
             <a:extLst xmlns:a="http://schemas.openxmlformats.org/drawingml/2006/main">
               <a:ext uri="{FF2B5EF4-FFF2-40B4-BE49-F238E27FC236}">
-                <a16:creationId xmlns:a16="http://schemas.microsoft.com/office/drawing/2014/main" id="{5821A22F-CE05-486F-B88E-3E15C570505E}"/>
+                <a16:creationId xmlns:a16="http://schemas.microsoft.com/office/drawing/2014/main" id="{0E0599AB-9351-4E19-A3FC-3EB4E9A0F889}"/>
               </a:ext>
             </a:extLst>
           </p:cNvPr>
@@ -43383,7 +43383,7 @@
           <p:cNvPr id="85" name="">
             <a:extLst xmlns:a="http://schemas.openxmlformats.org/drawingml/2006/main">
               <a:ext uri="{FF2B5EF4-FFF2-40B4-BE49-F238E27FC236}">
-                <a16:creationId xmlns:a16="http://schemas.microsoft.com/office/drawing/2014/main" id="{55052CFE-C997-4A36-AC7D-8441309663D3}"/>
+                <a16:creationId xmlns:a16="http://schemas.microsoft.com/office/drawing/2014/main" id="{2375D6A9-CCAB-47EC-A7FE-AE163857FA90}"/>
               </a:ext>
             </a:extLst>
           </p:cNvPr>
@@ -43435,7 +43435,7 @@
           <p:cNvPr id="86" name="">
             <a:extLst xmlns:a="http://schemas.openxmlformats.org/drawingml/2006/main">
               <a:ext uri="{FF2B5EF4-FFF2-40B4-BE49-F238E27FC236}">
-                <a16:creationId xmlns:a16="http://schemas.microsoft.com/office/drawing/2014/main" id="{9E62ACB1-F681-4EF0-AD4E-B2C1ED345C5E}"/>
+                <a16:creationId xmlns:a16="http://schemas.microsoft.com/office/drawing/2014/main" id="{3932C7E9-4938-4310-8816-AF694E034C67}"/>
               </a:ext>
             </a:extLst>
           </p:cNvPr>
@@ -43487,7 +43487,7 @@
           <p:cNvPr id="87" name="">
             <a:extLst xmlns:a="http://schemas.openxmlformats.org/drawingml/2006/main">
               <a:ext uri="{FF2B5EF4-FFF2-40B4-BE49-F238E27FC236}">
-                <a16:creationId xmlns:a16="http://schemas.microsoft.com/office/drawing/2014/main" id="{3118E47A-AE29-4CD9-ABE2-0B1CA29B184F}"/>
+                <a16:creationId xmlns:a16="http://schemas.microsoft.com/office/drawing/2014/main" id="{4D8694F6-1D0B-41E4-A3B8-FB96FDBFC26A}"/>
               </a:ext>
             </a:extLst>
           </p:cNvPr>
@@ -43539,7 +43539,7 @@
           <p:cNvPr id="88" name="">
             <a:extLst xmlns:a="http://schemas.openxmlformats.org/drawingml/2006/main">
               <a:ext uri="{FF2B5EF4-FFF2-40B4-BE49-F238E27FC236}">
-                <a16:creationId xmlns:a16="http://schemas.microsoft.com/office/drawing/2014/main" id="{68062CC1-DCFE-448C-B001-693D11083FA0}"/>
+                <a16:creationId xmlns:a16="http://schemas.microsoft.com/office/drawing/2014/main" id="{4825BBAB-30A1-483B-8207-877162CDE944}"/>
               </a:ext>
             </a:extLst>
           </p:cNvPr>
@@ -43591,7 +43591,7 @@
           <p:cNvPr id="89" name="">
             <a:extLst xmlns:a="http://schemas.openxmlformats.org/drawingml/2006/main">
               <a:ext uri="{FF2B5EF4-FFF2-40B4-BE49-F238E27FC236}">
-                <a16:creationId xmlns:a16="http://schemas.microsoft.com/office/drawing/2014/main" id="{533A4C12-0481-49CF-882E-EC3AA2849CB3}"/>
+                <a16:creationId xmlns:a16="http://schemas.microsoft.com/office/drawing/2014/main" id="{5BBD665E-5A0F-4161-867C-B00BD52F896E}"/>
               </a:ext>
             </a:extLst>
           </p:cNvPr>
@@ -43622,7 +43622,7 @@
           <p:cNvPr id="90" name="">
             <a:extLst xmlns:a="http://schemas.openxmlformats.org/drawingml/2006/main">
               <a:ext uri="{FF2B5EF4-FFF2-40B4-BE49-F238E27FC236}">
-                <a16:creationId xmlns:a16="http://schemas.microsoft.com/office/drawing/2014/main" id="{39DC9EC2-B98A-40C3-ADA4-A2EF604C2DD5}"/>
+                <a16:creationId xmlns:a16="http://schemas.microsoft.com/office/drawing/2014/main" id="{E656F88F-27C4-4092-B639-D5ED104A2C06}"/>
               </a:ext>
             </a:extLst>
           </p:cNvPr>
@@ -43653,7 +43653,7 @@
           <p:cNvPr id="91" name="">
             <a:extLst xmlns:a="http://schemas.openxmlformats.org/drawingml/2006/main">
               <a:ext uri="{FF2B5EF4-FFF2-40B4-BE49-F238E27FC236}">
-                <a16:creationId xmlns:a16="http://schemas.microsoft.com/office/drawing/2014/main" id="{2AAF9C9F-9101-41C8-8836-56721C749105}"/>
+                <a16:creationId xmlns:a16="http://schemas.microsoft.com/office/drawing/2014/main" id="{C84A4C81-2AF8-434C-9F39-4755DA4D4023}"/>
               </a:ext>
             </a:extLst>
           </p:cNvPr>
@@ -43705,7 +43705,7 @@
           <p:cNvPr id="92" name="">
             <a:extLst xmlns:a="http://schemas.openxmlformats.org/drawingml/2006/main">
               <a:ext uri="{FF2B5EF4-FFF2-40B4-BE49-F238E27FC236}">
-                <a16:creationId xmlns:a16="http://schemas.microsoft.com/office/drawing/2014/main" id="{6E0E2CD0-7AB0-4256-ABF4-D89B459786AE}"/>
+                <a16:creationId xmlns:a16="http://schemas.microsoft.com/office/drawing/2014/main" id="{5A54F343-F358-4536-8C59-881987E8457D}"/>
               </a:ext>
             </a:extLst>
           </p:cNvPr>
@@ -43757,7 +43757,7 @@
           <p:cNvPr id="93" name="">
             <a:extLst xmlns:a="http://schemas.openxmlformats.org/drawingml/2006/main">
               <a:ext uri="{FF2B5EF4-FFF2-40B4-BE49-F238E27FC236}">
-                <a16:creationId xmlns:a16="http://schemas.microsoft.com/office/drawing/2014/main" id="{8BDA44D0-D5FA-45AC-AB52-A7AC07053FAD}"/>
+                <a16:creationId xmlns:a16="http://schemas.microsoft.com/office/drawing/2014/main" id="{FFCC7BBA-4892-46D7-91B5-4748D127EBD4}"/>
               </a:ext>
             </a:extLst>
           </p:cNvPr>
@@ -43809,7 +43809,7 @@
           <p:cNvPr id="94" name="">
             <a:extLst xmlns:a="http://schemas.openxmlformats.org/drawingml/2006/main">
               <a:ext uri="{FF2B5EF4-FFF2-40B4-BE49-F238E27FC236}">
-                <a16:creationId xmlns:a16="http://schemas.microsoft.com/office/drawing/2014/main" id="{93951EFB-E1FC-414F-9903-DDE3615E746D}"/>
+                <a16:creationId xmlns:a16="http://schemas.microsoft.com/office/drawing/2014/main" id="{DBDBB078-48F4-47BD-B541-ED9419B210CF}"/>
               </a:ext>
             </a:extLst>
           </p:cNvPr>
@@ -43861,7 +43861,7 @@
           <p:cNvPr id="95" name="">
             <a:extLst xmlns:a="http://schemas.openxmlformats.org/drawingml/2006/main">
               <a:ext uri="{FF2B5EF4-FFF2-40B4-BE49-F238E27FC236}">
-                <a16:creationId xmlns:a16="http://schemas.microsoft.com/office/drawing/2014/main" id="{8D2EE5F7-496F-419D-9BBE-03F9E6008EC4}"/>
+                <a16:creationId xmlns:a16="http://schemas.microsoft.com/office/drawing/2014/main" id="{3FD126D1-1291-446F-AAE8-45C5F1910756}"/>
               </a:ext>
             </a:extLst>
           </p:cNvPr>
@@ -43913,7 +43913,7 @@
           <p:cNvPr id="96" name="">
             <a:extLst xmlns:a="http://schemas.openxmlformats.org/drawingml/2006/main">
               <a:ext uri="{FF2B5EF4-FFF2-40B4-BE49-F238E27FC236}">
-                <a16:creationId xmlns:a16="http://schemas.microsoft.com/office/drawing/2014/main" id="{FCD4A686-E43D-474B-9551-9CAF9EC25DCF}"/>
+                <a16:creationId xmlns:a16="http://schemas.microsoft.com/office/drawing/2014/main" id="{1C3AB6B8-F46A-4776-950D-467B44975ABE}"/>
               </a:ext>
             </a:extLst>
           </p:cNvPr>
@@ -43944,7 +43944,7 @@
           <p:cNvPr id="97" name="">
             <a:extLst xmlns:a="http://schemas.openxmlformats.org/drawingml/2006/main">
               <a:ext uri="{FF2B5EF4-FFF2-40B4-BE49-F238E27FC236}">
-                <a16:creationId xmlns:a16="http://schemas.microsoft.com/office/drawing/2014/main" id="{87EC346D-7621-4874-99F7-594FAAA6691A}"/>
+                <a16:creationId xmlns:a16="http://schemas.microsoft.com/office/drawing/2014/main" id="{1DE32102-5013-43FE-980D-E92309EB7EB1}"/>
               </a:ext>
             </a:extLst>
           </p:cNvPr>
@@ -43996,7 +43996,7 @@
           <p:cNvPr id="98" name="">
             <a:extLst xmlns:a="http://schemas.openxmlformats.org/drawingml/2006/main">
               <a:ext uri="{FF2B5EF4-FFF2-40B4-BE49-F238E27FC236}">
-                <a16:creationId xmlns:a16="http://schemas.microsoft.com/office/drawing/2014/main" id="{857CA9A9-8433-4B9B-AFC9-40D30556CA9F}"/>
+                <a16:creationId xmlns:a16="http://schemas.microsoft.com/office/drawing/2014/main" id="{D9398ADA-2FC1-4CF7-8A63-618F83F05760}"/>
               </a:ext>
             </a:extLst>
           </p:cNvPr>
@@ -44048,7 +44048,7 @@
           <p:cNvPr id="99" name="">
             <a:extLst xmlns:a="http://schemas.openxmlformats.org/drawingml/2006/main">
               <a:ext uri="{FF2B5EF4-FFF2-40B4-BE49-F238E27FC236}">
-                <a16:creationId xmlns:a16="http://schemas.microsoft.com/office/drawing/2014/main" id="{518641DB-A418-4129-A761-5ACAD220A148}"/>
+                <a16:creationId xmlns:a16="http://schemas.microsoft.com/office/drawing/2014/main" id="{EC4E79F4-5580-484B-A0E9-07ADEB1E5DFE}"/>
               </a:ext>
             </a:extLst>
           </p:cNvPr>
@@ -44100,7 +44100,7 @@
           <p:cNvPr id="100" name="">
             <a:extLst xmlns:a="http://schemas.openxmlformats.org/drawingml/2006/main">
               <a:ext uri="{FF2B5EF4-FFF2-40B4-BE49-F238E27FC236}">
-                <a16:creationId xmlns:a16="http://schemas.microsoft.com/office/drawing/2014/main" id="{AAF02FCD-2F64-4C33-A0AD-61FC8CFA9682}"/>
+                <a16:creationId xmlns:a16="http://schemas.microsoft.com/office/drawing/2014/main" id="{322EAA9E-2157-4FB6-A308-CACE312FA18F}"/>
               </a:ext>
             </a:extLst>
           </p:cNvPr>
@@ -44152,7 +44152,7 @@
           <p:cNvPr id="101" name="">
             <a:extLst xmlns:a="http://schemas.openxmlformats.org/drawingml/2006/main">
               <a:ext uri="{FF2B5EF4-FFF2-40B4-BE49-F238E27FC236}">
-                <a16:creationId xmlns:a16="http://schemas.microsoft.com/office/drawing/2014/main" id="{BA84A0D4-D263-4063-BD23-DDA518275C7C}"/>
+                <a16:creationId xmlns:a16="http://schemas.microsoft.com/office/drawing/2014/main" id="{AE86B37C-2B42-433D-A8A6-1CA5881FB7AC}"/>
               </a:ext>
             </a:extLst>
           </p:cNvPr>
@@ -44202,7 +44202,7 @@
     </p:spTree>
     <p:extLst>
       <p:ext uri="{BB962C8B-B14F-4D97-AF65-F5344CB8AC3E}">
-        <p14:creationId xmlns:p14="http://schemas.microsoft.com/office/powerpoint/2010/main" val="1548799346"/>
+        <p14:creationId xmlns:p14="http://schemas.microsoft.com/office/powerpoint/2010/main" val="1024014528"/>
       </p:ext>
     </p:extLst>
   </p:cSld>

--- a/.preview/pptx-claro/deck.pptx
+++ b/.preview/pptx-claro/deck.pptx
@@ -2,27 +2,27 @@
 <file path=ppt/presentation.xml><?xml version="1.0" encoding="utf-8"?>
 <p:presentation xmlns:p="http://schemas.openxmlformats.org/presentationml/2006/main">
   <p:sldMasterIdLst>
-    <p:sldMasterId xmlns:r="http://schemas.openxmlformats.org/officeDocument/2006/relationships" id="2147483648" r:id="R8be4fbcc6e3f4520"/>
+    <p:sldMasterId xmlns:r="http://schemas.openxmlformats.org/officeDocument/2006/relationships" id="2147483648" r:id="R2e9b35ff1e294435"/>
   </p:sldMasterIdLst>
   <p:notesMasterIdLst>
-    <p:notesMasterId xmlns:r="http://schemas.openxmlformats.org/officeDocument/2006/relationships" r:id="Rac3605fb06c3448e"/>
+    <p:notesMasterId xmlns:r="http://schemas.openxmlformats.org/officeDocument/2006/relationships" r:id="R0c0ed49d34fb4d39"/>
   </p:notesMasterIdLst>
   <p:sldIdLst>
-    <p:sldId xmlns:r="http://schemas.openxmlformats.org/officeDocument/2006/relationships" id="256" r:id="Rad162787f2854eaa"/>
-    <p:sldId xmlns:r="http://schemas.openxmlformats.org/officeDocument/2006/relationships" id="257" r:id="R7b2cd728da7646ad"/>
-    <p:sldId xmlns:r="http://schemas.openxmlformats.org/officeDocument/2006/relationships" id="258" r:id="Ra5127260120f4c21"/>
-    <p:sldId xmlns:r="http://schemas.openxmlformats.org/officeDocument/2006/relationships" id="259" r:id="Rfd0b3c5dd6bc480f"/>
-    <p:sldId xmlns:r="http://schemas.openxmlformats.org/officeDocument/2006/relationships" id="260" r:id="R9b806fa1a28e48ad"/>
-    <p:sldId xmlns:r="http://schemas.openxmlformats.org/officeDocument/2006/relationships" id="261" r:id="Rc5d5cb9103594ae8"/>
-    <p:sldId xmlns:r="http://schemas.openxmlformats.org/officeDocument/2006/relationships" id="262" r:id="R83cf517e9be54023"/>
-    <p:sldId xmlns:r="http://schemas.openxmlformats.org/officeDocument/2006/relationships" id="263" r:id="R8fa3d878a1ac4c81"/>
-    <p:sldId xmlns:r="http://schemas.openxmlformats.org/officeDocument/2006/relationships" id="264" r:id="R3b5ec1dc7d6242e2"/>
-    <p:sldId xmlns:r="http://schemas.openxmlformats.org/officeDocument/2006/relationships" id="265" r:id="R272111ec9821431b"/>
-    <p:sldId xmlns:r="http://schemas.openxmlformats.org/officeDocument/2006/relationships" id="266" r:id="Rc7841c8dc1f648ef"/>
-    <p:sldId xmlns:r="http://schemas.openxmlformats.org/officeDocument/2006/relationships" id="267" r:id="R0d7d4a6a7f4e4f8b"/>
-    <p:sldId xmlns:r="http://schemas.openxmlformats.org/officeDocument/2006/relationships" id="268" r:id="R7b09981cf1904eb0"/>
-    <p:sldId xmlns:r="http://schemas.openxmlformats.org/officeDocument/2006/relationships" id="269" r:id="R610ce29488d64650"/>
-    <p:sldId xmlns:r="http://schemas.openxmlformats.org/officeDocument/2006/relationships" id="270" r:id="R52492277fdef4365"/>
+    <p:sldId xmlns:r="http://schemas.openxmlformats.org/officeDocument/2006/relationships" id="256" r:id="Rb3c795f7c1a743e3"/>
+    <p:sldId xmlns:r="http://schemas.openxmlformats.org/officeDocument/2006/relationships" id="257" r:id="R4447d1972cb64f99"/>
+    <p:sldId xmlns:r="http://schemas.openxmlformats.org/officeDocument/2006/relationships" id="258" r:id="R86ba29eac0314966"/>
+    <p:sldId xmlns:r="http://schemas.openxmlformats.org/officeDocument/2006/relationships" id="259" r:id="Rd79db976aad94270"/>
+    <p:sldId xmlns:r="http://schemas.openxmlformats.org/officeDocument/2006/relationships" id="260" r:id="R988c2322ee01419b"/>
+    <p:sldId xmlns:r="http://schemas.openxmlformats.org/officeDocument/2006/relationships" id="261" r:id="Rea126b6105964041"/>
+    <p:sldId xmlns:r="http://schemas.openxmlformats.org/officeDocument/2006/relationships" id="262" r:id="Race3c14dde9a47d7"/>
+    <p:sldId xmlns:r="http://schemas.openxmlformats.org/officeDocument/2006/relationships" id="263" r:id="Rc10422a5a3864345"/>
+    <p:sldId xmlns:r="http://schemas.openxmlformats.org/officeDocument/2006/relationships" id="264" r:id="Rc6398f9ac9fc495c"/>
+    <p:sldId xmlns:r="http://schemas.openxmlformats.org/officeDocument/2006/relationships" id="265" r:id="R829e82aae4ee4623"/>
+    <p:sldId xmlns:r="http://schemas.openxmlformats.org/officeDocument/2006/relationships" id="266" r:id="R55844aced19e4c5b"/>
+    <p:sldId xmlns:r="http://schemas.openxmlformats.org/officeDocument/2006/relationships" id="267" r:id="Ra0a29ca55a5b4f42"/>
+    <p:sldId xmlns:r="http://schemas.openxmlformats.org/officeDocument/2006/relationships" id="268" r:id="Re6f17fc5819c4d23"/>
+    <p:sldId xmlns:r="http://schemas.openxmlformats.org/officeDocument/2006/relationships" id="269" r:id="R7bb595b572f24987"/>
+    <p:sldId xmlns:r="http://schemas.openxmlformats.org/officeDocument/2006/relationships" id="270" r:id="R24d5412dfef14466"/>
   </p:sldIdLst>
   <p:sldSz cx="12192000" cy="6858000"/>
   <p:notesSz cx="6858000" cy="9144000"/>
@@ -1879,7 +1879,7 @@
   </p:cSld>
   <p:clrMap bg1="lt1" tx1="dk1" bg2="lt2" tx2="dk2" accent1="accent1" accent2="accent2" accent3="accent3" accent4="accent4" accent5="accent5" accent6="accent6" hlink="hlink" folHlink="folHlink"/>
   <p:sldLayoutIdLst>
-    <p:sldLayoutId xmlns:r="http://schemas.openxmlformats.org/officeDocument/2006/relationships" id="2147483649" r:id="R62596e22a5b142c5"/>
+    <p:sldLayoutId xmlns:r="http://schemas.openxmlformats.org/officeDocument/2006/relationships" id="2147483649" r:id="Rb9771b5626bd45d5"/>
   </p:sldLayoutIdLst>
   <p:txStyles>
     <p:titleStyle>
@@ -2430,7 +2430,7 @@
           <p:cNvPr id="17" name="">
             <a:extLst xmlns:a="http://schemas.openxmlformats.org/drawingml/2006/main">
               <a:ext uri="{FF2B5EF4-FFF2-40B4-BE49-F238E27FC236}">
-                <a16:creationId xmlns:a16="http://schemas.microsoft.com/office/drawing/2014/main" id="{6F04357B-C924-4FCD-BF66-380350E90527}"/>
+                <a16:creationId xmlns:a16="http://schemas.microsoft.com/office/drawing/2014/main" id="{4BA33FB2-5D5E-4E08-9DAA-0C44A69F2080}"/>
               </a:ext>
             </a:extLst>
           </p:cNvPr>
@@ -2463,7 +2463,7 @@
           <p:cNvPr id="2" name="">
             <a:extLst xmlns:a="http://schemas.openxmlformats.org/drawingml/2006/main">
               <a:ext uri="{FF2B5EF4-FFF2-40B4-BE49-F238E27FC236}">
-                <a16:creationId xmlns:a16="http://schemas.microsoft.com/office/drawing/2014/main" id="{4ABF7FFD-C61D-4CD4-B453-0D46FE7D7461}"/>
+                <a16:creationId xmlns:a16="http://schemas.microsoft.com/office/drawing/2014/main" id="{A8DD4DA6-20CA-4CF1-AA0A-B0EA2B14F6C0}"/>
               </a:ext>
             </a:extLst>
           </p:cNvPr>
@@ -2494,7 +2494,7 @@
           <p:cNvPr id="3" name="">
             <a:extLst xmlns:a="http://schemas.openxmlformats.org/drawingml/2006/main">
               <a:ext uri="{FF2B5EF4-FFF2-40B4-BE49-F238E27FC236}">
-                <a16:creationId xmlns:a16="http://schemas.microsoft.com/office/drawing/2014/main" id="{30EDB489-194F-40C1-8FCE-1B2022674BBB}"/>
+                <a16:creationId xmlns:a16="http://schemas.microsoft.com/office/drawing/2014/main" id="{2F18B327-AF18-4A0A-963D-8000F4242550}"/>
               </a:ext>
             </a:extLst>
           </p:cNvPr>
@@ -2529,7 +2529,7 @@
           <p:nvPr/>
         </p:nvPicPr>
         <p:blipFill>
-          <a:blip xmlns:r="http://schemas.openxmlformats.org/officeDocument/2006/relationships" xmlns:a="http://schemas.openxmlformats.org/drawingml/2006/main" r:embed="R407d29352f3f4545"/>
+          <a:blip xmlns:r="http://schemas.openxmlformats.org/officeDocument/2006/relationships" xmlns:a="http://schemas.openxmlformats.org/drawingml/2006/main" r:embed="R14b0681ffc174193"/>
           <a:stretch xmlns:a="http://schemas.openxmlformats.org/drawingml/2006/main"/>
         </p:blipFill>
         <p:spPr>
@@ -2547,7 +2547,7 @@
           <p:cNvPr id="5" name="">
             <a:extLst xmlns:a="http://schemas.openxmlformats.org/drawingml/2006/main">
               <a:ext uri="{FF2B5EF4-FFF2-40B4-BE49-F238E27FC236}">
-                <a16:creationId xmlns:a16="http://schemas.microsoft.com/office/drawing/2014/main" id="{5F1CCC55-0E09-4DFF-930A-6C95E5D2FE38}"/>
+                <a16:creationId xmlns:a16="http://schemas.microsoft.com/office/drawing/2014/main" id="{0F2522F4-6965-45C6-83B0-C8C0F64AAF90}"/>
               </a:ext>
             </a:extLst>
           </p:cNvPr>
@@ -2599,7 +2599,7 @@
           <p:cNvPr id="6" name="">
             <a:extLst xmlns:a="http://schemas.openxmlformats.org/drawingml/2006/main">
               <a:ext uri="{FF2B5EF4-FFF2-40B4-BE49-F238E27FC236}">
-                <a16:creationId xmlns:a16="http://schemas.microsoft.com/office/drawing/2014/main" id="{25552AF8-C584-4022-B82A-5F839394008F}"/>
+                <a16:creationId xmlns:a16="http://schemas.microsoft.com/office/drawing/2014/main" id="{747133A9-ECB0-4CB4-9806-DE4CBA19A6DC}"/>
               </a:ext>
             </a:extLst>
           </p:cNvPr>
@@ -2655,7 +2655,7 @@
           <p:nvPr/>
         </p:nvPicPr>
         <p:blipFill>
-          <a:blip xmlns:r="http://schemas.openxmlformats.org/officeDocument/2006/relationships" xmlns:a="http://schemas.openxmlformats.org/drawingml/2006/main" r:embed="Rc2a36c0ef9064e81"/>
+          <a:blip xmlns:r="http://schemas.openxmlformats.org/officeDocument/2006/relationships" xmlns:a="http://schemas.openxmlformats.org/drawingml/2006/main" r:embed="R4d9ca53e78cb4f71"/>
           <a:stretch xmlns:a="http://schemas.openxmlformats.org/drawingml/2006/main"/>
         </p:blipFill>
         <p:spPr>
@@ -2673,7 +2673,7 @@
           <p:cNvPr id="8" name="">
             <a:extLst xmlns:a="http://schemas.openxmlformats.org/drawingml/2006/main">
               <a:ext uri="{FF2B5EF4-FFF2-40B4-BE49-F238E27FC236}">
-                <a16:creationId xmlns:a16="http://schemas.microsoft.com/office/drawing/2014/main" id="{A704604D-1F9B-485D-8534-8245C28DD5AA}"/>
+                <a16:creationId xmlns:a16="http://schemas.microsoft.com/office/drawing/2014/main" id="{E321D7E5-BD4B-406A-A14B-24802B3AF7FE}"/>
               </a:ext>
             </a:extLst>
           </p:cNvPr>
@@ -2706,7 +2706,7 @@
           <p:cNvPr id="9" name="">
             <a:extLst xmlns:a="http://schemas.openxmlformats.org/drawingml/2006/main">
               <a:ext uri="{FF2B5EF4-FFF2-40B4-BE49-F238E27FC236}">
-                <a16:creationId xmlns:a16="http://schemas.microsoft.com/office/drawing/2014/main" id="{28217AF1-F08F-44F7-85FF-AFB0A87CB3A5}"/>
+                <a16:creationId xmlns:a16="http://schemas.microsoft.com/office/drawing/2014/main" id="{F7BCBC83-B5EE-4C84-839C-CF636C26CCB4}"/>
               </a:ext>
             </a:extLst>
           </p:cNvPr>
@@ -2758,7 +2758,7 @@
           <p:cNvPr id="10" name="">
             <a:extLst xmlns:a="http://schemas.openxmlformats.org/drawingml/2006/main">
               <a:ext uri="{FF2B5EF4-FFF2-40B4-BE49-F238E27FC236}">
-                <a16:creationId xmlns:a16="http://schemas.microsoft.com/office/drawing/2014/main" id="{CC18D608-2EDA-4DAC-BC6A-911F37C23AF0}"/>
+                <a16:creationId xmlns:a16="http://schemas.microsoft.com/office/drawing/2014/main" id="{2CC61D81-7ACE-4A48-9389-71B7F11CA272}"/>
               </a:ext>
             </a:extLst>
           </p:cNvPr>
@@ -2810,7 +2810,7 @@
           <p:cNvPr id="11" name="">
             <a:extLst xmlns:a="http://schemas.openxmlformats.org/drawingml/2006/main">
               <a:ext uri="{FF2B5EF4-FFF2-40B4-BE49-F238E27FC236}">
-                <a16:creationId xmlns:a16="http://schemas.microsoft.com/office/drawing/2014/main" id="{5520739D-23F7-4D6D-B3EA-22585415FCF4}"/>
+                <a16:creationId xmlns:a16="http://schemas.microsoft.com/office/drawing/2014/main" id="{A35FD0B4-59B1-4987-A18B-753A632AD09B}"/>
               </a:ext>
             </a:extLst>
           </p:cNvPr>
@@ -2862,7 +2862,7 @@
           <p:cNvPr id="12" name="">
             <a:extLst xmlns:a="http://schemas.openxmlformats.org/drawingml/2006/main">
               <a:ext uri="{FF2B5EF4-FFF2-40B4-BE49-F238E27FC236}">
-                <a16:creationId xmlns:a16="http://schemas.microsoft.com/office/drawing/2014/main" id="{D7E1AC54-2DF5-4926-9FA5-A83B57C04085}"/>
+                <a16:creationId xmlns:a16="http://schemas.microsoft.com/office/drawing/2014/main" id="{3420EE02-5408-447B-996D-B1ECEFCD51D9}"/>
               </a:ext>
             </a:extLst>
           </p:cNvPr>
@@ -2914,7 +2914,7 @@
           <p:cNvPr id="13" name="">
             <a:extLst xmlns:a="http://schemas.openxmlformats.org/drawingml/2006/main">
               <a:ext uri="{FF2B5EF4-FFF2-40B4-BE49-F238E27FC236}">
-                <a16:creationId xmlns:a16="http://schemas.microsoft.com/office/drawing/2014/main" id="{1DFBECBF-2E09-43CB-B95E-7E65330013BC}"/>
+                <a16:creationId xmlns:a16="http://schemas.microsoft.com/office/drawing/2014/main" id="{DC9B5D40-B863-4B45-92A2-DED4BAB49F06}"/>
               </a:ext>
             </a:extLst>
           </p:cNvPr>
@@ -2966,7 +2966,7 @@
           <p:cNvPr id="14" name="">
             <a:extLst xmlns:a="http://schemas.openxmlformats.org/drawingml/2006/main">
               <a:ext uri="{FF2B5EF4-FFF2-40B4-BE49-F238E27FC236}">
-                <a16:creationId xmlns:a16="http://schemas.microsoft.com/office/drawing/2014/main" id="{DF4CC1A9-7363-44A7-9872-665C1C9CE5D1}"/>
+                <a16:creationId xmlns:a16="http://schemas.microsoft.com/office/drawing/2014/main" id="{F1053A5A-A8B4-4C03-B4C2-E50CE8DE2AE1}"/>
               </a:ext>
             </a:extLst>
           </p:cNvPr>
@@ -3018,7 +3018,7 @@
           <p:cNvPr id="15" name="">
             <a:extLst xmlns:a="http://schemas.openxmlformats.org/drawingml/2006/main">
               <a:ext uri="{FF2B5EF4-FFF2-40B4-BE49-F238E27FC236}">
-                <a16:creationId xmlns:a16="http://schemas.microsoft.com/office/drawing/2014/main" id="{EEBF39D9-8D4B-4407-B4A2-78DF9FE3ED72}"/>
+                <a16:creationId xmlns:a16="http://schemas.microsoft.com/office/drawing/2014/main" id="{C38CDBAA-1207-4AC2-B807-A9FFB50250AF}"/>
               </a:ext>
             </a:extLst>
           </p:cNvPr>
@@ -3070,7 +3070,7 @@
           <p:cNvPr id="16" name="">
             <a:extLst xmlns:a="http://schemas.openxmlformats.org/drawingml/2006/main">
               <a:ext uri="{FF2B5EF4-FFF2-40B4-BE49-F238E27FC236}">
-                <a16:creationId xmlns:a16="http://schemas.microsoft.com/office/drawing/2014/main" id="{A30EA6CD-2645-46B0-B6C4-B133A08F8042}"/>
+                <a16:creationId xmlns:a16="http://schemas.microsoft.com/office/drawing/2014/main" id="{D4D37A0C-6C55-4E56-A6A6-216A4D2FEA62}"/>
               </a:ext>
             </a:extLst>
           </p:cNvPr>
@@ -3120,7 +3120,7 @@
     </p:spTree>
     <p:extLst>
       <p:ext uri="{BB962C8B-B14F-4D97-AF65-F5344CB8AC3E}">
-        <p14:creationId xmlns:p14="http://schemas.microsoft.com/office/powerpoint/2010/main" val="295514081"/>
+        <p14:creationId xmlns:p14="http://schemas.microsoft.com/office/powerpoint/2010/main" val="489410009"/>
       </p:ext>
     </p:extLst>
   </p:cSld>
@@ -3151,7 +3151,7 @@
           <p:cNvPr id="103" name="">
             <a:extLst xmlns:a="http://schemas.openxmlformats.org/drawingml/2006/main">
               <a:ext uri="{FF2B5EF4-FFF2-40B4-BE49-F238E27FC236}">
-                <a16:creationId xmlns:a16="http://schemas.microsoft.com/office/drawing/2014/main" id="{77CEE376-0CB8-465C-88EB-E2912318C62D}"/>
+                <a16:creationId xmlns:a16="http://schemas.microsoft.com/office/drawing/2014/main" id="{E096C3E0-0111-458A-8B46-441250F396AE}"/>
               </a:ext>
             </a:extLst>
           </p:cNvPr>
@@ -3184,7 +3184,7 @@
           <p:cNvPr id="2" name="">
             <a:extLst xmlns:a="http://schemas.openxmlformats.org/drawingml/2006/main">
               <a:ext uri="{FF2B5EF4-FFF2-40B4-BE49-F238E27FC236}">
-                <a16:creationId xmlns:a16="http://schemas.microsoft.com/office/drawing/2014/main" id="{DCBED293-2D6A-401A-976C-B310C0A6B52F}"/>
+                <a16:creationId xmlns:a16="http://schemas.microsoft.com/office/drawing/2014/main" id="{E2C6D12E-BFB9-4F22-868A-095FC018A07E}"/>
               </a:ext>
             </a:extLst>
           </p:cNvPr>
@@ -3215,7 +3215,7 @@
           <p:cNvPr id="3" name="">
             <a:extLst xmlns:a="http://schemas.openxmlformats.org/drawingml/2006/main">
               <a:ext uri="{FF2B5EF4-FFF2-40B4-BE49-F238E27FC236}">
-                <a16:creationId xmlns:a16="http://schemas.microsoft.com/office/drawing/2014/main" id="{FB3C40EE-6CCC-4749-9ABE-1824C894D988}"/>
+                <a16:creationId xmlns:a16="http://schemas.microsoft.com/office/drawing/2014/main" id="{B39D4B7C-8825-41CD-8DE7-9CE6F3179490}"/>
               </a:ext>
             </a:extLst>
           </p:cNvPr>
@@ -3267,7 +3267,7 @@
           <p:cNvPr id="4" name="">
             <a:extLst xmlns:a="http://schemas.openxmlformats.org/drawingml/2006/main">
               <a:ext uri="{FF2B5EF4-FFF2-40B4-BE49-F238E27FC236}">
-                <a16:creationId xmlns:a16="http://schemas.microsoft.com/office/drawing/2014/main" id="{91040483-8DDA-419F-BCE9-C4DADDF7AF6A}"/>
+                <a16:creationId xmlns:a16="http://schemas.microsoft.com/office/drawing/2014/main" id="{63D7F166-3F2A-42B9-8FE0-E847A84D6C01}"/>
               </a:ext>
             </a:extLst>
           </p:cNvPr>
@@ -3319,7 +3319,7 @@
           <p:cNvPr id="5" name="">
             <a:extLst xmlns:a="http://schemas.openxmlformats.org/drawingml/2006/main">
               <a:ext uri="{FF2B5EF4-FFF2-40B4-BE49-F238E27FC236}">
-                <a16:creationId xmlns:a16="http://schemas.microsoft.com/office/drawing/2014/main" id="{87A2CD75-ECEF-4089-87ED-F72B255A3A67}"/>
+                <a16:creationId xmlns:a16="http://schemas.microsoft.com/office/drawing/2014/main" id="{B4D9DA32-DB14-49BC-A76C-A03BAEDDC6DC}"/>
               </a:ext>
             </a:extLst>
           </p:cNvPr>
@@ -3354,7 +3354,7 @@
           <p:nvPr/>
         </p:nvPicPr>
         <p:blipFill>
-          <a:blip xmlns:r="http://schemas.openxmlformats.org/officeDocument/2006/relationships" xmlns:a="http://schemas.openxmlformats.org/drawingml/2006/main" r:embed="R5e98aaf0881447a7"/>
+          <a:blip xmlns:r="http://schemas.openxmlformats.org/officeDocument/2006/relationships" xmlns:a="http://schemas.openxmlformats.org/drawingml/2006/main" r:embed="R481b887441924598"/>
           <a:stretch xmlns:a="http://schemas.openxmlformats.org/drawingml/2006/main"/>
         </p:blipFill>
         <p:spPr>
@@ -3372,7 +3372,7 @@
           <p:cNvPr id="7" name="">
             <a:extLst xmlns:a="http://schemas.openxmlformats.org/drawingml/2006/main">
               <a:ext uri="{FF2B5EF4-FFF2-40B4-BE49-F238E27FC236}">
-                <a16:creationId xmlns:a16="http://schemas.microsoft.com/office/drawing/2014/main" id="{52BFABAF-E2CD-4B0C-98EE-DA40AB5C67B4}"/>
+                <a16:creationId xmlns:a16="http://schemas.microsoft.com/office/drawing/2014/main" id="{5640CD3E-18E3-4A8D-8154-4B2BA1D05788}"/>
               </a:ext>
             </a:extLst>
           </p:cNvPr>
@@ -3424,7 +3424,7 @@
           <p:cNvPr id="8" name="">
             <a:extLst xmlns:a="http://schemas.openxmlformats.org/drawingml/2006/main">
               <a:ext uri="{FF2B5EF4-FFF2-40B4-BE49-F238E27FC236}">
-                <a16:creationId xmlns:a16="http://schemas.microsoft.com/office/drawing/2014/main" id="{EEB2AF3C-4C94-438B-8FE7-6E896073BB8D}"/>
+                <a16:creationId xmlns:a16="http://schemas.microsoft.com/office/drawing/2014/main" id="{7CDA49C5-8227-4660-B36C-FD54B1E14895}"/>
               </a:ext>
             </a:extLst>
           </p:cNvPr>
@@ -3476,7 +3476,7 @@
           <p:cNvPr id="9" name="">
             <a:extLst xmlns:a="http://schemas.openxmlformats.org/drawingml/2006/main">
               <a:ext uri="{FF2B5EF4-FFF2-40B4-BE49-F238E27FC236}">
-                <a16:creationId xmlns:a16="http://schemas.microsoft.com/office/drawing/2014/main" id="{6F1D3E8B-3279-441F-A05F-FA97A3C77B39}"/>
+                <a16:creationId xmlns:a16="http://schemas.microsoft.com/office/drawing/2014/main" id="{2CDD0576-82DC-4934-8CDA-00FC0BA974E4}"/>
               </a:ext>
             </a:extLst>
           </p:cNvPr>
@@ -3528,7 +3528,7 @@
           <p:cNvPr id="10" name="">
             <a:extLst xmlns:a="http://schemas.openxmlformats.org/drawingml/2006/main">
               <a:ext uri="{FF2B5EF4-FFF2-40B4-BE49-F238E27FC236}">
-                <a16:creationId xmlns:a16="http://schemas.microsoft.com/office/drawing/2014/main" id="{ECFB7717-35AF-497F-BFB8-5E260814514B}"/>
+                <a16:creationId xmlns:a16="http://schemas.microsoft.com/office/drawing/2014/main" id="{06559564-6048-4974-9E5F-F44170D7DAD0}"/>
               </a:ext>
             </a:extLst>
           </p:cNvPr>
@@ -3580,7 +3580,7 @@
           <p:cNvPr id="11" name="">
             <a:extLst xmlns:a="http://schemas.openxmlformats.org/drawingml/2006/main">
               <a:ext uri="{FF2B5EF4-FFF2-40B4-BE49-F238E27FC236}">
-                <a16:creationId xmlns:a16="http://schemas.microsoft.com/office/drawing/2014/main" id="{D635673B-D857-4D84-8B30-27B29736A14C}"/>
+                <a16:creationId xmlns:a16="http://schemas.microsoft.com/office/drawing/2014/main" id="{70478EAC-D4C4-48E6-8115-259DF36BC5B8}"/>
               </a:ext>
             </a:extLst>
           </p:cNvPr>
@@ -3611,7 +3611,7 @@
           <p:cNvPr id="12" name="">
             <a:extLst xmlns:a="http://schemas.openxmlformats.org/drawingml/2006/main">
               <a:ext uri="{FF2B5EF4-FFF2-40B4-BE49-F238E27FC236}">
-                <a16:creationId xmlns:a16="http://schemas.microsoft.com/office/drawing/2014/main" id="{D34354D3-3FC7-4A35-98F9-164D36DA4523}"/>
+                <a16:creationId xmlns:a16="http://schemas.microsoft.com/office/drawing/2014/main" id="{77728092-16A1-4547-88A3-35B34C2B2923}"/>
               </a:ext>
             </a:extLst>
           </p:cNvPr>
@@ -3642,7 +3642,7 @@
           <p:cNvPr id="13" name="">
             <a:extLst xmlns:a="http://schemas.openxmlformats.org/drawingml/2006/main">
               <a:ext uri="{FF2B5EF4-FFF2-40B4-BE49-F238E27FC236}">
-                <a16:creationId xmlns:a16="http://schemas.microsoft.com/office/drawing/2014/main" id="{660EF4CC-2C37-49AE-BEE3-27CD45CE2A94}"/>
+                <a16:creationId xmlns:a16="http://schemas.microsoft.com/office/drawing/2014/main" id="{D89CC61C-939B-4647-9141-131B42B68094}"/>
               </a:ext>
             </a:extLst>
           </p:cNvPr>
@@ -3694,7 +3694,7 @@
           <p:cNvPr id="14" name="">
             <a:extLst xmlns:a="http://schemas.openxmlformats.org/drawingml/2006/main">
               <a:ext uri="{FF2B5EF4-FFF2-40B4-BE49-F238E27FC236}">
-                <a16:creationId xmlns:a16="http://schemas.microsoft.com/office/drawing/2014/main" id="{D94C6C33-D01B-487E-AFA5-1690999B77A7}"/>
+                <a16:creationId xmlns:a16="http://schemas.microsoft.com/office/drawing/2014/main" id="{97C5A991-6EE1-4350-8C14-2FE4A00037BA}"/>
               </a:ext>
             </a:extLst>
           </p:cNvPr>
@@ -3746,7 +3746,7 @@
           <p:cNvPr id="15" name="">
             <a:extLst xmlns:a="http://schemas.openxmlformats.org/drawingml/2006/main">
               <a:ext uri="{FF2B5EF4-FFF2-40B4-BE49-F238E27FC236}">
-                <a16:creationId xmlns:a16="http://schemas.microsoft.com/office/drawing/2014/main" id="{80A0B1E1-CAC4-4668-82EE-CA887B71623E}"/>
+                <a16:creationId xmlns:a16="http://schemas.microsoft.com/office/drawing/2014/main" id="{B560063F-B579-4C1B-90BF-8921CC54B313}"/>
               </a:ext>
             </a:extLst>
           </p:cNvPr>
@@ -3798,7 +3798,7 @@
           <p:cNvPr id="16" name="">
             <a:extLst xmlns:a="http://schemas.openxmlformats.org/drawingml/2006/main">
               <a:ext uri="{FF2B5EF4-FFF2-40B4-BE49-F238E27FC236}">
-                <a16:creationId xmlns:a16="http://schemas.microsoft.com/office/drawing/2014/main" id="{69853DA7-BC2C-4B46-B377-E1B8FBEAFC66}"/>
+                <a16:creationId xmlns:a16="http://schemas.microsoft.com/office/drawing/2014/main" id="{E8CAE4F3-67BC-4BFE-9768-CCE26A0B5824}"/>
               </a:ext>
             </a:extLst>
           </p:cNvPr>
@@ -3850,7 +3850,7 @@
           <p:cNvPr id="17" name="">
             <a:extLst xmlns:a="http://schemas.openxmlformats.org/drawingml/2006/main">
               <a:ext uri="{FF2B5EF4-FFF2-40B4-BE49-F238E27FC236}">
-                <a16:creationId xmlns:a16="http://schemas.microsoft.com/office/drawing/2014/main" id="{0D337E8E-AA10-4D09-AD2B-4C6693213983}"/>
+                <a16:creationId xmlns:a16="http://schemas.microsoft.com/office/drawing/2014/main" id="{583A882F-D3F7-4314-9B6B-38E744C7FCCD}"/>
               </a:ext>
             </a:extLst>
           </p:cNvPr>
@@ -3902,7 +3902,7 @@
           <p:cNvPr id="18" name="">
             <a:extLst xmlns:a="http://schemas.openxmlformats.org/drawingml/2006/main">
               <a:ext uri="{FF2B5EF4-FFF2-40B4-BE49-F238E27FC236}">
-                <a16:creationId xmlns:a16="http://schemas.microsoft.com/office/drawing/2014/main" id="{0FAB02E6-CB6B-4968-A110-818B835C5233}"/>
+                <a16:creationId xmlns:a16="http://schemas.microsoft.com/office/drawing/2014/main" id="{46F2C962-BA01-45BA-B2E4-7AF939D2DCFA}"/>
               </a:ext>
             </a:extLst>
           </p:cNvPr>
@@ -3933,7 +3933,7 @@
           <p:cNvPr id="19" name="">
             <a:extLst xmlns:a="http://schemas.openxmlformats.org/drawingml/2006/main">
               <a:ext uri="{FF2B5EF4-FFF2-40B4-BE49-F238E27FC236}">
-                <a16:creationId xmlns:a16="http://schemas.microsoft.com/office/drawing/2014/main" id="{AC27A9CB-D261-4A60-82D0-9813083D3004}"/>
+                <a16:creationId xmlns:a16="http://schemas.microsoft.com/office/drawing/2014/main" id="{795C3A96-5382-4C7B-9DA7-A73D5B0273A6}"/>
               </a:ext>
             </a:extLst>
           </p:cNvPr>
@@ -3964,7 +3964,7 @@
           <p:cNvPr id="20" name="">
             <a:extLst xmlns:a="http://schemas.openxmlformats.org/drawingml/2006/main">
               <a:ext uri="{FF2B5EF4-FFF2-40B4-BE49-F238E27FC236}">
-                <a16:creationId xmlns:a16="http://schemas.microsoft.com/office/drawing/2014/main" id="{7C093751-801A-482D-9613-341395B22602}"/>
+                <a16:creationId xmlns:a16="http://schemas.microsoft.com/office/drawing/2014/main" id="{94CB8257-E159-4763-9CC9-1C256D91FF61}"/>
               </a:ext>
             </a:extLst>
           </p:cNvPr>
@@ -4016,7 +4016,7 @@
           <p:cNvPr id="21" name="">
             <a:extLst xmlns:a="http://schemas.openxmlformats.org/drawingml/2006/main">
               <a:ext uri="{FF2B5EF4-FFF2-40B4-BE49-F238E27FC236}">
-                <a16:creationId xmlns:a16="http://schemas.microsoft.com/office/drawing/2014/main" id="{41262952-F2D2-4558-B8D3-A6B3F520732F}"/>
+                <a16:creationId xmlns:a16="http://schemas.microsoft.com/office/drawing/2014/main" id="{E905F4CC-7CAF-4BD9-9C20-34508853AA1D}"/>
               </a:ext>
             </a:extLst>
           </p:cNvPr>
@@ -4068,7 +4068,7 @@
           <p:cNvPr id="22" name="">
             <a:extLst xmlns:a="http://schemas.openxmlformats.org/drawingml/2006/main">
               <a:ext uri="{FF2B5EF4-FFF2-40B4-BE49-F238E27FC236}">
-                <a16:creationId xmlns:a16="http://schemas.microsoft.com/office/drawing/2014/main" id="{F9343216-90AE-45D1-B13B-6C7D67B0A7BD}"/>
+                <a16:creationId xmlns:a16="http://schemas.microsoft.com/office/drawing/2014/main" id="{18FD9E3E-F027-4F5C-AD30-7A37810E7B99}"/>
               </a:ext>
             </a:extLst>
           </p:cNvPr>
@@ -4120,7 +4120,7 @@
           <p:cNvPr id="23" name="">
             <a:extLst xmlns:a="http://schemas.openxmlformats.org/drawingml/2006/main">
               <a:ext uri="{FF2B5EF4-FFF2-40B4-BE49-F238E27FC236}">
-                <a16:creationId xmlns:a16="http://schemas.microsoft.com/office/drawing/2014/main" id="{1E8D4651-9346-4CC8-A230-C262065F7A03}"/>
+                <a16:creationId xmlns:a16="http://schemas.microsoft.com/office/drawing/2014/main" id="{536D30C5-569B-4FC9-B500-3BC89ABB52ED}"/>
               </a:ext>
             </a:extLst>
           </p:cNvPr>
@@ -4172,7 +4172,7 @@
           <p:cNvPr id="24" name="">
             <a:extLst xmlns:a="http://schemas.openxmlformats.org/drawingml/2006/main">
               <a:ext uri="{FF2B5EF4-FFF2-40B4-BE49-F238E27FC236}">
-                <a16:creationId xmlns:a16="http://schemas.microsoft.com/office/drawing/2014/main" id="{804A09F8-09C7-4681-8AE3-0C27BA49B7FC}"/>
+                <a16:creationId xmlns:a16="http://schemas.microsoft.com/office/drawing/2014/main" id="{DF734AAB-2439-40A3-9867-A2C9DA58DFAD}"/>
               </a:ext>
             </a:extLst>
           </p:cNvPr>
@@ -4224,7 +4224,7 @@
           <p:cNvPr id="25" name="">
             <a:extLst xmlns:a="http://schemas.openxmlformats.org/drawingml/2006/main">
               <a:ext uri="{FF2B5EF4-FFF2-40B4-BE49-F238E27FC236}">
-                <a16:creationId xmlns:a16="http://schemas.microsoft.com/office/drawing/2014/main" id="{712E0E20-42DC-413E-AF1B-67295B6E9CC5}"/>
+                <a16:creationId xmlns:a16="http://schemas.microsoft.com/office/drawing/2014/main" id="{399735B4-CAF1-4009-BA07-03FBEDB3053E}"/>
               </a:ext>
             </a:extLst>
           </p:cNvPr>
@@ -4255,7 +4255,7 @@
           <p:cNvPr id="26" name="">
             <a:extLst xmlns:a="http://schemas.openxmlformats.org/drawingml/2006/main">
               <a:ext uri="{FF2B5EF4-FFF2-40B4-BE49-F238E27FC236}">
-                <a16:creationId xmlns:a16="http://schemas.microsoft.com/office/drawing/2014/main" id="{0CB6B297-7FA2-4364-A93C-F19ADE1C1EE3}"/>
+                <a16:creationId xmlns:a16="http://schemas.microsoft.com/office/drawing/2014/main" id="{1DF206EE-0D4C-42EF-AC1A-606A2B0DCA63}"/>
               </a:ext>
             </a:extLst>
           </p:cNvPr>
@@ -4307,7 +4307,7 @@
           <p:cNvPr id="27" name="">
             <a:extLst xmlns:a="http://schemas.openxmlformats.org/drawingml/2006/main">
               <a:ext uri="{FF2B5EF4-FFF2-40B4-BE49-F238E27FC236}">
-                <a16:creationId xmlns:a16="http://schemas.microsoft.com/office/drawing/2014/main" id="{BD7BA7FB-4D13-4A8F-A030-049FCC4815D1}"/>
+                <a16:creationId xmlns:a16="http://schemas.microsoft.com/office/drawing/2014/main" id="{CE569BAB-0F56-407B-A583-3BD305C7B2AB}"/>
               </a:ext>
             </a:extLst>
           </p:cNvPr>
@@ -4359,7 +4359,7 @@
           <p:cNvPr id="28" name="">
             <a:extLst xmlns:a="http://schemas.openxmlformats.org/drawingml/2006/main">
               <a:ext uri="{FF2B5EF4-FFF2-40B4-BE49-F238E27FC236}">
-                <a16:creationId xmlns:a16="http://schemas.microsoft.com/office/drawing/2014/main" id="{3665F66E-EA62-4EE7-82BE-4E831A4E15A6}"/>
+                <a16:creationId xmlns:a16="http://schemas.microsoft.com/office/drawing/2014/main" id="{276F4D6B-56E1-466B-AA4C-EB517AFC0518}"/>
               </a:ext>
             </a:extLst>
           </p:cNvPr>
@@ -4411,7 +4411,7 @@
           <p:cNvPr id="29" name="">
             <a:extLst xmlns:a="http://schemas.openxmlformats.org/drawingml/2006/main">
               <a:ext uri="{FF2B5EF4-FFF2-40B4-BE49-F238E27FC236}">
-                <a16:creationId xmlns:a16="http://schemas.microsoft.com/office/drawing/2014/main" id="{E27A1EF1-655F-45E9-8AF4-196A1B081A5C}"/>
+                <a16:creationId xmlns:a16="http://schemas.microsoft.com/office/drawing/2014/main" id="{97434B09-A7CB-4A7F-8BDD-65B3004DCA09}"/>
               </a:ext>
             </a:extLst>
           </p:cNvPr>
@@ -4463,7 +4463,7 @@
           <p:cNvPr id="30" name="">
             <a:extLst xmlns:a="http://schemas.openxmlformats.org/drawingml/2006/main">
               <a:ext uri="{FF2B5EF4-FFF2-40B4-BE49-F238E27FC236}">
-                <a16:creationId xmlns:a16="http://schemas.microsoft.com/office/drawing/2014/main" id="{04514E59-F313-4DA6-84A9-E2B8B92C0FBE}"/>
+                <a16:creationId xmlns:a16="http://schemas.microsoft.com/office/drawing/2014/main" id="{6A8FE27B-5AA4-4161-B997-F516CAA3FBFF}"/>
               </a:ext>
             </a:extLst>
           </p:cNvPr>
@@ -4515,7 +4515,7 @@
           <p:cNvPr id="31" name="">
             <a:extLst xmlns:a="http://schemas.openxmlformats.org/drawingml/2006/main">
               <a:ext uri="{FF2B5EF4-FFF2-40B4-BE49-F238E27FC236}">
-                <a16:creationId xmlns:a16="http://schemas.microsoft.com/office/drawing/2014/main" id="{28B3469F-636D-44FB-A136-3609FE0DE62E}"/>
+                <a16:creationId xmlns:a16="http://schemas.microsoft.com/office/drawing/2014/main" id="{3755E0E8-523F-4E9C-BC25-5952850A11D8}"/>
               </a:ext>
             </a:extLst>
           </p:cNvPr>
@@ -4546,7 +4546,7 @@
           <p:cNvPr id="32" name="">
             <a:extLst xmlns:a="http://schemas.openxmlformats.org/drawingml/2006/main">
               <a:ext uri="{FF2B5EF4-FFF2-40B4-BE49-F238E27FC236}">
-                <a16:creationId xmlns:a16="http://schemas.microsoft.com/office/drawing/2014/main" id="{604FE857-B4BF-431B-87F9-DD5025D69E71}"/>
+                <a16:creationId xmlns:a16="http://schemas.microsoft.com/office/drawing/2014/main" id="{0AA7A7ED-0D24-48D8-87AE-46AA0DD531ED}"/>
               </a:ext>
             </a:extLst>
           </p:cNvPr>
@@ -4577,7 +4577,7 @@
           <p:cNvPr id="33" name="">
             <a:extLst xmlns:a="http://schemas.openxmlformats.org/drawingml/2006/main">
               <a:ext uri="{FF2B5EF4-FFF2-40B4-BE49-F238E27FC236}">
-                <a16:creationId xmlns:a16="http://schemas.microsoft.com/office/drawing/2014/main" id="{3E2E2A67-E0FF-4F19-AF98-4B007C0ECF36}"/>
+                <a16:creationId xmlns:a16="http://schemas.microsoft.com/office/drawing/2014/main" id="{F0A2DC6B-F328-4B72-8E45-9AD81135B363}"/>
               </a:ext>
             </a:extLst>
           </p:cNvPr>
@@ -4629,7 +4629,7 @@
           <p:cNvPr id="34" name="">
             <a:extLst xmlns:a="http://schemas.openxmlformats.org/drawingml/2006/main">
               <a:ext uri="{FF2B5EF4-FFF2-40B4-BE49-F238E27FC236}">
-                <a16:creationId xmlns:a16="http://schemas.microsoft.com/office/drawing/2014/main" id="{31B168DC-4D98-43D7-B480-35603F7F2A6D}"/>
+                <a16:creationId xmlns:a16="http://schemas.microsoft.com/office/drawing/2014/main" id="{21ACDBA3-BDCA-4D4E-AAFD-CE28E7209D11}"/>
               </a:ext>
             </a:extLst>
           </p:cNvPr>
@@ -4681,7 +4681,7 @@
           <p:cNvPr id="35" name="">
             <a:extLst xmlns:a="http://schemas.openxmlformats.org/drawingml/2006/main">
               <a:ext uri="{FF2B5EF4-FFF2-40B4-BE49-F238E27FC236}">
-                <a16:creationId xmlns:a16="http://schemas.microsoft.com/office/drawing/2014/main" id="{A77471F6-D305-4E6D-BCA9-12F6361E1884}"/>
+                <a16:creationId xmlns:a16="http://schemas.microsoft.com/office/drawing/2014/main" id="{3BC0DD2D-9303-43A3-BB3A-28364F9C932E}"/>
               </a:ext>
             </a:extLst>
           </p:cNvPr>
@@ -4733,7 +4733,7 @@
           <p:cNvPr id="36" name="">
             <a:extLst xmlns:a="http://schemas.openxmlformats.org/drawingml/2006/main">
               <a:ext uri="{FF2B5EF4-FFF2-40B4-BE49-F238E27FC236}">
-                <a16:creationId xmlns:a16="http://schemas.microsoft.com/office/drawing/2014/main" id="{70F7E884-F24C-4879-99DC-E37D0433DDFC}"/>
+                <a16:creationId xmlns:a16="http://schemas.microsoft.com/office/drawing/2014/main" id="{52D01F84-E0B7-4E26-A052-D9A176CBBC1E}"/>
               </a:ext>
             </a:extLst>
           </p:cNvPr>
@@ -4785,7 +4785,7 @@
           <p:cNvPr id="37" name="">
             <a:extLst xmlns:a="http://schemas.openxmlformats.org/drawingml/2006/main">
               <a:ext uri="{FF2B5EF4-FFF2-40B4-BE49-F238E27FC236}">
-                <a16:creationId xmlns:a16="http://schemas.microsoft.com/office/drawing/2014/main" id="{11F40AE7-9AA7-4D0D-8F87-E2998DD1352F}"/>
+                <a16:creationId xmlns:a16="http://schemas.microsoft.com/office/drawing/2014/main" id="{A19BC3C8-790E-4888-96AE-6055DA06802D}"/>
               </a:ext>
             </a:extLst>
           </p:cNvPr>
@@ -4837,7 +4837,7 @@
           <p:cNvPr id="38" name="">
             <a:extLst xmlns:a="http://schemas.openxmlformats.org/drawingml/2006/main">
               <a:ext uri="{FF2B5EF4-FFF2-40B4-BE49-F238E27FC236}">
-                <a16:creationId xmlns:a16="http://schemas.microsoft.com/office/drawing/2014/main" id="{1F85B26D-AB7A-4B6C-B890-5D200ED6D6B1}"/>
+                <a16:creationId xmlns:a16="http://schemas.microsoft.com/office/drawing/2014/main" id="{1B5EDD98-76F3-4934-87A1-C83C77BD143D}"/>
               </a:ext>
             </a:extLst>
           </p:cNvPr>
@@ -4868,7 +4868,7 @@
           <p:cNvPr id="39" name="">
             <a:extLst xmlns:a="http://schemas.openxmlformats.org/drawingml/2006/main">
               <a:ext uri="{FF2B5EF4-FFF2-40B4-BE49-F238E27FC236}">
-                <a16:creationId xmlns:a16="http://schemas.microsoft.com/office/drawing/2014/main" id="{71C058DE-7119-4E37-90CE-171C30C662DB}"/>
+                <a16:creationId xmlns:a16="http://schemas.microsoft.com/office/drawing/2014/main" id="{CFDC880F-096E-4A63-9F61-15322463B707}"/>
               </a:ext>
             </a:extLst>
           </p:cNvPr>
@@ -4920,7 +4920,7 @@
           <p:cNvPr id="40" name="">
             <a:extLst xmlns:a="http://schemas.openxmlformats.org/drawingml/2006/main">
               <a:ext uri="{FF2B5EF4-FFF2-40B4-BE49-F238E27FC236}">
-                <a16:creationId xmlns:a16="http://schemas.microsoft.com/office/drawing/2014/main" id="{F6980A2E-066C-4144-8562-B6C28D6D4592}"/>
+                <a16:creationId xmlns:a16="http://schemas.microsoft.com/office/drawing/2014/main" id="{38B8223E-DC0E-4B0B-821D-35F84516361E}"/>
               </a:ext>
             </a:extLst>
           </p:cNvPr>
@@ -4972,7 +4972,7 @@
           <p:cNvPr id="41" name="">
             <a:extLst xmlns:a="http://schemas.openxmlformats.org/drawingml/2006/main">
               <a:ext uri="{FF2B5EF4-FFF2-40B4-BE49-F238E27FC236}">
-                <a16:creationId xmlns:a16="http://schemas.microsoft.com/office/drawing/2014/main" id="{191022CB-E57B-470C-975B-E7DADA66D903}"/>
+                <a16:creationId xmlns:a16="http://schemas.microsoft.com/office/drawing/2014/main" id="{6D45B986-7BF4-4A3A-994F-70E7DA392165}"/>
               </a:ext>
             </a:extLst>
           </p:cNvPr>
@@ -5024,7 +5024,7 @@
           <p:cNvPr id="42" name="">
             <a:extLst xmlns:a="http://schemas.openxmlformats.org/drawingml/2006/main">
               <a:ext uri="{FF2B5EF4-FFF2-40B4-BE49-F238E27FC236}">
-                <a16:creationId xmlns:a16="http://schemas.microsoft.com/office/drawing/2014/main" id="{4FC2ADCD-CC31-41CB-B13A-E9F27B4C1D17}"/>
+                <a16:creationId xmlns:a16="http://schemas.microsoft.com/office/drawing/2014/main" id="{F4527A59-DB44-4667-A1BD-AA58443A5EC8}"/>
               </a:ext>
             </a:extLst>
           </p:cNvPr>
@@ -5076,7 +5076,7 @@
           <p:cNvPr id="43" name="">
             <a:extLst xmlns:a="http://schemas.openxmlformats.org/drawingml/2006/main">
               <a:ext uri="{FF2B5EF4-FFF2-40B4-BE49-F238E27FC236}">
-                <a16:creationId xmlns:a16="http://schemas.microsoft.com/office/drawing/2014/main" id="{3843200C-2127-4462-B3A2-EC4D7A0D3F8F}"/>
+                <a16:creationId xmlns:a16="http://schemas.microsoft.com/office/drawing/2014/main" id="{70175D61-8629-45C3-8D14-9A6A4F8C5798}"/>
               </a:ext>
             </a:extLst>
           </p:cNvPr>
@@ -5128,7 +5128,7 @@
           <p:cNvPr id="44" name="">
             <a:extLst xmlns:a="http://schemas.openxmlformats.org/drawingml/2006/main">
               <a:ext uri="{FF2B5EF4-FFF2-40B4-BE49-F238E27FC236}">
-                <a16:creationId xmlns:a16="http://schemas.microsoft.com/office/drawing/2014/main" id="{4A158147-6741-4ADD-831A-720ACACC5AA3}"/>
+                <a16:creationId xmlns:a16="http://schemas.microsoft.com/office/drawing/2014/main" id="{55041E04-83B5-4A65-8F3B-A58465E5E78E}"/>
               </a:ext>
             </a:extLst>
           </p:cNvPr>
@@ -5159,7 +5159,7 @@
           <p:cNvPr id="45" name="">
             <a:extLst xmlns:a="http://schemas.openxmlformats.org/drawingml/2006/main">
               <a:ext uri="{FF2B5EF4-FFF2-40B4-BE49-F238E27FC236}">
-                <a16:creationId xmlns:a16="http://schemas.microsoft.com/office/drawing/2014/main" id="{B0435995-5D64-431F-982B-2B42AE55DE69}"/>
+                <a16:creationId xmlns:a16="http://schemas.microsoft.com/office/drawing/2014/main" id="{96DD9A6F-CC15-4263-AABC-7BD3B1525A3B}"/>
               </a:ext>
             </a:extLst>
           </p:cNvPr>
@@ -5190,7 +5190,7 @@
           <p:cNvPr id="46" name="">
             <a:extLst xmlns:a="http://schemas.openxmlformats.org/drawingml/2006/main">
               <a:ext uri="{FF2B5EF4-FFF2-40B4-BE49-F238E27FC236}">
-                <a16:creationId xmlns:a16="http://schemas.microsoft.com/office/drawing/2014/main" id="{ADAC833A-5A58-436A-BA54-B537E7C522E6}"/>
+                <a16:creationId xmlns:a16="http://schemas.microsoft.com/office/drawing/2014/main" id="{F0BC3A7F-59D3-4BE5-9DFF-6B0BC5CEDF55}"/>
               </a:ext>
             </a:extLst>
           </p:cNvPr>
@@ -5242,7 +5242,7 @@
           <p:cNvPr id="47" name="">
             <a:extLst xmlns:a="http://schemas.openxmlformats.org/drawingml/2006/main">
               <a:ext uri="{FF2B5EF4-FFF2-40B4-BE49-F238E27FC236}">
-                <a16:creationId xmlns:a16="http://schemas.microsoft.com/office/drawing/2014/main" id="{A07FB6B9-90C8-4337-8CD9-938D26FA9456}"/>
+                <a16:creationId xmlns:a16="http://schemas.microsoft.com/office/drawing/2014/main" id="{8DA64D86-8EC0-428A-A567-6856B91542E9}"/>
               </a:ext>
             </a:extLst>
           </p:cNvPr>
@@ -5294,7 +5294,7 @@
           <p:cNvPr id="48" name="">
             <a:extLst xmlns:a="http://schemas.openxmlformats.org/drawingml/2006/main">
               <a:ext uri="{FF2B5EF4-FFF2-40B4-BE49-F238E27FC236}">
-                <a16:creationId xmlns:a16="http://schemas.microsoft.com/office/drawing/2014/main" id="{B800BBC1-5A3B-4E92-AE20-772F8ABBC8D6}"/>
+                <a16:creationId xmlns:a16="http://schemas.microsoft.com/office/drawing/2014/main" id="{8AD3AE03-86A3-47FD-AFCA-0F816A7B1B97}"/>
               </a:ext>
             </a:extLst>
           </p:cNvPr>
@@ -5346,7 +5346,7 @@
           <p:cNvPr id="49" name="">
             <a:extLst xmlns:a="http://schemas.openxmlformats.org/drawingml/2006/main">
               <a:ext uri="{FF2B5EF4-FFF2-40B4-BE49-F238E27FC236}">
-                <a16:creationId xmlns:a16="http://schemas.microsoft.com/office/drawing/2014/main" id="{BBB879AE-7625-48B3-9BE7-D0DD040E599B}"/>
+                <a16:creationId xmlns:a16="http://schemas.microsoft.com/office/drawing/2014/main" id="{19BB7667-8C25-4482-A895-737ED8C13115}"/>
               </a:ext>
             </a:extLst>
           </p:cNvPr>
@@ -5398,7 +5398,7 @@
           <p:cNvPr id="50" name="">
             <a:extLst xmlns:a="http://schemas.openxmlformats.org/drawingml/2006/main">
               <a:ext uri="{FF2B5EF4-FFF2-40B4-BE49-F238E27FC236}">
-                <a16:creationId xmlns:a16="http://schemas.microsoft.com/office/drawing/2014/main" id="{37211C58-F676-4C30-9A57-34C6E760BE13}"/>
+                <a16:creationId xmlns:a16="http://schemas.microsoft.com/office/drawing/2014/main" id="{E6F9CAA6-EF9C-4A88-8918-154D38A82884}"/>
               </a:ext>
             </a:extLst>
           </p:cNvPr>
@@ -5450,7 +5450,7 @@
           <p:cNvPr id="51" name="">
             <a:extLst xmlns:a="http://schemas.openxmlformats.org/drawingml/2006/main">
               <a:ext uri="{FF2B5EF4-FFF2-40B4-BE49-F238E27FC236}">
-                <a16:creationId xmlns:a16="http://schemas.microsoft.com/office/drawing/2014/main" id="{33F27D7B-1A08-453D-A5B9-77B49737D58C}"/>
+                <a16:creationId xmlns:a16="http://schemas.microsoft.com/office/drawing/2014/main" id="{9F0D5C11-132A-47A7-800D-C3B6FF294082}"/>
               </a:ext>
             </a:extLst>
           </p:cNvPr>
@@ -5481,7 +5481,7 @@
           <p:cNvPr id="52" name="">
             <a:extLst xmlns:a="http://schemas.openxmlformats.org/drawingml/2006/main">
               <a:ext uri="{FF2B5EF4-FFF2-40B4-BE49-F238E27FC236}">
-                <a16:creationId xmlns:a16="http://schemas.microsoft.com/office/drawing/2014/main" id="{FEDB65CE-1F1B-4D61-B194-5409CEAF8755}"/>
+                <a16:creationId xmlns:a16="http://schemas.microsoft.com/office/drawing/2014/main" id="{EB5CAC62-A54B-48CE-8732-174AA78180B0}"/>
               </a:ext>
             </a:extLst>
           </p:cNvPr>
@@ -5533,7 +5533,7 @@
           <p:cNvPr id="53" name="">
             <a:extLst xmlns:a="http://schemas.openxmlformats.org/drawingml/2006/main">
               <a:ext uri="{FF2B5EF4-FFF2-40B4-BE49-F238E27FC236}">
-                <a16:creationId xmlns:a16="http://schemas.microsoft.com/office/drawing/2014/main" id="{214DBF54-31EC-4AE2-9BBD-8667A7C057A7}"/>
+                <a16:creationId xmlns:a16="http://schemas.microsoft.com/office/drawing/2014/main" id="{A1E29BF7-AC84-43BB-8274-647C7A24B9DF}"/>
               </a:ext>
             </a:extLst>
           </p:cNvPr>
@@ -5585,7 +5585,7 @@
           <p:cNvPr id="54" name="">
             <a:extLst xmlns:a="http://schemas.openxmlformats.org/drawingml/2006/main">
               <a:ext uri="{FF2B5EF4-FFF2-40B4-BE49-F238E27FC236}">
-                <a16:creationId xmlns:a16="http://schemas.microsoft.com/office/drawing/2014/main" id="{2205C5F2-0EFC-4118-A86E-4495105FCFA5}"/>
+                <a16:creationId xmlns:a16="http://schemas.microsoft.com/office/drawing/2014/main" id="{66076ACE-43F5-4038-AF24-4F6C001239AB}"/>
               </a:ext>
             </a:extLst>
           </p:cNvPr>
@@ -5637,7 +5637,7 @@
           <p:cNvPr id="55" name="">
             <a:extLst xmlns:a="http://schemas.openxmlformats.org/drawingml/2006/main">
               <a:ext uri="{FF2B5EF4-FFF2-40B4-BE49-F238E27FC236}">
-                <a16:creationId xmlns:a16="http://schemas.microsoft.com/office/drawing/2014/main" id="{2BD6C40A-DBB1-400B-BD35-516BEFEA88F6}"/>
+                <a16:creationId xmlns:a16="http://schemas.microsoft.com/office/drawing/2014/main" id="{F367B95B-9DFF-4B49-92B2-979D3873898A}"/>
               </a:ext>
             </a:extLst>
           </p:cNvPr>
@@ -5689,7 +5689,7 @@
           <p:cNvPr id="56" name="">
             <a:extLst xmlns:a="http://schemas.openxmlformats.org/drawingml/2006/main">
               <a:ext uri="{FF2B5EF4-FFF2-40B4-BE49-F238E27FC236}">
-                <a16:creationId xmlns:a16="http://schemas.microsoft.com/office/drawing/2014/main" id="{67A3EFC9-11DB-4BBB-8B34-72D12F94DE07}"/>
+                <a16:creationId xmlns:a16="http://schemas.microsoft.com/office/drawing/2014/main" id="{55AE7A52-98EC-49D5-A6DF-37BDD67A2404}"/>
               </a:ext>
             </a:extLst>
           </p:cNvPr>
@@ -5741,7 +5741,7 @@
           <p:cNvPr id="57" name="">
             <a:extLst xmlns:a="http://schemas.openxmlformats.org/drawingml/2006/main">
               <a:ext uri="{FF2B5EF4-FFF2-40B4-BE49-F238E27FC236}">
-                <a16:creationId xmlns:a16="http://schemas.microsoft.com/office/drawing/2014/main" id="{5ADE85EE-595D-418A-A995-C61A106B1F3B}"/>
+                <a16:creationId xmlns:a16="http://schemas.microsoft.com/office/drawing/2014/main" id="{FBDF9DAD-E6DB-43BA-9B3E-F129F2E3341A}"/>
               </a:ext>
             </a:extLst>
           </p:cNvPr>
@@ -5772,7 +5772,7 @@
           <p:cNvPr id="58" name="">
             <a:extLst xmlns:a="http://schemas.openxmlformats.org/drawingml/2006/main">
               <a:ext uri="{FF2B5EF4-FFF2-40B4-BE49-F238E27FC236}">
-                <a16:creationId xmlns:a16="http://schemas.microsoft.com/office/drawing/2014/main" id="{D739D0E6-52DB-4F39-A92C-3DED73A74979}"/>
+                <a16:creationId xmlns:a16="http://schemas.microsoft.com/office/drawing/2014/main" id="{0F7F3487-1782-4FEA-B24B-CFDDAFA538C7}"/>
               </a:ext>
             </a:extLst>
           </p:cNvPr>
@@ -5803,7 +5803,7 @@
           <p:cNvPr id="59" name="">
             <a:extLst xmlns:a="http://schemas.openxmlformats.org/drawingml/2006/main">
               <a:ext uri="{FF2B5EF4-FFF2-40B4-BE49-F238E27FC236}">
-                <a16:creationId xmlns:a16="http://schemas.microsoft.com/office/drawing/2014/main" id="{2EA2C44D-9E69-4005-98D0-5EC47F0E5470}"/>
+                <a16:creationId xmlns:a16="http://schemas.microsoft.com/office/drawing/2014/main" id="{6BE6878B-9A2D-4877-8DC1-B2B03EEF2117}"/>
               </a:ext>
             </a:extLst>
           </p:cNvPr>
@@ -5855,7 +5855,7 @@
           <p:cNvPr id="60" name="">
             <a:extLst xmlns:a="http://schemas.openxmlformats.org/drawingml/2006/main">
               <a:ext uri="{FF2B5EF4-FFF2-40B4-BE49-F238E27FC236}">
-                <a16:creationId xmlns:a16="http://schemas.microsoft.com/office/drawing/2014/main" id="{4D8131FA-1FBB-435A-92A7-02D86A995129}"/>
+                <a16:creationId xmlns:a16="http://schemas.microsoft.com/office/drawing/2014/main" id="{1D93EC38-792E-4BE0-8627-39B76C387977}"/>
               </a:ext>
             </a:extLst>
           </p:cNvPr>
@@ -5907,7 +5907,7 @@
           <p:cNvPr id="61" name="">
             <a:extLst xmlns:a="http://schemas.openxmlformats.org/drawingml/2006/main">
               <a:ext uri="{FF2B5EF4-FFF2-40B4-BE49-F238E27FC236}">
-                <a16:creationId xmlns:a16="http://schemas.microsoft.com/office/drawing/2014/main" id="{216EB8C4-4DCD-4DE3-811E-C36356B7AC9F}"/>
+                <a16:creationId xmlns:a16="http://schemas.microsoft.com/office/drawing/2014/main" id="{FF15A26C-AED2-4B6E-BC76-6B4B837CCBC7}"/>
               </a:ext>
             </a:extLst>
           </p:cNvPr>
@@ -5959,7 +5959,7 @@
           <p:cNvPr id="62" name="">
             <a:extLst xmlns:a="http://schemas.openxmlformats.org/drawingml/2006/main">
               <a:ext uri="{FF2B5EF4-FFF2-40B4-BE49-F238E27FC236}">
-                <a16:creationId xmlns:a16="http://schemas.microsoft.com/office/drawing/2014/main" id="{C408D4C5-58C2-4608-B738-2B68C8A71981}"/>
+                <a16:creationId xmlns:a16="http://schemas.microsoft.com/office/drawing/2014/main" id="{00E86B0E-24AC-469E-BD94-0883CBBCC9ED}"/>
               </a:ext>
             </a:extLst>
           </p:cNvPr>
@@ -6011,7 +6011,7 @@
           <p:cNvPr id="63" name="">
             <a:extLst xmlns:a="http://schemas.openxmlformats.org/drawingml/2006/main">
               <a:ext uri="{FF2B5EF4-FFF2-40B4-BE49-F238E27FC236}">
-                <a16:creationId xmlns:a16="http://schemas.microsoft.com/office/drawing/2014/main" id="{CBEBDE78-DD3F-4DC0-A944-8FFCB05C88FD}"/>
+                <a16:creationId xmlns:a16="http://schemas.microsoft.com/office/drawing/2014/main" id="{E5EB7FDC-FC3D-4A05-8AF2-2BE2EFAC9321}"/>
               </a:ext>
             </a:extLst>
           </p:cNvPr>
@@ -6063,7 +6063,7 @@
           <p:cNvPr id="64" name="">
             <a:extLst xmlns:a="http://schemas.openxmlformats.org/drawingml/2006/main">
               <a:ext uri="{FF2B5EF4-FFF2-40B4-BE49-F238E27FC236}">
-                <a16:creationId xmlns:a16="http://schemas.microsoft.com/office/drawing/2014/main" id="{D874C212-5FBB-4446-814C-580EAE4810CA}"/>
+                <a16:creationId xmlns:a16="http://schemas.microsoft.com/office/drawing/2014/main" id="{F2408CD6-3245-4BFA-AC08-93F764773DF2}"/>
               </a:ext>
             </a:extLst>
           </p:cNvPr>
@@ -6094,7 +6094,7 @@
           <p:cNvPr id="65" name="">
             <a:extLst xmlns:a="http://schemas.openxmlformats.org/drawingml/2006/main">
               <a:ext uri="{FF2B5EF4-FFF2-40B4-BE49-F238E27FC236}">
-                <a16:creationId xmlns:a16="http://schemas.microsoft.com/office/drawing/2014/main" id="{021B35EA-9F30-4147-A60A-4943F439CA1F}"/>
+                <a16:creationId xmlns:a16="http://schemas.microsoft.com/office/drawing/2014/main" id="{5BDBBE4C-8E3A-42D0-8150-70806A86305E}"/>
               </a:ext>
             </a:extLst>
           </p:cNvPr>
@@ -6146,7 +6146,7 @@
           <p:cNvPr id="66" name="">
             <a:extLst xmlns:a="http://schemas.openxmlformats.org/drawingml/2006/main">
               <a:ext uri="{FF2B5EF4-FFF2-40B4-BE49-F238E27FC236}">
-                <a16:creationId xmlns:a16="http://schemas.microsoft.com/office/drawing/2014/main" id="{4C23F58B-83A4-46BF-BF42-CD205FEFACC8}"/>
+                <a16:creationId xmlns:a16="http://schemas.microsoft.com/office/drawing/2014/main" id="{09434A5A-C236-4826-96F7-8CC7D1944FC1}"/>
               </a:ext>
             </a:extLst>
           </p:cNvPr>
@@ -6198,7 +6198,7 @@
           <p:cNvPr id="67" name="">
             <a:extLst xmlns:a="http://schemas.openxmlformats.org/drawingml/2006/main">
               <a:ext uri="{FF2B5EF4-FFF2-40B4-BE49-F238E27FC236}">
-                <a16:creationId xmlns:a16="http://schemas.microsoft.com/office/drawing/2014/main" id="{F85751AF-A6FD-491E-8C60-9583EBAD77F2}"/>
+                <a16:creationId xmlns:a16="http://schemas.microsoft.com/office/drawing/2014/main" id="{EEEBFBED-0720-480D-8E7A-B9A58A4A0B0C}"/>
               </a:ext>
             </a:extLst>
           </p:cNvPr>
@@ -6250,7 +6250,7 @@
           <p:cNvPr id="68" name="">
             <a:extLst xmlns:a="http://schemas.openxmlformats.org/drawingml/2006/main">
               <a:ext uri="{FF2B5EF4-FFF2-40B4-BE49-F238E27FC236}">
-                <a16:creationId xmlns:a16="http://schemas.microsoft.com/office/drawing/2014/main" id="{E4AEC9C4-7610-4D4F-9E64-6CA923D6262D}"/>
+                <a16:creationId xmlns:a16="http://schemas.microsoft.com/office/drawing/2014/main" id="{A72F1F5A-DA1F-4B13-A9DD-E348682B2ACD}"/>
               </a:ext>
             </a:extLst>
           </p:cNvPr>
@@ -6302,7 +6302,7 @@
           <p:cNvPr id="69" name="">
             <a:extLst xmlns:a="http://schemas.openxmlformats.org/drawingml/2006/main">
               <a:ext uri="{FF2B5EF4-FFF2-40B4-BE49-F238E27FC236}">
-                <a16:creationId xmlns:a16="http://schemas.microsoft.com/office/drawing/2014/main" id="{B3B8C2C6-0C73-4F0C-B2AB-153564EAB40B}"/>
+                <a16:creationId xmlns:a16="http://schemas.microsoft.com/office/drawing/2014/main" id="{30426055-032E-47E2-B331-BF8159EA2174}"/>
               </a:ext>
             </a:extLst>
           </p:cNvPr>
@@ -6354,7 +6354,7 @@
           <p:cNvPr id="70" name="">
             <a:extLst xmlns:a="http://schemas.openxmlformats.org/drawingml/2006/main">
               <a:ext uri="{FF2B5EF4-FFF2-40B4-BE49-F238E27FC236}">
-                <a16:creationId xmlns:a16="http://schemas.microsoft.com/office/drawing/2014/main" id="{90ECEBA9-8638-4E20-AF95-06946FDDE26B}"/>
+                <a16:creationId xmlns:a16="http://schemas.microsoft.com/office/drawing/2014/main" id="{F48A223E-E561-4A39-8FDA-A9F9757844E8}"/>
               </a:ext>
             </a:extLst>
           </p:cNvPr>
@@ -6385,7 +6385,7 @@
           <p:cNvPr id="71" name="">
             <a:extLst xmlns:a="http://schemas.openxmlformats.org/drawingml/2006/main">
               <a:ext uri="{FF2B5EF4-FFF2-40B4-BE49-F238E27FC236}">
-                <a16:creationId xmlns:a16="http://schemas.microsoft.com/office/drawing/2014/main" id="{8C7860F9-B13D-471B-8B36-B2860FB51A28}"/>
+                <a16:creationId xmlns:a16="http://schemas.microsoft.com/office/drawing/2014/main" id="{3BED9F3F-6A47-4DEB-855E-858B502B929C}"/>
               </a:ext>
             </a:extLst>
           </p:cNvPr>
@@ -6416,7 +6416,7 @@
           <p:cNvPr id="72" name="">
             <a:extLst xmlns:a="http://schemas.openxmlformats.org/drawingml/2006/main">
               <a:ext uri="{FF2B5EF4-FFF2-40B4-BE49-F238E27FC236}">
-                <a16:creationId xmlns:a16="http://schemas.microsoft.com/office/drawing/2014/main" id="{D9655930-E862-4D13-9FE0-AE940D35BF32}"/>
+                <a16:creationId xmlns:a16="http://schemas.microsoft.com/office/drawing/2014/main" id="{ABE4F051-C72E-4760-88BC-00CD416B67C2}"/>
               </a:ext>
             </a:extLst>
           </p:cNvPr>
@@ -6468,7 +6468,7 @@
           <p:cNvPr id="73" name="">
             <a:extLst xmlns:a="http://schemas.openxmlformats.org/drawingml/2006/main">
               <a:ext uri="{FF2B5EF4-FFF2-40B4-BE49-F238E27FC236}">
-                <a16:creationId xmlns:a16="http://schemas.microsoft.com/office/drawing/2014/main" id="{316F8DEB-F860-4172-BB1A-938C3A8B9CC4}"/>
+                <a16:creationId xmlns:a16="http://schemas.microsoft.com/office/drawing/2014/main" id="{5E5F1C22-407D-4C40-9538-FBE0295FF7DC}"/>
               </a:ext>
             </a:extLst>
           </p:cNvPr>
@@ -6520,7 +6520,7 @@
           <p:cNvPr id="74" name="">
             <a:extLst xmlns:a="http://schemas.openxmlformats.org/drawingml/2006/main">
               <a:ext uri="{FF2B5EF4-FFF2-40B4-BE49-F238E27FC236}">
-                <a16:creationId xmlns:a16="http://schemas.microsoft.com/office/drawing/2014/main" id="{A1F690CA-F9BB-4875-9D0F-9412011029D1}"/>
+                <a16:creationId xmlns:a16="http://schemas.microsoft.com/office/drawing/2014/main" id="{9B2CDB7A-94C4-40A7-AC19-8362B338DD18}"/>
               </a:ext>
             </a:extLst>
           </p:cNvPr>
@@ -6572,7 +6572,7 @@
           <p:cNvPr id="75" name="">
             <a:extLst xmlns:a="http://schemas.openxmlformats.org/drawingml/2006/main">
               <a:ext uri="{FF2B5EF4-FFF2-40B4-BE49-F238E27FC236}">
-                <a16:creationId xmlns:a16="http://schemas.microsoft.com/office/drawing/2014/main" id="{40BD4C29-6D6A-440B-8D39-4AAAF2D22267}"/>
+                <a16:creationId xmlns:a16="http://schemas.microsoft.com/office/drawing/2014/main" id="{F7814811-2CC7-418F-B4F6-7ADB6C91B27F}"/>
               </a:ext>
             </a:extLst>
           </p:cNvPr>
@@ -6624,7 +6624,7 @@
           <p:cNvPr id="76" name="">
             <a:extLst xmlns:a="http://schemas.openxmlformats.org/drawingml/2006/main">
               <a:ext uri="{FF2B5EF4-FFF2-40B4-BE49-F238E27FC236}">
-                <a16:creationId xmlns:a16="http://schemas.microsoft.com/office/drawing/2014/main" id="{57E92D34-2DDC-45AD-A1F1-992046C7D0CF}"/>
+                <a16:creationId xmlns:a16="http://schemas.microsoft.com/office/drawing/2014/main" id="{B98A9368-2803-43F4-8458-ADB5977273E3}"/>
               </a:ext>
             </a:extLst>
           </p:cNvPr>
@@ -6676,7 +6676,7 @@
           <p:cNvPr id="77" name="">
             <a:extLst xmlns:a="http://schemas.openxmlformats.org/drawingml/2006/main">
               <a:ext uri="{FF2B5EF4-FFF2-40B4-BE49-F238E27FC236}">
-                <a16:creationId xmlns:a16="http://schemas.microsoft.com/office/drawing/2014/main" id="{5024DEED-5492-4A69-8E8B-573168B5037D}"/>
+                <a16:creationId xmlns:a16="http://schemas.microsoft.com/office/drawing/2014/main" id="{EA937E79-03F9-48A5-BACB-AD6660962762}"/>
               </a:ext>
             </a:extLst>
           </p:cNvPr>
@@ -6707,7 +6707,7 @@
           <p:cNvPr id="78" name="">
             <a:extLst xmlns:a="http://schemas.openxmlformats.org/drawingml/2006/main">
               <a:ext uri="{FF2B5EF4-FFF2-40B4-BE49-F238E27FC236}">
-                <a16:creationId xmlns:a16="http://schemas.microsoft.com/office/drawing/2014/main" id="{58CEF48C-BDF5-4590-AA28-E3BE5C9D7C1C}"/>
+                <a16:creationId xmlns:a16="http://schemas.microsoft.com/office/drawing/2014/main" id="{A2F5B53A-8641-40C3-98E5-8BC2EC99B9DE}"/>
               </a:ext>
             </a:extLst>
           </p:cNvPr>
@@ -6759,7 +6759,7 @@
           <p:cNvPr id="79" name="">
             <a:extLst xmlns:a="http://schemas.openxmlformats.org/drawingml/2006/main">
               <a:ext uri="{FF2B5EF4-FFF2-40B4-BE49-F238E27FC236}">
-                <a16:creationId xmlns:a16="http://schemas.microsoft.com/office/drawing/2014/main" id="{A2BB4C82-683D-42A6-959F-476686530EE8}"/>
+                <a16:creationId xmlns:a16="http://schemas.microsoft.com/office/drawing/2014/main" id="{05DFFF30-06F8-420A-8CC9-0123EBAEB455}"/>
               </a:ext>
             </a:extLst>
           </p:cNvPr>
@@ -6811,7 +6811,7 @@
           <p:cNvPr id="80" name="">
             <a:extLst xmlns:a="http://schemas.openxmlformats.org/drawingml/2006/main">
               <a:ext uri="{FF2B5EF4-FFF2-40B4-BE49-F238E27FC236}">
-                <a16:creationId xmlns:a16="http://schemas.microsoft.com/office/drawing/2014/main" id="{5B9D815E-2DD7-4698-8DAC-F317A2DF3140}"/>
+                <a16:creationId xmlns:a16="http://schemas.microsoft.com/office/drawing/2014/main" id="{2CA2B9B6-3219-4C31-A8BE-645AA0995333}"/>
               </a:ext>
             </a:extLst>
           </p:cNvPr>
@@ -6863,7 +6863,7 @@
           <p:cNvPr id="81" name="">
             <a:extLst xmlns:a="http://schemas.openxmlformats.org/drawingml/2006/main">
               <a:ext uri="{FF2B5EF4-FFF2-40B4-BE49-F238E27FC236}">
-                <a16:creationId xmlns:a16="http://schemas.microsoft.com/office/drawing/2014/main" id="{7ECA958B-11CF-4DB3-90A5-FB1B0466B626}"/>
+                <a16:creationId xmlns:a16="http://schemas.microsoft.com/office/drawing/2014/main" id="{0B40737B-0C7A-49ED-98AC-A4561BAEEE0B}"/>
               </a:ext>
             </a:extLst>
           </p:cNvPr>
@@ -6915,7 +6915,7 @@
           <p:cNvPr id="82" name="">
             <a:extLst xmlns:a="http://schemas.openxmlformats.org/drawingml/2006/main">
               <a:ext uri="{FF2B5EF4-FFF2-40B4-BE49-F238E27FC236}">
-                <a16:creationId xmlns:a16="http://schemas.microsoft.com/office/drawing/2014/main" id="{72D3DBC3-45F8-4947-B143-E9C7C095AE45}"/>
+                <a16:creationId xmlns:a16="http://schemas.microsoft.com/office/drawing/2014/main" id="{EB0AF4F2-6240-45B2-AE09-17E987CC7D83}"/>
               </a:ext>
             </a:extLst>
           </p:cNvPr>
@@ -6967,7 +6967,7 @@
           <p:cNvPr id="83" name="">
             <a:extLst xmlns:a="http://schemas.openxmlformats.org/drawingml/2006/main">
               <a:ext uri="{FF2B5EF4-FFF2-40B4-BE49-F238E27FC236}">
-                <a16:creationId xmlns:a16="http://schemas.microsoft.com/office/drawing/2014/main" id="{589A71CC-77D4-4CAB-B0DB-FB0257700B69}"/>
+                <a16:creationId xmlns:a16="http://schemas.microsoft.com/office/drawing/2014/main" id="{BB731386-1AE3-4C52-BF67-52EDEB2191BB}"/>
               </a:ext>
             </a:extLst>
           </p:cNvPr>
@@ -6998,7 +6998,7 @@
           <p:cNvPr id="84" name="">
             <a:extLst xmlns:a="http://schemas.openxmlformats.org/drawingml/2006/main">
               <a:ext uri="{FF2B5EF4-FFF2-40B4-BE49-F238E27FC236}">
-                <a16:creationId xmlns:a16="http://schemas.microsoft.com/office/drawing/2014/main" id="{5F9F5A65-70C6-4457-B207-15CEB2FC0B60}"/>
+                <a16:creationId xmlns:a16="http://schemas.microsoft.com/office/drawing/2014/main" id="{90B640CB-6000-4116-9222-CA64333192D2}"/>
               </a:ext>
             </a:extLst>
           </p:cNvPr>
@@ -7029,7 +7029,7 @@
           <p:cNvPr id="85" name="">
             <a:extLst xmlns:a="http://schemas.openxmlformats.org/drawingml/2006/main">
               <a:ext uri="{FF2B5EF4-FFF2-40B4-BE49-F238E27FC236}">
-                <a16:creationId xmlns:a16="http://schemas.microsoft.com/office/drawing/2014/main" id="{BCC58F19-E603-4B14-99FF-D8662D834489}"/>
+                <a16:creationId xmlns:a16="http://schemas.microsoft.com/office/drawing/2014/main" id="{86019EF3-B5E2-4B18-83C5-DC71A9357B46}"/>
               </a:ext>
             </a:extLst>
           </p:cNvPr>
@@ -7081,7 +7081,7 @@
           <p:cNvPr id="86" name="">
             <a:extLst xmlns:a="http://schemas.openxmlformats.org/drawingml/2006/main">
               <a:ext uri="{FF2B5EF4-FFF2-40B4-BE49-F238E27FC236}">
-                <a16:creationId xmlns:a16="http://schemas.microsoft.com/office/drawing/2014/main" id="{18A00448-525D-403E-94F3-EC638B83312C}"/>
+                <a16:creationId xmlns:a16="http://schemas.microsoft.com/office/drawing/2014/main" id="{59F72F45-28DB-48C8-A065-ABBED3597F06}"/>
               </a:ext>
             </a:extLst>
           </p:cNvPr>
@@ -7133,7 +7133,7 @@
           <p:cNvPr id="87" name="">
             <a:extLst xmlns:a="http://schemas.openxmlformats.org/drawingml/2006/main">
               <a:ext uri="{FF2B5EF4-FFF2-40B4-BE49-F238E27FC236}">
-                <a16:creationId xmlns:a16="http://schemas.microsoft.com/office/drawing/2014/main" id="{688ABFEC-B8D7-4CFD-AA9C-902CA0905DF6}"/>
+                <a16:creationId xmlns:a16="http://schemas.microsoft.com/office/drawing/2014/main" id="{50EF8E9E-6301-4282-B935-331DD5C9EAAB}"/>
               </a:ext>
             </a:extLst>
           </p:cNvPr>
@@ -7185,7 +7185,7 @@
           <p:cNvPr id="88" name="">
             <a:extLst xmlns:a="http://schemas.openxmlformats.org/drawingml/2006/main">
               <a:ext uri="{FF2B5EF4-FFF2-40B4-BE49-F238E27FC236}">
-                <a16:creationId xmlns:a16="http://schemas.microsoft.com/office/drawing/2014/main" id="{7B67F1CA-1A91-4414-85B0-F102003B0D5A}"/>
+                <a16:creationId xmlns:a16="http://schemas.microsoft.com/office/drawing/2014/main" id="{3B350274-498D-41A3-9938-5E1EE3DA7682}"/>
               </a:ext>
             </a:extLst>
           </p:cNvPr>
@@ -7237,7 +7237,7 @@
           <p:cNvPr id="89" name="">
             <a:extLst xmlns:a="http://schemas.openxmlformats.org/drawingml/2006/main">
               <a:ext uri="{FF2B5EF4-FFF2-40B4-BE49-F238E27FC236}">
-                <a16:creationId xmlns:a16="http://schemas.microsoft.com/office/drawing/2014/main" id="{4A38381C-CCCC-4A84-B802-47422F918D7C}"/>
+                <a16:creationId xmlns:a16="http://schemas.microsoft.com/office/drawing/2014/main" id="{0D242CD7-1099-4A00-AE61-684BCC0BBE6C}"/>
               </a:ext>
             </a:extLst>
           </p:cNvPr>
@@ -7289,7 +7289,7 @@
           <p:cNvPr id="90" name="">
             <a:extLst xmlns:a="http://schemas.openxmlformats.org/drawingml/2006/main">
               <a:ext uri="{FF2B5EF4-FFF2-40B4-BE49-F238E27FC236}">
-                <a16:creationId xmlns:a16="http://schemas.microsoft.com/office/drawing/2014/main" id="{C6E2FCCF-039F-42BD-A67C-4EDF44AFC6B2}"/>
+                <a16:creationId xmlns:a16="http://schemas.microsoft.com/office/drawing/2014/main" id="{1EEE061F-DD15-4FD0-A49B-50869C48B2BE}"/>
               </a:ext>
             </a:extLst>
           </p:cNvPr>
@@ -7320,7 +7320,7 @@
           <p:cNvPr id="91" name="">
             <a:extLst xmlns:a="http://schemas.openxmlformats.org/drawingml/2006/main">
               <a:ext uri="{FF2B5EF4-FFF2-40B4-BE49-F238E27FC236}">
-                <a16:creationId xmlns:a16="http://schemas.microsoft.com/office/drawing/2014/main" id="{BBCA2189-3CFD-4C3F-8EEA-168326ED59F8}"/>
+                <a16:creationId xmlns:a16="http://schemas.microsoft.com/office/drawing/2014/main" id="{BB26E801-89F5-490E-85B6-9DCDFA4F5FB6}"/>
               </a:ext>
             </a:extLst>
           </p:cNvPr>
@@ -7372,7 +7372,7 @@
           <p:cNvPr id="92" name="">
             <a:extLst xmlns:a="http://schemas.openxmlformats.org/drawingml/2006/main">
               <a:ext uri="{FF2B5EF4-FFF2-40B4-BE49-F238E27FC236}">
-                <a16:creationId xmlns:a16="http://schemas.microsoft.com/office/drawing/2014/main" id="{3319F513-0BF0-4459-9D92-7C72D6B2E2F7}"/>
+                <a16:creationId xmlns:a16="http://schemas.microsoft.com/office/drawing/2014/main" id="{3F4362DE-FBC7-4146-8203-41CBF12F9A5E}"/>
               </a:ext>
             </a:extLst>
           </p:cNvPr>
@@ -7424,7 +7424,7 @@
           <p:cNvPr id="93" name="">
             <a:extLst xmlns:a="http://schemas.openxmlformats.org/drawingml/2006/main">
               <a:ext uri="{FF2B5EF4-FFF2-40B4-BE49-F238E27FC236}">
-                <a16:creationId xmlns:a16="http://schemas.microsoft.com/office/drawing/2014/main" id="{B932F922-58C8-4C29-B487-64B83930C622}"/>
+                <a16:creationId xmlns:a16="http://schemas.microsoft.com/office/drawing/2014/main" id="{76B880E1-DE5C-4B2C-BB84-354608451A80}"/>
               </a:ext>
             </a:extLst>
           </p:cNvPr>
@@ -7476,7 +7476,7 @@
           <p:cNvPr id="94" name="">
             <a:extLst xmlns:a="http://schemas.openxmlformats.org/drawingml/2006/main">
               <a:ext uri="{FF2B5EF4-FFF2-40B4-BE49-F238E27FC236}">
-                <a16:creationId xmlns:a16="http://schemas.microsoft.com/office/drawing/2014/main" id="{36B4D9CB-2216-4B1E-86B8-FF488622E5B4}"/>
+                <a16:creationId xmlns:a16="http://schemas.microsoft.com/office/drawing/2014/main" id="{2DE0FFF3-1BFC-48A3-863E-47C9E2855F16}"/>
               </a:ext>
             </a:extLst>
           </p:cNvPr>
@@ -7528,7 +7528,7 @@
           <p:cNvPr id="95" name="">
             <a:extLst xmlns:a="http://schemas.openxmlformats.org/drawingml/2006/main">
               <a:ext uri="{FF2B5EF4-FFF2-40B4-BE49-F238E27FC236}">
-                <a16:creationId xmlns:a16="http://schemas.microsoft.com/office/drawing/2014/main" id="{FAE4258D-3430-4F95-8A8A-6FFBF5D55B97}"/>
+                <a16:creationId xmlns:a16="http://schemas.microsoft.com/office/drawing/2014/main" id="{7D2C513C-4826-432C-879F-CA01DCF43AFD}"/>
               </a:ext>
             </a:extLst>
           </p:cNvPr>
@@ -7580,7 +7580,7 @@
           <p:cNvPr id="96" name="">
             <a:extLst xmlns:a="http://schemas.openxmlformats.org/drawingml/2006/main">
               <a:ext uri="{FF2B5EF4-FFF2-40B4-BE49-F238E27FC236}">
-                <a16:creationId xmlns:a16="http://schemas.microsoft.com/office/drawing/2014/main" id="{630E47E7-859B-4425-9357-1C16D14FF0AE}"/>
+                <a16:creationId xmlns:a16="http://schemas.microsoft.com/office/drawing/2014/main" id="{4C6364C1-496F-4452-9C20-9A0410160F8B}"/>
               </a:ext>
             </a:extLst>
           </p:cNvPr>
@@ -7611,7 +7611,7 @@
           <p:cNvPr id="97" name="">
             <a:extLst xmlns:a="http://schemas.openxmlformats.org/drawingml/2006/main">
               <a:ext uri="{FF2B5EF4-FFF2-40B4-BE49-F238E27FC236}">
-                <a16:creationId xmlns:a16="http://schemas.microsoft.com/office/drawing/2014/main" id="{DD1341E0-355E-4801-8EA2-3002E180E163}"/>
+                <a16:creationId xmlns:a16="http://schemas.microsoft.com/office/drawing/2014/main" id="{1BCEF659-37C8-431E-9BB5-15A4FFBA2C4C}"/>
               </a:ext>
             </a:extLst>
           </p:cNvPr>
@@ -7642,7 +7642,7 @@
           <p:cNvPr id="98" name="">
             <a:extLst xmlns:a="http://schemas.openxmlformats.org/drawingml/2006/main">
               <a:ext uri="{FF2B5EF4-FFF2-40B4-BE49-F238E27FC236}">
-                <a16:creationId xmlns:a16="http://schemas.microsoft.com/office/drawing/2014/main" id="{FAF76E21-EDCC-43CD-BF01-BFD04BEE39A7}"/>
+                <a16:creationId xmlns:a16="http://schemas.microsoft.com/office/drawing/2014/main" id="{2B7EF987-39BE-45D8-B679-9C55F22539CE}"/>
               </a:ext>
             </a:extLst>
           </p:cNvPr>
@@ -7694,7 +7694,7 @@
           <p:cNvPr id="99" name="">
             <a:extLst xmlns:a="http://schemas.openxmlformats.org/drawingml/2006/main">
               <a:ext uri="{FF2B5EF4-FFF2-40B4-BE49-F238E27FC236}">
-                <a16:creationId xmlns:a16="http://schemas.microsoft.com/office/drawing/2014/main" id="{18994981-68F2-44DE-8CAA-53B8B9A6AD6F}"/>
+                <a16:creationId xmlns:a16="http://schemas.microsoft.com/office/drawing/2014/main" id="{6CFA317D-B5FB-404B-9C4D-FAD7431307CE}"/>
               </a:ext>
             </a:extLst>
           </p:cNvPr>
@@ -7746,7 +7746,7 @@
           <p:cNvPr id="100" name="">
             <a:extLst xmlns:a="http://schemas.openxmlformats.org/drawingml/2006/main">
               <a:ext uri="{FF2B5EF4-FFF2-40B4-BE49-F238E27FC236}">
-                <a16:creationId xmlns:a16="http://schemas.microsoft.com/office/drawing/2014/main" id="{110DAA25-1F0B-4BC6-89B6-2A75D3204A2B}"/>
+                <a16:creationId xmlns:a16="http://schemas.microsoft.com/office/drawing/2014/main" id="{D71DEDA7-3D22-4702-82F8-7B7BC7F0E74A}"/>
               </a:ext>
             </a:extLst>
           </p:cNvPr>
@@ -7798,7 +7798,7 @@
           <p:cNvPr id="101" name="">
             <a:extLst xmlns:a="http://schemas.openxmlformats.org/drawingml/2006/main">
               <a:ext uri="{FF2B5EF4-FFF2-40B4-BE49-F238E27FC236}">
-                <a16:creationId xmlns:a16="http://schemas.microsoft.com/office/drawing/2014/main" id="{F63EB30A-EC3E-4493-A1A5-9BF9F59D2A7B}"/>
+                <a16:creationId xmlns:a16="http://schemas.microsoft.com/office/drawing/2014/main" id="{E02E869D-D008-444C-A834-D4618234649A}"/>
               </a:ext>
             </a:extLst>
           </p:cNvPr>
@@ -7850,7 +7850,7 @@
           <p:cNvPr id="102" name="">
             <a:extLst xmlns:a="http://schemas.openxmlformats.org/drawingml/2006/main">
               <a:ext uri="{FF2B5EF4-FFF2-40B4-BE49-F238E27FC236}">
-                <a16:creationId xmlns:a16="http://schemas.microsoft.com/office/drawing/2014/main" id="{79027F70-68CA-4F18-A301-C1AB26B2C33D}"/>
+                <a16:creationId xmlns:a16="http://schemas.microsoft.com/office/drawing/2014/main" id="{ED40E7DB-94B2-4D85-A6DE-4FA0C23A02C6}"/>
               </a:ext>
             </a:extLst>
           </p:cNvPr>
@@ -7900,7 +7900,7 @@
     </p:spTree>
     <p:extLst>
       <p:ext uri="{BB962C8B-B14F-4D97-AF65-F5344CB8AC3E}">
-        <p14:creationId xmlns:p14="http://schemas.microsoft.com/office/powerpoint/2010/main" val="330623249"/>
+        <p14:creationId xmlns:p14="http://schemas.microsoft.com/office/powerpoint/2010/main" val="143213166"/>
       </p:ext>
     </p:extLst>
   </p:cSld>
@@ -7931,7 +7931,7 @@
           <p:cNvPr id="98" name="">
             <a:extLst xmlns:a="http://schemas.openxmlformats.org/drawingml/2006/main">
               <a:ext uri="{FF2B5EF4-FFF2-40B4-BE49-F238E27FC236}">
-                <a16:creationId xmlns:a16="http://schemas.microsoft.com/office/drawing/2014/main" id="{F4503986-14CB-4B68-8DB9-3D0E9A0FE09D}"/>
+                <a16:creationId xmlns:a16="http://schemas.microsoft.com/office/drawing/2014/main" id="{C47680CD-2236-4D6A-8709-0E0EC33AA6A7}"/>
               </a:ext>
             </a:extLst>
           </p:cNvPr>
@@ -7964,7 +7964,7 @@
           <p:cNvPr id="2" name="">
             <a:extLst xmlns:a="http://schemas.openxmlformats.org/drawingml/2006/main">
               <a:ext uri="{FF2B5EF4-FFF2-40B4-BE49-F238E27FC236}">
-                <a16:creationId xmlns:a16="http://schemas.microsoft.com/office/drawing/2014/main" id="{CB4B4425-205C-46F2-AE5F-EDEC4C7ECA48}"/>
+                <a16:creationId xmlns:a16="http://schemas.microsoft.com/office/drawing/2014/main" id="{C46334F2-7CB6-4CB6-98FE-DBBA0CB8777D}"/>
               </a:ext>
             </a:extLst>
           </p:cNvPr>
@@ -7995,7 +7995,7 @@
           <p:cNvPr id="3" name="">
             <a:extLst xmlns:a="http://schemas.openxmlformats.org/drawingml/2006/main">
               <a:ext uri="{FF2B5EF4-FFF2-40B4-BE49-F238E27FC236}">
-                <a16:creationId xmlns:a16="http://schemas.microsoft.com/office/drawing/2014/main" id="{56037206-9C63-4A3C-B033-91DD58B20960}"/>
+                <a16:creationId xmlns:a16="http://schemas.microsoft.com/office/drawing/2014/main" id="{4F04E27F-0301-4A57-96C4-B24443025AB7}"/>
               </a:ext>
             </a:extLst>
           </p:cNvPr>
@@ -8047,7 +8047,7 @@
           <p:cNvPr id="4" name="">
             <a:extLst xmlns:a="http://schemas.openxmlformats.org/drawingml/2006/main">
               <a:ext uri="{FF2B5EF4-FFF2-40B4-BE49-F238E27FC236}">
-                <a16:creationId xmlns:a16="http://schemas.microsoft.com/office/drawing/2014/main" id="{AE9DF301-C68A-4252-925E-50A9FC9D67E1}"/>
+                <a16:creationId xmlns:a16="http://schemas.microsoft.com/office/drawing/2014/main" id="{1D355ACA-2CD8-4AEC-9AA7-17A504B0E4EE}"/>
               </a:ext>
             </a:extLst>
           </p:cNvPr>
@@ -8099,7 +8099,7 @@
           <p:cNvPr id="5" name="">
             <a:extLst xmlns:a="http://schemas.openxmlformats.org/drawingml/2006/main">
               <a:ext uri="{FF2B5EF4-FFF2-40B4-BE49-F238E27FC236}">
-                <a16:creationId xmlns:a16="http://schemas.microsoft.com/office/drawing/2014/main" id="{1FD2C718-31C7-47B3-95B8-0A895D29E4CD}"/>
+                <a16:creationId xmlns:a16="http://schemas.microsoft.com/office/drawing/2014/main" id="{25C14880-31D2-4D66-81F6-02D9B4ACF50E}"/>
               </a:ext>
             </a:extLst>
           </p:cNvPr>
@@ -8134,7 +8134,7 @@
           <p:nvPr/>
         </p:nvPicPr>
         <p:blipFill>
-          <a:blip xmlns:r="http://schemas.openxmlformats.org/officeDocument/2006/relationships" xmlns:a="http://schemas.openxmlformats.org/drawingml/2006/main" r:embed="Ra9569e1c7acf4a40"/>
+          <a:blip xmlns:r="http://schemas.openxmlformats.org/officeDocument/2006/relationships" xmlns:a="http://schemas.openxmlformats.org/drawingml/2006/main" r:embed="R510ea138c1ad4211"/>
           <a:stretch xmlns:a="http://schemas.openxmlformats.org/drawingml/2006/main"/>
         </p:blipFill>
         <p:spPr>
@@ -8152,7 +8152,7 @@
           <p:cNvPr id="7" name="">
             <a:extLst xmlns:a="http://schemas.openxmlformats.org/drawingml/2006/main">
               <a:ext uri="{FF2B5EF4-FFF2-40B4-BE49-F238E27FC236}">
-                <a16:creationId xmlns:a16="http://schemas.microsoft.com/office/drawing/2014/main" id="{8FBE7E86-91CF-4A9F-BEC1-0F9CA0A45733}"/>
+                <a16:creationId xmlns:a16="http://schemas.microsoft.com/office/drawing/2014/main" id="{E55D8B7A-965A-49D5-BB5E-AD4E52CD4468}"/>
               </a:ext>
             </a:extLst>
           </p:cNvPr>
@@ -8204,7 +8204,7 @@
           <p:cNvPr id="8" name="">
             <a:extLst xmlns:a="http://schemas.openxmlformats.org/drawingml/2006/main">
               <a:ext uri="{FF2B5EF4-FFF2-40B4-BE49-F238E27FC236}">
-                <a16:creationId xmlns:a16="http://schemas.microsoft.com/office/drawing/2014/main" id="{4C3601F0-48DE-4CAC-906F-7D80111CB597}"/>
+                <a16:creationId xmlns:a16="http://schemas.microsoft.com/office/drawing/2014/main" id="{E73D1296-7014-4E42-9CA1-20C0CE6024F2}"/>
               </a:ext>
             </a:extLst>
           </p:cNvPr>
@@ -8256,7 +8256,7 @@
           <p:cNvPr id="9" name="">
             <a:extLst xmlns:a="http://schemas.openxmlformats.org/drawingml/2006/main">
               <a:ext uri="{FF2B5EF4-FFF2-40B4-BE49-F238E27FC236}">
-                <a16:creationId xmlns:a16="http://schemas.microsoft.com/office/drawing/2014/main" id="{08324BC2-58D9-432E-A403-0F4A4ACF31B8}"/>
+                <a16:creationId xmlns:a16="http://schemas.microsoft.com/office/drawing/2014/main" id="{19233ECC-CC4E-4709-8B16-BA51D95C188E}"/>
               </a:ext>
             </a:extLst>
           </p:cNvPr>
@@ -8308,7 +8308,7 @@
           <p:cNvPr id="10" name="">
             <a:extLst xmlns:a="http://schemas.openxmlformats.org/drawingml/2006/main">
               <a:ext uri="{FF2B5EF4-FFF2-40B4-BE49-F238E27FC236}">
-                <a16:creationId xmlns:a16="http://schemas.microsoft.com/office/drawing/2014/main" id="{D43D2FF5-2378-4A50-B04B-CA13B422D363}"/>
+                <a16:creationId xmlns:a16="http://schemas.microsoft.com/office/drawing/2014/main" id="{32227635-0448-40E1-AC76-81D6921D8C71}"/>
               </a:ext>
             </a:extLst>
           </p:cNvPr>
@@ -8360,7 +8360,7 @@
           <p:cNvPr id="11" name="">
             <a:extLst xmlns:a="http://schemas.openxmlformats.org/drawingml/2006/main">
               <a:ext uri="{FF2B5EF4-FFF2-40B4-BE49-F238E27FC236}">
-                <a16:creationId xmlns:a16="http://schemas.microsoft.com/office/drawing/2014/main" id="{16E37A14-DA05-42A4-A5A5-E5C1CDB700E1}"/>
+                <a16:creationId xmlns:a16="http://schemas.microsoft.com/office/drawing/2014/main" id="{9F05678A-0AAC-409B-9F5D-CF97F3EEA2CD}"/>
               </a:ext>
             </a:extLst>
           </p:cNvPr>
@@ -8391,7 +8391,7 @@
           <p:cNvPr id="12" name="">
             <a:extLst xmlns:a="http://schemas.openxmlformats.org/drawingml/2006/main">
               <a:ext uri="{FF2B5EF4-FFF2-40B4-BE49-F238E27FC236}">
-                <a16:creationId xmlns:a16="http://schemas.microsoft.com/office/drawing/2014/main" id="{69C4E1BC-9976-4054-B41A-E2BFE073A1EA}"/>
+                <a16:creationId xmlns:a16="http://schemas.microsoft.com/office/drawing/2014/main" id="{A4986A2A-5A41-465F-B3F0-8101949E7511}"/>
               </a:ext>
             </a:extLst>
           </p:cNvPr>
@@ -8422,7 +8422,7 @@
           <p:cNvPr id="13" name="">
             <a:extLst xmlns:a="http://schemas.openxmlformats.org/drawingml/2006/main">
               <a:ext uri="{FF2B5EF4-FFF2-40B4-BE49-F238E27FC236}">
-                <a16:creationId xmlns:a16="http://schemas.microsoft.com/office/drawing/2014/main" id="{406F1FF0-19A8-4457-9017-E5352FAAEBA9}"/>
+                <a16:creationId xmlns:a16="http://schemas.microsoft.com/office/drawing/2014/main" id="{63DAD41D-4B79-4D5D-ACF3-6001587C7044}"/>
               </a:ext>
             </a:extLst>
           </p:cNvPr>
@@ -8474,7 +8474,7 @@
           <p:cNvPr id="14" name="">
             <a:extLst xmlns:a="http://schemas.openxmlformats.org/drawingml/2006/main">
               <a:ext uri="{FF2B5EF4-FFF2-40B4-BE49-F238E27FC236}">
-                <a16:creationId xmlns:a16="http://schemas.microsoft.com/office/drawing/2014/main" id="{277E3BE4-6D83-4702-A6EE-4037FC2DE0CB}"/>
+                <a16:creationId xmlns:a16="http://schemas.microsoft.com/office/drawing/2014/main" id="{4193FB94-9F81-4C6E-B39C-B9DA44205AFF}"/>
               </a:ext>
             </a:extLst>
           </p:cNvPr>
@@ -8526,7 +8526,7 @@
           <p:cNvPr id="15" name="">
             <a:extLst xmlns:a="http://schemas.openxmlformats.org/drawingml/2006/main">
               <a:ext uri="{FF2B5EF4-FFF2-40B4-BE49-F238E27FC236}">
-                <a16:creationId xmlns:a16="http://schemas.microsoft.com/office/drawing/2014/main" id="{F03F740D-86E8-43E8-B30E-0FFA46BA1BAF}"/>
+                <a16:creationId xmlns:a16="http://schemas.microsoft.com/office/drawing/2014/main" id="{51A83242-81B2-4FDE-A5CD-DAE4F0AEC180}"/>
               </a:ext>
             </a:extLst>
           </p:cNvPr>
@@ -8578,7 +8578,7 @@
           <p:cNvPr id="16" name="">
             <a:extLst xmlns:a="http://schemas.openxmlformats.org/drawingml/2006/main">
               <a:ext uri="{FF2B5EF4-FFF2-40B4-BE49-F238E27FC236}">
-                <a16:creationId xmlns:a16="http://schemas.microsoft.com/office/drawing/2014/main" id="{0B909D05-B96D-42ED-9C36-A8B188150327}"/>
+                <a16:creationId xmlns:a16="http://schemas.microsoft.com/office/drawing/2014/main" id="{BB0F19B2-2C29-4797-9226-730BD81090B5}"/>
               </a:ext>
             </a:extLst>
           </p:cNvPr>
@@ -8630,7 +8630,7 @@
           <p:cNvPr id="17" name="">
             <a:extLst xmlns:a="http://schemas.openxmlformats.org/drawingml/2006/main">
               <a:ext uri="{FF2B5EF4-FFF2-40B4-BE49-F238E27FC236}">
-                <a16:creationId xmlns:a16="http://schemas.microsoft.com/office/drawing/2014/main" id="{43B96CE8-9F82-406C-9DAD-6703DE91DA76}"/>
+                <a16:creationId xmlns:a16="http://schemas.microsoft.com/office/drawing/2014/main" id="{4C6A029C-BC33-44A5-A3EF-B89AEC5E5518}"/>
               </a:ext>
             </a:extLst>
           </p:cNvPr>
@@ -8682,7 +8682,7 @@
           <p:cNvPr id="18" name="">
             <a:extLst xmlns:a="http://schemas.openxmlformats.org/drawingml/2006/main">
               <a:ext uri="{FF2B5EF4-FFF2-40B4-BE49-F238E27FC236}">
-                <a16:creationId xmlns:a16="http://schemas.microsoft.com/office/drawing/2014/main" id="{41B79055-E421-41A0-B205-BFFB4294FE73}"/>
+                <a16:creationId xmlns:a16="http://schemas.microsoft.com/office/drawing/2014/main" id="{1ED79460-DB69-4E9A-AA96-30EA25C7E169}"/>
               </a:ext>
             </a:extLst>
           </p:cNvPr>
@@ -8713,7 +8713,7 @@
           <p:cNvPr id="19" name="">
             <a:extLst xmlns:a="http://schemas.openxmlformats.org/drawingml/2006/main">
               <a:ext uri="{FF2B5EF4-FFF2-40B4-BE49-F238E27FC236}">
-                <a16:creationId xmlns:a16="http://schemas.microsoft.com/office/drawing/2014/main" id="{32DC1811-95B4-4BA5-A9E2-2006C092DDD4}"/>
+                <a16:creationId xmlns:a16="http://schemas.microsoft.com/office/drawing/2014/main" id="{3CAE2FD8-598F-4C05-AB6D-89F78CB7B633}"/>
               </a:ext>
             </a:extLst>
           </p:cNvPr>
@@ -8765,7 +8765,7 @@
           <p:cNvPr id="20" name="">
             <a:extLst xmlns:a="http://schemas.openxmlformats.org/drawingml/2006/main">
               <a:ext uri="{FF2B5EF4-FFF2-40B4-BE49-F238E27FC236}">
-                <a16:creationId xmlns:a16="http://schemas.microsoft.com/office/drawing/2014/main" id="{FC74721E-DEF7-4165-8EC0-5D2D82284556}"/>
+                <a16:creationId xmlns:a16="http://schemas.microsoft.com/office/drawing/2014/main" id="{46064CF8-D25C-4086-AEE1-8D2950F4E3D7}"/>
               </a:ext>
             </a:extLst>
           </p:cNvPr>
@@ -8817,7 +8817,7 @@
           <p:cNvPr id="21" name="">
             <a:extLst xmlns:a="http://schemas.openxmlformats.org/drawingml/2006/main">
               <a:ext uri="{FF2B5EF4-FFF2-40B4-BE49-F238E27FC236}">
-                <a16:creationId xmlns:a16="http://schemas.microsoft.com/office/drawing/2014/main" id="{E181A103-202E-4661-BC20-3BBAB097F0F0}"/>
+                <a16:creationId xmlns:a16="http://schemas.microsoft.com/office/drawing/2014/main" id="{81DBC754-F18C-4857-9C1F-EF14DE915A7A}"/>
               </a:ext>
             </a:extLst>
           </p:cNvPr>
@@ -8869,7 +8869,7 @@
           <p:cNvPr id="22" name="">
             <a:extLst xmlns:a="http://schemas.openxmlformats.org/drawingml/2006/main">
               <a:ext uri="{FF2B5EF4-FFF2-40B4-BE49-F238E27FC236}">
-                <a16:creationId xmlns:a16="http://schemas.microsoft.com/office/drawing/2014/main" id="{0666BABB-4395-4504-8ACC-B15C1872869B}"/>
+                <a16:creationId xmlns:a16="http://schemas.microsoft.com/office/drawing/2014/main" id="{9E9D3F76-247E-466C-A18A-7EF896CF252C}"/>
               </a:ext>
             </a:extLst>
           </p:cNvPr>
@@ -8921,7 +8921,7 @@
           <p:cNvPr id="23" name="">
             <a:extLst xmlns:a="http://schemas.openxmlformats.org/drawingml/2006/main">
               <a:ext uri="{FF2B5EF4-FFF2-40B4-BE49-F238E27FC236}">
-                <a16:creationId xmlns:a16="http://schemas.microsoft.com/office/drawing/2014/main" id="{8705B770-BA18-41B5-A2C4-613E9A9BDAF5}"/>
+                <a16:creationId xmlns:a16="http://schemas.microsoft.com/office/drawing/2014/main" id="{1D1639A5-D779-4343-9925-DDE63FCECBA3}"/>
               </a:ext>
             </a:extLst>
           </p:cNvPr>
@@ -8973,7 +8973,7 @@
           <p:cNvPr id="24" name="">
             <a:extLst xmlns:a="http://schemas.openxmlformats.org/drawingml/2006/main">
               <a:ext uri="{FF2B5EF4-FFF2-40B4-BE49-F238E27FC236}">
-                <a16:creationId xmlns:a16="http://schemas.microsoft.com/office/drawing/2014/main" id="{E2CAEA61-4CA4-43B7-8CC4-2F61DF0A3002}"/>
+                <a16:creationId xmlns:a16="http://schemas.microsoft.com/office/drawing/2014/main" id="{EDAA2BAE-2516-4472-B812-5C7485EC34F0}"/>
               </a:ext>
             </a:extLst>
           </p:cNvPr>
@@ -9004,7 +9004,7 @@
           <p:cNvPr id="25" name="">
             <a:extLst xmlns:a="http://schemas.openxmlformats.org/drawingml/2006/main">
               <a:ext uri="{FF2B5EF4-FFF2-40B4-BE49-F238E27FC236}">
-                <a16:creationId xmlns:a16="http://schemas.microsoft.com/office/drawing/2014/main" id="{006ACF93-FDE1-45F2-9976-1FF2734E3FA6}"/>
+                <a16:creationId xmlns:a16="http://schemas.microsoft.com/office/drawing/2014/main" id="{3BD3CA53-CE1E-49A0-82E2-266285744C73}"/>
               </a:ext>
             </a:extLst>
           </p:cNvPr>
@@ -9035,7 +9035,7 @@
           <p:cNvPr id="26" name="">
             <a:extLst xmlns:a="http://schemas.openxmlformats.org/drawingml/2006/main">
               <a:ext uri="{FF2B5EF4-FFF2-40B4-BE49-F238E27FC236}">
-                <a16:creationId xmlns:a16="http://schemas.microsoft.com/office/drawing/2014/main" id="{C3896079-A6E7-4E76-B446-1B59B0CCD11F}"/>
+                <a16:creationId xmlns:a16="http://schemas.microsoft.com/office/drawing/2014/main" id="{AF4E7D65-3F80-4BB3-80A0-86EA630AC253}"/>
               </a:ext>
             </a:extLst>
           </p:cNvPr>
@@ -9087,7 +9087,7 @@
           <p:cNvPr id="27" name="">
             <a:extLst xmlns:a="http://schemas.openxmlformats.org/drawingml/2006/main">
               <a:ext uri="{FF2B5EF4-FFF2-40B4-BE49-F238E27FC236}">
-                <a16:creationId xmlns:a16="http://schemas.microsoft.com/office/drawing/2014/main" id="{32ECAE88-B9E8-40FE-8E68-A1FAB40EFF0F}"/>
+                <a16:creationId xmlns:a16="http://schemas.microsoft.com/office/drawing/2014/main" id="{D52AAA58-A84A-4E21-B120-99C9266DCDBD}"/>
               </a:ext>
             </a:extLst>
           </p:cNvPr>
@@ -9139,7 +9139,7 @@
           <p:cNvPr id="28" name="">
             <a:extLst xmlns:a="http://schemas.openxmlformats.org/drawingml/2006/main">
               <a:ext uri="{FF2B5EF4-FFF2-40B4-BE49-F238E27FC236}">
-                <a16:creationId xmlns:a16="http://schemas.microsoft.com/office/drawing/2014/main" id="{24D5A6D5-9F3D-415E-9D6D-E75347825F51}"/>
+                <a16:creationId xmlns:a16="http://schemas.microsoft.com/office/drawing/2014/main" id="{EE7B5352-598B-4303-951A-E7982B458868}"/>
               </a:ext>
             </a:extLst>
           </p:cNvPr>
@@ -9191,7 +9191,7 @@
           <p:cNvPr id="29" name="">
             <a:extLst xmlns:a="http://schemas.openxmlformats.org/drawingml/2006/main">
               <a:ext uri="{FF2B5EF4-FFF2-40B4-BE49-F238E27FC236}">
-                <a16:creationId xmlns:a16="http://schemas.microsoft.com/office/drawing/2014/main" id="{42FC7C7E-3A82-476F-A035-D26EF0D9C72D}"/>
+                <a16:creationId xmlns:a16="http://schemas.microsoft.com/office/drawing/2014/main" id="{238D2B98-613D-42C8-BD37-BE971F6DC4BA}"/>
               </a:ext>
             </a:extLst>
           </p:cNvPr>
@@ -9243,7 +9243,7 @@
           <p:cNvPr id="30" name="">
             <a:extLst xmlns:a="http://schemas.openxmlformats.org/drawingml/2006/main">
               <a:ext uri="{FF2B5EF4-FFF2-40B4-BE49-F238E27FC236}">
-                <a16:creationId xmlns:a16="http://schemas.microsoft.com/office/drawing/2014/main" id="{4C7DB8BC-29CF-4C91-973A-D5F292932871}"/>
+                <a16:creationId xmlns:a16="http://schemas.microsoft.com/office/drawing/2014/main" id="{8078E05E-618B-447C-8319-3BC16C405E63}"/>
               </a:ext>
             </a:extLst>
           </p:cNvPr>
@@ -9295,7 +9295,7 @@
           <p:cNvPr id="31" name="">
             <a:extLst xmlns:a="http://schemas.openxmlformats.org/drawingml/2006/main">
               <a:ext uri="{FF2B5EF4-FFF2-40B4-BE49-F238E27FC236}">
-                <a16:creationId xmlns:a16="http://schemas.microsoft.com/office/drawing/2014/main" id="{198F950F-2EBF-45C1-A77F-B96477251F4F}"/>
+                <a16:creationId xmlns:a16="http://schemas.microsoft.com/office/drawing/2014/main" id="{A5DB08B6-72DE-45AB-8A41-3D5EE5E65EDF}"/>
               </a:ext>
             </a:extLst>
           </p:cNvPr>
@@ -9326,7 +9326,7 @@
           <p:cNvPr id="32" name="">
             <a:extLst xmlns:a="http://schemas.openxmlformats.org/drawingml/2006/main">
               <a:ext uri="{FF2B5EF4-FFF2-40B4-BE49-F238E27FC236}">
-                <a16:creationId xmlns:a16="http://schemas.microsoft.com/office/drawing/2014/main" id="{23615892-8574-4DB1-AC10-09AD00FD0BC0}"/>
+                <a16:creationId xmlns:a16="http://schemas.microsoft.com/office/drawing/2014/main" id="{7467B243-8837-4BED-82C4-842E674262F7}"/>
               </a:ext>
             </a:extLst>
           </p:cNvPr>
@@ -9378,7 +9378,7 @@
           <p:cNvPr id="33" name="">
             <a:extLst xmlns:a="http://schemas.openxmlformats.org/drawingml/2006/main">
               <a:ext uri="{FF2B5EF4-FFF2-40B4-BE49-F238E27FC236}">
-                <a16:creationId xmlns:a16="http://schemas.microsoft.com/office/drawing/2014/main" id="{A81967B0-83EF-4106-B72E-C099A7B96BF5}"/>
+                <a16:creationId xmlns:a16="http://schemas.microsoft.com/office/drawing/2014/main" id="{31740934-E53B-4F16-8232-79E9F538506E}"/>
               </a:ext>
             </a:extLst>
           </p:cNvPr>
@@ -9430,7 +9430,7 @@
           <p:cNvPr id="34" name="">
             <a:extLst xmlns:a="http://schemas.openxmlformats.org/drawingml/2006/main">
               <a:ext uri="{FF2B5EF4-FFF2-40B4-BE49-F238E27FC236}">
-                <a16:creationId xmlns:a16="http://schemas.microsoft.com/office/drawing/2014/main" id="{2039F7D2-3020-4FA7-B864-EEBE208B4E71}"/>
+                <a16:creationId xmlns:a16="http://schemas.microsoft.com/office/drawing/2014/main" id="{453D1180-792C-4A48-B194-2E1460A77424}"/>
               </a:ext>
             </a:extLst>
           </p:cNvPr>
@@ -9482,7 +9482,7 @@
           <p:cNvPr id="35" name="">
             <a:extLst xmlns:a="http://schemas.openxmlformats.org/drawingml/2006/main">
               <a:ext uri="{FF2B5EF4-FFF2-40B4-BE49-F238E27FC236}">
-                <a16:creationId xmlns:a16="http://schemas.microsoft.com/office/drawing/2014/main" id="{47B18148-B46A-402E-BA77-6BD898379C28}"/>
+                <a16:creationId xmlns:a16="http://schemas.microsoft.com/office/drawing/2014/main" id="{4DA6B5E1-50AE-40F1-B764-68886461ACA9}"/>
               </a:ext>
             </a:extLst>
           </p:cNvPr>
@@ -9534,7 +9534,7 @@
           <p:cNvPr id="36" name="">
             <a:extLst xmlns:a="http://schemas.openxmlformats.org/drawingml/2006/main">
               <a:ext uri="{FF2B5EF4-FFF2-40B4-BE49-F238E27FC236}">
-                <a16:creationId xmlns:a16="http://schemas.microsoft.com/office/drawing/2014/main" id="{F643CE2A-6168-4CB6-AD1F-E61F6259FFCD}"/>
+                <a16:creationId xmlns:a16="http://schemas.microsoft.com/office/drawing/2014/main" id="{7856F6D7-BCBF-42AC-983D-ADD48FCDC546}"/>
               </a:ext>
             </a:extLst>
           </p:cNvPr>
@@ -9586,7 +9586,7 @@
           <p:cNvPr id="37" name="">
             <a:extLst xmlns:a="http://schemas.openxmlformats.org/drawingml/2006/main">
               <a:ext uri="{FF2B5EF4-FFF2-40B4-BE49-F238E27FC236}">
-                <a16:creationId xmlns:a16="http://schemas.microsoft.com/office/drawing/2014/main" id="{85E4A9C8-6928-41F0-AE73-6F3F91193F8C}"/>
+                <a16:creationId xmlns:a16="http://schemas.microsoft.com/office/drawing/2014/main" id="{F5B470DE-F0EE-448A-871E-2B4594062C35}"/>
               </a:ext>
             </a:extLst>
           </p:cNvPr>
@@ -9617,7 +9617,7 @@
           <p:cNvPr id="38" name="">
             <a:extLst xmlns:a="http://schemas.openxmlformats.org/drawingml/2006/main">
               <a:ext uri="{FF2B5EF4-FFF2-40B4-BE49-F238E27FC236}">
-                <a16:creationId xmlns:a16="http://schemas.microsoft.com/office/drawing/2014/main" id="{7CE4E682-0B50-4A19-9DD3-54C0309AC60F}"/>
+                <a16:creationId xmlns:a16="http://schemas.microsoft.com/office/drawing/2014/main" id="{C0E97E2C-5B11-4DA7-8257-27FCE7AFAF93}"/>
               </a:ext>
             </a:extLst>
           </p:cNvPr>
@@ -9648,7 +9648,7 @@
           <p:cNvPr id="39" name="">
             <a:extLst xmlns:a="http://schemas.openxmlformats.org/drawingml/2006/main">
               <a:ext uri="{FF2B5EF4-FFF2-40B4-BE49-F238E27FC236}">
-                <a16:creationId xmlns:a16="http://schemas.microsoft.com/office/drawing/2014/main" id="{0A5FBC93-2EBC-43BA-8D21-B44C1545B571}"/>
+                <a16:creationId xmlns:a16="http://schemas.microsoft.com/office/drawing/2014/main" id="{5F5D6944-B3AD-4855-8AA1-48A2B0ABBFA5}"/>
               </a:ext>
             </a:extLst>
           </p:cNvPr>
@@ -9700,7 +9700,7 @@
           <p:cNvPr id="40" name="">
             <a:extLst xmlns:a="http://schemas.openxmlformats.org/drawingml/2006/main">
               <a:ext uri="{FF2B5EF4-FFF2-40B4-BE49-F238E27FC236}">
-                <a16:creationId xmlns:a16="http://schemas.microsoft.com/office/drawing/2014/main" id="{1A87EE66-95DA-4245-90F6-C9E3B3E1B1B9}"/>
+                <a16:creationId xmlns:a16="http://schemas.microsoft.com/office/drawing/2014/main" id="{CB42FE47-C475-4989-B127-77C3787C00D1}"/>
               </a:ext>
             </a:extLst>
           </p:cNvPr>
@@ -9752,7 +9752,7 @@
           <p:cNvPr id="41" name="">
             <a:extLst xmlns:a="http://schemas.openxmlformats.org/drawingml/2006/main">
               <a:ext uri="{FF2B5EF4-FFF2-40B4-BE49-F238E27FC236}">
-                <a16:creationId xmlns:a16="http://schemas.microsoft.com/office/drawing/2014/main" id="{EC856D44-2170-47FA-BEF8-D1A28EE35420}"/>
+                <a16:creationId xmlns:a16="http://schemas.microsoft.com/office/drawing/2014/main" id="{B8D314B9-2A35-4495-ABE5-21F202A1B616}"/>
               </a:ext>
             </a:extLst>
           </p:cNvPr>
@@ -9804,7 +9804,7 @@
           <p:cNvPr id="42" name="">
             <a:extLst xmlns:a="http://schemas.openxmlformats.org/drawingml/2006/main">
               <a:ext uri="{FF2B5EF4-FFF2-40B4-BE49-F238E27FC236}">
-                <a16:creationId xmlns:a16="http://schemas.microsoft.com/office/drawing/2014/main" id="{9C98D240-D1B9-4ED3-86AE-3F2D2C532607}"/>
+                <a16:creationId xmlns:a16="http://schemas.microsoft.com/office/drawing/2014/main" id="{BBABB3BD-B37E-43EF-9C31-9CCB4DE91C48}"/>
               </a:ext>
             </a:extLst>
           </p:cNvPr>
@@ -9856,7 +9856,7 @@
           <p:cNvPr id="43" name="">
             <a:extLst xmlns:a="http://schemas.openxmlformats.org/drawingml/2006/main">
               <a:ext uri="{FF2B5EF4-FFF2-40B4-BE49-F238E27FC236}">
-                <a16:creationId xmlns:a16="http://schemas.microsoft.com/office/drawing/2014/main" id="{9A4F7B3E-C076-4A5B-A634-6A8A9D0F0025}"/>
+                <a16:creationId xmlns:a16="http://schemas.microsoft.com/office/drawing/2014/main" id="{DCA97009-9804-4EC9-8A83-C092CC092159}"/>
               </a:ext>
             </a:extLst>
           </p:cNvPr>
@@ -9908,7 +9908,7 @@
           <p:cNvPr id="44" name="">
             <a:extLst xmlns:a="http://schemas.openxmlformats.org/drawingml/2006/main">
               <a:ext uri="{FF2B5EF4-FFF2-40B4-BE49-F238E27FC236}">
-                <a16:creationId xmlns:a16="http://schemas.microsoft.com/office/drawing/2014/main" id="{0F014617-5D53-4483-884A-9580340F7ECC}"/>
+                <a16:creationId xmlns:a16="http://schemas.microsoft.com/office/drawing/2014/main" id="{CB23D743-79E0-4251-9AC7-DE8FBE0CF7CB}"/>
               </a:ext>
             </a:extLst>
           </p:cNvPr>
@@ -9939,7 +9939,7 @@
           <p:cNvPr id="45" name="">
             <a:extLst xmlns:a="http://schemas.openxmlformats.org/drawingml/2006/main">
               <a:ext uri="{FF2B5EF4-FFF2-40B4-BE49-F238E27FC236}">
-                <a16:creationId xmlns:a16="http://schemas.microsoft.com/office/drawing/2014/main" id="{6820C067-70C6-4A65-810C-F3C00790DE44}"/>
+                <a16:creationId xmlns:a16="http://schemas.microsoft.com/office/drawing/2014/main" id="{5859321F-9620-46CD-B967-737F120BFFF9}"/>
               </a:ext>
             </a:extLst>
           </p:cNvPr>
@@ -9991,7 +9991,7 @@
           <p:cNvPr id="46" name="">
             <a:extLst xmlns:a="http://schemas.openxmlformats.org/drawingml/2006/main">
               <a:ext uri="{FF2B5EF4-FFF2-40B4-BE49-F238E27FC236}">
-                <a16:creationId xmlns:a16="http://schemas.microsoft.com/office/drawing/2014/main" id="{A8459023-B54A-4BCD-B7E1-AA5E2048737D}"/>
+                <a16:creationId xmlns:a16="http://schemas.microsoft.com/office/drawing/2014/main" id="{DCAAB99F-748A-4657-BEA2-3D8BF1328E73}"/>
               </a:ext>
             </a:extLst>
           </p:cNvPr>
@@ -10043,7 +10043,7 @@
           <p:cNvPr id="47" name="">
             <a:extLst xmlns:a="http://schemas.openxmlformats.org/drawingml/2006/main">
               <a:ext uri="{FF2B5EF4-FFF2-40B4-BE49-F238E27FC236}">
-                <a16:creationId xmlns:a16="http://schemas.microsoft.com/office/drawing/2014/main" id="{312EA0AC-7ADC-45B6-A3B1-08695FC56A69}"/>
+                <a16:creationId xmlns:a16="http://schemas.microsoft.com/office/drawing/2014/main" id="{1AD7F484-39A8-4F1F-BEF6-AFF27EC9DD37}"/>
               </a:ext>
             </a:extLst>
           </p:cNvPr>
@@ -10095,7 +10095,7 @@
           <p:cNvPr id="48" name="">
             <a:extLst xmlns:a="http://schemas.openxmlformats.org/drawingml/2006/main">
               <a:ext uri="{FF2B5EF4-FFF2-40B4-BE49-F238E27FC236}">
-                <a16:creationId xmlns:a16="http://schemas.microsoft.com/office/drawing/2014/main" id="{C2B01BD3-BC3C-42DA-8C2F-A4ED5FA59A37}"/>
+                <a16:creationId xmlns:a16="http://schemas.microsoft.com/office/drawing/2014/main" id="{3BA77A22-B606-47B2-B744-2BABFBE473F9}"/>
               </a:ext>
             </a:extLst>
           </p:cNvPr>
@@ -10147,7 +10147,7 @@
           <p:cNvPr id="49" name="">
             <a:extLst xmlns:a="http://schemas.openxmlformats.org/drawingml/2006/main">
               <a:ext uri="{FF2B5EF4-FFF2-40B4-BE49-F238E27FC236}">
-                <a16:creationId xmlns:a16="http://schemas.microsoft.com/office/drawing/2014/main" id="{72A932A1-654D-4AB5-97EE-6C6BC6E7BD7F}"/>
+                <a16:creationId xmlns:a16="http://schemas.microsoft.com/office/drawing/2014/main" id="{89CCC401-5A76-4B4C-A50E-D7D7238A8CEC}"/>
               </a:ext>
             </a:extLst>
           </p:cNvPr>
@@ -10199,7 +10199,7 @@
           <p:cNvPr id="50" name="">
             <a:extLst xmlns:a="http://schemas.openxmlformats.org/drawingml/2006/main">
               <a:ext uri="{FF2B5EF4-FFF2-40B4-BE49-F238E27FC236}">
-                <a16:creationId xmlns:a16="http://schemas.microsoft.com/office/drawing/2014/main" id="{44CC161B-037E-4347-AD70-68A59642B935}"/>
+                <a16:creationId xmlns:a16="http://schemas.microsoft.com/office/drawing/2014/main" id="{F9790495-4658-483B-8DF3-2A21051C0239}"/>
               </a:ext>
             </a:extLst>
           </p:cNvPr>
@@ -10251,7 +10251,7 @@
           <p:cNvPr id="51" name="">
             <a:extLst xmlns:a="http://schemas.openxmlformats.org/drawingml/2006/main">
               <a:ext uri="{FF2B5EF4-FFF2-40B4-BE49-F238E27FC236}">
-                <a16:creationId xmlns:a16="http://schemas.microsoft.com/office/drawing/2014/main" id="{B17F080D-6DE4-47C9-9BC8-C81758169301}"/>
+                <a16:creationId xmlns:a16="http://schemas.microsoft.com/office/drawing/2014/main" id="{5D7A2F86-E88D-42B6-9EAC-582CBF044E8E}"/>
               </a:ext>
             </a:extLst>
           </p:cNvPr>
@@ -10282,7 +10282,7 @@
           <p:cNvPr id="52" name="">
             <a:extLst xmlns:a="http://schemas.openxmlformats.org/drawingml/2006/main">
               <a:ext uri="{FF2B5EF4-FFF2-40B4-BE49-F238E27FC236}">
-                <a16:creationId xmlns:a16="http://schemas.microsoft.com/office/drawing/2014/main" id="{8C904B60-E384-45F2-95CC-E0C497E81BDF}"/>
+                <a16:creationId xmlns:a16="http://schemas.microsoft.com/office/drawing/2014/main" id="{D2ED18F0-B4CD-4C9D-928C-4609D33FC954}"/>
               </a:ext>
             </a:extLst>
           </p:cNvPr>
@@ -10313,7 +10313,7 @@
           <p:cNvPr id="53" name="">
             <a:extLst xmlns:a="http://schemas.openxmlformats.org/drawingml/2006/main">
               <a:ext uri="{FF2B5EF4-FFF2-40B4-BE49-F238E27FC236}">
-                <a16:creationId xmlns:a16="http://schemas.microsoft.com/office/drawing/2014/main" id="{F7791CFB-7723-4CAC-AFFF-4F4EBB3382BB}"/>
+                <a16:creationId xmlns:a16="http://schemas.microsoft.com/office/drawing/2014/main" id="{C51A6A7D-A53B-4640-9206-DE753FFE06C1}"/>
               </a:ext>
             </a:extLst>
           </p:cNvPr>
@@ -10344,7 +10344,7 @@
           <p:cNvPr id="54" name="">
             <a:extLst xmlns:a="http://schemas.openxmlformats.org/drawingml/2006/main">
               <a:ext uri="{FF2B5EF4-FFF2-40B4-BE49-F238E27FC236}">
-                <a16:creationId xmlns:a16="http://schemas.microsoft.com/office/drawing/2014/main" id="{2C25CA6C-EBEB-4BEC-80AF-72179C6633B0}"/>
+                <a16:creationId xmlns:a16="http://schemas.microsoft.com/office/drawing/2014/main" id="{AC377759-F2C3-4E08-8CA8-251D54D24E7B}"/>
               </a:ext>
             </a:extLst>
           </p:cNvPr>
@@ -10396,7 +10396,7 @@
           <p:cNvPr id="55" name="">
             <a:extLst xmlns:a="http://schemas.openxmlformats.org/drawingml/2006/main">
               <a:ext uri="{FF2B5EF4-FFF2-40B4-BE49-F238E27FC236}">
-                <a16:creationId xmlns:a16="http://schemas.microsoft.com/office/drawing/2014/main" id="{A2BAF77B-485B-45D8-818D-116AF77BB29A}"/>
+                <a16:creationId xmlns:a16="http://schemas.microsoft.com/office/drawing/2014/main" id="{4763F195-5A97-44B7-8864-B65A6B057A96}"/>
               </a:ext>
             </a:extLst>
           </p:cNvPr>
@@ -10448,7 +10448,7 @@
           <p:cNvPr id="56" name="">
             <a:extLst xmlns:a="http://schemas.openxmlformats.org/drawingml/2006/main">
               <a:ext uri="{FF2B5EF4-FFF2-40B4-BE49-F238E27FC236}">
-                <a16:creationId xmlns:a16="http://schemas.microsoft.com/office/drawing/2014/main" id="{DE690C34-5714-4C4C-8BCD-BCB9BE6A5418}"/>
+                <a16:creationId xmlns:a16="http://schemas.microsoft.com/office/drawing/2014/main" id="{B8E48849-9D59-47C7-B294-8CE378052995}"/>
               </a:ext>
             </a:extLst>
           </p:cNvPr>
@@ -10500,7 +10500,7 @@
           <p:cNvPr id="57" name="">
             <a:extLst xmlns:a="http://schemas.openxmlformats.org/drawingml/2006/main">
               <a:ext uri="{FF2B5EF4-FFF2-40B4-BE49-F238E27FC236}">
-                <a16:creationId xmlns:a16="http://schemas.microsoft.com/office/drawing/2014/main" id="{3EC9A0DD-2C02-405A-A0FE-01C1F92EF685}"/>
+                <a16:creationId xmlns:a16="http://schemas.microsoft.com/office/drawing/2014/main" id="{9C68032C-70B6-4EC6-BF17-A87D323BBAA1}"/>
               </a:ext>
             </a:extLst>
           </p:cNvPr>
@@ -10552,7 +10552,7 @@
           <p:cNvPr id="58" name="">
             <a:extLst xmlns:a="http://schemas.openxmlformats.org/drawingml/2006/main">
               <a:ext uri="{FF2B5EF4-FFF2-40B4-BE49-F238E27FC236}">
-                <a16:creationId xmlns:a16="http://schemas.microsoft.com/office/drawing/2014/main" id="{3F56D864-9DAB-4454-9E29-3B6BF9C90433}"/>
+                <a16:creationId xmlns:a16="http://schemas.microsoft.com/office/drawing/2014/main" id="{1C176BA3-9110-4237-84BD-0F7B191701B3}"/>
               </a:ext>
             </a:extLst>
           </p:cNvPr>
@@ -10604,7 +10604,7 @@
           <p:cNvPr id="59" name="">
             <a:extLst xmlns:a="http://schemas.openxmlformats.org/drawingml/2006/main">
               <a:ext uri="{FF2B5EF4-FFF2-40B4-BE49-F238E27FC236}">
-                <a16:creationId xmlns:a16="http://schemas.microsoft.com/office/drawing/2014/main" id="{2E71B29A-C767-44D3-ACC1-8005A1A957DE}"/>
+                <a16:creationId xmlns:a16="http://schemas.microsoft.com/office/drawing/2014/main" id="{AB304183-A356-4F1A-AD1F-5BDB557BB545}"/>
               </a:ext>
             </a:extLst>
           </p:cNvPr>
@@ -10635,7 +10635,7 @@
           <p:cNvPr id="60" name="">
             <a:extLst xmlns:a="http://schemas.openxmlformats.org/drawingml/2006/main">
               <a:ext uri="{FF2B5EF4-FFF2-40B4-BE49-F238E27FC236}">
-                <a16:creationId xmlns:a16="http://schemas.microsoft.com/office/drawing/2014/main" id="{C8645535-D370-42C3-AA1E-D1C97A65FCFA}"/>
+                <a16:creationId xmlns:a16="http://schemas.microsoft.com/office/drawing/2014/main" id="{ACE3B89C-8BB1-4F11-8552-FE483148E680}"/>
               </a:ext>
             </a:extLst>
           </p:cNvPr>
@@ -10687,7 +10687,7 @@
           <p:cNvPr id="61" name="">
             <a:extLst xmlns:a="http://schemas.openxmlformats.org/drawingml/2006/main">
               <a:ext uri="{FF2B5EF4-FFF2-40B4-BE49-F238E27FC236}">
-                <a16:creationId xmlns:a16="http://schemas.microsoft.com/office/drawing/2014/main" id="{EEA93E6E-8EEC-4FFB-B701-675CD7BBD74F}"/>
+                <a16:creationId xmlns:a16="http://schemas.microsoft.com/office/drawing/2014/main" id="{B89597F5-1F97-4173-AB8C-EFF7A9988DC8}"/>
               </a:ext>
             </a:extLst>
           </p:cNvPr>
@@ -10739,7 +10739,7 @@
           <p:cNvPr id="62" name="">
             <a:extLst xmlns:a="http://schemas.openxmlformats.org/drawingml/2006/main">
               <a:ext uri="{FF2B5EF4-FFF2-40B4-BE49-F238E27FC236}">
-                <a16:creationId xmlns:a16="http://schemas.microsoft.com/office/drawing/2014/main" id="{05A1F132-39A8-4A18-B915-982E4066A4CA}"/>
+                <a16:creationId xmlns:a16="http://schemas.microsoft.com/office/drawing/2014/main" id="{05D20841-D052-4FDD-B863-B9336E5864F0}"/>
               </a:ext>
             </a:extLst>
           </p:cNvPr>
@@ -10791,7 +10791,7 @@
           <p:cNvPr id="63" name="">
             <a:extLst xmlns:a="http://schemas.openxmlformats.org/drawingml/2006/main">
               <a:ext uri="{FF2B5EF4-FFF2-40B4-BE49-F238E27FC236}">
-                <a16:creationId xmlns:a16="http://schemas.microsoft.com/office/drawing/2014/main" id="{94638A5C-E859-4850-AD32-6B710A2AFDF8}"/>
+                <a16:creationId xmlns:a16="http://schemas.microsoft.com/office/drawing/2014/main" id="{69B10941-9DFE-4A4F-B326-EAFAD6D0715C}"/>
               </a:ext>
             </a:extLst>
           </p:cNvPr>
@@ -10843,7 +10843,7 @@
           <p:cNvPr id="64" name="">
             <a:extLst xmlns:a="http://schemas.openxmlformats.org/drawingml/2006/main">
               <a:ext uri="{FF2B5EF4-FFF2-40B4-BE49-F238E27FC236}">
-                <a16:creationId xmlns:a16="http://schemas.microsoft.com/office/drawing/2014/main" id="{213FEC61-A470-4291-94DA-886E5425761D}"/>
+                <a16:creationId xmlns:a16="http://schemas.microsoft.com/office/drawing/2014/main" id="{05BD3C38-17C7-4FAC-AC83-F181BEFE7081}"/>
               </a:ext>
             </a:extLst>
           </p:cNvPr>
@@ -10895,7 +10895,7 @@
           <p:cNvPr id="65" name="">
             <a:extLst xmlns:a="http://schemas.openxmlformats.org/drawingml/2006/main">
               <a:ext uri="{FF2B5EF4-FFF2-40B4-BE49-F238E27FC236}">
-                <a16:creationId xmlns:a16="http://schemas.microsoft.com/office/drawing/2014/main" id="{8284FF04-0BA9-4126-A439-A750874A4619}"/>
+                <a16:creationId xmlns:a16="http://schemas.microsoft.com/office/drawing/2014/main" id="{D06C2F31-40D7-43EF-81A5-3B47721F984C}"/>
               </a:ext>
             </a:extLst>
           </p:cNvPr>
@@ -10926,7 +10926,7 @@
           <p:cNvPr id="66" name="">
             <a:extLst xmlns:a="http://schemas.openxmlformats.org/drawingml/2006/main">
               <a:ext uri="{FF2B5EF4-FFF2-40B4-BE49-F238E27FC236}">
-                <a16:creationId xmlns:a16="http://schemas.microsoft.com/office/drawing/2014/main" id="{C594EEB9-475A-4367-A349-5C998F50EEEE}"/>
+                <a16:creationId xmlns:a16="http://schemas.microsoft.com/office/drawing/2014/main" id="{0DE52071-3329-4B1F-935F-A37FAC7864D7}"/>
               </a:ext>
             </a:extLst>
           </p:cNvPr>
@@ -10957,7 +10957,7 @@
           <p:cNvPr id="67" name="">
             <a:extLst xmlns:a="http://schemas.openxmlformats.org/drawingml/2006/main">
               <a:ext uri="{FF2B5EF4-FFF2-40B4-BE49-F238E27FC236}">
-                <a16:creationId xmlns:a16="http://schemas.microsoft.com/office/drawing/2014/main" id="{50F76231-9873-479E-ADF8-1416827DBE4E}"/>
+                <a16:creationId xmlns:a16="http://schemas.microsoft.com/office/drawing/2014/main" id="{C5516646-2D12-4F70-86F7-3D443F0643EF}"/>
               </a:ext>
             </a:extLst>
           </p:cNvPr>
@@ -11009,7 +11009,7 @@
           <p:cNvPr id="68" name="">
             <a:extLst xmlns:a="http://schemas.openxmlformats.org/drawingml/2006/main">
               <a:ext uri="{FF2B5EF4-FFF2-40B4-BE49-F238E27FC236}">
-                <a16:creationId xmlns:a16="http://schemas.microsoft.com/office/drawing/2014/main" id="{C5D21F91-2B0B-4B77-B3BE-DE4713D45BDE}"/>
+                <a16:creationId xmlns:a16="http://schemas.microsoft.com/office/drawing/2014/main" id="{DCB7107C-1A80-4604-A08F-C74FC4DBC709}"/>
               </a:ext>
             </a:extLst>
           </p:cNvPr>
@@ -11061,7 +11061,7 @@
           <p:cNvPr id="69" name="">
             <a:extLst xmlns:a="http://schemas.openxmlformats.org/drawingml/2006/main">
               <a:ext uri="{FF2B5EF4-FFF2-40B4-BE49-F238E27FC236}">
-                <a16:creationId xmlns:a16="http://schemas.microsoft.com/office/drawing/2014/main" id="{4396367A-475B-4B72-A7E0-2DCEFFDF8477}"/>
+                <a16:creationId xmlns:a16="http://schemas.microsoft.com/office/drawing/2014/main" id="{59EF6986-AB6E-4F9E-BBC6-101DD7468920}"/>
               </a:ext>
             </a:extLst>
           </p:cNvPr>
@@ -11113,7 +11113,7 @@
           <p:cNvPr id="70" name="">
             <a:extLst xmlns:a="http://schemas.openxmlformats.org/drawingml/2006/main">
               <a:ext uri="{FF2B5EF4-FFF2-40B4-BE49-F238E27FC236}">
-                <a16:creationId xmlns:a16="http://schemas.microsoft.com/office/drawing/2014/main" id="{321F3CDF-6817-49EB-A71D-DE81C72838C3}"/>
+                <a16:creationId xmlns:a16="http://schemas.microsoft.com/office/drawing/2014/main" id="{D753C49F-E495-4926-B0E9-5837E8DA2E16}"/>
               </a:ext>
             </a:extLst>
           </p:cNvPr>
@@ -11165,7 +11165,7 @@
           <p:cNvPr id="71" name="">
             <a:extLst xmlns:a="http://schemas.openxmlformats.org/drawingml/2006/main">
               <a:ext uri="{FF2B5EF4-FFF2-40B4-BE49-F238E27FC236}">
-                <a16:creationId xmlns:a16="http://schemas.microsoft.com/office/drawing/2014/main" id="{F5850F3F-108A-4182-ACD8-3BB9BBA65BB9}"/>
+                <a16:creationId xmlns:a16="http://schemas.microsoft.com/office/drawing/2014/main" id="{9FAD6049-51A8-4C49-8C2D-4B5C7E51C344}"/>
               </a:ext>
             </a:extLst>
           </p:cNvPr>
@@ -11217,7 +11217,7 @@
           <p:cNvPr id="72" name="">
             <a:extLst xmlns:a="http://schemas.openxmlformats.org/drawingml/2006/main">
               <a:ext uri="{FF2B5EF4-FFF2-40B4-BE49-F238E27FC236}">
-                <a16:creationId xmlns:a16="http://schemas.microsoft.com/office/drawing/2014/main" id="{0368B3A5-FC33-4772-B529-D0E0A7422322}"/>
+                <a16:creationId xmlns:a16="http://schemas.microsoft.com/office/drawing/2014/main" id="{CB704017-AC2B-4598-9BB1-D853CA88DD6F}"/>
               </a:ext>
             </a:extLst>
           </p:cNvPr>
@@ -11248,7 +11248,7 @@
           <p:cNvPr id="73" name="">
             <a:extLst xmlns:a="http://schemas.openxmlformats.org/drawingml/2006/main">
               <a:ext uri="{FF2B5EF4-FFF2-40B4-BE49-F238E27FC236}">
-                <a16:creationId xmlns:a16="http://schemas.microsoft.com/office/drawing/2014/main" id="{39EACE9C-2FC4-4253-938E-407982C742E2}"/>
+                <a16:creationId xmlns:a16="http://schemas.microsoft.com/office/drawing/2014/main" id="{163E4843-E4E4-4B99-8116-98B5D8C5EDBD}"/>
               </a:ext>
             </a:extLst>
           </p:cNvPr>
@@ -11300,7 +11300,7 @@
           <p:cNvPr id="74" name="">
             <a:extLst xmlns:a="http://schemas.openxmlformats.org/drawingml/2006/main">
               <a:ext uri="{FF2B5EF4-FFF2-40B4-BE49-F238E27FC236}">
-                <a16:creationId xmlns:a16="http://schemas.microsoft.com/office/drawing/2014/main" id="{B6B71742-9866-4A21-8DD8-F28EBBB66CAB}"/>
+                <a16:creationId xmlns:a16="http://schemas.microsoft.com/office/drawing/2014/main" id="{46A26B11-7F20-4D75-8CB6-01CD37831784}"/>
               </a:ext>
             </a:extLst>
           </p:cNvPr>
@@ -11352,7 +11352,7 @@
           <p:cNvPr id="75" name="">
             <a:extLst xmlns:a="http://schemas.openxmlformats.org/drawingml/2006/main">
               <a:ext uri="{FF2B5EF4-FFF2-40B4-BE49-F238E27FC236}">
-                <a16:creationId xmlns:a16="http://schemas.microsoft.com/office/drawing/2014/main" id="{E26398AE-334F-4189-967C-DE6C3EDA4399}"/>
+                <a16:creationId xmlns:a16="http://schemas.microsoft.com/office/drawing/2014/main" id="{2C1036C6-C187-496E-A71E-F242B1AF918C}"/>
               </a:ext>
             </a:extLst>
           </p:cNvPr>
@@ -11404,7 +11404,7 @@
           <p:cNvPr id="76" name="">
             <a:extLst xmlns:a="http://schemas.openxmlformats.org/drawingml/2006/main">
               <a:ext uri="{FF2B5EF4-FFF2-40B4-BE49-F238E27FC236}">
-                <a16:creationId xmlns:a16="http://schemas.microsoft.com/office/drawing/2014/main" id="{40095BAD-0381-4B06-9592-C4F794D73451}"/>
+                <a16:creationId xmlns:a16="http://schemas.microsoft.com/office/drawing/2014/main" id="{5DC8F823-7D07-4FAB-8221-F8DBBA748259}"/>
               </a:ext>
             </a:extLst>
           </p:cNvPr>
@@ -11456,7 +11456,7 @@
           <p:cNvPr id="77" name="">
             <a:extLst xmlns:a="http://schemas.openxmlformats.org/drawingml/2006/main">
               <a:ext uri="{FF2B5EF4-FFF2-40B4-BE49-F238E27FC236}">
-                <a16:creationId xmlns:a16="http://schemas.microsoft.com/office/drawing/2014/main" id="{071CF5D7-15C9-4972-9B33-2BD86241C99E}"/>
+                <a16:creationId xmlns:a16="http://schemas.microsoft.com/office/drawing/2014/main" id="{DE17D9E2-25DA-495A-AD6C-100456C3C890}"/>
               </a:ext>
             </a:extLst>
           </p:cNvPr>
@@ -11508,7 +11508,7 @@
           <p:cNvPr id="78" name="">
             <a:extLst xmlns:a="http://schemas.openxmlformats.org/drawingml/2006/main">
               <a:ext uri="{FF2B5EF4-FFF2-40B4-BE49-F238E27FC236}">
-                <a16:creationId xmlns:a16="http://schemas.microsoft.com/office/drawing/2014/main" id="{59C10909-F5E2-4166-9471-8F0EFC970F23}"/>
+                <a16:creationId xmlns:a16="http://schemas.microsoft.com/office/drawing/2014/main" id="{529EB3AE-F8FF-403C-8503-D761BAD8B6DD}"/>
               </a:ext>
             </a:extLst>
           </p:cNvPr>
@@ -11539,7 +11539,7 @@
           <p:cNvPr id="79" name="">
             <a:extLst xmlns:a="http://schemas.openxmlformats.org/drawingml/2006/main">
               <a:ext uri="{FF2B5EF4-FFF2-40B4-BE49-F238E27FC236}">
-                <a16:creationId xmlns:a16="http://schemas.microsoft.com/office/drawing/2014/main" id="{200D92B6-43AE-41E2-AAA1-3B5548BA485C}"/>
+                <a16:creationId xmlns:a16="http://schemas.microsoft.com/office/drawing/2014/main" id="{5DFC7D9E-E7FE-4E10-A331-0A9337743E92}"/>
               </a:ext>
             </a:extLst>
           </p:cNvPr>
@@ -11570,7 +11570,7 @@
           <p:cNvPr id="80" name="">
             <a:extLst xmlns:a="http://schemas.openxmlformats.org/drawingml/2006/main">
               <a:ext uri="{FF2B5EF4-FFF2-40B4-BE49-F238E27FC236}">
-                <a16:creationId xmlns:a16="http://schemas.microsoft.com/office/drawing/2014/main" id="{0DB921EE-04A8-45D5-A050-F4B642ABAE25}"/>
+                <a16:creationId xmlns:a16="http://schemas.microsoft.com/office/drawing/2014/main" id="{85470D39-5C10-422A-89CF-759511330DBD}"/>
               </a:ext>
             </a:extLst>
           </p:cNvPr>
@@ -11622,7 +11622,7 @@
           <p:cNvPr id="81" name="">
             <a:extLst xmlns:a="http://schemas.openxmlformats.org/drawingml/2006/main">
               <a:ext uri="{FF2B5EF4-FFF2-40B4-BE49-F238E27FC236}">
-                <a16:creationId xmlns:a16="http://schemas.microsoft.com/office/drawing/2014/main" id="{D215825D-DF70-486E-9861-87BBD2CDE97A}"/>
+                <a16:creationId xmlns:a16="http://schemas.microsoft.com/office/drawing/2014/main" id="{4350E368-95A2-425C-88A4-07638D6103F1}"/>
               </a:ext>
             </a:extLst>
           </p:cNvPr>
@@ -11674,7 +11674,7 @@
           <p:cNvPr id="82" name="">
             <a:extLst xmlns:a="http://schemas.openxmlformats.org/drawingml/2006/main">
               <a:ext uri="{FF2B5EF4-FFF2-40B4-BE49-F238E27FC236}">
-                <a16:creationId xmlns:a16="http://schemas.microsoft.com/office/drawing/2014/main" id="{CE74D3AB-8E21-47FE-84A2-573E5BBC3266}"/>
+                <a16:creationId xmlns:a16="http://schemas.microsoft.com/office/drawing/2014/main" id="{FC8781E0-7083-40F2-9A51-B337E8FA8602}"/>
               </a:ext>
             </a:extLst>
           </p:cNvPr>
@@ -11726,7 +11726,7 @@
           <p:cNvPr id="83" name="">
             <a:extLst xmlns:a="http://schemas.openxmlformats.org/drawingml/2006/main">
               <a:ext uri="{FF2B5EF4-FFF2-40B4-BE49-F238E27FC236}">
-                <a16:creationId xmlns:a16="http://schemas.microsoft.com/office/drawing/2014/main" id="{94A294D2-7CCE-412E-89F5-61652D17167E}"/>
+                <a16:creationId xmlns:a16="http://schemas.microsoft.com/office/drawing/2014/main" id="{EFD48757-C5D0-4C0C-A27F-850AD6D60ADF}"/>
               </a:ext>
             </a:extLst>
           </p:cNvPr>
@@ -11778,7 +11778,7 @@
           <p:cNvPr id="84" name="">
             <a:extLst xmlns:a="http://schemas.openxmlformats.org/drawingml/2006/main">
               <a:ext uri="{FF2B5EF4-FFF2-40B4-BE49-F238E27FC236}">
-                <a16:creationId xmlns:a16="http://schemas.microsoft.com/office/drawing/2014/main" id="{63F47A34-A545-4C23-9640-876F3E08D572}"/>
+                <a16:creationId xmlns:a16="http://schemas.microsoft.com/office/drawing/2014/main" id="{52F3D756-59F8-4AB0-8EF6-28E263895BD0}"/>
               </a:ext>
             </a:extLst>
           </p:cNvPr>
@@ -11830,7 +11830,7 @@
           <p:cNvPr id="85" name="">
             <a:extLst xmlns:a="http://schemas.openxmlformats.org/drawingml/2006/main">
               <a:ext uri="{FF2B5EF4-FFF2-40B4-BE49-F238E27FC236}">
-                <a16:creationId xmlns:a16="http://schemas.microsoft.com/office/drawing/2014/main" id="{288326BB-96BF-4459-83D3-747AA8F67B58}"/>
+                <a16:creationId xmlns:a16="http://schemas.microsoft.com/office/drawing/2014/main" id="{80AA806F-2A7C-4B9A-BAED-FD74F14845C3}"/>
               </a:ext>
             </a:extLst>
           </p:cNvPr>
@@ -11861,7 +11861,7 @@
           <p:cNvPr id="86" name="">
             <a:extLst xmlns:a="http://schemas.openxmlformats.org/drawingml/2006/main">
               <a:ext uri="{FF2B5EF4-FFF2-40B4-BE49-F238E27FC236}">
-                <a16:creationId xmlns:a16="http://schemas.microsoft.com/office/drawing/2014/main" id="{4374A3E0-61A0-4CC7-95F9-B92005AE6E74}"/>
+                <a16:creationId xmlns:a16="http://schemas.microsoft.com/office/drawing/2014/main" id="{1B52BFD1-3A2C-431A-AF4B-7340BCADC433}"/>
               </a:ext>
             </a:extLst>
           </p:cNvPr>
@@ -11913,7 +11913,7 @@
           <p:cNvPr id="87" name="">
             <a:extLst xmlns:a="http://schemas.openxmlformats.org/drawingml/2006/main">
               <a:ext uri="{FF2B5EF4-FFF2-40B4-BE49-F238E27FC236}">
-                <a16:creationId xmlns:a16="http://schemas.microsoft.com/office/drawing/2014/main" id="{82615C63-5E67-4E62-8F9E-C5DEE86B96F1}"/>
+                <a16:creationId xmlns:a16="http://schemas.microsoft.com/office/drawing/2014/main" id="{575D071A-FF75-41E1-8E70-AAA50B8C95F3}"/>
               </a:ext>
             </a:extLst>
           </p:cNvPr>
@@ -11965,7 +11965,7 @@
           <p:cNvPr id="88" name="">
             <a:extLst xmlns:a="http://schemas.openxmlformats.org/drawingml/2006/main">
               <a:ext uri="{FF2B5EF4-FFF2-40B4-BE49-F238E27FC236}">
-                <a16:creationId xmlns:a16="http://schemas.microsoft.com/office/drawing/2014/main" id="{72068F13-F79D-4789-8488-B9F09A024917}"/>
+                <a16:creationId xmlns:a16="http://schemas.microsoft.com/office/drawing/2014/main" id="{834857FC-1C25-447E-A62B-F68E146F5DEF}"/>
               </a:ext>
             </a:extLst>
           </p:cNvPr>
@@ -12017,7 +12017,7 @@
           <p:cNvPr id="89" name="">
             <a:extLst xmlns:a="http://schemas.openxmlformats.org/drawingml/2006/main">
               <a:ext uri="{FF2B5EF4-FFF2-40B4-BE49-F238E27FC236}">
-                <a16:creationId xmlns:a16="http://schemas.microsoft.com/office/drawing/2014/main" id="{E4AE8A53-BDB3-4335-8ED3-7367EF626F67}"/>
+                <a16:creationId xmlns:a16="http://schemas.microsoft.com/office/drawing/2014/main" id="{F12D49D6-5D09-4192-A74C-766FF8E194AF}"/>
               </a:ext>
             </a:extLst>
           </p:cNvPr>
@@ -12069,7 +12069,7 @@
           <p:cNvPr id="90" name="">
             <a:extLst xmlns:a="http://schemas.openxmlformats.org/drawingml/2006/main">
               <a:ext uri="{FF2B5EF4-FFF2-40B4-BE49-F238E27FC236}">
-                <a16:creationId xmlns:a16="http://schemas.microsoft.com/office/drawing/2014/main" id="{C761F060-BAB6-44E2-82A1-5B64F4B72592}"/>
+                <a16:creationId xmlns:a16="http://schemas.microsoft.com/office/drawing/2014/main" id="{C776D566-CFED-4451-B513-2318E3F57DEB}"/>
               </a:ext>
             </a:extLst>
           </p:cNvPr>
@@ -12121,7 +12121,7 @@
           <p:cNvPr id="91" name="">
             <a:extLst xmlns:a="http://schemas.openxmlformats.org/drawingml/2006/main">
               <a:ext uri="{FF2B5EF4-FFF2-40B4-BE49-F238E27FC236}">
-                <a16:creationId xmlns:a16="http://schemas.microsoft.com/office/drawing/2014/main" id="{505C3E9E-2EED-4758-A872-7163FBEF4A73}"/>
+                <a16:creationId xmlns:a16="http://schemas.microsoft.com/office/drawing/2014/main" id="{6CAB77BE-96B9-4EA6-8F9D-DA15AF34D0A9}"/>
               </a:ext>
             </a:extLst>
           </p:cNvPr>
@@ -12152,7 +12152,7 @@
           <p:cNvPr id="92" name="">
             <a:extLst xmlns:a="http://schemas.openxmlformats.org/drawingml/2006/main">
               <a:ext uri="{FF2B5EF4-FFF2-40B4-BE49-F238E27FC236}">
-                <a16:creationId xmlns:a16="http://schemas.microsoft.com/office/drawing/2014/main" id="{F21E70B1-DEF5-4E7A-8B3E-8017B86EB089}"/>
+                <a16:creationId xmlns:a16="http://schemas.microsoft.com/office/drawing/2014/main" id="{AD86D20A-DCCB-47C6-86A4-27F9AE628702}"/>
               </a:ext>
             </a:extLst>
           </p:cNvPr>
@@ -12183,7 +12183,7 @@
           <p:cNvPr id="93" name="">
             <a:extLst xmlns:a="http://schemas.openxmlformats.org/drawingml/2006/main">
               <a:ext uri="{FF2B5EF4-FFF2-40B4-BE49-F238E27FC236}">
-                <a16:creationId xmlns:a16="http://schemas.microsoft.com/office/drawing/2014/main" id="{1029EA12-935E-42B6-88D8-36EB947E6C50}"/>
+                <a16:creationId xmlns:a16="http://schemas.microsoft.com/office/drawing/2014/main" id="{D8BDBDA7-9D57-4B76-BF4F-D002CD1FFC74}"/>
               </a:ext>
             </a:extLst>
           </p:cNvPr>
@@ -12235,7 +12235,7 @@
           <p:cNvPr id="94" name="">
             <a:extLst xmlns:a="http://schemas.openxmlformats.org/drawingml/2006/main">
               <a:ext uri="{FF2B5EF4-FFF2-40B4-BE49-F238E27FC236}">
-                <a16:creationId xmlns:a16="http://schemas.microsoft.com/office/drawing/2014/main" id="{446D7553-D9F6-4B3F-A376-04727F96EC18}"/>
+                <a16:creationId xmlns:a16="http://schemas.microsoft.com/office/drawing/2014/main" id="{E273A76F-44CF-4865-8F69-86DAABC02B8B}"/>
               </a:ext>
             </a:extLst>
           </p:cNvPr>
@@ -12287,7 +12287,7 @@
           <p:cNvPr id="95" name="">
             <a:extLst xmlns:a="http://schemas.openxmlformats.org/drawingml/2006/main">
               <a:ext uri="{FF2B5EF4-FFF2-40B4-BE49-F238E27FC236}">
-                <a16:creationId xmlns:a16="http://schemas.microsoft.com/office/drawing/2014/main" id="{784A8831-48BE-4C9F-96F8-2E9931A155D3}"/>
+                <a16:creationId xmlns:a16="http://schemas.microsoft.com/office/drawing/2014/main" id="{E38F5162-AFC6-4DA3-ACE4-7E0B2503B145}"/>
               </a:ext>
             </a:extLst>
           </p:cNvPr>
@@ -12339,7 +12339,7 @@
           <p:cNvPr id="96" name="">
             <a:extLst xmlns:a="http://schemas.openxmlformats.org/drawingml/2006/main">
               <a:ext uri="{FF2B5EF4-FFF2-40B4-BE49-F238E27FC236}">
-                <a16:creationId xmlns:a16="http://schemas.microsoft.com/office/drawing/2014/main" id="{976B4411-6749-4E43-BB37-989D6486DE05}"/>
+                <a16:creationId xmlns:a16="http://schemas.microsoft.com/office/drawing/2014/main" id="{FC2B1ECD-A9DB-49EF-BB17-8B207E303671}"/>
               </a:ext>
             </a:extLst>
           </p:cNvPr>
@@ -12391,7 +12391,7 @@
           <p:cNvPr id="97" name="">
             <a:extLst xmlns:a="http://schemas.openxmlformats.org/drawingml/2006/main">
               <a:ext uri="{FF2B5EF4-FFF2-40B4-BE49-F238E27FC236}">
-                <a16:creationId xmlns:a16="http://schemas.microsoft.com/office/drawing/2014/main" id="{66C6D13E-18D1-45C0-9425-E9379D1CC115}"/>
+                <a16:creationId xmlns:a16="http://schemas.microsoft.com/office/drawing/2014/main" id="{1216E5C0-A5D3-4C27-9A75-BFF7C0A4124F}"/>
               </a:ext>
             </a:extLst>
           </p:cNvPr>
@@ -12441,7 +12441,7 @@
     </p:spTree>
     <p:extLst>
       <p:ext uri="{BB962C8B-B14F-4D97-AF65-F5344CB8AC3E}">
-        <p14:creationId xmlns:p14="http://schemas.microsoft.com/office/powerpoint/2010/main" val="1287608515"/>
+        <p14:creationId xmlns:p14="http://schemas.microsoft.com/office/powerpoint/2010/main" val="423089821"/>
       </p:ext>
     </p:extLst>
   </p:cSld>
@@ -12472,7 +12472,7 @@
           <p:cNvPr id="102" name="">
             <a:extLst xmlns:a="http://schemas.openxmlformats.org/drawingml/2006/main">
               <a:ext uri="{FF2B5EF4-FFF2-40B4-BE49-F238E27FC236}">
-                <a16:creationId xmlns:a16="http://schemas.microsoft.com/office/drawing/2014/main" id="{A59FE9E3-3B46-459F-8AC3-3C9698CBC022}"/>
+                <a16:creationId xmlns:a16="http://schemas.microsoft.com/office/drawing/2014/main" id="{C63FA62B-ECED-4378-AF1E-4820B8464586}"/>
               </a:ext>
             </a:extLst>
           </p:cNvPr>
@@ -12505,7 +12505,7 @@
           <p:cNvPr id="2" name="">
             <a:extLst xmlns:a="http://schemas.openxmlformats.org/drawingml/2006/main">
               <a:ext uri="{FF2B5EF4-FFF2-40B4-BE49-F238E27FC236}">
-                <a16:creationId xmlns:a16="http://schemas.microsoft.com/office/drawing/2014/main" id="{2642C0B2-79C2-45C1-AA53-3EE6C54339D9}"/>
+                <a16:creationId xmlns:a16="http://schemas.microsoft.com/office/drawing/2014/main" id="{AC097105-D4D3-4EE9-8A5C-9FE5487043AD}"/>
               </a:ext>
             </a:extLst>
           </p:cNvPr>
@@ -12536,7 +12536,7 @@
           <p:cNvPr id="3" name="">
             <a:extLst xmlns:a="http://schemas.openxmlformats.org/drawingml/2006/main">
               <a:ext uri="{FF2B5EF4-FFF2-40B4-BE49-F238E27FC236}">
-                <a16:creationId xmlns:a16="http://schemas.microsoft.com/office/drawing/2014/main" id="{E7B2508C-B4EA-4DB8-808D-AB0657D201DB}"/>
+                <a16:creationId xmlns:a16="http://schemas.microsoft.com/office/drawing/2014/main" id="{5C9C25A3-238D-4EDB-9C11-807CFD6D0BA7}"/>
               </a:ext>
             </a:extLst>
           </p:cNvPr>
@@ -12588,7 +12588,7 @@
           <p:cNvPr id="4" name="">
             <a:extLst xmlns:a="http://schemas.openxmlformats.org/drawingml/2006/main">
               <a:ext uri="{FF2B5EF4-FFF2-40B4-BE49-F238E27FC236}">
-                <a16:creationId xmlns:a16="http://schemas.microsoft.com/office/drawing/2014/main" id="{BB2B701D-B9F7-41C4-869E-3F9252D16888}"/>
+                <a16:creationId xmlns:a16="http://schemas.microsoft.com/office/drawing/2014/main" id="{2079E0B3-39FE-4A4F-9FC5-145D7C5E88C3}"/>
               </a:ext>
             </a:extLst>
           </p:cNvPr>
@@ -12640,7 +12640,7 @@
           <p:cNvPr id="5" name="">
             <a:extLst xmlns:a="http://schemas.openxmlformats.org/drawingml/2006/main">
               <a:ext uri="{FF2B5EF4-FFF2-40B4-BE49-F238E27FC236}">
-                <a16:creationId xmlns:a16="http://schemas.microsoft.com/office/drawing/2014/main" id="{3434F4E9-6F08-4109-B2B6-64708B13B5D3}"/>
+                <a16:creationId xmlns:a16="http://schemas.microsoft.com/office/drawing/2014/main" id="{6F88E0D3-B1D2-4648-A582-9C6D243142F5}"/>
               </a:ext>
             </a:extLst>
           </p:cNvPr>
@@ -12675,7 +12675,7 @@
           <p:nvPr/>
         </p:nvPicPr>
         <p:blipFill>
-          <a:blip xmlns:r="http://schemas.openxmlformats.org/officeDocument/2006/relationships" xmlns:a="http://schemas.openxmlformats.org/drawingml/2006/main" r:embed="R112c1cd87639472e"/>
+          <a:blip xmlns:r="http://schemas.openxmlformats.org/officeDocument/2006/relationships" xmlns:a="http://schemas.openxmlformats.org/drawingml/2006/main" r:embed="R99aeda51e5864818"/>
           <a:stretch xmlns:a="http://schemas.openxmlformats.org/drawingml/2006/main"/>
         </p:blipFill>
         <p:spPr>
@@ -12693,7 +12693,7 @@
           <p:cNvPr id="7" name="">
             <a:extLst xmlns:a="http://schemas.openxmlformats.org/drawingml/2006/main">
               <a:ext uri="{FF2B5EF4-FFF2-40B4-BE49-F238E27FC236}">
-                <a16:creationId xmlns:a16="http://schemas.microsoft.com/office/drawing/2014/main" id="{08744B8B-CCD8-40B0-AECC-BD69F4A1A437}"/>
+                <a16:creationId xmlns:a16="http://schemas.microsoft.com/office/drawing/2014/main" id="{71A5297F-02A4-4945-B831-D90D89EF03DD}"/>
               </a:ext>
             </a:extLst>
           </p:cNvPr>
@@ -12745,7 +12745,7 @@
           <p:cNvPr id="8" name="">
             <a:extLst xmlns:a="http://schemas.openxmlformats.org/drawingml/2006/main">
               <a:ext uri="{FF2B5EF4-FFF2-40B4-BE49-F238E27FC236}">
-                <a16:creationId xmlns:a16="http://schemas.microsoft.com/office/drawing/2014/main" id="{236E98F0-3529-4400-A2C0-D20348594AE5}"/>
+                <a16:creationId xmlns:a16="http://schemas.microsoft.com/office/drawing/2014/main" id="{8A32610F-84CB-4EE5-A42A-A905A5B12E71}"/>
               </a:ext>
             </a:extLst>
           </p:cNvPr>
@@ -12797,7 +12797,7 @@
           <p:cNvPr id="9" name="">
             <a:extLst xmlns:a="http://schemas.openxmlformats.org/drawingml/2006/main">
               <a:ext uri="{FF2B5EF4-FFF2-40B4-BE49-F238E27FC236}">
-                <a16:creationId xmlns:a16="http://schemas.microsoft.com/office/drawing/2014/main" id="{FC8C520D-7124-464D-A7E7-407E00989FD1}"/>
+                <a16:creationId xmlns:a16="http://schemas.microsoft.com/office/drawing/2014/main" id="{FC865B86-72D9-48C8-BB7A-5AAA28E759CA}"/>
               </a:ext>
             </a:extLst>
           </p:cNvPr>
@@ -12849,7 +12849,7 @@
           <p:cNvPr id="10" name="">
             <a:extLst xmlns:a="http://schemas.openxmlformats.org/drawingml/2006/main">
               <a:ext uri="{FF2B5EF4-FFF2-40B4-BE49-F238E27FC236}">
-                <a16:creationId xmlns:a16="http://schemas.microsoft.com/office/drawing/2014/main" id="{0150E5BB-E189-4EF4-9D28-EDFEED573D47}"/>
+                <a16:creationId xmlns:a16="http://schemas.microsoft.com/office/drawing/2014/main" id="{CC474721-4AEF-4F2C-B585-7853D292DC75}"/>
               </a:ext>
             </a:extLst>
           </p:cNvPr>
@@ -12901,7 +12901,7 @@
           <p:cNvPr id="11" name="">
             <a:extLst xmlns:a="http://schemas.openxmlformats.org/drawingml/2006/main">
               <a:ext uri="{FF2B5EF4-FFF2-40B4-BE49-F238E27FC236}">
-                <a16:creationId xmlns:a16="http://schemas.microsoft.com/office/drawing/2014/main" id="{804B294F-2CA9-4CFF-8A0E-803CDD03D2C5}"/>
+                <a16:creationId xmlns:a16="http://schemas.microsoft.com/office/drawing/2014/main" id="{5FB63A05-0C9B-46F3-9480-B50D760FABFD}"/>
               </a:ext>
             </a:extLst>
           </p:cNvPr>
@@ -12932,7 +12932,7 @@
           <p:cNvPr id="12" name="">
             <a:extLst xmlns:a="http://schemas.openxmlformats.org/drawingml/2006/main">
               <a:ext uri="{FF2B5EF4-FFF2-40B4-BE49-F238E27FC236}">
-                <a16:creationId xmlns:a16="http://schemas.microsoft.com/office/drawing/2014/main" id="{99ED2795-370E-443D-8843-420B049673D5}"/>
+                <a16:creationId xmlns:a16="http://schemas.microsoft.com/office/drawing/2014/main" id="{AEBA9FE3-0668-4509-9930-1013687ADDD1}"/>
               </a:ext>
             </a:extLst>
           </p:cNvPr>
@@ -12963,7 +12963,7 @@
           <p:cNvPr id="13" name="">
             <a:extLst xmlns:a="http://schemas.openxmlformats.org/drawingml/2006/main">
               <a:ext uri="{FF2B5EF4-FFF2-40B4-BE49-F238E27FC236}">
-                <a16:creationId xmlns:a16="http://schemas.microsoft.com/office/drawing/2014/main" id="{9C021960-AD41-4A91-82E6-D5432E4D558D}"/>
+                <a16:creationId xmlns:a16="http://schemas.microsoft.com/office/drawing/2014/main" id="{25F44782-E3F6-405E-BED8-DC06F39CEA62}"/>
               </a:ext>
             </a:extLst>
           </p:cNvPr>
@@ -13015,7 +13015,7 @@
           <p:cNvPr id="14" name="">
             <a:extLst xmlns:a="http://schemas.openxmlformats.org/drawingml/2006/main">
               <a:ext uri="{FF2B5EF4-FFF2-40B4-BE49-F238E27FC236}">
-                <a16:creationId xmlns:a16="http://schemas.microsoft.com/office/drawing/2014/main" id="{45DD69BB-23B0-4DAC-8E4D-A82B4EE48D12}"/>
+                <a16:creationId xmlns:a16="http://schemas.microsoft.com/office/drawing/2014/main" id="{5079775B-22CC-4B06-92AC-EBEE8E4AC518}"/>
               </a:ext>
             </a:extLst>
           </p:cNvPr>
@@ -13067,7 +13067,7 @@
           <p:cNvPr id="15" name="">
             <a:extLst xmlns:a="http://schemas.openxmlformats.org/drawingml/2006/main">
               <a:ext uri="{FF2B5EF4-FFF2-40B4-BE49-F238E27FC236}">
-                <a16:creationId xmlns:a16="http://schemas.microsoft.com/office/drawing/2014/main" id="{A10A2DDC-7B9A-40AE-B4CA-7D505E30D54D}"/>
+                <a16:creationId xmlns:a16="http://schemas.microsoft.com/office/drawing/2014/main" id="{BFA3E41A-52B1-4B01-86E1-3C0E1FEE5ACB}"/>
               </a:ext>
             </a:extLst>
           </p:cNvPr>
@@ -13119,7 +13119,7 @@
           <p:cNvPr id="16" name="">
             <a:extLst xmlns:a="http://schemas.openxmlformats.org/drawingml/2006/main">
               <a:ext uri="{FF2B5EF4-FFF2-40B4-BE49-F238E27FC236}">
-                <a16:creationId xmlns:a16="http://schemas.microsoft.com/office/drawing/2014/main" id="{58C4E946-DC1B-4E5A-A64A-6130D164631D}"/>
+                <a16:creationId xmlns:a16="http://schemas.microsoft.com/office/drawing/2014/main" id="{A8A6F965-0049-4B31-BCB3-5554DD935CBC}"/>
               </a:ext>
             </a:extLst>
           </p:cNvPr>
@@ -13171,7 +13171,7 @@
           <p:cNvPr id="17" name="">
             <a:extLst xmlns:a="http://schemas.openxmlformats.org/drawingml/2006/main">
               <a:ext uri="{FF2B5EF4-FFF2-40B4-BE49-F238E27FC236}">
-                <a16:creationId xmlns:a16="http://schemas.microsoft.com/office/drawing/2014/main" id="{0F2D64F4-B538-4C78-935B-869863D29FF4}"/>
+                <a16:creationId xmlns:a16="http://schemas.microsoft.com/office/drawing/2014/main" id="{23F9CA5F-2299-4CDD-B5D1-B8DB244C39BE}"/>
               </a:ext>
             </a:extLst>
           </p:cNvPr>
@@ -13223,7 +13223,7 @@
           <p:cNvPr id="18" name="">
             <a:extLst xmlns:a="http://schemas.openxmlformats.org/drawingml/2006/main">
               <a:ext uri="{FF2B5EF4-FFF2-40B4-BE49-F238E27FC236}">
-                <a16:creationId xmlns:a16="http://schemas.microsoft.com/office/drawing/2014/main" id="{D6DC4DF8-008B-4353-A56A-D344751BA571}"/>
+                <a16:creationId xmlns:a16="http://schemas.microsoft.com/office/drawing/2014/main" id="{701C2E4D-3370-48FB-B967-4187F94DE848}"/>
               </a:ext>
             </a:extLst>
           </p:cNvPr>
@@ -13254,7 +13254,7 @@
           <p:cNvPr id="19" name="">
             <a:extLst xmlns:a="http://schemas.openxmlformats.org/drawingml/2006/main">
               <a:ext uri="{FF2B5EF4-FFF2-40B4-BE49-F238E27FC236}">
-                <a16:creationId xmlns:a16="http://schemas.microsoft.com/office/drawing/2014/main" id="{1B1D851A-6A93-487D-9C83-2AC494696DE7}"/>
+                <a16:creationId xmlns:a16="http://schemas.microsoft.com/office/drawing/2014/main" id="{307B973A-83D2-4B9E-AA87-A2ACCF6150EB}"/>
               </a:ext>
             </a:extLst>
           </p:cNvPr>
@@ -13306,7 +13306,7 @@
           <p:cNvPr id="20" name="">
             <a:extLst xmlns:a="http://schemas.openxmlformats.org/drawingml/2006/main">
               <a:ext uri="{FF2B5EF4-FFF2-40B4-BE49-F238E27FC236}">
-                <a16:creationId xmlns:a16="http://schemas.microsoft.com/office/drawing/2014/main" id="{44C58FDA-99E4-4CC7-A5A9-78E41DAE2873}"/>
+                <a16:creationId xmlns:a16="http://schemas.microsoft.com/office/drawing/2014/main" id="{A6F05546-A2EB-409D-86D4-0BBE7E1366D5}"/>
               </a:ext>
             </a:extLst>
           </p:cNvPr>
@@ -13358,7 +13358,7 @@
           <p:cNvPr id="21" name="">
             <a:extLst xmlns:a="http://schemas.openxmlformats.org/drawingml/2006/main">
               <a:ext uri="{FF2B5EF4-FFF2-40B4-BE49-F238E27FC236}">
-                <a16:creationId xmlns:a16="http://schemas.microsoft.com/office/drawing/2014/main" id="{90B36F2C-2725-4F96-BA84-6DB9978D9DBC}"/>
+                <a16:creationId xmlns:a16="http://schemas.microsoft.com/office/drawing/2014/main" id="{4A9E4421-21E8-4504-9723-F773531265AE}"/>
               </a:ext>
             </a:extLst>
           </p:cNvPr>
@@ -13410,7 +13410,7 @@
           <p:cNvPr id="22" name="">
             <a:extLst xmlns:a="http://schemas.openxmlformats.org/drawingml/2006/main">
               <a:ext uri="{FF2B5EF4-FFF2-40B4-BE49-F238E27FC236}">
-                <a16:creationId xmlns:a16="http://schemas.microsoft.com/office/drawing/2014/main" id="{0C867811-95A9-4B5D-A0B1-26351D70F382}"/>
+                <a16:creationId xmlns:a16="http://schemas.microsoft.com/office/drawing/2014/main" id="{7CE535F2-9196-4934-B4DF-373E7FA572DC}"/>
               </a:ext>
             </a:extLst>
           </p:cNvPr>
@@ -13462,7 +13462,7 @@
           <p:cNvPr id="23" name="">
             <a:extLst xmlns:a="http://schemas.openxmlformats.org/drawingml/2006/main">
               <a:ext uri="{FF2B5EF4-FFF2-40B4-BE49-F238E27FC236}">
-                <a16:creationId xmlns:a16="http://schemas.microsoft.com/office/drawing/2014/main" id="{C6BDD339-DF8D-4618-AD06-0182B79264C6}"/>
+                <a16:creationId xmlns:a16="http://schemas.microsoft.com/office/drawing/2014/main" id="{96EDAFBF-C62E-41AA-91AD-F85536E1F93D}"/>
               </a:ext>
             </a:extLst>
           </p:cNvPr>
@@ -13514,7 +13514,7 @@
           <p:cNvPr id="24" name="">
             <a:extLst xmlns:a="http://schemas.openxmlformats.org/drawingml/2006/main">
               <a:ext uri="{FF2B5EF4-FFF2-40B4-BE49-F238E27FC236}">
-                <a16:creationId xmlns:a16="http://schemas.microsoft.com/office/drawing/2014/main" id="{74917113-75D2-48BD-A030-0EBB35E92A7A}"/>
+                <a16:creationId xmlns:a16="http://schemas.microsoft.com/office/drawing/2014/main" id="{A7CA494E-7FDC-4AAA-B2E6-5BE14968B0AB}"/>
               </a:ext>
             </a:extLst>
           </p:cNvPr>
@@ -13545,7 +13545,7 @@
           <p:cNvPr id="25" name="">
             <a:extLst xmlns:a="http://schemas.openxmlformats.org/drawingml/2006/main">
               <a:ext uri="{FF2B5EF4-FFF2-40B4-BE49-F238E27FC236}">
-                <a16:creationId xmlns:a16="http://schemas.microsoft.com/office/drawing/2014/main" id="{B601FD15-8879-4BBA-9643-34F227F58B37}"/>
+                <a16:creationId xmlns:a16="http://schemas.microsoft.com/office/drawing/2014/main" id="{C6153817-6FB2-4988-82BB-661FC7C9E81E}"/>
               </a:ext>
             </a:extLst>
           </p:cNvPr>
@@ -13576,7 +13576,7 @@
           <p:cNvPr id="26" name="">
             <a:extLst xmlns:a="http://schemas.openxmlformats.org/drawingml/2006/main">
               <a:ext uri="{FF2B5EF4-FFF2-40B4-BE49-F238E27FC236}">
-                <a16:creationId xmlns:a16="http://schemas.microsoft.com/office/drawing/2014/main" id="{7FE8EE23-304A-48D7-BB84-ABA3448CCFA2}"/>
+                <a16:creationId xmlns:a16="http://schemas.microsoft.com/office/drawing/2014/main" id="{0BDDD2B2-F928-4B16-B560-3C284894EBC7}"/>
               </a:ext>
             </a:extLst>
           </p:cNvPr>
@@ -13628,7 +13628,7 @@
           <p:cNvPr id="27" name="">
             <a:extLst xmlns:a="http://schemas.openxmlformats.org/drawingml/2006/main">
               <a:ext uri="{FF2B5EF4-FFF2-40B4-BE49-F238E27FC236}">
-                <a16:creationId xmlns:a16="http://schemas.microsoft.com/office/drawing/2014/main" id="{5B13C07F-C1BD-425F-8FE0-4651189DE896}"/>
+                <a16:creationId xmlns:a16="http://schemas.microsoft.com/office/drawing/2014/main" id="{AF6EF8E3-B097-4F1E-983D-F22A5EC6348C}"/>
               </a:ext>
             </a:extLst>
           </p:cNvPr>
@@ -13680,7 +13680,7 @@
           <p:cNvPr id="28" name="">
             <a:extLst xmlns:a="http://schemas.openxmlformats.org/drawingml/2006/main">
               <a:ext uri="{FF2B5EF4-FFF2-40B4-BE49-F238E27FC236}">
-                <a16:creationId xmlns:a16="http://schemas.microsoft.com/office/drawing/2014/main" id="{30CD4C88-7921-4372-BAD0-A6C4FE2E647D}"/>
+                <a16:creationId xmlns:a16="http://schemas.microsoft.com/office/drawing/2014/main" id="{70E66A50-6968-45EF-A8DF-C7B6439FC43F}"/>
               </a:ext>
             </a:extLst>
           </p:cNvPr>
@@ -13732,7 +13732,7 @@
           <p:cNvPr id="29" name="">
             <a:extLst xmlns:a="http://schemas.openxmlformats.org/drawingml/2006/main">
               <a:ext uri="{FF2B5EF4-FFF2-40B4-BE49-F238E27FC236}">
-                <a16:creationId xmlns:a16="http://schemas.microsoft.com/office/drawing/2014/main" id="{8C736BE5-BFD3-4AC2-A1F3-A8BD1F431CB0}"/>
+                <a16:creationId xmlns:a16="http://schemas.microsoft.com/office/drawing/2014/main" id="{391F3513-47D1-4E49-864D-358863B2710A}"/>
               </a:ext>
             </a:extLst>
           </p:cNvPr>
@@ -13784,7 +13784,7 @@
           <p:cNvPr id="30" name="">
             <a:extLst xmlns:a="http://schemas.openxmlformats.org/drawingml/2006/main">
               <a:ext uri="{FF2B5EF4-FFF2-40B4-BE49-F238E27FC236}">
-                <a16:creationId xmlns:a16="http://schemas.microsoft.com/office/drawing/2014/main" id="{1490EE70-62AD-499F-A96D-BA9F3867B240}"/>
+                <a16:creationId xmlns:a16="http://schemas.microsoft.com/office/drawing/2014/main" id="{AF2B595E-B008-49AC-97E7-DAB8999C7093}"/>
               </a:ext>
             </a:extLst>
           </p:cNvPr>
@@ -13836,7 +13836,7 @@
           <p:cNvPr id="31" name="">
             <a:extLst xmlns:a="http://schemas.openxmlformats.org/drawingml/2006/main">
               <a:ext uri="{FF2B5EF4-FFF2-40B4-BE49-F238E27FC236}">
-                <a16:creationId xmlns:a16="http://schemas.microsoft.com/office/drawing/2014/main" id="{39549514-4590-4208-91C9-6E0185AEDF83}"/>
+                <a16:creationId xmlns:a16="http://schemas.microsoft.com/office/drawing/2014/main" id="{ACC79864-BC05-4D35-8DCA-92BE42C3EE4A}"/>
               </a:ext>
             </a:extLst>
           </p:cNvPr>
@@ -13867,7 +13867,7 @@
           <p:cNvPr id="32" name="">
             <a:extLst xmlns:a="http://schemas.openxmlformats.org/drawingml/2006/main">
               <a:ext uri="{FF2B5EF4-FFF2-40B4-BE49-F238E27FC236}">
-                <a16:creationId xmlns:a16="http://schemas.microsoft.com/office/drawing/2014/main" id="{05EB08F0-BB10-43DE-880D-82C8CB747CDA}"/>
+                <a16:creationId xmlns:a16="http://schemas.microsoft.com/office/drawing/2014/main" id="{E3EF302C-E02A-44F9-8F39-9E9D26289B1A}"/>
               </a:ext>
             </a:extLst>
           </p:cNvPr>
@@ -13919,7 +13919,7 @@
           <p:cNvPr id="33" name="">
             <a:extLst xmlns:a="http://schemas.openxmlformats.org/drawingml/2006/main">
               <a:ext uri="{FF2B5EF4-FFF2-40B4-BE49-F238E27FC236}">
-                <a16:creationId xmlns:a16="http://schemas.microsoft.com/office/drawing/2014/main" id="{6BC9BB3B-704A-41DB-AE01-C8CF246C2C0F}"/>
+                <a16:creationId xmlns:a16="http://schemas.microsoft.com/office/drawing/2014/main" id="{66ED967D-A58F-4D00-B1A0-FB9296B2F14B}"/>
               </a:ext>
             </a:extLst>
           </p:cNvPr>
@@ -13971,7 +13971,7 @@
           <p:cNvPr id="34" name="">
             <a:extLst xmlns:a="http://schemas.openxmlformats.org/drawingml/2006/main">
               <a:ext uri="{FF2B5EF4-FFF2-40B4-BE49-F238E27FC236}">
-                <a16:creationId xmlns:a16="http://schemas.microsoft.com/office/drawing/2014/main" id="{ECCC415F-C13E-4613-85A6-08F4C511FFF4}"/>
+                <a16:creationId xmlns:a16="http://schemas.microsoft.com/office/drawing/2014/main" id="{073CDFFB-C84B-4F6A-84F5-6BB01878008C}"/>
               </a:ext>
             </a:extLst>
           </p:cNvPr>
@@ -14023,7 +14023,7 @@
           <p:cNvPr id="35" name="">
             <a:extLst xmlns:a="http://schemas.openxmlformats.org/drawingml/2006/main">
               <a:ext uri="{FF2B5EF4-FFF2-40B4-BE49-F238E27FC236}">
-                <a16:creationId xmlns:a16="http://schemas.microsoft.com/office/drawing/2014/main" id="{0391090B-27B9-4B96-8508-0D3AC57ACBF3}"/>
+                <a16:creationId xmlns:a16="http://schemas.microsoft.com/office/drawing/2014/main" id="{BB818E7C-1EDF-422E-8A98-EBBCA61F9224}"/>
               </a:ext>
             </a:extLst>
           </p:cNvPr>
@@ -14075,7 +14075,7 @@
           <p:cNvPr id="36" name="">
             <a:extLst xmlns:a="http://schemas.openxmlformats.org/drawingml/2006/main">
               <a:ext uri="{FF2B5EF4-FFF2-40B4-BE49-F238E27FC236}">
-                <a16:creationId xmlns:a16="http://schemas.microsoft.com/office/drawing/2014/main" id="{D637515A-131D-47C7-AF09-C5085DE0B16D}"/>
+                <a16:creationId xmlns:a16="http://schemas.microsoft.com/office/drawing/2014/main" id="{A63F0A84-83AF-4C08-9051-566A50C83A32}"/>
               </a:ext>
             </a:extLst>
           </p:cNvPr>
@@ -14127,7 +14127,7 @@
           <p:cNvPr id="37" name="">
             <a:extLst xmlns:a="http://schemas.openxmlformats.org/drawingml/2006/main">
               <a:ext uri="{FF2B5EF4-FFF2-40B4-BE49-F238E27FC236}">
-                <a16:creationId xmlns:a16="http://schemas.microsoft.com/office/drawing/2014/main" id="{F393484C-8B23-4B4E-A5C8-1DADFE8DE1F9}"/>
+                <a16:creationId xmlns:a16="http://schemas.microsoft.com/office/drawing/2014/main" id="{1E42B01A-93C5-4DDC-A53E-835EFC960BC2}"/>
               </a:ext>
             </a:extLst>
           </p:cNvPr>
@@ -14158,7 +14158,7 @@
           <p:cNvPr id="38" name="">
             <a:extLst xmlns:a="http://schemas.openxmlformats.org/drawingml/2006/main">
               <a:ext uri="{FF2B5EF4-FFF2-40B4-BE49-F238E27FC236}">
-                <a16:creationId xmlns:a16="http://schemas.microsoft.com/office/drawing/2014/main" id="{4D2C5D50-FC25-492D-8B8D-B09EB8CFFCD0}"/>
+                <a16:creationId xmlns:a16="http://schemas.microsoft.com/office/drawing/2014/main" id="{16B8E5B2-59E7-4754-84D2-08D5A56B4122}"/>
               </a:ext>
             </a:extLst>
           </p:cNvPr>
@@ -14189,7 +14189,7 @@
           <p:cNvPr id="39" name="">
             <a:extLst xmlns:a="http://schemas.openxmlformats.org/drawingml/2006/main">
               <a:ext uri="{FF2B5EF4-FFF2-40B4-BE49-F238E27FC236}">
-                <a16:creationId xmlns:a16="http://schemas.microsoft.com/office/drawing/2014/main" id="{B4BB686B-B291-4EF7-A3D2-A131438D88BA}"/>
+                <a16:creationId xmlns:a16="http://schemas.microsoft.com/office/drawing/2014/main" id="{3F375930-33E9-4F56-9675-DA617A4E453E}"/>
               </a:ext>
             </a:extLst>
           </p:cNvPr>
@@ -14241,7 +14241,7 @@
           <p:cNvPr id="40" name="">
             <a:extLst xmlns:a="http://schemas.openxmlformats.org/drawingml/2006/main">
               <a:ext uri="{FF2B5EF4-FFF2-40B4-BE49-F238E27FC236}">
-                <a16:creationId xmlns:a16="http://schemas.microsoft.com/office/drawing/2014/main" id="{07666E29-A1B6-46E1-B317-1A14A632B3BC}"/>
+                <a16:creationId xmlns:a16="http://schemas.microsoft.com/office/drawing/2014/main" id="{345209AC-F4B2-44DD-A22F-1A28770843F8}"/>
               </a:ext>
             </a:extLst>
           </p:cNvPr>
@@ -14293,7 +14293,7 @@
           <p:cNvPr id="41" name="">
             <a:extLst xmlns:a="http://schemas.openxmlformats.org/drawingml/2006/main">
               <a:ext uri="{FF2B5EF4-FFF2-40B4-BE49-F238E27FC236}">
-                <a16:creationId xmlns:a16="http://schemas.microsoft.com/office/drawing/2014/main" id="{AB0F36C5-5E71-4180-9767-2065516AEB54}"/>
+                <a16:creationId xmlns:a16="http://schemas.microsoft.com/office/drawing/2014/main" id="{463265EA-3572-4ADE-B21B-7C0F61F9FD98}"/>
               </a:ext>
             </a:extLst>
           </p:cNvPr>
@@ -14345,7 +14345,7 @@
           <p:cNvPr id="42" name="">
             <a:extLst xmlns:a="http://schemas.openxmlformats.org/drawingml/2006/main">
               <a:ext uri="{FF2B5EF4-FFF2-40B4-BE49-F238E27FC236}">
-                <a16:creationId xmlns:a16="http://schemas.microsoft.com/office/drawing/2014/main" id="{86C2AE3B-6009-4FF1-BFB8-901000E0430D}"/>
+                <a16:creationId xmlns:a16="http://schemas.microsoft.com/office/drawing/2014/main" id="{462B5F52-7C62-487B-9183-04989D28AA97}"/>
               </a:ext>
             </a:extLst>
           </p:cNvPr>
@@ -14397,7 +14397,7 @@
           <p:cNvPr id="43" name="">
             <a:extLst xmlns:a="http://schemas.openxmlformats.org/drawingml/2006/main">
               <a:ext uri="{FF2B5EF4-FFF2-40B4-BE49-F238E27FC236}">
-                <a16:creationId xmlns:a16="http://schemas.microsoft.com/office/drawing/2014/main" id="{FFAAAF57-531B-43DD-A612-9BC8B7FC386F}"/>
+                <a16:creationId xmlns:a16="http://schemas.microsoft.com/office/drawing/2014/main" id="{70B798DA-DEAD-4317-B5C0-FA9EBF647198}"/>
               </a:ext>
             </a:extLst>
           </p:cNvPr>
@@ -14449,7 +14449,7 @@
           <p:cNvPr id="44" name="">
             <a:extLst xmlns:a="http://schemas.openxmlformats.org/drawingml/2006/main">
               <a:ext uri="{FF2B5EF4-FFF2-40B4-BE49-F238E27FC236}">
-                <a16:creationId xmlns:a16="http://schemas.microsoft.com/office/drawing/2014/main" id="{C47BB52E-6F04-4467-A6D7-D3E7136C654E}"/>
+                <a16:creationId xmlns:a16="http://schemas.microsoft.com/office/drawing/2014/main" id="{91BF9044-4B61-4DCC-8380-D58B14433CF8}"/>
               </a:ext>
             </a:extLst>
           </p:cNvPr>
@@ -14480,7 +14480,7 @@
           <p:cNvPr id="45" name="">
             <a:extLst xmlns:a="http://schemas.openxmlformats.org/drawingml/2006/main">
               <a:ext uri="{FF2B5EF4-FFF2-40B4-BE49-F238E27FC236}">
-                <a16:creationId xmlns:a16="http://schemas.microsoft.com/office/drawing/2014/main" id="{82F068E4-68B1-45E7-A7DF-902847CE1127}"/>
+                <a16:creationId xmlns:a16="http://schemas.microsoft.com/office/drawing/2014/main" id="{300B6443-2ACA-44FB-8307-5F8C8279F292}"/>
               </a:ext>
             </a:extLst>
           </p:cNvPr>
@@ -14532,7 +14532,7 @@
           <p:cNvPr id="46" name="">
             <a:extLst xmlns:a="http://schemas.openxmlformats.org/drawingml/2006/main">
               <a:ext uri="{FF2B5EF4-FFF2-40B4-BE49-F238E27FC236}">
-                <a16:creationId xmlns:a16="http://schemas.microsoft.com/office/drawing/2014/main" id="{B75647F8-547D-468D-8B93-4F509F24FAF6}"/>
+                <a16:creationId xmlns:a16="http://schemas.microsoft.com/office/drawing/2014/main" id="{165E3341-552E-41F7-B8C9-1DD0D5E7C0EB}"/>
               </a:ext>
             </a:extLst>
           </p:cNvPr>
@@ -14584,7 +14584,7 @@
           <p:cNvPr id="47" name="">
             <a:extLst xmlns:a="http://schemas.openxmlformats.org/drawingml/2006/main">
               <a:ext uri="{FF2B5EF4-FFF2-40B4-BE49-F238E27FC236}">
-                <a16:creationId xmlns:a16="http://schemas.microsoft.com/office/drawing/2014/main" id="{5371A630-8C99-4218-A5AB-E4299083384F}"/>
+                <a16:creationId xmlns:a16="http://schemas.microsoft.com/office/drawing/2014/main" id="{DD94C93A-A577-42EF-8C5A-FF140D85DA75}"/>
               </a:ext>
             </a:extLst>
           </p:cNvPr>
@@ -14636,7 +14636,7 @@
           <p:cNvPr id="48" name="">
             <a:extLst xmlns:a="http://schemas.openxmlformats.org/drawingml/2006/main">
               <a:ext uri="{FF2B5EF4-FFF2-40B4-BE49-F238E27FC236}">
-                <a16:creationId xmlns:a16="http://schemas.microsoft.com/office/drawing/2014/main" id="{AA920066-43FB-4575-95FF-33D4FF68E313}"/>
+                <a16:creationId xmlns:a16="http://schemas.microsoft.com/office/drawing/2014/main" id="{ED575F08-2C73-4FB1-AA9E-8B69B1146DD5}"/>
               </a:ext>
             </a:extLst>
           </p:cNvPr>
@@ -14688,7 +14688,7 @@
           <p:cNvPr id="49" name="">
             <a:extLst xmlns:a="http://schemas.openxmlformats.org/drawingml/2006/main">
               <a:ext uri="{FF2B5EF4-FFF2-40B4-BE49-F238E27FC236}">
-                <a16:creationId xmlns:a16="http://schemas.microsoft.com/office/drawing/2014/main" id="{A0078621-861E-402B-8CB0-E21458DB8A21}"/>
+                <a16:creationId xmlns:a16="http://schemas.microsoft.com/office/drawing/2014/main" id="{DE1466AF-66E5-4249-BFF7-EFCB6C7BD5D6}"/>
               </a:ext>
             </a:extLst>
           </p:cNvPr>
@@ -14740,7 +14740,7 @@
           <p:cNvPr id="50" name="">
             <a:extLst xmlns:a="http://schemas.openxmlformats.org/drawingml/2006/main">
               <a:ext uri="{FF2B5EF4-FFF2-40B4-BE49-F238E27FC236}">
-                <a16:creationId xmlns:a16="http://schemas.microsoft.com/office/drawing/2014/main" id="{A4EABB28-416A-4EE4-9051-EE854E4E8772}"/>
+                <a16:creationId xmlns:a16="http://schemas.microsoft.com/office/drawing/2014/main" id="{40FCD9C0-6DEA-4EC0-8BF0-DDEF8EAA928D}"/>
               </a:ext>
             </a:extLst>
           </p:cNvPr>
@@ -14771,7 +14771,7 @@
           <p:cNvPr id="51" name="">
             <a:extLst xmlns:a="http://schemas.openxmlformats.org/drawingml/2006/main">
               <a:ext uri="{FF2B5EF4-FFF2-40B4-BE49-F238E27FC236}">
-                <a16:creationId xmlns:a16="http://schemas.microsoft.com/office/drawing/2014/main" id="{D50D4B23-BDB1-4E28-9E90-F46914E67FF7}"/>
+                <a16:creationId xmlns:a16="http://schemas.microsoft.com/office/drawing/2014/main" id="{33773F83-5DA8-48BE-A96B-3C75672B69B3}"/>
               </a:ext>
             </a:extLst>
           </p:cNvPr>
@@ -14802,7 +14802,7 @@
           <p:cNvPr id="52" name="">
             <a:extLst xmlns:a="http://schemas.openxmlformats.org/drawingml/2006/main">
               <a:ext uri="{FF2B5EF4-FFF2-40B4-BE49-F238E27FC236}">
-                <a16:creationId xmlns:a16="http://schemas.microsoft.com/office/drawing/2014/main" id="{BEBD2D0F-23A6-42F1-ACBF-E17780FF71AC}"/>
+                <a16:creationId xmlns:a16="http://schemas.microsoft.com/office/drawing/2014/main" id="{7F82A16B-EE73-4DAD-9866-81A543848389}"/>
               </a:ext>
             </a:extLst>
           </p:cNvPr>
@@ -14854,7 +14854,7 @@
           <p:cNvPr id="53" name="">
             <a:extLst xmlns:a="http://schemas.openxmlformats.org/drawingml/2006/main">
               <a:ext uri="{FF2B5EF4-FFF2-40B4-BE49-F238E27FC236}">
-                <a16:creationId xmlns:a16="http://schemas.microsoft.com/office/drawing/2014/main" id="{941CA376-A0E0-40B6-910D-DF8846441462}"/>
+                <a16:creationId xmlns:a16="http://schemas.microsoft.com/office/drawing/2014/main" id="{286BC786-FB6A-411A-BFC3-0145E39DD617}"/>
               </a:ext>
             </a:extLst>
           </p:cNvPr>
@@ -14906,7 +14906,7 @@
           <p:cNvPr id="54" name="">
             <a:extLst xmlns:a="http://schemas.openxmlformats.org/drawingml/2006/main">
               <a:ext uri="{FF2B5EF4-FFF2-40B4-BE49-F238E27FC236}">
-                <a16:creationId xmlns:a16="http://schemas.microsoft.com/office/drawing/2014/main" id="{8CA8AA30-795E-4D46-95A8-A1DE0D67FA44}"/>
+                <a16:creationId xmlns:a16="http://schemas.microsoft.com/office/drawing/2014/main" id="{9144E24A-E01D-4D52-85ED-A83A5D71E6FD}"/>
               </a:ext>
             </a:extLst>
           </p:cNvPr>
@@ -14958,7 +14958,7 @@
           <p:cNvPr id="55" name="">
             <a:extLst xmlns:a="http://schemas.openxmlformats.org/drawingml/2006/main">
               <a:ext uri="{FF2B5EF4-FFF2-40B4-BE49-F238E27FC236}">
-                <a16:creationId xmlns:a16="http://schemas.microsoft.com/office/drawing/2014/main" id="{ACC969B2-A74B-47DF-A105-2204CC89520D}"/>
+                <a16:creationId xmlns:a16="http://schemas.microsoft.com/office/drawing/2014/main" id="{3FB602BE-36E6-49D5-A0CB-EAAEF31EFBF9}"/>
               </a:ext>
             </a:extLst>
           </p:cNvPr>
@@ -15010,7 +15010,7 @@
           <p:cNvPr id="56" name="">
             <a:extLst xmlns:a="http://schemas.openxmlformats.org/drawingml/2006/main">
               <a:ext uri="{FF2B5EF4-FFF2-40B4-BE49-F238E27FC236}">
-                <a16:creationId xmlns:a16="http://schemas.microsoft.com/office/drawing/2014/main" id="{CEB8DE6D-6543-42A6-836A-18A31FD4006A}"/>
+                <a16:creationId xmlns:a16="http://schemas.microsoft.com/office/drawing/2014/main" id="{C44C0E91-AF1E-4598-97B1-D250F32CA1B9}"/>
               </a:ext>
             </a:extLst>
           </p:cNvPr>
@@ -15062,7 +15062,7 @@
           <p:cNvPr id="57" name="">
             <a:extLst xmlns:a="http://schemas.openxmlformats.org/drawingml/2006/main">
               <a:ext uri="{FF2B5EF4-FFF2-40B4-BE49-F238E27FC236}">
-                <a16:creationId xmlns:a16="http://schemas.microsoft.com/office/drawing/2014/main" id="{A910FC74-D7FB-4774-975C-917BD82EC6D7}"/>
+                <a16:creationId xmlns:a16="http://schemas.microsoft.com/office/drawing/2014/main" id="{4539E6C0-DD01-4B3F-9DB6-D6E3F35C6F63}"/>
               </a:ext>
             </a:extLst>
           </p:cNvPr>
@@ -15093,7 +15093,7 @@
           <p:cNvPr id="58" name="">
             <a:extLst xmlns:a="http://schemas.openxmlformats.org/drawingml/2006/main">
               <a:ext uri="{FF2B5EF4-FFF2-40B4-BE49-F238E27FC236}">
-                <a16:creationId xmlns:a16="http://schemas.microsoft.com/office/drawing/2014/main" id="{BF8C0924-2E5C-46D3-8A19-35E57E28A8C0}"/>
+                <a16:creationId xmlns:a16="http://schemas.microsoft.com/office/drawing/2014/main" id="{8E010A72-4C8B-4154-8DC6-39FC8753343B}"/>
               </a:ext>
             </a:extLst>
           </p:cNvPr>
@@ -15145,7 +15145,7 @@
           <p:cNvPr id="59" name="">
             <a:extLst xmlns:a="http://schemas.openxmlformats.org/drawingml/2006/main">
               <a:ext uri="{FF2B5EF4-FFF2-40B4-BE49-F238E27FC236}">
-                <a16:creationId xmlns:a16="http://schemas.microsoft.com/office/drawing/2014/main" id="{543C0147-A610-4CF6-BD88-4FBDE7F35D9E}"/>
+                <a16:creationId xmlns:a16="http://schemas.microsoft.com/office/drawing/2014/main" id="{3BED5E9B-ABD1-433A-82F2-02CF2C8ECD65}"/>
               </a:ext>
             </a:extLst>
           </p:cNvPr>
@@ -15197,7 +15197,7 @@
           <p:cNvPr id="60" name="">
             <a:extLst xmlns:a="http://schemas.openxmlformats.org/drawingml/2006/main">
               <a:ext uri="{FF2B5EF4-FFF2-40B4-BE49-F238E27FC236}">
-                <a16:creationId xmlns:a16="http://schemas.microsoft.com/office/drawing/2014/main" id="{D0703437-49F3-4F4C-8D85-94167E9A4ADA}"/>
+                <a16:creationId xmlns:a16="http://schemas.microsoft.com/office/drawing/2014/main" id="{5895A626-97E3-416F-98C6-FCB49B6057BE}"/>
               </a:ext>
             </a:extLst>
           </p:cNvPr>
@@ -15249,7 +15249,7 @@
           <p:cNvPr id="61" name="">
             <a:extLst xmlns:a="http://schemas.openxmlformats.org/drawingml/2006/main">
               <a:ext uri="{FF2B5EF4-FFF2-40B4-BE49-F238E27FC236}">
-                <a16:creationId xmlns:a16="http://schemas.microsoft.com/office/drawing/2014/main" id="{8445A495-D406-4D09-B0C5-4DE15758866C}"/>
+                <a16:creationId xmlns:a16="http://schemas.microsoft.com/office/drawing/2014/main" id="{E76AB7F2-2309-4BCD-80CA-886574D459FE}"/>
               </a:ext>
             </a:extLst>
           </p:cNvPr>
@@ -15301,7 +15301,7 @@
           <p:cNvPr id="62" name="">
             <a:extLst xmlns:a="http://schemas.openxmlformats.org/drawingml/2006/main">
               <a:ext uri="{FF2B5EF4-FFF2-40B4-BE49-F238E27FC236}">
-                <a16:creationId xmlns:a16="http://schemas.microsoft.com/office/drawing/2014/main" id="{6841C9E1-A0D9-4C3F-ADB6-C98E9D780181}"/>
+                <a16:creationId xmlns:a16="http://schemas.microsoft.com/office/drawing/2014/main" id="{18EBAC66-48D9-4B04-B76D-7F14CBA589CC}"/>
               </a:ext>
             </a:extLst>
           </p:cNvPr>
@@ -15353,7 +15353,7 @@
           <p:cNvPr id="63" name="">
             <a:extLst xmlns:a="http://schemas.openxmlformats.org/drawingml/2006/main">
               <a:ext uri="{FF2B5EF4-FFF2-40B4-BE49-F238E27FC236}">
-                <a16:creationId xmlns:a16="http://schemas.microsoft.com/office/drawing/2014/main" id="{ACF49C41-BC93-4E3A-9B18-67B942E7C7FA}"/>
+                <a16:creationId xmlns:a16="http://schemas.microsoft.com/office/drawing/2014/main" id="{EB9EF3C0-1A50-47C3-8C05-09C52156732A}"/>
               </a:ext>
             </a:extLst>
           </p:cNvPr>
@@ -15384,7 +15384,7 @@
           <p:cNvPr id="64" name="">
             <a:extLst xmlns:a="http://schemas.openxmlformats.org/drawingml/2006/main">
               <a:ext uri="{FF2B5EF4-FFF2-40B4-BE49-F238E27FC236}">
-                <a16:creationId xmlns:a16="http://schemas.microsoft.com/office/drawing/2014/main" id="{4CC23A3C-1BC6-41D8-B8A5-4DE9516EE391}"/>
+                <a16:creationId xmlns:a16="http://schemas.microsoft.com/office/drawing/2014/main" id="{B9DD2308-659D-4F4F-A3BF-9D3A465A98CA}"/>
               </a:ext>
             </a:extLst>
           </p:cNvPr>
@@ -15415,7 +15415,7 @@
           <p:cNvPr id="65" name="">
             <a:extLst xmlns:a="http://schemas.openxmlformats.org/drawingml/2006/main">
               <a:ext uri="{FF2B5EF4-FFF2-40B4-BE49-F238E27FC236}">
-                <a16:creationId xmlns:a16="http://schemas.microsoft.com/office/drawing/2014/main" id="{1FE21321-DFD0-49C5-AA90-4E3846AAF531}"/>
+                <a16:creationId xmlns:a16="http://schemas.microsoft.com/office/drawing/2014/main" id="{5217283D-F434-48D6-A5A6-4812D294BDCC}"/>
               </a:ext>
             </a:extLst>
           </p:cNvPr>
@@ -15467,7 +15467,7 @@
           <p:cNvPr id="66" name="">
             <a:extLst xmlns:a="http://schemas.openxmlformats.org/drawingml/2006/main">
               <a:ext uri="{FF2B5EF4-FFF2-40B4-BE49-F238E27FC236}">
-                <a16:creationId xmlns:a16="http://schemas.microsoft.com/office/drawing/2014/main" id="{6D3D0122-CAB8-434C-B8C4-B546B51D5C87}"/>
+                <a16:creationId xmlns:a16="http://schemas.microsoft.com/office/drawing/2014/main" id="{9EA0D49C-2AF1-43A8-A62A-426FE59840D3}"/>
               </a:ext>
             </a:extLst>
           </p:cNvPr>
@@ -15519,7 +15519,7 @@
           <p:cNvPr id="67" name="">
             <a:extLst xmlns:a="http://schemas.openxmlformats.org/drawingml/2006/main">
               <a:ext uri="{FF2B5EF4-FFF2-40B4-BE49-F238E27FC236}">
-                <a16:creationId xmlns:a16="http://schemas.microsoft.com/office/drawing/2014/main" id="{CA783A2D-2BD4-4D43-971B-8BC19DE55F08}"/>
+                <a16:creationId xmlns:a16="http://schemas.microsoft.com/office/drawing/2014/main" id="{796D52E7-DF42-421A-9D91-ACA4020DC0F9}"/>
               </a:ext>
             </a:extLst>
           </p:cNvPr>
@@ -15571,7 +15571,7 @@
           <p:cNvPr id="68" name="">
             <a:extLst xmlns:a="http://schemas.openxmlformats.org/drawingml/2006/main">
               <a:ext uri="{FF2B5EF4-FFF2-40B4-BE49-F238E27FC236}">
-                <a16:creationId xmlns:a16="http://schemas.microsoft.com/office/drawing/2014/main" id="{5CBDECA6-110A-467A-8D23-AB7F5AC7D4CA}"/>
+                <a16:creationId xmlns:a16="http://schemas.microsoft.com/office/drawing/2014/main" id="{7DA415CF-D5E7-4747-B25E-A7883BD5F1FF}"/>
               </a:ext>
             </a:extLst>
           </p:cNvPr>
@@ -15623,7 +15623,7 @@
           <p:cNvPr id="69" name="">
             <a:extLst xmlns:a="http://schemas.openxmlformats.org/drawingml/2006/main">
               <a:ext uri="{FF2B5EF4-FFF2-40B4-BE49-F238E27FC236}">
-                <a16:creationId xmlns:a16="http://schemas.microsoft.com/office/drawing/2014/main" id="{F5A4381D-5CE9-4496-8889-CA185572306F}"/>
+                <a16:creationId xmlns:a16="http://schemas.microsoft.com/office/drawing/2014/main" id="{86BC37A8-73C8-4FB5-A077-0F84626EAC2B}"/>
               </a:ext>
             </a:extLst>
           </p:cNvPr>
@@ -15675,7 +15675,7 @@
           <p:cNvPr id="70" name="">
             <a:extLst xmlns:a="http://schemas.openxmlformats.org/drawingml/2006/main">
               <a:ext uri="{FF2B5EF4-FFF2-40B4-BE49-F238E27FC236}">
-                <a16:creationId xmlns:a16="http://schemas.microsoft.com/office/drawing/2014/main" id="{DFBE1C9D-F40D-424B-B5CA-A6DE4EC0122B}"/>
+                <a16:creationId xmlns:a16="http://schemas.microsoft.com/office/drawing/2014/main" id="{F3088CC9-83D2-475A-A56C-5E1C24002675}"/>
               </a:ext>
             </a:extLst>
           </p:cNvPr>
@@ -15706,7 +15706,7 @@
           <p:cNvPr id="71" name="">
             <a:extLst xmlns:a="http://schemas.openxmlformats.org/drawingml/2006/main">
               <a:ext uri="{FF2B5EF4-FFF2-40B4-BE49-F238E27FC236}">
-                <a16:creationId xmlns:a16="http://schemas.microsoft.com/office/drawing/2014/main" id="{5703AF4A-9ED9-41AC-A5DC-4C9B80C01DBB}"/>
+                <a16:creationId xmlns:a16="http://schemas.microsoft.com/office/drawing/2014/main" id="{231B2B91-D929-413D-A092-255F2F5AE843}"/>
               </a:ext>
             </a:extLst>
           </p:cNvPr>
@@ -15758,7 +15758,7 @@
           <p:cNvPr id="72" name="">
             <a:extLst xmlns:a="http://schemas.openxmlformats.org/drawingml/2006/main">
               <a:ext uri="{FF2B5EF4-FFF2-40B4-BE49-F238E27FC236}">
-                <a16:creationId xmlns:a16="http://schemas.microsoft.com/office/drawing/2014/main" id="{D462C0A0-0A49-4C82-B041-6FE156F96AEE}"/>
+                <a16:creationId xmlns:a16="http://schemas.microsoft.com/office/drawing/2014/main" id="{B51A603A-864D-475B-B0A2-C0C7E66FCE52}"/>
               </a:ext>
             </a:extLst>
           </p:cNvPr>
@@ -15810,7 +15810,7 @@
           <p:cNvPr id="73" name="">
             <a:extLst xmlns:a="http://schemas.openxmlformats.org/drawingml/2006/main">
               <a:ext uri="{FF2B5EF4-FFF2-40B4-BE49-F238E27FC236}">
-                <a16:creationId xmlns:a16="http://schemas.microsoft.com/office/drawing/2014/main" id="{146E3D3F-3B6C-4B7E-BAB9-FDCBD094C883}"/>
+                <a16:creationId xmlns:a16="http://schemas.microsoft.com/office/drawing/2014/main" id="{64C53734-8DDF-4986-B3CA-3066CFABB924}"/>
               </a:ext>
             </a:extLst>
           </p:cNvPr>
@@ -15862,7 +15862,7 @@
           <p:cNvPr id="74" name="">
             <a:extLst xmlns:a="http://schemas.openxmlformats.org/drawingml/2006/main">
               <a:ext uri="{FF2B5EF4-FFF2-40B4-BE49-F238E27FC236}">
-                <a16:creationId xmlns:a16="http://schemas.microsoft.com/office/drawing/2014/main" id="{E5AA1815-1CB0-4731-AD29-E50D128A6530}"/>
+                <a16:creationId xmlns:a16="http://schemas.microsoft.com/office/drawing/2014/main" id="{A14E151E-73A9-4991-B273-8F597B0F4625}"/>
               </a:ext>
             </a:extLst>
           </p:cNvPr>
@@ -15914,7 +15914,7 @@
           <p:cNvPr id="75" name="">
             <a:extLst xmlns:a="http://schemas.openxmlformats.org/drawingml/2006/main">
               <a:ext uri="{FF2B5EF4-FFF2-40B4-BE49-F238E27FC236}">
-                <a16:creationId xmlns:a16="http://schemas.microsoft.com/office/drawing/2014/main" id="{358EA962-F3A8-4BEE-8E55-DFCAB8938956}"/>
+                <a16:creationId xmlns:a16="http://schemas.microsoft.com/office/drawing/2014/main" id="{6A5B087A-2EDD-4E2B-89D6-46ABFD8A297E}"/>
               </a:ext>
             </a:extLst>
           </p:cNvPr>
@@ -15966,7 +15966,7 @@
           <p:cNvPr id="76" name="">
             <a:extLst xmlns:a="http://schemas.openxmlformats.org/drawingml/2006/main">
               <a:ext uri="{FF2B5EF4-FFF2-40B4-BE49-F238E27FC236}">
-                <a16:creationId xmlns:a16="http://schemas.microsoft.com/office/drawing/2014/main" id="{B71D6C3F-9E6F-4357-B99F-82E0892D82BC}"/>
+                <a16:creationId xmlns:a16="http://schemas.microsoft.com/office/drawing/2014/main" id="{55854DBE-82CC-49F8-9BDA-C1CB57E373AD}"/>
               </a:ext>
             </a:extLst>
           </p:cNvPr>
@@ -15997,7 +15997,7 @@
           <p:cNvPr id="77" name="">
             <a:extLst xmlns:a="http://schemas.openxmlformats.org/drawingml/2006/main">
               <a:ext uri="{FF2B5EF4-FFF2-40B4-BE49-F238E27FC236}">
-                <a16:creationId xmlns:a16="http://schemas.microsoft.com/office/drawing/2014/main" id="{6A2FD534-FEFA-4072-B0E5-CCE0547D68DB}"/>
+                <a16:creationId xmlns:a16="http://schemas.microsoft.com/office/drawing/2014/main" id="{3B8026B5-4037-4029-97C6-331A3DEFDD0F}"/>
               </a:ext>
             </a:extLst>
           </p:cNvPr>
@@ -16028,7 +16028,7 @@
           <p:cNvPr id="78" name="">
             <a:extLst xmlns:a="http://schemas.openxmlformats.org/drawingml/2006/main">
               <a:ext uri="{FF2B5EF4-FFF2-40B4-BE49-F238E27FC236}">
-                <a16:creationId xmlns:a16="http://schemas.microsoft.com/office/drawing/2014/main" id="{A49FDF98-1352-41DF-9498-F48A57126E6F}"/>
+                <a16:creationId xmlns:a16="http://schemas.microsoft.com/office/drawing/2014/main" id="{16CCE1F2-936C-4F1A-A5C8-4EDDAECA8CB6}"/>
               </a:ext>
             </a:extLst>
           </p:cNvPr>
@@ -16080,7 +16080,7 @@
           <p:cNvPr id="79" name="">
             <a:extLst xmlns:a="http://schemas.openxmlformats.org/drawingml/2006/main">
               <a:ext uri="{FF2B5EF4-FFF2-40B4-BE49-F238E27FC236}">
-                <a16:creationId xmlns:a16="http://schemas.microsoft.com/office/drawing/2014/main" id="{08A316DD-A7FF-4DC1-B1E9-C2113FE4431E}"/>
+                <a16:creationId xmlns:a16="http://schemas.microsoft.com/office/drawing/2014/main" id="{59AD26CA-5701-47F0-89A0-653C19B9844C}"/>
               </a:ext>
             </a:extLst>
           </p:cNvPr>
@@ -16132,7 +16132,7 @@
           <p:cNvPr id="80" name="">
             <a:extLst xmlns:a="http://schemas.openxmlformats.org/drawingml/2006/main">
               <a:ext uri="{FF2B5EF4-FFF2-40B4-BE49-F238E27FC236}">
-                <a16:creationId xmlns:a16="http://schemas.microsoft.com/office/drawing/2014/main" id="{3D03FCCC-868B-4597-9B8F-8742A8F70661}"/>
+                <a16:creationId xmlns:a16="http://schemas.microsoft.com/office/drawing/2014/main" id="{32A2BCC5-2589-41D6-8EF2-924906E874A4}"/>
               </a:ext>
             </a:extLst>
           </p:cNvPr>
@@ -16184,7 +16184,7 @@
           <p:cNvPr id="81" name="">
             <a:extLst xmlns:a="http://schemas.openxmlformats.org/drawingml/2006/main">
               <a:ext uri="{FF2B5EF4-FFF2-40B4-BE49-F238E27FC236}">
-                <a16:creationId xmlns:a16="http://schemas.microsoft.com/office/drawing/2014/main" id="{F4D9FC1E-738F-4D3C-9F2A-FB5D33506D83}"/>
+                <a16:creationId xmlns:a16="http://schemas.microsoft.com/office/drawing/2014/main" id="{F2643BCA-1E61-4D61-9155-436AE511EBA1}"/>
               </a:ext>
             </a:extLst>
           </p:cNvPr>
@@ -16236,7 +16236,7 @@
           <p:cNvPr id="82" name="">
             <a:extLst xmlns:a="http://schemas.openxmlformats.org/drawingml/2006/main">
               <a:ext uri="{FF2B5EF4-FFF2-40B4-BE49-F238E27FC236}">
-                <a16:creationId xmlns:a16="http://schemas.microsoft.com/office/drawing/2014/main" id="{9A6CF797-AAB7-423B-84DE-A7045035C8C1}"/>
+                <a16:creationId xmlns:a16="http://schemas.microsoft.com/office/drawing/2014/main" id="{5F05B8BB-0560-474F-97C8-2C1B3F6ACA3D}"/>
               </a:ext>
             </a:extLst>
           </p:cNvPr>
@@ -16288,7 +16288,7 @@
           <p:cNvPr id="83" name="">
             <a:extLst xmlns:a="http://schemas.openxmlformats.org/drawingml/2006/main">
               <a:ext uri="{FF2B5EF4-FFF2-40B4-BE49-F238E27FC236}">
-                <a16:creationId xmlns:a16="http://schemas.microsoft.com/office/drawing/2014/main" id="{B33D8784-49FF-43F1-8424-F82E8DDE1553}"/>
+                <a16:creationId xmlns:a16="http://schemas.microsoft.com/office/drawing/2014/main" id="{315DE081-1E7B-4223-B1DC-462231C35CC8}"/>
               </a:ext>
             </a:extLst>
           </p:cNvPr>
@@ -16319,7 +16319,7 @@
           <p:cNvPr id="84" name="">
             <a:extLst xmlns:a="http://schemas.openxmlformats.org/drawingml/2006/main">
               <a:ext uri="{FF2B5EF4-FFF2-40B4-BE49-F238E27FC236}">
-                <a16:creationId xmlns:a16="http://schemas.microsoft.com/office/drawing/2014/main" id="{687F47A2-E0A5-451D-954F-C1808E4E3D5A}"/>
+                <a16:creationId xmlns:a16="http://schemas.microsoft.com/office/drawing/2014/main" id="{C2BCBC27-3D5F-4655-A7BC-5DAD9ED9F775}"/>
               </a:ext>
             </a:extLst>
           </p:cNvPr>
@@ -16371,7 +16371,7 @@
           <p:cNvPr id="85" name="">
             <a:extLst xmlns:a="http://schemas.openxmlformats.org/drawingml/2006/main">
               <a:ext uri="{FF2B5EF4-FFF2-40B4-BE49-F238E27FC236}">
-                <a16:creationId xmlns:a16="http://schemas.microsoft.com/office/drawing/2014/main" id="{2776E407-FD72-43BC-AB53-EA9DBF92A81D}"/>
+                <a16:creationId xmlns:a16="http://schemas.microsoft.com/office/drawing/2014/main" id="{43B2E5CD-98E9-4F9C-8E9A-EF03B393A836}"/>
               </a:ext>
             </a:extLst>
           </p:cNvPr>
@@ -16423,7 +16423,7 @@
           <p:cNvPr id="86" name="">
             <a:extLst xmlns:a="http://schemas.openxmlformats.org/drawingml/2006/main">
               <a:ext uri="{FF2B5EF4-FFF2-40B4-BE49-F238E27FC236}">
-                <a16:creationId xmlns:a16="http://schemas.microsoft.com/office/drawing/2014/main" id="{5F1DD72C-9D61-4E09-93FC-0E48079F4F38}"/>
+                <a16:creationId xmlns:a16="http://schemas.microsoft.com/office/drawing/2014/main" id="{1225EE61-EA06-43D9-A88C-7EA19819F2F2}"/>
               </a:ext>
             </a:extLst>
           </p:cNvPr>
@@ -16475,7 +16475,7 @@
           <p:cNvPr id="87" name="">
             <a:extLst xmlns:a="http://schemas.openxmlformats.org/drawingml/2006/main">
               <a:ext uri="{FF2B5EF4-FFF2-40B4-BE49-F238E27FC236}">
-                <a16:creationId xmlns:a16="http://schemas.microsoft.com/office/drawing/2014/main" id="{81270204-B155-4844-80D9-A78A70550668}"/>
+                <a16:creationId xmlns:a16="http://schemas.microsoft.com/office/drawing/2014/main" id="{4A05C219-1374-4D73-A623-8F5855D7DE16}"/>
               </a:ext>
             </a:extLst>
           </p:cNvPr>
@@ -16527,7 +16527,7 @@
           <p:cNvPr id="88" name="">
             <a:extLst xmlns:a="http://schemas.openxmlformats.org/drawingml/2006/main">
               <a:ext uri="{FF2B5EF4-FFF2-40B4-BE49-F238E27FC236}">
-                <a16:creationId xmlns:a16="http://schemas.microsoft.com/office/drawing/2014/main" id="{24AF9A71-1037-4B2E-8CF6-B9C778671250}"/>
+                <a16:creationId xmlns:a16="http://schemas.microsoft.com/office/drawing/2014/main" id="{4C2794F6-5C39-42DD-AFAF-6D7E6D968EBA}"/>
               </a:ext>
             </a:extLst>
           </p:cNvPr>
@@ -16579,7 +16579,7 @@
           <p:cNvPr id="89" name="">
             <a:extLst xmlns:a="http://schemas.openxmlformats.org/drawingml/2006/main">
               <a:ext uri="{FF2B5EF4-FFF2-40B4-BE49-F238E27FC236}">
-                <a16:creationId xmlns:a16="http://schemas.microsoft.com/office/drawing/2014/main" id="{2E0A8006-4AAC-4A90-9869-98E6F8CD0E28}"/>
+                <a16:creationId xmlns:a16="http://schemas.microsoft.com/office/drawing/2014/main" id="{EBE1C1B3-EA34-4DCE-8143-27A3EA5925BE}"/>
               </a:ext>
             </a:extLst>
           </p:cNvPr>
@@ -16610,7 +16610,7 @@
           <p:cNvPr id="90" name="">
             <a:extLst xmlns:a="http://schemas.openxmlformats.org/drawingml/2006/main">
               <a:ext uri="{FF2B5EF4-FFF2-40B4-BE49-F238E27FC236}">
-                <a16:creationId xmlns:a16="http://schemas.microsoft.com/office/drawing/2014/main" id="{15C45B3A-F3BF-40FB-B7D0-C78AB32C5773}"/>
+                <a16:creationId xmlns:a16="http://schemas.microsoft.com/office/drawing/2014/main" id="{48766A56-2DAB-4E77-B337-1E8E1368C379}"/>
               </a:ext>
             </a:extLst>
           </p:cNvPr>
@@ -16641,7 +16641,7 @@
           <p:cNvPr id="91" name="">
             <a:extLst xmlns:a="http://schemas.openxmlformats.org/drawingml/2006/main">
               <a:ext uri="{FF2B5EF4-FFF2-40B4-BE49-F238E27FC236}">
-                <a16:creationId xmlns:a16="http://schemas.microsoft.com/office/drawing/2014/main" id="{9A3746A4-F8D9-44EA-A455-FFFBBBA20E1E}"/>
+                <a16:creationId xmlns:a16="http://schemas.microsoft.com/office/drawing/2014/main" id="{B591BBEB-47F9-4D16-8244-F35DB25213A9}"/>
               </a:ext>
             </a:extLst>
           </p:cNvPr>
@@ -16693,7 +16693,7 @@
           <p:cNvPr id="92" name="">
             <a:extLst xmlns:a="http://schemas.openxmlformats.org/drawingml/2006/main">
               <a:ext uri="{FF2B5EF4-FFF2-40B4-BE49-F238E27FC236}">
-                <a16:creationId xmlns:a16="http://schemas.microsoft.com/office/drawing/2014/main" id="{E39D31C3-7169-4A4A-8DFD-8898EBAD0A65}"/>
+                <a16:creationId xmlns:a16="http://schemas.microsoft.com/office/drawing/2014/main" id="{D178E3DA-31A1-43D6-864F-19A018567040}"/>
               </a:ext>
             </a:extLst>
           </p:cNvPr>
@@ -16745,7 +16745,7 @@
           <p:cNvPr id="93" name="">
             <a:extLst xmlns:a="http://schemas.openxmlformats.org/drawingml/2006/main">
               <a:ext uri="{FF2B5EF4-FFF2-40B4-BE49-F238E27FC236}">
-                <a16:creationId xmlns:a16="http://schemas.microsoft.com/office/drawing/2014/main" id="{E152F4C9-12EC-4A73-A763-E5CACF7197AE}"/>
+                <a16:creationId xmlns:a16="http://schemas.microsoft.com/office/drawing/2014/main" id="{12327942-5EA3-4D32-AEB5-82EB958BDAF5}"/>
               </a:ext>
             </a:extLst>
           </p:cNvPr>
@@ -16797,7 +16797,7 @@
           <p:cNvPr id="94" name="">
             <a:extLst xmlns:a="http://schemas.openxmlformats.org/drawingml/2006/main">
               <a:ext uri="{FF2B5EF4-FFF2-40B4-BE49-F238E27FC236}">
-                <a16:creationId xmlns:a16="http://schemas.microsoft.com/office/drawing/2014/main" id="{752C4274-2A7B-47FF-9C42-7F4478BCEBE9}"/>
+                <a16:creationId xmlns:a16="http://schemas.microsoft.com/office/drawing/2014/main" id="{129DBAF2-4ADC-4956-96EA-C38E6191685F}"/>
               </a:ext>
             </a:extLst>
           </p:cNvPr>
@@ -16849,7 +16849,7 @@
           <p:cNvPr id="95" name="">
             <a:extLst xmlns:a="http://schemas.openxmlformats.org/drawingml/2006/main">
               <a:ext uri="{FF2B5EF4-FFF2-40B4-BE49-F238E27FC236}">
-                <a16:creationId xmlns:a16="http://schemas.microsoft.com/office/drawing/2014/main" id="{2CA28DF8-8D37-4701-AE38-F80B998B7701}"/>
+                <a16:creationId xmlns:a16="http://schemas.microsoft.com/office/drawing/2014/main" id="{7245E2B7-DA50-49BC-9478-7DAEB9DEFA11}"/>
               </a:ext>
             </a:extLst>
           </p:cNvPr>
@@ -16901,7 +16901,7 @@
           <p:cNvPr id="96" name="">
             <a:extLst xmlns:a="http://schemas.openxmlformats.org/drawingml/2006/main">
               <a:ext uri="{FF2B5EF4-FFF2-40B4-BE49-F238E27FC236}">
-                <a16:creationId xmlns:a16="http://schemas.microsoft.com/office/drawing/2014/main" id="{C57BDB7C-8728-4186-9CCC-EE8F8FD9A33E}"/>
+                <a16:creationId xmlns:a16="http://schemas.microsoft.com/office/drawing/2014/main" id="{F3FBC214-6DB4-4209-A3A0-BE940AA2B499}"/>
               </a:ext>
             </a:extLst>
           </p:cNvPr>
@@ -16932,7 +16932,7 @@
           <p:cNvPr id="97" name="">
             <a:extLst xmlns:a="http://schemas.openxmlformats.org/drawingml/2006/main">
               <a:ext uri="{FF2B5EF4-FFF2-40B4-BE49-F238E27FC236}">
-                <a16:creationId xmlns:a16="http://schemas.microsoft.com/office/drawing/2014/main" id="{2027B4FA-98F4-4498-A647-02498BCCA060}"/>
+                <a16:creationId xmlns:a16="http://schemas.microsoft.com/office/drawing/2014/main" id="{04CB6EE8-7231-468E-B99C-3E259D9671C2}"/>
               </a:ext>
             </a:extLst>
           </p:cNvPr>
@@ -16984,7 +16984,7 @@
           <p:cNvPr id="98" name="">
             <a:extLst xmlns:a="http://schemas.openxmlformats.org/drawingml/2006/main">
               <a:ext uri="{FF2B5EF4-FFF2-40B4-BE49-F238E27FC236}">
-                <a16:creationId xmlns:a16="http://schemas.microsoft.com/office/drawing/2014/main" id="{BAB2F27B-B6A1-422B-A8E1-F64E6376ACB3}"/>
+                <a16:creationId xmlns:a16="http://schemas.microsoft.com/office/drawing/2014/main" id="{498D18CE-98C0-4487-A58C-16AEDD62631E}"/>
               </a:ext>
             </a:extLst>
           </p:cNvPr>
@@ -17036,7 +17036,7 @@
           <p:cNvPr id="99" name="">
             <a:extLst xmlns:a="http://schemas.openxmlformats.org/drawingml/2006/main">
               <a:ext uri="{FF2B5EF4-FFF2-40B4-BE49-F238E27FC236}">
-                <a16:creationId xmlns:a16="http://schemas.microsoft.com/office/drawing/2014/main" id="{B692151C-B534-4A2A-B15E-D649E94B2636}"/>
+                <a16:creationId xmlns:a16="http://schemas.microsoft.com/office/drawing/2014/main" id="{5EDAFEA4-179B-457F-90D9-565B6082CF80}"/>
               </a:ext>
             </a:extLst>
           </p:cNvPr>
@@ -17088,7 +17088,7 @@
           <p:cNvPr id="100" name="">
             <a:extLst xmlns:a="http://schemas.openxmlformats.org/drawingml/2006/main">
               <a:ext uri="{FF2B5EF4-FFF2-40B4-BE49-F238E27FC236}">
-                <a16:creationId xmlns:a16="http://schemas.microsoft.com/office/drawing/2014/main" id="{77E87AA2-1BBF-4B06-A8F8-CE0937EE60AA}"/>
+                <a16:creationId xmlns:a16="http://schemas.microsoft.com/office/drawing/2014/main" id="{BC516FED-6E99-4B81-9BA4-77912E1FC931}"/>
               </a:ext>
             </a:extLst>
           </p:cNvPr>
@@ -17140,7 +17140,7 @@
           <p:cNvPr id="101" name="">
             <a:extLst xmlns:a="http://schemas.openxmlformats.org/drawingml/2006/main">
               <a:ext uri="{FF2B5EF4-FFF2-40B4-BE49-F238E27FC236}">
-                <a16:creationId xmlns:a16="http://schemas.microsoft.com/office/drawing/2014/main" id="{3F2CDEB3-65C0-4447-A89F-250B13449CA6}"/>
+                <a16:creationId xmlns:a16="http://schemas.microsoft.com/office/drawing/2014/main" id="{3D4C71C9-0DE6-4AE6-9CCB-3C531DC6BE63}"/>
               </a:ext>
             </a:extLst>
           </p:cNvPr>
@@ -17190,7 +17190,7 @@
     </p:spTree>
     <p:extLst>
       <p:ext uri="{BB962C8B-B14F-4D97-AF65-F5344CB8AC3E}">
-        <p14:creationId xmlns:p14="http://schemas.microsoft.com/office/powerpoint/2010/main" val="2104594755"/>
+        <p14:creationId xmlns:p14="http://schemas.microsoft.com/office/powerpoint/2010/main" val="1761722608"/>
       </p:ext>
     </p:extLst>
   </p:cSld>
@@ -17221,7 +17221,7 @@
           <p:cNvPr id="96" name="">
             <a:extLst xmlns:a="http://schemas.openxmlformats.org/drawingml/2006/main">
               <a:ext uri="{FF2B5EF4-FFF2-40B4-BE49-F238E27FC236}">
-                <a16:creationId xmlns:a16="http://schemas.microsoft.com/office/drawing/2014/main" id="{8EA1A113-971E-4B02-A055-3BD0E5A963C2}"/>
+                <a16:creationId xmlns:a16="http://schemas.microsoft.com/office/drawing/2014/main" id="{F0F6B607-7281-4606-A2FF-BEA47B797983}"/>
               </a:ext>
             </a:extLst>
           </p:cNvPr>
@@ -17254,7 +17254,7 @@
           <p:cNvPr id="2" name="">
             <a:extLst xmlns:a="http://schemas.openxmlformats.org/drawingml/2006/main">
               <a:ext uri="{FF2B5EF4-FFF2-40B4-BE49-F238E27FC236}">
-                <a16:creationId xmlns:a16="http://schemas.microsoft.com/office/drawing/2014/main" id="{8859D14F-8023-4518-9B92-14B5A5DAE104}"/>
+                <a16:creationId xmlns:a16="http://schemas.microsoft.com/office/drawing/2014/main" id="{ACB33990-5793-481D-9666-0F7B8D2EE53C}"/>
               </a:ext>
             </a:extLst>
           </p:cNvPr>
@@ -17285,7 +17285,7 @@
           <p:cNvPr id="3" name="">
             <a:extLst xmlns:a="http://schemas.openxmlformats.org/drawingml/2006/main">
               <a:ext uri="{FF2B5EF4-FFF2-40B4-BE49-F238E27FC236}">
-                <a16:creationId xmlns:a16="http://schemas.microsoft.com/office/drawing/2014/main" id="{02A18145-101C-495D-844B-781C8E5B56F1}"/>
+                <a16:creationId xmlns:a16="http://schemas.microsoft.com/office/drawing/2014/main" id="{6FA0D00A-5BCC-4A6F-8CE7-94776E27B2CF}"/>
               </a:ext>
             </a:extLst>
           </p:cNvPr>
@@ -17337,7 +17337,7 @@
           <p:cNvPr id="4" name="">
             <a:extLst xmlns:a="http://schemas.openxmlformats.org/drawingml/2006/main">
               <a:ext uri="{FF2B5EF4-FFF2-40B4-BE49-F238E27FC236}">
-                <a16:creationId xmlns:a16="http://schemas.microsoft.com/office/drawing/2014/main" id="{B7C7E48E-C504-46D4-9071-B7BD568A8137}"/>
+                <a16:creationId xmlns:a16="http://schemas.microsoft.com/office/drawing/2014/main" id="{FD8A8ED0-91E0-44FC-B64A-92F5256AD610}"/>
               </a:ext>
             </a:extLst>
           </p:cNvPr>
@@ -17389,7 +17389,7 @@
           <p:cNvPr id="5" name="">
             <a:extLst xmlns:a="http://schemas.openxmlformats.org/drawingml/2006/main">
               <a:ext uri="{FF2B5EF4-FFF2-40B4-BE49-F238E27FC236}">
-                <a16:creationId xmlns:a16="http://schemas.microsoft.com/office/drawing/2014/main" id="{464D27A1-E93C-44D6-AA80-C52E65A6ED10}"/>
+                <a16:creationId xmlns:a16="http://schemas.microsoft.com/office/drawing/2014/main" id="{6C594131-2D5F-4908-A2BA-C37552ED6204}"/>
               </a:ext>
             </a:extLst>
           </p:cNvPr>
@@ -17424,7 +17424,7 @@
           <p:nvPr/>
         </p:nvPicPr>
         <p:blipFill>
-          <a:blip xmlns:r="http://schemas.openxmlformats.org/officeDocument/2006/relationships" xmlns:a="http://schemas.openxmlformats.org/drawingml/2006/main" r:embed="R08e7d07f745841df"/>
+          <a:blip xmlns:r="http://schemas.openxmlformats.org/officeDocument/2006/relationships" xmlns:a="http://schemas.openxmlformats.org/drawingml/2006/main" r:embed="R57ce1533856844ec"/>
           <a:stretch xmlns:a="http://schemas.openxmlformats.org/drawingml/2006/main"/>
         </p:blipFill>
         <p:spPr>
@@ -17442,7 +17442,7 @@
           <p:cNvPr id="7" name="">
             <a:extLst xmlns:a="http://schemas.openxmlformats.org/drawingml/2006/main">
               <a:ext uri="{FF2B5EF4-FFF2-40B4-BE49-F238E27FC236}">
-                <a16:creationId xmlns:a16="http://schemas.microsoft.com/office/drawing/2014/main" id="{1C0482B5-707D-41FC-8D86-592CD0390441}"/>
+                <a16:creationId xmlns:a16="http://schemas.microsoft.com/office/drawing/2014/main" id="{07D7AA4D-9E81-4758-A518-C8DF5C9C27AA}"/>
               </a:ext>
             </a:extLst>
           </p:cNvPr>
@@ -17494,7 +17494,7 @@
           <p:cNvPr id="8" name="">
             <a:extLst xmlns:a="http://schemas.openxmlformats.org/drawingml/2006/main">
               <a:ext uri="{FF2B5EF4-FFF2-40B4-BE49-F238E27FC236}">
-                <a16:creationId xmlns:a16="http://schemas.microsoft.com/office/drawing/2014/main" id="{8C9B9B7E-90F5-402F-8EAB-342AF55FB64C}"/>
+                <a16:creationId xmlns:a16="http://schemas.microsoft.com/office/drawing/2014/main" id="{18DF2E78-6755-424C-8515-60E4E217E8BC}"/>
               </a:ext>
             </a:extLst>
           </p:cNvPr>
@@ -17546,7 +17546,7 @@
           <p:cNvPr id="9" name="">
             <a:extLst xmlns:a="http://schemas.openxmlformats.org/drawingml/2006/main">
               <a:ext uri="{FF2B5EF4-FFF2-40B4-BE49-F238E27FC236}">
-                <a16:creationId xmlns:a16="http://schemas.microsoft.com/office/drawing/2014/main" id="{64EB7B29-6B3A-4E35-A662-15656A2A83EB}"/>
+                <a16:creationId xmlns:a16="http://schemas.microsoft.com/office/drawing/2014/main" id="{9B5D4033-A718-4C16-85EA-15E9F0E2D491}"/>
               </a:ext>
             </a:extLst>
           </p:cNvPr>
@@ -17598,7 +17598,7 @@
           <p:cNvPr id="10" name="">
             <a:extLst xmlns:a="http://schemas.openxmlformats.org/drawingml/2006/main">
               <a:ext uri="{FF2B5EF4-FFF2-40B4-BE49-F238E27FC236}">
-                <a16:creationId xmlns:a16="http://schemas.microsoft.com/office/drawing/2014/main" id="{42F5A5D0-DB29-4031-A1B7-57A22141E19D}"/>
+                <a16:creationId xmlns:a16="http://schemas.microsoft.com/office/drawing/2014/main" id="{F9B8DC5C-4C34-4AE7-BC7D-86B3615FC70D}"/>
               </a:ext>
             </a:extLst>
           </p:cNvPr>
@@ -17650,7 +17650,7 @@
           <p:cNvPr id="11" name="">
             <a:extLst xmlns:a="http://schemas.openxmlformats.org/drawingml/2006/main">
               <a:ext uri="{FF2B5EF4-FFF2-40B4-BE49-F238E27FC236}">
-                <a16:creationId xmlns:a16="http://schemas.microsoft.com/office/drawing/2014/main" id="{17CD0D26-FF19-4C27-AD16-E75D0728B7BE}"/>
+                <a16:creationId xmlns:a16="http://schemas.microsoft.com/office/drawing/2014/main" id="{3674C28A-336E-4FF9-9135-3474EAA059A2}"/>
               </a:ext>
             </a:extLst>
           </p:cNvPr>
@@ -17681,7 +17681,7 @@
           <p:cNvPr id="12" name="">
             <a:extLst xmlns:a="http://schemas.openxmlformats.org/drawingml/2006/main">
               <a:ext uri="{FF2B5EF4-FFF2-40B4-BE49-F238E27FC236}">
-                <a16:creationId xmlns:a16="http://schemas.microsoft.com/office/drawing/2014/main" id="{DD3A536B-67C1-4910-B892-E8DA284453BA}"/>
+                <a16:creationId xmlns:a16="http://schemas.microsoft.com/office/drawing/2014/main" id="{4C03BCF6-C9EB-496F-944C-1DFB5BAB9408}"/>
               </a:ext>
             </a:extLst>
           </p:cNvPr>
@@ -17712,7 +17712,7 @@
           <p:cNvPr id="13" name="">
             <a:extLst xmlns:a="http://schemas.openxmlformats.org/drawingml/2006/main">
               <a:ext uri="{FF2B5EF4-FFF2-40B4-BE49-F238E27FC236}">
-                <a16:creationId xmlns:a16="http://schemas.microsoft.com/office/drawing/2014/main" id="{EC4D6DF0-71CE-4365-82EE-EEF7DB77E358}"/>
+                <a16:creationId xmlns:a16="http://schemas.microsoft.com/office/drawing/2014/main" id="{6C9A0B84-774F-4698-93A9-67DCE79B5A8E}"/>
               </a:ext>
             </a:extLst>
           </p:cNvPr>
@@ -17764,7 +17764,7 @@
           <p:cNvPr id="14" name="">
             <a:extLst xmlns:a="http://schemas.openxmlformats.org/drawingml/2006/main">
               <a:ext uri="{FF2B5EF4-FFF2-40B4-BE49-F238E27FC236}">
-                <a16:creationId xmlns:a16="http://schemas.microsoft.com/office/drawing/2014/main" id="{5A09D46F-4851-4A6F-B7D4-4CE6D24C0E0C}"/>
+                <a16:creationId xmlns:a16="http://schemas.microsoft.com/office/drawing/2014/main" id="{F70E1F2C-BA13-4420-BE08-CD816E4A2BC5}"/>
               </a:ext>
             </a:extLst>
           </p:cNvPr>
@@ -17816,7 +17816,7 @@
           <p:cNvPr id="15" name="">
             <a:extLst xmlns:a="http://schemas.openxmlformats.org/drawingml/2006/main">
               <a:ext uri="{FF2B5EF4-FFF2-40B4-BE49-F238E27FC236}">
-                <a16:creationId xmlns:a16="http://schemas.microsoft.com/office/drawing/2014/main" id="{0025EF51-E8EF-4BB5-9B8E-8243AD221E08}"/>
+                <a16:creationId xmlns:a16="http://schemas.microsoft.com/office/drawing/2014/main" id="{801E770A-CABF-45C9-B79F-46430F564E05}"/>
               </a:ext>
             </a:extLst>
           </p:cNvPr>
@@ -17868,7 +17868,7 @@
           <p:cNvPr id="16" name="">
             <a:extLst xmlns:a="http://schemas.openxmlformats.org/drawingml/2006/main">
               <a:ext uri="{FF2B5EF4-FFF2-40B4-BE49-F238E27FC236}">
-                <a16:creationId xmlns:a16="http://schemas.microsoft.com/office/drawing/2014/main" id="{71E40D3C-0F66-4618-B64A-DA6505215B7D}"/>
+                <a16:creationId xmlns:a16="http://schemas.microsoft.com/office/drawing/2014/main" id="{14014E51-EC14-405A-9868-997E91DCA955}"/>
               </a:ext>
             </a:extLst>
           </p:cNvPr>
@@ -17920,7 +17920,7 @@
           <p:cNvPr id="17" name="">
             <a:extLst xmlns:a="http://schemas.openxmlformats.org/drawingml/2006/main">
               <a:ext uri="{FF2B5EF4-FFF2-40B4-BE49-F238E27FC236}">
-                <a16:creationId xmlns:a16="http://schemas.microsoft.com/office/drawing/2014/main" id="{EA0CEF3C-B735-43EC-93E1-3EFBF3F85FE6}"/>
+                <a16:creationId xmlns:a16="http://schemas.microsoft.com/office/drawing/2014/main" id="{0B9769C8-9684-41CC-81FB-63C32E33AB44}"/>
               </a:ext>
             </a:extLst>
           </p:cNvPr>
@@ -17972,7 +17972,7 @@
           <p:cNvPr id="18" name="">
             <a:extLst xmlns:a="http://schemas.openxmlformats.org/drawingml/2006/main">
               <a:ext uri="{FF2B5EF4-FFF2-40B4-BE49-F238E27FC236}">
-                <a16:creationId xmlns:a16="http://schemas.microsoft.com/office/drawing/2014/main" id="{E80F3024-EE15-4713-BEAE-BF0B2E63058D}"/>
+                <a16:creationId xmlns:a16="http://schemas.microsoft.com/office/drawing/2014/main" id="{91B70145-DE91-460B-8919-600079862B7E}"/>
               </a:ext>
             </a:extLst>
           </p:cNvPr>
@@ -18003,7 +18003,7 @@
           <p:cNvPr id="19" name="">
             <a:extLst xmlns:a="http://schemas.openxmlformats.org/drawingml/2006/main">
               <a:ext uri="{FF2B5EF4-FFF2-40B4-BE49-F238E27FC236}">
-                <a16:creationId xmlns:a16="http://schemas.microsoft.com/office/drawing/2014/main" id="{419F630B-EF00-4F24-AC80-D5BE379FD447}"/>
+                <a16:creationId xmlns:a16="http://schemas.microsoft.com/office/drawing/2014/main" id="{CD895D23-1FC2-4859-B182-285432E5E474}"/>
               </a:ext>
             </a:extLst>
           </p:cNvPr>
@@ -18034,7 +18034,7 @@
           <p:cNvPr id="20" name="">
             <a:extLst xmlns:a="http://schemas.openxmlformats.org/drawingml/2006/main">
               <a:ext uri="{FF2B5EF4-FFF2-40B4-BE49-F238E27FC236}">
-                <a16:creationId xmlns:a16="http://schemas.microsoft.com/office/drawing/2014/main" id="{1769B513-6375-4F6F-885B-8826BAA99DA6}"/>
+                <a16:creationId xmlns:a16="http://schemas.microsoft.com/office/drawing/2014/main" id="{BD65999A-EA15-4DBD-B87A-2E449D7818F0}"/>
               </a:ext>
             </a:extLst>
           </p:cNvPr>
@@ -18086,7 +18086,7 @@
           <p:cNvPr id="21" name="">
             <a:extLst xmlns:a="http://schemas.openxmlformats.org/drawingml/2006/main">
               <a:ext uri="{FF2B5EF4-FFF2-40B4-BE49-F238E27FC236}">
-                <a16:creationId xmlns:a16="http://schemas.microsoft.com/office/drawing/2014/main" id="{203369D9-F45A-4567-9CB9-9F6F9BD1DC70}"/>
+                <a16:creationId xmlns:a16="http://schemas.microsoft.com/office/drawing/2014/main" id="{34DCE849-56B6-41D9-9E46-8C386AE2C0C2}"/>
               </a:ext>
             </a:extLst>
           </p:cNvPr>
@@ -18138,7 +18138,7 @@
           <p:cNvPr id="22" name="">
             <a:extLst xmlns:a="http://schemas.openxmlformats.org/drawingml/2006/main">
               <a:ext uri="{FF2B5EF4-FFF2-40B4-BE49-F238E27FC236}">
-                <a16:creationId xmlns:a16="http://schemas.microsoft.com/office/drawing/2014/main" id="{0EE76FAE-5B9D-40A2-969B-B033D7ED6892}"/>
+                <a16:creationId xmlns:a16="http://schemas.microsoft.com/office/drawing/2014/main" id="{87796C80-E1A4-470D-BB12-A0CC476936BA}"/>
               </a:ext>
             </a:extLst>
           </p:cNvPr>
@@ -18190,7 +18190,7 @@
           <p:cNvPr id="23" name="">
             <a:extLst xmlns:a="http://schemas.openxmlformats.org/drawingml/2006/main">
               <a:ext uri="{FF2B5EF4-FFF2-40B4-BE49-F238E27FC236}">
-                <a16:creationId xmlns:a16="http://schemas.microsoft.com/office/drawing/2014/main" id="{C52CCA0C-E230-458A-B5A8-06C50EEFD229}"/>
+                <a16:creationId xmlns:a16="http://schemas.microsoft.com/office/drawing/2014/main" id="{D6C352D4-9903-4EC8-948E-F6DAD7C8FAB8}"/>
               </a:ext>
             </a:extLst>
           </p:cNvPr>
@@ -18242,7 +18242,7 @@
           <p:cNvPr id="24" name="">
             <a:extLst xmlns:a="http://schemas.openxmlformats.org/drawingml/2006/main">
               <a:ext uri="{FF2B5EF4-FFF2-40B4-BE49-F238E27FC236}">
-                <a16:creationId xmlns:a16="http://schemas.microsoft.com/office/drawing/2014/main" id="{B699F6BD-29D5-4C07-AA4A-8EFFCECEB997}"/>
+                <a16:creationId xmlns:a16="http://schemas.microsoft.com/office/drawing/2014/main" id="{D3A0F306-4D42-4048-AAD9-2E9EB987AF6A}"/>
               </a:ext>
             </a:extLst>
           </p:cNvPr>
@@ -18294,7 +18294,7 @@
           <p:cNvPr id="25" name="">
             <a:extLst xmlns:a="http://schemas.openxmlformats.org/drawingml/2006/main">
               <a:ext uri="{FF2B5EF4-FFF2-40B4-BE49-F238E27FC236}">
-                <a16:creationId xmlns:a16="http://schemas.microsoft.com/office/drawing/2014/main" id="{FA9BF8C3-B2E3-427F-82A2-11B48B992E40}"/>
+                <a16:creationId xmlns:a16="http://schemas.microsoft.com/office/drawing/2014/main" id="{0AEDC00F-5A7B-4E9E-8A24-255F98C3468A}"/>
               </a:ext>
             </a:extLst>
           </p:cNvPr>
@@ -18325,7 +18325,7 @@
           <p:cNvPr id="26" name="">
             <a:extLst xmlns:a="http://schemas.openxmlformats.org/drawingml/2006/main">
               <a:ext uri="{FF2B5EF4-FFF2-40B4-BE49-F238E27FC236}">
-                <a16:creationId xmlns:a16="http://schemas.microsoft.com/office/drawing/2014/main" id="{DA46E2CD-D6CE-4C64-BA58-935AD169DD0D}"/>
+                <a16:creationId xmlns:a16="http://schemas.microsoft.com/office/drawing/2014/main" id="{A79728D2-8987-4011-BBD4-1CBF0FA3F2FC}"/>
               </a:ext>
             </a:extLst>
           </p:cNvPr>
@@ -18377,7 +18377,7 @@
           <p:cNvPr id="27" name="">
             <a:extLst xmlns:a="http://schemas.openxmlformats.org/drawingml/2006/main">
               <a:ext uri="{FF2B5EF4-FFF2-40B4-BE49-F238E27FC236}">
-                <a16:creationId xmlns:a16="http://schemas.microsoft.com/office/drawing/2014/main" id="{016D1452-1212-4705-B6E4-6C0DEFF62BA5}"/>
+                <a16:creationId xmlns:a16="http://schemas.microsoft.com/office/drawing/2014/main" id="{381596B5-8B65-4B6B-8B06-846E4D8414EA}"/>
               </a:ext>
             </a:extLst>
           </p:cNvPr>
@@ -18429,7 +18429,7 @@
           <p:cNvPr id="28" name="">
             <a:extLst xmlns:a="http://schemas.openxmlformats.org/drawingml/2006/main">
               <a:ext uri="{FF2B5EF4-FFF2-40B4-BE49-F238E27FC236}">
-                <a16:creationId xmlns:a16="http://schemas.microsoft.com/office/drawing/2014/main" id="{886B27EF-72D6-44D7-AC00-5B4319A309BE}"/>
+                <a16:creationId xmlns:a16="http://schemas.microsoft.com/office/drawing/2014/main" id="{2E434680-575D-405D-962D-D33F79B8BCF5}"/>
               </a:ext>
             </a:extLst>
           </p:cNvPr>
@@ -18481,7 +18481,7 @@
           <p:cNvPr id="29" name="">
             <a:extLst xmlns:a="http://schemas.openxmlformats.org/drawingml/2006/main">
               <a:ext uri="{FF2B5EF4-FFF2-40B4-BE49-F238E27FC236}">
-                <a16:creationId xmlns:a16="http://schemas.microsoft.com/office/drawing/2014/main" id="{644C6B97-8338-415F-BA38-B7347555B4F0}"/>
+                <a16:creationId xmlns:a16="http://schemas.microsoft.com/office/drawing/2014/main" id="{522435D3-260F-4814-8531-5F45E3FB9A88}"/>
               </a:ext>
             </a:extLst>
           </p:cNvPr>
@@ -18533,7 +18533,7 @@
           <p:cNvPr id="30" name="">
             <a:extLst xmlns:a="http://schemas.openxmlformats.org/drawingml/2006/main">
               <a:ext uri="{FF2B5EF4-FFF2-40B4-BE49-F238E27FC236}">
-                <a16:creationId xmlns:a16="http://schemas.microsoft.com/office/drawing/2014/main" id="{684523B7-D86C-4B0B-830E-B03E96D8D772}"/>
+                <a16:creationId xmlns:a16="http://schemas.microsoft.com/office/drawing/2014/main" id="{24BD27D3-2224-428D-9464-FF0C480A63AE}"/>
               </a:ext>
             </a:extLst>
           </p:cNvPr>
@@ -18585,7 +18585,7 @@
           <p:cNvPr id="31" name="">
             <a:extLst xmlns:a="http://schemas.openxmlformats.org/drawingml/2006/main">
               <a:ext uri="{FF2B5EF4-FFF2-40B4-BE49-F238E27FC236}">
-                <a16:creationId xmlns:a16="http://schemas.microsoft.com/office/drawing/2014/main" id="{1DDCD2DD-2694-4579-8A19-2ECCEE4B621C}"/>
+                <a16:creationId xmlns:a16="http://schemas.microsoft.com/office/drawing/2014/main" id="{42A39109-375D-4128-BE10-42FFCCED1F83}"/>
               </a:ext>
             </a:extLst>
           </p:cNvPr>
@@ -18616,7 +18616,7 @@
           <p:cNvPr id="32" name="">
             <a:extLst xmlns:a="http://schemas.openxmlformats.org/drawingml/2006/main">
               <a:ext uri="{FF2B5EF4-FFF2-40B4-BE49-F238E27FC236}">
-                <a16:creationId xmlns:a16="http://schemas.microsoft.com/office/drawing/2014/main" id="{47A7DADC-FE2E-418A-B7C5-43577EAA4AFD}"/>
+                <a16:creationId xmlns:a16="http://schemas.microsoft.com/office/drawing/2014/main" id="{524D24B9-541F-4E22-BA87-3B0CF8E06E0B}"/>
               </a:ext>
             </a:extLst>
           </p:cNvPr>
@@ -18647,7 +18647,7 @@
           <p:cNvPr id="33" name="">
             <a:extLst xmlns:a="http://schemas.openxmlformats.org/drawingml/2006/main">
               <a:ext uri="{FF2B5EF4-FFF2-40B4-BE49-F238E27FC236}">
-                <a16:creationId xmlns:a16="http://schemas.microsoft.com/office/drawing/2014/main" id="{D5A7A405-DD7E-4B82-8477-B8FCE9BA67B6}"/>
+                <a16:creationId xmlns:a16="http://schemas.microsoft.com/office/drawing/2014/main" id="{26838C55-EB96-4758-B942-81CA03BDCE9A}"/>
               </a:ext>
             </a:extLst>
           </p:cNvPr>
@@ -18699,7 +18699,7 @@
           <p:cNvPr id="34" name="">
             <a:extLst xmlns:a="http://schemas.openxmlformats.org/drawingml/2006/main">
               <a:ext uri="{FF2B5EF4-FFF2-40B4-BE49-F238E27FC236}">
-                <a16:creationId xmlns:a16="http://schemas.microsoft.com/office/drawing/2014/main" id="{33F064AD-2F58-49AF-B314-3DC8249D6491}"/>
+                <a16:creationId xmlns:a16="http://schemas.microsoft.com/office/drawing/2014/main" id="{50EDC6A0-442E-4918-8A47-7C9D42939FDA}"/>
               </a:ext>
             </a:extLst>
           </p:cNvPr>
@@ -18751,7 +18751,7 @@
           <p:cNvPr id="35" name="">
             <a:extLst xmlns:a="http://schemas.openxmlformats.org/drawingml/2006/main">
               <a:ext uri="{FF2B5EF4-FFF2-40B4-BE49-F238E27FC236}">
-                <a16:creationId xmlns:a16="http://schemas.microsoft.com/office/drawing/2014/main" id="{DB412685-781B-4C68-ACE4-81F257D08F3B}"/>
+                <a16:creationId xmlns:a16="http://schemas.microsoft.com/office/drawing/2014/main" id="{0C147BD3-EC25-4C52-A7CB-B4A3FC0413F1}"/>
               </a:ext>
             </a:extLst>
           </p:cNvPr>
@@ -18803,7 +18803,7 @@
           <p:cNvPr id="36" name="">
             <a:extLst xmlns:a="http://schemas.openxmlformats.org/drawingml/2006/main">
               <a:ext uri="{FF2B5EF4-FFF2-40B4-BE49-F238E27FC236}">
-                <a16:creationId xmlns:a16="http://schemas.microsoft.com/office/drawing/2014/main" id="{8A01D203-E749-4A54-B56D-B73D2C610B32}"/>
+                <a16:creationId xmlns:a16="http://schemas.microsoft.com/office/drawing/2014/main" id="{AEF4DEBE-3F3A-4716-99D4-E079F1525BD5}"/>
               </a:ext>
             </a:extLst>
           </p:cNvPr>
@@ -18855,7 +18855,7 @@
           <p:cNvPr id="37" name="">
             <a:extLst xmlns:a="http://schemas.openxmlformats.org/drawingml/2006/main">
               <a:ext uri="{FF2B5EF4-FFF2-40B4-BE49-F238E27FC236}">
-                <a16:creationId xmlns:a16="http://schemas.microsoft.com/office/drawing/2014/main" id="{AD3B1149-3727-4D59-B4E9-077DC7160FF4}"/>
+                <a16:creationId xmlns:a16="http://schemas.microsoft.com/office/drawing/2014/main" id="{DF3E9BC3-C10C-4883-B04E-64C2519535CE}"/>
               </a:ext>
             </a:extLst>
           </p:cNvPr>
@@ -18907,7 +18907,7 @@
           <p:cNvPr id="38" name="">
             <a:extLst xmlns:a="http://schemas.openxmlformats.org/drawingml/2006/main">
               <a:ext uri="{FF2B5EF4-FFF2-40B4-BE49-F238E27FC236}">
-                <a16:creationId xmlns:a16="http://schemas.microsoft.com/office/drawing/2014/main" id="{FBFEF11B-D96D-4DE4-8A94-06999896249B}"/>
+                <a16:creationId xmlns:a16="http://schemas.microsoft.com/office/drawing/2014/main" id="{93160ED4-236B-4F63-B28E-40ACBE9DE053}"/>
               </a:ext>
             </a:extLst>
           </p:cNvPr>
@@ -18938,7 +18938,7 @@
           <p:cNvPr id="39" name="">
             <a:extLst xmlns:a="http://schemas.openxmlformats.org/drawingml/2006/main">
               <a:ext uri="{FF2B5EF4-FFF2-40B4-BE49-F238E27FC236}">
-                <a16:creationId xmlns:a16="http://schemas.microsoft.com/office/drawing/2014/main" id="{1481340F-63E3-44DA-8E23-C0FE37508FC7}"/>
+                <a16:creationId xmlns:a16="http://schemas.microsoft.com/office/drawing/2014/main" id="{405A1BE8-148C-4465-A08D-622D4BB81D9B}"/>
               </a:ext>
             </a:extLst>
           </p:cNvPr>
@@ -18990,7 +18990,7 @@
           <p:cNvPr id="40" name="">
             <a:extLst xmlns:a="http://schemas.openxmlformats.org/drawingml/2006/main">
               <a:ext uri="{FF2B5EF4-FFF2-40B4-BE49-F238E27FC236}">
-                <a16:creationId xmlns:a16="http://schemas.microsoft.com/office/drawing/2014/main" id="{8311DA3E-16C2-4597-AB23-A758F2D0022F}"/>
+                <a16:creationId xmlns:a16="http://schemas.microsoft.com/office/drawing/2014/main" id="{22730621-9849-4651-905D-32FB6B244BAE}"/>
               </a:ext>
             </a:extLst>
           </p:cNvPr>
@@ -19042,7 +19042,7 @@
           <p:cNvPr id="41" name="">
             <a:extLst xmlns:a="http://schemas.openxmlformats.org/drawingml/2006/main">
               <a:ext uri="{FF2B5EF4-FFF2-40B4-BE49-F238E27FC236}">
-                <a16:creationId xmlns:a16="http://schemas.microsoft.com/office/drawing/2014/main" id="{6ACC67DD-0259-43AD-B3EE-4013DF70DF3E}"/>
+                <a16:creationId xmlns:a16="http://schemas.microsoft.com/office/drawing/2014/main" id="{0C5F27C7-7BEA-4357-9850-D0DB8AA638F0}"/>
               </a:ext>
             </a:extLst>
           </p:cNvPr>
@@ -19094,7 +19094,7 @@
           <p:cNvPr id="42" name="">
             <a:extLst xmlns:a="http://schemas.openxmlformats.org/drawingml/2006/main">
               <a:ext uri="{FF2B5EF4-FFF2-40B4-BE49-F238E27FC236}">
-                <a16:creationId xmlns:a16="http://schemas.microsoft.com/office/drawing/2014/main" id="{B939E10A-8D1F-4F9A-9C71-2CE30C13BD50}"/>
+                <a16:creationId xmlns:a16="http://schemas.microsoft.com/office/drawing/2014/main" id="{E5034E35-13C7-4A61-9497-A1B9FF97ED23}"/>
               </a:ext>
             </a:extLst>
           </p:cNvPr>
@@ -19146,7 +19146,7 @@
           <p:cNvPr id="43" name="">
             <a:extLst xmlns:a="http://schemas.openxmlformats.org/drawingml/2006/main">
               <a:ext uri="{FF2B5EF4-FFF2-40B4-BE49-F238E27FC236}">
-                <a16:creationId xmlns:a16="http://schemas.microsoft.com/office/drawing/2014/main" id="{7A9EFC7F-79F6-48A0-BE84-B651224E12B3}"/>
+                <a16:creationId xmlns:a16="http://schemas.microsoft.com/office/drawing/2014/main" id="{72B3155B-AB36-4174-AA6C-08805E41A2B5}"/>
               </a:ext>
             </a:extLst>
           </p:cNvPr>
@@ -19198,7 +19198,7 @@
           <p:cNvPr id="44" name="">
             <a:extLst xmlns:a="http://schemas.openxmlformats.org/drawingml/2006/main">
               <a:ext uri="{FF2B5EF4-FFF2-40B4-BE49-F238E27FC236}">
-                <a16:creationId xmlns:a16="http://schemas.microsoft.com/office/drawing/2014/main" id="{29BCC117-7C7D-4DD5-A58E-E95FA369D67F}"/>
+                <a16:creationId xmlns:a16="http://schemas.microsoft.com/office/drawing/2014/main" id="{39625A21-DEDF-4939-9D50-BFC030D97915}"/>
               </a:ext>
             </a:extLst>
           </p:cNvPr>
@@ -19229,7 +19229,7 @@
           <p:cNvPr id="45" name="">
             <a:extLst xmlns:a="http://schemas.openxmlformats.org/drawingml/2006/main">
               <a:ext uri="{FF2B5EF4-FFF2-40B4-BE49-F238E27FC236}">
-                <a16:creationId xmlns:a16="http://schemas.microsoft.com/office/drawing/2014/main" id="{8E61D459-4097-41EA-81C5-050C5EDAE195}"/>
+                <a16:creationId xmlns:a16="http://schemas.microsoft.com/office/drawing/2014/main" id="{F059A5BC-E7E3-4E62-8DEA-99678E0CA9A7}"/>
               </a:ext>
             </a:extLst>
           </p:cNvPr>
@@ -19260,7 +19260,7 @@
           <p:cNvPr id="46" name="">
             <a:extLst xmlns:a="http://schemas.openxmlformats.org/drawingml/2006/main">
               <a:ext uri="{FF2B5EF4-FFF2-40B4-BE49-F238E27FC236}">
-                <a16:creationId xmlns:a16="http://schemas.microsoft.com/office/drawing/2014/main" id="{51C396DD-B7A9-4008-B979-9CBF04EFC2CE}"/>
+                <a16:creationId xmlns:a16="http://schemas.microsoft.com/office/drawing/2014/main" id="{49234B00-9A7C-49DE-80FA-0F96CB9D082E}"/>
               </a:ext>
             </a:extLst>
           </p:cNvPr>
@@ -19312,7 +19312,7 @@
           <p:cNvPr id="47" name="">
             <a:extLst xmlns:a="http://schemas.openxmlformats.org/drawingml/2006/main">
               <a:ext uri="{FF2B5EF4-FFF2-40B4-BE49-F238E27FC236}">
-                <a16:creationId xmlns:a16="http://schemas.microsoft.com/office/drawing/2014/main" id="{61658B90-AA15-4620-902D-4AC5AE2C187B}"/>
+                <a16:creationId xmlns:a16="http://schemas.microsoft.com/office/drawing/2014/main" id="{03B6CDD6-B9FC-4DAE-840D-4299246452E9}"/>
               </a:ext>
             </a:extLst>
           </p:cNvPr>
@@ -19364,7 +19364,7 @@
           <p:cNvPr id="48" name="">
             <a:extLst xmlns:a="http://schemas.openxmlformats.org/drawingml/2006/main">
               <a:ext uri="{FF2B5EF4-FFF2-40B4-BE49-F238E27FC236}">
-                <a16:creationId xmlns:a16="http://schemas.microsoft.com/office/drawing/2014/main" id="{D0AB7D9C-25E2-4875-84D5-F324DFB71D95}"/>
+                <a16:creationId xmlns:a16="http://schemas.microsoft.com/office/drawing/2014/main" id="{30696C74-0EEE-4868-825F-28B7929BCED6}"/>
               </a:ext>
             </a:extLst>
           </p:cNvPr>
@@ -19416,7 +19416,7 @@
           <p:cNvPr id="49" name="">
             <a:extLst xmlns:a="http://schemas.openxmlformats.org/drawingml/2006/main">
               <a:ext uri="{FF2B5EF4-FFF2-40B4-BE49-F238E27FC236}">
-                <a16:creationId xmlns:a16="http://schemas.microsoft.com/office/drawing/2014/main" id="{CC93AA11-9C85-4D3C-85E8-A91BCDEC0F95}"/>
+                <a16:creationId xmlns:a16="http://schemas.microsoft.com/office/drawing/2014/main" id="{1A9E1439-51A5-4B67-AFDA-7A7DD4E7CC6C}"/>
               </a:ext>
             </a:extLst>
           </p:cNvPr>
@@ -19468,7 +19468,7 @@
           <p:cNvPr id="50" name="">
             <a:extLst xmlns:a="http://schemas.openxmlformats.org/drawingml/2006/main">
               <a:ext uri="{FF2B5EF4-FFF2-40B4-BE49-F238E27FC236}">
-                <a16:creationId xmlns:a16="http://schemas.microsoft.com/office/drawing/2014/main" id="{821A2C2F-A8BF-4A64-90CF-5484796AC7F6}"/>
+                <a16:creationId xmlns:a16="http://schemas.microsoft.com/office/drawing/2014/main" id="{3208ABC4-254F-490E-BD0F-07B0E2145732}"/>
               </a:ext>
             </a:extLst>
           </p:cNvPr>
@@ -19520,7 +19520,7 @@
           <p:cNvPr id="51" name="">
             <a:extLst xmlns:a="http://schemas.openxmlformats.org/drawingml/2006/main">
               <a:ext uri="{FF2B5EF4-FFF2-40B4-BE49-F238E27FC236}">
-                <a16:creationId xmlns:a16="http://schemas.microsoft.com/office/drawing/2014/main" id="{5D468D0C-E17B-4C29-8F67-A23D343BE25E}"/>
+                <a16:creationId xmlns:a16="http://schemas.microsoft.com/office/drawing/2014/main" id="{1E28A6DE-5436-450C-96E5-3EB9C594E05E}"/>
               </a:ext>
             </a:extLst>
           </p:cNvPr>
@@ -19551,7 +19551,7 @@
           <p:cNvPr id="52" name="">
             <a:extLst xmlns:a="http://schemas.openxmlformats.org/drawingml/2006/main">
               <a:ext uri="{FF2B5EF4-FFF2-40B4-BE49-F238E27FC236}">
-                <a16:creationId xmlns:a16="http://schemas.microsoft.com/office/drawing/2014/main" id="{D809FCBB-6E76-46B2-896C-527AC370B589}"/>
+                <a16:creationId xmlns:a16="http://schemas.microsoft.com/office/drawing/2014/main" id="{2B2D608C-206E-45A3-AFC8-470F80E6D879}"/>
               </a:ext>
             </a:extLst>
           </p:cNvPr>
@@ -19603,7 +19603,7 @@
           <p:cNvPr id="53" name="">
             <a:extLst xmlns:a="http://schemas.openxmlformats.org/drawingml/2006/main">
               <a:ext uri="{FF2B5EF4-FFF2-40B4-BE49-F238E27FC236}">
-                <a16:creationId xmlns:a16="http://schemas.microsoft.com/office/drawing/2014/main" id="{0C4EA40B-4F13-4BCB-9127-CBE46FFB6994}"/>
+                <a16:creationId xmlns:a16="http://schemas.microsoft.com/office/drawing/2014/main" id="{AF4381B9-4663-4331-9F55-F0384823EB98}"/>
               </a:ext>
             </a:extLst>
           </p:cNvPr>
@@ -19655,7 +19655,7 @@
           <p:cNvPr id="54" name="">
             <a:extLst xmlns:a="http://schemas.openxmlformats.org/drawingml/2006/main">
               <a:ext uri="{FF2B5EF4-FFF2-40B4-BE49-F238E27FC236}">
-                <a16:creationId xmlns:a16="http://schemas.microsoft.com/office/drawing/2014/main" id="{35AA4671-9FCB-401A-8D5B-78DC950360BA}"/>
+                <a16:creationId xmlns:a16="http://schemas.microsoft.com/office/drawing/2014/main" id="{BE448811-F484-4B95-98DD-B6588E615919}"/>
               </a:ext>
             </a:extLst>
           </p:cNvPr>
@@ -19707,7 +19707,7 @@
           <p:cNvPr id="55" name="">
             <a:extLst xmlns:a="http://schemas.openxmlformats.org/drawingml/2006/main">
               <a:ext uri="{FF2B5EF4-FFF2-40B4-BE49-F238E27FC236}">
-                <a16:creationId xmlns:a16="http://schemas.microsoft.com/office/drawing/2014/main" id="{EB09C0B5-652D-48A2-B10D-7B4754C8A0E0}"/>
+                <a16:creationId xmlns:a16="http://schemas.microsoft.com/office/drawing/2014/main" id="{0C9D7349-5526-4BF7-8FFB-EA144B4AD0B0}"/>
               </a:ext>
             </a:extLst>
           </p:cNvPr>
@@ -19759,7 +19759,7 @@
           <p:cNvPr id="56" name="">
             <a:extLst xmlns:a="http://schemas.openxmlformats.org/drawingml/2006/main">
               <a:ext uri="{FF2B5EF4-FFF2-40B4-BE49-F238E27FC236}">
-                <a16:creationId xmlns:a16="http://schemas.microsoft.com/office/drawing/2014/main" id="{7713BC8F-DEE9-45B3-B486-6178D2B7007C}"/>
+                <a16:creationId xmlns:a16="http://schemas.microsoft.com/office/drawing/2014/main" id="{C1B5D366-99F6-48EF-A359-94686BD811D9}"/>
               </a:ext>
             </a:extLst>
           </p:cNvPr>
@@ -19811,7 +19811,7 @@
           <p:cNvPr id="57" name="">
             <a:extLst xmlns:a="http://schemas.openxmlformats.org/drawingml/2006/main">
               <a:ext uri="{FF2B5EF4-FFF2-40B4-BE49-F238E27FC236}">
-                <a16:creationId xmlns:a16="http://schemas.microsoft.com/office/drawing/2014/main" id="{AAD1E446-0B5C-4F86-AC61-4227BC2D95EF}"/>
+                <a16:creationId xmlns:a16="http://schemas.microsoft.com/office/drawing/2014/main" id="{A5A8D46E-AC39-4CC4-B54E-B6805ECF682D}"/>
               </a:ext>
             </a:extLst>
           </p:cNvPr>
@@ -19842,7 +19842,7 @@
           <p:cNvPr id="58" name="">
             <a:extLst xmlns:a="http://schemas.openxmlformats.org/drawingml/2006/main">
               <a:ext uri="{FF2B5EF4-FFF2-40B4-BE49-F238E27FC236}">
-                <a16:creationId xmlns:a16="http://schemas.microsoft.com/office/drawing/2014/main" id="{032A07D6-0118-43F0-910A-09CA0F2DFEE9}"/>
+                <a16:creationId xmlns:a16="http://schemas.microsoft.com/office/drawing/2014/main" id="{1AF2E998-E720-4905-A682-11050B8A7470}"/>
               </a:ext>
             </a:extLst>
           </p:cNvPr>
@@ -19873,7 +19873,7 @@
           <p:cNvPr id="59" name="">
             <a:extLst xmlns:a="http://schemas.openxmlformats.org/drawingml/2006/main">
               <a:ext uri="{FF2B5EF4-FFF2-40B4-BE49-F238E27FC236}">
-                <a16:creationId xmlns:a16="http://schemas.microsoft.com/office/drawing/2014/main" id="{68197BB4-A72B-4315-B467-FCDC0204004E}"/>
+                <a16:creationId xmlns:a16="http://schemas.microsoft.com/office/drawing/2014/main" id="{B8E209A6-1E74-4AA8-9E58-9037B6F5D327}"/>
               </a:ext>
             </a:extLst>
           </p:cNvPr>
@@ -19925,7 +19925,7 @@
           <p:cNvPr id="60" name="">
             <a:extLst xmlns:a="http://schemas.openxmlformats.org/drawingml/2006/main">
               <a:ext uri="{FF2B5EF4-FFF2-40B4-BE49-F238E27FC236}">
-                <a16:creationId xmlns:a16="http://schemas.microsoft.com/office/drawing/2014/main" id="{FEDF10E6-5D3B-475D-83E6-A7BAF8DF1E7F}"/>
+                <a16:creationId xmlns:a16="http://schemas.microsoft.com/office/drawing/2014/main" id="{D79CA7DD-F255-4013-BFA0-37421D3C696D}"/>
               </a:ext>
             </a:extLst>
           </p:cNvPr>
@@ -19977,7 +19977,7 @@
           <p:cNvPr id="61" name="">
             <a:extLst xmlns:a="http://schemas.openxmlformats.org/drawingml/2006/main">
               <a:ext uri="{FF2B5EF4-FFF2-40B4-BE49-F238E27FC236}">
-                <a16:creationId xmlns:a16="http://schemas.microsoft.com/office/drawing/2014/main" id="{8FB1A2A2-9568-4146-A4CC-45EFF22472E1}"/>
+                <a16:creationId xmlns:a16="http://schemas.microsoft.com/office/drawing/2014/main" id="{01AA4612-698F-4721-905A-9326E3EE822C}"/>
               </a:ext>
             </a:extLst>
           </p:cNvPr>
@@ -20029,7 +20029,7 @@
           <p:cNvPr id="62" name="">
             <a:extLst xmlns:a="http://schemas.openxmlformats.org/drawingml/2006/main">
               <a:ext uri="{FF2B5EF4-FFF2-40B4-BE49-F238E27FC236}">
-                <a16:creationId xmlns:a16="http://schemas.microsoft.com/office/drawing/2014/main" id="{1C1924BE-B3FB-42B0-874D-D31C8C17A8A3}"/>
+                <a16:creationId xmlns:a16="http://schemas.microsoft.com/office/drawing/2014/main" id="{A17B3613-1A57-44B9-BAF7-9E38EC96FCA4}"/>
               </a:ext>
             </a:extLst>
           </p:cNvPr>
@@ -20081,7 +20081,7 @@
           <p:cNvPr id="63" name="">
             <a:extLst xmlns:a="http://schemas.openxmlformats.org/drawingml/2006/main">
               <a:ext uri="{FF2B5EF4-FFF2-40B4-BE49-F238E27FC236}">
-                <a16:creationId xmlns:a16="http://schemas.microsoft.com/office/drawing/2014/main" id="{73DEBD6C-C1DE-47DB-951F-0284D0E1EB9E}"/>
+                <a16:creationId xmlns:a16="http://schemas.microsoft.com/office/drawing/2014/main" id="{C83DAB2F-4F10-490A-A52A-21D3DEC9A666}"/>
               </a:ext>
             </a:extLst>
           </p:cNvPr>
@@ -20133,7 +20133,7 @@
           <p:cNvPr id="64" name="">
             <a:extLst xmlns:a="http://schemas.openxmlformats.org/drawingml/2006/main">
               <a:ext uri="{FF2B5EF4-FFF2-40B4-BE49-F238E27FC236}">
-                <a16:creationId xmlns:a16="http://schemas.microsoft.com/office/drawing/2014/main" id="{8C037695-AF42-4A0E-AF78-5340CF4CB5C2}"/>
+                <a16:creationId xmlns:a16="http://schemas.microsoft.com/office/drawing/2014/main" id="{BC6C4ECE-7B84-4F5D-8828-41FA597CE8F0}"/>
               </a:ext>
             </a:extLst>
           </p:cNvPr>
@@ -20164,7 +20164,7 @@
           <p:cNvPr id="65" name="">
             <a:extLst xmlns:a="http://schemas.openxmlformats.org/drawingml/2006/main">
               <a:ext uri="{FF2B5EF4-FFF2-40B4-BE49-F238E27FC236}">
-                <a16:creationId xmlns:a16="http://schemas.microsoft.com/office/drawing/2014/main" id="{A67EF838-EA91-45D0-A307-0C83D62C023D}"/>
+                <a16:creationId xmlns:a16="http://schemas.microsoft.com/office/drawing/2014/main" id="{A562C9E3-581D-4C4A-BA9F-5FBF459B5C22}"/>
               </a:ext>
             </a:extLst>
           </p:cNvPr>
@@ -20216,7 +20216,7 @@
           <p:cNvPr id="66" name="">
             <a:extLst xmlns:a="http://schemas.openxmlformats.org/drawingml/2006/main">
               <a:ext uri="{FF2B5EF4-FFF2-40B4-BE49-F238E27FC236}">
-                <a16:creationId xmlns:a16="http://schemas.microsoft.com/office/drawing/2014/main" id="{B9BFF29A-70A7-407C-9223-C28ADF4205AB}"/>
+                <a16:creationId xmlns:a16="http://schemas.microsoft.com/office/drawing/2014/main" id="{FFD9CD8D-990C-4639-BDAD-BB39F21C429A}"/>
               </a:ext>
             </a:extLst>
           </p:cNvPr>
@@ -20268,7 +20268,7 @@
           <p:cNvPr id="67" name="">
             <a:extLst xmlns:a="http://schemas.openxmlformats.org/drawingml/2006/main">
               <a:ext uri="{FF2B5EF4-FFF2-40B4-BE49-F238E27FC236}">
-                <a16:creationId xmlns:a16="http://schemas.microsoft.com/office/drawing/2014/main" id="{8329C0A9-3F05-4437-A7C8-4C28CB3F3F48}"/>
+                <a16:creationId xmlns:a16="http://schemas.microsoft.com/office/drawing/2014/main" id="{077CBFEF-4F99-4392-883E-8C2A1987CA36}"/>
               </a:ext>
             </a:extLst>
           </p:cNvPr>
@@ -20320,7 +20320,7 @@
           <p:cNvPr id="68" name="">
             <a:extLst xmlns:a="http://schemas.openxmlformats.org/drawingml/2006/main">
               <a:ext uri="{FF2B5EF4-FFF2-40B4-BE49-F238E27FC236}">
-                <a16:creationId xmlns:a16="http://schemas.microsoft.com/office/drawing/2014/main" id="{38E045CF-040F-4480-985E-315AF3ECDE62}"/>
+                <a16:creationId xmlns:a16="http://schemas.microsoft.com/office/drawing/2014/main" id="{FCC1D8A6-11CD-459F-BEB9-8A29FCD034EE}"/>
               </a:ext>
             </a:extLst>
           </p:cNvPr>
@@ -20372,7 +20372,7 @@
           <p:cNvPr id="69" name="">
             <a:extLst xmlns:a="http://schemas.openxmlformats.org/drawingml/2006/main">
               <a:ext uri="{FF2B5EF4-FFF2-40B4-BE49-F238E27FC236}">
-                <a16:creationId xmlns:a16="http://schemas.microsoft.com/office/drawing/2014/main" id="{1CCD0C79-B69E-476B-A7CE-64D493452F50}"/>
+                <a16:creationId xmlns:a16="http://schemas.microsoft.com/office/drawing/2014/main" id="{88BE96D6-6E55-4864-98A4-D657553C8D2A}"/>
               </a:ext>
             </a:extLst>
           </p:cNvPr>
@@ -20424,7 +20424,7 @@
           <p:cNvPr id="70" name="">
             <a:extLst xmlns:a="http://schemas.openxmlformats.org/drawingml/2006/main">
               <a:ext uri="{FF2B5EF4-FFF2-40B4-BE49-F238E27FC236}">
-                <a16:creationId xmlns:a16="http://schemas.microsoft.com/office/drawing/2014/main" id="{26536CF3-F47F-4757-B243-FBE22D11C321}"/>
+                <a16:creationId xmlns:a16="http://schemas.microsoft.com/office/drawing/2014/main" id="{45895375-A0C1-42DB-A632-D92A6D324B1C}"/>
               </a:ext>
             </a:extLst>
           </p:cNvPr>
@@ -20455,7 +20455,7 @@
           <p:cNvPr id="71" name="">
             <a:extLst xmlns:a="http://schemas.openxmlformats.org/drawingml/2006/main">
               <a:ext uri="{FF2B5EF4-FFF2-40B4-BE49-F238E27FC236}">
-                <a16:creationId xmlns:a16="http://schemas.microsoft.com/office/drawing/2014/main" id="{97CF08F5-97E4-4FB9-A128-E02DE66F14D4}"/>
+                <a16:creationId xmlns:a16="http://schemas.microsoft.com/office/drawing/2014/main" id="{00C6E8B7-54D3-4AE6-AA19-176401988129}"/>
               </a:ext>
             </a:extLst>
           </p:cNvPr>
@@ -20486,7 +20486,7 @@
           <p:cNvPr id="72" name="">
             <a:extLst xmlns:a="http://schemas.openxmlformats.org/drawingml/2006/main">
               <a:ext uri="{FF2B5EF4-FFF2-40B4-BE49-F238E27FC236}">
-                <a16:creationId xmlns:a16="http://schemas.microsoft.com/office/drawing/2014/main" id="{443AF44D-7054-4873-A354-735DD0D7CC10}"/>
+                <a16:creationId xmlns:a16="http://schemas.microsoft.com/office/drawing/2014/main" id="{791AC00F-87D5-4508-AFC4-AD535B84E666}"/>
               </a:ext>
             </a:extLst>
           </p:cNvPr>
@@ -20538,7 +20538,7 @@
           <p:cNvPr id="73" name="">
             <a:extLst xmlns:a="http://schemas.openxmlformats.org/drawingml/2006/main">
               <a:ext uri="{FF2B5EF4-FFF2-40B4-BE49-F238E27FC236}">
-                <a16:creationId xmlns:a16="http://schemas.microsoft.com/office/drawing/2014/main" id="{47707AAE-2490-4A68-95B5-FDA58835E167}"/>
+                <a16:creationId xmlns:a16="http://schemas.microsoft.com/office/drawing/2014/main" id="{FF691CD6-A5A4-4501-9F2F-4CF9FBC3C920}"/>
               </a:ext>
             </a:extLst>
           </p:cNvPr>
@@ -20590,7 +20590,7 @@
           <p:cNvPr id="74" name="">
             <a:extLst xmlns:a="http://schemas.openxmlformats.org/drawingml/2006/main">
               <a:ext uri="{FF2B5EF4-FFF2-40B4-BE49-F238E27FC236}">
-                <a16:creationId xmlns:a16="http://schemas.microsoft.com/office/drawing/2014/main" id="{8F708F94-3515-437A-9A78-FBBDE7E66E9B}"/>
+                <a16:creationId xmlns:a16="http://schemas.microsoft.com/office/drawing/2014/main" id="{BC403F7C-D673-4D64-BF58-ABB78A2139AA}"/>
               </a:ext>
             </a:extLst>
           </p:cNvPr>
@@ -20642,7 +20642,7 @@
           <p:cNvPr id="75" name="">
             <a:extLst xmlns:a="http://schemas.openxmlformats.org/drawingml/2006/main">
               <a:ext uri="{FF2B5EF4-FFF2-40B4-BE49-F238E27FC236}">
-                <a16:creationId xmlns:a16="http://schemas.microsoft.com/office/drawing/2014/main" id="{279B264E-6A5E-4FDF-AFD6-235C590E2617}"/>
+                <a16:creationId xmlns:a16="http://schemas.microsoft.com/office/drawing/2014/main" id="{F6D93D6F-B694-4E51-9E98-885F98154EF1}"/>
               </a:ext>
             </a:extLst>
           </p:cNvPr>
@@ -20694,7 +20694,7 @@
           <p:cNvPr id="76" name="">
             <a:extLst xmlns:a="http://schemas.openxmlformats.org/drawingml/2006/main">
               <a:ext uri="{FF2B5EF4-FFF2-40B4-BE49-F238E27FC236}">
-                <a16:creationId xmlns:a16="http://schemas.microsoft.com/office/drawing/2014/main" id="{D8A79F64-1FFC-44B7-AE62-B8425149DA6C}"/>
+                <a16:creationId xmlns:a16="http://schemas.microsoft.com/office/drawing/2014/main" id="{5AA38853-36D2-47A6-9221-DA7CC02180CD}"/>
               </a:ext>
             </a:extLst>
           </p:cNvPr>
@@ -20746,7 +20746,7 @@
           <p:cNvPr id="77" name="">
             <a:extLst xmlns:a="http://schemas.openxmlformats.org/drawingml/2006/main">
               <a:ext uri="{FF2B5EF4-FFF2-40B4-BE49-F238E27FC236}">
-                <a16:creationId xmlns:a16="http://schemas.microsoft.com/office/drawing/2014/main" id="{4DDC84F3-8821-442C-AC0A-0FFF393864D7}"/>
+                <a16:creationId xmlns:a16="http://schemas.microsoft.com/office/drawing/2014/main" id="{1E494543-47A1-449B-9C45-AFB6321EED79}"/>
               </a:ext>
             </a:extLst>
           </p:cNvPr>
@@ -20777,7 +20777,7 @@
           <p:cNvPr id="78" name="">
             <a:extLst xmlns:a="http://schemas.openxmlformats.org/drawingml/2006/main">
               <a:ext uri="{FF2B5EF4-FFF2-40B4-BE49-F238E27FC236}">
-                <a16:creationId xmlns:a16="http://schemas.microsoft.com/office/drawing/2014/main" id="{A7449A6B-4994-4DA2-979B-385C4E8B5706}"/>
+                <a16:creationId xmlns:a16="http://schemas.microsoft.com/office/drawing/2014/main" id="{5A83DFF3-1C39-4DFF-8B1A-98D8753366CF}"/>
               </a:ext>
             </a:extLst>
           </p:cNvPr>
@@ -20829,7 +20829,7 @@
           <p:cNvPr id="79" name="">
             <a:extLst xmlns:a="http://schemas.openxmlformats.org/drawingml/2006/main">
               <a:ext uri="{FF2B5EF4-FFF2-40B4-BE49-F238E27FC236}">
-                <a16:creationId xmlns:a16="http://schemas.microsoft.com/office/drawing/2014/main" id="{DA27C1DF-BD3A-449D-B42F-9C121B30A20B}"/>
+                <a16:creationId xmlns:a16="http://schemas.microsoft.com/office/drawing/2014/main" id="{68763FBC-4420-447F-871C-CE454F350FEC}"/>
               </a:ext>
             </a:extLst>
           </p:cNvPr>
@@ -20881,7 +20881,7 @@
           <p:cNvPr id="80" name="">
             <a:extLst xmlns:a="http://schemas.openxmlformats.org/drawingml/2006/main">
               <a:ext uri="{FF2B5EF4-FFF2-40B4-BE49-F238E27FC236}">
-                <a16:creationId xmlns:a16="http://schemas.microsoft.com/office/drawing/2014/main" id="{A900DF79-8AFF-4D16-AACB-BFB49D4D13BD}"/>
+                <a16:creationId xmlns:a16="http://schemas.microsoft.com/office/drawing/2014/main" id="{2D806EA7-012F-4D35-BBC5-00E69D3B2DBE}"/>
               </a:ext>
             </a:extLst>
           </p:cNvPr>
@@ -20933,7 +20933,7 @@
           <p:cNvPr id="81" name="">
             <a:extLst xmlns:a="http://schemas.openxmlformats.org/drawingml/2006/main">
               <a:ext uri="{FF2B5EF4-FFF2-40B4-BE49-F238E27FC236}">
-                <a16:creationId xmlns:a16="http://schemas.microsoft.com/office/drawing/2014/main" id="{ACE9CAA0-D6A7-4035-B1C5-57BCA78A6418}"/>
+                <a16:creationId xmlns:a16="http://schemas.microsoft.com/office/drawing/2014/main" id="{CE57C298-BFC3-447B-8DF1-4690A16316FF}"/>
               </a:ext>
             </a:extLst>
           </p:cNvPr>
@@ -20985,7 +20985,7 @@
           <p:cNvPr id="82" name="">
             <a:extLst xmlns:a="http://schemas.openxmlformats.org/drawingml/2006/main">
               <a:ext uri="{FF2B5EF4-FFF2-40B4-BE49-F238E27FC236}">
-                <a16:creationId xmlns:a16="http://schemas.microsoft.com/office/drawing/2014/main" id="{34F424A3-FAE3-4008-9374-13889C230FFB}"/>
+                <a16:creationId xmlns:a16="http://schemas.microsoft.com/office/drawing/2014/main" id="{2C526E01-C02C-481D-B080-DCE643DE3375}"/>
               </a:ext>
             </a:extLst>
           </p:cNvPr>
@@ -21037,7 +21037,7 @@
           <p:cNvPr id="83" name="">
             <a:extLst xmlns:a="http://schemas.openxmlformats.org/drawingml/2006/main">
               <a:ext uri="{FF2B5EF4-FFF2-40B4-BE49-F238E27FC236}">
-                <a16:creationId xmlns:a16="http://schemas.microsoft.com/office/drawing/2014/main" id="{4D482B9F-A7D4-4507-9B38-927913FD95DB}"/>
+                <a16:creationId xmlns:a16="http://schemas.microsoft.com/office/drawing/2014/main" id="{7D9CE9C1-155B-4871-9808-17E675049A67}"/>
               </a:ext>
             </a:extLst>
           </p:cNvPr>
@@ -21068,7 +21068,7 @@
           <p:cNvPr id="84" name="">
             <a:extLst xmlns:a="http://schemas.openxmlformats.org/drawingml/2006/main">
               <a:ext uri="{FF2B5EF4-FFF2-40B4-BE49-F238E27FC236}">
-                <a16:creationId xmlns:a16="http://schemas.microsoft.com/office/drawing/2014/main" id="{87992A32-760B-4EFD-B5E9-5ACEB73947FA}"/>
+                <a16:creationId xmlns:a16="http://schemas.microsoft.com/office/drawing/2014/main" id="{F675AC07-E120-4730-963C-CF7D305F83B5}"/>
               </a:ext>
             </a:extLst>
           </p:cNvPr>
@@ -21120,7 +21120,7 @@
           <p:cNvPr id="85" name="">
             <a:extLst xmlns:a="http://schemas.openxmlformats.org/drawingml/2006/main">
               <a:ext uri="{FF2B5EF4-FFF2-40B4-BE49-F238E27FC236}">
-                <a16:creationId xmlns:a16="http://schemas.microsoft.com/office/drawing/2014/main" id="{AD7CADB0-BDAB-433E-8436-9F19B836C4BB}"/>
+                <a16:creationId xmlns:a16="http://schemas.microsoft.com/office/drawing/2014/main" id="{B1BDF301-73AD-4B75-A769-78C03A59DB46}"/>
               </a:ext>
             </a:extLst>
           </p:cNvPr>
@@ -21172,7 +21172,7 @@
           <p:cNvPr id="86" name="">
             <a:extLst xmlns:a="http://schemas.openxmlformats.org/drawingml/2006/main">
               <a:ext uri="{FF2B5EF4-FFF2-40B4-BE49-F238E27FC236}">
-                <a16:creationId xmlns:a16="http://schemas.microsoft.com/office/drawing/2014/main" id="{2EE74568-5717-4083-8280-19F204DC4968}"/>
+                <a16:creationId xmlns:a16="http://schemas.microsoft.com/office/drawing/2014/main" id="{FDBBD759-4CCF-4F30-B694-276474CDDAF3}"/>
               </a:ext>
             </a:extLst>
           </p:cNvPr>
@@ -21224,7 +21224,7 @@
           <p:cNvPr id="87" name="">
             <a:extLst xmlns:a="http://schemas.openxmlformats.org/drawingml/2006/main">
               <a:ext uri="{FF2B5EF4-FFF2-40B4-BE49-F238E27FC236}">
-                <a16:creationId xmlns:a16="http://schemas.microsoft.com/office/drawing/2014/main" id="{7B419410-8A2C-4256-8DAC-42DB393F44E2}"/>
+                <a16:creationId xmlns:a16="http://schemas.microsoft.com/office/drawing/2014/main" id="{1481D981-33B4-4808-B7EB-2AB5824D7980}"/>
               </a:ext>
             </a:extLst>
           </p:cNvPr>
@@ -21276,7 +21276,7 @@
           <p:cNvPr id="88" name="">
             <a:extLst xmlns:a="http://schemas.openxmlformats.org/drawingml/2006/main">
               <a:ext uri="{FF2B5EF4-FFF2-40B4-BE49-F238E27FC236}">
-                <a16:creationId xmlns:a16="http://schemas.microsoft.com/office/drawing/2014/main" id="{73569FD0-0EDF-4596-B7C8-85FFD44FCE8A}"/>
+                <a16:creationId xmlns:a16="http://schemas.microsoft.com/office/drawing/2014/main" id="{FCE351D1-62F6-4755-AFB3-8AA765C0179C}"/>
               </a:ext>
             </a:extLst>
           </p:cNvPr>
@@ -21328,7 +21328,7 @@
           <p:cNvPr id="89" name="">
             <a:extLst xmlns:a="http://schemas.openxmlformats.org/drawingml/2006/main">
               <a:ext uri="{FF2B5EF4-FFF2-40B4-BE49-F238E27FC236}">
-                <a16:creationId xmlns:a16="http://schemas.microsoft.com/office/drawing/2014/main" id="{E156C21F-0E37-4134-BED7-9AC40C89051F}"/>
+                <a16:creationId xmlns:a16="http://schemas.microsoft.com/office/drawing/2014/main" id="{1C859E55-62BE-4F42-8CF1-6C00BF084821}"/>
               </a:ext>
             </a:extLst>
           </p:cNvPr>
@@ -21359,7 +21359,7 @@
           <p:cNvPr id="90" name="">
             <a:extLst xmlns:a="http://schemas.openxmlformats.org/drawingml/2006/main">
               <a:ext uri="{FF2B5EF4-FFF2-40B4-BE49-F238E27FC236}">
-                <a16:creationId xmlns:a16="http://schemas.microsoft.com/office/drawing/2014/main" id="{17C4FFD0-09B7-4D9C-921E-595C6E297A6B}"/>
+                <a16:creationId xmlns:a16="http://schemas.microsoft.com/office/drawing/2014/main" id="{ED61BE55-8BA7-466B-BF75-BBE8AFA8D171}"/>
               </a:ext>
             </a:extLst>
           </p:cNvPr>
@@ -21390,7 +21390,7 @@
           <p:cNvPr id="91" name="">
             <a:extLst xmlns:a="http://schemas.openxmlformats.org/drawingml/2006/main">
               <a:ext uri="{FF2B5EF4-FFF2-40B4-BE49-F238E27FC236}">
-                <a16:creationId xmlns:a16="http://schemas.microsoft.com/office/drawing/2014/main" id="{FFC07A22-9CE5-4FCE-B23B-B63A78066625}"/>
+                <a16:creationId xmlns:a16="http://schemas.microsoft.com/office/drawing/2014/main" id="{862BDDB5-C990-4BD6-A011-431809A0C190}"/>
               </a:ext>
             </a:extLst>
           </p:cNvPr>
@@ -21442,7 +21442,7 @@
           <p:cNvPr id="92" name="">
             <a:extLst xmlns:a="http://schemas.openxmlformats.org/drawingml/2006/main">
               <a:ext uri="{FF2B5EF4-FFF2-40B4-BE49-F238E27FC236}">
-                <a16:creationId xmlns:a16="http://schemas.microsoft.com/office/drawing/2014/main" id="{48608D09-1A9F-4C3B-B2A3-6C3D0105FE4F}"/>
+                <a16:creationId xmlns:a16="http://schemas.microsoft.com/office/drawing/2014/main" id="{A7C63A69-C342-422D-BEA3-06382EB9E3EC}"/>
               </a:ext>
             </a:extLst>
           </p:cNvPr>
@@ -21494,7 +21494,7 @@
           <p:cNvPr id="93" name="">
             <a:extLst xmlns:a="http://schemas.openxmlformats.org/drawingml/2006/main">
               <a:ext uri="{FF2B5EF4-FFF2-40B4-BE49-F238E27FC236}">
-                <a16:creationId xmlns:a16="http://schemas.microsoft.com/office/drawing/2014/main" id="{85C094D9-1F99-4F69-BCCC-D5F6644CCD0B}"/>
+                <a16:creationId xmlns:a16="http://schemas.microsoft.com/office/drawing/2014/main" id="{0861F0ED-5131-44D8-BC6E-DF509D7B48B5}"/>
               </a:ext>
             </a:extLst>
           </p:cNvPr>
@@ -21546,7 +21546,7 @@
           <p:cNvPr id="94" name="">
             <a:extLst xmlns:a="http://schemas.openxmlformats.org/drawingml/2006/main">
               <a:ext uri="{FF2B5EF4-FFF2-40B4-BE49-F238E27FC236}">
-                <a16:creationId xmlns:a16="http://schemas.microsoft.com/office/drawing/2014/main" id="{37A5BD50-3980-4FD3-9633-72086E4570FE}"/>
+                <a16:creationId xmlns:a16="http://schemas.microsoft.com/office/drawing/2014/main" id="{98076F41-C03F-45A1-A4CA-2A0BC2E9C876}"/>
               </a:ext>
             </a:extLst>
           </p:cNvPr>
@@ -21598,7 +21598,7 @@
           <p:cNvPr id="95" name="">
             <a:extLst xmlns:a="http://schemas.openxmlformats.org/drawingml/2006/main">
               <a:ext uri="{FF2B5EF4-FFF2-40B4-BE49-F238E27FC236}">
-                <a16:creationId xmlns:a16="http://schemas.microsoft.com/office/drawing/2014/main" id="{ACAF3A10-1B48-4829-A9B6-AC6D56DB5C5B}"/>
+                <a16:creationId xmlns:a16="http://schemas.microsoft.com/office/drawing/2014/main" id="{37AC5B77-CE6C-48DA-8D53-0067354812E1}"/>
               </a:ext>
             </a:extLst>
           </p:cNvPr>
@@ -21648,7 +21648,7 @@
     </p:spTree>
     <p:extLst>
       <p:ext uri="{BB962C8B-B14F-4D97-AF65-F5344CB8AC3E}">
-        <p14:creationId xmlns:p14="http://schemas.microsoft.com/office/powerpoint/2010/main" val="636750888"/>
+        <p14:creationId xmlns:p14="http://schemas.microsoft.com/office/powerpoint/2010/main" val="164269043"/>
       </p:ext>
     </p:extLst>
   </p:cSld>
@@ -21679,7 +21679,7 @@
           <p:cNvPr id="122" name="">
             <a:extLst xmlns:a="http://schemas.openxmlformats.org/drawingml/2006/main">
               <a:ext uri="{FF2B5EF4-FFF2-40B4-BE49-F238E27FC236}">
-                <a16:creationId xmlns:a16="http://schemas.microsoft.com/office/drawing/2014/main" id="{2B063F8E-0914-4E74-8CBF-E2C0D908A247}"/>
+                <a16:creationId xmlns:a16="http://schemas.microsoft.com/office/drawing/2014/main" id="{6A2D6BAB-75E1-4D2F-88DE-74D6532E0463}"/>
               </a:ext>
             </a:extLst>
           </p:cNvPr>
@@ -21712,7 +21712,7 @@
           <p:cNvPr id="2" name="">
             <a:extLst xmlns:a="http://schemas.openxmlformats.org/drawingml/2006/main">
               <a:ext uri="{FF2B5EF4-FFF2-40B4-BE49-F238E27FC236}">
-                <a16:creationId xmlns:a16="http://schemas.microsoft.com/office/drawing/2014/main" id="{F5D06C45-70D1-460F-9637-62D18905EEF1}"/>
+                <a16:creationId xmlns:a16="http://schemas.microsoft.com/office/drawing/2014/main" id="{6C725F5A-9B76-4C84-ACA0-AB1C9EF137FF}"/>
               </a:ext>
             </a:extLst>
           </p:cNvPr>
@@ -21743,7 +21743,7 @@
           <p:cNvPr id="3" name="">
             <a:extLst xmlns:a="http://schemas.openxmlformats.org/drawingml/2006/main">
               <a:ext uri="{FF2B5EF4-FFF2-40B4-BE49-F238E27FC236}">
-                <a16:creationId xmlns:a16="http://schemas.microsoft.com/office/drawing/2014/main" id="{1A4D33E6-2541-4BB4-96D2-EC5F8953E46E}"/>
+                <a16:creationId xmlns:a16="http://schemas.microsoft.com/office/drawing/2014/main" id="{8FFACC33-2670-4526-A889-BDF77AA7975D}"/>
               </a:ext>
             </a:extLst>
           </p:cNvPr>
@@ -21795,7 +21795,7 @@
           <p:cNvPr id="4" name="">
             <a:extLst xmlns:a="http://schemas.openxmlformats.org/drawingml/2006/main">
               <a:ext uri="{FF2B5EF4-FFF2-40B4-BE49-F238E27FC236}">
-                <a16:creationId xmlns:a16="http://schemas.microsoft.com/office/drawing/2014/main" id="{23B6FA38-BF9E-4DF4-A968-84B962C6DF09}"/>
+                <a16:creationId xmlns:a16="http://schemas.microsoft.com/office/drawing/2014/main" id="{DD1457BD-1D35-4BA3-9A8C-BE9BE48BE94D}"/>
               </a:ext>
             </a:extLst>
           </p:cNvPr>
@@ -21847,7 +21847,7 @@
           <p:cNvPr id="5" name="">
             <a:extLst xmlns:a="http://schemas.openxmlformats.org/drawingml/2006/main">
               <a:ext uri="{FF2B5EF4-FFF2-40B4-BE49-F238E27FC236}">
-                <a16:creationId xmlns:a16="http://schemas.microsoft.com/office/drawing/2014/main" id="{97FC6421-5089-422B-BC75-1CC773038348}"/>
+                <a16:creationId xmlns:a16="http://schemas.microsoft.com/office/drawing/2014/main" id="{0237EC77-1139-4FE4-93AD-A06ED1AD42F6}"/>
               </a:ext>
             </a:extLst>
           </p:cNvPr>
@@ -21882,7 +21882,7 @@
           <p:nvPr/>
         </p:nvPicPr>
         <p:blipFill>
-          <a:blip xmlns:r="http://schemas.openxmlformats.org/officeDocument/2006/relationships" xmlns:a="http://schemas.openxmlformats.org/drawingml/2006/main" r:embed="Rf7f99e7c77bf48e5"/>
+          <a:blip xmlns:r="http://schemas.openxmlformats.org/officeDocument/2006/relationships" xmlns:a="http://schemas.openxmlformats.org/drawingml/2006/main" r:embed="Rd7786cc8a1994431"/>
           <a:stretch xmlns:a="http://schemas.openxmlformats.org/drawingml/2006/main"/>
         </p:blipFill>
         <p:spPr>
@@ -21900,7 +21900,7 @@
           <p:cNvPr id="7" name="">
             <a:extLst xmlns:a="http://schemas.openxmlformats.org/drawingml/2006/main">
               <a:ext uri="{FF2B5EF4-FFF2-40B4-BE49-F238E27FC236}">
-                <a16:creationId xmlns:a16="http://schemas.microsoft.com/office/drawing/2014/main" id="{F6FE6D0B-E3D2-406A-9833-8BC85B182C3C}"/>
+                <a16:creationId xmlns:a16="http://schemas.microsoft.com/office/drawing/2014/main" id="{BA10148D-4B74-4334-92EF-B4280754BC24}"/>
               </a:ext>
             </a:extLst>
           </p:cNvPr>
@@ -21952,7 +21952,7 @@
           <p:cNvPr id="8" name="">
             <a:extLst xmlns:a="http://schemas.openxmlformats.org/drawingml/2006/main">
               <a:ext uri="{FF2B5EF4-FFF2-40B4-BE49-F238E27FC236}">
-                <a16:creationId xmlns:a16="http://schemas.microsoft.com/office/drawing/2014/main" id="{257FE475-A28C-4BE4-AE9E-C254A82C759B}"/>
+                <a16:creationId xmlns:a16="http://schemas.microsoft.com/office/drawing/2014/main" id="{359965F0-13F0-4946-809F-545AE3B411BA}"/>
               </a:ext>
             </a:extLst>
           </p:cNvPr>
@@ -22004,7 +22004,7 @@
           <p:cNvPr id="9" name="">
             <a:extLst xmlns:a="http://schemas.openxmlformats.org/drawingml/2006/main">
               <a:ext uri="{FF2B5EF4-FFF2-40B4-BE49-F238E27FC236}">
-                <a16:creationId xmlns:a16="http://schemas.microsoft.com/office/drawing/2014/main" id="{E60D047B-3667-4E81-8DDB-59E05ECE487D}"/>
+                <a16:creationId xmlns:a16="http://schemas.microsoft.com/office/drawing/2014/main" id="{C131CF5F-E59F-4B79-A3B1-4E5C5318AAF2}"/>
               </a:ext>
             </a:extLst>
           </p:cNvPr>
@@ -22056,7 +22056,7 @@
           <p:cNvPr id="10" name="">
             <a:extLst xmlns:a="http://schemas.openxmlformats.org/drawingml/2006/main">
               <a:ext uri="{FF2B5EF4-FFF2-40B4-BE49-F238E27FC236}">
-                <a16:creationId xmlns:a16="http://schemas.microsoft.com/office/drawing/2014/main" id="{68A39688-8C8F-4E01-A5F9-9B9ECDE74CF6}"/>
+                <a16:creationId xmlns:a16="http://schemas.microsoft.com/office/drawing/2014/main" id="{901EDA61-2C75-458F-BE0E-661DB5F3D8D7}"/>
               </a:ext>
             </a:extLst>
           </p:cNvPr>
@@ -22108,7 +22108,7 @@
           <p:cNvPr id="11" name="">
             <a:extLst xmlns:a="http://schemas.openxmlformats.org/drawingml/2006/main">
               <a:ext uri="{FF2B5EF4-FFF2-40B4-BE49-F238E27FC236}">
-                <a16:creationId xmlns:a16="http://schemas.microsoft.com/office/drawing/2014/main" id="{9E318370-45D0-434F-A268-AC0DD5B566CF}"/>
+                <a16:creationId xmlns:a16="http://schemas.microsoft.com/office/drawing/2014/main" id="{F4422781-5669-442F-B97B-3E9319D3AEE4}"/>
               </a:ext>
             </a:extLst>
           </p:cNvPr>
@@ -22139,7 +22139,7 @@
           <p:cNvPr id="12" name="">
             <a:extLst xmlns:a="http://schemas.openxmlformats.org/drawingml/2006/main">
               <a:ext uri="{FF2B5EF4-FFF2-40B4-BE49-F238E27FC236}">
-                <a16:creationId xmlns:a16="http://schemas.microsoft.com/office/drawing/2014/main" id="{30B0141E-9710-4ED6-9EDF-8EE4FCF8A686}"/>
+                <a16:creationId xmlns:a16="http://schemas.microsoft.com/office/drawing/2014/main" id="{78CA0E3F-AEF2-47CF-BFAE-AD4C05530F7A}"/>
               </a:ext>
             </a:extLst>
           </p:cNvPr>
@@ -22170,7 +22170,7 @@
           <p:cNvPr id="13" name="">
             <a:extLst xmlns:a="http://schemas.openxmlformats.org/drawingml/2006/main">
               <a:ext uri="{FF2B5EF4-FFF2-40B4-BE49-F238E27FC236}">
-                <a16:creationId xmlns:a16="http://schemas.microsoft.com/office/drawing/2014/main" id="{29FA0B92-78A6-4FFD-8279-73BB5693F778}"/>
+                <a16:creationId xmlns:a16="http://schemas.microsoft.com/office/drawing/2014/main" id="{8B6B74CB-5BE6-436D-8DFD-D68E9A0B1AA4}"/>
               </a:ext>
             </a:extLst>
           </p:cNvPr>
@@ -22222,7 +22222,7 @@
           <p:cNvPr id="14" name="">
             <a:extLst xmlns:a="http://schemas.openxmlformats.org/drawingml/2006/main">
               <a:ext uri="{FF2B5EF4-FFF2-40B4-BE49-F238E27FC236}">
-                <a16:creationId xmlns:a16="http://schemas.microsoft.com/office/drawing/2014/main" id="{00528E46-3F1A-4B35-875C-A778F1B2909E}"/>
+                <a16:creationId xmlns:a16="http://schemas.microsoft.com/office/drawing/2014/main" id="{640EDD7C-A29B-44DC-81B5-827DEDB9F6AE}"/>
               </a:ext>
             </a:extLst>
           </p:cNvPr>
@@ -22274,7 +22274,7 @@
           <p:cNvPr id="15" name="">
             <a:extLst xmlns:a="http://schemas.openxmlformats.org/drawingml/2006/main">
               <a:ext uri="{FF2B5EF4-FFF2-40B4-BE49-F238E27FC236}">
-                <a16:creationId xmlns:a16="http://schemas.microsoft.com/office/drawing/2014/main" id="{0A8D5E9A-4009-4383-AA5E-3F037DCCA66D}"/>
+                <a16:creationId xmlns:a16="http://schemas.microsoft.com/office/drawing/2014/main" id="{3A8349A9-A36E-4064-A5EB-FCAA1B86415D}"/>
               </a:ext>
             </a:extLst>
           </p:cNvPr>
@@ -22326,7 +22326,7 @@
           <p:cNvPr id="16" name="">
             <a:extLst xmlns:a="http://schemas.openxmlformats.org/drawingml/2006/main">
               <a:ext uri="{FF2B5EF4-FFF2-40B4-BE49-F238E27FC236}">
-                <a16:creationId xmlns:a16="http://schemas.microsoft.com/office/drawing/2014/main" id="{0B383B1C-3E4E-4BCE-93E1-000A666D485A}"/>
+                <a16:creationId xmlns:a16="http://schemas.microsoft.com/office/drawing/2014/main" id="{88B022DB-A367-41B7-9F22-CC4F8CE0C5D5}"/>
               </a:ext>
             </a:extLst>
           </p:cNvPr>
@@ -22378,7 +22378,7 @@
           <p:cNvPr id="17" name="">
             <a:extLst xmlns:a="http://schemas.openxmlformats.org/drawingml/2006/main">
               <a:ext uri="{FF2B5EF4-FFF2-40B4-BE49-F238E27FC236}">
-                <a16:creationId xmlns:a16="http://schemas.microsoft.com/office/drawing/2014/main" id="{03445DCE-7C10-4F28-BAE0-BE5F682998AE}"/>
+                <a16:creationId xmlns:a16="http://schemas.microsoft.com/office/drawing/2014/main" id="{7810329E-9D77-401D-89BF-6E25FDE9C82F}"/>
               </a:ext>
             </a:extLst>
           </p:cNvPr>
@@ -22430,7 +22430,7 @@
           <p:cNvPr id="18" name="">
             <a:extLst xmlns:a="http://schemas.openxmlformats.org/drawingml/2006/main">
               <a:ext uri="{FF2B5EF4-FFF2-40B4-BE49-F238E27FC236}">
-                <a16:creationId xmlns:a16="http://schemas.microsoft.com/office/drawing/2014/main" id="{0A878A64-111A-4D33-9CE5-3B9782883E6C}"/>
+                <a16:creationId xmlns:a16="http://schemas.microsoft.com/office/drawing/2014/main" id="{40E308BE-8128-47F2-A696-79A1B8D6A915}"/>
               </a:ext>
             </a:extLst>
           </p:cNvPr>
@@ -22482,7 +22482,7 @@
           <p:cNvPr id="19" name="">
             <a:extLst xmlns:a="http://schemas.openxmlformats.org/drawingml/2006/main">
               <a:ext uri="{FF2B5EF4-FFF2-40B4-BE49-F238E27FC236}">
-                <a16:creationId xmlns:a16="http://schemas.microsoft.com/office/drawing/2014/main" id="{83AF6217-2A51-4FCB-90EB-3ADAC9356459}"/>
+                <a16:creationId xmlns:a16="http://schemas.microsoft.com/office/drawing/2014/main" id="{A701B0B8-12ED-4E1D-9DEB-9297315C0B3E}"/>
               </a:ext>
             </a:extLst>
           </p:cNvPr>
@@ -22534,7 +22534,7 @@
           <p:cNvPr id="20" name="">
             <a:extLst xmlns:a="http://schemas.openxmlformats.org/drawingml/2006/main">
               <a:ext uri="{FF2B5EF4-FFF2-40B4-BE49-F238E27FC236}">
-                <a16:creationId xmlns:a16="http://schemas.microsoft.com/office/drawing/2014/main" id="{822A1D17-69F3-4DE7-961F-BA14376B72FA}"/>
+                <a16:creationId xmlns:a16="http://schemas.microsoft.com/office/drawing/2014/main" id="{6F7681F4-D7F3-4C9F-A928-F4F7867B0603}"/>
               </a:ext>
             </a:extLst>
           </p:cNvPr>
@@ -22565,7 +22565,7 @@
           <p:cNvPr id="21" name="">
             <a:extLst xmlns:a="http://schemas.openxmlformats.org/drawingml/2006/main">
               <a:ext uri="{FF2B5EF4-FFF2-40B4-BE49-F238E27FC236}">
-                <a16:creationId xmlns:a16="http://schemas.microsoft.com/office/drawing/2014/main" id="{08764FBD-7437-4057-89FE-2E2597BDBD5E}"/>
+                <a16:creationId xmlns:a16="http://schemas.microsoft.com/office/drawing/2014/main" id="{47BA4A0D-FA1D-42A2-9B64-6E8CD10A24A3}"/>
               </a:ext>
             </a:extLst>
           </p:cNvPr>
@@ -22617,7 +22617,7 @@
           <p:cNvPr id="22" name="">
             <a:extLst xmlns:a="http://schemas.openxmlformats.org/drawingml/2006/main">
               <a:ext uri="{FF2B5EF4-FFF2-40B4-BE49-F238E27FC236}">
-                <a16:creationId xmlns:a16="http://schemas.microsoft.com/office/drawing/2014/main" id="{4CDA67BC-3F4B-4AF3-B212-2C341A71E80C}"/>
+                <a16:creationId xmlns:a16="http://schemas.microsoft.com/office/drawing/2014/main" id="{E2E44D8F-FA3E-43A2-BB36-898118DF337C}"/>
               </a:ext>
             </a:extLst>
           </p:cNvPr>
@@ -22669,7 +22669,7 @@
           <p:cNvPr id="23" name="">
             <a:extLst xmlns:a="http://schemas.openxmlformats.org/drawingml/2006/main">
               <a:ext uri="{FF2B5EF4-FFF2-40B4-BE49-F238E27FC236}">
-                <a16:creationId xmlns:a16="http://schemas.microsoft.com/office/drawing/2014/main" id="{C0B195BA-BFF2-4AA7-B11E-054AD2116014}"/>
+                <a16:creationId xmlns:a16="http://schemas.microsoft.com/office/drawing/2014/main" id="{BE6F683A-D019-46AE-A5B1-0EF779459ACC}"/>
               </a:ext>
             </a:extLst>
           </p:cNvPr>
@@ -22721,7 +22721,7 @@
           <p:cNvPr id="24" name="">
             <a:extLst xmlns:a="http://schemas.openxmlformats.org/drawingml/2006/main">
               <a:ext uri="{FF2B5EF4-FFF2-40B4-BE49-F238E27FC236}">
-                <a16:creationId xmlns:a16="http://schemas.microsoft.com/office/drawing/2014/main" id="{2C044A97-F440-44D2-AC01-DF95C225B920}"/>
+                <a16:creationId xmlns:a16="http://schemas.microsoft.com/office/drawing/2014/main" id="{5F48EBEF-8B83-471A-906A-55D4A8601AA1}"/>
               </a:ext>
             </a:extLst>
           </p:cNvPr>
@@ -22773,7 +22773,7 @@
           <p:cNvPr id="25" name="">
             <a:extLst xmlns:a="http://schemas.openxmlformats.org/drawingml/2006/main">
               <a:ext uri="{FF2B5EF4-FFF2-40B4-BE49-F238E27FC236}">
-                <a16:creationId xmlns:a16="http://schemas.microsoft.com/office/drawing/2014/main" id="{A19603EB-8848-4C76-B689-2C364FB45B44}"/>
+                <a16:creationId xmlns:a16="http://schemas.microsoft.com/office/drawing/2014/main" id="{4181EF54-270D-4653-9172-0015363F3671}"/>
               </a:ext>
             </a:extLst>
           </p:cNvPr>
@@ -22825,7 +22825,7 @@
           <p:cNvPr id="26" name="">
             <a:extLst xmlns:a="http://schemas.openxmlformats.org/drawingml/2006/main">
               <a:ext uri="{FF2B5EF4-FFF2-40B4-BE49-F238E27FC236}">
-                <a16:creationId xmlns:a16="http://schemas.microsoft.com/office/drawing/2014/main" id="{8C6B4C5A-2C52-441E-B7E0-048CE192D18A}"/>
+                <a16:creationId xmlns:a16="http://schemas.microsoft.com/office/drawing/2014/main" id="{3A970D3E-25B6-418B-A0A1-36BFC3B3A50C}"/>
               </a:ext>
             </a:extLst>
           </p:cNvPr>
@@ -22877,7 +22877,7 @@
           <p:cNvPr id="27" name="">
             <a:extLst xmlns:a="http://schemas.openxmlformats.org/drawingml/2006/main">
               <a:ext uri="{FF2B5EF4-FFF2-40B4-BE49-F238E27FC236}">
-                <a16:creationId xmlns:a16="http://schemas.microsoft.com/office/drawing/2014/main" id="{C8A83B8B-ED47-46DB-9AEF-D1F5D5B3FDF2}"/>
+                <a16:creationId xmlns:a16="http://schemas.microsoft.com/office/drawing/2014/main" id="{09DEEF08-932F-4437-836F-C15C83DAA7FC}"/>
               </a:ext>
             </a:extLst>
           </p:cNvPr>
@@ -22929,7 +22929,7 @@
           <p:cNvPr id="28" name="">
             <a:extLst xmlns:a="http://schemas.openxmlformats.org/drawingml/2006/main">
               <a:ext uri="{FF2B5EF4-FFF2-40B4-BE49-F238E27FC236}">
-                <a16:creationId xmlns:a16="http://schemas.microsoft.com/office/drawing/2014/main" id="{8868AC22-4900-46F7-B14E-B22CEDF0941D}"/>
+                <a16:creationId xmlns:a16="http://schemas.microsoft.com/office/drawing/2014/main" id="{9C91274A-63D0-4606-A64D-30F04710FAF6}"/>
               </a:ext>
             </a:extLst>
           </p:cNvPr>
@@ -22960,7 +22960,7 @@
           <p:cNvPr id="29" name="">
             <a:extLst xmlns:a="http://schemas.openxmlformats.org/drawingml/2006/main">
               <a:ext uri="{FF2B5EF4-FFF2-40B4-BE49-F238E27FC236}">
-                <a16:creationId xmlns:a16="http://schemas.microsoft.com/office/drawing/2014/main" id="{79E20391-2E62-4D4A-AA41-91F2B9D3CDE8}"/>
+                <a16:creationId xmlns:a16="http://schemas.microsoft.com/office/drawing/2014/main" id="{C63010B7-688A-4B7F-AD80-2F3650014BB1}"/>
               </a:ext>
             </a:extLst>
           </p:cNvPr>
@@ -22991,7 +22991,7 @@
           <p:cNvPr id="30" name="">
             <a:extLst xmlns:a="http://schemas.openxmlformats.org/drawingml/2006/main">
               <a:ext uri="{FF2B5EF4-FFF2-40B4-BE49-F238E27FC236}">
-                <a16:creationId xmlns:a16="http://schemas.microsoft.com/office/drawing/2014/main" id="{070C8051-6D4A-40A6-80B8-ED29B9CBD95F}"/>
+                <a16:creationId xmlns:a16="http://schemas.microsoft.com/office/drawing/2014/main" id="{EC50DF23-B49F-4166-825D-774A4C372B0D}"/>
               </a:ext>
             </a:extLst>
           </p:cNvPr>
@@ -23043,7 +23043,7 @@
           <p:cNvPr id="31" name="">
             <a:extLst xmlns:a="http://schemas.openxmlformats.org/drawingml/2006/main">
               <a:ext uri="{FF2B5EF4-FFF2-40B4-BE49-F238E27FC236}">
-                <a16:creationId xmlns:a16="http://schemas.microsoft.com/office/drawing/2014/main" id="{5B705A00-ED4A-40EB-8F4B-864B923A1ED8}"/>
+                <a16:creationId xmlns:a16="http://schemas.microsoft.com/office/drawing/2014/main" id="{701C02DE-A4E1-4657-AAAB-6E713DC52666}"/>
               </a:ext>
             </a:extLst>
           </p:cNvPr>
@@ -23095,7 +23095,7 @@
           <p:cNvPr id="32" name="">
             <a:extLst xmlns:a="http://schemas.openxmlformats.org/drawingml/2006/main">
               <a:ext uri="{FF2B5EF4-FFF2-40B4-BE49-F238E27FC236}">
-                <a16:creationId xmlns:a16="http://schemas.microsoft.com/office/drawing/2014/main" id="{104BE72F-FC54-4D0D-834A-D3B5D1AF348A}"/>
+                <a16:creationId xmlns:a16="http://schemas.microsoft.com/office/drawing/2014/main" id="{9B856652-DA3D-4165-BC0A-318F72A6CD13}"/>
               </a:ext>
             </a:extLst>
           </p:cNvPr>
@@ -23147,7 +23147,7 @@
           <p:cNvPr id="33" name="">
             <a:extLst xmlns:a="http://schemas.openxmlformats.org/drawingml/2006/main">
               <a:ext uri="{FF2B5EF4-FFF2-40B4-BE49-F238E27FC236}">
-                <a16:creationId xmlns:a16="http://schemas.microsoft.com/office/drawing/2014/main" id="{86A8E39A-2C0F-49C9-897C-E848778529EC}"/>
+                <a16:creationId xmlns:a16="http://schemas.microsoft.com/office/drawing/2014/main" id="{6BAC6654-B484-4315-830F-095E6127AED7}"/>
               </a:ext>
             </a:extLst>
           </p:cNvPr>
@@ -23199,7 +23199,7 @@
           <p:cNvPr id="34" name="">
             <a:extLst xmlns:a="http://schemas.openxmlformats.org/drawingml/2006/main">
               <a:ext uri="{FF2B5EF4-FFF2-40B4-BE49-F238E27FC236}">
-                <a16:creationId xmlns:a16="http://schemas.microsoft.com/office/drawing/2014/main" id="{0A222A2E-D3C0-43E5-BAC7-D081373A69B3}"/>
+                <a16:creationId xmlns:a16="http://schemas.microsoft.com/office/drawing/2014/main" id="{BD0AB95C-A982-47F0-8513-A85A51EF0C9C}"/>
               </a:ext>
             </a:extLst>
           </p:cNvPr>
@@ -23251,7 +23251,7 @@
           <p:cNvPr id="35" name="">
             <a:extLst xmlns:a="http://schemas.openxmlformats.org/drawingml/2006/main">
               <a:ext uri="{FF2B5EF4-FFF2-40B4-BE49-F238E27FC236}">
-                <a16:creationId xmlns:a16="http://schemas.microsoft.com/office/drawing/2014/main" id="{FBF45AF6-0099-494C-B711-9A9169BCA023}"/>
+                <a16:creationId xmlns:a16="http://schemas.microsoft.com/office/drawing/2014/main" id="{3796D772-D847-4523-A9A1-21FE981E8118}"/>
               </a:ext>
             </a:extLst>
           </p:cNvPr>
@@ -23303,7 +23303,7 @@
           <p:cNvPr id="36" name="">
             <a:extLst xmlns:a="http://schemas.openxmlformats.org/drawingml/2006/main">
               <a:ext uri="{FF2B5EF4-FFF2-40B4-BE49-F238E27FC236}">
-                <a16:creationId xmlns:a16="http://schemas.microsoft.com/office/drawing/2014/main" id="{B520B3E2-A78E-4E6A-A227-D52AB4E14E43}"/>
+                <a16:creationId xmlns:a16="http://schemas.microsoft.com/office/drawing/2014/main" id="{8C23ACFA-80F1-41C9-A820-9140735C1CEE}"/>
               </a:ext>
             </a:extLst>
           </p:cNvPr>
@@ -23355,7 +23355,7 @@
           <p:cNvPr id="37" name="">
             <a:extLst xmlns:a="http://schemas.openxmlformats.org/drawingml/2006/main">
               <a:ext uri="{FF2B5EF4-FFF2-40B4-BE49-F238E27FC236}">
-                <a16:creationId xmlns:a16="http://schemas.microsoft.com/office/drawing/2014/main" id="{24BDDA8C-A883-4CCF-A9A2-9720F178B59B}"/>
+                <a16:creationId xmlns:a16="http://schemas.microsoft.com/office/drawing/2014/main" id="{6CC97953-0E72-4F7E-911E-A4CA526EB76A}"/>
               </a:ext>
             </a:extLst>
           </p:cNvPr>
@@ -23386,7 +23386,7 @@
           <p:cNvPr id="38" name="">
             <a:extLst xmlns:a="http://schemas.openxmlformats.org/drawingml/2006/main">
               <a:ext uri="{FF2B5EF4-FFF2-40B4-BE49-F238E27FC236}">
-                <a16:creationId xmlns:a16="http://schemas.microsoft.com/office/drawing/2014/main" id="{9C484871-5042-4167-AD4A-EE09F9DB122C}"/>
+                <a16:creationId xmlns:a16="http://schemas.microsoft.com/office/drawing/2014/main" id="{7BE4EAD0-AC15-4CDD-A238-F7BCDF7E124E}"/>
               </a:ext>
             </a:extLst>
           </p:cNvPr>
@@ -23438,7 +23438,7 @@
           <p:cNvPr id="39" name="">
             <a:extLst xmlns:a="http://schemas.openxmlformats.org/drawingml/2006/main">
               <a:ext uri="{FF2B5EF4-FFF2-40B4-BE49-F238E27FC236}">
-                <a16:creationId xmlns:a16="http://schemas.microsoft.com/office/drawing/2014/main" id="{5A29E984-EEDA-47A6-ACF9-E98C9D0DFE7A}"/>
+                <a16:creationId xmlns:a16="http://schemas.microsoft.com/office/drawing/2014/main" id="{933B93C4-1F4D-4156-BEFC-79487EF7B8D1}"/>
               </a:ext>
             </a:extLst>
           </p:cNvPr>
@@ -23490,7 +23490,7 @@
           <p:cNvPr id="40" name="">
             <a:extLst xmlns:a="http://schemas.openxmlformats.org/drawingml/2006/main">
               <a:ext uri="{FF2B5EF4-FFF2-40B4-BE49-F238E27FC236}">
-                <a16:creationId xmlns:a16="http://schemas.microsoft.com/office/drawing/2014/main" id="{7314489A-1BC8-408C-8202-D83670C5DF64}"/>
+                <a16:creationId xmlns:a16="http://schemas.microsoft.com/office/drawing/2014/main" id="{9B355672-A4B9-4524-8C45-4637D4527C5D}"/>
               </a:ext>
             </a:extLst>
           </p:cNvPr>
@@ -23542,7 +23542,7 @@
           <p:cNvPr id="41" name="">
             <a:extLst xmlns:a="http://schemas.openxmlformats.org/drawingml/2006/main">
               <a:ext uri="{FF2B5EF4-FFF2-40B4-BE49-F238E27FC236}">
-                <a16:creationId xmlns:a16="http://schemas.microsoft.com/office/drawing/2014/main" id="{A9555F1D-85FD-430B-8240-8672B91F0483}"/>
+                <a16:creationId xmlns:a16="http://schemas.microsoft.com/office/drawing/2014/main" id="{E2F55359-1AB0-4AE6-A3FC-D53A2B797CCC}"/>
               </a:ext>
             </a:extLst>
           </p:cNvPr>
@@ -23594,7 +23594,7 @@
           <p:cNvPr id="42" name="">
             <a:extLst xmlns:a="http://schemas.openxmlformats.org/drawingml/2006/main">
               <a:ext uri="{FF2B5EF4-FFF2-40B4-BE49-F238E27FC236}">
-                <a16:creationId xmlns:a16="http://schemas.microsoft.com/office/drawing/2014/main" id="{F23724B3-C42B-4CC5-87F1-6AAE43DD5257}"/>
+                <a16:creationId xmlns:a16="http://schemas.microsoft.com/office/drawing/2014/main" id="{F4A9E6AB-64C3-4EF0-A40C-9112A2314BB0}"/>
               </a:ext>
             </a:extLst>
           </p:cNvPr>
@@ -23646,7 +23646,7 @@
           <p:cNvPr id="43" name="">
             <a:extLst xmlns:a="http://schemas.openxmlformats.org/drawingml/2006/main">
               <a:ext uri="{FF2B5EF4-FFF2-40B4-BE49-F238E27FC236}">
-                <a16:creationId xmlns:a16="http://schemas.microsoft.com/office/drawing/2014/main" id="{95E72471-ADBA-4F00-A29A-657319098693}"/>
+                <a16:creationId xmlns:a16="http://schemas.microsoft.com/office/drawing/2014/main" id="{51561FFD-7B7E-464F-805B-1D091562753F}"/>
               </a:ext>
             </a:extLst>
           </p:cNvPr>
@@ -23698,7 +23698,7 @@
           <p:cNvPr id="44" name="">
             <a:extLst xmlns:a="http://schemas.openxmlformats.org/drawingml/2006/main">
               <a:ext uri="{FF2B5EF4-FFF2-40B4-BE49-F238E27FC236}">
-                <a16:creationId xmlns:a16="http://schemas.microsoft.com/office/drawing/2014/main" id="{B9EB73B7-B7D0-462F-867E-E6FEB98530B4}"/>
+                <a16:creationId xmlns:a16="http://schemas.microsoft.com/office/drawing/2014/main" id="{B72CAD3A-CE45-495A-A2AD-3E4F11A4BF1A}"/>
               </a:ext>
             </a:extLst>
           </p:cNvPr>
@@ -23750,7 +23750,7 @@
           <p:cNvPr id="45" name="">
             <a:extLst xmlns:a="http://schemas.openxmlformats.org/drawingml/2006/main">
               <a:ext uri="{FF2B5EF4-FFF2-40B4-BE49-F238E27FC236}">
-                <a16:creationId xmlns:a16="http://schemas.microsoft.com/office/drawing/2014/main" id="{CDC327B7-DBAD-4C77-AC1C-C4928330C3CD}"/>
+                <a16:creationId xmlns:a16="http://schemas.microsoft.com/office/drawing/2014/main" id="{8321A43A-2837-44A3-8D07-8550BA639B0B}"/>
               </a:ext>
             </a:extLst>
           </p:cNvPr>
@@ -23781,7 +23781,7 @@
           <p:cNvPr id="46" name="">
             <a:extLst xmlns:a="http://schemas.openxmlformats.org/drawingml/2006/main">
               <a:ext uri="{FF2B5EF4-FFF2-40B4-BE49-F238E27FC236}">
-                <a16:creationId xmlns:a16="http://schemas.microsoft.com/office/drawing/2014/main" id="{78CE97A2-DB6B-4DD5-AF9D-55B47DD1479D}"/>
+                <a16:creationId xmlns:a16="http://schemas.microsoft.com/office/drawing/2014/main" id="{B5DDD5E8-0F9A-4A63-922D-CE5F11EC6804}"/>
               </a:ext>
             </a:extLst>
           </p:cNvPr>
@@ -23812,7 +23812,7 @@
           <p:cNvPr id="47" name="">
             <a:extLst xmlns:a="http://schemas.openxmlformats.org/drawingml/2006/main">
               <a:ext uri="{FF2B5EF4-FFF2-40B4-BE49-F238E27FC236}">
-                <a16:creationId xmlns:a16="http://schemas.microsoft.com/office/drawing/2014/main" id="{74FFFD47-E53B-460B-860E-1AAE77589EE5}"/>
+                <a16:creationId xmlns:a16="http://schemas.microsoft.com/office/drawing/2014/main" id="{058707A4-6155-47D9-8879-04F9F702A85C}"/>
               </a:ext>
             </a:extLst>
           </p:cNvPr>
@@ -23864,7 +23864,7 @@
           <p:cNvPr id="48" name="">
             <a:extLst xmlns:a="http://schemas.openxmlformats.org/drawingml/2006/main">
               <a:ext uri="{FF2B5EF4-FFF2-40B4-BE49-F238E27FC236}">
-                <a16:creationId xmlns:a16="http://schemas.microsoft.com/office/drawing/2014/main" id="{C419183F-B799-4A06-BF9F-DDF70744F0FD}"/>
+                <a16:creationId xmlns:a16="http://schemas.microsoft.com/office/drawing/2014/main" id="{4AF7E40A-A359-4211-9B2C-88A3ED0E2097}"/>
               </a:ext>
             </a:extLst>
           </p:cNvPr>
@@ -23916,7 +23916,7 @@
           <p:cNvPr id="49" name="">
             <a:extLst xmlns:a="http://schemas.openxmlformats.org/drawingml/2006/main">
               <a:ext uri="{FF2B5EF4-FFF2-40B4-BE49-F238E27FC236}">
-                <a16:creationId xmlns:a16="http://schemas.microsoft.com/office/drawing/2014/main" id="{46DCF69C-4314-4C35-80D7-44CDE7237632}"/>
+                <a16:creationId xmlns:a16="http://schemas.microsoft.com/office/drawing/2014/main" id="{E970848C-8F4D-4A37-9236-1804A7E15671}"/>
               </a:ext>
             </a:extLst>
           </p:cNvPr>
@@ -23968,7 +23968,7 @@
           <p:cNvPr id="50" name="">
             <a:extLst xmlns:a="http://schemas.openxmlformats.org/drawingml/2006/main">
               <a:ext uri="{FF2B5EF4-FFF2-40B4-BE49-F238E27FC236}">
-                <a16:creationId xmlns:a16="http://schemas.microsoft.com/office/drawing/2014/main" id="{90F49C82-20B6-40E9-9251-D467FE6055AD}"/>
+                <a16:creationId xmlns:a16="http://schemas.microsoft.com/office/drawing/2014/main" id="{F5471A65-0008-4096-8674-0613DE63CC93}"/>
               </a:ext>
             </a:extLst>
           </p:cNvPr>
@@ -24020,7 +24020,7 @@
           <p:cNvPr id="51" name="">
             <a:extLst xmlns:a="http://schemas.openxmlformats.org/drawingml/2006/main">
               <a:ext uri="{FF2B5EF4-FFF2-40B4-BE49-F238E27FC236}">
-                <a16:creationId xmlns:a16="http://schemas.microsoft.com/office/drawing/2014/main" id="{4EFC4390-2E0F-41C2-8632-B1C89407C2A1}"/>
+                <a16:creationId xmlns:a16="http://schemas.microsoft.com/office/drawing/2014/main" id="{7779B076-DC1A-4DBE-A8F1-8C743B2F23F7}"/>
               </a:ext>
             </a:extLst>
           </p:cNvPr>
@@ -24072,7 +24072,7 @@
           <p:cNvPr id="52" name="">
             <a:extLst xmlns:a="http://schemas.openxmlformats.org/drawingml/2006/main">
               <a:ext uri="{FF2B5EF4-FFF2-40B4-BE49-F238E27FC236}">
-                <a16:creationId xmlns:a16="http://schemas.microsoft.com/office/drawing/2014/main" id="{06359722-8CDE-4D81-8335-A5FAF524BAB1}"/>
+                <a16:creationId xmlns:a16="http://schemas.microsoft.com/office/drawing/2014/main" id="{FC9F4C83-A11F-4EF0-BA4D-0C2947E3F010}"/>
               </a:ext>
             </a:extLst>
           </p:cNvPr>
@@ -24124,7 +24124,7 @@
           <p:cNvPr id="53" name="">
             <a:extLst xmlns:a="http://schemas.openxmlformats.org/drawingml/2006/main">
               <a:ext uri="{FF2B5EF4-FFF2-40B4-BE49-F238E27FC236}">
-                <a16:creationId xmlns:a16="http://schemas.microsoft.com/office/drawing/2014/main" id="{FE3E79EC-898C-4DB2-BFA7-4FB681D9191C}"/>
+                <a16:creationId xmlns:a16="http://schemas.microsoft.com/office/drawing/2014/main" id="{336F7F56-1E1C-49A4-83F5-D4F48A2022BC}"/>
               </a:ext>
             </a:extLst>
           </p:cNvPr>
@@ -24176,7 +24176,7 @@
           <p:cNvPr id="54" name="">
             <a:extLst xmlns:a="http://schemas.openxmlformats.org/drawingml/2006/main">
               <a:ext uri="{FF2B5EF4-FFF2-40B4-BE49-F238E27FC236}">
-                <a16:creationId xmlns:a16="http://schemas.microsoft.com/office/drawing/2014/main" id="{85D9358A-7979-430E-A967-02176B7008A1}"/>
+                <a16:creationId xmlns:a16="http://schemas.microsoft.com/office/drawing/2014/main" id="{DE34D0AE-4814-4B62-83BB-4DB9D73D7296}"/>
               </a:ext>
             </a:extLst>
           </p:cNvPr>
@@ -24207,7 +24207,7 @@
           <p:cNvPr id="55" name="">
             <a:extLst xmlns:a="http://schemas.openxmlformats.org/drawingml/2006/main">
               <a:ext uri="{FF2B5EF4-FFF2-40B4-BE49-F238E27FC236}">
-                <a16:creationId xmlns:a16="http://schemas.microsoft.com/office/drawing/2014/main" id="{42D5FBBB-3704-4A48-A400-F3DBD343F6F0}"/>
+                <a16:creationId xmlns:a16="http://schemas.microsoft.com/office/drawing/2014/main" id="{B7FB80D5-8D54-40B6-884C-EC52F8D289C3}"/>
               </a:ext>
             </a:extLst>
           </p:cNvPr>
@@ -24259,7 +24259,7 @@
           <p:cNvPr id="56" name="">
             <a:extLst xmlns:a="http://schemas.openxmlformats.org/drawingml/2006/main">
               <a:ext uri="{FF2B5EF4-FFF2-40B4-BE49-F238E27FC236}">
-                <a16:creationId xmlns:a16="http://schemas.microsoft.com/office/drawing/2014/main" id="{1E8F92BD-EFA8-44A8-99C4-49FB7F942E81}"/>
+                <a16:creationId xmlns:a16="http://schemas.microsoft.com/office/drawing/2014/main" id="{498C264B-191D-4AE8-9433-C616EC608C87}"/>
               </a:ext>
             </a:extLst>
           </p:cNvPr>
@@ -24311,7 +24311,7 @@
           <p:cNvPr id="57" name="">
             <a:extLst xmlns:a="http://schemas.openxmlformats.org/drawingml/2006/main">
               <a:ext uri="{FF2B5EF4-FFF2-40B4-BE49-F238E27FC236}">
-                <a16:creationId xmlns:a16="http://schemas.microsoft.com/office/drawing/2014/main" id="{9F4E760F-2B00-4333-8517-93FB74BDEBA3}"/>
+                <a16:creationId xmlns:a16="http://schemas.microsoft.com/office/drawing/2014/main" id="{ECCCF99C-E1C1-4967-8EE5-A04B010185A4}"/>
               </a:ext>
             </a:extLst>
           </p:cNvPr>
@@ -24363,7 +24363,7 @@
           <p:cNvPr id="58" name="">
             <a:extLst xmlns:a="http://schemas.openxmlformats.org/drawingml/2006/main">
               <a:ext uri="{FF2B5EF4-FFF2-40B4-BE49-F238E27FC236}">
-                <a16:creationId xmlns:a16="http://schemas.microsoft.com/office/drawing/2014/main" id="{B7B661B2-B6B6-4ACC-A22C-79F2D2FBF106}"/>
+                <a16:creationId xmlns:a16="http://schemas.microsoft.com/office/drawing/2014/main" id="{7257B982-9FA7-4AD2-916C-261CBA61CCEF}"/>
               </a:ext>
             </a:extLst>
           </p:cNvPr>
@@ -24415,7 +24415,7 @@
           <p:cNvPr id="59" name="">
             <a:extLst xmlns:a="http://schemas.openxmlformats.org/drawingml/2006/main">
               <a:ext uri="{FF2B5EF4-FFF2-40B4-BE49-F238E27FC236}">
-                <a16:creationId xmlns:a16="http://schemas.microsoft.com/office/drawing/2014/main" id="{C575655E-B5DF-4ACD-9826-E8AA9F3AAF94}"/>
+                <a16:creationId xmlns:a16="http://schemas.microsoft.com/office/drawing/2014/main" id="{53A761B6-FC62-4301-AE4B-4459A11B1CEB}"/>
               </a:ext>
             </a:extLst>
           </p:cNvPr>
@@ -24467,7 +24467,7 @@
           <p:cNvPr id="60" name="">
             <a:extLst xmlns:a="http://schemas.openxmlformats.org/drawingml/2006/main">
               <a:ext uri="{FF2B5EF4-FFF2-40B4-BE49-F238E27FC236}">
-                <a16:creationId xmlns:a16="http://schemas.microsoft.com/office/drawing/2014/main" id="{316463ED-6543-47FA-8DBF-717731426891}"/>
+                <a16:creationId xmlns:a16="http://schemas.microsoft.com/office/drawing/2014/main" id="{D57DAC68-6E42-4D2B-9D1C-BDB4358094C8}"/>
               </a:ext>
             </a:extLst>
           </p:cNvPr>
@@ -24519,7 +24519,7 @@
           <p:cNvPr id="61" name="">
             <a:extLst xmlns:a="http://schemas.openxmlformats.org/drawingml/2006/main">
               <a:ext uri="{FF2B5EF4-FFF2-40B4-BE49-F238E27FC236}">
-                <a16:creationId xmlns:a16="http://schemas.microsoft.com/office/drawing/2014/main" id="{66AF1C09-6FF0-48BD-8C44-9BBA402BB91B}"/>
+                <a16:creationId xmlns:a16="http://schemas.microsoft.com/office/drawing/2014/main" id="{07B809EA-494E-4149-954A-3C0466945FDA}"/>
               </a:ext>
             </a:extLst>
           </p:cNvPr>
@@ -24571,7 +24571,7 @@
           <p:cNvPr id="62" name="">
             <a:extLst xmlns:a="http://schemas.openxmlformats.org/drawingml/2006/main">
               <a:ext uri="{FF2B5EF4-FFF2-40B4-BE49-F238E27FC236}">
-                <a16:creationId xmlns:a16="http://schemas.microsoft.com/office/drawing/2014/main" id="{7D22EC7F-EC1F-4143-8536-E26DD217480E}"/>
+                <a16:creationId xmlns:a16="http://schemas.microsoft.com/office/drawing/2014/main" id="{751B1C11-AEFE-429F-814D-048679C32C86}"/>
               </a:ext>
             </a:extLst>
           </p:cNvPr>
@@ -24602,7 +24602,7 @@
           <p:cNvPr id="63" name="">
             <a:extLst xmlns:a="http://schemas.openxmlformats.org/drawingml/2006/main">
               <a:ext uri="{FF2B5EF4-FFF2-40B4-BE49-F238E27FC236}">
-                <a16:creationId xmlns:a16="http://schemas.microsoft.com/office/drawing/2014/main" id="{A723B9C2-5191-4F04-96C7-9B844AED2495}"/>
+                <a16:creationId xmlns:a16="http://schemas.microsoft.com/office/drawing/2014/main" id="{6C5D31F9-BBC3-4025-B968-D93CA91C5A75}"/>
               </a:ext>
             </a:extLst>
           </p:cNvPr>
@@ -24633,7 +24633,7 @@
           <p:cNvPr id="64" name="">
             <a:extLst xmlns:a="http://schemas.openxmlformats.org/drawingml/2006/main">
               <a:ext uri="{FF2B5EF4-FFF2-40B4-BE49-F238E27FC236}">
-                <a16:creationId xmlns:a16="http://schemas.microsoft.com/office/drawing/2014/main" id="{8841D616-B047-4B21-AE8E-7888613563F9}"/>
+                <a16:creationId xmlns:a16="http://schemas.microsoft.com/office/drawing/2014/main" id="{A88F3252-D7ED-453A-B752-F2E886EEF2CA}"/>
               </a:ext>
             </a:extLst>
           </p:cNvPr>
@@ -24685,7 +24685,7 @@
           <p:cNvPr id="65" name="">
             <a:extLst xmlns:a="http://schemas.openxmlformats.org/drawingml/2006/main">
               <a:ext uri="{FF2B5EF4-FFF2-40B4-BE49-F238E27FC236}">
-                <a16:creationId xmlns:a16="http://schemas.microsoft.com/office/drawing/2014/main" id="{14E046B0-48F4-4065-89CE-BB0E0F854FC4}"/>
+                <a16:creationId xmlns:a16="http://schemas.microsoft.com/office/drawing/2014/main" id="{0B77DE1E-9D33-4BFE-9945-788205B2AA6D}"/>
               </a:ext>
             </a:extLst>
           </p:cNvPr>
@@ -24737,7 +24737,7 @@
           <p:cNvPr id="66" name="">
             <a:extLst xmlns:a="http://schemas.openxmlformats.org/drawingml/2006/main">
               <a:ext uri="{FF2B5EF4-FFF2-40B4-BE49-F238E27FC236}">
-                <a16:creationId xmlns:a16="http://schemas.microsoft.com/office/drawing/2014/main" id="{25AC875C-E333-4393-B02E-60F4544DC0C0}"/>
+                <a16:creationId xmlns:a16="http://schemas.microsoft.com/office/drawing/2014/main" id="{37A3C9DB-DE66-42EF-8267-C1A8A1CE8935}"/>
               </a:ext>
             </a:extLst>
           </p:cNvPr>
@@ -24789,7 +24789,7 @@
           <p:cNvPr id="67" name="">
             <a:extLst xmlns:a="http://schemas.openxmlformats.org/drawingml/2006/main">
               <a:ext uri="{FF2B5EF4-FFF2-40B4-BE49-F238E27FC236}">
-                <a16:creationId xmlns:a16="http://schemas.microsoft.com/office/drawing/2014/main" id="{8E4E4809-9AAE-4F02-9993-E3EB5A2AE7F3}"/>
+                <a16:creationId xmlns:a16="http://schemas.microsoft.com/office/drawing/2014/main" id="{9EE2B846-0C3C-43A6-95CA-4CDF0F3E4B08}"/>
               </a:ext>
             </a:extLst>
           </p:cNvPr>
@@ -24841,7 +24841,7 @@
           <p:cNvPr id="68" name="">
             <a:extLst xmlns:a="http://schemas.openxmlformats.org/drawingml/2006/main">
               <a:ext uri="{FF2B5EF4-FFF2-40B4-BE49-F238E27FC236}">
-                <a16:creationId xmlns:a16="http://schemas.microsoft.com/office/drawing/2014/main" id="{442F9531-1623-4F43-8C23-3AF0346A410D}"/>
+                <a16:creationId xmlns:a16="http://schemas.microsoft.com/office/drawing/2014/main" id="{73C294F5-C05D-49E3-817E-69FC8075265A}"/>
               </a:ext>
             </a:extLst>
           </p:cNvPr>
@@ -24893,7 +24893,7 @@
           <p:cNvPr id="69" name="">
             <a:extLst xmlns:a="http://schemas.openxmlformats.org/drawingml/2006/main">
               <a:ext uri="{FF2B5EF4-FFF2-40B4-BE49-F238E27FC236}">
-                <a16:creationId xmlns:a16="http://schemas.microsoft.com/office/drawing/2014/main" id="{249CF7EE-9216-45AB-ACD1-7474BC94964B}"/>
+                <a16:creationId xmlns:a16="http://schemas.microsoft.com/office/drawing/2014/main" id="{21CAEE79-89CF-44D0-8CE5-EEC294F74BD3}"/>
               </a:ext>
             </a:extLst>
           </p:cNvPr>
@@ -24945,7 +24945,7 @@
           <p:cNvPr id="70" name="">
             <a:extLst xmlns:a="http://schemas.openxmlformats.org/drawingml/2006/main">
               <a:ext uri="{FF2B5EF4-FFF2-40B4-BE49-F238E27FC236}">
-                <a16:creationId xmlns:a16="http://schemas.microsoft.com/office/drawing/2014/main" id="{028C8581-2D64-4D7D-8F06-ED7730299DD4}"/>
+                <a16:creationId xmlns:a16="http://schemas.microsoft.com/office/drawing/2014/main" id="{47403BBE-30CF-4C91-B2DB-0AA59F451F1A}"/>
               </a:ext>
             </a:extLst>
           </p:cNvPr>
@@ -24997,7 +24997,7 @@
           <p:cNvPr id="71" name="">
             <a:extLst xmlns:a="http://schemas.openxmlformats.org/drawingml/2006/main">
               <a:ext uri="{FF2B5EF4-FFF2-40B4-BE49-F238E27FC236}">
-                <a16:creationId xmlns:a16="http://schemas.microsoft.com/office/drawing/2014/main" id="{EE8CE196-C7B5-41CE-850F-65C3A95967ED}"/>
+                <a16:creationId xmlns:a16="http://schemas.microsoft.com/office/drawing/2014/main" id="{AF602D61-C04E-489B-B4CC-A2BA38847966}"/>
               </a:ext>
             </a:extLst>
           </p:cNvPr>
@@ -25028,7 +25028,7 @@
           <p:cNvPr id="72" name="">
             <a:extLst xmlns:a="http://schemas.openxmlformats.org/drawingml/2006/main">
               <a:ext uri="{FF2B5EF4-FFF2-40B4-BE49-F238E27FC236}">
-                <a16:creationId xmlns:a16="http://schemas.microsoft.com/office/drawing/2014/main" id="{21E420F7-19E7-47F0-9C64-0D66BDBAFD2B}"/>
+                <a16:creationId xmlns:a16="http://schemas.microsoft.com/office/drawing/2014/main" id="{49E0604F-B530-4BE2-9D55-A985FDDA4C50}"/>
               </a:ext>
             </a:extLst>
           </p:cNvPr>
@@ -25080,7 +25080,7 @@
           <p:cNvPr id="73" name="">
             <a:extLst xmlns:a="http://schemas.openxmlformats.org/drawingml/2006/main">
               <a:ext uri="{FF2B5EF4-FFF2-40B4-BE49-F238E27FC236}">
-                <a16:creationId xmlns:a16="http://schemas.microsoft.com/office/drawing/2014/main" id="{39CAD1BF-A707-4A92-A41C-B06DD0508FA9}"/>
+                <a16:creationId xmlns:a16="http://schemas.microsoft.com/office/drawing/2014/main" id="{11AD26C3-8FC4-4130-A54E-4AD20729C171}"/>
               </a:ext>
             </a:extLst>
           </p:cNvPr>
@@ -25132,7 +25132,7 @@
           <p:cNvPr id="74" name="">
             <a:extLst xmlns:a="http://schemas.openxmlformats.org/drawingml/2006/main">
               <a:ext uri="{FF2B5EF4-FFF2-40B4-BE49-F238E27FC236}">
-                <a16:creationId xmlns:a16="http://schemas.microsoft.com/office/drawing/2014/main" id="{DB541383-85E1-41D0-A3B6-4D9ECB376B24}"/>
+                <a16:creationId xmlns:a16="http://schemas.microsoft.com/office/drawing/2014/main" id="{D5E421F9-1229-4EA7-A4A4-1A5D4B3C8D21}"/>
               </a:ext>
             </a:extLst>
           </p:cNvPr>
@@ -25184,7 +25184,7 @@
           <p:cNvPr id="75" name="">
             <a:extLst xmlns:a="http://schemas.openxmlformats.org/drawingml/2006/main">
               <a:ext uri="{FF2B5EF4-FFF2-40B4-BE49-F238E27FC236}">
-                <a16:creationId xmlns:a16="http://schemas.microsoft.com/office/drawing/2014/main" id="{21597937-762F-4425-8ADF-EA06B3C22C16}"/>
+                <a16:creationId xmlns:a16="http://schemas.microsoft.com/office/drawing/2014/main" id="{59861414-DDF2-4692-85AC-32799A0FA854}"/>
               </a:ext>
             </a:extLst>
           </p:cNvPr>
@@ -25236,7 +25236,7 @@
           <p:cNvPr id="76" name="">
             <a:extLst xmlns:a="http://schemas.openxmlformats.org/drawingml/2006/main">
               <a:ext uri="{FF2B5EF4-FFF2-40B4-BE49-F238E27FC236}">
-                <a16:creationId xmlns:a16="http://schemas.microsoft.com/office/drawing/2014/main" id="{95236AD4-5F89-440D-85C8-83FAE2224229}"/>
+                <a16:creationId xmlns:a16="http://schemas.microsoft.com/office/drawing/2014/main" id="{A35D08F9-0D19-4DAC-8A0B-258AAB674B3B}"/>
               </a:ext>
             </a:extLst>
           </p:cNvPr>
@@ -25288,7 +25288,7 @@
           <p:cNvPr id="77" name="">
             <a:extLst xmlns:a="http://schemas.openxmlformats.org/drawingml/2006/main">
               <a:ext uri="{FF2B5EF4-FFF2-40B4-BE49-F238E27FC236}">
-                <a16:creationId xmlns:a16="http://schemas.microsoft.com/office/drawing/2014/main" id="{2B9F44D1-322D-4996-BAC1-5E4F665B53BA}"/>
+                <a16:creationId xmlns:a16="http://schemas.microsoft.com/office/drawing/2014/main" id="{59CE9063-C5F7-41EA-8FC8-43240EEDEC44}"/>
               </a:ext>
             </a:extLst>
           </p:cNvPr>
@@ -25340,7 +25340,7 @@
           <p:cNvPr id="78" name="">
             <a:extLst xmlns:a="http://schemas.openxmlformats.org/drawingml/2006/main">
               <a:ext uri="{FF2B5EF4-FFF2-40B4-BE49-F238E27FC236}">
-                <a16:creationId xmlns:a16="http://schemas.microsoft.com/office/drawing/2014/main" id="{681EE1A5-2DCE-4724-888D-8B145A03FAD9}"/>
+                <a16:creationId xmlns:a16="http://schemas.microsoft.com/office/drawing/2014/main" id="{C24211F2-F199-4271-BCBE-EEE13BBC859E}"/>
               </a:ext>
             </a:extLst>
           </p:cNvPr>
@@ -25392,7 +25392,7 @@
           <p:cNvPr id="79" name="">
             <a:extLst xmlns:a="http://schemas.openxmlformats.org/drawingml/2006/main">
               <a:ext uri="{FF2B5EF4-FFF2-40B4-BE49-F238E27FC236}">
-                <a16:creationId xmlns:a16="http://schemas.microsoft.com/office/drawing/2014/main" id="{8F0EB74D-DBFD-49CB-93EB-2CB1C3E279C1}"/>
+                <a16:creationId xmlns:a16="http://schemas.microsoft.com/office/drawing/2014/main" id="{442BEA77-F04E-442F-AE7C-F37BC7002230}"/>
               </a:ext>
             </a:extLst>
           </p:cNvPr>
@@ -25423,7 +25423,7 @@
           <p:cNvPr id="80" name="">
             <a:extLst xmlns:a="http://schemas.openxmlformats.org/drawingml/2006/main">
               <a:ext uri="{FF2B5EF4-FFF2-40B4-BE49-F238E27FC236}">
-                <a16:creationId xmlns:a16="http://schemas.microsoft.com/office/drawing/2014/main" id="{8D22EE4A-31E4-4FEA-84E6-D34FC0DE6DB9}"/>
+                <a16:creationId xmlns:a16="http://schemas.microsoft.com/office/drawing/2014/main" id="{4A341DC7-F1F3-48CA-8FCF-21AFF5EB8C89}"/>
               </a:ext>
             </a:extLst>
           </p:cNvPr>
@@ -25454,7 +25454,7 @@
           <p:cNvPr id="81" name="">
             <a:extLst xmlns:a="http://schemas.openxmlformats.org/drawingml/2006/main">
               <a:ext uri="{FF2B5EF4-FFF2-40B4-BE49-F238E27FC236}">
-                <a16:creationId xmlns:a16="http://schemas.microsoft.com/office/drawing/2014/main" id="{2A5BD854-E2C3-4790-92A9-32B9A9BD0DB8}"/>
+                <a16:creationId xmlns:a16="http://schemas.microsoft.com/office/drawing/2014/main" id="{F12C8527-70B1-475A-8B13-4E4F310B42EA}"/>
               </a:ext>
             </a:extLst>
           </p:cNvPr>
@@ -25506,7 +25506,7 @@
           <p:cNvPr id="82" name="">
             <a:extLst xmlns:a="http://schemas.openxmlformats.org/drawingml/2006/main">
               <a:ext uri="{FF2B5EF4-FFF2-40B4-BE49-F238E27FC236}">
-                <a16:creationId xmlns:a16="http://schemas.microsoft.com/office/drawing/2014/main" id="{639227BE-0110-4681-9A39-A2108DD5ADC5}"/>
+                <a16:creationId xmlns:a16="http://schemas.microsoft.com/office/drawing/2014/main" id="{1380B20E-4551-44AC-B6EB-5FE70E9A51DC}"/>
               </a:ext>
             </a:extLst>
           </p:cNvPr>
@@ -25558,7 +25558,7 @@
           <p:cNvPr id="83" name="">
             <a:extLst xmlns:a="http://schemas.openxmlformats.org/drawingml/2006/main">
               <a:ext uri="{FF2B5EF4-FFF2-40B4-BE49-F238E27FC236}">
-                <a16:creationId xmlns:a16="http://schemas.microsoft.com/office/drawing/2014/main" id="{C0AD5F9E-23EE-4AAB-9FD8-F909C29EA68D}"/>
+                <a16:creationId xmlns:a16="http://schemas.microsoft.com/office/drawing/2014/main" id="{39F08160-57A3-4FE8-905D-DB9E4E7BDF9E}"/>
               </a:ext>
             </a:extLst>
           </p:cNvPr>
@@ -25610,7 +25610,7 @@
           <p:cNvPr id="84" name="">
             <a:extLst xmlns:a="http://schemas.openxmlformats.org/drawingml/2006/main">
               <a:ext uri="{FF2B5EF4-FFF2-40B4-BE49-F238E27FC236}">
-                <a16:creationId xmlns:a16="http://schemas.microsoft.com/office/drawing/2014/main" id="{F7534329-9329-49A6-ACB4-3A7A65296D94}"/>
+                <a16:creationId xmlns:a16="http://schemas.microsoft.com/office/drawing/2014/main" id="{BC8C614D-713B-4301-9E47-4D34AB2FDA8C}"/>
               </a:ext>
             </a:extLst>
           </p:cNvPr>
@@ -25662,7 +25662,7 @@
           <p:cNvPr id="85" name="">
             <a:extLst xmlns:a="http://schemas.openxmlformats.org/drawingml/2006/main">
               <a:ext uri="{FF2B5EF4-FFF2-40B4-BE49-F238E27FC236}">
-                <a16:creationId xmlns:a16="http://schemas.microsoft.com/office/drawing/2014/main" id="{3C200D8C-0F13-4878-8672-D82A504E5DA1}"/>
+                <a16:creationId xmlns:a16="http://schemas.microsoft.com/office/drawing/2014/main" id="{098C845D-341A-4E37-B130-EF5CFB19B341}"/>
               </a:ext>
             </a:extLst>
           </p:cNvPr>
@@ -25714,7 +25714,7 @@
           <p:cNvPr id="86" name="">
             <a:extLst xmlns:a="http://schemas.openxmlformats.org/drawingml/2006/main">
               <a:ext uri="{FF2B5EF4-FFF2-40B4-BE49-F238E27FC236}">
-                <a16:creationId xmlns:a16="http://schemas.microsoft.com/office/drawing/2014/main" id="{9CE9AE12-7C6A-452B-9121-CD2B5F9450D2}"/>
+                <a16:creationId xmlns:a16="http://schemas.microsoft.com/office/drawing/2014/main" id="{AF5BC76D-3019-40EB-9161-B5964934435C}"/>
               </a:ext>
             </a:extLst>
           </p:cNvPr>
@@ -25766,7 +25766,7 @@
           <p:cNvPr id="87" name="">
             <a:extLst xmlns:a="http://schemas.openxmlformats.org/drawingml/2006/main">
               <a:ext uri="{FF2B5EF4-FFF2-40B4-BE49-F238E27FC236}">
-                <a16:creationId xmlns:a16="http://schemas.microsoft.com/office/drawing/2014/main" id="{FFA50902-E990-4F65-8D1F-23DD5BDE6FB6}"/>
+                <a16:creationId xmlns:a16="http://schemas.microsoft.com/office/drawing/2014/main" id="{FB8AD88D-791B-40AB-9BF4-A3D20818EACA}"/>
               </a:ext>
             </a:extLst>
           </p:cNvPr>
@@ -25818,7 +25818,7 @@
           <p:cNvPr id="88" name="">
             <a:extLst xmlns:a="http://schemas.openxmlformats.org/drawingml/2006/main">
               <a:ext uri="{FF2B5EF4-FFF2-40B4-BE49-F238E27FC236}">
-                <a16:creationId xmlns:a16="http://schemas.microsoft.com/office/drawing/2014/main" id="{CDA411EA-81CF-4438-85C3-460CF529775F}"/>
+                <a16:creationId xmlns:a16="http://schemas.microsoft.com/office/drawing/2014/main" id="{21FD60D0-B771-4F29-A5E9-6302B36C0BC0}"/>
               </a:ext>
             </a:extLst>
           </p:cNvPr>
@@ -25849,7 +25849,7 @@
           <p:cNvPr id="89" name="">
             <a:extLst xmlns:a="http://schemas.openxmlformats.org/drawingml/2006/main">
               <a:ext uri="{FF2B5EF4-FFF2-40B4-BE49-F238E27FC236}">
-                <a16:creationId xmlns:a16="http://schemas.microsoft.com/office/drawing/2014/main" id="{BB3E6A22-996D-40E8-A074-43A8AD8D38FF}"/>
+                <a16:creationId xmlns:a16="http://schemas.microsoft.com/office/drawing/2014/main" id="{455BFE1B-8AFA-461D-9597-B454B08F89AC}"/>
               </a:ext>
             </a:extLst>
           </p:cNvPr>
@@ -25901,7 +25901,7 @@
           <p:cNvPr id="90" name="">
             <a:extLst xmlns:a="http://schemas.openxmlformats.org/drawingml/2006/main">
               <a:ext uri="{FF2B5EF4-FFF2-40B4-BE49-F238E27FC236}">
-                <a16:creationId xmlns:a16="http://schemas.microsoft.com/office/drawing/2014/main" id="{39ED99D7-ED74-49E8-BE1B-EFDDE5601D57}"/>
+                <a16:creationId xmlns:a16="http://schemas.microsoft.com/office/drawing/2014/main" id="{1925E36E-6BF9-464E-8681-1D5C00FE4333}"/>
               </a:ext>
             </a:extLst>
           </p:cNvPr>
@@ -25953,7 +25953,7 @@
           <p:cNvPr id="91" name="">
             <a:extLst xmlns:a="http://schemas.openxmlformats.org/drawingml/2006/main">
               <a:ext uri="{FF2B5EF4-FFF2-40B4-BE49-F238E27FC236}">
-                <a16:creationId xmlns:a16="http://schemas.microsoft.com/office/drawing/2014/main" id="{821BCCB3-6746-4ACC-9E90-2F9A68C1BCE1}"/>
+                <a16:creationId xmlns:a16="http://schemas.microsoft.com/office/drawing/2014/main" id="{E25E91DD-7AA8-4B16-B461-3A5F11FA40FF}"/>
               </a:ext>
             </a:extLst>
           </p:cNvPr>
@@ -26005,7 +26005,7 @@
           <p:cNvPr id="92" name="">
             <a:extLst xmlns:a="http://schemas.openxmlformats.org/drawingml/2006/main">
               <a:ext uri="{FF2B5EF4-FFF2-40B4-BE49-F238E27FC236}">
-                <a16:creationId xmlns:a16="http://schemas.microsoft.com/office/drawing/2014/main" id="{EA060ED1-602F-4108-A744-75CC5EF38D44}"/>
+                <a16:creationId xmlns:a16="http://schemas.microsoft.com/office/drawing/2014/main" id="{E607B138-D0B6-4678-92F6-F4FE65969442}"/>
               </a:ext>
             </a:extLst>
           </p:cNvPr>
@@ -26057,7 +26057,7 @@
           <p:cNvPr id="93" name="">
             <a:extLst xmlns:a="http://schemas.openxmlformats.org/drawingml/2006/main">
               <a:ext uri="{FF2B5EF4-FFF2-40B4-BE49-F238E27FC236}">
-                <a16:creationId xmlns:a16="http://schemas.microsoft.com/office/drawing/2014/main" id="{9169073E-EA9E-4A4F-9D0C-8CC34E137765}"/>
+                <a16:creationId xmlns:a16="http://schemas.microsoft.com/office/drawing/2014/main" id="{1E512218-A6F5-473B-B157-5ED48B332B71}"/>
               </a:ext>
             </a:extLst>
           </p:cNvPr>
@@ -26109,7 +26109,7 @@
           <p:cNvPr id="94" name="">
             <a:extLst xmlns:a="http://schemas.openxmlformats.org/drawingml/2006/main">
               <a:ext uri="{FF2B5EF4-FFF2-40B4-BE49-F238E27FC236}">
-                <a16:creationId xmlns:a16="http://schemas.microsoft.com/office/drawing/2014/main" id="{4E44B610-2FC4-4314-BFF0-85DCBD4F58AB}"/>
+                <a16:creationId xmlns:a16="http://schemas.microsoft.com/office/drawing/2014/main" id="{2B50CBBD-88C1-4D00-86A4-C422D3030EC6}"/>
               </a:ext>
             </a:extLst>
           </p:cNvPr>
@@ -26161,7 +26161,7 @@
           <p:cNvPr id="95" name="">
             <a:extLst xmlns:a="http://schemas.openxmlformats.org/drawingml/2006/main">
               <a:ext uri="{FF2B5EF4-FFF2-40B4-BE49-F238E27FC236}">
-                <a16:creationId xmlns:a16="http://schemas.microsoft.com/office/drawing/2014/main" id="{63742D4A-6D6B-48CB-B25C-E459AB0B4C68}"/>
+                <a16:creationId xmlns:a16="http://schemas.microsoft.com/office/drawing/2014/main" id="{A7095734-AC47-4EDD-B483-508A7D3A383B}"/>
               </a:ext>
             </a:extLst>
           </p:cNvPr>
@@ -26213,7 +26213,7 @@
           <p:cNvPr id="96" name="">
             <a:extLst xmlns:a="http://schemas.openxmlformats.org/drawingml/2006/main">
               <a:ext uri="{FF2B5EF4-FFF2-40B4-BE49-F238E27FC236}">
-                <a16:creationId xmlns:a16="http://schemas.microsoft.com/office/drawing/2014/main" id="{05EF63B0-05F2-49B7-BF55-2591D306E71E}"/>
+                <a16:creationId xmlns:a16="http://schemas.microsoft.com/office/drawing/2014/main" id="{35398B0D-0778-4063-88E2-A6FF2F983CB3}"/>
               </a:ext>
             </a:extLst>
           </p:cNvPr>
@@ -26244,7 +26244,7 @@
           <p:cNvPr id="97" name="">
             <a:extLst xmlns:a="http://schemas.openxmlformats.org/drawingml/2006/main">
               <a:ext uri="{FF2B5EF4-FFF2-40B4-BE49-F238E27FC236}">
-                <a16:creationId xmlns:a16="http://schemas.microsoft.com/office/drawing/2014/main" id="{DE1B5271-AAB7-4AA5-800E-F671876530ED}"/>
+                <a16:creationId xmlns:a16="http://schemas.microsoft.com/office/drawing/2014/main" id="{18856DA8-192E-47BA-823E-4A302314B433}"/>
               </a:ext>
             </a:extLst>
           </p:cNvPr>
@@ -26275,7 +26275,7 @@
           <p:cNvPr id="98" name="">
             <a:extLst xmlns:a="http://schemas.openxmlformats.org/drawingml/2006/main">
               <a:ext uri="{FF2B5EF4-FFF2-40B4-BE49-F238E27FC236}">
-                <a16:creationId xmlns:a16="http://schemas.microsoft.com/office/drawing/2014/main" id="{3A03227F-E13F-466E-A3F2-B68F12040DEA}"/>
+                <a16:creationId xmlns:a16="http://schemas.microsoft.com/office/drawing/2014/main" id="{CBE8B7C7-7AA7-4F47-B210-B9D51D109E3A}"/>
               </a:ext>
             </a:extLst>
           </p:cNvPr>
@@ -26327,7 +26327,7 @@
           <p:cNvPr id="99" name="">
             <a:extLst xmlns:a="http://schemas.openxmlformats.org/drawingml/2006/main">
               <a:ext uri="{FF2B5EF4-FFF2-40B4-BE49-F238E27FC236}">
-                <a16:creationId xmlns:a16="http://schemas.microsoft.com/office/drawing/2014/main" id="{1E773FEE-3BF1-43F5-829D-73B57F7E39A6}"/>
+                <a16:creationId xmlns:a16="http://schemas.microsoft.com/office/drawing/2014/main" id="{1DAD7C05-1909-4E32-B469-FC6BFFAA9640}"/>
               </a:ext>
             </a:extLst>
           </p:cNvPr>
@@ -26379,7 +26379,7 @@
           <p:cNvPr id="100" name="">
             <a:extLst xmlns:a="http://schemas.openxmlformats.org/drawingml/2006/main">
               <a:ext uri="{FF2B5EF4-FFF2-40B4-BE49-F238E27FC236}">
-                <a16:creationId xmlns:a16="http://schemas.microsoft.com/office/drawing/2014/main" id="{7054150B-C1D4-4D2C-8B15-A88125B9328C}"/>
+                <a16:creationId xmlns:a16="http://schemas.microsoft.com/office/drawing/2014/main" id="{5770AB99-CA69-4351-910E-9EC08E25EB5F}"/>
               </a:ext>
             </a:extLst>
           </p:cNvPr>
@@ -26431,7 +26431,7 @@
           <p:cNvPr id="101" name="">
             <a:extLst xmlns:a="http://schemas.openxmlformats.org/drawingml/2006/main">
               <a:ext uri="{FF2B5EF4-FFF2-40B4-BE49-F238E27FC236}">
-                <a16:creationId xmlns:a16="http://schemas.microsoft.com/office/drawing/2014/main" id="{9E1377D9-FDE0-4BE0-B64A-C1FF4AB42653}"/>
+                <a16:creationId xmlns:a16="http://schemas.microsoft.com/office/drawing/2014/main" id="{CB0AFBEA-355A-4738-BFE1-A5D1754C6F46}"/>
               </a:ext>
             </a:extLst>
           </p:cNvPr>
@@ -26483,7 +26483,7 @@
           <p:cNvPr id="102" name="">
             <a:extLst xmlns:a="http://schemas.openxmlformats.org/drawingml/2006/main">
               <a:ext uri="{FF2B5EF4-FFF2-40B4-BE49-F238E27FC236}">
-                <a16:creationId xmlns:a16="http://schemas.microsoft.com/office/drawing/2014/main" id="{67846F32-D988-4263-B205-17021B34F35E}"/>
+                <a16:creationId xmlns:a16="http://schemas.microsoft.com/office/drawing/2014/main" id="{3D4CAF8D-4D88-42F2-A9C5-5BA3A0922A00}"/>
               </a:ext>
             </a:extLst>
           </p:cNvPr>
@@ -26535,7 +26535,7 @@
           <p:cNvPr id="103" name="">
             <a:extLst xmlns:a="http://schemas.openxmlformats.org/drawingml/2006/main">
               <a:ext uri="{FF2B5EF4-FFF2-40B4-BE49-F238E27FC236}">
-                <a16:creationId xmlns:a16="http://schemas.microsoft.com/office/drawing/2014/main" id="{CEC3E4C0-29D6-4237-9D72-06BE709621E2}"/>
+                <a16:creationId xmlns:a16="http://schemas.microsoft.com/office/drawing/2014/main" id="{F11688C3-2960-432E-9787-68DBB6522BCC}"/>
               </a:ext>
             </a:extLst>
           </p:cNvPr>
@@ -26587,7 +26587,7 @@
           <p:cNvPr id="104" name="">
             <a:extLst xmlns:a="http://schemas.openxmlformats.org/drawingml/2006/main">
               <a:ext uri="{FF2B5EF4-FFF2-40B4-BE49-F238E27FC236}">
-                <a16:creationId xmlns:a16="http://schemas.microsoft.com/office/drawing/2014/main" id="{3B340820-751D-4D8F-B9DF-C8399C629404}"/>
+                <a16:creationId xmlns:a16="http://schemas.microsoft.com/office/drawing/2014/main" id="{1FF4C4C2-3DC0-4159-9227-4CD7E5888429}"/>
               </a:ext>
             </a:extLst>
           </p:cNvPr>
@@ -26639,7 +26639,7 @@
           <p:cNvPr id="105" name="">
             <a:extLst xmlns:a="http://schemas.openxmlformats.org/drawingml/2006/main">
               <a:ext uri="{FF2B5EF4-FFF2-40B4-BE49-F238E27FC236}">
-                <a16:creationId xmlns:a16="http://schemas.microsoft.com/office/drawing/2014/main" id="{9EC3373C-B6A7-4F75-B6DC-1B0A8C3FAA33}"/>
+                <a16:creationId xmlns:a16="http://schemas.microsoft.com/office/drawing/2014/main" id="{C03A185D-1EC5-4AB3-9F5B-C2AD21D43834}"/>
               </a:ext>
             </a:extLst>
           </p:cNvPr>
@@ -26670,7 +26670,7 @@
           <p:cNvPr id="106" name="">
             <a:extLst xmlns:a="http://schemas.openxmlformats.org/drawingml/2006/main">
               <a:ext uri="{FF2B5EF4-FFF2-40B4-BE49-F238E27FC236}">
-                <a16:creationId xmlns:a16="http://schemas.microsoft.com/office/drawing/2014/main" id="{57FAE21B-7080-4E88-9289-7833C337C854}"/>
+                <a16:creationId xmlns:a16="http://schemas.microsoft.com/office/drawing/2014/main" id="{04505BAE-4D8A-4DCE-9931-788DE7D2901F}"/>
               </a:ext>
             </a:extLst>
           </p:cNvPr>
@@ -26722,7 +26722,7 @@
           <p:cNvPr id="107" name="">
             <a:extLst xmlns:a="http://schemas.openxmlformats.org/drawingml/2006/main">
               <a:ext uri="{FF2B5EF4-FFF2-40B4-BE49-F238E27FC236}">
-                <a16:creationId xmlns:a16="http://schemas.microsoft.com/office/drawing/2014/main" id="{D077D480-D43A-4E36-84ED-9BB6B975A4AB}"/>
+                <a16:creationId xmlns:a16="http://schemas.microsoft.com/office/drawing/2014/main" id="{B0210C36-6DE2-4C19-A2B5-3AFC204D42D7}"/>
               </a:ext>
             </a:extLst>
           </p:cNvPr>
@@ -26774,7 +26774,7 @@
           <p:cNvPr id="108" name="">
             <a:extLst xmlns:a="http://schemas.openxmlformats.org/drawingml/2006/main">
               <a:ext uri="{FF2B5EF4-FFF2-40B4-BE49-F238E27FC236}">
-                <a16:creationId xmlns:a16="http://schemas.microsoft.com/office/drawing/2014/main" id="{CC29DD52-D1C7-4342-A344-F0253F0A3BDF}"/>
+                <a16:creationId xmlns:a16="http://schemas.microsoft.com/office/drawing/2014/main" id="{5B3DFD45-9124-4FA0-8F91-59C9303EE21E}"/>
               </a:ext>
             </a:extLst>
           </p:cNvPr>
@@ -26826,7 +26826,7 @@
           <p:cNvPr id="109" name="">
             <a:extLst xmlns:a="http://schemas.openxmlformats.org/drawingml/2006/main">
               <a:ext uri="{FF2B5EF4-FFF2-40B4-BE49-F238E27FC236}">
-                <a16:creationId xmlns:a16="http://schemas.microsoft.com/office/drawing/2014/main" id="{47430FE2-4DDA-4F56-93C5-2D26E682D300}"/>
+                <a16:creationId xmlns:a16="http://schemas.microsoft.com/office/drawing/2014/main" id="{AF6416B2-99A5-4698-8B5A-9AF00A58DF2B}"/>
               </a:ext>
             </a:extLst>
           </p:cNvPr>
@@ -26878,7 +26878,7 @@
           <p:cNvPr id="110" name="">
             <a:extLst xmlns:a="http://schemas.openxmlformats.org/drawingml/2006/main">
               <a:ext uri="{FF2B5EF4-FFF2-40B4-BE49-F238E27FC236}">
-                <a16:creationId xmlns:a16="http://schemas.microsoft.com/office/drawing/2014/main" id="{C39A8352-012F-4F52-A07E-22FA147AF4C9}"/>
+                <a16:creationId xmlns:a16="http://schemas.microsoft.com/office/drawing/2014/main" id="{4A8C8850-8519-4D86-8F96-B6D100BE2608}"/>
               </a:ext>
             </a:extLst>
           </p:cNvPr>
@@ -26930,7 +26930,7 @@
           <p:cNvPr id="111" name="">
             <a:extLst xmlns:a="http://schemas.openxmlformats.org/drawingml/2006/main">
               <a:ext uri="{FF2B5EF4-FFF2-40B4-BE49-F238E27FC236}">
-                <a16:creationId xmlns:a16="http://schemas.microsoft.com/office/drawing/2014/main" id="{85D47812-039E-467D-997C-97E3A8D68674}"/>
+                <a16:creationId xmlns:a16="http://schemas.microsoft.com/office/drawing/2014/main" id="{2FED4DE4-B1B4-4F0B-87D8-19EE9AE1519C}"/>
               </a:ext>
             </a:extLst>
           </p:cNvPr>
@@ -26982,7 +26982,7 @@
           <p:cNvPr id="112" name="">
             <a:extLst xmlns:a="http://schemas.openxmlformats.org/drawingml/2006/main">
               <a:ext uri="{FF2B5EF4-FFF2-40B4-BE49-F238E27FC236}">
-                <a16:creationId xmlns:a16="http://schemas.microsoft.com/office/drawing/2014/main" id="{BC590889-3965-43BC-AEC1-E98D4E258B0C}"/>
+                <a16:creationId xmlns:a16="http://schemas.microsoft.com/office/drawing/2014/main" id="{605747C5-1E5B-49C3-B017-C5F4359FC52F}"/>
               </a:ext>
             </a:extLst>
           </p:cNvPr>
@@ -27034,7 +27034,7 @@
           <p:cNvPr id="113" name="">
             <a:extLst xmlns:a="http://schemas.openxmlformats.org/drawingml/2006/main">
               <a:ext uri="{FF2B5EF4-FFF2-40B4-BE49-F238E27FC236}">
-                <a16:creationId xmlns:a16="http://schemas.microsoft.com/office/drawing/2014/main" id="{3AEBB0CE-875F-4000-ABB9-F67388598559}"/>
+                <a16:creationId xmlns:a16="http://schemas.microsoft.com/office/drawing/2014/main" id="{F690CF47-9E54-4EDE-B86E-E5BA2ECD5F5A}"/>
               </a:ext>
             </a:extLst>
           </p:cNvPr>
@@ -27065,7 +27065,7 @@
           <p:cNvPr id="114" name="">
             <a:extLst xmlns:a="http://schemas.openxmlformats.org/drawingml/2006/main">
               <a:ext uri="{FF2B5EF4-FFF2-40B4-BE49-F238E27FC236}">
-                <a16:creationId xmlns:a16="http://schemas.microsoft.com/office/drawing/2014/main" id="{D4D5359F-5EB3-4654-B7EC-2CA0C5E00626}"/>
+                <a16:creationId xmlns:a16="http://schemas.microsoft.com/office/drawing/2014/main" id="{59EC79DF-D031-4A4C-91D4-C9AB7D12B6AC}"/>
               </a:ext>
             </a:extLst>
           </p:cNvPr>
@@ -27096,7 +27096,7 @@
           <p:cNvPr id="115" name="">
             <a:extLst xmlns:a="http://schemas.openxmlformats.org/drawingml/2006/main">
               <a:ext uri="{FF2B5EF4-FFF2-40B4-BE49-F238E27FC236}">
-                <a16:creationId xmlns:a16="http://schemas.microsoft.com/office/drawing/2014/main" id="{ABB3F4BA-DE56-4D38-A82C-23733531E39C}"/>
+                <a16:creationId xmlns:a16="http://schemas.microsoft.com/office/drawing/2014/main" id="{16E2E197-2DBD-43AB-A3D8-76682A8FE035}"/>
               </a:ext>
             </a:extLst>
           </p:cNvPr>
@@ -27148,7 +27148,7 @@
           <p:cNvPr id="116" name="">
             <a:extLst xmlns:a="http://schemas.openxmlformats.org/drawingml/2006/main">
               <a:ext uri="{FF2B5EF4-FFF2-40B4-BE49-F238E27FC236}">
-                <a16:creationId xmlns:a16="http://schemas.microsoft.com/office/drawing/2014/main" id="{05387A0C-37B4-4423-AB6E-7AC559A8C1AF}"/>
+                <a16:creationId xmlns:a16="http://schemas.microsoft.com/office/drawing/2014/main" id="{68BC0210-59EE-4F45-84BA-3525B9F629AC}"/>
               </a:ext>
             </a:extLst>
           </p:cNvPr>
@@ -27200,7 +27200,7 @@
           <p:cNvPr id="117" name="">
             <a:extLst xmlns:a="http://schemas.openxmlformats.org/drawingml/2006/main">
               <a:ext uri="{FF2B5EF4-FFF2-40B4-BE49-F238E27FC236}">
-                <a16:creationId xmlns:a16="http://schemas.microsoft.com/office/drawing/2014/main" id="{416C1655-714E-4C78-BE55-8D483F0FE688}"/>
+                <a16:creationId xmlns:a16="http://schemas.microsoft.com/office/drawing/2014/main" id="{5D82EE7C-A90D-4697-AD99-5DC13C4BB8C7}"/>
               </a:ext>
             </a:extLst>
           </p:cNvPr>
@@ -27252,7 +27252,7 @@
           <p:cNvPr id="118" name="">
             <a:extLst xmlns:a="http://schemas.openxmlformats.org/drawingml/2006/main">
               <a:ext uri="{FF2B5EF4-FFF2-40B4-BE49-F238E27FC236}">
-                <a16:creationId xmlns:a16="http://schemas.microsoft.com/office/drawing/2014/main" id="{8FEEF5D7-1D89-46C7-8862-19D8F7A2C410}"/>
+                <a16:creationId xmlns:a16="http://schemas.microsoft.com/office/drawing/2014/main" id="{6D5F1B92-239B-486B-91C2-A889F4AF6CB7}"/>
               </a:ext>
             </a:extLst>
           </p:cNvPr>
@@ -27304,7 +27304,7 @@
           <p:cNvPr id="119" name="">
             <a:extLst xmlns:a="http://schemas.openxmlformats.org/drawingml/2006/main">
               <a:ext uri="{FF2B5EF4-FFF2-40B4-BE49-F238E27FC236}">
-                <a16:creationId xmlns:a16="http://schemas.microsoft.com/office/drawing/2014/main" id="{8330A0C5-E0BB-4322-842D-042441D4B043}"/>
+                <a16:creationId xmlns:a16="http://schemas.microsoft.com/office/drawing/2014/main" id="{C07DB948-25E5-42F7-B647-441F3773BFF8}"/>
               </a:ext>
             </a:extLst>
           </p:cNvPr>
@@ -27356,7 +27356,7 @@
           <p:cNvPr id="120" name="">
             <a:extLst xmlns:a="http://schemas.openxmlformats.org/drawingml/2006/main">
               <a:ext uri="{FF2B5EF4-FFF2-40B4-BE49-F238E27FC236}">
-                <a16:creationId xmlns:a16="http://schemas.microsoft.com/office/drawing/2014/main" id="{E0D68D01-1310-4626-811B-AF9934547D6D}"/>
+                <a16:creationId xmlns:a16="http://schemas.microsoft.com/office/drawing/2014/main" id="{FA66AF3E-22ED-4471-A742-0BA62A43299A}"/>
               </a:ext>
             </a:extLst>
           </p:cNvPr>
@@ -27408,7 +27408,7 @@
           <p:cNvPr id="121" name="">
             <a:extLst xmlns:a="http://schemas.openxmlformats.org/drawingml/2006/main">
               <a:ext uri="{FF2B5EF4-FFF2-40B4-BE49-F238E27FC236}">
-                <a16:creationId xmlns:a16="http://schemas.microsoft.com/office/drawing/2014/main" id="{526CBB19-0EB6-45FE-AA82-5AB74F12D909}"/>
+                <a16:creationId xmlns:a16="http://schemas.microsoft.com/office/drawing/2014/main" id="{8EBE2ABF-C12C-4184-9821-AE0314259F70}"/>
               </a:ext>
             </a:extLst>
           </p:cNvPr>
@@ -27458,7 +27458,7 @@
     </p:spTree>
     <p:extLst>
       <p:ext uri="{BB962C8B-B14F-4D97-AF65-F5344CB8AC3E}">
-        <p14:creationId xmlns:p14="http://schemas.microsoft.com/office/powerpoint/2010/main" val="1185475387"/>
+        <p14:creationId xmlns:p14="http://schemas.microsoft.com/office/powerpoint/2010/main" val="1727015435"/>
       </p:ext>
     </p:extLst>
   </p:cSld>
@@ -27489,7 +27489,7 @@
           <p:cNvPr id="9" name="">
             <a:extLst xmlns:a="http://schemas.openxmlformats.org/drawingml/2006/main">
               <a:ext uri="{FF2B5EF4-FFF2-40B4-BE49-F238E27FC236}">
-                <a16:creationId xmlns:a16="http://schemas.microsoft.com/office/drawing/2014/main" id="{193D4B5D-C9D1-4487-9842-688793408CC4}"/>
+                <a16:creationId xmlns:a16="http://schemas.microsoft.com/office/drawing/2014/main" id="{6635AB25-74E9-467F-8493-D63AA0B7552D}"/>
               </a:ext>
             </a:extLst>
           </p:cNvPr>
@@ -27522,7 +27522,7 @@
           <p:cNvPr id="2" name="">
             <a:extLst xmlns:a="http://schemas.openxmlformats.org/drawingml/2006/main">
               <a:ext uri="{FF2B5EF4-FFF2-40B4-BE49-F238E27FC236}">
-                <a16:creationId xmlns:a16="http://schemas.microsoft.com/office/drawing/2014/main" id="{DDBB1645-F4C0-4E5A-9446-DD01457B8BFF}"/>
+                <a16:creationId xmlns:a16="http://schemas.microsoft.com/office/drawing/2014/main" id="{F5600267-53AC-4A85-AF18-3E7B9957798A}"/>
               </a:ext>
             </a:extLst>
           </p:cNvPr>
@@ -27553,7 +27553,7 @@
           <p:cNvPr id="3" name="">
             <a:extLst xmlns:a="http://schemas.openxmlformats.org/drawingml/2006/main">
               <a:ext uri="{FF2B5EF4-FFF2-40B4-BE49-F238E27FC236}">
-                <a16:creationId xmlns:a16="http://schemas.microsoft.com/office/drawing/2014/main" id="{38BF0894-BAC2-48B4-99E2-BAE7F67CF470}"/>
+                <a16:creationId xmlns:a16="http://schemas.microsoft.com/office/drawing/2014/main" id="{C307F0E6-50E1-4E7E-BE3F-DCE9746A1DE2}"/>
               </a:ext>
             </a:extLst>
           </p:cNvPr>
@@ -27605,7 +27605,7 @@
           <p:cNvPr id="4" name="">
             <a:extLst xmlns:a="http://schemas.openxmlformats.org/drawingml/2006/main">
               <a:ext uri="{FF2B5EF4-FFF2-40B4-BE49-F238E27FC236}">
-                <a16:creationId xmlns:a16="http://schemas.microsoft.com/office/drawing/2014/main" id="{F4EE008F-6A54-454E-A164-08925A4B84E2}"/>
+                <a16:creationId xmlns:a16="http://schemas.microsoft.com/office/drawing/2014/main" id="{36EF0217-D5C5-483A-BDCC-782DD57779FE}"/>
               </a:ext>
             </a:extLst>
           </p:cNvPr>
@@ -27640,7 +27640,7 @@
           <p:nvPr/>
         </p:nvPicPr>
         <p:blipFill>
-          <a:blip xmlns:r="http://schemas.openxmlformats.org/officeDocument/2006/relationships" xmlns:a="http://schemas.openxmlformats.org/drawingml/2006/main" r:embed="R95ab8028fd484868"/>
+          <a:blip xmlns:r="http://schemas.openxmlformats.org/officeDocument/2006/relationships" xmlns:a="http://schemas.openxmlformats.org/drawingml/2006/main" r:embed="R2475c0e4656a4dd9"/>
           <a:stretch xmlns:a="http://schemas.openxmlformats.org/drawingml/2006/main"/>
         </p:blipFill>
         <p:spPr>
@@ -27658,7 +27658,7 @@
           <p:cNvPr id="6" name="">
             <a:extLst xmlns:a="http://schemas.openxmlformats.org/drawingml/2006/main">
               <a:ext uri="{FF2B5EF4-FFF2-40B4-BE49-F238E27FC236}">
-                <a16:creationId xmlns:a16="http://schemas.microsoft.com/office/drawing/2014/main" id="{FA498571-DE58-4ED8-95C2-CC4671491C8F}"/>
+                <a16:creationId xmlns:a16="http://schemas.microsoft.com/office/drawing/2014/main" id="{E1B86236-D0CF-4B09-A008-A5C9CA6967D4}"/>
               </a:ext>
             </a:extLst>
           </p:cNvPr>
@@ -27710,7 +27710,7 @@
           <p:cNvPr id="7" name="">
             <a:extLst xmlns:a="http://schemas.openxmlformats.org/drawingml/2006/main">
               <a:ext uri="{FF2B5EF4-FFF2-40B4-BE49-F238E27FC236}">
-                <a16:creationId xmlns:a16="http://schemas.microsoft.com/office/drawing/2014/main" id="{FC48C2EA-9741-455B-BCC0-DB8F6F82E3C7}"/>
+                <a16:creationId xmlns:a16="http://schemas.microsoft.com/office/drawing/2014/main" id="{FF9C976C-1AF3-4679-9DCB-B075E959B949}"/>
               </a:ext>
             </a:extLst>
           </p:cNvPr>
@@ -27766,7 +27766,7 @@
           <p:nvPr/>
         </p:nvPicPr>
         <p:blipFill>
-          <a:blip xmlns:r="http://schemas.openxmlformats.org/officeDocument/2006/relationships" xmlns:a="http://schemas.openxmlformats.org/drawingml/2006/main" r:embed="R32f504a9cee14784"/>
+          <a:blip xmlns:r="http://schemas.openxmlformats.org/officeDocument/2006/relationships" xmlns:a="http://schemas.openxmlformats.org/drawingml/2006/main" r:embed="Rb24e0723467d404e"/>
           <a:stretch xmlns:a="http://schemas.openxmlformats.org/drawingml/2006/main"/>
         </p:blipFill>
         <p:spPr>
@@ -27782,7 +27782,7 @@
     </p:spTree>
     <p:extLst>
       <p:ext uri="{BB962C8B-B14F-4D97-AF65-F5344CB8AC3E}">
-        <p14:creationId xmlns:p14="http://schemas.microsoft.com/office/powerpoint/2010/main" val="1564804731"/>
+        <p14:creationId xmlns:p14="http://schemas.microsoft.com/office/powerpoint/2010/main" val="1731172623"/>
       </p:ext>
     </p:extLst>
   </p:cSld>
@@ -27813,7 +27813,7 @@
           <p:cNvPr id="42" name="">
             <a:extLst xmlns:a="http://schemas.openxmlformats.org/drawingml/2006/main">
               <a:ext uri="{FF2B5EF4-FFF2-40B4-BE49-F238E27FC236}">
-                <a16:creationId xmlns:a16="http://schemas.microsoft.com/office/drawing/2014/main" id="{3AA95D6C-D2EE-4168-948E-DE10A0B8C04A}"/>
+                <a16:creationId xmlns:a16="http://schemas.microsoft.com/office/drawing/2014/main" id="{6D615819-4BA5-44CD-9434-961A8B24459E}"/>
               </a:ext>
             </a:extLst>
           </p:cNvPr>
@@ -27846,7 +27846,7 @@
           <p:cNvPr id="2" name="">
             <a:extLst xmlns:a="http://schemas.openxmlformats.org/drawingml/2006/main">
               <a:ext uri="{FF2B5EF4-FFF2-40B4-BE49-F238E27FC236}">
-                <a16:creationId xmlns:a16="http://schemas.microsoft.com/office/drawing/2014/main" id="{A72F40D5-5579-474E-B0A1-3621059BDC73}"/>
+                <a16:creationId xmlns:a16="http://schemas.microsoft.com/office/drawing/2014/main" id="{6D178733-D709-4594-9625-3BCC893626D2}"/>
               </a:ext>
             </a:extLst>
           </p:cNvPr>
@@ -27877,7 +27877,7 @@
           <p:cNvPr id="3" name="">
             <a:extLst xmlns:a="http://schemas.openxmlformats.org/drawingml/2006/main">
               <a:ext uri="{FF2B5EF4-FFF2-40B4-BE49-F238E27FC236}">
-                <a16:creationId xmlns:a16="http://schemas.microsoft.com/office/drawing/2014/main" id="{508E3797-1575-4470-8452-B995E0F1DC43}"/>
+                <a16:creationId xmlns:a16="http://schemas.microsoft.com/office/drawing/2014/main" id="{B2A3E1EE-664F-4168-9A5E-ABEB58C746AE}"/>
               </a:ext>
             </a:extLst>
           </p:cNvPr>
@@ -27929,7 +27929,7 @@
           <p:cNvPr id="4" name="">
             <a:extLst xmlns:a="http://schemas.openxmlformats.org/drawingml/2006/main">
               <a:ext uri="{FF2B5EF4-FFF2-40B4-BE49-F238E27FC236}">
-                <a16:creationId xmlns:a16="http://schemas.microsoft.com/office/drawing/2014/main" id="{01196BE0-5BA7-4955-A7D9-A839610E51EB}"/>
+                <a16:creationId xmlns:a16="http://schemas.microsoft.com/office/drawing/2014/main" id="{B61FA833-80AA-4CEF-8AA7-96B9EF19A03D}"/>
               </a:ext>
             </a:extLst>
           </p:cNvPr>
@@ -27981,7 +27981,7 @@
           <p:cNvPr id="5" name="">
             <a:extLst xmlns:a="http://schemas.openxmlformats.org/drawingml/2006/main">
               <a:ext uri="{FF2B5EF4-FFF2-40B4-BE49-F238E27FC236}">
-                <a16:creationId xmlns:a16="http://schemas.microsoft.com/office/drawing/2014/main" id="{0C918960-4295-491C-8467-E4BCEA403335}"/>
+                <a16:creationId xmlns:a16="http://schemas.microsoft.com/office/drawing/2014/main" id="{1F64C5FA-5F6D-4612-B05C-0D3D737CE0B4}"/>
               </a:ext>
             </a:extLst>
           </p:cNvPr>
@@ -28016,7 +28016,7 @@
           <p:nvPr/>
         </p:nvPicPr>
         <p:blipFill>
-          <a:blip xmlns:r="http://schemas.openxmlformats.org/officeDocument/2006/relationships" xmlns:a="http://schemas.openxmlformats.org/drawingml/2006/main" r:embed="Rc75678afd4824e4a"/>
+          <a:blip xmlns:r="http://schemas.openxmlformats.org/officeDocument/2006/relationships" xmlns:a="http://schemas.openxmlformats.org/drawingml/2006/main" r:embed="Rd35d615d63a24f63"/>
           <a:stretch xmlns:a="http://schemas.openxmlformats.org/drawingml/2006/main"/>
         </p:blipFill>
         <p:spPr>
@@ -28034,7 +28034,7 @@
           <p:cNvPr id="7" name="">
             <a:extLst xmlns:a="http://schemas.openxmlformats.org/drawingml/2006/main">
               <a:ext uri="{FF2B5EF4-FFF2-40B4-BE49-F238E27FC236}">
-                <a16:creationId xmlns:a16="http://schemas.microsoft.com/office/drawing/2014/main" id="{46200CC3-9A94-4CB9-9940-79725DA1E63A}"/>
+                <a16:creationId xmlns:a16="http://schemas.microsoft.com/office/drawing/2014/main" id="{1AAFBDE8-50FB-4EC9-9D59-F3A7FF45FF9B}"/>
               </a:ext>
             </a:extLst>
           </p:cNvPr>
@@ -28086,7 +28086,7 @@
           <p:cNvPr id="8" name="">
             <a:extLst xmlns:a="http://schemas.openxmlformats.org/drawingml/2006/main">
               <a:ext uri="{FF2B5EF4-FFF2-40B4-BE49-F238E27FC236}">
-                <a16:creationId xmlns:a16="http://schemas.microsoft.com/office/drawing/2014/main" id="{CE661503-664D-4BE1-B69D-292DC8253E75}"/>
+                <a16:creationId xmlns:a16="http://schemas.microsoft.com/office/drawing/2014/main" id="{5DA76CF5-47E0-41C1-9E64-2E935040C1B8}"/>
               </a:ext>
             </a:extLst>
           </p:cNvPr>
@@ -28138,7 +28138,7 @@
           <p:cNvPr id="9" name="">
             <a:extLst xmlns:a="http://schemas.openxmlformats.org/drawingml/2006/main">
               <a:ext uri="{FF2B5EF4-FFF2-40B4-BE49-F238E27FC236}">
-                <a16:creationId xmlns:a16="http://schemas.microsoft.com/office/drawing/2014/main" id="{265EBC4C-A0C0-47A4-BF76-6EFADF2C5144}"/>
+                <a16:creationId xmlns:a16="http://schemas.microsoft.com/office/drawing/2014/main" id="{461AE7D6-3BF7-4BEB-9BEC-3CF5AA4E6AEE}"/>
               </a:ext>
             </a:extLst>
           </p:cNvPr>
@@ -28190,7 +28190,7 @@
           <p:cNvPr id="10" name="">
             <a:extLst xmlns:a="http://schemas.openxmlformats.org/drawingml/2006/main">
               <a:ext uri="{FF2B5EF4-FFF2-40B4-BE49-F238E27FC236}">
-                <a16:creationId xmlns:a16="http://schemas.microsoft.com/office/drawing/2014/main" id="{D263A027-E84B-4688-A133-9D78A09E0885}"/>
+                <a16:creationId xmlns:a16="http://schemas.microsoft.com/office/drawing/2014/main" id="{BFAF6D23-757B-4328-8D36-C77281C40672}"/>
               </a:ext>
             </a:extLst>
           </p:cNvPr>
@@ -28221,7 +28221,7 @@
           <p:cNvPr id="11" name="">
             <a:extLst xmlns:a="http://schemas.openxmlformats.org/drawingml/2006/main">
               <a:ext uri="{FF2B5EF4-FFF2-40B4-BE49-F238E27FC236}">
-                <a16:creationId xmlns:a16="http://schemas.microsoft.com/office/drawing/2014/main" id="{5EE5B5AF-1EA8-4880-859B-4AF0815C4863}"/>
+                <a16:creationId xmlns:a16="http://schemas.microsoft.com/office/drawing/2014/main" id="{A8F2032D-AB5E-4703-BF27-9B3DC8785B5B}"/>
               </a:ext>
             </a:extLst>
           </p:cNvPr>
@@ -28273,7 +28273,7 @@
           <p:cNvPr id="12" name="">
             <a:extLst xmlns:a="http://schemas.openxmlformats.org/drawingml/2006/main">
               <a:ext uri="{FF2B5EF4-FFF2-40B4-BE49-F238E27FC236}">
-                <a16:creationId xmlns:a16="http://schemas.microsoft.com/office/drawing/2014/main" id="{9B98198A-B951-46C1-91D8-9D121A46BF03}"/>
+                <a16:creationId xmlns:a16="http://schemas.microsoft.com/office/drawing/2014/main" id="{E50E2975-6748-4244-BEAA-1070250C666D}"/>
               </a:ext>
             </a:extLst>
           </p:cNvPr>
@@ -28325,7 +28325,7 @@
           <p:cNvPr id="13" name="">
             <a:extLst xmlns:a="http://schemas.openxmlformats.org/drawingml/2006/main">
               <a:ext uri="{FF2B5EF4-FFF2-40B4-BE49-F238E27FC236}">
-                <a16:creationId xmlns:a16="http://schemas.microsoft.com/office/drawing/2014/main" id="{432981C8-5B1C-42EF-9AFE-8C55F93E13C0}"/>
+                <a16:creationId xmlns:a16="http://schemas.microsoft.com/office/drawing/2014/main" id="{84EBDBF3-979B-4592-A7CC-4795E30F2317}"/>
               </a:ext>
             </a:extLst>
           </p:cNvPr>
@@ -28377,7 +28377,7 @@
           <p:cNvPr id="14" name="">
             <a:extLst xmlns:a="http://schemas.openxmlformats.org/drawingml/2006/main">
               <a:ext uri="{FF2B5EF4-FFF2-40B4-BE49-F238E27FC236}">
-                <a16:creationId xmlns:a16="http://schemas.microsoft.com/office/drawing/2014/main" id="{E94507A6-8A6E-4CF2-AD51-726309449951}"/>
+                <a16:creationId xmlns:a16="http://schemas.microsoft.com/office/drawing/2014/main" id="{226B7A77-3D67-43E1-8BC9-86F7BB49DD06}"/>
               </a:ext>
             </a:extLst>
           </p:cNvPr>
@@ -28408,7 +28408,7 @@
           <p:cNvPr id="15" name="">
             <a:extLst xmlns:a="http://schemas.openxmlformats.org/drawingml/2006/main">
               <a:ext uri="{FF2B5EF4-FFF2-40B4-BE49-F238E27FC236}">
-                <a16:creationId xmlns:a16="http://schemas.microsoft.com/office/drawing/2014/main" id="{2BF3044F-E9CE-4449-8A8F-2B977937B033}"/>
+                <a16:creationId xmlns:a16="http://schemas.microsoft.com/office/drawing/2014/main" id="{ABD4B862-BF16-4C33-825C-AA7B39654005}"/>
               </a:ext>
             </a:extLst>
           </p:cNvPr>
@@ -28460,7 +28460,7 @@
           <p:cNvPr id="16" name="">
             <a:extLst xmlns:a="http://schemas.openxmlformats.org/drawingml/2006/main">
               <a:ext uri="{FF2B5EF4-FFF2-40B4-BE49-F238E27FC236}">
-                <a16:creationId xmlns:a16="http://schemas.microsoft.com/office/drawing/2014/main" id="{502706FB-FC62-43A6-8BAB-7BB172DCAABD}"/>
+                <a16:creationId xmlns:a16="http://schemas.microsoft.com/office/drawing/2014/main" id="{1842610B-FEA7-44C4-A9F4-364DFBF6B32E}"/>
               </a:ext>
             </a:extLst>
           </p:cNvPr>
@@ -28512,7 +28512,7 @@
           <p:cNvPr id="17" name="">
             <a:extLst xmlns:a="http://schemas.openxmlformats.org/drawingml/2006/main">
               <a:ext uri="{FF2B5EF4-FFF2-40B4-BE49-F238E27FC236}">
-                <a16:creationId xmlns:a16="http://schemas.microsoft.com/office/drawing/2014/main" id="{388D8B32-C1FA-4AFB-BF63-606639CB88D8}"/>
+                <a16:creationId xmlns:a16="http://schemas.microsoft.com/office/drawing/2014/main" id="{61540BA3-06BB-4364-8988-CB7564D3310E}"/>
               </a:ext>
             </a:extLst>
           </p:cNvPr>
@@ -28564,7 +28564,7 @@
           <p:cNvPr id="18" name="">
             <a:extLst xmlns:a="http://schemas.openxmlformats.org/drawingml/2006/main">
               <a:ext uri="{FF2B5EF4-FFF2-40B4-BE49-F238E27FC236}">
-                <a16:creationId xmlns:a16="http://schemas.microsoft.com/office/drawing/2014/main" id="{CC3D8306-49D8-4F39-8CDF-0FCD1327DC5A}"/>
+                <a16:creationId xmlns:a16="http://schemas.microsoft.com/office/drawing/2014/main" id="{22CE4710-9127-40C9-99C9-DBA085187C43}"/>
               </a:ext>
             </a:extLst>
           </p:cNvPr>
@@ -28595,7 +28595,7 @@
           <p:cNvPr id="19" name="">
             <a:extLst xmlns:a="http://schemas.openxmlformats.org/drawingml/2006/main">
               <a:ext uri="{FF2B5EF4-FFF2-40B4-BE49-F238E27FC236}">
-                <a16:creationId xmlns:a16="http://schemas.microsoft.com/office/drawing/2014/main" id="{E79DE5E3-7A33-440C-93DE-95EC7D5A758E}"/>
+                <a16:creationId xmlns:a16="http://schemas.microsoft.com/office/drawing/2014/main" id="{B43C33D7-36B1-42D0-9164-0FB07079AFE4}"/>
               </a:ext>
             </a:extLst>
           </p:cNvPr>
@@ -28647,7 +28647,7 @@
           <p:cNvPr id="20" name="">
             <a:extLst xmlns:a="http://schemas.openxmlformats.org/drawingml/2006/main">
               <a:ext uri="{FF2B5EF4-FFF2-40B4-BE49-F238E27FC236}">
-                <a16:creationId xmlns:a16="http://schemas.microsoft.com/office/drawing/2014/main" id="{61DB372C-B874-4E8B-B68A-342702C9A3B8}"/>
+                <a16:creationId xmlns:a16="http://schemas.microsoft.com/office/drawing/2014/main" id="{BCAFC4DB-CBD6-475F-B3AE-3282A4E31396}"/>
               </a:ext>
             </a:extLst>
           </p:cNvPr>
@@ -28699,7 +28699,7 @@
           <p:cNvPr id="21" name="">
             <a:extLst xmlns:a="http://schemas.openxmlformats.org/drawingml/2006/main">
               <a:ext uri="{FF2B5EF4-FFF2-40B4-BE49-F238E27FC236}">
-                <a16:creationId xmlns:a16="http://schemas.microsoft.com/office/drawing/2014/main" id="{8552FB2B-E421-44B4-B02F-D527FD870E3B}"/>
+                <a16:creationId xmlns:a16="http://schemas.microsoft.com/office/drawing/2014/main" id="{7BA9BDCB-2369-4047-AD49-EC5ED26D743A}"/>
               </a:ext>
             </a:extLst>
           </p:cNvPr>
@@ -28751,7 +28751,7 @@
           <p:cNvPr id="22" name="">
             <a:extLst xmlns:a="http://schemas.openxmlformats.org/drawingml/2006/main">
               <a:ext uri="{FF2B5EF4-FFF2-40B4-BE49-F238E27FC236}">
-                <a16:creationId xmlns:a16="http://schemas.microsoft.com/office/drawing/2014/main" id="{BE47DFEE-FFBF-4C49-B44D-FF033C7FD4BA}"/>
+                <a16:creationId xmlns:a16="http://schemas.microsoft.com/office/drawing/2014/main" id="{8DA07540-DFC0-4879-9D77-B7A4CCF128A2}"/>
               </a:ext>
             </a:extLst>
           </p:cNvPr>
@@ -28782,7 +28782,7 @@
           <p:cNvPr id="23" name="">
             <a:extLst xmlns:a="http://schemas.openxmlformats.org/drawingml/2006/main">
               <a:ext uri="{FF2B5EF4-FFF2-40B4-BE49-F238E27FC236}">
-                <a16:creationId xmlns:a16="http://schemas.microsoft.com/office/drawing/2014/main" id="{579E659E-2EE8-447A-9138-F0F916D248BE}"/>
+                <a16:creationId xmlns:a16="http://schemas.microsoft.com/office/drawing/2014/main" id="{D2020645-70E0-4FA0-A5F7-57720492A22A}"/>
               </a:ext>
             </a:extLst>
           </p:cNvPr>
@@ -28834,7 +28834,7 @@
           <p:cNvPr id="24" name="">
             <a:extLst xmlns:a="http://schemas.openxmlformats.org/drawingml/2006/main">
               <a:ext uri="{FF2B5EF4-FFF2-40B4-BE49-F238E27FC236}">
-                <a16:creationId xmlns:a16="http://schemas.microsoft.com/office/drawing/2014/main" id="{0D682F23-36B6-430C-B600-9561EB4DDF17}"/>
+                <a16:creationId xmlns:a16="http://schemas.microsoft.com/office/drawing/2014/main" id="{6858B8A1-748F-4E63-9869-5588FA09EB15}"/>
               </a:ext>
             </a:extLst>
           </p:cNvPr>
@@ -28886,7 +28886,7 @@
           <p:cNvPr id="25" name="">
             <a:extLst xmlns:a="http://schemas.openxmlformats.org/drawingml/2006/main">
               <a:ext uri="{FF2B5EF4-FFF2-40B4-BE49-F238E27FC236}">
-                <a16:creationId xmlns:a16="http://schemas.microsoft.com/office/drawing/2014/main" id="{C2D08BDD-A505-4460-92F1-4ECDCBD57A5B}"/>
+                <a16:creationId xmlns:a16="http://schemas.microsoft.com/office/drawing/2014/main" id="{9F1125A9-FBC0-4EF3-B71E-6E3B2A50EB97}"/>
               </a:ext>
             </a:extLst>
           </p:cNvPr>
@@ -28938,7 +28938,7 @@
           <p:cNvPr id="26" name="">
             <a:extLst xmlns:a="http://schemas.openxmlformats.org/drawingml/2006/main">
               <a:ext uri="{FF2B5EF4-FFF2-40B4-BE49-F238E27FC236}">
-                <a16:creationId xmlns:a16="http://schemas.microsoft.com/office/drawing/2014/main" id="{7433DC82-6A95-4FD4-9BB7-9C9864A4FE01}"/>
+                <a16:creationId xmlns:a16="http://schemas.microsoft.com/office/drawing/2014/main" id="{361FC502-9F1E-4115-95C5-0B11F8EF76AD}"/>
               </a:ext>
             </a:extLst>
           </p:cNvPr>
@@ -28969,7 +28969,7 @@
           <p:cNvPr id="27" name="">
             <a:extLst xmlns:a="http://schemas.openxmlformats.org/drawingml/2006/main">
               <a:ext uri="{FF2B5EF4-FFF2-40B4-BE49-F238E27FC236}">
-                <a16:creationId xmlns:a16="http://schemas.microsoft.com/office/drawing/2014/main" id="{695B3D7C-BC28-49E3-921E-B2B532A1F013}"/>
+                <a16:creationId xmlns:a16="http://schemas.microsoft.com/office/drawing/2014/main" id="{79E10ADC-8407-4222-9315-B3431295C59B}"/>
               </a:ext>
             </a:extLst>
           </p:cNvPr>
@@ -29021,7 +29021,7 @@
           <p:cNvPr id="28" name="">
             <a:extLst xmlns:a="http://schemas.openxmlformats.org/drawingml/2006/main">
               <a:ext uri="{FF2B5EF4-FFF2-40B4-BE49-F238E27FC236}">
-                <a16:creationId xmlns:a16="http://schemas.microsoft.com/office/drawing/2014/main" id="{4CF0EF60-D389-4EF8-A26A-1674A1AECA40}"/>
+                <a16:creationId xmlns:a16="http://schemas.microsoft.com/office/drawing/2014/main" id="{86D84F99-F8DC-4869-AD18-C9189A31BF21}"/>
               </a:ext>
             </a:extLst>
           </p:cNvPr>
@@ -29073,7 +29073,7 @@
           <p:cNvPr id="29" name="">
             <a:extLst xmlns:a="http://schemas.openxmlformats.org/drawingml/2006/main">
               <a:ext uri="{FF2B5EF4-FFF2-40B4-BE49-F238E27FC236}">
-                <a16:creationId xmlns:a16="http://schemas.microsoft.com/office/drawing/2014/main" id="{12FB2185-0485-4B8B-89BB-362F24721C05}"/>
+                <a16:creationId xmlns:a16="http://schemas.microsoft.com/office/drawing/2014/main" id="{1861F44F-D9F4-4216-8313-A9CD191359CC}"/>
               </a:ext>
             </a:extLst>
           </p:cNvPr>
@@ -29125,7 +29125,7 @@
           <p:cNvPr id="30" name="">
             <a:extLst xmlns:a="http://schemas.openxmlformats.org/drawingml/2006/main">
               <a:ext uri="{FF2B5EF4-FFF2-40B4-BE49-F238E27FC236}">
-                <a16:creationId xmlns:a16="http://schemas.microsoft.com/office/drawing/2014/main" id="{32401BC3-C279-4D93-9780-EEDB20025563}"/>
+                <a16:creationId xmlns:a16="http://schemas.microsoft.com/office/drawing/2014/main" id="{8B8B0602-5B3E-4940-B159-8D9AE1B3B129}"/>
               </a:ext>
             </a:extLst>
           </p:cNvPr>
@@ -29156,7 +29156,7 @@
           <p:cNvPr id="31" name="">
             <a:extLst xmlns:a="http://schemas.openxmlformats.org/drawingml/2006/main">
               <a:ext uri="{FF2B5EF4-FFF2-40B4-BE49-F238E27FC236}">
-                <a16:creationId xmlns:a16="http://schemas.microsoft.com/office/drawing/2014/main" id="{EB6C0117-C6D9-4AC6-A4F4-2C879AB094C2}"/>
+                <a16:creationId xmlns:a16="http://schemas.microsoft.com/office/drawing/2014/main" id="{FDEFF4BB-C92C-4C5D-8DC2-A5CB3D7E3339}"/>
               </a:ext>
             </a:extLst>
           </p:cNvPr>
@@ -29208,7 +29208,7 @@
           <p:cNvPr id="32" name="">
             <a:extLst xmlns:a="http://schemas.openxmlformats.org/drawingml/2006/main">
               <a:ext uri="{FF2B5EF4-FFF2-40B4-BE49-F238E27FC236}">
-                <a16:creationId xmlns:a16="http://schemas.microsoft.com/office/drawing/2014/main" id="{B07E8199-2EB9-4C85-9FA1-6C92C254ED84}"/>
+                <a16:creationId xmlns:a16="http://schemas.microsoft.com/office/drawing/2014/main" id="{BAB71480-3C16-4D93-97C1-63F13AE29E88}"/>
               </a:ext>
             </a:extLst>
           </p:cNvPr>
@@ -29260,7 +29260,7 @@
           <p:cNvPr id="33" name="">
             <a:extLst xmlns:a="http://schemas.openxmlformats.org/drawingml/2006/main">
               <a:ext uri="{FF2B5EF4-FFF2-40B4-BE49-F238E27FC236}">
-                <a16:creationId xmlns:a16="http://schemas.microsoft.com/office/drawing/2014/main" id="{B0C1B263-128C-4CC2-AFCC-0F1BB5D11795}"/>
+                <a16:creationId xmlns:a16="http://schemas.microsoft.com/office/drawing/2014/main" id="{62787768-35D2-4740-BB0C-35737B3064E1}"/>
               </a:ext>
             </a:extLst>
           </p:cNvPr>
@@ -29312,7 +29312,7 @@
           <p:cNvPr id="34" name="">
             <a:extLst xmlns:a="http://schemas.openxmlformats.org/drawingml/2006/main">
               <a:ext uri="{FF2B5EF4-FFF2-40B4-BE49-F238E27FC236}">
-                <a16:creationId xmlns:a16="http://schemas.microsoft.com/office/drawing/2014/main" id="{DEDA3687-0EEE-43D6-BE92-C7EBC6C0E279}"/>
+                <a16:creationId xmlns:a16="http://schemas.microsoft.com/office/drawing/2014/main" id="{0E2ACF25-53B7-4F48-BA4C-99B9BD630342}"/>
               </a:ext>
             </a:extLst>
           </p:cNvPr>
@@ -29343,7 +29343,7 @@
           <p:cNvPr id="35" name="">
             <a:extLst xmlns:a="http://schemas.openxmlformats.org/drawingml/2006/main">
               <a:ext uri="{FF2B5EF4-FFF2-40B4-BE49-F238E27FC236}">
-                <a16:creationId xmlns:a16="http://schemas.microsoft.com/office/drawing/2014/main" id="{3A3CF4CB-28E9-4F81-8BCF-CD46CC929E60}"/>
+                <a16:creationId xmlns:a16="http://schemas.microsoft.com/office/drawing/2014/main" id="{499C29F3-F852-4389-A256-B1B1D1E093F7}"/>
               </a:ext>
             </a:extLst>
           </p:cNvPr>
@@ -29395,7 +29395,7 @@
           <p:cNvPr id="36" name="">
             <a:extLst xmlns:a="http://schemas.openxmlformats.org/drawingml/2006/main">
               <a:ext uri="{FF2B5EF4-FFF2-40B4-BE49-F238E27FC236}">
-                <a16:creationId xmlns:a16="http://schemas.microsoft.com/office/drawing/2014/main" id="{33870727-A85B-44B1-AA13-B83A86FA3C7B}"/>
+                <a16:creationId xmlns:a16="http://schemas.microsoft.com/office/drawing/2014/main" id="{FB0BAA45-ACE6-47EF-B50C-2F5FC31A1FF9}"/>
               </a:ext>
             </a:extLst>
           </p:cNvPr>
@@ -29447,7 +29447,7 @@
           <p:cNvPr id="37" name="">
             <a:extLst xmlns:a="http://schemas.openxmlformats.org/drawingml/2006/main">
               <a:ext uri="{FF2B5EF4-FFF2-40B4-BE49-F238E27FC236}">
-                <a16:creationId xmlns:a16="http://schemas.microsoft.com/office/drawing/2014/main" id="{1C20096E-D79C-4A52-B436-96F8B184E950}"/>
+                <a16:creationId xmlns:a16="http://schemas.microsoft.com/office/drawing/2014/main" id="{C01C485A-658C-4668-A7C9-F991E6459E87}"/>
               </a:ext>
             </a:extLst>
           </p:cNvPr>
@@ -29499,7 +29499,7 @@
           <p:cNvPr id="38" name="">
             <a:extLst xmlns:a="http://schemas.openxmlformats.org/drawingml/2006/main">
               <a:ext uri="{FF2B5EF4-FFF2-40B4-BE49-F238E27FC236}">
-                <a16:creationId xmlns:a16="http://schemas.microsoft.com/office/drawing/2014/main" id="{6A52D85B-1A68-4D04-BC9F-D39A4139BE84}"/>
+                <a16:creationId xmlns:a16="http://schemas.microsoft.com/office/drawing/2014/main" id="{93F0A218-9EDB-43E4-94F2-A3ED4AEB76B8}"/>
               </a:ext>
             </a:extLst>
           </p:cNvPr>
@@ -29530,7 +29530,7 @@
           <p:cNvPr id="39" name="">
             <a:extLst xmlns:a="http://schemas.openxmlformats.org/drawingml/2006/main">
               <a:ext uri="{FF2B5EF4-FFF2-40B4-BE49-F238E27FC236}">
-                <a16:creationId xmlns:a16="http://schemas.microsoft.com/office/drawing/2014/main" id="{45D2039F-0E9C-4FDD-9E9D-9D91DA4A9243}"/>
+                <a16:creationId xmlns:a16="http://schemas.microsoft.com/office/drawing/2014/main" id="{8DFA82C8-4869-4A64-B43A-56C0938AAC43}"/>
               </a:ext>
             </a:extLst>
           </p:cNvPr>
@@ -29582,7 +29582,7 @@
           <p:cNvPr id="40" name="">
             <a:extLst xmlns:a="http://schemas.openxmlformats.org/drawingml/2006/main">
               <a:ext uri="{FF2B5EF4-FFF2-40B4-BE49-F238E27FC236}">
-                <a16:creationId xmlns:a16="http://schemas.microsoft.com/office/drawing/2014/main" id="{2A167551-FD61-4E36-9BB5-986F1AE89FE1}"/>
+                <a16:creationId xmlns:a16="http://schemas.microsoft.com/office/drawing/2014/main" id="{02584821-6CEB-4F26-B961-7D304D22A79B}"/>
               </a:ext>
             </a:extLst>
           </p:cNvPr>
@@ -29634,7 +29634,7 @@
           <p:cNvPr id="41" name="">
             <a:extLst xmlns:a="http://schemas.openxmlformats.org/drawingml/2006/main">
               <a:ext uri="{FF2B5EF4-FFF2-40B4-BE49-F238E27FC236}">
-                <a16:creationId xmlns:a16="http://schemas.microsoft.com/office/drawing/2014/main" id="{6A99B158-46B7-4DF2-AD43-0849890FA68B}"/>
+                <a16:creationId xmlns:a16="http://schemas.microsoft.com/office/drawing/2014/main" id="{53133738-1BF8-4576-B170-E550C015A6BC}"/>
               </a:ext>
             </a:extLst>
           </p:cNvPr>
@@ -29684,7 +29684,7 @@
     </p:spTree>
     <p:extLst>
       <p:ext uri="{BB962C8B-B14F-4D97-AF65-F5344CB8AC3E}">
-        <p14:creationId xmlns:p14="http://schemas.microsoft.com/office/powerpoint/2010/main" val="797578903"/>
+        <p14:creationId xmlns:p14="http://schemas.microsoft.com/office/powerpoint/2010/main" val="2128167216"/>
       </p:ext>
     </p:extLst>
   </p:cSld>
@@ -29715,7 +29715,7 @@
           <p:cNvPr id="76" name="">
             <a:extLst xmlns:a="http://schemas.openxmlformats.org/drawingml/2006/main">
               <a:ext uri="{FF2B5EF4-FFF2-40B4-BE49-F238E27FC236}">
-                <a16:creationId xmlns:a16="http://schemas.microsoft.com/office/drawing/2014/main" id="{534F220F-1EEA-471C-BAB6-AD13BEAD6CD6}"/>
+                <a16:creationId xmlns:a16="http://schemas.microsoft.com/office/drawing/2014/main" id="{D8D65B37-478B-4421-A505-23A338E0BCF3}"/>
               </a:ext>
             </a:extLst>
           </p:cNvPr>
@@ -29748,7 +29748,7 @@
           <p:cNvPr id="2" name="">
             <a:extLst xmlns:a="http://schemas.openxmlformats.org/drawingml/2006/main">
               <a:ext uri="{FF2B5EF4-FFF2-40B4-BE49-F238E27FC236}">
-                <a16:creationId xmlns:a16="http://schemas.microsoft.com/office/drawing/2014/main" id="{58F6FBF9-CFD0-4B66-AA4A-8E9FEFF0203B}"/>
+                <a16:creationId xmlns:a16="http://schemas.microsoft.com/office/drawing/2014/main" id="{EAF694DA-A3B1-4158-890F-42253754D03C}"/>
               </a:ext>
             </a:extLst>
           </p:cNvPr>
@@ -29779,7 +29779,7 @@
           <p:cNvPr id="3" name="">
             <a:extLst xmlns:a="http://schemas.openxmlformats.org/drawingml/2006/main">
               <a:ext uri="{FF2B5EF4-FFF2-40B4-BE49-F238E27FC236}">
-                <a16:creationId xmlns:a16="http://schemas.microsoft.com/office/drawing/2014/main" id="{FE16F2FB-71DA-4289-B071-F54AFF6D06F8}"/>
+                <a16:creationId xmlns:a16="http://schemas.microsoft.com/office/drawing/2014/main" id="{06C88FD3-F7F9-4A9D-85A3-14AFD1046363}"/>
               </a:ext>
             </a:extLst>
           </p:cNvPr>
@@ -29831,7 +29831,7 @@
           <p:cNvPr id="4" name="">
             <a:extLst xmlns:a="http://schemas.openxmlformats.org/drawingml/2006/main">
               <a:ext uri="{FF2B5EF4-FFF2-40B4-BE49-F238E27FC236}">
-                <a16:creationId xmlns:a16="http://schemas.microsoft.com/office/drawing/2014/main" id="{DC67F8B7-7E6B-421D-9F3B-2F59B2E456B9}"/>
+                <a16:creationId xmlns:a16="http://schemas.microsoft.com/office/drawing/2014/main" id="{37D559B5-5098-4495-B0A6-E8E5EABF2A0A}"/>
               </a:ext>
             </a:extLst>
           </p:cNvPr>
@@ -29883,7 +29883,7 @@
           <p:cNvPr id="5" name="">
             <a:extLst xmlns:a="http://schemas.openxmlformats.org/drawingml/2006/main">
               <a:ext uri="{FF2B5EF4-FFF2-40B4-BE49-F238E27FC236}">
-                <a16:creationId xmlns:a16="http://schemas.microsoft.com/office/drawing/2014/main" id="{96BF18CD-5CF0-47CB-A219-145993949A1A}"/>
+                <a16:creationId xmlns:a16="http://schemas.microsoft.com/office/drawing/2014/main" id="{AEF52591-6C2D-41A4-BFAB-B5752B8C468D}"/>
               </a:ext>
             </a:extLst>
           </p:cNvPr>
@@ -29918,7 +29918,7 @@
           <p:nvPr/>
         </p:nvPicPr>
         <p:blipFill>
-          <a:blip xmlns:r="http://schemas.openxmlformats.org/officeDocument/2006/relationships" xmlns:a="http://schemas.openxmlformats.org/drawingml/2006/main" r:embed="R1676e32402254640"/>
+          <a:blip xmlns:r="http://schemas.openxmlformats.org/officeDocument/2006/relationships" xmlns:a="http://schemas.openxmlformats.org/drawingml/2006/main" r:embed="Ra4a15ea9a81740d9"/>
           <a:stretch xmlns:a="http://schemas.openxmlformats.org/drawingml/2006/main"/>
         </p:blipFill>
         <p:spPr>
@@ -29936,7 +29936,7 @@
           <p:cNvPr id="7" name="">
             <a:extLst xmlns:a="http://schemas.openxmlformats.org/drawingml/2006/main">
               <a:ext uri="{FF2B5EF4-FFF2-40B4-BE49-F238E27FC236}">
-                <a16:creationId xmlns:a16="http://schemas.microsoft.com/office/drawing/2014/main" id="{077C2A7A-7B42-4435-A47E-5CC8EAB9C77C}"/>
+                <a16:creationId xmlns:a16="http://schemas.microsoft.com/office/drawing/2014/main" id="{8948E404-2476-4186-A9A0-70A3FAF5AE9C}"/>
               </a:ext>
             </a:extLst>
           </p:cNvPr>
@@ -29988,7 +29988,7 @@
           <p:cNvPr id="8" name="">
             <a:extLst xmlns:a="http://schemas.openxmlformats.org/drawingml/2006/main">
               <a:ext uri="{FF2B5EF4-FFF2-40B4-BE49-F238E27FC236}">
-                <a16:creationId xmlns:a16="http://schemas.microsoft.com/office/drawing/2014/main" id="{61EBCACA-82CC-4068-A1C7-3CF98228283C}"/>
+                <a16:creationId xmlns:a16="http://schemas.microsoft.com/office/drawing/2014/main" id="{81760781-4549-49EC-A84B-4530C2177471}"/>
               </a:ext>
             </a:extLst>
           </p:cNvPr>
@@ -30040,7 +30040,7 @@
           <p:cNvPr id="9" name="">
             <a:extLst xmlns:a="http://schemas.openxmlformats.org/drawingml/2006/main">
               <a:ext uri="{FF2B5EF4-FFF2-40B4-BE49-F238E27FC236}">
-                <a16:creationId xmlns:a16="http://schemas.microsoft.com/office/drawing/2014/main" id="{1A7057CC-CF8F-48BF-BEC7-9515034FFE67}"/>
+                <a16:creationId xmlns:a16="http://schemas.microsoft.com/office/drawing/2014/main" id="{4621C456-4FEC-4F17-A000-304ACF5A14FF}"/>
               </a:ext>
             </a:extLst>
           </p:cNvPr>
@@ -30092,7 +30092,7 @@
           <p:cNvPr id="10" name="">
             <a:extLst xmlns:a="http://schemas.openxmlformats.org/drawingml/2006/main">
               <a:ext uri="{FF2B5EF4-FFF2-40B4-BE49-F238E27FC236}">
-                <a16:creationId xmlns:a16="http://schemas.microsoft.com/office/drawing/2014/main" id="{29A158BD-49D0-4076-97BB-C3FA4758FDCD}"/>
+                <a16:creationId xmlns:a16="http://schemas.microsoft.com/office/drawing/2014/main" id="{57DBAD7D-0764-47F5-8927-0ACF6216B239}"/>
               </a:ext>
             </a:extLst>
           </p:cNvPr>
@@ -30144,7 +30144,7 @@
           <p:cNvPr id="11" name="">
             <a:extLst xmlns:a="http://schemas.openxmlformats.org/drawingml/2006/main">
               <a:ext uri="{FF2B5EF4-FFF2-40B4-BE49-F238E27FC236}">
-                <a16:creationId xmlns:a16="http://schemas.microsoft.com/office/drawing/2014/main" id="{ECA99A2C-C0BC-4707-A411-06AFB0AC2C01}"/>
+                <a16:creationId xmlns:a16="http://schemas.microsoft.com/office/drawing/2014/main" id="{268D8B10-1FD0-4E07-AA31-BF6F32956947}"/>
               </a:ext>
             </a:extLst>
           </p:cNvPr>
@@ -30187,7 +30187,7 @@
           <p:cNvPr id="12" name="">
             <a:extLst xmlns:a="http://schemas.openxmlformats.org/drawingml/2006/main">
               <a:ext uri="{FF2B5EF4-FFF2-40B4-BE49-F238E27FC236}">
-                <a16:creationId xmlns:a16="http://schemas.microsoft.com/office/drawing/2014/main" id="{9FCBE329-197E-4C20-81C7-5E44BE44FB40}"/>
+                <a16:creationId xmlns:a16="http://schemas.microsoft.com/office/drawing/2014/main" id="{A324557B-D0B4-4B43-A672-2BF52E013153}"/>
               </a:ext>
             </a:extLst>
           </p:cNvPr>
@@ -30218,7 +30218,7 @@
           <p:cNvPr id="13" name="">
             <a:extLst xmlns:a="http://schemas.openxmlformats.org/drawingml/2006/main">
               <a:ext uri="{FF2B5EF4-FFF2-40B4-BE49-F238E27FC236}">
-                <a16:creationId xmlns:a16="http://schemas.microsoft.com/office/drawing/2014/main" id="{8A3B84A5-4B13-4F6A-8D10-D8CFFF737235}"/>
+                <a16:creationId xmlns:a16="http://schemas.microsoft.com/office/drawing/2014/main" id="{3292E423-1E8C-4185-A1BB-BD521CD432F5}"/>
               </a:ext>
             </a:extLst>
           </p:cNvPr>
@@ -30249,7 +30249,7 @@
           <p:cNvPr id="14" name="">
             <a:extLst xmlns:a="http://schemas.openxmlformats.org/drawingml/2006/main">
               <a:ext uri="{FF2B5EF4-FFF2-40B4-BE49-F238E27FC236}">
-                <a16:creationId xmlns:a16="http://schemas.microsoft.com/office/drawing/2014/main" id="{9480E6FB-BB30-42A6-A3FD-9C14FD1E645A}"/>
+                <a16:creationId xmlns:a16="http://schemas.microsoft.com/office/drawing/2014/main" id="{596E9B33-9991-4BC9-A2AF-3A873F93B8E5}"/>
               </a:ext>
             </a:extLst>
           </p:cNvPr>
@@ -30292,7 +30292,7 @@
           <p:cNvPr id="15" name="">
             <a:extLst xmlns:a="http://schemas.openxmlformats.org/drawingml/2006/main">
               <a:ext uri="{FF2B5EF4-FFF2-40B4-BE49-F238E27FC236}">
-                <a16:creationId xmlns:a16="http://schemas.microsoft.com/office/drawing/2014/main" id="{81A3D514-6B27-4B30-8A26-BE7A1A39A020}"/>
+                <a16:creationId xmlns:a16="http://schemas.microsoft.com/office/drawing/2014/main" id="{13F36A07-53C4-40A5-9858-6B67716BFA0D}"/>
               </a:ext>
             </a:extLst>
           </p:cNvPr>
@@ -30323,7 +30323,7 @@
           <p:cNvPr id="16" name="">
             <a:extLst xmlns:a="http://schemas.openxmlformats.org/drawingml/2006/main">
               <a:ext uri="{FF2B5EF4-FFF2-40B4-BE49-F238E27FC236}">
-                <a16:creationId xmlns:a16="http://schemas.microsoft.com/office/drawing/2014/main" id="{BDF8CD0A-290E-4A3A-AA13-C2EF4AB6CB77}"/>
+                <a16:creationId xmlns:a16="http://schemas.microsoft.com/office/drawing/2014/main" id="{565E7247-7770-4B31-B949-726BDCB94808}"/>
               </a:ext>
             </a:extLst>
           </p:cNvPr>
@@ -30354,7 +30354,7 @@
           <p:cNvPr id="17" name="">
             <a:extLst xmlns:a="http://schemas.openxmlformats.org/drawingml/2006/main">
               <a:ext uri="{FF2B5EF4-FFF2-40B4-BE49-F238E27FC236}">
-                <a16:creationId xmlns:a16="http://schemas.microsoft.com/office/drawing/2014/main" id="{9E6A584E-45F0-4524-938F-075C3D24980D}"/>
+                <a16:creationId xmlns:a16="http://schemas.microsoft.com/office/drawing/2014/main" id="{258D3C07-D50D-4A41-8AD2-290EB40E0DF6}"/>
               </a:ext>
             </a:extLst>
           </p:cNvPr>
@@ -30406,7 +30406,7 @@
           <p:cNvPr id="18" name="">
             <a:extLst xmlns:a="http://schemas.openxmlformats.org/drawingml/2006/main">
               <a:ext uri="{FF2B5EF4-FFF2-40B4-BE49-F238E27FC236}">
-                <a16:creationId xmlns:a16="http://schemas.microsoft.com/office/drawing/2014/main" id="{DFDF62E5-8B8B-4D83-981E-3F5C0A9E97D6}"/>
+                <a16:creationId xmlns:a16="http://schemas.microsoft.com/office/drawing/2014/main" id="{29EDC174-8FDC-420E-AF0C-97C52B3CB8F6}"/>
               </a:ext>
             </a:extLst>
           </p:cNvPr>
@@ -30458,7 +30458,7 @@
           <p:cNvPr id="19" name="">
             <a:extLst xmlns:a="http://schemas.openxmlformats.org/drawingml/2006/main">
               <a:ext uri="{FF2B5EF4-FFF2-40B4-BE49-F238E27FC236}">
-                <a16:creationId xmlns:a16="http://schemas.microsoft.com/office/drawing/2014/main" id="{06599AD2-4698-42F6-86D1-FA9E94241EFE}"/>
+                <a16:creationId xmlns:a16="http://schemas.microsoft.com/office/drawing/2014/main" id="{77C75914-16A4-4C18-9A1A-D20013BB0D89}"/>
               </a:ext>
             </a:extLst>
           </p:cNvPr>
@@ -30510,7 +30510,7 @@
           <p:cNvPr id="20" name="">
             <a:extLst xmlns:a="http://schemas.openxmlformats.org/drawingml/2006/main">
               <a:ext uri="{FF2B5EF4-FFF2-40B4-BE49-F238E27FC236}">
-                <a16:creationId xmlns:a16="http://schemas.microsoft.com/office/drawing/2014/main" id="{93EE1944-63FD-44C8-8D9A-B6589CC089DC}"/>
+                <a16:creationId xmlns:a16="http://schemas.microsoft.com/office/drawing/2014/main" id="{718D43ED-AB0A-4055-8A7A-5D8D96FE99E7}"/>
               </a:ext>
             </a:extLst>
           </p:cNvPr>
@@ -30553,7 +30553,7 @@
           <p:cNvPr id="21" name="">
             <a:extLst xmlns:a="http://schemas.openxmlformats.org/drawingml/2006/main">
               <a:ext uri="{FF2B5EF4-FFF2-40B4-BE49-F238E27FC236}">
-                <a16:creationId xmlns:a16="http://schemas.microsoft.com/office/drawing/2014/main" id="{B04C9BB6-6076-477C-A8E0-E2032A616DB3}"/>
+                <a16:creationId xmlns:a16="http://schemas.microsoft.com/office/drawing/2014/main" id="{53106EB6-BC9D-4A49-96E0-A351ED8DE67C}"/>
               </a:ext>
             </a:extLst>
           </p:cNvPr>
@@ -30584,7 +30584,7 @@
           <p:cNvPr id="22" name="">
             <a:extLst xmlns:a="http://schemas.openxmlformats.org/drawingml/2006/main">
               <a:ext uri="{FF2B5EF4-FFF2-40B4-BE49-F238E27FC236}">
-                <a16:creationId xmlns:a16="http://schemas.microsoft.com/office/drawing/2014/main" id="{7C167144-1B3A-4A08-8CA3-71CB344457E5}"/>
+                <a16:creationId xmlns:a16="http://schemas.microsoft.com/office/drawing/2014/main" id="{722366D4-8CAD-421A-9BE1-DF7C2A390988}"/>
               </a:ext>
             </a:extLst>
           </p:cNvPr>
@@ -30615,7 +30615,7 @@
           <p:cNvPr id="23" name="">
             <a:extLst xmlns:a="http://schemas.openxmlformats.org/drawingml/2006/main">
               <a:ext uri="{FF2B5EF4-FFF2-40B4-BE49-F238E27FC236}">
-                <a16:creationId xmlns:a16="http://schemas.microsoft.com/office/drawing/2014/main" id="{033921ED-5B83-49F6-A53F-38EF18FABC4B}"/>
+                <a16:creationId xmlns:a16="http://schemas.microsoft.com/office/drawing/2014/main" id="{3EAC9AB4-EBBE-41FC-803B-A923308ACE49}"/>
               </a:ext>
             </a:extLst>
           </p:cNvPr>
@@ -30667,7 +30667,7 @@
           <p:cNvPr id="24" name="">
             <a:extLst xmlns:a="http://schemas.openxmlformats.org/drawingml/2006/main">
               <a:ext uri="{FF2B5EF4-FFF2-40B4-BE49-F238E27FC236}">
-                <a16:creationId xmlns:a16="http://schemas.microsoft.com/office/drawing/2014/main" id="{C1E5BF0E-9EDC-4503-BD9A-555255A9ACB1}"/>
+                <a16:creationId xmlns:a16="http://schemas.microsoft.com/office/drawing/2014/main" id="{FE21F029-33F4-439F-91E4-6518A038C6AF}"/>
               </a:ext>
             </a:extLst>
           </p:cNvPr>
@@ -30719,7 +30719,7 @@
           <p:cNvPr id="25" name="">
             <a:extLst xmlns:a="http://schemas.openxmlformats.org/drawingml/2006/main">
               <a:ext uri="{FF2B5EF4-FFF2-40B4-BE49-F238E27FC236}">
-                <a16:creationId xmlns:a16="http://schemas.microsoft.com/office/drawing/2014/main" id="{70E076D9-EC32-466D-A1C2-70497B0FBDF0}"/>
+                <a16:creationId xmlns:a16="http://schemas.microsoft.com/office/drawing/2014/main" id="{C50520D9-8F52-44D4-AE49-FDE6A2E8D637}"/>
               </a:ext>
             </a:extLst>
           </p:cNvPr>
@@ -30771,7 +30771,7 @@
           <p:cNvPr id="26" name="">
             <a:extLst xmlns:a="http://schemas.openxmlformats.org/drawingml/2006/main">
               <a:ext uri="{FF2B5EF4-FFF2-40B4-BE49-F238E27FC236}">
-                <a16:creationId xmlns:a16="http://schemas.microsoft.com/office/drawing/2014/main" id="{FB11D7AD-E3C9-4D3D-AA37-5441E834C5FC}"/>
+                <a16:creationId xmlns:a16="http://schemas.microsoft.com/office/drawing/2014/main" id="{8AFF6E6E-4BD9-42FD-9C79-C508E513A94B}"/>
               </a:ext>
             </a:extLst>
           </p:cNvPr>
@@ -30814,7 +30814,7 @@
           <p:cNvPr id="27" name="">
             <a:extLst xmlns:a="http://schemas.openxmlformats.org/drawingml/2006/main">
               <a:ext uri="{FF2B5EF4-FFF2-40B4-BE49-F238E27FC236}">
-                <a16:creationId xmlns:a16="http://schemas.microsoft.com/office/drawing/2014/main" id="{0E129B28-6628-4A2F-80EC-FA7951FAC5C7}"/>
+                <a16:creationId xmlns:a16="http://schemas.microsoft.com/office/drawing/2014/main" id="{8BC3270A-33C5-4916-9D0B-40F8F47DB8A6}"/>
               </a:ext>
             </a:extLst>
           </p:cNvPr>
@@ -30845,7 +30845,7 @@
           <p:cNvPr id="28" name="">
             <a:extLst xmlns:a="http://schemas.openxmlformats.org/drawingml/2006/main">
               <a:ext uri="{FF2B5EF4-FFF2-40B4-BE49-F238E27FC236}">
-                <a16:creationId xmlns:a16="http://schemas.microsoft.com/office/drawing/2014/main" id="{916D75B5-4970-4A22-A950-EA591BB2F6B1}"/>
+                <a16:creationId xmlns:a16="http://schemas.microsoft.com/office/drawing/2014/main" id="{3E009DEB-5A6B-4808-A4D6-FD4E7C049AE6}"/>
               </a:ext>
             </a:extLst>
           </p:cNvPr>
@@ -30876,7 +30876,7 @@
           <p:cNvPr id="29" name="">
             <a:extLst xmlns:a="http://schemas.openxmlformats.org/drawingml/2006/main">
               <a:ext uri="{FF2B5EF4-FFF2-40B4-BE49-F238E27FC236}">
-                <a16:creationId xmlns:a16="http://schemas.microsoft.com/office/drawing/2014/main" id="{4DD509AA-18B6-4941-A0F8-CFB47CE441E5}"/>
+                <a16:creationId xmlns:a16="http://schemas.microsoft.com/office/drawing/2014/main" id="{1274E1A5-D599-4FAB-BDF6-B8181A34A6C7}"/>
               </a:ext>
             </a:extLst>
           </p:cNvPr>
@@ -30928,7 +30928,7 @@
           <p:cNvPr id="30" name="">
             <a:extLst xmlns:a="http://schemas.openxmlformats.org/drawingml/2006/main">
               <a:ext uri="{FF2B5EF4-FFF2-40B4-BE49-F238E27FC236}">
-                <a16:creationId xmlns:a16="http://schemas.microsoft.com/office/drawing/2014/main" id="{AFD0AD8D-3398-47CD-9B3B-1A82ABAE9406}"/>
+                <a16:creationId xmlns:a16="http://schemas.microsoft.com/office/drawing/2014/main" id="{B946FD30-C9F3-4AE3-B397-503668FE0031}"/>
               </a:ext>
             </a:extLst>
           </p:cNvPr>
@@ -30980,7 +30980,7 @@
           <p:cNvPr id="31" name="">
             <a:extLst xmlns:a="http://schemas.openxmlformats.org/drawingml/2006/main">
               <a:ext uri="{FF2B5EF4-FFF2-40B4-BE49-F238E27FC236}">
-                <a16:creationId xmlns:a16="http://schemas.microsoft.com/office/drawing/2014/main" id="{03EE93B6-A698-4C25-B4D5-FB07B311892C}"/>
+                <a16:creationId xmlns:a16="http://schemas.microsoft.com/office/drawing/2014/main" id="{7FD367C3-BC9B-4EC8-BBB6-E82A986A0646}"/>
               </a:ext>
             </a:extLst>
           </p:cNvPr>
@@ -31032,7 +31032,7 @@
           <p:cNvPr id="32" name="">
             <a:extLst xmlns:a="http://schemas.openxmlformats.org/drawingml/2006/main">
               <a:ext uri="{FF2B5EF4-FFF2-40B4-BE49-F238E27FC236}">
-                <a16:creationId xmlns:a16="http://schemas.microsoft.com/office/drawing/2014/main" id="{116D54EE-22AA-4C8F-BDF6-D7FA27AAFEA9}"/>
+                <a16:creationId xmlns:a16="http://schemas.microsoft.com/office/drawing/2014/main" id="{9B7D472B-B17D-4C4E-B628-911D14B6D9BF}"/>
               </a:ext>
             </a:extLst>
           </p:cNvPr>
@@ -31075,7 +31075,7 @@
           <p:cNvPr id="33" name="">
             <a:extLst xmlns:a="http://schemas.openxmlformats.org/drawingml/2006/main">
               <a:ext uri="{FF2B5EF4-FFF2-40B4-BE49-F238E27FC236}">
-                <a16:creationId xmlns:a16="http://schemas.microsoft.com/office/drawing/2014/main" id="{DC654EA6-68CC-4A27-8992-9E499440AAAD}"/>
+                <a16:creationId xmlns:a16="http://schemas.microsoft.com/office/drawing/2014/main" id="{CACE442C-DD65-43A8-983E-D118BB00E70C}"/>
               </a:ext>
             </a:extLst>
           </p:cNvPr>
@@ -31106,7 +31106,7 @@
           <p:cNvPr id="34" name="">
             <a:extLst xmlns:a="http://schemas.openxmlformats.org/drawingml/2006/main">
               <a:ext uri="{FF2B5EF4-FFF2-40B4-BE49-F238E27FC236}">
-                <a16:creationId xmlns:a16="http://schemas.microsoft.com/office/drawing/2014/main" id="{B8453445-053E-4211-9C40-A4985FB9D07B}"/>
+                <a16:creationId xmlns:a16="http://schemas.microsoft.com/office/drawing/2014/main" id="{C554FE57-D060-4A41-BAE6-958DECBC3BDF}"/>
               </a:ext>
             </a:extLst>
           </p:cNvPr>
@@ -31137,7 +31137,7 @@
           <p:cNvPr id="35" name="">
             <a:extLst xmlns:a="http://schemas.openxmlformats.org/drawingml/2006/main">
               <a:ext uri="{FF2B5EF4-FFF2-40B4-BE49-F238E27FC236}">
-                <a16:creationId xmlns:a16="http://schemas.microsoft.com/office/drawing/2014/main" id="{650E843E-0C0D-4528-A59F-44A1B4A0B3D8}"/>
+                <a16:creationId xmlns:a16="http://schemas.microsoft.com/office/drawing/2014/main" id="{4A492759-0A63-4FB4-86DD-AEE0123A8D5C}"/>
               </a:ext>
             </a:extLst>
           </p:cNvPr>
@@ -31189,7 +31189,7 @@
           <p:cNvPr id="36" name="">
             <a:extLst xmlns:a="http://schemas.openxmlformats.org/drawingml/2006/main">
               <a:ext uri="{FF2B5EF4-FFF2-40B4-BE49-F238E27FC236}">
-                <a16:creationId xmlns:a16="http://schemas.microsoft.com/office/drawing/2014/main" id="{718D988D-82A6-4148-B4DE-E45FFECB726B}"/>
+                <a16:creationId xmlns:a16="http://schemas.microsoft.com/office/drawing/2014/main" id="{B39FBEAF-4D82-4655-98E5-1ACB1A55DDA7}"/>
               </a:ext>
             </a:extLst>
           </p:cNvPr>
@@ -31241,7 +31241,7 @@
           <p:cNvPr id="37" name="">
             <a:extLst xmlns:a="http://schemas.openxmlformats.org/drawingml/2006/main">
               <a:ext uri="{FF2B5EF4-FFF2-40B4-BE49-F238E27FC236}">
-                <a16:creationId xmlns:a16="http://schemas.microsoft.com/office/drawing/2014/main" id="{836C4532-657B-4E42-9DCB-7E0A927FCA10}"/>
+                <a16:creationId xmlns:a16="http://schemas.microsoft.com/office/drawing/2014/main" id="{C11C7E60-AF43-4843-9499-EF88EF4B5621}"/>
               </a:ext>
             </a:extLst>
           </p:cNvPr>
@@ -31297,10 +31297,10 @@
           <p:nvPr/>
         </p:nvPicPr>
         <p:blipFill>
-          <a:blip xmlns:r="http://schemas.openxmlformats.org/officeDocument/2006/relationships" xmlns:a="http://schemas.openxmlformats.org/drawingml/2006/main" r:embed="R78e47176bb44422b">
+          <a:blip xmlns:r="http://schemas.openxmlformats.org/officeDocument/2006/relationships" xmlns:a="http://schemas.openxmlformats.org/drawingml/2006/main" r:embed="Rb7c61ac6945d47ea">
             <a:extLst>
               <a:ext uri="{96DAC541-7B7A-43D3-8B79-37D633B846F1}">
-                <asvg:svgBlip xmlns:asvg="http://schemas.microsoft.com/office/drawing/2016/SVG/main" r:embed="R12227a075c6641df"/>
+                <asvg:svgBlip xmlns:asvg="http://schemas.microsoft.com/office/drawing/2016/SVG/main" r:embed="R561dd380bff2495a"/>
               </a:ext>
             </a:extLst>
           </a:blip>
@@ -31321,7 +31321,7 @@
           <p:cNvPr id="39" name="">
             <a:extLst xmlns:a="http://schemas.openxmlformats.org/drawingml/2006/main">
               <a:ext uri="{FF2B5EF4-FFF2-40B4-BE49-F238E27FC236}">
-                <a16:creationId xmlns:a16="http://schemas.microsoft.com/office/drawing/2014/main" id="{3EC1D7B6-BFEF-4E8E-B812-1EC3F603D7A7}"/>
+                <a16:creationId xmlns:a16="http://schemas.microsoft.com/office/drawing/2014/main" id="{D308429E-252F-4BF1-B0D1-8885305FEFE8}"/>
               </a:ext>
             </a:extLst>
           </p:cNvPr>
@@ -31373,7 +31373,7 @@
           <p:cNvPr id="40" name="">
             <a:extLst xmlns:a="http://schemas.openxmlformats.org/drawingml/2006/main">
               <a:ext uri="{FF2B5EF4-FFF2-40B4-BE49-F238E27FC236}">
-                <a16:creationId xmlns:a16="http://schemas.microsoft.com/office/drawing/2014/main" id="{C6284858-E2C8-4011-8DF4-570D64B4F619}"/>
+                <a16:creationId xmlns:a16="http://schemas.microsoft.com/office/drawing/2014/main" id="{8244FA60-78C2-4305-A2E9-19514F26F20C}"/>
               </a:ext>
             </a:extLst>
           </p:cNvPr>
@@ -31425,7 +31425,7 @@
           <p:cNvPr id="41" name="">
             <a:extLst xmlns:a="http://schemas.openxmlformats.org/drawingml/2006/main">
               <a:ext uri="{FF2B5EF4-FFF2-40B4-BE49-F238E27FC236}">
-                <a16:creationId xmlns:a16="http://schemas.microsoft.com/office/drawing/2014/main" id="{87D55942-C88D-4777-B07C-63FFF056C087}"/>
+                <a16:creationId xmlns:a16="http://schemas.microsoft.com/office/drawing/2014/main" id="{24CBBA1B-CACE-4073-92BC-B7686A4C6368}"/>
               </a:ext>
             </a:extLst>
           </p:cNvPr>
@@ -31468,7 +31468,7 @@
           <p:cNvPr id="42" name="">
             <a:extLst xmlns:a="http://schemas.openxmlformats.org/drawingml/2006/main">
               <a:ext uri="{FF2B5EF4-FFF2-40B4-BE49-F238E27FC236}">
-                <a16:creationId xmlns:a16="http://schemas.microsoft.com/office/drawing/2014/main" id="{4FC804EA-3E30-4680-9545-8323170C8E64}"/>
+                <a16:creationId xmlns:a16="http://schemas.microsoft.com/office/drawing/2014/main" id="{9B818460-6EB8-4582-B12F-7FE4418CD8CB}"/>
               </a:ext>
             </a:extLst>
           </p:cNvPr>
@@ -31499,7 +31499,7 @@
           <p:cNvPr id="43" name="">
             <a:extLst xmlns:a="http://schemas.openxmlformats.org/drawingml/2006/main">
               <a:ext uri="{FF2B5EF4-FFF2-40B4-BE49-F238E27FC236}">
-                <a16:creationId xmlns:a16="http://schemas.microsoft.com/office/drawing/2014/main" id="{27537BDE-D759-4482-A19A-A41C88D166A1}"/>
+                <a16:creationId xmlns:a16="http://schemas.microsoft.com/office/drawing/2014/main" id="{3C0A252E-9E4C-4165-B6CA-D220CD9E8735}"/>
               </a:ext>
             </a:extLst>
           </p:cNvPr>
@@ -31530,7 +31530,7 @@
           <p:cNvPr id="44" name="">
             <a:extLst xmlns:a="http://schemas.openxmlformats.org/drawingml/2006/main">
               <a:ext uri="{FF2B5EF4-FFF2-40B4-BE49-F238E27FC236}">
-                <a16:creationId xmlns:a16="http://schemas.microsoft.com/office/drawing/2014/main" id="{08B3080B-E8D9-47F0-AE27-1D1168330E4F}"/>
+                <a16:creationId xmlns:a16="http://schemas.microsoft.com/office/drawing/2014/main" id="{E065D806-B4B2-4886-B27D-BB652D4B6C9E}"/>
               </a:ext>
             </a:extLst>
           </p:cNvPr>
@@ -31573,7 +31573,7 @@
           <p:cNvPr id="45" name="">
             <a:extLst xmlns:a="http://schemas.openxmlformats.org/drawingml/2006/main">
               <a:ext uri="{FF2B5EF4-FFF2-40B4-BE49-F238E27FC236}">
-                <a16:creationId xmlns:a16="http://schemas.microsoft.com/office/drawing/2014/main" id="{56DF48E9-6D55-4527-8152-1E41BB7EB7A0}"/>
+                <a16:creationId xmlns:a16="http://schemas.microsoft.com/office/drawing/2014/main" id="{976778ED-1842-4EAE-8708-333AAF762C8B}"/>
               </a:ext>
             </a:extLst>
           </p:cNvPr>
@@ -31604,7 +31604,7 @@
           <p:cNvPr id="46" name="">
             <a:extLst xmlns:a="http://schemas.openxmlformats.org/drawingml/2006/main">
               <a:ext uri="{FF2B5EF4-FFF2-40B4-BE49-F238E27FC236}">
-                <a16:creationId xmlns:a16="http://schemas.microsoft.com/office/drawing/2014/main" id="{218E9D75-D63C-4185-BD12-6FB25BFAFDC5}"/>
+                <a16:creationId xmlns:a16="http://schemas.microsoft.com/office/drawing/2014/main" id="{11A95817-8048-4FC0-812F-CF1C1FB2431F}"/>
               </a:ext>
             </a:extLst>
           </p:cNvPr>
@@ -31635,7 +31635,7 @@
           <p:cNvPr id="47" name="">
             <a:extLst xmlns:a="http://schemas.openxmlformats.org/drawingml/2006/main">
               <a:ext uri="{FF2B5EF4-FFF2-40B4-BE49-F238E27FC236}">
-                <a16:creationId xmlns:a16="http://schemas.microsoft.com/office/drawing/2014/main" id="{1FC301D2-4773-4F76-AE8B-6EC725807546}"/>
+                <a16:creationId xmlns:a16="http://schemas.microsoft.com/office/drawing/2014/main" id="{75BFFE82-19CB-42B8-A306-E2887308C181}"/>
               </a:ext>
             </a:extLst>
           </p:cNvPr>
@@ -31687,7 +31687,7 @@
           <p:cNvPr id="48" name="">
             <a:extLst xmlns:a="http://schemas.openxmlformats.org/drawingml/2006/main">
               <a:ext uri="{FF2B5EF4-FFF2-40B4-BE49-F238E27FC236}">
-                <a16:creationId xmlns:a16="http://schemas.microsoft.com/office/drawing/2014/main" id="{30FCF2A0-5BFF-4BCF-98F4-CCB5D65C1CFA}"/>
+                <a16:creationId xmlns:a16="http://schemas.microsoft.com/office/drawing/2014/main" id="{4A0EBCCA-173F-4F23-AFFC-8A5C9132F887}"/>
               </a:ext>
             </a:extLst>
           </p:cNvPr>
@@ -31720,7 +31720,7 @@
           <p:cNvPr id="49" name="">
             <a:extLst xmlns:a="http://schemas.openxmlformats.org/drawingml/2006/main">
               <a:ext uri="{FF2B5EF4-FFF2-40B4-BE49-F238E27FC236}">
-                <a16:creationId xmlns:a16="http://schemas.microsoft.com/office/drawing/2014/main" id="{23A7B8ED-BD31-4AA9-9734-B96FB7773BF9}"/>
+                <a16:creationId xmlns:a16="http://schemas.microsoft.com/office/drawing/2014/main" id="{52AEC935-7A6C-45B1-8B06-EA8A3A512755}"/>
               </a:ext>
             </a:extLst>
           </p:cNvPr>
@@ -31772,7 +31772,7 @@
           <p:cNvPr id="50" name="">
             <a:extLst xmlns:a="http://schemas.openxmlformats.org/drawingml/2006/main">
               <a:ext uri="{FF2B5EF4-FFF2-40B4-BE49-F238E27FC236}">
-                <a16:creationId xmlns:a16="http://schemas.microsoft.com/office/drawing/2014/main" id="{80170F7F-AB5F-475C-96E2-860DE9E9F81D}"/>
+                <a16:creationId xmlns:a16="http://schemas.microsoft.com/office/drawing/2014/main" id="{A41BC7E9-4031-4125-8A7D-ECE803044C5D}"/>
               </a:ext>
             </a:extLst>
           </p:cNvPr>
@@ -31824,7 +31824,7 @@
           <p:cNvPr id="51" name="">
             <a:extLst xmlns:a="http://schemas.openxmlformats.org/drawingml/2006/main">
               <a:ext uri="{FF2B5EF4-FFF2-40B4-BE49-F238E27FC236}">
-                <a16:creationId xmlns:a16="http://schemas.microsoft.com/office/drawing/2014/main" id="{DFC41B13-B63A-4D50-8A2C-7D0C45021720}"/>
+                <a16:creationId xmlns:a16="http://schemas.microsoft.com/office/drawing/2014/main" id="{E78710C2-4DDA-450A-99F5-E4CEC0FB9CB6}"/>
               </a:ext>
             </a:extLst>
           </p:cNvPr>
@@ -31876,7 +31876,7 @@
           <p:cNvPr id="52" name="">
             <a:extLst xmlns:a="http://schemas.openxmlformats.org/drawingml/2006/main">
               <a:ext uri="{FF2B5EF4-FFF2-40B4-BE49-F238E27FC236}">
-                <a16:creationId xmlns:a16="http://schemas.microsoft.com/office/drawing/2014/main" id="{53FC8F5E-8521-466C-B0B7-A2B2A80E16C5}"/>
+                <a16:creationId xmlns:a16="http://schemas.microsoft.com/office/drawing/2014/main" id="{370A1F84-12BF-4B72-BF3C-A414F3B1F466}"/>
               </a:ext>
             </a:extLst>
           </p:cNvPr>
@@ -31919,7 +31919,7 @@
           <p:cNvPr id="53" name="">
             <a:extLst xmlns:a="http://schemas.openxmlformats.org/drawingml/2006/main">
               <a:ext uri="{FF2B5EF4-FFF2-40B4-BE49-F238E27FC236}">
-                <a16:creationId xmlns:a16="http://schemas.microsoft.com/office/drawing/2014/main" id="{47F0EEFE-6439-45C9-A212-672AB1894AF1}"/>
+                <a16:creationId xmlns:a16="http://schemas.microsoft.com/office/drawing/2014/main" id="{14DF2ACA-2882-497C-B400-4E789B06D564}"/>
               </a:ext>
             </a:extLst>
           </p:cNvPr>
@@ -31950,7 +31950,7 @@
           <p:cNvPr id="54" name="">
             <a:extLst xmlns:a="http://schemas.openxmlformats.org/drawingml/2006/main">
               <a:ext uri="{FF2B5EF4-FFF2-40B4-BE49-F238E27FC236}">
-                <a16:creationId xmlns:a16="http://schemas.microsoft.com/office/drawing/2014/main" id="{ADD31308-61FA-4CF5-873C-678D3C36AF8B}"/>
+                <a16:creationId xmlns:a16="http://schemas.microsoft.com/office/drawing/2014/main" id="{553D1549-1CC9-49A9-9F7B-E860923671C1}"/>
               </a:ext>
             </a:extLst>
           </p:cNvPr>
@@ -31981,7 +31981,7 @@
           <p:cNvPr id="55" name="">
             <a:extLst xmlns:a="http://schemas.openxmlformats.org/drawingml/2006/main">
               <a:ext uri="{FF2B5EF4-FFF2-40B4-BE49-F238E27FC236}">
-                <a16:creationId xmlns:a16="http://schemas.microsoft.com/office/drawing/2014/main" id="{95F04371-5EC9-42FC-AAD4-3B45A6234849}"/>
+                <a16:creationId xmlns:a16="http://schemas.microsoft.com/office/drawing/2014/main" id="{40E1A564-4030-4061-8A7C-413E4F9768CB}"/>
               </a:ext>
             </a:extLst>
           </p:cNvPr>
@@ -32033,7 +32033,7 @@
           <p:cNvPr id="56" name="">
             <a:extLst xmlns:a="http://schemas.openxmlformats.org/drawingml/2006/main">
               <a:ext uri="{FF2B5EF4-FFF2-40B4-BE49-F238E27FC236}">
-                <a16:creationId xmlns:a16="http://schemas.microsoft.com/office/drawing/2014/main" id="{83D90A77-EFD7-4DFE-A286-67E747472C40}"/>
+                <a16:creationId xmlns:a16="http://schemas.microsoft.com/office/drawing/2014/main" id="{C5B15C3E-7EC0-45EF-88AD-EEA9BAB4F980}"/>
               </a:ext>
             </a:extLst>
           </p:cNvPr>
@@ -32066,7 +32066,7 @@
           <p:cNvPr id="57" name="">
             <a:extLst xmlns:a="http://schemas.openxmlformats.org/drawingml/2006/main">
               <a:ext uri="{FF2B5EF4-FFF2-40B4-BE49-F238E27FC236}">
-                <a16:creationId xmlns:a16="http://schemas.microsoft.com/office/drawing/2014/main" id="{9D98C203-C9EF-4393-8F9E-EE28FA84CC9E}"/>
+                <a16:creationId xmlns:a16="http://schemas.microsoft.com/office/drawing/2014/main" id="{F9DCD618-86D6-4486-9A2F-5E7D2FE9034E}"/>
               </a:ext>
             </a:extLst>
           </p:cNvPr>
@@ -32118,7 +32118,7 @@
           <p:cNvPr id="58" name="">
             <a:extLst xmlns:a="http://schemas.openxmlformats.org/drawingml/2006/main">
               <a:ext uri="{FF2B5EF4-FFF2-40B4-BE49-F238E27FC236}">
-                <a16:creationId xmlns:a16="http://schemas.microsoft.com/office/drawing/2014/main" id="{BE6B337D-A00B-459C-808D-054C6C02345F}"/>
+                <a16:creationId xmlns:a16="http://schemas.microsoft.com/office/drawing/2014/main" id="{77273A5C-0BB4-42CB-A42B-9BD551C8DB03}"/>
               </a:ext>
             </a:extLst>
           </p:cNvPr>
@@ -32170,7 +32170,7 @@
           <p:cNvPr id="59" name="">
             <a:extLst xmlns:a="http://schemas.openxmlformats.org/drawingml/2006/main">
               <a:ext uri="{FF2B5EF4-FFF2-40B4-BE49-F238E27FC236}">
-                <a16:creationId xmlns:a16="http://schemas.microsoft.com/office/drawing/2014/main" id="{F7CEDFC2-4B8C-445F-9E2A-F186DBFBC851}"/>
+                <a16:creationId xmlns:a16="http://schemas.microsoft.com/office/drawing/2014/main" id="{D1BD7F4D-3B87-4A05-86C1-1000F286B0EF}"/>
               </a:ext>
             </a:extLst>
           </p:cNvPr>
@@ -32222,7 +32222,7 @@
           <p:cNvPr id="60" name="">
             <a:extLst xmlns:a="http://schemas.openxmlformats.org/drawingml/2006/main">
               <a:ext uri="{FF2B5EF4-FFF2-40B4-BE49-F238E27FC236}">
-                <a16:creationId xmlns:a16="http://schemas.microsoft.com/office/drawing/2014/main" id="{777BADD8-AE7A-4CF1-B209-B688F86A006B}"/>
+                <a16:creationId xmlns:a16="http://schemas.microsoft.com/office/drawing/2014/main" id="{D21FD493-1E35-4AF3-A4EA-4983C456AA98}"/>
               </a:ext>
             </a:extLst>
           </p:cNvPr>
@@ -32265,7 +32265,7 @@
           <p:cNvPr id="61" name="">
             <a:extLst xmlns:a="http://schemas.openxmlformats.org/drawingml/2006/main">
               <a:ext uri="{FF2B5EF4-FFF2-40B4-BE49-F238E27FC236}">
-                <a16:creationId xmlns:a16="http://schemas.microsoft.com/office/drawing/2014/main" id="{E643C19A-D534-4387-B144-059454CB9477}"/>
+                <a16:creationId xmlns:a16="http://schemas.microsoft.com/office/drawing/2014/main" id="{F718E740-71F4-4C77-BB33-3A948EE5AC49}"/>
               </a:ext>
             </a:extLst>
           </p:cNvPr>
@@ -32296,7 +32296,7 @@
           <p:cNvPr id="62" name="">
             <a:extLst xmlns:a="http://schemas.openxmlformats.org/drawingml/2006/main">
               <a:ext uri="{FF2B5EF4-FFF2-40B4-BE49-F238E27FC236}">
-                <a16:creationId xmlns:a16="http://schemas.microsoft.com/office/drawing/2014/main" id="{13FD36E0-8B1B-45F4-B43C-05BC3D91012F}"/>
+                <a16:creationId xmlns:a16="http://schemas.microsoft.com/office/drawing/2014/main" id="{EDC07C1E-4843-42FF-A5F3-2D2A97B31DD2}"/>
               </a:ext>
             </a:extLst>
           </p:cNvPr>
@@ -32327,7 +32327,7 @@
           <p:cNvPr id="63" name="">
             <a:extLst xmlns:a="http://schemas.openxmlformats.org/drawingml/2006/main">
               <a:ext uri="{FF2B5EF4-FFF2-40B4-BE49-F238E27FC236}">
-                <a16:creationId xmlns:a16="http://schemas.microsoft.com/office/drawing/2014/main" id="{825482C9-0510-460E-BC4A-7C1405E43BBD}"/>
+                <a16:creationId xmlns:a16="http://schemas.microsoft.com/office/drawing/2014/main" id="{C1EC2960-FB35-4FAA-A790-7D39FC08ECE9}"/>
               </a:ext>
             </a:extLst>
           </p:cNvPr>
@@ -32379,7 +32379,7 @@
           <p:cNvPr id="64" name="">
             <a:extLst xmlns:a="http://schemas.openxmlformats.org/drawingml/2006/main">
               <a:ext uri="{FF2B5EF4-FFF2-40B4-BE49-F238E27FC236}">
-                <a16:creationId xmlns:a16="http://schemas.microsoft.com/office/drawing/2014/main" id="{8E99CB99-746A-44C1-B069-B0FC3C0714E2}"/>
+                <a16:creationId xmlns:a16="http://schemas.microsoft.com/office/drawing/2014/main" id="{3BFB8CB1-BE62-460E-BFB0-DE0625A20A98}"/>
               </a:ext>
             </a:extLst>
           </p:cNvPr>
@@ -32412,7 +32412,7 @@
           <p:cNvPr id="65" name="">
             <a:extLst xmlns:a="http://schemas.openxmlformats.org/drawingml/2006/main">
               <a:ext uri="{FF2B5EF4-FFF2-40B4-BE49-F238E27FC236}">
-                <a16:creationId xmlns:a16="http://schemas.microsoft.com/office/drawing/2014/main" id="{5A1FBC50-5CD4-4071-A790-2550613BB0C8}"/>
+                <a16:creationId xmlns:a16="http://schemas.microsoft.com/office/drawing/2014/main" id="{F493D50C-BD3E-4611-9A61-3E1E7659DC78}"/>
               </a:ext>
             </a:extLst>
           </p:cNvPr>
@@ -32464,7 +32464,7 @@
           <p:cNvPr id="66" name="">
             <a:extLst xmlns:a="http://schemas.openxmlformats.org/drawingml/2006/main">
               <a:ext uri="{FF2B5EF4-FFF2-40B4-BE49-F238E27FC236}">
-                <a16:creationId xmlns:a16="http://schemas.microsoft.com/office/drawing/2014/main" id="{4E3B859F-3A9B-4BBA-AA11-FC79C8F246E2}"/>
+                <a16:creationId xmlns:a16="http://schemas.microsoft.com/office/drawing/2014/main" id="{A623EC6D-43C5-499C-BDFB-FC293104F7EA}"/>
               </a:ext>
             </a:extLst>
           </p:cNvPr>
@@ -32516,7 +32516,7 @@
           <p:cNvPr id="67" name="">
             <a:extLst xmlns:a="http://schemas.openxmlformats.org/drawingml/2006/main">
               <a:ext uri="{FF2B5EF4-FFF2-40B4-BE49-F238E27FC236}">
-                <a16:creationId xmlns:a16="http://schemas.microsoft.com/office/drawing/2014/main" id="{8DF6C1B2-F280-493B-A0B1-4B638BDFB751}"/>
+                <a16:creationId xmlns:a16="http://schemas.microsoft.com/office/drawing/2014/main" id="{8467BE23-9F0B-4363-8CB4-A6F767D3374F}"/>
               </a:ext>
             </a:extLst>
           </p:cNvPr>
@@ -32568,7 +32568,7 @@
           <p:cNvPr id="68" name="">
             <a:extLst xmlns:a="http://schemas.openxmlformats.org/drawingml/2006/main">
               <a:ext uri="{FF2B5EF4-FFF2-40B4-BE49-F238E27FC236}">
-                <a16:creationId xmlns:a16="http://schemas.microsoft.com/office/drawing/2014/main" id="{14C6E23F-A1F9-4A22-834A-CF82AAB4C149}"/>
+                <a16:creationId xmlns:a16="http://schemas.microsoft.com/office/drawing/2014/main" id="{8169599D-1914-4EDF-92B7-93595CD9E287}"/>
               </a:ext>
             </a:extLst>
           </p:cNvPr>
@@ -32611,7 +32611,7 @@
           <p:cNvPr id="69" name="">
             <a:extLst xmlns:a="http://schemas.openxmlformats.org/drawingml/2006/main">
               <a:ext uri="{FF2B5EF4-FFF2-40B4-BE49-F238E27FC236}">
-                <a16:creationId xmlns:a16="http://schemas.microsoft.com/office/drawing/2014/main" id="{C5732ABD-DAF9-45BD-B4DB-D262D79DC3CD}"/>
+                <a16:creationId xmlns:a16="http://schemas.microsoft.com/office/drawing/2014/main" id="{35CA09E3-9105-4B93-B363-D702AECFD311}"/>
               </a:ext>
             </a:extLst>
           </p:cNvPr>
@@ -32642,7 +32642,7 @@
           <p:cNvPr id="70" name="">
             <a:extLst xmlns:a="http://schemas.openxmlformats.org/drawingml/2006/main">
               <a:ext uri="{FF2B5EF4-FFF2-40B4-BE49-F238E27FC236}">
-                <a16:creationId xmlns:a16="http://schemas.microsoft.com/office/drawing/2014/main" id="{7CB7D207-9939-4BEC-9CE4-D4D004BC7D1C}"/>
+                <a16:creationId xmlns:a16="http://schemas.microsoft.com/office/drawing/2014/main" id="{B453F23D-E206-4CC5-BDF3-2B230463C891}"/>
               </a:ext>
             </a:extLst>
           </p:cNvPr>
@@ -32673,7 +32673,7 @@
           <p:cNvPr id="71" name="">
             <a:extLst xmlns:a="http://schemas.openxmlformats.org/drawingml/2006/main">
               <a:ext uri="{FF2B5EF4-FFF2-40B4-BE49-F238E27FC236}">
-                <a16:creationId xmlns:a16="http://schemas.microsoft.com/office/drawing/2014/main" id="{401CE761-47DC-4A20-A99C-4429BD9B487A}"/>
+                <a16:creationId xmlns:a16="http://schemas.microsoft.com/office/drawing/2014/main" id="{45489A6A-A2D7-4AF9-AE6B-FF5D4015FE22}"/>
               </a:ext>
             </a:extLst>
           </p:cNvPr>
@@ -32725,7 +32725,7 @@
           <p:cNvPr id="72" name="">
             <a:extLst xmlns:a="http://schemas.openxmlformats.org/drawingml/2006/main">
               <a:ext uri="{FF2B5EF4-FFF2-40B4-BE49-F238E27FC236}">
-                <a16:creationId xmlns:a16="http://schemas.microsoft.com/office/drawing/2014/main" id="{19FA5F00-67DC-4437-AC71-96AD313142E9}"/>
+                <a16:creationId xmlns:a16="http://schemas.microsoft.com/office/drawing/2014/main" id="{9B8C258C-1EBE-4359-A81B-428C8739DA44}"/>
               </a:ext>
             </a:extLst>
           </p:cNvPr>
@@ -32758,7 +32758,7 @@
           <p:cNvPr id="73" name="">
             <a:extLst xmlns:a="http://schemas.openxmlformats.org/drawingml/2006/main">
               <a:ext uri="{FF2B5EF4-FFF2-40B4-BE49-F238E27FC236}">
-                <a16:creationId xmlns:a16="http://schemas.microsoft.com/office/drawing/2014/main" id="{9CDBBCFF-CDA7-4FFA-8574-7D78760A9CDC}"/>
+                <a16:creationId xmlns:a16="http://schemas.microsoft.com/office/drawing/2014/main" id="{AF37993D-EC27-4DE1-B413-4B2FD746A4ED}"/>
               </a:ext>
             </a:extLst>
           </p:cNvPr>
@@ -32810,7 +32810,7 @@
           <p:cNvPr id="74" name="">
             <a:extLst xmlns:a="http://schemas.openxmlformats.org/drawingml/2006/main">
               <a:ext uri="{FF2B5EF4-FFF2-40B4-BE49-F238E27FC236}">
-                <a16:creationId xmlns:a16="http://schemas.microsoft.com/office/drawing/2014/main" id="{F08C1169-5CC9-4662-B7EF-A1C1810F6320}"/>
+                <a16:creationId xmlns:a16="http://schemas.microsoft.com/office/drawing/2014/main" id="{978440D3-105F-40F8-A979-07C034356C53}"/>
               </a:ext>
             </a:extLst>
           </p:cNvPr>
@@ -32862,7 +32862,7 @@
           <p:cNvPr id="75" name="">
             <a:extLst xmlns:a="http://schemas.openxmlformats.org/drawingml/2006/main">
               <a:ext uri="{FF2B5EF4-FFF2-40B4-BE49-F238E27FC236}">
-                <a16:creationId xmlns:a16="http://schemas.microsoft.com/office/drawing/2014/main" id="{08A2A79D-C2A2-4221-8DDB-A8DF13EC77E2}"/>
+                <a16:creationId xmlns:a16="http://schemas.microsoft.com/office/drawing/2014/main" id="{94C5D701-C869-4AE1-B549-9F505C8CCD43}"/>
               </a:ext>
             </a:extLst>
           </p:cNvPr>
@@ -32912,7 +32912,7 @@
     </p:spTree>
     <p:extLst>
       <p:ext uri="{BB962C8B-B14F-4D97-AF65-F5344CB8AC3E}">
-        <p14:creationId xmlns:p14="http://schemas.microsoft.com/office/powerpoint/2010/main" val="861318938"/>
+        <p14:creationId xmlns:p14="http://schemas.microsoft.com/office/powerpoint/2010/main" val="1027137725"/>
       </p:ext>
     </p:extLst>
   </p:cSld>
@@ -32943,7 +32943,7 @@
           <p:cNvPr id="30" name="">
             <a:extLst xmlns:a="http://schemas.openxmlformats.org/drawingml/2006/main">
               <a:ext uri="{FF2B5EF4-FFF2-40B4-BE49-F238E27FC236}">
-                <a16:creationId xmlns:a16="http://schemas.microsoft.com/office/drawing/2014/main" id="{DCF25C65-850B-4703-BE8F-FEAD54E483B7}"/>
+                <a16:creationId xmlns:a16="http://schemas.microsoft.com/office/drawing/2014/main" id="{9A2DAFCC-05F2-4681-A37C-3EFDAD1AA471}"/>
               </a:ext>
             </a:extLst>
           </p:cNvPr>
@@ -32976,7 +32976,7 @@
           <p:cNvPr id="2" name="">
             <a:extLst xmlns:a="http://schemas.openxmlformats.org/drawingml/2006/main">
               <a:ext uri="{FF2B5EF4-FFF2-40B4-BE49-F238E27FC236}">
-                <a16:creationId xmlns:a16="http://schemas.microsoft.com/office/drawing/2014/main" id="{86A6766D-0AC0-4B33-A2E7-83D966A4F473}"/>
+                <a16:creationId xmlns:a16="http://schemas.microsoft.com/office/drawing/2014/main" id="{EC51E3A4-CF50-487A-95F4-6E95EECBDB99}"/>
               </a:ext>
             </a:extLst>
           </p:cNvPr>
@@ -33007,7 +33007,7 @@
           <p:cNvPr id="3" name="">
             <a:extLst xmlns:a="http://schemas.openxmlformats.org/drawingml/2006/main">
               <a:ext uri="{FF2B5EF4-FFF2-40B4-BE49-F238E27FC236}">
-                <a16:creationId xmlns:a16="http://schemas.microsoft.com/office/drawing/2014/main" id="{D0FC95A3-4F84-4D4C-A4A8-2F5CB9E99A16}"/>
+                <a16:creationId xmlns:a16="http://schemas.microsoft.com/office/drawing/2014/main" id="{43A1887A-E063-44D5-886B-BFE36F7D1330}"/>
               </a:ext>
             </a:extLst>
           </p:cNvPr>
@@ -33059,7 +33059,7 @@
           <p:cNvPr id="4" name="">
             <a:extLst xmlns:a="http://schemas.openxmlformats.org/drawingml/2006/main">
               <a:ext uri="{FF2B5EF4-FFF2-40B4-BE49-F238E27FC236}">
-                <a16:creationId xmlns:a16="http://schemas.microsoft.com/office/drawing/2014/main" id="{C8402D5A-19C5-4D88-A0CA-36EFD6A2A2A2}"/>
+                <a16:creationId xmlns:a16="http://schemas.microsoft.com/office/drawing/2014/main" id="{E2548F65-FFF0-4F38-9260-D2681AC347A1}"/>
               </a:ext>
             </a:extLst>
           </p:cNvPr>
@@ -33111,7 +33111,7 @@
           <p:cNvPr id="5" name="">
             <a:extLst xmlns:a="http://schemas.openxmlformats.org/drawingml/2006/main">
               <a:ext uri="{FF2B5EF4-FFF2-40B4-BE49-F238E27FC236}">
-                <a16:creationId xmlns:a16="http://schemas.microsoft.com/office/drawing/2014/main" id="{9BD295E4-9B06-4B3F-BECE-8A4A0DCAE17B}"/>
+                <a16:creationId xmlns:a16="http://schemas.microsoft.com/office/drawing/2014/main" id="{C308630A-420C-49C9-BDE5-3412FB72E0D1}"/>
               </a:ext>
             </a:extLst>
           </p:cNvPr>
@@ -33146,7 +33146,7 @@
           <p:nvPr/>
         </p:nvPicPr>
         <p:blipFill>
-          <a:blip xmlns:r="http://schemas.openxmlformats.org/officeDocument/2006/relationships" xmlns:a="http://schemas.openxmlformats.org/drawingml/2006/main" r:embed="Refe368c43a48456e"/>
+          <a:blip xmlns:r="http://schemas.openxmlformats.org/officeDocument/2006/relationships" xmlns:a="http://schemas.openxmlformats.org/drawingml/2006/main" r:embed="R3b49b89ecf6b45df"/>
           <a:stretch xmlns:a="http://schemas.openxmlformats.org/drawingml/2006/main"/>
         </p:blipFill>
         <p:spPr>
@@ -33164,7 +33164,7 @@
           <p:cNvPr id="7" name="">
             <a:extLst xmlns:a="http://schemas.openxmlformats.org/drawingml/2006/main">
               <a:ext uri="{FF2B5EF4-FFF2-40B4-BE49-F238E27FC236}">
-                <a16:creationId xmlns:a16="http://schemas.microsoft.com/office/drawing/2014/main" id="{754027AB-39A7-4929-ADDD-1B9CD24D10E2}"/>
+                <a16:creationId xmlns:a16="http://schemas.microsoft.com/office/drawing/2014/main" id="{C0068067-165A-4AD1-9B65-DCCA5D24ABF0}"/>
               </a:ext>
             </a:extLst>
           </p:cNvPr>
@@ -33216,7 +33216,7 @@
           <p:cNvPr id="8" name="">
             <a:extLst xmlns:a="http://schemas.openxmlformats.org/drawingml/2006/main">
               <a:ext uri="{FF2B5EF4-FFF2-40B4-BE49-F238E27FC236}">
-                <a16:creationId xmlns:a16="http://schemas.microsoft.com/office/drawing/2014/main" id="{03A6F063-FC3C-4BF0-8208-3908AED39803}"/>
+                <a16:creationId xmlns:a16="http://schemas.microsoft.com/office/drawing/2014/main" id="{67A41ECB-132C-4CDE-A1D4-D9FA2B15C2CB}"/>
               </a:ext>
             </a:extLst>
           </p:cNvPr>
@@ -33268,7 +33268,7 @@
           <p:cNvPr id="9" name="">
             <a:extLst xmlns:a="http://schemas.openxmlformats.org/drawingml/2006/main">
               <a:ext uri="{FF2B5EF4-FFF2-40B4-BE49-F238E27FC236}">
-                <a16:creationId xmlns:a16="http://schemas.microsoft.com/office/drawing/2014/main" id="{BD4DA6B5-71D2-40CE-BE75-EF611C5BDE5F}"/>
+                <a16:creationId xmlns:a16="http://schemas.microsoft.com/office/drawing/2014/main" id="{6D59FD32-3562-4460-AD1E-65DBAC2661FD}"/>
               </a:ext>
             </a:extLst>
           </p:cNvPr>
@@ -33320,7 +33320,7 @@
           <p:cNvPr id="10" name="">
             <a:extLst xmlns:a="http://schemas.openxmlformats.org/drawingml/2006/main">
               <a:ext uri="{FF2B5EF4-FFF2-40B4-BE49-F238E27FC236}">
-                <a16:creationId xmlns:a16="http://schemas.microsoft.com/office/drawing/2014/main" id="{BD105998-E799-4ECC-B690-F9817DD582D3}"/>
+                <a16:creationId xmlns:a16="http://schemas.microsoft.com/office/drawing/2014/main" id="{15701664-4626-4403-87C7-DA3443E3360D}"/>
               </a:ext>
             </a:extLst>
           </p:cNvPr>
@@ -33372,7 +33372,7 @@
           <p:cNvPr id="11" name="">
             <a:extLst xmlns:a="http://schemas.openxmlformats.org/drawingml/2006/main">
               <a:ext uri="{FF2B5EF4-FFF2-40B4-BE49-F238E27FC236}">
-                <a16:creationId xmlns:a16="http://schemas.microsoft.com/office/drawing/2014/main" id="{D220D852-9C5E-410A-892A-386565F2C35F}"/>
+                <a16:creationId xmlns:a16="http://schemas.microsoft.com/office/drawing/2014/main" id="{80D3116E-B344-49AB-A753-3572C5E2D9BE}"/>
               </a:ext>
             </a:extLst>
           </p:cNvPr>
@@ -33419,10 +33419,10 @@
           <p:nvPr/>
         </p:nvPicPr>
         <p:blipFill>
-          <a:blip xmlns:r="http://schemas.openxmlformats.org/officeDocument/2006/relationships" xmlns:a="http://schemas.openxmlformats.org/drawingml/2006/main" r:embed="Rad0915b0d0ac4e34">
+          <a:blip xmlns:r="http://schemas.openxmlformats.org/officeDocument/2006/relationships" xmlns:a="http://schemas.openxmlformats.org/drawingml/2006/main" r:embed="R6be2af94dd0e4811">
             <a:extLst>
               <a:ext uri="{96DAC541-7B7A-43D3-8B79-37D633B846F1}">
-                <asvg:svgBlip xmlns:asvg="http://schemas.microsoft.com/office/drawing/2016/SVG/main" r:embed="R76c9a67a770747ec"/>
+                <asvg:svgBlip xmlns:asvg="http://schemas.microsoft.com/office/drawing/2016/SVG/main" r:embed="R5f309deb57734c85"/>
               </a:ext>
             </a:extLst>
           </a:blip>
@@ -33443,7 +33443,7 @@
           <p:cNvPr id="13" name="">
             <a:extLst xmlns:a="http://schemas.openxmlformats.org/drawingml/2006/main">
               <a:ext uri="{FF2B5EF4-FFF2-40B4-BE49-F238E27FC236}">
-                <a16:creationId xmlns:a16="http://schemas.microsoft.com/office/drawing/2014/main" id="{07D3D823-DFBB-4675-AD94-663772665A13}"/>
+                <a16:creationId xmlns:a16="http://schemas.microsoft.com/office/drawing/2014/main" id="{53ED146A-37F6-4890-8AFF-F6E429D6C6E7}"/>
               </a:ext>
             </a:extLst>
           </p:cNvPr>
@@ -33476,7 +33476,7 @@
           <p:cNvPr id="14" name="">
             <a:extLst xmlns:a="http://schemas.openxmlformats.org/drawingml/2006/main">
               <a:ext uri="{FF2B5EF4-FFF2-40B4-BE49-F238E27FC236}">
-                <a16:creationId xmlns:a16="http://schemas.microsoft.com/office/drawing/2014/main" id="{68F63042-0384-4682-80C8-BF723CD3EB2D}"/>
+                <a16:creationId xmlns:a16="http://schemas.microsoft.com/office/drawing/2014/main" id="{2D4AF135-B05C-4D99-B53D-F4C9ABF42D81}"/>
               </a:ext>
             </a:extLst>
           </p:cNvPr>
@@ -33528,7 +33528,7 @@
           <p:cNvPr id="15" name="">
             <a:extLst xmlns:a="http://schemas.openxmlformats.org/drawingml/2006/main">
               <a:ext uri="{FF2B5EF4-FFF2-40B4-BE49-F238E27FC236}">
-                <a16:creationId xmlns:a16="http://schemas.microsoft.com/office/drawing/2014/main" id="{86C0BA86-B5AF-4225-979D-FB1D7BCB3F45}"/>
+                <a16:creationId xmlns:a16="http://schemas.microsoft.com/office/drawing/2014/main" id="{1540FB7E-C29E-44F1-BCF7-18C54619E472}"/>
               </a:ext>
             </a:extLst>
           </p:cNvPr>
@@ -33561,7 +33561,7 @@
           <p:cNvPr id="16" name="">
             <a:extLst xmlns:a="http://schemas.openxmlformats.org/drawingml/2006/main">
               <a:ext uri="{FF2B5EF4-FFF2-40B4-BE49-F238E27FC236}">
-                <a16:creationId xmlns:a16="http://schemas.microsoft.com/office/drawing/2014/main" id="{8ECB2C11-8061-4E02-A9EF-2996592F4EC1}"/>
+                <a16:creationId xmlns:a16="http://schemas.microsoft.com/office/drawing/2014/main" id="{97B2E1B5-E5F0-4D1B-9F5C-995E80248DE2}"/>
               </a:ext>
             </a:extLst>
           </p:cNvPr>
@@ -33613,7 +33613,7 @@
           <p:cNvPr id="17" name="">
             <a:extLst xmlns:a="http://schemas.openxmlformats.org/drawingml/2006/main">
               <a:ext uri="{FF2B5EF4-FFF2-40B4-BE49-F238E27FC236}">
-                <a16:creationId xmlns:a16="http://schemas.microsoft.com/office/drawing/2014/main" id="{F250FAB6-D685-445D-B33E-6940F9A2FED6}"/>
+                <a16:creationId xmlns:a16="http://schemas.microsoft.com/office/drawing/2014/main" id="{4EA36DEE-7554-4F65-AB7D-6AC21318FF4E}"/>
               </a:ext>
             </a:extLst>
           </p:cNvPr>
@@ -33646,7 +33646,7 @@
           <p:cNvPr id="18" name="">
             <a:extLst xmlns:a="http://schemas.openxmlformats.org/drawingml/2006/main">
               <a:ext uri="{FF2B5EF4-FFF2-40B4-BE49-F238E27FC236}">
-                <a16:creationId xmlns:a16="http://schemas.microsoft.com/office/drawing/2014/main" id="{0309591C-11A1-4ADB-AEAB-5F9D597A37A3}"/>
+                <a16:creationId xmlns:a16="http://schemas.microsoft.com/office/drawing/2014/main" id="{1988465C-A44C-4394-AA13-C4D6FC0EF4BC}"/>
               </a:ext>
             </a:extLst>
           </p:cNvPr>
@@ -33698,7 +33698,7 @@
           <p:cNvPr id="19" name="">
             <a:extLst xmlns:a="http://schemas.openxmlformats.org/drawingml/2006/main">
               <a:ext uri="{FF2B5EF4-FFF2-40B4-BE49-F238E27FC236}">
-                <a16:creationId xmlns:a16="http://schemas.microsoft.com/office/drawing/2014/main" id="{EFCD99FC-1209-497E-A330-9656806D0AE4}"/>
+                <a16:creationId xmlns:a16="http://schemas.microsoft.com/office/drawing/2014/main" id="{C823F407-623B-4BA2-A2AC-2AF813873FE8}"/>
               </a:ext>
             </a:extLst>
           </p:cNvPr>
@@ -33731,7 +33731,7 @@
           <p:cNvPr id="20" name="">
             <a:extLst xmlns:a="http://schemas.openxmlformats.org/drawingml/2006/main">
               <a:ext uri="{FF2B5EF4-FFF2-40B4-BE49-F238E27FC236}">
-                <a16:creationId xmlns:a16="http://schemas.microsoft.com/office/drawing/2014/main" id="{8F8891C0-B761-46C2-AD77-5D6B276EA3DC}"/>
+                <a16:creationId xmlns:a16="http://schemas.microsoft.com/office/drawing/2014/main" id="{DB64C828-B8DB-4B6E-8D61-71C2680C0961}"/>
               </a:ext>
             </a:extLst>
           </p:cNvPr>
@@ -33783,7 +33783,7 @@
           <p:cNvPr id="21" name="">
             <a:extLst xmlns:a="http://schemas.openxmlformats.org/drawingml/2006/main">
               <a:ext uri="{FF2B5EF4-FFF2-40B4-BE49-F238E27FC236}">
-                <a16:creationId xmlns:a16="http://schemas.microsoft.com/office/drawing/2014/main" id="{F26E2BDF-DD6C-4607-BFD6-288DB0E85BB8}"/>
+                <a16:creationId xmlns:a16="http://schemas.microsoft.com/office/drawing/2014/main" id="{246FFCE2-C53C-4F7A-96B5-8C1EE7D2E8E4}"/>
               </a:ext>
             </a:extLst>
           </p:cNvPr>
@@ -33814,7 +33814,7 @@
           <p:cNvPr id="22" name="">
             <a:extLst xmlns:a="http://schemas.openxmlformats.org/drawingml/2006/main">
               <a:ext uri="{FF2B5EF4-FFF2-40B4-BE49-F238E27FC236}">
-                <a16:creationId xmlns:a16="http://schemas.microsoft.com/office/drawing/2014/main" id="{DEE9C699-C864-4A5C-AD3E-E4685925F8D8}"/>
+                <a16:creationId xmlns:a16="http://schemas.microsoft.com/office/drawing/2014/main" id="{B738F55E-8C04-4AED-92DB-BCF6C47567B5}"/>
               </a:ext>
             </a:extLst>
           </p:cNvPr>
@@ -33866,7 +33866,7 @@
           <p:cNvPr id="23" name="">
             <a:extLst xmlns:a="http://schemas.openxmlformats.org/drawingml/2006/main">
               <a:ext uri="{FF2B5EF4-FFF2-40B4-BE49-F238E27FC236}">
-                <a16:creationId xmlns:a16="http://schemas.microsoft.com/office/drawing/2014/main" id="{2F29D234-5300-4B03-878F-CE16CC913FA1}"/>
+                <a16:creationId xmlns:a16="http://schemas.microsoft.com/office/drawing/2014/main" id="{23EAAF32-32D4-44F3-B89F-F6BAD76C6192}"/>
               </a:ext>
             </a:extLst>
           </p:cNvPr>
@@ -33918,7 +33918,7 @@
           <p:cNvPr id="24" name="">
             <a:extLst xmlns:a="http://schemas.openxmlformats.org/drawingml/2006/main">
               <a:ext uri="{FF2B5EF4-FFF2-40B4-BE49-F238E27FC236}">
-                <a16:creationId xmlns:a16="http://schemas.microsoft.com/office/drawing/2014/main" id="{1B451845-922F-4126-82D6-96AD94CD60D2}"/>
+                <a16:creationId xmlns:a16="http://schemas.microsoft.com/office/drawing/2014/main" id="{9D44B579-F796-45AB-832F-30871057C7BA}"/>
               </a:ext>
             </a:extLst>
           </p:cNvPr>
@@ -33970,7 +33970,7 @@
           <p:cNvPr id="25" name="">
             <a:extLst xmlns:a="http://schemas.openxmlformats.org/drawingml/2006/main">
               <a:ext uri="{FF2B5EF4-FFF2-40B4-BE49-F238E27FC236}">
-                <a16:creationId xmlns:a16="http://schemas.microsoft.com/office/drawing/2014/main" id="{95DCDB1C-49BB-4583-92CF-7B2DD8481D7E}"/>
+                <a16:creationId xmlns:a16="http://schemas.microsoft.com/office/drawing/2014/main" id="{148A1045-01FB-42E3-8F26-20023D9F6392}"/>
               </a:ext>
             </a:extLst>
           </p:cNvPr>
@@ -34022,7 +34022,7 @@
           <p:cNvPr id="26" name="">
             <a:extLst xmlns:a="http://schemas.openxmlformats.org/drawingml/2006/main">
               <a:ext uri="{FF2B5EF4-FFF2-40B4-BE49-F238E27FC236}">
-                <a16:creationId xmlns:a16="http://schemas.microsoft.com/office/drawing/2014/main" id="{DE67A53F-18F9-40BF-A743-9E339245BFC7}"/>
+                <a16:creationId xmlns:a16="http://schemas.microsoft.com/office/drawing/2014/main" id="{26E1BEEB-F743-47DC-BCA2-0D79D1F0AAB6}"/>
               </a:ext>
             </a:extLst>
           </p:cNvPr>
@@ -34074,7 +34074,7 @@
           <p:cNvPr id="27" name="">
             <a:extLst xmlns:a="http://schemas.openxmlformats.org/drawingml/2006/main">
               <a:ext uri="{FF2B5EF4-FFF2-40B4-BE49-F238E27FC236}">
-                <a16:creationId xmlns:a16="http://schemas.microsoft.com/office/drawing/2014/main" id="{923D9486-1D90-47F9-877B-071DF1EF3FA9}"/>
+                <a16:creationId xmlns:a16="http://schemas.microsoft.com/office/drawing/2014/main" id="{A9400081-DA31-46E8-9E2C-FCFA230EB26A}"/>
               </a:ext>
             </a:extLst>
           </p:cNvPr>
@@ -34126,7 +34126,7 @@
           <p:cNvPr id="28" name="">
             <a:extLst xmlns:a="http://schemas.openxmlformats.org/drawingml/2006/main">
               <a:ext uri="{FF2B5EF4-FFF2-40B4-BE49-F238E27FC236}">
-                <a16:creationId xmlns:a16="http://schemas.microsoft.com/office/drawing/2014/main" id="{9DBCE666-A343-47A8-BE0F-6A013091180E}"/>
+                <a16:creationId xmlns:a16="http://schemas.microsoft.com/office/drawing/2014/main" id="{64E4021F-866D-4F6A-A51B-BD1F3D3EE339}"/>
               </a:ext>
             </a:extLst>
           </p:cNvPr>
@@ -34178,7 +34178,7 @@
           <p:cNvPr id="29" name="">
             <a:extLst xmlns:a="http://schemas.openxmlformats.org/drawingml/2006/main">
               <a:ext uri="{FF2B5EF4-FFF2-40B4-BE49-F238E27FC236}">
-                <a16:creationId xmlns:a16="http://schemas.microsoft.com/office/drawing/2014/main" id="{79078FB3-9338-46BC-8980-967C369018F7}"/>
+                <a16:creationId xmlns:a16="http://schemas.microsoft.com/office/drawing/2014/main" id="{1BDEE495-D96B-4476-AD43-B0B51BB95C22}"/>
               </a:ext>
             </a:extLst>
           </p:cNvPr>
@@ -34228,7 +34228,7 @@
     </p:spTree>
     <p:extLst>
       <p:ext uri="{BB962C8B-B14F-4D97-AF65-F5344CB8AC3E}">
-        <p14:creationId xmlns:p14="http://schemas.microsoft.com/office/powerpoint/2010/main" val="344942096"/>
+        <p14:creationId xmlns:p14="http://schemas.microsoft.com/office/powerpoint/2010/main" val="1779397715"/>
       </p:ext>
     </p:extLst>
   </p:cSld>
@@ -34259,7 +34259,7 @@
           <p:cNvPr id="33" name="">
             <a:extLst xmlns:a="http://schemas.openxmlformats.org/drawingml/2006/main">
               <a:ext uri="{FF2B5EF4-FFF2-40B4-BE49-F238E27FC236}">
-                <a16:creationId xmlns:a16="http://schemas.microsoft.com/office/drawing/2014/main" id="{A9DA4C17-3782-49F6-8060-4B07C654F8E9}"/>
+                <a16:creationId xmlns:a16="http://schemas.microsoft.com/office/drawing/2014/main" id="{BFF866E8-D4F1-4BF5-975C-07F7A0723B7E}"/>
               </a:ext>
             </a:extLst>
           </p:cNvPr>
@@ -34292,7 +34292,7 @@
           <p:cNvPr id="2" name="">
             <a:extLst xmlns:a="http://schemas.openxmlformats.org/drawingml/2006/main">
               <a:ext uri="{FF2B5EF4-FFF2-40B4-BE49-F238E27FC236}">
-                <a16:creationId xmlns:a16="http://schemas.microsoft.com/office/drawing/2014/main" id="{79FB5EAB-C2F1-42F5-814D-E3E57D8778FC}"/>
+                <a16:creationId xmlns:a16="http://schemas.microsoft.com/office/drawing/2014/main" id="{6BFBE7C9-08FA-4D97-A35D-36000A98685D}"/>
               </a:ext>
             </a:extLst>
           </p:cNvPr>
@@ -34323,7 +34323,7 @@
           <p:cNvPr id="3" name="">
             <a:extLst xmlns:a="http://schemas.openxmlformats.org/drawingml/2006/main">
               <a:ext uri="{FF2B5EF4-FFF2-40B4-BE49-F238E27FC236}">
-                <a16:creationId xmlns:a16="http://schemas.microsoft.com/office/drawing/2014/main" id="{FF649985-42EC-4C94-A5B9-26769FE5DB24}"/>
+                <a16:creationId xmlns:a16="http://schemas.microsoft.com/office/drawing/2014/main" id="{02F20B05-7D96-411C-8080-396BBA7554C7}"/>
               </a:ext>
             </a:extLst>
           </p:cNvPr>
@@ -34375,7 +34375,7 @@
           <p:cNvPr id="4" name="">
             <a:extLst xmlns:a="http://schemas.openxmlformats.org/drawingml/2006/main">
               <a:ext uri="{FF2B5EF4-FFF2-40B4-BE49-F238E27FC236}">
-                <a16:creationId xmlns:a16="http://schemas.microsoft.com/office/drawing/2014/main" id="{180E319F-66F3-475F-884C-A0147971F0D4}"/>
+                <a16:creationId xmlns:a16="http://schemas.microsoft.com/office/drawing/2014/main" id="{41FC5E21-D5D1-4938-93F7-90374E90B609}"/>
               </a:ext>
             </a:extLst>
           </p:cNvPr>
@@ -34427,7 +34427,7 @@
           <p:cNvPr id="5" name="">
             <a:extLst xmlns:a="http://schemas.openxmlformats.org/drawingml/2006/main">
               <a:ext uri="{FF2B5EF4-FFF2-40B4-BE49-F238E27FC236}">
-                <a16:creationId xmlns:a16="http://schemas.microsoft.com/office/drawing/2014/main" id="{F9E4C558-759C-4A6F-A2FD-DCEC800E4C4A}"/>
+                <a16:creationId xmlns:a16="http://schemas.microsoft.com/office/drawing/2014/main" id="{EFAFD563-68AF-41B0-8F1D-F1BDA4428244}"/>
               </a:ext>
             </a:extLst>
           </p:cNvPr>
@@ -34462,7 +34462,7 @@
           <p:nvPr/>
         </p:nvPicPr>
         <p:blipFill>
-          <a:blip xmlns:r="http://schemas.openxmlformats.org/officeDocument/2006/relationships" xmlns:a="http://schemas.openxmlformats.org/drawingml/2006/main" r:embed="Ra3b76f2d84304286"/>
+          <a:blip xmlns:r="http://schemas.openxmlformats.org/officeDocument/2006/relationships" xmlns:a="http://schemas.openxmlformats.org/drawingml/2006/main" r:embed="R7c40b3bcee22468f"/>
           <a:stretch xmlns:a="http://schemas.openxmlformats.org/drawingml/2006/main"/>
         </p:blipFill>
         <p:spPr>
@@ -34480,7 +34480,7 @@
           <p:cNvPr id="7" name="">
             <a:extLst xmlns:a="http://schemas.openxmlformats.org/drawingml/2006/main">
               <a:ext uri="{FF2B5EF4-FFF2-40B4-BE49-F238E27FC236}">
-                <a16:creationId xmlns:a16="http://schemas.microsoft.com/office/drawing/2014/main" id="{ED590937-9623-40B0-AE35-E33A99DB7C7F}"/>
+                <a16:creationId xmlns:a16="http://schemas.microsoft.com/office/drawing/2014/main" id="{26B2AAFD-9C60-4067-A94C-15E6F52D5395}"/>
               </a:ext>
             </a:extLst>
           </p:cNvPr>
@@ -34532,7 +34532,7 @@
           <p:cNvPr id="8" name="">
             <a:extLst xmlns:a="http://schemas.openxmlformats.org/drawingml/2006/main">
               <a:ext uri="{FF2B5EF4-FFF2-40B4-BE49-F238E27FC236}">
-                <a16:creationId xmlns:a16="http://schemas.microsoft.com/office/drawing/2014/main" id="{814EB8B8-6614-436C-B6CC-C849B3059E9D}"/>
+                <a16:creationId xmlns:a16="http://schemas.microsoft.com/office/drawing/2014/main" id="{FE309F23-D831-4C3F-9D57-574EE93B760D}"/>
               </a:ext>
             </a:extLst>
           </p:cNvPr>
@@ -34584,7 +34584,7 @@
           <p:cNvPr id="9" name="">
             <a:extLst xmlns:a="http://schemas.openxmlformats.org/drawingml/2006/main">
               <a:ext uri="{FF2B5EF4-FFF2-40B4-BE49-F238E27FC236}">
-                <a16:creationId xmlns:a16="http://schemas.microsoft.com/office/drawing/2014/main" id="{5E560B66-7DA6-4FF3-9AD0-E89B9EEB039B}"/>
+                <a16:creationId xmlns:a16="http://schemas.microsoft.com/office/drawing/2014/main" id="{D9B55767-7B27-4567-AAB4-4BCAC338B8C8}"/>
               </a:ext>
             </a:extLst>
           </p:cNvPr>
@@ -34636,7 +34636,7 @@
           <p:cNvPr id="10" name="">
             <a:extLst xmlns:a="http://schemas.openxmlformats.org/drawingml/2006/main">
               <a:ext uri="{FF2B5EF4-FFF2-40B4-BE49-F238E27FC236}">
-                <a16:creationId xmlns:a16="http://schemas.microsoft.com/office/drawing/2014/main" id="{55EF3624-5665-4CF1-BFA9-73D3304F73A4}"/>
+                <a16:creationId xmlns:a16="http://schemas.microsoft.com/office/drawing/2014/main" id="{7A43A311-067B-464A-9D66-606BBDEEDFF4}"/>
               </a:ext>
             </a:extLst>
           </p:cNvPr>
@@ -34688,7 +34688,7 @@
           <p:cNvPr id="11" name="">
             <a:extLst xmlns:a="http://schemas.openxmlformats.org/drawingml/2006/main">
               <a:ext uri="{FF2B5EF4-FFF2-40B4-BE49-F238E27FC236}">
-                <a16:creationId xmlns:a16="http://schemas.microsoft.com/office/drawing/2014/main" id="{63A887C4-F14D-4ACB-BDAC-3EC34CC21D73}"/>
+                <a16:creationId xmlns:a16="http://schemas.microsoft.com/office/drawing/2014/main" id="{D00F52C0-CB94-440F-B608-2BE319A0DA1A}"/>
               </a:ext>
             </a:extLst>
           </p:cNvPr>
@@ -34735,10 +34735,10 @@
           <p:nvPr/>
         </p:nvPicPr>
         <p:blipFill>
-          <a:blip xmlns:r="http://schemas.openxmlformats.org/officeDocument/2006/relationships" xmlns:a="http://schemas.openxmlformats.org/drawingml/2006/main" r:embed="R92374d02f1e44351">
+          <a:blip xmlns:r="http://schemas.openxmlformats.org/officeDocument/2006/relationships" xmlns:a="http://schemas.openxmlformats.org/drawingml/2006/main" r:embed="R31eee9104aaa482f">
             <a:extLst>
               <a:ext uri="{96DAC541-7B7A-43D3-8B79-37D633B846F1}">
-                <asvg:svgBlip xmlns:asvg="http://schemas.microsoft.com/office/drawing/2016/SVG/main" r:embed="R3b13652f50b34607"/>
+                <asvg:svgBlip xmlns:asvg="http://schemas.microsoft.com/office/drawing/2016/SVG/main" r:embed="Re7b61468de6e46aa"/>
               </a:ext>
             </a:extLst>
           </a:blip>
@@ -34759,7 +34759,7 @@
           <p:cNvPr id="13" name="">
             <a:extLst xmlns:a="http://schemas.openxmlformats.org/drawingml/2006/main">
               <a:ext uri="{FF2B5EF4-FFF2-40B4-BE49-F238E27FC236}">
-                <a16:creationId xmlns:a16="http://schemas.microsoft.com/office/drawing/2014/main" id="{8B787BCE-5351-4AE3-B5B4-76C288219DD8}"/>
+                <a16:creationId xmlns:a16="http://schemas.microsoft.com/office/drawing/2014/main" id="{0BB67155-F3C4-42A8-8F68-3A2624BFE06B}"/>
               </a:ext>
             </a:extLst>
           </p:cNvPr>
@@ -34792,7 +34792,7 @@
           <p:cNvPr id="14" name="">
             <a:extLst xmlns:a="http://schemas.openxmlformats.org/drawingml/2006/main">
               <a:ext uri="{FF2B5EF4-FFF2-40B4-BE49-F238E27FC236}">
-                <a16:creationId xmlns:a16="http://schemas.microsoft.com/office/drawing/2014/main" id="{05D84932-FB4C-4FE6-84D1-E5A7F805D0D2}"/>
+                <a16:creationId xmlns:a16="http://schemas.microsoft.com/office/drawing/2014/main" id="{5DFFAE34-D346-4B3D-9CF2-93E9BF9D3B0D}"/>
               </a:ext>
             </a:extLst>
           </p:cNvPr>
@@ -34844,7 +34844,7 @@
           <p:cNvPr id="15" name="">
             <a:extLst xmlns:a="http://schemas.openxmlformats.org/drawingml/2006/main">
               <a:ext uri="{FF2B5EF4-FFF2-40B4-BE49-F238E27FC236}">
-                <a16:creationId xmlns:a16="http://schemas.microsoft.com/office/drawing/2014/main" id="{653B4A8F-89FC-46AF-8CAA-0021DACDE8AD}"/>
+                <a16:creationId xmlns:a16="http://schemas.microsoft.com/office/drawing/2014/main" id="{8926758A-50E2-406A-BC45-7CC932DA5A02}"/>
               </a:ext>
             </a:extLst>
           </p:cNvPr>
@@ -34875,7 +34875,7 @@
           <p:cNvPr id="16" name="">
             <a:extLst xmlns:a="http://schemas.openxmlformats.org/drawingml/2006/main">
               <a:ext uri="{FF2B5EF4-FFF2-40B4-BE49-F238E27FC236}">
-                <a16:creationId xmlns:a16="http://schemas.microsoft.com/office/drawing/2014/main" id="{B483697C-7F6B-4E39-95FE-29DF0611D1A9}"/>
+                <a16:creationId xmlns:a16="http://schemas.microsoft.com/office/drawing/2014/main" id="{E7EE8D32-5A1A-493C-B8C2-45D4CBB01A74}"/>
               </a:ext>
             </a:extLst>
           </p:cNvPr>
@@ -34906,7 +34906,7 @@
           <p:cNvPr id="17" name="">
             <a:extLst xmlns:a="http://schemas.openxmlformats.org/drawingml/2006/main">
               <a:ext uri="{FF2B5EF4-FFF2-40B4-BE49-F238E27FC236}">
-                <a16:creationId xmlns:a16="http://schemas.microsoft.com/office/drawing/2014/main" id="{FF60CD81-41F6-43D4-9CF6-792BE0E8D24A}"/>
+                <a16:creationId xmlns:a16="http://schemas.microsoft.com/office/drawing/2014/main" id="{E58CC73B-1385-4F48-B858-2B3A4A746FC0}"/>
               </a:ext>
             </a:extLst>
           </p:cNvPr>
@@ -34958,7 +34958,7 @@
           <p:cNvPr id="18" name="">
             <a:extLst xmlns:a="http://schemas.openxmlformats.org/drawingml/2006/main">
               <a:ext uri="{FF2B5EF4-FFF2-40B4-BE49-F238E27FC236}">
-                <a16:creationId xmlns:a16="http://schemas.microsoft.com/office/drawing/2014/main" id="{7BBB64A4-77D1-4CB2-9D0E-5D8BA8FA0B17}"/>
+                <a16:creationId xmlns:a16="http://schemas.microsoft.com/office/drawing/2014/main" id="{ACDD4E2B-4C9B-4C9B-A69A-A3FC258CD5FC}"/>
               </a:ext>
             </a:extLst>
           </p:cNvPr>
@@ -34991,7 +34991,7 @@
           <p:cNvPr id="19" name="">
             <a:extLst xmlns:a="http://schemas.openxmlformats.org/drawingml/2006/main">
               <a:ext uri="{FF2B5EF4-FFF2-40B4-BE49-F238E27FC236}">
-                <a16:creationId xmlns:a16="http://schemas.microsoft.com/office/drawing/2014/main" id="{AF41E9D0-1187-4529-B3C2-532FEBB1BD0D}"/>
+                <a16:creationId xmlns:a16="http://schemas.microsoft.com/office/drawing/2014/main" id="{6854AA7B-534F-42E7-95E1-B5479047CD44}"/>
               </a:ext>
             </a:extLst>
           </p:cNvPr>
@@ -35043,7 +35043,7 @@
           <p:cNvPr id="20" name="">
             <a:extLst xmlns:a="http://schemas.openxmlformats.org/drawingml/2006/main">
               <a:ext uri="{FF2B5EF4-FFF2-40B4-BE49-F238E27FC236}">
-                <a16:creationId xmlns:a16="http://schemas.microsoft.com/office/drawing/2014/main" id="{E59DE7D8-2275-4D73-B452-A1214D097ECD}"/>
+                <a16:creationId xmlns:a16="http://schemas.microsoft.com/office/drawing/2014/main" id="{1E3282A4-ECF3-4906-8977-B2E01E49AEF6}"/>
               </a:ext>
             </a:extLst>
           </p:cNvPr>
@@ -35074,7 +35074,7 @@
           <p:cNvPr id="21" name="">
             <a:extLst xmlns:a="http://schemas.openxmlformats.org/drawingml/2006/main">
               <a:ext uri="{FF2B5EF4-FFF2-40B4-BE49-F238E27FC236}">
-                <a16:creationId xmlns:a16="http://schemas.microsoft.com/office/drawing/2014/main" id="{35579CF3-4EBF-477B-B840-CFB5056D0F09}"/>
+                <a16:creationId xmlns:a16="http://schemas.microsoft.com/office/drawing/2014/main" id="{0A243731-44E4-48F8-9498-35511250CB03}"/>
               </a:ext>
             </a:extLst>
           </p:cNvPr>
@@ -35105,7 +35105,7 @@
           <p:cNvPr id="22" name="">
             <a:extLst xmlns:a="http://schemas.openxmlformats.org/drawingml/2006/main">
               <a:ext uri="{FF2B5EF4-FFF2-40B4-BE49-F238E27FC236}">
-                <a16:creationId xmlns:a16="http://schemas.microsoft.com/office/drawing/2014/main" id="{ABC33EB2-AD88-4FCC-8E08-326CEAFA8FFA}"/>
+                <a16:creationId xmlns:a16="http://schemas.microsoft.com/office/drawing/2014/main" id="{663251CE-72C3-4B6F-BC38-6D8B632B5891}"/>
               </a:ext>
             </a:extLst>
           </p:cNvPr>
@@ -35157,7 +35157,7 @@
           <p:cNvPr id="23" name="">
             <a:extLst xmlns:a="http://schemas.openxmlformats.org/drawingml/2006/main">
               <a:ext uri="{FF2B5EF4-FFF2-40B4-BE49-F238E27FC236}">
-                <a16:creationId xmlns:a16="http://schemas.microsoft.com/office/drawing/2014/main" id="{5551E249-59CD-4B75-A8A0-6D914BA50D04}"/>
+                <a16:creationId xmlns:a16="http://schemas.microsoft.com/office/drawing/2014/main" id="{1623D15F-912C-4926-AD4F-2A75AAEF6C7D}"/>
               </a:ext>
             </a:extLst>
           </p:cNvPr>
@@ -35209,7 +35209,7 @@
           <p:cNvPr id="24" name="">
             <a:extLst xmlns:a="http://schemas.openxmlformats.org/drawingml/2006/main">
               <a:ext uri="{FF2B5EF4-FFF2-40B4-BE49-F238E27FC236}">
-                <a16:creationId xmlns:a16="http://schemas.microsoft.com/office/drawing/2014/main" id="{E9ABE8A3-F460-45C2-B212-B8FBDCE704F0}"/>
+                <a16:creationId xmlns:a16="http://schemas.microsoft.com/office/drawing/2014/main" id="{5886E063-71E0-4784-ABB3-6C204449D9E4}"/>
               </a:ext>
             </a:extLst>
           </p:cNvPr>
@@ -35240,7 +35240,7 @@
           <p:cNvPr id="25" name="">
             <a:extLst xmlns:a="http://schemas.openxmlformats.org/drawingml/2006/main">
               <a:ext uri="{FF2B5EF4-FFF2-40B4-BE49-F238E27FC236}">
-                <a16:creationId xmlns:a16="http://schemas.microsoft.com/office/drawing/2014/main" id="{8B00C65D-E772-4B5D-8B58-0E9674E1A6DF}"/>
+                <a16:creationId xmlns:a16="http://schemas.microsoft.com/office/drawing/2014/main" id="{45CE0250-15B3-4E40-A60C-11C3EC29697A}"/>
               </a:ext>
             </a:extLst>
           </p:cNvPr>
@@ -35292,7 +35292,7 @@
           <p:cNvPr id="26" name="">
             <a:extLst xmlns:a="http://schemas.openxmlformats.org/drawingml/2006/main">
               <a:ext uri="{FF2B5EF4-FFF2-40B4-BE49-F238E27FC236}">
-                <a16:creationId xmlns:a16="http://schemas.microsoft.com/office/drawing/2014/main" id="{F7321EC9-30F7-4A37-A64A-53169813FBFE}"/>
+                <a16:creationId xmlns:a16="http://schemas.microsoft.com/office/drawing/2014/main" id="{95CCB3FB-259C-4D59-BD3D-8D0935BD2B4F}"/>
               </a:ext>
             </a:extLst>
           </p:cNvPr>
@@ -35344,7 +35344,7 @@
           <p:cNvPr id="27" name="">
             <a:extLst xmlns:a="http://schemas.openxmlformats.org/drawingml/2006/main">
               <a:ext uri="{FF2B5EF4-FFF2-40B4-BE49-F238E27FC236}">
-                <a16:creationId xmlns:a16="http://schemas.microsoft.com/office/drawing/2014/main" id="{745CBE78-BAE6-48C1-89FC-2205CBC50CE6}"/>
+                <a16:creationId xmlns:a16="http://schemas.microsoft.com/office/drawing/2014/main" id="{315A77E6-4826-4D9B-B643-57C665F71591}"/>
               </a:ext>
             </a:extLst>
           </p:cNvPr>
@@ -35396,7 +35396,7 @@
           <p:cNvPr id="28" name="">
             <a:extLst xmlns:a="http://schemas.openxmlformats.org/drawingml/2006/main">
               <a:ext uri="{FF2B5EF4-FFF2-40B4-BE49-F238E27FC236}">
-                <a16:creationId xmlns:a16="http://schemas.microsoft.com/office/drawing/2014/main" id="{BEBFF2B3-75E0-4A87-AE38-5EFA0F302250}"/>
+                <a16:creationId xmlns:a16="http://schemas.microsoft.com/office/drawing/2014/main" id="{7AC5BD0A-F516-44D2-8E5F-F3078823B7D9}"/>
               </a:ext>
             </a:extLst>
           </p:cNvPr>
@@ -35448,7 +35448,7 @@
           <p:cNvPr id="29" name="">
             <a:extLst xmlns:a="http://schemas.openxmlformats.org/drawingml/2006/main">
               <a:ext uri="{FF2B5EF4-FFF2-40B4-BE49-F238E27FC236}">
-                <a16:creationId xmlns:a16="http://schemas.microsoft.com/office/drawing/2014/main" id="{7D57A4B8-9586-4B43-9A39-3F3FC157CF6C}"/>
+                <a16:creationId xmlns:a16="http://schemas.microsoft.com/office/drawing/2014/main" id="{2469630A-934E-43FE-BF4A-6E8AA7B0D8EB}"/>
               </a:ext>
             </a:extLst>
           </p:cNvPr>
@@ -35500,7 +35500,7 @@
           <p:cNvPr id="30" name="">
             <a:extLst xmlns:a="http://schemas.openxmlformats.org/drawingml/2006/main">
               <a:ext uri="{FF2B5EF4-FFF2-40B4-BE49-F238E27FC236}">
-                <a16:creationId xmlns:a16="http://schemas.microsoft.com/office/drawing/2014/main" id="{148EF693-ECF5-4525-800C-7A70B6BCFB5D}"/>
+                <a16:creationId xmlns:a16="http://schemas.microsoft.com/office/drawing/2014/main" id="{2B87EFE7-839F-47A0-9019-0C7F3546CF2E}"/>
               </a:ext>
             </a:extLst>
           </p:cNvPr>
@@ -35552,7 +35552,7 @@
           <p:cNvPr id="31" name="">
             <a:extLst xmlns:a="http://schemas.openxmlformats.org/drawingml/2006/main">
               <a:ext uri="{FF2B5EF4-FFF2-40B4-BE49-F238E27FC236}">
-                <a16:creationId xmlns:a16="http://schemas.microsoft.com/office/drawing/2014/main" id="{BAE33056-6DC9-495E-A119-19D5E5AA40AE}"/>
+                <a16:creationId xmlns:a16="http://schemas.microsoft.com/office/drawing/2014/main" id="{E6017027-89D8-48E7-B687-662F9276B147}"/>
               </a:ext>
             </a:extLst>
           </p:cNvPr>
@@ -35604,7 +35604,7 @@
           <p:cNvPr id="32" name="">
             <a:extLst xmlns:a="http://schemas.openxmlformats.org/drawingml/2006/main">
               <a:ext uri="{FF2B5EF4-FFF2-40B4-BE49-F238E27FC236}">
-                <a16:creationId xmlns:a16="http://schemas.microsoft.com/office/drawing/2014/main" id="{7253BA24-14A5-4A86-B77A-4E5D00A7CBF1}"/>
+                <a16:creationId xmlns:a16="http://schemas.microsoft.com/office/drawing/2014/main" id="{2BA2E846-4318-4619-9612-77520A28EF4F}"/>
               </a:ext>
             </a:extLst>
           </p:cNvPr>
@@ -35654,7 +35654,7 @@
     </p:spTree>
     <p:extLst>
       <p:ext uri="{BB962C8B-B14F-4D97-AF65-F5344CB8AC3E}">
-        <p14:creationId xmlns:p14="http://schemas.microsoft.com/office/powerpoint/2010/main" val="62862920"/>
+        <p14:creationId xmlns:p14="http://schemas.microsoft.com/office/powerpoint/2010/main" val="258630576"/>
       </p:ext>
     </p:extLst>
   </p:cSld>
@@ -35685,7 +35685,7 @@
           <p:cNvPr id="27" name="">
             <a:extLst xmlns:a="http://schemas.openxmlformats.org/drawingml/2006/main">
               <a:ext uri="{FF2B5EF4-FFF2-40B4-BE49-F238E27FC236}">
-                <a16:creationId xmlns:a16="http://schemas.microsoft.com/office/drawing/2014/main" id="{FBA19638-EBC7-4BE2-B934-EA8C64E4D046}"/>
+                <a16:creationId xmlns:a16="http://schemas.microsoft.com/office/drawing/2014/main" id="{BA157759-1260-4665-A299-44BD2DF2ADFD}"/>
               </a:ext>
             </a:extLst>
           </p:cNvPr>
@@ -35718,7 +35718,7 @@
           <p:cNvPr id="2" name="">
             <a:extLst xmlns:a="http://schemas.openxmlformats.org/drawingml/2006/main">
               <a:ext uri="{FF2B5EF4-FFF2-40B4-BE49-F238E27FC236}">
-                <a16:creationId xmlns:a16="http://schemas.microsoft.com/office/drawing/2014/main" id="{3145595A-AA65-46DB-B8A8-BAEDC0074A97}"/>
+                <a16:creationId xmlns:a16="http://schemas.microsoft.com/office/drawing/2014/main" id="{4493EB8C-77CD-4721-B04B-ACFEEB3190B6}"/>
               </a:ext>
             </a:extLst>
           </p:cNvPr>
@@ -35749,7 +35749,7 @@
           <p:cNvPr id="3" name="">
             <a:extLst xmlns:a="http://schemas.openxmlformats.org/drawingml/2006/main">
               <a:ext uri="{FF2B5EF4-FFF2-40B4-BE49-F238E27FC236}">
-                <a16:creationId xmlns:a16="http://schemas.microsoft.com/office/drawing/2014/main" id="{84B2963C-F882-47E6-908F-F917CE61CADC}"/>
+                <a16:creationId xmlns:a16="http://schemas.microsoft.com/office/drawing/2014/main" id="{E6A34492-8413-4361-8219-533017DF278D}"/>
               </a:ext>
             </a:extLst>
           </p:cNvPr>
@@ -35801,7 +35801,7 @@
           <p:cNvPr id="4" name="">
             <a:extLst xmlns:a="http://schemas.openxmlformats.org/drawingml/2006/main">
               <a:ext uri="{FF2B5EF4-FFF2-40B4-BE49-F238E27FC236}">
-                <a16:creationId xmlns:a16="http://schemas.microsoft.com/office/drawing/2014/main" id="{723ADDBE-0571-427A-AA1C-A4BE2C5E8AEB}"/>
+                <a16:creationId xmlns:a16="http://schemas.microsoft.com/office/drawing/2014/main" id="{38C4A2F5-2F9E-41BD-A0CA-9921AD616B6D}"/>
               </a:ext>
             </a:extLst>
           </p:cNvPr>
@@ -35853,7 +35853,7 @@
           <p:cNvPr id="5" name="">
             <a:extLst xmlns:a="http://schemas.openxmlformats.org/drawingml/2006/main">
               <a:ext uri="{FF2B5EF4-FFF2-40B4-BE49-F238E27FC236}">
-                <a16:creationId xmlns:a16="http://schemas.microsoft.com/office/drawing/2014/main" id="{4BF620A7-D701-4DED-98BD-CDDFF1C0DE36}"/>
+                <a16:creationId xmlns:a16="http://schemas.microsoft.com/office/drawing/2014/main" id="{3CCAA8CD-862A-4547-980F-C6439B485776}"/>
               </a:ext>
             </a:extLst>
           </p:cNvPr>
@@ -35888,7 +35888,7 @@
           <p:nvPr/>
         </p:nvPicPr>
         <p:blipFill>
-          <a:blip xmlns:r="http://schemas.openxmlformats.org/officeDocument/2006/relationships" xmlns:a="http://schemas.openxmlformats.org/drawingml/2006/main" r:embed="R92e513a84ac34ea1"/>
+          <a:blip xmlns:r="http://schemas.openxmlformats.org/officeDocument/2006/relationships" xmlns:a="http://schemas.openxmlformats.org/drawingml/2006/main" r:embed="R4ba69b1cce714af9"/>
           <a:stretch xmlns:a="http://schemas.openxmlformats.org/drawingml/2006/main"/>
         </p:blipFill>
         <p:spPr>
@@ -35906,7 +35906,7 @@
           <p:cNvPr id="7" name="">
             <a:extLst xmlns:a="http://schemas.openxmlformats.org/drawingml/2006/main">
               <a:ext uri="{FF2B5EF4-FFF2-40B4-BE49-F238E27FC236}">
-                <a16:creationId xmlns:a16="http://schemas.microsoft.com/office/drawing/2014/main" id="{BA6002FA-1795-4081-B88C-C9E774357844}"/>
+                <a16:creationId xmlns:a16="http://schemas.microsoft.com/office/drawing/2014/main" id="{40AEC481-8F91-4990-A494-A7043371B25B}"/>
               </a:ext>
             </a:extLst>
           </p:cNvPr>
@@ -35958,7 +35958,7 @@
           <p:cNvPr id="8" name="">
             <a:extLst xmlns:a="http://schemas.openxmlformats.org/drawingml/2006/main">
               <a:ext uri="{FF2B5EF4-FFF2-40B4-BE49-F238E27FC236}">
-                <a16:creationId xmlns:a16="http://schemas.microsoft.com/office/drawing/2014/main" id="{D9F58EB7-6482-47BF-81C9-9102CC19C326}"/>
+                <a16:creationId xmlns:a16="http://schemas.microsoft.com/office/drawing/2014/main" id="{FE79EC73-BA12-4B72-8658-08089BAEF2F4}"/>
               </a:ext>
             </a:extLst>
           </p:cNvPr>
@@ -36010,7 +36010,7 @@
           <p:cNvPr id="9" name="">
             <a:extLst xmlns:a="http://schemas.openxmlformats.org/drawingml/2006/main">
               <a:ext uri="{FF2B5EF4-FFF2-40B4-BE49-F238E27FC236}">
-                <a16:creationId xmlns:a16="http://schemas.microsoft.com/office/drawing/2014/main" id="{042AF77B-DEB1-47A4-B265-8880B7E7BA73}"/>
+                <a16:creationId xmlns:a16="http://schemas.microsoft.com/office/drawing/2014/main" id="{1A01441C-AE02-45CE-A545-2CC300A68AE2}"/>
               </a:ext>
             </a:extLst>
           </p:cNvPr>
@@ -36062,7 +36062,7 @@
           <p:cNvPr id="10" name="">
             <a:extLst xmlns:a="http://schemas.openxmlformats.org/drawingml/2006/main">
               <a:ext uri="{FF2B5EF4-FFF2-40B4-BE49-F238E27FC236}">
-                <a16:creationId xmlns:a16="http://schemas.microsoft.com/office/drawing/2014/main" id="{940E0C7E-0B32-4193-8A2B-241E2780BB50}"/>
+                <a16:creationId xmlns:a16="http://schemas.microsoft.com/office/drawing/2014/main" id="{502F5039-F90A-4B36-A34F-3631B32FF299}"/>
               </a:ext>
             </a:extLst>
           </p:cNvPr>
@@ -36114,7 +36114,7 @@
           <p:cNvPr id="11" name="">
             <a:extLst xmlns:a="http://schemas.openxmlformats.org/drawingml/2006/main">
               <a:ext uri="{FF2B5EF4-FFF2-40B4-BE49-F238E27FC236}">
-                <a16:creationId xmlns:a16="http://schemas.microsoft.com/office/drawing/2014/main" id="{D457409B-D146-4FE8-975C-4A81C10A2E61}"/>
+                <a16:creationId xmlns:a16="http://schemas.microsoft.com/office/drawing/2014/main" id="{4D5EF8C9-6ABE-4B48-943F-76647686528D}"/>
               </a:ext>
             </a:extLst>
           </p:cNvPr>
@@ -36161,10 +36161,10 @@
           <p:nvPr/>
         </p:nvPicPr>
         <p:blipFill>
-          <a:blip xmlns:r="http://schemas.openxmlformats.org/officeDocument/2006/relationships" xmlns:a="http://schemas.openxmlformats.org/drawingml/2006/main" r:embed="R0a95a66c4ee54d45">
+          <a:blip xmlns:r="http://schemas.openxmlformats.org/officeDocument/2006/relationships" xmlns:a="http://schemas.openxmlformats.org/drawingml/2006/main" r:embed="R806bd11e7b764e55">
             <a:extLst>
               <a:ext uri="{96DAC541-7B7A-43D3-8B79-37D633B846F1}">
-                <asvg:svgBlip xmlns:asvg="http://schemas.microsoft.com/office/drawing/2016/SVG/main" r:embed="R8555b201611d45fc"/>
+                <asvg:svgBlip xmlns:asvg="http://schemas.microsoft.com/office/drawing/2016/SVG/main" r:embed="R70ff44f059444b7f"/>
               </a:ext>
             </a:extLst>
           </a:blip>
@@ -36185,7 +36185,7 @@
           <p:cNvPr id="13" name="">
             <a:extLst xmlns:a="http://schemas.openxmlformats.org/drawingml/2006/main">
               <a:ext uri="{FF2B5EF4-FFF2-40B4-BE49-F238E27FC236}">
-                <a16:creationId xmlns:a16="http://schemas.microsoft.com/office/drawing/2014/main" id="{F25FC46F-39D7-463F-87FC-3D9944251253}"/>
+                <a16:creationId xmlns:a16="http://schemas.microsoft.com/office/drawing/2014/main" id="{41727BCC-467A-47EA-918C-8AD9A88D55B6}"/>
               </a:ext>
             </a:extLst>
           </p:cNvPr>
@@ -36218,7 +36218,7 @@
           <p:cNvPr id="14" name="">
             <a:extLst xmlns:a="http://schemas.openxmlformats.org/drawingml/2006/main">
               <a:ext uri="{FF2B5EF4-FFF2-40B4-BE49-F238E27FC236}">
-                <a16:creationId xmlns:a16="http://schemas.microsoft.com/office/drawing/2014/main" id="{631364F6-5B71-44BA-8B73-61DB6E0E06ED}"/>
+                <a16:creationId xmlns:a16="http://schemas.microsoft.com/office/drawing/2014/main" id="{3F8A9BE7-9934-4529-AC0E-954ADFDDCA05}"/>
               </a:ext>
             </a:extLst>
           </p:cNvPr>
@@ -36270,7 +36270,7 @@
           <p:cNvPr id="15" name="">
             <a:extLst xmlns:a="http://schemas.openxmlformats.org/drawingml/2006/main">
               <a:ext uri="{FF2B5EF4-FFF2-40B4-BE49-F238E27FC236}">
-                <a16:creationId xmlns:a16="http://schemas.microsoft.com/office/drawing/2014/main" id="{2887FC73-AD45-4CCD-8F87-B4D3E121AFC7}"/>
+                <a16:creationId xmlns:a16="http://schemas.microsoft.com/office/drawing/2014/main" id="{D69E55AA-2110-4109-BE9F-38CCA4EF6ADF}"/>
               </a:ext>
             </a:extLst>
           </p:cNvPr>
@@ -36303,7 +36303,7 @@
           <p:cNvPr id="16" name="">
             <a:extLst xmlns:a="http://schemas.openxmlformats.org/drawingml/2006/main">
               <a:ext uri="{FF2B5EF4-FFF2-40B4-BE49-F238E27FC236}">
-                <a16:creationId xmlns:a16="http://schemas.microsoft.com/office/drawing/2014/main" id="{6ED31D8C-C0B3-4832-AF71-6FC708E060CD}"/>
+                <a16:creationId xmlns:a16="http://schemas.microsoft.com/office/drawing/2014/main" id="{4E15D848-B36E-4B38-A738-6A32B3069EFF}"/>
               </a:ext>
             </a:extLst>
           </p:cNvPr>
@@ -36355,7 +36355,7 @@
           <p:cNvPr id="17" name="">
             <a:extLst xmlns:a="http://schemas.openxmlformats.org/drawingml/2006/main">
               <a:ext uri="{FF2B5EF4-FFF2-40B4-BE49-F238E27FC236}">
-                <a16:creationId xmlns:a16="http://schemas.microsoft.com/office/drawing/2014/main" id="{0DB7F97C-0053-4E64-94FF-6E0F1DAE3FA8}"/>
+                <a16:creationId xmlns:a16="http://schemas.microsoft.com/office/drawing/2014/main" id="{9F26DD6F-DB45-4C38-BEB2-EC48D6B15699}"/>
               </a:ext>
             </a:extLst>
           </p:cNvPr>
@@ -36386,7 +36386,7 @@
           <p:cNvPr id="18" name="">
             <a:extLst xmlns:a="http://schemas.openxmlformats.org/drawingml/2006/main">
               <a:ext uri="{FF2B5EF4-FFF2-40B4-BE49-F238E27FC236}">
-                <a16:creationId xmlns:a16="http://schemas.microsoft.com/office/drawing/2014/main" id="{EFB26BD1-2409-46A7-937E-9B628865A4DF}"/>
+                <a16:creationId xmlns:a16="http://schemas.microsoft.com/office/drawing/2014/main" id="{EDC34823-C779-4D8A-A480-925AA070B9DA}"/>
               </a:ext>
             </a:extLst>
           </p:cNvPr>
@@ -36417,7 +36417,7 @@
           <p:cNvPr id="19" name="">
             <a:extLst xmlns:a="http://schemas.openxmlformats.org/drawingml/2006/main">
               <a:ext uri="{FF2B5EF4-FFF2-40B4-BE49-F238E27FC236}">
-                <a16:creationId xmlns:a16="http://schemas.microsoft.com/office/drawing/2014/main" id="{638EC4A2-86E0-449F-A76A-8A3BFABC38CF}"/>
+                <a16:creationId xmlns:a16="http://schemas.microsoft.com/office/drawing/2014/main" id="{BEC37C05-F956-43F3-A41D-E7A1B27D9429}"/>
               </a:ext>
             </a:extLst>
           </p:cNvPr>
@@ -36469,7 +36469,7 @@
           <p:cNvPr id="20" name="">
             <a:extLst xmlns:a="http://schemas.openxmlformats.org/drawingml/2006/main">
               <a:ext uri="{FF2B5EF4-FFF2-40B4-BE49-F238E27FC236}">
-                <a16:creationId xmlns:a16="http://schemas.microsoft.com/office/drawing/2014/main" id="{9C7BC5A5-EB14-451C-B6D2-562E74A04870}"/>
+                <a16:creationId xmlns:a16="http://schemas.microsoft.com/office/drawing/2014/main" id="{16AB3CD4-FA7B-4308-ABA6-EFAA9BF36585}"/>
               </a:ext>
             </a:extLst>
           </p:cNvPr>
@@ -36500,7 +36500,7 @@
           <p:cNvPr id="21" name="">
             <a:extLst xmlns:a="http://schemas.openxmlformats.org/drawingml/2006/main">
               <a:ext uri="{FF2B5EF4-FFF2-40B4-BE49-F238E27FC236}">
-                <a16:creationId xmlns:a16="http://schemas.microsoft.com/office/drawing/2014/main" id="{B2F3A39B-21EB-4C06-A1A1-410241953AAE}"/>
+                <a16:creationId xmlns:a16="http://schemas.microsoft.com/office/drawing/2014/main" id="{A8462808-0EB3-40F3-B142-5524C6476474}"/>
               </a:ext>
             </a:extLst>
           </p:cNvPr>
@@ -36552,7 +36552,7 @@
           <p:cNvPr id="22" name="">
             <a:extLst xmlns:a="http://schemas.openxmlformats.org/drawingml/2006/main">
               <a:ext uri="{FF2B5EF4-FFF2-40B4-BE49-F238E27FC236}">
-                <a16:creationId xmlns:a16="http://schemas.microsoft.com/office/drawing/2014/main" id="{8FCADB7D-DE95-4547-BDCB-C75894FB349E}"/>
+                <a16:creationId xmlns:a16="http://schemas.microsoft.com/office/drawing/2014/main" id="{21ACB26F-AE28-4E0B-940C-E0EA2729B552}"/>
               </a:ext>
             </a:extLst>
           </p:cNvPr>
@@ -36604,7 +36604,7 @@
           <p:cNvPr id="23" name="">
             <a:extLst xmlns:a="http://schemas.openxmlformats.org/drawingml/2006/main">
               <a:ext uri="{FF2B5EF4-FFF2-40B4-BE49-F238E27FC236}">
-                <a16:creationId xmlns:a16="http://schemas.microsoft.com/office/drawing/2014/main" id="{70C9D0E3-F65C-4A6C-B1DC-77BB25919D7E}"/>
+                <a16:creationId xmlns:a16="http://schemas.microsoft.com/office/drawing/2014/main" id="{DBED288A-7204-42B5-81D4-A447996D28C2}"/>
               </a:ext>
             </a:extLst>
           </p:cNvPr>
@@ -36656,7 +36656,7 @@
           <p:cNvPr id="24" name="">
             <a:extLst xmlns:a="http://schemas.openxmlformats.org/drawingml/2006/main">
               <a:ext uri="{FF2B5EF4-FFF2-40B4-BE49-F238E27FC236}">
-                <a16:creationId xmlns:a16="http://schemas.microsoft.com/office/drawing/2014/main" id="{2501144F-750B-41BF-85AB-C64B136F0395}"/>
+                <a16:creationId xmlns:a16="http://schemas.microsoft.com/office/drawing/2014/main" id="{6890CFA2-8520-407C-B35F-7D13C243C3A0}"/>
               </a:ext>
             </a:extLst>
           </p:cNvPr>
@@ -36708,7 +36708,7 @@
           <p:cNvPr id="25" name="">
             <a:extLst xmlns:a="http://schemas.openxmlformats.org/drawingml/2006/main">
               <a:ext uri="{FF2B5EF4-FFF2-40B4-BE49-F238E27FC236}">
-                <a16:creationId xmlns:a16="http://schemas.microsoft.com/office/drawing/2014/main" id="{CA289F46-BBA1-4FB9-90E9-FD8000CA6FCF}"/>
+                <a16:creationId xmlns:a16="http://schemas.microsoft.com/office/drawing/2014/main" id="{C0DAFAEB-965F-4569-A400-A5C9F5CF2742}"/>
               </a:ext>
             </a:extLst>
           </p:cNvPr>
@@ -36760,7 +36760,7 @@
           <p:cNvPr id="26" name="">
             <a:extLst xmlns:a="http://schemas.openxmlformats.org/drawingml/2006/main">
               <a:ext uri="{FF2B5EF4-FFF2-40B4-BE49-F238E27FC236}">
-                <a16:creationId xmlns:a16="http://schemas.microsoft.com/office/drawing/2014/main" id="{408C91A6-1028-48E2-910C-27002F802A1C}"/>
+                <a16:creationId xmlns:a16="http://schemas.microsoft.com/office/drawing/2014/main" id="{A03E3736-DD20-4706-9F63-DFA5117DE325}"/>
               </a:ext>
             </a:extLst>
           </p:cNvPr>
@@ -36810,7 +36810,7 @@
     </p:spTree>
     <p:extLst>
       <p:ext uri="{BB962C8B-B14F-4D97-AF65-F5344CB8AC3E}">
-        <p14:creationId xmlns:p14="http://schemas.microsoft.com/office/powerpoint/2010/main" val="724373623"/>
+        <p14:creationId xmlns:p14="http://schemas.microsoft.com/office/powerpoint/2010/main" val="1292875088"/>
       </p:ext>
     </p:extLst>
   </p:cSld>
@@ -36841,7 +36841,7 @@
           <p:cNvPr id="27" name="">
             <a:extLst xmlns:a="http://schemas.openxmlformats.org/drawingml/2006/main">
               <a:ext uri="{FF2B5EF4-FFF2-40B4-BE49-F238E27FC236}">
-                <a16:creationId xmlns:a16="http://schemas.microsoft.com/office/drawing/2014/main" id="{BBCD2584-DD29-4993-9AA0-5AFFCA8D7649}"/>
+                <a16:creationId xmlns:a16="http://schemas.microsoft.com/office/drawing/2014/main" id="{7BAB1031-EADC-4784-ADA8-EECF738458D6}"/>
               </a:ext>
             </a:extLst>
           </p:cNvPr>
@@ -36874,7 +36874,7 @@
           <p:cNvPr id="2" name="">
             <a:extLst xmlns:a="http://schemas.openxmlformats.org/drawingml/2006/main">
               <a:ext uri="{FF2B5EF4-FFF2-40B4-BE49-F238E27FC236}">
-                <a16:creationId xmlns:a16="http://schemas.microsoft.com/office/drawing/2014/main" id="{9FE7D550-748C-4444-AF12-B8090114F826}"/>
+                <a16:creationId xmlns:a16="http://schemas.microsoft.com/office/drawing/2014/main" id="{31D23389-33B4-4ECD-8DBC-CBF24F4D21D8}"/>
               </a:ext>
             </a:extLst>
           </p:cNvPr>
@@ -36905,7 +36905,7 @@
           <p:cNvPr id="3" name="">
             <a:extLst xmlns:a="http://schemas.openxmlformats.org/drawingml/2006/main">
               <a:ext uri="{FF2B5EF4-FFF2-40B4-BE49-F238E27FC236}">
-                <a16:creationId xmlns:a16="http://schemas.microsoft.com/office/drawing/2014/main" id="{8DF74A93-22B1-4B59-AFD7-FBA4339069AF}"/>
+                <a16:creationId xmlns:a16="http://schemas.microsoft.com/office/drawing/2014/main" id="{D201CA88-FA59-431A-9232-F897EEEB0CDC}"/>
               </a:ext>
             </a:extLst>
           </p:cNvPr>
@@ -36957,7 +36957,7 @@
           <p:cNvPr id="4" name="">
             <a:extLst xmlns:a="http://schemas.openxmlformats.org/drawingml/2006/main">
               <a:ext uri="{FF2B5EF4-FFF2-40B4-BE49-F238E27FC236}">
-                <a16:creationId xmlns:a16="http://schemas.microsoft.com/office/drawing/2014/main" id="{2D974AC6-7F16-499E-86D5-3C8A33C14F64}"/>
+                <a16:creationId xmlns:a16="http://schemas.microsoft.com/office/drawing/2014/main" id="{D4297572-5876-4127-ABFE-59587A1931DF}"/>
               </a:ext>
             </a:extLst>
           </p:cNvPr>
@@ -37009,7 +37009,7 @@
           <p:cNvPr id="5" name="">
             <a:extLst xmlns:a="http://schemas.openxmlformats.org/drawingml/2006/main">
               <a:ext uri="{FF2B5EF4-FFF2-40B4-BE49-F238E27FC236}">
-                <a16:creationId xmlns:a16="http://schemas.microsoft.com/office/drawing/2014/main" id="{85158E30-4268-4D76-9BA4-96B78D763A04}"/>
+                <a16:creationId xmlns:a16="http://schemas.microsoft.com/office/drawing/2014/main" id="{5797F10A-84FB-4F80-8B27-B034D2130BF1}"/>
               </a:ext>
             </a:extLst>
           </p:cNvPr>
@@ -37044,7 +37044,7 @@
           <p:nvPr/>
         </p:nvPicPr>
         <p:blipFill>
-          <a:blip xmlns:r="http://schemas.openxmlformats.org/officeDocument/2006/relationships" xmlns:a="http://schemas.openxmlformats.org/drawingml/2006/main" r:embed="Rda677bd8fe5d49db"/>
+          <a:blip xmlns:r="http://schemas.openxmlformats.org/officeDocument/2006/relationships" xmlns:a="http://schemas.openxmlformats.org/drawingml/2006/main" r:embed="R2239badbcb2647fa"/>
           <a:stretch xmlns:a="http://schemas.openxmlformats.org/drawingml/2006/main"/>
         </p:blipFill>
         <p:spPr>
@@ -37062,7 +37062,7 @@
           <p:cNvPr id="7" name="">
             <a:extLst xmlns:a="http://schemas.openxmlformats.org/drawingml/2006/main">
               <a:ext uri="{FF2B5EF4-FFF2-40B4-BE49-F238E27FC236}">
-                <a16:creationId xmlns:a16="http://schemas.microsoft.com/office/drawing/2014/main" id="{445A338B-FE6E-4FFC-A083-7FE1C9DEC92A}"/>
+                <a16:creationId xmlns:a16="http://schemas.microsoft.com/office/drawing/2014/main" id="{DC5DEAEB-E282-47EE-8BE7-A8E8B85C5AB8}"/>
               </a:ext>
             </a:extLst>
           </p:cNvPr>
@@ -37114,7 +37114,7 @@
           <p:cNvPr id="8" name="">
             <a:extLst xmlns:a="http://schemas.openxmlformats.org/drawingml/2006/main">
               <a:ext uri="{FF2B5EF4-FFF2-40B4-BE49-F238E27FC236}">
-                <a16:creationId xmlns:a16="http://schemas.microsoft.com/office/drawing/2014/main" id="{B804D8B7-BD22-4AB8-B06B-8A2CC7C9DCAC}"/>
+                <a16:creationId xmlns:a16="http://schemas.microsoft.com/office/drawing/2014/main" id="{82B43649-A509-46FE-BE0F-6FB5D5F6F312}"/>
               </a:ext>
             </a:extLst>
           </p:cNvPr>
@@ -37166,7 +37166,7 @@
           <p:cNvPr id="9" name="">
             <a:extLst xmlns:a="http://schemas.openxmlformats.org/drawingml/2006/main">
               <a:ext uri="{FF2B5EF4-FFF2-40B4-BE49-F238E27FC236}">
-                <a16:creationId xmlns:a16="http://schemas.microsoft.com/office/drawing/2014/main" id="{ADB789F0-375A-4A09-AEF7-C1C1D1FE416C}"/>
+                <a16:creationId xmlns:a16="http://schemas.microsoft.com/office/drawing/2014/main" id="{9D4DF4A6-4F12-4819-9FA5-6D739230F91E}"/>
               </a:ext>
             </a:extLst>
           </p:cNvPr>
@@ -37218,7 +37218,7 @@
           <p:cNvPr id="10" name="">
             <a:extLst xmlns:a="http://schemas.openxmlformats.org/drawingml/2006/main">
               <a:ext uri="{FF2B5EF4-FFF2-40B4-BE49-F238E27FC236}">
-                <a16:creationId xmlns:a16="http://schemas.microsoft.com/office/drawing/2014/main" id="{F036E63A-3240-4189-82CB-6A14B8388330}"/>
+                <a16:creationId xmlns:a16="http://schemas.microsoft.com/office/drawing/2014/main" id="{25203088-E5EA-40AC-BAF0-3312B5D47ADD}"/>
               </a:ext>
             </a:extLst>
           </p:cNvPr>
@@ -37270,7 +37270,7 @@
           <p:cNvPr id="11" name="">
             <a:extLst xmlns:a="http://schemas.openxmlformats.org/drawingml/2006/main">
               <a:ext uri="{FF2B5EF4-FFF2-40B4-BE49-F238E27FC236}">
-                <a16:creationId xmlns:a16="http://schemas.microsoft.com/office/drawing/2014/main" id="{255CA2CD-1C1D-4E29-99C2-DA9F528B69CD}"/>
+                <a16:creationId xmlns:a16="http://schemas.microsoft.com/office/drawing/2014/main" id="{D555E913-BB0D-438D-9403-AED230DC83EC}"/>
               </a:ext>
             </a:extLst>
           </p:cNvPr>
@@ -37317,10 +37317,10 @@
           <p:nvPr/>
         </p:nvPicPr>
         <p:blipFill>
-          <a:blip xmlns:r="http://schemas.openxmlformats.org/officeDocument/2006/relationships" xmlns:a="http://schemas.openxmlformats.org/drawingml/2006/main" r:embed="R2d1d6eb3effc4943">
+          <a:blip xmlns:r="http://schemas.openxmlformats.org/officeDocument/2006/relationships" xmlns:a="http://schemas.openxmlformats.org/drawingml/2006/main" r:embed="R763fab52b297463c">
             <a:extLst>
               <a:ext uri="{96DAC541-7B7A-43D3-8B79-37D633B846F1}">
-                <asvg:svgBlip xmlns:asvg="http://schemas.microsoft.com/office/drawing/2016/SVG/main" r:embed="R69eb353e8a344a8a"/>
+                <asvg:svgBlip xmlns:asvg="http://schemas.microsoft.com/office/drawing/2016/SVG/main" r:embed="Rc8f1327803184728"/>
               </a:ext>
             </a:extLst>
           </a:blip>
@@ -37341,7 +37341,7 @@
           <p:cNvPr id="13" name="">
             <a:extLst xmlns:a="http://schemas.openxmlformats.org/drawingml/2006/main">
               <a:ext uri="{FF2B5EF4-FFF2-40B4-BE49-F238E27FC236}">
-                <a16:creationId xmlns:a16="http://schemas.microsoft.com/office/drawing/2014/main" id="{77A7C722-828D-4FF5-9564-21D1C2AFFA95}"/>
+                <a16:creationId xmlns:a16="http://schemas.microsoft.com/office/drawing/2014/main" id="{EF6C5CDE-D69D-40CD-A045-645DAE41CDDE}"/>
               </a:ext>
             </a:extLst>
           </p:cNvPr>
@@ -37374,7 +37374,7 @@
           <p:cNvPr id="14" name="">
             <a:extLst xmlns:a="http://schemas.openxmlformats.org/drawingml/2006/main">
               <a:ext uri="{FF2B5EF4-FFF2-40B4-BE49-F238E27FC236}">
-                <a16:creationId xmlns:a16="http://schemas.microsoft.com/office/drawing/2014/main" id="{1FC27747-BA9F-4EFC-96D6-3393AFC03559}"/>
+                <a16:creationId xmlns:a16="http://schemas.microsoft.com/office/drawing/2014/main" id="{87013D7B-F518-4606-A786-A01BCFEE17DB}"/>
               </a:ext>
             </a:extLst>
           </p:cNvPr>
@@ -37426,7 +37426,7 @@
           <p:cNvPr id="15" name="">
             <a:extLst xmlns:a="http://schemas.openxmlformats.org/drawingml/2006/main">
               <a:ext uri="{FF2B5EF4-FFF2-40B4-BE49-F238E27FC236}">
-                <a16:creationId xmlns:a16="http://schemas.microsoft.com/office/drawing/2014/main" id="{FF7D664E-32CB-4D6C-AD9D-6EE404EB229E}"/>
+                <a16:creationId xmlns:a16="http://schemas.microsoft.com/office/drawing/2014/main" id="{F01A2EF1-B5FD-4BBB-804D-D6657EE01FB8}"/>
               </a:ext>
             </a:extLst>
           </p:cNvPr>
@@ -37459,7 +37459,7 @@
           <p:cNvPr id="16" name="">
             <a:extLst xmlns:a="http://schemas.openxmlformats.org/drawingml/2006/main">
               <a:ext uri="{FF2B5EF4-FFF2-40B4-BE49-F238E27FC236}">
-                <a16:creationId xmlns:a16="http://schemas.microsoft.com/office/drawing/2014/main" id="{3B7B7828-31DF-49ED-8698-B66C6CC1E5E1}"/>
+                <a16:creationId xmlns:a16="http://schemas.microsoft.com/office/drawing/2014/main" id="{69247309-3621-4BDC-9190-017D2687216D}"/>
               </a:ext>
             </a:extLst>
           </p:cNvPr>
@@ -37511,7 +37511,7 @@
           <p:cNvPr id="17" name="">
             <a:extLst xmlns:a="http://schemas.openxmlformats.org/drawingml/2006/main">
               <a:ext uri="{FF2B5EF4-FFF2-40B4-BE49-F238E27FC236}">
-                <a16:creationId xmlns:a16="http://schemas.microsoft.com/office/drawing/2014/main" id="{17205AF3-8BFB-4CDB-B62E-733520DB1E67}"/>
+                <a16:creationId xmlns:a16="http://schemas.microsoft.com/office/drawing/2014/main" id="{1A2E2549-427F-48A6-BE0A-6E15B8DC0F38}"/>
               </a:ext>
             </a:extLst>
           </p:cNvPr>
@@ -37544,7 +37544,7 @@
           <p:cNvPr id="18" name="">
             <a:extLst xmlns:a="http://schemas.openxmlformats.org/drawingml/2006/main">
               <a:ext uri="{FF2B5EF4-FFF2-40B4-BE49-F238E27FC236}">
-                <a16:creationId xmlns:a16="http://schemas.microsoft.com/office/drawing/2014/main" id="{EAB8FE0B-07F9-4E37-BCA6-01D4AA00F803}"/>
+                <a16:creationId xmlns:a16="http://schemas.microsoft.com/office/drawing/2014/main" id="{41127A28-11C6-4BE8-9579-B536828CBFD8}"/>
               </a:ext>
             </a:extLst>
           </p:cNvPr>
@@ -37596,7 +37596,7 @@
           <p:cNvPr id="19" name="">
             <a:extLst xmlns:a="http://schemas.openxmlformats.org/drawingml/2006/main">
               <a:ext uri="{FF2B5EF4-FFF2-40B4-BE49-F238E27FC236}">
-                <a16:creationId xmlns:a16="http://schemas.microsoft.com/office/drawing/2014/main" id="{ACD91093-829C-4977-8640-80489AC2A14C}"/>
+                <a16:creationId xmlns:a16="http://schemas.microsoft.com/office/drawing/2014/main" id="{05E17B92-DF01-433C-B9E3-CC55D94E78A6}"/>
               </a:ext>
             </a:extLst>
           </p:cNvPr>
@@ -37648,7 +37648,7 @@
           <p:cNvPr id="20" name="">
             <a:extLst xmlns:a="http://schemas.openxmlformats.org/drawingml/2006/main">
               <a:ext uri="{FF2B5EF4-FFF2-40B4-BE49-F238E27FC236}">
-                <a16:creationId xmlns:a16="http://schemas.microsoft.com/office/drawing/2014/main" id="{A97EDA55-1259-41BC-9716-3F1A99078A64}"/>
+                <a16:creationId xmlns:a16="http://schemas.microsoft.com/office/drawing/2014/main" id="{FD54F81A-2B7E-46A2-8A79-74D97FE4C69D}"/>
               </a:ext>
             </a:extLst>
           </p:cNvPr>
@@ -37679,7 +37679,7 @@
           <p:cNvPr id="21" name="">
             <a:extLst xmlns:a="http://schemas.openxmlformats.org/drawingml/2006/main">
               <a:ext uri="{FF2B5EF4-FFF2-40B4-BE49-F238E27FC236}">
-                <a16:creationId xmlns:a16="http://schemas.microsoft.com/office/drawing/2014/main" id="{A348ABCE-4139-4924-A52E-091063601300}"/>
+                <a16:creationId xmlns:a16="http://schemas.microsoft.com/office/drawing/2014/main" id="{F7D3B004-EF87-4896-A01F-FE2E0C4ED209}"/>
               </a:ext>
             </a:extLst>
           </p:cNvPr>
@@ -37731,7 +37731,7 @@
           <p:cNvPr id="22" name="">
             <a:extLst xmlns:a="http://schemas.openxmlformats.org/drawingml/2006/main">
               <a:ext uri="{FF2B5EF4-FFF2-40B4-BE49-F238E27FC236}">
-                <a16:creationId xmlns:a16="http://schemas.microsoft.com/office/drawing/2014/main" id="{230E4105-2BCA-45F6-ACF8-58B84514C048}"/>
+                <a16:creationId xmlns:a16="http://schemas.microsoft.com/office/drawing/2014/main" id="{18DD43F1-71BC-4000-9745-FFA7EAED5822}"/>
               </a:ext>
             </a:extLst>
           </p:cNvPr>
@@ -37783,7 +37783,7 @@
           <p:cNvPr id="23" name="">
             <a:extLst xmlns:a="http://schemas.openxmlformats.org/drawingml/2006/main">
               <a:ext uri="{FF2B5EF4-FFF2-40B4-BE49-F238E27FC236}">
-                <a16:creationId xmlns:a16="http://schemas.microsoft.com/office/drawing/2014/main" id="{D405FAE1-67A1-4EF2-9A5A-9A96B4A23D21}"/>
+                <a16:creationId xmlns:a16="http://schemas.microsoft.com/office/drawing/2014/main" id="{114BBC1D-B968-4D52-8DF9-560BC28923F9}"/>
               </a:ext>
             </a:extLst>
           </p:cNvPr>
@@ -37835,7 +37835,7 @@
           <p:cNvPr id="24" name="">
             <a:extLst xmlns:a="http://schemas.openxmlformats.org/drawingml/2006/main">
               <a:ext uri="{FF2B5EF4-FFF2-40B4-BE49-F238E27FC236}">
-                <a16:creationId xmlns:a16="http://schemas.microsoft.com/office/drawing/2014/main" id="{757670FA-0E77-4306-BD3A-25FE98E2EEDF}"/>
+                <a16:creationId xmlns:a16="http://schemas.microsoft.com/office/drawing/2014/main" id="{57FC936A-3533-48B2-99C5-BFEF7446A360}"/>
               </a:ext>
             </a:extLst>
           </p:cNvPr>
@@ -37887,7 +37887,7 @@
           <p:cNvPr id="25" name="">
             <a:extLst xmlns:a="http://schemas.openxmlformats.org/drawingml/2006/main">
               <a:ext uri="{FF2B5EF4-FFF2-40B4-BE49-F238E27FC236}">
-                <a16:creationId xmlns:a16="http://schemas.microsoft.com/office/drawing/2014/main" id="{0CB4D01A-5895-4833-AA21-9AB26950588C}"/>
+                <a16:creationId xmlns:a16="http://schemas.microsoft.com/office/drawing/2014/main" id="{76285355-2950-41A2-A785-44B6A59EB160}"/>
               </a:ext>
             </a:extLst>
           </p:cNvPr>
@@ -37939,7 +37939,7 @@
           <p:cNvPr id="26" name="">
             <a:extLst xmlns:a="http://schemas.openxmlformats.org/drawingml/2006/main">
               <a:ext uri="{FF2B5EF4-FFF2-40B4-BE49-F238E27FC236}">
-                <a16:creationId xmlns:a16="http://schemas.microsoft.com/office/drawing/2014/main" id="{E21EFEA0-7816-402A-BB0E-865C49941602}"/>
+                <a16:creationId xmlns:a16="http://schemas.microsoft.com/office/drawing/2014/main" id="{F007833B-F86A-4020-BB34-6971394D2430}"/>
               </a:ext>
             </a:extLst>
           </p:cNvPr>
@@ -37989,7 +37989,7 @@
     </p:spTree>
     <p:extLst>
       <p:ext uri="{BB962C8B-B14F-4D97-AF65-F5344CB8AC3E}">
-        <p14:creationId xmlns:p14="http://schemas.microsoft.com/office/powerpoint/2010/main" val="2080369573"/>
+        <p14:creationId xmlns:p14="http://schemas.microsoft.com/office/powerpoint/2010/main" val="603692482"/>
       </p:ext>
     </p:extLst>
   </p:cSld>
@@ -38020,7 +38020,7 @@
           <p:cNvPr id="35" name="">
             <a:extLst xmlns:a="http://schemas.openxmlformats.org/drawingml/2006/main">
               <a:ext uri="{FF2B5EF4-FFF2-40B4-BE49-F238E27FC236}">
-                <a16:creationId xmlns:a16="http://schemas.microsoft.com/office/drawing/2014/main" id="{2E292ACC-AE2E-48BF-85CF-7ED3CBE85631}"/>
+                <a16:creationId xmlns:a16="http://schemas.microsoft.com/office/drawing/2014/main" id="{881A4FBA-57B6-449A-BCEB-483273D9A83E}"/>
               </a:ext>
             </a:extLst>
           </p:cNvPr>
@@ -38053,7 +38053,7 @@
           <p:cNvPr id="2" name="">
             <a:extLst xmlns:a="http://schemas.openxmlformats.org/drawingml/2006/main">
               <a:ext uri="{FF2B5EF4-FFF2-40B4-BE49-F238E27FC236}">
-                <a16:creationId xmlns:a16="http://schemas.microsoft.com/office/drawing/2014/main" id="{9EA93074-1023-4706-BAF1-106A1E57C901}"/>
+                <a16:creationId xmlns:a16="http://schemas.microsoft.com/office/drawing/2014/main" id="{54D4B18D-88B5-4039-942A-27BA0F8EA39D}"/>
               </a:ext>
             </a:extLst>
           </p:cNvPr>
@@ -38084,7 +38084,7 @@
           <p:cNvPr id="3" name="">
             <a:extLst xmlns:a="http://schemas.openxmlformats.org/drawingml/2006/main">
               <a:ext uri="{FF2B5EF4-FFF2-40B4-BE49-F238E27FC236}">
-                <a16:creationId xmlns:a16="http://schemas.microsoft.com/office/drawing/2014/main" id="{92705BA2-F3CB-4087-92B6-5ACFE29BC8ED}"/>
+                <a16:creationId xmlns:a16="http://schemas.microsoft.com/office/drawing/2014/main" id="{65CBEEC9-80BF-405A-ABAA-E73A4AE496E6}"/>
               </a:ext>
             </a:extLst>
           </p:cNvPr>
@@ -38136,7 +38136,7 @@
           <p:cNvPr id="4" name="">
             <a:extLst xmlns:a="http://schemas.openxmlformats.org/drawingml/2006/main">
               <a:ext uri="{FF2B5EF4-FFF2-40B4-BE49-F238E27FC236}">
-                <a16:creationId xmlns:a16="http://schemas.microsoft.com/office/drawing/2014/main" id="{262A5319-7B03-4C16-800D-44203001F86A}"/>
+                <a16:creationId xmlns:a16="http://schemas.microsoft.com/office/drawing/2014/main" id="{C8FBBD62-E42E-4431-9CD7-3355FB3FEFB1}"/>
               </a:ext>
             </a:extLst>
           </p:cNvPr>
@@ -38188,7 +38188,7 @@
           <p:cNvPr id="5" name="">
             <a:extLst xmlns:a="http://schemas.openxmlformats.org/drawingml/2006/main">
               <a:ext uri="{FF2B5EF4-FFF2-40B4-BE49-F238E27FC236}">
-                <a16:creationId xmlns:a16="http://schemas.microsoft.com/office/drawing/2014/main" id="{F838FC2F-426B-4013-850A-E63DCD834F32}"/>
+                <a16:creationId xmlns:a16="http://schemas.microsoft.com/office/drawing/2014/main" id="{9341F068-ED18-4AC3-AB8B-D6A37244B7D8}"/>
               </a:ext>
             </a:extLst>
           </p:cNvPr>
@@ -38223,7 +38223,7 @@
           <p:nvPr/>
         </p:nvPicPr>
         <p:blipFill>
-          <a:blip xmlns:r="http://schemas.openxmlformats.org/officeDocument/2006/relationships" xmlns:a="http://schemas.openxmlformats.org/drawingml/2006/main" r:embed="R73983da916604a7e"/>
+          <a:blip xmlns:r="http://schemas.openxmlformats.org/officeDocument/2006/relationships" xmlns:a="http://schemas.openxmlformats.org/drawingml/2006/main" r:embed="R8d7e083856234368"/>
           <a:stretch xmlns:a="http://schemas.openxmlformats.org/drawingml/2006/main"/>
         </p:blipFill>
         <p:spPr>
@@ -38241,7 +38241,7 @@
           <p:cNvPr id="7" name="">
             <a:extLst xmlns:a="http://schemas.openxmlformats.org/drawingml/2006/main">
               <a:ext uri="{FF2B5EF4-FFF2-40B4-BE49-F238E27FC236}">
-                <a16:creationId xmlns:a16="http://schemas.microsoft.com/office/drawing/2014/main" id="{7ADCE55C-A767-4A01-887F-A83FB396A569}"/>
+                <a16:creationId xmlns:a16="http://schemas.microsoft.com/office/drawing/2014/main" id="{3EF26C2B-97A8-429C-9FE2-4EA108392810}"/>
               </a:ext>
             </a:extLst>
           </p:cNvPr>
@@ -38293,7 +38293,7 @@
           <p:cNvPr id="8" name="">
             <a:extLst xmlns:a="http://schemas.openxmlformats.org/drawingml/2006/main">
               <a:ext uri="{FF2B5EF4-FFF2-40B4-BE49-F238E27FC236}">
-                <a16:creationId xmlns:a16="http://schemas.microsoft.com/office/drawing/2014/main" id="{E00AACC3-78AF-43E7-848B-49178BAA9CE5}"/>
+                <a16:creationId xmlns:a16="http://schemas.microsoft.com/office/drawing/2014/main" id="{C6F26924-34E2-4B3A-9489-FA898E84E7DB}"/>
               </a:ext>
             </a:extLst>
           </p:cNvPr>
@@ -38345,7 +38345,7 @@
           <p:cNvPr id="9" name="">
             <a:extLst xmlns:a="http://schemas.openxmlformats.org/drawingml/2006/main">
               <a:ext uri="{FF2B5EF4-FFF2-40B4-BE49-F238E27FC236}">
-                <a16:creationId xmlns:a16="http://schemas.microsoft.com/office/drawing/2014/main" id="{4AB7E80F-7F5B-4C05-83ED-54ADDF1849EB}"/>
+                <a16:creationId xmlns:a16="http://schemas.microsoft.com/office/drawing/2014/main" id="{69FB8376-F0A6-478D-A604-8158AF1C954C}"/>
               </a:ext>
             </a:extLst>
           </p:cNvPr>
@@ -38397,7 +38397,7 @@
           <p:cNvPr id="10" name="">
             <a:extLst xmlns:a="http://schemas.openxmlformats.org/drawingml/2006/main">
               <a:ext uri="{FF2B5EF4-FFF2-40B4-BE49-F238E27FC236}">
-                <a16:creationId xmlns:a16="http://schemas.microsoft.com/office/drawing/2014/main" id="{0069E83E-E789-4489-84D8-A4F5CFD694B0}"/>
+                <a16:creationId xmlns:a16="http://schemas.microsoft.com/office/drawing/2014/main" id="{41F432F3-1DB3-4186-BE4B-DAD6056D5743}"/>
               </a:ext>
             </a:extLst>
           </p:cNvPr>
@@ -38449,7 +38449,7 @@
           <p:cNvPr id="11" name="">
             <a:extLst xmlns:a="http://schemas.openxmlformats.org/drawingml/2006/main">
               <a:ext uri="{FF2B5EF4-FFF2-40B4-BE49-F238E27FC236}">
-                <a16:creationId xmlns:a16="http://schemas.microsoft.com/office/drawing/2014/main" id="{AA07473B-67BE-4F8F-BCE5-4999E39D7EF8}"/>
+                <a16:creationId xmlns:a16="http://schemas.microsoft.com/office/drawing/2014/main" id="{0580AE73-EF1D-4FB8-82BE-E77E164C3700}"/>
               </a:ext>
             </a:extLst>
           </p:cNvPr>
@@ -38496,10 +38496,10 @@
           <p:nvPr/>
         </p:nvPicPr>
         <p:blipFill>
-          <a:blip xmlns:r="http://schemas.openxmlformats.org/officeDocument/2006/relationships" xmlns:a="http://schemas.openxmlformats.org/drawingml/2006/main" r:embed="R3eb7a7e0bf5b43a2">
+          <a:blip xmlns:r="http://schemas.openxmlformats.org/officeDocument/2006/relationships" xmlns:a="http://schemas.openxmlformats.org/drawingml/2006/main" r:embed="Rb25f83938c8248d0">
             <a:extLst>
               <a:ext uri="{96DAC541-7B7A-43D3-8B79-37D633B846F1}">
-                <asvg:svgBlip xmlns:asvg="http://schemas.microsoft.com/office/drawing/2016/SVG/main" r:embed="R103985b19fe64f5f"/>
+                <asvg:svgBlip xmlns:asvg="http://schemas.microsoft.com/office/drawing/2016/SVG/main" r:embed="R2671a709d0df4b84"/>
               </a:ext>
             </a:extLst>
           </a:blip>
@@ -38520,7 +38520,7 @@
           <p:cNvPr id="13" name="">
             <a:extLst xmlns:a="http://schemas.openxmlformats.org/drawingml/2006/main">
               <a:ext uri="{FF2B5EF4-FFF2-40B4-BE49-F238E27FC236}">
-                <a16:creationId xmlns:a16="http://schemas.microsoft.com/office/drawing/2014/main" id="{A27EA4D5-DA11-4EBF-BA38-55388AE1C11A}"/>
+                <a16:creationId xmlns:a16="http://schemas.microsoft.com/office/drawing/2014/main" id="{5AF788D7-CE57-4268-AF94-B5DC10FD0E21}"/>
               </a:ext>
             </a:extLst>
           </p:cNvPr>
@@ -38553,7 +38553,7 @@
           <p:cNvPr id="14" name="">
             <a:extLst xmlns:a="http://schemas.openxmlformats.org/drawingml/2006/main">
               <a:ext uri="{FF2B5EF4-FFF2-40B4-BE49-F238E27FC236}">
-                <a16:creationId xmlns:a16="http://schemas.microsoft.com/office/drawing/2014/main" id="{22FD5E1E-6396-485E-B8D5-8480E883E619}"/>
+                <a16:creationId xmlns:a16="http://schemas.microsoft.com/office/drawing/2014/main" id="{A94806B4-D26C-465A-97A3-D5696258E819}"/>
               </a:ext>
             </a:extLst>
           </p:cNvPr>
@@ -38605,7 +38605,7 @@
           <p:cNvPr id="15" name="">
             <a:extLst xmlns:a="http://schemas.openxmlformats.org/drawingml/2006/main">
               <a:ext uri="{FF2B5EF4-FFF2-40B4-BE49-F238E27FC236}">
-                <a16:creationId xmlns:a16="http://schemas.microsoft.com/office/drawing/2014/main" id="{C6CC4C59-0384-428F-B07E-136F764F9E95}"/>
+                <a16:creationId xmlns:a16="http://schemas.microsoft.com/office/drawing/2014/main" id="{678E4846-2C71-46F1-ACCF-F57EC12AC57C}"/>
               </a:ext>
             </a:extLst>
           </p:cNvPr>
@@ -38638,7 +38638,7 @@
           <p:cNvPr id="16" name="">
             <a:extLst xmlns:a="http://schemas.openxmlformats.org/drawingml/2006/main">
               <a:ext uri="{FF2B5EF4-FFF2-40B4-BE49-F238E27FC236}">
-                <a16:creationId xmlns:a16="http://schemas.microsoft.com/office/drawing/2014/main" id="{1C688A7C-DB8D-41FB-8200-3B088BE3DA20}"/>
+                <a16:creationId xmlns:a16="http://schemas.microsoft.com/office/drawing/2014/main" id="{75651EE9-F632-4E29-BA4F-17942CB0F716}"/>
               </a:ext>
             </a:extLst>
           </p:cNvPr>
@@ -38690,7 +38690,7 @@
           <p:cNvPr id="17" name="">
             <a:extLst xmlns:a="http://schemas.openxmlformats.org/drawingml/2006/main">
               <a:ext uri="{FF2B5EF4-FFF2-40B4-BE49-F238E27FC236}">
-                <a16:creationId xmlns:a16="http://schemas.microsoft.com/office/drawing/2014/main" id="{BCE76FD6-38D8-4030-A1CA-A61B8336D651}"/>
+                <a16:creationId xmlns:a16="http://schemas.microsoft.com/office/drawing/2014/main" id="{ACA1B9C4-2DEA-4DCE-8922-41F2F7B30C35}"/>
               </a:ext>
             </a:extLst>
           </p:cNvPr>
@@ -38723,7 +38723,7 @@
           <p:cNvPr id="18" name="">
             <a:extLst xmlns:a="http://schemas.openxmlformats.org/drawingml/2006/main">
               <a:ext uri="{FF2B5EF4-FFF2-40B4-BE49-F238E27FC236}">
-                <a16:creationId xmlns:a16="http://schemas.microsoft.com/office/drawing/2014/main" id="{DD8971BF-3867-4D67-ABBE-9E6827EBD45F}"/>
+                <a16:creationId xmlns:a16="http://schemas.microsoft.com/office/drawing/2014/main" id="{E50ACEE2-AB27-447C-9D7B-7BC1343BD802}"/>
               </a:ext>
             </a:extLst>
           </p:cNvPr>
@@ -38775,7 +38775,7 @@
           <p:cNvPr id="19" name="">
             <a:extLst xmlns:a="http://schemas.openxmlformats.org/drawingml/2006/main">
               <a:ext uri="{FF2B5EF4-FFF2-40B4-BE49-F238E27FC236}">
-                <a16:creationId xmlns:a16="http://schemas.microsoft.com/office/drawing/2014/main" id="{8606EA67-9E53-4D1E-8CBF-05417A5549D5}"/>
+                <a16:creationId xmlns:a16="http://schemas.microsoft.com/office/drawing/2014/main" id="{0FE5C5F6-703A-4C4A-A5C2-CDDB666E2031}"/>
               </a:ext>
             </a:extLst>
           </p:cNvPr>
@@ -38808,7 +38808,7 @@
           <p:cNvPr id="20" name="">
             <a:extLst xmlns:a="http://schemas.openxmlformats.org/drawingml/2006/main">
               <a:ext uri="{FF2B5EF4-FFF2-40B4-BE49-F238E27FC236}">
-                <a16:creationId xmlns:a16="http://schemas.microsoft.com/office/drawing/2014/main" id="{0A5B060B-79D7-413C-878F-C52F0947830E}"/>
+                <a16:creationId xmlns:a16="http://schemas.microsoft.com/office/drawing/2014/main" id="{6AE41729-8551-4EAE-AA54-D97AA2AF5C41}"/>
               </a:ext>
             </a:extLst>
           </p:cNvPr>
@@ -38860,7 +38860,7 @@
           <p:cNvPr id="21" name="">
             <a:extLst xmlns:a="http://schemas.openxmlformats.org/drawingml/2006/main">
               <a:ext uri="{FF2B5EF4-FFF2-40B4-BE49-F238E27FC236}">
-                <a16:creationId xmlns:a16="http://schemas.microsoft.com/office/drawing/2014/main" id="{E699BADE-6E2D-47AB-8501-FB42D0C5209C}"/>
+                <a16:creationId xmlns:a16="http://schemas.microsoft.com/office/drawing/2014/main" id="{2B2B7053-B0B7-4AC4-80F1-B781FD708207}"/>
               </a:ext>
             </a:extLst>
           </p:cNvPr>
@@ -38893,7 +38893,7 @@
           <p:cNvPr id="22" name="">
             <a:extLst xmlns:a="http://schemas.openxmlformats.org/drawingml/2006/main">
               <a:ext uri="{FF2B5EF4-FFF2-40B4-BE49-F238E27FC236}">
-                <a16:creationId xmlns:a16="http://schemas.microsoft.com/office/drawing/2014/main" id="{F276D870-6ECB-4170-8C69-4B659E9EC17D}"/>
+                <a16:creationId xmlns:a16="http://schemas.microsoft.com/office/drawing/2014/main" id="{CD567A63-A289-4AB3-957F-F0C0225B6528}"/>
               </a:ext>
             </a:extLst>
           </p:cNvPr>
@@ -38945,7 +38945,7 @@
           <p:cNvPr id="23" name="">
             <a:extLst xmlns:a="http://schemas.openxmlformats.org/drawingml/2006/main">
               <a:ext uri="{FF2B5EF4-FFF2-40B4-BE49-F238E27FC236}">
-                <a16:creationId xmlns:a16="http://schemas.microsoft.com/office/drawing/2014/main" id="{6BD78645-3C83-446C-9777-350A15BFD185}"/>
+                <a16:creationId xmlns:a16="http://schemas.microsoft.com/office/drawing/2014/main" id="{FE7B8D62-95AE-47A5-A574-9FDFB4B894FF}"/>
               </a:ext>
             </a:extLst>
           </p:cNvPr>
@@ -38978,7 +38978,7 @@
           <p:cNvPr id="24" name="">
             <a:extLst xmlns:a="http://schemas.openxmlformats.org/drawingml/2006/main">
               <a:ext uri="{FF2B5EF4-FFF2-40B4-BE49-F238E27FC236}">
-                <a16:creationId xmlns:a16="http://schemas.microsoft.com/office/drawing/2014/main" id="{B36DA1CA-124D-4CA4-9D6D-344B1BBF1E87}"/>
+                <a16:creationId xmlns:a16="http://schemas.microsoft.com/office/drawing/2014/main" id="{C2AFB863-FECC-454E-A935-6A4F8C7680EA}"/>
               </a:ext>
             </a:extLst>
           </p:cNvPr>
@@ -39030,7 +39030,7 @@
           <p:cNvPr id="25" name="">
             <a:extLst xmlns:a="http://schemas.openxmlformats.org/drawingml/2006/main">
               <a:ext uri="{FF2B5EF4-FFF2-40B4-BE49-F238E27FC236}">
-                <a16:creationId xmlns:a16="http://schemas.microsoft.com/office/drawing/2014/main" id="{EBF99E2C-FE2A-42AF-95E9-438123129759}"/>
+                <a16:creationId xmlns:a16="http://schemas.microsoft.com/office/drawing/2014/main" id="{34BEE430-9C5E-4BD2-B118-CD7F899CB9F0}"/>
               </a:ext>
             </a:extLst>
           </p:cNvPr>
@@ -39063,7 +39063,7 @@
           <p:cNvPr id="26" name="">
             <a:extLst xmlns:a="http://schemas.openxmlformats.org/drawingml/2006/main">
               <a:ext uri="{FF2B5EF4-FFF2-40B4-BE49-F238E27FC236}">
-                <a16:creationId xmlns:a16="http://schemas.microsoft.com/office/drawing/2014/main" id="{C740A7C0-755A-4CAC-BD75-ECCC0C279434}"/>
+                <a16:creationId xmlns:a16="http://schemas.microsoft.com/office/drawing/2014/main" id="{805EB07D-391B-49BB-BB3B-977B9ECAF30C}"/>
               </a:ext>
             </a:extLst>
           </p:cNvPr>
@@ -39115,7 +39115,7 @@
           <p:cNvPr id="27" name="">
             <a:extLst xmlns:a="http://schemas.openxmlformats.org/drawingml/2006/main">
               <a:ext uri="{FF2B5EF4-FFF2-40B4-BE49-F238E27FC236}">
-                <a16:creationId xmlns:a16="http://schemas.microsoft.com/office/drawing/2014/main" id="{C5A94301-DFAD-44A8-9CB9-9CA311C5CC08}"/>
+                <a16:creationId xmlns:a16="http://schemas.microsoft.com/office/drawing/2014/main" id="{1C159080-F750-4638-87D8-7DF95A04FAB3}"/>
               </a:ext>
             </a:extLst>
           </p:cNvPr>
@@ -39148,7 +39148,7 @@
           <p:cNvPr id="28" name="">
             <a:extLst xmlns:a="http://schemas.openxmlformats.org/drawingml/2006/main">
               <a:ext uri="{FF2B5EF4-FFF2-40B4-BE49-F238E27FC236}">
-                <a16:creationId xmlns:a16="http://schemas.microsoft.com/office/drawing/2014/main" id="{0B46A24B-9E62-48FF-93EE-85CE8D767C7F}"/>
+                <a16:creationId xmlns:a16="http://schemas.microsoft.com/office/drawing/2014/main" id="{14726CB3-DA9E-48E6-BB16-CC116A6D77F2}"/>
               </a:ext>
             </a:extLst>
           </p:cNvPr>
@@ -39200,7 +39200,7 @@
           <p:cNvPr id="29" name="">
             <a:extLst xmlns:a="http://schemas.openxmlformats.org/drawingml/2006/main">
               <a:ext uri="{FF2B5EF4-FFF2-40B4-BE49-F238E27FC236}">
-                <a16:creationId xmlns:a16="http://schemas.microsoft.com/office/drawing/2014/main" id="{C72D891F-80E2-44B7-80AC-195DF30DA05E}"/>
+                <a16:creationId xmlns:a16="http://schemas.microsoft.com/office/drawing/2014/main" id="{F1883017-7A99-4D08-A87A-A9D58553FF6A}"/>
               </a:ext>
             </a:extLst>
           </p:cNvPr>
@@ -39233,7 +39233,7 @@
           <p:cNvPr id="30" name="">
             <a:extLst xmlns:a="http://schemas.openxmlformats.org/drawingml/2006/main">
               <a:ext uri="{FF2B5EF4-FFF2-40B4-BE49-F238E27FC236}">
-                <a16:creationId xmlns:a16="http://schemas.microsoft.com/office/drawing/2014/main" id="{6D2BA494-3195-43AA-8BA8-65E0B5ECFC61}"/>
+                <a16:creationId xmlns:a16="http://schemas.microsoft.com/office/drawing/2014/main" id="{6EB96A04-3FA2-466D-86D4-246B27038CEC}"/>
               </a:ext>
             </a:extLst>
           </p:cNvPr>
@@ -39285,7 +39285,7 @@
           <p:cNvPr id="31" name="">
             <a:extLst xmlns:a="http://schemas.openxmlformats.org/drawingml/2006/main">
               <a:ext uri="{FF2B5EF4-FFF2-40B4-BE49-F238E27FC236}">
-                <a16:creationId xmlns:a16="http://schemas.microsoft.com/office/drawing/2014/main" id="{2809BBD5-8CAF-4107-9F47-18B1A0693405}"/>
+                <a16:creationId xmlns:a16="http://schemas.microsoft.com/office/drawing/2014/main" id="{E10C3324-1508-4B2E-9EE8-0C0021ACF626}"/>
               </a:ext>
             </a:extLst>
           </p:cNvPr>
@@ -39318,7 +39318,7 @@
           <p:cNvPr id="32" name="">
             <a:extLst xmlns:a="http://schemas.openxmlformats.org/drawingml/2006/main">
               <a:ext uri="{FF2B5EF4-FFF2-40B4-BE49-F238E27FC236}">
-                <a16:creationId xmlns:a16="http://schemas.microsoft.com/office/drawing/2014/main" id="{2079245F-7618-4ABC-887C-DCB15F218BA9}"/>
+                <a16:creationId xmlns:a16="http://schemas.microsoft.com/office/drawing/2014/main" id="{4481E3B9-B0F2-4EF8-BF7E-A1C7AD17CFCB}"/>
               </a:ext>
             </a:extLst>
           </p:cNvPr>
@@ -39370,7 +39370,7 @@
           <p:cNvPr id="33" name="">
             <a:extLst xmlns:a="http://schemas.openxmlformats.org/drawingml/2006/main">
               <a:ext uri="{FF2B5EF4-FFF2-40B4-BE49-F238E27FC236}">
-                <a16:creationId xmlns:a16="http://schemas.microsoft.com/office/drawing/2014/main" id="{481EDD14-4395-4699-A5DB-113562B9B39A}"/>
+                <a16:creationId xmlns:a16="http://schemas.microsoft.com/office/drawing/2014/main" id="{4D518D91-83CC-4ACC-8B3C-07D59347F8D4}"/>
               </a:ext>
             </a:extLst>
           </p:cNvPr>
@@ -39403,7 +39403,7 @@
           <p:cNvPr id="34" name="">
             <a:extLst xmlns:a="http://schemas.openxmlformats.org/drawingml/2006/main">
               <a:ext uri="{FF2B5EF4-FFF2-40B4-BE49-F238E27FC236}">
-                <a16:creationId xmlns:a16="http://schemas.microsoft.com/office/drawing/2014/main" id="{AEDBCBD4-E62F-4990-B70E-813552DC8A04}"/>
+                <a16:creationId xmlns:a16="http://schemas.microsoft.com/office/drawing/2014/main" id="{5B510AAD-15B3-4DD5-BD8D-4E1B29D08652}"/>
               </a:ext>
             </a:extLst>
           </p:cNvPr>
@@ -39453,7 +39453,7 @@
     </p:spTree>
     <p:extLst>
       <p:ext uri="{BB962C8B-B14F-4D97-AF65-F5344CB8AC3E}">
-        <p14:creationId xmlns:p14="http://schemas.microsoft.com/office/powerpoint/2010/main" val="643012332"/>
+        <p14:creationId xmlns:p14="http://schemas.microsoft.com/office/powerpoint/2010/main" val="1633635870"/>
       </p:ext>
     </p:extLst>
   </p:cSld>
@@ -39484,7 +39484,7 @@
           <p:cNvPr id="102" name="">
             <a:extLst xmlns:a="http://schemas.openxmlformats.org/drawingml/2006/main">
               <a:ext uri="{FF2B5EF4-FFF2-40B4-BE49-F238E27FC236}">
-                <a16:creationId xmlns:a16="http://schemas.microsoft.com/office/drawing/2014/main" id="{0DB5295E-1186-483A-A9B1-9B41C89CA0CB}"/>
+                <a16:creationId xmlns:a16="http://schemas.microsoft.com/office/drawing/2014/main" id="{C45A8E44-47C9-4019-856F-F6D1C2EF2234}"/>
               </a:ext>
             </a:extLst>
           </p:cNvPr>
@@ -39517,7 +39517,7 @@
           <p:cNvPr id="2" name="">
             <a:extLst xmlns:a="http://schemas.openxmlformats.org/drawingml/2006/main">
               <a:ext uri="{FF2B5EF4-FFF2-40B4-BE49-F238E27FC236}">
-                <a16:creationId xmlns:a16="http://schemas.microsoft.com/office/drawing/2014/main" id="{00942C2C-B5FA-4CB2-85DF-4C19BA665993}"/>
+                <a16:creationId xmlns:a16="http://schemas.microsoft.com/office/drawing/2014/main" id="{6536EC23-9B44-43D8-882E-55B989CC877A}"/>
               </a:ext>
             </a:extLst>
           </p:cNvPr>
@@ -39548,7 +39548,7 @@
           <p:cNvPr id="3" name="">
             <a:extLst xmlns:a="http://schemas.openxmlformats.org/drawingml/2006/main">
               <a:ext uri="{FF2B5EF4-FFF2-40B4-BE49-F238E27FC236}">
-                <a16:creationId xmlns:a16="http://schemas.microsoft.com/office/drawing/2014/main" id="{60BDE270-267B-499D-A72F-1EDCC2E0A891}"/>
+                <a16:creationId xmlns:a16="http://schemas.microsoft.com/office/drawing/2014/main" id="{F5CDA3AB-F6DB-492A-AB82-1CF2B9C3D4D8}"/>
               </a:ext>
             </a:extLst>
           </p:cNvPr>
@@ -39600,7 +39600,7 @@
           <p:cNvPr id="4" name="">
             <a:extLst xmlns:a="http://schemas.openxmlformats.org/drawingml/2006/main">
               <a:ext uri="{FF2B5EF4-FFF2-40B4-BE49-F238E27FC236}">
-                <a16:creationId xmlns:a16="http://schemas.microsoft.com/office/drawing/2014/main" id="{353C8573-08FC-4D1F-9ABC-0BBB33749CFD}"/>
+                <a16:creationId xmlns:a16="http://schemas.microsoft.com/office/drawing/2014/main" id="{E32AD883-5107-4023-A0BB-58E67E4E2B83}"/>
               </a:ext>
             </a:extLst>
           </p:cNvPr>
@@ -39652,7 +39652,7 @@
           <p:cNvPr id="5" name="">
             <a:extLst xmlns:a="http://schemas.openxmlformats.org/drawingml/2006/main">
               <a:ext uri="{FF2B5EF4-FFF2-40B4-BE49-F238E27FC236}">
-                <a16:creationId xmlns:a16="http://schemas.microsoft.com/office/drawing/2014/main" id="{0335E5A0-7D41-4B25-92C9-D8FCD8AFBEA8}"/>
+                <a16:creationId xmlns:a16="http://schemas.microsoft.com/office/drawing/2014/main" id="{EDDB203C-320F-4EEB-A429-BD00E66D4A51}"/>
               </a:ext>
             </a:extLst>
           </p:cNvPr>
@@ -39687,7 +39687,7 @@
           <p:nvPr/>
         </p:nvPicPr>
         <p:blipFill>
-          <a:blip xmlns:r="http://schemas.openxmlformats.org/officeDocument/2006/relationships" xmlns:a="http://schemas.openxmlformats.org/drawingml/2006/main" r:embed="R36a5d2da2de043bb"/>
+          <a:blip xmlns:r="http://schemas.openxmlformats.org/officeDocument/2006/relationships" xmlns:a="http://schemas.openxmlformats.org/drawingml/2006/main" r:embed="Rb834c3ca98a24fc1"/>
           <a:stretch xmlns:a="http://schemas.openxmlformats.org/drawingml/2006/main"/>
         </p:blipFill>
         <p:spPr>
@@ -39705,7 +39705,7 @@
           <p:cNvPr id="7" name="">
             <a:extLst xmlns:a="http://schemas.openxmlformats.org/drawingml/2006/main">
               <a:ext uri="{FF2B5EF4-FFF2-40B4-BE49-F238E27FC236}">
-                <a16:creationId xmlns:a16="http://schemas.microsoft.com/office/drawing/2014/main" id="{AEFDB3A0-D1A5-4147-8575-75180269A517}"/>
+                <a16:creationId xmlns:a16="http://schemas.microsoft.com/office/drawing/2014/main" id="{989A99F6-D69F-4F53-B900-22F4345A4000}"/>
               </a:ext>
             </a:extLst>
           </p:cNvPr>
@@ -39757,7 +39757,7 @@
           <p:cNvPr id="8" name="">
             <a:extLst xmlns:a="http://schemas.openxmlformats.org/drawingml/2006/main">
               <a:ext uri="{FF2B5EF4-FFF2-40B4-BE49-F238E27FC236}">
-                <a16:creationId xmlns:a16="http://schemas.microsoft.com/office/drawing/2014/main" id="{03D85291-938A-435F-814B-FF0FA75FC42A}"/>
+                <a16:creationId xmlns:a16="http://schemas.microsoft.com/office/drawing/2014/main" id="{47204629-5B0C-4A5A-BA0E-F67BE8BA5D47}"/>
               </a:ext>
             </a:extLst>
           </p:cNvPr>
@@ -39809,7 +39809,7 @@
           <p:cNvPr id="9" name="">
             <a:extLst xmlns:a="http://schemas.openxmlformats.org/drawingml/2006/main">
               <a:ext uri="{FF2B5EF4-FFF2-40B4-BE49-F238E27FC236}">
-                <a16:creationId xmlns:a16="http://schemas.microsoft.com/office/drawing/2014/main" id="{A41D03ED-BF6A-446B-ABD4-E150F7A015F8}"/>
+                <a16:creationId xmlns:a16="http://schemas.microsoft.com/office/drawing/2014/main" id="{55F240A6-7DE9-4FB3-A3D8-4D4206202F63}"/>
               </a:ext>
             </a:extLst>
           </p:cNvPr>
@@ -39861,7 +39861,7 @@
           <p:cNvPr id="10" name="">
             <a:extLst xmlns:a="http://schemas.openxmlformats.org/drawingml/2006/main">
               <a:ext uri="{FF2B5EF4-FFF2-40B4-BE49-F238E27FC236}">
-                <a16:creationId xmlns:a16="http://schemas.microsoft.com/office/drawing/2014/main" id="{9C258D9F-08F2-478C-BC79-E826E98DA468}"/>
+                <a16:creationId xmlns:a16="http://schemas.microsoft.com/office/drawing/2014/main" id="{9D8504C0-5241-4D2F-A190-8F18C2E26B5D}"/>
               </a:ext>
             </a:extLst>
           </p:cNvPr>
@@ -39913,7 +39913,7 @@
           <p:cNvPr id="11" name="">
             <a:extLst xmlns:a="http://schemas.openxmlformats.org/drawingml/2006/main">
               <a:ext uri="{FF2B5EF4-FFF2-40B4-BE49-F238E27FC236}">
-                <a16:creationId xmlns:a16="http://schemas.microsoft.com/office/drawing/2014/main" id="{847B9DC7-846F-4227-87E1-9EC322CAF9B2}"/>
+                <a16:creationId xmlns:a16="http://schemas.microsoft.com/office/drawing/2014/main" id="{D8CA01EB-B046-4244-9B45-DC143246056F}"/>
               </a:ext>
             </a:extLst>
           </p:cNvPr>
@@ -39944,7 +39944,7 @@
           <p:cNvPr id="12" name="">
             <a:extLst xmlns:a="http://schemas.openxmlformats.org/drawingml/2006/main">
               <a:ext uri="{FF2B5EF4-FFF2-40B4-BE49-F238E27FC236}">
-                <a16:creationId xmlns:a16="http://schemas.microsoft.com/office/drawing/2014/main" id="{998030AC-C45E-4DD8-B642-F7F1902364B3}"/>
+                <a16:creationId xmlns:a16="http://schemas.microsoft.com/office/drawing/2014/main" id="{7ED04110-EE19-40B6-A0AA-B1D8914FCA73}"/>
               </a:ext>
             </a:extLst>
           </p:cNvPr>
@@ -39975,7 +39975,7 @@
           <p:cNvPr id="13" name="">
             <a:extLst xmlns:a="http://schemas.openxmlformats.org/drawingml/2006/main">
               <a:ext uri="{FF2B5EF4-FFF2-40B4-BE49-F238E27FC236}">
-                <a16:creationId xmlns:a16="http://schemas.microsoft.com/office/drawing/2014/main" id="{0C896123-046C-4CEC-A550-3E4F7B1D0B04}"/>
+                <a16:creationId xmlns:a16="http://schemas.microsoft.com/office/drawing/2014/main" id="{4ADC50AD-4BD9-4B7D-8C63-DC6F4EEFCA8B}"/>
               </a:ext>
             </a:extLst>
           </p:cNvPr>
@@ -40027,7 +40027,7 @@
           <p:cNvPr id="14" name="">
             <a:extLst xmlns:a="http://schemas.openxmlformats.org/drawingml/2006/main">
               <a:ext uri="{FF2B5EF4-FFF2-40B4-BE49-F238E27FC236}">
-                <a16:creationId xmlns:a16="http://schemas.microsoft.com/office/drawing/2014/main" id="{37097B24-8F5F-4F41-A36B-8902ADA813CC}"/>
+                <a16:creationId xmlns:a16="http://schemas.microsoft.com/office/drawing/2014/main" id="{77F0309B-9FF6-4E7A-A2EA-455430FCC993}"/>
               </a:ext>
             </a:extLst>
           </p:cNvPr>
@@ -40079,7 +40079,7 @@
           <p:cNvPr id="15" name="">
             <a:extLst xmlns:a="http://schemas.openxmlformats.org/drawingml/2006/main">
               <a:ext uri="{FF2B5EF4-FFF2-40B4-BE49-F238E27FC236}">
-                <a16:creationId xmlns:a16="http://schemas.microsoft.com/office/drawing/2014/main" id="{4D1E5209-C85E-405A-9157-911C75AE7BB8}"/>
+                <a16:creationId xmlns:a16="http://schemas.microsoft.com/office/drawing/2014/main" id="{0CAF5416-13CB-49D8-B215-64B2FC72B108}"/>
               </a:ext>
             </a:extLst>
           </p:cNvPr>
@@ -40131,7 +40131,7 @@
           <p:cNvPr id="16" name="">
             <a:extLst xmlns:a="http://schemas.openxmlformats.org/drawingml/2006/main">
               <a:ext uri="{FF2B5EF4-FFF2-40B4-BE49-F238E27FC236}">
-                <a16:creationId xmlns:a16="http://schemas.microsoft.com/office/drawing/2014/main" id="{2E790B5D-55B6-47A1-B143-3C2ADC4BD2A5}"/>
+                <a16:creationId xmlns:a16="http://schemas.microsoft.com/office/drawing/2014/main" id="{9B12E16A-4CA9-4B59-9D00-ECD5F9B6070F}"/>
               </a:ext>
             </a:extLst>
           </p:cNvPr>
@@ -40183,7 +40183,7 @@
           <p:cNvPr id="17" name="">
             <a:extLst xmlns:a="http://schemas.openxmlformats.org/drawingml/2006/main">
               <a:ext uri="{FF2B5EF4-FFF2-40B4-BE49-F238E27FC236}">
-                <a16:creationId xmlns:a16="http://schemas.microsoft.com/office/drawing/2014/main" id="{1E212483-C3C7-4638-8E59-D640F3511230}"/>
+                <a16:creationId xmlns:a16="http://schemas.microsoft.com/office/drawing/2014/main" id="{255481F7-7222-422E-BEF3-E9CBCFE7EA2B}"/>
               </a:ext>
             </a:extLst>
           </p:cNvPr>
@@ -40235,7 +40235,7 @@
           <p:cNvPr id="18" name="">
             <a:extLst xmlns:a="http://schemas.openxmlformats.org/drawingml/2006/main">
               <a:ext uri="{FF2B5EF4-FFF2-40B4-BE49-F238E27FC236}">
-                <a16:creationId xmlns:a16="http://schemas.microsoft.com/office/drawing/2014/main" id="{B30BA70B-11FC-49F6-AB12-E693AB898138}"/>
+                <a16:creationId xmlns:a16="http://schemas.microsoft.com/office/drawing/2014/main" id="{C8584A01-9DC8-4191-AA7D-DBF992221B68}"/>
               </a:ext>
             </a:extLst>
           </p:cNvPr>
@@ -40266,7 +40266,7 @@
           <p:cNvPr id="19" name="">
             <a:extLst xmlns:a="http://schemas.openxmlformats.org/drawingml/2006/main">
               <a:ext uri="{FF2B5EF4-FFF2-40B4-BE49-F238E27FC236}">
-                <a16:creationId xmlns:a16="http://schemas.microsoft.com/office/drawing/2014/main" id="{C2E5E0AD-ED5E-42A2-941E-FCC83810BD0D}"/>
+                <a16:creationId xmlns:a16="http://schemas.microsoft.com/office/drawing/2014/main" id="{F0C9D150-F514-43B8-BE8D-03703E3EF643}"/>
               </a:ext>
             </a:extLst>
           </p:cNvPr>
@@ -40318,7 +40318,7 @@
           <p:cNvPr id="20" name="">
             <a:extLst xmlns:a="http://schemas.openxmlformats.org/drawingml/2006/main">
               <a:ext uri="{FF2B5EF4-FFF2-40B4-BE49-F238E27FC236}">
-                <a16:creationId xmlns:a16="http://schemas.microsoft.com/office/drawing/2014/main" id="{2D98C540-7539-4D89-B878-6C4EB915E566}"/>
+                <a16:creationId xmlns:a16="http://schemas.microsoft.com/office/drawing/2014/main" id="{382F389A-F2E4-4665-95FA-0FC1D2A14958}"/>
               </a:ext>
             </a:extLst>
           </p:cNvPr>
@@ -40370,7 +40370,7 @@
           <p:cNvPr id="21" name="">
             <a:extLst xmlns:a="http://schemas.openxmlformats.org/drawingml/2006/main">
               <a:ext uri="{FF2B5EF4-FFF2-40B4-BE49-F238E27FC236}">
-                <a16:creationId xmlns:a16="http://schemas.microsoft.com/office/drawing/2014/main" id="{2D9214FB-3733-4A7C-B700-6DED854F6DF2}"/>
+                <a16:creationId xmlns:a16="http://schemas.microsoft.com/office/drawing/2014/main" id="{EEBCA5D6-364A-4ABD-AD71-243178F6CDD8}"/>
               </a:ext>
             </a:extLst>
           </p:cNvPr>
@@ -40422,7 +40422,7 @@
           <p:cNvPr id="22" name="">
             <a:extLst xmlns:a="http://schemas.openxmlformats.org/drawingml/2006/main">
               <a:ext uri="{FF2B5EF4-FFF2-40B4-BE49-F238E27FC236}">
-                <a16:creationId xmlns:a16="http://schemas.microsoft.com/office/drawing/2014/main" id="{62973F82-22DD-469A-9346-E0754458F12F}"/>
+                <a16:creationId xmlns:a16="http://schemas.microsoft.com/office/drawing/2014/main" id="{669DCF60-42EB-4A6F-AB7A-66B7C7F475DF}"/>
               </a:ext>
             </a:extLst>
           </p:cNvPr>
@@ -40474,7 +40474,7 @@
           <p:cNvPr id="23" name="">
             <a:extLst xmlns:a="http://schemas.openxmlformats.org/drawingml/2006/main">
               <a:ext uri="{FF2B5EF4-FFF2-40B4-BE49-F238E27FC236}">
-                <a16:creationId xmlns:a16="http://schemas.microsoft.com/office/drawing/2014/main" id="{AFE57977-6C0A-422D-BCE3-9792ACF47B77}"/>
+                <a16:creationId xmlns:a16="http://schemas.microsoft.com/office/drawing/2014/main" id="{2D38F75F-406C-4817-A354-64143B1C3710}"/>
               </a:ext>
             </a:extLst>
           </p:cNvPr>
@@ -40526,7 +40526,7 @@
           <p:cNvPr id="24" name="">
             <a:extLst xmlns:a="http://schemas.openxmlformats.org/drawingml/2006/main">
               <a:ext uri="{FF2B5EF4-FFF2-40B4-BE49-F238E27FC236}">
-                <a16:creationId xmlns:a16="http://schemas.microsoft.com/office/drawing/2014/main" id="{01F64419-D298-4A25-97CB-21ADC2A522A2}"/>
+                <a16:creationId xmlns:a16="http://schemas.microsoft.com/office/drawing/2014/main" id="{76D83FA2-24A1-4455-95F7-CC614F3ACDD7}"/>
               </a:ext>
             </a:extLst>
           </p:cNvPr>
@@ -40557,7 +40557,7 @@
           <p:cNvPr id="25" name="">
             <a:extLst xmlns:a="http://schemas.openxmlformats.org/drawingml/2006/main">
               <a:ext uri="{FF2B5EF4-FFF2-40B4-BE49-F238E27FC236}">
-                <a16:creationId xmlns:a16="http://schemas.microsoft.com/office/drawing/2014/main" id="{985115A5-9CEE-4CC8-8D4C-EBC01C62EC1B}"/>
+                <a16:creationId xmlns:a16="http://schemas.microsoft.com/office/drawing/2014/main" id="{4DE55C38-51A4-486B-9460-36CADD207303}"/>
               </a:ext>
             </a:extLst>
           </p:cNvPr>
@@ -40588,7 +40588,7 @@
           <p:cNvPr id="26" name="">
             <a:extLst xmlns:a="http://schemas.openxmlformats.org/drawingml/2006/main">
               <a:ext uri="{FF2B5EF4-FFF2-40B4-BE49-F238E27FC236}">
-                <a16:creationId xmlns:a16="http://schemas.microsoft.com/office/drawing/2014/main" id="{FD6B4858-DA11-42A2-AB15-8BEFCD17C2FC}"/>
+                <a16:creationId xmlns:a16="http://schemas.microsoft.com/office/drawing/2014/main" id="{E7EA476A-9D2F-4BCA-87C7-B340AA59BA7B}"/>
               </a:ext>
             </a:extLst>
           </p:cNvPr>
@@ -40640,7 +40640,7 @@
           <p:cNvPr id="27" name="">
             <a:extLst xmlns:a="http://schemas.openxmlformats.org/drawingml/2006/main">
               <a:ext uri="{FF2B5EF4-FFF2-40B4-BE49-F238E27FC236}">
-                <a16:creationId xmlns:a16="http://schemas.microsoft.com/office/drawing/2014/main" id="{5F530E05-DA51-4DF3-97CC-A3CD4FC9834B}"/>
+                <a16:creationId xmlns:a16="http://schemas.microsoft.com/office/drawing/2014/main" id="{458A64BD-B24C-4FD9-B48C-437008BBC0CC}"/>
               </a:ext>
             </a:extLst>
           </p:cNvPr>
@@ -40692,7 +40692,7 @@
           <p:cNvPr id="28" name="">
             <a:extLst xmlns:a="http://schemas.openxmlformats.org/drawingml/2006/main">
               <a:ext uri="{FF2B5EF4-FFF2-40B4-BE49-F238E27FC236}">
-                <a16:creationId xmlns:a16="http://schemas.microsoft.com/office/drawing/2014/main" id="{7EFA01D3-AA33-4C16-86A1-2AEEB8A84B6A}"/>
+                <a16:creationId xmlns:a16="http://schemas.microsoft.com/office/drawing/2014/main" id="{05A50C40-15C2-4D33-8A69-11A2E3E5533B}"/>
               </a:ext>
             </a:extLst>
           </p:cNvPr>
@@ -40744,7 +40744,7 @@
           <p:cNvPr id="29" name="">
             <a:extLst xmlns:a="http://schemas.openxmlformats.org/drawingml/2006/main">
               <a:ext uri="{FF2B5EF4-FFF2-40B4-BE49-F238E27FC236}">
-                <a16:creationId xmlns:a16="http://schemas.microsoft.com/office/drawing/2014/main" id="{F99379B7-DC20-4EED-9ADA-ADD19FE11D3B}"/>
+                <a16:creationId xmlns:a16="http://schemas.microsoft.com/office/drawing/2014/main" id="{1AC24134-B1E7-4248-B0B2-AF55EDB203E3}"/>
               </a:ext>
             </a:extLst>
           </p:cNvPr>
@@ -40796,7 +40796,7 @@
           <p:cNvPr id="30" name="">
             <a:extLst xmlns:a="http://schemas.openxmlformats.org/drawingml/2006/main">
               <a:ext uri="{FF2B5EF4-FFF2-40B4-BE49-F238E27FC236}">
-                <a16:creationId xmlns:a16="http://schemas.microsoft.com/office/drawing/2014/main" id="{FCFD479C-5816-4834-998F-E4A9ECBCCD8E}"/>
+                <a16:creationId xmlns:a16="http://schemas.microsoft.com/office/drawing/2014/main" id="{E1B255AE-80F9-4DD6-8264-16A930CEF372}"/>
               </a:ext>
             </a:extLst>
           </p:cNvPr>
@@ -40848,7 +40848,7 @@
           <p:cNvPr id="31" name="">
             <a:extLst xmlns:a="http://schemas.openxmlformats.org/drawingml/2006/main">
               <a:ext uri="{FF2B5EF4-FFF2-40B4-BE49-F238E27FC236}">
-                <a16:creationId xmlns:a16="http://schemas.microsoft.com/office/drawing/2014/main" id="{C7AED589-6FFF-40EC-A3DB-67578D4306F9}"/>
+                <a16:creationId xmlns:a16="http://schemas.microsoft.com/office/drawing/2014/main" id="{39476F70-0AEB-4064-8DFF-7023330DA011}"/>
               </a:ext>
             </a:extLst>
           </p:cNvPr>
@@ -40879,7 +40879,7 @@
           <p:cNvPr id="32" name="">
             <a:extLst xmlns:a="http://schemas.openxmlformats.org/drawingml/2006/main">
               <a:ext uri="{FF2B5EF4-FFF2-40B4-BE49-F238E27FC236}">
-                <a16:creationId xmlns:a16="http://schemas.microsoft.com/office/drawing/2014/main" id="{27E83F04-96FF-4111-852E-F8982920011A}"/>
+                <a16:creationId xmlns:a16="http://schemas.microsoft.com/office/drawing/2014/main" id="{B6BB37B4-F8A3-42D4-B3C9-09B28607026A}"/>
               </a:ext>
             </a:extLst>
           </p:cNvPr>
@@ -40931,7 +40931,7 @@
           <p:cNvPr id="33" name="">
             <a:extLst xmlns:a="http://schemas.openxmlformats.org/drawingml/2006/main">
               <a:ext uri="{FF2B5EF4-FFF2-40B4-BE49-F238E27FC236}">
-                <a16:creationId xmlns:a16="http://schemas.microsoft.com/office/drawing/2014/main" id="{8C3F6407-AEA3-444B-818E-4AED8AA6F039}"/>
+                <a16:creationId xmlns:a16="http://schemas.microsoft.com/office/drawing/2014/main" id="{8A4FC02F-CCAD-484C-B8B4-764DC225D80B}"/>
               </a:ext>
             </a:extLst>
           </p:cNvPr>
@@ -40983,7 +40983,7 @@
           <p:cNvPr id="34" name="">
             <a:extLst xmlns:a="http://schemas.openxmlformats.org/drawingml/2006/main">
               <a:ext uri="{FF2B5EF4-FFF2-40B4-BE49-F238E27FC236}">
-                <a16:creationId xmlns:a16="http://schemas.microsoft.com/office/drawing/2014/main" id="{CE6A1129-87CA-4A23-B7DA-A5851112B7A9}"/>
+                <a16:creationId xmlns:a16="http://schemas.microsoft.com/office/drawing/2014/main" id="{D955634A-20BA-493A-8AEF-221D73751E5A}"/>
               </a:ext>
             </a:extLst>
           </p:cNvPr>
@@ -41035,7 +41035,7 @@
           <p:cNvPr id="35" name="">
             <a:extLst xmlns:a="http://schemas.openxmlformats.org/drawingml/2006/main">
               <a:ext uri="{FF2B5EF4-FFF2-40B4-BE49-F238E27FC236}">
-                <a16:creationId xmlns:a16="http://schemas.microsoft.com/office/drawing/2014/main" id="{EBFFF142-A94F-47F8-80A3-6E37BC5DF9AF}"/>
+                <a16:creationId xmlns:a16="http://schemas.microsoft.com/office/drawing/2014/main" id="{2620F441-B3F0-4C96-A34B-E7888F8BE6FB}"/>
               </a:ext>
             </a:extLst>
           </p:cNvPr>
@@ -41087,7 +41087,7 @@
           <p:cNvPr id="36" name="">
             <a:extLst xmlns:a="http://schemas.openxmlformats.org/drawingml/2006/main">
               <a:ext uri="{FF2B5EF4-FFF2-40B4-BE49-F238E27FC236}">
-                <a16:creationId xmlns:a16="http://schemas.microsoft.com/office/drawing/2014/main" id="{202AAC9B-C3A9-44F8-BD71-7ED3F3C79244}"/>
+                <a16:creationId xmlns:a16="http://schemas.microsoft.com/office/drawing/2014/main" id="{EB2579B0-8463-4F8A-96B3-9723101E2A2B}"/>
               </a:ext>
             </a:extLst>
           </p:cNvPr>
@@ -41139,7 +41139,7 @@
           <p:cNvPr id="37" name="">
             <a:extLst xmlns:a="http://schemas.openxmlformats.org/drawingml/2006/main">
               <a:ext uri="{FF2B5EF4-FFF2-40B4-BE49-F238E27FC236}">
-                <a16:creationId xmlns:a16="http://schemas.microsoft.com/office/drawing/2014/main" id="{3E8C8E14-DD30-4D51-B76B-51DAAA62D0A6}"/>
+                <a16:creationId xmlns:a16="http://schemas.microsoft.com/office/drawing/2014/main" id="{98E37B0C-8E52-4EF4-A65A-E186E130121B}"/>
               </a:ext>
             </a:extLst>
           </p:cNvPr>
@@ -41170,7 +41170,7 @@
           <p:cNvPr id="38" name="">
             <a:extLst xmlns:a="http://schemas.openxmlformats.org/drawingml/2006/main">
               <a:ext uri="{FF2B5EF4-FFF2-40B4-BE49-F238E27FC236}">
-                <a16:creationId xmlns:a16="http://schemas.microsoft.com/office/drawing/2014/main" id="{5B442943-AA68-4494-8C36-43BFB5B9C872}"/>
+                <a16:creationId xmlns:a16="http://schemas.microsoft.com/office/drawing/2014/main" id="{7704EF8B-9562-42E6-8254-31E68EC215A9}"/>
               </a:ext>
             </a:extLst>
           </p:cNvPr>
@@ -41201,7 +41201,7 @@
           <p:cNvPr id="39" name="">
             <a:extLst xmlns:a="http://schemas.openxmlformats.org/drawingml/2006/main">
               <a:ext uri="{FF2B5EF4-FFF2-40B4-BE49-F238E27FC236}">
-                <a16:creationId xmlns:a16="http://schemas.microsoft.com/office/drawing/2014/main" id="{E40E8DA9-EAC2-4C95-BD40-07F64C7BC35F}"/>
+                <a16:creationId xmlns:a16="http://schemas.microsoft.com/office/drawing/2014/main" id="{A782D0E4-9EDE-49E7-A647-2D3E4F4E580E}"/>
               </a:ext>
             </a:extLst>
           </p:cNvPr>
@@ -41253,7 +41253,7 @@
           <p:cNvPr id="40" name="">
             <a:extLst xmlns:a="http://schemas.openxmlformats.org/drawingml/2006/main">
               <a:ext uri="{FF2B5EF4-FFF2-40B4-BE49-F238E27FC236}">
-                <a16:creationId xmlns:a16="http://schemas.microsoft.com/office/drawing/2014/main" id="{BA6073C4-FA95-49B4-94A8-C702EB7FFD0E}"/>
+                <a16:creationId xmlns:a16="http://schemas.microsoft.com/office/drawing/2014/main" id="{1F4C9E73-A6EC-4BB2-A862-14EB081129CF}"/>
               </a:ext>
             </a:extLst>
           </p:cNvPr>
@@ -41305,7 +41305,7 @@
           <p:cNvPr id="41" name="">
             <a:extLst xmlns:a="http://schemas.openxmlformats.org/drawingml/2006/main">
               <a:ext uri="{FF2B5EF4-FFF2-40B4-BE49-F238E27FC236}">
-                <a16:creationId xmlns:a16="http://schemas.microsoft.com/office/drawing/2014/main" id="{FCA9029E-9A97-4643-868A-19751BF4440A}"/>
+                <a16:creationId xmlns:a16="http://schemas.microsoft.com/office/drawing/2014/main" id="{1EF67487-FDD9-401C-A342-30848594808E}"/>
               </a:ext>
             </a:extLst>
           </p:cNvPr>
@@ -41357,7 +41357,7 @@
           <p:cNvPr id="42" name="">
             <a:extLst xmlns:a="http://schemas.openxmlformats.org/drawingml/2006/main">
               <a:ext uri="{FF2B5EF4-FFF2-40B4-BE49-F238E27FC236}">
-                <a16:creationId xmlns:a16="http://schemas.microsoft.com/office/drawing/2014/main" id="{E0147AC4-B352-4C23-85C0-2E516243E9CA}"/>
+                <a16:creationId xmlns:a16="http://schemas.microsoft.com/office/drawing/2014/main" id="{2351EC7D-D349-4B08-B12B-4EA146B2A939}"/>
               </a:ext>
             </a:extLst>
           </p:cNvPr>
@@ -41409,7 +41409,7 @@
           <p:cNvPr id="43" name="">
             <a:extLst xmlns:a="http://schemas.openxmlformats.org/drawingml/2006/main">
               <a:ext uri="{FF2B5EF4-FFF2-40B4-BE49-F238E27FC236}">
-                <a16:creationId xmlns:a16="http://schemas.microsoft.com/office/drawing/2014/main" id="{308C011C-CC56-4863-A56C-7AF4AF9568FD}"/>
+                <a16:creationId xmlns:a16="http://schemas.microsoft.com/office/drawing/2014/main" id="{C41B7A2F-CD33-4360-9254-8C432D0185D4}"/>
               </a:ext>
             </a:extLst>
           </p:cNvPr>
@@ -41461,7 +41461,7 @@
           <p:cNvPr id="44" name="">
             <a:extLst xmlns:a="http://schemas.openxmlformats.org/drawingml/2006/main">
               <a:ext uri="{FF2B5EF4-FFF2-40B4-BE49-F238E27FC236}">
-                <a16:creationId xmlns:a16="http://schemas.microsoft.com/office/drawing/2014/main" id="{9B7689A4-B590-40E4-976B-40966DD5453B}"/>
+                <a16:creationId xmlns:a16="http://schemas.microsoft.com/office/drawing/2014/main" id="{A5243E07-F976-4638-BFB7-B83E5D128D81}"/>
               </a:ext>
             </a:extLst>
           </p:cNvPr>
@@ -41492,7 +41492,7 @@
           <p:cNvPr id="45" name="">
             <a:extLst xmlns:a="http://schemas.openxmlformats.org/drawingml/2006/main">
               <a:ext uri="{FF2B5EF4-FFF2-40B4-BE49-F238E27FC236}">
-                <a16:creationId xmlns:a16="http://schemas.microsoft.com/office/drawing/2014/main" id="{27E1E569-3F7F-439C-B5E1-9D286E28B514}"/>
+                <a16:creationId xmlns:a16="http://schemas.microsoft.com/office/drawing/2014/main" id="{0617B153-F73C-4771-A006-0A92C129296B}"/>
               </a:ext>
             </a:extLst>
           </p:cNvPr>
@@ -41544,7 +41544,7 @@
           <p:cNvPr id="46" name="">
             <a:extLst xmlns:a="http://schemas.openxmlformats.org/drawingml/2006/main">
               <a:ext uri="{FF2B5EF4-FFF2-40B4-BE49-F238E27FC236}">
-                <a16:creationId xmlns:a16="http://schemas.microsoft.com/office/drawing/2014/main" id="{D9EEEE8F-4065-4860-8CB4-5C8E2D28C291}"/>
+                <a16:creationId xmlns:a16="http://schemas.microsoft.com/office/drawing/2014/main" id="{8E84644D-B7EB-441F-9A02-CB1EE517C53A}"/>
               </a:ext>
             </a:extLst>
           </p:cNvPr>
@@ -41596,7 +41596,7 @@
           <p:cNvPr id="47" name="">
             <a:extLst xmlns:a="http://schemas.openxmlformats.org/drawingml/2006/main">
               <a:ext uri="{FF2B5EF4-FFF2-40B4-BE49-F238E27FC236}">
-                <a16:creationId xmlns:a16="http://schemas.microsoft.com/office/drawing/2014/main" id="{C47427FA-D4CF-45C6-A3ED-88883C08AFBC}"/>
+                <a16:creationId xmlns:a16="http://schemas.microsoft.com/office/drawing/2014/main" id="{07C55608-6542-4EDB-9954-F637E2A3B7D5}"/>
               </a:ext>
             </a:extLst>
           </p:cNvPr>
@@ -41648,7 +41648,7 @@
           <p:cNvPr id="48" name="">
             <a:extLst xmlns:a="http://schemas.openxmlformats.org/drawingml/2006/main">
               <a:ext uri="{FF2B5EF4-FFF2-40B4-BE49-F238E27FC236}">
-                <a16:creationId xmlns:a16="http://schemas.microsoft.com/office/drawing/2014/main" id="{EB0B8D85-91D1-4B9C-92E3-0667178CE4D0}"/>
+                <a16:creationId xmlns:a16="http://schemas.microsoft.com/office/drawing/2014/main" id="{B6371A06-685E-4ECD-9388-81811F204FE6}"/>
               </a:ext>
             </a:extLst>
           </p:cNvPr>
@@ -41700,7 +41700,7 @@
           <p:cNvPr id="49" name="">
             <a:extLst xmlns:a="http://schemas.openxmlformats.org/drawingml/2006/main">
               <a:ext uri="{FF2B5EF4-FFF2-40B4-BE49-F238E27FC236}">
-                <a16:creationId xmlns:a16="http://schemas.microsoft.com/office/drawing/2014/main" id="{2D6834B2-1E95-4A73-A63A-B532BD92D812}"/>
+                <a16:creationId xmlns:a16="http://schemas.microsoft.com/office/drawing/2014/main" id="{E844939D-FC36-4DC3-B0D1-FC3374718818}"/>
               </a:ext>
             </a:extLst>
           </p:cNvPr>
@@ -41752,7 +41752,7 @@
           <p:cNvPr id="50" name="">
             <a:extLst xmlns:a="http://schemas.openxmlformats.org/drawingml/2006/main">
               <a:ext uri="{FF2B5EF4-FFF2-40B4-BE49-F238E27FC236}">
-                <a16:creationId xmlns:a16="http://schemas.microsoft.com/office/drawing/2014/main" id="{D9152811-2242-4476-B870-A8F7854715E2}"/>
+                <a16:creationId xmlns:a16="http://schemas.microsoft.com/office/drawing/2014/main" id="{6D431E32-C8D9-4653-B124-164260F0FD0E}"/>
               </a:ext>
             </a:extLst>
           </p:cNvPr>
@@ -41783,7 +41783,7 @@
           <p:cNvPr id="51" name="">
             <a:extLst xmlns:a="http://schemas.openxmlformats.org/drawingml/2006/main">
               <a:ext uri="{FF2B5EF4-FFF2-40B4-BE49-F238E27FC236}">
-                <a16:creationId xmlns:a16="http://schemas.microsoft.com/office/drawing/2014/main" id="{B2012260-7D4B-4C3E-BCE4-913EE0A92F1B}"/>
+                <a16:creationId xmlns:a16="http://schemas.microsoft.com/office/drawing/2014/main" id="{0E30C257-C258-419D-85D7-E17E93110D0A}"/>
               </a:ext>
             </a:extLst>
           </p:cNvPr>
@@ -41814,7 +41814,7 @@
           <p:cNvPr id="52" name="">
             <a:extLst xmlns:a="http://schemas.openxmlformats.org/drawingml/2006/main">
               <a:ext uri="{FF2B5EF4-FFF2-40B4-BE49-F238E27FC236}">
-                <a16:creationId xmlns:a16="http://schemas.microsoft.com/office/drawing/2014/main" id="{66C57987-9D3E-40BA-8BDB-CD74E1B23C84}"/>
+                <a16:creationId xmlns:a16="http://schemas.microsoft.com/office/drawing/2014/main" id="{77B253E7-B23F-4A6D-B36A-D376D356868F}"/>
               </a:ext>
             </a:extLst>
           </p:cNvPr>
@@ -41866,7 +41866,7 @@
           <p:cNvPr id="53" name="">
             <a:extLst xmlns:a="http://schemas.openxmlformats.org/drawingml/2006/main">
               <a:ext uri="{FF2B5EF4-FFF2-40B4-BE49-F238E27FC236}">
-                <a16:creationId xmlns:a16="http://schemas.microsoft.com/office/drawing/2014/main" id="{DCFA927C-20FC-4214-B5CA-3CAB8131FDA4}"/>
+                <a16:creationId xmlns:a16="http://schemas.microsoft.com/office/drawing/2014/main" id="{60F45B15-AD82-4C7D-8546-4DE3852C662F}"/>
               </a:ext>
             </a:extLst>
           </p:cNvPr>
@@ -41918,7 +41918,7 @@
           <p:cNvPr id="54" name="">
             <a:extLst xmlns:a="http://schemas.openxmlformats.org/drawingml/2006/main">
               <a:ext uri="{FF2B5EF4-FFF2-40B4-BE49-F238E27FC236}">
-                <a16:creationId xmlns:a16="http://schemas.microsoft.com/office/drawing/2014/main" id="{12D09A15-BD10-41F3-B411-0C0B3F6BA5B9}"/>
+                <a16:creationId xmlns:a16="http://schemas.microsoft.com/office/drawing/2014/main" id="{B622AAB3-41E5-4C7A-8995-A7D9A34F2912}"/>
               </a:ext>
             </a:extLst>
           </p:cNvPr>
@@ -41970,7 +41970,7 @@
           <p:cNvPr id="55" name="">
             <a:extLst xmlns:a="http://schemas.openxmlformats.org/drawingml/2006/main">
               <a:ext uri="{FF2B5EF4-FFF2-40B4-BE49-F238E27FC236}">
-                <a16:creationId xmlns:a16="http://schemas.microsoft.com/office/drawing/2014/main" id="{8793B85D-7569-485A-9664-B89C5EB2C96A}"/>
+                <a16:creationId xmlns:a16="http://schemas.microsoft.com/office/drawing/2014/main" id="{CF89ED69-33F8-4E3E-B6FA-7FAE9B47B7D8}"/>
               </a:ext>
             </a:extLst>
           </p:cNvPr>
@@ -42022,7 +42022,7 @@
           <p:cNvPr id="56" name="">
             <a:extLst xmlns:a="http://schemas.openxmlformats.org/drawingml/2006/main">
               <a:ext uri="{FF2B5EF4-FFF2-40B4-BE49-F238E27FC236}">
-                <a16:creationId xmlns:a16="http://schemas.microsoft.com/office/drawing/2014/main" id="{F53B78D9-C1D7-43A6-9CBE-39CE54606391}"/>
+                <a16:creationId xmlns:a16="http://schemas.microsoft.com/office/drawing/2014/main" id="{CFA222C8-C3EE-4568-A268-2B54F9C86F98}"/>
               </a:ext>
             </a:extLst>
           </p:cNvPr>
@@ -42074,7 +42074,7 @@
           <p:cNvPr id="57" name="">
             <a:extLst xmlns:a="http://schemas.openxmlformats.org/drawingml/2006/main">
               <a:ext uri="{FF2B5EF4-FFF2-40B4-BE49-F238E27FC236}">
-                <a16:creationId xmlns:a16="http://schemas.microsoft.com/office/drawing/2014/main" id="{03409E0B-40BF-4C54-A9EC-3096D948CE10}"/>
+                <a16:creationId xmlns:a16="http://schemas.microsoft.com/office/drawing/2014/main" id="{B9B20174-0C14-460A-AC22-BAF38F24FB8F}"/>
               </a:ext>
             </a:extLst>
           </p:cNvPr>
@@ -42105,7 +42105,7 @@
           <p:cNvPr id="58" name="">
             <a:extLst xmlns:a="http://schemas.openxmlformats.org/drawingml/2006/main">
               <a:ext uri="{FF2B5EF4-FFF2-40B4-BE49-F238E27FC236}">
-                <a16:creationId xmlns:a16="http://schemas.microsoft.com/office/drawing/2014/main" id="{94EDC121-48DB-4405-9A5C-96D36EE4096E}"/>
+                <a16:creationId xmlns:a16="http://schemas.microsoft.com/office/drawing/2014/main" id="{9EBF7A54-D2FF-49D1-988F-AE1A4BC07C66}"/>
               </a:ext>
             </a:extLst>
           </p:cNvPr>
@@ -42157,7 +42157,7 @@
           <p:cNvPr id="59" name="">
             <a:extLst xmlns:a="http://schemas.openxmlformats.org/drawingml/2006/main">
               <a:ext uri="{FF2B5EF4-FFF2-40B4-BE49-F238E27FC236}">
-                <a16:creationId xmlns:a16="http://schemas.microsoft.com/office/drawing/2014/main" id="{1B8F9452-7DA2-4E04-9D0D-3E9921A8B03D}"/>
+                <a16:creationId xmlns:a16="http://schemas.microsoft.com/office/drawing/2014/main" id="{00E4FFDF-C0E0-4E00-88EB-07DBB7A8B150}"/>
               </a:ext>
             </a:extLst>
           </p:cNvPr>
@@ -42209,7 +42209,7 @@
           <p:cNvPr id="60" name="">
             <a:extLst xmlns:a="http://schemas.openxmlformats.org/drawingml/2006/main">
               <a:ext uri="{FF2B5EF4-FFF2-40B4-BE49-F238E27FC236}">
-                <a16:creationId xmlns:a16="http://schemas.microsoft.com/office/drawing/2014/main" id="{402B8519-C1BA-4A8F-BD32-628F4B11E7A0}"/>
+                <a16:creationId xmlns:a16="http://schemas.microsoft.com/office/drawing/2014/main" id="{36C9FAD8-6F97-429C-80F8-0C8829C6A1E1}"/>
               </a:ext>
             </a:extLst>
           </p:cNvPr>
@@ -42261,7 +42261,7 @@
           <p:cNvPr id="61" name="">
             <a:extLst xmlns:a="http://schemas.openxmlformats.org/drawingml/2006/main">
               <a:ext uri="{FF2B5EF4-FFF2-40B4-BE49-F238E27FC236}">
-                <a16:creationId xmlns:a16="http://schemas.microsoft.com/office/drawing/2014/main" id="{F0130508-D38D-4E50-928C-AA9125CED0E8}"/>
+                <a16:creationId xmlns:a16="http://schemas.microsoft.com/office/drawing/2014/main" id="{BFCA766E-E50E-4D95-AFF5-B97332CFE464}"/>
               </a:ext>
             </a:extLst>
           </p:cNvPr>
@@ -42313,7 +42313,7 @@
           <p:cNvPr id="62" name="">
             <a:extLst xmlns:a="http://schemas.openxmlformats.org/drawingml/2006/main">
               <a:ext uri="{FF2B5EF4-FFF2-40B4-BE49-F238E27FC236}">
-                <a16:creationId xmlns:a16="http://schemas.microsoft.com/office/drawing/2014/main" id="{3B53D747-EB27-46A7-8E9A-74EF4A619B92}"/>
+                <a16:creationId xmlns:a16="http://schemas.microsoft.com/office/drawing/2014/main" id="{5CA5041C-E2E8-4C64-A0F6-F696E86947CC}"/>
               </a:ext>
             </a:extLst>
           </p:cNvPr>
@@ -42365,7 +42365,7 @@
           <p:cNvPr id="63" name="">
             <a:extLst xmlns:a="http://schemas.openxmlformats.org/drawingml/2006/main">
               <a:ext uri="{FF2B5EF4-FFF2-40B4-BE49-F238E27FC236}">
-                <a16:creationId xmlns:a16="http://schemas.microsoft.com/office/drawing/2014/main" id="{8B9AA140-272E-49E3-B748-20B60A37BF70}"/>
+                <a16:creationId xmlns:a16="http://schemas.microsoft.com/office/drawing/2014/main" id="{296C5185-9AB7-4997-BE62-C379ED2D74FE}"/>
               </a:ext>
             </a:extLst>
           </p:cNvPr>
@@ -42396,7 +42396,7 @@
           <p:cNvPr id="64" name="">
             <a:extLst xmlns:a="http://schemas.openxmlformats.org/drawingml/2006/main">
               <a:ext uri="{FF2B5EF4-FFF2-40B4-BE49-F238E27FC236}">
-                <a16:creationId xmlns:a16="http://schemas.microsoft.com/office/drawing/2014/main" id="{4A244690-5740-4442-894F-F427CFC2224B}"/>
+                <a16:creationId xmlns:a16="http://schemas.microsoft.com/office/drawing/2014/main" id="{CE9DEB20-11F1-4C7C-88CF-CB9907C38967}"/>
               </a:ext>
             </a:extLst>
           </p:cNvPr>
@@ -42427,7 +42427,7 @@
           <p:cNvPr id="65" name="">
             <a:extLst xmlns:a="http://schemas.openxmlformats.org/drawingml/2006/main">
               <a:ext uri="{FF2B5EF4-FFF2-40B4-BE49-F238E27FC236}">
-                <a16:creationId xmlns:a16="http://schemas.microsoft.com/office/drawing/2014/main" id="{DE8B5533-ADA4-4699-8A40-7C6B98C7DC9C}"/>
+                <a16:creationId xmlns:a16="http://schemas.microsoft.com/office/drawing/2014/main" id="{98CD097D-5BF5-4683-A2DC-9348A4F469E7}"/>
               </a:ext>
             </a:extLst>
           </p:cNvPr>
@@ -42479,7 +42479,7 @@
           <p:cNvPr id="66" name="">
             <a:extLst xmlns:a="http://schemas.openxmlformats.org/drawingml/2006/main">
               <a:ext uri="{FF2B5EF4-FFF2-40B4-BE49-F238E27FC236}">
-                <a16:creationId xmlns:a16="http://schemas.microsoft.com/office/drawing/2014/main" id="{BE4C4DAF-B9A2-44BB-904F-CB65F92246AE}"/>
+                <a16:creationId xmlns:a16="http://schemas.microsoft.com/office/drawing/2014/main" id="{34C6AB40-5794-4521-8306-8C8F0F97F4AF}"/>
               </a:ext>
             </a:extLst>
           </p:cNvPr>
@@ -42531,7 +42531,7 @@
           <p:cNvPr id="67" name="">
             <a:extLst xmlns:a="http://schemas.openxmlformats.org/drawingml/2006/main">
               <a:ext uri="{FF2B5EF4-FFF2-40B4-BE49-F238E27FC236}">
-                <a16:creationId xmlns:a16="http://schemas.microsoft.com/office/drawing/2014/main" id="{64E6E2A2-5D46-42E3-BA27-E98FCFB05463}"/>
+                <a16:creationId xmlns:a16="http://schemas.microsoft.com/office/drawing/2014/main" id="{F2266B3E-5184-45FD-9B8A-33335D067D72}"/>
               </a:ext>
             </a:extLst>
           </p:cNvPr>
@@ -42583,7 +42583,7 @@
           <p:cNvPr id="68" name="">
             <a:extLst xmlns:a="http://schemas.openxmlformats.org/drawingml/2006/main">
               <a:ext uri="{FF2B5EF4-FFF2-40B4-BE49-F238E27FC236}">
-                <a16:creationId xmlns:a16="http://schemas.microsoft.com/office/drawing/2014/main" id="{4C03E7CF-D3F2-400A-A400-7D3DDAF9A54D}"/>
+                <a16:creationId xmlns:a16="http://schemas.microsoft.com/office/drawing/2014/main" id="{8EC4303B-6693-4222-8EAD-8AD73D206546}"/>
               </a:ext>
             </a:extLst>
           </p:cNvPr>
@@ -42635,7 +42635,7 @@
           <p:cNvPr id="69" name="">
             <a:extLst xmlns:a="http://schemas.openxmlformats.org/drawingml/2006/main">
               <a:ext uri="{FF2B5EF4-FFF2-40B4-BE49-F238E27FC236}">
-                <a16:creationId xmlns:a16="http://schemas.microsoft.com/office/drawing/2014/main" id="{C3CE5175-C869-4BBC-9420-5E3FF05371BE}"/>
+                <a16:creationId xmlns:a16="http://schemas.microsoft.com/office/drawing/2014/main" id="{A047C5E1-9634-4ACA-918D-C8D953018585}"/>
               </a:ext>
             </a:extLst>
           </p:cNvPr>
@@ -42687,7 +42687,7 @@
           <p:cNvPr id="70" name="">
             <a:extLst xmlns:a="http://schemas.openxmlformats.org/drawingml/2006/main">
               <a:ext uri="{FF2B5EF4-FFF2-40B4-BE49-F238E27FC236}">
-                <a16:creationId xmlns:a16="http://schemas.microsoft.com/office/drawing/2014/main" id="{7E5D7A39-057E-446D-8C16-6F22EB1C9CB2}"/>
+                <a16:creationId xmlns:a16="http://schemas.microsoft.com/office/drawing/2014/main" id="{F6A02767-A003-404C-852B-3B93F115D8D7}"/>
               </a:ext>
             </a:extLst>
           </p:cNvPr>
@@ -42718,7 +42718,7 @@
           <p:cNvPr id="71" name="">
             <a:extLst xmlns:a="http://schemas.openxmlformats.org/drawingml/2006/main">
               <a:ext uri="{FF2B5EF4-FFF2-40B4-BE49-F238E27FC236}">
-                <a16:creationId xmlns:a16="http://schemas.microsoft.com/office/drawing/2014/main" id="{17DFAD87-2909-4BF5-934B-2DA8AEC824F3}"/>
+                <a16:creationId xmlns:a16="http://schemas.microsoft.com/office/drawing/2014/main" id="{538CBCCF-F6B7-4FF3-B419-A5C848CAC0A0}"/>
               </a:ext>
             </a:extLst>
           </p:cNvPr>
@@ -42770,7 +42770,7 @@
           <p:cNvPr id="72" name="">
             <a:extLst xmlns:a="http://schemas.openxmlformats.org/drawingml/2006/main">
               <a:ext uri="{FF2B5EF4-FFF2-40B4-BE49-F238E27FC236}">
-                <a16:creationId xmlns:a16="http://schemas.microsoft.com/office/drawing/2014/main" id="{8DAE3CBE-22F8-4B13-878D-1001A78C1C55}"/>
+                <a16:creationId xmlns:a16="http://schemas.microsoft.com/office/drawing/2014/main" id="{09F9C337-3564-4042-8261-73836503312A}"/>
               </a:ext>
             </a:extLst>
           </p:cNvPr>
@@ -42822,7 +42822,7 @@
           <p:cNvPr id="73" name="">
             <a:extLst xmlns:a="http://schemas.openxmlformats.org/drawingml/2006/main">
               <a:ext uri="{FF2B5EF4-FFF2-40B4-BE49-F238E27FC236}">
-                <a16:creationId xmlns:a16="http://schemas.microsoft.com/office/drawing/2014/main" id="{B1A25FF8-3AAA-4B53-8544-B858632F5AA8}"/>
+                <a16:creationId xmlns:a16="http://schemas.microsoft.com/office/drawing/2014/main" id="{6E615F81-21DA-42A0-9940-E2AAA4E21D05}"/>
               </a:ext>
             </a:extLst>
           </p:cNvPr>
@@ -42874,7 +42874,7 @@
           <p:cNvPr id="74" name="">
             <a:extLst xmlns:a="http://schemas.openxmlformats.org/drawingml/2006/main">
               <a:ext uri="{FF2B5EF4-FFF2-40B4-BE49-F238E27FC236}">
-                <a16:creationId xmlns:a16="http://schemas.microsoft.com/office/drawing/2014/main" id="{1527068E-7A79-4093-B449-275AF3E8813C}"/>
+                <a16:creationId xmlns:a16="http://schemas.microsoft.com/office/drawing/2014/main" id="{F3431572-32C3-49C8-9B55-E39347D6E7C7}"/>
               </a:ext>
             </a:extLst>
           </p:cNvPr>
@@ -42926,7 +42926,7 @@
           <p:cNvPr id="75" name="">
             <a:extLst xmlns:a="http://schemas.openxmlformats.org/drawingml/2006/main">
               <a:ext uri="{FF2B5EF4-FFF2-40B4-BE49-F238E27FC236}">
-                <a16:creationId xmlns:a16="http://schemas.microsoft.com/office/drawing/2014/main" id="{893A19A4-5CA9-4F32-8A07-C5DEC63F029D}"/>
+                <a16:creationId xmlns:a16="http://schemas.microsoft.com/office/drawing/2014/main" id="{F9C59887-D1A3-45BA-A802-8BCEEA0F1ED7}"/>
               </a:ext>
             </a:extLst>
           </p:cNvPr>
@@ -42978,7 +42978,7 @@
           <p:cNvPr id="76" name="">
             <a:extLst xmlns:a="http://schemas.openxmlformats.org/drawingml/2006/main">
               <a:ext uri="{FF2B5EF4-FFF2-40B4-BE49-F238E27FC236}">
-                <a16:creationId xmlns:a16="http://schemas.microsoft.com/office/drawing/2014/main" id="{D1036751-9017-4486-9CF6-260403323A70}"/>
+                <a16:creationId xmlns:a16="http://schemas.microsoft.com/office/drawing/2014/main" id="{C37BE035-1C97-421E-9830-03BA16A99837}"/>
               </a:ext>
             </a:extLst>
           </p:cNvPr>
@@ -43009,7 +43009,7 @@
           <p:cNvPr id="77" name="">
             <a:extLst xmlns:a="http://schemas.openxmlformats.org/drawingml/2006/main">
               <a:ext uri="{FF2B5EF4-FFF2-40B4-BE49-F238E27FC236}">
-                <a16:creationId xmlns:a16="http://schemas.microsoft.com/office/drawing/2014/main" id="{D4C6A8F8-A0F4-4B08-8EDA-A58869718B85}"/>
+                <a16:creationId xmlns:a16="http://schemas.microsoft.com/office/drawing/2014/main" id="{F60980E9-1C59-451B-9B5A-81EE28241A44}"/>
               </a:ext>
             </a:extLst>
           </p:cNvPr>
@@ -43040,7 +43040,7 @@
           <p:cNvPr id="78" name="">
             <a:extLst xmlns:a="http://schemas.openxmlformats.org/drawingml/2006/main">
               <a:ext uri="{FF2B5EF4-FFF2-40B4-BE49-F238E27FC236}">
-                <a16:creationId xmlns:a16="http://schemas.microsoft.com/office/drawing/2014/main" id="{B221C623-98B4-4C4D-8552-F7247F6BA90C}"/>
+                <a16:creationId xmlns:a16="http://schemas.microsoft.com/office/drawing/2014/main" id="{A756E29D-8FED-4C5E-9629-918F0523659E}"/>
               </a:ext>
             </a:extLst>
           </p:cNvPr>
@@ -43092,7 +43092,7 @@
           <p:cNvPr id="79" name="">
             <a:extLst xmlns:a="http://schemas.openxmlformats.org/drawingml/2006/main">
               <a:ext uri="{FF2B5EF4-FFF2-40B4-BE49-F238E27FC236}">
-                <a16:creationId xmlns:a16="http://schemas.microsoft.com/office/drawing/2014/main" id="{4ADFD7C4-7A55-4889-84AE-48AA9A329DC2}"/>
+                <a16:creationId xmlns:a16="http://schemas.microsoft.com/office/drawing/2014/main" id="{92C52541-FDC5-46DB-B894-28C153280BD9}"/>
               </a:ext>
             </a:extLst>
           </p:cNvPr>
@@ -43144,7 +43144,7 @@
           <p:cNvPr id="80" name="">
             <a:extLst xmlns:a="http://schemas.openxmlformats.org/drawingml/2006/main">
               <a:ext uri="{FF2B5EF4-FFF2-40B4-BE49-F238E27FC236}">
-                <a16:creationId xmlns:a16="http://schemas.microsoft.com/office/drawing/2014/main" id="{83BA07AA-8243-4851-B843-AB028D929EB3}"/>
+                <a16:creationId xmlns:a16="http://schemas.microsoft.com/office/drawing/2014/main" id="{6B4B6E7F-2E6D-4D0B-9655-4D879233EE06}"/>
               </a:ext>
             </a:extLst>
           </p:cNvPr>
@@ -43196,7 +43196,7 @@
           <p:cNvPr id="81" name="">
             <a:extLst xmlns:a="http://schemas.openxmlformats.org/drawingml/2006/main">
               <a:ext uri="{FF2B5EF4-FFF2-40B4-BE49-F238E27FC236}">
-                <a16:creationId xmlns:a16="http://schemas.microsoft.com/office/drawing/2014/main" id="{6220DBAC-DF33-4957-9179-99EFEF7FC26B}"/>
+                <a16:creationId xmlns:a16="http://schemas.microsoft.com/office/drawing/2014/main" id="{30EE4D43-D76F-442B-8830-C9EF0358BF26}"/>
               </a:ext>
             </a:extLst>
           </p:cNvPr>
@@ -43248,7 +43248,7 @@
           <p:cNvPr id="82" name="">
             <a:extLst xmlns:a="http://schemas.openxmlformats.org/drawingml/2006/main">
               <a:ext uri="{FF2B5EF4-FFF2-40B4-BE49-F238E27FC236}">
-                <a16:creationId xmlns:a16="http://schemas.microsoft.com/office/drawing/2014/main" id="{1BAAA7D4-CAD4-4270-B3F0-980EDA4CDEB9}"/>
+                <a16:creationId xmlns:a16="http://schemas.microsoft.com/office/drawing/2014/main" id="{BC7C0273-CBFB-4F9B-A682-8DE6F7F59F87}"/>
               </a:ext>
             </a:extLst>
           </p:cNvPr>
@@ -43300,7 +43300,7 @@
           <p:cNvPr id="83" name="">
             <a:extLst xmlns:a="http://schemas.openxmlformats.org/drawingml/2006/main">
               <a:ext uri="{FF2B5EF4-FFF2-40B4-BE49-F238E27FC236}">
-                <a16:creationId xmlns:a16="http://schemas.microsoft.com/office/drawing/2014/main" id="{382C4644-E8A2-4A7E-8E59-DEE1E95FE3D3}"/>
+                <a16:creationId xmlns:a16="http://schemas.microsoft.com/office/drawing/2014/main" id="{5AAE5DDF-6A2D-49AD-BBB3-711CA7DA8E16}"/>
               </a:ext>
             </a:extLst>
           </p:cNvPr>
@@ -43331,7 +43331,7 @@
           <p:cNvPr id="84" name="">
             <a:extLst xmlns:a="http://schemas.openxmlformats.org/drawingml/2006/main">
               <a:ext uri="{FF2B5EF4-FFF2-40B4-BE49-F238E27FC236}">
-                <a16:creationId xmlns:a16="http://schemas.microsoft.com/office/drawing/2014/main" id="{0E0599AB-9351-4E19-A3FC-3EB4E9A0F889}"/>
+                <a16:creationId xmlns:a16="http://schemas.microsoft.com/office/drawing/2014/main" id="{313A1A4B-C35E-47C4-9A72-ABB22FBE5791}"/>
               </a:ext>
             </a:extLst>
           </p:cNvPr>
@@ -43383,7 +43383,7 @@
           <p:cNvPr id="85" name="">
             <a:extLst xmlns:a="http://schemas.openxmlformats.org/drawingml/2006/main">
               <a:ext uri="{FF2B5EF4-FFF2-40B4-BE49-F238E27FC236}">
-                <a16:creationId xmlns:a16="http://schemas.microsoft.com/office/drawing/2014/main" id="{2375D6A9-CCAB-47EC-A7FE-AE163857FA90}"/>
+                <a16:creationId xmlns:a16="http://schemas.microsoft.com/office/drawing/2014/main" id="{9F1DC701-D36F-479E-ACC4-8EC9A7B2BE52}"/>
               </a:ext>
             </a:extLst>
           </p:cNvPr>
@@ -43435,7 +43435,7 @@
           <p:cNvPr id="86" name="">
             <a:extLst xmlns:a="http://schemas.openxmlformats.org/drawingml/2006/main">
               <a:ext uri="{FF2B5EF4-FFF2-40B4-BE49-F238E27FC236}">
-                <a16:creationId xmlns:a16="http://schemas.microsoft.com/office/drawing/2014/main" id="{3932C7E9-4938-4310-8816-AF694E034C67}"/>
+                <a16:creationId xmlns:a16="http://schemas.microsoft.com/office/drawing/2014/main" id="{472B9E57-F742-4E96-BB63-A539657376AE}"/>
               </a:ext>
             </a:extLst>
           </p:cNvPr>
@@ -43487,7 +43487,7 @@
           <p:cNvPr id="87" name="">
             <a:extLst xmlns:a="http://schemas.openxmlformats.org/drawingml/2006/main">
               <a:ext uri="{FF2B5EF4-FFF2-40B4-BE49-F238E27FC236}">
-                <a16:creationId xmlns:a16="http://schemas.microsoft.com/office/drawing/2014/main" id="{4D8694F6-1D0B-41E4-A3B8-FB96FDBFC26A}"/>
+                <a16:creationId xmlns:a16="http://schemas.microsoft.com/office/drawing/2014/main" id="{68FF222D-9E1B-4AFD-9F54-49F4700AB1CB}"/>
               </a:ext>
             </a:extLst>
           </p:cNvPr>
@@ -43539,7 +43539,7 @@
           <p:cNvPr id="88" name="">
             <a:extLst xmlns:a="http://schemas.openxmlformats.org/drawingml/2006/main">
               <a:ext uri="{FF2B5EF4-FFF2-40B4-BE49-F238E27FC236}">
-                <a16:creationId xmlns:a16="http://schemas.microsoft.com/office/drawing/2014/main" id="{4825BBAB-30A1-483B-8207-877162CDE944}"/>
+                <a16:creationId xmlns:a16="http://schemas.microsoft.com/office/drawing/2014/main" id="{B8B954F8-421F-434B-A613-D14D589A0121}"/>
               </a:ext>
             </a:extLst>
           </p:cNvPr>
@@ -43591,7 +43591,7 @@
           <p:cNvPr id="89" name="">
             <a:extLst xmlns:a="http://schemas.openxmlformats.org/drawingml/2006/main">
               <a:ext uri="{FF2B5EF4-FFF2-40B4-BE49-F238E27FC236}">
-                <a16:creationId xmlns:a16="http://schemas.microsoft.com/office/drawing/2014/main" id="{5BBD665E-5A0F-4161-867C-B00BD52F896E}"/>
+                <a16:creationId xmlns:a16="http://schemas.microsoft.com/office/drawing/2014/main" id="{35284238-ED24-4F9D-BBE3-3978F2492035}"/>
               </a:ext>
             </a:extLst>
           </p:cNvPr>
@@ -43622,7 +43622,7 @@
           <p:cNvPr id="90" name="">
             <a:extLst xmlns:a="http://schemas.openxmlformats.org/drawingml/2006/main">
               <a:ext uri="{FF2B5EF4-FFF2-40B4-BE49-F238E27FC236}">
-                <a16:creationId xmlns:a16="http://schemas.microsoft.com/office/drawing/2014/main" id="{E656F88F-27C4-4092-B639-D5ED104A2C06}"/>
+                <a16:creationId xmlns:a16="http://schemas.microsoft.com/office/drawing/2014/main" id="{839868C3-9580-4F92-8E86-0E11DA89D601}"/>
               </a:ext>
             </a:extLst>
           </p:cNvPr>
@@ -43653,7 +43653,7 @@
           <p:cNvPr id="91" name="">
             <a:extLst xmlns:a="http://schemas.openxmlformats.org/drawingml/2006/main">
               <a:ext uri="{FF2B5EF4-FFF2-40B4-BE49-F238E27FC236}">
-                <a16:creationId xmlns:a16="http://schemas.microsoft.com/office/drawing/2014/main" id="{C84A4C81-2AF8-434C-9F39-4755DA4D4023}"/>
+                <a16:creationId xmlns:a16="http://schemas.microsoft.com/office/drawing/2014/main" id="{B5FA5C0A-11BC-4E7D-8ABF-CE1341CDA4B5}"/>
               </a:ext>
             </a:extLst>
           </p:cNvPr>
@@ -43705,7 +43705,7 @@
           <p:cNvPr id="92" name="">
             <a:extLst xmlns:a="http://schemas.openxmlformats.org/drawingml/2006/main">
               <a:ext uri="{FF2B5EF4-FFF2-40B4-BE49-F238E27FC236}">
-                <a16:creationId xmlns:a16="http://schemas.microsoft.com/office/drawing/2014/main" id="{5A54F343-F358-4536-8C59-881987E8457D}"/>
+                <a16:creationId xmlns:a16="http://schemas.microsoft.com/office/drawing/2014/main" id="{E95A9E6A-C18B-424F-80D1-A5F169FB5C42}"/>
               </a:ext>
             </a:extLst>
           </p:cNvPr>
@@ -43757,7 +43757,7 @@
           <p:cNvPr id="93" name="">
             <a:extLst xmlns:a="http://schemas.openxmlformats.org/drawingml/2006/main">
               <a:ext uri="{FF2B5EF4-FFF2-40B4-BE49-F238E27FC236}">
-                <a16:creationId xmlns:a16="http://schemas.microsoft.com/office/drawing/2014/main" id="{FFCC7BBA-4892-46D7-91B5-4748D127EBD4}"/>
+                <a16:creationId xmlns:a16="http://schemas.microsoft.com/office/drawing/2014/main" id="{A4C47C28-F9BD-4A7B-A59C-FFE620AC1AEB}"/>
               </a:ext>
             </a:extLst>
           </p:cNvPr>
@@ -43809,7 +43809,7 @@
           <p:cNvPr id="94" name="">
             <a:extLst xmlns:a="http://schemas.openxmlformats.org/drawingml/2006/main">
               <a:ext uri="{FF2B5EF4-FFF2-40B4-BE49-F238E27FC236}">
-                <a16:creationId xmlns:a16="http://schemas.microsoft.com/office/drawing/2014/main" id="{DBDBB078-48F4-47BD-B541-ED9419B210CF}"/>
+                <a16:creationId xmlns:a16="http://schemas.microsoft.com/office/drawing/2014/main" id="{F4E0C733-F71B-4AE7-95AF-73CD2639A5ED}"/>
               </a:ext>
             </a:extLst>
           </p:cNvPr>
@@ -43861,7 +43861,7 @@
           <p:cNvPr id="95" name="">
             <a:extLst xmlns:a="http://schemas.openxmlformats.org/drawingml/2006/main">
               <a:ext uri="{FF2B5EF4-FFF2-40B4-BE49-F238E27FC236}">
-                <a16:creationId xmlns:a16="http://schemas.microsoft.com/office/drawing/2014/main" id="{3FD126D1-1291-446F-AAE8-45C5F1910756}"/>
+                <a16:creationId xmlns:a16="http://schemas.microsoft.com/office/drawing/2014/main" id="{C185C992-2CA6-4B3A-9CEB-2C92ED8C3292}"/>
               </a:ext>
             </a:extLst>
           </p:cNvPr>
@@ -43913,7 +43913,7 @@
           <p:cNvPr id="96" name="">
             <a:extLst xmlns:a="http://schemas.openxmlformats.org/drawingml/2006/main">
               <a:ext uri="{FF2B5EF4-FFF2-40B4-BE49-F238E27FC236}">
-                <a16:creationId xmlns:a16="http://schemas.microsoft.com/office/drawing/2014/main" id="{1C3AB6B8-F46A-4776-950D-467B44975ABE}"/>
+                <a16:creationId xmlns:a16="http://schemas.microsoft.com/office/drawing/2014/main" id="{C22B1B3D-0236-47D3-A081-8393064A9E1F}"/>
               </a:ext>
             </a:extLst>
           </p:cNvPr>
@@ -43944,7 +43944,7 @@
           <p:cNvPr id="97" name="">
             <a:extLst xmlns:a="http://schemas.openxmlformats.org/drawingml/2006/main">
               <a:ext uri="{FF2B5EF4-FFF2-40B4-BE49-F238E27FC236}">
-                <a16:creationId xmlns:a16="http://schemas.microsoft.com/office/drawing/2014/main" id="{1DE32102-5013-43FE-980D-E92309EB7EB1}"/>
+                <a16:creationId xmlns:a16="http://schemas.microsoft.com/office/drawing/2014/main" id="{702DFDEF-BE29-410A-9FB1-35A12F247856}"/>
               </a:ext>
             </a:extLst>
           </p:cNvPr>
@@ -43996,7 +43996,7 @@
           <p:cNvPr id="98" name="">
             <a:extLst xmlns:a="http://schemas.openxmlformats.org/drawingml/2006/main">
               <a:ext uri="{FF2B5EF4-FFF2-40B4-BE49-F238E27FC236}">
-                <a16:creationId xmlns:a16="http://schemas.microsoft.com/office/drawing/2014/main" id="{D9398ADA-2FC1-4CF7-8A63-618F83F05760}"/>
+                <a16:creationId xmlns:a16="http://schemas.microsoft.com/office/drawing/2014/main" id="{996563B8-D4F4-4CC7-ABFE-93755F8A9A37}"/>
               </a:ext>
             </a:extLst>
           </p:cNvPr>
@@ -44048,7 +44048,7 @@
           <p:cNvPr id="99" name="">
             <a:extLst xmlns:a="http://schemas.openxmlformats.org/drawingml/2006/main">
               <a:ext uri="{FF2B5EF4-FFF2-40B4-BE49-F238E27FC236}">
-                <a16:creationId xmlns:a16="http://schemas.microsoft.com/office/drawing/2014/main" id="{EC4E79F4-5580-484B-A0E9-07ADEB1E5DFE}"/>
+                <a16:creationId xmlns:a16="http://schemas.microsoft.com/office/drawing/2014/main" id="{EFC443B8-4F50-46C3-BC95-10222E384453}"/>
               </a:ext>
             </a:extLst>
           </p:cNvPr>
@@ -44100,7 +44100,7 @@
           <p:cNvPr id="100" name="">
             <a:extLst xmlns:a="http://schemas.openxmlformats.org/drawingml/2006/main">
               <a:ext uri="{FF2B5EF4-FFF2-40B4-BE49-F238E27FC236}">
-                <a16:creationId xmlns:a16="http://schemas.microsoft.com/office/drawing/2014/main" id="{322EAA9E-2157-4FB6-A308-CACE312FA18F}"/>
+                <a16:creationId xmlns:a16="http://schemas.microsoft.com/office/drawing/2014/main" id="{5084F61D-4050-4B73-9954-D19932347230}"/>
               </a:ext>
             </a:extLst>
           </p:cNvPr>
@@ -44152,7 +44152,7 @@
           <p:cNvPr id="101" name="">
             <a:extLst xmlns:a="http://schemas.openxmlformats.org/drawingml/2006/main">
               <a:ext uri="{FF2B5EF4-FFF2-40B4-BE49-F238E27FC236}">
-                <a16:creationId xmlns:a16="http://schemas.microsoft.com/office/drawing/2014/main" id="{AE86B37C-2B42-433D-A8A6-1CA5881FB7AC}"/>
+                <a16:creationId xmlns:a16="http://schemas.microsoft.com/office/drawing/2014/main" id="{14C43275-E1A7-4C2B-95DD-6ADD782ECE75}"/>
               </a:ext>
             </a:extLst>
           </p:cNvPr>
@@ -44202,7 +44202,7 @@
     </p:spTree>
     <p:extLst>
       <p:ext uri="{BB962C8B-B14F-4D97-AF65-F5344CB8AC3E}">
-        <p14:creationId xmlns:p14="http://schemas.microsoft.com/office/powerpoint/2010/main" val="1024014528"/>
+        <p14:creationId xmlns:p14="http://schemas.microsoft.com/office/powerpoint/2010/main" val="1589380407"/>
       </p:ext>
     </p:extLst>
   </p:cSld>

--- a/.preview/pptx-claro/deck.pptx
+++ b/.preview/pptx-claro/deck.pptx
@@ -2,27 +2,27 @@
 <file path=ppt/presentation.xml><?xml version="1.0" encoding="utf-8"?>
 <p:presentation xmlns:p="http://schemas.openxmlformats.org/presentationml/2006/main">
   <p:sldMasterIdLst>
-    <p:sldMasterId xmlns:r="http://schemas.openxmlformats.org/officeDocument/2006/relationships" id="2147483648" r:id="R2e9b35ff1e294435"/>
+    <p:sldMasterId xmlns:r="http://schemas.openxmlformats.org/officeDocument/2006/relationships" id="2147483648" r:id="R4225a1f9020b45b2"/>
   </p:sldMasterIdLst>
   <p:notesMasterIdLst>
-    <p:notesMasterId xmlns:r="http://schemas.openxmlformats.org/officeDocument/2006/relationships" r:id="R0c0ed49d34fb4d39"/>
+    <p:notesMasterId xmlns:r="http://schemas.openxmlformats.org/officeDocument/2006/relationships" r:id="Radbf3f93ae2344b3"/>
   </p:notesMasterIdLst>
   <p:sldIdLst>
-    <p:sldId xmlns:r="http://schemas.openxmlformats.org/officeDocument/2006/relationships" id="256" r:id="Rb3c795f7c1a743e3"/>
-    <p:sldId xmlns:r="http://schemas.openxmlformats.org/officeDocument/2006/relationships" id="257" r:id="R4447d1972cb64f99"/>
-    <p:sldId xmlns:r="http://schemas.openxmlformats.org/officeDocument/2006/relationships" id="258" r:id="R86ba29eac0314966"/>
-    <p:sldId xmlns:r="http://schemas.openxmlformats.org/officeDocument/2006/relationships" id="259" r:id="Rd79db976aad94270"/>
-    <p:sldId xmlns:r="http://schemas.openxmlformats.org/officeDocument/2006/relationships" id="260" r:id="R988c2322ee01419b"/>
-    <p:sldId xmlns:r="http://schemas.openxmlformats.org/officeDocument/2006/relationships" id="261" r:id="Rea126b6105964041"/>
-    <p:sldId xmlns:r="http://schemas.openxmlformats.org/officeDocument/2006/relationships" id="262" r:id="Race3c14dde9a47d7"/>
-    <p:sldId xmlns:r="http://schemas.openxmlformats.org/officeDocument/2006/relationships" id="263" r:id="Rc10422a5a3864345"/>
-    <p:sldId xmlns:r="http://schemas.openxmlformats.org/officeDocument/2006/relationships" id="264" r:id="Rc6398f9ac9fc495c"/>
-    <p:sldId xmlns:r="http://schemas.openxmlformats.org/officeDocument/2006/relationships" id="265" r:id="R829e82aae4ee4623"/>
-    <p:sldId xmlns:r="http://schemas.openxmlformats.org/officeDocument/2006/relationships" id="266" r:id="R55844aced19e4c5b"/>
-    <p:sldId xmlns:r="http://schemas.openxmlformats.org/officeDocument/2006/relationships" id="267" r:id="Ra0a29ca55a5b4f42"/>
-    <p:sldId xmlns:r="http://schemas.openxmlformats.org/officeDocument/2006/relationships" id="268" r:id="Re6f17fc5819c4d23"/>
-    <p:sldId xmlns:r="http://schemas.openxmlformats.org/officeDocument/2006/relationships" id="269" r:id="R7bb595b572f24987"/>
-    <p:sldId xmlns:r="http://schemas.openxmlformats.org/officeDocument/2006/relationships" id="270" r:id="R24d5412dfef14466"/>
+    <p:sldId xmlns:r="http://schemas.openxmlformats.org/officeDocument/2006/relationships" id="256" r:id="R5cb17912a71f4e37"/>
+    <p:sldId xmlns:r="http://schemas.openxmlformats.org/officeDocument/2006/relationships" id="257" r:id="R7c9c448ca4fe4f89"/>
+    <p:sldId xmlns:r="http://schemas.openxmlformats.org/officeDocument/2006/relationships" id="258" r:id="R7b521916150941d9"/>
+    <p:sldId xmlns:r="http://schemas.openxmlformats.org/officeDocument/2006/relationships" id="259" r:id="R0da4d72d04764fac"/>
+    <p:sldId xmlns:r="http://schemas.openxmlformats.org/officeDocument/2006/relationships" id="260" r:id="R228bed0e25884a45"/>
+    <p:sldId xmlns:r="http://schemas.openxmlformats.org/officeDocument/2006/relationships" id="261" r:id="Rd39d345b08fd49a2"/>
+    <p:sldId xmlns:r="http://schemas.openxmlformats.org/officeDocument/2006/relationships" id="262" r:id="R2d2b5d3dfd4a422d"/>
+    <p:sldId xmlns:r="http://schemas.openxmlformats.org/officeDocument/2006/relationships" id="263" r:id="Rd4c66f7cf501417c"/>
+    <p:sldId xmlns:r="http://schemas.openxmlformats.org/officeDocument/2006/relationships" id="264" r:id="R5d6357db41fe4687"/>
+    <p:sldId xmlns:r="http://schemas.openxmlformats.org/officeDocument/2006/relationships" id="265" r:id="R31c5ea0dd3c34926"/>
+    <p:sldId xmlns:r="http://schemas.openxmlformats.org/officeDocument/2006/relationships" id="266" r:id="Rdac0b5357c4942e7"/>
+    <p:sldId xmlns:r="http://schemas.openxmlformats.org/officeDocument/2006/relationships" id="267" r:id="R749a2a46718a4600"/>
+    <p:sldId xmlns:r="http://schemas.openxmlformats.org/officeDocument/2006/relationships" id="268" r:id="Rf38f24c775cb43e2"/>
+    <p:sldId xmlns:r="http://schemas.openxmlformats.org/officeDocument/2006/relationships" id="269" r:id="Rada3fe216e024481"/>
+    <p:sldId xmlns:r="http://schemas.openxmlformats.org/officeDocument/2006/relationships" id="270" r:id="R0e7e573ed3214d41"/>
   </p:sldIdLst>
   <p:sldSz cx="12192000" cy="6858000"/>
   <p:notesSz cx="6858000" cy="9144000"/>
@@ -1879,7 +1879,7 @@
   </p:cSld>
   <p:clrMap bg1="lt1" tx1="dk1" bg2="lt2" tx2="dk2" accent1="accent1" accent2="accent2" accent3="accent3" accent4="accent4" accent5="accent5" accent6="accent6" hlink="hlink" folHlink="folHlink"/>
   <p:sldLayoutIdLst>
-    <p:sldLayoutId xmlns:r="http://schemas.openxmlformats.org/officeDocument/2006/relationships" id="2147483649" r:id="Rb9771b5626bd45d5"/>
+    <p:sldLayoutId xmlns:r="http://schemas.openxmlformats.org/officeDocument/2006/relationships" id="2147483649" r:id="R1db3c962a989497c"/>
   </p:sldLayoutIdLst>
   <p:txStyles>
     <p:titleStyle>
@@ -2430,7 +2430,7 @@
           <p:cNvPr id="17" name="">
             <a:extLst xmlns:a="http://schemas.openxmlformats.org/drawingml/2006/main">
               <a:ext uri="{FF2B5EF4-FFF2-40B4-BE49-F238E27FC236}">
-                <a16:creationId xmlns:a16="http://schemas.microsoft.com/office/drawing/2014/main" id="{4BA33FB2-5D5E-4E08-9DAA-0C44A69F2080}"/>
+                <a16:creationId xmlns:a16="http://schemas.microsoft.com/office/drawing/2014/main" id="{EB0C5B8B-9A28-4F15-BB4C-894ADDEC1A84}"/>
               </a:ext>
             </a:extLst>
           </p:cNvPr>
@@ -2463,7 +2463,7 @@
           <p:cNvPr id="2" name="">
             <a:extLst xmlns:a="http://schemas.openxmlformats.org/drawingml/2006/main">
               <a:ext uri="{FF2B5EF4-FFF2-40B4-BE49-F238E27FC236}">
-                <a16:creationId xmlns:a16="http://schemas.microsoft.com/office/drawing/2014/main" id="{A8DD4DA6-20CA-4CF1-AA0A-B0EA2B14F6C0}"/>
+                <a16:creationId xmlns:a16="http://schemas.microsoft.com/office/drawing/2014/main" id="{52DD632F-ED03-44F2-BD72-67BE5D2C5673}"/>
               </a:ext>
             </a:extLst>
           </p:cNvPr>
@@ -2494,7 +2494,7 @@
           <p:cNvPr id="3" name="">
             <a:extLst xmlns:a="http://schemas.openxmlformats.org/drawingml/2006/main">
               <a:ext uri="{FF2B5EF4-FFF2-40B4-BE49-F238E27FC236}">
-                <a16:creationId xmlns:a16="http://schemas.microsoft.com/office/drawing/2014/main" id="{2F18B327-AF18-4A0A-963D-8000F4242550}"/>
+                <a16:creationId xmlns:a16="http://schemas.microsoft.com/office/drawing/2014/main" id="{F6FA2B0E-6B55-4EF1-91DB-3DC45F7AD15E}"/>
               </a:ext>
             </a:extLst>
           </p:cNvPr>
@@ -2529,7 +2529,7 @@
           <p:nvPr/>
         </p:nvPicPr>
         <p:blipFill>
-          <a:blip xmlns:r="http://schemas.openxmlformats.org/officeDocument/2006/relationships" xmlns:a="http://schemas.openxmlformats.org/drawingml/2006/main" r:embed="R14b0681ffc174193"/>
+          <a:blip xmlns:r="http://schemas.openxmlformats.org/officeDocument/2006/relationships" xmlns:a="http://schemas.openxmlformats.org/drawingml/2006/main" r:embed="R70923e5c86a24432"/>
           <a:stretch xmlns:a="http://schemas.openxmlformats.org/drawingml/2006/main"/>
         </p:blipFill>
         <p:spPr>
@@ -2547,7 +2547,7 @@
           <p:cNvPr id="5" name="">
             <a:extLst xmlns:a="http://schemas.openxmlformats.org/drawingml/2006/main">
               <a:ext uri="{FF2B5EF4-FFF2-40B4-BE49-F238E27FC236}">
-                <a16:creationId xmlns:a16="http://schemas.microsoft.com/office/drawing/2014/main" id="{0F2522F4-6965-45C6-83B0-C8C0F64AAF90}"/>
+                <a16:creationId xmlns:a16="http://schemas.microsoft.com/office/drawing/2014/main" id="{5CDBA813-09C9-477A-840E-41FA162B1698}"/>
               </a:ext>
             </a:extLst>
           </p:cNvPr>
@@ -2599,7 +2599,7 @@
           <p:cNvPr id="6" name="">
             <a:extLst xmlns:a="http://schemas.openxmlformats.org/drawingml/2006/main">
               <a:ext uri="{FF2B5EF4-FFF2-40B4-BE49-F238E27FC236}">
-                <a16:creationId xmlns:a16="http://schemas.microsoft.com/office/drawing/2014/main" id="{747133A9-ECB0-4CB4-9806-DE4CBA19A6DC}"/>
+                <a16:creationId xmlns:a16="http://schemas.microsoft.com/office/drawing/2014/main" id="{843FF58A-7C79-4B21-AD73-A746D07F67EA}"/>
               </a:ext>
             </a:extLst>
           </p:cNvPr>
@@ -2655,7 +2655,7 @@
           <p:nvPr/>
         </p:nvPicPr>
         <p:blipFill>
-          <a:blip xmlns:r="http://schemas.openxmlformats.org/officeDocument/2006/relationships" xmlns:a="http://schemas.openxmlformats.org/drawingml/2006/main" r:embed="R4d9ca53e78cb4f71"/>
+          <a:blip xmlns:r="http://schemas.openxmlformats.org/officeDocument/2006/relationships" xmlns:a="http://schemas.openxmlformats.org/drawingml/2006/main" r:embed="R67a1e525580544f3"/>
           <a:stretch xmlns:a="http://schemas.openxmlformats.org/drawingml/2006/main"/>
         </p:blipFill>
         <p:spPr>
@@ -2673,7 +2673,7 @@
           <p:cNvPr id="8" name="">
             <a:extLst xmlns:a="http://schemas.openxmlformats.org/drawingml/2006/main">
               <a:ext uri="{FF2B5EF4-FFF2-40B4-BE49-F238E27FC236}">
-                <a16:creationId xmlns:a16="http://schemas.microsoft.com/office/drawing/2014/main" id="{E321D7E5-BD4B-406A-A14B-24802B3AF7FE}"/>
+                <a16:creationId xmlns:a16="http://schemas.microsoft.com/office/drawing/2014/main" id="{71C60882-AFC8-4F50-A42D-2C02F7BD94D2}"/>
               </a:ext>
             </a:extLst>
           </p:cNvPr>
@@ -2706,7 +2706,7 @@
           <p:cNvPr id="9" name="">
             <a:extLst xmlns:a="http://schemas.openxmlformats.org/drawingml/2006/main">
               <a:ext uri="{FF2B5EF4-FFF2-40B4-BE49-F238E27FC236}">
-                <a16:creationId xmlns:a16="http://schemas.microsoft.com/office/drawing/2014/main" id="{F7BCBC83-B5EE-4C84-839C-CF636C26CCB4}"/>
+                <a16:creationId xmlns:a16="http://schemas.microsoft.com/office/drawing/2014/main" id="{CD808AB2-DB8D-4FD2-8B67-ACE2C47C74A4}"/>
               </a:ext>
             </a:extLst>
           </p:cNvPr>
@@ -2758,7 +2758,7 @@
           <p:cNvPr id="10" name="">
             <a:extLst xmlns:a="http://schemas.openxmlformats.org/drawingml/2006/main">
               <a:ext uri="{FF2B5EF4-FFF2-40B4-BE49-F238E27FC236}">
-                <a16:creationId xmlns:a16="http://schemas.microsoft.com/office/drawing/2014/main" id="{2CC61D81-7ACE-4A48-9389-71B7F11CA272}"/>
+                <a16:creationId xmlns:a16="http://schemas.microsoft.com/office/drawing/2014/main" id="{EB2042B8-F3B1-47E3-AB47-E1739E4FACFA}"/>
               </a:ext>
             </a:extLst>
           </p:cNvPr>
@@ -2810,7 +2810,7 @@
           <p:cNvPr id="11" name="">
             <a:extLst xmlns:a="http://schemas.openxmlformats.org/drawingml/2006/main">
               <a:ext uri="{FF2B5EF4-FFF2-40B4-BE49-F238E27FC236}">
-                <a16:creationId xmlns:a16="http://schemas.microsoft.com/office/drawing/2014/main" id="{A35FD0B4-59B1-4987-A18B-753A632AD09B}"/>
+                <a16:creationId xmlns:a16="http://schemas.microsoft.com/office/drawing/2014/main" id="{9162C3B5-2A12-4DC0-BEF7-16ABD7959112}"/>
               </a:ext>
             </a:extLst>
           </p:cNvPr>
@@ -2862,7 +2862,7 @@
           <p:cNvPr id="12" name="">
             <a:extLst xmlns:a="http://schemas.openxmlformats.org/drawingml/2006/main">
               <a:ext uri="{FF2B5EF4-FFF2-40B4-BE49-F238E27FC236}">
-                <a16:creationId xmlns:a16="http://schemas.microsoft.com/office/drawing/2014/main" id="{3420EE02-5408-447B-996D-B1ECEFCD51D9}"/>
+                <a16:creationId xmlns:a16="http://schemas.microsoft.com/office/drawing/2014/main" id="{DA644396-928C-4FCD-8E25-1A75E954AEED}"/>
               </a:ext>
             </a:extLst>
           </p:cNvPr>
@@ -2914,7 +2914,7 @@
           <p:cNvPr id="13" name="">
             <a:extLst xmlns:a="http://schemas.openxmlformats.org/drawingml/2006/main">
               <a:ext uri="{FF2B5EF4-FFF2-40B4-BE49-F238E27FC236}">
-                <a16:creationId xmlns:a16="http://schemas.microsoft.com/office/drawing/2014/main" id="{DC9B5D40-B863-4B45-92A2-DED4BAB49F06}"/>
+                <a16:creationId xmlns:a16="http://schemas.microsoft.com/office/drawing/2014/main" id="{2AE27E0D-06B8-4462-A6FC-454736DE95AA}"/>
               </a:ext>
             </a:extLst>
           </p:cNvPr>
@@ -2966,7 +2966,7 @@
           <p:cNvPr id="14" name="">
             <a:extLst xmlns:a="http://schemas.openxmlformats.org/drawingml/2006/main">
               <a:ext uri="{FF2B5EF4-FFF2-40B4-BE49-F238E27FC236}">
-                <a16:creationId xmlns:a16="http://schemas.microsoft.com/office/drawing/2014/main" id="{F1053A5A-A8B4-4C03-B4C2-E50CE8DE2AE1}"/>
+                <a16:creationId xmlns:a16="http://schemas.microsoft.com/office/drawing/2014/main" id="{0116212F-F4AA-43F4-87B8-DD53A1B18CD8}"/>
               </a:ext>
             </a:extLst>
           </p:cNvPr>
@@ -3018,7 +3018,7 @@
           <p:cNvPr id="15" name="">
             <a:extLst xmlns:a="http://schemas.openxmlformats.org/drawingml/2006/main">
               <a:ext uri="{FF2B5EF4-FFF2-40B4-BE49-F238E27FC236}">
-                <a16:creationId xmlns:a16="http://schemas.microsoft.com/office/drawing/2014/main" id="{C38CDBAA-1207-4AC2-B807-A9FFB50250AF}"/>
+                <a16:creationId xmlns:a16="http://schemas.microsoft.com/office/drawing/2014/main" id="{8EB8E771-8FC2-4FEC-A00F-FAF0A3A5B1BF}"/>
               </a:ext>
             </a:extLst>
           </p:cNvPr>
@@ -3070,7 +3070,7 @@
           <p:cNvPr id="16" name="">
             <a:extLst xmlns:a="http://schemas.openxmlformats.org/drawingml/2006/main">
               <a:ext uri="{FF2B5EF4-FFF2-40B4-BE49-F238E27FC236}">
-                <a16:creationId xmlns:a16="http://schemas.microsoft.com/office/drawing/2014/main" id="{D4D37A0C-6C55-4E56-A6A6-216A4D2FEA62}"/>
+                <a16:creationId xmlns:a16="http://schemas.microsoft.com/office/drawing/2014/main" id="{F3298F7D-D696-42E6-9EC3-419B9040B829}"/>
               </a:ext>
             </a:extLst>
           </p:cNvPr>
@@ -3120,7 +3120,7 @@
     </p:spTree>
     <p:extLst>
       <p:ext uri="{BB962C8B-B14F-4D97-AF65-F5344CB8AC3E}">
-        <p14:creationId xmlns:p14="http://schemas.microsoft.com/office/powerpoint/2010/main" val="489410009"/>
+        <p14:creationId xmlns:p14="http://schemas.microsoft.com/office/powerpoint/2010/main" val="1973090434"/>
       </p:ext>
     </p:extLst>
   </p:cSld>
@@ -3151,7 +3151,7 @@
           <p:cNvPr id="103" name="">
             <a:extLst xmlns:a="http://schemas.openxmlformats.org/drawingml/2006/main">
               <a:ext uri="{FF2B5EF4-FFF2-40B4-BE49-F238E27FC236}">
-                <a16:creationId xmlns:a16="http://schemas.microsoft.com/office/drawing/2014/main" id="{E096C3E0-0111-458A-8B46-441250F396AE}"/>
+                <a16:creationId xmlns:a16="http://schemas.microsoft.com/office/drawing/2014/main" id="{97AD94E1-E09C-453C-B63F-3481C854BBBB}"/>
               </a:ext>
             </a:extLst>
           </p:cNvPr>
@@ -3184,7 +3184,7 @@
           <p:cNvPr id="2" name="">
             <a:extLst xmlns:a="http://schemas.openxmlformats.org/drawingml/2006/main">
               <a:ext uri="{FF2B5EF4-FFF2-40B4-BE49-F238E27FC236}">
-                <a16:creationId xmlns:a16="http://schemas.microsoft.com/office/drawing/2014/main" id="{E2C6D12E-BFB9-4F22-868A-095FC018A07E}"/>
+                <a16:creationId xmlns:a16="http://schemas.microsoft.com/office/drawing/2014/main" id="{A8E9432F-20AD-4A23-B51F-2CB751110425}"/>
               </a:ext>
             </a:extLst>
           </p:cNvPr>
@@ -3215,7 +3215,7 @@
           <p:cNvPr id="3" name="">
             <a:extLst xmlns:a="http://schemas.openxmlformats.org/drawingml/2006/main">
               <a:ext uri="{FF2B5EF4-FFF2-40B4-BE49-F238E27FC236}">
-                <a16:creationId xmlns:a16="http://schemas.microsoft.com/office/drawing/2014/main" id="{B39D4B7C-8825-41CD-8DE7-9CE6F3179490}"/>
+                <a16:creationId xmlns:a16="http://schemas.microsoft.com/office/drawing/2014/main" id="{4E7D2F3C-75AF-4431-B3E9-0F2B00E335ED}"/>
               </a:ext>
             </a:extLst>
           </p:cNvPr>
@@ -3267,7 +3267,7 @@
           <p:cNvPr id="4" name="">
             <a:extLst xmlns:a="http://schemas.openxmlformats.org/drawingml/2006/main">
               <a:ext uri="{FF2B5EF4-FFF2-40B4-BE49-F238E27FC236}">
-                <a16:creationId xmlns:a16="http://schemas.microsoft.com/office/drawing/2014/main" id="{63D7F166-3F2A-42B9-8FE0-E847A84D6C01}"/>
+                <a16:creationId xmlns:a16="http://schemas.microsoft.com/office/drawing/2014/main" id="{8E276B6C-9DC2-4A97-B8F4-74AC5B354887}"/>
               </a:ext>
             </a:extLst>
           </p:cNvPr>
@@ -3319,7 +3319,7 @@
           <p:cNvPr id="5" name="">
             <a:extLst xmlns:a="http://schemas.openxmlformats.org/drawingml/2006/main">
               <a:ext uri="{FF2B5EF4-FFF2-40B4-BE49-F238E27FC236}">
-                <a16:creationId xmlns:a16="http://schemas.microsoft.com/office/drawing/2014/main" id="{B4D9DA32-DB14-49BC-A76C-A03BAEDDC6DC}"/>
+                <a16:creationId xmlns:a16="http://schemas.microsoft.com/office/drawing/2014/main" id="{E9EB2B5F-36FD-4E78-9CCF-026E12B6697E}"/>
               </a:ext>
             </a:extLst>
           </p:cNvPr>
@@ -3354,7 +3354,7 @@
           <p:nvPr/>
         </p:nvPicPr>
         <p:blipFill>
-          <a:blip xmlns:r="http://schemas.openxmlformats.org/officeDocument/2006/relationships" xmlns:a="http://schemas.openxmlformats.org/drawingml/2006/main" r:embed="R481b887441924598"/>
+          <a:blip xmlns:r="http://schemas.openxmlformats.org/officeDocument/2006/relationships" xmlns:a="http://schemas.openxmlformats.org/drawingml/2006/main" r:embed="Rcca181ca9fbb4490"/>
           <a:stretch xmlns:a="http://schemas.openxmlformats.org/drawingml/2006/main"/>
         </p:blipFill>
         <p:spPr>
@@ -3372,7 +3372,7 @@
           <p:cNvPr id="7" name="">
             <a:extLst xmlns:a="http://schemas.openxmlformats.org/drawingml/2006/main">
               <a:ext uri="{FF2B5EF4-FFF2-40B4-BE49-F238E27FC236}">
-                <a16:creationId xmlns:a16="http://schemas.microsoft.com/office/drawing/2014/main" id="{5640CD3E-18E3-4A8D-8154-4B2BA1D05788}"/>
+                <a16:creationId xmlns:a16="http://schemas.microsoft.com/office/drawing/2014/main" id="{814D2794-00A9-4558-9C97-DD09CE95BC36}"/>
               </a:ext>
             </a:extLst>
           </p:cNvPr>
@@ -3424,7 +3424,7 @@
           <p:cNvPr id="8" name="">
             <a:extLst xmlns:a="http://schemas.openxmlformats.org/drawingml/2006/main">
               <a:ext uri="{FF2B5EF4-FFF2-40B4-BE49-F238E27FC236}">
-                <a16:creationId xmlns:a16="http://schemas.microsoft.com/office/drawing/2014/main" id="{7CDA49C5-8227-4660-B36C-FD54B1E14895}"/>
+                <a16:creationId xmlns:a16="http://schemas.microsoft.com/office/drawing/2014/main" id="{4AD7BF04-40E2-4E8C-8997-CF40F3162962}"/>
               </a:ext>
             </a:extLst>
           </p:cNvPr>
@@ -3476,7 +3476,7 @@
           <p:cNvPr id="9" name="">
             <a:extLst xmlns:a="http://schemas.openxmlformats.org/drawingml/2006/main">
               <a:ext uri="{FF2B5EF4-FFF2-40B4-BE49-F238E27FC236}">
-                <a16:creationId xmlns:a16="http://schemas.microsoft.com/office/drawing/2014/main" id="{2CDD0576-82DC-4934-8CDA-00FC0BA974E4}"/>
+                <a16:creationId xmlns:a16="http://schemas.microsoft.com/office/drawing/2014/main" id="{A3AD2EF5-E33A-4744-B612-CCC71B343E8C}"/>
               </a:ext>
             </a:extLst>
           </p:cNvPr>
@@ -3528,7 +3528,7 @@
           <p:cNvPr id="10" name="">
             <a:extLst xmlns:a="http://schemas.openxmlformats.org/drawingml/2006/main">
               <a:ext uri="{FF2B5EF4-FFF2-40B4-BE49-F238E27FC236}">
-                <a16:creationId xmlns:a16="http://schemas.microsoft.com/office/drawing/2014/main" id="{06559564-6048-4974-9E5F-F44170D7DAD0}"/>
+                <a16:creationId xmlns:a16="http://schemas.microsoft.com/office/drawing/2014/main" id="{793247C0-0D1C-4835-82E8-BF82A9C6FB10}"/>
               </a:ext>
             </a:extLst>
           </p:cNvPr>
@@ -3580,7 +3580,7 @@
           <p:cNvPr id="11" name="">
             <a:extLst xmlns:a="http://schemas.openxmlformats.org/drawingml/2006/main">
               <a:ext uri="{FF2B5EF4-FFF2-40B4-BE49-F238E27FC236}">
-                <a16:creationId xmlns:a16="http://schemas.microsoft.com/office/drawing/2014/main" id="{70478EAC-D4C4-48E6-8115-259DF36BC5B8}"/>
+                <a16:creationId xmlns:a16="http://schemas.microsoft.com/office/drawing/2014/main" id="{D7F0D2D9-4A0A-4F07-B340-D768F3BA62EE}"/>
               </a:ext>
             </a:extLst>
           </p:cNvPr>
@@ -3611,7 +3611,7 @@
           <p:cNvPr id="12" name="">
             <a:extLst xmlns:a="http://schemas.openxmlformats.org/drawingml/2006/main">
               <a:ext uri="{FF2B5EF4-FFF2-40B4-BE49-F238E27FC236}">
-                <a16:creationId xmlns:a16="http://schemas.microsoft.com/office/drawing/2014/main" id="{77728092-16A1-4547-88A3-35B34C2B2923}"/>
+                <a16:creationId xmlns:a16="http://schemas.microsoft.com/office/drawing/2014/main" id="{5D67CE2B-BD1D-4022-99AB-7D1BAF82630E}"/>
               </a:ext>
             </a:extLst>
           </p:cNvPr>
@@ -3642,7 +3642,7 @@
           <p:cNvPr id="13" name="">
             <a:extLst xmlns:a="http://schemas.openxmlformats.org/drawingml/2006/main">
               <a:ext uri="{FF2B5EF4-FFF2-40B4-BE49-F238E27FC236}">
-                <a16:creationId xmlns:a16="http://schemas.microsoft.com/office/drawing/2014/main" id="{D89CC61C-939B-4647-9141-131B42B68094}"/>
+                <a16:creationId xmlns:a16="http://schemas.microsoft.com/office/drawing/2014/main" id="{21E2B415-B3EE-4E04-816D-E26C251812ED}"/>
               </a:ext>
             </a:extLst>
           </p:cNvPr>
@@ -3694,7 +3694,7 @@
           <p:cNvPr id="14" name="">
             <a:extLst xmlns:a="http://schemas.openxmlformats.org/drawingml/2006/main">
               <a:ext uri="{FF2B5EF4-FFF2-40B4-BE49-F238E27FC236}">
-                <a16:creationId xmlns:a16="http://schemas.microsoft.com/office/drawing/2014/main" id="{97C5A991-6EE1-4350-8C14-2FE4A00037BA}"/>
+                <a16:creationId xmlns:a16="http://schemas.microsoft.com/office/drawing/2014/main" id="{A952D573-3135-4C13-9CAA-A0739950924D}"/>
               </a:ext>
             </a:extLst>
           </p:cNvPr>
@@ -3746,7 +3746,7 @@
           <p:cNvPr id="15" name="">
             <a:extLst xmlns:a="http://schemas.openxmlformats.org/drawingml/2006/main">
               <a:ext uri="{FF2B5EF4-FFF2-40B4-BE49-F238E27FC236}">
-                <a16:creationId xmlns:a16="http://schemas.microsoft.com/office/drawing/2014/main" id="{B560063F-B579-4C1B-90BF-8921CC54B313}"/>
+                <a16:creationId xmlns:a16="http://schemas.microsoft.com/office/drawing/2014/main" id="{0CC1324F-94AE-4B57-8948-987E6F7A06BA}"/>
               </a:ext>
             </a:extLst>
           </p:cNvPr>
@@ -3798,7 +3798,7 @@
           <p:cNvPr id="16" name="">
             <a:extLst xmlns:a="http://schemas.openxmlformats.org/drawingml/2006/main">
               <a:ext uri="{FF2B5EF4-FFF2-40B4-BE49-F238E27FC236}">
-                <a16:creationId xmlns:a16="http://schemas.microsoft.com/office/drawing/2014/main" id="{E8CAE4F3-67BC-4BFE-9768-CCE26A0B5824}"/>
+                <a16:creationId xmlns:a16="http://schemas.microsoft.com/office/drawing/2014/main" id="{E9B7AD23-09CA-4DD4-96FB-406A5E98727A}"/>
               </a:ext>
             </a:extLst>
           </p:cNvPr>
@@ -3850,7 +3850,7 @@
           <p:cNvPr id="17" name="">
             <a:extLst xmlns:a="http://schemas.openxmlformats.org/drawingml/2006/main">
               <a:ext uri="{FF2B5EF4-FFF2-40B4-BE49-F238E27FC236}">
-                <a16:creationId xmlns:a16="http://schemas.microsoft.com/office/drawing/2014/main" id="{583A882F-D3F7-4314-9B6B-38E744C7FCCD}"/>
+                <a16:creationId xmlns:a16="http://schemas.microsoft.com/office/drawing/2014/main" id="{A5EDF66A-D701-4FC7-9547-26307E47D5BF}"/>
               </a:ext>
             </a:extLst>
           </p:cNvPr>
@@ -3902,7 +3902,7 @@
           <p:cNvPr id="18" name="">
             <a:extLst xmlns:a="http://schemas.openxmlformats.org/drawingml/2006/main">
               <a:ext uri="{FF2B5EF4-FFF2-40B4-BE49-F238E27FC236}">
-                <a16:creationId xmlns:a16="http://schemas.microsoft.com/office/drawing/2014/main" id="{46F2C962-BA01-45BA-B2E4-7AF939D2DCFA}"/>
+                <a16:creationId xmlns:a16="http://schemas.microsoft.com/office/drawing/2014/main" id="{95D0D6B1-2274-4547-AD23-49D9CCAAF5BE}"/>
               </a:ext>
             </a:extLst>
           </p:cNvPr>
@@ -3933,7 +3933,7 @@
           <p:cNvPr id="19" name="">
             <a:extLst xmlns:a="http://schemas.openxmlformats.org/drawingml/2006/main">
               <a:ext uri="{FF2B5EF4-FFF2-40B4-BE49-F238E27FC236}">
-                <a16:creationId xmlns:a16="http://schemas.microsoft.com/office/drawing/2014/main" id="{795C3A96-5382-4C7B-9DA7-A73D5B0273A6}"/>
+                <a16:creationId xmlns:a16="http://schemas.microsoft.com/office/drawing/2014/main" id="{E3503ADF-B3F6-4F99-B639-A7F2A8CD15A3}"/>
               </a:ext>
             </a:extLst>
           </p:cNvPr>
@@ -3964,7 +3964,7 @@
           <p:cNvPr id="20" name="">
             <a:extLst xmlns:a="http://schemas.openxmlformats.org/drawingml/2006/main">
               <a:ext uri="{FF2B5EF4-FFF2-40B4-BE49-F238E27FC236}">
-                <a16:creationId xmlns:a16="http://schemas.microsoft.com/office/drawing/2014/main" id="{94CB8257-E159-4763-9CC9-1C256D91FF61}"/>
+                <a16:creationId xmlns:a16="http://schemas.microsoft.com/office/drawing/2014/main" id="{5D11B446-0ACD-4847-8C16-E3CF130BE72C}"/>
               </a:ext>
             </a:extLst>
           </p:cNvPr>
@@ -4016,7 +4016,7 @@
           <p:cNvPr id="21" name="">
             <a:extLst xmlns:a="http://schemas.openxmlformats.org/drawingml/2006/main">
               <a:ext uri="{FF2B5EF4-FFF2-40B4-BE49-F238E27FC236}">
-                <a16:creationId xmlns:a16="http://schemas.microsoft.com/office/drawing/2014/main" id="{E905F4CC-7CAF-4BD9-9C20-34508853AA1D}"/>
+                <a16:creationId xmlns:a16="http://schemas.microsoft.com/office/drawing/2014/main" id="{607D4424-6AFF-4724-B41B-FEC1B726043C}"/>
               </a:ext>
             </a:extLst>
           </p:cNvPr>
@@ -4068,7 +4068,7 @@
           <p:cNvPr id="22" name="">
             <a:extLst xmlns:a="http://schemas.openxmlformats.org/drawingml/2006/main">
               <a:ext uri="{FF2B5EF4-FFF2-40B4-BE49-F238E27FC236}">
-                <a16:creationId xmlns:a16="http://schemas.microsoft.com/office/drawing/2014/main" id="{18FD9E3E-F027-4F5C-AD30-7A37810E7B99}"/>
+                <a16:creationId xmlns:a16="http://schemas.microsoft.com/office/drawing/2014/main" id="{F9C3906D-46EC-4913-A38B-8B502ABD65B2}"/>
               </a:ext>
             </a:extLst>
           </p:cNvPr>
@@ -4120,7 +4120,7 @@
           <p:cNvPr id="23" name="">
             <a:extLst xmlns:a="http://schemas.openxmlformats.org/drawingml/2006/main">
               <a:ext uri="{FF2B5EF4-FFF2-40B4-BE49-F238E27FC236}">
-                <a16:creationId xmlns:a16="http://schemas.microsoft.com/office/drawing/2014/main" id="{536D30C5-569B-4FC9-B500-3BC89ABB52ED}"/>
+                <a16:creationId xmlns:a16="http://schemas.microsoft.com/office/drawing/2014/main" id="{12AEDED4-5FAF-4D57-91A1-0BF6493DD766}"/>
               </a:ext>
             </a:extLst>
           </p:cNvPr>
@@ -4172,7 +4172,7 @@
           <p:cNvPr id="24" name="">
             <a:extLst xmlns:a="http://schemas.openxmlformats.org/drawingml/2006/main">
               <a:ext uri="{FF2B5EF4-FFF2-40B4-BE49-F238E27FC236}">
-                <a16:creationId xmlns:a16="http://schemas.microsoft.com/office/drawing/2014/main" id="{DF734AAB-2439-40A3-9867-A2C9DA58DFAD}"/>
+                <a16:creationId xmlns:a16="http://schemas.microsoft.com/office/drawing/2014/main" id="{F7EE5B30-9B3B-4169-9136-8811154E649A}"/>
               </a:ext>
             </a:extLst>
           </p:cNvPr>
@@ -4224,7 +4224,7 @@
           <p:cNvPr id="25" name="">
             <a:extLst xmlns:a="http://schemas.openxmlformats.org/drawingml/2006/main">
               <a:ext uri="{FF2B5EF4-FFF2-40B4-BE49-F238E27FC236}">
-                <a16:creationId xmlns:a16="http://schemas.microsoft.com/office/drawing/2014/main" id="{399735B4-CAF1-4009-BA07-03FBEDB3053E}"/>
+                <a16:creationId xmlns:a16="http://schemas.microsoft.com/office/drawing/2014/main" id="{E4BFB6A9-6B0D-4FB7-A938-5A18838C54AD}"/>
               </a:ext>
             </a:extLst>
           </p:cNvPr>
@@ -4255,7 +4255,7 @@
           <p:cNvPr id="26" name="">
             <a:extLst xmlns:a="http://schemas.openxmlformats.org/drawingml/2006/main">
               <a:ext uri="{FF2B5EF4-FFF2-40B4-BE49-F238E27FC236}">
-                <a16:creationId xmlns:a16="http://schemas.microsoft.com/office/drawing/2014/main" id="{1DF206EE-0D4C-42EF-AC1A-606A2B0DCA63}"/>
+                <a16:creationId xmlns:a16="http://schemas.microsoft.com/office/drawing/2014/main" id="{69F7D387-166E-425C-9360-33FCF616E95A}"/>
               </a:ext>
             </a:extLst>
           </p:cNvPr>
@@ -4307,7 +4307,7 @@
           <p:cNvPr id="27" name="">
             <a:extLst xmlns:a="http://schemas.openxmlformats.org/drawingml/2006/main">
               <a:ext uri="{FF2B5EF4-FFF2-40B4-BE49-F238E27FC236}">
-                <a16:creationId xmlns:a16="http://schemas.microsoft.com/office/drawing/2014/main" id="{CE569BAB-0F56-407B-A583-3BD305C7B2AB}"/>
+                <a16:creationId xmlns:a16="http://schemas.microsoft.com/office/drawing/2014/main" id="{C945E3B6-D300-49F8-986A-685553BBD0EB}"/>
               </a:ext>
             </a:extLst>
           </p:cNvPr>
@@ -4359,7 +4359,7 @@
           <p:cNvPr id="28" name="">
             <a:extLst xmlns:a="http://schemas.openxmlformats.org/drawingml/2006/main">
               <a:ext uri="{FF2B5EF4-FFF2-40B4-BE49-F238E27FC236}">
-                <a16:creationId xmlns:a16="http://schemas.microsoft.com/office/drawing/2014/main" id="{276F4D6B-56E1-466B-AA4C-EB517AFC0518}"/>
+                <a16:creationId xmlns:a16="http://schemas.microsoft.com/office/drawing/2014/main" id="{4390FC73-0A85-40C8-ACE1-AC48DDF08B71}"/>
               </a:ext>
             </a:extLst>
           </p:cNvPr>
@@ -4411,7 +4411,7 @@
           <p:cNvPr id="29" name="">
             <a:extLst xmlns:a="http://schemas.openxmlformats.org/drawingml/2006/main">
               <a:ext uri="{FF2B5EF4-FFF2-40B4-BE49-F238E27FC236}">
-                <a16:creationId xmlns:a16="http://schemas.microsoft.com/office/drawing/2014/main" id="{97434B09-A7CB-4A7F-8BDD-65B3004DCA09}"/>
+                <a16:creationId xmlns:a16="http://schemas.microsoft.com/office/drawing/2014/main" id="{09A1F0DE-E70E-45A0-AD69-AD9D50DB980F}"/>
               </a:ext>
             </a:extLst>
           </p:cNvPr>
@@ -4463,7 +4463,7 @@
           <p:cNvPr id="30" name="">
             <a:extLst xmlns:a="http://schemas.openxmlformats.org/drawingml/2006/main">
               <a:ext uri="{FF2B5EF4-FFF2-40B4-BE49-F238E27FC236}">
-                <a16:creationId xmlns:a16="http://schemas.microsoft.com/office/drawing/2014/main" id="{6A8FE27B-5AA4-4161-B997-F516CAA3FBFF}"/>
+                <a16:creationId xmlns:a16="http://schemas.microsoft.com/office/drawing/2014/main" id="{C30081E1-66C6-4F06-81EF-36BE68B3FD15}"/>
               </a:ext>
             </a:extLst>
           </p:cNvPr>
@@ -4515,7 +4515,7 @@
           <p:cNvPr id="31" name="">
             <a:extLst xmlns:a="http://schemas.openxmlformats.org/drawingml/2006/main">
               <a:ext uri="{FF2B5EF4-FFF2-40B4-BE49-F238E27FC236}">
-                <a16:creationId xmlns:a16="http://schemas.microsoft.com/office/drawing/2014/main" id="{3755E0E8-523F-4E9C-BC25-5952850A11D8}"/>
+                <a16:creationId xmlns:a16="http://schemas.microsoft.com/office/drawing/2014/main" id="{189E88DA-85DA-41BC-87B6-5C1ABF2D1D7E}"/>
               </a:ext>
             </a:extLst>
           </p:cNvPr>
@@ -4546,7 +4546,7 @@
           <p:cNvPr id="32" name="">
             <a:extLst xmlns:a="http://schemas.openxmlformats.org/drawingml/2006/main">
               <a:ext uri="{FF2B5EF4-FFF2-40B4-BE49-F238E27FC236}">
-                <a16:creationId xmlns:a16="http://schemas.microsoft.com/office/drawing/2014/main" id="{0AA7A7ED-0D24-48D8-87AE-46AA0DD531ED}"/>
+                <a16:creationId xmlns:a16="http://schemas.microsoft.com/office/drawing/2014/main" id="{D1617F44-2E59-4F7D-AB32-C8DE85ACBA1E}"/>
               </a:ext>
             </a:extLst>
           </p:cNvPr>
@@ -4577,7 +4577,7 @@
           <p:cNvPr id="33" name="">
             <a:extLst xmlns:a="http://schemas.openxmlformats.org/drawingml/2006/main">
               <a:ext uri="{FF2B5EF4-FFF2-40B4-BE49-F238E27FC236}">
-                <a16:creationId xmlns:a16="http://schemas.microsoft.com/office/drawing/2014/main" id="{F0A2DC6B-F328-4B72-8E45-9AD81135B363}"/>
+                <a16:creationId xmlns:a16="http://schemas.microsoft.com/office/drawing/2014/main" id="{62305B3C-7CB8-4C63-80F0-2D35F0602749}"/>
               </a:ext>
             </a:extLst>
           </p:cNvPr>
@@ -4629,7 +4629,7 @@
           <p:cNvPr id="34" name="">
             <a:extLst xmlns:a="http://schemas.openxmlformats.org/drawingml/2006/main">
               <a:ext uri="{FF2B5EF4-FFF2-40B4-BE49-F238E27FC236}">
-                <a16:creationId xmlns:a16="http://schemas.microsoft.com/office/drawing/2014/main" id="{21ACDBA3-BDCA-4D4E-AAFD-CE28E7209D11}"/>
+                <a16:creationId xmlns:a16="http://schemas.microsoft.com/office/drawing/2014/main" id="{EE9A3812-ADD5-465D-A2AF-F0B94A92B81F}"/>
               </a:ext>
             </a:extLst>
           </p:cNvPr>
@@ -4681,7 +4681,7 @@
           <p:cNvPr id="35" name="">
             <a:extLst xmlns:a="http://schemas.openxmlformats.org/drawingml/2006/main">
               <a:ext uri="{FF2B5EF4-FFF2-40B4-BE49-F238E27FC236}">
-                <a16:creationId xmlns:a16="http://schemas.microsoft.com/office/drawing/2014/main" id="{3BC0DD2D-9303-43A3-BB3A-28364F9C932E}"/>
+                <a16:creationId xmlns:a16="http://schemas.microsoft.com/office/drawing/2014/main" id="{35DC027F-AE4C-45C6-B927-A4D7066629B0}"/>
               </a:ext>
             </a:extLst>
           </p:cNvPr>
@@ -4733,7 +4733,7 @@
           <p:cNvPr id="36" name="">
             <a:extLst xmlns:a="http://schemas.openxmlformats.org/drawingml/2006/main">
               <a:ext uri="{FF2B5EF4-FFF2-40B4-BE49-F238E27FC236}">
-                <a16:creationId xmlns:a16="http://schemas.microsoft.com/office/drawing/2014/main" id="{52D01F84-E0B7-4E26-A052-D9A176CBBC1E}"/>
+                <a16:creationId xmlns:a16="http://schemas.microsoft.com/office/drawing/2014/main" id="{7837499F-81E7-4E8F-BDFC-0108021E9F86}"/>
               </a:ext>
             </a:extLst>
           </p:cNvPr>
@@ -4785,7 +4785,7 @@
           <p:cNvPr id="37" name="">
             <a:extLst xmlns:a="http://schemas.openxmlformats.org/drawingml/2006/main">
               <a:ext uri="{FF2B5EF4-FFF2-40B4-BE49-F238E27FC236}">
-                <a16:creationId xmlns:a16="http://schemas.microsoft.com/office/drawing/2014/main" id="{A19BC3C8-790E-4888-96AE-6055DA06802D}"/>
+                <a16:creationId xmlns:a16="http://schemas.microsoft.com/office/drawing/2014/main" id="{7AFEC32C-491D-4040-A525-FFA753975659}"/>
               </a:ext>
             </a:extLst>
           </p:cNvPr>
@@ -4837,7 +4837,7 @@
           <p:cNvPr id="38" name="">
             <a:extLst xmlns:a="http://schemas.openxmlformats.org/drawingml/2006/main">
               <a:ext uri="{FF2B5EF4-FFF2-40B4-BE49-F238E27FC236}">
-                <a16:creationId xmlns:a16="http://schemas.microsoft.com/office/drawing/2014/main" id="{1B5EDD98-76F3-4934-87A1-C83C77BD143D}"/>
+                <a16:creationId xmlns:a16="http://schemas.microsoft.com/office/drawing/2014/main" id="{98E129B3-1E3B-4586-80AB-A2690A59DED3}"/>
               </a:ext>
             </a:extLst>
           </p:cNvPr>
@@ -4868,7 +4868,7 @@
           <p:cNvPr id="39" name="">
             <a:extLst xmlns:a="http://schemas.openxmlformats.org/drawingml/2006/main">
               <a:ext uri="{FF2B5EF4-FFF2-40B4-BE49-F238E27FC236}">
-                <a16:creationId xmlns:a16="http://schemas.microsoft.com/office/drawing/2014/main" id="{CFDC880F-096E-4A63-9F61-15322463B707}"/>
+                <a16:creationId xmlns:a16="http://schemas.microsoft.com/office/drawing/2014/main" id="{0EC56C8C-FA26-4047-9359-E42B74FEBF4E}"/>
               </a:ext>
             </a:extLst>
           </p:cNvPr>
@@ -4920,7 +4920,7 @@
           <p:cNvPr id="40" name="">
             <a:extLst xmlns:a="http://schemas.openxmlformats.org/drawingml/2006/main">
               <a:ext uri="{FF2B5EF4-FFF2-40B4-BE49-F238E27FC236}">
-                <a16:creationId xmlns:a16="http://schemas.microsoft.com/office/drawing/2014/main" id="{38B8223E-DC0E-4B0B-821D-35F84516361E}"/>
+                <a16:creationId xmlns:a16="http://schemas.microsoft.com/office/drawing/2014/main" id="{F0FE46FA-A071-4587-8015-5864155714CC}"/>
               </a:ext>
             </a:extLst>
           </p:cNvPr>
@@ -4972,7 +4972,7 @@
           <p:cNvPr id="41" name="">
             <a:extLst xmlns:a="http://schemas.openxmlformats.org/drawingml/2006/main">
               <a:ext uri="{FF2B5EF4-FFF2-40B4-BE49-F238E27FC236}">
-                <a16:creationId xmlns:a16="http://schemas.microsoft.com/office/drawing/2014/main" id="{6D45B986-7BF4-4A3A-994F-70E7DA392165}"/>
+                <a16:creationId xmlns:a16="http://schemas.microsoft.com/office/drawing/2014/main" id="{258A6717-EE76-4BD3-97D4-23B819A7A352}"/>
               </a:ext>
             </a:extLst>
           </p:cNvPr>
@@ -5024,7 +5024,7 @@
           <p:cNvPr id="42" name="">
             <a:extLst xmlns:a="http://schemas.openxmlformats.org/drawingml/2006/main">
               <a:ext uri="{FF2B5EF4-FFF2-40B4-BE49-F238E27FC236}">
-                <a16:creationId xmlns:a16="http://schemas.microsoft.com/office/drawing/2014/main" id="{F4527A59-DB44-4667-A1BD-AA58443A5EC8}"/>
+                <a16:creationId xmlns:a16="http://schemas.microsoft.com/office/drawing/2014/main" id="{7715A93B-F40E-42BF-B35B-09894D500E89}"/>
               </a:ext>
             </a:extLst>
           </p:cNvPr>
@@ -5076,7 +5076,7 @@
           <p:cNvPr id="43" name="">
             <a:extLst xmlns:a="http://schemas.openxmlformats.org/drawingml/2006/main">
               <a:ext uri="{FF2B5EF4-FFF2-40B4-BE49-F238E27FC236}">
-                <a16:creationId xmlns:a16="http://schemas.microsoft.com/office/drawing/2014/main" id="{70175D61-8629-45C3-8D14-9A6A4F8C5798}"/>
+                <a16:creationId xmlns:a16="http://schemas.microsoft.com/office/drawing/2014/main" id="{B6253CD2-1B49-4250-90C4-17A85491EA3A}"/>
               </a:ext>
             </a:extLst>
           </p:cNvPr>
@@ -5128,7 +5128,7 @@
           <p:cNvPr id="44" name="">
             <a:extLst xmlns:a="http://schemas.openxmlformats.org/drawingml/2006/main">
               <a:ext uri="{FF2B5EF4-FFF2-40B4-BE49-F238E27FC236}">
-                <a16:creationId xmlns:a16="http://schemas.microsoft.com/office/drawing/2014/main" id="{55041E04-83B5-4A65-8F3B-A58465E5E78E}"/>
+                <a16:creationId xmlns:a16="http://schemas.microsoft.com/office/drawing/2014/main" id="{5147D2CF-355C-42C0-8CFD-1586B404CA5C}"/>
               </a:ext>
             </a:extLst>
           </p:cNvPr>
@@ -5159,7 +5159,7 @@
           <p:cNvPr id="45" name="">
             <a:extLst xmlns:a="http://schemas.openxmlformats.org/drawingml/2006/main">
               <a:ext uri="{FF2B5EF4-FFF2-40B4-BE49-F238E27FC236}">
-                <a16:creationId xmlns:a16="http://schemas.microsoft.com/office/drawing/2014/main" id="{96DD9A6F-CC15-4263-AABC-7BD3B1525A3B}"/>
+                <a16:creationId xmlns:a16="http://schemas.microsoft.com/office/drawing/2014/main" id="{02993AD7-4C1E-4D67-8248-CBCF72B7A18E}"/>
               </a:ext>
             </a:extLst>
           </p:cNvPr>
@@ -5190,7 +5190,7 @@
           <p:cNvPr id="46" name="">
             <a:extLst xmlns:a="http://schemas.openxmlformats.org/drawingml/2006/main">
               <a:ext uri="{FF2B5EF4-FFF2-40B4-BE49-F238E27FC236}">
-                <a16:creationId xmlns:a16="http://schemas.microsoft.com/office/drawing/2014/main" id="{F0BC3A7F-59D3-4BE5-9DFF-6B0BC5CEDF55}"/>
+                <a16:creationId xmlns:a16="http://schemas.microsoft.com/office/drawing/2014/main" id="{A079A9C9-7DB4-47CD-8B34-4FC88EF72DCA}"/>
               </a:ext>
             </a:extLst>
           </p:cNvPr>
@@ -5242,7 +5242,7 @@
           <p:cNvPr id="47" name="">
             <a:extLst xmlns:a="http://schemas.openxmlformats.org/drawingml/2006/main">
               <a:ext uri="{FF2B5EF4-FFF2-40B4-BE49-F238E27FC236}">
-                <a16:creationId xmlns:a16="http://schemas.microsoft.com/office/drawing/2014/main" id="{8DA64D86-8EC0-428A-A567-6856B91542E9}"/>
+                <a16:creationId xmlns:a16="http://schemas.microsoft.com/office/drawing/2014/main" id="{B31D1F28-0553-4ED3-86E8-2D026E28A522}"/>
               </a:ext>
             </a:extLst>
           </p:cNvPr>
@@ -5294,7 +5294,7 @@
           <p:cNvPr id="48" name="">
             <a:extLst xmlns:a="http://schemas.openxmlformats.org/drawingml/2006/main">
               <a:ext uri="{FF2B5EF4-FFF2-40B4-BE49-F238E27FC236}">
-                <a16:creationId xmlns:a16="http://schemas.microsoft.com/office/drawing/2014/main" id="{8AD3AE03-86A3-47FD-AFCA-0F816A7B1B97}"/>
+                <a16:creationId xmlns:a16="http://schemas.microsoft.com/office/drawing/2014/main" id="{677661B7-0C36-4679-A104-1FA716643699}"/>
               </a:ext>
             </a:extLst>
           </p:cNvPr>
@@ -5346,7 +5346,7 @@
           <p:cNvPr id="49" name="">
             <a:extLst xmlns:a="http://schemas.openxmlformats.org/drawingml/2006/main">
               <a:ext uri="{FF2B5EF4-FFF2-40B4-BE49-F238E27FC236}">
-                <a16:creationId xmlns:a16="http://schemas.microsoft.com/office/drawing/2014/main" id="{19BB7667-8C25-4482-A895-737ED8C13115}"/>
+                <a16:creationId xmlns:a16="http://schemas.microsoft.com/office/drawing/2014/main" id="{3F74CE5D-BCCC-407A-81D8-809B89396D8A}"/>
               </a:ext>
             </a:extLst>
           </p:cNvPr>
@@ -5398,7 +5398,7 @@
           <p:cNvPr id="50" name="">
             <a:extLst xmlns:a="http://schemas.openxmlformats.org/drawingml/2006/main">
               <a:ext uri="{FF2B5EF4-FFF2-40B4-BE49-F238E27FC236}">
-                <a16:creationId xmlns:a16="http://schemas.microsoft.com/office/drawing/2014/main" id="{E6F9CAA6-EF9C-4A88-8918-154D38A82884}"/>
+                <a16:creationId xmlns:a16="http://schemas.microsoft.com/office/drawing/2014/main" id="{50947339-AF0D-455D-BD6A-F7BE02A9027B}"/>
               </a:ext>
             </a:extLst>
           </p:cNvPr>
@@ -5450,7 +5450,7 @@
           <p:cNvPr id="51" name="">
             <a:extLst xmlns:a="http://schemas.openxmlformats.org/drawingml/2006/main">
               <a:ext uri="{FF2B5EF4-FFF2-40B4-BE49-F238E27FC236}">
-                <a16:creationId xmlns:a16="http://schemas.microsoft.com/office/drawing/2014/main" id="{9F0D5C11-132A-47A7-800D-C3B6FF294082}"/>
+                <a16:creationId xmlns:a16="http://schemas.microsoft.com/office/drawing/2014/main" id="{9337DB32-C541-46ED-841B-3257600B8BE4}"/>
               </a:ext>
             </a:extLst>
           </p:cNvPr>
@@ -5481,7 +5481,7 @@
           <p:cNvPr id="52" name="">
             <a:extLst xmlns:a="http://schemas.openxmlformats.org/drawingml/2006/main">
               <a:ext uri="{FF2B5EF4-FFF2-40B4-BE49-F238E27FC236}">
-                <a16:creationId xmlns:a16="http://schemas.microsoft.com/office/drawing/2014/main" id="{EB5CAC62-A54B-48CE-8732-174AA78180B0}"/>
+                <a16:creationId xmlns:a16="http://schemas.microsoft.com/office/drawing/2014/main" id="{AC7D2B9F-27AC-4CDD-8122-BEDEA4558782}"/>
               </a:ext>
             </a:extLst>
           </p:cNvPr>
@@ -5533,7 +5533,7 @@
           <p:cNvPr id="53" name="">
             <a:extLst xmlns:a="http://schemas.openxmlformats.org/drawingml/2006/main">
               <a:ext uri="{FF2B5EF4-FFF2-40B4-BE49-F238E27FC236}">
-                <a16:creationId xmlns:a16="http://schemas.microsoft.com/office/drawing/2014/main" id="{A1E29BF7-AC84-43BB-8274-647C7A24B9DF}"/>
+                <a16:creationId xmlns:a16="http://schemas.microsoft.com/office/drawing/2014/main" id="{044C4711-F032-4E14-97F1-9358C1F2371E}"/>
               </a:ext>
             </a:extLst>
           </p:cNvPr>
@@ -5585,7 +5585,7 @@
           <p:cNvPr id="54" name="">
             <a:extLst xmlns:a="http://schemas.openxmlformats.org/drawingml/2006/main">
               <a:ext uri="{FF2B5EF4-FFF2-40B4-BE49-F238E27FC236}">
-                <a16:creationId xmlns:a16="http://schemas.microsoft.com/office/drawing/2014/main" id="{66076ACE-43F5-4038-AF24-4F6C001239AB}"/>
+                <a16:creationId xmlns:a16="http://schemas.microsoft.com/office/drawing/2014/main" id="{EC056104-E267-4DA7-B787-8847D3B3BFD6}"/>
               </a:ext>
             </a:extLst>
           </p:cNvPr>
@@ -5637,7 +5637,7 @@
           <p:cNvPr id="55" name="">
             <a:extLst xmlns:a="http://schemas.openxmlformats.org/drawingml/2006/main">
               <a:ext uri="{FF2B5EF4-FFF2-40B4-BE49-F238E27FC236}">
-                <a16:creationId xmlns:a16="http://schemas.microsoft.com/office/drawing/2014/main" id="{F367B95B-9DFF-4B49-92B2-979D3873898A}"/>
+                <a16:creationId xmlns:a16="http://schemas.microsoft.com/office/drawing/2014/main" id="{B23DF411-7921-49F7-9BDB-94DBB7DC3906}"/>
               </a:ext>
             </a:extLst>
           </p:cNvPr>
@@ -5689,7 +5689,7 @@
           <p:cNvPr id="56" name="">
             <a:extLst xmlns:a="http://schemas.openxmlformats.org/drawingml/2006/main">
               <a:ext uri="{FF2B5EF4-FFF2-40B4-BE49-F238E27FC236}">
-                <a16:creationId xmlns:a16="http://schemas.microsoft.com/office/drawing/2014/main" id="{55AE7A52-98EC-49D5-A6DF-37BDD67A2404}"/>
+                <a16:creationId xmlns:a16="http://schemas.microsoft.com/office/drawing/2014/main" id="{AC962020-2B35-4118-8A26-5DD217DD3BAB}"/>
               </a:ext>
             </a:extLst>
           </p:cNvPr>
@@ -5741,7 +5741,7 @@
           <p:cNvPr id="57" name="">
             <a:extLst xmlns:a="http://schemas.openxmlformats.org/drawingml/2006/main">
               <a:ext uri="{FF2B5EF4-FFF2-40B4-BE49-F238E27FC236}">
-                <a16:creationId xmlns:a16="http://schemas.microsoft.com/office/drawing/2014/main" id="{FBDF9DAD-E6DB-43BA-9B3E-F129F2E3341A}"/>
+                <a16:creationId xmlns:a16="http://schemas.microsoft.com/office/drawing/2014/main" id="{BA0A61BE-776D-4BAB-A4A9-398C16EFDC09}"/>
               </a:ext>
             </a:extLst>
           </p:cNvPr>
@@ -5772,7 +5772,7 @@
           <p:cNvPr id="58" name="">
             <a:extLst xmlns:a="http://schemas.openxmlformats.org/drawingml/2006/main">
               <a:ext uri="{FF2B5EF4-FFF2-40B4-BE49-F238E27FC236}">
-                <a16:creationId xmlns:a16="http://schemas.microsoft.com/office/drawing/2014/main" id="{0F7F3487-1782-4FEA-B24B-CFDDAFA538C7}"/>
+                <a16:creationId xmlns:a16="http://schemas.microsoft.com/office/drawing/2014/main" id="{06A0E7F4-D7C4-4CE3-9BAE-342FECF3C143}"/>
               </a:ext>
             </a:extLst>
           </p:cNvPr>
@@ -5803,7 +5803,7 @@
           <p:cNvPr id="59" name="">
             <a:extLst xmlns:a="http://schemas.openxmlformats.org/drawingml/2006/main">
               <a:ext uri="{FF2B5EF4-FFF2-40B4-BE49-F238E27FC236}">
-                <a16:creationId xmlns:a16="http://schemas.microsoft.com/office/drawing/2014/main" id="{6BE6878B-9A2D-4877-8DC1-B2B03EEF2117}"/>
+                <a16:creationId xmlns:a16="http://schemas.microsoft.com/office/drawing/2014/main" id="{380B6D16-4250-4F67-BC15-8A01526713FA}"/>
               </a:ext>
             </a:extLst>
           </p:cNvPr>
@@ -5855,7 +5855,7 @@
           <p:cNvPr id="60" name="">
             <a:extLst xmlns:a="http://schemas.openxmlformats.org/drawingml/2006/main">
               <a:ext uri="{FF2B5EF4-FFF2-40B4-BE49-F238E27FC236}">
-                <a16:creationId xmlns:a16="http://schemas.microsoft.com/office/drawing/2014/main" id="{1D93EC38-792E-4BE0-8627-39B76C387977}"/>
+                <a16:creationId xmlns:a16="http://schemas.microsoft.com/office/drawing/2014/main" id="{CDCE05C4-A7B2-46AF-BB81-4C870A8DE509}"/>
               </a:ext>
             </a:extLst>
           </p:cNvPr>
@@ -5907,7 +5907,7 @@
           <p:cNvPr id="61" name="">
             <a:extLst xmlns:a="http://schemas.openxmlformats.org/drawingml/2006/main">
               <a:ext uri="{FF2B5EF4-FFF2-40B4-BE49-F238E27FC236}">
-                <a16:creationId xmlns:a16="http://schemas.microsoft.com/office/drawing/2014/main" id="{FF15A26C-AED2-4B6E-BC76-6B4B837CCBC7}"/>
+                <a16:creationId xmlns:a16="http://schemas.microsoft.com/office/drawing/2014/main" id="{2F368A27-5EB6-473E-8FD7-96E024E4C35A}"/>
               </a:ext>
             </a:extLst>
           </p:cNvPr>
@@ -5959,7 +5959,7 @@
           <p:cNvPr id="62" name="">
             <a:extLst xmlns:a="http://schemas.openxmlformats.org/drawingml/2006/main">
               <a:ext uri="{FF2B5EF4-FFF2-40B4-BE49-F238E27FC236}">
-                <a16:creationId xmlns:a16="http://schemas.microsoft.com/office/drawing/2014/main" id="{00E86B0E-24AC-469E-BD94-0883CBBCC9ED}"/>
+                <a16:creationId xmlns:a16="http://schemas.microsoft.com/office/drawing/2014/main" id="{B0E5465F-1F71-41F0-B970-A69CC77A0440}"/>
               </a:ext>
             </a:extLst>
           </p:cNvPr>
@@ -6011,7 +6011,7 @@
           <p:cNvPr id="63" name="">
             <a:extLst xmlns:a="http://schemas.openxmlformats.org/drawingml/2006/main">
               <a:ext uri="{FF2B5EF4-FFF2-40B4-BE49-F238E27FC236}">
-                <a16:creationId xmlns:a16="http://schemas.microsoft.com/office/drawing/2014/main" id="{E5EB7FDC-FC3D-4A05-8AF2-2BE2EFAC9321}"/>
+                <a16:creationId xmlns:a16="http://schemas.microsoft.com/office/drawing/2014/main" id="{E4247F9A-E195-4428-9080-DD8BBB59A028}"/>
               </a:ext>
             </a:extLst>
           </p:cNvPr>
@@ -6063,7 +6063,7 @@
           <p:cNvPr id="64" name="">
             <a:extLst xmlns:a="http://schemas.openxmlformats.org/drawingml/2006/main">
               <a:ext uri="{FF2B5EF4-FFF2-40B4-BE49-F238E27FC236}">
-                <a16:creationId xmlns:a16="http://schemas.microsoft.com/office/drawing/2014/main" id="{F2408CD6-3245-4BFA-AC08-93F764773DF2}"/>
+                <a16:creationId xmlns:a16="http://schemas.microsoft.com/office/drawing/2014/main" id="{46A7D010-E04B-4103-AB24-42D4147F3B01}"/>
               </a:ext>
             </a:extLst>
           </p:cNvPr>
@@ -6094,7 +6094,7 @@
           <p:cNvPr id="65" name="">
             <a:extLst xmlns:a="http://schemas.openxmlformats.org/drawingml/2006/main">
               <a:ext uri="{FF2B5EF4-FFF2-40B4-BE49-F238E27FC236}">
-                <a16:creationId xmlns:a16="http://schemas.microsoft.com/office/drawing/2014/main" id="{5BDBBE4C-8E3A-42D0-8150-70806A86305E}"/>
+                <a16:creationId xmlns:a16="http://schemas.microsoft.com/office/drawing/2014/main" id="{8DC5CB41-D700-40B9-A24E-0B21E930760E}"/>
               </a:ext>
             </a:extLst>
           </p:cNvPr>
@@ -6146,7 +6146,7 @@
           <p:cNvPr id="66" name="">
             <a:extLst xmlns:a="http://schemas.openxmlformats.org/drawingml/2006/main">
               <a:ext uri="{FF2B5EF4-FFF2-40B4-BE49-F238E27FC236}">
-                <a16:creationId xmlns:a16="http://schemas.microsoft.com/office/drawing/2014/main" id="{09434A5A-C236-4826-96F7-8CC7D1944FC1}"/>
+                <a16:creationId xmlns:a16="http://schemas.microsoft.com/office/drawing/2014/main" id="{45EAD286-E418-4D70-A6FB-A861B7569085}"/>
               </a:ext>
             </a:extLst>
           </p:cNvPr>
@@ -6198,7 +6198,7 @@
           <p:cNvPr id="67" name="">
             <a:extLst xmlns:a="http://schemas.openxmlformats.org/drawingml/2006/main">
               <a:ext uri="{FF2B5EF4-FFF2-40B4-BE49-F238E27FC236}">
-                <a16:creationId xmlns:a16="http://schemas.microsoft.com/office/drawing/2014/main" id="{EEEBFBED-0720-480D-8E7A-B9A58A4A0B0C}"/>
+                <a16:creationId xmlns:a16="http://schemas.microsoft.com/office/drawing/2014/main" id="{B73C90AB-523C-4E6E-B257-6DA3D75B1110}"/>
               </a:ext>
             </a:extLst>
           </p:cNvPr>
@@ -6250,7 +6250,7 @@
           <p:cNvPr id="68" name="">
             <a:extLst xmlns:a="http://schemas.openxmlformats.org/drawingml/2006/main">
               <a:ext uri="{FF2B5EF4-FFF2-40B4-BE49-F238E27FC236}">
-                <a16:creationId xmlns:a16="http://schemas.microsoft.com/office/drawing/2014/main" id="{A72F1F5A-DA1F-4B13-A9DD-E348682B2ACD}"/>
+                <a16:creationId xmlns:a16="http://schemas.microsoft.com/office/drawing/2014/main" id="{2DFBB4B8-480A-49AD-86CB-17DF97AB60A8}"/>
               </a:ext>
             </a:extLst>
           </p:cNvPr>
@@ -6302,7 +6302,7 @@
           <p:cNvPr id="69" name="">
             <a:extLst xmlns:a="http://schemas.openxmlformats.org/drawingml/2006/main">
               <a:ext uri="{FF2B5EF4-FFF2-40B4-BE49-F238E27FC236}">
-                <a16:creationId xmlns:a16="http://schemas.microsoft.com/office/drawing/2014/main" id="{30426055-032E-47E2-B331-BF8159EA2174}"/>
+                <a16:creationId xmlns:a16="http://schemas.microsoft.com/office/drawing/2014/main" id="{141A5ECF-D8A2-46CA-8AF5-932110486099}"/>
               </a:ext>
             </a:extLst>
           </p:cNvPr>
@@ -6354,7 +6354,7 @@
           <p:cNvPr id="70" name="">
             <a:extLst xmlns:a="http://schemas.openxmlformats.org/drawingml/2006/main">
               <a:ext uri="{FF2B5EF4-FFF2-40B4-BE49-F238E27FC236}">
-                <a16:creationId xmlns:a16="http://schemas.microsoft.com/office/drawing/2014/main" id="{F48A223E-E561-4A39-8FDA-A9F9757844E8}"/>
+                <a16:creationId xmlns:a16="http://schemas.microsoft.com/office/drawing/2014/main" id="{C15A5086-C24F-4131-9215-F3439B9E7645}"/>
               </a:ext>
             </a:extLst>
           </p:cNvPr>
@@ -6385,7 +6385,7 @@
           <p:cNvPr id="71" name="">
             <a:extLst xmlns:a="http://schemas.openxmlformats.org/drawingml/2006/main">
               <a:ext uri="{FF2B5EF4-FFF2-40B4-BE49-F238E27FC236}">
-                <a16:creationId xmlns:a16="http://schemas.microsoft.com/office/drawing/2014/main" id="{3BED9F3F-6A47-4DEB-855E-858B502B929C}"/>
+                <a16:creationId xmlns:a16="http://schemas.microsoft.com/office/drawing/2014/main" id="{0DADF873-4127-49B6-9524-B4FC1F8469FE}"/>
               </a:ext>
             </a:extLst>
           </p:cNvPr>
@@ -6416,7 +6416,7 @@
           <p:cNvPr id="72" name="">
             <a:extLst xmlns:a="http://schemas.openxmlformats.org/drawingml/2006/main">
               <a:ext uri="{FF2B5EF4-FFF2-40B4-BE49-F238E27FC236}">
-                <a16:creationId xmlns:a16="http://schemas.microsoft.com/office/drawing/2014/main" id="{ABE4F051-C72E-4760-88BC-00CD416B67C2}"/>
+                <a16:creationId xmlns:a16="http://schemas.microsoft.com/office/drawing/2014/main" id="{C592161F-E6E6-4E44-A957-0149E89037D7}"/>
               </a:ext>
             </a:extLst>
           </p:cNvPr>
@@ -6468,7 +6468,7 @@
           <p:cNvPr id="73" name="">
             <a:extLst xmlns:a="http://schemas.openxmlformats.org/drawingml/2006/main">
               <a:ext uri="{FF2B5EF4-FFF2-40B4-BE49-F238E27FC236}">
-                <a16:creationId xmlns:a16="http://schemas.microsoft.com/office/drawing/2014/main" id="{5E5F1C22-407D-4C40-9538-FBE0295FF7DC}"/>
+                <a16:creationId xmlns:a16="http://schemas.microsoft.com/office/drawing/2014/main" id="{B95DF017-0C13-4195-A62D-AFFB0B4D5668}"/>
               </a:ext>
             </a:extLst>
           </p:cNvPr>
@@ -6520,7 +6520,7 @@
           <p:cNvPr id="74" name="">
             <a:extLst xmlns:a="http://schemas.openxmlformats.org/drawingml/2006/main">
               <a:ext uri="{FF2B5EF4-FFF2-40B4-BE49-F238E27FC236}">
-                <a16:creationId xmlns:a16="http://schemas.microsoft.com/office/drawing/2014/main" id="{9B2CDB7A-94C4-40A7-AC19-8362B338DD18}"/>
+                <a16:creationId xmlns:a16="http://schemas.microsoft.com/office/drawing/2014/main" id="{470293AE-B6ED-4058-BD5F-2905EC64E2BD}"/>
               </a:ext>
             </a:extLst>
           </p:cNvPr>
@@ -6572,7 +6572,7 @@
           <p:cNvPr id="75" name="">
             <a:extLst xmlns:a="http://schemas.openxmlformats.org/drawingml/2006/main">
               <a:ext uri="{FF2B5EF4-FFF2-40B4-BE49-F238E27FC236}">
-                <a16:creationId xmlns:a16="http://schemas.microsoft.com/office/drawing/2014/main" id="{F7814811-2CC7-418F-B4F6-7ADB6C91B27F}"/>
+                <a16:creationId xmlns:a16="http://schemas.microsoft.com/office/drawing/2014/main" id="{757958ED-EE85-4407-88F6-D25410E29ECC}"/>
               </a:ext>
             </a:extLst>
           </p:cNvPr>
@@ -6624,7 +6624,7 @@
           <p:cNvPr id="76" name="">
             <a:extLst xmlns:a="http://schemas.openxmlformats.org/drawingml/2006/main">
               <a:ext uri="{FF2B5EF4-FFF2-40B4-BE49-F238E27FC236}">
-                <a16:creationId xmlns:a16="http://schemas.microsoft.com/office/drawing/2014/main" id="{B98A9368-2803-43F4-8458-ADB5977273E3}"/>
+                <a16:creationId xmlns:a16="http://schemas.microsoft.com/office/drawing/2014/main" id="{5627705E-61C9-4DE8-85A1-C38E27A0F5F9}"/>
               </a:ext>
             </a:extLst>
           </p:cNvPr>
@@ -6676,7 +6676,7 @@
           <p:cNvPr id="77" name="">
             <a:extLst xmlns:a="http://schemas.openxmlformats.org/drawingml/2006/main">
               <a:ext uri="{FF2B5EF4-FFF2-40B4-BE49-F238E27FC236}">
-                <a16:creationId xmlns:a16="http://schemas.microsoft.com/office/drawing/2014/main" id="{EA937E79-03F9-48A5-BACB-AD6660962762}"/>
+                <a16:creationId xmlns:a16="http://schemas.microsoft.com/office/drawing/2014/main" id="{64EF847B-3569-4AAC-B55A-DE0C44A676E8}"/>
               </a:ext>
             </a:extLst>
           </p:cNvPr>
@@ -6707,7 +6707,7 @@
           <p:cNvPr id="78" name="">
             <a:extLst xmlns:a="http://schemas.openxmlformats.org/drawingml/2006/main">
               <a:ext uri="{FF2B5EF4-FFF2-40B4-BE49-F238E27FC236}">
-                <a16:creationId xmlns:a16="http://schemas.microsoft.com/office/drawing/2014/main" id="{A2F5B53A-8641-40C3-98E5-8BC2EC99B9DE}"/>
+                <a16:creationId xmlns:a16="http://schemas.microsoft.com/office/drawing/2014/main" id="{318D1CC9-AFC0-43DB-8A03-23F7C10AB50D}"/>
               </a:ext>
             </a:extLst>
           </p:cNvPr>
@@ -6759,7 +6759,7 @@
           <p:cNvPr id="79" name="">
             <a:extLst xmlns:a="http://schemas.openxmlformats.org/drawingml/2006/main">
               <a:ext uri="{FF2B5EF4-FFF2-40B4-BE49-F238E27FC236}">
-                <a16:creationId xmlns:a16="http://schemas.microsoft.com/office/drawing/2014/main" id="{05DFFF30-06F8-420A-8CC9-0123EBAEB455}"/>
+                <a16:creationId xmlns:a16="http://schemas.microsoft.com/office/drawing/2014/main" id="{F63241D0-217E-4C31-96FE-7C7A7434B336}"/>
               </a:ext>
             </a:extLst>
           </p:cNvPr>
@@ -6811,7 +6811,7 @@
           <p:cNvPr id="80" name="">
             <a:extLst xmlns:a="http://schemas.openxmlformats.org/drawingml/2006/main">
               <a:ext uri="{FF2B5EF4-FFF2-40B4-BE49-F238E27FC236}">
-                <a16:creationId xmlns:a16="http://schemas.microsoft.com/office/drawing/2014/main" id="{2CA2B9B6-3219-4C31-A8BE-645AA0995333}"/>
+                <a16:creationId xmlns:a16="http://schemas.microsoft.com/office/drawing/2014/main" id="{9E9A1892-5F1D-40CF-ADAF-B9EF1662AB37}"/>
               </a:ext>
             </a:extLst>
           </p:cNvPr>
@@ -6863,7 +6863,7 @@
           <p:cNvPr id="81" name="">
             <a:extLst xmlns:a="http://schemas.openxmlformats.org/drawingml/2006/main">
               <a:ext uri="{FF2B5EF4-FFF2-40B4-BE49-F238E27FC236}">
-                <a16:creationId xmlns:a16="http://schemas.microsoft.com/office/drawing/2014/main" id="{0B40737B-0C7A-49ED-98AC-A4561BAEEE0B}"/>
+                <a16:creationId xmlns:a16="http://schemas.microsoft.com/office/drawing/2014/main" id="{980245CB-CE32-4914-B4BF-7DC71240B4B0}"/>
               </a:ext>
             </a:extLst>
           </p:cNvPr>
@@ -6915,7 +6915,7 @@
           <p:cNvPr id="82" name="">
             <a:extLst xmlns:a="http://schemas.openxmlformats.org/drawingml/2006/main">
               <a:ext uri="{FF2B5EF4-FFF2-40B4-BE49-F238E27FC236}">
-                <a16:creationId xmlns:a16="http://schemas.microsoft.com/office/drawing/2014/main" id="{EB0AF4F2-6240-45B2-AE09-17E987CC7D83}"/>
+                <a16:creationId xmlns:a16="http://schemas.microsoft.com/office/drawing/2014/main" id="{DF2F9C6E-B883-4209-86CD-247E538152F9}"/>
               </a:ext>
             </a:extLst>
           </p:cNvPr>
@@ -6967,7 +6967,7 @@
           <p:cNvPr id="83" name="">
             <a:extLst xmlns:a="http://schemas.openxmlformats.org/drawingml/2006/main">
               <a:ext uri="{FF2B5EF4-FFF2-40B4-BE49-F238E27FC236}">
-                <a16:creationId xmlns:a16="http://schemas.microsoft.com/office/drawing/2014/main" id="{BB731386-1AE3-4C52-BF67-52EDEB2191BB}"/>
+                <a16:creationId xmlns:a16="http://schemas.microsoft.com/office/drawing/2014/main" id="{DAED0353-4321-45F0-BF62-443F2F394D36}"/>
               </a:ext>
             </a:extLst>
           </p:cNvPr>
@@ -6998,7 +6998,7 @@
           <p:cNvPr id="84" name="">
             <a:extLst xmlns:a="http://schemas.openxmlformats.org/drawingml/2006/main">
               <a:ext uri="{FF2B5EF4-FFF2-40B4-BE49-F238E27FC236}">
-                <a16:creationId xmlns:a16="http://schemas.microsoft.com/office/drawing/2014/main" id="{90B640CB-6000-4116-9222-CA64333192D2}"/>
+                <a16:creationId xmlns:a16="http://schemas.microsoft.com/office/drawing/2014/main" id="{EA54A428-53A8-4E41-BB09-738443A7DD9C}"/>
               </a:ext>
             </a:extLst>
           </p:cNvPr>
@@ -7029,7 +7029,7 @@
           <p:cNvPr id="85" name="">
             <a:extLst xmlns:a="http://schemas.openxmlformats.org/drawingml/2006/main">
               <a:ext uri="{FF2B5EF4-FFF2-40B4-BE49-F238E27FC236}">
-                <a16:creationId xmlns:a16="http://schemas.microsoft.com/office/drawing/2014/main" id="{86019EF3-B5E2-4B18-83C5-DC71A9357B46}"/>
+                <a16:creationId xmlns:a16="http://schemas.microsoft.com/office/drawing/2014/main" id="{4D2CB226-4250-418F-8924-A6CCA0E8C246}"/>
               </a:ext>
             </a:extLst>
           </p:cNvPr>
@@ -7081,7 +7081,7 @@
           <p:cNvPr id="86" name="">
             <a:extLst xmlns:a="http://schemas.openxmlformats.org/drawingml/2006/main">
               <a:ext uri="{FF2B5EF4-FFF2-40B4-BE49-F238E27FC236}">
-                <a16:creationId xmlns:a16="http://schemas.microsoft.com/office/drawing/2014/main" id="{59F72F45-28DB-48C8-A065-ABBED3597F06}"/>
+                <a16:creationId xmlns:a16="http://schemas.microsoft.com/office/drawing/2014/main" id="{193068F2-7DB7-485C-BA80-5290F0D8AE05}"/>
               </a:ext>
             </a:extLst>
           </p:cNvPr>
@@ -7133,7 +7133,7 @@
           <p:cNvPr id="87" name="">
             <a:extLst xmlns:a="http://schemas.openxmlformats.org/drawingml/2006/main">
               <a:ext uri="{FF2B5EF4-FFF2-40B4-BE49-F238E27FC236}">
-                <a16:creationId xmlns:a16="http://schemas.microsoft.com/office/drawing/2014/main" id="{50EF8E9E-6301-4282-B935-331DD5C9EAAB}"/>
+                <a16:creationId xmlns:a16="http://schemas.microsoft.com/office/drawing/2014/main" id="{D11B9B67-F364-4974-BD4A-02554CA64D65}"/>
               </a:ext>
             </a:extLst>
           </p:cNvPr>
@@ -7185,7 +7185,7 @@
           <p:cNvPr id="88" name="">
             <a:extLst xmlns:a="http://schemas.openxmlformats.org/drawingml/2006/main">
               <a:ext uri="{FF2B5EF4-FFF2-40B4-BE49-F238E27FC236}">
-                <a16:creationId xmlns:a16="http://schemas.microsoft.com/office/drawing/2014/main" id="{3B350274-498D-41A3-9938-5E1EE3DA7682}"/>
+                <a16:creationId xmlns:a16="http://schemas.microsoft.com/office/drawing/2014/main" id="{CD4FBAE1-9875-4EFA-B0BC-2B2D3C632B98}"/>
               </a:ext>
             </a:extLst>
           </p:cNvPr>
@@ -7237,7 +7237,7 @@
           <p:cNvPr id="89" name="">
             <a:extLst xmlns:a="http://schemas.openxmlformats.org/drawingml/2006/main">
               <a:ext uri="{FF2B5EF4-FFF2-40B4-BE49-F238E27FC236}">
-                <a16:creationId xmlns:a16="http://schemas.microsoft.com/office/drawing/2014/main" id="{0D242CD7-1099-4A00-AE61-684BCC0BBE6C}"/>
+                <a16:creationId xmlns:a16="http://schemas.microsoft.com/office/drawing/2014/main" id="{0F553E6A-7855-4B28-BA03-D194FD8C3380}"/>
               </a:ext>
             </a:extLst>
           </p:cNvPr>
@@ -7289,7 +7289,7 @@
           <p:cNvPr id="90" name="">
             <a:extLst xmlns:a="http://schemas.openxmlformats.org/drawingml/2006/main">
               <a:ext uri="{FF2B5EF4-FFF2-40B4-BE49-F238E27FC236}">
-                <a16:creationId xmlns:a16="http://schemas.microsoft.com/office/drawing/2014/main" id="{1EEE061F-DD15-4FD0-A49B-50869C48B2BE}"/>
+                <a16:creationId xmlns:a16="http://schemas.microsoft.com/office/drawing/2014/main" id="{9005080D-21F7-4B40-9D70-FADC4EAC3133}"/>
               </a:ext>
             </a:extLst>
           </p:cNvPr>
@@ -7320,7 +7320,7 @@
           <p:cNvPr id="91" name="">
             <a:extLst xmlns:a="http://schemas.openxmlformats.org/drawingml/2006/main">
               <a:ext uri="{FF2B5EF4-FFF2-40B4-BE49-F238E27FC236}">
-                <a16:creationId xmlns:a16="http://schemas.microsoft.com/office/drawing/2014/main" id="{BB26E801-89F5-490E-85B6-9DCDFA4F5FB6}"/>
+                <a16:creationId xmlns:a16="http://schemas.microsoft.com/office/drawing/2014/main" id="{E694B39E-1CBE-438A-A1FD-4F2D608E3039}"/>
               </a:ext>
             </a:extLst>
           </p:cNvPr>
@@ -7372,7 +7372,7 @@
           <p:cNvPr id="92" name="">
             <a:extLst xmlns:a="http://schemas.openxmlformats.org/drawingml/2006/main">
               <a:ext uri="{FF2B5EF4-FFF2-40B4-BE49-F238E27FC236}">
-                <a16:creationId xmlns:a16="http://schemas.microsoft.com/office/drawing/2014/main" id="{3F4362DE-FBC7-4146-8203-41CBF12F9A5E}"/>
+                <a16:creationId xmlns:a16="http://schemas.microsoft.com/office/drawing/2014/main" id="{B6190614-42F8-4355-A778-915424BC46E5}"/>
               </a:ext>
             </a:extLst>
           </p:cNvPr>
@@ -7424,7 +7424,7 @@
           <p:cNvPr id="93" name="">
             <a:extLst xmlns:a="http://schemas.openxmlformats.org/drawingml/2006/main">
               <a:ext uri="{FF2B5EF4-FFF2-40B4-BE49-F238E27FC236}">
-                <a16:creationId xmlns:a16="http://schemas.microsoft.com/office/drawing/2014/main" id="{76B880E1-DE5C-4B2C-BB84-354608451A80}"/>
+                <a16:creationId xmlns:a16="http://schemas.microsoft.com/office/drawing/2014/main" id="{47154ADD-FF0E-4F7F-A11D-E6F30C7C4F57}"/>
               </a:ext>
             </a:extLst>
           </p:cNvPr>
@@ -7476,7 +7476,7 @@
           <p:cNvPr id="94" name="">
             <a:extLst xmlns:a="http://schemas.openxmlformats.org/drawingml/2006/main">
               <a:ext uri="{FF2B5EF4-FFF2-40B4-BE49-F238E27FC236}">
-                <a16:creationId xmlns:a16="http://schemas.microsoft.com/office/drawing/2014/main" id="{2DE0FFF3-1BFC-48A3-863E-47C9E2855F16}"/>
+                <a16:creationId xmlns:a16="http://schemas.microsoft.com/office/drawing/2014/main" id="{7F5C6F75-F0A8-4CA2-A09A-C10D713F78F5}"/>
               </a:ext>
             </a:extLst>
           </p:cNvPr>
@@ -7528,7 +7528,7 @@
           <p:cNvPr id="95" name="">
             <a:extLst xmlns:a="http://schemas.openxmlformats.org/drawingml/2006/main">
               <a:ext uri="{FF2B5EF4-FFF2-40B4-BE49-F238E27FC236}">
-                <a16:creationId xmlns:a16="http://schemas.microsoft.com/office/drawing/2014/main" id="{7D2C513C-4826-432C-879F-CA01DCF43AFD}"/>
+                <a16:creationId xmlns:a16="http://schemas.microsoft.com/office/drawing/2014/main" id="{2C62BF21-F0E2-4410-97B3-3F24A7C74FAB}"/>
               </a:ext>
             </a:extLst>
           </p:cNvPr>
@@ -7580,7 +7580,7 @@
           <p:cNvPr id="96" name="">
             <a:extLst xmlns:a="http://schemas.openxmlformats.org/drawingml/2006/main">
               <a:ext uri="{FF2B5EF4-FFF2-40B4-BE49-F238E27FC236}">
-                <a16:creationId xmlns:a16="http://schemas.microsoft.com/office/drawing/2014/main" id="{4C6364C1-496F-4452-9C20-9A0410160F8B}"/>
+                <a16:creationId xmlns:a16="http://schemas.microsoft.com/office/drawing/2014/main" id="{6E5A80B0-9AA1-41AD-BF47-421114E56C84}"/>
               </a:ext>
             </a:extLst>
           </p:cNvPr>
@@ -7611,7 +7611,7 @@
           <p:cNvPr id="97" name="">
             <a:extLst xmlns:a="http://schemas.openxmlformats.org/drawingml/2006/main">
               <a:ext uri="{FF2B5EF4-FFF2-40B4-BE49-F238E27FC236}">
-                <a16:creationId xmlns:a16="http://schemas.microsoft.com/office/drawing/2014/main" id="{1BCEF659-37C8-431E-9BB5-15A4FFBA2C4C}"/>
+                <a16:creationId xmlns:a16="http://schemas.microsoft.com/office/drawing/2014/main" id="{1E35720B-03C2-4A0F-9705-18E4E127CAC1}"/>
               </a:ext>
             </a:extLst>
           </p:cNvPr>
@@ -7642,7 +7642,7 @@
           <p:cNvPr id="98" name="">
             <a:extLst xmlns:a="http://schemas.openxmlformats.org/drawingml/2006/main">
               <a:ext uri="{FF2B5EF4-FFF2-40B4-BE49-F238E27FC236}">
-                <a16:creationId xmlns:a16="http://schemas.microsoft.com/office/drawing/2014/main" id="{2B7EF987-39BE-45D8-B679-9C55F22539CE}"/>
+                <a16:creationId xmlns:a16="http://schemas.microsoft.com/office/drawing/2014/main" id="{4203382D-24DF-4E9B-98A8-ECBEE1C4790C}"/>
               </a:ext>
             </a:extLst>
           </p:cNvPr>
@@ -7694,7 +7694,7 @@
           <p:cNvPr id="99" name="">
             <a:extLst xmlns:a="http://schemas.openxmlformats.org/drawingml/2006/main">
               <a:ext uri="{FF2B5EF4-FFF2-40B4-BE49-F238E27FC236}">
-                <a16:creationId xmlns:a16="http://schemas.microsoft.com/office/drawing/2014/main" id="{6CFA317D-B5FB-404B-9C4D-FAD7431307CE}"/>
+                <a16:creationId xmlns:a16="http://schemas.microsoft.com/office/drawing/2014/main" id="{ABDC3EDB-DA0D-4753-BC63-7216B7E62F20}"/>
               </a:ext>
             </a:extLst>
           </p:cNvPr>
@@ -7746,7 +7746,7 @@
           <p:cNvPr id="100" name="">
             <a:extLst xmlns:a="http://schemas.openxmlformats.org/drawingml/2006/main">
               <a:ext uri="{FF2B5EF4-FFF2-40B4-BE49-F238E27FC236}">
-                <a16:creationId xmlns:a16="http://schemas.microsoft.com/office/drawing/2014/main" id="{D71DEDA7-3D22-4702-82F8-7B7BC7F0E74A}"/>
+                <a16:creationId xmlns:a16="http://schemas.microsoft.com/office/drawing/2014/main" id="{E0BE0C38-AC13-4D84-87D3-F9EE017A3837}"/>
               </a:ext>
             </a:extLst>
           </p:cNvPr>
@@ -7798,7 +7798,7 @@
           <p:cNvPr id="101" name="">
             <a:extLst xmlns:a="http://schemas.openxmlformats.org/drawingml/2006/main">
               <a:ext uri="{FF2B5EF4-FFF2-40B4-BE49-F238E27FC236}">
-                <a16:creationId xmlns:a16="http://schemas.microsoft.com/office/drawing/2014/main" id="{E02E869D-D008-444C-A834-D4618234649A}"/>
+                <a16:creationId xmlns:a16="http://schemas.microsoft.com/office/drawing/2014/main" id="{4EC4562E-37BB-4217-A53C-9EC52A92471F}"/>
               </a:ext>
             </a:extLst>
           </p:cNvPr>
@@ -7850,7 +7850,7 @@
           <p:cNvPr id="102" name="">
             <a:extLst xmlns:a="http://schemas.openxmlformats.org/drawingml/2006/main">
               <a:ext uri="{FF2B5EF4-FFF2-40B4-BE49-F238E27FC236}">
-                <a16:creationId xmlns:a16="http://schemas.microsoft.com/office/drawing/2014/main" id="{ED40E7DB-94B2-4D85-A6DE-4FA0C23A02C6}"/>
+                <a16:creationId xmlns:a16="http://schemas.microsoft.com/office/drawing/2014/main" id="{FB9BAE5F-1DC5-47E1-962C-BCE2AE277882}"/>
               </a:ext>
             </a:extLst>
           </p:cNvPr>
@@ -7900,7 +7900,7 @@
     </p:spTree>
     <p:extLst>
       <p:ext uri="{BB962C8B-B14F-4D97-AF65-F5344CB8AC3E}">
-        <p14:creationId xmlns:p14="http://schemas.microsoft.com/office/powerpoint/2010/main" val="143213166"/>
+        <p14:creationId xmlns:p14="http://schemas.microsoft.com/office/powerpoint/2010/main" val="270971542"/>
       </p:ext>
     </p:extLst>
   </p:cSld>
@@ -7931,7 +7931,7 @@
           <p:cNvPr id="98" name="">
             <a:extLst xmlns:a="http://schemas.openxmlformats.org/drawingml/2006/main">
               <a:ext uri="{FF2B5EF4-FFF2-40B4-BE49-F238E27FC236}">
-                <a16:creationId xmlns:a16="http://schemas.microsoft.com/office/drawing/2014/main" id="{C47680CD-2236-4D6A-8709-0E0EC33AA6A7}"/>
+                <a16:creationId xmlns:a16="http://schemas.microsoft.com/office/drawing/2014/main" id="{0FBA2B74-7DFA-4E5C-934E-0519F0EE6F99}"/>
               </a:ext>
             </a:extLst>
           </p:cNvPr>
@@ -7964,7 +7964,7 @@
           <p:cNvPr id="2" name="">
             <a:extLst xmlns:a="http://schemas.openxmlformats.org/drawingml/2006/main">
               <a:ext uri="{FF2B5EF4-FFF2-40B4-BE49-F238E27FC236}">
-                <a16:creationId xmlns:a16="http://schemas.microsoft.com/office/drawing/2014/main" id="{C46334F2-7CB6-4CB6-98FE-DBBA0CB8777D}"/>
+                <a16:creationId xmlns:a16="http://schemas.microsoft.com/office/drawing/2014/main" id="{2A038EF8-D026-4BBD-8F35-BDCD62376CEA}"/>
               </a:ext>
             </a:extLst>
           </p:cNvPr>
@@ -7995,7 +7995,7 @@
           <p:cNvPr id="3" name="">
             <a:extLst xmlns:a="http://schemas.openxmlformats.org/drawingml/2006/main">
               <a:ext uri="{FF2B5EF4-FFF2-40B4-BE49-F238E27FC236}">
-                <a16:creationId xmlns:a16="http://schemas.microsoft.com/office/drawing/2014/main" id="{4F04E27F-0301-4A57-96C4-B24443025AB7}"/>
+                <a16:creationId xmlns:a16="http://schemas.microsoft.com/office/drawing/2014/main" id="{D8740D79-1D7F-43AE-BF25-A77F5A4B236A}"/>
               </a:ext>
             </a:extLst>
           </p:cNvPr>
@@ -8047,7 +8047,7 @@
           <p:cNvPr id="4" name="">
             <a:extLst xmlns:a="http://schemas.openxmlformats.org/drawingml/2006/main">
               <a:ext uri="{FF2B5EF4-FFF2-40B4-BE49-F238E27FC236}">
-                <a16:creationId xmlns:a16="http://schemas.microsoft.com/office/drawing/2014/main" id="{1D355ACA-2CD8-4AEC-9AA7-17A504B0E4EE}"/>
+                <a16:creationId xmlns:a16="http://schemas.microsoft.com/office/drawing/2014/main" id="{783F5007-929B-47E5-A141-7882C1E0C953}"/>
               </a:ext>
             </a:extLst>
           </p:cNvPr>
@@ -8099,7 +8099,7 @@
           <p:cNvPr id="5" name="">
             <a:extLst xmlns:a="http://schemas.openxmlformats.org/drawingml/2006/main">
               <a:ext uri="{FF2B5EF4-FFF2-40B4-BE49-F238E27FC236}">
-                <a16:creationId xmlns:a16="http://schemas.microsoft.com/office/drawing/2014/main" id="{25C14880-31D2-4D66-81F6-02D9B4ACF50E}"/>
+                <a16:creationId xmlns:a16="http://schemas.microsoft.com/office/drawing/2014/main" id="{CD18E9F7-AAED-498A-BA91-72DAF208469F}"/>
               </a:ext>
             </a:extLst>
           </p:cNvPr>
@@ -8134,7 +8134,7 @@
           <p:nvPr/>
         </p:nvPicPr>
         <p:blipFill>
-          <a:blip xmlns:r="http://schemas.openxmlformats.org/officeDocument/2006/relationships" xmlns:a="http://schemas.openxmlformats.org/drawingml/2006/main" r:embed="R510ea138c1ad4211"/>
+          <a:blip xmlns:r="http://schemas.openxmlformats.org/officeDocument/2006/relationships" xmlns:a="http://schemas.openxmlformats.org/drawingml/2006/main" r:embed="Rebe8e65edb6449a6"/>
           <a:stretch xmlns:a="http://schemas.openxmlformats.org/drawingml/2006/main"/>
         </p:blipFill>
         <p:spPr>
@@ -8152,7 +8152,7 @@
           <p:cNvPr id="7" name="">
             <a:extLst xmlns:a="http://schemas.openxmlformats.org/drawingml/2006/main">
               <a:ext uri="{FF2B5EF4-FFF2-40B4-BE49-F238E27FC236}">
-                <a16:creationId xmlns:a16="http://schemas.microsoft.com/office/drawing/2014/main" id="{E55D8B7A-965A-49D5-BB5E-AD4E52CD4468}"/>
+                <a16:creationId xmlns:a16="http://schemas.microsoft.com/office/drawing/2014/main" id="{08F2C372-3ED6-451D-A470-68A7FEC63D69}"/>
               </a:ext>
             </a:extLst>
           </p:cNvPr>
@@ -8204,7 +8204,7 @@
           <p:cNvPr id="8" name="">
             <a:extLst xmlns:a="http://schemas.openxmlformats.org/drawingml/2006/main">
               <a:ext uri="{FF2B5EF4-FFF2-40B4-BE49-F238E27FC236}">
-                <a16:creationId xmlns:a16="http://schemas.microsoft.com/office/drawing/2014/main" id="{E73D1296-7014-4E42-9CA1-20C0CE6024F2}"/>
+                <a16:creationId xmlns:a16="http://schemas.microsoft.com/office/drawing/2014/main" id="{5ADF55D2-A800-4587-8AD2-36A70E55805D}"/>
               </a:ext>
             </a:extLst>
           </p:cNvPr>
@@ -8256,7 +8256,7 @@
           <p:cNvPr id="9" name="">
             <a:extLst xmlns:a="http://schemas.openxmlformats.org/drawingml/2006/main">
               <a:ext uri="{FF2B5EF4-FFF2-40B4-BE49-F238E27FC236}">
-                <a16:creationId xmlns:a16="http://schemas.microsoft.com/office/drawing/2014/main" id="{19233ECC-CC4E-4709-8B16-BA51D95C188E}"/>
+                <a16:creationId xmlns:a16="http://schemas.microsoft.com/office/drawing/2014/main" id="{7EF4E712-3461-49EA-925D-801BD150F0F0}"/>
               </a:ext>
             </a:extLst>
           </p:cNvPr>
@@ -8308,7 +8308,7 @@
           <p:cNvPr id="10" name="">
             <a:extLst xmlns:a="http://schemas.openxmlformats.org/drawingml/2006/main">
               <a:ext uri="{FF2B5EF4-FFF2-40B4-BE49-F238E27FC236}">
-                <a16:creationId xmlns:a16="http://schemas.microsoft.com/office/drawing/2014/main" id="{32227635-0448-40E1-AC76-81D6921D8C71}"/>
+                <a16:creationId xmlns:a16="http://schemas.microsoft.com/office/drawing/2014/main" id="{7A600875-5009-4DC0-AA34-D699EEA18086}"/>
               </a:ext>
             </a:extLst>
           </p:cNvPr>
@@ -8360,7 +8360,7 @@
           <p:cNvPr id="11" name="">
             <a:extLst xmlns:a="http://schemas.openxmlformats.org/drawingml/2006/main">
               <a:ext uri="{FF2B5EF4-FFF2-40B4-BE49-F238E27FC236}">
-                <a16:creationId xmlns:a16="http://schemas.microsoft.com/office/drawing/2014/main" id="{9F05678A-0AAC-409B-9F5D-CF97F3EEA2CD}"/>
+                <a16:creationId xmlns:a16="http://schemas.microsoft.com/office/drawing/2014/main" id="{CB98E13F-6E31-47BB-BDF7-AA1BC2FE45FC}"/>
               </a:ext>
             </a:extLst>
           </p:cNvPr>
@@ -8391,7 +8391,7 @@
           <p:cNvPr id="12" name="">
             <a:extLst xmlns:a="http://schemas.openxmlformats.org/drawingml/2006/main">
               <a:ext uri="{FF2B5EF4-FFF2-40B4-BE49-F238E27FC236}">
-                <a16:creationId xmlns:a16="http://schemas.microsoft.com/office/drawing/2014/main" id="{A4986A2A-5A41-465F-B3F0-8101949E7511}"/>
+                <a16:creationId xmlns:a16="http://schemas.microsoft.com/office/drawing/2014/main" id="{77F8B26C-E698-4CA8-8D4A-D36601C348F8}"/>
               </a:ext>
             </a:extLst>
           </p:cNvPr>
@@ -8422,7 +8422,7 @@
           <p:cNvPr id="13" name="">
             <a:extLst xmlns:a="http://schemas.openxmlformats.org/drawingml/2006/main">
               <a:ext uri="{FF2B5EF4-FFF2-40B4-BE49-F238E27FC236}">
-                <a16:creationId xmlns:a16="http://schemas.microsoft.com/office/drawing/2014/main" id="{63DAD41D-4B79-4D5D-ACF3-6001587C7044}"/>
+                <a16:creationId xmlns:a16="http://schemas.microsoft.com/office/drawing/2014/main" id="{E3A780F8-B78D-4AB0-8C72-BA69D7B7D510}"/>
               </a:ext>
             </a:extLst>
           </p:cNvPr>
@@ -8474,7 +8474,7 @@
           <p:cNvPr id="14" name="">
             <a:extLst xmlns:a="http://schemas.openxmlformats.org/drawingml/2006/main">
               <a:ext uri="{FF2B5EF4-FFF2-40B4-BE49-F238E27FC236}">
-                <a16:creationId xmlns:a16="http://schemas.microsoft.com/office/drawing/2014/main" id="{4193FB94-9F81-4C6E-B39C-B9DA44205AFF}"/>
+                <a16:creationId xmlns:a16="http://schemas.microsoft.com/office/drawing/2014/main" id="{790022F5-CF08-4361-8ADF-CE0016D38CB4}"/>
               </a:ext>
             </a:extLst>
           </p:cNvPr>
@@ -8526,7 +8526,7 @@
           <p:cNvPr id="15" name="">
             <a:extLst xmlns:a="http://schemas.openxmlformats.org/drawingml/2006/main">
               <a:ext uri="{FF2B5EF4-FFF2-40B4-BE49-F238E27FC236}">
-                <a16:creationId xmlns:a16="http://schemas.microsoft.com/office/drawing/2014/main" id="{51A83242-81B2-4FDE-A5CD-DAE4F0AEC180}"/>
+                <a16:creationId xmlns:a16="http://schemas.microsoft.com/office/drawing/2014/main" id="{6B38148E-3AFA-42AB-ADCF-8A12413795FC}"/>
               </a:ext>
             </a:extLst>
           </p:cNvPr>
@@ -8578,7 +8578,7 @@
           <p:cNvPr id="16" name="">
             <a:extLst xmlns:a="http://schemas.openxmlformats.org/drawingml/2006/main">
               <a:ext uri="{FF2B5EF4-FFF2-40B4-BE49-F238E27FC236}">
-                <a16:creationId xmlns:a16="http://schemas.microsoft.com/office/drawing/2014/main" id="{BB0F19B2-2C29-4797-9226-730BD81090B5}"/>
+                <a16:creationId xmlns:a16="http://schemas.microsoft.com/office/drawing/2014/main" id="{A358E90B-EB6F-47FD-A846-E515D1D8B786}"/>
               </a:ext>
             </a:extLst>
           </p:cNvPr>
@@ -8630,7 +8630,7 @@
           <p:cNvPr id="17" name="">
             <a:extLst xmlns:a="http://schemas.openxmlformats.org/drawingml/2006/main">
               <a:ext uri="{FF2B5EF4-FFF2-40B4-BE49-F238E27FC236}">
-                <a16:creationId xmlns:a16="http://schemas.microsoft.com/office/drawing/2014/main" id="{4C6A029C-BC33-44A5-A3EF-B89AEC5E5518}"/>
+                <a16:creationId xmlns:a16="http://schemas.microsoft.com/office/drawing/2014/main" id="{295E3001-C580-4728-9F86-61D6CE6780AF}"/>
               </a:ext>
             </a:extLst>
           </p:cNvPr>
@@ -8682,7 +8682,7 @@
           <p:cNvPr id="18" name="">
             <a:extLst xmlns:a="http://schemas.openxmlformats.org/drawingml/2006/main">
               <a:ext uri="{FF2B5EF4-FFF2-40B4-BE49-F238E27FC236}">
-                <a16:creationId xmlns:a16="http://schemas.microsoft.com/office/drawing/2014/main" id="{1ED79460-DB69-4E9A-AA96-30EA25C7E169}"/>
+                <a16:creationId xmlns:a16="http://schemas.microsoft.com/office/drawing/2014/main" id="{CD6C5B91-D730-408A-9CE7-A28EEC15AB3B}"/>
               </a:ext>
             </a:extLst>
           </p:cNvPr>
@@ -8713,7 +8713,7 @@
           <p:cNvPr id="19" name="">
             <a:extLst xmlns:a="http://schemas.openxmlformats.org/drawingml/2006/main">
               <a:ext uri="{FF2B5EF4-FFF2-40B4-BE49-F238E27FC236}">
-                <a16:creationId xmlns:a16="http://schemas.microsoft.com/office/drawing/2014/main" id="{3CAE2FD8-598F-4C05-AB6D-89F78CB7B633}"/>
+                <a16:creationId xmlns:a16="http://schemas.microsoft.com/office/drawing/2014/main" id="{7B972406-BBDB-4973-9CAD-7ABAE4184E5C}"/>
               </a:ext>
             </a:extLst>
           </p:cNvPr>
@@ -8765,7 +8765,7 @@
           <p:cNvPr id="20" name="">
             <a:extLst xmlns:a="http://schemas.openxmlformats.org/drawingml/2006/main">
               <a:ext uri="{FF2B5EF4-FFF2-40B4-BE49-F238E27FC236}">
-                <a16:creationId xmlns:a16="http://schemas.microsoft.com/office/drawing/2014/main" id="{46064CF8-D25C-4086-AEE1-8D2950F4E3D7}"/>
+                <a16:creationId xmlns:a16="http://schemas.microsoft.com/office/drawing/2014/main" id="{528A06DD-DCC4-4B24-85DB-9C750B726A34}"/>
               </a:ext>
             </a:extLst>
           </p:cNvPr>
@@ -8817,7 +8817,7 @@
           <p:cNvPr id="21" name="">
             <a:extLst xmlns:a="http://schemas.openxmlformats.org/drawingml/2006/main">
               <a:ext uri="{FF2B5EF4-FFF2-40B4-BE49-F238E27FC236}">
-                <a16:creationId xmlns:a16="http://schemas.microsoft.com/office/drawing/2014/main" id="{81DBC754-F18C-4857-9C1F-EF14DE915A7A}"/>
+                <a16:creationId xmlns:a16="http://schemas.microsoft.com/office/drawing/2014/main" id="{293AABE1-E9E8-4D7E-9C17-C0AB3CEDD770}"/>
               </a:ext>
             </a:extLst>
           </p:cNvPr>
@@ -8869,7 +8869,7 @@
           <p:cNvPr id="22" name="">
             <a:extLst xmlns:a="http://schemas.openxmlformats.org/drawingml/2006/main">
               <a:ext uri="{FF2B5EF4-FFF2-40B4-BE49-F238E27FC236}">
-                <a16:creationId xmlns:a16="http://schemas.microsoft.com/office/drawing/2014/main" id="{9E9D3F76-247E-466C-A18A-7EF896CF252C}"/>
+                <a16:creationId xmlns:a16="http://schemas.microsoft.com/office/drawing/2014/main" id="{5ED6AEB1-9798-454E-9731-19D334E918C8}"/>
               </a:ext>
             </a:extLst>
           </p:cNvPr>
@@ -8921,7 +8921,7 @@
           <p:cNvPr id="23" name="">
             <a:extLst xmlns:a="http://schemas.openxmlformats.org/drawingml/2006/main">
               <a:ext uri="{FF2B5EF4-FFF2-40B4-BE49-F238E27FC236}">
-                <a16:creationId xmlns:a16="http://schemas.microsoft.com/office/drawing/2014/main" id="{1D1639A5-D779-4343-9925-DDE63FCECBA3}"/>
+                <a16:creationId xmlns:a16="http://schemas.microsoft.com/office/drawing/2014/main" id="{08C195B5-C909-431C-B95F-EDE078168017}"/>
               </a:ext>
             </a:extLst>
           </p:cNvPr>
@@ -8973,7 +8973,7 @@
           <p:cNvPr id="24" name="">
             <a:extLst xmlns:a="http://schemas.openxmlformats.org/drawingml/2006/main">
               <a:ext uri="{FF2B5EF4-FFF2-40B4-BE49-F238E27FC236}">
-                <a16:creationId xmlns:a16="http://schemas.microsoft.com/office/drawing/2014/main" id="{EDAA2BAE-2516-4472-B812-5C7485EC34F0}"/>
+                <a16:creationId xmlns:a16="http://schemas.microsoft.com/office/drawing/2014/main" id="{700219D0-A164-439D-826E-3CE2BDC41CA9}"/>
               </a:ext>
             </a:extLst>
           </p:cNvPr>
@@ -9004,7 +9004,7 @@
           <p:cNvPr id="25" name="">
             <a:extLst xmlns:a="http://schemas.openxmlformats.org/drawingml/2006/main">
               <a:ext uri="{FF2B5EF4-FFF2-40B4-BE49-F238E27FC236}">
-                <a16:creationId xmlns:a16="http://schemas.microsoft.com/office/drawing/2014/main" id="{3BD3CA53-CE1E-49A0-82E2-266285744C73}"/>
+                <a16:creationId xmlns:a16="http://schemas.microsoft.com/office/drawing/2014/main" id="{5CD560F9-432F-4407-B2D0-95FB371EAA29}"/>
               </a:ext>
             </a:extLst>
           </p:cNvPr>
@@ -9035,7 +9035,7 @@
           <p:cNvPr id="26" name="">
             <a:extLst xmlns:a="http://schemas.openxmlformats.org/drawingml/2006/main">
               <a:ext uri="{FF2B5EF4-FFF2-40B4-BE49-F238E27FC236}">
-                <a16:creationId xmlns:a16="http://schemas.microsoft.com/office/drawing/2014/main" id="{AF4E7D65-3F80-4BB3-80A0-86EA630AC253}"/>
+                <a16:creationId xmlns:a16="http://schemas.microsoft.com/office/drawing/2014/main" id="{5899706F-547D-4C0D-9A2D-48D22311DBDC}"/>
               </a:ext>
             </a:extLst>
           </p:cNvPr>
@@ -9087,7 +9087,7 @@
           <p:cNvPr id="27" name="">
             <a:extLst xmlns:a="http://schemas.openxmlformats.org/drawingml/2006/main">
               <a:ext uri="{FF2B5EF4-FFF2-40B4-BE49-F238E27FC236}">
-                <a16:creationId xmlns:a16="http://schemas.microsoft.com/office/drawing/2014/main" id="{D52AAA58-A84A-4E21-B120-99C9266DCDBD}"/>
+                <a16:creationId xmlns:a16="http://schemas.microsoft.com/office/drawing/2014/main" id="{10E2F6DF-3574-4C32-9391-53B9AAC61CC9}"/>
               </a:ext>
             </a:extLst>
           </p:cNvPr>
@@ -9139,7 +9139,7 @@
           <p:cNvPr id="28" name="">
             <a:extLst xmlns:a="http://schemas.openxmlformats.org/drawingml/2006/main">
               <a:ext uri="{FF2B5EF4-FFF2-40B4-BE49-F238E27FC236}">
-                <a16:creationId xmlns:a16="http://schemas.microsoft.com/office/drawing/2014/main" id="{EE7B5352-598B-4303-951A-E7982B458868}"/>
+                <a16:creationId xmlns:a16="http://schemas.microsoft.com/office/drawing/2014/main" id="{4185DB9B-8B3A-4B13-8B3E-82E6FE778FB3}"/>
               </a:ext>
             </a:extLst>
           </p:cNvPr>
@@ -9191,7 +9191,7 @@
           <p:cNvPr id="29" name="">
             <a:extLst xmlns:a="http://schemas.openxmlformats.org/drawingml/2006/main">
               <a:ext uri="{FF2B5EF4-FFF2-40B4-BE49-F238E27FC236}">
-                <a16:creationId xmlns:a16="http://schemas.microsoft.com/office/drawing/2014/main" id="{238D2B98-613D-42C8-BD37-BE971F6DC4BA}"/>
+                <a16:creationId xmlns:a16="http://schemas.microsoft.com/office/drawing/2014/main" id="{21AD7953-6351-463F-80BE-87D25D1ADF69}"/>
               </a:ext>
             </a:extLst>
           </p:cNvPr>
@@ -9243,7 +9243,7 @@
           <p:cNvPr id="30" name="">
             <a:extLst xmlns:a="http://schemas.openxmlformats.org/drawingml/2006/main">
               <a:ext uri="{FF2B5EF4-FFF2-40B4-BE49-F238E27FC236}">
-                <a16:creationId xmlns:a16="http://schemas.microsoft.com/office/drawing/2014/main" id="{8078E05E-618B-447C-8319-3BC16C405E63}"/>
+                <a16:creationId xmlns:a16="http://schemas.microsoft.com/office/drawing/2014/main" id="{E6276580-3600-45AB-B234-172219829148}"/>
               </a:ext>
             </a:extLst>
           </p:cNvPr>
@@ -9295,7 +9295,7 @@
           <p:cNvPr id="31" name="">
             <a:extLst xmlns:a="http://schemas.openxmlformats.org/drawingml/2006/main">
               <a:ext uri="{FF2B5EF4-FFF2-40B4-BE49-F238E27FC236}">
-                <a16:creationId xmlns:a16="http://schemas.microsoft.com/office/drawing/2014/main" id="{A5DB08B6-72DE-45AB-8A41-3D5EE5E65EDF}"/>
+                <a16:creationId xmlns:a16="http://schemas.microsoft.com/office/drawing/2014/main" id="{17A2E95C-822A-4EC0-9347-4FBDE95DF275}"/>
               </a:ext>
             </a:extLst>
           </p:cNvPr>
@@ -9326,7 +9326,7 @@
           <p:cNvPr id="32" name="">
             <a:extLst xmlns:a="http://schemas.openxmlformats.org/drawingml/2006/main">
               <a:ext uri="{FF2B5EF4-FFF2-40B4-BE49-F238E27FC236}">
-                <a16:creationId xmlns:a16="http://schemas.microsoft.com/office/drawing/2014/main" id="{7467B243-8837-4BED-82C4-842E674262F7}"/>
+                <a16:creationId xmlns:a16="http://schemas.microsoft.com/office/drawing/2014/main" id="{15AA4F61-6C53-4FEB-85A2-99A6F989ABDB}"/>
               </a:ext>
             </a:extLst>
           </p:cNvPr>
@@ -9378,7 +9378,7 @@
           <p:cNvPr id="33" name="">
             <a:extLst xmlns:a="http://schemas.openxmlformats.org/drawingml/2006/main">
               <a:ext uri="{FF2B5EF4-FFF2-40B4-BE49-F238E27FC236}">
-                <a16:creationId xmlns:a16="http://schemas.microsoft.com/office/drawing/2014/main" id="{31740934-E53B-4F16-8232-79E9F538506E}"/>
+                <a16:creationId xmlns:a16="http://schemas.microsoft.com/office/drawing/2014/main" id="{D1AF9F7C-A3A4-4E76-97D7-79BD0042C13B}"/>
               </a:ext>
             </a:extLst>
           </p:cNvPr>
@@ -9430,7 +9430,7 @@
           <p:cNvPr id="34" name="">
             <a:extLst xmlns:a="http://schemas.openxmlformats.org/drawingml/2006/main">
               <a:ext uri="{FF2B5EF4-FFF2-40B4-BE49-F238E27FC236}">
-                <a16:creationId xmlns:a16="http://schemas.microsoft.com/office/drawing/2014/main" id="{453D1180-792C-4A48-B194-2E1460A77424}"/>
+                <a16:creationId xmlns:a16="http://schemas.microsoft.com/office/drawing/2014/main" id="{3A81F948-B91E-47F2-9900-5AE2AD4E99DC}"/>
               </a:ext>
             </a:extLst>
           </p:cNvPr>
@@ -9482,7 +9482,7 @@
           <p:cNvPr id="35" name="">
             <a:extLst xmlns:a="http://schemas.openxmlformats.org/drawingml/2006/main">
               <a:ext uri="{FF2B5EF4-FFF2-40B4-BE49-F238E27FC236}">
-                <a16:creationId xmlns:a16="http://schemas.microsoft.com/office/drawing/2014/main" id="{4DA6B5E1-50AE-40F1-B764-68886461ACA9}"/>
+                <a16:creationId xmlns:a16="http://schemas.microsoft.com/office/drawing/2014/main" id="{91CF2C30-1A26-4872-904C-7FFABA06CBAC}"/>
               </a:ext>
             </a:extLst>
           </p:cNvPr>
@@ -9534,7 +9534,7 @@
           <p:cNvPr id="36" name="">
             <a:extLst xmlns:a="http://schemas.openxmlformats.org/drawingml/2006/main">
               <a:ext uri="{FF2B5EF4-FFF2-40B4-BE49-F238E27FC236}">
-                <a16:creationId xmlns:a16="http://schemas.microsoft.com/office/drawing/2014/main" id="{7856F6D7-BCBF-42AC-983D-ADD48FCDC546}"/>
+                <a16:creationId xmlns:a16="http://schemas.microsoft.com/office/drawing/2014/main" id="{0B57DC34-0A5C-4567-8A50-1979B5ACD941}"/>
               </a:ext>
             </a:extLst>
           </p:cNvPr>
@@ -9586,7 +9586,7 @@
           <p:cNvPr id="37" name="">
             <a:extLst xmlns:a="http://schemas.openxmlformats.org/drawingml/2006/main">
               <a:ext uri="{FF2B5EF4-FFF2-40B4-BE49-F238E27FC236}">
-                <a16:creationId xmlns:a16="http://schemas.microsoft.com/office/drawing/2014/main" id="{F5B470DE-F0EE-448A-871E-2B4594062C35}"/>
+                <a16:creationId xmlns:a16="http://schemas.microsoft.com/office/drawing/2014/main" id="{C03484FE-1077-45BF-82C9-CB75A226A9CF}"/>
               </a:ext>
             </a:extLst>
           </p:cNvPr>
@@ -9617,7 +9617,7 @@
           <p:cNvPr id="38" name="">
             <a:extLst xmlns:a="http://schemas.openxmlformats.org/drawingml/2006/main">
               <a:ext uri="{FF2B5EF4-FFF2-40B4-BE49-F238E27FC236}">
-                <a16:creationId xmlns:a16="http://schemas.microsoft.com/office/drawing/2014/main" id="{C0E97E2C-5B11-4DA7-8257-27FCE7AFAF93}"/>
+                <a16:creationId xmlns:a16="http://schemas.microsoft.com/office/drawing/2014/main" id="{9B4B8EC1-BC5C-4371-ABCD-980A296FA73C}"/>
               </a:ext>
             </a:extLst>
           </p:cNvPr>
@@ -9648,7 +9648,7 @@
           <p:cNvPr id="39" name="">
             <a:extLst xmlns:a="http://schemas.openxmlformats.org/drawingml/2006/main">
               <a:ext uri="{FF2B5EF4-FFF2-40B4-BE49-F238E27FC236}">
-                <a16:creationId xmlns:a16="http://schemas.microsoft.com/office/drawing/2014/main" id="{5F5D6944-B3AD-4855-8AA1-48A2B0ABBFA5}"/>
+                <a16:creationId xmlns:a16="http://schemas.microsoft.com/office/drawing/2014/main" id="{2E035A2C-4412-4E4F-9180-62715F04C011}"/>
               </a:ext>
             </a:extLst>
           </p:cNvPr>
@@ -9700,7 +9700,7 @@
           <p:cNvPr id="40" name="">
             <a:extLst xmlns:a="http://schemas.openxmlformats.org/drawingml/2006/main">
               <a:ext uri="{FF2B5EF4-FFF2-40B4-BE49-F238E27FC236}">
-                <a16:creationId xmlns:a16="http://schemas.microsoft.com/office/drawing/2014/main" id="{CB42FE47-C475-4989-B127-77C3787C00D1}"/>
+                <a16:creationId xmlns:a16="http://schemas.microsoft.com/office/drawing/2014/main" id="{D73AED96-36D7-45EE-92D6-4F31A4402695}"/>
               </a:ext>
             </a:extLst>
           </p:cNvPr>
@@ -9752,7 +9752,7 @@
           <p:cNvPr id="41" name="">
             <a:extLst xmlns:a="http://schemas.openxmlformats.org/drawingml/2006/main">
               <a:ext uri="{FF2B5EF4-FFF2-40B4-BE49-F238E27FC236}">
-                <a16:creationId xmlns:a16="http://schemas.microsoft.com/office/drawing/2014/main" id="{B8D314B9-2A35-4495-ABE5-21F202A1B616}"/>
+                <a16:creationId xmlns:a16="http://schemas.microsoft.com/office/drawing/2014/main" id="{B1BB3F0E-AAD0-43C9-BDA1-615670668D25}"/>
               </a:ext>
             </a:extLst>
           </p:cNvPr>
@@ -9804,7 +9804,7 @@
           <p:cNvPr id="42" name="">
             <a:extLst xmlns:a="http://schemas.openxmlformats.org/drawingml/2006/main">
               <a:ext uri="{FF2B5EF4-FFF2-40B4-BE49-F238E27FC236}">
-                <a16:creationId xmlns:a16="http://schemas.microsoft.com/office/drawing/2014/main" id="{BBABB3BD-B37E-43EF-9C31-9CCB4DE91C48}"/>
+                <a16:creationId xmlns:a16="http://schemas.microsoft.com/office/drawing/2014/main" id="{FA5C29E7-0DCA-48CE-AF27-F25E2FCAC655}"/>
               </a:ext>
             </a:extLst>
           </p:cNvPr>
@@ -9856,7 +9856,7 @@
           <p:cNvPr id="43" name="">
             <a:extLst xmlns:a="http://schemas.openxmlformats.org/drawingml/2006/main">
               <a:ext uri="{FF2B5EF4-FFF2-40B4-BE49-F238E27FC236}">
-                <a16:creationId xmlns:a16="http://schemas.microsoft.com/office/drawing/2014/main" id="{DCA97009-9804-4EC9-8A83-C092CC092159}"/>
+                <a16:creationId xmlns:a16="http://schemas.microsoft.com/office/drawing/2014/main" id="{1510C5BD-9EAD-41A0-952A-97D86D148928}"/>
               </a:ext>
             </a:extLst>
           </p:cNvPr>
@@ -9908,7 +9908,7 @@
           <p:cNvPr id="44" name="">
             <a:extLst xmlns:a="http://schemas.openxmlformats.org/drawingml/2006/main">
               <a:ext uri="{FF2B5EF4-FFF2-40B4-BE49-F238E27FC236}">
-                <a16:creationId xmlns:a16="http://schemas.microsoft.com/office/drawing/2014/main" id="{CB23D743-79E0-4251-9AC7-DE8FBE0CF7CB}"/>
+                <a16:creationId xmlns:a16="http://schemas.microsoft.com/office/drawing/2014/main" id="{127FB7D5-9B24-46E3-99BF-DE480FD0F4D0}"/>
               </a:ext>
             </a:extLst>
           </p:cNvPr>
@@ -9939,7 +9939,7 @@
           <p:cNvPr id="45" name="">
             <a:extLst xmlns:a="http://schemas.openxmlformats.org/drawingml/2006/main">
               <a:ext uri="{FF2B5EF4-FFF2-40B4-BE49-F238E27FC236}">
-                <a16:creationId xmlns:a16="http://schemas.microsoft.com/office/drawing/2014/main" id="{5859321F-9620-46CD-B967-737F120BFFF9}"/>
+                <a16:creationId xmlns:a16="http://schemas.microsoft.com/office/drawing/2014/main" id="{7800F681-2951-48AD-9117-3C906C5EA446}"/>
               </a:ext>
             </a:extLst>
           </p:cNvPr>
@@ -9991,7 +9991,7 @@
           <p:cNvPr id="46" name="">
             <a:extLst xmlns:a="http://schemas.openxmlformats.org/drawingml/2006/main">
               <a:ext uri="{FF2B5EF4-FFF2-40B4-BE49-F238E27FC236}">
-                <a16:creationId xmlns:a16="http://schemas.microsoft.com/office/drawing/2014/main" id="{DCAAB99F-748A-4657-BEA2-3D8BF1328E73}"/>
+                <a16:creationId xmlns:a16="http://schemas.microsoft.com/office/drawing/2014/main" id="{EFF95EF3-AE0E-4162-9F76-BA27D7F7CD19}"/>
               </a:ext>
             </a:extLst>
           </p:cNvPr>
@@ -10043,7 +10043,7 @@
           <p:cNvPr id="47" name="">
             <a:extLst xmlns:a="http://schemas.openxmlformats.org/drawingml/2006/main">
               <a:ext uri="{FF2B5EF4-FFF2-40B4-BE49-F238E27FC236}">
-                <a16:creationId xmlns:a16="http://schemas.microsoft.com/office/drawing/2014/main" id="{1AD7F484-39A8-4F1F-BEF6-AFF27EC9DD37}"/>
+                <a16:creationId xmlns:a16="http://schemas.microsoft.com/office/drawing/2014/main" id="{417444DE-89AB-4D04-89DA-EDDE0C60DFA5}"/>
               </a:ext>
             </a:extLst>
           </p:cNvPr>
@@ -10095,7 +10095,7 @@
           <p:cNvPr id="48" name="">
             <a:extLst xmlns:a="http://schemas.openxmlformats.org/drawingml/2006/main">
               <a:ext uri="{FF2B5EF4-FFF2-40B4-BE49-F238E27FC236}">
-                <a16:creationId xmlns:a16="http://schemas.microsoft.com/office/drawing/2014/main" id="{3BA77A22-B606-47B2-B744-2BABFBE473F9}"/>
+                <a16:creationId xmlns:a16="http://schemas.microsoft.com/office/drawing/2014/main" id="{C880B553-0EB3-4CE3-8BA8-444C49B2E3BC}"/>
               </a:ext>
             </a:extLst>
           </p:cNvPr>
@@ -10147,7 +10147,7 @@
           <p:cNvPr id="49" name="">
             <a:extLst xmlns:a="http://schemas.openxmlformats.org/drawingml/2006/main">
               <a:ext uri="{FF2B5EF4-FFF2-40B4-BE49-F238E27FC236}">
-                <a16:creationId xmlns:a16="http://schemas.microsoft.com/office/drawing/2014/main" id="{89CCC401-5A76-4B4C-A50E-D7D7238A8CEC}"/>
+                <a16:creationId xmlns:a16="http://schemas.microsoft.com/office/drawing/2014/main" id="{2FBD7850-3D30-4143-91BD-AE5F72F6AFA2}"/>
               </a:ext>
             </a:extLst>
           </p:cNvPr>
@@ -10199,7 +10199,7 @@
           <p:cNvPr id="50" name="">
             <a:extLst xmlns:a="http://schemas.openxmlformats.org/drawingml/2006/main">
               <a:ext uri="{FF2B5EF4-FFF2-40B4-BE49-F238E27FC236}">
-                <a16:creationId xmlns:a16="http://schemas.microsoft.com/office/drawing/2014/main" id="{F9790495-4658-483B-8DF3-2A21051C0239}"/>
+                <a16:creationId xmlns:a16="http://schemas.microsoft.com/office/drawing/2014/main" id="{6CA9CACD-0B7A-442B-B221-C2AFB22D5981}"/>
               </a:ext>
             </a:extLst>
           </p:cNvPr>
@@ -10251,7 +10251,7 @@
           <p:cNvPr id="51" name="">
             <a:extLst xmlns:a="http://schemas.openxmlformats.org/drawingml/2006/main">
               <a:ext uri="{FF2B5EF4-FFF2-40B4-BE49-F238E27FC236}">
-                <a16:creationId xmlns:a16="http://schemas.microsoft.com/office/drawing/2014/main" id="{5D7A2F86-E88D-42B6-9EAC-582CBF044E8E}"/>
+                <a16:creationId xmlns:a16="http://schemas.microsoft.com/office/drawing/2014/main" id="{5A2C400D-AEFE-49CC-8DE5-3211D9768C24}"/>
               </a:ext>
             </a:extLst>
           </p:cNvPr>
@@ -10282,7 +10282,7 @@
           <p:cNvPr id="52" name="">
             <a:extLst xmlns:a="http://schemas.openxmlformats.org/drawingml/2006/main">
               <a:ext uri="{FF2B5EF4-FFF2-40B4-BE49-F238E27FC236}">
-                <a16:creationId xmlns:a16="http://schemas.microsoft.com/office/drawing/2014/main" id="{D2ED18F0-B4CD-4C9D-928C-4609D33FC954}"/>
+                <a16:creationId xmlns:a16="http://schemas.microsoft.com/office/drawing/2014/main" id="{565CBFCD-4320-4E08-96A8-3B77EABE99CF}"/>
               </a:ext>
             </a:extLst>
           </p:cNvPr>
@@ -10313,7 +10313,7 @@
           <p:cNvPr id="53" name="">
             <a:extLst xmlns:a="http://schemas.openxmlformats.org/drawingml/2006/main">
               <a:ext uri="{FF2B5EF4-FFF2-40B4-BE49-F238E27FC236}">
-                <a16:creationId xmlns:a16="http://schemas.microsoft.com/office/drawing/2014/main" id="{C51A6A7D-A53B-4640-9206-DE753FFE06C1}"/>
+                <a16:creationId xmlns:a16="http://schemas.microsoft.com/office/drawing/2014/main" id="{9AFAA076-8305-41C5-9828-11767D66A196}"/>
               </a:ext>
             </a:extLst>
           </p:cNvPr>
@@ -10344,7 +10344,7 @@
           <p:cNvPr id="54" name="">
             <a:extLst xmlns:a="http://schemas.openxmlformats.org/drawingml/2006/main">
               <a:ext uri="{FF2B5EF4-FFF2-40B4-BE49-F238E27FC236}">
-                <a16:creationId xmlns:a16="http://schemas.microsoft.com/office/drawing/2014/main" id="{AC377759-F2C3-4E08-8CA8-251D54D24E7B}"/>
+                <a16:creationId xmlns:a16="http://schemas.microsoft.com/office/drawing/2014/main" id="{BFADA8D1-479C-4405-83D6-111F4E189148}"/>
               </a:ext>
             </a:extLst>
           </p:cNvPr>
@@ -10396,7 +10396,7 @@
           <p:cNvPr id="55" name="">
             <a:extLst xmlns:a="http://schemas.openxmlformats.org/drawingml/2006/main">
               <a:ext uri="{FF2B5EF4-FFF2-40B4-BE49-F238E27FC236}">
-                <a16:creationId xmlns:a16="http://schemas.microsoft.com/office/drawing/2014/main" id="{4763F195-5A97-44B7-8864-B65A6B057A96}"/>
+                <a16:creationId xmlns:a16="http://schemas.microsoft.com/office/drawing/2014/main" id="{8C938851-09D5-435A-AD5E-A23786782A04}"/>
               </a:ext>
             </a:extLst>
           </p:cNvPr>
@@ -10448,7 +10448,7 @@
           <p:cNvPr id="56" name="">
             <a:extLst xmlns:a="http://schemas.openxmlformats.org/drawingml/2006/main">
               <a:ext uri="{FF2B5EF4-FFF2-40B4-BE49-F238E27FC236}">
-                <a16:creationId xmlns:a16="http://schemas.microsoft.com/office/drawing/2014/main" id="{B8E48849-9D59-47C7-B294-8CE378052995}"/>
+                <a16:creationId xmlns:a16="http://schemas.microsoft.com/office/drawing/2014/main" id="{3659695A-6EB7-4251-8DA8-930002863670}"/>
               </a:ext>
             </a:extLst>
           </p:cNvPr>
@@ -10500,7 +10500,7 @@
           <p:cNvPr id="57" name="">
             <a:extLst xmlns:a="http://schemas.openxmlformats.org/drawingml/2006/main">
               <a:ext uri="{FF2B5EF4-FFF2-40B4-BE49-F238E27FC236}">
-                <a16:creationId xmlns:a16="http://schemas.microsoft.com/office/drawing/2014/main" id="{9C68032C-70B6-4EC6-BF17-A87D323BBAA1}"/>
+                <a16:creationId xmlns:a16="http://schemas.microsoft.com/office/drawing/2014/main" id="{E3356F22-D3BC-4669-B0E1-7E7979AAB35C}"/>
               </a:ext>
             </a:extLst>
           </p:cNvPr>
@@ -10552,7 +10552,7 @@
           <p:cNvPr id="58" name="">
             <a:extLst xmlns:a="http://schemas.openxmlformats.org/drawingml/2006/main">
               <a:ext uri="{FF2B5EF4-FFF2-40B4-BE49-F238E27FC236}">
-                <a16:creationId xmlns:a16="http://schemas.microsoft.com/office/drawing/2014/main" id="{1C176BA3-9110-4237-84BD-0F7B191701B3}"/>
+                <a16:creationId xmlns:a16="http://schemas.microsoft.com/office/drawing/2014/main" id="{E62F15A8-7EEB-483F-9A72-F456B22E0052}"/>
               </a:ext>
             </a:extLst>
           </p:cNvPr>
@@ -10604,7 +10604,7 @@
           <p:cNvPr id="59" name="">
             <a:extLst xmlns:a="http://schemas.openxmlformats.org/drawingml/2006/main">
               <a:ext uri="{FF2B5EF4-FFF2-40B4-BE49-F238E27FC236}">
-                <a16:creationId xmlns:a16="http://schemas.microsoft.com/office/drawing/2014/main" id="{AB304183-A356-4F1A-AD1F-5BDB557BB545}"/>
+                <a16:creationId xmlns:a16="http://schemas.microsoft.com/office/drawing/2014/main" id="{8D74A3F8-7DEF-4A0E-A28B-284B84B75F73}"/>
               </a:ext>
             </a:extLst>
           </p:cNvPr>
@@ -10635,7 +10635,7 @@
           <p:cNvPr id="60" name="">
             <a:extLst xmlns:a="http://schemas.openxmlformats.org/drawingml/2006/main">
               <a:ext uri="{FF2B5EF4-FFF2-40B4-BE49-F238E27FC236}">
-                <a16:creationId xmlns:a16="http://schemas.microsoft.com/office/drawing/2014/main" id="{ACE3B89C-8BB1-4F11-8552-FE483148E680}"/>
+                <a16:creationId xmlns:a16="http://schemas.microsoft.com/office/drawing/2014/main" id="{2BC9EBD8-FE2C-41B2-A6E2-E394F6F73760}"/>
               </a:ext>
             </a:extLst>
           </p:cNvPr>
@@ -10687,7 +10687,7 @@
           <p:cNvPr id="61" name="">
             <a:extLst xmlns:a="http://schemas.openxmlformats.org/drawingml/2006/main">
               <a:ext uri="{FF2B5EF4-FFF2-40B4-BE49-F238E27FC236}">
-                <a16:creationId xmlns:a16="http://schemas.microsoft.com/office/drawing/2014/main" id="{B89597F5-1F97-4173-AB8C-EFF7A9988DC8}"/>
+                <a16:creationId xmlns:a16="http://schemas.microsoft.com/office/drawing/2014/main" id="{B3C7A571-37B0-490C-9248-DDF590D4EBEC}"/>
               </a:ext>
             </a:extLst>
           </p:cNvPr>
@@ -10739,7 +10739,7 @@
           <p:cNvPr id="62" name="">
             <a:extLst xmlns:a="http://schemas.openxmlformats.org/drawingml/2006/main">
               <a:ext uri="{FF2B5EF4-FFF2-40B4-BE49-F238E27FC236}">
-                <a16:creationId xmlns:a16="http://schemas.microsoft.com/office/drawing/2014/main" id="{05D20841-D052-4FDD-B863-B9336E5864F0}"/>
+                <a16:creationId xmlns:a16="http://schemas.microsoft.com/office/drawing/2014/main" id="{848A2C7A-5B9A-4791-9361-9C455F731991}"/>
               </a:ext>
             </a:extLst>
           </p:cNvPr>
@@ -10791,7 +10791,7 @@
           <p:cNvPr id="63" name="">
             <a:extLst xmlns:a="http://schemas.openxmlformats.org/drawingml/2006/main">
               <a:ext uri="{FF2B5EF4-FFF2-40B4-BE49-F238E27FC236}">
-                <a16:creationId xmlns:a16="http://schemas.microsoft.com/office/drawing/2014/main" id="{69B10941-9DFE-4A4F-B326-EAFAD6D0715C}"/>
+                <a16:creationId xmlns:a16="http://schemas.microsoft.com/office/drawing/2014/main" id="{92ED4D9D-9D4B-408E-BF35-0C99FD3EF14E}"/>
               </a:ext>
             </a:extLst>
           </p:cNvPr>
@@ -10843,7 +10843,7 @@
           <p:cNvPr id="64" name="">
             <a:extLst xmlns:a="http://schemas.openxmlformats.org/drawingml/2006/main">
               <a:ext uri="{FF2B5EF4-FFF2-40B4-BE49-F238E27FC236}">
-                <a16:creationId xmlns:a16="http://schemas.microsoft.com/office/drawing/2014/main" id="{05BD3C38-17C7-4FAC-AC83-F181BEFE7081}"/>
+                <a16:creationId xmlns:a16="http://schemas.microsoft.com/office/drawing/2014/main" id="{241DC7EC-192D-4C98-9BDC-15AE054FBB64}"/>
               </a:ext>
             </a:extLst>
           </p:cNvPr>
@@ -10895,7 +10895,7 @@
           <p:cNvPr id="65" name="">
             <a:extLst xmlns:a="http://schemas.openxmlformats.org/drawingml/2006/main">
               <a:ext uri="{FF2B5EF4-FFF2-40B4-BE49-F238E27FC236}">
-                <a16:creationId xmlns:a16="http://schemas.microsoft.com/office/drawing/2014/main" id="{D06C2F31-40D7-43EF-81A5-3B47721F984C}"/>
+                <a16:creationId xmlns:a16="http://schemas.microsoft.com/office/drawing/2014/main" id="{A3D5FB7F-98C6-4467-990C-BD15A8AAD173}"/>
               </a:ext>
             </a:extLst>
           </p:cNvPr>
@@ -10926,7 +10926,7 @@
           <p:cNvPr id="66" name="">
             <a:extLst xmlns:a="http://schemas.openxmlformats.org/drawingml/2006/main">
               <a:ext uri="{FF2B5EF4-FFF2-40B4-BE49-F238E27FC236}">
-                <a16:creationId xmlns:a16="http://schemas.microsoft.com/office/drawing/2014/main" id="{0DE52071-3329-4B1F-935F-A37FAC7864D7}"/>
+                <a16:creationId xmlns:a16="http://schemas.microsoft.com/office/drawing/2014/main" id="{BE410B99-2E4C-46C8-96B4-366D7741CB77}"/>
               </a:ext>
             </a:extLst>
           </p:cNvPr>
@@ -10957,7 +10957,7 @@
           <p:cNvPr id="67" name="">
             <a:extLst xmlns:a="http://schemas.openxmlformats.org/drawingml/2006/main">
               <a:ext uri="{FF2B5EF4-FFF2-40B4-BE49-F238E27FC236}">
-                <a16:creationId xmlns:a16="http://schemas.microsoft.com/office/drawing/2014/main" id="{C5516646-2D12-4F70-86F7-3D443F0643EF}"/>
+                <a16:creationId xmlns:a16="http://schemas.microsoft.com/office/drawing/2014/main" id="{EF5A4442-FD00-4603-9487-8CB3C9A72C22}"/>
               </a:ext>
             </a:extLst>
           </p:cNvPr>
@@ -11009,7 +11009,7 @@
           <p:cNvPr id="68" name="">
             <a:extLst xmlns:a="http://schemas.openxmlformats.org/drawingml/2006/main">
               <a:ext uri="{FF2B5EF4-FFF2-40B4-BE49-F238E27FC236}">
-                <a16:creationId xmlns:a16="http://schemas.microsoft.com/office/drawing/2014/main" id="{DCB7107C-1A80-4604-A08F-C74FC4DBC709}"/>
+                <a16:creationId xmlns:a16="http://schemas.microsoft.com/office/drawing/2014/main" id="{30E37FBF-D551-4821-B235-BAD8B5C57DF0}"/>
               </a:ext>
             </a:extLst>
           </p:cNvPr>
@@ -11061,7 +11061,7 @@
           <p:cNvPr id="69" name="">
             <a:extLst xmlns:a="http://schemas.openxmlformats.org/drawingml/2006/main">
               <a:ext uri="{FF2B5EF4-FFF2-40B4-BE49-F238E27FC236}">
-                <a16:creationId xmlns:a16="http://schemas.microsoft.com/office/drawing/2014/main" id="{59EF6986-AB6E-4F9E-BBC6-101DD7468920}"/>
+                <a16:creationId xmlns:a16="http://schemas.microsoft.com/office/drawing/2014/main" id="{0CC68522-C687-4258-8D2D-B2DBB2271E20}"/>
               </a:ext>
             </a:extLst>
           </p:cNvPr>
@@ -11113,7 +11113,7 @@
           <p:cNvPr id="70" name="">
             <a:extLst xmlns:a="http://schemas.openxmlformats.org/drawingml/2006/main">
               <a:ext uri="{FF2B5EF4-FFF2-40B4-BE49-F238E27FC236}">
-                <a16:creationId xmlns:a16="http://schemas.microsoft.com/office/drawing/2014/main" id="{D753C49F-E495-4926-B0E9-5837E8DA2E16}"/>
+                <a16:creationId xmlns:a16="http://schemas.microsoft.com/office/drawing/2014/main" id="{A8A5CC83-B1BE-4C55-8E12-0333F94D6F24}"/>
               </a:ext>
             </a:extLst>
           </p:cNvPr>
@@ -11165,7 +11165,7 @@
           <p:cNvPr id="71" name="">
             <a:extLst xmlns:a="http://schemas.openxmlformats.org/drawingml/2006/main">
               <a:ext uri="{FF2B5EF4-FFF2-40B4-BE49-F238E27FC236}">
-                <a16:creationId xmlns:a16="http://schemas.microsoft.com/office/drawing/2014/main" id="{9FAD6049-51A8-4C49-8C2D-4B5C7E51C344}"/>
+                <a16:creationId xmlns:a16="http://schemas.microsoft.com/office/drawing/2014/main" id="{81E7BB35-5A44-4E3B-832D-6CB0B7CFCD94}"/>
               </a:ext>
             </a:extLst>
           </p:cNvPr>
@@ -11217,7 +11217,7 @@
           <p:cNvPr id="72" name="">
             <a:extLst xmlns:a="http://schemas.openxmlformats.org/drawingml/2006/main">
               <a:ext uri="{FF2B5EF4-FFF2-40B4-BE49-F238E27FC236}">
-                <a16:creationId xmlns:a16="http://schemas.microsoft.com/office/drawing/2014/main" id="{CB704017-AC2B-4598-9BB1-D853CA88DD6F}"/>
+                <a16:creationId xmlns:a16="http://schemas.microsoft.com/office/drawing/2014/main" id="{A68A58A9-F645-47EF-96A5-152D63672D86}"/>
               </a:ext>
             </a:extLst>
           </p:cNvPr>
@@ -11248,7 +11248,7 @@
           <p:cNvPr id="73" name="">
             <a:extLst xmlns:a="http://schemas.openxmlformats.org/drawingml/2006/main">
               <a:ext uri="{FF2B5EF4-FFF2-40B4-BE49-F238E27FC236}">
-                <a16:creationId xmlns:a16="http://schemas.microsoft.com/office/drawing/2014/main" id="{163E4843-E4E4-4B99-8116-98B5D8C5EDBD}"/>
+                <a16:creationId xmlns:a16="http://schemas.microsoft.com/office/drawing/2014/main" id="{A619452B-FDB4-4FDF-9386-5A62EEE19C47}"/>
               </a:ext>
             </a:extLst>
           </p:cNvPr>
@@ -11300,7 +11300,7 @@
           <p:cNvPr id="74" name="">
             <a:extLst xmlns:a="http://schemas.openxmlformats.org/drawingml/2006/main">
               <a:ext uri="{FF2B5EF4-FFF2-40B4-BE49-F238E27FC236}">
-                <a16:creationId xmlns:a16="http://schemas.microsoft.com/office/drawing/2014/main" id="{46A26B11-7F20-4D75-8CB6-01CD37831784}"/>
+                <a16:creationId xmlns:a16="http://schemas.microsoft.com/office/drawing/2014/main" id="{83A93EF9-BD84-4254-8721-CDCEDB859518}"/>
               </a:ext>
             </a:extLst>
           </p:cNvPr>
@@ -11352,7 +11352,7 @@
           <p:cNvPr id="75" name="">
             <a:extLst xmlns:a="http://schemas.openxmlformats.org/drawingml/2006/main">
               <a:ext uri="{FF2B5EF4-FFF2-40B4-BE49-F238E27FC236}">
-                <a16:creationId xmlns:a16="http://schemas.microsoft.com/office/drawing/2014/main" id="{2C1036C6-C187-496E-A71E-F242B1AF918C}"/>
+                <a16:creationId xmlns:a16="http://schemas.microsoft.com/office/drawing/2014/main" id="{6C2A9BC7-FAFB-44F0-BD58-9A85D2846ED8}"/>
               </a:ext>
             </a:extLst>
           </p:cNvPr>
@@ -11404,7 +11404,7 @@
           <p:cNvPr id="76" name="">
             <a:extLst xmlns:a="http://schemas.openxmlformats.org/drawingml/2006/main">
               <a:ext uri="{FF2B5EF4-FFF2-40B4-BE49-F238E27FC236}">
-                <a16:creationId xmlns:a16="http://schemas.microsoft.com/office/drawing/2014/main" id="{5DC8F823-7D07-4FAB-8221-F8DBBA748259}"/>
+                <a16:creationId xmlns:a16="http://schemas.microsoft.com/office/drawing/2014/main" id="{F39E4478-CCC4-4481-BC48-6D96970C4D50}"/>
               </a:ext>
             </a:extLst>
           </p:cNvPr>
@@ -11456,7 +11456,7 @@
           <p:cNvPr id="77" name="">
             <a:extLst xmlns:a="http://schemas.openxmlformats.org/drawingml/2006/main">
               <a:ext uri="{FF2B5EF4-FFF2-40B4-BE49-F238E27FC236}">
-                <a16:creationId xmlns:a16="http://schemas.microsoft.com/office/drawing/2014/main" id="{DE17D9E2-25DA-495A-AD6C-100456C3C890}"/>
+                <a16:creationId xmlns:a16="http://schemas.microsoft.com/office/drawing/2014/main" id="{4C453943-8D7D-4916-910D-C986F97340E7}"/>
               </a:ext>
             </a:extLst>
           </p:cNvPr>
@@ -11508,7 +11508,7 @@
           <p:cNvPr id="78" name="">
             <a:extLst xmlns:a="http://schemas.openxmlformats.org/drawingml/2006/main">
               <a:ext uri="{FF2B5EF4-FFF2-40B4-BE49-F238E27FC236}">
-                <a16:creationId xmlns:a16="http://schemas.microsoft.com/office/drawing/2014/main" id="{529EB3AE-F8FF-403C-8503-D761BAD8B6DD}"/>
+                <a16:creationId xmlns:a16="http://schemas.microsoft.com/office/drawing/2014/main" id="{A308833A-2788-4C04-9980-9478F1DF6D76}"/>
               </a:ext>
             </a:extLst>
           </p:cNvPr>
@@ -11539,7 +11539,7 @@
           <p:cNvPr id="79" name="">
             <a:extLst xmlns:a="http://schemas.openxmlformats.org/drawingml/2006/main">
               <a:ext uri="{FF2B5EF4-FFF2-40B4-BE49-F238E27FC236}">
-                <a16:creationId xmlns:a16="http://schemas.microsoft.com/office/drawing/2014/main" id="{5DFC7D9E-E7FE-4E10-A331-0A9337743E92}"/>
+                <a16:creationId xmlns:a16="http://schemas.microsoft.com/office/drawing/2014/main" id="{380C0309-CE21-4540-9994-4140773CDC5D}"/>
               </a:ext>
             </a:extLst>
           </p:cNvPr>
@@ -11570,7 +11570,7 @@
           <p:cNvPr id="80" name="">
             <a:extLst xmlns:a="http://schemas.openxmlformats.org/drawingml/2006/main">
               <a:ext uri="{FF2B5EF4-FFF2-40B4-BE49-F238E27FC236}">
-                <a16:creationId xmlns:a16="http://schemas.microsoft.com/office/drawing/2014/main" id="{85470D39-5C10-422A-89CF-759511330DBD}"/>
+                <a16:creationId xmlns:a16="http://schemas.microsoft.com/office/drawing/2014/main" id="{A790718D-A08E-4794-9979-75C962566AE5}"/>
               </a:ext>
             </a:extLst>
           </p:cNvPr>
@@ -11622,7 +11622,7 @@
           <p:cNvPr id="81" name="">
             <a:extLst xmlns:a="http://schemas.openxmlformats.org/drawingml/2006/main">
               <a:ext uri="{FF2B5EF4-FFF2-40B4-BE49-F238E27FC236}">
-                <a16:creationId xmlns:a16="http://schemas.microsoft.com/office/drawing/2014/main" id="{4350E368-95A2-425C-88A4-07638D6103F1}"/>
+                <a16:creationId xmlns:a16="http://schemas.microsoft.com/office/drawing/2014/main" id="{15418A3C-C49D-4F74-B60D-C56FA2D7070A}"/>
               </a:ext>
             </a:extLst>
           </p:cNvPr>
@@ -11674,7 +11674,7 @@
           <p:cNvPr id="82" name="">
             <a:extLst xmlns:a="http://schemas.openxmlformats.org/drawingml/2006/main">
               <a:ext uri="{FF2B5EF4-FFF2-40B4-BE49-F238E27FC236}">
-                <a16:creationId xmlns:a16="http://schemas.microsoft.com/office/drawing/2014/main" id="{FC8781E0-7083-40F2-9A51-B337E8FA8602}"/>
+                <a16:creationId xmlns:a16="http://schemas.microsoft.com/office/drawing/2014/main" id="{75F08AE7-C59B-4601-B8ED-FBA74BB6C2AE}"/>
               </a:ext>
             </a:extLst>
           </p:cNvPr>
@@ -11726,7 +11726,7 @@
           <p:cNvPr id="83" name="">
             <a:extLst xmlns:a="http://schemas.openxmlformats.org/drawingml/2006/main">
               <a:ext uri="{FF2B5EF4-FFF2-40B4-BE49-F238E27FC236}">
-                <a16:creationId xmlns:a16="http://schemas.microsoft.com/office/drawing/2014/main" id="{EFD48757-C5D0-4C0C-A27F-850AD6D60ADF}"/>
+                <a16:creationId xmlns:a16="http://schemas.microsoft.com/office/drawing/2014/main" id="{7649851F-F2B7-40FD-85DF-1E603DE8DE54}"/>
               </a:ext>
             </a:extLst>
           </p:cNvPr>
@@ -11778,7 +11778,7 @@
           <p:cNvPr id="84" name="">
             <a:extLst xmlns:a="http://schemas.openxmlformats.org/drawingml/2006/main">
               <a:ext uri="{FF2B5EF4-FFF2-40B4-BE49-F238E27FC236}">
-                <a16:creationId xmlns:a16="http://schemas.microsoft.com/office/drawing/2014/main" id="{52F3D756-59F8-4AB0-8EF6-28E263895BD0}"/>
+                <a16:creationId xmlns:a16="http://schemas.microsoft.com/office/drawing/2014/main" id="{5D869980-15AB-4516-8C16-8289E461BA6E}"/>
               </a:ext>
             </a:extLst>
           </p:cNvPr>
@@ -11830,7 +11830,7 @@
           <p:cNvPr id="85" name="">
             <a:extLst xmlns:a="http://schemas.openxmlformats.org/drawingml/2006/main">
               <a:ext uri="{FF2B5EF4-FFF2-40B4-BE49-F238E27FC236}">
-                <a16:creationId xmlns:a16="http://schemas.microsoft.com/office/drawing/2014/main" id="{80AA806F-2A7C-4B9A-BAED-FD74F14845C3}"/>
+                <a16:creationId xmlns:a16="http://schemas.microsoft.com/office/drawing/2014/main" id="{6C1E7BD2-2B5B-4A22-9B60-31DF729AE1CB}"/>
               </a:ext>
             </a:extLst>
           </p:cNvPr>
@@ -11861,7 +11861,7 @@
           <p:cNvPr id="86" name="">
             <a:extLst xmlns:a="http://schemas.openxmlformats.org/drawingml/2006/main">
               <a:ext uri="{FF2B5EF4-FFF2-40B4-BE49-F238E27FC236}">
-                <a16:creationId xmlns:a16="http://schemas.microsoft.com/office/drawing/2014/main" id="{1B52BFD1-3A2C-431A-AF4B-7340BCADC433}"/>
+                <a16:creationId xmlns:a16="http://schemas.microsoft.com/office/drawing/2014/main" id="{8C5509BB-5027-4092-AB3A-5EF2E620B677}"/>
               </a:ext>
             </a:extLst>
           </p:cNvPr>
@@ -11913,7 +11913,7 @@
           <p:cNvPr id="87" name="">
             <a:extLst xmlns:a="http://schemas.openxmlformats.org/drawingml/2006/main">
               <a:ext uri="{FF2B5EF4-FFF2-40B4-BE49-F238E27FC236}">
-                <a16:creationId xmlns:a16="http://schemas.microsoft.com/office/drawing/2014/main" id="{575D071A-FF75-41E1-8E70-AAA50B8C95F3}"/>
+                <a16:creationId xmlns:a16="http://schemas.microsoft.com/office/drawing/2014/main" id="{73775E1A-BD6D-4F7D-9B1F-8423E3BA5477}"/>
               </a:ext>
             </a:extLst>
           </p:cNvPr>
@@ -11965,7 +11965,7 @@
           <p:cNvPr id="88" name="">
             <a:extLst xmlns:a="http://schemas.openxmlformats.org/drawingml/2006/main">
               <a:ext uri="{FF2B5EF4-FFF2-40B4-BE49-F238E27FC236}">
-                <a16:creationId xmlns:a16="http://schemas.microsoft.com/office/drawing/2014/main" id="{834857FC-1C25-447E-A62B-F68E146F5DEF}"/>
+                <a16:creationId xmlns:a16="http://schemas.microsoft.com/office/drawing/2014/main" id="{12823EEE-8FBB-44F6-ADFE-99724025AE6C}"/>
               </a:ext>
             </a:extLst>
           </p:cNvPr>
@@ -12017,7 +12017,7 @@
           <p:cNvPr id="89" name="">
             <a:extLst xmlns:a="http://schemas.openxmlformats.org/drawingml/2006/main">
               <a:ext uri="{FF2B5EF4-FFF2-40B4-BE49-F238E27FC236}">
-                <a16:creationId xmlns:a16="http://schemas.microsoft.com/office/drawing/2014/main" id="{F12D49D6-5D09-4192-A74C-766FF8E194AF}"/>
+                <a16:creationId xmlns:a16="http://schemas.microsoft.com/office/drawing/2014/main" id="{50827633-73FD-4A96-80B4-00EBA2505B90}"/>
               </a:ext>
             </a:extLst>
           </p:cNvPr>
@@ -12069,7 +12069,7 @@
           <p:cNvPr id="90" name="">
             <a:extLst xmlns:a="http://schemas.openxmlformats.org/drawingml/2006/main">
               <a:ext uri="{FF2B5EF4-FFF2-40B4-BE49-F238E27FC236}">
-                <a16:creationId xmlns:a16="http://schemas.microsoft.com/office/drawing/2014/main" id="{C776D566-CFED-4451-B513-2318E3F57DEB}"/>
+                <a16:creationId xmlns:a16="http://schemas.microsoft.com/office/drawing/2014/main" id="{90BF7C42-8531-4373-BF1D-0A9454559D6E}"/>
               </a:ext>
             </a:extLst>
           </p:cNvPr>
@@ -12121,7 +12121,7 @@
           <p:cNvPr id="91" name="">
             <a:extLst xmlns:a="http://schemas.openxmlformats.org/drawingml/2006/main">
               <a:ext uri="{FF2B5EF4-FFF2-40B4-BE49-F238E27FC236}">
-                <a16:creationId xmlns:a16="http://schemas.microsoft.com/office/drawing/2014/main" id="{6CAB77BE-96B9-4EA6-8F9D-DA15AF34D0A9}"/>
+                <a16:creationId xmlns:a16="http://schemas.microsoft.com/office/drawing/2014/main" id="{6D15D7D0-C3C3-4F1C-8512-7BB6747CE96E}"/>
               </a:ext>
             </a:extLst>
           </p:cNvPr>
@@ -12152,7 +12152,7 @@
           <p:cNvPr id="92" name="">
             <a:extLst xmlns:a="http://schemas.openxmlformats.org/drawingml/2006/main">
               <a:ext uri="{FF2B5EF4-FFF2-40B4-BE49-F238E27FC236}">
-                <a16:creationId xmlns:a16="http://schemas.microsoft.com/office/drawing/2014/main" id="{AD86D20A-DCCB-47C6-86A4-27F9AE628702}"/>
+                <a16:creationId xmlns:a16="http://schemas.microsoft.com/office/drawing/2014/main" id="{1279A282-492F-40E8-87C7-8C15F7955D4D}"/>
               </a:ext>
             </a:extLst>
           </p:cNvPr>
@@ -12183,7 +12183,7 @@
           <p:cNvPr id="93" name="">
             <a:extLst xmlns:a="http://schemas.openxmlformats.org/drawingml/2006/main">
               <a:ext uri="{FF2B5EF4-FFF2-40B4-BE49-F238E27FC236}">
-                <a16:creationId xmlns:a16="http://schemas.microsoft.com/office/drawing/2014/main" id="{D8BDBDA7-9D57-4B76-BF4F-D002CD1FFC74}"/>
+                <a16:creationId xmlns:a16="http://schemas.microsoft.com/office/drawing/2014/main" id="{43D337EB-4CDC-43C1-A8C8-E4A00D7CA4BD}"/>
               </a:ext>
             </a:extLst>
           </p:cNvPr>
@@ -12235,7 +12235,7 @@
           <p:cNvPr id="94" name="">
             <a:extLst xmlns:a="http://schemas.openxmlformats.org/drawingml/2006/main">
               <a:ext uri="{FF2B5EF4-FFF2-40B4-BE49-F238E27FC236}">
-                <a16:creationId xmlns:a16="http://schemas.microsoft.com/office/drawing/2014/main" id="{E273A76F-44CF-4865-8F69-86DAABC02B8B}"/>
+                <a16:creationId xmlns:a16="http://schemas.microsoft.com/office/drawing/2014/main" id="{2E42D639-786E-4EBC-95C1-2BACF1529FAA}"/>
               </a:ext>
             </a:extLst>
           </p:cNvPr>
@@ -12287,7 +12287,7 @@
           <p:cNvPr id="95" name="">
             <a:extLst xmlns:a="http://schemas.openxmlformats.org/drawingml/2006/main">
               <a:ext uri="{FF2B5EF4-FFF2-40B4-BE49-F238E27FC236}">
-                <a16:creationId xmlns:a16="http://schemas.microsoft.com/office/drawing/2014/main" id="{E38F5162-AFC6-4DA3-ACE4-7E0B2503B145}"/>
+                <a16:creationId xmlns:a16="http://schemas.microsoft.com/office/drawing/2014/main" id="{D939694F-9607-4CEE-8E5B-43CFF0DC3026}"/>
               </a:ext>
             </a:extLst>
           </p:cNvPr>
@@ -12339,7 +12339,7 @@
           <p:cNvPr id="96" name="">
             <a:extLst xmlns:a="http://schemas.openxmlformats.org/drawingml/2006/main">
               <a:ext uri="{FF2B5EF4-FFF2-40B4-BE49-F238E27FC236}">
-                <a16:creationId xmlns:a16="http://schemas.microsoft.com/office/drawing/2014/main" id="{FC2B1ECD-A9DB-49EF-BB17-8B207E303671}"/>
+                <a16:creationId xmlns:a16="http://schemas.microsoft.com/office/drawing/2014/main" id="{0E8BD080-F22E-4B07-9AF6-AF57B90A9ECD}"/>
               </a:ext>
             </a:extLst>
           </p:cNvPr>
@@ -12391,7 +12391,7 @@
           <p:cNvPr id="97" name="">
             <a:extLst xmlns:a="http://schemas.openxmlformats.org/drawingml/2006/main">
               <a:ext uri="{FF2B5EF4-FFF2-40B4-BE49-F238E27FC236}">
-                <a16:creationId xmlns:a16="http://schemas.microsoft.com/office/drawing/2014/main" id="{1216E5C0-A5D3-4C27-9A75-BFF7C0A4124F}"/>
+                <a16:creationId xmlns:a16="http://schemas.microsoft.com/office/drawing/2014/main" id="{6DA121DA-4AFC-4BAF-8EEA-72DE5A678758}"/>
               </a:ext>
             </a:extLst>
           </p:cNvPr>
@@ -12441,7 +12441,7 @@
     </p:spTree>
     <p:extLst>
       <p:ext uri="{BB962C8B-B14F-4D97-AF65-F5344CB8AC3E}">
-        <p14:creationId xmlns:p14="http://schemas.microsoft.com/office/powerpoint/2010/main" val="423089821"/>
+        <p14:creationId xmlns:p14="http://schemas.microsoft.com/office/powerpoint/2010/main" val="2034730275"/>
       </p:ext>
     </p:extLst>
   </p:cSld>
@@ -12472,7 +12472,7 @@
           <p:cNvPr id="102" name="">
             <a:extLst xmlns:a="http://schemas.openxmlformats.org/drawingml/2006/main">
               <a:ext uri="{FF2B5EF4-FFF2-40B4-BE49-F238E27FC236}">
-                <a16:creationId xmlns:a16="http://schemas.microsoft.com/office/drawing/2014/main" id="{C63FA62B-ECED-4378-AF1E-4820B8464586}"/>
+                <a16:creationId xmlns:a16="http://schemas.microsoft.com/office/drawing/2014/main" id="{04F06C3F-19FC-4857-A10B-34385E0EDA9D}"/>
               </a:ext>
             </a:extLst>
           </p:cNvPr>
@@ -12505,7 +12505,7 @@
           <p:cNvPr id="2" name="">
             <a:extLst xmlns:a="http://schemas.openxmlformats.org/drawingml/2006/main">
               <a:ext uri="{FF2B5EF4-FFF2-40B4-BE49-F238E27FC236}">
-                <a16:creationId xmlns:a16="http://schemas.microsoft.com/office/drawing/2014/main" id="{AC097105-D4D3-4EE9-8A5C-9FE5487043AD}"/>
+                <a16:creationId xmlns:a16="http://schemas.microsoft.com/office/drawing/2014/main" id="{65EEB272-2733-4CC9-A381-69B69157F799}"/>
               </a:ext>
             </a:extLst>
           </p:cNvPr>
@@ -12536,7 +12536,7 @@
           <p:cNvPr id="3" name="">
             <a:extLst xmlns:a="http://schemas.openxmlformats.org/drawingml/2006/main">
               <a:ext uri="{FF2B5EF4-FFF2-40B4-BE49-F238E27FC236}">
-                <a16:creationId xmlns:a16="http://schemas.microsoft.com/office/drawing/2014/main" id="{5C9C25A3-238D-4EDB-9C11-807CFD6D0BA7}"/>
+                <a16:creationId xmlns:a16="http://schemas.microsoft.com/office/drawing/2014/main" id="{CB5A5D48-5A38-4FE3-9AB6-5106C5A65BA2}"/>
               </a:ext>
             </a:extLst>
           </p:cNvPr>
@@ -12588,7 +12588,7 @@
           <p:cNvPr id="4" name="">
             <a:extLst xmlns:a="http://schemas.openxmlformats.org/drawingml/2006/main">
               <a:ext uri="{FF2B5EF4-FFF2-40B4-BE49-F238E27FC236}">
-                <a16:creationId xmlns:a16="http://schemas.microsoft.com/office/drawing/2014/main" id="{2079E0B3-39FE-4A4F-9FC5-145D7C5E88C3}"/>
+                <a16:creationId xmlns:a16="http://schemas.microsoft.com/office/drawing/2014/main" id="{E51C52B7-4240-4121-B7CE-F27AAB150061}"/>
               </a:ext>
             </a:extLst>
           </p:cNvPr>
@@ -12640,7 +12640,7 @@
           <p:cNvPr id="5" name="">
             <a:extLst xmlns:a="http://schemas.openxmlformats.org/drawingml/2006/main">
               <a:ext uri="{FF2B5EF4-FFF2-40B4-BE49-F238E27FC236}">
-                <a16:creationId xmlns:a16="http://schemas.microsoft.com/office/drawing/2014/main" id="{6F88E0D3-B1D2-4648-A582-9C6D243142F5}"/>
+                <a16:creationId xmlns:a16="http://schemas.microsoft.com/office/drawing/2014/main" id="{0AFAC8A4-0506-448F-A14D-D259B5A70243}"/>
               </a:ext>
             </a:extLst>
           </p:cNvPr>
@@ -12675,7 +12675,7 @@
           <p:nvPr/>
         </p:nvPicPr>
         <p:blipFill>
-          <a:blip xmlns:r="http://schemas.openxmlformats.org/officeDocument/2006/relationships" xmlns:a="http://schemas.openxmlformats.org/drawingml/2006/main" r:embed="R99aeda51e5864818"/>
+          <a:blip xmlns:r="http://schemas.openxmlformats.org/officeDocument/2006/relationships" xmlns:a="http://schemas.openxmlformats.org/drawingml/2006/main" r:embed="R8ccaf5bbb7194c7e"/>
           <a:stretch xmlns:a="http://schemas.openxmlformats.org/drawingml/2006/main"/>
         </p:blipFill>
         <p:spPr>
@@ -12693,7 +12693,7 @@
           <p:cNvPr id="7" name="">
             <a:extLst xmlns:a="http://schemas.openxmlformats.org/drawingml/2006/main">
               <a:ext uri="{FF2B5EF4-FFF2-40B4-BE49-F238E27FC236}">
-                <a16:creationId xmlns:a16="http://schemas.microsoft.com/office/drawing/2014/main" id="{71A5297F-02A4-4945-B831-D90D89EF03DD}"/>
+                <a16:creationId xmlns:a16="http://schemas.microsoft.com/office/drawing/2014/main" id="{2360F022-ED1B-413B-994E-6206C8DA051C}"/>
               </a:ext>
             </a:extLst>
           </p:cNvPr>
@@ -12745,7 +12745,7 @@
           <p:cNvPr id="8" name="">
             <a:extLst xmlns:a="http://schemas.openxmlformats.org/drawingml/2006/main">
               <a:ext uri="{FF2B5EF4-FFF2-40B4-BE49-F238E27FC236}">
-                <a16:creationId xmlns:a16="http://schemas.microsoft.com/office/drawing/2014/main" id="{8A32610F-84CB-4EE5-A42A-A905A5B12E71}"/>
+                <a16:creationId xmlns:a16="http://schemas.microsoft.com/office/drawing/2014/main" id="{ADC8B4D8-FD99-48FD-901E-1E9842CFA9EC}"/>
               </a:ext>
             </a:extLst>
           </p:cNvPr>
@@ -12797,7 +12797,7 @@
           <p:cNvPr id="9" name="">
             <a:extLst xmlns:a="http://schemas.openxmlformats.org/drawingml/2006/main">
               <a:ext uri="{FF2B5EF4-FFF2-40B4-BE49-F238E27FC236}">
-                <a16:creationId xmlns:a16="http://schemas.microsoft.com/office/drawing/2014/main" id="{FC865B86-72D9-48C8-BB7A-5AAA28E759CA}"/>
+                <a16:creationId xmlns:a16="http://schemas.microsoft.com/office/drawing/2014/main" id="{AA2C0AF2-5558-4198-A492-497AC5424566}"/>
               </a:ext>
             </a:extLst>
           </p:cNvPr>
@@ -12849,7 +12849,7 @@
           <p:cNvPr id="10" name="">
             <a:extLst xmlns:a="http://schemas.openxmlformats.org/drawingml/2006/main">
               <a:ext uri="{FF2B5EF4-FFF2-40B4-BE49-F238E27FC236}">
-                <a16:creationId xmlns:a16="http://schemas.microsoft.com/office/drawing/2014/main" id="{CC474721-4AEF-4F2C-B585-7853D292DC75}"/>
+                <a16:creationId xmlns:a16="http://schemas.microsoft.com/office/drawing/2014/main" id="{AE15F582-3F88-4A36-BF1C-2AC6E8D58310}"/>
               </a:ext>
             </a:extLst>
           </p:cNvPr>
@@ -12901,7 +12901,7 @@
           <p:cNvPr id="11" name="">
             <a:extLst xmlns:a="http://schemas.openxmlformats.org/drawingml/2006/main">
               <a:ext uri="{FF2B5EF4-FFF2-40B4-BE49-F238E27FC236}">
-                <a16:creationId xmlns:a16="http://schemas.microsoft.com/office/drawing/2014/main" id="{5FB63A05-0C9B-46F3-9480-B50D760FABFD}"/>
+                <a16:creationId xmlns:a16="http://schemas.microsoft.com/office/drawing/2014/main" id="{E2FD02E2-046C-4AB6-9BDB-88C8BD9E78F4}"/>
               </a:ext>
             </a:extLst>
           </p:cNvPr>
@@ -12932,7 +12932,7 @@
           <p:cNvPr id="12" name="">
             <a:extLst xmlns:a="http://schemas.openxmlformats.org/drawingml/2006/main">
               <a:ext uri="{FF2B5EF4-FFF2-40B4-BE49-F238E27FC236}">
-                <a16:creationId xmlns:a16="http://schemas.microsoft.com/office/drawing/2014/main" id="{AEBA9FE3-0668-4509-9930-1013687ADDD1}"/>
+                <a16:creationId xmlns:a16="http://schemas.microsoft.com/office/drawing/2014/main" id="{58537BA0-B81C-4185-B909-C87D196DA0F7}"/>
               </a:ext>
             </a:extLst>
           </p:cNvPr>
@@ -12963,7 +12963,7 @@
           <p:cNvPr id="13" name="">
             <a:extLst xmlns:a="http://schemas.openxmlformats.org/drawingml/2006/main">
               <a:ext uri="{FF2B5EF4-FFF2-40B4-BE49-F238E27FC236}">
-                <a16:creationId xmlns:a16="http://schemas.microsoft.com/office/drawing/2014/main" id="{25F44782-E3F6-405E-BED8-DC06F39CEA62}"/>
+                <a16:creationId xmlns:a16="http://schemas.microsoft.com/office/drawing/2014/main" id="{5852FAF9-965B-4603-907A-6B08271879F5}"/>
               </a:ext>
             </a:extLst>
           </p:cNvPr>
@@ -13015,7 +13015,7 @@
           <p:cNvPr id="14" name="">
             <a:extLst xmlns:a="http://schemas.openxmlformats.org/drawingml/2006/main">
               <a:ext uri="{FF2B5EF4-FFF2-40B4-BE49-F238E27FC236}">
-                <a16:creationId xmlns:a16="http://schemas.microsoft.com/office/drawing/2014/main" id="{5079775B-22CC-4B06-92AC-EBEE8E4AC518}"/>
+                <a16:creationId xmlns:a16="http://schemas.microsoft.com/office/drawing/2014/main" id="{7A1D7A31-2ECA-4233-90DA-26A1538DE567}"/>
               </a:ext>
             </a:extLst>
           </p:cNvPr>
@@ -13067,7 +13067,7 @@
           <p:cNvPr id="15" name="">
             <a:extLst xmlns:a="http://schemas.openxmlformats.org/drawingml/2006/main">
               <a:ext uri="{FF2B5EF4-FFF2-40B4-BE49-F238E27FC236}">
-                <a16:creationId xmlns:a16="http://schemas.microsoft.com/office/drawing/2014/main" id="{BFA3E41A-52B1-4B01-86E1-3C0E1FEE5ACB}"/>
+                <a16:creationId xmlns:a16="http://schemas.microsoft.com/office/drawing/2014/main" id="{4DC7A0D0-AC00-4A0D-A96C-D5113CE7FE35}"/>
               </a:ext>
             </a:extLst>
           </p:cNvPr>
@@ -13119,7 +13119,7 @@
           <p:cNvPr id="16" name="">
             <a:extLst xmlns:a="http://schemas.openxmlformats.org/drawingml/2006/main">
               <a:ext uri="{FF2B5EF4-FFF2-40B4-BE49-F238E27FC236}">
-                <a16:creationId xmlns:a16="http://schemas.microsoft.com/office/drawing/2014/main" id="{A8A6F965-0049-4B31-BCB3-5554DD935CBC}"/>
+                <a16:creationId xmlns:a16="http://schemas.microsoft.com/office/drawing/2014/main" id="{BBC164FC-31CF-40F1-913A-0B139EF5A250}"/>
               </a:ext>
             </a:extLst>
           </p:cNvPr>
@@ -13171,7 +13171,7 @@
           <p:cNvPr id="17" name="">
             <a:extLst xmlns:a="http://schemas.openxmlformats.org/drawingml/2006/main">
               <a:ext uri="{FF2B5EF4-FFF2-40B4-BE49-F238E27FC236}">
-                <a16:creationId xmlns:a16="http://schemas.microsoft.com/office/drawing/2014/main" id="{23F9CA5F-2299-4CDD-B5D1-B8DB244C39BE}"/>
+                <a16:creationId xmlns:a16="http://schemas.microsoft.com/office/drawing/2014/main" id="{57E88818-17AF-4B80-B30B-1D0A6768882E}"/>
               </a:ext>
             </a:extLst>
           </p:cNvPr>
@@ -13223,7 +13223,7 @@
           <p:cNvPr id="18" name="">
             <a:extLst xmlns:a="http://schemas.openxmlformats.org/drawingml/2006/main">
               <a:ext uri="{FF2B5EF4-FFF2-40B4-BE49-F238E27FC236}">
-                <a16:creationId xmlns:a16="http://schemas.microsoft.com/office/drawing/2014/main" id="{701C2E4D-3370-48FB-B967-4187F94DE848}"/>
+                <a16:creationId xmlns:a16="http://schemas.microsoft.com/office/drawing/2014/main" id="{342EBB5F-5664-400C-9B3F-77BEC017476D}"/>
               </a:ext>
             </a:extLst>
           </p:cNvPr>
@@ -13254,7 +13254,7 @@
           <p:cNvPr id="19" name="">
             <a:extLst xmlns:a="http://schemas.openxmlformats.org/drawingml/2006/main">
               <a:ext uri="{FF2B5EF4-FFF2-40B4-BE49-F238E27FC236}">
-                <a16:creationId xmlns:a16="http://schemas.microsoft.com/office/drawing/2014/main" id="{307B973A-83D2-4B9E-AA87-A2ACCF6150EB}"/>
+                <a16:creationId xmlns:a16="http://schemas.microsoft.com/office/drawing/2014/main" id="{52DEBCB9-FBE0-4AFA-9DD2-16AD59D26D19}"/>
               </a:ext>
             </a:extLst>
           </p:cNvPr>
@@ -13306,7 +13306,7 @@
           <p:cNvPr id="20" name="">
             <a:extLst xmlns:a="http://schemas.openxmlformats.org/drawingml/2006/main">
               <a:ext uri="{FF2B5EF4-FFF2-40B4-BE49-F238E27FC236}">
-                <a16:creationId xmlns:a16="http://schemas.microsoft.com/office/drawing/2014/main" id="{A6F05546-A2EB-409D-86D4-0BBE7E1366D5}"/>
+                <a16:creationId xmlns:a16="http://schemas.microsoft.com/office/drawing/2014/main" id="{A35F1648-4C29-48A1-AA59-1C0EEDD30479}"/>
               </a:ext>
             </a:extLst>
           </p:cNvPr>
@@ -13358,7 +13358,7 @@
           <p:cNvPr id="21" name="">
             <a:extLst xmlns:a="http://schemas.openxmlformats.org/drawingml/2006/main">
               <a:ext uri="{FF2B5EF4-FFF2-40B4-BE49-F238E27FC236}">
-                <a16:creationId xmlns:a16="http://schemas.microsoft.com/office/drawing/2014/main" id="{4A9E4421-21E8-4504-9723-F773531265AE}"/>
+                <a16:creationId xmlns:a16="http://schemas.microsoft.com/office/drawing/2014/main" id="{9A3E1071-B26A-4B1E-AB73-6A8CCA3B132D}"/>
               </a:ext>
             </a:extLst>
           </p:cNvPr>
@@ -13410,7 +13410,7 @@
           <p:cNvPr id="22" name="">
             <a:extLst xmlns:a="http://schemas.openxmlformats.org/drawingml/2006/main">
               <a:ext uri="{FF2B5EF4-FFF2-40B4-BE49-F238E27FC236}">
-                <a16:creationId xmlns:a16="http://schemas.microsoft.com/office/drawing/2014/main" id="{7CE535F2-9196-4934-B4DF-373E7FA572DC}"/>
+                <a16:creationId xmlns:a16="http://schemas.microsoft.com/office/drawing/2014/main" id="{BF71A9FB-5958-412C-8829-47FFAC535AF0}"/>
               </a:ext>
             </a:extLst>
           </p:cNvPr>
@@ -13462,7 +13462,7 @@
           <p:cNvPr id="23" name="">
             <a:extLst xmlns:a="http://schemas.openxmlformats.org/drawingml/2006/main">
               <a:ext uri="{FF2B5EF4-FFF2-40B4-BE49-F238E27FC236}">
-                <a16:creationId xmlns:a16="http://schemas.microsoft.com/office/drawing/2014/main" id="{96EDAFBF-C62E-41AA-91AD-F85536E1F93D}"/>
+                <a16:creationId xmlns:a16="http://schemas.microsoft.com/office/drawing/2014/main" id="{C9000133-BC13-422D-A3D5-211849A93466}"/>
               </a:ext>
             </a:extLst>
           </p:cNvPr>
@@ -13514,7 +13514,7 @@
           <p:cNvPr id="24" name="">
             <a:extLst xmlns:a="http://schemas.openxmlformats.org/drawingml/2006/main">
               <a:ext uri="{FF2B5EF4-FFF2-40B4-BE49-F238E27FC236}">
-                <a16:creationId xmlns:a16="http://schemas.microsoft.com/office/drawing/2014/main" id="{A7CA494E-7FDC-4AAA-B2E6-5BE14968B0AB}"/>
+                <a16:creationId xmlns:a16="http://schemas.microsoft.com/office/drawing/2014/main" id="{A6411060-DC98-4752-B8A5-E73A32FDA36E}"/>
               </a:ext>
             </a:extLst>
           </p:cNvPr>
@@ -13545,7 +13545,7 @@
           <p:cNvPr id="25" name="">
             <a:extLst xmlns:a="http://schemas.openxmlformats.org/drawingml/2006/main">
               <a:ext uri="{FF2B5EF4-FFF2-40B4-BE49-F238E27FC236}">
-                <a16:creationId xmlns:a16="http://schemas.microsoft.com/office/drawing/2014/main" id="{C6153817-6FB2-4988-82BB-661FC7C9E81E}"/>
+                <a16:creationId xmlns:a16="http://schemas.microsoft.com/office/drawing/2014/main" id="{9898035A-9BDE-4B63-A23C-5F4295B4F08E}"/>
               </a:ext>
             </a:extLst>
           </p:cNvPr>
@@ -13576,7 +13576,7 @@
           <p:cNvPr id="26" name="">
             <a:extLst xmlns:a="http://schemas.openxmlformats.org/drawingml/2006/main">
               <a:ext uri="{FF2B5EF4-FFF2-40B4-BE49-F238E27FC236}">
-                <a16:creationId xmlns:a16="http://schemas.microsoft.com/office/drawing/2014/main" id="{0BDDD2B2-F928-4B16-B560-3C284894EBC7}"/>
+                <a16:creationId xmlns:a16="http://schemas.microsoft.com/office/drawing/2014/main" id="{92B6DBBA-EA28-486F-91EF-520210C03D71}"/>
               </a:ext>
             </a:extLst>
           </p:cNvPr>
@@ -13628,7 +13628,7 @@
           <p:cNvPr id="27" name="">
             <a:extLst xmlns:a="http://schemas.openxmlformats.org/drawingml/2006/main">
               <a:ext uri="{FF2B5EF4-FFF2-40B4-BE49-F238E27FC236}">
-                <a16:creationId xmlns:a16="http://schemas.microsoft.com/office/drawing/2014/main" id="{AF6EF8E3-B097-4F1E-983D-F22A5EC6348C}"/>
+                <a16:creationId xmlns:a16="http://schemas.microsoft.com/office/drawing/2014/main" id="{87544292-863F-41A9-AA89-7F89B8953664}"/>
               </a:ext>
             </a:extLst>
           </p:cNvPr>
@@ -13680,7 +13680,7 @@
           <p:cNvPr id="28" name="">
             <a:extLst xmlns:a="http://schemas.openxmlformats.org/drawingml/2006/main">
               <a:ext uri="{FF2B5EF4-FFF2-40B4-BE49-F238E27FC236}">
-                <a16:creationId xmlns:a16="http://schemas.microsoft.com/office/drawing/2014/main" id="{70E66A50-6968-45EF-A8DF-C7B6439FC43F}"/>
+                <a16:creationId xmlns:a16="http://schemas.microsoft.com/office/drawing/2014/main" id="{FB7760D6-637E-4C73-B582-BBA2AEDF9136}"/>
               </a:ext>
             </a:extLst>
           </p:cNvPr>
@@ -13732,7 +13732,7 @@
           <p:cNvPr id="29" name="">
             <a:extLst xmlns:a="http://schemas.openxmlformats.org/drawingml/2006/main">
               <a:ext uri="{FF2B5EF4-FFF2-40B4-BE49-F238E27FC236}">
-                <a16:creationId xmlns:a16="http://schemas.microsoft.com/office/drawing/2014/main" id="{391F3513-47D1-4E49-864D-358863B2710A}"/>
+                <a16:creationId xmlns:a16="http://schemas.microsoft.com/office/drawing/2014/main" id="{890064DA-9C6C-4A10-89DD-17DF1DF50AE5}"/>
               </a:ext>
             </a:extLst>
           </p:cNvPr>
@@ -13784,7 +13784,7 @@
           <p:cNvPr id="30" name="">
             <a:extLst xmlns:a="http://schemas.openxmlformats.org/drawingml/2006/main">
               <a:ext uri="{FF2B5EF4-FFF2-40B4-BE49-F238E27FC236}">
-                <a16:creationId xmlns:a16="http://schemas.microsoft.com/office/drawing/2014/main" id="{AF2B595E-B008-49AC-97E7-DAB8999C7093}"/>
+                <a16:creationId xmlns:a16="http://schemas.microsoft.com/office/drawing/2014/main" id="{DFD0E2C6-6015-420C-A32E-E1ED3B7E1E17}"/>
               </a:ext>
             </a:extLst>
           </p:cNvPr>
@@ -13836,7 +13836,7 @@
           <p:cNvPr id="31" name="">
             <a:extLst xmlns:a="http://schemas.openxmlformats.org/drawingml/2006/main">
               <a:ext uri="{FF2B5EF4-FFF2-40B4-BE49-F238E27FC236}">
-                <a16:creationId xmlns:a16="http://schemas.microsoft.com/office/drawing/2014/main" id="{ACC79864-BC05-4D35-8DCA-92BE42C3EE4A}"/>
+                <a16:creationId xmlns:a16="http://schemas.microsoft.com/office/drawing/2014/main" id="{2F2292BC-3207-4E66-825B-AD88A435CE83}"/>
               </a:ext>
             </a:extLst>
           </p:cNvPr>
@@ -13867,7 +13867,7 @@
           <p:cNvPr id="32" name="">
             <a:extLst xmlns:a="http://schemas.openxmlformats.org/drawingml/2006/main">
               <a:ext uri="{FF2B5EF4-FFF2-40B4-BE49-F238E27FC236}">
-                <a16:creationId xmlns:a16="http://schemas.microsoft.com/office/drawing/2014/main" id="{E3EF302C-E02A-44F9-8F39-9E9D26289B1A}"/>
+                <a16:creationId xmlns:a16="http://schemas.microsoft.com/office/drawing/2014/main" id="{5F7FA7C7-32CD-44A4-8503-85C255716726}"/>
               </a:ext>
             </a:extLst>
           </p:cNvPr>
@@ -13919,7 +13919,7 @@
           <p:cNvPr id="33" name="">
             <a:extLst xmlns:a="http://schemas.openxmlformats.org/drawingml/2006/main">
               <a:ext uri="{FF2B5EF4-FFF2-40B4-BE49-F238E27FC236}">
-                <a16:creationId xmlns:a16="http://schemas.microsoft.com/office/drawing/2014/main" id="{66ED967D-A58F-4D00-B1A0-FB9296B2F14B}"/>
+                <a16:creationId xmlns:a16="http://schemas.microsoft.com/office/drawing/2014/main" id="{1744754F-811D-42C2-880E-7E4911704F9A}"/>
               </a:ext>
             </a:extLst>
           </p:cNvPr>
@@ -13971,7 +13971,7 @@
           <p:cNvPr id="34" name="">
             <a:extLst xmlns:a="http://schemas.openxmlformats.org/drawingml/2006/main">
               <a:ext uri="{FF2B5EF4-FFF2-40B4-BE49-F238E27FC236}">
-                <a16:creationId xmlns:a16="http://schemas.microsoft.com/office/drawing/2014/main" id="{073CDFFB-C84B-4F6A-84F5-6BB01878008C}"/>
+                <a16:creationId xmlns:a16="http://schemas.microsoft.com/office/drawing/2014/main" id="{7FF964EF-9F28-4F69-9895-E84FE7E00E61}"/>
               </a:ext>
             </a:extLst>
           </p:cNvPr>
@@ -14023,7 +14023,7 @@
           <p:cNvPr id="35" name="">
             <a:extLst xmlns:a="http://schemas.openxmlformats.org/drawingml/2006/main">
               <a:ext uri="{FF2B5EF4-FFF2-40B4-BE49-F238E27FC236}">
-                <a16:creationId xmlns:a16="http://schemas.microsoft.com/office/drawing/2014/main" id="{BB818E7C-1EDF-422E-8A98-EBBCA61F9224}"/>
+                <a16:creationId xmlns:a16="http://schemas.microsoft.com/office/drawing/2014/main" id="{2E78D811-B24C-4CB9-A30A-577A72B1BCF3}"/>
               </a:ext>
             </a:extLst>
           </p:cNvPr>
@@ -14075,7 +14075,7 @@
           <p:cNvPr id="36" name="">
             <a:extLst xmlns:a="http://schemas.openxmlformats.org/drawingml/2006/main">
               <a:ext uri="{FF2B5EF4-FFF2-40B4-BE49-F238E27FC236}">
-                <a16:creationId xmlns:a16="http://schemas.microsoft.com/office/drawing/2014/main" id="{A63F0A84-83AF-4C08-9051-566A50C83A32}"/>
+                <a16:creationId xmlns:a16="http://schemas.microsoft.com/office/drawing/2014/main" id="{499352CA-BF22-477F-B358-C5B189B96CFB}"/>
               </a:ext>
             </a:extLst>
           </p:cNvPr>
@@ -14127,7 +14127,7 @@
           <p:cNvPr id="37" name="">
             <a:extLst xmlns:a="http://schemas.openxmlformats.org/drawingml/2006/main">
               <a:ext uri="{FF2B5EF4-FFF2-40B4-BE49-F238E27FC236}">
-                <a16:creationId xmlns:a16="http://schemas.microsoft.com/office/drawing/2014/main" id="{1E42B01A-93C5-4DDC-A53E-835EFC960BC2}"/>
+                <a16:creationId xmlns:a16="http://schemas.microsoft.com/office/drawing/2014/main" id="{DB26665B-D34A-410A-B33A-FC0EE3F665FA}"/>
               </a:ext>
             </a:extLst>
           </p:cNvPr>
@@ -14158,7 +14158,7 @@
           <p:cNvPr id="38" name="">
             <a:extLst xmlns:a="http://schemas.openxmlformats.org/drawingml/2006/main">
               <a:ext uri="{FF2B5EF4-FFF2-40B4-BE49-F238E27FC236}">
-                <a16:creationId xmlns:a16="http://schemas.microsoft.com/office/drawing/2014/main" id="{16B8E5B2-59E7-4754-84D2-08D5A56B4122}"/>
+                <a16:creationId xmlns:a16="http://schemas.microsoft.com/office/drawing/2014/main" id="{208B37F5-37BB-47ED-A856-AA8FA90373CC}"/>
               </a:ext>
             </a:extLst>
           </p:cNvPr>
@@ -14189,7 +14189,7 @@
           <p:cNvPr id="39" name="">
             <a:extLst xmlns:a="http://schemas.openxmlformats.org/drawingml/2006/main">
               <a:ext uri="{FF2B5EF4-FFF2-40B4-BE49-F238E27FC236}">
-                <a16:creationId xmlns:a16="http://schemas.microsoft.com/office/drawing/2014/main" id="{3F375930-33E9-4F56-9675-DA617A4E453E}"/>
+                <a16:creationId xmlns:a16="http://schemas.microsoft.com/office/drawing/2014/main" id="{85666236-0A9F-461A-B71B-183D50D55950}"/>
               </a:ext>
             </a:extLst>
           </p:cNvPr>
@@ -14241,7 +14241,7 @@
           <p:cNvPr id="40" name="">
             <a:extLst xmlns:a="http://schemas.openxmlformats.org/drawingml/2006/main">
               <a:ext uri="{FF2B5EF4-FFF2-40B4-BE49-F238E27FC236}">
-                <a16:creationId xmlns:a16="http://schemas.microsoft.com/office/drawing/2014/main" id="{345209AC-F4B2-44DD-A22F-1A28770843F8}"/>
+                <a16:creationId xmlns:a16="http://schemas.microsoft.com/office/drawing/2014/main" id="{9C6E1073-5104-47C3-866F-839504C2F52F}"/>
               </a:ext>
             </a:extLst>
           </p:cNvPr>
@@ -14293,7 +14293,7 @@
           <p:cNvPr id="41" name="">
             <a:extLst xmlns:a="http://schemas.openxmlformats.org/drawingml/2006/main">
               <a:ext uri="{FF2B5EF4-FFF2-40B4-BE49-F238E27FC236}">
-                <a16:creationId xmlns:a16="http://schemas.microsoft.com/office/drawing/2014/main" id="{463265EA-3572-4ADE-B21B-7C0F61F9FD98}"/>
+                <a16:creationId xmlns:a16="http://schemas.microsoft.com/office/drawing/2014/main" id="{657A6047-3253-4EAF-9F9D-BDFBBF39DF7E}"/>
               </a:ext>
             </a:extLst>
           </p:cNvPr>
@@ -14345,7 +14345,7 @@
           <p:cNvPr id="42" name="">
             <a:extLst xmlns:a="http://schemas.openxmlformats.org/drawingml/2006/main">
               <a:ext uri="{FF2B5EF4-FFF2-40B4-BE49-F238E27FC236}">
-                <a16:creationId xmlns:a16="http://schemas.microsoft.com/office/drawing/2014/main" id="{462B5F52-7C62-487B-9183-04989D28AA97}"/>
+                <a16:creationId xmlns:a16="http://schemas.microsoft.com/office/drawing/2014/main" id="{A3BBCE1E-52B4-4CCC-980D-1C5FFF070CB5}"/>
               </a:ext>
             </a:extLst>
           </p:cNvPr>
@@ -14397,7 +14397,7 @@
           <p:cNvPr id="43" name="">
             <a:extLst xmlns:a="http://schemas.openxmlformats.org/drawingml/2006/main">
               <a:ext uri="{FF2B5EF4-FFF2-40B4-BE49-F238E27FC236}">
-                <a16:creationId xmlns:a16="http://schemas.microsoft.com/office/drawing/2014/main" id="{70B798DA-DEAD-4317-B5C0-FA9EBF647198}"/>
+                <a16:creationId xmlns:a16="http://schemas.microsoft.com/office/drawing/2014/main" id="{A0C66E41-846C-43EC-970A-571A12D77A2C}"/>
               </a:ext>
             </a:extLst>
           </p:cNvPr>
@@ -14449,7 +14449,7 @@
           <p:cNvPr id="44" name="">
             <a:extLst xmlns:a="http://schemas.openxmlformats.org/drawingml/2006/main">
               <a:ext uri="{FF2B5EF4-FFF2-40B4-BE49-F238E27FC236}">
-                <a16:creationId xmlns:a16="http://schemas.microsoft.com/office/drawing/2014/main" id="{91BF9044-4B61-4DCC-8380-D58B14433CF8}"/>
+                <a16:creationId xmlns:a16="http://schemas.microsoft.com/office/drawing/2014/main" id="{FE227274-C5EF-4BE9-AE15-C90C47009643}"/>
               </a:ext>
             </a:extLst>
           </p:cNvPr>
@@ -14480,7 +14480,7 @@
           <p:cNvPr id="45" name="">
             <a:extLst xmlns:a="http://schemas.openxmlformats.org/drawingml/2006/main">
               <a:ext uri="{FF2B5EF4-FFF2-40B4-BE49-F238E27FC236}">
-                <a16:creationId xmlns:a16="http://schemas.microsoft.com/office/drawing/2014/main" id="{300B6443-2ACA-44FB-8307-5F8C8279F292}"/>
+                <a16:creationId xmlns:a16="http://schemas.microsoft.com/office/drawing/2014/main" id="{5E124438-DF96-4DC4-B715-32B083DFD36E}"/>
               </a:ext>
             </a:extLst>
           </p:cNvPr>
@@ -14532,7 +14532,7 @@
           <p:cNvPr id="46" name="">
             <a:extLst xmlns:a="http://schemas.openxmlformats.org/drawingml/2006/main">
               <a:ext uri="{FF2B5EF4-FFF2-40B4-BE49-F238E27FC236}">
-                <a16:creationId xmlns:a16="http://schemas.microsoft.com/office/drawing/2014/main" id="{165E3341-552E-41F7-B8C9-1DD0D5E7C0EB}"/>
+                <a16:creationId xmlns:a16="http://schemas.microsoft.com/office/drawing/2014/main" id="{09972373-7619-4837-906F-11F4E97ACFF1}"/>
               </a:ext>
             </a:extLst>
           </p:cNvPr>
@@ -14584,7 +14584,7 @@
           <p:cNvPr id="47" name="">
             <a:extLst xmlns:a="http://schemas.openxmlformats.org/drawingml/2006/main">
               <a:ext uri="{FF2B5EF4-FFF2-40B4-BE49-F238E27FC236}">
-                <a16:creationId xmlns:a16="http://schemas.microsoft.com/office/drawing/2014/main" id="{DD94C93A-A577-42EF-8C5A-FF140D85DA75}"/>
+                <a16:creationId xmlns:a16="http://schemas.microsoft.com/office/drawing/2014/main" id="{A9ADB714-280A-4E9B-8F0A-AE48484324DE}"/>
               </a:ext>
             </a:extLst>
           </p:cNvPr>
@@ -14636,7 +14636,7 @@
           <p:cNvPr id="48" name="">
             <a:extLst xmlns:a="http://schemas.openxmlformats.org/drawingml/2006/main">
               <a:ext uri="{FF2B5EF4-FFF2-40B4-BE49-F238E27FC236}">
-                <a16:creationId xmlns:a16="http://schemas.microsoft.com/office/drawing/2014/main" id="{ED575F08-2C73-4FB1-AA9E-8B69B1146DD5}"/>
+                <a16:creationId xmlns:a16="http://schemas.microsoft.com/office/drawing/2014/main" id="{BFEABC78-92BC-420C-8BAE-78F667F87353}"/>
               </a:ext>
             </a:extLst>
           </p:cNvPr>
@@ -14688,7 +14688,7 @@
           <p:cNvPr id="49" name="">
             <a:extLst xmlns:a="http://schemas.openxmlformats.org/drawingml/2006/main">
               <a:ext uri="{FF2B5EF4-FFF2-40B4-BE49-F238E27FC236}">
-                <a16:creationId xmlns:a16="http://schemas.microsoft.com/office/drawing/2014/main" id="{DE1466AF-66E5-4249-BFF7-EFCB6C7BD5D6}"/>
+                <a16:creationId xmlns:a16="http://schemas.microsoft.com/office/drawing/2014/main" id="{F24136C0-29F3-4E0A-A34A-0614FC129D5E}"/>
               </a:ext>
             </a:extLst>
           </p:cNvPr>
@@ -14740,7 +14740,7 @@
           <p:cNvPr id="50" name="">
             <a:extLst xmlns:a="http://schemas.openxmlformats.org/drawingml/2006/main">
               <a:ext uri="{FF2B5EF4-FFF2-40B4-BE49-F238E27FC236}">
-                <a16:creationId xmlns:a16="http://schemas.microsoft.com/office/drawing/2014/main" id="{40FCD9C0-6DEA-4EC0-8BF0-DDEF8EAA928D}"/>
+                <a16:creationId xmlns:a16="http://schemas.microsoft.com/office/drawing/2014/main" id="{06DB1681-3031-449D-A474-830F87EF3467}"/>
               </a:ext>
             </a:extLst>
           </p:cNvPr>
@@ -14771,7 +14771,7 @@
           <p:cNvPr id="51" name="">
             <a:extLst xmlns:a="http://schemas.openxmlformats.org/drawingml/2006/main">
               <a:ext uri="{FF2B5EF4-FFF2-40B4-BE49-F238E27FC236}">
-                <a16:creationId xmlns:a16="http://schemas.microsoft.com/office/drawing/2014/main" id="{33773F83-5DA8-48BE-A96B-3C75672B69B3}"/>
+                <a16:creationId xmlns:a16="http://schemas.microsoft.com/office/drawing/2014/main" id="{A5F4E52F-D1AE-47C0-9F46-0A08EF3C615B}"/>
               </a:ext>
             </a:extLst>
           </p:cNvPr>
@@ -14802,7 +14802,7 @@
           <p:cNvPr id="52" name="">
             <a:extLst xmlns:a="http://schemas.openxmlformats.org/drawingml/2006/main">
               <a:ext uri="{FF2B5EF4-FFF2-40B4-BE49-F238E27FC236}">
-                <a16:creationId xmlns:a16="http://schemas.microsoft.com/office/drawing/2014/main" id="{7F82A16B-EE73-4DAD-9866-81A543848389}"/>
+                <a16:creationId xmlns:a16="http://schemas.microsoft.com/office/drawing/2014/main" id="{3625662D-0BC9-4E86-8FD2-913F6F0AA606}"/>
               </a:ext>
             </a:extLst>
           </p:cNvPr>
@@ -14854,7 +14854,7 @@
           <p:cNvPr id="53" name="">
             <a:extLst xmlns:a="http://schemas.openxmlformats.org/drawingml/2006/main">
               <a:ext uri="{FF2B5EF4-FFF2-40B4-BE49-F238E27FC236}">
-                <a16:creationId xmlns:a16="http://schemas.microsoft.com/office/drawing/2014/main" id="{286BC786-FB6A-411A-BFC3-0145E39DD617}"/>
+                <a16:creationId xmlns:a16="http://schemas.microsoft.com/office/drawing/2014/main" id="{C269A48A-E465-4F5A-B6BC-0B7AD3946511}"/>
               </a:ext>
             </a:extLst>
           </p:cNvPr>
@@ -14906,7 +14906,7 @@
           <p:cNvPr id="54" name="">
             <a:extLst xmlns:a="http://schemas.openxmlformats.org/drawingml/2006/main">
               <a:ext uri="{FF2B5EF4-FFF2-40B4-BE49-F238E27FC236}">
-                <a16:creationId xmlns:a16="http://schemas.microsoft.com/office/drawing/2014/main" id="{9144E24A-E01D-4D52-85ED-A83A5D71E6FD}"/>
+                <a16:creationId xmlns:a16="http://schemas.microsoft.com/office/drawing/2014/main" id="{F5CDF33B-CD58-4162-A936-AC3371F5A5BF}"/>
               </a:ext>
             </a:extLst>
           </p:cNvPr>
@@ -14958,7 +14958,7 @@
           <p:cNvPr id="55" name="">
             <a:extLst xmlns:a="http://schemas.openxmlformats.org/drawingml/2006/main">
               <a:ext uri="{FF2B5EF4-FFF2-40B4-BE49-F238E27FC236}">
-                <a16:creationId xmlns:a16="http://schemas.microsoft.com/office/drawing/2014/main" id="{3FB602BE-36E6-49D5-A0CB-EAAEF31EFBF9}"/>
+                <a16:creationId xmlns:a16="http://schemas.microsoft.com/office/drawing/2014/main" id="{F1DB0CF4-5264-40CB-B01F-9083A15B19F0}"/>
               </a:ext>
             </a:extLst>
           </p:cNvPr>
@@ -15010,7 +15010,7 @@
           <p:cNvPr id="56" name="">
             <a:extLst xmlns:a="http://schemas.openxmlformats.org/drawingml/2006/main">
               <a:ext uri="{FF2B5EF4-FFF2-40B4-BE49-F238E27FC236}">
-                <a16:creationId xmlns:a16="http://schemas.microsoft.com/office/drawing/2014/main" id="{C44C0E91-AF1E-4598-97B1-D250F32CA1B9}"/>
+                <a16:creationId xmlns:a16="http://schemas.microsoft.com/office/drawing/2014/main" id="{11AEC719-FDCD-42F6-AB4B-D04752C901EC}"/>
               </a:ext>
             </a:extLst>
           </p:cNvPr>
@@ -15062,7 +15062,7 @@
           <p:cNvPr id="57" name="">
             <a:extLst xmlns:a="http://schemas.openxmlformats.org/drawingml/2006/main">
               <a:ext uri="{FF2B5EF4-FFF2-40B4-BE49-F238E27FC236}">
-                <a16:creationId xmlns:a16="http://schemas.microsoft.com/office/drawing/2014/main" id="{4539E6C0-DD01-4B3F-9DB6-D6E3F35C6F63}"/>
+                <a16:creationId xmlns:a16="http://schemas.microsoft.com/office/drawing/2014/main" id="{5F2F15D1-32F6-4020-A671-3474C24F59C3}"/>
               </a:ext>
             </a:extLst>
           </p:cNvPr>
@@ -15093,7 +15093,7 @@
           <p:cNvPr id="58" name="">
             <a:extLst xmlns:a="http://schemas.openxmlformats.org/drawingml/2006/main">
               <a:ext uri="{FF2B5EF4-FFF2-40B4-BE49-F238E27FC236}">
-                <a16:creationId xmlns:a16="http://schemas.microsoft.com/office/drawing/2014/main" id="{8E010A72-4C8B-4154-8DC6-39FC8753343B}"/>
+                <a16:creationId xmlns:a16="http://schemas.microsoft.com/office/drawing/2014/main" id="{0E028BD5-D807-4FD2-9B2E-FF5FB597E406}"/>
               </a:ext>
             </a:extLst>
           </p:cNvPr>
@@ -15145,7 +15145,7 @@
           <p:cNvPr id="59" name="">
             <a:extLst xmlns:a="http://schemas.openxmlformats.org/drawingml/2006/main">
               <a:ext uri="{FF2B5EF4-FFF2-40B4-BE49-F238E27FC236}">
-                <a16:creationId xmlns:a16="http://schemas.microsoft.com/office/drawing/2014/main" id="{3BED5E9B-ABD1-433A-82F2-02CF2C8ECD65}"/>
+                <a16:creationId xmlns:a16="http://schemas.microsoft.com/office/drawing/2014/main" id="{64722C6D-A032-4499-9FA7-676DBE7100F4}"/>
               </a:ext>
             </a:extLst>
           </p:cNvPr>
@@ -15197,7 +15197,7 @@
           <p:cNvPr id="60" name="">
             <a:extLst xmlns:a="http://schemas.openxmlformats.org/drawingml/2006/main">
               <a:ext uri="{FF2B5EF4-FFF2-40B4-BE49-F238E27FC236}">
-                <a16:creationId xmlns:a16="http://schemas.microsoft.com/office/drawing/2014/main" id="{5895A626-97E3-416F-98C6-FCB49B6057BE}"/>
+                <a16:creationId xmlns:a16="http://schemas.microsoft.com/office/drawing/2014/main" id="{2DF91F43-EAEF-460E-90DC-94DB1465AEF7}"/>
               </a:ext>
             </a:extLst>
           </p:cNvPr>
@@ -15249,7 +15249,7 @@
           <p:cNvPr id="61" name="">
             <a:extLst xmlns:a="http://schemas.openxmlformats.org/drawingml/2006/main">
               <a:ext uri="{FF2B5EF4-FFF2-40B4-BE49-F238E27FC236}">
-                <a16:creationId xmlns:a16="http://schemas.microsoft.com/office/drawing/2014/main" id="{E76AB7F2-2309-4BCD-80CA-886574D459FE}"/>
+                <a16:creationId xmlns:a16="http://schemas.microsoft.com/office/drawing/2014/main" id="{AC20BCC7-4020-43C0-AF72-A467AB8CA0DA}"/>
               </a:ext>
             </a:extLst>
           </p:cNvPr>
@@ -15301,7 +15301,7 @@
           <p:cNvPr id="62" name="">
             <a:extLst xmlns:a="http://schemas.openxmlformats.org/drawingml/2006/main">
               <a:ext uri="{FF2B5EF4-FFF2-40B4-BE49-F238E27FC236}">
-                <a16:creationId xmlns:a16="http://schemas.microsoft.com/office/drawing/2014/main" id="{18EBAC66-48D9-4B04-B76D-7F14CBA589CC}"/>
+                <a16:creationId xmlns:a16="http://schemas.microsoft.com/office/drawing/2014/main" id="{FD22A612-D349-42BE-B63F-84B23B5A7A25}"/>
               </a:ext>
             </a:extLst>
           </p:cNvPr>
@@ -15353,7 +15353,7 @@
           <p:cNvPr id="63" name="">
             <a:extLst xmlns:a="http://schemas.openxmlformats.org/drawingml/2006/main">
               <a:ext uri="{FF2B5EF4-FFF2-40B4-BE49-F238E27FC236}">
-                <a16:creationId xmlns:a16="http://schemas.microsoft.com/office/drawing/2014/main" id="{EB9EF3C0-1A50-47C3-8C05-09C52156732A}"/>
+                <a16:creationId xmlns:a16="http://schemas.microsoft.com/office/drawing/2014/main" id="{E4092EA7-DD1F-4B6D-A8F0-644BA7DA6395}"/>
               </a:ext>
             </a:extLst>
           </p:cNvPr>
@@ -15384,7 +15384,7 @@
           <p:cNvPr id="64" name="">
             <a:extLst xmlns:a="http://schemas.openxmlformats.org/drawingml/2006/main">
               <a:ext uri="{FF2B5EF4-FFF2-40B4-BE49-F238E27FC236}">
-                <a16:creationId xmlns:a16="http://schemas.microsoft.com/office/drawing/2014/main" id="{B9DD2308-659D-4F4F-A3BF-9D3A465A98CA}"/>
+                <a16:creationId xmlns:a16="http://schemas.microsoft.com/office/drawing/2014/main" id="{12A63BE3-8792-43D8-B110-5754008F897C}"/>
               </a:ext>
             </a:extLst>
           </p:cNvPr>
@@ -15415,7 +15415,7 @@
           <p:cNvPr id="65" name="">
             <a:extLst xmlns:a="http://schemas.openxmlformats.org/drawingml/2006/main">
               <a:ext uri="{FF2B5EF4-FFF2-40B4-BE49-F238E27FC236}">
-                <a16:creationId xmlns:a16="http://schemas.microsoft.com/office/drawing/2014/main" id="{5217283D-F434-48D6-A5A6-4812D294BDCC}"/>
+                <a16:creationId xmlns:a16="http://schemas.microsoft.com/office/drawing/2014/main" id="{C3A9F29F-3751-458B-87C2-74AE22524B4E}"/>
               </a:ext>
             </a:extLst>
           </p:cNvPr>
@@ -15467,7 +15467,7 @@
           <p:cNvPr id="66" name="">
             <a:extLst xmlns:a="http://schemas.openxmlformats.org/drawingml/2006/main">
               <a:ext uri="{FF2B5EF4-FFF2-40B4-BE49-F238E27FC236}">
-                <a16:creationId xmlns:a16="http://schemas.microsoft.com/office/drawing/2014/main" id="{9EA0D49C-2AF1-43A8-A62A-426FE59840D3}"/>
+                <a16:creationId xmlns:a16="http://schemas.microsoft.com/office/drawing/2014/main" id="{4C2CACD4-64C5-4966-B6D8-C129477ACB6D}"/>
               </a:ext>
             </a:extLst>
           </p:cNvPr>
@@ -15519,7 +15519,7 @@
           <p:cNvPr id="67" name="">
             <a:extLst xmlns:a="http://schemas.openxmlformats.org/drawingml/2006/main">
               <a:ext uri="{FF2B5EF4-FFF2-40B4-BE49-F238E27FC236}">
-                <a16:creationId xmlns:a16="http://schemas.microsoft.com/office/drawing/2014/main" id="{796D52E7-DF42-421A-9D91-ACA4020DC0F9}"/>
+                <a16:creationId xmlns:a16="http://schemas.microsoft.com/office/drawing/2014/main" id="{F210EFDB-61CD-42F5-B773-859FB61A06AC}"/>
               </a:ext>
             </a:extLst>
           </p:cNvPr>
@@ -15571,7 +15571,7 @@
           <p:cNvPr id="68" name="">
             <a:extLst xmlns:a="http://schemas.openxmlformats.org/drawingml/2006/main">
               <a:ext uri="{FF2B5EF4-FFF2-40B4-BE49-F238E27FC236}">
-                <a16:creationId xmlns:a16="http://schemas.microsoft.com/office/drawing/2014/main" id="{7DA415CF-D5E7-4747-B25E-A7883BD5F1FF}"/>
+                <a16:creationId xmlns:a16="http://schemas.microsoft.com/office/drawing/2014/main" id="{E7501ECA-831D-434D-AE04-814318BD4D35}"/>
               </a:ext>
             </a:extLst>
           </p:cNvPr>
@@ -15623,7 +15623,7 @@
           <p:cNvPr id="69" name="">
             <a:extLst xmlns:a="http://schemas.openxmlformats.org/drawingml/2006/main">
               <a:ext uri="{FF2B5EF4-FFF2-40B4-BE49-F238E27FC236}">
-                <a16:creationId xmlns:a16="http://schemas.microsoft.com/office/drawing/2014/main" id="{86BC37A8-73C8-4FB5-A077-0F84626EAC2B}"/>
+                <a16:creationId xmlns:a16="http://schemas.microsoft.com/office/drawing/2014/main" id="{4551C908-3EF0-4A63-9FD8-8E93C1209C91}"/>
               </a:ext>
             </a:extLst>
           </p:cNvPr>
@@ -15675,7 +15675,7 @@
           <p:cNvPr id="70" name="">
             <a:extLst xmlns:a="http://schemas.openxmlformats.org/drawingml/2006/main">
               <a:ext uri="{FF2B5EF4-FFF2-40B4-BE49-F238E27FC236}">
-                <a16:creationId xmlns:a16="http://schemas.microsoft.com/office/drawing/2014/main" id="{F3088CC9-83D2-475A-A56C-5E1C24002675}"/>
+                <a16:creationId xmlns:a16="http://schemas.microsoft.com/office/drawing/2014/main" id="{8F4D84AB-3CF9-442A-90DD-E33293FB11D3}"/>
               </a:ext>
             </a:extLst>
           </p:cNvPr>
@@ -15706,7 +15706,7 @@
           <p:cNvPr id="71" name="">
             <a:extLst xmlns:a="http://schemas.openxmlformats.org/drawingml/2006/main">
               <a:ext uri="{FF2B5EF4-FFF2-40B4-BE49-F238E27FC236}">
-                <a16:creationId xmlns:a16="http://schemas.microsoft.com/office/drawing/2014/main" id="{231B2B91-D929-413D-A092-255F2F5AE843}"/>
+                <a16:creationId xmlns:a16="http://schemas.microsoft.com/office/drawing/2014/main" id="{E537BC7D-74DF-48AE-BF74-F8D534763DB6}"/>
               </a:ext>
             </a:extLst>
           </p:cNvPr>
@@ -15758,7 +15758,7 @@
           <p:cNvPr id="72" name="">
             <a:extLst xmlns:a="http://schemas.openxmlformats.org/drawingml/2006/main">
               <a:ext uri="{FF2B5EF4-FFF2-40B4-BE49-F238E27FC236}">
-                <a16:creationId xmlns:a16="http://schemas.microsoft.com/office/drawing/2014/main" id="{B51A603A-864D-475B-B0A2-C0C7E66FCE52}"/>
+                <a16:creationId xmlns:a16="http://schemas.microsoft.com/office/drawing/2014/main" id="{F664BAD6-67FF-4760-83BA-D5C5E78397E4}"/>
               </a:ext>
             </a:extLst>
           </p:cNvPr>
@@ -15810,7 +15810,7 @@
           <p:cNvPr id="73" name="">
             <a:extLst xmlns:a="http://schemas.openxmlformats.org/drawingml/2006/main">
               <a:ext uri="{FF2B5EF4-FFF2-40B4-BE49-F238E27FC236}">
-                <a16:creationId xmlns:a16="http://schemas.microsoft.com/office/drawing/2014/main" id="{64C53734-8DDF-4986-B3CA-3066CFABB924}"/>
+                <a16:creationId xmlns:a16="http://schemas.microsoft.com/office/drawing/2014/main" id="{B7C80544-B3F6-4BF4-B324-6614FF65AA2A}"/>
               </a:ext>
             </a:extLst>
           </p:cNvPr>
@@ -15862,7 +15862,7 @@
           <p:cNvPr id="74" name="">
             <a:extLst xmlns:a="http://schemas.openxmlformats.org/drawingml/2006/main">
               <a:ext uri="{FF2B5EF4-FFF2-40B4-BE49-F238E27FC236}">
-                <a16:creationId xmlns:a16="http://schemas.microsoft.com/office/drawing/2014/main" id="{A14E151E-73A9-4991-B273-8F597B0F4625}"/>
+                <a16:creationId xmlns:a16="http://schemas.microsoft.com/office/drawing/2014/main" id="{9EBFC86F-B916-4ED0-B05C-DDB9AACB097E}"/>
               </a:ext>
             </a:extLst>
           </p:cNvPr>
@@ -15914,7 +15914,7 @@
           <p:cNvPr id="75" name="">
             <a:extLst xmlns:a="http://schemas.openxmlformats.org/drawingml/2006/main">
               <a:ext uri="{FF2B5EF4-FFF2-40B4-BE49-F238E27FC236}">
-                <a16:creationId xmlns:a16="http://schemas.microsoft.com/office/drawing/2014/main" id="{6A5B087A-2EDD-4E2B-89D6-46ABFD8A297E}"/>
+                <a16:creationId xmlns:a16="http://schemas.microsoft.com/office/drawing/2014/main" id="{03A9D904-3F1C-43CA-A8DF-EB3D9FC359F8}"/>
               </a:ext>
             </a:extLst>
           </p:cNvPr>
@@ -15966,7 +15966,7 @@
           <p:cNvPr id="76" name="">
             <a:extLst xmlns:a="http://schemas.openxmlformats.org/drawingml/2006/main">
               <a:ext uri="{FF2B5EF4-FFF2-40B4-BE49-F238E27FC236}">
-                <a16:creationId xmlns:a16="http://schemas.microsoft.com/office/drawing/2014/main" id="{55854DBE-82CC-49F8-9BDA-C1CB57E373AD}"/>
+                <a16:creationId xmlns:a16="http://schemas.microsoft.com/office/drawing/2014/main" id="{2D54DB4E-103B-48DC-92C9-C38928256CD0}"/>
               </a:ext>
             </a:extLst>
           </p:cNvPr>
@@ -15997,7 +15997,7 @@
           <p:cNvPr id="77" name="">
             <a:extLst xmlns:a="http://schemas.openxmlformats.org/drawingml/2006/main">
               <a:ext uri="{FF2B5EF4-FFF2-40B4-BE49-F238E27FC236}">
-                <a16:creationId xmlns:a16="http://schemas.microsoft.com/office/drawing/2014/main" id="{3B8026B5-4037-4029-97C6-331A3DEFDD0F}"/>
+                <a16:creationId xmlns:a16="http://schemas.microsoft.com/office/drawing/2014/main" id="{C297FE61-8C01-4E0A-B740-0A6DC7E5D867}"/>
               </a:ext>
             </a:extLst>
           </p:cNvPr>
@@ -16028,7 +16028,7 @@
           <p:cNvPr id="78" name="">
             <a:extLst xmlns:a="http://schemas.openxmlformats.org/drawingml/2006/main">
               <a:ext uri="{FF2B5EF4-FFF2-40B4-BE49-F238E27FC236}">
-                <a16:creationId xmlns:a16="http://schemas.microsoft.com/office/drawing/2014/main" id="{16CCE1F2-936C-4F1A-A5C8-4EDDAECA8CB6}"/>
+                <a16:creationId xmlns:a16="http://schemas.microsoft.com/office/drawing/2014/main" id="{C6227BE3-C2BE-4790-8A04-D6A361DD7AA6}"/>
               </a:ext>
             </a:extLst>
           </p:cNvPr>
@@ -16080,7 +16080,7 @@
           <p:cNvPr id="79" name="">
             <a:extLst xmlns:a="http://schemas.openxmlformats.org/drawingml/2006/main">
               <a:ext uri="{FF2B5EF4-FFF2-40B4-BE49-F238E27FC236}">
-                <a16:creationId xmlns:a16="http://schemas.microsoft.com/office/drawing/2014/main" id="{59AD26CA-5701-47F0-89A0-653C19B9844C}"/>
+                <a16:creationId xmlns:a16="http://schemas.microsoft.com/office/drawing/2014/main" id="{441ADC43-A08D-41DB-A63A-3061C78CE49C}"/>
               </a:ext>
             </a:extLst>
           </p:cNvPr>
@@ -16132,7 +16132,7 @@
           <p:cNvPr id="80" name="">
             <a:extLst xmlns:a="http://schemas.openxmlformats.org/drawingml/2006/main">
               <a:ext uri="{FF2B5EF4-FFF2-40B4-BE49-F238E27FC236}">
-                <a16:creationId xmlns:a16="http://schemas.microsoft.com/office/drawing/2014/main" id="{32A2BCC5-2589-41D6-8EF2-924906E874A4}"/>
+                <a16:creationId xmlns:a16="http://schemas.microsoft.com/office/drawing/2014/main" id="{306AC9EA-CDCB-41F5-8092-9DF149CFED86}"/>
               </a:ext>
             </a:extLst>
           </p:cNvPr>
@@ -16184,7 +16184,7 @@
           <p:cNvPr id="81" name="">
             <a:extLst xmlns:a="http://schemas.openxmlformats.org/drawingml/2006/main">
               <a:ext uri="{FF2B5EF4-FFF2-40B4-BE49-F238E27FC236}">
-                <a16:creationId xmlns:a16="http://schemas.microsoft.com/office/drawing/2014/main" id="{F2643BCA-1E61-4D61-9155-436AE511EBA1}"/>
+                <a16:creationId xmlns:a16="http://schemas.microsoft.com/office/drawing/2014/main" id="{45865C38-D8EB-4199-9355-0C313B84A25E}"/>
               </a:ext>
             </a:extLst>
           </p:cNvPr>
@@ -16236,7 +16236,7 @@
           <p:cNvPr id="82" name="">
             <a:extLst xmlns:a="http://schemas.openxmlformats.org/drawingml/2006/main">
               <a:ext uri="{FF2B5EF4-FFF2-40B4-BE49-F238E27FC236}">
-                <a16:creationId xmlns:a16="http://schemas.microsoft.com/office/drawing/2014/main" id="{5F05B8BB-0560-474F-97C8-2C1B3F6ACA3D}"/>
+                <a16:creationId xmlns:a16="http://schemas.microsoft.com/office/drawing/2014/main" id="{BEDC3337-9BF1-4E60-A6FD-6C9D5FC1AB09}"/>
               </a:ext>
             </a:extLst>
           </p:cNvPr>
@@ -16288,7 +16288,7 @@
           <p:cNvPr id="83" name="">
             <a:extLst xmlns:a="http://schemas.openxmlformats.org/drawingml/2006/main">
               <a:ext uri="{FF2B5EF4-FFF2-40B4-BE49-F238E27FC236}">
-                <a16:creationId xmlns:a16="http://schemas.microsoft.com/office/drawing/2014/main" id="{315DE081-1E7B-4223-B1DC-462231C35CC8}"/>
+                <a16:creationId xmlns:a16="http://schemas.microsoft.com/office/drawing/2014/main" id="{5F08CDC3-7F3F-490F-9DEA-F2C3D1D46E03}"/>
               </a:ext>
             </a:extLst>
           </p:cNvPr>
@@ -16319,7 +16319,7 @@
           <p:cNvPr id="84" name="">
             <a:extLst xmlns:a="http://schemas.openxmlformats.org/drawingml/2006/main">
               <a:ext uri="{FF2B5EF4-FFF2-40B4-BE49-F238E27FC236}">
-                <a16:creationId xmlns:a16="http://schemas.microsoft.com/office/drawing/2014/main" id="{C2BCBC27-3D5F-4655-A7BC-5DAD9ED9F775}"/>
+                <a16:creationId xmlns:a16="http://schemas.microsoft.com/office/drawing/2014/main" id="{2047BEE8-ABEE-4CC9-A751-566822BF69AA}"/>
               </a:ext>
             </a:extLst>
           </p:cNvPr>
@@ -16371,7 +16371,7 @@
           <p:cNvPr id="85" name="">
             <a:extLst xmlns:a="http://schemas.openxmlformats.org/drawingml/2006/main">
               <a:ext uri="{FF2B5EF4-FFF2-40B4-BE49-F238E27FC236}">
-                <a16:creationId xmlns:a16="http://schemas.microsoft.com/office/drawing/2014/main" id="{43B2E5CD-98E9-4F9C-8E9A-EF03B393A836}"/>
+                <a16:creationId xmlns:a16="http://schemas.microsoft.com/office/drawing/2014/main" id="{05D719DF-14FF-4CB2-B0F5-A97F48C34D5C}"/>
               </a:ext>
             </a:extLst>
           </p:cNvPr>
@@ -16423,7 +16423,7 @@
           <p:cNvPr id="86" name="">
             <a:extLst xmlns:a="http://schemas.openxmlformats.org/drawingml/2006/main">
               <a:ext uri="{FF2B5EF4-FFF2-40B4-BE49-F238E27FC236}">
-                <a16:creationId xmlns:a16="http://schemas.microsoft.com/office/drawing/2014/main" id="{1225EE61-EA06-43D9-A88C-7EA19819F2F2}"/>
+                <a16:creationId xmlns:a16="http://schemas.microsoft.com/office/drawing/2014/main" id="{F1647E20-281C-4424-AFA7-ACFA0DE26C02}"/>
               </a:ext>
             </a:extLst>
           </p:cNvPr>
@@ -16475,7 +16475,7 @@
           <p:cNvPr id="87" name="">
             <a:extLst xmlns:a="http://schemas.openxmlformats.org/drawingml/2006/main">
               <a:ext uri="{FF2B5EF4-FFF2-40B4-BE49-F238E27FC236}">
-                <a16:creationId xmlns:a16="http://schemas.microsoft.com/office/drawing/2014/main" id="{4A05C219-1374-4D73-A623-8F5855D7DE16}"/>
+                <a16:creationId xmlns:a16="http://schemas.microsoft.com/office/drawing/2014/main" id="{78A30F09-1F7D-4237-BD47-8B7359E78F4D}"/>
               </a:ext>
             </a:extLst>
           </p:cNvPr>
@@ -16527,7 +16527,7 @@
           <p:cNvPr id="88" name="">
             <a:extLst xmlns:a="http://schemas.openxmlformats.org/drawingml/2006/main">
               <a:ext uri="{FF2B5EF4-FFF2-40B4-BE49-F238E27FC236}">
-                <a16:creationId xmlns:a16="http://schemas.microsoft.com/office/drawing/2014/main" id="{4C2794F6-5C39-42DD-AFAF-6D7E6D968EBA}"/>
+                <a16:creationId xmlns:a16="http://schemas.microsoft.com/office/drawing/2014/main" id="{E09BDD22-702B-4C0A-B72F-11702259373C}"/>
               </a:ext>
             </a:extLst>
           </p:cNvPr>
@@ -16579,7 +16579,7 @@
           <p:cNvPr id="89" name="">
             <a:extLst xmlns:a="http://schemas.openxmlformats.org/drawingml/2006/main">
               <a:ext uri="{FF2B5EF4-FFF2-40B4-BE49-F238E27FC236}">
-                <a16:creationId xmlns:a16="http://schemas.microsoft.com/office/drawing/2014/main" id="{EBE1C1B3-EA34-4DCE-8143-27A3EA5925BE}"/>
+                <a16:creationId xmlns:a16="http://schemas.microsoft.com/office/drawing/2014/main" id="{BCFB0478-AADF-41E6-AC35-C95571A46D54}"/>
               </a:ext>
             </a:extLst>
           </p:cNvPr>
@@ -16610,7 +16610,7 @@
           <p:cNvPr id="90" name="">
             <a:extLst xmlns:a="http://schemas.openxmlformats.org/drawingml/2006/main">
               <a:ext uri="{FF2B5EF4-FFF2-40B4-BE49-F238E27FC236}">
-                <a16:creationId xmlns:a16="http://schemas.microsoft.com/office/drawing/2014/main" id="{48766A56-2DAB-4E77-B337-1E8E1368C379}"/>
+                <a16:creationId xmlns:a16="http://schemas.microsoft.com/office/drawing/2014/main" id="{0BB1EC5E-B723-467B-8E52-C0DA0B98ECBF}"/>
               </a:ext>
             </a:extLst>
           </p:cNvPr>
@@ -16641,7 +16641,7 @@
           <p:cNvPr id="91" name="">
             <a:extLst xmlns:a="http://schemas.openxmlformats.org/drawingml/2006/main">
               <a:ext uri="{FF2B5EF4-FFF2-40B4-BE49-F238E27FC236}">
-                <a16:creationId xmlns:a16="http://schemas.microsoft.com/office/drawing/2014/main" id="{B591BBEB-47F9-4D16-8244-F35DB25213A9}"/>
+                <a16:creationId xmlns:a16="http://schemas.microsoft.com/office/drawing/2014/main" id="{589E65C1-F580-458A-ACDF-8AE8967D59D5}"/>
               </a:ext>
             </a:extLst>
           </p:cNvPr>
@@ -16693,7 +16693,7 @@
           <p:cNvPr id="92" name="">
             <a:extLst xmlns:a="http://schemas.openxmlformats.org/drawingml/2006/main">
               <a:ext uri="{FF2B5EF4-FFF2-40B4-BE49-F238E27FC236}">
-                <a16:creationId xmlns:a16="http://schemas.microsoft.com/office/drawing/2014/main" id="{D178E3DA-31A1-43D6-864F-19A018567040}"/>
+                <a16:creationId xmlns:a16="http://schemas.microsoft.com/office/drawing/2014/main" id="{77B263EB-F94B-488B-9287-248C722E03A8}"/>
               </a:ext>
             </a:extLst>
           </p:cNvPr>
@@ -16745,7 +16745,7 @@
           <p:cNvPr id="93" name="">
             <a:extLst xmlns:a="http://schemas.openxmlformats.org/drawingml/2006/main">
               <a:ext uri="{FF2B5EF4-FFF2-40B4-BE49-F238E27FC236}">
-                <a16:creationId xmlns:a16="http://schemas.microsoft.com/office/drawing/2014/main" id="{12327942-5EA3-4D32-AEB5-82EB958BDAF5}"/>
+                <a16:creationId xmlns:a16="http://schemas.microsoft.com/office/drawing/2014/main" id="{E9CF59A7-3FAE-47E2-AA54-D7B99382D7ED}"/>
               </a:ext>
             </a:extLst>
           </p:cNvPr>
@@ -16797,7 +16797,7 @@
           <p:cNvPr id="94" name="">
             <a:extLst xmlns:a="http://schemas.openxmlformats.org/drawingml/2006/main">
               <a:ext uri="{FF2B5EF4-FFF2-40B4-BE49-F238E27FC236}">
-                <a16:creationId xmlns:a16="http://schemas.microsoft.com/office/drawing/2014/main" id="{129DBAF2-4ADC-4956-96EA-C38E6191685F}"/>
+                <a16:creationId xmlns:a16="http://schemas.microsoft.com/office/drawing/2014/main" id="{D7675009-BA4C-4F70-A0B2-6AEBA4D628CB}"/>
               </a:ext>
             </a:extLst>
           </p:cNvPr>
@@ -16849,7 +16849,7 @@
           <p:cNvPr id="95" name="">
             <a:extLst xmlns:a="http://schemas.openxmlformats.org/drawingml/2006/main">
               <a:ext uri="{FF2B5EF4-FFF2-40B4-BE49-F238E27FC236}">
-                <a16:creationId xmlns:a16="http://schemas.microsoft.com/office/drawing/2014/main" id="{7245E2B7-DA50-49BC-9478-7DAEB9DEFA11}"/>
+                <a16:creationId xmlns:a16="http://schemas.microsoft.com/office/drawing/2014/main" id="{FBB0C301-02C3-4A24-AA49-CDC80AC0C795}"/>
               </a:ext>
             </a:extLst>
           </p:cNvPr>
@@ -16901,7 +16901,7 @@
           <p:cNvPr id="96" name="">
             <a:extLst xmlns:a="http://schemas.openxmlformats.org/drawingml/2006/main">
               <a:ext uri="{FF2B5EF4-FFF2-40B4-BE49-F238E27FC236}">
-                <a16:creationId xmlns:a16="http://schemas.microsoft.com/office/drawing/2014/main" id="{F3FBC214-6DB4-4209-A3A0-BE940AA2B499}"/>
+                <a16:creationId xmlns:a16="http://schemas.microsoft.com/office/drawing/2014/main" id="{7C1F8E7B-E6F3-4C8E-85C2-46BC0828A5F4}"/>
               </a:ext>
             </a:extLst>
           </p:cNvPr>
@@ -16932,7 +16932,7 @@
           <p:cNvPr id="97" name="">
             <a:extLst xmlns:a="http://schemas.openxmlformats.org/drawingml/2006/main">
               <a:ext uri="{FF2B5EF4-FFF2-40B4-BE49-F238E27FC236}">
-                <a16:creationId xmlns:a16="http://schemas.microsoft.com/office/drawing/2014/main" id="{04CB6EE8-7231-468E-B99C-3E259D9671C2}"/>
+                <a16:creationId xmlns:a16="http://schemas.microsoft.com/office/drawing/2014/main" id="{44B0C524-4EEE-41D2-9E9E-96CAC86735AD}"/>
               </a:ext>
             </a:extLst>
           </p:cNvPr>
@@ -16984,7 +16984,7 @@
           <p:cNvPr id="98" name="">
             <a:extLst xmlns:a="http://schemas.openxmlformats.org/drawingml/2006/main">
               <a:ext uri="{FF2B5EF4-FFF2-40B4-BE49-F238E27FC236}">
-                <a16:creationId xmlns:a16="http://schemas.microsoft.com/office/drawing/2014/main" id="{498D18CE-98C0-4487-A58C-16AEDD62631E}"/>
+                <a16:creationId xmlns:a16="http://schemas.microsoft.com/office/drawing/2014/main" id="{B43B4348-B1EE-4390-82E5-6E7D057C6DB1}"/>
               </a:ext>
             </a:extLst>
           </p:cNvPr>
@@ -17036,7 +17036,7 @@
           <p:cNvPr id="99" name="">
             <a:extLst xmlns:a="http://schemas.openxmlformats.org/drawingml/2006/main">
               <a:ext uri="{FF2B5EF4-FFF2-40B4-BE49-F238E27FC236}">
-                <a16:creationId xmlns:a16="http://schemas.microsoft.com/office/drawing/2014/main" id="{5EDAFEA4-179B-457F-90D9-565B6082CF80}"/>
+                <a16:creationId xmlns:a16="http://schemas.microsoft.com/office/drawing/2014/main" id="{A7E61674-D514-47D1-A437-8453438122FE}"/>
               </a:ext>
             </a:extLst>
           </p:cNvPr>
@@ -17088,7 +17088,7 @@
           <p:cNvPr id="100" name="">
             <a:extLst xmlns:a="http://schemas.openxmlformats.org/drawingml/2006/main">
               <a:ext uri="{FF2B5EF4-FFF2-40B4-BE49-F238E27FC236}">
-                <a16:creationId xmlns:a16="http://schemas.microsoft.com/office/drawing/2014/main" id="{BC516FED-6E99-4B81-9BA4-77912E1FC931}"/>
+                <a16:creationId xmlns:a16="http://schemas.microsoft.com/office/drawing/2014/main" id="{1A927FC8-AC50-493A-BD58-7B66236783D9}"/>
               </a:ext>
             </a:extLst>
           </p:cNvPr>
@@ -17140,7 +17140,7 @@
           <p:cNvPr id="101" name="">
             <a:extLst xmlns:a="http://schemas.openxmlformats.org/drawingml/2006/main">
               <a:ext uri="{FF2B5EF4-FFF2-40B4-BE49-F238E27FC236}">
-                <a16:creationId xmlns:a16="http://schemas.microsoft.com/office/drawing/2014/main" id="{3D4C71C9-0DE6-4AE6-9CCB-3C531DC6BE63}"/>
+                <a16:creationId xmlns:a16="http://schemas.microsoft.com/office/drawing/2014/main" id="{6B5515B6-1AC8-46FC-93BB-07FE7AC8A76C}"/>
               </a:ext>
             </a:extLst>
           </p:cNvPr>
@@ -17190,7 +17190,7 @@
     </p:spTree>
     <p:extLst>
       <p:ext uri="{BB962C8B-B14F-4D97-AF65-F5344CB8AC3E}">
-        <p14:creationId xmlns:p14="http://schemas.microsoft.com/office/powerpoint/2010/main" val="1761722608"/>
+        <p14:creationId xmlns:p14="http://schemas.microsoft.com/office/powerpoint/2010/main" val="1573270376"/>
       </p:ext>
     </p:extLst>
   </p:cSld>
@@ -17221,7 +17221,7 @@
           <p:cNvPr id="96" name="">
             <a:extLst xmlns:a="http://schemas.openxmlformats.org/drawingml/2006/main">
               <a:ext uri="{FF2B5EF4-FFF2-40B4-BE49-F238E27FC236}">
-                <a16:creationId xmlns:a16="http://schemas.microsoft.com/office/drawing/2014/main" id="{F0F6B607-7281-4606-A2FF-BEA47B797983}"/>
+                <a16:creationId xmlns:a16="http://schemas.microsoft.com/office/drawing/2014/main" id="{DA758ED7-40AE-460F-887C-D141E1625B35}"/>
               </a:ext>
             </a:extLst>
           </p:cNvPr>
@@ -17254,7 +17254,7 @@
           <p:cNvPr id="2" name="">
             <a:extLst xmlns:a="http://schemas.openxmlformats.org/drawingml/2006/main">
               <a:ext uri="{FF2B5EF4-FFF2-40B4-BE49-F238E27FC236}">
-                <a16:creationId xmlns:a16="http://schemas.microsoft.com/office/drawing/2014/main" id="{ACB33990-5793-481D-9666-0F7B8D2EE53C}"/>
+                <a16:creationId xmlns:a16="http://schemas.microsoft.com/office/drawing/2014/main" id="{4556CE46-2B07-48E2-AB48-13E206483FAC}"/>
               </a:ext>
             </a:extLst>
           </p:cNvPr>
@@ -17285,7 +17285,7 @@
           <p:cNvPr id="3" name="">
             <a:extLst xmlns:a="http://schemas.openxmlformats.org/drawingml/2006/main">
               <a:ext uri="{FF2B5EF4-FFF2-40B4-BE49-F238E27FC236}">
-                <a16:creationId xmlns:a16="http://schemas.microsoft.com/office/drawing/2014/main" id="{6FA0D00A-5BCC-4A6F-8CE7-94776E27B2CF}"/>
+                <a16:creationId xmlns:a16="http://schemas.microsoft.com/office/drawing/2014/main" id="{6F3647F8-3312-4426-9306-4D3E0BB5F2F0}"/>
               </a:ext>
             </a:extLst>
           </p:cNvPr>
@@ -17337,7 +17337,7 @@
           <p:cNvPr id="4" name="">
             <a:extLst xmlns:a="http://schemas.openxmlformats.org/drawingml/2006/main">
               <a:ext uri="{FF2B5EF4-FFF2-40B4-BE49-F238E27FC236}">
-                <a16:creationId xmlns:a16="http://schemas.microsoft.com/office/drawing/2014/main" id="{FD8A8ED0-91E0-44FC-B64A-92F5256AD610}"/>
+                <a16:creationId xmlns:a16="http://schemas.microsoft.com/office/drawing/2014/main" id="{B76C02E0-FA96-41D8-92BC-CA9C4CDADDDB}"/>
               </a:ext>
             </a:extLst>
           </p:cNvPr>
@@ -17389,7 +17389,7 @@
           <p:cNvPr id="5" name="">
             <a:extLst xmlns:a="http://schemas.openxmlformats.org/drawingml/2006/main">
               <a:ext uri="{FF2B5EF4-FFF2-40B4-BE49-F238E27FC236}">
-                <a16:creationId xmlns:a16="http://schemas.microsoft.com/office/drawing/2014/main" id="{6C594131-2D5F-4908-A2BA-C37552ED6204}"/>
+                <a16:creationId xmlns:a16="http://schemas.microsoft.com/office/drawing/2014/main" id="{8C57F358-0AC8-46DE-92A4-4B58C32D14CD}"/>
               </a:ext>
             </a:extLst>
           </p:cNvPr>
@@ -17424,7 +17424,7 @@
           <p:nvPr/>
         </p:nvPicPr>
         <p:blipFill>
-          <a:blip xmlns:r="http://schemas.openxmlformats.org/officeDocument/2006/relationships" xmlns:a="http://schemas.openxmlformats.org/drawingml/2006/main" r:embed="R57ce1533856844ec"/>
+          <a:blip xmlns:r="http://schemas.openxmlformats.org/officeDocument/2006/relationships" xmlns:a="http://schemas.openxmlformats.org/drawingml/2006/main" r:embed="Rf9e79bcb71a24104"/>
           <a:stretch xmlns:a="http://schemas.openxmlformats.org/drawingml/2006/main"/>
         </p:blipFill>
         <p:spPr>
@@ -17442,7 +17442,7 @@
           <p:cNvPr id="7" name="">
             <a:extLst xmlns:a="http://schemas.openxmlformats.org/drawingml/2006/main">
               <a:ext uri="{FF2B5EF4-FFF2-40B4-BE49-F238E27FC236}">
-                <a16:creationId xmlns:a16="http://schemas.microsoft.com/office/drawing/2014/main" id="{07D7AA4D-9E81-4758-A518-C8DF5C9C27AA}"/>
+                <a16:creationId xmlns:a16="http://schemas.microsoft.com/office/drawing/2014/main" id="{956232D4-12A5-473A-AF52-DCF4978F57AE}"/>
               </a:ext>
             </a:extLst>
           </p:cNvPr>
@@ -17494,7 +17494,7 @@
           <p:cNvPr id="8" name="">
             <a:extLst xmlns:a="http://schemas.openxmlformats.org/drawingml/2006/main">
               <a:ext uri="{FF2B5EF4-FFF2-40B4-BE49-F238E27FC236}">
-                <a16:creationId xmlns:a16="http://schemas.microsoft.com/office/drawing/2014/main" id="{18DF2E78-6755-424C-8515-60E4E217E8BC}"/>
+                <a16:creationId xmlns:a16="http://schemas.microsoft.com/office/drawing/2014/main" id="{29D2DB3C-5867-423B-AA9D-C5AE1B00AD4D}"/>
               </a:ext>
             </a:extLst>
           </p:cNvPr>
@@ -17546,7 +17546,7 @@
           <p:cNvPr id="9" name="">
             <a:extLst xmlns:a="http://schemas.openxmlformats.org/drawingml/2006/main">
               <a:ext uri="{FF2B5EF4-FFF2-40B4-BE49-F238E27FC236}">
-                <a16:creationId xmlns:a16="http://schemas.microsoft.com/office/drawing/2014/main" id="{9B5D4033-A718-4C16-85EA-15E9F0E2D491}"/>
+                <a16:creationId xmlns:a16="http://schemas.microsoft.com/office/drawing/2014/main" id="{A8B1CC82-F480-4B14-B03D-3ECEE7F6AB37}"/>
               </a:ext>
             </a:extLst>
           </p:cNvPr>
@@ -17598,7 +17598,7 @@
           <p:cNvPr id="10" name="">
             <a:extLst xmlns:a="http://schemas.openxmlformats.org/drawingml/2006/main">
               <a:ext uri="{FF2B5EF4-FFF2-40B4-BE49-F238E27FC236}">
-                <a16:creationId xmlns:a16="http://schemas.microsoft.com/office/drawing/2014/main" id="{F9B8DC5C-4C34-4AE7-BC7D-86B3615FC70D}"/>
+                <a16:creationId xmlns:a16="http://schemas.microsoft.com/office/drawing/2014/main" id="{8642D659-3F7B-4B1C-AE28-6097809FA2F9}"/>
               </a:ext>
             </a:extLst>
           </p:cNvPr>
@@ -17650,7 +17650,7 @@
           <p:cNvPr id="11" name="">
             <a:extLst xmlns:a="http://schemas.openxmlformats.org/drawingml/2006/main">
               <a:ext uri="{FF2B5EF4-FFF2-40B4-BE49-F238E27FC236}">
-                <a16:creationId xmlns:a16="http://schemas.microsoft.com/office/drawing/2014/main" id="{3674C28A-336E-4FF9-9135-3474EAA059A2}"/>
+                <a16:creationId xmlns:a16="http://schemas.microsoft.com/office/drawing/2014/main" id="{3CCB1ADD-7520-4A5A-B18A-E0E61046EEC4}"/>
               </a:ext>
             </a:extLst>
           </p:cNvPr>
@@ -17681,7 +17681,7 @@
           <p:cNvPr id="12" name="">
             <a:extLst xmlns:a="http://schemas.openxmlformats.org/drawingml/2006/main">
               <a:ext uri="{FF2B5EF4-FFF2-40B4-BE49-F238E27FC236}">
-                <a16:creationId xmlns:a16="http://schemas.microsoft.com/office/drawing/2014/main" id="{4C03BCF6-C9EB-496F-944C-1DFB5BAB9408}"/>
+                <a16:creationId xmlns:a16="http://schemas.microsoft.com/office/drawing/2014/main" id="{03946D72-18BF-46F3-AD08-90C81B2579BC}"/>
               </a:ext>
             </a:extLst>
           </p:cNvPr>
@@ -17712,7 +17712,7 @@
           <p:cNvPr id="13" name="">
             <a:extLst xmlns:a="http://schemas.openxmlformats.org/drawingml/2006/main">
               <a:ext uri="{FF2B5EF4-FFF2-40B4-BE49-F238E27FC236}">
-                <a16:creationId xmlns:a16="http://schemas.microsoft.com/office/drawing/2014/main" id="{6C9A0B84-774F-4698-93A9-67DCE79B5A8E}"/>
+                <a16:creationId xmlns:a16="http://schemas.microsoft.com/office/drawing/2014/main" id="{2B084171-D338-4EE2-97D5-0538088A018B}"/>
               </a:ext>
             </a:extLst>
           </p:cNvPr>
@@ -17764,7 +17764,7 @@
           <p:cNvPr id="14" name="">
             <a:extLst xmlns:a="http://schemas.openxmlformats.org/drawingml/2006/main">
               <a:ext uri="{FF2B5EF4-FFF2-40B4-BE49-F238E27FC236}">
-                <a16:creationId xmlns:a16="http://schemas.microsoft.com/office/drawing/2014/main" id="{F70E1F2C-BA13-4420-BE08-CD816E4A2BC5}"/>
+                <a16:creationId xmlns:a16="http://schemas.microsoft.com/office/drawing/2014/main" id="{1266A9D8-A829-4D41-B79A-623E125D140A}"/>
               </a:ext>
             </a:extLst>
           </p:cNvPr>
@@ -17816,7 +17816,7 @@
           <p:cNvPr id="15" name="">
             <a:extLst xmlns:a="http://schemas.openxmlformats.org/drawingml/2006/main">
               <a:ext uri="{FF2B5EF4-FFF2-40B4-BE49-F238E27FC236}">
-                <a16:creationId xmlns:a16="http://schemas.microsoft.com/office/drawing/2014/main" id="{801E770A-CABF-45C9-B79F-46430F564E05}"/>
+                <a16:creationId xmlns:a16="http://schemas.microsoft.com/office/drawing/2014/main" id="{82195CC0-7A53-4618-A6DA-AE6A8424DDFB}"/>
               </a:ext>
             </a:extLst>
           </p:cNvPr>
@@ -17868,7 +17868,7 @@
           <p:cNvPr id="16" name="">
             <a:extLst xmlns:a="http://schemas.openxmlformats.org/drawingml/2006/main">
               <a:ext uri="{FF2B5EF4-FFF2-40B4-BE49-F238E27FC236}">
-                <a16:creationId xmlns:a16="http://schemas.microsoft.com/office/drawing/2014/main" id="{14014E51-EC14-405A-9868-997E91DCA955}"/>
+                <a16:creationId xmlns:a16="http://schemas.microsoft.com/office/drawing/2014/main" id="{F18E7824-3F5D-4940-96F4-B471DB0B29A0}"/>
               </a:ext>
             </a:extLst>
           </p:cNvPr>
@@ -17920,7 +17920,7 @@
           <p:cNvPr id="17" name="">
             <a:extLst xmlns:a="http://schemas.openxmlformats.org/drawingml/2006/main">
               <a:ext uri="{FF2B5EF4-FFF2-40B4-BE49-F238E27FC236}">
-                <a16:creationId xmlns:a16="http://schemas.microsoft.com/office/drawing/2014/main" id="{0B9769C8-9684-41CC-81FB-63C32E33AB44}"/>
+                <a16:creationId xmlns:a16="http://schemas.microsoft.com/office/drawing/2014/main" id="{9859429D-A63F-4A89-9E62-1945D443EC73}"/>
               </a:ext>
             </a:extLst>
           </p:cNvPr>
@@ -17972,7 +17972,7 @@
           <p:cNvPr id="18" name="">
             <a:extLst xmlns:a="http://schemas.openxmlformats.org/drawingml/2006/main">
               <a:ext uri="{FF2B5EF4-FFF2-40B4-BE49-F238E27FC236}">
-                <a16:creationId xmlns:a16="http://schemas.microsoft.com/office/drawing/2014/main" id="{91B70145-DE91-460B-8919-600079862B7E}"/>
+                <a16:creationId xmlns:a16="http://schemas.microsoft.com/office/drawing/2014/main" id="{508ED51F-6061-4E53-AD2E-2169EEB6AE40}"/>
               </a:ext>
             </a:extLst>
           </p:cNvPr>
@@ -18003,7 +18003,7 @@
           <p:cNvPr id="19" name="">
             <a:extLst xmlns:a="http://schemas.openxmlformats.org/drawingml/2006/main">
               <a:ext uri="{FF2B5EF4-FFF2-40B4-BE49-F238E27FC236}">
-                <a16:creationId xmlns:a16="http://schemas.microsoft.com/office/drawing/2014/main" id="{CD895D23-1FC2-4859-B182-285432E5E474}"/>
+                <a16:creationId xmlns:a16="http://schemas.microsoft.com/office/drawing/2014/main" id="{0E4C6D64-BA6B-4C7B-A16E-5AE3882F4CF1}"/>
               </a:ext>
             </a:extLst>
           </p:cNvPr>
@@ -18034,7 +18034,7 @@
           <p:cNvPr id="20" name="">
             <a:extLst xmlns:a="http://schemas.openxmlformats.org/drawingml/2006/main">
               <a:ext uri="{FF2B5EF4-FFF2-40B4-BE49-F238E27FC236}">
-                <a16:creationId xmlns:a16="http://schemas.microsoft.com/office/drawing/2014/main" id="{BD65999A-EA15-4DBD-B87A-2E449D7818F0}"/>
+                <a16:creationId xmlns:a16="http://schemas.microsoft.com/office/drawing/2014/main" id="{CE9BA1ED-BDEC-4588-9835-FE638A757001}"/>
               </a:ext>
             </a:extLst>
           </p:cNvPr>
@@ -18086,7 +18086,7 @@
           <p:cNvPr id="21" name="">
             <a:extLst xmlns:a="http://schemas.openxmlformats.org/drawingml/2006/main">
               <a:ext uri="{FF2B5EF4-FFF2-40B4-BE49-F238E27FC236}">
-                <a16:creationId xmlns:a16="http://schemas.microsoft.com/office/drawing/2014/main" id="{34DCE849-56B6-41D9-9E46-8C386AE2C0C2}"/>
+                <a16:creationId xmlns:a16="http://schemas.microsoft.com/office/drawing/2014/main" id="{6DA81897-5157-40F5-A7AE-2D618CBE8CFF}"/>
               </a:ext>
             </a:extLst>
           </p:cNvPr>
@@ -18138,7 +18138,7 @@
           <p:cNvPr id="22" name="">
             <a:extLst xmlns:a="http://schemas.openxmlformats.org/drawingml/2006/main">
               <a:ext uri="{FF2B5EF4-FFF2-40B4-BE49-F238E27FC236}">
-                <a16:creationId xmlns:a16="http://schemas.microsoft.com/office/drawing/2014/main" id="{87796C80-E1A4-470D-BB12-A0CC476936BA}"/>
+                <a16:creationId xmlns:a16="http://schemas.microsoft.com/office/drawing/2014/main" id="{FBF36768-BD64-42FA-A13D-DD8C2E61BEF6}"/>
               </a:ext>
             </a:extLst>
           </p:cNvPr>
@@ -18190,7 +18190,7 @@
           <p:cNvPr id="23" name="">
             <a:extLst xmlns:a="http://schemas.openxmlformats.org/drawingml/2006/main">
               <a:ext uri="{FF2B5EF4-FFF2-40B4-BE49-F238E27FC236}">
-                <a16:creationId xmlns:a16="http://schemas.microsoft.com/office/drawing/2014/main" id="{D6C352D4-9903-4EC8-948E-F6DAD7C8FAB8}"/>
+                <a16:creationId xmlns:a16="http://schemas.microsoft.com/office/drawing/2014/main" id="{2E6880D5-5D5F-4EE0-A11C-A108BCD9A040}"/>
               </a:ext>
             </a:extLst>
           </p:cNvPr>
@@ -18242,7 +18242,7 @@
           <p:cNvPr id="24" name="">
             <a:extLst xmlns:a="http://schemas.openxmlformats.org/drawingml/2006/main">
               <a:ext uri="{FF2B5EF4-FFF2-40B4-BE49-F238E27FC236}">
-                <a16:creationId xmlns:a16="http://schemas.microsoft.com/office/drawing/2014/main" id="{D3A0F306-4D42-4048-AAD9-2E9EB987AF6A}"/>
+                <a16:creationId xmlns:a16="http://schemas.microsoft.com/office/drawing/2014/main" id="{A22F725A-606F-4984-8FF3-2FDE6D06626E}"/>
               </a:ext>
             </a:extLst>
           </p:cNvPr>
@@ -18294,7 +18294,7 @@
           <p:cNvPr id="25" name="">
             <a:extLst xmlns:a="http://schemas.openxmlformats.org/drawingml/2006/main">
               <a:ext uri="{FF2B5EF4-FFF2-40B4-BE49-F238E27FC236}">
-                <a16:creationId xmlns:a16="http://schemas.microsoft.com/office/drawing/2014/main" id="{0AEDC00F-5A7B-4E9E-8A24-255F98C3468A}"/>
+                <a16:creationId xmlns:a16="http://schemas.microsoft.com/office/drawing/2014/main" id="{BF4215F3-36FF-46A5-AF03-7D4D68BBE7C5}"/>
               </a:ext>
             </a:extLst>
           </p:cNvPr>
@@ -18325,7 +18325,7 @@
           <p:cNvPr id="26" name="">
             <a:extLst xmlns:a="http://schemas.openxmlformats.org/drawingml/2006/main">
               <a:ext uri="{FF2B5EF4-FFF2-40B4-BE49-F238E27FC236}">
-                <a16:creationId xmlns:a16="http://schemas.microsoft.com/office/drawing/2014/main" id="{A79728D2-8987-4011-BBD4-1CBF0FA3F2FC}"/>
+                <a16:creationId xmlns:a16="http://schemas.microsoft.com/office/drawing/2014/main" id="{E4354762-6F52-4BC8-AEAE-C767937255CF}"/>
               </a:ext>
             </a:extLst>
           </p:cNvPr>
@@ -18377,7 +18377,7 @@
           <p:cNvPr id="27" name="">
             <a:extLst xmlns:a="http://schemas.openxmlformats.org/drawingml/2006/main">
               <a:ext uri="{FF2B5EF4-FFF2-40B4-BE49-F238E27FC236}">
-                <a16:creationId xmlns:a16="http://schemas.microsoft.com/office/drawing/2014/main" id="{381596B5-8B65-4B6B-8B06-846E4D8414EA}"/>
+                <a16:creationId xmlns:a16="http://schemas.microsoft.com/office/drawing/2014/main" id="{0613D4AB-1476-46DA-812E-5A7D63B4A57D}"/>
               </a:ext>
             </a:extLst>
           </p:cNvPr>
@@ -18429,7 +18429,7 @@
           <p:cNvPr id="28" name="">
             <a:extLst xmlns:a="http://schemas.openxmlformats.org/drawingml/2006/main">
               <a:ext uri="{FF2B5EF4-FFF2-40B4-BE49-F238E27FC236}">
-                <a16:creationId xmlns:a16="http://schemas.microsoft.com/office/drawing/2014/main" id="{2E434680-575D-405D-962D-D33F79B8BCF5}"/>
+                <a16:creationId xmlns:a16="http://schemas.microsoft.com/office/drawing/2014/main" id="{009ED156-782C-4FAD-ACE9-539B3C3798A3}"/>
               </a:ext>
             </a:extLst>
           </p:cNvPr>
@@ -18481,7 +18481,7 @@
           <p:cNvPr id="29" name="">
             <a:extLst xmlns:a="http://schemas.openxmlformats.org/drawingml/2006/main">
               <a:ext uri="{FF2B5EF4-FFF2-40B4-BE49-F238E27FC236}">
-                <a16:creationId xmlns:a16="http://schemas.microsoft.com/office/drawing/2014/main" id="{522435D3-260F-4814-8531-5F45E3FB9A88}"/>
+                <a16:creationId xmlns:a16="http://schemas.microsoft.com/office/drawing/2014/main" id="{07D2A623-5D08-4F2E-91C1-1E8AF6AF76F9}"/>
               </a:ext>
             </a:extLst>
           </p:cNvPr>
@@ -18533,7 +18533,7 @@
           <p:cNvPr id="30" name="">
             <a:extLst xmlns:a="http://schemas.openxmlformats.org/drawingml/2006/main">
               <a:ext uri="{FF2B5EF4-FFF2-40B4-BE49-F238E27FC236}">
-                <a16:creationId xmlns:a16="http://schemas.microsoft.com/office/drawing/2014/main" id="{24BD27D3-2224-428D-9464-FF0C480A63AE}"/>
+                <a16:creationId xmlns:a16="http://schemas.microsoft.com/office/drawing/2014/main" id="{7057C12D-BAAA-4355-8B2C-ADC83FF7517B}"/>
               </a:ext>
             </a:extLst>
           </p:cNvPr>
@@ -18585,7 +18585,7 @@
           <p:cNvPr id="31" name="">
             <a:extLst xmlns:a="http://schemas.openxmlformats.org/drawingml/2006/main">
               <a:ext uri="{FF2B5EF4-FFF2-40B4-BE49-F238E27FC236}">
-                <a16:creationId xmlns:a16="http://schemas.microsoft.com/office/drawing/2014/main" id="{42A39109-375D-4128-BE10-42FFCCED1F83}"/>
+                <a16:creationId xmlns:a16="http://schemas.microsoft.com/office/drawing/2014/main" id="{6F4DE323-21AB-4DF6-B34B-53EC627C92A7}"/>
               </a:ext>
             </a:extLst>
           </p:cNvPr>
@@ -18616,7 +18616,7 @@
           <p:cNvPr id="32" name="">
             <a:extLst xmlns:a="http://schemas.openxmlformats.org/drawingml/2006/main">
               <a:ext uri="{FF2B5EF4-FFF2-40B4-BE49-F238E27FC236}">
-                <a16:creationId xmlns:a16="http://schemas.microsoft.com/office/drawing/2014/main" id="{524D24B9-541F-4E22-BA87-3B0CF8E06E0B}"/>
+                <a16:creationId xmlns:a16="http://schemas.microsoft.com/office/drawing/2014/main" id="{882EB896-5AC7-4B80-93F9-8384C02DA272}"/>
               </a:ext>
             </a:extLst>
           </p:cNvPr>
@@ -18647,7 +18647,7 @@
           <p:cNvPr id="33" name="">
             <a:extLst xmlns:a="http://schemas.openxmlformats.org/drawingml/2006/main">
               <a:ext uri="{FF2B5EF4-FFF2-40B4-BE49-F238E27FC236}">
-                <a16:creationId xmlns:a16="http://schemas.microsoft.com/office/drawing/2014/main" id="{26838C55-EB96-4758-B942-81CA03BDCE9A}"/>
+                <a16:creationId xmlns:a16="http://schemas.microsoft.com/office/drawing/2014/main" id="{579E9D8D-C2BE-4ECA-8CE7-4B561B78D7A4}"/>
               </a:ext>
             </a:extLst>
           </p:cNvPr>
@@ -18699,7 +18699,7 @@
           <p:cNvPr id="34" name="">
             <a:extLst xmlns:a="http://schemas.openxmlformats.org/drawingml/2006/main">
               <a:ext uri="{FF2B5EF4-FFF2-40B4-BE49-F238E27FC236}">
-                <a16:creationId xmlns:a16="http://schemas.microsoft.com/office/drawing/2014/main" id="{50EDC6A0-442E-4918-8A47-7C9D42939FDA}"/>
+                <a16:creationId xmlns:a16="http://schemas.microsoft.com/office/drawing/2014/main" id="{4C3350F5-16B8-4776-8668-8C2EDDB3D5D9}"/>
               </a:ext>
             </a:extLst>
           </p:cNvPr>
@@ -18751,7 +18751,7 @@
           <p:cNvPr id="35" name="">
             <a:extLst xmlns:a="http://schemas.openxmlformats.org/drawingml/2006/main">
               <a:ext uri="{FF2B5EF4-FFF2-40B4-BE49-F238E27FC236}">
-                <a16:creationId xmlns:a16="http://schemas.microsoft.com/office/drawing/2014/main" id="{0C147BD3-EC25-4C52-A7CB-B4A3FC0413F1}"/>
+                <a16:creationId xmlns:a16="http://schemas.microsoft.com/office/drawing/2014/main" id="{3D207BAC-9BEF-4F6A-8D91-363AAEEBFB79}"/>
               </a:ext>
             </a:extLst>
           </p:cNvPr>
@@ -18803,7 +18803,7 @@
           <p:cNvPr id="36" name="">
             <a:extLst xmlns:a="http://schemas.openxmlformats.org/drawingml/2006/main">
               <a:ext uri="{FF2B5EF4-FFF2-40B4-BE49-F238E27FC236}">
-                <a16:creationId xmlns:a16="http://schemas.microsoft.com/office/drawing/2014/main" id="{AEF4DEBE-3F3A-4716-99D4-E079F1525BD5}"/>
+                <a16:creationId xmlns:a16="http://schemas.microsoft.com/office/drawing/2014/main" id="{3AD6A083-2911-42DD-ABA8-F58C3D953492}"/>
               </a:ext>
             </a:extLst>
           </p:cNvPr>
@@ -18855,7 +18855,7 @@
           <p:cNvPr id="37" name="">
             <a:extLst xmlns:a="http://schemas.openxmlformats.org/drawingml/2006/main">
               <a:ext uri="{FF2B5EF4-FFF2-40B4-BE49-F238E27FC236}">
-                <a16:creationId xmlns:a16="http://schemas.microsoft.com/office/drawing/2014/main" id="{DF3E9BC3-C10C-4883-B04E-64C2519535CE}"/>
+                <a16:creationId xmlns:a16="http://schemas.microsoft.com/office/drawing/2014/main" id="{26D2ED08-4D6B-4037-BF9D-77EF9DFB4B4A}"/>
               </a:ext>
             </a:extLst>
           </p:cNvPr>
@@ -18907,7 +18907,7 @@
           <p:cNvPr id="38" name="">
             <a:extLst xmlns:a="http://schemas.openxmlformats.org/drawingml/2006/main">
               <a:ext uri="{FF2B5EF4-FFF2-40B4-BE49-F238E27FC236}">
-                <a16:creationId xmlns:a16="http://schemas.microsoft.com/office/drawing/2014/main" id="{93160ED4-236B-4F63-B28E-40ACBE9DE053}"/>
+                <a16:creationId xmlns:a16="http://schemas.microsoft.com/office/drawing/2014/main" id="{020085AD-04CE-402B-9D96-BC46FAADD925}"/>
               </a:ext>
             </a:extLst>
           </p:cNvPr>
@@ -18938,7 +18938,7 @@
           <p:cNvPr id="39" name="">
             <a:extLst xmlns:a="http://schemas.openxmlformats.org/drawingml/2006/main">
               <a:ext uri="{FF2B5EF4-FFF2-40B4-BE49-F238E27FC236}">
-                <a16:creationId xmlns:a16="http://schemas.microsoft.com/office/drawing/2014/main" id="{405A1BE8-148C-4465-A08D-622D4BB81D9B}"/>
+                <a16:creationId xmlns:a16="http://schemas.microsoft.com/office/drawing/2014/main" id="{2E1029DE-1063-428F-A181-2E34C23A0114}"/>
               </a:ext>
             </a:extLst>
           </p:cNvPr>
@@ -18990,7 +18990,7 @@
           <p:cNvPr id="40" name="">
             <a:extLst xmlns:a="http://schemas.openxmlformats.org/drawingml/2006/main">
               <a:ext uri="{FF2B5EF4-FFF2-40B4-BE49-F238E27FC236}">
-                <a16:creationId xmlns:a16="http://schemas.microsoft.com/office/drawing/2014/main" id="{22730621-9849-4651-905D-32FB6B244BAE}"/>
+                <a16:creationId xmlns:a16="http://schemas.microsoft.com/office/drawing/2014/main" id="{9CDC893A-7BB6-48B7-ADF4-826CBB444ABA}"/>
               </a:ext>
             </a:extLst>
           </p:cNvPr>
@@ -19042,7 +19042,7 @@
           <p:cNvPr id="41" name="">
             <a:extLst xmlns:a="http://schemas.openxmlformats.org/drawingml/2006/main">
               <a:ext uri="{FF2B5EF4-FFF2-40B4-BE49-F238E27FC236}">
-                <a16:creationId xmlns:a16="http://schemas.microsoft.com/office/drawing/2014/main" id="{0C5F27C7-7BEA-4357-9850-D0DB8AA638F0}"/>
+                <a16:creationId xmlns:a16="http://schemas.microsoft.com/office/drawing/2014/main" id="{F1B40B89-8657-4573-A7F1-010EC97750C2}"/>
               </a:ext>
             </a:extLst>
           </p:cNvPr>
@@ -19094,7 +19094,7 @@
           <p:cNvPr id="42" name="">
             <a:extLst xmlns:a="http://schemas.openxmlformats.org/drawingml/2006/main">
               <a:ext uri="{FF2B5EF4-FFF2-40B4-BE49-F238E27FC236}">
-                <a16:creationId xmlns:a16="http://schemas.microsoft.com/office/drawing/2014/main" id="{E5034E35-13C7-4A61-9497-A1B9FF97ED23}"/>
+                <a16:creationId xmlns:a16="http://schemas.microsoft.com/office/drawing/2014/main" id="{003725A3-EA17-479C-BD58-FAA1B5023F64}"/>
               </a:ext>
             </a:extLst>
           </p:cNvPr>
@@ -19146,7 +19146,7 @@
           <p:cNvPr id="43" name="">
             <a:extLst xmlns:a="http://schemas.openxmlformats.org/drawingml/2006/main">
               <a:ext uri="{FF2B5EF4-FFF2-40B4-BE49-F238E27FC236}">
-                <a16:creationId xmlns:a16="http://schemas.microsoft.com/office/drawing/2014/main" id="{72B3155B-AB36-4174-AA6C-08805E41A2B5}"/>
+                <a16:creationId xmlns:a16="http://schemas.microsoft.com/office/drawing/2014/main" id="{DF194075-F6C9-4890-8671-3556B240FDFB}"/>
               </a:ext>
             </a:extLst>
           </p:cNvPr>
@@ -19198,7 +19198,7 @@
           <p:cNvPr id="44" name="">
             <a:extLst xmlns:a="http://schemas.openxmlformats.org/drawingml/2006/main">
               <a:ext uri="{FF2B5EF4-FFF2-40B4-BE49-F238E27FC236}">
-                <a16:creationId xmlns:a16="http://schemas.microsoft.com/office/drawing/2014/main" id="{39625A21-DEDF-4939-9D50-BFC030D97915}"/>
+                <a16:creationId xmlns:a16="http://schemas.microsoft.com/office/drawing/2014/main" id="{F1F5AE66-DD80-4EE5-8A5A-FEF3B123CBC3}"/>
               </a:ext>
             </a:extLst>
           </p:cNvPr>
@@ -19229,7 +19229,7 @@
           <p:cNvPr id="45" name="">
             <a:extLst xmlns:a="http://schemas.openxmlformats.org/drawingml/2006/main">
               <a:ext uri="{FF2B5EF4-FFF2-40B4-BE49-F238E27FC236}">
-                <a16:creationId xmlns:a16="http://schemas.microsoft.com/office/drawing/2014/main" id="{F059A5BC-E7E3-4E62-8DEA-99678E0CA9A7}"/>
+                <a16:creationId xmlns:a16="http://schemas.microsoft.com/office/drawing/2014/main" id="{61C8FF2E-39B1-47D6-BADC-29037A4D640D}"/>
               </a:ext>
             </a:extLst>
           </p:cNvPr>
@@ -19260,7 +19260,7 @@
           <p:cNvPr id="46" name="">
             <a:extLst xmlns:a="http://schemas.openxmlformats.org/drawingml/2006/main">
               <a:ext uri="{FF2B5EF4-FFF2-40B4-BE49-F238E27FC236}">
-                <a16:creationId xmlns:a16="http://schemas.microsoft.com/office/drawing/2014/main" id="{49234B00-9A7C-49DE-80FA-0F96CB9D082E}"/>
+                <a16:creationId xmlns:a16="http://schemas.microsoft.com/office/drawing/2014/main" id="{EDE315E1-7EC8-48CA-8B87-18A2BA855E47}"/>
               </a:ext>
             </a:extLst>
           </p:cNvPr>
@@ -19312,7 +19312,7 @@
           <p:cNvPr id="47" name="">
             <a:extLst xmlns:a="http://schemas.openxmlformats.org/drawingml/2006/main">
               <a:ext uri="{FF2B5EF4-FFF2-40B4-BE49-F238E27FC236}">
-                <a16:creationId xmlns:a16="http://schemas.microsoft.com/office/drawing/2014/main" id="{03B6CDD6-B9FC-4DAE-840D-4299246452E9}"/>
+                <a16:creationId xmlns:a16="http://schemas.microsoft.com/office/drawing/2014/main" id="{51950640-67AF-4801-BFF1-DC4FB4E8D2E2}"/>
               </a:ext>
             </a:extLst>
           </p:cNvPr>
@@ -19364,7 +19364,7 @@
           <p:cNvPr id="48" name="">
             <a:extLst xmlns:a="http://schemas.openxmlformats.org/drawingml/2006/main">
               <a:ext uri="{FF2B5EF4-FFF2-40B4-BE49-F238E27FC236}">
-                <a16:creationId xmlns:a16="http://schemas.microsoft.com/office/drawing/2014/main" id="{30696C74-0EEE-4868-825F-28B7929BCED6}"/>
+                <a16:creationId xmlns:a16="http://schemas.microsoft.com/office/drawing/2014/main" id="{C2340E9C-C6DE-4881-8104-5660EFF0B4F4}"/>
               </a:ext>
             </a:extLst>
           </p:cNvPr>
@@ -19416,7 +19416,7 @@
           <p:cNvPr id="49" name="">
             <a:extLst xmlns:a="http://schemas.openxmlformats.org/drawingml/2006/main">
               <a:ext uri="{FF2B5EF4-FFF2-40B4-BE49-F238E27FC236}">
-                <a16:creationId xmlns:a16="http://schemas.microsoft.com/office/drawing/2014/main" id="{1A9E1439-51A5-4B67-AFDA-7A7DD4E7CC6C}"/>
+                <a16:creationId xmlns:a16="http://schemas.microsoft.com/office/drawing/2014/main" id="{1E39959C-254D-4626-A604-9D21BC8DD8C2}"/>
               </a:ext>
             </a:extLst>
           </p:cNvPr>
@@ -19468,7 +19468,7 @@
           <p:cNvPr id="50" name="">
             <a:extLst xmlns:a="http://schemas.openxmlformats.org/drawingml/2006/main">
               <a:ext uri="{FF2B5EF4-FFF2-40B4-BE49-F238E27FC236}">
-                <a16:creationId xmlns:a16="http://schemas.microsoft.com/office/drawing/2014/main" id="{3208ABC4-254F-490E-BD0F-07B0E2145732}"/>
+                <a16:creationId xmlns:a16="http://schemas.microsoft.com/office/drawing/2014/main" id="{A87F265C-81B8-4E83-9543-7BA006B519DC}"/>
               </a:ext>
             </a:extLst>
           </p:cNvPr>
@@ -19520,7 +19520,7 @@
           <p:cNvPr id="51" name="">
             <a:extLst xmlns:a="http://schemas.openxmlformats.org/drawingml/2006/main">
               <a:ext uri="{FF2B5EF4-FFF2-40B4-BE49-F238E27FC236}">
-                <a16:creationId xmlns:a16="http://schemas.microsoft.com/office/drawing/2014/main" id="{1E28A6DE-5436-450C-96E5-3EB9C594E05E}"/>
+                <a16:creationId xmlns:a16="http://schemas.microsoft.com/office/drawing/2014/main" id="{8E42F9C8-B05B-4744-8CA7-2B0F5095BF0B}"/>
               </a:ext>
             </a:extLst>
           </p:cNvPr>
@@ -19551,7 +19551,7 @@
           <p:cNvPr id="52" name="">
             <a:extLst xmlns:a="http://schemas.openxmlformats.org/drawingml/2006/main">
               <a:ext uri="{FF2B5EF4-FFF2-40B4-BE49-F238E27FC236}">
-                <a16:creationId xmlns:a16="http://schemas.microsoft.com/office/drawing/2014/main" id="{2B2D608C-206E-45A3-AFC8-470F80E6D879}"/>
+                <a16:creationId xmlns:a16="http://schemas.microsoft.com/office/drawing/2014/main" id="{7AA80F25-2CB4-48E9-BC12-E687F8FDBEE6}"/>
               </a:ext>
             </a:extLst>
           </p:cNvPr>
@@ -19603,7 +19603,7 @@
           <p:cNvPr id="53" name="">
             <a:extLst xmlns:a="http://schemas.openxmlformats.org/drawingml/2006/main">
               <a:ext uri="{FF2B5EF4-FFF2-40B4-BE49-F238E27FC236}">
-                <a16:creationId xmlns:a16="http://schemas.microsoft.com/office/drawing/2014/main" id="{AF4381B9-4663-4331-9F55-F0384823EB98}"/>
+                <a16:creationId xmlns:a16="http://schemas.microsoft.com/office/drawing/2014/main" id="{0288238C-F975-4636-8E3E-84F39942C64D}"/>
               </a:ext>
             </a:extLst>
           </p:cNvPr>
@@ -19655,7 +19655,7 @@
           <p:cNvPr id="54" name="">
             <a:extLst xmlns:a="http://schemas.openxmlformats.org/drawingml/2006/main">
               <a:ext uri="{FF2B5EF4-FFF2-40B4-BE49-F238E27FC236}">
-                <a16:creationId xmlns:a16="http://schemas.microsoft.com/office/drawing/2014/main" id="{BE448811-F484-4B95-98DD-B6588E615919}"/>
+                <a16:creationId xmlns:a16="http://schemas.microsoft.com/office/drawing/2014/main" id="{8158582F-BDB2-4260-BDDA-CB4226A458D0}"/>
               </a:ext>
             </a:extLst>
           </p:cNvPr>
@@ -19707,7 +19707,7 @@
           <p:cNvPr id="55" name="">
             <a:extLst xmlns:a="http://schemas.openxmlformats.org/drawingml/2006/main">
               <a:ext uri="{FF2B5EF4-FFF2-40B4-BE49-F238E27FC236}">
-                <a16:creationId xmlns:a16="http://schemas.microsoft.com/office/drawing/2014/main" id="{0C9D7349-5526-4BF7-8FFB-EA144B4AD0B0}"/>
+                <a16:creationId xmlns:a16="http://schemas.microsoft.com/office/drawing/2014/main" id="{B6E84D4A-8C36-4AA5-84F8-104FFA7A4246}"/>
               </a:ext>
             </a:extLst>
           </p:cNvPr>
@@ -19759,7 +19759,7 @@
           <p:cNvPr id="56" name="">
             <a:extLst xmlns:a="http://schemas.openxmlformats.org/drawingml/2006/main">
               <a:ext uri="{FF2B5EF4-FFF2-40B4-BE49-F238E27FC236}">
-                <a16:creationId xmlns:a16="http://schemas.microsoft.com/office/drawing/2014/main" id="{C1B5D366-99F6-48EF-A359-94686BD811D9}"/>
+                <a16:creationId xmlns:a16="http://schemas.microsoft.com/office/drawing/2014/main" id="{0932AA0F-B909-4627-9F90-1155F40B0B28}"/>
               </a:ext>
             </a:extLst>
           </p:cNvPr>
@@ -19811,7 +19811,7 @@
           <p:cNvPr id="57" name="">
             <a:extLst xmlns:a="http://schemas.openxmlformats.org/drawingml/2006/main">
               <a:ext uri="{FF2B5EF4-FFF2-40B4-BE49-F238E27FC236}">
-                <a16:creationId xmlns:a16="http://schemas.microsoft.com/office/drawing/2014/main" id="{A5A8D46E-AC39-4CC4-B54E-B6805ECF682D}"/>
+                <a16:creationId xmlns:a16="http://schemas.microsoft.com/office/drawing/2014/main" id="{8336FAE7-C11D-4D10-AD8E-90DBEE32F94B}"/>
               </a:ext>
             </a:extLst>
           </p:cNvPr>
@@ -19842,7 +19842,7 @@
           <p:cNvPr id="58" name="">
             <a:extLst xmlns:a="http://schemas.openxmlformats.org/drawingml/2006/main">
               <a:ext uri="{FF2B5EF4-FFF2-40B4-BE49-F238E27FC236}">
-                <a16:creationId xmlns:a16="http://schemas.microsoft.com/office/drawing/2014/main" id="{1AF2E998-E720-4905-A682-11050B8A7470}"/>
+                <a16:creationId xmlns:a16="http://schemas.microsoft.com/office/drawing/2014/main" id="{D4F8AEFC-B075-4ADB-B87C-47DC4693106B}"/>
               </a:ext>
             </a:extLst>
           </p:cNvPr>
@@ -19873,7 +19873,7 @@
           <p:cNvPr id="59" name="">
             <a:extLst xmlns:a="http://schemas.openxmlformats.org/drawingml/2006/main">
               <a:ext uri="{FF2B5EF4-FFF2-40B4-BE49-F238E27FC236}">
-                <a16:creationId xmlns:a16="http://schemas.microsoft.com/office/drawing/2014/main" id="{B8E209A6-1E74-4AA8-9E58-9037B6F5D327}"/>
+                <a16:creationId xmlns:a16="http://schemas.microsoft.com/office/drawing/2014/main" id="{15E1EDEE-1462-4CBE-BDC2-B3329FFC040F}"/>
               </a:ext>
             </a:extLst>
           </p:cNvPr>
@@ -19925,7 +19925,7 @@
           <p:cNvPr id="60" name="">
             <a:extLst xmlns:a="http://schemas.openxmlformats.org/drawingml/2006/main">
               <a:ext uri="{FF2B5EF4-FFF2-40B4-BE49-F238E27FC236}">
-                <a16:creationId xmlns:a16="http://schemas.microsoft.com/office/drawing/2014/main" id="{D79CA7DD-F255-4013-BFA0-37421D3C696D}"/>
+                <a16:creationId xmlns:a16="http://schemas.microsoft.com/office/drawing/2014/main" id="{F213A1F1-ECC4-46FF-8839-C6E398C70404}"/>
               </a:ext>
             </a:extLst>
           </p:cNvPr>
@@ -19977,7 +19977,7 @@
           <p:cNvPr id="61" name="">
             <a:extLst xmlns:a="http://schemas.openxmlformats.org/drawingml/2006/main">
               <a:ext uri="{FF2B5EF4-FFF2-40B4-BE49-F238E27FC236}">
-                <a16:creationId xmlns:a16="http://schemas.microsoft.com/office/drawing/2014/main" id="{01AA4612-698F-4721-905A-9326E3EE822C}"/>
+                <a16:creationId xmlns:a16="http://schemas.microsoft.com/office/drawing/2014/main" id="{C6A1D561-518C-4BDA-8314-238FD7C6F202}"/>
               </a:ext>
             </a:extLst>
           </p:cNvPr>
@@ -20029,7 +20029,7 @@
           <p:cNvPr id="62" name="">
             <a:extLst xmlns:a="http://schemas.openxmlformats.org/drawingml/2006/main">
               <a:ext uri="{FF2B5EF4-FFF2-40B4-BE49-F238E27FC236}">
-                <a16:creationId xmlns:a16="http://schemas.microsoft.com/office/drawing/2014/main" id="{A17B3613-1A57-44B9-BAF7-9E38EC96FCA4}"/>
+                <a16:creationId xmlns:a16="http://schemas.microsoft.com/office/drawing/2014/main" id="{BE277CA2-0A74-40F3-BED6-27A7EBF9D3C0}"/>
               </a:ext>
             </a:extLst>
           </p:cNvPr>
@@ -20081,7 +20081,7 @@
           <p:cNvPr id="63" name="">
             <a:extLst xmlns:a="http://schemas.openxmlformats.org/drawingml/2006/main">
               <a:ext uri="{FF2B5EF4-FFF2-40B4-BE49-F238E27FC236}">
-                <a16:creationId xmlns:a16="http://schemas.microsoft.com/office/drawing/2014/main" id="{C83DAB2F-4F10-490A-A52A-21D3DEC9A666}"/>
+                <a16:creationId xmlns:a16="http://schemas.microsoft.com/office/drawing/2014/main" id="{3AD58FD6-EC11-4B08-A614-EEF2F21EFB24}"/>
               </a:ext>
             </a:extLst>
           </p:cNvPr>
@@ -20133,7 +20133,7 @@
           <p:cNvPr id="64" name="">
             <a:extLst xmlns:a="http://schemas.openxmlformats.org/drawingml/2006/main">
               <a:ext uri="{FF2B5EF4-FFF2-40B4-BE49-F238E27FC236}">
-                <a16:creationId xmlns:a16="http://schemas.microsoft.com/office/drawing/2014/main" id="{BC6C4ECE-7B84-4F5D-8828-41FA597CE8F0}"/>
+                <a16:creationId xmlns:a16="http://schemas.microsoft.com/office/drawing/2014/main" id="{87041CF8-FD09-4C01-82EC-747C8CABAA4A}"/>
               </a:ext>
             </a:extLst>
           </p:cNvPr>
@@ -20164,7 +20164,7 @@
           <p:cNvPr id="65" name="">
             <a:extLst xmlns:a="http://schemas.openxmlformats.org/drawingml/2006/main">
               <a:ext uri="{FF2B5EF4-FFF2-40B4-BE49-F238E27FC236}">
-                <a16:creationId xmlns:a16="http://schemas.microsoft.com/office/drawing/2014/main" id="{A562C9E3-581D-4C4A-BA9F-5FBF459B5C22}"/>
+                <a16:creationId xmlns:a16="http://schemas.microsoft.com/office/drawing/2014/main" id="{DF1B761D-9806-4C63-94CC-48AC8DD29373}"/>
               </a:ext>
             </a:extLst>
           </p:cNvPr>
@@ -20216,7 +20216,7 @@
           <p:cNvPr id="66" name="">
             <a:extLst xmlns:a="http://schemas.openxmlformats.org/drawingml/2006/main">
               <a:ext uri="{FF2B5EF4-FFF2-40B4-BE49-F238E27FC236}">
-                <a16:creationId xmlns:a16="http://schemas.microsoft.com/office/drawing/2014/main" id="{FFD9CD8D-990C-4639-BDAD-BB39F21C429A}"/>
+                <a16:creationId xmlns:a16="http://schemas.microsoft.com/office/drawing/2014/main" id="{53513FFA-3181-414F-AC91-6C3F812AAD43}"/>
               </a:ext>
             </a:extLst>
           </p:cNvPr>
@@ -20268,7 +20268,7 @@
           <p:cNvPr id="67" name="">
             <a:extLst xmlns:a="http://schemas.openxmlformats.org/drawingml/2006/main">
               <a:ext uri="{FF2B5EF4-FFF2-40B4-BE49-F238E27FC236}">
-                <a16:creationId xmlns:a16="http://schemas.microsoft.com/office/drawing/2014/main" id="{077CBFEF-4F99-4392-883E-8C2A1987CA36}"/>
+                <a16:creationId xmlns:a16="http://schemas.microsoft.com/office/drawing/2014/main" id="{495F6275-C077-492E-BA7E-40C8C808BA6D}"/>
               </a:ext>
             </a:extLst>
           </p:cNvPr>
@@ -20320,7 +20320,7 @@
           <p:cNvPr id="68" name="">
             <a:extLst xmlns:a="http://schemas.openxmlformats.org/drawingml/2006/main">
               <a:ext uri="{FF2B5EF4-FFF2-40B4-BE49-F238E27FC236}">
-                <a16:creationId xmlns:a16="http://schemas.microsoft.com/office/drawing/2014/main" id="{FCC1D8A6-11CD-459F-BEB9-8A29FCD034EE}"/>
+                <a16:creationId xmlns:a16="http://schemas.microsoft.com/office/drawing/2014/main" id="{F7A8A255-43C3-4E4E-9D5F-29ED9288E21A}"/>
               </a:ext>
             </a:extLst>
           </p:cNvPr>
@@ -20372,7 +20372,7 @@
           <p:cNvPr id="69" name="">
             <a:extLst xmlns:a="http://schemas.openxmlformats.org/drawingml/2006/main">
               <a:ext uri="{FF2B5EF4-FFF2-40B4-BE49-F238E27FC236}">
-                <a16:creationId xmlns:a16="http://schemas.microsoft.com/office/drawing/2014/main" id="{88BE96D6-6E55-4864-98A4-D657553C8D2A}"/>
+                <a16:creationId xmlns:a16="http://schemas.microsoft.com/office/drawing/2014/main" id="{45B89037-6E81-4F34-81ED-FA60464136D3}"/>
               </a:ext>
             </a:extLst>
           </p:cNvPr>
@@ -20424,7 +20424,7 @@
           <p:cNvPr id="70" name="">
             <a:extLst xmlns:a="http://schemas.openxmlformats.org/drawingml/2006/main">
               <a:ext uri="{FF2B5EF4-FFF2-40B4-BE49-F238E27FC236}">
-                <a16:creationId xmlns:a16="http://schemas.microsoft.com/office/drawing/2014/main" id="{45895375-A0C1-42DB-A632-D92A6D324B1C}"/>
+                <a16:creationId xmlns:a16="http://schemas.microsoft.com/office/drawing/2014/main" id="{148F4518-E692-47FC-8D30-3393DBD6EE85}"/>
               </a:ext>
             </a:extLst>
           </p:cNvPr>
@@ -20455,7 +20455,7 @@
           <p:cNvPr id="71" name="">
             <a:extLst xmlns:a="http://schemas.openxmlformats.org/drawingml/2006/main">
               <a:ext uri="{FF2B5EF4-FFF2-40B4-BE49-F238E27FC236}">
-                <a16:creationId xmlns:a16="http://schemas.microsoft.com/office/drawing/2014/main" id="{00C6E8B7-54D3-4AE6-AA19-176401988129}"/>
+                <a16:creationId xmlns:a16="http://schemas.microsoft.com/office/drawing/2014/main" id="{A776A257-6FD4-4F49-94FC-2348084A2F59}"/>
               </a:ext>
             </a:extLst>
           </p:cNvPr>
@@ -20486,7 +20486,7 @@
           <p:cNvPr id="72" name="">
             <a:extLst xmlns:a="http://schemas.openxmlformats.org/drawingml/2006/main">
               <a:ext uri="{FF2B5EF4-FFF2-40B4-BE49-F238E27FC236}">
-                <a16:creationId xmlns:a16="http://schemas.microsoft.com/office/drawing/2014/main" id="{791AC00F-87D5-4508-AFC4-AD535B84E666}"/>
+                <a16:creationId xmlns:a16="http://schemas.microsoft.com/office/drawing/2014/main" id="{46BD250F-E1AA-4F56-B3BD-579DAB1DB8CC}"/>
               </a:ext>
             </a:extLst>
           </p:cNvPr>
@@ -20538,7 +20538,7 @@
           <p:cNvPr id="73" name="">
             <a:extLst xmlns:a="http://schemas.openxmlformats.org/drawingml/2006/main">
               <a:ext uri="{FF2B5EF4-FFF2-40B4-BE49-F238E27FC236}">
-                <a16:creationId xmlns:a16="http://schemas.microsoft.com/office/drawing/2014/main" id="{FF691CD6-A5A4-4501-9F2F-4CF9FBC3C920}"/>
+                <a16:creationId xmlns:a16="http://schemas.microsoft.com/office/drawing/2014/main" id="{54A1E42E-C61A-448B-BB36-F4F8BBB5D1EE}"/>
               </a:ext>
             </a:extLst>
           </p:cNvPr>
@@ -20590,7 +20590,7 @@
           <p:cNvPr id="74" name="">
             <a:extLst xmlns:a="http://schemas.openxmlformats.org/drawingml/2006/main">
               <a:ext uri="{FF2B5EF4-FFF2-40B4-BE49-F238E27FC236}">
-                <a16:creationId xmlns:a16="http://schemas.microsoft.com/office/drawing/2014/main" id="{BC403F7C-D673-4D64-BF58-ABB78A2139AA}"/>
+                <a16:creationId xmlns:a16="http://schemas.microsoft.com/office/drawing/2014/main" id="{54018512-E9D3-4F20-B534-10BC6F169D68}"/>
               </a:ext>
             </a:extLst>
           </p:cNvPr>
@@ -20642,7 +20642,7 @@
           <p:cNvPr id="75" name="">
             <a:extLst xmlns:a="http://schemas.openxmlformats.org/drawingml/2006/main">
               <a:ext uri="{FF2B5EF4-FFF2-40B4-BE49-F238E27FC236}">
-                <a16:creationId xmlns:a16="http://schemas.microsoft.com/office/drawing/2014/main" id="{F6D93D6F-B694-4E51-9E98-885F98154EF1}"/>
+                <a16:creationId xmlns:a16="http://schemas.microsoft.com/office/drawing/2014/main" id="{C0412916-F85A-4F42-B7BA-73E69F705D16}"/>
               </a:ext>
             </a:extLst>
           </p:cNvPr>
@@ -20694,7 +20694,7 @@
           <p:cNvPr id="76" name="">
             <a:extLst xmlns:a="http://schemas.openxmlformats.org/drawingml/2006/main">
               <a:ext uri="{FF2B5EF4-FFF2-40B4-BE49-F238E27FC236}">
-                <a16:creationId xmlns:a16="http://schemas.microsoft.com/office/drawing/2014/main" id="{5AA38853-36D2-47A6-9221-DA7CC02180CD}"/>
+                <a16:creationId xmlns:a16="http://schemas.microsoft.com/office/drawing/2014/main" id="{0497A558-291F-4C2F-80EA-F96B216C732D}"/>
               </a:ext>
             </a:extLst>
           </p:cNvPr>
@@ -20746,7 +20746,7 @@
           <p:cNvPr id="77" name="">
             <a:extLst xmlns:a="http://schemas.openxmlformats.org/drawingml/2006/main">
               <a:ext uri="{FF2B5EF4-FFF2-40B4-BE49-F238E27FC236}">
-                <a16:creationId xmlns:a16="http://schemas.microsoft.com/office/drawing/2014/main" id="{1E494543-47A1-449B-9C45-AFB6321EED79}"/>
+                <a16:creationId xmlns:a16="http://schemas.microsoft.com/office/drawing/2014/main" id="{F11FE4D2-DFBD-4A3E-8E46-D3D1FE53B426}"/>
               </a:ext>
             </a:extLst>
           </p:cNvPr>
@@ -20777,7 +20777,7 @@
           <p:cNvPr id="78" name="">
             <a:extLst xmlns:a="http://schemas.openxmlformats.org/drawingml/2006/main">
               <a:ext uri="{FF2B5EF4-FFF2-40B4-BE49-F238E27FC236}">
-                <a16:creationId xmlns:a16="http://schemas.microsoft.com/office/drawing/2014/main" id="{5A83DFF3-1C39-4DFF-8B1A-98D8753366CF}"/>
+                <a16:creationId xmlns:a16="http://schemas.microsoft.com/office/drawing/2014/main" id="{ABEB48A5-5EE3-49FB-B291-EB71812055ED}"/>
               </a:ext>
             </a:extLst>
           </p:cNvPr>
@@ -20829,7 +20829,7 @@
           <p:cNvPr id="79" name="">
             <a:extLst xmlns:a="http://schemas.openxmlformats.org/drawingml/2006/main">
               <a:ext uri="{FF2B5EF4-FFF2-40B4-BE49-F238E27FC236}">
-                <a16:creationId xmlns:a16="http://schemas.microsoft.com/office/drawing/2014/main" id="{68763FBC-4420-447F-871C-CE454F350FEC}"/>
+                <a16:creationId xmlns:a16="http://schemas.microsoft.com/office/drawing/2014/main" id="{033AA919-0BB4-4F6C-A465-364ACA0522E7}"/>
               </a:ext>
             </a:extLst>
           </p:cNvPr>
@@ -20881,7 +20881,7 @@
           <p:cNvPr id="80" name="">
             <a:extLst xmlns:a="http://schemas.openxmlformats.org/drawingml/2006/main">
               <a:ext uri="{FF2B5EF4-FFF2-40B4-BE49-F238E27FC236}">
-                <a16:creationId xmlns:a16="http://schemas.microsoft.com/office/drawing/2014/main" id="{2D806EA7-012F-4D35-BBC5-00E69D3B2DBE}"/>
+                <a16:creationId xmlns:a16="http://schemas.microsoft.com/office/drawing/2014/main" id="{5B7BAC19-988B-465E-9A8C-98BC9E751876}"/>
               </a:ext>
             </a:extLst>
           </p:cNvPr>
@@ -20933,7 +20933,7 @@
           <p:cNvPr id="81" name="">
             <a:extLst xmlns:a="http://schemas.openxmlformats.org/drawingml/2006/main">
               <a:ext uri="{FF2B5EF4-FFF2-40B4-BE49-F238E27FC236}">
-                <a16:creationId xmlns:a16="http://schemas.microsoft.com/office/drawing/2014/main" id="{CE57C298-BFC3-447B-8DF1-4690A16316FF}"/>
+                <a16:creationId xmlns:a16="http://schemas.microsoft.com/office/drawing/2014/main" id="{2957EFB6-6A69-461B-AEE0-1F96C9D74B01}"/>
               </a:ext>
             </a:extLst>
           </p:cNvPr>
@@ -20985,7 +20985,7 @@
           <p:cNvPr id="82" name="">
             <a:extLst xmlns:a="http://schemas.openxmlformats.org/drawingml/2006/main">
               <a:ext uri="{FF2B5EF4-FFF2-40B4-BE49-F238E27FC236}">
-                <a16:creationId xmlns:a16="http://schemas.microsoft.com/office/drawing/2014/main" id="{2C526E01-C02C-481D-B080-DCE643DE3375}"/>
+                <a16:creationId xmlns:a16="http://schemas.microsoft.com/office/drawing/2014/main" id="{A764D9D7-FDD6-4351-864C-C08F47AF2DDF}"/>
               </a:ext>
             </a:extLst>
           </p:cNvPr>
@@ -21037,7 +21037,7 @@
           <p:cNvPr id="83" name="">
             <a:extLst xmlns:a="http://schemas.openxmlformats.org/drawingml/2006/main">
               <a:ext uri="{FF2B5EF4-FFF2-40B4-BE49-F238E27FC236}">
-                <a16:creationId xmlns:a16="http://schemas.microsoft.com/office/drawing/2014/main" id="{7D9CE9C1-155B-4871-9808-17E675049A67}"/>
+                <a16:creationId xmlns:a16="http://schemas.microsoft.com/office/drawing/2014/main" id="{0F4901A8-0E33-4061-A64C-DBE8BCF6552E}"/>
               </a:ext>
             </a:extLst>
           </p:cNvPr>
@@ -21068,7 +21068,7 @@
           <p:cNvPr id="84" name="">
             <a:extLst xmlns:a="http://schemas.openxmlformats.org/drawingml/2006/main">
               <a:ext uri="{FF2B5EF4-FFF2-40B4-BE49-F238E27FC236}">
-                <a16:creationId xmlns:a16="http://schemas.microsoft.com/office/drawing/2014/main" id="{F675AC07-E120-4730-963C-CF7D305F83B5}"/>
+                <a16:creationId xmlns:a16="http://schemas.microsoft.com/office/drawing/2014/main" id="{2892E57A-1F58-48CD-BC57-A63B168A9852}"/>
               </a:ext>
             </a:extLst>
           </p:cNvPr>
@@ -21120,7 +21120,7 @@
           <p:cNvPr id="85" name="">
             <a:extLst xmlns:a="http://schemas.openxmlformats.org/drawingml/2006/main">
               <a:ext uri="{FF2B5EF4-FFF2-40B4-BE49-F238E27FC236}">
-                <a16:creationId xmlns:a16="http://schemas.microsoft.com/office/drawing/2014/main" id="{B1BDF301-73AD-4B75-A769-78C03A59DB46}"/>
+                <a16:creationId xmlns:a16="http://schemas.microsoft.com/office/drawing/2014/main" id="{FE18375A-43BB-40E3-9A9F-1796ECB6DEF4}"/>
               </a:ext>
             </a:extLst>
           </p:cNvPr>
@@ -21172,7 +21172,7 @@
           <p:cNvPr id="86" name="">
             <a:extLst xmlns:a="http://schemas.openxmlformats.org/drawingml/2006/main">
               <a:ext uri="{FF2B5EF4-FFF2-40B4-BE49-F238E27FC236}">
-                <a16:creationId xmlns:a16="http://schemas.microsoft.com/office/drawing/2014/main" id="{FDBBD759-4CCF-4F30-B694-276474CDDAF3}"/>
+                <a16:creationId xmlns:a16="http://schemas.microsoft.com/office/drawing/2014/main" id="{C79E3E54-180C-4C9B-9408-14E871F0B3AB}"/>
               </a:ext>
             </a:extLst>
           </p:cNvPr>
@@ -21224,7 +21224,7 @@
           <p:cNvPr id="87" name="">
             <a:extLst xmlns:a="http://schemas.openxmlformats.org/drawingml/2006/main">
               <a:ext uri="{FF2B5EF4-FFF2-40B4-BE49-F238E27FC236}">
-                <a16:creationId xmlns:a16="http://schemas.microsoft.com/office/drawing/2014/main" id="{1481D981-33B4-4808-B7EB-2AB5824D7980}"/>
+                <a16:creationId xmlns:a16="http://schemas.microsoft.com/office/drawing/2014/main" id="{B1E3BF02-E6F0-4F73-8168-6CA6D2DD3DAF}"/>
               </a:ext>
             </a:extLst>
           </p:cNvPr>
@@ -21276,7 +21276,7 @@
           <p:cNvPr id="88" name="">
             <a:extLst xmlns:a="http://schemas.openxmlformats.org/drawingml/2006/main">
               <a:ext uri="{FF2B5EF4-FFF2-40B4-BE49-F238E27FC236}">
-                <a16:creationId xmlns:a16="http://schemas.microsoft.com/office/drawing/2014/main" id="{FCE351D1-62F6-4755-AFB3-8AA765C0179C}"/>
+                <a16:creationId xmlns:a16="http://schemas.microsoft.com/office/drawing/2014/main" id="{E6DC0113-91AC-43D9-BA86-1A9EEACB4541}"/>
               </a:ext>
             </a:extLst>
           </p:cNvPr>
@@ -21328,7 +21328,7 @@
           <p:cNvPr id="89" name="">
             <a:extLst xmlns:a="http://schemas.openxmlformats.org/drawingml/2006/main">
               <a:ext uri="{FF2B5EF4-FFF2-40B4-BE49-F238E27FC236}">
-                <a16:creationId xmlns:a16="http://schemas.microsoft.com/office/drawing/2014/main" id="{1C859E55-62BE-4F42-8CF1-6C00BF084821}"/>
+                <a16:creationId xmlns:a16="http://schemas.microsoft.com/office/drawing/2014/main" id="{5ACC1532-BC58-491D-A22D-D805B8B24F03}"/>
               </a:ext>
             </a:extLst>
           </p:cNvPr>
@@ -21359,7 +21359,7 @@
           <p:cNvPr id="90" name="">
             <a:extLst xmlns:a="http://schemas.openxmlformats.org/drawingml/2006/main">
               <a:ext uri="{FF2B5EF4-FFF2-40B4-BE49-F238E27FC236}">
-                <a16:creationId xmlns:a16="http://schemas.microsoft.com/office/drawing/2014/main" id="{ED61BE55-8BA7-466B-BF75-BBE8AFA8D171}"/>
+                <a16:creationId xmlns:a16="http://schemas.microsoft.com/office/drawing/2014/main" id="{9E586164-E6E9-43CE-B2AB-B6588A2A81D0}"/>
               </a:ext>
             </a:extLst>
           </p:cNvPr>
@@ -21390,7 +21390,7 @@
           <p:cNvPr id="91" name="">
             <a:extLst xmlns:a="http://schemas.openxmlformats.org/drawingml/2006/main">
               <a:ext uri="{FF2B5EF4-FFF2-40B4-BE49-F238E27FC236}">
-                <a16:creationId xmlns:a16="http://schemas.microsoft.com/office/drawing/2014/main" id="{862BDDB5-C990-4BD6-A011-431809A0C190}"/>
+                <a16:creationId xmlns:a16="http://schemas.microsoft.com/office/drawing/2014/main" id="{89F1B83A-1394-4ED1-85E7-072B9D76351A}"/>
               </a:ext>
             </a:extLst>
           </p:cNvPr>
@@ -21442,7 +21442,7 @@
           <p:cNvPr id="92" name="">
             <a:extLst xmlns:a="http://schemas.openxmlformats.org/drawingml/2006/main">
               <a:ext uri="{FF2B5EF4-FFF2-40B4-BE49-F238E27FC236}">
-                <a16:creationId xmlns:a16="http://schemas.microsoft.com/office/drawing/2014/main" id="{A7C63A69-C342-422D-BEA3-06382EB9E3EC}"/>
+                <a16:creationId xmlns:a16="http://schemas.microsoft.com/office/drawing/2014/main" id="{8BE08837-D8D3-47AE-BB8F-51BFA4B6C296}"/>
               </a:ext>
             </a:extLst>
           </p:cNvPr>
@@ -21494,7 +21494,7 @@
           <p:cNvPr id="93" name="">
             <a:extLst xmlns:a="http://schemas.openxmlformats.org/drawingml/2006/main">
               <a:ext uri="{FF2B5EF4-FFF2-40B4-BE49-F238E27FC236}">
-                <a16:creationId xmlns:a16="http://schemas.microsoft.com/office/drawing/2014/main" id="{0861F0ED-5131-44D8-BC6E-DF509D7B48B5}"/>
+                <a16:creationId xmlns:a16="http://schemas.microsoft.com/office/drawing/2014/main" id="{85DEDF21-FB33-4F8F-A7E4-B466F3D58D25}"/>
               </a:ext>
             </a:extLst>
           </p:cNvPr>
@@ -21546,7 +21546,7 @@
           <p:cNvPr id="94" name="">
             <a:extLst xmlns:a="http://schemas.openxmlformats.org/drawingml/2006/main">
               <a:ext uri="{FF2B5EF4-FFF2-40B4-BE49-F238E27FC236}">
-                <a16:creationId xmlns:a16="http://schemas.microsoft.com/office/drawing/2014/main" id="{98076F41-C03F-45A1-A4CA-2A0BC2E9C876}"/>
+                <a16:creationId xmlns:a16="http://schemas.microsoft.com/office/drawing/2014/main" id="{BDE3BE94-AE6D-44BA-8A6A-193DD4CCFFF6}"/>
               </a:ext>
             </a:extLst>
           </p:cNvPr>
@@ -21598,7 +21598,7 @@
           <p:cNvPr id="95" name="">
             <a:extLst xmlns:a="http://schemas.openxmlformats.org/drawingml/2006/main">
               <a:ext uri="{FF2B5EF4-FFF2-40B4-BE49-F238E27FC236}">
-                <a16:creationId xmlns:a16="http://schemas.microsoft.com/office/drawing/2014/main" id="{37AC5B77-CE6C-48DA-8D53-0067354812E1}"/>
+                <a16:creationId xmlns:a16="http://schemas.microsoft.com/office/drawing/2014/main" id="{633ECC59-8769-48C6-AFBE-01BB032E9569}"/>
               </a:ext>
             </a:extLst>
           </p:cNvPr>
@@ -21648,7 +21648,7 @@
     </p:spTree>
     <p:extLst>
       <p:ext uri="{BB962C8B-B14F-4D97-AF65-F5344CB8AC3E}">
-        <p14:creationId xmlns:p14="http://schemas.microsoft.com/office/powerpoint/2010/main" val="164269043"/>
+        <p14:creationId xmlns:p14="http://schemas.microsoft.com/office/powerpoint/2010/main" val="423836283"/>
       </p:ext>
     </p:extLst>
   </p:cSld>
@@ -21679,7 +21679,7 @@
           <p:cNvPr id="122" name="">
             <a:extLst xmlns:a="http://schemas.openxmlformats.org/drawingml/2006/main">
               <a:ext uri="{FF2B5EF4-FFF2-40B4-BE49-F238E27FC236}">
-                <a16:creationId xmlns:a16="http://schemas.microsoft.com/office/drawing/2014/main" id="{6A2D6BAB-75E1-4D2F-88DE-74D6532E0463}"/>
+                <a16:creationId xmlns:a16="http://schemas.microsoft.com/office/drawing/2014/main" id="{8C1759D0-C2AB-4B4B-9184-33A67CAFAF7D}"/>
               </a:ext>
             </a:extLst>
           </p:cNvPr>
@@ -21712,7 +21712,7 @@
           <p:cNvPr id="2" name="">
             <a:extLst xmlns:a="http://schemas.openxmlformats.org/drawingml/2006/main">
               <a:ext uri="{FF2B5EF4-FFF2-40B4-BE49-F238E27FC236}">
-                <a16:creationId xmlns:a16="http://schemas.microsoft.com/office/drawing/2014/main" id="{6C725F5A-9B76-4C84-ACA0-AB1C9EF137FF}"/>
+                <a16:creationId xmlns:a16="http://schemas.microsoft.com/office/drawing/2014/main" id="{D1594A6D-EAF0-4923-A180-30C0D5473155}"/>
               </a:ext>
             </a:extLst>
           </p:cNvPr>
@@ -21743,7 +21743,7 @@
           <p:cNvPr id="3" name="">
             <a:extLst xmlns:a="http://schemas.openxmlformats.org/drawingml/2006/main">
               <a:ext uri="{FF2B5EF4-FFF2-40B4-BE49-F238E27FC236}">
-                <a16:creationId xmlns:a16="http://schemas.microsoft.com/office/drawing/2014/main" id="{8FFACC33-2670-4526-A889-BDF77AA7975D}"/>
+                <a16:creationId xmlns:a16="http://schemas.microsoft.com/office/drawing/2014/main" id="{5C5971EB-5DC8-4E85-8176-08CB23B3A228}"/>
               </a:ext>
             </a:extLst>
           </p:cNvPr>
@@ -21795,7 +21795,7 @@
           <p:cNvPr id="4" name="">
             <a:extLst xmlns:a="http://schemas.openxmlformats.org/drawingml/2006/main">
               <a:ext uri="{FF2B5EF4-FFF2-40B4-BE49-F238E27FC236}">
-                <a16:creationId xmlns:a16="http://schemas.microsoft.com/office/drawing/2014/main" id="{DD1457BD-1D35-4BA3-9A8C-BE9BE48BE94D}"/>
+                <a16:creationId xmlns:a16="http://schemas.microsoft.com/office/drawing/2014/main" id="{520E3B79-D74D-415F-A4AE-3F4FB080117A}"/>
               </a:ext>
             </a:extLst>
           </p:cNvPr>
@@ -21847,7 +21847,7 @@
           <p:cNvPr id="5" name="">
             <a:extLst xmlns:a="http://schemas.openxmlformats.org/drawingml/2006/main">
               <a:ext uri="{FF2B5EF4-FFF2-40B4-BE49-F238E27FC236}">
-                <a16:creationId xmlns:a16="http://schemas.microsoft.com/office/drawing/2014/main" id="{0237EC77-1139-4FE4-93AD-A06ED1AD42F6}"/>
+                <a16:creationId xmlns:a16="http://schemas.microsoft.com/office/drawing/2014/main" id="{8CDA7878-C874-4FD4-8D49-582492C0FC27}"/>
               </a:ext>
             </a:extLst>
           </p:cNvPr>
@@ -21882,7 +21882,7 @@
           <p:nvPr/>
         </p:nvPicPr>
         <p:blipFill>
-          <a:blip xmlns:r="http://schemas.openxmlformats.org/officeDocument/2006/relationships" xmlns:a="http://schemas.openxmlformats.org/drawingml/2006/main" r:embed="Rd7786cc8a1994431"/>
+          <a:blip xmlns:r="http://schemas.openxmlformats.org/officeDocument/2006/relationships" xmlns:a="http://schemas.openxmlformats.org/drawingml/2006/main" r:embed="R8525fa842ea74479"/>
           <a:stretch xmlns:a="http://schemas.openxmlformats.org/drawingml/2006/main"/>
         </p:blipFill>
         <p:spPr>
@@ -21900,7 +21900,7 @@
           <p:cNvPr id="7" name="">
             <a:extLst xmlns:a="http://schemas.openxmlformats.org/drawingml/2006/main">
               <a:ext uri="{FF2B5EF4-FFF2-40B4-BE49-F238E27FC236}">
-                <a16:creationId xmlns:a16="http://schemas.microsoft.com/office/drawing/2014/main" id="{BA10148D-4B74-4334-92EF-B4280754BC24}"/>
+                <a16:creationId xmlns:a16="http://schemas.microsoft.com/office/drawing/2014/main" id="{B3874932-4CB4-4FC4-AE09-04D90F1ACD88}"/>
               </a:ext>
             </a:extLst>
           </p:cNvPr>
@@ -21952,7 +21952,7 @@
           <p:cNvPr id="8" name="">
             <a:extLst xmlns:a="http://schemas.openxmlformats.org/drawingml/2006/main">
               <a:ext uri="{FF2B5EF4-FFF2-40B4-BE49-F238E27FC236}">
-                <a16:creationId xmlns:a16="http://schemas.microsoft.com/office/drawing/2014/main" id="{359965F0-13F0-4946-809F-545AE3B411BA}"/>
+                <a16:creationId xmlns:a16="http://schemas.microsoft.com/office/drawing/2014/main" id="{F1BB2D91-CB4E-425E-9BDF-C8802B7816B2}"/>
               </a:ext>
             </a:extLst>
           </p:cNvPr>
@@ -22004,7 +22004,7 @@
           <p:cNvPr id="9" name="">
             <a:extLst xmlns:a="http://schemas.openxmlformats.org/drawingml/2006/main">
               <a:ext uri="{FF2B5EF4-FFF2-40B4-BE49-F238E27FC236}">
-                <a16:creationId xmlns:a16="http://schemas.microsoft.com/office/drawing/2014/main" id="{C131CF5F-E59F-4B79-A3B1-4E5C5318AAF2}"/>
+                <a16:creationId xmlns:a16="http://schemas.microsoft.com/office/drawing/2014/main" id="{AEA02BFB-AB29-4379-A231-BA4DDB53A72E}"/>
               </a:ext>
             </a:extLst>
           </p:cNvPr>
@@ -22056,7 +22056,7 @@
           <p:cNvPr id="10" name="">
             <a:extLst xmlns:a="http://schemas.openxmlformats.org/drawingml/2006/main">
               <a:ext uri="{FF2B5EF4-FFF2-40B4-BE49-F238E27FC236}">
-                <a16:creationId xmlns:a16="http://schemas.microsoft.com/office/drawing/2014/main" id="{901EDA61-2C75-458F-BE0E-661DB5F3D8D7}"/>
+                <a16:creationId xmlns:a16="http://schemas.microsoft.com/office/drawing/2014/main" id="{0B4419FC-BB8A-40C7-8BCC-5F66802A813B}"/>
               </a:ext>
             </a:extLst>
           </p:cNvPr>
@@ -22108,7 +22108,7 @@
           <p:cNvPr id="11" name="">
             <a:extLst xmlns:a="http://schemas.openxmlformats.org/drawingml/2006/main">
               <a:ext uri="{FF2B5EF4-FFF2-40B4-BE49-F238E27FC236}">
-                <a16:creationId xmlns:a16="http://schemas.microsoft.com/office/drawing/2014/main" id="{F4422781-5669-442F-B97B-3E9319D3AEE4}"/>
+                <a16:creationId xmlns:a16="http://schemas.microsoft.com/office/drawing/2014/main" id="{9690340A-3232-4534-9798-FB9F24EAD695}"/>
               </a:ext>
             </a:extLst>
           </p:cNvPr>
@@ -22139,7 +22139,7 @@
           <p:cNvPr id="12" name="">
             <a:extLst xmlns:a="http://schemas.openxmlformats.org/drawingml/2006/main">
               <a:ext uri="{FF2B5EF4-FFF2-40B4-BE49-F238E27FC236}">
-                <a16:creationId xmlns:a16="http://schemas.microsoft.com/office/drawing/2014/main" id="{78CA0E3F-AEF2-47CF-BFAE-AD4C05530F7A}"/>
+                <a16:creationId xmlns:a16="http://schemas.microsoft.com/office/drawing/2014/main" id="{F12573BC-9235-461F-9B35-A738274D9085}"/>
               </a:ext>
             </a:extLst>
           </p:cNvPr>
@@ -22170,7 +22170,7 @@
           <p:cNvPr id="13" name="">
             <a:extLst xmlns:a="http://schemas.openxmlformats.org/drawingml/2006/main">
               <a:ext uri="{FF2B5EF4-FFF2-40B4-BE49-F238E27FC236}">
-                <a16:creationId xmlns:a16="http://schemas.microsoft.com/office/drawing/2014/main" id="{8B6B74CB-5BE6-436D-8DFD-D68E9A0B1AA4}"/>
+                <a16:creationId xmlns:a16="http://schemas.microsoft.com/office/drawing/2014/main" id="{269100F5-56E9-46A6-A436-3F3D9CBF2732}"/>
               </a:ext>
             </a:extLst>
           </p:cNvPr>
@@ -22222,7 +22222,7 @@
           <p:cNvPr id="14" name="">
             <a:extLst xmlns:a="http://schemas.openxmlformats.org/drawingml/2006/main">
               <a:ext uri="{FF2B5EF4-FFF2-40B4-BE49-F238E27FC236}">
-                <a16:creationId xmlns:a16="http://schemas.microsoft.com/office/drawing/2014/main" id="{640EDD7C-A29B-44DC-81B5-827DEDB9F6AE}"/>
+                <a16:creationId xmlns:a16="http://schemas.microsoft.com/office/drawing/2014/main" id="{69B7FEC2-654E-4307-BDD9-724E0F53B96B}"/>
               </a:ext>
             </a:extLst>
           </p:cNvPr>
@@ -22274,7 +22274,7 @@
           <p:cNvPr id="15" name="">
             <a:extLst xmlns:a="http://schemas.openxmlformats.org/drawingml/2006/main">
               <a:ext uri="{FF2B5EF4-FFF2-40B4-BE49-F238E27FC236}">
-                <a16:creationId xmlns:a16="http://schemas.microsoft.com/office/drawing/2014/main" id="{3A8349A9-A36E-4064-A5EB-FCAA1B86415D}"/>
+                <a16:creationId xmlns:a16="http://schemas.microsoft.com/office/drawing/2014/main" id="{AFFEC75D-E6FB-4FAC-A4A4-BDB3B2CDF875}"/>
               </a:ext>
             </a:extLst>
           </p:cNvPr>
@@ -22326,7 +22326,7 @@
           <p:cNvPr id="16" name="">
             <a:extLst xmlns:a="http://schemas.openxmlformats.org/drawingml/2006/main">
               <a:ext uri="{FF2B5EF4-FFF2-40B4-BE49-F238E27FC236}">
-                <a16:creationId xmlns:a16="http://schemas.microsoft.com/office/drawing/2014/main" id="{88B022DB-A367-41B7-9F22-CC4F8CE0C5D5}"/>
+                <a16:creationId xmlns:a16="http://schemas.microsoft.com/office/drawing/2014/main" id="{CB1F5900-D19B-4EA4-AF15-999C61216CBC}"/>
               </a:ext>
             </a:extLst>
           </p:cNvPr>
@@ -22378,7 +22378,7 @@
           <p:cNvPr id="17" name="">
             <a:extLst xmlns:a="http://schemas.openxmlformats.org/drawingml/2006/main">
               <a:ext uri="{FF2B5EF4-FFF2-40B4-BE49-F238E27FC236}">
-                <a16:creationId xmlns:a16="http://schemas.microsoft.com/office/drawing/2014/main" id="{7810329E-9D77-401D-89BF-6E25FDE9C82F}"/>
+                <a16:creationId xmlns:a16="http://schemas.microsoft.com/office/drawing/2014/main" id="{B4C6B53D-503B-4DD1-80E8-3FE73FD9A99F}"/>
               </a:ext>
             </a:extLst>
           </p:cNvPr>
@@ -22430,7 +22430,7 @@
           <p:cNvPr id="18" name="">
             <a:extLst xmlns:a="http://schemas.openxmlformats.org/drawingml/2006/main">
               <a:ext uri="{FF2B5EF4-FFF2-40B4-BE49-F238E27FC236}">
-                <a16:creationId xmlns:a16="http://schemas.microsoft.com/office/drawing/2014/main" id="{40E308BE-8128-47F2-A696-79A1B8D6A915}"/>
+                <a16:creationId xmlns:a16="http://schemas.microsoft.com/office/drawing/2014/main" id="{9ADC89BA-6B34-4DFE-853C-4620112F680B}"/>
               </a:ext>
             </a:extLst>
           </p:cNvPr>
@@ -22482,7 +22482,7 @@
           <p:cNvPr id="19" name="">
             <a:extLst xmlns:a="http://schemas.openxmlformats.org/drawingml/2006/main">
               <a:ext uri="{FF2B5EF4-FFF2-40B4-BE49-F238E27FC236}">
-                <a16:creationId xmlns:a16="http://schemas.microsoft.com/office/drawing/2014/main" id="{A701B0B8-12ED-4E1D-9DEB-9297315C0B3E}"/>
+                <a16:creationId xmlns:a16="http://schemas.microsoft.com/office/drawing/2014/main" id="{7C9534EA-FA1E-4EC2-BA7E-EE37B84203FD}"/>
               </a:ext>
             </a:extLst>
           </p:cNvPr>
@@ -22534,7 +22534,7 @@
           <p:cNvPr id="20" name="">
             <a:extLst xmlns:a="http://schemas.openxmlformats.org/drawingml/2006/main">
               <a:ext uri="{FF2B5EF4-FFF2-40B4-BE49-F238E27FC236}">
-                <a16:creationId xmlns:a16="http://schemas.microsoft.com/office/drawing/2014/main" id="{6F7681F4-D7F3-4C9F-A928-F4F7867B0603}"/>
+                <a16:creationId xmlns:a16="http://schemas.microsoft.com/office/drawing/2014/main" id="{EF55DDB8-306C-4D97-AE39-3543A60D9F16}"/>
               </a:ext>
             </a:extLst>
           </p:cNvPr>
@@ -22565,7 +22565,7 @@
           <p:cNvPr id="21" name="">
             <a:extLst xmlns:a="http://schemas.openxmlformats.org/drawingml/2006/main">
               <a:ext uri="{FF2B5EF4-FFF2-40B4-BE49-F238E27FC236}">
-                <a16:creationId xmlns:a16="http://schemas.microsoft.com/office/drawing/2014/main" id="{47BA4A0D-FA1D-42A2-9B64-6E8CD10A24A3}"/>
+                <a16:creationId xmlns:a16="http://schemas.microsoft.com/office/drawing/2014/main" id="{01167036-1FE1-4B7A-BAB4-21E6B55CC44B}"/>
               </a:ext>
             </a:extLst>
           </p:cNvPr>
@@ -22617,7 +22617,7 @@
           <p:cNvPr id="22" name="">
             <a:extLst xmlns:a="http://schemas.openxmlformats.org/drawingml/2006/main">
               <a:ext uri="{FF2B5EF4-FFF2-40B4-BE49-F238E27FC236}">
-                <a16:creationId xmlns:a16="http://schemas.microsoft.com/office/drawing/2014/main" id="{E2E44D8F-FA3E-43A2-BB36-898118DF337C}"/>
+                <a16:creationId xmlns:a16="http://schemas.microsoft.com/office/drawing/2014/main" id="{EBA3639F-C8A6-4F7E-A445-F33641E3BAAA}"/>
               </a:ext>
             </a:extLst>
           </p:cNvPr>
@@ -22669,7 +22669,7 @@
           <p:cNvPr id="23" name="">
             <a:extLst xmlns:a="http://schemas.openxmlformats.org/drawingml/2006/main">
               <a:ext uri="{FF2B5EF4-FFF2-40B4-BE49-F238E27FC236}">
-                <a16:creationId xmlns:a16="http://schemas.microsoft.com/office/drawing/2014/main" id="{BE6F683A-D019-46AE-A5B1-0EF779459ACC}"/>
+                <a16:creationId xmlns:a16="http://schemas.microsoft.com/office/drawing/2014/main" id="{BC8864E7-1C36-44C0-B6B4-7953200A4D6E}"/>
               </a:ext>
             </a:extLst>
           </p:cNvPr>
@@ -22721,7 +22721,7 @@
           <p:cNvPr id="24" name="">
             <a:extLst xmlns:a="http://schemas.openxmlformats.org/drawingml/2006/main">
               <a:ext uri="{FF2B5EF4-FFF2-40B4-BE49-F238E27FC236}">
-                <a16:creationId xmlns:a16="http://schemas.microsoft.com/office/drawing/2014/main" id="{5F48EBEF-8B83-471A-906A-55D4A8601AA1}"/>
+                <a16:creationId xmlns:a16="http://schemas.microsoft.com/office/drawing/2014/main" id="{FDB89981-4090-44B3-A13B-198EE390C5FC}"/>
               </a:ext>
             </a:extLst>
           </p:cNvPr>
@@ -22773,7 +22773,7 @@
           <p:cNvPr id="25" name="">
             <a:extLst xmlns:a="http://schemas.openxmlformats.org/drawingml/2006/main">
               <a:ext uri="{FF2B5EF4-FFF2-40B4-BE49-F238E27FC236}">
-                <a16:creationId xmlns:a16="http://schemas.microsoft.com/office/drawing/2014/main" id="{4181EF54-270D-4653-9172-0015363F3671}"/>
+                <a16:creationId xmlns:a16="http://schemas.microsoft.com/office/drawing/2014/main" id="{9011B55E-6421-461C-B3AC-DD3290126A49}"/>
               </a:ext>
             </a:extLst>
           </p:cNvPr>
@@ -22825,7 +22825,7 @@
           <p:cNvPr id="26" name="">
             <a:extLst xmlns:a="http://schemas.openxmlformats.org/drawingml/2006/main">
               <a:ext uri="{FF2B5EF4-FFF2-40B4-BE49-F238E27FC236}">
-                <a16:creationId xmlns:a16="http://schemas.microsoft.com/office/drawing/2014/main" id="{3A970D3E-25B6-418B-A0A1-36BFC3B3A50C}"/>
+                <a16:creationId xmlns:a16="http://schemas.microsoft.com/office/drawing/2014/main" id="{11D2E13F-7A4D-4987-AC90-A1DED47C7232}"/>
               </a:ext>
             </a:extLst>
           </p:cNvPr>
@@ -22877,7 +22877,7 @@
           <p:cNvPr id="27" name="">
             <a:extLst xmlns:a="http://schemas.openxmlformats.org/drawingml/2006/main">
               <a:ext uri="{FF2B5EF4-FFF2-40B4-BE49-F238E27FC236}">
-                <a16:creationId xmlns:a16="http://schemas.microsoft.com/office/drawing/2014/main" id="{09DEEF08-932F-4437-836F-C15C83DAA7FC}"/>
+                <a16:creationId xmlns:a16="http://schemas.microsoft.com/office/drawing/2014/main" id="{24E070D6-D002-482F-9683-7235E5D2AF55}"/>
               </a:ext>
             </a:extLst>
           </p:cNvPr>
@@ -22929,7 +22929,7 @@
           <p:cNvPr id="28" name="">
             <a:extLst xmlns:a="http://schemas.openxmlformats.org/drawingml/2006/main">
               <a:ext uri="{FF2B5EF4-FFF2-40B4-BE49-F238E27FC236}">
-                <a16:creationId xmlns:a16="http://schemas.microsoft.com/office/drawing/2014/main" id="{9C91274A-63D0-4606-A64D-30F04710FAF6}"/>
+                <a16:creationId xmlns:a16="http://schemas.microsoft.com/office/drawing/2014/main" id="{D7C55942-41CF-488A-BA82-68CA14249040}"/>
               </a:ext>
             </a:extLst>
           </p:cNvPr>
@@ -22960,7 +22960,7 @@
           <p:cNvPr id="29" name="">
             <a:extLst xmlns:a="http://schemas.openxmlformats.org/drawingml/2006/main">
               <a:ext uri="{FF2B5EF4-FFF2-40B4-BE49-F238E27FC236}">
-                <a16:creationId xmlns:a16="http://schemas.microsoft.com/office/drawing/2014/main" id="{C63010B7-688A-4B7F-AD80-2F3650014BB1}"/>
+                <a16:creationId xmlns:a16="http://schemas.microsoft.com/office/drawing/2014/main" id="{B0C84DC0-FABE-47AB-BAAD-7D828D55AE8D}"/>
               </a:ext>
             </a:extLst>
           </p:cNvPr>
@@ -22991,7 +22991,7 @@
           <p:cNvPr id="30" name="">
             <a:extLst xmlns:a="http://schemas.openxmlformats.org/drawingml/2006/main">
               <a:ext uri="{FF2B5EF4-FFF2-40B4-BE49-F238E27FC236}">
-                <a16:creationId xmlns:a16="http://schemas.microsoft.com/office/drawing/2014/main" id="{EC50DF23-B49F-4166-825D-774A4C372B0D}"/>
+                <a16:creationId xmlns:a16="http://schemas.microsoft.com/office/drawing/2014/main" id="{FFE7774B-03A4-4BA5-BDD0-B7427B5BF1FE}"/>
               </a:ext>
             </a:extLst>
           </p:cNvPr>
@@ -23043,7 +23043,7 @@
           <p:cNvPr id="31" name="">
             <a:extLst xmlns:a="http://schemas.openxmlformats.org/drawingml/2006/main">
               <a:ext uri="{FF2B5EF4-FFF2-40B4-BE49-F238E27FC236}">
-                <a16:creationId xmlns:a16="http://schemas.microsoft.com/office/drawing/2014/main" id="{701C02DE-A4E1-4657-AAAB-6E713DC52666}"/>
+                <a16:creationId xmlns:a16="http://schemas.microsoft.com/office/drawing/2014/main" id="{F37C860E-B244-4DFC-9FC6-BC8F74AB67CE}"/>
               </a:ext>
             </a:extLst>
           </p:cNvPr>
@@ -23095,7 +23095,7 @@
           <p:cNvPr id="32" name="">
             <a:extLst xmlns:a="http://schemas.openxmlformats.org/drawingml/2006/main">
               <a:ext uri="{FF2B5EF4-FFF2-40B4-BE49-F238E27FC236}">
-                <a16:creationId xmlns:a16="http://schemas.microsoft.com/office/drawing/2014/main" id="{9B856652-DA3D-4165-BC0A-318F72A6CD13}"/>
+                <a16:creationId xmlns:a16="http://schemas.microsoft.com/office/drawing/2014/main" id="{E637F05E-9855-4A3A-B2AC-C0077210A863}"/>
               </a:ext>
             </a:extLst>
           </p:cNvPr>
@@ -23147,7 +23147,7 @@
           <p:cNvPr id="33" name="">
             <a:extLst xmlns:a="http://schemas.openxmlformats.org/drawingml/2006/main">
               <a:ext uri="{FF2B5EF4-FFF2-40B4-BE49-F238E27FC236}">
-                <a16:creationId xmlns:a16="http://schemas.microsoft.com/office/drawing/2014/main" id="{6BAC6654-B484-4315-830F-095E6127AED7}"/>
+                <a16:creationId xmlns:a16="http://schemas.microsoft.com/office/drawing/2014/main" id="{E5A18AEA-EE57-467E-8EC9-9208F2977442}"/>
               </a:ext>
             </a:extLst>
           </p:cNvPr>
@@ -23199,7 +23199,7 @@
           <p:cNvPr id="34" name="">
             <a:extLst xmlns:a="http://schemas.openxmlformats.org/drawingml/2006/main">
               <a:ext uri="{FF2B5EF4-FFF2-40B4-BE49-F238E27FC236}">
-                <a16:creationId xmlns:a16="http://schemas.microsoft.com/office/drawing/2014/main" id="{BD0AB95C-A982-47F0-8513-A85A51EF0C9C}"/>
+                <a16:creationId xmlns:a16="http://schemas.microsoft.com/office/drawing/2014/main" id="{3B247443-C2B3-46A7-B137-B012125DBEBC}"/>
               </a:ext>
             </a:extLst>
           </p:cNvPr>
@@ -23251,7 +23251,7 @@
           <p:cNvPr id="35" name="">
             <a:extLst xmlns:a="http://schemas.openxmlformats.org/drawingml/2006/main">
               <a:ext uri="{FF2B5EF4-FFF2-40B4-BE49-F238E27FC236}">
-                <a16:creationId xmlns:a16="http://schemas.microsoft.com/office/drawing/2014/main" id="{3796D772-D847-4523-A9A1-21FE981E8118}"/>
+                <a16:creationId xmlns:a16="http://schemas.microsoft.com/office/drawing/2014/main" id="{9F832397-9753-495E-87DC-008A41BBAA42}"/>
               </a:ext>
             </a:extLst>
           </p:cNvPr>
@@ -23303,7 +23303,7 @@
           <p:cNvPr id="36" name="">
             <a:extLst xmlns:a="http://schemas.openxmlformats.org/drawingml/2006/main">
               <a:ext uri="{FF2B5EF4-FFF2-40B4-BE49-F238E27FC236}">
-                <a16:creationId xmlns:a16="http://schemas.microsoft.com/office/drawing/2014/main" id="{8C23ACFA-80F1-41C9-A820-9140735C1CEE}"/>
+                <a16:creationId xmlns:a16="http://schemas.microsoft.com/office/drawing/2014/main" id="{DD8125E5-8812-424F-B749-E32085F39332}"/>
               </a:ext>
             </a:extLst>
           </p:cNvPr>
@@ -23355,7 +23355,7 @@
           <p:cNvPr id="37" name="">
             <a:extLst xmlns:a="http://schemas.openxmlformats.org/drawingml/2006/main">
               <a:ext uri="{FF2B5EF4-FFF2-40B4-BE49-F238E27FC236}">
-                <a16:creationId xmlns:a16="http://schemas.microsoft.com/office/drawing/2014/main" id="{6CC97953-0E72-4F7E-911E-A4CA526EB76A}"/>
+                <a16:creationId xmlns:a16="http://schemas.microsoft.com/office/drawing/2014/main" id="{139CF2EE-C2A2-44D5-949E-D758D6A40489}"/>
               </a:ext>
             </a:extLst>
           </p:cNvPr>
@@ -23386,7 +23386,7 @@
           <p:cNvPr id="38" name="">
             <a:extLst xmlns:a="http://schemas.openxmlformats.org/drawingml/2006/main">
               <a:ext uri="{FF2B5EF4-FFF2-40B4-BE49-F238E27FC236}">
-                <a16:creationId xmlns:a16="http://schemas.microsoft.com/office/drawing/2014/main" id="{7BE4EAD0-AC15-4CDD-A238-F7BCDF7E124E}"/>
+                <a16:creationId xmlns:a16="http://schemas.microsoft.com/office/drawing/2014/main" id="{9AB897BD-61E4-4E1E-B022-72C75ECB7D9B}"/>
               </a:ext>
             </a:extLst>
           </p:cNvPr>
@@ -23438,7 +23438,7 @@
           <p:cNvPr id="39" name="">
             <a:extLst xmlns:a="http://schemas.openxmlformats.org/drawingml/2006/main">
               <a:ext uri="{FF2B5EF4-FFF2-40B4-BE49-F238E27FC236}">
-                <a16:creationId xmlns:a16="http://schemas.microsoft.com/office/drawing/2014/main" id="{933B93C4-1F4D-4156-BEFC-79487EF7B8D1}"/>
+                <a16:creationId xmlns:a16="http://schemas.microsoft.com/office/drawing/2014/main" id="{45382574-474D-4829-9D65-84F6817BA0C2}"/>
               </a:ext>
             </a:extLst>
           </p:cNvPr>
@@ -23490,7 +23490,7 @@
           <p:cNvPr id="40" name="">
             <a:extLst xmlns:a="http://schemas.openxmlformats.org/drawingml/2006/main">
               <a:ext uri="{FF2B5EF4-FFF2-40B4-BE49-F238E27FC236}">
-                <a16:creationId xmlns:a16="http://schemas.microsoft.com/office/drawing/2014/main" id="{9B355672-A4B9-4524-8C45-4637D4527C5D}"/>
+                <a16:creationId xmlns:a16="http://schemas.microsoft.com/office/drawing/2014/main" id="{2BBB605F-6648-49A0-B4D4-D4FB23751A05}"/>
               </a:ext>
             </a:extLst>
           </p:cNvPr>
@@ -23542,7 +23542,7 @@
           <p:cNvPr id="41" name="">
             <a:extLst xmlns:a="http://schemas.openxmlformats.org/drawingml/2006/main">
               <a:ext uri="{FF2B5EF4-FFF2-40B4-BE49-F238E27FC236}">
-                <a16:creationId xmlns:a16="http://schemas.microsoft.com/office/drawing/2014/main" id="{E2F55359-1AB0-4AE6-A3FC-D53A2B797CCC}"/>
+                <a16:creationId xmlns:a16="http://schemas.microsoft.com/office/drawing/2014/main" id="{F1820F7B-BB9E-4780-A1BE-1548E4DB75C2}"/>
               </a:ext>
             </a:extLst>
           </p:cNvPr>
@@ -23594,7 +23594,7 @@
           <p:cNvPr id="42" name="">
             <a:extLst xmlns:a="http://schemas.openxmlformats.org/drawingml/2006/main">
               <a:ext uri="{FF2B5EF4-FFF2-40B4-BE49-F238E27FC236}">
-                <a16:creationId xmlns:a16="http://schemas.microsoft.com/office/drawing/2014/main" id="{F4A9E6AB-64C3-4EF0-A40C-9112A2314BB0}"/>
+                <a16:creationId xmlns:a16="http://schemas.microsoft.com/office/drawing/2014/main" id="{E9BEF66A-73EC-4D26-B416-9AE16B9F6950}"/>
               </a:ext>
             </a:extLst>
           </p:cNvPr>
@@ -23646,7 +23646,7 @@
           <p:cNvPr id="43" name="">
             <a:extLst xmlns:a="http://schemas.openxmlformats.org/drawingml/2006/main">
               <a:ext uri="{FF2B5EF4-FFF2-40B4-BE49-F238E27FC236}">
-                <a16:creationId xmlns:a16="http://schemas.microsoft.com/office/drawing/2014/main" id="{51561FFD-7B7E-464F-805B-1D091562753F}"/>
+                <a16:creationId xmlns:a16="http://schemas.microsoft.com/office/drawing/2014/main" id="{DDDD60D2-1F34-4B32-8AF8-2EB61BBD162C}"/>
               </a:ext>
             </a:extLst>
           </p:cNvPr>
@@ -23698,7 +23698,7 @@
           <p:cNvPr id="44" name="">
             <a:extLst xmlns:a="http://schemas.openxmlformats.org/drawingml/2006/main">
               <a:ext uri="{FF2B5EF4-FFF2-40B4-BE49-F238E27FC236}">
-                <a16:creationId xmlns:a16="http://schemas.microsoft.com/office/drawing/2014/main" id="{B72CAD3A-CE45-495A-A2AD-3E4F11A4BF1A}"/>
+                <a16:creationId xmlns:a16="http://schemas.microsoft.com/office/drawing/2014/main" id="{D76B7345-FAEF-4260-BE63-459F036C416E}"/>
               </a:ext>
             </a:extLst>
           </p:cNvPr>
@@ -23750,7 +23750,7 @@
           <p:cNvPr id="45" name="">
             <a:extLst xmlns:a="http://schemas.openxmlformats.org/drawingml/2006/main">
               <a:ext uri="{FF2B5EF4-FFF2-40B4-BE49-F238E27FC236}">
-                <a16:creationId xmlns:a16="http://schemas.microsoft.com/office/drawing/2014/main" id="{8321A43A-2837-44A3-8D07-8550BA639B0B}"/>
+                <a16:creationId xmlns:a16="http://schemas.microsoft.com/office/drawing/2014/main" id="{55EEBDDC-7CED-4651-96CA-9612322899B0}"/>
               </a:ext>
             </a:extLst>
           </p:cNvPr>
@@ -23781,7 +23781,7 @@
           <p:cNvPr id="46" name="">
             <a:extLst xmlns:a="http://schemas.openxmlformats.org/drawingml/2006/main">
               <a:ext uri="{FF2B5EF4-FFF2-40B4-BE49-F238E27FC236}">
-                <a16:creationId xmlns:a16="http://schemas.microsoft.com/office/drawing/2014/main" id="{B5DDD5E8-0F9A-4A63-922D-CE5F11EC6804}"/>
+                <a16:creationId xmlns:a16="http://schemas.microsoft.com/office/drawing/2014/main" id="{CA139E17-BD98-4AA2-A396-7E7FEA47EFF5}"/>
               </a:ext>
             </a:extLst>
           </p:cNvPr>
@@ -23812,7 +23812,7 @@
           <p:cNvPr id="47" name="">
             <a:extLst xmlns:a="http://schemas.openxmlformats.org/drawingml/2006/main">
               <a:ext uri="{FF2B5EF4-FFF2-40B4-BE49-F238E27FC236}">
-                <a16:creationId xmlns:a16="http://schemas.microsoft.com/office/drawing/2014/main" id="{058707A4-6155-47D9-8879-04F9F702A85C}"/>
+                <a16:creationId xmlns:a16="http://schemas.microsoft.com/office/drawing/2014/main" id="{EF84C76E-E412-4FA0-BBCF-5B84EF340EB7}"/>
               </a:ext>
             </a:extLst>
           </p:cNvPr>
@@ -23864,7 +23864,7 @@
           <p:cNvPr id="48" name="">
             <a:extLst xmlns:a="http://schemas.openxmlformats.org/drawingml/2006/main">
               <a:ext uri="{FF2B5EF4-FFF2-40B4-BE49-F238E27FC236}">
-                <a16:creationId xmlns:a16="http://schemas.microsoft.com/office/drawing/2014/main" id="{4AF7E40A-A359-4211-9B2C-88A3ED0E2097}"/>
+                <a16:creationId xmlns:a16="http://schemas.microsoft.com/office/drawing/2014/main" id="{232186FC-43DE-4C19-8680-B798190F14EC}"/>
               </a:ext>
             </a:extLst>
           </p:cNvPr>
@@ -23916,7 +23916,7 @@
           <p:cNvPr id="49" name="">
             <a:extLst xmlns:a="http://schemas.openxmlformats.org/drawingml/2006/main">
               <a:ext uri="{FF2B5EF4-FFF2-40B4-BE49-F238E27FC236}">
-                <a16:creationId xmlns:a16="http://schemas.microsoft.com/office/drawing/2014/main" id="{E970848C-8F4D-4A37-9236-1804A7E15671}"/>
+                <a16:creationId xmlns:a16="http://schemas.microsoft.com/office/drawing/2014/main" id="{F5DB2B9F-CA7E-4E9A-8195-EA65F870F3BE}"/>
               </a:ext>
             </a:extLst>
           </p:cNvPr>
@@ -23968,7 +23968,7 @@
           <p:cNvPr id="50" name="">
             <a:extLst xmlns:a="http://schemas.openxmlformats.org/drawingml/2006/main">
               <a:ext uri="{FF2B5EF4-FFF2-40B4-BE49-F238E27FC236}">
-                <a16:creationId xmlns:a16="http://schemas.microsoft.com/office/drawing/2014/main" id="{F5471A65-0008-4096-8674-0613DE63CC93}"/>
+                <a16:creationId xmlns:a16="http://schemas.microsoft.com/office/drawing/2014/main" id="{B4AD43F0-DA85-413D-B4F5-35DBD1DD05A6}"/>
               </a:ext>
             </a:extLst>
           </p:cNvPr>
@@ -24020,7 +24020,7 @@
           <p:cNvPr id="51" name="">
             <a:extLst xmlns:a="http://schemas.openxmlformats.org/drawingml/2006/main">
               <a:ext uri="{FF2B5EF4-FFF2-40B4-BE49-F238E27FC236}">
-                <a16:creationId xmlns:a16="http://schemas.microsoft.com/office/drawing/2014/main" id="{7779B076-DC1A-4DBE-A8F1-8C743B2F23F7}"/>
+                <a16:creationId xmlns:a16="http://schemas.microsoft.com/office/drawing/2014/main" id="{6884A297-5E66-4395-9613-7D084360C893}"/>
               </a:ext>
             </a:extLst>
           </p:cNvPr>
@@ -24072,7 +24072,7 @@
           <p:cNvPr id="52" name="">
             <a:extLst xmlns:a="http://schemas.openxmlformats.org/drawingml/2006/main">
               <a:ext uri="{FF2B5EF4-FFF2-40B4-BE49-F238E27FC236}">
-                <a16:creationId xmlns:a16="http://schemas.microsoft.com/office/drawing/2014/main" id="{FC9F4C83-A11F-4EF0-BA4D-0C2947E3F010}"/>
+                <a16:creationId xmlns:a16="http://schemas.microsoft.com/office/drawing/2014/main" id="{B5649239-15FF-4D61-BA5B-723CDF1870F3}"/>
               </a:ext>
             </a:extLst>
           </p:cNvPr>
@@ -24124,7 +24124,7 @@
           <p:cNvPr id="53" name="">
             <a:extLst xmlns:a="http://schemas.openxmlformats.org/drawingml/2006/main">
               <a:ext uri="{FF2B5EF4-FFF2-40B4-BE49-F238E27FC236}">
-                <a16:creationId xmlns:a16="http://schemas.microsoft.com/office/drawing/2014/main" id="{336F7F56-1E1C-49A4-83F5-D4F48A2022BC}"/>
+                <a16:creationId xmlns:a16="http://schemas.microsoft.com/office/drawing/2014/main" id="{F6AA17ED-2003-4FB7-B286-4C7EB353D43A}"/>
               </a:ext>
             </a:extLst>
           </p:cNvPr>
@@ -24176,7 +24176,7 @@
           <p:cNvPr id="54" name="">
             <a:extLst xmlns:a="http://schemas.openxmlformats.org/drawingml/2006/main">
               <a:ext uri="{FF2B5EF4-FFF2-40B4-BE49-F238E27FC236}">
-                <a16:creationId xmlns:a16="http://schemas.microsoft.com/office/drawing/2014/main" id="{DE34D0AE-4814-4B62-83BB-4DB9D73D7296}"/>
+                <a16:creationId xmlns:a16="http://schemas.microsoft.com/office/drawing/2014/main" id="{A346D9DA-F8AB-4B0A-9D25-A3D3A7E010FF}"/>
               </a:ext>
             </a:extLst>
           </p:cNvPr>
@@ -24207,7 +24207,7 @@
           <p:cNvPr id="55" name="">
             <a:extLst xmlns:a="http://schemas.openxmlformats.org/drawingml/2006/main">
               <a:ext uri="{FF2B5EF4-FFF2-40B4-BE49-F238E27FC236}">
-                <a16:creationId xmlns:a16="http://schemas.microsoft.com/office/drawing/2014/main" id="{B7FB80D5-8D54-40B6-884C-EC52F8D289C3}"/>
+                <a16:creationId xmlns:a16="http://schemas.microsoft.com/office/drawing/2014/main" id="{2F5E8667-3A10-4133-A959-4FBA1AFE1981}"/>
               </a:ext>
             </a:extLst>
           </p:cNvPr>
@@ -24259,7 +24259,7 @@
           <p:cNvPr id="56" name="">
             <a:extLst xmlns:a="http://schemas.openxmlformats.org/drawingml/2006/main">
               <a:ext uri="{FF2B5EF4-FFF2-40B4-BE49-F238E27FC236}">
-                <a16:creationId xmlns:a16="http://schemas.microsoft.com/office/drawing/2014/main" id="{498C264B-191D-4AE8-9433-C616EC608C87}"/>
+                <a16:creationId xmlns:a16="http://schemas.microsoft.com/office/drawing/2014/main" id="{35DC67CF-2FAE-4255-AE98-D79C576D4F0C}"/>
               </a:ext>
             </a:extLst>
           </p:cNvPr>
@@ -24311,7 +24311,7 @@
           <p:cNvPr id="57" name="">
             <a:extLst xmlns:a="http://schemas.openxmlformats.org/drawingml/2006/main">
               <a:ext uri="{FF2B5EF4-FFF2-40B4-BE49-F238E27FC236}">
-                <a16:creationId xmlns:a16="http://schemas.microsoft.com/office/drawing/2014/main" id="{ECCCF99C-E1C1-4967-8EE5-A04B010185A4}"/>
+                <a16:creationId xmlns:a16="http://schemas.microsoft.com/office/drawing/2014/main" id="{80FE4EF8-68FA-43F7-A990-7FC9B37923B5}"/>
               </a:ext>
             </a:extLst>
           </p:cNvPr>
@@ -24363,7 +24363,7 @@
           <p:cNvPr id="58" name="">
             <a:extLst xmlns:a="http://schemas.openxmlformats.org/drawingml/2006/main">
               <a:ext uri="{FF2B5EF4-FFF2-40B4-BE49-F238E27FC236}">
-                <a16:creationId xmlns:a16="http://schemas.microsoft.com/office/drawing/2014/main" id="{7257B982-9FA7-4AD2-916C-261CBA61CCEF}"/>
+                <a16:creationId xmlns:a16="http://schemas.microsoft.com/office/drawing/2014/main" id="{FCD1CCD9-8C50-48EF-87FB-D1509BF73171}"/>
               </a:ext>
             </a:extLst>
           </p:cNvPr>
@@ -24415,7 +24415,7 @@
           <p:cNvPr id="59" name="">
             <a:extLst xmlns:a="http://schemas.openxmlformats.org/drawingml/2006/main">
               <a:ext uri="{FF2B5EF4-FFF2-40B4-BE49-F238E27FC236}">
-                <a16:creationId xmlns:a16="http://schemas.microsoft.com/office/drawing/2014/main" id="{53A761B6-FC62-4301-AE4B-4459A11B1CEB}"/>
+                <a16:creationId xmlns:a16="http://schemas.microsoft.com/office/drawing/2014/main" id="{0F6502DF-661E-4875-AE34-BB080582D228}"/>
               </a:ext>
             </a:extLst>
           </p:cNvPr>
@@ -24467,7 +24467,7 @@
           <p:cNvPr id="60" name="">
             <a:extLst xmlns:a="http://schemas.openxmlformats.org/drawingml/2006/main">
               <a:ext uri="{FF2B5EF4-FFF2-40B4-BE49-F238E27FC236}">
-                <a16:creationId xmlns:a16="http://schemas.microsoft.com/office/drawing/2014/main" id="{D57DAC68-6E42-4D2B-9D1C-BDB4358094C8}"/>
+                <a16:creationId xmlns:a16="http://schemas.microsoft.com/office/drawing/2014/main" id="{C704BF9C-689A-4208-A035-A6A450B99F01}"/>
               </a:ext>
             </a:extLst>
           </p:cNvPr>
@@ -24519,7 +24519,7 @@
           <p:cNvPr id="61" name="">
             <a:extLst xmlns:a="http://schemas.openxmlformats.org/drawingml/2006/main">
               <a:ext uri="{FF2B5EF4-FFF2-40B4-BE49-F238E27FC236}">
-                <a16:creationId xmlns:a16="http://schemas.microsoft.com/office/drawing/2014/main" id="{07B809EA-494E-4149-954A-3C0466945FDA}"/>
+                <a16:creationId xmlns:a16="http://schemas.microsoft.com/office/drawing/2014/main" id="{9948CB01-937D-47CD-A684-9517AF514A6E}"/>
               </a:ext>
             </a:extLst>
           </p:cNvPr>
@@ -24571,7 +24571,7 @@
           <p:cNvPr id="62" name="">
             <a:extLst xmlns:a="http://schemas.openxmlformats.org/drawingml/2006/main">
               <a:ext uri="{FF2B5EF4-FFF2-40B4-BE49-F238E27FC236}">
-                <a16:creationId xmlns:a16="http://schemas.microsoft.com/office/drawing/2014/main" id="{751B1C11-AEFE-429F-814D-048679C32C86}"/>
+                <a16:creationId xmlns:a16="http://schemas.microsoft.com/office/drawing/2014/main" id="{335D2F55-30AD-4A3F-8DD3-470FDB74E381}"/>
               </a:ext>
             </a:extLst>
           </p:cNvPr>
@@ -24602,7 +24602,7 @@
           <p:cNvPr id="63" name="">
             <a:extLst xmlns:a="http://schemas.openxmlformats.org/drawingml/2006/main">
               <a:ext uri="{FF2B5EF4-FFF2-40B4-BE49-F238E27FC236}">
-                <a16:creationId xmlns:a16="http://schemas.microsoft.com/office/drawing/2014/main" id="{6C5D31F9-BBC3-4025-B968-D93CA91C5A75}"/>
+                <a16:creationId xmlns:a16="http://schemas.microsoft.com/office/drawing/2014/main" id="{CD2C8F76-5252-4C7A-B080-99E42627A1AD}"/>
               </a:ext>
             </a:extLst>
           </p:cNvPr>
@@ -24633,7 +24633,7 @@
           <p:cNvPr id="64" name="">
             <a:extLst xmlns:a="http://schemas.openxmlformats.org/drawingml/2006/main">
               <a:ext uri="{FF2B5EF4-FFF2-40B4-BE49-F238E27FC236}">
-                <a16:creationId xmlns:a16="http://schemas.microsoft.com/office/drawing/2014/main" id="{A88F3252-D7ED-453A-B752-F2E886EEF2CA}"/>
+                <a16:creationId xmlns:a16="http://schemas.microsoft.com/office/drawing/2014/main" id="{97C00C17-7BF6-4DDC-AD26-E96EB12804C0}"/>
               </a:ext>
             </a:extLst>
           </p:cNvPr>
@@ -24685,7 +24685,7 @@
           <p:cNvPr id="65" name="">
             <a:extLst xmlns:a="http://schemas.openxmlformats.org/drawingml/2006/main">
               <a:ext uri="{FF2B5EF4-FFF2-40B4-BE49-F238E27FC236}">
-                <a16:creationId xmlns:a16="http://schemas.microsoft.com/office/drawing/2014/main" id="{0B77DE1E-9D33-4BFE-9945-788205B2AA6D}"/>
+                <a16:creationId xmlns:a16="http://schemas.microsoft.com/office/drawing/2014/main" id="{656DFC00-D3F0-485F-BD8D-A97EDD89EF16}"/>
               </a:ext>
             </a:extLst>
           </p:cNvPr>
@@ -24737,7 +24737,7 @@
           <p:cNvPr id="66" name="">
             <a:extLst xmlns:a="http://schemas.openxmlformats.org/drawingml/2006/main">
               <a:ext uri="{FF2B5EF4-FFF2-40B4-BE49-F238E27FC236}">
-                <a16:creationId xmlns:a16="http://schemas.microsoft.com/office/drawing/2014/main" id="{37A3C9DB-DE66-42EF-8267-C1A8A1CE8935}"/>
+                <a16:creationId xmlns:a16="http://schemas.microsoft.com/office/drawing/2014/main" id="{D6FBB31A-FCD2-44D7-8CC9-F2E8B2DD8025}"/>
               </a:ext>
             </a:extLst>
           </p:cNvPr>
@@ -24789,7 +24789,7 @@
           <p:cNvPr id="67" name="">
             <a:extLst xmlns:a="http://schemas.openxmlformats.org/drawingml/2006/main">
               <a:ext uri="{FF2B5EF4-FFF2-40B4-BE49-F238E27FC236}">
-                <a16:creationId xmlns:a16="http://schemas.microsoft.com/office/drawing/2014/main" id="{9EE2B846-0C3C-43A6-95CA-4CDF0F3E4B08}"/>
+                <a16:creationId xmlns:a16="http://schemas.microsoft.com/office/drawing/2014/main" id="{78E9F832-C14B-425B-9149-7A96CFC5BB2A}"/>
               </a:ext>
             </a:extLst>
           </p:cNvPr>
@@ -24841,7 +24841,7 @@
           <p:cNvPr id="68" name="">
             <a:extLst xmlns:a="http://schemas.openxmlformats.org/drawingml/2006/main">
               <a:ext uri="{FF2B5EF4-FFF2-40B4-BE49-F238E27FC236}">
-                <a16:creationId xmlns:a16="http://schemas.microsoft.com/office/drawing/2014/main" id="{73C294F5-C05D-49E3-817E-69FC8075265A}"/>
+                <a16:creationId xmlns:a16="http://schemas.microsoft.com/office/drawing/2014/main" id="{85471072-E62F-4047-9394-8501078D0949}"/>
               </a:ext>
             </a:extLst>
           </p:cNvPr>
@@ -24893,7 +24893,7 @@
           <p:cNvPr id="69" name="">
             <a:extLst xmlns:a="http://schemas.openxmlformats.org/drawingml/2006/main">
               <a:ext uri="{FF2B5EF4-FFF2-40B4-BE49-F238E27FC236}">
-                <a16:creationId xmlns:a16="http://schemas.microsoft.com/office/drawing/2014/main" id="{21CAEE79-89CF-44D0-8CE5-EEC294F74BD3}"/>
+                <a16:creationId xmlns:a16="http://schemas.microsoft.com/office/drawing/2014/main" id="{DC2560F8-AF34-49E9-9D7D-9CC10A88E5DB}"/>
               </a:ext>
             </a:extLst>
           </p:cNvPr>
@@ -24945,7 +24945,7 @@
           <p:cNvPr id="70" name="">
             <a:extLst xmlns:a="http://schemas.openxmlformats.org/drawingml/2006/main">
               <a:ext uri="{FF2B5EF4-FFF2-40B4-BE49-F238E27FC236}">
-                <a16:creationId xmlns:a16="http://schemas.microsoft.com/office/drawing/2014/main" id="{47403BBE-30CF-4C91-B2DB-0AA59F451F1A}"/>
+                <a16:creationId xmlns:a16="http://schemas.microsoft.com/office/drawing/2014/main" id="{9014E381-EC42-4B8B-96E2-77A8754E3FCC}"/>
               </a:ext>
             </a:extLst>
           </p:cNvPr>
@@ -24997,7 +24997,7 @@
           <p:cNvPr id="71" name="">
             <a:extLst xmlns:a="http://schemas.openxmlformats.org/drawingml/2006/main">
               <a:ext uri="{FF2B5EF4-FFF2-40B4-BE49-F238E27FC236}">
-                <a16:creationId xmlns:a16="http://schemas.microsoft.com/office/drawing/2014/main" id="{AF602D61-C04E-489B-B4CC-A2BA38847966}"/>
+                <a16:creationId xmlns:a16="http://schemas.microsoft.com/office/drawing/2014/main" id="{BE1D24D0-3673-4C35-A038-EF92F7E85EB7}"/>
               </a:ext>
             </a:extLst>
           </p:cNvPr>
@@ -25028,7 +25028,7 @@
           <p:cNvPr id="72" name="">
             <a:extLst xmlns:a="http://schemas.openxmlformats.org/drawingml/2006/main">
               <a:ext uri="{FF2B5EF4-FFF2-40B4-BE49-F238E27FC236}">
-                <a16:creationId xmlns:a16="http://schemas.microsoft.com/office/drawing/2014/main" id="{49E0604F-B530-4BE2-9D55-A985FDDA4C50}"/>
+                <a16:creationId xmlns:a16="http://schemas.microsoft.com/office/drawing/2014/main" id="{C8356B09-127A-424D-83CF-479B12CBA079}"/>
               </a:ext>
             </a:extLst>
           </p:cNvPr>
@@ -25080,7 +25080,7 @@
           <p:cNvPr id="73" name="">
             <a:extLst xmlns:a="http://schemas.openxmlformats.org/drawingml/2006/main">
               <a:ext uri="{FF2B5EF4-FFF2-40B4-BE49-F238E27FC236}">
-                <a16:creationId xmlns:a16="http://schemas.microsoft.com/office/drawing/2014/main" id="{11AD26C3-8FC4-4130-A54E-4AD20729C171}"/>
+                <a16:creationId xmlns:a16="http://schemas.microsoft.com/office/drawing/2014/main" id="{33FB3DCA-098E-4212-8AE0-A84FDFE07A41}"/>
               </a:ext>
             </a:extLst>
           </p:cNvPr>
@@ -25132,7 +25132,7 @@
           <p:cNvPr id="74" name="">
             <a:extLst xmlns:a="http://schemas.openxmlformats.org/drawingml/2006/main">
               <a:ext uri="{FF2B5EF4-FFF2-40B4-BE49-F238E27FC236}">
-                <a16:creationId xmlns:a16="http://schemas.microsoft.com/office/drawing/2014/main" id="{D5E421F9-1229-4EA7-A4A4-1A5D4B3C8D21}"/>
+                <a16:creationId xmlns:a16="http://schemas.microsoft.com/office/drawing/2014/main" id="{2955CFA7-1E0D-4A45-B273-192B72876AF5}"/>
               </a:ext>
             </a:extLst>
           </p:cNvPr>
@@ -25184,7 +25184,7 @@
           <p:cNvPr id="75" name="">
             <a:extLst xmlns:a="http://schemas.openxmlformats.org/drawingml/2006/main">
               <a:ext uri="{FF2B5EF4-FFF2-40B4-BE49-F238E27FC236}">
-                <a16:creationId xmlns:a16="http://schemas.microsoft.com/office/drawing/2014/main" id="{59861414-DDF2-4692-85AC-32799A0FA854}"/>
+                <a16:creationId xmlns:a16="http://schemas.microsoft.com/office/drawing/2014/main" id="{047392A6-46F9-476B-9C35-07A8808F46BD}"/>
               </a:ext>
             </a:extLst>
           </p:cNvPr>
@@ -25236,7 +25236,7 @@
           <p:cNvPr id="76" name="">
             <a:extLst xmlns:a="http://schemas.openxmlformats.org/drawingml/2006/main">
               <a:ext uri="{FF2B5EF4-FFF2-40B4-BE49-F238E27FC236}">
-                <a16:creationId xmlns:a16="http://schemas.microsoft.com/office/drawing/2014/main" id="{A35D08F9-0D19-4DAC-8A0B-258AAB674B3B}"/>
+                <a16:creationId xmlns:a16="http://schemas.microsoft.com/office/drawing/2014/main" id="{82942352-8979-4735-865D-112D33399CB5}"/>
               </a:ext>
             </a:extLst>
           </p:cNvPr>
@@ -25288,7 +25288,7 @@
           <p:cNvPr id="77" name="">
             <a:extLst xmlns:a="http://schemas.openxmlformats.org/drawingml/2006/main">
               <a:ext uri="{FF2B5EF4-FFF2-40B4-BE49-F238E27FC236}">
-                <a16:creationId xmlns:a16="http://schemas.microsoft.com/office/drawing/2014/main" id="{59CE9063-C5F7-41EA-8FC8-43240EEDEC44}"/>
+                <a16:creationId xmlns:a16="http://schemas.microsoft.com/office/drawing/2014/main" id="{1B98DBD2-9316-49D6-BAEF-F0509ECD8946}"/>
               </a:ext>
             </a:extLst>
           </p:cNvPr>
@@ -25340,7 +25340,7 @@
           <p:cNvPr id="78" name="">
             <a:extLst xmlns:a="http://schemas.openxmlformats.org/drawingml/2006/main">
               <a:ext uri="{FF2B5EF4-FFF2-40B4-BE49-F238E27FC236}">
-                <a16:creationId xmlns:a16="http://schemas.microsoft.com/office/drawing/2014/main" id="{C24211F2-F199-4271-BCBE-EEE13BBC859E}"/>
+                <a16:creationId xmlns:a16="http://schemas.microsoft.com/office/drawing/2014/main" id="{F73D540A-C9B0-43F2-A2EB-5E9449D73980}"/>
               </a:ext>
             </a:extLst>
           </p:cNvPr>
@@ -25392,7 +25392,7 @@
           <p:cNvPr id="79" name="">
             <a:extLst xmlns:a="http://schemas.openxmlformats.org/drawingml/2006/main">
               <a:ext uri="{FF2B5EF4-FFF2-40B4-BE49-F238E27FC236}">
-                <a16:creationId xmlns:a16="http://schemas.microsoft.com/office/drawing/2014/main" id="{442BEA77-F04E-442F-AE7C-F37BC7002230}"/>
+                <a16:creationId xmlns:a16="http://schemas.microsoft.com/office/drawing/2014/main" id="{A9533219-F778-46CA-8179-6520D33658DC}"/>
               </a:ext>
             </a:extLst>
           </p:cNvPr>
@@ -25423,7 +25423,7 @@
           <p:cNvPr id="80" name="">
             <a:extLst xmlns:a="http://schemas.openxmlformats.org/drawingml/2006/main">
               <a:ext uri="{FF2B5EF4-FFF2-40B4-BE49-F238E27FC236}">
-                <a16:creationId xmlns:a16="http://schemas.microsoft.com/office/drawing/2014/main" id="{4A341DC7-F1F3-48CA-8FCF-21AFF5EB8C89}"/>
+                <a16:creationId xmlns:a16="http://schemas.microsoft.com/office/drawing/2014/main" id="{661083B4-251B-4274-8170-994304B7B373}"/>
               </a:ext>
             </a:extLst>
           </p:cNvPr>
@@ -25454,7 +25454,7 @@
           <p:cNvPr id="81" name="">
             <a:extLst xmlns:a="http://schemas.openxmlformats.org/drawingml/2006/main">
               <a:ext uri="{FF2B5EF4-FFF2-40B4-BE49-F238E27FC236}">
-                <a16:creationId xmlns:a16="http://schemas.microsoft.com/office/drawing/2014/main" id="{F12C8527-70B1-475A-8B13-4E4F310B42EA}"/>
+                <a16:creationId xmlns:a16="http://schemas.microsoft.com/office/drawing/2014/main" id="{4BDB3D3C-85CF-40FE-9ACA-F53572AF8917}"/>
               </a:ext>
             </a:extLst>
           </p:cNvPr>
@@ -25506,7 +25506,7 @@
           <p:cNvPr id="82" name="">
             <a:extLst xmlns:a="http://schemas.openxmlformats.org/drawingml/2006/main">
               <a:ext uri="{FF2B5EF4-FFF2-40B4-BE49-F238E27FC236}">
-                <a16:creationId xmlns:a16="http://schemas.microsoft.com/office/drawing/2014/main" id="{1380B20E-4551-44AC-B6EB-5FE70E9A51DC}"/>
+                <a16:creationId xmlns:a16="http://schemas.microsoft.com/office/drawing/2014/main" id="{1559AAD9-C29C-4B9C-A8F2-DB3DB4832500}"/>
               </a:ext>
             </a:extLst>
           </p:cNvPr>
@@ -25558,7 +25558,7 @@
           <p:cNvPr id="83" name="">
             <a:extLst xmlns:a="http://schemas.openxmlformats.org/drawingml/2006/main">
               <a:ext uri="{FF2B5EF4-FFF2-40B4-BE49-F238E27FC236}">
-                <a16:creationId xmlns:a16="http://schemas.microsoft.com/office/drawing/2014/main" id="{39F08160-57A3-4FE8-905D-DB9E4E7BDF9E}"/>
+                <a16:creationId xmlns:a16="http://schemas.microsoft.com/office/drawing/2014/main" id="{6255C93C-514C-4A11-A26F-C642C4504D7B}"/>
               </a:ext>
             </a:extLst>
           </p:cNvPr>
@@ -25610,7 +25610,7 @@
           <p:cNvPr id="84" name="">
             <a:extLst xmlns:a="http://schemas.openxmlformats.org/drawingml/2006/main">
               <a:ext uri="{FF2B5EF4-FFF2-40B4-BE49-F238E27FC236}">
-                <a16:creationId xmlns:a16="http://schemas.microsoft.com/office/drawing/2014/main" id="{BC8C614D-713B-4301-9E47-4D34AB2FDA8C}"/>
+                <a16:creationId xmlns:a16="http://schemas.microsoft.com/office/drawing/2014/main" id="{160B524A-A0A5-4D5C-9A74-B703356A6089}"/>
               </a:ext>
             </a:extLst>
           </p:cNvPr>
@@ -25662,7 +25662,7 @@
           <p:cNvPr id="85" name="">
             <a:extLst xmlns:a="http://schemas.openxmlformats.org/drawingml/2006/main">
               <a:ext uri="{FF2B5EF4-FFF2-40B4-BE49-F238E27FC236}">
-                <a16:creationId xmlns:a16="http://schemas.microsoft.com/office/drawing/2014/main" id="{098C845D-341A-4E37-B130-EF5CFB19B341}"/>
+                <a16:creationId xmlns:a16="http://schemas.microsoft.com/office/drawing/2014/main" id="{8908A34B-7ECE-42B3-97C6-C11F36786D96}"/>
               </a:ext>
             </a:extLst>
           </p:cNvPr>
@@ -25714,7 +25714,7 @@
           <p:cNvPr id="86" name="">
             <a:extLst xmlns:a="http://schemas.openxmlformats.org/drawingml/2006/main">
               <a:ext uri="{FF2B5EF4-FFF2-40B4-BE49-F238E27FC236}">
-                <a16:creationId xmlns:a16="http://schemas.microsoft.com/office/drawing/2014/main" id="{AF5BC76D-3019-40EB-9161-B5964934435C}"/>
+                <a16:creationId xmlns:a16="http://schemas.microsoft.com/office/drawing/2014/main" id="{B5A2F13A-F3BD-4DF6-BBD5-F0B4A0B6C863}"/>
               </a:ext>
             </a:extLst>
           </p:cNvPr>
@@ -25766,7 +25766,7 @@
           <p:cNvPr id="87" name="">
             <a:extLst xmlns:a="http://schemas.openxmlformats.org/drawingml/2006/main">
               <a:ext uri="{FF2B5EF4-FFF2-40B4-BE49-F238E27FC236}">
-                <a16:creationId xmlns:a16="http://schemas.microsoft.com/office/drawing/2014/main" id="{FB8AD88D-791B-40AB-9BF4-A3D20818EACA}"/>
+                <a16:creationId xmlns:a16="http://schemas.microsoft.com/office/drawing/2014/main" id="{BA911B17-A92E-48B8-A38B-B5F8BDB98A91}"/>
               </a:ext>
             </a:extLst>
           </p:cNvPr>
@@ -25818,7 +25818,7 @@
           <p:cNvPr id="88" name="">
             <a:extLst xmlns:a="http://schemas.openxmlformats.org/drawingml/2006/main">
               <a:ext uri="{FF2B5EF4-FFF2-40B4-BE49-F238E27FC236}">
-                <a16:creationId xmlns:a16="http://schemas.microsoft.com/office/drawing/2014/main" id="{21FD60D0-B771-4F29-A5E9-6302B36C0BC0}"/>
+                <a16:creationId xmlns:a16="http://schemas.microsoft.com/office/drawing/2014/main" id="{FC1B0209-9380-4156-9FE1-2B9407E91BBF}"/>
               </a:ext>
             </a:extLst>
           </p:cNvPr>
@@ -25849,7 +25849,7 @@
           <p:cNvPr id="89" name="">
             <a:extLst xmlns:a="http://schemas.openxmlformats.org/drawingml/2006/main">
               <a:ext uri="{FF2B5EF4-FFF2-40B4-BE49-F238E27FC236}">
-                <a16:creationId xmlns:a16="http://schemas.microsoft.com/office/drawing/2014/main" id="{455BFE1B-8AFA-461D-9597-B454B08F89AC}"/>
+                <a16:creationId xmlns:a16="http://schemas.microsoft.com/office/drawing/2014/main" id="{32CA67E3-C5B9-4833-A6CD-4D935359A9F2}"/>
               </a:ext>
             </a:extLst>
           </p:cNvPr>
@@ -25901,7 +25901,7 @@
           <p:cNvPr id="90" name="">
             <a:extLst xmlns:a="http://schemas.openxmlformats.org/drawingml/2006/main">
               <a:ext uri="{FF2B5EF4-FFF2-40B4-BE49-F238E27FC236}">
-                <a16:creationId xmlns:a16="http://schemas.microsoft.com/office/drawing/2014/main" id="{1925E36E-6BF9-464E-8681-1D5C00FE4333}"/>
+                <a16:creationId xmlns:a16="http://schemas.microsoft.com/office/drawing/2014/main" id="{0A32ECF3-A473-4306-954F-E8ABA43CA992}"/>
               </a:ext>
             </a:extLst>
           </p:cNvPr>
@@ -25953,7 +25953,7 @@
           <p:cNvPr id="91" name="">
             <a:extLst xmlns:a="http://schemas.openxmlformats.org/drawingml/2006/main">
               <a:ext uri="{FF2B5EF4-FFF2-40B4-BE49-F238E27FC236}">
-                <a16:creationId xmlns:a16="http://schemas.microsoft.com/office/drawing/2014/main" id="{E25E91DD-7AA8-4B16-B461-3A5F11FA40FF}"/>
+                <a16:creationId xmlns:a16="http://schemas.microsoft.com/office/drawing/2014/main" id="{1D35B86A-1C58-403E-8A57-B31E5814D828}"/>
               </a:ext>
             </a:extLst>
           </p:cNvPr>
@@ -26005,7 +26005,7 @@
           <p:cNvPr id="92" name="">
             <a:extLst xmlns:a="http://schemas.openxmlformats.org/drawingml/2006/main">
               <a:ext uri="{FF2B5EF4-FFF2-40B4-BE49-F238E27FC236}">
-                <a16:creationId xmlns:a16="http://schemas.microsoft.com/office/drawing/2014/main" id="{E607B138-D0B6-4678-92F6-F4FE65969442}"/>
+                <a16:creationId xmlns:a16="http://schemas.microsoft.com/office/drawing/2014/main" id="{369CA534-CB8E-42A5-A1C9-8ECDC9635A0C}"/>
               </a:ext>
             </a:extLst>
           </p:cNvPr>
@@ -26057,7 +26057,7 @@
           <p:cNvPr id="93" name="">
             <a:extLst xmlns:a="http://schemas.openxmlformats.org/drawingml/2006/main">
               <a:ext uri="{FF2B5EF4-FFF2-40B4-BE49-F238E27FC236}">
-                <a16:creationId xmlns:a16="http://schemas.microsoft.com/office/drawing/2014/main" id="{1E512218-A6F5-473B-B157-5ED48B332B71}"/>
+                <a16:creationId xmlns:a16="http://schemas.microsoft.com/office/drawing/2014/main" id="{3B9FC85E-28B3-46DD-BB75-A703BAAC313D}"/>
               </a:ext>
             </a:extLst>
           </p:cNvPr>
@@ -26109,7 +26109,7 @@
           <p:cNvPr id="94" name="">
             <a:extLst xmlns:a="http://schemas.openxmlformats.org/drawingml/2006/main">
               <a:ext uri="{FF2B5EF4-FFF2-40B4-BE49-F238E27FC236}">
-                <a16:creationId xmlns:a16="http://schemas.microsoft.com/office/drawing/2014/main" id="{2B50CBBD-88C1-4D00-86A4-C422D3030EC6}"/>
+                <a16:creationId xmlns:a16="http://schemas.microsoft.com/office/drawing/2014/main" id="{7EA67A68-DAA6-4FB3-8A59-F0178D7F8349}"/>
               </a:ext>
             </a:extLst>
           </p:cNvPr>
@@ -26161,7 +26161,7 @@
           <p:cNvPr id="95" name="">
             <a:extLst xmlns:a="http://schemas.openxmlformats.org/drawingml/2006/main">
               <a:ext uri="{FF2B5EF4-FFF2-40B4-BE49-F238E27FC236}">
-                <a16:creationId xmlns:a16="http://schemas.microsoft.com/office/drawing/2014/main" id="{A7095734-AC47-4EDD-B483-508A7D3A383B}"/>
+                <a16:creationId xmlns:a16="http://schemas.microsoft.com/office/drawing/2014/main" id="{BDF21F5A-54EB-4CDE-B41A-7B4D9253C9D2}"/>
               </a:ext>
             </a:extLst>
           </p:cNvPr>
@@ -26213,7 +26213,7 @@
           <p:cNvPr id="96" name="">
             <a:extLst xmlns:a="http://schemas.openxmlformats.org/drawingml/2006/main">
               <a:ext uri="{FF2B5EF4-FFF2-40B4-BE49-F238E27FC236}">
-                <a16:creationId xmlns:a16="http://schemas.microsoft.com/office/drawing/2014/main" id="{35398B0D-0778-4063-88E2-A6FF2F983CB3}"/>
+                <a16:creationId xmlns:a16="http://schemas.microsoft.com/office/drawing/2014/main" id="{1EA11A08-661A-47BB-A9C6-C4B5AA50465E}"/>
               </a:ext>
             </a:extLst>
           </p:cNvPr>
@@ -26244,7 +26244,7 @@
           <p:cNvPr id="97" name="">
             <a:extLst xmlns:a="http://schemas.openxmlformats.org/drawingml/2006/main">
               <a:ext uri="{FF2B5EF4-FFF2-40B4-BE49-F238E27FC236}">
-                <a16:creationId xmlns:a16="http://schemas.microsoft.com/office/drawing/2014/main" id="{18856DA8-192E-47BA-823E-4A302314B433}"/>
+                <a16:creationId xmlns:a16="http://schemas.microsoft.com/office/drawing/2014/main" id="{EFDC8EF2-F548-4965-9920-AEA32221A6FC}"/>
               </a:ext>
             </a:extLst>
           </p:cNvPr>
@@ -26275,7 +26275,7 @@
           <p:cNvPr id="98" name="">
             <a:extLst xmlns:a="http://schemas.openxmlformats.org/drawingml/2006/main">
               <a:ext uri="{FF2B5EF4-FFF2-40B4-BE49-F238E27FC236}">
-                <a16:creationId xmlns:a16="http://schemas.microsoft.com/office/drawing/2014/main" id="{CBE8B7C7-7AA7-4F47-B210-B9D51D109E3A}"/>
+                <a16:creationId xmlns:a16="http://schemas.microsoft.com/office/drawing/2014/main" id="{233A9154-5620-4D7E-B7D1-FFA7B1613F45}"/>
               </a:ext>
             </a:extLst>
           </p:cNvPr>
@@ -26327,7 +26327,7 @@
           <p:cNvPr id="99" name="">
             <a:extLst xmlns:a="http://schemas.openxmlformats.org/drawingml/2006/main">
               <a:ext uri="{FF2B5EF4-FFF2-40B4-BE49-F238E27FC236}">
-                <a16:creationId xmlns:a16="http://schemas.microsoft.com/office/drawing/2014/main" id="{1DAD7C05-1909-4E32-B469-FC6BFFAA9640}"/>
+                <a16:creationId xmlns:a16="http://schemas.microsoft.com/office/drawing/2014/main" id="{4F5C8C8B-FE90-493D-A07A-7B76F6693177}"/>
               </a:ext>
             </a:extLst>
           </p:cNvPr>
@@ -26379,7 +26379,7 @@
           <p:cNvPr id="100" name="">
             <a:extLst xmlns:a="http://schemas.openxmlformats.org/drawingml/2006/main">
               <a:ext uri="{FF2B5EF4-FFF2-40B4-BE49-F238E27FC236}">
-                <a16:creationId xmlns:a16="http://schemas.microsoft.com/office/drawing/2014/main" id="{5770AB99-CA69-4351-910E-9EC08E25EB5F}"/>
+                <a16:creationId xmlns:a16="http://schemas.microsoft.com/office/drawing/2014/main" id="{721D632E-DC6F-4EF8-93F5-7D05D748A928}"/>
               </a:ext>
             </a:extLst>
           </p:cNvPr>
@@ -26431,7 +26431,7 @@
           <p:cNvPr id="101" name="">
             <a:extLst xmlns:a="http://schemas.openxmlformats.org/drawingml/2006/main">
               <a:ext uri="{FF2B5EF4-FFF2-40B4-BE49-F238E27FC236}">
-                <a16:creationId xmlns:a16="http://schemas.microsoft.com/office/drawing/2014/main" id="{CB0AFBEA-355A-4738-BFE1-A5D1754C6F46}"/>
+                <a16:creationId xmlns:a16="http://schemas.microsoft.com/office/drawing/2014/main" id="{A1C5C7E7-BC18-4207-8FB6-FE48C7F40CB5}"/>
               </a:ext>
             </a:extLst>
           </p:cNvPr>
@@ -26483,7 +26483,7 @@
           <p:cNvPr id="102" name="">
             <a:extLst xmlns:a="http://schemas.openxmlformats.org/drawingml/2006/main">
               <a:ext uri="{FF2B5EF4-FFF2-40B4-BE49-F238E27FC236}">
-                <a16:creationId xmlns:a16="http://schemas.microsoft.com/office/drawing/2014/main" id="{3D4CAF8D-4D88-42F2-A9C5-5BA3A0922A00}"/>
+                <a16:creationId xmlns:a16="http://schemas.microsoft.com/office/drawing/2014/main" id="{4AD5E8B8-EE14-4319-A2C4-D038A0D79C53}"/>
               </a:ext>
             </a:extLst>
           </p:cNvPr>
@@ -26535,7 +26535,7 @@
           <p:cNvPr id="103" name="">
             <a:extLst xmlns:a="http://schemas.openxmlformats.org/drawingml/2006/main">
               <a:ext uri="{FF2B5EF4-FFF2-40B4-BE49-F238E27FC236}">
-                <a16:creationId xmlns:a16="http://schemas.microsoft.com/office/drawing/2014/main" id="{F11688C3-2960-432E-9787-68DBB6522BCC}"/>
+                <a16:creationId xmlns:a16="http://schemas.microsoft.com/office/drawing/2014/main" id="{FD1DA85D-CD96-4318-A802-FCB5848A3D20}"/>
               </a:ext>
             </a:extLst>
           </p:cNvPr>
@@ -26587,7 +26587,7 @@
           <p:cNvPr id="104" name="">
             <a:extLst xmlns:a="http://schemas.openxmlformats.org/drawingml/2006/main">
               <a:ext uri="{FF2B5EF4-FFF2-40B4-BE49-F238E27FC236}">
-                <a16:creationId xmlns:a16="http://schemas.microsoft.com/office/drawing/2014/main" id="{1FF4C4C2-3DC0-4159-9227-4CD7E5888429}"/>
+                <a16:creationId xmlns:a16="http://schemas.microsoft.com/office/drawing/2014/main" id="{C6953C73-6633-4427-B239-5D9D7CB0019A}"/>
               </a:ext>
             </a:extLst>
           </p:cNvPr>
@@ -26639,7 +26639,7 @@
           <p:cNvPr id="105" name="">
             <a:extLst xmlns:a="http://schemas.openxmlformats.org/drawingml/2006/main">
               <a:ext uri="{FF2B5EF4-FFF2-40B4-BE49-F238E27FC236}">
-                <a16:creationId xmlns:a16="http://schemas.microsoft.com/office/drawing/2014/main" id="{C03A185D-1EC5-4AB3-9F5B-C2AD21D43834}"/>
+                <a16:creationId xmlns:a16="http://schemas.microsoft.com/office/drawing/2014/main" id="{74CB9CCE-39AB-4553-82DA-DA6ACE62DCDA}"/>
               </a:ext>
             </a:extLst>
           </p:cNvPr>
@@ -26670,7 +26670,7 @@
           <p:cNvPr id="106" name="">
             <a:extLst xmlns:a="http://schemas.openxmlformats.org/drawingml/2006/main">
               <a:ext uri="{FF2B5EF4-FFF2-40B4-BE49-F238E27FC236}">
-                <a16:creationId xmlns:a16="http://schemas.microsoft.com/office/drawing/2014/main" id="{04505BAE-4D8A-4DCE-9931-788DE7D2901F}"/>
+                <a16:creationId xmlns:a16="http://schemas.microsoft.com/office/drawing/2014/main" id="{258F0262-BFEC-420D-924F-8DFE7A988DF5}"/>
               </a:ext>
             </a:extLst>
           </p:cNvPr>
@@ -26722,7 +26722,7 @@
           <p:cNvPr id="107" name="">
             <a:extLst xmlns:a="http://schemas.openxmlformats.org/drawingml/2006/main">
               <a:ext uri="{FF2B5EF4-FFF2-40B4-BE49-F238E27FC236}">
-                <a16:creationId xmlns:a16="http://schemas.microsoft.com/office/drawing/2014/main" id="{B0210C36-6DE2-4C19-A2B5-3AFC204D42D7}"/>
+                <a16:creationId xmlns:a16="http://schemas.microsoft.com/office/drawing/2014/main" id="{568D7AD5-EE11-4EA9-BEBA-9B98DA7C21C7}"/>
               </a:ext>
             </a:extLst>
           </p:cNvPr>
@@ -26774,7 +26774,7 @@
           <p:cNvPr id="108" name="">
             <a:extLst xmlns:a="http://schemas.openxmlformats.org/drawingml/2006/main">
               <a:ext uri="{FF2B5EF4-FFF2-40B4-BE49-F238E27FC236}">
-                <a16:creationId xmlns:a16="http://schemas.microsoft.com/office/drawing/2014/main" id="{5B3DFD45-9124-4FA0-8F91-59C9303EE21E}"/>
+                <a16:creationId xmlns:a16="http://schemas.microsoft.com/office/drawing/2014/main" id="{05CE4682-3FFA-4CE0-8423-B045CEB0604B}"/>
               </a:ext>
             </a:extLst>
           </p:cNvPr>
@@ -26826,7 +26826,7 @@
           <p:cNvPr id="109" name="">
             <a:extLst xmlns:a="http://schemas.openxmlformats.org/drawingml/2006/main">
               <a:ext uri="{FF2B5EF4-FFF2-40B4-BE49-F238E27FC236}">
-                <a16:creationId xmlns:a16="http://schemas.microsoft.com/office/drawing/2014/main" id="{AF6416B2-99A5-4698-8B5A-9AF00A58DF2B}"/>
+                <a16:creationId xmlns:a16="http://schemas.microsoft.com/office/drawing/2014/main" id="{BECD2129-4308-4032-8FB6-0FCCACAE1C51}"/>
               </a:ext>
             </a:extLst>
           </p:cNvPr>
@@ -26878,7 +26878,7 @@
           <p:cNvPr id="110" name="">
             <a:extLst xmlns:a="http://schemas.openxmlformats.org/drawingml/2006/main">
               <a:ext uri="{FF2B5EF4-FFF2-40B4-BE49-F238E27FC236}">
-                <a16:creationId xmlns:a16="http://schemas.microsoft.com/office/drawing/2014/main" id="{4A8C8850-8519-4D86-8F96-B6D100BE2608}"/>
+                <a16:creationId xmlns:a16="http://schemas.microsoft.com/office/drawing/2014/main" id="{BD1B7DE3-DBEF-49DE-9F60-FA4B35D7AD64}"/>
               </a:ext>
             </a:extLst>
           </p:cNvPr>
@@ -26930,7 +26930,7 @@
           <p:cNvPr id="111" name="">
             <a:extLst xmlns:a="http://schemas.openxmlformats.org/drawingml/2006/main">
               <a:ext uri="{FF2B5EF4-FFF2-40B4-BE49-F238E27FC236}">
-                <a16:creationId xmlns:a16="http://schemas.microsoft.com/office/drawing/2014/main" id="{2FED4DE4-B1B4-4F0B-87D8-19EE9AE1519C}"/>
+                <a16:creationId xmlns:a16="http://schemas.microsoft.com/office/drawing/2014/main" id="{8BB4A737-3102-4C2E-91E3-62059F45E492}"/>
               </a:ext>
             </a:extLst>
           </p:cNvPr>
@@ -26982,7 +26982,7 @@
           <p:cNvPr id="112" name="">
             <a:extLst xmlns:a="http://schemas.openxmlformats.org/drawingml/2006/main">
               <a:ext uri="{FF2B5EF4-FFF2-40B4-BE49-F238E27FC236}">
-                <a16:creationId xmlns:a16="http://schemas.microsoft.com/office/drawing/2014/main" id="{605747C5-1E5B-49C3-B017-C5F4359FC52F}"/>
+                <a16:creationId xmlns:a16="http://schemas.microsoft.com/office/drawing/2014/main" id="{39539378-673F-4327-82C4-7AC9D7994B5B}"/>
               </a:ext>
             </a:extLst>
           </p:cNvPr>
@@ -27034,7 +27034,7 @@
           <p:cNvPr id="113" name="">
             <a:extLst xmlns:a="http://schemas.openxmlformats.org/drawingml/2006/main">
               <a:ext uri="{FF2B5EF4-FFF2-40B4-BE49-F238E27FC236}">
-                <a16:creationId xmlns:a16="http://schemas.microsoft.com/office/drawing/2014/main" id="{F690CF47-9E54-4EDE-B86E-E5BA2ECD5F5A}"/>
+                <a16:creationId xmlns:a16="http://schemas.microsoft.com/office/drawing/2014/main" id="{54E7803E-C0F5-4172-9931-9F41F82EEA00}"/>
               </a:ext>
             </a:extLst>
           </p:cNvPr>
@@ -27065,7 +27065,7 @@
           <p:cNvPr id="114" name="">
             <a:extLst xmlns:a="http://schemas.openxmlformats.org/drawingml/2006/main">
               <a:ext uri="{FF2B5EF4-FFF2-40B4-BE49-F238E27FC236}">
-                <a16:creationId xmlns:a16="http://schemas.microsoft.com/office/drawing/2014/main" id="{59EC79DF-D031-4A4C-91D4-C9AB7D12B6AC}"/>
+                <a16:creationId xmlns:a16="http://schemas.microsoft.com/office/drawing/2014/main" id="{CF732762-0087-4C5D-9758-B8C02064955B}"/>
               </a:ext>
             </a:extLst>
           </p:cNvPr>
@@ -27096,7 +27096,7 @@
           <p:cNvPr id="115" name="">
             <a:extLst xmlns:a="http://schemas.openxmlformats.org/drawingml/2006/main">
               <a:ext uri="{FF2B5EF4-FFF2-40B4-BE49-F238E27FC236}">
-                <a16:creationId xmlns:a16="http://schemas.microsoft.com/office/drawing/2014/main" id="{16E2E197-2DBD-43AB-A3D8-76682A8FE035}"/>
+                <a16:creationId xmlns:a16="http://schemas.microsoft.com/office/drawing/2014/main" id="{08038A33-FE01-476C-AFCF-64C57F8116B8}"/>
               </a:ext>
             </a:extLst>
           </p:cNvPr>
@@ -27148,7 +27148,7 @@
           <p:cNvPr id="116" name="">
             <a:extLst xmlns:a="http://schemas.openxmlformats.org/drawingml/2006/main">
               <a:ext uri="{FF2B5EF4-FFF2-40B4-BE49-F238E27FC236}">
-                <a16:creationId xmlns:a16="http://schemas.microsoft.com/office/drawing/2014/main" id="{68BC0210-59EE-4F45-84BA-3525B9F629AC}"/>
+                <a16:creationId xmlns:a16="http://schemas.microsoft.com/office/drawing/2014/main" id="{E3BC141C-08B2-414D-B4B8-AC0A6FBDAFC2}"/>
               </a:ext>
             </a:extLst>
           </p:cNvPr>
@@ -27200,7 +27200,7 @@
           <p:cNvPr id="117" name="">
             <a:extLst xmlns:a="http://schemas.openxmlformats.org/drawingml/2006/main">
               <a:ext uri="{FF2B5EF4-FFF2-40B4-BE49-F238E27FC236}">
-                <a16:creationId xmlns:a16="http://schemas.microsoft.com/office/drawing/2014/main" id="{5D82EE7C-A90D-4697-AD99-5DC13C4BB8C7}"/>
+                <a16:creationId xmlns:a16="http://schemas.microsoft.com/office/drawing/2014/main" id="{2BC1587C-BC9E-48DC-A27E-64B743CFF578}"/>
               </a:ext>
             </a:extLst>
           </p:cNvPr>
@@ -27252,7 +27252,7 @@
           <p:cNvPr id="118" name="">
             <a:extLst xmlns:a="http://schemas.openxmlformats.org/drawingml/2006/main">
               <a:ext uri="{FF2B5EF4-FFF2-40B4-BE49-F238E27FC236}">
-                <a16:creationId xmlns:a16="http://schemas.microsoft.com/office/drawing/2014/main" id="{6D5F1B92-239B-486B-91C2-A889F4AF6CB7}"/>
+                <a16:creationId xmlns:a16="http://schemas.microsoft.com/office/drawing/2014/main" id="{C4FD1D67-FD6D-4DB3-8B4D-D2847090A30A}"/>
               </a:ext>
             </a:extLst>
           </p:cNvPr>
@@ -27304,7 +27304,7 @@
           <p:cNvPr id="119" name="">
             <a:extLst xmlns:a="http://schemas.openxmlformats.org/drawingml/2006/main">
               <a:ext uri="{FF2B5EF4-FFF2-40B4-BE49-F238E27FC236}">
-                <a16:creationId xmlns:a16="http://schemas.microsoft.com/office/drawing/2014/main" id="{C07DB948-25E5-42F7-B647-441F3773BFF8}"/>
+                <a16:creationId xmlns:a16="http://schemas.microsoft.com/office/drawing/2014/main" id="{239374DE-00E5-455E-8BDA-D8C8EE90320D}"/>
               </a:ext>
             </a:extLst>
           </p:cNvPr>
@@ -27356,7 +27356,7 @@
           <p:cNvPr id="120" name="">
             <a:extLst xmlns:a="http://schemas.openxmlformats.org/drawingml/2006/main">
               <a:ext uri="{FF2B5EF4-FFF2-40B4-BE49-F238E27FC236}">
-                <a16:creationId xmlns:a16="http://schemas.microsoft.com/office/drawing/2014/main" id="{FA66AF3E-22ED-4471-A742-0BA62A43299A}"/>
+                <a16:creationId xmlns:a16="http://schemas.microsoft.com/office/drawing/2014/main" id="{F09041B1-618B-4610-8CCE-1F7E5EDADA20}"/>
               </a:ext>
             </a:extLst>
           </p:cNvPr>
@@ -27408,7 +27408,7 @@
           <p:cNvPr id="121" name="">
             <a:extLst xmlns:a="http://schemas.openxmlformats.org/drawingml/2006/main">
               <a:ext uri="{FF2B5EF4-FFF2-40B4-BE49-F238E27FC236}">
-                <a16:creationId xmlns:a16="http://schemas.microsoft.com/office/drawing/2014/main" id="{8EBE2ABF-C12C-4184-9821-AE0314259F70}"/>
+                <a16:creationId xmlns:a16="http://schemas.microsoft.com/office/drawing/2014/main" id="{04A6E09A-21F2-40F9-AFF8-6ED1189EA40A}"/>
               </a:ext>
             </a:extLst>
           </p:cNvPr>
@@ -27458,7 +27458,7 @@
     </p:spTree>
     <p:extLst>
       <p:ext uri="{BB962C8B-B14F-4D97-AF65-F5344CB8AC3E}">
-        <p14:creationId xmlns:p14="http://schemas.microsoft.com/office/powerpoint/2010/main" val="1727015435"/>
+        <p14:creationId xmlns:p14="http://schemas.microsoft.com/office/powerpoint/2010/main" val="50550671"/>
       </p:ext>
     </p:extLst>
   </p:cSld>
@@ -27489,7 +27489,7 @@
           <p:cNvPr id="9" name="">
             <a:extLst xmlns:a="http://schemas.openxmlformats.org/drawingml/2006/main">
               <a:ext uri="{FF2B5EF4-FFF2-40B4-BE49-F238E27FC236}">
-                <a16:creationId xmlns:a16="http://schemas.microsoft.com/office/drawing/2014/main" id="{6635AB25-74E9-467F-8493-D63AA0B7552D}"/>
+                <a16:creationId xmlns:a16="http://schemas.microsoft.com/office/drawing/2014/main" id="{0DCC7F3B-B77B-42F7-ACC0-11462AD62FFB}"/>
               </a:ext>
             </a:extLst>
           </p:cNvPr>
@@ -27522,7 +27522,7 @@
           <p:cNvPr id="2" name="">
             <a:extLst xmlns:a="http://schemas.openxmlformats.org/drawingml/2006/main">
               <a:ext uri="{FF2B5EF4-FFF2-40B4-BE49-F238E27FC236}">
-                <a16:creationId xmlns:a16="http://schemas.microsoft.com/office/drawing/2014/main" id="{F5600267-53AC-4A85-AF18-3E7B9957798A}"/>
+                <a16:creationId xmlns:a16="http://schemas.microsoft.com/office/drawing/2014/main" id="{FCDC7140-6C40-4931-8200-E577B9458BE3}"/>
               </a:ext>
             </a:extLst>
           </p:cNvPr>
@@ -27553,7 +27553,7 @@
           <p:cNvPr id="3" name="">
             <a:extLst xmlns:a="http://schemas.openxmlformats.org/drawingml/2006/main">
               <a:ext uri="{FF2B5EF4-FFF2-40B4-BE49-F238E27FC236}">
-                <a16:creationId xmlns:a16="http://schemas.microsoft.com/office/drawing/2014/main" id="{C307F0E6-50E1-4E7E-BE3F-DCE9746A1DE2}"/>
+                <a16:creationId xmlns:a16="http://schemas.microsoft.com/office/drawing/2014/main" id="{59209DB2-E2A8-4F98-A73C-5EB3FF547C56}"/>
               </a:ext>
             </a:extLst>
           </p:cNvPr>
@@ -27605,7 +27605,7 @@
           <p:cNvPr id="4" name="">
             <a:extLst xmlns:a="http://schemas.openxmlformats.org/drawingml/2006/main">
               <a:ext uri="{FF2B5EF4-FFF2-40B4-BE49-F238E27FC236}">
-                <a16:creationId xmlns:a16="http://schemas.microsoft.com/office/drawing/2014/main" id="{36EF0217-D5C5-483A-BDCC-782DD57779FE}"/>
+                <a16:creationId xmlns:a16="http://schemas.microsoft.com/office/drawing/2014/main" id="{25D9A3D6-4C1E-423C-96F8-6FA567446140}"/>
               </a:ext>
             </a:extLst>
           </p:cNvPr>
@@ -27640,7 +27640,7 @@
           <p:nvPr/>
         </p:nvPicPr>
         <p:blipFill>
-          <a:blip xmlns:r="http://schemas.openxmlformats.org/officeDocument/2006/relationships" xmlns:a="http://schemas.openxmlformats.org/drawingml/2006/main" r:embed="R2475c0e4656a4dd9"/>
+          <a:blip xmlns:r="http://schemas.openxmlformats.org/officeDocument/2006/relationships" xmlns:a="http://schemas.openxmlformats.org/drawingml/2006/main" r:embed="R1c209f5794c642fd"/>
           <a:stretch xmlns:a="http://schemas.openxmlformats.org/drawingml/2006/main"/>
         </p:blipFill>
         <p:spPr>
@@ -27658,7 +27658,7 @@
           <p:cNvPr id="6" name="">
             <a:extLst xmlns:a="http://schemas.openxmlformats.org/drawingml/2006/main">
               <a:ext uri="{FF2B5EF4-FFF2-40B4-BE49-F238E27FC236}">
-                <a16:creationId xmlns:a16="http://schemas.microsoft.com/office/drawing/2014/main" id="{E1B86236-D0CF-4B09-A008-A5C9CA6967D4}"/>
+                <a16:creationId xmlns:a16="http://schemas.microsoft.com/office/drawing/2014/main" id="{992269E6-EA24-4C7E-9564-270241C54718}"/>
               </a:ext>
             </a:extLst>
           </p:cNvPr>
@@ -27710,7 +27710,7 @@
           <p:cNvPr id="7" name="">
             <a:extLst xmlns:a="http://schemas.openxmlformats.org/drawingml/2006/main">
               <a:ext uri="{FF2B5EF4-FFF2-40B4-BE49-F238E27FC236}">
-                <a16:creationId xmlns:a16="http://schemas.microsoft.com/office/drawing/2014/main" id="{FF9C976C-1AF3-4679-9DCB-B075E959B949}"/>
+                <a16:creationId xmlns:a16="http://schemas.microsoft.com/office/drawing/2014/main" id="{4FB0D1BB-51E9-4BD5-936E-814C5C130916}"/>
               </a:ext>
             </a:extLst>
           </p:cNvPr>
@@ -27766,7 +27766,7 @@
           <p:nvPr/>
         </p:nvPicPr>
         <p:blipFill>
-          <a:blip xmlns:r="http://schemas.openxmlformats.org/officeDocument/2006/relationships" xmlns:a="http://schemas.openxmlformats.org/drawingml/2006/main" r:embed="Rb24e0723467d404e"/>
+          <a:blip xmlns:r="http://schemas.openxmlformats.org/officeDocument/2006/relationships" xmlns:a="http://schemas.openxmlformats.org/drawingml/2006/main" r:embed="R739bbe636913403b"/>
           <a:stretch xmlns:a="http://schemas.openxmlformats.org/drawingml/2006/main"/>
         </p:blipFill>
         <p:spPr>
@@ -27782,7 +27782,7 @@
     </p:spTree>
     <p:extLst>
       <p:ext uri="{BB962C8B-B14F-4D97-AF65-F5344CB8AC3E}">
-        <p14:creationId xmlns:p14="http://schemas.microsoft.com/office/powerpoint/2010/main" val="1731172623"/>
+        <p14:creationId xmlns:p14="http://schemas.microsoft.com/office/powerpoint/2010/main" val="1536834946"/>
       </p:ext>
     </p:extLst>
   </p:cSld>
@@ -27813,7 +27813,7 @@
           <p:cNvPr id="42" name="">
             <a:extLst xmlns:a="http://schemas.openxmlformats.org/drawingml/2006/main">
               <a:ext uri="{FF2B5EF4-FFF2-40B4-BE49-F238E27FC236}">
-                <a16:creationId xmlns:a16="http://schemas.microsoft.com/office/drawing/2014/main" id="{6D615819-4BA5-44CD-9434-961A8B24459E}"/>
+                <a16:creationId xmlns:a16="http://schemas.microsoft.com/office/drawing/2014/main" id="{6C7ECBC9-790A-413D-AE8C-A2AEEBF0FC78}"/>
               </a:ext>
             </a:extLst>
           </p:cNvPr>
@@ -27846,7 +27846,7 @@
           <p:cNvPr id="2" name="">
             <a:extLst xmlns:a="http://schemas.openxmlformats.org/drawingml/2006/main">
               <a:ext uri="{FF2B5EF4-FFF2-40B4-BE49-F238E27FC236}">
-                <a16:creationId xmlns:a16="http://schemas.microsoft.com/office/drawing/2014/main" id="{6D178733-D709-4594-9625-3BCC893626D2}"/>
+                <a16:creationId xmlns:a16="http://schemas.microsoft.com/office/drawing/2014/main" id="{E936D217-E08B-4872-974C-0223764AB974}"/>
               </a:ext>
             </a:extLst>
           </p:cNvPr>
@@ -27877,7 +27877,7 @@
           <p:cNvPr id="3" name="">
             <a:extLst xmlns:a="http://schemas.openxmlformats.org/drawingml/2006/main">
               <a:ext uri="{FF2B5EF4-FFF2-40B4-BE49-F238E27FC236}">
-                <a16:creationId xmlns:a16="http://schemas.microsoft.com/office/drawing/2014/main" id="{B2A3E1EE-664F-4168-9A5E-ABEB58C746AE}"/>
+                <a16:creationId xmlns:a16="http://schemas.microsoft.com/office/drawing/2014/main" id="{6EB31463-3AC0-490E-8253-497897C71866}"/>
               </a:ext>
             </a:extLst>
           </p:cNvPr>
@@ -27929,7 +27929,7 @@
           <p:cNvPr id="4" name="">
             <a:extLst xmlns:a="http://schemas.openxmlformats.org/drawingml/2006/main">
               <a:ext uri="{FF2B5EF4-FFF2-40B4-BE49-F238E27FC236}">
-                <a16:creationId xmlns:a16="http://schemas.microsoft.com/office/drawing/2014/main" id="{B61FA833-80AA-4CEF-8AA7-96B9EF19A03D}"/>
+                <a16:creationId xmlns:a16="http://schemas.microsoft.com/office/drawing/2014/main" id="{B552FE4A-49E9-4F2A-8992-87CA45B69953}"/>
               </a:ext>
             </a:extLst>
           </p:cNvPr>
@@ -27981,7 +27981,7 @@
           <p:cNvPr id="5" name="">
             <a:extLst xmlns:a="http://schemas.openxmlformats.org/drawingml/2006/main">
               <a:ext uri="{FF2B5EF4-FFF2-40B4-BE49-F238E27FC236}">
-                <a16:creationId xmlns:a16="http://schemas.microsoft.com/office/drawing/2014/main" id="{1F64C5FA-5F6D-4612-B05C-0D3D737CE0B4}"/>
+                <a16:creationId xmlns:a16="http://schemas.microsoft.com/office/drawing/2014/main" id="{58E88DF5-B259-4F0A-8F45-03469351DAAF}"/>
               </a:ext>
             </a:extLst>
           </p:cNvPr>
@@ -28016,7 +28016,7 @@
           <p:nvPr/>
         </p:nvPicPr>
         <p:blipFill>
-          <a:blip xmlns:r="http://schemas.openxmlformats.org/officeDocument/2006/relationships" xmlns:a="http://schemas.openxmlformats.org/drawingml/2006/main" r:embed="Rd35d615d63a24f63"/>
+          <a:blip xmlns:r="http://schemas.openxmlformats.org/officeDocument/2006/relationships" xmlns:a="http://schemas.openxmlformats.org/drawingml/2006/main" r:embed="R5906981fd4e14af5"/>
           <a:stretch xmlns:a="http://schemas.openxmlformats.org/drawingml/2006/main"/>
         </p:blipFill>
         <p:spPr>
@@ -28034,7 +28034,7 @@
           <p:cNvPr id="7" name="">
             <a:extLst xmlns:a="http://schemas.openxmlformats.org/drawingml/2006/main">
               <a:ext uri="{FF2B5EF4-FFF2-40B4-BE49-F238E27FC236}">
-                <a16:creationId xmlns:a16="http://schemas.microsoft.com/office/drawing/2014/main" id="{1AAFBDE8-50FB-4EC9-9D59-F3A7FF45FF9B}"/>
+                <a16:creationId xmlns:a16="http://schemas.microsoft.com/office/drawing/2014/main" id="{171CC6E2-172D-4D2E-BC13-A254754899FD}"/>
               </a:ext>
             </a:extLst>
           </p:cNvPr>
@@ -28086,7 +28086,7 @@
           <p:cNvPr id="8" name="">
             <a:extLst xmlns:a="http://schemas.openxmlformats.org/drawingml/2006/main">
               <a:ext uri="{FF2B5EF4-FFF2-40B4-BE49-F238E27FC236}">
-                <a16:creationId xmlns:a16="http://schemas.microsoft.com/office/drawing/2014/main" id="{5DA76CF5-47E0-41C1-9E64-2E935040C1B8}"/>
+                <a16:creationId xmlns:a16="http://schemas.microsoft.com/office/drawing/2014/main" id="{8D1E7121-262C-407E-A664-CCDE03ACF668}"/>
               </a:ext>
             </a:extLst>
           </p:cNvPr>
@@ -28138,7 +28138,7 @@
           <p:cNvPr id="9" name="">
             <a:extLst xmlns:a="http://schemas.openxmlformats.org/drawingml/2006/main">
               <a:ext uri="{FF2B5EF4-FFF2-40B4-BE49-F238E27FC236}">
-                <a16:creationId xmlns:a16="http://schemas.microsoft.com/office/drawing/2014/main" id="{461AE7D6-3BF7-4BEB-9BEC-3CF5AA4E6AEE}"/>
+                <a16:creationId xmlns:a16="http://schemas.microsoft.com/office/drawing/2014/main" id="{9026C406-10A1-4D34-80EE-DAFBD7B39230}"/>
               </a:ext>
             </a:extLst>
           </p:cNvPr>
@@ -28190,7 +28190,7 @@
           <p:cNvPr id="10" name="">
             <a:extLst xmlns:a="http://schemas.openxmlformats.org/drawingml/2006/main">
               <a:ext uri="{FF2B5EF4-FFF2-40B4-BE49-F238E27FC236}">
-                <a16:creationId xmlns:a16="http://schemas.microsoft.com/office/drawing/2014/main" id="{BFAF6D23-757B-4328-8D36-C77281C40672}"/>
+                <a16:creationId xmlns:a16="http://schemas.microsoft.com/office/drawing/2014/main" id="{483AB2AA-6A58-468C-B456-41DCECA69286}"/>
               </a:ext>
             </a:extLst>
           </p:cNvPr>
@@ -28221,7 +28221,7 @@
           <p:cNvPr id="11" name="">
             <a:extLst xmlns:a="http://schemas.openxmlformats.org/drawingml/2006/main">
               <a:ext uri="{FF2B5EF4-FFF2-40B4-BE49-F238E27FC236}">
-                <a16:creationId xmlns:a16="http://schemas.microsoft.com/office/drawing/2014/main" id="{A8F2032D-AB5E-4703-BF27-9B3DC8785B5B}"/>
+                <a16:creationId xmlns:a16="http://schemas.microsoft.com/office/drawing/2014/main" id="{82FC899E-0FF6-4A83-8902-488BF9758FB6}"/>
               </a:ext>
             </a:extLst>
           </p:cNvPr>
@@ -28273,7 +28273,7 @@
           <p:cNvPr id="12" name="">
             <a:extLst xmlns:a="http://schemas.openxmlformats.org/drawingml/2006/main">
               <a:ext uri="{FF2B5EF4-FFF2-40B4-BE49-F238E27FC236}">
-                <a16:creationId xmlns:a16="http://schemas.microsoft.com/office/drawing/2014/main" id="{E50E2975-6748-4244-BEAA-1070250C666D}"/>
+                <a16:creationId xmlns:a16="http://schemas.microsoft.com/office/drawing/2014/main" id="{300BCD10-B290-466F-A570-8BBD9DF91FE9}"/>
               </a:ext>
             </a:extLst>
           </p:cNvPr>
@@ -28325,7 +28325,7 @@
           <p:cNvPr id="13" name="">
             <a:extLst xmlns:a="http://schemas.openxmlformats.org/drawingml/2006/main">
               <a:ext uri="{FF2B5EF4-FFF2-40B4-BE49-F238E27FC236}">
-                <a16:creationId xmlns:a16="http://schemas.microsoft.com/office/drawing/2014/main" id="{84EBDBF3-979B-4592-A7CC-4795E30F2317}"/>
+                <a16:creationId xmlns:a16="http://schemas.microsoft.com/office/drawing/2014/main" id="{765EBF94-6BD6-41AE-A99B-A437DA392937}"/>
               </a:ext>
             </a:extLst>
           </p:cNvPr>
@@ -28377,7 +28377,7 @@
           <p:cNvPr id="14" name="">
             <a:extLst xmlns:a="http://schemas.openxmlformats.org/drawingml/2006/main">
               <a:ext uri="{FF2B5EF4-FFF2-40B4-BE49-F238E27FC236}">
-                <a16:creationId xmlns:a16="http://schemas.microsoft.com/office/drawing/2014/main" id="{226B7A77-3D67-43E1-8BC9-86F7BB49DD06}"/>
+                <a16:creationId xmlns:a16="http://schemas.microsoft.com/office/drawing/2014/main" id="{D04E3007-7AD1-4176-8916-DB0BE09838DE}"/>
               </a:ext>
             </a:extLst>
           </p:cNvPr>
@@ -28408,7 +28408,7 @@
           <p:cNvPr id="15" name="">
             <a:extLst xmlns:a="http://schemas.openxmlformats.org/drawingml/2006/main">
               <a:ext uri="{FF2B5EF4-FFF2-40B4-BE49-F238E27FC236}">
-                <a16:creationId xmlns:a16="http://schemas.microsoft.com/office/drawing/2014/main" id="{ABD4B862-BF16-4C33-825C-AA7B39654005}"/>
+                <a16:creationId xmlns:a16="http://schemas.microsoft.com/office/drawing/2014/main" id="{1E47DCE2-905D-460B-A3BA-9EE5F3276E58}"/>
               </a:ext>
             </a:extLst>
           </p:cNvPr>
@@ -28460,7 +28460,7 @@
           <p:cNvPr id="16" name="">
             <a:extLst xmlns:a="http://schemas.openxmlformats.org/drawingml/2006/main">
               <a:ext uri="{FF2B5EF4-FFF2-40B4-BE49-F238E27FC236}">
-                <a16:creationId xmlns:a16="http://schemas.microsoft.com/office/drawing/2014/main" id="{1842610B-FEA7-44C4-A9F4-364DFBF6B32E}"/>
+                <a16:creationId xmlns:a16="http://schemas.microsoft.com/office/drawing/2014/main" id="{0BB791F9-F54D-44F6-B816-E5A94FBDF592}"/>
               </a:ext>
             </a:extLst>
           </p:cNvPr>
@@ -28512,7 +28512,7 @@
           <p:cNvPr id="17" name="">
             <a:extLst xmlns:a="http://schemas.openxmlformats.org/drawingml/2006/main">
               <a:ext uri="{FF2B5EF4-FFF2-40B4-BE49-F238E27FC236}">
-                <a16:creationId xmlns:a16="http://schemas.microsoft.com/office/drawing/2014/main" id="{61540BA3-06BB-4364-8988-CB7564D3310E}"/>
+                <a16:creationId xmlns:a16="http://schemas.microsoft.com/office/drawing/2014/main" id="{FDAD9A8D-CD13-48EE-A49E-D6D8395C31A0}"/>
               </a:ext>
             </a:extLst>
           </p:cNvPr>
@@ -28564,7 +28564,7 @@
           <p:cNvPr id="18" name="">
             <a:extLst xmlns:a="http://schemas.openxmlformats.org/drawingml/2006/main">
               <a:ext uri="{FF2B5EF4-FFF2-40B4-BE49-F238E27FC236}">
-                <a16:creationId xmlns:a16="http://schemas.microsoft.com/office/drawing/2014/main" id="{22CE4710-9127-40C9-99C9-DBA085187C43}"/>
+                <a16:creationId xmlns:a16="http://schemas.microsoft.com/office/drawing/2014/main" id="{6EDB8AE5-CCA0-4F59-A402-8FBB3DE5F9A1}"/>
               </a:ext>
             </a:extLst>
           </p:cNvPr>
@@ -28595,7 +28595,7 @@
           <p:cNvPr id="19" name="">
             <a:extLst xmlns:a="http://schemas.openxmlformats.org/drawingml/2006/main">
               <a:ext uri="{FF2B5EF4-FFF2-40B4-BE49-F238E27FC236}">
-                <a16:creationId xmlns:a16="http://schemas.microsoft.com/office/drawing/2014/main" id="{B43C33D7-36B1-42D0-9164-0FB07079AFE4}"/>
+                <a16:creationId xmlns:a16="http://schemas.microsoft.com/office/drawing/2014/main" id="{85AF6406-D6CB-485C-88B9-16DE38B2C17A}"/>
               </a:ext>
             </a:extLst>
           </p:cNvPr>
@@ -28647,7 +28647,7 @@
           <p:cNvPr id="20" name="">
             <a:extLst xmlns:a="http://schemas.openxmlformats.org/drawingml/2006/main">
               <a:ext uri="{FF2B5EF4-FFF2-40B4-BE49-F238E27FC236}">
-                <a16:creationId xmlns:a16="http://schemas.microsoft.com/office/drawing/2014/main" id="{BCAFC4DB-CBD6-475F-B3AE-3282A4E31396}"/>
+                <a16:creationId xmlns:a16="http://schemas.microsoft.com/office/drawing/2014/main" id="{6704C538-854A-42C0-A1BB-4C2E54A77025}"/>
               </a:ext>
             </a:extLst>
           </p:cNvPr>
@@ -28699,7 +28699,7 @@
           <p:cNvPr id="21" name="">
             <a:extLst xmlns:a="http://schemas.openxmlformats.org/drawingml/2006/main">
               <a:ext uri="{FF2B5EF4-FFF2-40B4-BE49-F238E27FC236}">
-                <a16:creationId xmlns:a16="http://schemas.microsoft.com/office/drawing/2014/main" id="{7BA9BDCB-2369-4047-AD49-EC5ED26D743A}"/>
+                <a16:creationId xmlns:a16="http://schemas.microsoft.com/office/drawing/2014/main" id="{83B9A9BF-D2F9-445F-94F2-9BB672BD0841}"/>
               </a:ext>
             </a:extLst>
           </p:cNvPr>
@@ -28751,7 +28751,7 @@
           <p:cNvPr id="22" name="">
             <a:extLst xmlns:a="http://schemas.openxmlformats.org/drawingml/2006/main">
               <a:ext uri="{FF2B5EF4-FFF2-40B4-BE49-F238E27FC236}">
-                <a16:creationId xmlns:a16="http://schemas.microsoft.com/office/drawing/2014/main" id="{8DA07540-DFC0-4879-9D77-B7A4CCF128A2}"/>
+                <a16:creationId xmlns:a16="http://schemas.microsoft.com/office/drawing/2014/main" id="{A569ECF0-001D-4FD0-BA66-44A2CB1155AC}"/>
               </a:ext>
             </a:extLst>
           </p:cNvPr>
@@ -28782,7 +28782,7 @@
           <p:cNvPr id="23" name="">
             <a:extLst xmlns:a="http://schemas.openxmlformats.org/drawingml/2006/main">
               <a:ext uri="{FF2B5EF4-FFF2-40B4-BE49-F238E27FC236}">
-                <a16:creationId xmlns:a16="http://schemas.microsoft.com/office/drawing/2014/main" id="{D2020645-70E0-4FA0-A5F7-57720492A22A}"/>
+                <a16:creationId xmlns:a16="http://schemas.microsoft.com/office/drawing/2014/main" id="{07777FF7-062B-4876-8A23-D73F6D03C1DB}"/>
               </a:ext>
             </a:extLst>
           </p:cNvPr>
@@ -28834,7 +28834,7 @@
           <p:cNvPr id="24" name="">
             <a:extLst xmlns:a="http://schemas.openxmlformats.org/drawingml/2006/main">
               <a:ext uri="{FF2B5EF4-FFF2-40B4-BE49-F238E27FC236}">
-                <a16:creationId xmlns:a16="http://schemas.microsoft.com/office/drawing/2014/main" id="{6858B8A1-748F-4E63-9869-5588FA09EB15}"/>
+                <a16:creationId xmlns:a16="http://schemas.microsoft.com/office/drawing/2014/main" id="{4E1AF952-B20D-4E67-A5FE-F92EC16ED20B}"/>
               </a:ext>
             </a:extLst>
           </p:cNvPr>
@@ -28886,7 +28886,7 @@
           <p:cNvPr id="25" name="">
             <a:extLst xmlns:a="http://schemas.openxmlformats.org/drawingml/2006/main">
               <a:ext uri="{FF2B5EF4-FFF2-40B4-BE49-F238E27FC236}">
-                <a16:creationId xmlns:a16="http://schemas.microsoft.com/office/drawing/2014/main" id="{9F1125A9-FBC0-4EF3-B71E-6E3B2A50EB97}"/>
+                <a16:creationId xmlns:a16="http://schemas.microsoft.com/office/drawing/2014/main" id="{C6B016C1-F6DE-45BC-9FC8-6CE5AD2EBD1F}"/>
               </a:ext>
             </a:extLst>
           </p:cNvPr>
@@ -28938,7 +28938,7 @@
           <p:cNvPr id="26" name="">
             <a:extLst xmlns:a="http://schemas.openxmlformats.org/drawingml/2006/main">
               <a:ext uri="{FF2B5EF4-FFF2-40B4-BE49-F238E27FC236}">
-                <a16:creationId xmlns:a16="http://schemas.microsoft.com/office/drawing/2014/main" id="{361FC502-9F1E-4115-95C5-0B11F8EF76AD}"/>
+                <a16:creationId xmlns:a16="http://schemas.microsoft.com/office/drawing/2014/main" id="{B0841241-7569-4FA4-BF89-0D288AC6942E}"/>
               </a:ext>
             </a:extLst>
           </p:cNvPr>
@@ -28969,7 +28969,7 @@
           <p:cNvPr id="27" name="">
             <a:extLst xmlns:a="http://schemas.openxmlformats.org/drawingml/2006/main">
               <a:ext uri="{FF2B5EF4-FFF2-40B4-BE49-F238E27FC236}">
-                <a16:creationId xmlns:a16="http://schemas.microsoft.com/office/drawing/2014/main" id="{79E10ADC-8407-4222-9315-B3431295C59B}"/>
+                <a16:creationId xmlns:a16="http://schemas.microsoft.com/office/drawing/2014/main" id="{492AA867-C006-4BCD-9B2F-B99A543773C0}"/>
               </a:ext>
             </a:extLst>
           </p:cNvPr>
@@ -29021,7 +29021,7 @@
           <p:cNvPr id="28" name="">
             <a:extLst xmlns:a="http://schemas.openxmlformats.org/drawingml/2006/main">
               <a:ext uri="{FF2B5EF4-FFF2-40B4-BE49-F238E27FC236}">
-                <a16:creationId xmlns:a16="http://schemas.microsoft.com/office/drawing/2014/main" id="{86D84F99-F8DC-4869-AD18-C9189A31BF21}"/>
+                <a16:creationId xmlns:a16="http://schemas.microsoft.com/office/drawing/2014/main" id="{E607E2F1-0781-444B-ABCB-E67B88217C08}"/>
               </a:ext>
             </a:extLst>
           </p:cNvPr>
@@ -29073,7 +29073,7 @@
           <p:cNvPr id="29" name="">
             <a:extLst xmlns:a="http://schemas.openxmlformats.org/drawingml/2006/main">
               <a:ext uri="{FF2B5EF4-FFF2-40B4-BE49-F238E27FC236}">
-                <a16:creationId xmlns:a16="http://schemas.microsoft.com/office/drawing/2014/main" id="{1861F44F-D9F4-4216-8313-A9CD191359CC}"/>
+                <a16:creationId xmlns:a16="http://schemas.microsoft.com/office/drawing/2014/main" id="{40C38154-B1DA-4D95-BB11-0BDBBFFD3AD0}"/>
               </a:ext>
             </a:extLst>
           </p:cNvPr>
@@ -29125,7 +29125,7 @@
           <p:cNvPr id="30" name="">
             <a:extLst xmlns:a="http://schemas.openxmlformats.org/drawingml/2006/main">
               <a:ext uri="{FF2B5EF4-FFF2-40B4-BE49-F238E27FC236}">
-                <a16:creationId xmlns:a16="http://schemas.microsoft.com/office/drawing/2014/main" id="{8B8B0602-5B3E-4940-B159-8D9AE1B3B129}"/>
+                <a16:creationId xmlns:a16="http://schemas.microsoft.com/office/drawing/2014/main" id="{8CECCE64-EC99-4E47-A63D-75948AA4C9EB}"/>
               </a:ext>
             </a:extLst>
           </p:cNvPr>
@@ -29156,7 +29156,7 @@
           <p:cNvPr id="31" name="">
             <a:extLst xmlns:a="http://schemas.openxmlformats.org/drawingml/2006/main">
               <a:ext uri="{FF2B5EF4-FFF2-40B4-BE49-F238E27FC236}">
-                <a16:creationId xmlns:a16="http://schemas.microsoft.com/office/drawing/2014/main" id="{FDEFF4BB-C92C-4C5D-8DC2-A5CB3D7E3339}"/>
+                <a16:creationId xmlns:a16="http://schemas.microsoft.com/office/drawing/2014/main" id="{64664A91-A0E9-41E0-9615-A0EAEC506C37}"/>
               </a:ext>
             </a:extLst>
           </p:cNvPr>
@@ -29208,7 +29208,7 @@
           <p:cNvPr id="32" name="">
             <a:extLst xmlns:a="http://schemas.openxmlformats.org/drawingml/2006/main">
               <a:ext uri="{FF2B5EF4-FFF2-40B4-BE49-F238E27FC236}">
-                <a16:creationId xmlns:a16="http://schemas.microsoft.com/office/drawing/2014/main" id="{BAB71480-3C16-4D93-97C1-63F13AE29E88}"/>
+                <a16:creationId xmlns:a16="http://schemas.microsoft.com/office/drawing/2014/main" id="{96200E04-A652-4E17-B122-8013E2D9B71E}"/>
               </a:ext>
             </a:extLst>
           </p:cNvPr>
@@ -29260,7 +29260,7 @@
           <p:cNvPr id="33" name="">
             <a:extLst xmlns:a="http://schemas.openxmlformats.org/drawingml/2006/main">
               <a:ext uri="{FF2B5EF4-FFF2-40B4-BE49-F238E27FC236}">
-                <a16:creationId xmlns:a16="http://schemas.microsoft.com/office/drawing/2014/main" id="{62787768-35D2-4740-BB0C-35737B3064E1}"/>
+                <a16:creationId xmlns:a16="http://schemas.microsoft.com/office/drawing/2014/main" id="{84A6E42B-A073-41BC-917B-B45BBF33F991}"/>
               </a:ext>
             </a:extLst>
           </p:cNvPr>
@@ -29312,7 +29312,7 @@
           <p:cNvPr id="34" name="">
             <a:extLst xmlns:a="http://schemas.openxmlformats.org/drawingml/2006/main">
               <a:ext uri="{FF2B5EF4-FFF2-40B4-BE49-F238E27FC236}">
-                <a16:creationId xmlns:a16="http://schemas.microsoft.com/office/drawing/2014/main" id="{0E2ACF25-53B7-4F48-BA4C-99B9BD630342}"/>
+                <a16:creationId xmlns:a16="http://schemas.microsoft.com/office/drawing/2014/main" id="{C132F61B-8E63-4993-A8AF-3466739C2929}"/>
               </a:ext>
             </a:extLst>
           </p:cNvPr>
@@ -29343,7 +29343,7 @@
           <p:cNvPr id="35" name="">
             <a:extLst xmlns:a="http://schemas.openxmlformats.org/drawingml/2006/main">
               <a:ext uri="{FF2B5EF4-FFF2-40B4-BE49-F238E27FC236}">
-                <a16:creationId xmlns:a16="http://schemas.microsoft.com/office/drawing/2014/main" id="{499C29F3-F852-4389-A256-B1B1D1E093F7}"/>
+                <a16:creationId xmlns:a16="http://schemas.microsoft.com/office/drawing/2014/main" id="{5CF0AD09-913A-49D9-A039-A3F684608AF6}"/>
               </a:ext>
             </a:extLst>
           </p:cNvPr>
@@ -29395,7 +29395,7 @@
           <p:cNvPr id="36" name="">
             <a:extLst xmlns:a="http://schemas.openxmlformats.org/drawingml/2006/main">
               <a:ext uri="{FF2B5EF4-FFF2-40B4-BE49-F238E27FC236}">
-                <a16:creationId xmlns:a16="http://schemas.microsoft.com/office/drawing/2014/main" id="{FB0BAA45-ACE6-47EF-B50C-2F5FC31A1FF9}"/>
+                <a16:creationId xmlns:a16="http://schemas.microsoft.com/office/drawing/2014/main" id="{FCD3D267-6AA4-4481-A9CB-10081DD9939D}"/>
               </a:ext>
             </a:extLst>
           </p:cNvPr>
@@ -29447,7 +29447,7 @@
           <p:cNvPr id="37" name="">
             <a:extLst xmlns:a="http://schemas.openxmlformats.org/drawingml/2006/main">
               <a:ext uri="{FF2B5EF4-FFF2-40B4-BE49-F238E27FC236}">
-                <a16:creationId xmlns:a16="http://schemas.microsoft.com/office/drawing/2014/main" id="{C01C485A-658C-4668-A7C9-F991E6459E87}"/>
+                <a16:creationId xmlns:a16="http://schemas.microsoft.com/office/drawing/2014/main" id="{510D242E-0231-4B65-99EE-49D001BBFCE6}"/>
               </a:ext>
             </a:extLst>
           </p:cNvPr>
@@ -29499,7 +29499,7 @@
           <p:cNvPr id="38" name="">
             <a:extLst xmlns:a="http://schemas.openxmlformats.org/drawingml/2006/main">
               <a:ext uri="{FF2B5EF4-FFF2-40B4-BE49-F238E27FC236}">
-                <a16:creationId xmlns:a16="http://schemas.microsoft.com/office/drawing/2014/main" id="{93F0A218-9EDB-43E4-94F2-A3ED4AEB76B8}"/>
+                <a16:creationId xmlns:a16="http://schemas.microsoft.com/office/drawing/2014/main" id="{7F5EADBD-0132-4B87-BBD8-C21E99939424}"/>
               </a:ext>
             </a:extLst>
           </p:cNvPr>
@@ -29530,7 +29530,7 @@
           <p:cNvPr id="39" name="">
             <a:extLst xmlns:a="http://schemas.openxmlformats.org/drawingml/2006/main">
               <a:ext uri="{FF2B5EF4-FFF2-40B4-BE49-F238E27FC236}">
-                <a16:creationId xmlns:a16="http://schemas.microsoft.com/office/drawing/2014/main" id="{8DFA82C8-4869-4A64-B43A-56C0938AAC43}"/>
+                <a16:creationId xmlns:a16="http://schemas.microsoft.com/office/drawing/2014/main" id="{8F37E6EC-575C-4977-8654-6542F469B61A}"/>
               </a:ext>
             </a:extLst>
           </p:cNvPr>
@@ -29582,7 +29582,7 @@
           <p:cNvPr id="40" name="">
             <a:extLst xmlns:a="http://schemas.openxmlformats.org/drawingml/2006/main">
               <a:ext uri="{FF2B5EF4-FFF2-40B4-BE49-F238E27FC236}">
-                <a16:creationId xmlns:a16="http://schemas.microsoft.com/office/drawing/2014/main" id="{02584821-6CEB-4F26-B961-7D304D22A79B}"/>
+                <a16:creationId xmlns:a16="http://schemas.microsoft.com/office/drawing/2014/main" id="{7B046411-2B58-4090-BBDF-239A3EEF5EE0}"/>
               </a:ext>
             </a:extLst>
           </p:cNvPr>
@@ -29634,7 +29634,7 @@
           <p:cNvPr id="41" name="">
             <a:extLst xmlns:a="http://schemas.openxmlformats.org/drawingml/2006/main">
               <a:ext uri="{FF2B5EF4-FFF2-40B4-BE49-F238E27FC236}">
-                <a16:creationId xmlns:a16="http://schemas.microsoft.com/office/drawing/2014/main" id="{53133738-1BF8-4576-B170-E550C015A6BC}"/>
+                <a16:creationId xmlns:a16="http://schemas.microsoft.com/office/drawing/2014/main" id="{55F99950-97B9-41B4-9F03-1F670A5FAD29}"/>
               </a:ext>
             </a:extLst>
           </p:cNvPr>
@@ -29684,7 +29684,7 @@
     </p:spTree>
     <p:extLst>
       <p:ext uri="{BB962C8B-B14F-4D97-AF65-F5344CB8AC3E}">
-        <p14:creationId xmlns:p14="http://schemas.microsoft.com/office/powerpoint/2010/main" val="2128167216"/>
+        <p14:creationId xmlns:p14="http://schemas.microsoft.com/office/powerpoint/2010/main" val="928635421"/>
       </p:ext>
     </p:extLst>
   </p:cSld>
@@ -29715,7 +29715,7 @@
           <p:cNvPr id="76" name="">
             <a:extLst xmlns:a="http://schemas.openxmlformats.org/drawingml/2006/main">
               <a:ext uri="{FF2B5EF4-FFF2-40B4-BE49-F238E27FC236}">
-                <a16:creationId xmlns:a16="http://schemas.microsoft.com/office/drawing/2014/main" id="{D8D65B37-478B-4421-A505-23A338E0BCF3}"/>
+                <a16:creationId xmlns:a16="http://schemas.microsoft.com/office/drawing/2014/main" id="{B582B595-B02F-41DC-B068-40CE16DA48E9}"/>
               </a:ext>
             </a:extLst>
           </p:cNvPr>
@@ -29748,7 +29748,7 @@
           <p:cNvPr id="2" name="">
             <a:extLst xmlns:a="http://schemas.openxmlformats.org/drawingml/2006/main">
               <a:ext uri="{FF2B5EF4-FFF2-40B4-BE49-F238E27FC236}">
-                <a16:creationId xmlns:a16="http://schemas.microsoft.com/office/drawing/2014/main" id="{EAF694DA-A3B1-4158-890F-42253754D03C}"/>
+                <a16:creationId xmlns:a16="http://schemas.microsoft.com/office/drawing/2014/main" id="{0E58380B-E5D9-4A16-8588-2FDEF67A9E46}"/>
               </a:ext>
             </a:extLst>
           </p:cNvPr>
@@ -29779,7 +29779,7 @@
           <p:cNvPr id="3" name="">
             <a:extLst xmlns:a="http://schemas.openxmlformats.org/drawingml/2006/main">
               <a:ext uri="{FF2B5EF4-FFF2-40B4-BE49-F238E27FC236}">
-                <a16:creationId xmlns:a16="http://schemas.microsoft.com/office/drawing/2014/main" id="{06C88FD3-F7F9-4A9D-85A3-14AFD1046363}"/>
+                <a16:creationId xmlns:a16="http://schemas.microsoft.com/office/drawing/2014/main" id="{F8C7CB8A-2991-46B4-B700-554A8D2BFE28}"/>
               </a:ext>
             </a:extLst>
           </p:cNvPr>
@@ -29831,7 +29831,7 @@
           <p:cNvPr id="4" name="">
             <a:extLst xmlns:a="http://schemas.openxmlformats.org/drawingml/2006/main">
               <a:ext uri="{FF2B5EF4-FFF2-40B4-BE49-F238E27FC236}">
-                <a16:creationId xmlns:a16="http://schemas.microsoft.com/office/drawing/2014/main" id="{37D559B5-5098-4495-B0A6-E8E5EABF2A0A}"/>
+                <a16:creationId xmlns:a16="http://schemas.microsoft.com/office/drawing/2014/main" id="{975C19BF-C71C-418B-AF47-6B92CA20D6A5}"/>
               </a:ext>
             </a:extLst>
           </p:cNvPr>
@@ -29883,7 +29883,7 @@
           <p:cNvPr id="5" name="">
             <a:extLst xmlns:a="http://schemas.openxmlformats.org/drawingml/2006/main">
               <a:ext uri="{FF2B5EF4-FFF2-40B4-BE49-F238E27FC236}">
-                <a16:creationId xmlns:a16="http://schemas.microsoft.com/office/drawing/2014/main" id="{AEF52591-6C2D-41A4-BFAB-B5752B8C468D}"/>
+                <a16:creationId xmlns:a16="http://schemas.microsoft.com/office/drawing/2014/main" id="{C8EEB214-AA48-428D-A246-9976E714ABB0}"/>
               </a:ext>
             </a:extLst>
           </p:cNvPr>
@@ -29918,7 +29918,7 @@
           <p:nvPr/>
         </p:nvPicPr>
         <p:blipFill>
-          <a:blip xmlns:r="http://schemas.openxmlformats.org/officeDocument/2006/relationships" xmlns:a="http://schemas.openxmlformats.org/drawingml/2006/main" r:embed="Ra4a15ea9a81740d9"/>
+          <a:blip xmlns:r="http://schemas.openxmlformats.org/officeDocument/2006/relationships" xmlns:a="http://schemas.openxmlformats.org/drawingml/2006/main" r:embed="Rcce6c1efd5814bca"/>
           <a:stretch xmlns:a="http://schemas.openxmlformats.org/drawingml/2006/main"/>
         </p:blipFill>
         <p:spPr>
@@ -29936,7 +29936,7 @@
           <p:cNvPr id="7" name="">
             <a:extLst xmlns:a="http://schemas.openxmlformats.org/drawingml/2006/main">
               <a:ext uri="{FF2B5EF4-FFF2-40B4-BE49-F238E27FC236}">
-                <a16:creationId xmlns:a16="http://schemas.microsoft.com/office/drawing/2014/main" id="{8948E404-2476-4186-A9A0-70A3FAF5AE9C}"/>
+                <a16:creationId xmlns:a16="http://schemas.microsoft.com/office/drawing/2014/main" id="{CA479928-40FD-4520-9517-C5F3BCA50BE0}"/>
               </a:ext>
             </a:extLst>
           </p:cNvPr>
@@ -29988,7 +29988,7 @@
           <p:cNvPr id="8" name="">
             <a:extLst xmlns:a="http://schemas.openxmlformats.org/drawingml/2006/main">
               <a:ext uri="{FF2B5EF4-FFF2-40B4-BE49-F238E27FC236}">
-                <a16:creationId xmlns:a16="http://schemas.microsoft.com/office/drawing/2014/main" id="{81760781-4549-49EC-A84B-4530C2177471}"/>
+                <a16:creationId xmlns:a16="http://schemas.microsoft.com/office/drawing/2014/main" id="{B7F1BB60-9524-45BF-A434-B8B248E90BB8}"/>
               </a:ext>
             </a:extLst>
           </p:cNvPr>
@@ -30040,7 +30040,7 @@
           <p:cNvPr id="9" name="">
             <a:extLst xmlns:a="http://schemas.openxmlformats.org/drawingml/2006/main">
               <a:ext uri="{FF2B5EF4-FFF2-40B4-BE49-F238E27FC236}">
-                <a16:creationId xmlns:a16="http://schemas.microsoft.com/office/drawing/2014/main" id="{4621C456-4FEC-4F17-A000-304ACF5A14FF}"/>
+                <a16:creationId xmlns:a16="http://schemas.microsoft.com/office/drawing/2014/main" id="{76114F9D-BE4E-4AE7-8D70-69E74A4C282A}"/>
               </a:ext>
             </a:extLst>
           </p:cNvPr>
@@ -30092,7 +30092,7 @@
           <p:cNvPr id="10" name="">
             <a:extLst xmlns:a="http://schemas.openxmlformats.org/drawingml/2006/main">
               <a:ext uri="{FF2B5EF4-FFF2-40B4-BE49-F238E27FC236}">
-                <a16:creationId xmlns:a16="http://schemas.microsoft.com/office/drawing/2014/main" id="{57DBAD7D-0764-47F5-8927-0ACF6216B239}"/>
+                <a16:creationId xmlns:a16="http://schemas.microsoft.com/office/drawing/2014/main" id="{13A36E81-A07C-49E9-B792-7F5725FCE12D}"/>
               </a:ext>
             </a:extLst>
           </p:cNvPr>
@@ -30144,7 +30144,7 @@
           <p:cNvPr id="11" name="">
             <a:extLst xmlns:a="http://schemas.openxmlformats.org/drawingml/2006/main">
               <a:ext uri="{FF2B5EF4-FFF2-40B4-BE49-F238E27FC236}">
-                <a16:creationId xmlns:a16="http://schemas.microsoft.com/office/drawing/2014/main" id="{268D8B10-1FD0-4E07-AA31-BF6F32956947}"/>
+                <a16:creationId xmlns:a16="http://schemas.microsoft.com/office/drawing/2014/main" id="{4F82F7C8-B829-4FAA-8CF9-9AAF32F8B2F7}"/>
               </a:ext>
             </a:extLst>
           </p:cNvPr>
@@ -30187,7 +30187,7 @@
           <p:cNvPr id="12" name="">
             <a:extLst xmlns:a="http://schemas.openxmlformats.org/drawingml/2006/main">
               <a:ext uri="{FF2B5EF4-FFF2-40B4-BE49-F238E27FC236}">
-                <a16:creationId xmlns:a16="http://schemas.microsoft.com/office/drawing/2014/main" id="{A324557B-D0B4-4B43-A672-2BF52E013153}"/>
+                <a16:creationId xmlns:a16="http://schemas.microsoft.com/office/drawing/2014/main" id="{B6D3184A-6891-4DF2-BACC-26A6EC1FBB0C}"/>
               </a:ext>
             </a:extLst>
           </p:cNvPr>
@@ -30218,7 +30218,7 @@
           <p:cNvPr id="13" name="">
             <a:extLst xmlns:a="http://schemas.openxmlformats.org/drawingml/2006/main">
               <a:ext uri="{FF2B5EF4-FFF2-40B4-BE49-F238E27FC236}">
-                <a16:creationId xmlns:a16="http://schemas.microsoft.com/office/drawing/2014/main" id="{3292E423-1E8C-4185-A1BB-BD521CD432F5}"/>
+                <a16:creationId xmlns:a16="http://schemas.microsoft.com/office/drawing/2014/main" id="{1CBF434A-42F3-429A-B264-190C4199A8C3}"/>
               </a:ext>
             </a:extLst>
           </p:cNvPr>
@@ -30249,7 +30249,7 @@
           <p:cNvPr id="14" name="">
             <a:extLst xmlns:a="http://schemas.openxmlformats.org/drawingml/2006/main">
               <a:ext uri="{FF2B5EF4-FFF2-40B4-BE49-F238E27FC236}">
-                <a16:creationId xmlns:a16="http://schemas.microsoft.com/office/drawing/2014/main" id="{596E9B33-9991-4BC9-A2AF-3A873F93B8E5}"/>
+                <a16:creationId xmlns:a16="http://schemas.microsoft.com/office/drawing/2014/main" id="{8BAF9386-66FA-4BBA-902C-9832420E8C38}"/>
               </a:ext>
             </a:extLst>
           </p:cNvPr>
@@ -30292,7 +30292,7 @@
           <p:cNvPr id="15" name="">
             <a:extLst xmlns:a="http://schemas.openxmlformats.org/drawingml/2006/main">
               <a:ext uri="{FF2B5EF4-FFF2-40B4-BE49-F238E27FC236}">
-                <a16:creationId xmlns:a16="http://schemas.microsoft.com/office/drawing/2014/main" id="{13F36A07-53C4-40A5-9858-6B67716BFA0D}"/>
+                <a16:creationId xmlns:a16="http://schemas.microsoft.com/office/drawing/2014/main" id="{3B48F6AC-E449-4F82-9F57-F2154D0ACCE5}"/>
               </a:ext>
             </a:extLst>
           </p:cNvPr>
@@ -30323,7 +30323,7 @@
           <p:cNvPr id="16" name="">
             <a:extLst xmlns:a="http://schemas.openxmlformats.org/drawingml/2006/main">
               <a:ext uri="{FF2B5EF4-FFF2-40B4-BE49-F238E27FC236}">
-                <a16:creationId xmlns:a16="http://schemas.microsoft.com/office/drawing/2014/main" id="{565E7247-7770-4B31-B949-726BDCB94808}"/>
+                <a16:creationId xmlns:a16="http://schemas.microsoft.com/office/drawing/2014/main" id="{95882E84-46AB-4088-9879-3C0227A39BCF}"/>
               </a:ext>
             </a:extLst>
           </p:cNvPr>
@@ -30354,7 +30354,7 @@
           <p:cNvPr id="17" name="">
             <a:extLst xmlns:a="http://schemas.openxmlformats.org/drawingml/2006/main">
               <a:ext uri="{FF2B5EF4-FFF2-40B4-BE49-F238E27FC236}">
-                <a16:creationId xmlns:a16="http://schemas.microsoft.com/office/drawing/2014/main" id="{258D3C07-D50D-4A41-8AD2-290EB40E0DF6}"/>
+                <a16:creationId xmlns:a16="http://schemas.microsoft.com/office/drawing/2014/main" id="{B20A3FA6-FC19-46E4-A799-981DD74AC4F3}"/>
               </a:ext>
             </a:extLst>
           </p:cNvPr>
@@ -30406,7 +30406,7 @@
           <p:cNvPr id="18" name="">
             <a:extLst xmlns:a="http://schemas.openxmlformats.org/drawingml/2006/main">
               <a:ext uri="{FF2B5EF4-FFF2-40B4-BE49-F238E27FC236}">
-                <a16:creationId xmlns:a16="http://schemas.microsoft.com/office/drawing/2014/main" id="{29EDC174-8FDC-420E-AF0C-97C52B3CB8F6}"/>
+                <a16:creationId xmlns:a16="http://schemas.microsoft.com/office/drawing/2014/main" id="{8DC669B3-FE2D-490D-921F-DD32C0F8164C}"/>
               </a:ext>
             </a:extLst>
           </p:cNvPr>
@@ -30458,7 +30458,7 @@
           <p:cNvPr id="19" name="">
             <a:extLst xmlns:a="http://schemas.openxmlformats.org/drawingml/2006/main">
               <a:ext uri="{FF2B5EF4-FFF2-40B4-BE49-F238E27FC236}">
-                <a16:creationId xmlns:a16="http://schemas.microsoft.com/office/drawing/2014/main" id="{77C75914-16A4-4C18-9A1A-D20013BB0D89}"/>
+                <a16:creationId xmlns:a16="http://schemas.microsoft.com/office/drawing/2014/main" id="{DC3173D7-552E-4B13-8979-4C0E02F5EC03}"/>
               </a:ext>
             </a:extLst>
           </p:cNvPr>
@@ -30510,7 +30510,7 @@
           <p:cNvPr id="20" name="">
             <a:extLst xmlns:a="http://schemas.openxmlformats.org/drawingml/2006/main">
               <a:ext uri="{FF2B5EF4-FFF2-40B4-BE49-F238E27FC236}">
-                <a16:creationId xmlns:a16="http://schemas.microsoft.com/office/drawing/2014/main" id="{718D43ED-AB0A-4055-8A7A-5D8D96FE99E7}"/>
+                <a16:creationId xmlns:a16="http://schemas.microsoft.com/office/drawing/2014/main" id="{AB400755-412B-4581-9B7A-3D4A95367A83}"/>
               </a:ext>
             </a:extLst>
           </p:cNvPr>
@@ -30553,7 +30553,7 @@
           <p:cNvPr id="21" name="">
             <a:extLst xmlns:a="http://schemas.openxmlformats.org/drawingml/2006/main">
               <a:ext uri="{FF2B5EF4-FFF2-40B4-BE49-F238E27FC236}">
-                <a16:creationId xmlns:a16="http://schemas.microsoft.com/office/drawing/2014/main" id="{53106EB6-BC9D-4A49-96E0-A351ED8DE67C}"/>
+                <a16:creationId xmlns:a16="http://schemas.microsoft.com/office/drawing/2014/main" id="{D3C85E84-E787-42A4-882B-3E5761AAAD0E}"/>
               </a:ext>
             </a:extLst>
           </p:cNvPr>
@@ -30584,7 +30584,7 @@
           <p:cNvPr id="22" name="">
             <a:extLst xmlns:a="http://schemas.openxmlformats.org/drawingml/2006/main">
               <a:ext uri="{FF2B5EF4-FFF2-40B4-BE49-F238E27FC236}">
-                <a16:creationId xmlns:a16="http://schemas.microsoft.com/office/drawing/2014/main" id="{722366D4-8CAD-421A-9BE1-DF7C2A390988}"/>
+                <a16:creationId xmlns:a16="http://schemas.microsoft.com/office/drawing/2014/main" id="{1F01DCFD-4230-4FC5-A3A4-9C250EBE4ED5}"/>
               </a:ext>
             </a:extLst>
           </p:cNvPr>
@@ -30615,7 +30615,7 @@
           <p:cNvPr id="23" name="">
             <a:extLst xmlns:a="http://schemas.openxmlformats.org/drawingml/2006/main">
               <a:ext uri="{FF2B5EF4-FFF2-40B4-BE49-F238E27FC236}">
-                <a16:creationId xmlns:a16="http://schemas.microsoft.com/office/drawing/2014/main" id="{3EAC9AB4-EBBE-41FC-803B-A923308ACE49}"/>
+                <a16:creationId xmlns:a16="http://schemas.microsoft.com/office/drawing/2014/main" id="{DE8A40A3-BEFF-408E-B9EE-D4F2D44204DF}"/>
               </a:ext>
             </a:extLst>
           </p:cNvPr>
@@ -30667,7 +30667,7 @@
           <p:cNvPr id="24" name="">
             <a:extLst xmlns:a="http://schemas.openxmlformats.org/drawingml/2006/main">
               <a:ext uri="{FF2B5EF4-FFF2-40B4-BE49-F238E27FC236}">
-                <a16:creationId xmlns:a16="http://schemas.microsoft.com/office/drawing/2014/main" id="{FE21F029-33F4-439F-91E4-6518A038C6AF}"/>
+                <a16:creationId xmlns:a16="http://schemas.microsoft.com/office/drawing/2014/main" id="{260FD9C1-64A2-40EA-AD6A-7C08347931CB}"/>
               </a:ext>
             </a:extLst>
           </p:cNvPr>
@@ -30719,7 +30719,7 @@
           <p:cNvPr id="25" name="">
             <a:extLst xmlns:a="http://schemas.openxmlformats.org/drawingml/2006/main">
               <a:ext uri="{FF2B5EF4-FFF2-40B4-BE49-F238E27FC236}">
-                <a16:creationId xmlns:a16="http://schemas.microsoft.com/office/drawing/2014/main" id="{C50520D9-8F52-44D4-AE49-FDE6A2E8D637}"/>
+                <a16:creationId xmlns:a16="http://schemas.microsoft.com/office/drawing/2014/main" id="{3D8DEDE6-9F2D-4A04-8165-EB501627A2DB}"/>
               </a:ext>
             </a:extLst>
           </p:cNvPr>
@@ -30771,7 +30771,7 @@
           <p:cNvPr id="26" name="">
             <a:extLst xmlns:a="http://schemas.openxmlformats.org/drawingml/2006/main">
               <a:ext uri="{FF2B5EF4-FFF2-40B4-BE49-F238E27FC236}">
-                <a16:creationId xmlns:a16="http://schemas.microsoft.com/office/drawing/2014/main" id="{8AFF6E6E-4BD9-42FD-9C79-C508E513A94B}"/>
+                <a16:creationId xmlns:a16="http://schemas.microsoft.com/office/drawing/2014/main" id="{AFF885F9-037A-40DD-AC28-C5271560F54E}"/>
               </a:ext>
             </a:extLst>
           </p:cNvPr>
@@ -30814,7 +30814,7 @@
           <p:cNvPr id="27" name="">
             <a:extLst xmlns:a="http://schemas.openxmlformats.org/drawingml/2006/main">
               <a:ext uri="{FF2B5EF4-FFF2-40B4-BE49-F238E27FC236}">
-                <a16:creationId xmlns:a16="http://schemas.microsoft.com/office/drawing/2014/main" id="{8BC3270A-33C5-4916-9D0B-40F8F47DB8A6}"/>
+                <a16:creationId xmlns:a16="http://schemas.microsoft.com/office/drawing/2014/main" id="{D74056C8-61F1-4E00-A0D5-40A683006AE8}"/>
               </a:ext>
             </a:extLst>
           </p:cNvPr>
@@ -30845,7 +30845,7 @@
           <p:cNvPr id="28" name="">
             <a:extLst xmlns:a="http://schemas.openxmlformats.org/drawingml/2006/main">
               <a:ext uri="{FF2B5EF4-FFF2-40B4-BE49-F238E27FC236}">
-                <a16:creationId xmlns:a16="http://schemas.microsoft.com/office/drawing/2014/main" id="{3E009DEB-5A6B-4808-A4D6-FD4E7C049AE6}"/>
+                <a16:creationId xmlns:a16="http://schemas.microsoft.com/office/drawing/2014/main" id="{2BD29141-7EE0-4ADA-A39B-5E881FC9ACCF}"/>
               </a:ext>
             </a:extLst>
           </p:cNvPr>
@@ -30876,7 +30876,7 @@
           <p:cNvPr id="29" name="">
             <a:extLst xmlns:a="http://schemas.openxmlformats.org/drawingml/2006/main">
               <a:ext uri="{FF2B5EF4-FFF2-40B4-BE49-F238E27FC236}">
-                <a16:creationId xmlns:a16="http://schemas.microsoft.com/office/drawing/2014/main" id="{1274E1A5-D599-4FAB-BDF6-B8181A34A6C7}"/>
+                <a16:creationId xmlns:a16="http://schemas.microsoft.com/office/drawing/2014/main" id="{11A9F70E-6F5B-4175-A8DB-20875CA848E6}"/>
               </a:ext>
             </a:extLst>
           </p:cNvPr>
@@ -30928,7 +30928,7 @@
           <p:cNvPr id="30" name="">
             <a:extLst xmlns:a="http://schemas.openxmlformats.org/drawingml/2006/main">
               <a:ext uri="{FF2B5EF4-FFF2-40B4-BE49-F238E27FC236}">
-                <a16:creationId xmlns:a16="http://schemas.microsoft.com/office/drawing/2014/main" id="{B946FD30-C9F3-4AE3-B397-503668FE0031}"/>
+                <a16:creationId xmlns:a16="http://schemas.microsoft.com/office/drawing/2014/main" id="{94889D0F-5D94-466B-94A8-C0EC7606CDCE}"/>
               </a:ext>
             </a:extLst>
           </p:cNvPr>
@@ -30980,7 +30980,7 @@
           <p:cNvPr id="31" name="">
             <a:extLst xmlns:a="http://schemas.openxmlformats.org/drawingml/2006/main">
               <a:ext uri="{FF2B5EF4-FFF2-40B4-BE49-F238E27FC236}">
-                <a16:creationId xmlns:a16="http://schemas.microsoft.com/office/drawing/2014/main" id="{7FD367C3-BC9B-4EC8-BBB6-E82A986A0646}"/>
+                <a16:creationId xmlns:a16="http://schemas.microsoft.com/office/drawing/2014/main" id="{87A893F8-66CC-43A2-A81D-85E8DCD3D8A8}"/>
               </a:ext>
             </a:extLst>
           </p:cNvPr>
@@ -31032,7 +31032,7 @@
           <p:cNvPr id="32" name="">
             <a:extLst xmlns:a="http://schemas.openxmlformats.org/drawingml/2006/main">
               <a:ext uri="{FF2B5EF4-FFF2-40B4-BE49-F238E27FC236}">
-                <a16:creationId xmlns:a16="http://schemas.microsoft.com/office/drawing/2014/main" id="{9B7D472B-B17D-4C4E-B628-911D14B6D9BF}"/>
+                <a16:creationId xmlns:a16="http://schemas.microsoft.com/office/drawing/2014/main" id="{6C79DCA0-36EF-45C5-ABD6-3B19C3C556CD}"/>
               </a:ext>
             </a:extLst>
           </p:cNvPr>
@@ -31075,7 +31075,7 @@
           <p:cNvPr id="33" name="">
             <a:extLst xmlns:a="http://schemas.openxmlformats.org/drawingml/2006/main">
               <a:ext uri="{FF2B5EF4-FFF2-40B4-BE49-F238E27FC236}">
-                <a16:creationId xmlns:a16="http://schemas.microsoft.com/office/drawing/2014/main" id="{CACE442C-DD65-43A8-983E-D118BB00E70C}"/>
+                <a16:creationId xmlns:a16="http://schemas.microsoft.com/office/drawing/2014/main" id="{CF09F894-2B1A-44CE-8EE5-CED7F139A58B}"/>
               </a:ext>
             </a:extLst>
           </p:cNvPr>
@@ -31106,7 +31106,7 @@
           <p:cNvPr id="34" name="">
             <a:extLst xmlns:a="http://schemas.openxmlformats.org/drawingml/2006/main">
               <a:ext uri="{FF2B5EF4-FFF2-40B4-BE49-F238E27FC236}">
-                <a16:creationId xmlns:a16="http://schemas.microsoft.com/office/drawing/2014/main" id="{C554FE57-D060-4A41-BAE6-958DECBC3BDF}"/>
+                <a16:creationId xmlns:a16="http://schemas.microsoft.com/office/drawing/2014/main" id="{D76622AE-BA4F-4CCE-878C-7B6C87473CC6}"/>
               </a:ext>
             </a:extLst>
           </p:cNvPr>
@@ -31137,7 +31137,7 @@
           <p:cNvPr id="35" name="">
             <a:extLst xmlns:a="http://schemas.openxmlformats.org/drawingml/2006/main">
               <a:ext uri="{FF2B5EF4-FFF2-40B4-BE49-F238E27FC236}">
-                <a16:creationId xmlns:a16="http://schemas.microsoft.com/office/drawing/2014/main" id="{4A492759-0A63-4FB4-86DD-AEE0123A8D5C}"/>
+                <a16:creationId xmlns:a16="http://schemas.microsoft.com/office/drawing/2014/main" id="{FCD4EC03-5866-4103-8FD8-7029B35C8BA9}"/>
               </a:ext>
             </a:extLst>
           </p:cNvPr>
@@ -31189,7 +31189,7 @@
           <p:cNvPr id="36" name="">
             <a:extLst xmlns:a="http://schemas.openxmlformats.org/drawingml/2006/main">
               <a:ext uri="{FF2B5EF4-FFF2-40B4-BE49-F238E27FC236}">
-                <a16:creationId xmlns:a16="http://schemas.microsoft.com/office/drawing/2014/main" id="{B39FBEAF-4D82-4655-98E5-1ACB1A55DDA7}"/>
+                <a16:creationId xmlns:a16="http://schemas.microsoft.com/office/drawing/2014/main" id="{E0432A43-CB17-47E9-A819-6082987594A5}"/>
               </a:ext>
             </a:extLst>
           </p:cNvPr>
@@ -31241,7 +31241,7 @@
           <p:cNvPr id="37" name="">
             <a:extLst xmlns:a="http://schemas.openxmlformats.org/drawingml/2006/main">
               <a:ext uri="{FF2B5EF4-FFF2-40B4-BE49-F238E27FC236}">
-                <a16:creationId xmlns:a16="http://schemas.microsoft.com/office/drawing/2014/main" id="{C11C7E60-AF43-4843-9499-EF88EF4B5621}"/>
+                <a16:creationId xmlns:a16="http://schemas.microsoft.com/office/drawing/2014/main" id="{20E8F9EA-4793-4C66-AAA5-C786FA5DD89C}"/>
               </a:ext>
             </a:extLst>
           </p:cNvPr>
@@ -31297,10 +31297,10 @@
           <p:nvPr/>
         </p:nvPicPr>
         <p:blipFill>
-          <a:blip xmlns:r="http://schemas.openxmlformats.org/officeDocument/2006/relationships" xmlns:a="http://schemas.openxmlformats.org/drawingml/2006/main" r:embed="Rb7c61ac6945d47ea">
+          <a:blip xmlns:r="http://schemas.openxmlformats.org/officeDocument/2006/relationships" xmlns:a="http://schemas.openxmlformats.org/drawingml/2006/main" r:embed="R343998c629bd475c">
             <a:extLst>
               <a:ext uri="{96DAC541-7B7A-43D3-8B79-37D633B846F1}">
-                <asvg:svgBlip xmlns:asvg="http://schemas.microsoft.com/office/drawing/2016/SVG/main" r:embed="R561dd380bff2495a"/>
+                <asvg:svgBlip xmlns:asvg="http://schemas.microsoft.com/office/drawing/2016/SVG/main" r:embed="Rcc07596054de4f96"/>
               </a:ext>
             </a:extLst>
           </a:blip>
@@ -31321,7 +31321,7 @@
           <p:cNvPr id="39" name="">
             <a:extLst xmlns:a="http://schemas.openxmlformats.org/drawingml/2006/main">
               <a:ext uri="{FF2B5EF4-FFF2-40B4-BE49-F238E27FC236}">
-                <a16:creationId xmlns:a16="http://schemas.microsoft.com/office/drawing/2014/main" id="{D308429E-252F-4BF1-B0D1-8885305FEFE8}"/>
+                <a16:creationId xmlns:a16="http://schemas.microsoft.com/office/drawing/2014/main" id="{42B2842E-BFAA-4121-8B4C-44A31E17C24E}"/>
               </a:ext>
             </a:extLst>
           </p:cNvPr>
@@ -31373,7 +31373,7 @@
           <p:cNvPr id="40" name="">
             <a:extLst xmlns:a="http://schemas.openxmlformats.org/drawingml/2006/main">
               <a:ext uri="{FF2B5EF4-FFF2-40B4-BE49-F238E27FC236}">
-                <a16:creationId xmlns:a16="http://schemas.microsoft.com/office/drawing/2014/main" id="{8244FA60-78C2-4305-A2E9-19514F26F20C}"/>
+                <a16:creationId xmlns:a16="http://schemas.microsoft.com/office/drawing/2014/main" id="{F1F55C3C-8F7F-4F10-B90F-C7CED82631E1}"/>
               </a:ext>
             </a:extLst>
           </p:cNvPr>
@@ -31425,7 +31425,7 @@
           <p:cNvPr id="41" name="">
             <a:extLst xmlns:a="http://schemas.openxmlformats.org/drawingml/2006/main">
               <a:ext uri="{FF2B5EF4-FFF2-40B4-BE49-F238E27FC236}">
-                <a16:creationId xmlns:a16="http://schemas.microsoft.com/office/drawing/2014/main" id="{24CBBA1B-CACE-4073-92BC-B7686A4C6368}"/>
+                <a16:creationId xmlns:a16="http://schemas.microsoft.com/office/drawing/2014/main" id="{A259CBBA-5308-4B40-8C5A-9E989847ADB8}"/>
               </a:ext>
             </a:extLst>
           </p:cNvPr>
@@ -31468,7 +31468,7 @@
           <p:cNvPr id="42" name="">
             <a:extLst xmlns:a="http://schemas.openxmlformats.org/drawingml/2006/main">
               <a:ext uri="{FF2B5EF4-FFF2-40B4-BE49-F238E27FC236}">
-                <a16:creationId xmlns:a16="http://schemas.microsoft.com/office/drawing/2014/main" id="{9B818460-6EB8-4582-B12F-7FE4418CD8CB}"/>
+                <a16:creationId xmlns:a16="http://schemas.microsoft.com/office/drawing/2014/main" id="{CDD4EC13-AB54-4147-BBB7-2DDD32E34EE1}"/>
               </a:ext>
             </a:extLst>
           </p:cNvPr>
@@ -31499,7 +31499,7 @@
           <p:cNvPr id="43" name="">
             <a:extLst xmlns:a="http://schemas.openxmlformats.org/drawingml/2006/main">
               <a:ext uri="{FF2B5EF4-FFF2-40B4-BE49-F238E27FC236}">
-                <a16:creationId xmlns:a16="http://schemas.microsoft.com/office/drawing/2014/main" id="{3C0A252E-9E4C-4165-B6CA-D220CD9E8735}"/>
+                <a16:creationId xmlns:a16="http://schemas.microsoft.com/office/drawing/2014/main" id="{9D03FFEA-94E4-4FC2-ADAB-9E64DF9BEABE}"/>
               </a:ext>
             </a:extLst>
           </p:cNvPr>
@@ -31530,7 +31530,7 @@
           <p:cNvPr id="44" name="">
             <a:extLst xmlns:a="http://schemas.openxmlformats.org/drawingml/2006/main">
               <a:ext uri="{FF2B5EF4-FFF2-40B4-BE49-F238E27FC236}">
-                <a16:creationId xmlns:a16="http://schemas.microsoft.com/office/drawing/2014/main" id="{E065D806-B4B2-4886-B27D-BB652D4B6C9E}"/>
+                <a16:creationId xmlns:a16="http://schemas.microsoft.com/office/drawing/2014/main" id="{AE700FE1-3190-45A5-9E08-E944DA84D261}"/>
               </a:ext>
             </a:extLst>
           </p:cNvPr>
@@ -31573,7 +31573,7 @@
           <p:cNvPr id="45" name="">
             <a:extLst xmlns:a="http://schemas.openxmlformats.org/drawingml/2006/main">
               <a:ext uri="{FF2B5EF4-FFF2-40B4-BE49-F238E27FC236}">
-                <a16:creationId xmlns:a16="http://schemas.microsoft.com/office/drawing/2014/main" id="{976778ED-1842-4EAE-8708-333AAF762C8B}"/>
+                <a16:creationId xmlns:a16="http://schemas.microsoft.com/office/drawing/2014/main" id="{2CB4DBE0-9E94-44C5-BCD6-E26D6BA778C9}"/>
               </a:ext>
             </a:extLst>
           </p:cNvPr>
@@ -31604,7 +31604,7 @@
           <p:cNvPr id="46" name="">
             <a:extLst xmlns:a="http://schemas.openxmlformats.org/drawingml/2006/main">
               <a:ext uri="{FF2B5EF4-FFF2-40B4-BE49-F238E27FC236}">
-                <a16:creationId xmlns:a16="http://schemas.microsoft.com/office/drawing/2014/main" id="{11A95817-8048-4FC0-812F-CF1C1FB2431F}"/>
+                <a16:creationId xmlns:a16="http://schemas.microsoft.com/office/drawing/2014/main" id="{AB8BC860-5738-48AC-A7E9-396035AED445}"/>
               </a:ext>
             </a:extLst>
           </p:cNvPr>
@@ -31635,7 +31635,7 @@
           <p:cNvPr id="47" name="">
             <a:extLst xmlns:a="http://schemas.openxmlformats.org/drawingml/2006/main">
               <a:ext uri="{FF2B5EF4-FFF2-40B4-BE49-F238E27FC236}">
-                <a16:creationId xmlns:a16="http://schemas.microsoft.com/office/drawing/2014/main" id="{75BFFE82-19CB-42B8-A306-E2887308C181}"/>
+                <a16:creationId xmlns:a16="http://schemas.microsoft.com/office/drawing/2014/main" id="{EEDED02E-B907-4C71-93FF-F794B9CD0D4A}"/>
               </a:ext>
             </a:extLst>
           </p:cNvPr>
@@ -31687,7 +31687,7 @@
           <p:cNvPr id="48" name="">
             <a:extLst xmlns:a="http://schemas.openxmlformats.org/drawingml/2006/main">
               <a:ext uri="{FF2B5EF4-FFF2-40B4-BE49-F238E27FC236}">
-                <a16:creationId xmlns:a16="http://schemas.microsoft.com/office/drawing/2014/main" id="{4A0EBCCA-173F-4F23-AFFC-8A5C9132F887}"/>
+                <a16:creationId xmlns:a16="http://schemas.microsoft.com/office/drawing/2014/main" id="{F060DC3F-825E-4438-9517-95BCE5FC44A9}"/>
               </a:ext>
             </a:extLst>
           </p:cNvPr>
@@ -31720,7 +31720,7 @@
           <p:cNvPr id="49" name="">
             <a:extLst xmlns:a="http://schemas.openxmlformats.org/drawingml/2006/main">
               <a:ext uri="{FF2B5EF4-FFF2-40B4-BE49-F238E27FC236}">
-                <a16:creationId xmlns:a16="http://schemas.microsoft.com/office/drawing/2014/main" id="{52AEC935-7A6C-45B1-8B06-EA8A3A512755}"/>
+                <a16:creationId xmlns:a16="http://schemas.microsoft.com/office/drawing/2014/main" id="{11A3CA29-BFAE-4305-B70A-C6FDEDD964D8}"/>
               </a:ext>
             </a:extLst>
           </p:cNvPr>
@@ -31772,7 +31772,7 @@
           <p:cNvPr id="50" name="">
             <a:extLst xmlns:a="http://schemas.openxmlformats.org/drawingml/2006/main">
               <a:ext uri="{FF2B5EF4-FFF2-40B4-BE49-F238E27FC236}">
-                <a16:creationId xmlns:a16="http://schemas.microsoft.com/office/drawing/2014/main" id="{A41BC7E9-4031-4125-8A7D-ECE803044C5D}"/>
+                <a16:creationId xmlns:a16="http://schemas.microsoft.com/office/drawing/2014/main" id="{3D8D832E-8181-4183-9581-2B37FAFFEE32}"/>
               </a:ext>
             </a:extLst>
           </p:cNvPr>
@@ -31824,7 +31824,7 @@
           <p:cNvPr id="51" name="">
             <a:extLst xmlns:a="http://schemas.openxmlformats.org/drawingml/2006/main">
               <a:ext uri="{FF2B5EF4-FFF2-40B4-BE49-F238E27FC236}">
-                <a16:creationId xmlns:a16="http://schemas.microsoft.com/office/drawing/2014/main" id="{E78710C2-4DDA-450A-99F5-E4CEC0FB9CB6}"/>
+                <a16:creationId xmlns:a16="http://schemas.microsoft.com/office/drawing/2014/main" id="{4DC4CD10-6298-4839-9971-35FF395E61C8}"/>
               </a:ext>
             </a:extLst>
           </p:cNvPr>
@@ -31876,7 +31876,7 @@
           <p:cNvPr id="52" name="">
             <a:extLst xmlns:a="http://schemas.openxmlformats.org/drawingml/2006/main">
               <a:ext uri="{FF2B5EF4-FFF2-40B4-BE49-F238E27FC236}">
-                <a16:creationId xmlns:a16="http://schemas.microsoft.com/office/drawing/2014/main" id="{370A1F84-12BF-4B72-BF3C-A414F3B1F466}"/>
+                <a16:creationId xmlns:a16="http://schemas.microsoft.com/office/drawing/2014/main" id="{5CC47BE6-CB04-4554-ADCC-0CF9D8C8402E}"/>
               </a:ext>
             </a:extLst>
           </p:cNvPr>
@@ -31919,7 +31919,7 @@
           <p:cNvPr id="53" name="">
             <a:extLst xmlns:a="http://schemas.openxmlformats.org/drawingml/2006/main">
               <a:ext uri="{FF2B5EF4-FFF2-40B4-BE49-F238E27FC236}">
-                <a16:creationId xmlns:a16="http://schemas.microsoft.com/office/drawing/2014/main" id="{14DF2ACA-2882-497C-B400-4E789B06D564}"/>
+                <a16:creationId xmlns:a16="http://schemas.microsoft.com/office/drawing/2014/main" id="{A92A107D-7783-4EAD-9CA7-5FC98323C00B}"/>
               </a:ext>
             </a:extLst>
           </p:cNvPr>
@@ -31950,7 +31950,7 @@
           <p:cNvPr id="54" name="">
             <a:extLst xmlns:a="http://schemas.openxmlformats.org/drawingml/2006/main">
               <a:ext uri="{FF2B5EF4-FFF2-40B4-BE49-F238E27FC236}">
-                <a16:creationId xmlns:a16="http://schemas.microsoft.com/office/drawing/2014/main" id="{553D1549-1CC9-49A9-9F7B-E860923671C1}"/>
+                <a16:creationId xmlns:a16="http://schemas.microsoft.com/office/drawing/2014/main" id="{FCCDE267-BA7C-464C-8F11-F51E23A29C15}"/>
               </a:ext>
             </a:extLst>
           </p:cNvPr>
@@ -31981,7 +31981,7 @@
           <p:cNvPr id="55" name="">
             <a:extLst xmlns:a="http://schemas.openxmlformats.org/drawingml/2006/main">
               <a:ext uri="{FF2B5EF4-FFF2-40B4-BE49-F238E27FC236}">
-                <a16:creationId xmlns:a16="http://schemas.microsoft.com/office/drawing/2014/main" id="{40E1A564-4030-4061-8A7C-413E4F9768CB}"/>
+                <a16:creationId xmlns:a16="http://schemas.microsoft.com/office/drawing/2014/main" id="{A83AB633-B11C-4286-BE42-731EC6D656A1}"/>
               </a:ext>
             </a:extLst>
           </p:cNvPr>
@@ -32033,7 +32033,7 @@
           <p:cNvPr id="56" name="">
             <a:extLst xmlns:a="http://schemas.openxmlformats.org/drawingml/2006/main">
               <a:ext uri="{FF2B5EF4-FFF2-40B4-BE49-F238E27FC236}">
-                <a16:creationId xmlns:a16="http://schemas.microsoft.com/office/drawing/2014/main" id="{C5B15C3E-7EC0-45EF-88AD-EEA9BAB4F980}"/>
+                <a16:creationId xmlns:a16="http://schemas.microsoft.com/office/drawing/2014/main" id="{38BDABD0-9FFC-4C0D-8230-30558F301F23}"/>
               </a:ext>
             </a:extLst>
           </p:cNvPr>
@@ -32066,7 +32066,7 @@
           <p:cNvPr id="57" name="">
             <a:extLst xmlns:a="http://schemas.openxmlformats.org/drawingml/2006/main">
               <a:ext uri="{FF2B5EF4-FFF2-40B4-BE49-F238E27FC236}">
-                <a16:creationId xmlns:a16="http://schemas.microsoft.com/office/drawing/2014/main" id="{F9DCD618-86D6-4486-9A2F-5E7D2FE9034E}"/>
+                <a16:creationId xmlns:a16="http://schemas.microsoft.com/office/drawing/2014/main" id="{E79009CC-1811-448E-85AE-C3411FD07577}"/>
               </a:ext>
             </a:extLst>
           </p:cNvPr>
@@ -32118,7 +32118,7 @@
           <p:cNvPr id="58" name="">
             <a:extLst xmlns:a="http://schemas.openxmlformats.org/drawingml/2006/main">
               <a:ext uri="{FF2B5EF4-FFF2-40B4-BE49-F238E27FC236}">
-                <a16:creationId xmlns:a16="http://schemas.microsoft.com/office/drawing/2014/main" id="{77273A5C-0BB4-42CB-A42B-9BD551C8DB03}"/>
+                <a16:creationId xmlns:a16="http://schemas.microsoft.com/office/drawing/2014/main" id="{26BAC206-C1C7-4E07-A912-C26F2A62A9FF}"/>
               </a:ext>
             </a:extLst>
           </p:cNvPr>
@@ -32170,7 +32170,7 @@
           <p:cNvPr id="59" name="">
             <a:extLst xmlns:a="http://schemas.openxmlformats.org/drawingml/2006/main">
               <a:ext uri="{FF2B5EF4-FFF2-40B4-BE49-F238E27FC236}">
-                <a16:creationId xmlns:a16="http://schemas.microsoft.com/office/drawing/2014/main" id="{D1BD7F4D-3B87-4A05-86C1-1000F286B0EF}"/>
+                <a16:creationId xmlns:a16="http://schemas.microsoft.com/office/drawing/2014/main" id="{2D75925D-627B-41C8-A37E-62936738E338}"/>
               </a:ext>
             </a:extLst>
           </p:cNvPr>
@@ -32222,7 +32222,7 @@
           <p:cNvPr id="60" name="">
             <a:extLst xmlns:a="http://schemas.openxmlformats.org/drawingml/2006/main">
               <a:ext uri="{FF2B5EF4-FFF2-40B4-BE49-F238E27FC236}">
-                <a16:creationId xmlns:a16="http://schemas.microsoft.com/office/drawing/2014/main" id="{D21FD493-1E35-4AF3-A4EA-4983C456AA98}"/>
+                <a16:creationId xmlns:a16="http://schemas.microsoft.com/office/drawing/2014/main" id="{ADA3116A-0469-4681-A2BA-D46A2EA0E071}"/>
               </a:ext>
             </a:extLst>
           </p:cNvPr>
@@ -32265,7 +32265,7 @@
           <p:cNvPr id="61" name="">
             <a:extLst xmlns:a="http://schemas.openxmlformats.org/drawingml/2006/main">
               <a:ext uri="{FF2B5EF4-FFF2-40B4-BE49-F238E27FC236}">
-                <a16:creationId xmlns:a16="http://schemas.microsoft.com/office/drawing/2014/main" id="{F718E740-71F4-4C77-BB33-3A948EE5AC49}"/>
+                <a16:creationId xmlns:a16="http://schemas.microsoft.com/office/drawing/2014/main" id="{F6B093D8-F5D2-4718-8ED0-6B3F697A70BF}"/>
               </a:ext>
             </a:extLst>
           </p:cNvPr>
@@ -32296,7 +32296,7 @@
           <p:cNvPr id="62" name="">
             <a:extLst xmlns:a="http://schemas.openxmlformats.org/drawingml/2006/main">
               <a:ext uri="{FF2B5EF4-FFF2-40B4-BE49-F238E27FC236}">
-                <a16:creationId xmlns:a16="http://schemas.microsoft.com/office/drawing/2014/main" id="{EDC07C1E-4843-42FF-A5F3-2D2A97B31DD2}"/>
+                <a16:creationId xmlns:a16="http://schemas.microsoft.com/office/drawing/2014/main" id="{5ABE8C3B-11DF-4419-8B95-E881E4631EFC}"/>
               </a:ext>
             </a:extLst>
           </p:cNvPr>
@@ -32327,7 +32327,7 @@
           <p:cNvPr id="63" name="">
             <a:extLst xmlns:a="http://schemas.openxmlformats.org/drawingml/2006/main">
               <a:ext uri="{FF2B5EF4-FFF2-40B4-BE49-F238E27FC236}">
-                <a16:creationId xmlns:a16="http://schemas.microsoft.com/office/drawing/2014/main" id="{C1EC2960-FB35-4FAA-A790-7D39FC08ECE9}"/>
+                <a16:creationId xmlns:a16="http://schemas.microsoft.com/office/drawing/2014/main" id="{D31BFA96-C2A6-46DE-AD54-2F7715D98324}"/>
               </a:ext>
             </a:extLst>
           </p:cNvPr>
@@ -32379,7 +32379,7 @@
           <p:cNvPr id="64" name="">
             <a:extLst xmlns:a="http://schemas.openxmlformats.org/drawingml/2006/main">
               <a:ext uri="{FF2B5EF4-FFF2-40B4-BE49-F238E27FC236}">
-                <a16:creationId xmlns:a16="http://schemas.microsoft.com/office/drawing/2014/main" id="{3BFB8CB1-BE62-460E-BFB0-DE0625A20A98}"/>
+                <a16:creationId xmlns:a16="http://schemas.microsoft.com/office/drawing/2014/main" id="{0B2F818D-E502-440C-8099-1742A3E24554}"/>
               </a:ext>
             </a:extLst>
           </p:cNvPr>
@@ -32412,7 +32412,7 @@
           <p:cNvPr id="65" name="">
             <a:extLst xmlns:a="http://schemas.openxmlformats.org/drawingml/2006/main">
               <a:ext uri="{FF2B5EF4-FFF2-40B4-BE49-F238E27FC236}">
-                <a16:creationId xmlns:a16="http://schemas.microsoft.com/office/drawing/2014/main" id="{F493D50C-BD3E-4611-9A61-3E1E7659DC78}"/>
+                <a16:creationId xmlns:a16="http://schemas.microsoft.com/office/drawing/2014/main" id="{B4AA5F82-67F4-4BA2-A144-796B23606573}"/>
               </a:ext>
             </a:extLst>
           </p:cNvPr>
@@ -32464,7 +32464,7 @@
           <p:cNvPr id="66" name="">
             <a:extLst xmlns:a="http://schemas.openxmlformats.org/drawingml/2006/main">
               <a:ext uri="{FF2B5EF4-FFF2-40B4-BE49-F238E27FC236}">
-                <a16:creationId xmlns:a16="http://schemas.microsoft.com/office/drawing/2014/main" id="{A623EC6D-43C5-499C-BDFB-FC293104F7EA}"/>
+                <a16:creationId xmlns:a16="http://schemas.microsoft.com/office/drawing/2014/main" id="{97B27666-016A-44D4-8BE0-742A375D8AE0}"/>
               </a:ext>
             </a:extLst>
           </p:cNvPr>
@@ -32516,7 +32516,7 @@
           <p:cNvPr id="67" name="">
             <a:extLst xmlns:a="http://schemas.openxmlformats.org/drawingml/2006/main">
               <a:ext uri="{FF2B5EF4-FFF2-40B4-BE49-F238E27FC236}">
-                <a16:creationId xmlns:a16="http://schemas.microsoft.com/office/drawing/2014/main" id="{8467BE23-9F0B-4363-8CB4-A6F767D3374F}"/>
+                <a16:creationId xmlns:a16="http://schemas.microsoft.com/office/drawing/2014/main" id="{5064AAC1-8C48-4079-BF81-5F3728F6C3FA}"/>
               </a:ext>
             </a:extLst>
           </p:cNvPr>
@@ -32568,7 +32568,7 @@
           <p:cNvPr id="68" name="">
             <a:extLst xmlns:a="http://schemas.openxmlformats.org/drawingml/2006/main">
               <a:ext uri="{FF2B5EF4-FFF2-40B4-BE49-F238E27FC236}">
-                <a16:creationId xmlns:a16="http://schemas.microsoft.com/office/drawing/2014/main" id="{8169599D-1914-4EDF-92B7-93595CD9E287}"/>
+                <a16:creationId xmlns:a16="http://schemas.microsoft.com/office/drawing/2014/main" id="{0F2F8A9F-0D6F-4B6E-92D8-6C405C0DFBAC}"/>
               </a:ext>
             </a:extLst>
           </p:cNvPr>
@@ -32611,7 +32611,7 @@
           <p:cNvPr id="69" name="">
             <a:extLst xmlns:a="http://schemas.openxmlformats.org/drawingml/2006/main">
               <a:ext uri="{FF2B5EF4-FFF2-40B4-BE49-F238E27FC236}">
-                <a16:creationId xmlns:a16="http://schemas.microsoft.com/office/drawing/2014/main" id="{35CA09E3-9105-4B93-B363-D702AECFD311}"/>
+                <a16:creationId xmlns:a16="http://schemas.microsoft.com/office/drawing/2014/main" id="{E54F2081-4E43-4D75-9FCA-CDF4DCD0272B}"/>
               </a:ext>
             </a:extLst>
           </p:cNvPr>
@@ -32642,7 +32642,7 @@
           <p:cNvPr id="70" name="">
             <a:extLst xmlns:a="http://schemas.openxmlformats.org/drawingml/2006/main">
               <a:ext uri="{FF2B5EF4-FFF2-40B4-BE49-F238E27FC236}">
-                <a16:creationId xmlns:a16="http://schemas.microsoft.com/office/drawing/2014/main" id="{B453F23D-E206-4CC5-BDF3-2B230463C891}"/>
+                <a16:creationId xmlns:a16="http://schemas.microsoft.com/office/drawing/2014/main" id="{AFB9317B-B0FB-42B1-B59A-A380392C493C}"/>
               </a:ext>
             </a:extLst>
           </p:cNvPr>
@@ -32673,7 +32673,7 @@
           <p:cNvPr id="71" name="">
             <a:extLst xmlns:a="http://schemas.openxmlformats.org/drawingml/2006/main">
               <a:ext uri="{FF2B5EF4-FFF2-40B4-BE49-F238E27FC236}">
-                <a16:creationId xmlns:a16="http://schemas.microsoft.com/office/drawing/2014/main" id="{45489A6A-A2D7-4AF9-AE6B-FF5D4015FE22}"/>
+                <a16:creationId xmlns:a16="http://schemas.microsoft.com/office/drawing/2014/main" id="{B5156D46-E277-42E5-A0BC-21A764AB206B}"/>
             